--- a/QR Code Generator/QR_Code_Generator.pptx
+++ b/QR Code Generator/QR_Code_Generator.pptx
@@ -19,6 +19,9 @@
     <p:sldId id="267" r:id="rId18"/>
     <p:sldId id="268" r:id="rId19"/>
     <p:sldId id="269" r:id="rId20"/>
+    <p:sldId id="270" r:id="rId21"/>
+    <p:sldId id="271" r:id="rId22"/>
+    <p:sldId id="272" r:id="rId23"/>
   </p:sldIdLst>
   <p:sldSz cx="12191695" cy="6858000" type="screen4x3"/>
   <p:notesSz cx="6858000" cy="9144000"/>
@@ -3372,7 +3375,7 @@
                 <a:latin typeface="PingFang TC"/>
                 <a:ea typeface="PingFang TC"/>
               </a:rPr>
-              <a:t>09 · DEEP DIVE</a:t>
+              <a:t>07 · QR IMAGE</a:t>
             </a:r>
           </a:p>
           <a:p>
@@ -3389,21 +3392,693 @@
                 <a:latin typeface="PingFang TC"/>
                 <a:ea typeface="PingFang TC"/>
               </a:rPr>
-              <a:t>決策 2 — 302、快取、非同步</a:t>
-            </a:r>
-          </a:p>
-        </p:txBody>
-      </p:sp>
-      <p:sp>
-        <p:nvSpPr>
-          <p:cNvPr id="4" name="TextBox 3"/>
+              <a:t>取 QR 圖片流程  ·  GET /api/v1/qr/{token}/image</a:t>
+            </a:r>
+          </a:p>
+        </p:txBody>
+      </p:sp>
+      <p:sp>
+        <p:nvSpPr>
+          <p:cNvPr id="4" name="Rounded Rectangle 3"/>
+          <p:cNvSpPr/>
+          <p:nvPr/>
+        </p:nvSpPr>
+        <p:spPr>
+          <a:xfrm>
+            <a:off x="457200" y="2194560"/>
+            <a:ext cx="1737360" cy="1371600"/>
+          </a:xfrm>
+          <a:prstGeom prst="roundRect">
+            <a:avLst/>
+          </a:prstGeom>
+          <a:solidFill>
+            <a:srgbClr val="2563EB"/>
+          </a:solidFill>
+          <a:ln>
+            <a:solidFill>
+              <a:srgbClr val="2563EB"/>
+            </a:solidFill>
+          </a:ln>
+          <a:effectLst/>
+        </p:spPr>
+        <p:style>
+          <a:lnRef idx="1">
+            <a:schemeClr val="accent1"/>
+          </a:lnRef>
+          <a:fillRef idx="3">
+            <a:schemeClr val="accent1"/>
+          </a:fillRef>
+          <a:effectRef idx="2">
+            <a:schemeClr val="accent1"/>
+          </a:effectRef>
+          <a:fontRef idx="minor">
+            <a:schemeClr val="lt1"/>
+          </a:fontRef>
+        </p:style>
+        <p:txBody>
+          <a:bodyPr rtlCol="0" anchor="ctr" wrap="square" tIns="25400" bIns="25400"/>
+          <a:lstStyle/>
+          <a:p>
+            <a:pPr algn="ctr"/>
+            <a:r>
+              <a:rPr sz="1200" b="1">
+                <a:solidFill>
+                  <a:srgbClr val="FFFFFF"/>
+                </a:solidFill>
+                <a:latin typeface="PingFang TC"/>
+                <a:ea typeface="PingFang TC"/>
+              </a:rPr>
+              <a:t>① 驗證 token</a:t>
+            </a:r>
+          </a:p>
+          <a:p>
+            <a:pPr algn="ctr"/>
+            <a:r>
+              <a:rPr sz="1200" b="0">
+                <a:solidFill>
+                  <a:srgbClr val="FFFFFF"/>
+                </a:solidFill>
+                <a:latin typeface="PingFang TC"/>
+                <a:ea typeface="PingFang TC"/>
+              </a:rPr>
+              <a:t>找不到/已軟刪</a:t>
+            </a:r>
+          </a:p>
+          <a:p>
+            <a:pPr algn="ctr"/>
+            <a:r>
+              <a:rPr sz="1200" b="0">
+                <a:solidFill>
+                  <a:srgbClr val="FFFFFF"/>
+                </a:solidFill>
+                <a:latin typeface="PingFang TC"/>
+                <a:ea typeface="PingFang TC"/>
+              </a:rPr>
+              <a:t>→ 404</a:t>
+            </a:r>
+          </a:p>
+        </p:txBody>
+      </p:sp>
+      <p:cxnSp>
+        <p:nvCxnSpPr>
+          <p:cNvPr id="5" name="Connector 4"/>
+          <p:cNvCxnSpPr/>
+          <p:nvPr/>
+        </p:nvCxnSpPr>
+        <p:spPr>
+          <a:xfrm>
+            <a:off x="2194560" y="2880360"/>
+            <a:ext cx="128016" cy="0"/>
+          </a:xfrm>
+          <a:prstGeom prst="line">
+            <a:avLst/>
+          </a:prstGeom>
+          <a:ln w="22225">
+            <a:solidFill>
+              <a:srgbClr val="64748B"/>
+            </a:solidFill>
+            <a:tailEnd type="triangle" w="med" len="med"/>
+          </a:ln>
+        </p:spPr>
+        <p:style>
+          <a:lnRef idx="2">
+            <a:schemeClr val="accent1"/>
+          </a:lnRef>
+          <a:fillRef idx="0">
+            <a:schemeClr val="accent1"/>
+          </a:fillRef>
+          <a:effectRef idx="1">
+            <a:schemeClr val="accent1"/>
+          </a:effectRef>
+          <a:fontRef idx="minor">
+            <a:schemeClr val="tx1"/>
+          </a:fontRef>
+        </p:style>
+      </p:cxnSp>
+      <p:sp>
+        <p:nvSpPr>
+          <p:cNvPr id="6" name="Rounded Rectangle 5"/>
+          <p:cNvSpPr/>
+          <p:nvPr/>
+        </p:nvSpPr>
+        <p:spPr>
+          <a:xfrm>
+            <a:off x="2322576" y="2194560"/>
+            <a:ext cx="1737360" cy="1371600"/>
+          </a:xfrm>
+          <a:prstGeom prst="roundRect">
+            <a:avLst/>
+          </a:prstGeom>
+          <a:solidFill>
+            <a:srgbClr val="0EA5E9"/>
+          </a:solidFill>
+          <a:ln>
+            <a:solidFill>
+              <a:srgbClr val="0EA5E9"/>
+            </a:solidFill>
+          </a:ln>
+          <a:effectLst/>
+        </p:spPr>
+        <p:style>
+          <a:lnRef idx="1">
+            <a:schemeClr val="accent1"/>
+          </a:lnRef>
+          <a:fillRef idx="3">
+            <a:schemeClr val="accent1"/>
+          </a:fillRef>
+          <a:effectRef idx="2">
+            <a:schemeClr val="accent1"/>
+          </a:effectRef>
+          <a:fontRef idx="minor">
+            <a:schemeClr val="lt1"/>
+          </a:fontRef>
+        </p:style>
+        <p:txBody>
+          <a:bodyPr rtlCol="0" anchor="ctr" wrap="square" tIns="25400" bIns="25400"/>
+          <a:lstStyle/>
+          <a:p>
+            <a:pPr algn="ctr"/>
+            <a:r>
+              <a:rPr sz="1200" b="1">
+                <a:solidFill>
+                  <a:srgbClr val="FFFFFF"/>
+                </a:solidFill>
+                <a:latin typeface="PingFang TC"/>
+                <a:ea typeface="PingFang TC"/>
+              </a:rPr>
+              <a:t>② 組短碼</a:t>
+            </a:r>
+          </a:p>
+          <a:p>
+            <a:pPr algn="ctr"/>
+            <a:r>
+              <a:rPr sz="1200" b="0">
+                <a:solidFill>
+                  <a:srgbClr val="FFFFFF"/>
+                </a:solidFill>
+                <a:latin typeface="PingFang TC"/>
+                <a:ea typeface="PingFang TC"/>
+              </a:rPr>
+              <a:t>short_url =</a:t>
+            </a:r>
+          </a:p>
+          <a:p>
+            <a:pPr algn="ctr"/>
+            <a:r>
+              <a:rPr sz="1200" b="0">
+                <a:solidFill>
+                  <a:srgbClr val="FFFFFF"/>
+                </a:solidFill>
+                <a:latin typeface="PingFang TC"/>
+                <a:ea typeface="PingFang TC"/>
+              </a:rPr>
+              <a:t>BASE_URL+"/r/{token}"</a:t>
+            </a:r>
+          </a:p>
+        </p:txBody>
+      </p:sp>
+      <p:cxnSp>
+        <p:nvCxnSpPr>
+          <p:cNvPr id="7" name="Connector 6"/>
+          <p:cNvCxnSpPr/>
+          <p:nvPr/>
+        </p:nvCxnSpPr>
+        <p:spPr>
+          <a:xfrm>
+            <a:off x="4059936" y="2880360"/>
+            <a:ext cx="128016" cy="0"/>
+          </a:xfrm>
+          <a:prstGeom prst="line">
+            <a:avLst/>
+          </a:prstGeom>
+          <a:ln w="22225">
+            <a:solidFill>
+              <a:srgbClr val="64748B"/>
+            </a:solidFill>
+            <a:tailEnd type="triangle" w="med" len="med"/>
+          </a:ln>
+        </p:spPr>
+        <p:style>
+          <a:lnRef idx="2">
+            <a:schemeClr val="accent1"/>
+          </a:lnRef>
+          <a:fillRef idx="0">
+            <a:schemeClr val="accent1"/>
+          </a:fillRef>
+          <a:effectRef idx="1">
+            <a:schemeClr val="accent1"/>
+          </a:effectRef>
+          <a:fontRef idx="minor">
+            <a:schemeClr val="tx1"/>
+          </a:fontRef>
+        </p:style>
+      </p:cxnSp>
+      <p:sp>
+        <p:nvSpPr>
+          <p:cNvPr id="8" name="Rounded Rectangle 7"/>
+          <p:cNvSpPr/>
+          <p:nvPr/>
+        </p:nvSpPr>
+        <p:spPr>
+          <a:xfrm>
+            <a:off x="4187952" y="2194560"/>
+            <a:ext cx="1737360" cy="1371600"/>
+          </a:xfrm>
+          <a:prstGeom prst="roundRect">
+            <a:avLst/>
+          </a:prstGeom>
+          <a:solidFill>
+            <a:srgbClr val="059669"/>
+          </a:solidFill>
+          <a:ln>
+            <a:solidFill>
+              <a:srgbClr val="059669"/>
+            </a:solidFill>
+          </a:ln>
+          <a:effectLst/>
+        </p:spPr>
+        <p:style>
+          <a:lnRef idx="1">
+            <a:schemeClr val="accent1"/>
+          </a:lnRef>
+          <a:fillRef idx="3">
+            <a:schemeClr val="accent1"/>
+          </a:fillRef>
+          <a:effectRef idx="2">
+            <a:schemeClr val="accent1"/>
+          </a:effectRef>
+          <a:fontRef idx="minor">
+            <a:schemeClr val="lt1"/>
+          </a:fontRef>
+        </p:style>
+        <p:txBody>
+          <a:bodyPr rtlCol="0" anchor="ctr" wrap="square" tIns="25400" bIns="25400"/>
+          <a:lstStyle/>
+          <a:p>
+            <a:pPr algn="ctr"/>
+            <a:r>
+              <a:rPr sz="1200" b="1">
+                <a:solidFill>
+                  <a:srgbClr val="FFFFFF"/>
+                </a:solidFill>
+                <a:latin typeface="PingFang TC"/>
+                <a:ea typeface="PingFang TC"/>
+              </a:rPr>
+              <a:t>③④ 算矩陣</a:t>
+            </a:r>
+          </a:p>
+          <a:p>
+            <a:pPr algn="ctr"/>
+            <a:r>
+              <a:rPr sz="1200" b="0">
+                <a:solidFill>
+                  <a:srgbClr val="FFFFFF"/>
+                </a:solidFill>
+                <a:latin typeface="PingFang TC"/>
+                <a:ea typeface="PingFang TC"/>
+              </a:rPr>
+              <a:t>編碼→糾錯(RS)</a:t>
+            </a:r>
+          </a:p>
+          <a:p>
+            <a:pPr algn="ctr"/>
+            <a:r>
+              <a:rPr sz="1200" b="0">
+                <a:solidFill>
+                  <a:srgbClr val="FFFFFF"/>
+                </a:solidFill>
+                <a:latin typeface="PingFang TC"/>
+                <a:ea typeface="PingFang TC"/>
+              </a:rPr>
+              <a:t>→2D 模組矩陣</a:t>
+            </a:r>
+          </a:p>
+        </p:txBody>
+      </p:sp>
+      <p:cxnSp>
+        <p:nvCxnSpPr>
+          <p:cNvPr id="9" name="Connector 8"/>
+          <p:cNvCxnSpPr/>
+          <p:nvPr/>
+        </p:nvCxnSpPr>
+        <p:spPr>
+          <a:xfrm>
+            <a:off x="5925312" y="2880360"/>
+            <a:ext cx="128016" cy="0"/>
+          </a:xfrm>
+          <a:prstGeom prst="line">
+            <a:avLst/>
+          </a:prstGeom>
+          <a:ln w="22225">
+            <a:solidFill>
+              <a:srgbClr val="64748B"/>
+            </a:solidFill>
+            <a:tailEnd type="triangle" w="med" len="med"/>
+          </a:ln>
+        </p:spPr>
+        <p:style>
+          <a:lnRef idx="2">
+            <a:schemeClr val="accent1"/>
+          </a:lnRef>
+          <a:fillRef idx="0">
+            <a:schemeClr val="accent1"/>
+          </a:fillRef>
+          <a:effectRef idx="1">
+            <a:schemeClr val="accent1"/>
+          </a:effectRef>
+          <a:fontRef idx="minor">
+            <a:schemeClr val="tx1"/>
+          </a:fontRef>
+        </p:style>
+      </p:cxnSp>
+      <p:sp>
+        <p:nvSpPr>
+          <p:cNvPr id="10" name="Rounded Rectangle 9"/>
+          <p:cNvSpPr/>
+          <p:nvPr/>
+        </p:nvSpPr>
+        <p:spPr>
+          <a:xfrm>
+            <a:off x="6053328" y="2194560"/>
+            <a:ext cx="1737360" cy="1371600"/>
+          </a:xfrm>
+          <a:prstGeom prst="roundRect">
+            <a:avLst/>
+          </a:prstGeom>
+          <a:solidFill>
+            <a:srgbClr val="7C3AED"/>
+          </a:solidFill>
+          <a:ln>
+            <a:solidFill>
+              <a:srgbClr val="7C3AED"/>
+            </a:solidFill>
+          </a:ln>
+          <a:effectLst/>
+        </p:spPr>
+        <p:style>
+          <a:lnRef idx="1">
+            <a:schemeClr val="accent1"/>
+          </a:lnRef>
+          <a:fillRef idx="3">
+            <a:schemeClr val="accent1"/>
+          </a:fillRef>
+          <a:effectRef idx="2">
+            <a:schemeClr val="accent1"/>
+          </a:effectRef>
+          <a:fontRef idx="minor">
+            <a:schemeClr val="lt1"/>
+          </a:fontRef>
+        </p:style>
+        <p:txBody>
+          <a:bodyPr rtlCol="0" anchor="ctr" wrap="square" tIns="25400" bIns="25400"/>
+          <a:lstStyle/>
+          <a:p>
+            <a:pPr algn="ctr"/>
+            <a:r>
+              <a:rPr sz="1200" b="1">
+                <a:solidFill>
+                  <a:srgbClr val="FFFFFF"/>
+                </a:solidFill>
+                <a:latin typeface="PingFang TC"/>
+                <a:ea typeface="PingFang TC"/>
+              </a:rPr>
+              <a:t>⑤ 算像素</a:t>
+            </a:r>
+          </a:p>
+          <a:p>
+            <a:pPr algn="ctr"/>
+            <a:r>
+              <a:rPr sz="1200" b="0">
+                <a:solidFill>
+                  <a:srgbClr val="FFFFFF"/>
+                </a:solidFill>
+                <a:latin typeface="PingFang TC"/>
+                <a:ea typeface="PingFang TC"/>
+              </a:rPr>
+              <a:t>每模組→方塊</a:t>
+            </a:r>
+          </a:p>
+          <a:p>
+            <a:pPr algn="ctr"/>
+            <a:r>
+              <a:rPr sz="1200" b="0">
+                <a:solidFill>
+                  <a:srgbClr val="FFFFFF"/>
+                </a:solidFill>
+                <a:latin typeface="PingFang TC"/>
+                <a:ea typeface="PingFang TC"/>
+              </a:rPr>
+              <a:t>border=quiet zone</a:t>
+            </a:r>
+          </a:p>
+        </p:txBody>
+      </p:sp>
+      <p:cxnSp>
+        <p:nvCxnSpPr>
+          <p:cNvPr id="11" name="Connector 10"/>
+          <p:cNvCxnSpPr/>
+          <p:nvPr/>
+        </p:nvCxnSpPr>
+        <p:spPr>
+          <a:xfrm>
+            <a:off x="7790688" y="2880360"/>
+            <a:ext cx="128016" cy="0"/>
+          </a:xfrm>
+          <a:prstGeom prst="line">
+            <a:avLst/>
+          </a:prstGeom>
+          <a:ln w="22225">
+            <a:solidFill>
+              <a:srgbClr val="64748B"/>
+            </a:solidFill>
+            <a:tailEnd type="triangle" w="med" len="med"/>
+          </a:ln>
+        </p:spPr>
+        <p:style>
+          <a:lnRef idx="2">
+            <a:schemeClr val="accent1"/>
+          </a:lnRef>
+          <a:fillRef idx="0">
+            <a:schemeClr val="accent1"/>
+          </a:fillRef>
+          <a:effectRef idx="1">
+            <a:schemeClr val="accent1"/>
+          </a:effectRef>
+          <a:fontRef idx="minor">
+            <a:schemeClr val="tx1"/>
+          </a:fontRef>
+        </p:style>
+      </p:cxnSp>
+      <p:sp>
+        <p:nvSpPr>
+          <p:cNvPr id="12" name="Rounded Rectangle 11"/>
+          <p:cNvSpPr/>
+          <p:nvPr/>
+        </p:nvSpPr>
+        <p:spPr>
+          <a:xfrm>
+            <a:off x="7918704" y="2194560"/>
+            <a:ext cx="1737360" cy="1371600"/>
+          </a:xfrm>
+          <a:prstGeom prst="roundRect">
+            <a:avLst/>
+          </a:prstGeom>
+          <a:solidFill>
+            <a:srgbClr val="DC2626"/>
+          </a:solidFill>
+          <a:ln>
+            <a:solidFill>
+              <a:srgbClr val="DC2626"/>
+            </a:solidFill>
+          </a:ln>
+          <a:effectLst/>
+        </p:spPr>
+        <p:style>
+          <a:lnRef idx="1">
+            <a:schemeClr val="accent1"/>
+          </a:lnRef>
+          <a:fillRef idx="3">
+            <a:schemeClr val="accent1"/>
+          </a:fillRef>
+          <a:effectRef idx="2">
+            <a:schemeClr val="accent1"/>
+          </a:effectRef>
+          <a:fontRef idx="minor">
+            <a:schemeClr val="lt1"/>
+          </a:fontRef>
+        </p:style>
+        <p:txBody>
+          <a:bodyPr rtlCol="0" anchor="ctr" wrap="square" tIns="25400" bIns="25400"/>
+          <a:lstStyle/>
+          <a:p>
+            <a:pPr algn="ctr"/>
+            <a:r>
+              <a:rPr sz="1200" b="1">
+                <a:solidFill>
+                  <a:srgbClr val="FFFFFF"/>
+                </a:solidFill>
+                <a:latin typeface="PingFang TC"/>
+                <a:ea typeface="PingFang TC"/>
+              </a:rPr>
+              <a:t>⑥⑦ PNG</a:t>
+            </a:r>
+          </a:p>
+          <a:p>
+            <a:pPr algn="ctr"/>
+            <a:r>
+              <a:rPr sz="1200" b="0">
+                <a:solidFill>
+                  <a:srgbClr val="FFFFFF"/>
+                </a:solidFill>
+                <a:latin typeface="PingFang TC"/>
+                <a:ea typeface="PingFang TC"/>
+              </a:rPr>
+              <a:t>BytesIO</a:t>
+            </a:r>
+          </a:p>
+          <a:p>
+            <a:pPr algn="ctr"/>
+            <a:r>
+              <a:rPr sz="1200" b="0">
+                <a:solidFill>
+                  <a:srgbClr val="FFFFFF"/>
+                </a:solidFill>
+                <a:latin typeface="PingFang TC"/>
+                <a:ea typeface="PingFang TC"/>
+              </a:rPr>
+              <a:t>選填 dimension 縮放</a:t>
+            </a:r>
+          </a:p>
+        </p:txBody>
+      </p:sp>
+      <p:cxnSp>
+        <p:nvCxnSpPr>
+          <p:cNvPr id="13" name="Connector 12"/>
+          <p:cNvCxnSpPr/>
+          <p:nvPr/>
+        </p:nvCxnSpPr>
+        <p:spPr>
+          <a:xfrm>
+            <a:off x="9656064" y="2880360"/>
+            <a:ext cx="128016" cy="0"/>
+          </a:xfrm>
+          <a:prstGeom prst="line">
+            <a:avLst/>
+          </a:prstGeom>
+          <a:ln w="22225">
+            <a:solidFill>
+              <a:srgbClr val="64748B"/>
+            </a:solidFill>
+            <a:tailEnd type="triangle" w="med" len="med"/>
+          </a:ln>
+        </p:spPr>
+        <p:style>
+          <a:lnRef idx="2">
+            <a:schemeClr val="accent1"/>
+          </a:lnRef>
+          <a:fillRef idx="0">
+            <a:schemeClr val="accent1"/>
+          </a:fillRef>
+          <a:effectRef idx="1">
+            <a:schemeClr val="accent1"/>
+          </a:effectRef>
+          <a:fontRef idx="minor">
+            <a:schemeClr val="tx1"/>
+          </a:fontRef>
+        </p:style>
+      </p:cxnSp>
+      <p:sp>
+        <p:nvSpPr>
+          <p:cNvPr id="14" name="Rounded Rectangle 13"/>
+          <p:cNvSpPr/>
+          <p:nvPr/>
+        </p:nvSpPr>
+        <p:spPr>
+          <a:xfrm>
+            <a:off x="9784080" y="2194560"/>
+            <a:ext cx="1737360" cy="1371600"/>
+          </a:xfrm>
+          <a:prstGeom prst="roundRect">
+            <a:avLst/>
+          </a:prstGeom>
+          <a:solidFill>
+            <a:srgbClr val="D97706"/>
+          </a:solidFill>
+          <a:ln>
+            <a:solidFill>
+              <a:srgbClr val="D97706"/>
+            </a:solidFill>
+          </a:ln>
+          <a:effectLst/>
+        </p:spPr>
+        <p:style>
+          <a:lnRef idx="1">
+            <a:schemeClr val="accent1"/>
+          </a:lnRef>
+          <a:fillRef idx="3">
+            <a:schemeClr val="accent1"/>
+          </a:fillRef>
+          <a:effectRef idx="2">
+            <a:schemeClr val="accent1"/>
+          </a:effectRef>
+          <a:fontRef idx="minor">
+            <a:schemeClr val="lt1"/>
+          </a:fontRef>
+        </p:style>
+        <p:txBody>
+          <a:bodyPr rtlCol="0" anchor="ctr" wrap="square" tIns="25400" bIns="25400"/>
+          <a:lstStyle/>
+          <a:p>
+            <a:pPr algn="ctr"/>
+            <a:r>
+              <a:rPr sz="1200" b="1">
+                <a:solidFill>
+                  <a:srgbClr val="FFFFFF"/>
+                </a:solidFill>
+                <a:latin typeface="PingFang TC"/>
+                <a:ea typeface="PingFang TC"/>
+              </a:rPr>
+              <a:t>⑧ 串流</a:t>
+            </a:r>
+          </a:p>
+          <a:p>
+            <a:pPr algn="ctr"/>
+            <a:r>
+              <a:rPr sz="1200" b="0">
+                <a:solidFill>
+                  <a:srgbClr val="FFFFFF"/>
+                </a:solidFill>
+                <a:latin typeface="PingFang TC"/>
+                <a:ea typeface="PingFang TC"/>
+              </a:rPr>
+              <a:t>StreamingResponse</a:t>
+            </a:r>
+          </a:p>
+          <a:p>
+            <a:pPr algn="ctr"/>
+            <a:r>
+              <a:rPr sz="1200" b="0">
+                <a:solidFill>
+                  <a:srgbClr val="FFFFFF"/>
+                </a:solidFill>
+                <a:latin typeface="PingFang TC"/>
+                <a:ea typeface="PingFang TC"/>
+              </a:rPr>
+              <a:t>image/png</a:t>
+            </a:r>
+          </a:p>
+        </p:txBody>
+      </p:sp>
+      <p:sp>
+        <p:nvSpPr>
+          <p:cNvPr id="15" name="TextBox 14"/>
           <p:cNvSpPr txBox="1"/>
           <p:nvPr/>
         </p:nvSpPr>
         <p:spPr>
           <a:xfrm>
-            <a:off x="640080" y="1737360"/>
-            <a:ext cx="5486400" cy="4572000"/>
+            <a:off x="502920" y="4023360"/>
+            <a:ext cx="11155680" cy="2194560"/>
           </a:xfrm>
           <a:prstGeom prst="rect">
             <a:avLst/>
@@ -3411,31 +4086,31 @@
           <a:noFill/>
         </p:spPr>
         <p:txBody>
-          <a:bodyPr wrap="square">
+          <a:bodyPr wrap="square" anchor="t">
             <a:spAutoFit/>
           </a:bodyPr>
           <a:lstStyle/>
           <a:p>
-            <a:pPr>
+            <a:pPr algn="l">
               <a:spcAft>
                 <a:spcPts val="800"/>
               </a:spcAft>
             </a:pPr>
             <a:r>
-              <a:rPr sz="1400" b="0">
+              <a:rPr sz="1400" b="1">
                 <a:solidFill>
                   <a:srgbClr val="0F172A"/>
                 </a:solidFill>
                 <a:latin typeface="PingFang TC"/>
                 <a:ea typeface="PingFang TC"/>
               </a:rPr>
-              <a:t>•  302 而非 301</a:t>
-            </a:r>
-          </a:p>
-          <a:p>
-            <a:pPr lvl="1">
-              <a:spcAft>
-                <a:spcPts val="800"/>
+              <a:t>⚠ 編進 QR 的是『不變的短碼 /r/{token}』，不是原始 URL —— dynamic QR 關鍵：改目標 URL 不需重生圖。</a:t>
+            </a:r>
+          </a:p>
+          <a:p>
+            <a:pPr algn="l">
+              <a:spcAft>
+                <a:spcPts val="600"/>
               </a:spcAft>
             </a:pPr>
             <a:r>
@@ -3446,13 +4121,13 @@
                 <a:latin typeface="PingFang TC"/>
                 <a:ea typeface="PingFang TC"/>
               </a:rPr>
-              <a:t>–  301 被瀏覽器快取 → 跳過我方 server</a:t>
-            </a:r>
-          </a:p>
-          <a:p>
-            <a:pPr lvl="1">
-              <a:spcAft>
-                <a:spcPts val="800"/>
+              <a:t>QR 原理：字串 → byte 編碼 → Reed-Solomon 糾錯（破損仍可掃）→ 排入矩陣（finder/timing/alignment + 遮罩）。</a:t>
+            </a:r>
+          </a:p>
+          <a:p>
+            <a:pPr algn="l">
+              <a:spcAft>
+                <a:spcPts val="600"/>
               </a:spcAft>
             </a:pPr>
             <a:r>
@@ -3463,30 +4138,13 @@
                 <a:latin typeface="PingFang TC"/>
                 <a:ea typeface="PingFang TC"/>
               </a:rPr>
-              <a:t>–  → 無法改/刪/統計；故選 302 每次回源</a:t>
-            </a:r>
-          </a:p>
-          <a:p>
-            <a:pPr>
-              <a:spcAft>
-                <a:spcPts val="800"/>
-              </a:spcAft>
-            </a:pPr>
-            <a:r>
-              <a:rPr sz="1400" b="0">
-                <a:solidFill>
-                  <a:srgbClr val="0F172A"/>
-                </a:solidFill>
-                <a:latin typeface="PingFang TC"/>
-                <a:ea typeface="PingFang TC"/>
-              </a:rPr>
-              <a:t>•  Cache：Redis（非行程內 dict）</a:t>
-            </a:r>
-          </a:p>
-          <a:p>
-            <a:pPr lvl="1">
-              <a:spcAft>
-                <a:spcPts val="800"/>
+              <a:t>圖片是靜態內容 → 原型即時生成；正式版預生成存 object store + CDN（第 15 題）。</a:t>
+            </a:r>
+          </a:p>
+          <a:p>
+            <a:pPr algn="l">
+              <a:spcAft>
+                <a:spcPts val="400"/>
               </a:spcAft>
             </a:pPr>
             <a:r>
@@ -3497,166 +4155,7 @@
                 <a:latin typeface="PingFang TC"/>
                 <a:ea typeface="PingFang TC"/>
               </a:rPr>
-              <a:t>–  stateless 多台共享 + 全域 invalidation</a:t>
-            </a:r>
-          </a:p>
-          <a:p>
-            <a:pPr lvl="1">
-              <a:spcAft>
-                <a:spcPts val="800"/>
-              </a:spcAft>
-            </a:pPr>
-            <a:r>
-              <a:rPr sz="1300" b="0">
-                <a:solidFill>
-                  <a:srgbClr val="64748B"/>
-                </a:solidFill>
-                <a:latin typeface="PingFang TC"/>
-                <a:ea typeface="PingFang TC"/>
-              </a:rPr>
-              <a:t>–  行程內 dict 會讓 PATCH/DELETE 失效漏清</a:t>
-            </a:r>
-          </a:p>
-          <a:p>
-            <a:pPr lvl="1">
-              <a:spcAft>
-                <a:spcPts val="800"/>
-              </a:spcAft>
-            </a:pPr>
-            <a:r>
-              <a:rPr sz="1300" b="0">
-                <a:solidFill>
-                  <a:srgbClr val="64748B"/>
-                </a:solidFill>
-                <a:latin typeface="PingFang TC"/>
-                <a:ea typeface="PingFang TC"/>
-              </a:rPr>
-              <a:t>–  含 TTL 作最終一致性保險</a:t>
-            </a:r>
-          </a:p>
-        </p:txBody>
-      </p:sp>
-      <p:sp>
-        <p:nvSpPr>
-          <p:cNvPr id="5" name="TextBox 4"/>
-          <p:cNvSpPr txBox="1"/>
-          <p:nvPr/>
-        </p:nvSpPr>
-        <p:spPr>
-          <a:xfrm>
-            <a:off x="6309360" y="1737360"/>
-            <a:ext cx="5486400" cy="4572000"/>
-          </a:xfrm>
-          <a:prstGeom prst="rect">
-            <a:avLst/>
-          </a:prstGeom>
-          <a:noFill/>
-        </p:spPr>
-        <p:txBody>
-          <a:bodyPr wrap="square">
-            <a:spAutoFit/>
-          </a:bodyPr>
-          <a:lstStyle/>
-          <a:p>
-            <a:pPr>
-              <a:spcAft>
-                <a:spcPts val="800"/>
-              </a:spcAft>
-            </a:pPr>
-            <a:r>
-              <a:rPr sz="1400" b="0">
-                <a:solidFill>
-                  <a:srgbClr val="0F172A"/>
-                </a:solidFill>
-                <a:latin typeface="PingFang TC"/>
-                <a:ea typeface="PingFang TC"/>
-              </a:rPr>
-              <a:t>•  Scan 非同步寫</a:t>
-            </a:r>
-          </a:p>
-          <a:p>
-            <a:pPr lvl="1">
-              <a:spcAft>
-                <a:spcPts val="800"/>
-              </a:spcAft>
-            </a:pPr>
-            <a:r>
-              <a:rPr sz="1300" b="0">
-                <a:solidFill>
-                  <a:srgbClr val="64748B"/>
-                </a:solidFill>
-                <a:latin typeface="PingFang TC"/>
-                <a:ea typeface="PingFang TC"/>
-              </a:rPr>
-              <a:t>–  redirect 是 &lt;100ms + ~5,800 QPS 熱路徑</a:t>
-            </a:r>
-          </a:p>
-          <a:p>
-            <a:pPr lvl="1">
-              <a:spcAft>
-                <a:spcPts val="800"/>
-              </a:spcAft>
-            </a:pPr>
-            <a:r>
-              <a:rPr sz="1300" b="0">
-                <a:solidFill>
-                  <a:srgbClr val="64748B"/>
-                </a:solidFill>
-                <a:latin typeface="PingFang TC"/>
-                <a:ea typeface="PingFang TC"/>
-              </a:rPr>
-              <a:t>–  分析可容忍延遲/少量遺失 → 不擋跳轉</a:t>
-            </a:r>
-          </a:p>
-          <a:p>
-            <a:pPr lvl="1">
-              <a:spcAft>
-                <a:spcPts val="800"/>
-              </a:spcAft>
-            </a:pPr>
-            <a:r>
-              <a:rPr sz="1300" b="0">
-                <a:solidFill>
-                  <a:srgbClr val="64748B"/>
-                </a:solidFill>
-                <a:latin typeface="PingFang TC"/>
-                <a:ea typeface="PingFang TC"/>
-              </a:rPr>
-              <a:t>–  原型 BackgroundTasks；正式版佇列+worker</a:t>
-            </a:r>
-          </a:p>
-          <a:p>
-            <a:pPr>
-              <a:spcAft>
-                <a:spcPts val="800"/>
-              </a:spcAft>
-            </a:pPr>
-            <a:r>
-              <a:rPr sz="1400" b="0">
-                <a:solidFill>
-                  <a:srgbClr val="0F172A"/>
-                </a:solidFill>
-                <a:latin typeface="PingFang TC"/>
-                <a:ea typeface="PingFang TC"/>
-              </a:rPr>
-              <a:t>•  token index</a:t>
-            </a:r>
-          </a:p>
-          <a:p>
-            <a:pPr lvl="1">
-              <a:spcAft>
-                <a:spcPts val="800"/>
-              </a:spcAft>
-            </a:pPr>
-            <a:r>
-              <a:rPr sz="1300" b="0">
-                <a:solidFill>
-                  <a:srgbClr val="64748B"/>
-                </a:solidFill>
-                <a:latin typeface="PingFang TC"/>
-                <a:ea typeface="PingFang TC"/>
-              </a:rPr>
-              <a:t>–  避免全表掃描，redirect 直接命中</a:t>
+              <a:t>樣式參數：dimension（像素邊長）· color（hex 黑塊色）· border（quiet zone 模組數）。</a:t>
             </a:r>
           </a:p>
         </p:txBody>
@@ -3758,7 +4257,7 @@
                 <a:latin typeface="PingFang TC"/>
                 <a:ea typeface="PingFang TC"/>
               </a:rPr>
-              <a:t>10 · DEEP DIVE</a:t>
+              <a:t>08 · DEEP DIVE</a:t>
             </a:r>
           </a:p>
           <a:p>
@@ -3775,7 +4274,7 @@
                 <a:latin typeface="PingFang TC"/>
                 <a:ea typeface="PingFang TC"/>
               </a:rPr>
-              <a:t>決策 3 — 可靠性與資料語意</a:t>
+              <a:t>決策 1 — Token 生成與碰撞</a:t>
             </a:r>
           </a:p>
         </p:txBody>
@@ -3804,7 +4303,7 @@
           <a:p>
             <a:pPr>
               <a:spcAft>
-                <a:spcPts val="900"/>
+                <a:spcPts val="800"/>
               </a:spcAft>
             </a:pPr>
             <a:r>
@@ -3815,13 +4314,13 @@
                 <a:latin typeface="PingFang TC"/>
                 <a:ea typeface="PingFang TC"/>
               </a:rPr>
-              <a:t>•  軟刪除（is_deleted）：支撐 410 語意、保留分析、避免 token 回收風險</a:t>
+              <a:t>•  演算法：SHA-256(url + nonce) → Base62 → 取前 8 碼</a:t>
             </a:r>
           </a:p>
           <a:p>
             <a:pPr>
               <a:spcAft>
-                <a:spcPts val="900"/>
+                <a:spcPts val="800"/>
               </a:spcAft>
             </a:pPr>
             <a:r>
@@ -3832,13 +4331,13 @@
                 <a:latin typeface="PingFang TC"/>
                 <a:ea typeface="PingFang TC"/>
               </a:rPr>
-              <a:t>•  錯誤語意：404（從未存在） vs 410（曾存在已刪/過期）</a:t>
+              <a:t>•  nonce = 時間戳_重試次數，打破 SHA-256 的確定性</a:t>
             </a:r>
           </a:p>
           <a:p>
             <a:pPr lvl="1">
               <a:spcAft>
-                <a:spcPts val="900"/>
+                <a:spcPts val="800"/>
               </a:spcAft>
             </a:pPr>
             <a:r>
@@ -3849,13 +4348,30 @@
                 <a:latin typeface="PingFang TC"/>
                 <a:ea typeface="PingFang TC"/>
               </a:rPr>
-              <a:t>–  掃描路徑刪除回 410；管理 API 已刪回 404（刻意差異）</a:t>
+              <a:t>–  作用：讓同一個 URL 每次也產生不同 token（第 4 題：不去重）</a:t>
+            </a:r>
+          </a:p>
+          <a:p>
+            <a:pPr lvl="1">
+              <a:spcAft>
+                <a:spcPts val="800"/>
+              </a:spcAft>
+            </a:pPr>
+            <a:r>
+              <a:rPr sz="1400" b="0">
+                <a:solidFill>
+                  <a:srgbClr val="64748B"/>
+                </a:solidFill>
+                <a:latin typeface="PingFang TC"/>
+                <a:ea typeface="PingFang TC"/>
+              </a:rPr>
+              <a:t>–  ⚠ nonce 只解決『確定性』，不解決『碰撞』</a:t>
             </a:r>
           </a:p>
           <a:p>
             <a:pPr>
               <a:spcAft>
-                <a:spcPts val="900"/>
+                <a:spcPts val="800"/>
               </a:spcAft>
             </a:pPr>
             <a:r>
@@ -3866,13 +4382,47 @@
                 <a:latin typeface="PingFang TC"/>
                 <a:ea typeface="PingFang TC"/>
               </a:rPr>
-              <a:t>•  惰性過期 + cron 兜底：掃描即時檢查過期；cron 清過期/通知未點擊/物理清理</a:t>
+              <a:t>•  碰撞數學：截斷成 8 碼後空間 = 62^8 ≈ 2.18×10^14</a:t>
+            </a:r>
+          </a:p>
+          <a:p>
+            <a:pPr lvl="1">
+              <a:spcAft>
+                <a:spcPts val="800"/>
+              </a:spcAft>
+            </a:pPr>
+            <a:r>
+              <a:rPr sz="1400" b="0">
+                <a:solidFill>
+                  <a:srgbClr val="64748B"/>
+                </a:solidFill>
+                <a:latin typeface="PingFang TC"/>
+                <a:ea typeface="PingFang TC"/>
+              </a:rPr>
+              <a:t>–  10 億規模下碰撞『必然』發生（預期 ~2,290 次）</a:t>
+            </a:r>
+          </a:p>
+          <a:p>
+            <a:pPr lvl="1">
+              <a:spcAft>
+                <a:spcPts val="800"/>
+              </a:spcAft>
+            </a:pPr>
+            <a:r>
+              <a:rPr sz="1400" b="0">
+                <a:solidFill>
+                  <a:srgbClr val="64748B"/>
+                </a:solidFill>
+                <a:latin typeface="PingFang TC"/>
+                <a:ea typeface="PingFang TC"/>
+              </a:rPr>
+              <a:t>–  7 碼 → 8 碼：空間 ×62、預期碰撞降到 1/62</a:t>
             </a:r>
           </a:p>
           <a:p>
             <a:pPr>
               <a:spcAft>
-                <a:spcPts val="900"/>
+                <a:spcPts val="800"/>
               </a:spcAft>
             </a:pPr>
             <a:r>
@@ -3883,13 +4433,13 @@
                 <a:latin typeface="PingFang TC"/>
                 <a:ea typeface="PingFang TC"/>
               </a:rPr>
-              <a:t>•  URL 保守正規化：只 lower-case host，保留 path/query 與原 scheme</a:t>
+              <a:t>•  安全網：DB token UNIQUE + 直接插入例外重試（≤10）</a:t>
             </a:r>
           </a:p>
           <a:p>
             <a:pPr lvl="1">
               <a:spcAft>
-                <a:spcPts val="900"/>
+                <a:spcPts val="800"/>
               </a:spcAft>
             </a:pPr>
             <a:r>
@@ -3900,24 +4450,7 @@
                 <a:latin typeface="PingFang TC"/>
                 <a:ea typeface="PingFang TC"/>
               </a:rPr>
-              <a:t>–  修正 repo 的整串小寫（破壞 path）+ 強制 https（導向失效站）</a:t>
-            </a:r>
-          </a:p>
-          <a:p>
-            <a:pPr>
-              <a:spcAft>
-                <a:spcPts val="900"/>
-              </a:spcAft>
-            </a:pPr>
-            <a:r>
-              <a:rPr sz="1500" b="0">
-                <a:solidFill>
-                  <a:srgbClr val="0F172A"/>
-                </a:solidFill>
-                <a:latin typeface="PingFang TC"/>
-                <a:ea typeface="PingFang TC"/>
-              </a:rPr>
-              <a:t>•  惡意阻擋：黑名單 + SSRF/內網位址（localhost·127.*·私網），正式版接 Safe Browsing</a:t>
+              <a:t>–  每筆插入碰撞率 ~0.0005%，重試幾乎都第 2 次成功</a:t>
             </a:r>
           </a:p>
         </p:txBody>
@@ -4019,7 +4552,7 @@
                 <a:latin typeface="PingFang TC"/>
                 <a:ea typeface="PingFang TC"/>
               </a:rPr>
-              <a:t>11 · SCALING</a:t>
+              <a:t>08b · TOKEN INTERNALS</a:t>
             </a:r>
           </a:p>
           <a:p>
@@ -4036,21 +4569,615 @@
                 <a:latin typeface="PingFang TC"/>
                 <a:ea typeface="PingFang TC"/>
               </a:rPr>
-              <a:t>擴展策略</a:t>
-            </a:r>
-          </a:p>
-        </p:txBody>
-      </p:sp>
-      <p:sp>
-        <p:nvSpPr>
-          <p:cNvPr id="4" name="TextBox 3"/>
+              <a:t>Token 實作 — Hash → Encode</a:t>
+            </a:r>
+          </a:p>
+        </p:txBody>
+      </p:sp>
+      <p:sp>
+        <p:nvSpPr>
+          <p:cNvPr id="4" name="Rounded Rectangle 3"/>
+          <p:cNvSpPr/>
+          <p:nvPr/>
+        </p:nvSpPr>
+        <p:spPr>
+          <a:xfrm>
+            <a:off x="457200" y="2057400"/>
+            <a:ext cx="1737360" cy="1188720"/>
+          </a:xfrm>
+          <a:prstGeom prst="roundRect">
+            <a:avLst/>
+          </a:prstGeom>
+          <a:solidFill>
+            <a:srgbClr val="64748B"/>
+          </a:solidFill>
+          <a:ln>
+            <a:solidFill>
+              <a:srgbClr val="64748B"/>
+            </a:solidFill>
+          </a:ln>
+          <a:effectLst/>
+        </p:spPr>
+        <p:style>
+          <a:lnRef idx="1">
+            <a:schemeClr val="accent1"/>
+          </a:lnRef>
+          <a:fillRef idx="3">
+            <a:schemeClr val="accent1"/>
+          </a:fillRef>
+          <a:effectRef idx="2">
+            <a:schemeClr val="accent1"/>
+          </a:effectRef>
+          <a:fontRef idx="minor">
+            <a:schemeClr val="lt1"/>
+          </a:fontRef>
+        </p:style>
+        <p:txBody>
+          <a:bodyPr rtlCol="0" anchor="ctr" wrap="square" tIns="25400" bIns="25400"/>
+          <a:lstStyle/>
+          <a:p>
+            <a:pPr algn="ctr"/>
+            <a:r>
+              <a:rPr sz="1200" b="1">
+                <a:solidFill>
+                  <a:srgbClr val="FFFFFF"/>
+                </a:solidFill>
+                <a:latin typeface="PingFang TC"/>
+                <a:ea typeface="PingFang TC"/>
+              </a:rPr>
+              <a:t>url + nonce</a:t>
+            </a:r>
+          </a:p>
+          <a:p>
+            <a:pPr algn="ctr"/>
+            <a:r>
+              <a:rPr sz="1200" b="0">
+                <a:solidFill>
+                  <a:srgbClr val="FFFFFF"/>
+                </a:solidFill>
+                <a:latin typeface="PingFang TC"/>
+                <a:ea typeface="PingFang TC"/>
+              </a:rPr>
+              <a:t>字串</a:t>
+            </a:r>
+          </a:p>
+        </p:txBody>
+      </p:sp>
+      <p:cxnSp>
+        <p:nvCxnSpPr>
+          <p:cNvPr id="5" name="Connector 4"/>
+          <p:cNvCxnSpPr/>
+          <p:nvPr/>
+        </p:nvCxnSpPr>
+        <p:spPr>
+          <a:xfrm>
+            <a:off x="2194560" y="2651760"/>
+            <a:ext cx="118872" cy="0"/>
+          </a:xfrm>
+          <a:prstGeom prst="line">
+            <a:avLst/>
+          </a:prstGeom>
+          <a:ln w="22225">
+            <a:solidFill>
+              <a:srgbClr val="64748B"/>
+            </a:solidFill>
+            <a:tailEnd type="triangle" w="med" len="med"/>
+          </a:ln>
+        </p:spPr>
+        <p:style>
+          <a:lnRef idx="2">
+            <a:schemeClr val="accent1"/>
+          </a:lnRef>
+          <a:fillRef idx="0">
+            <a:schemeClr val="accent1"/>
+          </a:fillRef>
+          <a:effectRef idx="1">
+            <a:schemeClr val="accent1"/>
+          </a:effectRef>
+          <a:fontRef idx="minor">
+            <a:schemeClr val="tx1"/>
+          </a:fontRef>
+        </p:style>
+      </p:cxnSp>
+      <p:sp>
+        <p:nvSpPr>
+          <p:cNvPr id="6" name="Rounded Rectangle 5"/>
+          <p:cNvSpPr/>
+          <p:nvPr/>
+        </p:nvSpPr>
+        <p:spPr>
+          <a:xfrm>
+            <a:off x="2313432" y="2057400"/>
+            <a:ext cx="1737360" cy="1188720"/>
+          </a:xfrm>
+          <a:prstGeom prst="roundRect">
+            <a:avLst/>
+          </a:prstGeom>
+          <a:solidFill>
+            <a:srgbClr val="0EA5E9"/>
+          </a:solidFill>
+          <a:ln>
+            <a:solidFill>
+              <a:srgbClr val="0EA5E9"/>
+            </a:solidFill>
+          </a:ln>
+          <a:effectLst/>
+        </p:spPr>
+        <p:style>
+          <a:lnRef idx="1">
+            <a:schemeClr val="accent1"/>
+          </a:lnRef>
+          <a:fillRef idx="3">
+            <a:schemeClr val="accent1"/>
+          </a:fillRef>
+          <a:effectRef idx="2">
+            <a:schemeClr val="accent1"/>
+          </a:effectRef>
+          <a:fontRef idx="minor">
+            <a:schemeClr val="lt1"/>
+          </a:fontRef>
+        </p:style>
+        <p:txBody>
+          <a:bodyPr rtlCol="0" anchor="ctr" wrap="square" tIns="25400" bIns="25400"/>
+          <a:lstStyle/>
+          <a:p>
+            <a:pPr algn="ctr"/>
+            <a:r>
+              <a:rPr sz="1200" b="1">
+                <a:solidFill>
+                  <a:srgbClr val="FFFFFF"/>
+                </a:solidFill>
+                <a:latin typeface="PingFang TC"/>
+                <a:ea typeface="PingFang TC"/>
+              </a:rPr>
+              <a:t>.encode()</a:t>
+            </a:r>
+          </a:p>
+          <a:p>
+            <a:pPr algn="ctr"/>
+            <a:r>
+              <a:rPr sz="1200" b="0">
+                <a:solidFill>
+                  <a:srgbClr val="FFFFFF"/>
+                </a:solidFill>
+                <a:latin typeface="PingFang TC"/>
+                <a:ea typeface="PingFang TC"/>
+              </a:rPr>
+              <a:t>→ bytes (UTF-8)</a:t>
+            </a:r>
+          </a:p>
+        </p:txBody>
+      </p:sp>
+      <p:cxnSp>
+        <p:nvCxnSpPr>
+          <p:cNvPr id="7" name="Connector 6"/>
+          <p:cNvCxnSpPr/>
+          <p:nvPr/>
+        </p:nvCxnSpPr>
+        <p:spPr>
+          <a:xfrm>
+            <a:off x="4050792" y="2651760"/>
+            <a:ext cx="118872" cy="0"/>
+          </a:xfrm>
+          <a:prstGeom prst="line">
+            <a:avLst/>
+          </a:prstGeom>
+          <a:ln w="22225">
+            <a:solidFill>
+              <a:srgbClr val="64748B"/>
+            </a:solidFill>
+            <a:tailEnd type="triangle" w="med" len="med"/>
+          </a:ln>
+        </p:spPr>
+        <p:style>
+          <a:lnRef idx="2">
+            <a:schemeClr val="accent1"/>
+          </a:lnRef>
+          <a:fillRef idx="0">
+            <a:schemeClr val="accent1"/>
+          </a:fillRef>
+          <a:effectRef idx="1">
+            <a:schemeClr val="accent1"/>
+          </a:effectRef>
+          <a:fontRef idx="minor">
+            <a:schemeClr val="tx1"/>
+          </a:fontRef>
+        </p:style>
+      </p:cxnSp>
+      <p:sp>
+        <p:nvSpPr>
+          <p:cNvPr id="8" name="Rounded Rectangle 7"/>
+          <p:cNvSpPr/>
+          <p:nvPr/>
+        </p:nvSpPr>
+        <p:spPr>
+          <a:xfrm>
+            <a:off x="4169664" y="2057400"/>
+            <a:ext cx="1737360" cy="1188720"/>
+          </a:xfrm>
+          <a:prstGeom prst="roundRect">
+            <a:avLst/>
+          </a:prstGeom>
+          <a:solidFill>
+            <a:srgbClr val="2563EB"/>
+          </a:solidFill>
+          <a:ln>
+            <a:solidFill>
+              <a:srgbClr val="2563EB"/>
+            </a:solidFill>
+          </a:ln>
+          <a:effectLst/>
+        </p:spPr>
+        <p:style>
+          <a:lnRef idx="1">
+            <a:schemeClr val="accent1"/>
+          </a:lnRef>
+          <a:fillRef idx="3">
+            <a:schemeClr val="accent1"/>
+          </a:fillRef>
+          <a:effectRef idx="2">
+            <a:schemeClr val="accent1"/>
+          </a:effectRef>
+          <a:fontRef idx="minor">
+            <a:schemeClr val="lt1"/>
+          </a:fontRef>
+        </p:style>
+        <p:txBody>
+          <a:bodyPr rtlCol="0" anchor="ctr" wrap="square" tIns="25400" bIns="25400"/>
+          <a:lstStyle/>
+          <a:p>
+            <a:pPr algn="ctr"/>
+            <a:r>
+              <a:rPr sz="1200" b="1">
+                <a:solidFill>
+                  <a:srgbClr val="FFFFFF"/>
+                </a:solidFill>
+                <a:latin typeface="PingFang TC"/>
+                <a:ea typeface="PingFang TC"/>
+              </a:rPr>
+              <a:t>sha256().digest()</a:t>
+            </a:r>
+          </a:p>
+          <a:p>
+            <a:pPr algn="ctr"/>
+            <a:r>
+              <a:rPr sz="1200" b="0">
+                <a:solidFill>
+                  <a:srgbClr val="FFFFFF"/>
+                </a:solidFill>
+                <a:latin typeface="PingFang TC"/>
+                <a:ea typeface="PingFang TC"/>
+              </a:rPr>
+              <a:t>→ 32 bytes 指紋</a:t>
+            </a:r>
+          </a:p>
+        </p:txBody>
+      </p:sp>
+      <p:cxnSp>
+        <p:nvCxnSpPr>
+          <p:cNvPr id="9" name="Connector 8"/>
+          <p:cNvCxnSpPr/>
+          <p:nvPr/>
+        </p:nvCxnSpPr>
+        <p:spPr>
+          <a:xfrm>
+            <a:off x="5907024" y="2651760"/>
+            <a:ext cx="118872" cy="0"/>
+          </a:xfrm>
+          <a:prstGeom prst="line">
+            <a:avLst/>
+          </a:prstGeom>
+          <a:ln w="22225">
+            <a:solidFill>
+              <a:srgbClr val="64748B"/>
+            </a:solidFill>
+            <a:tailEnd type="triangle" w="med" len="med"/>
+          </a:ln>
+        </p:spPr>
+        <p:style>
+          <a:lnRef idx="2">
+            <a:schemeClr val="accent1"/>
+          </a:lnRef>
+          <a:fillRef idx="0">
+            <a:schemeClr val="accent1"/>
+          </a:fillRef>
+          <a:effectRef idx="1">
+            <a:schemeClr val="accent1"/>
+          </a:effectRef>
+          <a:fontRef idx="minor">
+            <a:schemeClr val="tx1"/>
+          </a:fontRef>
+        </p:style>
+      </p:cxnSp>
+      <p:sp>
+        <p:nvSpPr>
+          <p:cNvPr id="10" name="Rounded Rectangle 9"/>
+          <p:cNvSpPr/>
+          <p:nvPr/>
+        </p:nvSpPr>
+        <p:spPr>
+          <a:xfrm>
+            <a:off x="6025896" y="2057400"/>
+            <a:ext cx="1737360" cy="1188720"/>
+          </a:xfrm>
+          <a:prstGeom prst="roundRect">
+            <a:avLst/>
+          </a:prstGeom>
+          <a:solidFill>
+            <a:srgbClr val="059669"/>
+          </a:solidFill>
+          <a:ln>
+            <a:solidFill>
+              <a:srgbClr val="059669"/>
+            </a:solidFill>
+          </a:ln>
+          <a:effectLst/>
+        </p:spPr>
+        <p:style>
+          <a:lnRef idx="1">
+            <a:schemeClr val="accent1"/>
+          </a:lnRef>
+          <a:fillRef idx="3">
+            <a:schemeClr val="accent1"/>
+          </a:fillRef>
+          <a:effectRef idx="2">
+            <a:schemeClr val="accent1"/>
+          </a:effectRef>
+          <a:fontRef idx="minor">
+            <a:schemeClr val="lt1"/>
+          </a:fontRef>
+        </p:style>
+        <p:txBody>
+          <a:bodyPr rtlCol="0" anchor="ctr" wrap="square" tIns="25400" bIns="25400"/>
+          <a:lstStyle/>
+          <a:p>
+            <a:pPr algn="ctr"/>
+            <a:r>
+              <a:rPr sz="1200" b="1">
+                <a:solidFill>
+                  <a:srgbClr val="FFFFFF"/>
+                </a:solidFill>
+                <a:latin typeface="PingFang TC"/>
+                <a:ea typeface="PingFang TC"/>
+              </a:rPr>
+              <a:t>int.from_bytes</a:t>
+            </a:r>
+          </a:p>
+          <a:p>
+            <a:pPr algn="ctr"/>
+            <a:r>
+              <a:rPr sz="1200" b="0">
+                <a:solidFill>
+                  <a:srgbClr val="FFFFFF"/>
+                </a:solidFill>
+                <a:latin typeface="PingFang TC"/>
+                <a:ea typeface="PingFang TC"/>
+              </a:rPr>
+              <a:t>→ 256-bit 大整數</a:t>
+            </a:r>
+          </a:p>
+        </p:txBody>
+      </p:sp>
+      <p:cxnSp>
+        <p:nvCxnSpPr>
+          <p:cNvPr id="11" name="Connector 10"/>
+          <p:cNvCxnSpPr/>
+          <p:nvPr/>
+        </p:nvCxnSpPr>
+        <p:spPr>
+          <a:xfrm>
+            <a:off x="7763256" y="2651760"/>
+            <a:ext cx="118872" cy="0"/>
+          </a:xfrm>
+          <a:prstGeom prst="line">
+            <a:avLst/>
+          </a:prstGeom>
+          <a:ln w="22225">
+            <a:solidFill>
+              <a:srgbClr val="64748B"/>
+            </a:solidFill>
+            <a:tailEnd type="triangle" w="med" len="med"/>
+          </a:ln>
+        </p:spPr>
+        <p:style>
+          <a:lnRef idx="2">
+            <a:schemeClr val="accent1"/>
+          </a:lnRef>
+          <a:fillRef idx="0">
+            <a:schemeClr val="accent1"/>
+          </a:fillRef>
+          <a:effectRef idx="1">
+            <a:schemeClr val="accent1"/>
+          </a:effectRef>
+          <a:fontRef idx="minor">
+            <a:schemeClr val="tx1"/>
+          </a:fontRef>
+        </p:style>
+      </p:cxnSp>
+      <p:sp>
+        <p:nvSpPr>
+          <p:cNvPr id="12" name="Rounded Rectangle 11"/>
+          <p:cNvSpPr/>
+          <p:nvPr/>
+        </p:nvSpPr>
+        <p:spPr>
+          <a:xfrm>
+            <a:off x="7882128" y="2057400"/>
+            <a:ext cx="1737360" cy="1188720"/>
+          </a:xfrm>
+          <a:prstGeom prst="roundRect">
+            <a:avLst/>
+          </a:prstGeom>
+          <a:solidFill>
+            <a:srgbClr val="7C3AED"/>
+          </a:solidFill>
+          <a:ln>
+            <a:solidFill>
+              <a:srgbClr val="7C3AED"/>
+            </a:solidFill>
+          </a:ln>
+          <a:effectLst/>
+        </p:spPr>
+        <p:style>
+          <a:lnRef idx="1">
+            <a:schemeClr val="accent1"/>
+          </a:lnRef>
+          <a:fillRef idx="3">
+            <a:schemeClr val="accent1"/>
+          </a:fillRef>
+          <a:effectRef idx="2">
+            <a:schemeClr val="accent1"/>
+          </a:effectRef>
+          <a:fontRef idx="minor">
+            <a:schemeClr val="lt1"/>
+          </a:fontRef>
+        </p:style>
+        <p:txBody>
+          <a:bodyPr rtlCol="0" anchor="ctr" wrap="square" tIns="25400" bIns="25400"/>
+          <a:lstStyle/>
+          <a:p>
+            <a:pPr algn="ctr"/>
+            <a:r>
+              <a:rPr sz="1200" b="1">
+                <a:solidFill>
+                  <a:srgbClr val="FFFFFF"/>
+                </a:solidFill>
+                <a:latin typeface="PingFang TC"/>
+                <a:ea typeface="PingFang TC"/>
+              </a:rPr>
+              <a:t>base62 ÷62 取餘</a:t>
+            </a:r>
+          </a:p>
+          <a:p>
+            <a:pPr algn="ctr"/>
+            <a:r>
+              <a:rPr sz="1200" b="0">
+                <a:solidFill>
+                  <a:srgbClr val="FFFFFF"/>
+                </a:solidFill>
+                <a:latin typeface="PingFang TC"/>
+                <a:ea typeface="PingFang TC"/>
+              </a:rPr>
+              <a:t>→ ~43 字元</a:t>
+            </a:r>
+          </a:p>
+        </p:txBody>
+      </p:sp>
+      <p:cxnSp>
+        <p:nvCxnSpPr>
+          <p:cNvPr id="13" name="Connector 12"/>
+          <p:cNvCxnSpPr/>
+          <p:nvPr/>
+        </p:nvCxnSpPr>
+        <p:spPr>
+          <a:xfrm>
+            <a:off x="9619488" y="2651760"/>
+            <a:ext cx="118872" cy="0"/>
+          </a:xfrm>
+          <a:prstGeom prst="line">
+            <a:avLst/>
+          </a:prstGeom>
+          <a:ln w="22225">
+            <a:solidFill>
+              <a:srgbClr val="64748B"/>
+            </a:solidFill>
+            <a:tailEnd type="triangle" w="med" len="med"/>
+          </a:ln>
+        </p:spPr>
+        <p:style>
+          <a:lnRef idx="2">
+            <a:schemeClr val="accent1"/>
+          </a:lnRef>
+          <a:fillRef idx="0">
+            <a:schemeClr val="accent1"/>
+          </a:fillRef>
+          <a:effectRef idx="1">
+            <a:schemeClr val="accent1"/>
+          </a:effectRef>
+          <a:fontRef idx="minor">
+            <a:schemeClr val="tx1"/>
+          </a:fontRef>
+        </p:style>
+      </p:cxnSp>
+      <p:sp>
+        <p:nvSpPr>
+          <p:cNvPr id="14" name="Rounded Rectangle 13"/>
+          <p:cNvSpPr/>
+          <p:nvPr/>
+        </p:nvSpPr>
+        <p:spPr>
+          <a:xfrm>
+            <a:off x="9738360" y="2057400"/>
+            <a:ext cx="1737360" cy="1188720"/>
+          </a:xfrm>
+          <a:prstGeom prst="roundRect">
+            <a:avLst/>
+          </a:prstGeom>
+          <a:solidFill>
+            <a:srgbClr val="D97706"/>
+          </a:solidFill>
+          <a:ln>
+            <a:solidFill>
+              <a:srgbClr val="D97706"/>
+            </a:solidFill>
+          </a:ln>
+          <a:effectLst/>
+        </p:spPr>
+        <p:style>
+          <a:lnRef idx="1">
+            <a:schemeClr val="accent1"/>
+          </a:lnRef>
+          <a:fillRef idx="3">
+            <a:schemeClr val="accent1"/>
+          </a:fillRef>
+          <a:effectRef idx="2">
+            <a:schemeClr val="accent1"/>
+          </a:effectRef>
+          <a:fontRef idx="minor">
+            <a:schemeClr val="lt1"/>
+          </a:fontRef>
+        </p:style>
+        <p:txBody>
+          <a:bodyPr rtlCol="0" anchor="ctr" wrap="square" tIns="25400" bIns="25400"/>
+          <a:lstStyle/>
+          <a:p>
+            <a:pPr algn="ctr"/>
+            <a:r>
+              <a:rPr sz="1200" b="1">
+                <a:solidFill>
+                  <a:srgbClr val="FFFFFF"/>
+                </a:solidFill>
+                <a:latin typeface="PingFang TC"/>
+                <a:ea typeface="PingFang TC"/>
+              </a:rPr>
+              <a:t>[:8]</a:t>
+            </a:r>
+          </a:p>
+          <a:p>
+            <a:pPr algn="ctr"/>
+            <a:r>
+              <a:rPr sz="1200" b="0">
+                <a:solidFill>
+                  <a:srgbClr val="FFFFFF"/>
+                </a:solidFill>
+                <a:latin typeface="PingFang TC"/>
+                <a:ea typeface="PingFang TC"/>
+              </a:rPr>
+              <a:t>→ token</a:t>
+            </a:r>
+          </a:p>
+        </p:txBody>
+      </p:sp>
+      <p:sp>
+        <p:nvSpPr>
+          <p:cNvPr id="15" name="TextBox 14"/>
           <p:cNvSpPr txBox="1"/>
           <p:nvPr/>
         </p:nvSpPr>
         <p:spPr>
           <a:xfrm>
-            <a:off x="640080" y="1737360"/>
-            <a:ext cx="10789920" cy="4572000"/>
+            <a:off x="548640" y="3611880"/>
+            <a:ext cx="11155680" cy="2743200"/>
           </a:xfrm>
           <a:prstGeom prst="rect">
             <a:avLst/>
@@ -4065,120 +5192,103 @@
           <a:p>
             <a:pPr>
               <a:spcAft>
-                <a:spcPts val="900"/>
-              </a:spcAft>
-            </a:pPr>
-            <a:r>
-              <a:rPr sz="1500" b="0">
+                <a:spcPts val="700"/>
+              </a:spcAft>
+            </a:pPr>
+            <a:r>
+              <a:rPr sz="1300" b="0">
                 <a:solidFill>
                   <a:srgbClr val="0F172A"/>
                 </a:solidFill>
                 <a:latin typeface="PingFang TC"/>
                 <a:ea typeface="PingFang TC"/>
               </a:rPr>
-              <a:t>•  App server stateless → 增加 instance 水平擴展（cache 外置 Redis）</a:t>
+              <a:t>•  Hash（攪亂）：sha256(...).digest() 壓成固定 32 bytes 指紋 — 確定性·雪崩·單向（.hexdigest() 則回 64 字元 hex）</a:t>
             </a:r>
           </a:p>
           <a:p>
             <a:pPr>
               <a:spcAft>
-                <a:spcPts val="900"/>
-              </a:spcAft>
-            </a:pPr>
-            <a:r>
-              <a:rPr sz="1500" b="0">
+                <a:spcPts val="700"/>
+              </a:spcAft>
+            </a:pPr>
+            <a:r>
+              <a:rPr sz="1300" b="0">
                 <a:solidFill>
                   <a:srgbClr val="0F172A"/>
                 </a:solidFill>
                 <a:latin typeface="PingFang TC"/>
                 <a:ea typeface="PingFang TC"/>
               </a:rPr>
-              <a:t>•  DB：單 primary + 多 read replica（讀走副）+ primary 掛 failover 升主</a:t>
+              <a:t>•  Encode（變短碼）：大整數不斷 ÷62 記餘數 → 餘數 0–61 對映 0-9a-zA-Z；reversed 因餘數從最低位算起</a:t>
             </a:r>
           </a:p>
           <a:p>
             <a:pPr lvl="1">
               <a:spcAft>
-                <a:spcPts val="900"/>
-              </a:spcAft>
-            </a:pPr>
-            <a:r>
-              <a:rPr sz="1400" b="0">
+                <a:spcPts val="700"/>
+              </a:spcAft>
+            </a:pPr>
+            <a:r>
+              <a:rPr sz="1200" b="0">
                 <a:solidFill>
                   <a:srgbClr val="64748B"/>
                 </a:solidFill>
                 <a:latin typeface="PingFang TC"/>
                 <a:ea typeface="PingFang TC"/>
               </a:rPr>
-              <a:t>–  複寫延遲：create 後暖 cache 緩解</a:t>
+              <a:t>–  選 Base62 而非 Base64：不含 / + = → URL 安全</a:t>
             </a:r>
           </a:p>
           <a:p>
             <a:pPr>
               <a:spcAft>
-                <a:spcPts val="900"/>
-              </a:spcAft>
-            </a:pPr>
-            <a:r>
-              <a:rPr sz="1500" b="0">
+                <a:spcPts val="700"/>
+              </a:spcAft>
+            </a:pPr>
+            <a:r>
+              <a:rPr sz="1300" b="0">
                 <a:solidFill>
                   <a:srgbClr val="0F172A"/>
                 </a:solidFill>
                 <a:latin typeface="PingFang TC"/>
                 <a:ea typeface="PingFang TC"/>
               </a:rPr>
-              <a:t>•  分片：以 token hash 為鍵（均勻），列為未來選項（200GB 目前單機足夠）</a:t>
+              <a:t>•  截斷：62^43 ≈ 2^256，取前 8 碼 → 空間砍到 62^8（碰撞源於此）</a:t>
             </a:r>
           </a:p>
           <a:p>
             <a:pPr>
               <a:spcAft>
-                <a:spcPts val="900"/>
-              </a:spcAft>
-            </a:pPr>
-            <a:r>
-              <a:rPr sz="1500" b="0">
+                <a:spcPts val="700"/>
+              </a:spcAft>
+            </a:pPr>
+            <a:r>
+              <a:rPr sz="1300" b="0">
                 <a:solidFill>
                   <a:srgbClr val="0F172A"/>
                 </a:solidFill>
                 <a:latin typeface="PingFang TC"/>
                 <a:ea typeface="PingFang TC"/>
               </a:rPr>
-              <a:t>•  QR 圖片：object store + CDN（靜態內容，目標 URL 改不需重生圖）</a:t>
+              <a:t>•  ⚠ 兩個 encode：(url+nonce).encode() 是文字→bytes；base62_encode() 是 bytes→文字</a:t>
             </a:r>
           </a:p>
           <a:p>
             <a:pPr>
               <a:spcAft>
-                <a:spcPts val="900"/>
-              </a:spcAft>
-            </a:pPr>
-            <a:r>
-              <a:rPr sz="1500" b="0">
+                <a:spcPts val="700"/>
+              </a:spcAft>
+            </a:pPr>
+            <a:r>
+              <a:rPr sz="1300" b="0">
                 <a:solidFill>
                   <a:srgbClr val="0F172A"/>
                 </a:solidFill>
                 <a:latin typeface="PingFang TC"/>
                 <a:ea typeface="PingFang TC"/>
               </a:rPr>
-              <a:t>•  分析：佇列 → 獨立分析庫 + 預聚合每日計數表</a:t>
-            </a:r>
-          </a:p>
-          <a:p>
-            <a:pPr>
-              <a:spcAft>
-                <a:spcPts val="900"/>
-              </a:spcAft>
-            </a:pPr>
-            <a:r>
-              <a:rPr sz="1500" b="0">
-                <a:solidFill>
-                  <a:srgbClr val="0F172A"/>
-                </a:solidFill>
-                <a:latin typeface="PingFang TC"/>
-                <a:ea typeface="PingFang TC"/>
-              </a:rPr>
-              <a:t>•  清理 cron：清過期 / 通知後刪長期未點擊 / 物理清理超期軟刪 + invalidate cache</a:t>
+              <a:t>•  範例：3842 → 餘60='Y'、餘61='Z' → reversed → "ZY"</a:t>
             </a:r>
           </a:p>
         </p:txBody>
@@ -4280,6 +5390,914 @@
                 <a:latin typeface="PingFang TC"/>
                 <a:ea typeface="PingFang TC"/>
               </a:rPr>
+              <a:t>09 · DEEP DIVE</a:t>
+            </a:r>
+          </a:p>
+          <a:p>
+            <a:pPr algn="l">
+              <a:spcAft>
+                <a:spcPts val="400"/>
+              </a:spcAft>
+            </a:pPr>
+            <a:r>
+              <a:rPr sz="3000" b="1">
+                <a:solidFill>
+                  <a:srgbClr val="0F172A"/>
+                </a:solidFill>
+                <a:latin typeface="PingFang TC"/>
+                <a:ea typeface="PingFang TC"/>
+              </a:rPr>
+              <a:t>決策 2 — 302、快取、非同步</a:t>
+            </a:r>
+          </a:p>
+        </p:txBody>
+      </p:sp>
+      <p:sp>
+        <p:nvSpPr>
+          <p:cNvPr id="4" name="TextBox 3"/>
+          <p:cNvSpPr txBox="1"/>
+          <p:nvPr/>
+        </p:nvSpPr>
+        <p:spPr>
+          <a:xfrm>
+            <a:off x="640080" y="1737360"/>
+            <a:ext cx="5486400" cy="4572000"/>
+          </a:xfrm>
+          <a:prstGeom prst="rect">
+            <a:avLst/>
+          </a:prstGeom>
+          <a:noFill/>
+        </p:spPr>
+        <p:txBody>
+          <a:bodyPr wrap="square">
+            <a:spAutoFit/>
+          </a:bodyPr>
+          <a:lstStyle/>
+          <a:p>
+            <a:pPr>
+              <a:spcAft>
+                <a:spcPts val="800"/>
+              </a:spcAft>
+            </a:pPr>
+            <a:r>
+              <a:rPr sz="1400" b="0">
+                <a:solidFill>
+                  <a:srgbClr val="0F172A"/>
+                </a:solidFill>
+                <a:latin typeface="PingFang TC"/>
+                <a:ea typeface="PingFang TC"/>
+              </a:rPr>
+              <a:t>•  302 而非 301</a:t>
+            </a:r>
+          </a:p>
+          <a:p>
+            <a:pPr lvl="1">
+              <a:spcAft>
+                <a:spcPts val="800"/>
+              </a:spcAft>
+            </a:pPr>
+            <a:r>
+              <a:rPr sz="1300" b="0">
+                <a:solidFill>
+                  <a:srgbClr val="64748B"/>
+                </a:solidFill>
+                <a:latin typeface="PingFang TC"/>
+                <a:ea typeface="PingFang TC"/>
+              </a:rPr>
+              <a:t>–  301 被瀏覽器快取 → 跳過我方 server</a:t>
+            </a:r>
+          </a:p>
+          <a:p>
+            <a:pPr lvl="1">
+              <a:spcAft>
+                <a:spcPts val="800"/>
+              </a:spcAft>
+            </a:pPr>
+            <a:r>
+              <a:rPr sz="1300" b="0">
+                <a:solidFill>
+                  <a:srgbClr val="64748B"/>
+                </a:solidFill>
+                <a:latin typeface="PingFang TC"/>
+                <a:ea typeface="PingFang TC"/>
+              </a:rPr>
+              <a:t>–  → 無法改/刪/統計；故選 302 每次回源</a:t>
+            </a:r>
+          </a:p>
+          <a:p>
+            <a:pPr>
+              <a:spcAft>
+                <a:spcPts val="800"/>
+              </a:spcAft>
+            </a:pPr>
+            <a:r>
+              <a:rPr sz="1400" b="0">
+                <a:solidFill>
+                  <a:srgbClr val="0F172A"/>
+                </a:solidFill>
+                <a:latin typeface="PingFang TC"/>
+                <a:ea typeface="PingFang TC"/>
+              </a:rPr>
+              <a:t>•  Cache：Redis（非行程內 dict）</a:t>
+            </a:r>
+          </a:p>
+          <a:p>
+            <a:pPr lvl="1">
+              <a:spcAft>
+                <a:spcPts val="800"/>
+              </a:spcAft>
+            </a:pPr>
+            <a:r>
+              <a:rPr sz="1300" b="0">
+                <a:solidFill>
+                  <a:srgbClr val="64748B"/>
+                </a:solidFill>
+                <a:latin typeface="PingFang TC"/>
+                <a:ea typeface="PingFang TC"/>
+              </a:rPr>
+              <a:t>–  stateless 多台共享 + 全域 invalidation</a:t>
+            </a:r>
+          </a:p>
+          <a:p>
+            <a:pPr lvl="1">
+              <a:spcAft>
+                <a:spcPts val="800"/>
+              </a:spcAft>
+            </a:pPr>
+            <a:r>
+              <a:rPr sz="1300" b="0">
+                <a:solidFill>
+                  <a:srgbClr val="64748B"/>
+                </a:solidFill>
+                <a:latin typeface="PingFang TC"/>
+                <a:ea typeface="PingFang TC"/>
+              </a:rPr>
+              <a:t>–  行程內 dict 會讓 PATCH/DELETE 失效漏清</a:t>
+            </a:r>
+          </a:p>
+          <a:p>
+            <a:pPr lvl="1">
+              <a:spcAft>
+                <a:spcPts val="800"/>
+              </a:spcAft>
+            </a:pPr>
+            <a:r>
+              <a:rPr sz="1300" b="0">
+                <a:solidFill>
+                  <a:srgbClr val="64748B"/>
+                </a:solidFill>
+                <a:latin typeface="PingFang TC"/>
+                <a:ea typeface="PingFang TC"/>
+              </a:rPr>
+              <a:t>–  含 TTL 作最終一致性保險</a:t>
+            </a:r>
+          </a:p>
+        </p:txBody>
+      </p:sp>
+      <p:sp>
+        <p:nvSpPr>
+          <p:cNvPr id="5" name="TextBox 4"/>
+          <p:cNvSpPr txBox="1"/>
+          <p:nvPr/>
+        </p:nvSpPr>
+        <p:spPr>
+          <a:xfrm>
+            <a:off x="6309360" y="1737360"/>
+            <a:ext cx="5486400" cy="4572000"/>
+          </a:xfrm>
+          <a:prstGeom prst="rect">
+            <a:avLst/>
+          </a:prstGeom>
+          <a:noFill/>
+        </p:spPr>
+        <p:txBody>
+          <a:bodyPr wrap="square">
+            <a:spAutoFit/>
+          </a:bodyPr>
+          <a:lstStyle/>
+          <a:p>
+            <a:pPr>
+              <a:spcAft>
+                <a:spcPts val="800"/>
+              </a:spcAft>
+            </a:pPr>
+            <a:r>
+              <a:rPr sz="1400" b="0">
+                <a:solidFill>
+                  <a:srgbClr val="0F172A"/>
+                </a:solidFill>
+                <a:latin typeface="PingFang TC"/>
+                <a:ea typeface="PingFang TC"/>
+              </a:rPr>
+              <a:t>•  Scan 非同步寫</a:t>
+            </a:r>
+          </a:p>
+          <a:p>
+            <a:pPr lvl="1">
+              <a:spcAft>
+                <a:spcPts val="800"/>
+              </a:spcAft>
+            </a:pPr>
+            <a:r>
+              <a:rPr sz="1300" b="0">
+                <a:solidFill>
+                  <a:srgbClr val="64748B"/>
+                </a:solidFill>
+                <a:latin typeface="PingFang TC"/>
+                <a:ea typeface="PingFang TC"/>
+              </a:rPr>
+              <a:t>–  redirect 是 &lt;100ms + ~5,800 QPS 熱路徑</a:t>
+            </a:r>
+          </a:p>
+          <a:p>
+            <a:pPr lvl="1">
+              <a:spcAft>
+                <a:spcPts val="800"/>
+              </a:spcAft>
+            </a:pPr>
+            <a:r>
+              <a:rPr sz="1300" b="0">
+                <a:solidFill>
+                  <a:srgbClr val="64748B"/>
+                </a:solidFill>
+                <a:latin typeface="PingFang TC"/>
+                <a:ea typeface="PingFang TC"/>
+              </a:rPr>
+              <a:t>–  分析可容忍延遲/少量遺失 → 不擋跳轉</a:t>
+            </a:r>
+          </a:p>
+          <a:p>
+            <a:pPr lvl="1">
+              <a:spcAft>
+                <a:spcPts val="800"/>
+              </a:spcAft>
+            </a:pPr>
+            <a:r>
+              <a:rPr sz="1300" b="0">
+                <a:solidFill>
+                  <a:srgbClr val="64748B"/>
+                </a:solidFill>
+                <a:latin typeface="PingFang TC"/>
+                <a:ea typeface="PingFang TC"/>
+              </a:rPr>
+              <a:t>–  原型 BackgroundTasks；正式版佇列+worker</a:t>
+            </a:r>
+          </a:p>
+          <a:p>
+            <a:pPr>
+              <a:spcAft>
+                <a:spcPts val="800"/>
+              </a:spcAft>
+            </a:pPr>
+            <a:r>
+              <a:rPr sz="1400" b="0">
+                <a:solidFill>
+                  <a:srgbClr val="0F172A"/>
+                </a:solidFill>
+                <a:latin typeface="PingFang TC"/>
+                <a:ea typeface="PingFang TC"/>
+              </a:rPr>
+              <a:t>•  token index</a:t>
+            </a:r>
+          </a:p>
+          <a:p>
+            <a:pPr lvl="1">
+              <a:spcAft>
+                <a:spcPts val="800"/>
+              </a:spcAft>
+            </a:pPr>
+            <a:r>
+              <a:rPr sz="1300" b="0">
+                <a:solidFill>
+                  <a:srgbClr val="64748B"/>
+                </a:solidFill>
+                <a:latin typeface="PingFang TC"/>
+                <a:ea typeface="PingFang TC"/>
+              </a:rPr>
+              <a:t>–  避免全表掃描，redirect 直接命中</a:t>
+            </a:r>
+          </a:p>
+        </p:txBody>
+      </p:sp>
+    </p:spTree>
+  </p:cSld>
+  <p:clrMapOvr>
+    <a:masterClrMapping/>
+  </p:clrMapOvr>
+</p:sld>
+</file>
+
+<file path=ppt/slides/slide14.xml><?xml version="1.0" encoding="utf-8"?>
+<p:sld xmlns:a="http://schemas.openxmlformats.org/drawingml/2006/main" xmlns:p="http://schemas.openxmlformats.org/presentationml/2006/main" xmlns:r="http://schemas.openxmlformats.org/officeDocument/2006/relationships">
+  <p:cSld>
+    <p:spTree>
+      <p:nvGrpSpPr>
+        <p:cNvPr id="1" name=""/>
+        <p:cNvGrpSpPr/>
+        <p:nvPr/>
+      </p:nvGrpSpPr>
+      <p:grpSpPr/>
+      <p:sp>
+        <p:nvSpPr>
+          <p:cNvPr id="2" name="Rectangle 1"/>
+          <p:cNvSpPr/>
+          <p:nvPr/>
+        </p:nvSpPr>
+        <p:spPr>
+          <a:xfrm>
+            <a:off x="0" y="0"/>
+            <a:ext cx="164592" cy="6858000"/>
+          </a:xfrm>
+          <a:prstGeom prst="rect">
+            <a:avLst/>
+          </a:prstGeom>
+          <a:solidFill>
+            <a:srgbClr val="2563EB"/>
+          </a:solidFill>
+          <a:ln>
+            <a:noFill/>
+          </a:ln>
+          <a:effectLst/>
+        </p:spPr>
+        <p:style>
+          <a:lnRef idx="1">
+            <a:schemeClr val="accent1"/>
+          </a:lnRef>
+          <a:fillRef idx="3">
+            <a:schemeClr val="accent1"/>
+          </a:fillRef>
+          <a:effectRef idx="2">
+            <a:schemeClr val="accent1"/>
+          </a:effectRef>
+          <a:fontRef idx="minor">
+            <a:schemeClr val="lt1"/>
+          </a:fontRef>
+        </p:style>
+        <p:txBody>
+          <a:bodyPr rtlCol="0" anchor="ctr"/>
+          <a:lstStyle/>
+          <a:p>
+            <a:pPr algn="ctr"/>
+          </a:p>
+        </p:txBody>
+      </p:sp>
+      <p:sp>
+        <p:nvSpPr>
+          <p:cNvPr id="3" name="TextBox 2"/>
+          <p:cNvSpPr txBox="1"/>
+          <p:nvPr/>
+        </p:nvSpPr>
+        <p:spPr>
+          <a:xfrm>
+            <a:off x="502920" y="320040"/>
+            <a:ext cx="10972800" cy="1005840"/>
+          </a:xfrm>
+          <a:prstGeom prst="rect">
+            <a:avLst/>
+          </a:prstGeom>
+          <a:noFill/>
+        </p:spPr>
+        <p:txBody>
+          <a:bodyPr wrap="square" anchor="t">
+            <a:spAutoFit/>
+          </a:bodyPr>
+          <a:lstStyle/>
+          <a:p>
+            <a:pPr algn="l">
+              <a:spcAft>
+                <a:spcPts val="200"/>
+              </a:spcAft>
+            </a:pPr>
+            <a:r>
+              <a:rPr sz="1300" b="1">
+                <a:solidFill>
+                  <a:srgbClr val="2563EB"/>
+                </a:solidFill>
+                <a:latin typeface="PingFang TC"/>
+                <a:ea typeface="PingFang TC"/>
+              </a:rPr>
+              <a:t>10 · DEEP DIVE</a:t>
+            </a:r>
+          </a:p>
+          <a:p>
+            <a:pPr algn="l">
+              <a:spcAft>
+                <a:spcPts val="400"/>
+              </a:spcAft>
+            </a:pPr>
+            <a:r>
+              <a:rPr sz="3000" b="1">
+                <a:solidFill>
+                  <a:srgbClr val="0F172A"/>
+                </a:solidFill>
+                <a:latin typeface="PingFang TC"/>
+                <a:ea typeface="PingFang TC"/>
+              </a:rPr>
+              <a:t>決策 3 — 可靠性與資料語意</a:t>
+            </a:r>
+          </a:p>
+        </p:txBody>
+      </p:sp>
+      <p:sp>
+        <p:nvSpPr>
+          <p:cNvPr id="4" name="TextBox 3"/>
+          <p:cNvSpPr txBox="1"/>
+          <p:nvPr/>
+        </p:nvSpPr>
+        <p:spPr>
+          <a:xfrm>
+            <a:off x="640080" y="1737360"/>
+            <a:ext cx="10789920" cy="4572000"/>
+          </a:xfrm>
+          <a:prstGeom prst="rect">
+            <a:avLst/>
+          </a:prstGeom>
+          <a:noFill/>
+        </p:spPr>
+        <p:txBody>
+          <a:bodyPr wrap="square">
+            <a:spAutoFit/>
+          </a:bodyPr>
+          <a:lstStyle/>
+          <a:p>
+            <a:pPr>
+              <a:spcAft>
+                <a:spcPts val="900"/>
+              </a:spcAft>
+            </a:pPr>
+            <a:r>
+              <a:rPr sz="1500" b="0">
+                <a:solidFill>
+                  <a:srgbClr val="0F172A"/>
+                </a:solidFill>
+                <a:latin typeface="PingFang TC"/>
+                <a:ea typeface="PingFang TC"/>
+              </a:rPr>
+              <a:t>•  軟刪除（is_deleted）：支撐 410 語意、保留分析、避免 token 回收風險</a:t>
+            </a:r>
+          </a:p>
+          <a:p>
+            <a:pPr>
+              <a:spcAft>
+                <a:spcPts val="900"/>
+              </a:spcAft>
+            </a:pPr>
+            <a:r>
+              <a:rPr sz="1500" b="0">
+                <a:solidFill>
+                  <a:srgbClr val="0F172A"/>
+                </a:solidFill>
+                <a:latin typeface="PingFang TC"/>
+                <a:ea typeface="PingFang TC"/>
+              </a:rPr>
+              <a:t>•  錯誤語意：404（從未存在） vs 410（曾存在已刪/過期）</a:t>
+            </a:r>
+          </a:p>
+          <a:p>
+            <a:pPr lvl="1">
+              <a:spcAft>
+                <a:spcPts val="900"/>
+              </a:spcAft>
+            </a:pPr>
+            <a:r>
+              <a:rPr sz="1400" b="0">
+                <a:solidFill>
+                  <a:srgbClr val="64748B"/>
+                </a:solidFill>
+                <a:latin typeface="PingFang TC"/>
+                <a:ea typeface="PingFang TC"/>
+              </a:rPr>
+              <a:t>–  掃描路徑刪除回 410；管理 API 已刪回 404（刻意差異）</a:t>
+            </a:r>
+          </a:p>
+          <a:p>
+            <a:pPr>
+              <a:spcAft>
+                <a:spcPts val="900"/>
+              </a:spcAft>
+            </a:pPr>
+            <a:r>
+              <a:rPr sz="1500" b="0">
+                <a:solidFill>
+                  <a:srgbClr val="0F172A"/>
+                </a:solidFill>
+                <a:latin typeface="PingFang TC"/>
+                <a:ea typeface="PingFang TC"/>
+              </a:rPr>
+              <a:t>•  惰性過期 + cron 兜底：掃描即時檢查過期；cron 清過期/通知未點擊/物理清理</a:t>
+            </a:r>
+          </a:p>
+          <a:p>
+            <a:pPr>
+              <a:spcAft>
+                <a:spcPts val="900"/>
+              </a:spcAft>
+            </a:pPr>
+            <a:r>
+              <a:rPr sz="1500" b="0">
+                <a:solidFill>
+                  <a:srgbClr val="0F172A"/>
+                </a:solidFill>
+                <a:latin typeface="PingFang TC"/>
+                <a:ea typeface="PingFang TC"/>
+              </a:rPr>
+              <a:t>•  URL 保守正規化：只 lower-case host，保留 path/query 與原 scheme</a:t>
+            </a:r>
+          </a:p>
+          <a:p>
+            <a:pPr lvl="1">
+              <a:spcAft>
+                <a:spcPts val="900"/>
+              </a:spcAft>
+            </a:pPr>
+            <a:r>
+              <a:rPr sz="1400" b="0">
+                <a:solidFill>
+                  <a:srgbClr val="64748B"/>
+                </a:solidFill>
+                <a:latin typeface="PingFang TC"/>
+                <a:ea typeface="PingFang TC"/>
+              </a:rPr>
+              <a:t>–  修正 repo 的整串小寫（破壞 path）+ 強制 https（導向失效站）</a:t>
+            </a:r>
+          </a:p>
+          <a:p>
+            <a:pPr>
+              <a:spcAft>
+                <a:spcPts val="900"/>
+              </a:spcAft>
+            </a:pPr>
+            <a:r>
+              <a:rPr sz="1500" b="0">
+                <a:solidFill>
+                  <a:srgbClr val="0F172A"/>
+                </a:solidFill>
+                <a:latin typeface="PingFang TC"/>
+                <a:ea typeface="PingFang TC"/>
+              </a:rPr>
+              <a:t>•  惡意阻擋：黑名單 + SSRF/內網位址（localhost·127.*·私網），正式版接 Safe Browsing</a:t>
+            </a:r>
+          </a:p>
+        </p:txBody>
+      </p:sp>
+    </p:spTree>
+  </p:cSld>
+  <p:clrMapOvr>
+    <a:masterClrMapping/>
+  </p:clrMapOvr>
+</p:sld>
+</file>
+
+<file path=ppt/slides/slide15.xml><?xml version="1.0" encoding="utf-8"?>
+<p:sld xmlns:a="http://schemas.openxmlformats.org/drawingml/2006/main" xmlns:p="http://schemas.openxmlformats.org/presentationml/2006/main" xmlns:r="http://schemas.openxmlformats.org/officeDocument/2006/relationships">
+  <p:cSld>
+    <p:spTree>
+      <p:nvGrpSpPr>
+        <p:cNvPr id="1" name=""/>
+        <p:cNvGrpSpPr/>
+        <p:nvPr/>
+      </p:nvGrpSpPr>
+      <p:grpSpPr/>
+      <p:sp>
+        <p:nvSpPr>
+          <p:cNvPr id="2" name="Rectangle 1"/>
+          <p:cNvSpPr/>
+          <p:nvPr/>
+        </p:nvSpPr>
+        <p:spPr>
+          <a:xfrm>
+            <a:off x="0" y="0"/>
+            <a:ext cx="164592" cy="6858000"/>
+          </a:xfrm>
+          <a:prstGeom prst="rect">
+            <a:avLst/>
+          </a:prstGeom>
+          <a:solidFill>
+            <a:srgbClr val="2563EB"/>
+          </a:solidFill>
+          <a:ln>
+            <a:noFill/>
+          </a:ln>
+          <a:effectLst/>
+        </p:spPr>
+        <p:style>
+          <a:lnRef idx="1">
+            <a:schemeClr val="accent1"/>
+          </a:lnRef>
+          <a:fillRef idx="3">
+            <a:schemeClr val="accent1"/>
+          </a:fillRef>
+          <a:effectRef idx="2">
+            <a:schemeClr val="accent1"/>
+          </a:effectRef>
+          <a:fontRef idx="minor">
+            <a:schemeClr val="lt1"/>
+          </a:fontRef>
+        </p:style>
+        <p:txBody>
+          <a:bodyPr rtlCol="0" anchor="ctr"/>
+          <a:lstStyle/>
+          <a:p>
+            <a:pPr algn="ctr"/>
+          </a:p>
+        </p:txBody>
+      </p:sp>
+      <p:sp>
+        <p:nvSpPr>
+          <p:cNvPr id="3" name="TextBox 2"/>
+          <p:cNvSpPr txBox="1"/>
+          <p:nvPr/>
+        </p:nvSpPr>
+        <p:spPr>
+          <a:xfrm>
+            <a:off x="502920" y="320040"/>
+            <a:ext cx="10972800" cy="1005840"/>
+          </a:xfrm>
+          <a:prstGeom prst="rect">
+            <a:avLst/>
+          </a:prstGeom>
+          <a:noFill/>
+        </p:spPr>
+        <p:txBody>
+          <a:bodyPr wrap="square" anchor="t">
+            <a:spAutoFit/>
+          </a:bodyPr>
+          <a:lstStyle/>
+          <a:p>
+            <a:pPr algn="l">
+              <a:spcAft>
+                <a:spcPts val="200"/>
+              </a:spcAft>
+            </a:pPr>
+            <a:r>
+              <a:rPr sz="1300" b="1">
+                <a:solidFill>
+                  <a:srgbClr val="2563EB"/>
+                </a:solidFill>
+                <a:latin typeface="PingFang TC"/>
+                <a:ea typeface="PingFang TC"/>
+              </a:rPr>
+              <a:t>11 · SCALING</a:t>
+            </a:r>
+          </a:p>
+          <a:p>
+            <a:pPr algn="l">
+              <a:spcAft>
+                <a:spcPts val="400"/>
+              </a:spcAft>
+            </a:pPr>
+            <a:r>
+              <a:rPr sz="3000" b="1">
+                <a:solidFill>
+                  <a:srgbClr val="0F172A"/>
+                </a:solidFill>
+                <a:latin typeface="PingFang TC"/>
+                <a:ea typeface="PingFang TC"/>
+              </a:rPr>
+              <a:t>擴展策略</a:t>
+            </a:r>
+          </a:p>
+        </p:txBody>
+      </p:sp>
+      <p:sp>
+        <p:nvSpPr>
+          <p:cNvPr id="4" name="TextBox 3"/>
+          <p:cNvSpPr txBox="1"/>
+          <p:nvPr/>
+        </p:nvSpPr>
+        <p:spPr>
+          <a:xfrm>
+            <a:off x="640080" y="1737360"/>
+            <a:ext cx="10789920" cy="4572000"/>
+          </a:xfrm>
+          <a:prstGeom prst="rect">
+            <a:avLst/>
+          </a:prstGeom>
+          <a:noFill/>
+        </p:spPr>
+        <p:txBody>
+          <a:bodyPr wrap="square">
+            <a:spAutoFit/>
+          </a:bodyPr>
+          <a:lstStyle/>
+          <a:p>
+            <a:pPr>
+              <a:spcAft>
+                <a:spcPts val="900"/>
+              </a:spcAft>
+            </a:pPr>
+            <a:r>
+              <a:rPr sz="1500" b="0">
+                <a:solidFill>
+                  <a:srgbClr val="0F172A"/>
+                </a:solidFill>
+                <a:latin typeface="PingFang TC"/>
+                <a:ea typeface="PingFang TC"/>
+              </a:rPr>
+              <a:t>•  App server stateless → 增加 instance 水平擴展（cache 外置 Redis）</a:t>
+            </a:r>
+          </a:p>
+          <a:p>
+            <a:pPr>
+              <a:spcAft>
+                <a:spcPts val="900"/>
+              </a:spcAft>
+            </a:pPr>
+            <a:r>
+              <a:rPr sz="1500" b="0">
+                <a:solidFill>
+                  <a:srgbClr val="0F172A"/>
+                </a:solidFill>
+                <a:latin typeface="PingFang TC"/>
+                <a:ea typeface="PingFang TC"/>
+              </a:rPr>
+              <a:t>•  DB：單 primary + 多 read replica（讀走副）+ primary 掛 failover 升主</a:t>
+            </a:r>
+          </a:p>
+          <a:p>
+            <a:pPr lvl="1">
+              <a:spcAft>
+                <a:spcPts val="900"/>
+              </a:spcAft>
+            </a:pPr>
+            <a:r>
+              <a:rPr sz="1400" b="0">
+                <a:solidFill>
+                  <a:srgbClr val="64748B"/>
+                </a:solidFill>
+                <a:latin typeface="PingFang TC"/>
+                <a:ea typeface="PingFang TC"/>
+              </a:rPr>
+              <a:t>–  複寫延遲：create 後暖 cache 緩解</a:t>
+            </a:r>
+          </a:p>
+          <a:p>
+            <a:pPr>
+              <a:spcAft>
+                <a:spcPts val="900"/>
+              </a:spcAft>
+            </a:pPr>
+            <a:r>
+              <a:rPr sz="1500" b="0">
+                <a:solidFill>
+                  <a:srgbClr val="0F172A"/>
+                </a:solidFill>
+                <a:latin typeface="PingFang TC"/>
+                <a:ea typeface="PingFang TC"/>
+              </a:rPr>
+              <a:t>•  分片：以 token hash 為鍵（均勻），列為未來選項（200GB 目前單機足夠）</a:t>
+            </a:r>
+          </a:p>
+          <a:p>
+            <a:pPr>
+              <a:spcAft>
+                <a:spcPts val="900"/>
+              </a:spcAft>
+            </a:pPr>
+            <a:r>
+              <a:rPr sz="1500" b="0">
+                <a:solidFill>
+                  <a:srgbClr val="0F172A"/>
+                </a:solidFill>
+                <a:latin typeface="PingFang TC"/>
+                <a:ea typeface="PingFang TC"/>
+              </a:rPr>
+              <a:t>•  QR 圖片：object store + CDN（靜態內容，目標 URL 改不需重生圖）</a:t>
+            </a:r>
+          </a:p>
+          <a:p>
+            <a:pPr>
+              <a:spcAft>
+                <a:spcPts val="900"/>
+              </a:spcAft>
+            </a:pPr>
+            <a:r>
+              <a:rPr sz="1500" b="0">
+                <a:solidFill>
+                  <a:srgbClr val="0F172A"/>
+                </a:solidFill>
+                <a:latin typeface="PingFang TC"/>
+                <a:ea typeface="PingFang TC"/>
+              </a:rPr>
+              <a:t>•  分析：佇列 → 獨立分析庫 + 預聚合每日計數表</a:t>
+            </a:r>
+          </a:p>
+          <a:p>
+            <a:pPr>
+              <a:spcAft>
+                <a:spcPts val="900"/>
+              </a:spcAft>
+            </a:pPr>
+            <a:r>
+              <a:rPr sz="1500" b="0">
+                <a:solidFill>
+                  <a:srgbClr val="0F172A"/>
+                </a:solidFill>
+                <a:latin typeface="PingFang TC"/>
+                <a:ea typeface="PingFang TC"/>
+              </a:rPr>
+              <a:t>•  清理 cron：清過期 / 通知後刪長期未點擊 / 物理清理超期軟刪 + invalidate cache</a:t>
+            </a:r>
+          </a:p>
+        </p:txBody>
+      </p:sp>
+    </p:spTree>
+  </p:cSld>
+  <p:clrMapOvr>
+    <a:masterClrMapping/>
+  </p:clrMapOvr>
+</p:sld>
+</file>
+
+<file path=ppt/slides/slide16.xml><?xml version="1.0" encoding="utf-8"?>
+<p:sld xmlns:a="http://schemas.openxmlformats.org/drawingml/2006/main" xmlns:p="http://schemas.openxmlformats.org/presentationml/2006/main" xmlns:r="http://schemas.openxmlformats.org/officeDocument/2006/relationships">
+  <p:cSld>
+    <p:spTree>
+      <p:nvGrpSpPr>
+        <p:cNvPr id="1" name=""/>
+        <p:cNvGrpSpPr/>
+        <p:nvPr/>
+      </p:nvGrpSpPr>
+      <p:grpSpPr/>
+      <p:sp>
+        <p:nvSpPr>
+          <p:cNvPr id="2" name="Rectangle 1"/>
+          <p:cNvSpPr/>
+          <p:nvPr/>
+        </p:nvSpPr>
+        <p:spPr>
+          <a:xfrm>
+            <a:off x="0" y="0"/>
+            <a:ext cx="164592" cy="6858000"/>
+          </a:xfrm>
+          <a:prstGeom prst="rect">
+            <a:avLst/>
+          </a:prstGeom>
+          <a:solidFill>
+            <a:srgbClr val="2563EB"/>
+          </a:solidFill>
+          <a:ln>
+            <a:noFill/>
+          </a:ln>
+          <a:effectLst/>
+        </p:spPr>
+        <p:style>
+          <a:lnRef idx="1">
+            <a:schemeClr val="accent1"/>
+          </a:lnRef>
+          <a:fillRef idx="3">
+            <a:schemeClr val="accent1"/>
+          </a:fillRef>
+          <a:effectRef idx="2">
+            <a:schemeClr val="accent1"/>
+          </a:effectRef>
+          <a:fontRef idx="minor">
+            <a:schemeClr val="lt1"/>
+          </a:fontRef>
+        </p:style>
+        <p:txBody>
+          <a:bodyPr rtlCol="0" anchor="ctr"/>
+          <a:lstStyle/>
+          <a:p>
+            <a:pPr algn="ctr"/>
+          </a:p>
+        </p:txBody>
+      </p:sp>
+      <p:sp>
+        <p:nvSpPr>
+          <p:cNvPr id="3" name="TextBox 2"/>
+          <p:cNvSpPr txBox="1"/>
+          <p:nvPr/>
+        </p:nvSpPr>
+        <p:spPr>
+          <a:xfrm>
+            <a:off x="502920" y="320040"/>
+            <a:ext cx="10972800" cy="1005840"/>
+          </a:xfrm>
+          <a:prstGeom prst="rect">
+            <a:avLst/>
+          </a:prstGeom>
+          <a:noFill/>
+        </p:spPr>
+        <p:txBody>
+          <a:bodyPr wrap="square" anchor="t">
+            <a:spAutoFit/>
+          </a:bodyPr>
+          <a:lstStyle/>
+          <a:p>
+            <a:pPr algn="l">
+              <a:spcAft>
+                <a:spcPts val="200"/>
+              </a:spcAft>
+            </a:pPr>
+            <a:r>
+              <a:rPr sz="1300" b="1">
+                <a:solidFill>
+                  <a:srgbClr val="2563EB"/>
+                </a:solidFill>
+                <a:latin typeface="PingFang TC"/>
+                <a:ea typeface="PingFang TC"/>
+              </a:rPr>
               <a:t>12 · IMPROVEMENTS</a:t>
             </a:r>
           </a:p>
@@ -5105,7 +7123,7 @@
 </p:sld>
 </file>
 
-<file path=ppt/slides/slide14.xml><?xml version="1.0" encoding="utf-8"?>
+<file path=ppt/slides/slide17.xml><?xml version="1.0" encoding="utf-8"?>
 <p:sld xmlns:a="http://schemas.openxmlformats.org/drawingml/2006/main" xmlns:p="http://schemas.openxmlformats.org/presentationml/2006/main" xmlns:r="http://schemas.openxmlformats.org/officeDocument/2006/relationships">
   <p:cSld>
     <p:spTree>
@@ -7531,7 +9549,7 @@
                 <a:latin typeface="PingFang TC"/>
                 <a:ea typeface="PingFang TC"/>
               </a:rPr>
-              <a:t>04 · HIGH-LEVEL ARCHITECTURE</a:t>
+              <a:t>03b · DB SCHEMA</a:t>
             </a:r>
           </a:p>
           <a:p>
@@ -7548,7 +9566,7 @@
                 <a:latin typeface="PingFang TC"/>
                 <a:ea typeface="PingFang TC"/>
               </a:rPr>
-              <a:t>高階架構</a:t>
+              <a:t>資料庫 Schema (DDL) · schema.sql</a:t>
             </a:r>
           </a:p>
         </p:txBody>
@@ -7561,18 +9579,18 @@
         </p:nvSpPr>
         <p:spPr>
           <a:xfrm>
-            <a:off x="548640" y="2103120"/>
-            <a:ext cx="1645920" cy="868680"/>
+            <a:off x="548640" y="1600200"/>
+            <a:ext cx="5532120" cy="3200400"/>
           </a:xfrm>
           <a:prstGeom prst="roundRect">
             <a:avLst/>
           </a:prstGeom>
           <a:solidFill>
-            <a:srgbClr val="64748B"/>
+            <a:srgbClr val="F1F5F9"/>
           </a:solidFill>
           <a:ln>
             <a:solidFill>
-              <a:srgbClr val="64748B"/>
+              <a:srgbClr val="F1F5F9"/>
             </a:solidFill>
           </a:ln>
           <a:effectLst/>
@@ -7592,32 +9610,182 @@
           </a:fontRef>
         </p:style>
         <p:txBody>
-          <a:bodyPr rtlCol="0" anchor="ctr" wrap="square" tIns="25400" bIns="25400"/>
-          <a:lstStyle/>
-          <a:p>
-            <a:pPr algn="ctr"/>
-            <a:r>
-              <a:rPr sz="1300" b="1">
-                <a:solidFill>
-                  <a:srgbClr val="FFFFFF"/>
-                </a:solidFill>
-                <a:latin typeface="PingFang TC"/>
-                <a:ea typeface="PingFang TC"/>
-              </a:rPr>
-              <a:t>Client</a:t>
-            </a:r>
-          </a:p>
-          <a:p>
-            <a:pPr algn="ctr"/>
-            <a:r>
-              <a:rPr sz="1300" b="0">
-                <a:solidFill>
-                  <a:srgbClr val="FFFFFF"/>
-                </a:solidFill>
-                <a:latin typeface="PingFang TC"/>
-                <a:ea typeface="PingFang TC"/>
-              </a:rPr>
-              <a:t>掃描者/瀏覽器</a:t>
+          <a:bodyPr rtlCol="0" anchor="ctr" wrap="square" lIns="152400" rIns="76200" tIns="101600"/>
+          <a:lstStyle/>
+          <a:p>
+            <a:pPr algn="ctr">
+              <a:spcAft>
+                <a:spcPts val="100"/>
+              </a:spcAft>
+            </a:pPr>
+            <a:r>
+              <a:rPr sz="1100">
+                <a:solidFill>
+                  <a:srgbClr val="0F172A"/>
+                </a:solidFill>
+                <a:latin typeface="Menlo"/>
+              </a:rPr>
+              <a:t>CREATE TABLE url_mappings (</a:t>
+            </a:r>
+          </a:p>
+          <a:p>
+            <a:pPr>
+              <a:spcAft>
+                <a:spcPts val="100"/>
+              </a:spcAft>
+            </a:pPr>
+            <a:r>
+              <a:rPr sz="1100">
+                <a:solidFill>
+                  <a:srgbClr val="0F172A"/>
+                </a:solidFill>
+                <a:latin typeface="Menlo"/>
+              </a:rPr>
+              <a:t>  id            INTEGER  PRIMARY KEY,</a:t>
+            </a:r>
+          </a:p>
+          <a:p>
+            <a:pPr>
+              <a:spcAft>
+                <a:spcPts val="100"/>
+              </a:spcAft>
+            </a:pPr>
+            <a:r>
+              <a:rPr sz="1100">
+                <a:solidFill>
+                  <a:srgbClr val="0F172A"/>
+                </a:solidFill>
+                <a:latin typeface="Menlo"/>
+              </a:rPr>
+              <a:t>  token         VARCHAR(8)   NOT NULL,</a:t>
+            </a:r>
+          </a:p>
+          <a:p>
+            <a:pPr>
+              <a:spcAft>
+                <a:spcPts val="100"/>
+              </a:spcAft>
+            </a:pPr>
+            <a:r>
+              <a:rPr sz="1100">
+                <a:solidFill>
+                  <a:srgbClr val="0F172A"/>
+                </a:solidFill>
+                <a:latin typeface="Menlo"/>
+              </a:rPr>
+              <a:t>  original_url  TEXT     NOT NULL,</a:t>
+            </a:r>
+          </a:p>
+          <a:p>
+            <a:pPr>
+              <a:spcAft>
+                <a:spcPts val="100"/>
+              </a:spcAft>
+            </a:pPr>
+            <a:r>
+              <a:rPr sz="1100">
+                <a:solidFill>
+                  <a:srgbClr val="0F172A"/>
+                </a:solidFill>
+                <a:latin typeface="Menlo"/>
+              </a:rPr>
+              <a:t>  created_at    DATETIME NOT NULL,</a:t>
+            </a:r>
+          </a:p>
+          <a:p>
+            <a:pPr>
+              <a:spcAft>
+                <a:spcPts val="100"/>
+              </a:spcAft>
+            </a:pPr>
+            <a:r>
+              <a:rPr sz="1100">
+                <a:solidFill>
+                  <a:srgbClr val="0F172A"/>
+                </a:solidFill>
+                <a:latin typeface="Menlo"/>
+              </a:rPr>
+              <a:t>  updated_at    DATETIME NOT NULL,</a:t>
+            </a:r>
+          </a:p>
+          <a:p>
+            <a:pPr>
+              <a:spcAft>
+                <a:spcPts val="100"/>
+              </a:spcAft>
+            </a:pPr>
+            <a:r>
+              <a:rPr sz="1100">
+                <a:solidFill>
+                  <a:srgbClr val="0F172A"/>
+                </a:solidFill>
+                <a:latin typeface="Menlo"/>
+              </a:rPr>
+              <a:t>  expires_at    DATETIME     NULL,</a:t>
+            </a:r>
+          </a:p>
+          <a:p>
+            <a:pPr>
+              <a:spcAft>
+                <a:spcPts val="100"/>
+              </a:spcAft>
+            </a:pPr>
+            <a:r>
+              <a:rPr sz="1100">
+                <a:solidFill>
+                  <a:srgbClr val="0F172A"/>
+                </a:solidFill>
+                <a:latin typeface="Menlo"/>
+              </a:rPr>
+              <a:t>  is_deleted    BOOLEAN  NOT NULL DEFAULT 0</a:t>
+            </a:r>
+          </a:p>
+          <a:p>
+            <a:pPr>
+              <a:spcAft>
+                <a:spcPts val="100"/>
+              </a:spcAft>
+            </a:pPr>
+            <a:r>
+              <a:rPr sz="1100">
+                <a:solidFill>
+                  <a:srgbClr val="0F172A"/>
+                </a:solidFill>
+                <a:latin typeface="Menlo"/>
+              </a:rPr>
+              <a:t>);</a:t>
+            </a:r>
+          </a:p>
+          <a:p>
+            <a:pPr>
+              <a:spcAft>
+                <a:spcPts val="100"/>
+              </a:spcAft>
+            </a:pPr>
+            <a:r>
+              <a:rPr sz="1100">
+                <a:solidFill>
+                  <a:srgbClr val="0F172A"/>
+                </a:solidFill>
+                <a:latin typeface="Menlo"/>
+              </a:rPr>
+              <a:t>CREATE UNIQUE INDEX ix_url_mappings_token</a:t>
+            </a:r>
+          </a:p>
+          <a:p>
+            <a:pPr>
+              <a:spcAft>
+                <a:spcPts val="100"/>
+              </a:spcAft>
+            </a:pPr>
+            <a:r>
+              <a:rPr sz="1100">
+                <a:solidFill>
+                  <a:srgbClr val="0F172A"/>
+                </a:solidFill>
+                <a:latin typeface="Menlo"/>
+              </a:rPr>
+              <a:t>  ON url_mappings (token);</a:t>
             </a:r>
           </a:p>
         </p:txBody>
@@ -7630,18 +9798,18 @@
         </p:nvSpPr>
         <p:spPr>
           <a:xfrm>
-            <a:off x="2651760" y="2103120"/>
-            <a:ext cx="1645920" cy="868680"/>
+            <a:off x="6309360" y="1600200"/>
+            <a:ext cx="5349240" cy="3200400"/>
           </a:xfrm>
           <a:prstGeom prst="roundRect">
             <a:avLst/>
           </a:prstGeom>
           <a:solidFill>
-            <a:srgbClr val="0EA5E9"/>
+            <a:srgbClr val="F1F5F9"/>
           </a:solidFill>
           <a:ln>
             <a:solidFill>
-              <a:srgbClr val="0EA5E9"/>
+              <a:srgbClr val="F1F5F9"/>
             </a:solidFill>
           </a:ln>
           <a:effectLst/>
@@ -7661,594 +9829,164 @@
           </a:fontRef>
         </p:style>
         <p:txBody>
-          <a:bodyPr rtlCol="0" anchor="ctr" wrap="square" tIns="25400" bIns="25400"/>
-          <a:lstStyle/>
-          <a:p>
-            <a:pPr algn="ctr"/>
-            <a:r>
-              <a:rPr sz="1300" b="1">
-                <a:solidFill>
-                  <a:srgbClr val="FFFFFF"/>
-                </a:solidFill>
-                <a:latin typeface="PingFang TC"/>
-                <a:ea typeface="PingFang TC"/>
-              </a:rPr>
-              <a:t>API Gateway</a:t>
-            </a:r>
-          </a:p>
-        </p:txBody>
-      </p:sp>
-      <p:sp>
-        <p:nvSpPr>
-          <p:cNvPr id="6" name="Rounded Rectangle 5"/>
-          <p:cNvSpPr/>
-          <p:nvPr/>
-        </p:nvSpPr>
-        <p:spPr>
-          <a:xfrm>
-            <a:off x="4754880" y="2103120"/>
-            <a:ext cx="2194560" cy="868680"/>
-          </a:xfrm>
-          <a:prstGeom prst="roundRect">
-            <a:avLst/>
-          </a:prstGeom>
-          <a:solidFill>
-            <a:srgbClr val="2563EB"/>
-          </a:solidFill>
-          <a:ln>
-            <a:solidFill>
-              <a:srgbClr val="2563EB"/>
-            </a:solidFill>
-          </a:ln>
-          <a:effectLst/>
-        </p:spPr>
-        <p:style>
-          <a:lnRef idx="1">
-            <a:schemeClr val="accent1"/>
-          </a:lnRef>
-          <a:fillRef idx="3">
-            <a:schemeClr val="accent1"/>
-          </a:fillRef>
-          <a:effectRef idx="2">
-            <a:schemeClr val="accent1"/>
-          </a:effectRef>
-          <a:fontRef idx="minor">
-            <a:schemeClr val="lt1"/>
-          </a:fontRef>
-        </p:style>
-        <p:txBody>
-          <a:bodyPr rtlCol="0" anchor="ctr" wrap="square" tIns="25400" bIns="25400"/>
-          <a:lstStyle/>
-          <a:p>
-            <a:pPr algn="ctr"/>
-            <a:r>
-              <a:rPr sz="1300" b="1">
-                <a:solidFill>
-                  <a:srgbClr val="FFFFFF"/>
-                </a:solidFill>
-                <a:latin typeface="PingFang TC"/>
-                <a:ea typeface="PingFang TC"/>
-              </a:rPr>
-              <a:t>QR Service</a:t>
-            </a:r>
-          </a:p>
-          <a:p>
-            <a:pPr algn="ctr"/>
-            <a:r>
-              <a:rPr sz="1300" b="0">
-                <a:solidFill>
-                  <a:srgbClr val="FFFFFF"/>
-                </a:solidFill>
-                <a:latin typeface="PingFang TC"/>
-                <a:ea typeface="PingFang TC"/>
-              </a:rPr>
-              <a:t>(stateless, 水平擴展)</a:t>
-            </a:r>
-          </a:p>
-        </p:txBody>
-      </p:sp>
-      <p:cxnSp>
-        <p:nvCxnSpPr>
-          <p:cNvPr id="7" name="Connector 6"/>
-          <p:cNvCxnSpPr/>
-          <p:nvPr/>
-        </p:nvCxnSpPr>
-        <p:spPr>
-          <a:xfrm>
-            <a:off x="2194560" y="2532888"/>
-            <a:ext cx="457200" cy="0"/>
-          </a:xfrm>
-          <a:prstGeom prst="line">
-            <a:avLst/>
-          </a:prstGeom>
-          <a:ln w="22225">
-            <a:solidFill>
-              <a:srgbClr val="64748B"/>
-            </a:solidFill>
-            <a:tailEnd type="triangle" w="med" len="med"/>
-          </a:ln>
-        </p:spPr>
-        <p:style>
-          <a:lnRef idx="2">
-            <a:schemeClr val="accent1"/>
-          </a:lnRef>
-          <a:fillRef idx="0">
-            <a:schemeClr val="accent1"/>
-          </a:fillRef>
-          <a:effectRef idx="1">
-            <a:schemeClr val="accent1"/>
-          </a:effectRef>
-          <a:fontRef idx="minor">
-            <a:schemeClr val="tx1"/>
-          </a:fontRef>
-        </p:style>
-      </p:cxnSp>
-      <p:cxnSp>
-        <p:nvCxnSpPr>
-          <p:cNvPr id="8" name="Connector 7"/>
-          <p:cNvCxnSpPr/>
-          <p:nvPr/>
-        </p:nvCxnSpPr>
-        <p:spPr>
-          <a:xfrm>
-            <a:off x="4297680" y="2532888"/>
-            <a:ext cx="457200" cy="0"/>
-          </a:xfrm>
-          <a:prstGeom prst="line">
-            <a:avLst/>
-          </a:prstGeom>
-          <a:ln w="22225">
-            <a:solidFill>
-              <a:srgbClr val="64748B"/>
-            </a:solidFill>
-            <a:tailEnd type="triangle" w="med" len="med"/>
-          </a:ln>
-        </p:spPr>
-        <p:style>
-          <a:lnRef idx="2">
-            <a:schemeClr val="accent1"/>
-          </a:lnRef>
-          <a:fillRef idx="0">
-            <a:schemeClr val="accent1"/>
-          </a:fillRef>
-          <a:effectRef idx="1">
-            <a:schemeClr val="accent1"/>
-          </a:effectRef>
-          <a:fontRef idx="minor">
-            <a:schemeClr val="tx1"/>
-          </a:fontRef>
-        </p:style>
-      </p:cxnSp>
-      <p:sp>
-        <p:nvSpPr>
-          <p:cNvPr id="9" name="Rounded Rectangle 8"/>
-          <p:cNvSpPr/>
-          <p:nvPr/>
-        </p:nvSpPr>
-        <p:spPr>
-          <a:xfrm>
-            <a:off x="7863840" y="1371600"/>
-            <a:ext cx="3749039" cy="731520"/>
-          </a:xfrm>
-          <a:prstGeom prst="roundRect">
-            <a:avLst/>
-          </a:prstGeom>
-          <a:solidFill>
-            <a:srgbClr val="DC2626"/>
-          </a:solidFill>
-          <a:ln>
-            <a:solidFill>
-              <a:srgbClr val="DC2626"/>
-            </a:solidFill>
-          </a:ln>
-          <a:effectLst/>
-        </p:spPr>
-        <p:style>
-          <a:lnRef idx="1">
-            <a:schemeClr val="accent1"/>
-          </a:lnRef>
-          <a:fillRef idx="3">
-            <a:schemeClr val="accent1"/>
-          </a:fillRef>
-          <a:effectRef idx="2">
-            <a:schemeClr val="accent1"/>
-          </a:effectRef>
-          <a:fontRef idx="minor">
-            <a:schemeClr val="lt1"/>
-          </a:fontRef>
-        </p:style>
-        <p:txBody>
-          <a:bodyPr rtlCol="0" anchor="ctr" wrap="square" tIns="25400" bIns="25400"/>
-          <a:lstStyle/>
-          <a:p>
-            <a:pPr algn="ctr"/>
-            <a:r>
-              <a:rPr sz="1200" b="1">
-                <a:solidFill>
-                  <a:srgbClr val="FFFFFF"/>
-                </a:solidFill>
-                <a:latin typeface="PingFang TC"/>
-                <a:ea typeface="PingFang TC"/>
-              </a:rPr>
-              <a:t>Redis  快取</a:t>
-            </a:r>
-          </a:p>
-          <a:p>
-            <a:pPr algn="ctr"/>
-            <a:r>
-              <a:rPr sz="1200" b="0">
-                <a:solidFill>
-                  <a:srgbClr val="FFFFFF"/>
-                </a:solidFill>
-                <a:latin typeface="PingFang TC"/>
-                <a:ea typeface="PingFang TC"/>
-              </a:rPr>
-              <a:t>(redirect 熱路徑, TTL)</a:t>
-            </a:r>
-          </a:p>
-        </p:txBody>
-      </p:sp>
-      <p:sp>
-        <p:nvSpPr>
-          <p:cNvPr id="10" name="Rounded Rectangle 9"/>
-          <p:cNvSpPr/>
-          <p:nvPr/>
-        </p:nvSpPr>
-        <p:spPr>
-          <a:xfrm>
-            <a:off x="7863840" y="2286000"/>
-            <a:ext cx="3749039" cy="822960"/>
-          </a:xfrm>
-          <a:prstGeom prst="roundRect">
-            <a:avLst/>
-          </a:prstGeom>
-          <a:solidFill>
-            <a:srgbClr val="059669"/>
-          </a:solidFill>
-          <a:ln>
-            <a:solidFill>
-              <a:srgbClr val="059669"/>
-            </a:solidFill>
-          </a:ln>
-          <a:effectLst/>
-        </p:spPr>
-        <p:style>
-          <a:lnRef idx="1">
-            <a:schemeClr val="accent1"/>
-          </a:lnRef>
-          <a:fillRef idx="3">
-            <a:schemeClr val="accent1"/>
-          </a:fillRef>
-          <a:effectRef idx="2">
-            <a:schemeClr val="accent1"/>
-          </a:effectRef>
-          <a:fontRef idx="minor">
-            <a:schemeClr val="lt1"/>
-          </a:fontRef>
-        </p:style>
-        <p:txBody>
-          <a:bodyPr rtlCol="0" anchor="ctr" wrap="square" tIns="25400" bIns="25400"/>
-          <a:lstStyle/>
-          <a:p>
-            <a:pPr algn="ctr"/>
-            <a:r>
-              <a:rPr sz="1200" b="1">
-                <a:solidFill>
-                  <a:srgbClr val="FFFFFF"/>
-                </a:solidFill>
-                <a:latin typeface="PingFang TC"/>
-                <a:ea typeface="PingFang TC"/>
-              </a:rPr>
-              <a:t>Primary DB → Read Replicas</a:t>
-            </a:r>
-          </a:p>
-          <a:p>
-            <a:pPr algn="ctr"/>
-            <a:r>
-              <a:rPr sz="1200" b="0">
-                <a:solidFill>
-                  <a:srgbClr val="FFFFFF"/>
-                </a:solidFill>
-                <a:latin typeface="PingFang TC"/>
-                <a:ea typeface="PingFang TC"/>
-              </a:rPr>
-              <a:t>(寫走主 · 讀走副 · failover)</a:t>
-            </a:r>
-          </a:p>
-        </p:txBody>
-      </p:sp>
-      <p:sp>
-        <p:nvSpPr>
-          <p:cNvPr id="11" name="Rounded Rectangle 10"/>
-          <p:cNvSpPr/>
-          <p:nvPr/>
-        </p:nvSpPr>
-        <p:spPr>
-          <a:xfrm>
-            <a:off x="7863840" y="3246120"/>
-            <a:ext cx="3749039" cy="731520"/>
-          </a:xfrm>
-          <a:prstGeom prst="roundRect">
-            <a:avLst/>
-          </a:prstGeom>
-          <a:solidFill>
-            <a:srgbClr val="7C3AED"/>
-          </a:solidFill>
-          <a:ln>
-            <a:solidFill>
-              <a:srgbClr val="7C3AED"/>
-            </a:solidFill>
-          </a:ln>
-          <a:effectLst/>
-        </p:spPr>
-        <p:style>
-          <a:lnRef idx="1">
-            <a:schemeClr val="accent1"/>
-          </a:lnRef>
-          <a:fillRef idx="3">
-            <a:schemeClr val="accent1"/>
-          </a:fillRef>
-          <a:effectRef idx="2">
-            <a:schemeClr val="accent1"/>
-          </a:effectRef>
-          <a:fontRef idx="minor">
-            <a:schemeClr val="lt1"/>
-          </a:fontRef>
-        </p:style>
-        <p:txBody>
-          <a:bodyPr rtlCol="0" anchor="ctr" wrap="square" tIns="25400" bIns="25400"/>
-          <a:lstStyle/>
-          <a:p>
-            <a:pPr algn="ctr"/>
-            <a:r>
-              <a:rPr sz="1200" b="1">
-                <a:solidFill>
-                  <a:srgbClr val="FFFFFF"/>
-                </a:solidFill>
-                <a:latin typeface="PingFang TC"/>
-                <a:ea typeface="PingFang TC"/>
-              </a:rPr>
-              <a:t>Object Store + CDN</a:t>
-            </a:r>
-          </a:p>
-          <a:p>
-            <a:pPr algn="ctr"/>
-            <a:r>
-              <a:rPr sz="1200" b="0">
-                <a:solidFill>
-                  <a:srgbClr val="FFFFFF"/>
-                </a:solidFill>
-                <a:latin typeface="PingFang TC"/>
-                <a:ea typeface="PingFang TC"/>
-              </a:rPr>
-              <a:t>(QR 圖片靜態內容)</a:t>
-            </a:r>
-          </a:p>
-        </p:txBody>
-      </p:sp>
-      <p:sp>
-        <p:nvSpPr>
-          <p:cNvPr id="12" name="Rounded Rectangle 11"/>
-          <p:cNvSpPr/>
-          <p:nvPr/>
-        </p:nvSpPr>
-        <p:spPr>
-          <a:xfrm>
-            <a:off x="7863840" y="4069080"/>
-            <a:ext cx="3749039" cy="731520"/>
-          </a:xfrm>
-          <a:prstGeom prst="roundRect">
-            <a:avLst/>
-          </a:prstGeom>
-          <a:solidFill>
-            <a:srgbClr val="D97706"/>
-          </a:solidFill>
-          <a:ln>
-            <a:solidFill>
-              <a:srgbClr val="D97706"/>
-            </a:solidFill>
-          </a:ln>
-          <a:effectLst/>
-        </p:spPr>
-        <p:style>
-          <a:lnRef idx="1">
-            <a:schemeClr val="accent1"/>
-          </a:lnRef>
-          <a:fillRef idx="3">
-            <a:schemeClr val="accent1"/>
-          </a:fillRef>
-          <a:effectRef idx="2">
-            <a:schemeClr val="accent1"/>
-          </a:effectRef>
-          <a:fontRef idx="minor">
-            <a:schemeClr val="lt1"/>
-          </a:fontRef>
-        </p:style>
-        <p:txBody>
-          <a:bodyPr rtlCol="0" anchor="ctr" wrap="square" tIns="25400" bIns="25400"/>
-          <a:lstStyle/>
-          <a:p>
-            <a:pPr algn="ctr"/>
-            <a:r>
-              <a:rPr sz="1200" b="1">
-                <a:solidFill>
-                  <a:srgbClr val="FFFFFF"/>
-                </a:solidFill>
-                <a:latin typeface="PingFang TC"/>
-                <a:ea typeface="PingFang TC"/>
-              </a:rPr>
-              <a:t>佇列 → 分析庫</a:t>
-            </a:r>
-          </a:p>
-          <a:p>
-            <a:pPr algn="ctr"/>
-            <a:r>
-              <a:rPr sz="1200" b="0">
-                <a:solidFill>
-                  <a:srgbClr val="FFFFFF"/>
-                </a:solidFill>
-                <a:latin typeface="PingFang TC"/>
-                <a:ea typeface="PingFang TC"/>
-              </a:rPr>
-              <a:t>(非同步 scan · 預聚合)</a:t>
-            </a:r>
-          </a:p>
-        </p:txBody>
-      </p:sp>
-      <p:cxnSp>
-        <p:nvCxnSpPr>
-          <p:cNvPr id="13" name="Connector 12"/>
-          <p:cNvCxnSpPr/>
-          <p:nvPr/>
-        </p:nvCxnSpPr>
-        <p:spPr>
-          <a:xfrm flipV="1">
-            <a:off x="6949440" y="1737360"/>
-            <a:ext cx="914400" cy="795528"/>
-          </a:xfrm>
-          <a:prstGeom prst="line">
-            <a:avLst/>
-          </a:prstGeom>
-          <a:ln w="22225">
-            <a:solidFill>
-              <a:srgbClr val="64748B"/>
-            </a:solidFill>
-            <a:tailEnd type="triangle" w="med" len="med"/>
-          </a:ln>
-        </p:spPr>
-        <p:style>
-          <a:lnRef idx="2">
-            <a:schemeClr val="accent1"/>
-          </a:lnRef>
-          <a:fillRef idx="0">
-            <a:schemeClr val="accent1"/>
-          </a:fillRef>
-          <a:effectRef idx="1">
-            <a:schemeClr val="accent1"/>
-          </a:effectRef>
-          <a:fontRef idx="minor">
-            <a:schemeClr val="tx1"/>
-          </a:fontRef>
-        </p:style>
-      </p:cxnSp>
-      <p:cxnSp>
-        <p:nvCxnSpPr>
-          <p:cNvPr id="14" name="Connector 13"/>
-          <p:cNvCxnSpPr/>
-          <p:nvPr/>
-        </p:nvCxnSpPr>
-        <p:spPr>
-          <a:xfrm>
-            <a:off x="6949440" y="2532888"/>
-            <a:ext cx="914400" cy="164592"/>
-          </a:xfrm>
-          <a:prstGeom prst="line">
-            <a:avLst/>
-          </a:prstGeom>
-          <a:ln w="22225">
-            <a:solidFill>
-              <a:srgbClr val="64748B"/>
-            </a:solidFill>
-            <a:tailEnd type="triangle" w="med" len="med"/>
-          </a:ln>
-        </p:spPr>
-        <p:style>
-          <a:lnRef idx="2">
-            <a:schemeClr val="accent1"/>
-          </a:lnRef>
-          <a:fillRef idx="0">
-            <a:schemeClr val="accent1"/>
-          </a:fillRef>
-          <a:effectRef idx="1">
-            <a:schemeClr val="accent1"/>
-          </a:effectRef>
-          <a:fontRef idx="minor">
-            <a:schemeClr val="tx1"/>
-          </a:fontRef>
-        </p:style>
-      </p:cxnSp>
-      <p:cxnSp>
-        <p:nvCxnSpPr>
-          <p:cNvPr id="15" name="Connector 14"/>
-          <p:cNvCxnSpPr/>
-          <p:nvPr/>
-        </p:nvCxnSpPr>
-        <p:spPr>
-          <a:xfrm>
-            <a:off x="6949440" y="2532888"/>
-            <a:ext cx="914400" cy="1078992"/>
-          </a:xfrm>
-          <a:prstGeom prst="line">
-            <a:avLst/>
-          </a:prstGeom>
-          <a:ln w="22225">
-            <a:solidFill>
-              <a:srgbClr val="64748B"/>
-            </a:solidFill>
-            <a:tailEnd type="triangle" w="med" len="med"/>
-          </a:ln>
-        </p:spPr>
-        <p:style>
-          <a:lnRef idx="2">
-            <a:schemeClr val="accent1"/>
-          </a:lnRef>
-          <a:fillRef idx="0">
-            <a:schemeClr val="accent1"/>
-          </a:fillRef>
-          <a:effectRef idx="1">
-            <a:schemeClr val="accent1"/>
-          </a:effectRef>
-          <a:fontRef idx="minor">
-            <a:schemeClr val="tx1"/>
-          </a:fontRef>
-        </p:style>
-      </p:cxnSp>
-      <p:cxnSp>
-        <p:nvCxnSpPr>
-          <p:cNvPr id="16" name="Connector 15"/>
-          <p:cNvCxnSpPr/>
-          <p:nvPr/>
-        </p:nvCxnSpPr>
-        <p:spPr>
-          <a:xfrm>
-            <a:off x="6949440" y="2532888"/>
-            <a:ext cx="914400" cy="1901952"/>
-          </a:xfrm>
-          <a:prstGeom prst="line">
-            <a:avLst/>
-          </a:prstGeom>
-          <a:ln w="22225">
-            <a:solidFill>
-              <a:srgbClr val="64748B"/>
-            </a:solidFill>
-            <a:tailEnd type="triangle" w="med" len="med"/>
-          </a:ln>
-        </p:spPr>
-        <p:style>
-          <a:lnRef idx="2">
-            <a:schemeClr val="accent1"/>
-          </a:lnRef>
-          <a:fillRef idx="0">
-            <a:schemeClr val="accent1"/>
-          </a:fillRef>
-          <a:effectRef idx="1">
-            <a:schemeClr val="accent1"/>
-          </a:effectRef>
-          <a:fontRef idx="minor">
-            <a:schemeClr val="tx1"/>
-          </a:fontRef>
-        </p:style>
-      </p:cxnSp>
-      <p:sp>
-        <p:nvSpPr>
-          <p:cNvPr id="17" name="TextBox 16"/>
+          <a:bodyPr rtlCol="0" anchor="ctr" wrap="square" lIns="152400" rIns="76200" tIns="101600"/>
+          <a:lstStyle/>
+          <a:p>
+            <a:pPr algn="ctr">
+              <a:spcAft>
+                <a:spcPts val="100"/>
+              </a:spcAft>
+            </a:pPr>
+            <a:r>
+              <a:rPr sz="1100">
+                <a:solidFill>
+                  <a:srgbClr val="0F172A"/>
+                </a:solidFill>
+                <a:latin typeface="Menlo"/>
+              </a:rPr>
+              <a:t>CREATE TABLE scan_events (</a:t>
+            </a:r>
+          </a:p>
+          <a:p>
+            <a:pPr>
+              <a:spcAft>
+                <a:spcPts val="100"/>
+              </a:spcAft>
+            </a:pPr>
+            <a:r>
+              <a:rPr sz="1100">
+                <a:solidFill>
+                  <a:srgbClr val="0F172A"/>
+                </a:solidFill>
+                <a:latin typeface="Menlo"/>
+              </a:rPr>
+              <a:t>  id          INTEGER  PRIMARY KEY,</a:t>
+            </a:r>
+          </a:p>
+          <a:p>
+            <a:pPr>
+              <a:spcAft>
+                <a:spcPts val="100"/>
+              </a:spcAft>
+            </a:pPr>
+            <a:r>
+              <a:rPr sz="1100">
+                <a:solidFill>
+                  <a:srgbClr val="0F172A"/>
+                </a:solidFill>
+                <a:latin typeface="Menlo"/>
+              </a:rPr>
+              <a:t>  token       VARCHAR(8)   NOT NULL,</a:t>
+            </a:r>
+          </a:p>
+          <a:p>
+            <a:pPr>
+              <a:spcAft>
+                <a:spcPts val="100"/>
+              </a:spcAft>
+            </a:pPr>
+            <a:r>
+              <a:rPr sz="1100">
+                <a:solidFill>
+                  <a:srgbClr val="0F172A"/>
+                </a:solidFill>
+                <a:latin typeface="Menlo"/>
+              </a:rPr>
+              <a:t>  scanned_at  DATETIME NOT NULL,</a:t>
+            </a:r>
+          </a:p>
+          <a:p>
+            <a:pPr>
+              <a:spcAft>
+                <a:spcPts val="100"/>
+              </a:spcAft>
+            </a:pPr>
+            <a:r>
+              <a:rPr sz="1100">
+                <a:solidFill>
+                  <a:srgbClr val="0F172A"/>
+                </a:solidFill>
+                <a:latin typeface="Menlo"/>
+              </a:rPr>
+              <a:t>  user_agent  VARCHAR(500) NULL,</a:t>
+            </a:r>
+          </a:p>
+          <a:p>
+            <a:pPr>
+              <a:spcAft>
+                <a:spcPts val="100"/>
+              </a:spcAft>
+            </a:pPr>
+            <a:r>
+              <a:rPr sz="1100">
+                <a:solidFill>
+                  <a:srgbClr val="0F172A"/>
+                </a:solidFill>
+                <a:latin typeface="Menlo"/>
+              </a:rPr>
+              <a:t>  ip_address  VARCHAR(45)  NULL</a:t>
+            </a:r>
+          </a:p>
+          <a:p>
+            <a:pPr>
+              <a:spcAft>
+                <a:spcPts val="100"/>
+              </a:spcAft>
+            </a:pPr>
+            <a:r>
+              <a:rPr sz="1100">
+                <a:solidFill>
+                  <a:srgbClr val="0F172A"/>
+                </a:solidFill>
+                <a:latin typeface="Menlo"/>
+              </a:rPr>
+              <a:t>);</a:t>
+            </a:r>
+          </a:p>
+          <a:p>
+            <a:pPr>
+              <a:spcAft>
+                <a:spcPts val="100"/>
+              </a:spcAft>
+            </a:pPr>
+            <a:r>
+              <a:rPr sz="1100">
+                <a:solidFill>
+                  <a:srgbClr val="0F172A"/>
+                </a:solidFill>
+                <a:latin typeface="Menlo"/>
+              </a:rPr>
+              <a:t>CREATE INDEX idx_token_scanned</a:t>
+            </a:r>
+          </a:p>
+          <a:p>
+            <a:pPr>
+              <a:spcAft>
+                <a:spcPts val="100"/>
+              </a:spcAft>
+            </a:pPr>
+            <a:r>
+              <a:rPr sz="1100">
+                <a:solidFill>
+                  <a:srgbClr val="0F172A"/>
+                </a:solidFill>
+                <a:latin typeface="Menlo"/>
+              </a:rPr>
+              <a:t>  ON scan_events (token, scanned_at);</a:t>
+            </a:r>
+          </a:p>
+        </p:txBody>
+      </p:sp>
+      <p:sp>
+        <p:nvSpPr>
+          <p:cNvPr id="6" name="TextBox 5"/>
           <p:cNvSpPr txBox="1"/>
           <p:nvPr/>
         </p:nvSpPr>
         <p:spPr>
           <a:xfrm>
-            <a:off x="548640" y="5486400"/>
-            <a:ext cx="10972800" cy="914400"/>
+            <a:off x="548640" y="4983480"/>
+            <a:ext cx="11247120" cy="1554480"/>
           </a:xfrm>
           <a:prstGeom prst="rect">
             <a:avLst/>
@@ -8256,25 +9994,59 @@
           <a:noFill/>
         </p:spPr>
         <p:txBody>
-          <a:bodyPr wrap="square" anchor="t">
+          <a:bodyPr wrap="square">
             <a:spAutoFit/>
           </a:bodyPr>
           <a:lstStyle/>
           <a:p>
-            <a:pPr algn="l">
-              <a:spcAft>
-                <a:spcPts val="400"/>
+            <a:pPr>
+              <a:spcAft>
+                <a:spcPts val="600"/>
               </a:spcAft>
             </a:pPr>
             <a:r>
               <a:rPr sz="1300" b="0">
                 <a:solidFill>
-                  <a:srgbClr val="64748B"/>
-                </a:solidFill>
-                <a:latin typeface="PingFang TC"/>
-                <a:ea typeface="PingFang TC"/>
-              </a:rPr>
-              <a:t>讀多寫少：redirect 先打 Redis，miss 才到 DB（read replica）；QR 圖片走 CDN；scan 非同步進分析庫。</a:t>
+                  <a:srgbClr val="0F172A"/>
+                </a:solidFill>
+                <a:latin typeface="PingFang TC"/>
+                <a:ea typeface="PingFang TC"/>
+              </a:rPr>
+              <a:t>•  token：8 碼 Base62；UNIQUE 索引兼碰撞安全網（第 5 題）+ redirect O(log n) 查找（第 2 題）</a:t>
+            </a:r>
+          </a:p>
+          <a:p>
+            <a:pPr>
+              <a:spcAft>
+                <a:spcPts val="600"/>
+              </a:spcAft>
+            </a:pPr>
+            <a:r>
+              <a:rPr sz="1300" b="0">
+                <a:solidFill>
+                  <a:srgbClr val="0F172A"/>
+                </a:solidFill>
+                <a:latin typeface="PingFang TC"/>
+                <a:ea typeface="PingFang TC"/>
+              </a:rPr>
+              <a:t>•  is_deleted 軟刪除（第 12 題）· expires_at 惰性過期（第 13 題）· 時間一律存 UTC</a:t>
+            </a:r>
+          </a:p>
+          <a:p>
+            <a:pPr>
+              <a:spcAft>
+                <a:spcPts val="600"/>
+              </a:spcAft>
+            </a:pPr>
+            <a:r>
+              <a:rPr sz="1300" b="0">
+                <a:solidFill>
+                  <a:srgbClr val="0F172A"/>
+                </a:solidFill>
+                <a:latin typeface="PingFang TC"/>
+                <a:ea typeface="PingFang TC"/>
+              </a:rPr>
+              <a:t>•  scan_events：分析明細 + 複合索引；正式版改獨立分析庫 + 預聚合（第 14 題）</a:t>
             </a:r>
           </a:p>
         </p:txBody>
@@ -8376,7 +10148,7 @@
                 <a:latin typeface="PingFang TC"/>
                 <a:ea typeface="PingFang TC"/>
               </a:rPr>
-              <a:t>05 · CREATE FLOW</a:t>
+              <a:t>04 · HIGH-LEVEL ARCHITECTURE</a:t>
             </a:r>
           </a:p>
           <a:p>
@@ -8393,7 +10165,7 @@
                 <a:latin typeface="PingFang TC"/>
                 <a:ea typeface="PingFang TC"/>
               </a:rPr>
-              <a:t>建立流程</a:t>
+              <a:t>高階架構</a:t>
             </a:r>
           </a:p>
         </p:txBody>
@@ -8406,8 +10178,133 @@
         </p:nvSpPr>
         <p:spPr>
           <a:xfrm>
-            <a:off x="502920" y="2468880"/>
-            <a:ext cx="1691640" cy="1371600"/>
+            <a:off x="548640" y="2103120"/>
+            <a:ext cx="1645920" cy="868680"/>
+          </a:xfrm>
+          <a:prstGeom prst="roundRect">
+            <a:avLst/>
+          </a:prstGeom>
+          <a:solidFill>
+            <a:srgbClr val="64748B"/>
+          </a:solidFill>
+          <a:ln>
+            <a:solidFill>
+              <a:srgbClr val="64748B"/>
+            </a:solidFill>
+          </a:ln>
+          <a:effectLst/>
+        </p:spPr>
+        <p:style>
+          <a:lnRef idx="1">
+            <a:schemeClr val="accent1"/>
+          </a:lnRef>
+          <a:fillRef idx="3">
+            <a:schemeClr val="accent1"/>
+          </a:fillRef>
+          <a:effectRef idx="2">
+            <a:schemeClr val="accent1"/>
+          </a:effectRef>
+          <a:fontRef idx="minor">
+            <a:schemeClr val="lt1"/>
+          </a:fontRef>
+        </p:style>
+        <p:txBody>
+          <a:bodyPr rtlCol="0" anchor="ctr" wrap="square" tIns="25400" bIns="25400"/>
+          <a:lstStyle/>
+          <a:p>
+            <a:pPr algn="ctr"/>
+            <a:r>
+              <a:rPr sz="1300" b="1">
+                <a:solidFill>
+                  <a:srgbClr val="FFFFFF"/>
+                </a:solidFill>
+                <a:latin typeface="PingFang TC"/>
+                <a:ea typeface="PingFang TC"/>
+              </a:rPr>
+              <a:t>Client</a:t>
+            </a:r>
+          </a:p>
+          <a:p>
+            <a:pPr algn="ctr"/>
+            <a:r>
+              <a:rPr sz="1300" b="0">
+                <a:solidFill>
+                  <a:srgbClr val="FFFFFF"/>
+                </a:solidFill>
+                <a:latin typeface="PingFang TC"/>
+                <a:ea typeface="PingFang TC"/>
+              </a:rPr>
+              <a:t>掃描者/瀏覽器</a:t>
+            </a:r>
+          </a:p>
+        </p:txBody>
+      </p:sp>
+      <p:sp>
+        <p:nvSpPr>
+          <p:cNvPr id="5" name="Rounded Rectangle 4"/>
+          <p:cNvSpPr/>
+          <p:nvPr/>
+        </p:nvSpPr>
+        <p:spPr>
+          <a:xfrm>
+            <a:off x="2651760" y="2103120"/>
+            <a:ext cx="1645920" cy="868680"/>
+          </a:xfrm>
+          <a:prstGeom prst="roundRect">
+            <a:avLst/>
+          </a:prstGeom>
+          <a:solidFill>
+            <a:srgbClr val="0EA5E9"/>
+          </a:solidFill>
+          <a:ln>
+            <a:solidFill>
+              <a:srgbClr val="0EA5E9"/>
+            </a:solidFill>
+          </a:ln>
+          <a:effectLst/>
+        </p:spPr>
+        <p:style>
+          <a:lnRef idx="1">
+            <a:schemeClr val="accent1"/>
+          </a:lnRef>
+          <a:fillRef idx="3">
+            <a:schemeClr val="accent1"/>
+          </a:fillRef>
+          <a:effectRef idx="2">
+            <a:schemeClr val="accent1"/>
+          </a:effectRef>
+          <a:fontRef idx="minor">
+            <a:schemeClr val="lt1"/>
+          </a:fontRef>
+        </p:style>
+        <p:txBody>
+          <a:bodyPr rtlCol="0" anchor="ctr" wrap="square" tIns="25400" bIns="25400"/>
+          <a:lstStyle/>
+          <a:p>
+            <a:pPr algn="ctr"/>
+            <a:r>
+              <a:rPr sz="1300" b="1">
+                <a:solidFill>
+                  <a:srgbClr val="FFFFFF"/>
+                </a:solidFill>
+                <a:latin typeface="PingFang TC"/>
+                <a:ea typeface="PingFang TC"/>
+              </a:rPr>
+              <a:t>API Gateway</a:t>
+            </a:r>
+          </a:p>
+        </p:txBody>
+      </p:sp>
+      <p:sp>
+        <p:nvSpPr>
+          <p:cNvPr id="6" name="Rounded Rectangle 5"/>
+          <p:cNvSpPr/>
+          <p:nvPr/>
+        </p:nvSpPr>
+        <p:spPr>
+          <a:xfrm>
+            <a:off x="4754880" y="2103120"/>
+            <a:ext cx="2194560" cy="868680"/>
           </a:xfrm>
           <a:prstGeom prst="roundRect">
             <a:avLst/>
@@ -8449,7 +10346,7 @@
                 <a:latin typeface="PingFang TC"/>
                 <a:ea typeface="PingFang TC"/>
               </a:rPr>
-              <a:t>① 驗證</a:t>
+              <a:t>QR Service</a:t>
             </a:r>
           </a:p>
           <a:p>
@@ -8462,34 +10359,21 @@
                 <a:latin typeface="PingFang TC"/>
                 <a:ea typeface="PingFang TC"/>
               </a:rPr>
-              <a:t>保守正規化</a:t>
-            </a:r>
-          </a:p>
-          <a:p>
-            <a:pPr algn="ctr"/>
-            <a:r>
-              <a:rPr sz="1300" b="0">
-                <a:solidFill>
-                  <a:srgbClr val="FFFFFF"/>
-                </a:solidFill>
-                <a:latin typeface="PingFang TC"/>
-                <a:ea typeface="PingFang TC"/>
-              </a:rPr>
-              <a:t>+ 惡意/SSRF 檢查</a:t>
+              <a:t>(stateless, 水平擴展)</a:t>
             </a:r>
           </a:p>
         </p:txBody>
       </p:sp>
       <p:cxnSp>
         <p:nvCxnSpPr>
-          <p:cNvPr id="5" name="Connector 4"/>
+          <p:cNvPr id="7" name="Connector 6"/>
           <p:cNvCxnSpPr/>
           <p:nvPr/>
         </p:nvCxnSpPr>
         <p:spPr>
           <a:xfrm>
-            <a:off x="2194560" y="3154680"/>
-            <a:ext cx="164592" cy="0"/>
+            <a:off x="2194560" y="2532888"/>
+            <a:ext cx="457200" cy="0"/>
           </a:xfrm>
           <a:prstGeom prst="line">
             <a:avLst/>
@@ -8516,98 +10400,16 @@
           </a:fontRef>
         </p:style>
       </p:cxnSp>
-      <p:sp>
-        <p:nvSpPr>
-          <p:cNvPr id="6" name="Rounded Rectangle 5"/>
-          <p:cNvSpPr/>
-          <p:nvPr/>
-        </p:nvSpPr>
-        <p:spPr>
-          <a:xfrm>
-            <a:off x="2359152" y="2468880"/>
-            <a:ext cx="1691640" cy="1371600"/>
-          </a:xfrm>
-          <a:prstGeom prst="roundRect">
-            <a:avLst/>
-          </a:prstGeom>
-          <a:solidFill>
-            <a:srgbClr val="0EA5E9"/>
-          </a:solidFill>
-          <a:ln>
-            <a:solidFill>
-              <a:srgbClr val="0EA5E9"/>
-            </a:solidFill>
-          </a:ln>
-          <a:effectLst/>
-        </p:spPr>
-        <p:style>
-          <a:lnRef idx="1">
-            <a:schemeClr val="accent1"/>
-          </a:lnRef>
-          <a:fillRef idx="3">
-            <a:schemeClr val="accent1"/>
-          </a:fillRef>
-          <a:effectRef idx="2">
-            <a:schemeClr val="accent1"/>
-          </a:effectRef>
-          <a:fontRef idx="minor">
-            <a:schemeClr val="lt1"/>
-          </a:fontRef>
-        </p:style>
-        <p:txBody>
-          <a:bodyPr rtlCol="0" anchor="ctr" wrap="square" tIns="25400" bIns="25400"/>
-          <a:lstStyle/>
-          <a:p>
-            <a:pPr algn="ctr"/>
-            <a:r>
-              <a:rPr sz="1300" b="1">
-                <a:solidFill>
-                  <a:srgbClr val="FFFFFF"/>
-                </a:solidFill>
-                <a:latin typeface="PingFang TC"/>
-                <a:ea typeface="PingFang TC"/>
-              </a:rPr>
-              <a:t>② 生 token</a:t>
-            </a:r>
-          </a:p>
-          <a:p>
-            <a:pPr algn="ctr"/>
-            <a:r>
-              <a:rPr sz="1300" b="0">
-                <a:solidFill>
-                  <a:srgbClr val="FFFFFF"/>
-                </a:solidFill>
-                <a:latin typeface="PingFang TC"/>
-                <a:ea typeface="PingFang TC"/>
-              </a:rPr>
-              <a:t>SHA-256+nonce</a:t>
-            </a:r>
-          </a:p>
-          <a:p>
-            <a:pPr algn="ctr"/>
-            <a:r>
-              <a:rPr sz="1300" b="0">
-                <a:solidFill>
-                  <a:srgbClr val="FFFFFF"/>
-                </a:solidFill>
-                <a:latin typeface="PingFang TC"/>
-                <a:ea typeface="PingFang TC"/>
-              </a:rPr>
-              <a:t>→Base62→8 碼</a:t>
-            </a:r>
-          </a:p>
-        </p:txBody>
-      </p:sp>
       <p:cxnSp>
         <p:nvCxnSpPr>
-          <p:cNvPr id="7" name="Connector 6"/>
+          <p:cNvPr id="8" name="Connector 7"/>
           <p:cNvCxnSpPr/>
           <p:nvPr/>
         </p:nvCxnSpPr>
         <p:spPr>
           <a:xfrm>
-            <a:off x="4050792" y="3154680"/>
-            <a:ext cx="164592" cy="0"/>
+            <a:off x="4297680" y="2532888"/>
+            <a:ext cx="457200" cy="0"/>
           </a:xfrm>
           <a:prstGeom prst="line">
             <a:avLst/>
@@ -8636,14 +10438,83 @@
       </p:cxnSp>
       <p:sp>
         <p:nvSpPr>
-          <p:cNvPr id="8" name="Rounded Rectangle 7"/>
+          <p:cNvPr id="9" name="Rounded Rectangle 8"/>
           <p:cNvSpPr/>
           <p:nvPr/>
         </p:nvSpPr>
         <p:spPr>
           <a:xfrm>
-            <a:off x="4215384" y="2468880"/>
-            <a:ext cx="1691640" cy="1371600"/>
+            <a:off x="7863840" y="1371600"/>
+            <a:ext cx="3749039" cy="731520"/>
+          </a:xfrm>
+          <a:prstGeom prst="roundRect">
+            <a:avLst/>
+          </a:prstGeom>
+          <a:solidFill>
+            <a:srgbClr val="DC2626"/>
+          </a:solidFill>
+          <a:ln>
+            <a:solidFill>
+              <a:srgbClr val="DC2626"/>
+            </a:solidFill>
+          </a:ln>
+          <a:effectLst/>
+        </p:spPr>
+        <p:style>
+          <a:lnRef idx="1">
+            <a:schemeClr val="accent1"/>
+          </a:lnRef>
+          <a:fillRef idx="3">
+            <a:schemeClr val="accent1"/>
+          </a:fillRef>
+          <a:effectRef idx="2">
+            <a:schemeClr val="accent1"/>
+          </a:effectRef>
+          <a:fontRef idx="minor">
+            <a:schemeClr val="lt1"/>
+          </a:fontRef>
+        </p:style>
+        <p:txBody>
+          <a:bodyPr rtlCol="0" anchor="ctr" wrap="square" tIns="25400" bIns="25400"/>
+          <a:lstStyle/>
+          <a:p>
+            <a:pPr algn="ctr"/>
+            <a:r>
+              <a:rPr sz="1200" b="1">
+                <a:solidFill>
+                  <a:srgbClr val="FFFFFF"/>
+                </a:solidFill>
+                <a:latin typeface="PingFang TC"/>
+                <a:ea typeface="PingFang TC"/>
+              </a:rPr>
+              <a:t>Redis  快取</a:t>
+            </a:r>
+          </a:p>
+          <a:p>
+            <a:pPr algn="ctr"/>
+            <a:r>
+              <a:rPr sz="1200" b="0">
+                <a:solidFill>
+                  <a:srgbClr val="FFFFFF"/>
+                </a:solidFill>
+                <a:latin typeface="PingFang TC"/>
+                <a:ea typeface="PingFang TC"/>
+              </a:rPr>
+              <a:t>(redirect 熱路徑, TTL)</a:t>
+            </a:r>
+          </a:p>
+        </p:txBody>
+      </p:sp>
+      <p:sp>
+        <p:nvSpPr>
+          <p:cNvPr id="10" name="Rounded Rectangle 9"/>
+          <p:cNvSpPr/>
+          <p:nvPr/>
+        </p:nvSpPr>
+        <p:spPr>
+          <a:xfrm>
+            <a:off x="7863840" y="2286000"/>
+            <a:ext cx="3749039" cy="822960"/>
           </a:xfrm>
           <a:prstGeom prst="roundRect">
             <a:avLst/>
@@ -8678,208 +10549,41 @@
           <a:p>
             <a:pPr algn="ctr"/>
             <a:r>
-              <a:rPr sz="1300" b="1">
+              <a:rPr sz="1200" b="1">
                 <a:solidFill>
                   <a:srgbClr val="FFFFFF"/>
                 </a:solidFill>
                 <a:latin typeface="PingFang TC"/>
                 <a:ea typeface="PingFang TC"/>
               </a:rPr>
-              <a:t>③ 寫 DB</a:t>
+              <a:t>Primary DB → Read Replicas</a:t>
             </a:r>
           </a:p>
           <a:p>
             <a:pPr algn="ctr"/>
             <a:r>
-              <a:rPr sz="1300" b="0">
+              <a:rPr sz="1200" b="0">
                 <a:solidFill>
                   <a:srgbClr val="FFFFFF"/>
                 </a:solidFill>
                 <a:latin typeface="PingFang TC"/>
                 <a:ea typeface="PingFang TC"/>
               </a:rPr>
-              <a:t>直接插入</a:t>
-            </a:r>
-          </a:p>
-          <a:p>
-            <a:pPr algn="ctr"/>
-            <a:r>
-              <a:rPr sz="1300" b="0">
-                <a:solidFill>
-                  <a:srgbClr val="FFFFFF"/>
-                </a:solidFill>
-                <a:latin typeface="PingFang TC"/>
-                <a:ea typeface="PingFang TC"/>
-              </a:rPr>
-              <a:t>UNIQUE 重試 ≤10</a:t>
-            </a:r>
-          </a:p>
-        </p:txBody>
-      </p:sp>
-      <p:cxnSp>
-        <p:nvCxnSpPr>
-          <p:cNvPr id="9" name="Connector 8"/>
-          <p:cNvCxnSpPr/>
-          <p:nvPr/>
-        </p:nvCxnSpPr>
-        <p:spPr>
-          <a:xfrm>
-            <a:off x="5907024" y="3154680"/>
-            <a:ext cx="164592" cy="0"/>
-          </a:xfrm>
-          <a:prstGeom prst="line">
-            <a:avLst/>
-          </a:prstGeom>
-          <a:ln w="22225">
-            <a:solidFill>
-              <a:srgbClr val="64748B"/>
-            </a:solidFill>
-            <a:tailEnd type="triangle" w="med" len="med"/>
-          </a:ln>
-        </p:spPr>
-        <p:style>
-          <a:lnRef idx="2">
-            <a:schemeClr val="accent1"/>
-          </a:lnRef>
-          <a:fillRef idx="0">
-            <a:schemeClr val="accent1"/>
-          </a:fillRef>
-          <a:effectRef idx="1">
-            <a:schemeClr val="accent1"/>
-          </a:effectRef>
-          <a:fontRef idx="minor">
-            <a:schemeClr val="tx1"/>
-          </a:fontRef>
-        </p:style>
-      </p:cxnSp>
-      <p:sp>
-        <p:nvSpPr>
-          <p:cNvPr id="10" name="Rounded Rectangle 9"/>
+              <a:t>(寫走主 · 讀走副 · failover)</a:t>
+            </a:r>
+          </a:p>
+        </p:txBody>
+      </p:sp>
+      <p:sp>
+        <p:nvSpPr>
+          <p:cNvPr id="11" name="Rounded Rectangle 10"/>
           <p:cNvSpPr/>
           <p:nvPr/>
         </p:nvSpPr>
         <p:spPr>
           <a:xfrm>
-            <a:off x="6071616" y="2468880"/>
-            <a:ext cx="1691640" cy="1371600"/>
-          </a:xfrm>
-          <a:prstGeom prst="roundRect">
-            <a:avLst/>
-          </a:prstGeom>
-          <a:solidFill>
-            <a:srgbClr val="DC2626"/>
-          </a:solidFill>
-          <a:ln>
-            <a:solidFill>
-              <a:srgbClr val="DC2626"/>
-            </a:solidFill>
-          </a:ln>
-          <a:effectLst/>
-        </p:spPr>
-        <p:style>
-          <a:lnRef idx="1">
-            <a:schemeClr val="accent1"/>
-          </a:lnRef>
-          <a:fillRef idx="3">
-            <a:schemeClr val="accent1"/>
-          </a:fillRef>
-          <a:effectRef idx="2">
-            <a:schemeClr val="accent1"/>
-          </a:effectRef>
-          <a:fontRef idx="minor">
-            <a:schemeClr val="lt1"/>
-          </a:fontRef>
-        </p:style>
-        <p:txBody>
-          <a:bodyPr rtlCol="0" anchor="ctr" wrap="square" tIns="25400" bIns="25400"/>
-          <a:lstStyle/>
-          <a:p>
-            <a:pPr algn="ctr"/>
-            <a:r>
-              <a:rPr sz="1300" b="1">
-                <a:solidFill>
-                  <a:srgbClr val="FFFFFF"/>
-                </a:solidFill>
-                <a:latin typeface="PingFang TC"/>
-                <a:ea typeface="PingFang TC"/>
-              </a:rPr>
-              <a:t>④ 暖 cache</a:t>
-            </a:r>
-          </a:p>
-          <a:p>
-            <a:pPr algn="ctr"/>
-            <a:r>
-              <a:rPr sz="1300" b="0">
-                <a:solidFill>
-                  <a:srgbClr val="FFFFFF"/>
-                </a:solidFill>
-                <a:latin typeface="PingFang TC"/>
-                <a:ea typeface="PingFang TC"/>
-              </a:rPr>
-              <a:t>token→URL</a:t>
-            </a:r>
-          </a:p>
-          <a:p>
-            <a:pPr algn="ctr"/>
-            <a:r>
-              <a:rPr sz="1300" b="0">
-                <a:solidFill>
-                  <a:srgbClr val="FFFFFF"/>
-                </a:solidFill>
-                <a:latin typeface="PingFang TC"/>
-                <a:ea typeface="PingFang TC"/>
-              </a:rPr>
-              <a:t>寫進 Redis</a:t>
-            </a:r>
-          </a:p>
-        </p:txBody>
-      </p:sp>
-      <p:cxnSp>
-        <p:nvCxnSpPr>
-          <p:cNvPr id="11" name="Connector 10"/>
-          <p:cNvCxnSpPr/>
-          <p:nvPr/>
-        </p:nvCxnSpPr>
-        <p:spPr>
-          <a:xfrm>
-            <a:off x="7763256" y="3154680"/>
-            <a:ext cx="164592" cy="0"/>
-          </a:xfrm>
-          <a:prstGeom prst="line">
-            <a:avLst/>
-          </a:prstGeom>
-          <a:ln w="22225">
-            <a:solidFill>
-              <a:srgbClr val="64748B"/>
-            </a:solidFill>
-            <a:tailEnd type="triangle" w="med" len="med"/>
-          </a:ln>
-        </p:spPr>
-        <p:style>
-          <a:lnRef idx="2">
-            <a:schemeClr val="accent1"/>
-          </a:lnRef>
-          <a:fillRef idx="0">
-            <a:schemeClr val="accent1"/>
-          </a:fillRef>
-          <a:effectRef idx="1">
-            <a:schemeClr val="accent1"/>
-          </a:effectRef>
-          <a:fontRef idx="minor">
-            <a:schemeClr val="tx1"/>
-          </a:fontRef>
-        </p:style>
-      </p:cxnSp>
-      <p:sp>
-        <p:nvSpPr>
-          <p:cNvPr id="12" name="Rounded Rectangle 11"/>
-          <p:cNvSpPr/>
-          <p:nvPr/>
-        </p:nvSpPr>
-        <p:spPr>
-          <a:xfrm>
-            <a:off x="7927848" y="2468880"/>
-            <a:ext cx="1691640" cy="1371600"/>
+            <a:off x="7863840" y="3246120"/>
+            <a:ext cx="3749039" cy="731520"/>
           </a:xfrm>
           <a:prstGeom prst="roundRect">
             <a:avLst/>
@@ -8914,90 +10618,41 @@
           <a:p>
             <a:pPr algn="ctr"/>
             <a:r>
-              <a:rPr sz="1300" b="1">
+              <a:rPr sz="1200" b="1">
                 <a:solidFill>
                   <a:srgbClr val="FFFFFF"/>
                 </a:solidFill>
                 <a:latin typeface="PingFang TC"/>
                 <a:ea typeface="PingFang TC"/>
               </a:rPr>
-              <a:t>⑤ 生圖</a:t>
+              <a:t>Object Store + CDN</a:t>
             </a:r>
           </a:p>
           <a:p>
             <a:pPr algn="ctr"/>
             <a:r>
-              <a:rPr sz="1300" b="0">
+              <a:rPr sz="1200" b="0">
                 <a:solidFill>
                   <a:srgbClr val="FFFFFF"/>
                 </a:solidFill>
                 <a:latin typeface="PingFang TC"/>
                 <a:ea typeface="PingFang TC"/>
               </a:rPr>
-              <a:t>預生成 QR</a:t>
-            </a:r>
-          </a:p>
-          <a:p>
-            <a:pPr algn="ctr"/>
-            <a:r>
-              <a:rPr sz="1300" b="0">
-                <a:solidFill>
-                  <a:srgbClr val="FFFFFF"/>
-                </a:solidFill>
-                <a:latin typeface="PingFang TC"/>
-                <a:ea typeface="PingFang TC"/>
-              </a:rPr>
-              <a:t>→ object store</a:t>
-            </a:r>
-          </a:p>
-        </p:txBody>
-      </p:sp>
-      <p:cxnSp>
-        <p:nvCxnSpPr>
-          <p:cNvPr id="13" name="Connector 12"/>
-          <p:cNvCxnSpPr/>
-          <p:nvPr/>
-        </p:nvCxnSpPr>
-        <p:spPr>
-          <a:xfrm>
-            <a:off x="9619488" y="3154680"/>
-            <a:ext cx="164592" cy="0"/>
-          </a:xfrm>
-          <a:prstGeom prst="line">
-            <a:avLst/>
-          </a:prstGeom>
-          <a:ln w="22225">
-            <a:solidFill>
-              <a:srgbClr val="64748B"/>
-            </a:solidFill>
-            <a:tailEnd type="triangle" w="med" len="med"/>
-          </a:ln>
-        </p:spPr>
-        <p:style>
-          <a:lnRef idx="2">
-            <a:schemeClr val="accent1"/>
-          </a:lnRef>
-          <a:fillRef idx="0">
-            <a:schemeClr val="accent1"/>
-          </a:fillRef>
-          <a:effectRef idx="1">
-            <a:schemeClr val="accent1"/>
-          </a:effectRef>
-          <a:fontRef idx="minor">
-            <a:schemeClr val="tx1"/>
-          </a:fontRef>
-        </p:style>
-      </p:cxnSp>
-      <p:sp>
-        <p:nvSpPr>
-          <p:cNvPr id="14" name="Rounded Rectangle 13"/>
+              <a:t>(QR 圖片靜態內容)</a:t>
+            </a:r>
+          </a:p>
+        </p:txBody>
+      </p:sp>
+      <p:sp>
+        <p:nvSpPr>
+          <p:cNvPr id="12" name="Rounded Rectangle 11"/>
           <p:cNvSpPr/>
           <p:nvPr/>
         </p:nvSpPr>
         <p:spPr>
           <a:xfrm>
-            <a:off x="9784080" y="2468880"/>
-            <a:ext cx="1691640" cy="1371600"/>
+            <a:off x="7863840" y="4069080"/>
+            <a:ext cx="3749039" cy="731520"/>
           </a:xfrm>
           <a:prstGeom prst="roundRect">
             <a:avLst/>
@@ -9032,54 +10687,185 @@
           <a:p>
             <a:pPr algn="ctr"/>
             <a:r>
-              <a:rPr sz="1300" b="1">
+              <a:rPr sz="1200" b="1">
                 <a:solidFill>
                   <a:srgbClr val="FFFFFF"/>
                 </a:solidFill>
                 <a:latin typeface="PingFang TC"/>
                 <a:ea typeface="PingFang TC"/>
               </a:rPr>
-              <a:t>⑥ 回應</a:t>
+              <a:t>佇列 → 分析庫</a:t>
             </a:r>
           </a:p>
           <a:p>
             <a:pPr algn="ctr"/>
             <a:r>
-              <a:rPr sz="1300" b="0">
+              <a:rPr sz="1200" b="0">
                 <a:solidFill>
                   <a:srgbClr val="FFFFFF"/>
                 </a:solidFill>
                 <a:latin typeface="PingFang TC"/>
                 <a:ea typeface="PingFang TC"/>
               </a:rPr>
-              <a:t>token / short_url</a:t>
-            </a:r>
-          </a:p>
-          <a:p>
-            <a:pPr algn="ctr"/>
-            <a:r>
-              <a:rPr sz="1300" b="0">
-                <a:solidFill>
-                  <a:srgbClr val="FFFFFF"/>
-                </a:solidFill>
-                <a:latin typeface="PingFang TC"/>
-                <a:ea typeface="PingFang TC"/>
-              </a:rPr>
-              <a:t>/ qr_code_url</a:t>
-            </a:r>
-          </a:p>
-        </p:txBody>
-      </p:sp>
-      <p:sp>
-        <p:nvSpPr>
-          <p:cNvPr id="15" name="TextBox 14"/>
+              <a:t>(非同步 scan · 預聚合)</a:t>
+            </a:r>
+          </a:p>
+        </p:txBody>
+      </p:sp>
+      <p:cxnSp>
+        <p:nvCxnSpPr>
+          <p:cNvPr id="13" name="Connector 12"/>
+          <p:cNvCxnSpPr/>
+          <p:nvPr/>
+        </p:nvCxnSpPr>
+        <p:spPr>
+          <a:xfrm flipV="1">
+            <a:off x="6949440" y="1737360"/>
+            <a:ext cx="914400" cy="795528"/>
+          </a:xfrm>
+          <a:prstGeom prst="line">
+            <a:avLst/>
+          </a:prstGeom>
+          <a:ln w="22225">
+            <a:solidFill>
+              <a:srgbClr val="64748B"/>
+            </a:solidFill>
+            <a:tailEnd type="triangle" w="med" len="med"/>
+          </a:ln>
+        </p:spPr>
+        <p:style>
+          <a:lnRef idx="2">
+            <a:schemeClr val="accent1"/>
+          </a:lnRef>
+          <a:fillRef idx="0">
+            <a:schemeClr val="accent1"/>
+          </a:fillRef>
+          <a:effectRef idx="1">
+            <a:schemeClr val="accent1"/>
+          </a:effectRef>
+          <a:fontRef idx="minor">
+            <a:schemeClr val="tx1"/>
+          </a:fontRef>
+        </p:style>
+      </p:cxnSp>
+      <p:cxnSp>
+        <p:nvCxnSpPr>
+          <p:cNvPr id="14" name="Connector 13"/>
+          <p:cNvCxnSpPr/>
+          <p:nvPr/>
+        </p:nvCxnSpPr>
+        <p:spPr>
+          <a:xfrm>
+            <a:off x="6949440" y="2532888"/>
+            <a:ext cx="914400" cy="164592"/>
+          </a:xfrm>
+          <a:prstGeom prst="line">
+            <a:avLst/>
+          </a:prstGeom>
+          <a:ln w="22225">
+            <a:solidFill>
+              <a:srgbClr val="64748B"/>
+            </a:solidFill>
+            <a:tailEnd type="triangle" w="med" len="med"/>
+          </a:ln>
+        </p:spPr>
+        <p:style>
+          <a:lnRef idx="2">
+            <a:schemeClr val="accent1"/>
+          </a:lnRef>
+          <a:fillRef idx="0">
+            <a:schemeClr val="accent1"/>
+          </a:fillRef>
+          <a:effectRef idx="1">
+            <a:schemeClr val="accent1"/>
+          </a:effectRef>
+          <a:fontRef idx="minor">
+            <a:schemeClr val="tx1"/>
+          </a:fontRef>
+        </p:style>
+      </p:cxnSp>
+      <p:cxnSp>
+        <p:nvCxnSpPr>
+          <p:cNvPr id="15" name="Connector 14"/>
+          <p:cNvCxnSpPr/>
+          <p:nvPr/>
+        </p:nvCxnSpPr>
+        <p:spPr>
+          <a:xfrm>
+            <a:off x="6949440" y="2532888"/>
+            <a:ext cx="914400" cy="1078992"/>
+          </a:xfrm>
+          <a:prstGeom prst="line">
+            <a:avLst/>
+          </a:prstGeom>
+          <a:ln w="22225">
+            <a:solidFill>
+              <a:srgbClr val="64748B"/>
+            </a:solidFill>
+            <a:tailEnd type="triangle" w="med" len="med"/>
+          </a:ln>
+        </p:spPr>
+        <p:style>
+          <a:lnRef idx="2">
+            <a:schemeClr val="accent1"/>
+          </a:lnRef>
+          <a:fillRef idx="0">
+            <a:schemeClr val="accent1"/>
+          </a:fillRef>
+          <a:effectRef idx="1">
+            <a:schemeClr val="accent1"/>
+          </a:effectRef>
+          <a:fontRef idx="minor">
+            <a:schemeClr val="tx1"/>
+          </a:fontRef>
+        </p:style>
+      </p:cxnSp>
+      <p:cxnSp>
+        <p:nvCxnSpPr>
+          <p:cNvPr id="16" name="Connector 15"/>
+          <p:cNvCxnSpPr/>
+          <p:nvPr/>
+        </p:nvCxnSpPr>
+        <p:spPr>
+          <a:xfrm>
+            <a:off x="6949440" y="2532888"/>
+            <a:ext cx="914400" cy="1901952"/>
+          </a:xfrm>
+          <a:prstGeom prst="line">
+            <a:avLst/>
+          </a:prstGeom>
+          <a:ln w="22225">
+            <a:solidFill>
+              <a:srgbClr val="64748B"/>
+            </a:solidFill>
+            <a:tailEnd type="triangle" w="med" len="med"/>
+          </a:ln>
+        </p:spPr>
+        <p:style>
+          <a:lnRef idx="2">
+            <a:schemeClr val="accent1"/>
+          </a:lnRef>
+          <a:fillRef idx="0">
+            <a:schemeClr val="accent1"/>
+          </a:fillRef>
+          <a:effectRef idx="1">
+            <a:schemeClr val="accent1"/>
+          </a:effectRef>
+          <a:fontRef idx="minor">
+            <a:schemeClr val="tx1"/>
+          </a:fontRef>
+        </p:style>
+      </p:cxnSp>
+      <p:sp>
+        <p:nvSpPr>
+          <p:cNvPr id="17" name="TextBox 16"/>
           <p:cNvSpPr txBox="1"/>
           <p:nvPr/>
         </p:nvSpPr>
         <p:spPr>
           <a:xfrm>
-            <a:off x="502920" y="4297680"/>
-            <a:ext cx="10972800" cy="1097280"/>
+            <a:off x="548640" y="5486400"/>
+            <a:ext cx="10972800" cy="914400"/>
           </a:xfrm>
           <a:prstGeom prst="rect">
             <a:avLst/>
@@ -9094,23 +10880,6 @@
           <a:p>
             <a:pPr algn="l">
               <a:spcAft>
-                <a:spcPts val="600"/>
-              </a:spcAft>
-            </a:pPr>
-            <a:r>
-              <a:rPr sz="1400" b="1">
-                <a:solidFill>
-                  <a:srgbClr val="0F172A"/>
-                </a:solidFill>
-                <a:latin typeface="PingFang TC"/>
-                <a:ea typeface="PingFang TC"/>
-              </a:rPr>
-              <a:t>關鍵：第 ③ 步「直接插入 + UNIQUE 例外重試」取代 repo 的「先查再插」，消除高並發 race。</a:t>
-            </a:r>
-          </a:p>
-          <a:p>
-            <a:pPr algn="l">
-              <a:spcAft>
                 <a:spcPts val="400"/>
               </a:spcAft>
             </a:pPr>
@@ -9122,7 +10891,7 @@
                 <a:latin typeface="PingFang TC"/>
                 <a:ea typeface="PingFang TC"/>
               </a:rPr>
-              <a:t>token 碰撞在大規模下必然發生，靠 DB UNIQUE + 重試兜底（nonce 只防『同 URL 同 token』，不防碰撞）。</a:t>
+              <a:t>讀多寫少：redirect 先打 Redis，miss 才到 DB（read replica）；QR 圖片走 CDN；scan 非同步進分析庫。</a:t>
             </a:r>
           </a:p>
         </p:txBody>
@@ -9224,7 +10993,7 @@
                 <a:latin typeface="PingFang TC"/>
                 <a:ea typeface="PingFang TC"/>
               </a:rPr>
-              <a:t>06 · REDIRECT FLOW</a:t>
+              <a:t>05 · CREATE FLOW</a:t>
             </a:r>
           </a:p>
           <a:p>
@@ -9241,7 +11010,7 @@
                 <a:latin typeface="PingFang TC"/>
                 <a:ea typeface="PingFang TC"/>
               </a:rPr>
-              <a:t>掃描 / Redirect 流程（&lt; 100ms 關鍵路徑）</a:t>
+              <a:t>建立流程</a:t>
             </a:r>
           </a:p>
         </p:txBody>
@@ -9254,18 +11023,18 @@
         </p:nvSpPr>
         <p:spPr>
           <a:xfrm>
-            <a:off x="548640" y="1554480"/>
-            <a:ext cx="2103120" cy="731520"/>
+            <a:off x="502920" y="2468880"/>
+            <a:ext cx="1691640" cy="1371600"/>
           </a:xfrm>
           <a:prstGeom prst="roundRect">
             <a:avLst/>
           </a:prstGeom>
           <a:solidFill>
-            <a:srgbClr val="64748B"/>
+            <a:srgbClr val="2563EB"/>
           </a:solidFill>
           <a:ln>
             <a:solidFill>
-              <a:srgbClr val="64748B"/>
+              <a:srgbClr val="2563EB"/>
             </a:solidFill>
           </a:ln>
           <a:effectLst/>
@@ -9290,41 +11059,326 @@
           <a:p>
             <a:pPr algn="ctr"/>
             <a:r>
-              <a:rPr sz="1200" b="1">
+              <a:rPr sz="1300" b="1">
                 <a:solidFill>
                   <a:srgbClr val="FFFFFF"/>
                 </a:solidFill>
                 <a:latin typeface="PingFang TC"/>
                 <a:ea typeface="PingFang TC"/>
               </a:rPr>
-              <a:t>GET /r/{token}</a:t>
+              <a:t>① 驗證</a:t>
             </a:r>
           </a:p>
           <a:p>
             <a:pPr algn="ctr"/>
             <a:r>
-              <a:rPr sz="1200" b="0">
+              <a:rPr sz="1300" b="0">
                 <a:solidFill>
                   <a:srgbClr val="FFFFFF"/>
                 </a:solidFill>
                 <a:latin typeface="PingFang TC"/>
                 <a:ea typeface="PingFang TC"/>
               </a:rPr>
-              <a:t>掃描者瀏覽器</a:t>
-            </a:r>
-          </a:p>
-        </p:txBody>
-      </p:sp>
-      <p:sp>
-        <p:nvSpPr>
-          <p:cNvPr id="5" name="Rounded Rectangle 4"/>
+              <a:t>保守正規化</a:t>
+            </a:r>
+          </a:p>
+          <a:p>
+            <a:pPr algn="ctr"/>
+            <a:r>
+              <a:rPr sz="1300" b="0">
+                <a:solidFill>
+                  <a:srgbClr val="FFFFFF"/>
+                </a:solidFill>
+                <a:latin typeface="PingFang TC"/>
+                <a:ea typeface="PingFang TC"/>
+              </a:rPr>
+              <a:t>+ 惡意/SSRF 檢查</a:t>
+            </a:r>
+          </a:p>
+        </p:txBody>
+      </p:sp>
+      <p:cxnSp>
+        <p:nvCxnSpPr>
+          <p:cNvPr id="5" name="Connector 4"/>
+          <p:cNvCxnSpPr/>
+          <p:nvPr/>
+        </p:nvCxnSpPr>
+        <p:spPr>
+          <a:xfrm>
+            <a:off x="2194560" y="3154680"/>
+            <a:ext cx="164592" cy="0"/>
+          </a:xfrm>
+          <a:prstGeom prst="line">
+            <a:avLst/>
+          </a:prstGeom>
+          <a:ln w="22225">
+            <a:solidFill>
+              <a:srgbClr val="64748B"/>
+            </a:solidFill>
+            <a:tailEnd type="triangle" w="med" len="med"/>
+          </a:ln>
+        </p:spPr>
+        <p:style>
+          <a:lnRef idx="2">
+            <a:schemeClr val="accent1"/>
+          </a:lnRef>
+          <a:fillRef idx="0">
+            <a:schemeClr val="accent1"/>
+          </a:fillRef>
+          <a:effectRef idx="1">
+            <a:schemeClr val="accent1"/>
+          </a:effectRef>
+          <a:fontRef idx="minor">
+            <a:schemeClr val="tx1"/>
+          </a:fontRef>
+        </p:style>
+      </p:cxnSp>
+      <p:sp>
+        <p:nvSpPr>
+          <p:cNvPr id="6" name="Rounded Rectangle 5"/>
           <p:cNvSpPr/>
           <p:nvPr/>
         </p:nvSpPr>
         <p:spPr>
           <a:xfrm>
-            <a:off x="3017520" y="1554480"/>
-            <a:ext cx="2377440" cy="731520"/>
+            <a:off x="2359152" y="2468880"/>
+            <a:ext cx="1691640" cy="1371600"/>
+          </a:xfrm>
+          <a:prstGeom prst="roundRect">
+            <a:avLst/>
+          </a:prstGeom>
+          <a:solidFill>
+            <a:srgbClr val="0EA5E9"/>
+          </a:solidFill>
+          <a:ln>
+            <a:solidFill>
+              <a:srgbClr val="0EA5E9"/>
+            </a:solidFill>
+          </a:ln>
+          <a:effectLst/>
+        </p:spPr>
+        <p:style>
+          <a:lnRef idx="1">
+            <a:schemeClr val="accent1"/>
+          </a:lnRef>
+          <a:fillRef idx="3">
+            <a:schemeClr val="accent1"/>
+          </a:fillRef>
+          <a:effectRef idx="2">
+            <a:schemeClr val="accent1"/>
+          </a:effectRef>
+          <a:fontRef idx="minor">
+            <a:schemeClr val="lt1"/>
+          </a:fontRef>
+        </p:style>
+        <p:txBody>
+          <a:bodyPr rtlCol="0" anchor="ctr" wrap="square" tIns="25400" bIns="25400"/>
+          <a:lstStyle/>
+          <a:p>
+            <a:pPr algn="ctr"/>
+            <a:r>
+              <a:rPr sz="1300" b="1">
+                <a:solidFill>
+                  <a:srgbClr val="FFFFFF"/>
+                </a:solidFill>
+                <a:latin typeface="PingFang TC"/>
+                <a:ea typeface="PingFang TC"/>
+              </a:rPr>
+              <a:t>② 生 token</a:t>
+            </a:r>
+          </a:p>
+          <a:p>
+            <a:pPr algn="ctr"/>
+            <a:r>
+              <a:rPr sz="1300" b="0">
+                <a:solidFill>
+                  <a:srgbClr val="FFFFFF"/>
+                </a:solidFill>
+                <a:latin typeface="PingFang TC"/>
+                <a:ea typeface="PingFang TC"/>
+              </a:rPr>
+              <a:t>SHA-256+nonce</a:t>
+            </a:r>
+          </a:p>
+          <a:p>
+            <a:pPr algn="ctr"/>
+            <a:r>
+              <a:rPr sz="1300" b="0">
+                <a:solidFill>
+                  <a:srgbClr val="FFFFFF"/>
+                </a:solidFill>
+                <a:latin typeface="PingFang TC"/>
+                <a:ea typeface="PingFang TC"/>
+              </a:rPr>
+              <a:t>→Base62→8 碼</a:t>
+            </a:r>
+          </a:p>
+        </p:txBody>
+      </p:sp>
+      <p:cxnSp>
+        <p:nvCxnSpPr>
+          <p:cNvPr id="7" name="Connector 6"/>
+          <p:cNvCxnSpPr/>
+          <p:nvPr/>
+        </p:nvCxnSpPr>
+        <p:spPr>
+          <a:xfrm>
+            <a:off x="4050792" y="3154680"/>
+            <a:ext cx="164592" cy="0"/>
+          </a:xfrm>
+          <a:prstGeom prst="line">
+            <a:avLst/>
+          </a:prstGeom>
+          <a:ln w="22225">
+            <a:solidFill>
+              <a:srgbClr val="64748B"/>
+            </a:solidFill>
+            <a:tailEnd type="triangle" w="med" len="med"/>
+          </a:ln>
+        </p:spPr>
+        <p:style>
+          <a:lnRef idx="2">
+            <a:schemeClr val="accent1"/>
+          </a:lnRef>
+          <a:fillRef idx="0">
+            <a:schemeClr val="accent1"/>
+          </a:fillRef>
+          <a:effectRef idx="1">
+            <a:schemeClr val="accent1"/>
+          </a:effectRef>
+          <a:fontRef idx="minor">
+            <a:schemeClr val="tx1"/>
+          </a:fontRef>
+        </p:style>
+      </p:cxnSp>
+      <p:sp>
+        <p:nvSpPr>
+          <p:cNvPr id="8" name="Rounded Rectangle 7"/>
+          <p:cNvSpPr/>
+          <p:nvPr/>
+        </p:nvSpPr>
+        <p:spPr>
+          <a:xfrm>
+            <a:off x="4215384" y="2468880"/>
+            <a:ext cx="1691640" cy="1371600"/>
+          </a:xfrm>
+          <a:prstGeom prst="roundRect">
+            <a:avLst/>
+          </a:prstGeom>
+          <a:solidFill>
+            <a:srgbClr val="059669"/>
+          </a:solidFill>
+          <a:ln>
+            <a:solidFill>
+              <a:srgbClr val="059669"/>
+            </a:solidFill>
+          </a:ln>
+          <a:effectLst/>
+        </p:spPr>
+        <p:style>
+          <a:lnRef idx="1">
+            <a:schemeClr val="accent1"/>
+          </a:lnRef>
+          <a:fillRef idx="3">
+            <a:schemeClr val="accent1"/>
+          </a:fillRef>
+          <a:effectRef idx="2">
+            <a:schemeClr val="accent1"/>
+          </a:effectRef>
+          <a:fontRef idx="minor">
+            <a:schemeClr val="lt1"/>
+          </a:fontRef>
+        </p:style>
+        <p:txBody>
+          <a:bodyPr rtlCol="0" anchor="ctr" wrap="square" tIns="25400" bIns="25400"/>
+          <a:lstStyle/>
+          <a:p>
+            <a:pPr algn="ctr"/>
+            <a:r>
+              <a:rPr sz="1300" b="1">
+                <a:solidFill>
+                  <a:srgbClr val="FFFFFF"/>
+                </a:solidFill>
+                <a:latin typeface="PingFang TC"/>
+                <a:ea typeface="PingFang TC"/>
+              </a:rPr>
+              <a:t>③ 寫 DB</a:t>
+            </a:r>
+          </a:p>
+          <a:p>
+            <a:pPr algn="ctr"/>
+            <a:r>
+              <a:rPr sz="1300" b="0">
+                <a:solidFill>
+                  <a:srgbClr val="FFFFFF"/>
+                </a:solidFill>
+                <a:latin typeface="PingFang TC"/>
+                <a:ea typeface="PingFang TC"/>
+              </a:rPr>
+              <a:t>直接插入</a:t>
+            </a:r>
+          </a:p>
+          <a:p>
+            <a:pPr algn="ctr"/>
+            <a:r>
+              <a:rPr sz="1300" b="0">
+                <a:solidFill>
+                  <a:srgbClr val="FFFFFF"/>
+                </a:solidFill>
+                <a:latin typeface="PingFang TC"/>
+                <a:ea typeface="PingFang TC"/>
+              </a:rPr>
+              <a:t>UNIQUE 重試 ≤10</a:t>
+            </a:r>
+          </a:p>
+        </p:txBody>
+      </p:sp>
+      <p:cxnSp>
+        <p:nvCxnSpPr>
+          <p:cNvPr id="9" name="Connector 8"/>
+          <p:cNvCxnSpPr/>
+          <p:nvPr/>
+        </p:nvCxnSpPr>
+        <p:spPr>
+          <a:xfrm>
+            <a:off x="5907024" y="3154680"/>
+            <a:ext cx="164592" cy="0"/>
+          </a:xfrm>
+          <a:prstGeom prst="line">
+            <a:avLst/>
+          </a:prstGeom>
+          <a:ln w="22225">
+            <a:solidFill>
+              <a:srgbClr val="64748B"/>
+            </a:solidFill>
+            <a:tailEnd type="triangle" w="med" len="med"/>
+          </a:ln>
+        </p:spPr>
+        <p:style>
+          <a:lnRef idx="2">
+            <a:schemeClr val="accent1"/>
+          </a:lnRef>
+          <a:fillRef idx="0">
+            <a:schemeClr val="accent1"/>
+          </a:fillRef>
+          <a:effectRef idx="1">
+            <a:schemeClr val="accent1"/>
+          </a:effectRef>
+          <a:fontRef idx="minor">
+            <a:schemeClr val="tx1"/>
+          </a:fontRef>
+        </p:style>
+      </p:cxnSp>
+      <p:sp>
+        <p:nvSpPr>
+          <p:cNvPr id="10" name="Rounded Rectangle 9"/>
+          <p:cNvSpPr/>
+          <p:nvPr/>
+        </p:nvSpPr>
+        <p:spPr>
+          <a:xfrm>
+            <a:off x="6071616" y="2468880"/>
+            <a:ext cx="1691640" cy="1371600"/>
           </a:xfrm>
           <a:prstGeom prst="roundRect">
             <a:avLst/>
@@ -9366,21 +11420,47 @@
                 <a:latin typeface="PingFang TC"/>
                 <a:ea typeface="PingFang TC"/>
               </a:rPr>
-              <a:t>① 查 Cache (Redis)</a:t>
+              <a:t>④ 暖 cache</a:t>
+            </a:r>
+          </a:p>
+          <a:p>
+            <a:pPr algn="ctr"/>
+            <a:r>
+              <a:rPr sz="1300" b="0">
+                <a:solidFill>
+                  <a:srgbClr val="FFFFFF"/>
+                </a:solidFill>
+                <a:latin typeface="PingFang TC"/>
+                <a:ea typeface="PingFang TC"/>
+              </a:rPr>
+              <a:t>token→URL</a:t>
+            </a:r>
+          </a:p>
+          <a:p>
+            <a:pPr algn="ctr"/>
+            <a:r>
+              <a:rPr sz="1300" b="0">
+                <a:solidFill>
+                  <a:srgbClr val="FFFFFF"/>
+                </a:solidFill>
+                <a:latin typeface="PingFang TC"/>
+                <a:ea typeface="PingFang TC"/>
+              </a:rPr>
+              <a:t>寫進 Redis</a:t>
             </a:r>
           </a:p>
         </p:txBody>
       </p:sp>
       <p:cxnSp>
         <p:nvCxnSpPr>
-          <p:cNvPr id="6" name="Connector 5"/>
+          <p:cNvPr id="11" name="Connector 10"/>
           <p:cNvCxnSpPr/>
           <p:nvPr/>
         </p:nvCxnSpPr>
         <p:spPr>
           <a:xfrm>
-            <a:off x="2651760" y="1920240"/>
-            <a:ext cx="365760" cy="0"/>
+            <a:off x="7763256" y="3154680"/>
+            <a:ext cx="164592" cy="0"/>
           </a:xfrm>
           <a:prstGeom prst="line">
             <a:avLst/>
@@ -9409,24 +11489,24 @@
       </p:cxnSp>
       <p:sp>
         <p:nvSpPr>
-          <p:cNvPr id="7" name="Rounded Rectangle 6"/>
+          <p:cNvPr id="12" name="Rounded Rectangle 11"/>
           <p:cNvSpPr/>
           <p:nvPr/>
         </p:nvSpPr>
         <p:spPr>
           <a:xfrm>
-            <a:off x="3017520" y="2651760"/>
-            <a:ext cx="2377440" cy="640080"/>
+            <a:off x="7927848" y="2468880"/>
+            <a:ext cx="1691640" cy="1371600"/>
           </a:xfrm>
           <a:prstGeom prst="roundRect">
             <a:avLst/>
           </a:prstGeom>
           <a:solidFill>
-            <a:srgbClr val="059669"/>
+            <a:srgbClr val="7C3AED"/>
           </a:solidFill>
           <a:ln>
             <a:solidFill>
-              <a:srgbClr val="059669"/>
+              <a:srgbClr val="7C3AED"/>
             </a:solidFill>
           </a:ln>
           <a:effectLst/>
@@ -9451,97 +11531,54 @@
           <a:p>
             <a:pPr algn="ctr"/>
             <a:r>
-              <a:rPr sz="1200" b="1">
+              <a:rPr sz="1300" b="1">
                 <a:solidFill>
                   <a:srgbClr val="FFFFFF"/>
                 </a:solidFill>
                 <a:latin typeface="PingFang TC"/>
                 <a:ea typeface="PingFang TC"/>
               </a:rPr>
-              <a:t>命中 + 未過期</a:t>
-            </a:r>
-          </a:p>
-        </p:txBody>
-      </p:sp>
-      <p:sp>
-        <p:nvSpPr>
-          <p:cNvPr id="8" name="Rounded Rectangle 7"/>
-          <p:cNvSpPr/>
-          <p:nvPr/>
-        </p:nvSpPr>
-        <p:spPr>
-          <a:xfrm>
-            <a:off x="5852160" y="1554480"/>
-            <a:ext cx="2468880" cy="731520"/>
-          </a:xfrm>
-          <a:prstGeom prst="roundRect">
-            <a:avLst/>
-          </a:prstGeom>
-          <a:solidFill>
-            <a:srgbClr val="059669"/>
-          </a:solidFill>
-          <a:ln>
-            <a:solidFill>
-              <a:srgbClr val="059669"/>
-            </a:solidFill>
-          </a:ln>
-          <a:effectLst/>
-        </p:spPr>
-        <p:style>
-          <a:lnRef idx="1">
-            <a:schemeClr val="accent1"/>
-          </a:lnRef>
-          <a:fillRef idx="3">
-            <a:schemeClr val="accent1"/>
-          </a:fillRef>
-          <a:effectRef idx="2">
-            <a:schemeClr val="accent1"/>
-          </a:effectRef>
-          <a:fontRef idx="minor">
-            <a:schemeClr val="lt1"/>
-          </a:fontRef>
-        </p:style>
-        <p:txBody>
-          <a:bodyPr rtlCol="0" anchor="ctr" wrap="square" tIns="25400" bIns="25400"/>
-          <a:lstStyle/>
+              <a:t>⑤ 生圖</a:t>
+            </a:r>
+          </a:p>
           <a:p>
             <a:pPr algn="ctr"/>
             <a:r>
-              <a:rPr sz="1200" b="1">
+              <a:rPr sz="1300" b="0">
                 <a:solidFill>
                   <a:srgbClr val="FFFFFF"/>
                 </a:solidFill>
                 <a:latin typeface="PingFang TC"/>
                 <a:ea typeface="PingFang TC"/>
               </a:rPr>
-              <a:t>② miss → 查 DB</a:t>
+              <a:t>預生成 QR</a:t>
             </a:r>
           </a:p>
           <a:p>
             <a:pPr algn="ctr"/>
             <a:r>
-              <a:rPr sz="1200" b="0">
+              <a:rPr sz="1300" b="0">
                 <a:solidFill>
                   <a:srgbClr val="FFFFFF"/>
                 </a:solidFill>
                 <a:latin typeface="PingFang TC"/>
                 <a:ea typeface="PingFang TC"/>
               </a:rPr>
-              <a:t>(read replica)</a:t>
+              <a:t>→ object store</a:t>
             </a:r>
           </a:p>
         </p:txBody>
       </p:sp>
       <p:cxnSp>
         <p:nvCxnSpPr>
-          <p:cNvPr id="9" name="Connector 8"/>
+          <p:cNvPr id="13" name="Connector 12"/>
           <p:cNvCxnSpPr/>
           <p:nvPr/>
         </p:nvCxnSpPr>
         <p:spPr>
           <a:xfrm>
-            <a:off x="5394960" y="1920240"/>
-            <a:ext cx="457200" cy="0"/>
+            <a:off x="9619488" y="3154680"/>
+            <a:ext cx="164592" cy="0"/>
           </a:xfrm>
           <a:prstGeom prst="line">
             <a:avLst/>
@@ -9570,382 +11607,14 @@
       </p:cxnSp>
       <p:sp>
         <p:nvSpPr>
-          <p:cNvPr id="10" name="Rounded Rectangle 9"/>
-          <p:cNvSpPr/>
-          <p:nvPr/>
-        </p:nvSpPr>
-        <p:spPr>
-          <a:xfrm>
-            <a:off x="8686800" y="1234440"/>
-            <a:ext cx="3017520" cy="640080"/>
-          </a:xfrm>
-          <a:prstGeom prst="roundRect">
-            <a:avLst/>
-          </a:prstGeom>
-          <a:solidFill>
-            <a:srgbClr val="DC2626"/>
-          </a:solidFill>
-          <a:ln>
-            <a:solidFill>
-              <a:srgbClr val="DC2626"/>
-            </a:solidFill>
-          </a:ln>
-          <a:effectLst/>
-        </p:spPr>
-        <p:style>
-          <a:lnRef idx="1">
-            <a:schemeClr val="accent1"/>
-          </a:lnRef>
-          <a:fillRef idx="3">
-            <a:schemeClr val="accent1"/>
-          </a:fillRef>
-          <a:effectRef idx="2">
-            <a:schemeClr val="accent1"/>
-          </a:effectRef>
-          <a:fontRef idx="minor">
-            <a:schemeClr val="lt1"/>
-          </a:fontRef>
-        </p:style>
-        <p:txBody>
-          <a:bodyPr rtlCol="0" anchor="ctr" wrap="square" tIns="25400" bIns="25400"/>
-          <a:lstStyle/>
-          <a:p>
-            <a:pPr algn="ctr"/>
-            <a:r>
-              <a:rPr sz="1200" b="1">
-                <a:solidFill>
-                  <a:srgbClr val="FFFFFF"/>
-                </a:solidFill>
-                <a:latin typeface="PingFang TC"/>
-                <a:ea typeface="PingFang TC"/>
-              </a:rPr>
-              <a:t>找不到  →  404</a:t>
-            </a:r>
-          </a:p>
-        </p:txBody>
-      </p:sp>
-      <p:cxnSp>
-        <p:nvCxnSpPr>
-          <p:cNvPr id="11" name="Connector 10"/>
-          <p:cNvCxnSpPr/>
-          <p:nvPr/>
-        </p:nvCxnSpPr>
-        <p:spPr>
-          <a:xfrm flipV="1">
-            <a:off x="8321040" y="1554480"/>
-            <a:ext cx="365760" cy="365760"/>
-          </a:xfrm>
-          <a:prstGeom prst="line">
-            <a:avLst/>
-          </a:prstGeom>
-          <a:ln w="15240">
-            <a:solidFill>
-              <a:srgbClr val="64748B"/>
-            </a:solidFill>
-            <a:tailEnd type="triangle" w="med" len="med"/>
-          </a:ln>
-        </p:spPr>
-        <p:style>
-          <a:lnRef idx="2">
-            <a:schemeClr val="accent1"/>
-          </a:lnRef>
-          <a:fillRef idx="0">
-            <a:schemeClr val="accent1"/>
-          </a:fillRef>
-          <a:effectRef idx="1">
-            <a:schemeClr val="accent1"/>
-          </a:effectRef>
-          <a:fontRef idx="minor">
-            <a:schemeClr val="tx1"/>
-          </a:fontRef>
-        </p:style>
-      </p:cxnSp>
-      <p:sp>
-        <p:nvSpPr>
-          <p:cNvPr id="12" name="Rounded Rectangle 11"/>
-          <p:cNvSpPr/>
-          <p:nvPr/>
-        </p:nvSpPr>
-        <p:spPr>
-          <a:xfrm>
-            <a:off x="8686800" y="2057400"/>
-            <a:ext cx="3017520" cy="640080"/>
-          </a:xfrm>
-          <a:prstGeom prst="roundRect">
-            <a:avLst/>
-          </a:prstGeom>
-          <a:solidFill>
-            <a:srgbClr val="DC2626"/>
-          </a:solidFill>
-          <a:ln>
-            <a:solidFill>
-              <a:srgbClr val="DC2626"/>
-            </a:solidFill>
-          </a:ln>
-          <a:effectLst/>
-        </p:spPr>
-        <p:style>
-          <a:lnRef idx="1">
-            <a:schemeClr val="accent1"/>
-          </a:lnRef>
-          <a:fillRef idx="3">
-            <a:schemeClr val="accent1"/>
-          </a:fillRef>
-          <a:effectRef idx="2">
-            <a:schemeClr val="accent1"/>
-          </a:effectRef>
-          <a:fontRef idx="minor">
-            <a:schemeClr val="lt1"/>
-          </a:fontRef>
-        </p:style>
-        <p:txBody>
-          <a:bodyPr rtlCol="0" anchor="ctr" wrap="square" tIns="25400" bIns="25400"/>
-          <a:lstStyle/>
-          <a:p>
-            <a:pPr algn="ctr"/>
-            <a:r>
-              <a:rPr sz="1200" b="1">
-                <a:solidFill>
-                  <a:srgbClr val="FFFFFF"/>
-                </a:solidFill>
-                <a:latin typeface="PingFang TC"/>
-                <a:ea typeface="PingFang TC"/>
-              </a:rPr>
-              <a:t>is_deleted  →  410</a:t>
-            </a:r>
-          </a:p>
-        </p:txBody>
-      </p:sp>
-      <p:cxnSp>
-        <p:nvCxnSpPr>
-          <p:cNvPr id="13" name="Connector 12"/>
-          <p:cNvCxnSpPr/>
-          <p:nvPr/>
-        </p:nvCxnSpPr>
-        <p:spPr>
-          <a:xfrm>
-            <a:off x="8321040" y="1920240"/>
-            <a:ext cx="365760" cy="457200"/>
-          </a:xfrm>
-          <a:prstGeom prst="line">
-            <a:avLst/>
-          </a:prstGeom>
-          <a:ln w="15240">
-            <a:solidFill>
-              <a:srgbClr val="64748B"/>
-            </a:solidFill>
-            <a:tailEnd type="triangle" w="med" len="med"/>
-          </a:ln>
-        </p:spPr>
-        <p:style>
-          <a:lnRef idx="2">
-            <a:schemeClr val="accent1"/>
-          </a:lnRef>
-          <a:fillRef idx="0">
-            <a:schemeClr val="accent1"/>
-          </a:fillRef>
-          <a:effectRef idx="1">
-            <a:schemeClr val="accent1"/>
-          </a:effectRef>
-          <a:fontRef idx="minor">
-            <a:schemeClr val="tx1"/>
-          </a:fontRef>
-        </p:style>
-      </p:cxnSp>
-      <p:sp>
-        <p:nvSpPr>
           <p:cNvPr id="14" name="Rounded Rectangle 13"/>
           <p:cNvSpPr/>
           <p:nvPr/>
         </p:nvSpPr>
         <p:spPr>
           <a:xfrm>
-            <a:off x="8686800" y="2880360"/>
-            <a:ext cx="3017520" cy="640080"/>
-          </a:xfrm>
-          <a:prstGeom prst="roundRect">
-            <a:avLst/>
-          </a:prstGeom>
-          <a:solidFill>
-            <a:srgbClr val="DC2626"/>
-          </a:solidFill>
-          <a:ln>
-            <a:solidFill>
-              <a:srgbClr val="DC2626"/>
-            </a:solidFill>
-          </a:ln>
-          <a:effectLst/>
-        </p:spPr>
-        <p:style>
-          <a:lnRef idx="1">
-            <a:schemeClr val="accent1"/>
-          </a:lnRef>
-          <a:fillRef idx="3">
-            <a:schemeClr val="accent1"/>
-          </a:fillRef>
-          <a:effectRef idx="2">
-            <a:schemeClr val="accent1"/>
-          </a:effectRef>
-          <a:fontRef idx="minor">
-            <a:schemeClr val="lt1"/>
-          </a:fontRef>
-        </p:style>
-        <p:txBody>
-          <a:bodyPr rtlCol="0" anchor="ctr" wrap="square" tIns="25400" bIns="25400"/>
-          <a:lstStyle/>
-          <a:p>
-            <a:pPr algn="ctr"/>
-            <a:r>
-              <a:rPr sz="1200" b="1">
-                <a:solidFill>
-                  <a:srgbClr val="FFFFFF"/>
-                </a:solidFill>
-                <a:latin typeface="PingFang TC"/>
-                <a:ea typeface="PingFang TC"/>
-              </a:rPr>
-              <a:t>已過期  →  410</a:t>
-            </a:r>
-          </a:p>
-        </p:txBody>
-      </p:sp>
-      <p:cxnSp>
-        <p:nvCxnSpPr>
-          <p:cNvPr id="15" name="Connector 14"/>
-          <p:cNvCxnSpPr/>
-          <p:nvPr/>
-        </p:nvCxnSpPr>
-        <p:spPr>
-          <a:xfrm>
-            <a:off x="8321040" y="1920240"/>
-            <a:ext cx="365760" cy="1280160"/>
-          </a:xfrm>
-          <a:prstGeom prst="line">
-            <a:avLst/>
-          </a:prstGeom>
-          <a:ln w="15240">
-            <a:solidFill>
-              <a:srgbClr val="64748B"/>
-            </a:solidFill>
-            <a:tailEnd type="triangle" w="med" len="med"/>
-          </a:ln>
-        </p:spPr>
-        <p:style>
-          <a:lnRef idx="2">
-            <a:schemeClr val="accent1"/>
-          </a:lnRef>
-          <a:fillRef idx="0">
-            <a:schemeClr val="accent1"/>
-          </a:fillRef>
-          <a:effectRef idx="1">
-            <a:schemeClr val="accent1"/>
-          </a:effectRef>
-          <a:fontRef idx="minor">
-            <a:schemeClr val="tx1"/>
-          </a:fontRef>
-        </p:style>
-      </p:cxnSp>
-      <p:sp>
-        <p:nvSpPr>
-          <p:cNvPr id="16" name="Rounded Rectangle 15"/>
-          <p:cNvSpPr/>
-          <p:nvPr/>
-        </p:nvSpPr>
-        <p:spPr>
-          <a:xfrm>
-            <a:off x="8686800" y="3703320"/>
-            <a:ext cx="3017520" cy="640080"/>
-          </a:xfrm>
-          <a:prstGeom prst="roundRect">
-            <a:avLst/>
-          </a:prstGeom>
-          <a:solidFill>
-            <a:srgbClr val="059669"/>
-          </a:solidFill>
-          <a:ln>
-            <a:solidFill>
-              <a:srgbClr val="059669"/>
-            </a:solidFill>
-          </a:ln>
-          <a:effectLst/>
-        </p:spPr>
-        <p:style>
-          <a:lnRef idx="1">
-            <a:schemeClr val="accent1"/>
-          </a:lnRef>
-          <a:fillRef idx="3">
-            <a:schemeClr val="accent1"/>
-          </a:fillRef>
-          <a:effectRef idx="2">
-            <a:schemeClr val="accent1"/>
-          </a:effectRef>
-          <a:fontRef idx="minor">
-            <a:schemeClr val="lt1"/>
-          </a:fontRef>
-        </p:style>
-        <p:txBody>
-          <a:bodyPr rtlCol="0" anchor="ctr" wrap="square" tIns="25400" bIns="25400"/>
-          <a:lstStyle/>
-          <a:p>
-            <a:pPr algn="ctr"/>
-            <a:r>
-              <a:rPr sz="1200" b="1">
-                <a:solidFill>
-                  <a:srgbClr val="FFFFFF"/>
-                </a:solidFill>
-                <a:latin typeface="PingFang TC"/>
-                <a:ea typeface="PingFang TC"/>
-              </a:rPr>
-              <a:t>正常  →  ③ 回填 cache</a:t>
-            </a:r>
-          </a:p>
-        </p:txBody>
-      </p:sp>
-      <p:cxnSp>
-        <p:nvCxnSpPr>
-          <p:cNvPr id="17" name="Connector 16"/>
-          <p:cNvCxnSpPr/>
-          <p:nvPr/>
-        </p:nvCxnSpPr>
-        <p:spPr>
-          <a:xfrm>
-            <a:off x="8321040" y="1920240"/>
-            <a:ext cx="365760" cy="2103120"/>
-          </a:xfrm>
-          <a:prstGeom prst="line">
-            <a:avLst/>
-          </a:prstGeom>
-          <a:ln w="15240">
-            <a:solidFill>
-              <a:srgbClr val="64748B"/>
-            </a:solidFill>
-            <a:tailEnd type="triangle" w="med" len="med"/>
-          </a:ln>
-        </p:spPr>
-        <p:style>
-          <a:lnRef idx="2">
-            <a:schemeClr val="accent1"/>
-          </a:lnRef>
-          <a:fillRef idx="0">
-            <a:schemeClr val="accent1"/>
-          </a:fillRef>
-          <a:effectRef idx="1">
-            <a:schemeClr val="accent1"/>
-          </a:effectRef>
-          <a:fontRef idx="minor">
-            <a:schemeClr val="tx1"/>
-          </a:fontRef>
-        </p:style>
-      </p:cxnSp>
-      <p:sp>
-        <p:nvSpPr>
-          <p:cNvPr id="18" name="Rounded Rectangle 17"/>
-          <p:cNvSpPr/>
-          <p:nvPr/>
-        </p:nvSpPr>
-        <p:spPr>
-          <a:xfrm>
-            <a:off x="3017520" y="4480560"/>
-            <a:ext cx="5303520" cy="731520"/>
+            <a:off x="9784080" y="2468880"/>
+            <a:ext cx="1691640" cy="1371600"/>
           </a:xfrm>
           <a:prstGeom prst="roundRect">
             <a:avLst/>
@@ -9980,146 +11649,101 @@
           <a:p>
             <a:pPr algn="ctr"/>
             <a:r>
-              <a:rPr sz="1200" b="1">
+              <a:rPr sz="1300" b="1">
                 <a:solidFill>
                   <a:srgbClr val="FFFFFF"/>
                 </a:solidFill>
                 <a:latin typeface="PingFang TC"/>
                 <a:ea typeface="PingFang TC"/>
               </a:rPr>
-              <a:t>④ 排程非同步記 scan (BackgroundTasks) → 不擋跳轉</a:t>
-            </a:r>
-          </a:p>
-        </p:txBody>
-      </p:sp>
-      <p:sp>
-        <p:nvSpPr>
-          <p:cNvPr id="19" name="Rounded Rectangle 18"/>
-          <p:cNvSpPr/>
-          <p:nvPr/>
-        </p:nvSpPr>
-        <p:spPr>
-          <a:xfrm>
-            <a:off x="3017520" y="5394960"/>
-            <a:ext cx="5303520" cy="731520"/>
-          </a:xfrm>
-          <a:prstGeom prst="roundRect">
-            <a:avLst/>
-          </a:prstGeom>
-          <a:solidFill>
-            <a:srgbClr val="2563EB"/>
-          </a:solidFill>
-          <a:ln>
-            <a:solidFill>
-              <a:srgbClr val="2563EB"/>
-            </a:solidFill>
-          </a:ln>
-          <a:effectLst/>
-        </p:spPr>
-        <p:style>
-          <a:lnRef idx="1">
-            <a:schemeClr val="accent1"/>
-          </a:lnRef>
-          <a:fillRef idx="3">
-            <a:schemeClr val="accent1"/>
-          </a:fillRef>
-          <a:effectRef idx="2">
-            <a:schemeClr val="accent1"/>
-          </a:effectRef>
-          <a:fontRef idx="minor">
-            <a:schemeClr val="lt1"/>
-          </a:fontRef>
-        </p:style>
-        <p:txBody>
-          <a:bodyPr rtlCol="0" anchor="ctr" wrap="square" tIns="25400" bIns="25400"/>
-          <a:lstStyle/>
+              <a:t>⑥ 回應</a:t>
+            </a:r>
+          </a:p>
           <a:p>
             <a:pPr algn="ctr"/>
             <a:r>
-              <a:rPr sz="1300" b="1">
+              <a:rPr sz="1300" b="0">
                 <a:solidFill>
                   <a:srgbClr val="FFFFFF"/>
                 </a:solidFill>
                 <a:latin typeface="PingFang TC"/>
                 <a:ea typeface="PingFang TC"/>
               </a:rPr>
-              <a:t>⑤ 回 302  Location: 原始 URL  → 瀏覽器自動跟隨</a:t>
-            </a:r>
-          </a:p>
-        </p:txBody>
-      </p:sp>
-      <p:cxnSp>
-        <p:nvCxnSpPr>
-          <p:cNvPr id="20" name="Connector 19"/>
-          <p:cNvCxnSpPr/>
-          <p:nvPr/>
-        </p:nvCxnSpPr>
-        <p:spPr>
-          <a:xfrm>
-            <a:off x="4206240" y="3291840"/>
-            <a:ext cx="0" cy="1188720"/>
-          </a:xfrm>
-          <a:prstGeom prst="line">
-            <a:avLst/>
-          </a:prstGeom>
-          <a:ln w="22225">
-            <a:solidFill>
-              <a:srgbClr val="059669"/>
-            </a:solidFill>
-            <a:tailEnd type="triangle" w="med" len="med"/>
-          </a:ln>
-        </p:spPr>
-        <p:style>
-          <a:lnRef idx="2">
-            <a:schemeClr val="accent1"/>
-          </a:lnRef>
-          <a:fillRef idx="0">
-            <a:schemeClr val="accent1"/>
-          </a:fillRef>
-          <a:effectRef idx="1">
-            <a:schemeClr val="accent1"/>
-          </a:effectRef>
-          <a:fontRef idx="minor">
-            <a:schemeClr val="tx1"/>
-          </a:fontRef>
-        </p:style>
-      </p:cxnSp>
-      <p:cxnSp>
-        <p:nvCxnSpPr>
-          <p:cNvPr id="21" name="Connector 20"/>
-          <p:cNvCxnSpPr/>
-          <p:nvPr/>
-        </p:nvCxnSpPr>
-        <p:spPr>
-          <a:xfrm flipH="1">
-            <a:off x="8321040" y="4343400"/>
-            <a:ext cx="1828800" cy="502920"/>
-          </a:xfrm>
-          <a:prstGeom prst="line">
-            <a:avLst/>
-          </a:prstGeom>
-          <a:ln w="15240">
-            <a:solidFill>
-              <a:srgbClr val="059669"/>
-            </a:solidFill>
-            <a:tailEnd type="triangle" w="med" len="med"/>
-          </a:ln>
-        </p:spPr>
-        <p:style>
-          <a:lnRef idx="2">
-            <a:schemeClr val="accent1"/>
-          </a:lnRef>
-          <a:fillRef idx="0">
-            <a:schemeClr val="accent1"/>
-          </a:fillRef>
-          <a:effectRef idx="1">
-            <a:schemeClr val="accent1"/>
-          </a:effectRef>
-          <a:fontRef idx="minor">
-            <a:schemeClr val="tx1"/>
-          </a:fontRef>
-        </p:style>
-      </p:cxnSp>
+              <a:t>token / short_url</a:t>
+            </a:r>
+          </a:p>
+          <a:p>
+            <a:pPr algn="ctr"/>
+            <a:r>
+              <a:rPr sz="1300" b="0">
+                <a:solidFill>
+                  <a:srgbClr val="FFFFFF"/>
+                </a:solidFill>
+                <a:latin typeface="PingFang TC"/>
+                <a:ea typeface="PingFang TC"/>
+              </a:rPr>
+              <a:t>/ qr_code_url</a:t>
+            </a:r>
+          </a:p>
+        </p:txBody>
+      </p:sp>
+      <p:sp>
+        <p:nvSpPr>
+          <p:cNvPr id="15" name="TextBox 14"/>
+          <p:cNvSpPr txBox="1"/>
+          <p:nvPr/>
+        </p:nvSpPr>
+        <p:spPr>
+          <a:xfrm>
+            <a:off x="502920" y="4297680"/>
+            <a:ext cx="10972800" cy="1097280"/>
+          </a:xfrm>
+          <a:prstGeom prst="rect">
+            <a:avLst/>
+          </a:prstGeom>
+          <a:noFill/>
+        </p:spPr>
+        <p:txBody>
+          <a:bodyPr wrap="square" anchor="t">
+            <a:spAutoFit/>
+          </a:bodyPr>
+          <a:lstStyle/>
+          <a:p>
+            <a:pPr algn="l">
+              <a:spcAft>
+                <a:spcPts val="600"/>
+              </a:spcAft>
+            </a:pPr>
+            <a:r>
+              <a:rPr sz="1400" b="1">
+                <a:solidFill>
+                  <a:srgbClr val="0F172A"/>
+                </a:solidFill>
+                <a:latin typeface="PingFang TC"/>
+                <a:ea typeface="PingFang TC"/>
+              </a:rPr>
+              <a:t>關鍵：第 ③ 步「直接插入 + UNIQUE 例外重試」取代 repo 的「先查再插」，消除高並發 race。</a:t>
+            </a:r>
+          </a:p>
+          <a:p>
+            <a:pPr algn="l">
+              <a:spcAft>
+                <a:spcPts val="400"/>
+              </a:spcAft>
+            </a:pPr>
+            <a:r>
+              <a:rPr sz="1300" b="0">
+                <a:solidFill>
+                  <a:srgbClr val="64748B"/>
+                </a:solidFill>
+                <a:latin typeface="PingFang TC"/>
+                <a:ea typeface="PingFang TC"/>
+              </a:rPr>
+              <a:t>token 碰撞在大規模下必然發生，靠 DB UNIQUE + 重試兜底（nonce 只防『同 URL 同 token』，不防碰撞）。</a:t>
+            </a:r>
+          </a:p>
+        </p:txBody>
+      </p:sp>
     </p:spTree>
   </p:cSld>
   <p:clrMapOvr>
@@ -10217,7 +11841,7 @@
                 <a:latin typeface="PingFang TC"/>
                 <a:ea typeface="PingFang TC"/>
               </a:rPr>
-              <a:t>07 · QR IMAGE</a:t>
+              <a:t>06 · REDIRECT FLOW</a:t>
             </a:r>
           </a:p>
           <a:p>
@@ -10234,7 +11858,7 @@
                 <a:latin typeface="PingFang TC"/>
                 <a:ea typeface="PingFang TC"/>
               </a:rPr>
-              <a:t>取 QR 圖片流程  ·  GET /api/v1/qr/{token}/image</a:t>
+              <a:t>掃描 / Redirect 流程（&lt; 100ms 關鍵路徑）</a:t>
             </a:r>
           </a:p>
         </p:txBody>
@@ -10247,8 +11871,754 @@
         </p:nvSpPr>
         <p:spPr>
           <a:xfrm>
-            <a:off x="457200" y="2194560"/>
-            <a:ext cx="1737360" cy="1371600"/>
+            <a:off x="548640" y="1554480"/>
+            <a:ext cx="2103120" cy="731520"/>
+          </a:xfrm>
+          <a:prstGeom prst="roundRect">
+            <a:avLst/>
+          </a:prstGeom>
+          <a:solidFill>
+            <a:srgbClr val="64748B"/>
+          </a:solidFill>
+          <a:ln>
+            <a:solidFill>
+              <a:srgbClr val="64748B"/>
+            </a:solidFill>
+          </a:ln>
+          <a:effectLst/>
+        </p:spPr>
+        <p:style>
+          <a:lnRef idx="1">
+            <a:schemeClr val="accent1"/>
+          </a:lnRef>
+          <a:fillRef idx="3">
+            <a:schemeClr val="accent1"/>
+          </a:fillRef>
+          <a:effectRef idx="2">
+            <a:schemeClr val="accent1"/>
+          </a:effectRef>
+          <a:fontRef idx="minor">
+            <a:schemeClr val="lt1"/>
+          </a:fontRef>
+        </p:style>
+        <p:txBody>
+          <a:bodyPr rtlCol="0" anchor="ctr" wrap="square" tIns="25400" bIns="25400"/>
+          <a:lstStyle/>
+          <a:p>
+            <a:pPr algn="ctr"/>
+            <a:r>
+              <a:rPr sz="1200" b="1">
+                <a:solidFill>
+                  <a:srgbClr val="FFFFFF"/>
+                </a:solidFill>
+                <a:latin typeface="PingFang TC"/>
+                <a:ea typeface="PingFang TC"/>
+              </a:rPr>
+              <a:t>GET /r/{token}</a:t>
+            </a:r>
+          </a:p>
+          <a:p>
+            <a:pPr algn="ctr"/>
+            <a:r>
+              <a:rPr sz="1200" b="0">
+                <a:solidFill>
+                  <a:srgbClr val="FFFFFF"/>
+                </a:solidFill>
+                <a:latin typeface="PingFang TC"/>
+                <a:ea typeface="PingFang TC"/>
+              </a:rPr>
+              <a:t>掃描者瀏覽器</a:t>
+            </a:r>
+          </a:p>
+        </p:txBody>
+      </p:sp>
+      <p:sp>
+        <p:nvSpPr>
+          <p:cNvPr id="5" name="Rounded Rectangle 4"/>
+          <p:cNvSpPr/>
+          <p:nvPr/>
+        </p:nvSpPr>
+        <p:spPr>
+          <a:xfrm>
+            <a:off x="3017520" y="1554480"/>
+            <a:ext cx="2377440" cy="731520"/>
+          </a:xfrm>
+          <a:prstGeom prst="roundRect">
+            <a:avLst/>
+          </a:prstGeom>
+          <a:solidFill>
+            <a:srgbClr val="DC2626"/>
+          </a:solidFill>
+          <a:ln>
+            <a:solidFill>
+              <a:srgbClr val="DC2626"/>
+            </a:solidFill>
+          </a:ln>
+          <a:effectLst/>
+        </p:spPr>
+        <p:style>
+          <a:lnRef idx="1">
+            <a:schemeClr val="accent1"/>
+          </a:lnRef>
+          <a:fillRef idx="3">
+            <a:schemeClr val="accent1"/>
+          </a:fillRef>
+          <a:effectRef idx="2">
+            <a:schemeClr val="accent1"/>
+          </a:effectRef>
+          <a:fontRef idx="minor">
+            <a:schemeClr val="lt1"/>
+          </a:fontRef>
+        </p:style>
+        <p:txBody>
+          <a:bodyPr rtlCol="0" anchor="ctr" wrap="square" tIns="25400" bIns="25400"/>
+          <a:lstStyle/>
+          <a:p>
+            <a:pPr algn="ctr"/>
+            <a:r>
+              <a:rPr sz="1300" b="1">
+                <a:solidFill>
+                  <a:srgbClr val="FFFFFF"/>
+                </a:solidFill>
+                <a:latin typeface="PingFang TC"/>
+                <a:ea typeface="PingFang TC"/>
+              </a:rPr>
+              <a:t>① 查 Cache (Redis)</a:t>
+            </a:r>
+          </a:p>
+        </p:txBody>
+      </p:sp>
+      <p:cxnSp>
+        <p:nvCxnSpPr>
+          <p:cNvPr id="6" name="Connector 5"/>
+          <p:cNvCxnSpPr/>
+          <p:nvPr/>
+        </p:nvCxnSpPr>
+        <p:spPr>
+          <a:xfrm>
+            <a:off x="2651760" y="1920240"/>
+            <a:ext cx="365760" cy="0"/>
+          </a:xfrm>
+          <a:prstGeom prst="line">
+            <a:avLst/>
+          </a:prstGeom>
+          <a:ln w="22225">
+            <a:solidFill>
+              <a:srgbClr val="64748B"/>
+            </a:solidFill>
+            <a:tailEnd type="triangle" w="med" len="med"/>
+          </a:ln>
+        </p:spPr>
+        <p:style>
+          <a:lnRef idx="2">
+            <a:schemeClr val="accent1"/>
+          </a:lnRef>
+          <a:fillRef idx="0">
+            <a:schemeClr val="accent1"/>
+          </a:fillRef>
+          <a:effectRef idx="1">
+            <a:schemeClr val="accent1"/>
+          </a:effectRef>
+          <a:fontRef idx="minor">
+            <a:schemeClr val="tx1"/>
+          </a:fontRef>
+        </p:style>
+      </p:cxnSp>
+      <p:sp>
+        <p:nvSpPr>
+          <p:cNvPr id="7" name="Rounded Rectangle 6"/>
+          <p:cNvSpPr/>
+          <p:nvPr/>
+        </p:nvSpPr>
+        <p:spPr>
+          <a:xfrm>
+            <a:off x="3017520" y="2651760"/>
+            <a:ext cx="2377440" cy="640080"/>
+          </a:xfrm>
+          <a:prstGeom prst="roundRect">
+            <a:avLst/>
+          </a:prstGeom>
+          <a:solidFill>
+            <a:srgbClr val="059669"/>
+          </a:solidFill>
+          <a:ln>
+            <a:solidFill>
+              <a:srgbClr val="059669"/>
+            </a:solidFill>
+          </a:ln>
+          <a:effectLst/>
+        </p:spPr>
+        <p:style>
+          <a:lnRef idx="1">
+            <a:schemeClr val="accent1"/>
+          </a:lnRef>
+          <a:fillRef idx="3">
+            <a:schemeClr val="accent1"/>
+          </a:fillRef>
+          <a:effectRef idx="2">
+            <a:schemeClr val="accent1"/>
+          </a:effectRef>
+          <a:fontRef idx="minor">
+            <a:schemeClr val="lt1"/>
+          </a:fontRef>
+        </p:style>
+        <p:txBody>
+          <a:bodyPr rtlCol="0" anchor="ctr" wrap="square" tIns="25400" bIns="25400"/>
+          <a:lstStyle/>
+          <a:p>
+            <a:pPr algn="ctr"/>
+            <a:r>
+              <a:rPr sz="1200" b="1">
+                <a:solidFill>
+                  <a:srgbClr val="FFFFFF"/>
+                </a:solidFill>
+                <a:latin typeface="PingFang TC"/>
+                <a:ea typeface="PingFang TC"/>
+              </a:rPr>
+              <a:t>命中 + 未過期</a:t>
+            </a:r>
+          </a:p>
+        </p:txBody>
+      </p:sp>
+      <p:sp>
+        <p:nvSpPr>
+          <p:cNvPr id="8" name="Rounded Rectangle 7"/>
+          <p:cNvSpPr/>
+          <p:nvPr/>
+        </p:nvSpPr>
+        <p:spPr>
+          <a:xfrm>
+            <a:off x="5852160" y="1554480"/>
+            <a:ext cx="2468880" cy="731520"/>
+          </a:xfrm>
+          <a:prstGeom prst="roundRect">
+            <a:avLst/>
+          </a:prstGeom>
+          <a:solidFill>
+            <a:srgbClr val="059669"/>
+          </a:solidFill>
+          <a:ln>
+            <a:solidFill>
+              <a:srgbClr val="059669"/>
+            </a:solidFill>
+          </a:ln>
+          <a:effectLst/>
+        </p:spPr>
+        <p:style>
+          <a:lnRef idx="1">
+            <a:schemeClr val="accent1"/>
+          </a:lnRef>
+          <a:fillRef idx="3">
+            <a:schemeClr val="accent1"/>
+          </a:fillRef>
+          <a:effectRef idx="2">
+            <a:schemeClr val="accent1"/>
+          </a:effectRef>
+          <a:fontRef idx="minor">
+            <a:schemeClr val="lt1"/>
+          </a:fontRef>
+        </p:style>
+        <p:txBody>
+          <a:bodyPr rtlCol="0" anchor="ctr" wrap="square" tIns="25400" bIns="25400"/>
+          <a:lstStyle/>
+          <a:p>
+            <a:pPr algn="ctr"/>
+            <a:r>
+              <a:rPr sz="1200" b="1">
+                <a:solidFill>
+                  <a:srgbClr val="FFFFFF"/>
+                </a:solidFill>
+                <a:latin typeface="PingFang TC"/>
+                <a:ea typeface="PingFang TC"/>
+              </a:rPr>
+              <a:t>② miss → 查 DB</a:t>
+            </a:r>
+          </a:p>
+          <a:p>
+            <a:pPr algn="ctr"/>
+            <a:r>
+              <a:rPr sz="1200" b="0">
+                <a:solidFill>
+                  <a:srgbClr val="FFFFFF"/>
+                </a:solidFill>
+                <a:latin typeface="PingFang TC"/>
+                <a:ea typeface="PingFang TC"/>
+              </a:rPr>
+              <a:t>(read replica)</a:t>
+            </a:r>
+          </a:p>
+        </p:txBody>
+      </p:sp>
+      <p:cxnSp>
+        <p:nvCxnSpPr>
+          <p:cNvPr id="9" name="Connector 8"/>
+          <p:cNvCxnSpPr/>
+          <p:nvPr/>
+        </p:nvCxnSpPr>
+        <p:spPr>
+          <a:xfrm>
+            <a:off x="5394960" y="1920240"/>
+            <a:ext cx="457200" cy="0"/>
+          </a:xfrm>
+          <a:prstGeom prst="line">
+            <a:avLst/>
+          </a:prstGeom>
+          <a:ln w="22225">
+            <a:solidFill>
+              <a:srgbClr val="64748B"/>
+            </a:solidFill>
+            <a:tailEnd type="triangle" w="med" len="med"/>
+          </a:ln>
+        </p:spPr>
+        <p:style>
+          <a:lnRef idx="2">
+            <a:schemeClr val="accent1"/>
+          </a:lnRef>
+          <a:fillRef idx="0">
+            <a:schemeClr val="accent1"/>
+          </a:fillRef>
+          <a:effectRef idx="1">
+            <a:schemeClr val="accent1"/>
+          </a:effectRef>
+          <a:fontRef idx="minor">
+            <a:schemeClr val="tx1"/>
+          </a:fontRef>
+        </p:style>
+      </p:cxnSp>
+      <p:sp>
+        <p:nvSpPr>
+          <p:cNvPr id="10" name="Rounded Rectangle 9"/>
+          <p:cNvSpPr/>
+          <p:nvPr/>
+        </p:nvSpPr>
+        <p:spPr>
+          <a:xfrm>
+            <a:off x="8686800" y="1234440"/>
+            <a:ext cx="3017520" cy="640080"/>
+          </a:xfrm>
+          <a:prstGeom prst="roundRect">
+            <a:avLst/>
+          </a:prstGeom>
+          <a:solidFill>
+            <a:srgbClr val="DC2626"/>
+          </a:solidFill>
+          <a:ln>
+            <a:solidFill>
+              <a:srgbClr val="DC2626"/>
+            </a:solidFill>
+          </a:ln>
+          <a:effectLst/>
+        </p:spPr>
+        <p:style>
+          <a:lnRef idx="1">
+            <a:schemeClr val="accent1"/>
+          </a:lnRef>
+          <a:fillRef idx="3">
+            <a:schemeClr val="accent1"/>
+          </a:fillRef>
+          <a:effectRef idx="2">
+            <a:schemeClr val="accent1"/>
+          </a:effectRef>
+          <a:fontRef idx="minor">
+            <a:schemeClr val="lt1"/>
+          </a:fontRef>
+        </p:style>
+        <p:txBody>
+          <a:bodyPr rtlCol="0" anchor="ctr" wrap="square" tIns="25400" bIns="25400"/>
+          <a:lstStyle/>
+          <a:p>
+            <a:pPr algn="ctr"/>
+            <a:r>
+              <a:rPr sz="1200" b="1">
+                <a:solidFill>
+                  <a:srgbClr val="FFFFFF"/>
+                </a:solidFill>
+                <a:latin typeface="PingFang TC"/>
+                <a:ea typeface="PingFang TC"/>
+              </a:rPr>
+              <a:t>找不到  →  404</a:t>
+            </a:r>
+          </a:p>
+        </p:txBody>
+      </p:sp>
+      <p:cxnSp>
+        <p:nvCxnSpPr>
+          <p:cNvPr id="11" name="Connector 10"/>
+          <p:cNvCxnSpPr/>
+          <p:nvPr/>
+        </p:nvCxnSpPr>
+        <p:spPr>
+          <a:xfrm flipV="1">
+            <a:off x="8321040" y="1554480"/>
+            <a:ext cx="365760" cy="365760"/>
+          </a:xfrm>
+          <a:prstGeom prst="line">
+            <a:avLst/>
+          </a:prstGeom>
+          <a:ln w="15240">
+            <a:solidFill>
+              <a:srgbClr val="64748B"/>
+            </a:solidFill>
+            <a:tailEnd type="triangle" w="med" len="med"/>
+          </a:ln>
+        </p:spPr>
+        <p:style>
+          <a:lnRef idx="2">
+            <a:schemeClr val="accent1"/>
+          </a:lnRef>
+          <a:fillRef idx="0">
+            <a:schemeClr val="accent1"/>
+          </a:fillRef>
+          <a:effectRef idx="1">
+            <a:schemeClr val="accent1"/>
+          </a:effectRef>
+          <a:fontRef idx="minor">
+            <a:schemeClr val="tx1"/>
+          </a:fontRef>
+        </p:style>
+      </p:cxnSp>
+      <p:sp>
+        <p:nvSpPr>
+          <p:cNvPr id="12" name="Rounded Rectangle 11"/>
+          <p:cNvSpPr/>
+          <p:nvPr/>
+        </p:nvSpPr>
+        <p:spPr>
+          <a:xfrm>
+            <a:off x="8686800" y="2057400"/>
+            <a:ext cx="3017520" cy="640080"/>
+          </a:xfrm>
+          <a:prstGeom prst="roundRect">
+            <a:avLst/>
+          </a:prstGeom>
+          <a:solidFill>
+            <a:srgbClr val="DC2626"/>
+          </a:solidFill>
+          <a:ln>
+            <a:solidFill>
+              <a:srgbClr val="DC2626"/>
+            </a:solidFill>
+          </a:ln>
+          <a:effectLst/>
+        </p:spPr>
+        <p:style>
+          <a:lnRef idx="1">
+            <a:schemeClr val="accent1"/>
+          </a:lnRef>
+          <a:fillRef idx="3">
+            <a:schemeClr val="accent1"/>
+          </a:fillRef>
+          <a:effectRef idx="2">
+            <a:schemeClr val="accent1"/>
+          </a:effectRef>
+          <a:fontRef idx="minor">
+            <a:schemeClr val="lt1"/>
+          </a:fontRef>
+        </p:style>
+        <p:txBody>
+          <a:bodyPr rtlCol="0" anchor="ctr" wrap="square" tIns="25400" bIns="25400"/>
+          <a:lstStyle/>
+          <a:p>
+            <a:pPr algn="ctr"/>
+            <a:r>
+              <a:rPr sz="1200" b="1">
+                <a:solidFill>
+                  <a:srgbClr val="FFFFFF"/>
+                </a:solidFill>
+                <a:latin typeface="PingFang TC"/>
+                <a:ea typeface="PingFang TC"/>
+              </a:rPr>
+              <a:t>is_deleted  →  410</a:t>
+            </a:r>
+          </a:p>
+        </p:txBody>
+      </p:sp>
+      <p:cxnSp>
+        <p:nvCxnSpPr>
+          <p:cNvPr id="13" name="Connector 12"/>
+          <p:cNvCxnSpPr/>
+          <p:nvPr/>
+        </p:nvCxnSpPr>
+        <p:spPr>
+          <a:xfrm>
+            <a:off x="8321040" y="1920240"/>
+            <a:ext cx="365760" cy="457200"/>
+          </a:xfrm>
+          <a:prstGeom prst="line">
+            <a:avLst/>
+          </a:prstGeom>
+          <a:ln w="15240">
+            <a:solidFill>
+              <a:srgbClr val="64748B"/>
+            </a:solidFill>
+            <a:tailEnd type="triangle" w="med" len="med"/>
+          </a:ln>
+        </p:spPr>
+        <p:style>
+          <a:lnRef idx="2">
+            <a:schemeClr val="accent1"/>
+          </a:lnRef>
+          <a:fillRef idx="0">
+            <a:schemeClr val="accent1"/>
+          </a:fillRef>
+          <a:effectRef idx="1">
+            <a:schemeClr val="accent1"/>
+          </a:effectRef>
+          <a:fontRef idx="minor">
+            <a:schemeClr val="tx1"/>
+          </a:fontRef>
+        </p:style>
+      </p:cxnSp>
+      <p:sp>
+        <p:nvSpPr>
+          <p:cNvPr id="14" name="Rounded Rectangle 13"/>
+          <p:cNvSpPr/>
+          <p:nvPr/>
+        </p:nvSpPr>
+        <p:spPr>
+          <a:xfrm>
+            <a:off x="8686800" y="2880360"/>
+            <a:ext cx="3017520" cy="640080"/>
+          </a:xfrm>
+          <a:prstGeom prst="roundRect">
+            <a:avLst/>
+          </a:prstGeom>
+          <a:solidFill>
+            <a:srgbClr val="DC2626"/>
+          </a:solidFill>
+          <a:ln>
+            <a:solidFill>
+              <a:srgbClr val="DC2626"/>
+            </a:solidFill>
+          </a:ln>
+          <a:effectLst/>
+        </p:spPr>
+        <p:style>
+          <a:lnRef idx="1">
+            <a:schemeClr val="accent1"/>
+          </a:lnRef>
+          <a:fillRef idx="3">
+            <a:schemeClr val="accent1"/>
+          </a:fillRef>
+          <a:effectRef idx="2">
+            <a:schemeClr val="accent1"/>
+          </a:effectRef>
+          <a:fontRef idx="minor">
+            <a:schemeClr val="lt1"/>
+          </a:fontRef>
+        </p:style>
+        <p:txBody>
+          <a:bodyPr rtlCol="0" anchor="ctr" wrap="square" tIns="25400" bIns="25400"/>
+          <a:lstStyle/>
+          <a:p>
+            <a:pPr algn="ctr"/>
+            <a:r>
+              <a:rPr sz="1200" b="1">
+                <a:solidFill>
+                  <a:srgbClr val="FFFFFF"/>
+                </a:solidFill>
+                <a:latin typeface="PingFang TC"/>
+                <a:ea typeface="PingFang TC"/>
+              </a:rPr>
+              <a:t>已過期  →  410</a:t>
+            </a:r>
+          </a:p>
+        </p:txBody>
+      </p:sp>
+      <p:cxnSp>
+        <p:nvCxnSpPr>
+          <p:cNvPr id="15" name="Connector 14"/>
+          <p:cNvCxnSpPr/>
+          <p:nvPr/>
+        </p:nvCxnSpPr>
+        <p:spPr>
+          <a:xfrm>
+            <a:off x="8321040" y="1920240"/>
+            <a:ext cx="365760" cy="1280160"/>
+          </a:xfrm>
+          <a:prstGeom prst="line">
+            <a:avLst/>
+          </a:prstGeom>
+          <a:ln w="15240">
+            <a:solidFill>
+              <a:srgbClr val="64748B"/>
+            </a:solidFill>
+            <a:tailEnd type="triangle" w="med" len="med"/>
+          </a:ln>
+        </p:spPr>
+        <p:style>
+          <a:lnRef idx="2">
+            <a:schemeClr val="accent1"/>
+          </a:lnRef>
+          <a:fillRef idx="0">
+            <a:schemeClr val="accent1"/>
+          </a:fillRef>
+          <a:effectRef idx="1">
+            <a:schemeClr val="accent1"/>
+          </a:effectRef>
+          <a:fontRef idx="minor">
+            <a:schemeClr val="tx1"/>
+          </a:fontRef>
+        </p:style>
+      </p:cxnSp>
+      <p:sp>
+        <p:nvSpPr>
+          <p:cNvPr id="16" name="Rounded Rectangle 15"/>
+          <p:cNvSpPr/>
+          <p:nvPr/>
+        </p:nvSpPr>
+        <p:spPr>
+          <a:xfrm>
+            <a:off x="8686800" y="3703320"/>
+            <a:ext cx="3017520" cy="640080"/>
+          </a:xfrm>
+          <a:prstGeom prst="roundRect">
+            <a:avLst/>
+          </a:prstGeom>
+          <a:solidFill>
+            <a:srgbClr val="059669"/>
+          </a:solidFill>
+          <a:ln>
+            <a:solidFill>
+              <a:srgbClr val="059669"/>
+            </a:solidFill>
+          </a:ln>
+          <a:effectLst/>
+        </p:spPr>
+        <p:style>
+          <a:lnRef idx="1">
+            <a:schemeClr val="accent1"/>
+          </a:lnRef>
+          <a:fillRef idx="3">
+            <a:schemeClr val="accent1"/>
+          </a:fillRef>
+          <a:effectRef idx="2">
+            <a:schemeClr val="accent1"/>
+          </a:effectRef>
+          <a:fontRef idx="minor">
+            <a:schemeClr val="lt1"/>
+          </a:fontRef>
+        </p:style>
+        <p:txBody>
+          <a:bodyPr rtlCol="0" anchor="ctr" wrap="square" tIns="25400" bIns="25400"/>
+          <a:lstStyle/>
+          <a:p>
+            <a:pPr algn="ctr"/>
+            <a:r>
+              <a:rPr sz="1200" b="1">
+                <a:solidFill>
+                  <a:srgbClr val="FFFFFF"/>
+                </a:solidFill>
+                <a:latin typeface="PingFang TC"/>
+                <a:ea typeface="PingFang TC"/>
+              </a:rPr>
+              <a:t>正常  →  ③ 回填 cache</a:t>
+            </a:r>
+          </a:p>
+        </p:txBody>
+      </p:sp>
+      <p:cxnSp>
+        <p:nvCxnSpPr>
+          <p:cNvPr id="17" name="Connector 16"/>
+          <p:cNvCxnSpPr/>
+          <p:nvPr/>
+        </p:nvCxnSpPr>
+        <p:spPr>
+          <a:xfrm>
+            <a:off x="8321040" y="1920240"/>
+            <a:ext cx="365760" cy="2103120"/>
+          </a:xfrm>
+          <a:prstGeom prst="line">
+            <a:avLst/>
+          </a:prstGeom>
+          <a:ln w="15240">
+            <a:solidFill>
+              <a:srgbClr val="64748B"/>
+            </a:solidFill>
+            <a:tailEnd type="triangle" w="med" len="med"/>
+          </a:ln>
+        </p:spPr>
+        <p:style>
+          <a:lnRef idx="2">
+            <a:schemeClr val="accent1"/>
+          </a:lnRef>
+          <a:fillRef idx="0">
+            <a:schemeClr val="accent1"/>
+          </a:fillRef>
+          <a:effectRef idx="1">
+            <a:schemeClr val="accent1"/>
+          </a:effectRef>
+          <a:fontRef idx="minor">
+            <a:schemeClr val="tx1"/>
+          </a:fontRef>
+        </p:style>
+      </p:cxnSp>
+      <p:sp>
+        <p:nvSpPr>
+          <p:cNvPr id="18" name="Rounded Rectangle 17"/>
+          <p:cNvSpPr/>
+          <p:nvPr/>
+        </p:nvSpPr>
+        <p:spPr>
+          <a:xfrm>
+            <a:off x="3017520" y="4480560"/>
+            <a:ext cx="5303520" cy="731520"/>
+          </a:xfrm>
+          <a:prstGeom prst="roundRect">
+            <a:avLst/>
+          </a:prstGeom>
+          <a:solidFill>
+            <a:srgbClr val="D97706"/>
+          </a:solidFill>
+          <a:ln>
+            <a:solidFill>
+              <a:srgbClr val="D97706"/>
+            </a:solidFill>
+          </a:ln>
+          <a:effectLst/>
+        </p:spPr>
+        <p:style>
+          <a:lnRef idx="1">
+            <a:schemeClr val="accent1"/>
+          </a:lnRef>
+          <a:fillRef idx="3">
+            <a:schemeClr val="accent1"/>
+          </a:fillRef>
+          <a:effectRef idx="2">
+            <a:schemeClr val="accent1"/>
+          </a:effectRef>
+          <a:fontRef idx="minor">
+            <a:schemeClr val="lt1"/>
+          </a:fontRef>
+        </p:style>
+        <p:txBody>
+          <a:bodyPr rtlCol="0" anchor="ctr" wrap="square" tIns="25400" bIns="25400"/>
+          <a:lstStyle/>
+          <a:p>
+            <a:pPr algn="ctr"/>
+            <a:r>
+              <a:rPr sz="1200" b="1">
+                <a:solidFill>
+                  <a:srgbClr val="FFFFFF"/>
+                </a:solidFill>
+                <a:latin typeface="PingFang TC"/>
+                <a:ea typeface="PingFang TC"/>
+              </a:rPr>
+              <a:t>④ 排程非同步記 scan (BackgroundTasks) → 不擋跳轉</a:t>
+            </a:r>
+          </a:p>
+        </p:txBody>
+      </p:sp>
+      <p:sp>
+        <p:nvSpPr>
+          <p:cNvPr id="19" name="Rounded Rectangle 18"/>
+          <p:cNvSpPr/>
+          <p:nvPr/>
+        </p:nvSpPr>
+        <p:spPr>
+          <a:xfrm>
+            <a:off x="3017520" y="5394960"/>
+            <a:ext cx="5303520" cy="731520"/>
           </a:xfrm>
           <a:prstGeom prst="roundRect">
             <a:avLst/>
@@ -10283,61 +12653,35 @@
           <a:p>
             <a:pPr algn="ctr"/>
             <a:r>
-              <a:rPr sz="1200" b="1">
+              <a:rPr sz="1300" b="1">
                 <a:solidFill>
                   <a:srgbClr val="FFFFFF"/>
                 </a:solidFill>
                 <a:latin typeface="PingFang TC"/>
                 <a:ea typeface="PingFang TC"/>
               </a:rPr>
-              <a:t>① 驗證 token</a:t>
-            </a:r>
-          </a:p>
-          <a:p>
-            <a:pPr algn="ctr"/>
-            <a:r>
-              <a:rPr sz="1200" b="0">
-                <a:solidFill>
-                  <a:srgbClr val="FFFFFF"/>
-                </a:solidFill>
-                <a:latin typeface="PingFang TC"/>
-                <a:ea typeface="PingFang TC"/>
-              </a:rPr>
-              <a:t>找不到/已軟刪</a:t>
-            </a:r>
-          </a:p>
-          <a:p>
-            <a:pPr algn="ctr"/>
-            <a:r>
-              <a:rPr sz="1200" b="0">
-                <a:solidFill>
-                  <a:srgbClr val="FFFFFF"/>
-                </a:solidFill>
-                <a:latin typeface="PingFang TC"/>
-                <a:ea typeface="PingFang TC"/>
-              </a:rPr>
-              <a:t>→ 404</a:t>
+              <a:t>⑤ 回 302  Location: 原始 URL  → 瀏覽器自動跟隨</a:t>
             </a:r>
           </a:p>
         </p:txBody>
       </p:sp>
       <p:cxnSp>
         <p:nvCxnSpPr>
-          <p:cNvPr id="5" name="Connector 4"/>
+          <p:cNvPr id="20" name="Connector 19"/>
           <p:cNvCxnSpPr/>
           <p:nvPr/>
         </p:nvCxnSpPr>
         <p:spPr>
           <a:xfrm>
-            <a:off x="2194560" y="2880360"/>
-            <a:ext cx="128016" cy="0"/>
+            <a:off x="4206240" y="3291840"/>
+            <a:ext cx="0" cy="1188720"/>
           </a:xfrm>
           <a:prstGeom prst="line">
             <a:avLst/>
           </a:prstGeom>
           <a:ln w="22225">
             <a:solidFill>
-              <a:srgbClr val="64748B"/>
+              <a:srgbClr val="059669"/>
             </a:solidFill>
             <a:tailEnd type="triangle" w="med" len="med"/>
           </a:ln>
@@ -10357,105 +12701,23 @@
           </a:fontRef>
         </p:style>
       </p:cxnSp>
-      <p:sp>
-        <p:nvSpPr>
-          <p:cNvPr id="6" name="Rounded Rectangle 5"/>
-          <p:cNvSpPr/>
-          <p:nvPr/>
-        </p:nvSpPr>
-        <p:spPr>
-          <a:xfrm>
-            <a:off x="2322576" y="2194560"/>
-            <a:ext cx="1737360" cy="1371600"/>
-          </a:xfrm>
-          <a:prstGeom prst="roundRect">
-            <a:avLst/>
-          </a:prstGeom>
-          <a:solidFill>
-            <a:srgbClr val="0EA5E9"/>
-          </a:solidFill>
-          <a:ln>
-            <a:solidFill>
-              <a:srgbClr val="0EA5E9"/>
-            </a:solidFill>
-          </a:ln>
-          <a:effectLst/>
-        </p:spPr>
-        <p:style>
-          <a:lnRef idx="1">
-            <a:schemeClr val="accent1"/>
-          </a:lnRef>
-          <a:fillRef idx="3">
-            <a:schemeClr val="accent1"/>
-          </a:fillRef>
-          <a:effectRef idx="2">
-            <a:schemeClr val="accent1"/>
-          </a:effectRef>
-          <a:fontRef idx="minor">
-            <a:schemeClr val="lt1"/>
-          </a:fontRef>
-        </p:style>
-        <p:txBody>
-          <a:bodyPr rtlCol="0" anchor="ctr" wrap="square" tIns="25400" bIns="25400"/>
-          <a:lstStyle/>
-          <a:p>
-            <a:pPr algn="ctr"/>
-            <a:r>
-              <a:rPr sz="1200" b="1">
-                <a:solidFill>
-                  <a:srgbClr val="FFFFFF"/>
-                </a:solidFill>
-                <a:latin typeface="PingFang TC"/>
-                <a:ea typeface="PingFang TC"/>
-              </a:rPr>
-              <a:t>② 組短碼</a:t>
-            </a:r>
-          </a:p>
-          <a:p>
-            <a:pPr algn="ctr"/>
-            <a:r>
-              <a:rPr sz="1200" b="0">
-                <a:solidFill>
-                  <a:srgbClr val="FFFFFF"/>
-                </a:solidFill>
-                <a:latin typeface="PingFang TC"/>
-                <a:ea typeface="PingFang TC"/>
-              </a:rPr>
-              <a:t>short_url =</a:t>
-            </a:r>
-          </a:p>
-          <a:p>
-            <a:pPr algn="ctr"/>
-            <a:r>
-              <a:rPr sz="1200" b="0">
-                <a:solidFill>
-                  <a:srgbClr val="FFFFFF"/>
-                </a:solidFill>
-                <a:latin typeface="PingFang TC"/>
-                <a:ea typeface="PingFang TC"/>
-              </a:rPr>
-              <a:t>BASE_URL+"/r/{token}"</a:t>
-            </a:r>
-          </a:p>
-        </p:txBody>
-      </p:sp>
       <p:cxnSp>
         <p:nvCxnSpPr>
-          <p:cNvPr id="7" name="Connector 6"/>
+          <p:cNvPr id="21" name="Connector 20"/>
           <p:cNvCxnSpPr/>
           <p:nvPr/>
         </p:nvCxnSpPr>
         <p:spPr>
-          <a:xfrm>
-            <a:off x="4059936" y="2880360"/>
-            <a:ext cx="128016" cy="0"/>
+          <a:xfrm flipH="1">
+            <a:off x="8321040" y="4343400"/>
+            <a:ext cx="1828800" cy="502920"/>
           </a:xfrm>
           <a:prstGeom prst="line">
             <a:avLst/>
           </a:prstGeom>
-          <a:ln w="22225">
+          <a:ln w="15240">
             <a:solidFill>
-              <a:srgbClr val="64748B"/>
+              <a:srgbClr val="059669"/>
             </a:solidFill>
             <a:tailEnd type="triangle" w="med" len="med"/>
           </a:ln>
@@ -10475,533 +12737,6 @@
           </a:fontRef>
         </p:style>
       </p:cxnSp>
-      <p:sp>
-        <p:nvSpPr>
-          <p:cNvPr id="8" name="Rounded Rectangle 7"/>
-          <p:cNvSpPr/>
-          <p:nvPr/>
-        </p:nvSpPr>
-        <p:spPr>
-          <a:xfrm>
-            <a:off x="4187952" y="2194560"/>
-            <a:ext cx="1737360" cy="1371600"/>
-          </a:xfrm>
-          <a:prstGeom prst="roundRect">
-            <a:avLst/>
-          </a:prstGeom>
-          <a:solidFill>
-            <a:srgbClr val="059669"/>
-          </a:solidFill>
-          <a:ln>
-            <a:solidFill>
-              <a:srgbClr val="059669"/>
-            </a:solidFill>
-          </a:ln>
-          <a:effectLst/>
-        </p:spPr>
-        <p:style>
-          <a:lnRef idx="1">
-            <a:schemeClr val="accent1"/>
-          </a:lnRef>
-          <a:fillRef idx="3">
-            <a:schemeClr val="accent1"/>
-          </a:fillRef>
-          <a:effectRef idx="2">
-            <a:schemeClr val="accent1"/>
-          </a:effectRef>
-          <a:fontRef idx="minor">
-            <a:schemeClr val="lt1"/>
-          </a:fontRef>
-        </p:style>
-        <p:txBody>
-          <a:bodyPr rtlCol="0" anchor="ctr" wrap="square" tIns="25400" bIns="25400"/>
-          <a:lstStyle/>
-          <a:p>
-            <a:pPr algn="ctr"/>
-            <a:r>
-              <a:rPr sz="1200" b="1">
-                <a:solidFill>
-                  <a:srgbClr val="FFFFFF"/>
-                </a:solidFill>
-                <a:latin typeface="PingFang TC"/>
-                <a:ea typeface="PingFang TC"/>
-              </a:rPr>
-              <a:t>③④ 算矩陣</a:t>
-            </a:r>
-          </a:p>
-          <a:p>
-            <a:pPr algn="ctr"/>
-            <a:r>
-              <a:rPr sz="1200" b="0">
-                <a:solidFill>
-                  <a:srgbClr val="FFFFFF"/>
-                </a:solidFill>
-                <a:latin typeface="PingFang TC"/>
-                <a:ea typeface="PingFang TC"/>
-              </a:rPr>
-              <a:t>編碼→糾錯(RS)</a:t>
-            </a:r>
-          </a:p>
-          <a:p>
-            <a:pPr algn="ctr"/>
-            <a:r>
-              <a:rPr sz="1200" b="0">
-                <a:solidFill>
-                  <a:srgbClr val="FFFFFF"/>
-                </a:solidFill>
-                <a:latin typeface="PingFang TC"/>
-                <a:ea typeface="PingFang TC"/>
-              </a:rPr>
-              <a:t>→2D 模組矩陣</a:t>
-            </a:r>
-          </a:p>
-        </p:txBody>
-      </p:sp>
-      <p:cxnSp>
-        <p:nvCxnSpPr>
-          <p:cNvPr id="9" name="Connector 8"/>
-          <p:cNvCxnSpPr/>
-          <p:nvPr/>
-        </p:nvCxnSpPr>
-        <p:spPr>
-          <a:xfrm>
-            <a:off x="5925312" y="2880360"/>
-            <a:ext cx="128016" cy="0"/>
-          </a:xfrm>
-          <a:prstGeom prst="line">
-            <a:avLst/>
-          </a:prstGeom>
-          <a:ln w="22225">
-            <a:solidFill>
-              <a:srgbClr val="64748B"/>
-            </a:solidFill>
-            <a:tailEnd type="triangle" w="med" len="med"/>
-          </a:ln>
-        </p:spPr>
-        <p:style>
-          <a:lnRef idx="2">
-            <a:schemeClr val="accent1"/>
-          </a:lnRef>
-          <a:fillRef idx="0">
-            <a:schemeClr val="accent1"/>
-          </a:fillRef>
-          <a:effectRef idx="1">
-            <a:schemeClr val="accent1"/>
-          </a:effectRef>
-          <a:fontRef idx="minor">
-            <a:schemeClr val="tx1"/>
-          </a:fontRef>
-        </p:style>
-      </p:cxnSp>
-      <p:sp>
-        <p:nvSpPr>
-          <p:cNvPr id="10" name="Rounded Rectangle 9"/>
-          <p:cNvSpPr/>
-          <p:nvPr/>
-        </p:nvSpPr>
-        <p:spPr>
-          <a:xfrm>
-            <a:off x="6053328" y="2194560"/>
-            <a:ext cx="1737360" cy="1371600"/>
-          </a:xfrm>
-          <a:prstGeom prst="roundRect">
-            <a:avLst/>
-          </a:prstGeom>
-          <a:solidFill>
-            <a:srgbClr val="7C3AED"/>
-          </a:solidFill>
-          <a:ln>
-            <a:solidFill>
-              <a:srgbClr val="7C3AED"/>
-            </a:solidFill>
-          </a:ln>
-          <a:effectLst/>
-        </p:spPr>
-        <p:style>
-          <a:lnRef idx="1">
-            <a:schemeClr val="accent1"/>
-          </a:lnRef>
-          <a:fillRef idx="3">
-            <a:schemeClr val="accent1"/>
-          </a:fillRef>
-          <a:effectRef idx="2">
-            <a:schemeClr val="accent1"/>
-          </a:effectRef>
-          <a:fontRef idx="minor">
-            <a:schemeClr val="lt1"/>
-          </a:fontRef>
-        </p:style>
-        <p:txBody>
-          <a:bodyPr rtlCol="0" anchor="ctr" wrap="square" tIns="25400" bIns="25400"/>
-          <a:lstStyle/>
-          <a:p>
-            <a:pPr algn="ctr"/>
-            <a:r>
-              <a:rPr sz="1200" b="1">
-                <a:solidFill>
-                  <a:srgbClr val="FFFFFF"/>
-                </a:solidFill>
-                <a:latin typeface="PingFang TC"/>
-                <a:ea typeface="PingFang TC"/>
-              </a:rPr>
-              <a:t>⑤ 算像素</a:t>
-            </a:r>
-          </a:p>
-          <a:p>
-            <a:pPr algn="ctr"/>
-            <a:r>
-              <a:rPr sz="1200" b="0">
-                <a:solidFill>
-                  <a:srgbClr val="FFFFFF"/>
-                </a:solidFill>
-                <a:latin typeface="PingFang TC"/>
-                <a:ea typeface="PingFang TC"/>
-              </a:rPr>
-              <a:t>每模組→方塊</a:t>
-            </a:r>
-          </a:p>
-          <a:p>
-            <a:pPr algn="ctr"/>
-            <a:r>
-              <a:rPr sz="1200" b="0">
-                <a:solidFill>
-                  <a:srgbClr val="FFFFFF"/>
-                </a:solidFill>
-                <a:latin typeface="PingFang TC"/>
-                <a:ea typeface="PingFang TC"/>
-              </a:rPr>
-              <a:t>border=quiet zone</a:t>
-            </a:r>
-          </a:p>
-        </p:txBody>
-      </p:sp>
-      <p:cxnSp>
-        <p:nvCxnSpPr>
-          <p:cNvPr id="11" name="Connector 10"/>
-          <p:cNvCxnSpPr/>
-          <p:nvPr/>
-        </p:nvCxnSpPr>
-        <p:spPr>
-          <a:xfrm>
-            <a:off x="7790688" y="2880360"/>
-            <a:ext cx="128016" cy="0"/>
-          </a:xfrm>
-          <a:prstGeom prst="line">
-            <a:avLst/>
-          </a:prstGeom>
-          <a:ln w="22225">
-            <a:solidFill>
-              <a:srgbClr val="64748B"/>
-            </a:solidFill>
-            <a:tailEnd type="triangle" w="med" len="med"/>
-          </a:ln>
-        </p:spPr>
-        <p:style>
-          <a:lnRef idx="2">
-            <a:schemeClr val="accent1"/>
-          </a:lnRef>
-          <a:fillRef idx="0">
-            <a:schemeClr val="accent1"/>
-          </a:fillRef>
-          <a:effectRef idx="1">
-            <a:schemeClr val="accent1"/>
-          </a:effectRef>
-          <a:fontRef idx="minor">
-            <a:schemeClr val="tx1"/>
-          </a:fontRef>
-        </p:style>
-      </p:cxnSp>
-      <p:sp>
-        <p:nvSpPr>
-          <p:cNvPr id="12" name="Rounded Rectangle 11"/>
-          <p:cNvSpPr/>
-          <p:nvPr/>
-        </p:nvSpPr>
-        <p:spPr>
-          <a:xfrm>
-            <a:off x="7918704" y="2194560"/>
-            <a:ext cx="1737360" cy="1371600"/>
-          </a:xfrm>
-          <a:prstGeom prst="roundRect">
-            <a:avLst/>
-          </a:prstGeom>
-          <a:solidFill>
-            <a:srgbClr val="DC2626"/>
-          </a:solidFill>
-          <a:ln>
-            <a:solidFill>
-              <a:srgbClr val="DC2626"/>
-            </a:solidFill>
-          </a:ln>
-          <a:effectLst/>
-        </p:spPr>
-        <p:style>
-          <a:lnRef idx="1">
-            <a:schemeClr val="accent1"/>
-          </a:lnRef>
-          <a:fillRef idx="3">
-            <a:schemeClr val="accent1"/>
-          </a:fillRef>
-          <a:effectRef idx="2">
-            <a:schemeClr val="accent1"/>
-          </a:effectRef>
-          <a:fontRef idx="minor">
-            <a:schemeClr val="lt1"/>
-          </a:fontRef>
-        </p:style>
-        <p:txBody>
-          <a:bodyPr rtlCol="0" anchor="ctr" wrap="square" tIns="25400" bIns="25400"/>
-          <a:lstStyle/>
-          <a:p>
-            <a:pPr algn="ctr"/>
-            <a:r>
-              <a:rPr sz="1200" b="1">
-                <a:solidFill>
-                  <a:srgbClr val="FFFFFF"/>
-                </a:solidFill>
-                <a:latin typeface="PingFang TC"/>
-                <a:ea typeface="PingFang TC"/>
-              </a:rPr>
-              <a:t>⑥⑦ PNG</a:t>
-            </a:r>
-          </a:p>
-          <a:p>
-            <a:pPr algn="ctr"/>
-            <a:r>
-              <a:rPr sz="1200" b="0">
-                <a:solidFill>
-                  <a:srgbClr val="FFFFFF"/>
-                </a:solidFill>
-                <a:latin typeface="PingFang TC"/>
-                <a:ea typeface="PingFang TC"/>
-              </a:rPr>
-              <a:t>BytesIO</a:t>
-            </a:r>
-          </a:p>
-          <a:p>
-            <a:pPr algn="ctr"/>
-            <a:r>
-              <a:rPr sz="1200" b="0">
-                <a:solidFill>
-                  <a:srgbClr val="FFFFFF"/>
-                </a:solidFill>
-                <a:latin typeface="PingFang TC"/>
-                <a:ea typeface="PingFang TC"/>
-              </a:rPr>
-              <a:t>選填 dimension 縮放</a:t>
-            </a:r>
-          </a:p>
-        </p:txBody>
-      </p:sp>
-      <p:cxnSp>
-        <p:nvCxnSpPr>
-          <p:cNvPr id="13" name="Connector 12"/>
-          <p:cNvCxnSpPr/>
-          <p:nvPr/>
-        </p:nvCxnSpPr>
-        <p:spPr>
-          <a:xfrm>
-            <a:off x="9656064" y="2880360"/>
-            <a:ext cx="128016" cy="0"/>
-          </a:xfrm>
-          <a:prstGeom prst="line">
-            <a:avLst/>
-          </a:prstGeom>
-          <a:ln w="22225">
-            <a:solidFill>
-              <a:srgbClr val="64748B"/>
-            </a:solidFill>
-            <a:tailEnd type="triangle" w="med" len="med"/>
-          </a:ln>
-        </p:spPr>
-        <p:style>
-          <a:lnRef idx="2">
-            <a:schemeClr val="accent1"/>
-          </a:lnRef>
-          <a:fillRef idx="0">
-            <a:schemeClr val="accent1"/>
-          </a:fillRef>
-          <a:effectRef idx="1">
-            <a:schemeClr val="accent1"/>
-          </a:effectRef>
-          <a:fontRef idx="minor">
-            <a:schemeClr val="tx1"/>
-          </a:fontRef>
-        </p:style>
-      </p:cxnSp>
-      <p:sp>
-        <p:nvSpPr>
-          <p:cNvPr id="14" name="Rounded Rectangle 13"/>
-          <p:cNvSpPr/>
-          <p:nvPr/>
-        </p:nvSpPr>
-        <p:spPr>
-          <a:xfrm>
-            <a:off x="9784080" y="2194560"/>
-            <a:ext cx="1737360" cy="1371600"/>
-          </a:xfrm>
-          <a:prstGeom prst="roundRect">
-            <a:avLst/>
-          </a:prstGeom>
-          <a:solidFill>
-            <a:srgbClr val="D97706"/>
-          </a:solidFill>
-          <a:ln>
-            <a:solidFill>
-              <a:srgbClr val="D97706"/>
-            </a:solidFill>
-          </a:ln>
-          <a:effectLst/>
-        </p:spPr>
-        <p:style>
-          <a:lnRef idx="1">
-            <a:schemeClr val="accent1"/>
-          </a:lnRef>
-          <a:fillRef idx="3">
-            <a:schemeClr val="accent1"/>
-          </a:fillRef>
-          <a:effectRef idx="2">
-            <a:schemeClr val="accent1"/>
-          </a:effectRef>
-          <a:fontRef idx="minor">
-            <a:schemeClr val="lt1"/>
-          </a:fontRef>
-        </p:style>
-        <p:txBody>
-          <a:bodyPr rtlCol="0" anchor="ctr" wrap="square" tIns="25400" bIns="25400"/>
-          <a:lstStyle/>
-          <a:p>
-            <a:pPr algn="ctr"/>
-            <a:r>
-              <a:rPr sz="1200" b="1">
-                <a:solidFill>
-                  <a:srgbClr val="FFFFFF"/>
-                </a:solidFill>
-                <a:latin typeface="PingFang TC"/>
-                <a:ea typeface="PingFang TC"/>
-              </a:rPr>
-              <a:t>⑧ 串流</a:t>
-            </a:r>
-          </a:p>
-          <a:p>
-            <a:pPr algn="ctr"/>
-            <a:r>
-              <a:rPr sz="1200" b="0">
-                <a:solidFill>
-                  <a:srgbClr val="FFFFFF"/>
-                </a:solidFill>
-                <a:latin typeface="PingFang TC"/>
-                <a:ea typeface="PingFang TC"/>
-              </a:rPr>
-              <a:t>StreamingResponse</a:t>
-            </a:r>
-          </a:p>
-          <a:p>
-            <a:pPr algn="ctr"/>
-            <a:r>
-              <a:rPr sz="1200" b="0">
-                <a:solidFill>
-                  <a:srgbClr val="FFFFFF"/>
-                </a:solidFill>
-                <a:latin typeface="PingFang TC"/>
-                <a:ea typeface="PingFang TC"/>
-              </a:rPr>
-              <a:t>image/png</a:t>
-            </a:r>
-          </a:p>
-        </p:txBody>
-      </p:sp>
-      <p:sp>
-        <p:nvSpPr>
-          <p:cNvPr id="15" name="TextBox 14"/>
-          <p:cNvSpPr txBox="1"/>
-          <p:nvPr/>
-        </p:nvSpPr>
-        <p:spPr>
-          <a:xfrm>
-            <a:off x="502920" y="4023360"/>
-            <a:ext cx="11155680" cy="2194560"/>
-          </a:xfrm>
-          <a:prstGeom prst="rect">
-            <a:avLst/>
-          </a:prstGeom>
-          <a:noFill/>
-        </p:spPr>
-        <p:txBody>
-          <a:bodyPr wrap="square" anchor="t">
-            <a:spAutoFit/>
-          </a:bodyPr>
-          <a:lstStyle/>
-          <a:p>
-            <a:pPr algn="l">
-              <a:spcAft>
-                <a:spcPts val="800"/>
-              </a:spcAft>
-            </a:pPr>
-            <a:r>
-              <a:rPr sz="1400" b="1">
-                <a:solidFill>
-                  <a:srgbClr val="0F172A"/>
-                </a:solidFill>
-                <a:latin typeface="PingFang TC"/>
-                <a:ea typeface="PingFang TC"/>
-              </a:rPr>
-              <a:t>⚠ 編進 QR 的是『不變的短碼 /r/{token}』，不是原始 URL —— dynamic QR 關鍵：改目標 URL 不需重生圖。</a:t>
-            </a:r>
-          </a:p>
-          <a:p>
-            <a:pPr algn="l">
-              <a:spcAft>
-                <a:spcPts val="600"/>
-              </a:spcAft>
-            </a:pPr>
-            <a:r>
-              <a:rPr sz="1300" b="0">
-                <a:solidFill>
-                  <a:srgbClr val="64748B"/>
-                </a:solidFill>
-                <a:latin typeface="PingFang TC"/>
-                <a:ea typeface="PingFang TC"/>
-              </a:rPr>
-              <a:t>QR 原理：字串 → byte 編碼 → Reed-Solomon 糾錯（破損仍可掃）→ 排入矩陣（finder/timing/alignment + 遮罩）。</a:t>
-            </a:r>
-          </a:p>
-          <a:p>
-            <a:pPr algn="l">
-              <a:spcAft>
-                <a:spcPts val="600"/>
-              </a:spcAft>
-            </a:pPr>
-            <a:r>
-              <a:rPr sz="1300" b="0">
-                <a:solidFill>
-                  <a:srgbClr val="64748B"/>
-                </a:solidFill>
-                <a:latin typeface="PingFang TC"/>
-                <a:ea typeface="PingFang TC"/>
-              </a:rPr>
-              <a:t>圖片是靜態內容 → 原型即時生成；正式版預生成存 object store + CDN（第 15 題）。</a:t>
-            </a:r>
-          </a:p>
-          <a:p>
-            <a:pPr algn="l">
-              <a:spcAft>
-                <a:spcPts val="400"/>
-              </a:spcAft>
-            </a:pPr>
-            <a:r>
-              <a:rPr sz="1300" b="0">
-                <a:solidFill>
-                  <a:srgbClr val="64748B"/>
-                </a:solidFill>
-                <a:latin typeface="PingFang TC"/>
-                <a:ea typeface="PingFang TC"/>
-              </a:rPr>
-              <a:t>樣式參數：dimension（像素邊長）· color（hex 黑塊色）· border（quiet zone 模組數）。</a:t>
-            </a:r>
-          </a:p>
-        </p:txBody>
-      </p:sp>
     </p:spTree>
   </p:cSld>
   <p:clrMapOvr>
@@ -11099,7 +12834,7 @@
                 <a:latin typeface="PingFang TC"/>
                 <a:ea typeface="PingFang TC"/>
               </a:rPr>
-              <a:t>08 · DEEP DIVE</a:t>
+              <a:t>06b · LATENCY</a:t>
             </a:r>
           </a:p>
           <a:p>
@@ -11116,21 +12851,484 @@
                 <a:latin typeface="PingFang TC"/>
                 <a:ea typeface="PingFang TC"/>
               </a:rPr>
-              <a:t>決策 1 — Token 生成與碰撞</a:t>
-            </a:r>
-          </a:p>
-        </p:txBody>
-      </p:sp>
-      <p:sp>
-        <p:nvSpPr>
-          <p:cNvPr id="4" name="TextBox 3"/>
+              <a:t>redirect &lt; 100ms — 兩層查找 + 索引</a:t>
+            </a:r>
+          </a:p>
+        </p:txBody>
+      </p:sp>
+      <p:sp>
+        <p:nvSpPr>
+          <p:cNvPr id="4" name="Rounded Rectangle 3"/>
+          <p:cNvSpPr/>
+          <p:nvPr/>
+        </p:nvSpPr>
+        <p:spPr>
+          <a:xfrm>
+            <a:off x="548640" y="1874519"/>
+            <a:ext cx="2194560" cy="822960"/>
+          </a:xfrm>
+          <a:prstGeom prst="roundRect">
+            <a:avLst/>
+          </a:prstGeom>
+          <a:solidFill>
+            <a:srgbClr val="64748B"/>
+          </a:solidFill>
+          <a:ln>
+            <a:solidFill>
+              <a:srgbClr val="64748B"/>
+            </a:solidFill>
+          </a:ln>
+          <a:effectLst/>
+        </p:spPr>
+        <p:style>
+          <a:lnRef idx="1">
+            <a:schemeClr val="accent1"/>
+          </a:lnRef>
+          <a:fillRef idx="3">
+            <a:schemeClr val="accent1"/>
+          </a:fillRef>
+          <a:effectRef idx="2">
+            <a:schemeClr val="accent1"/>
+          </a:effectRef>
+          <a:fontRef idx="minor">
+            <a:schemeClr val="lt1"/>
+          </a:fontRef>
+        </p:style>
+        <p:txBody>
+          <a:bodyPr rtlCol="0" anchor="ctr" wrap="square" tIns="25400" bIns="25400"/>
+          <a:lstStyle/>
+          <a:p>
+            <a:pPr algn="ctr"/>
+            <a:r>
+              <a:rPr sz="1300" b="1">
+                <a:solidFill>
+                  <a:srgbClr val="FFFFFF"/>
+                </a:solidFill>
+                <a:latin typeface="PingFang TC"/>
+                <a:ea typeface="PingFang TC"/>
+              </a:rPr>
+              <a:t>掃描</a:t>
+            </a:r>
+          </a:p>
+          <a:p>
+            <a:pPr algn="ctr"/>
+            <a:r>
+              <a:rPr sz="1300" b="0">
+                <a:solidFill>
+                  <a:srgbClr val="FFFFFF"/>
+                </a:solidFill>
+                <a:latin typeface="PingFang TC"/>
+                <a:ea typeface="PingFang TC"/>
+              </a:rPr>
+              <a:t>GET /r/{token}</a:t>
+            </a:r>
+          </a:p>
+        </p:txBody>
+      </p:sp>
+      <p:sp>
+        <p:nvSpPr>
+          <p:cNvPr id="5" name="Rounded Rectangle 4"/>
+          <p:cNvSpPr/>
+          <p:nvPr/>
+        </p:nvSpPr>
+        <p:spPr>
+          <a:xfrm>
+            <a:off x="3200400" y="1874519"/>
+            <a:ext cx="3063240" cy="822960"/>
+          </a:xfrm>
+          <a:prstGeom prst="roundRect">
+            <a:avLst/>
+          </a:prstGeom>
+          <a:solidFill>
+            <a:srgbClr val="DC2626"/>
+          </a:solidFill>
+          <a:ln>
+            <a:solidFill>
+              <a:srgbClr val="DC2626"/>
+            </a:solidFill>
+          </a:ln>
+          <a:effectLst/>
+        </p:spPr>
+        <p:style>
+          <a:lnRef idx="1">
+            <a:schemeClr val="accent1"/>
+          </a:lnRef>
+          <a:fillRef idx="3">
+            <a:schemeClr val="accent1"/>
+          </a:fillRef>
+          <a:effectRef idx="2">
+            <a:schemeClr val="accent1"/>
+          </a:effectRef>
+          <a:fontRef idx="minor">
+            <a:schemeClr val="lt1"/>
+          </a:fontRef>
+        </p:style>
+        <p:txBody>
+          <a:bodyPr rtlCol="0" anchor="ctr" wrap="square" tIns="25400" bIns="25400"/>
+          <a:lstStyle/>
+          <a:p>
+            <a:pPr algn="ctr"/>
+            <a:r>
+              <a:rPr sz="1300" b="1">
+                <a:solidFill>
+                  <a:srgbClr val="FFFFFF"/>
+                </a:solidFill>
+                <a:latin typeface="PingFang TC"/>
+                <a:ea typeface="PingFang TC"/>
+              </a:rPr>
+              <a:t>① Cache (Redis)</a:t>
+            </a:r>
+          </a:p>
+          <a:p>
+            <a:pPr algn="ctr"/>
+            <a:r>
+              <a:rPr sz="1300" b="0">
+                <a:solidFill>
+                  <a:srgbClr val="FFFFFF"/>
+                </a:solidFill>
+                <a:latin typeface="PingFang TC"/>
+                <a:ea typeface="PingFang TC"/>
+              </a:rPr>
+              <a:t>O(1) · &lt;1ms</a:t>
+            </a:r>
+          </a:p>
+        </p:txBody>
+      </p:sp>
+      <p:cxnSp>
+        <p:nvCxnSpPr>
+          <p:cNvPr id="6" name="Connector 5"/>
+          <p:cNvCxnSpPr/>
+          <p:nvPr/>
+        </p:nvCxnSpPr>
+        <p:spPr>
+          <a:xfrm>
+            <a:off x="2743200" y="2286000"/>
+            <a:ext cx="457200" cy="0"/>
+          </a:xfrm>
+          <a:prstGeom prst="line">
+            <a:avLst/>
+          </a:prstGeom>
+          <a:ln w="22225">
+            <a:solidFill>
+              <a:srgbClr val="64748B"/>
+            </a:solidFill>
+            <a:tailEnd type="triangle" w="med" len="med"/>
+          </a:ln>
+        </p:spPr>
+        <p:style>
+          <a:lnRef idx="2">
+            <a:schemeClr val="accent1"/>
+          </a:lnRef>
+          <a:fillRef idx="0">
+            <a:schemeClr val="accent1"/>
+          </a:fillRef>
+          <a:effectRef idx="1">
+            <a:schemeClr val="accent1"/>
+          </a:effectRef>
+          <a:fontRef idx="minor">
+            <a:schemeClr val="tx1"/>
+          </a:fontRef>
+        </p:style>
+      </p:cxnSp>
+      <p:sp>
+        <p:nvSpPr>
+          <p:cNvPr id="7" name="Rounded Rectangle 6"/>
+          <p:cNvSpPr/>
+          <p:nvPr/>
+        </p:nvSpPr>
+        <p:spPr>
+          <a:xfrm>
+            <a:off x="3200400" y="2971800"/>
+            <a:ext cx="3063240" cy="731520"/>
+          </a:xfrm>
+          <a:prstGeom prst="roundRect">
+            <a:avLst/>
+          </a:prstGeom>
+          <a:solidFill>
+            <a:srgbClr val="059669"/>
+          </a:solidFill>
+          <a:ln>
+            <a:solidFill>
+              <a:srgbClr val="059669"/>
+            </a:solidFill>
+          </a:ln>
+          <a:effectLst/>
+        </p:spPr>
+        <p:style>
+          <a:lnRef idx="1">
+            <a:schemeClr val="accent1"/>
+          </a:lnRef>
+          <a:fillRef idx="3">
+            <a:schemeClr val="accent1"/>
+          </a:fillRef>
+          <a:effectRef idx="2">
+            <a:schemeClr val="accent1"/>
+          </a:effectRef>
+          <a:fontRef idx="minor">
+            <a:schemeClr val="lt1"/>
+          </a:fontRef>
+        </p:style>
+        <p:txBody>
+          <a:bodyPr rtlCol="0" anchor="ctr" wrap="square" tIns="25400" bIns="25400"/>
+          <a:lstStyle/>
+          <a:p>
+            <a:pPr algn="ctr"/>
+            <a:r>
+              <a:rPr sz="1200" b="1">
+                <a:solidFill>
+                  <a:srgbClr val="FFFFFF"/>
+                </a:solidFill>
+                <a:latin typeface="PingFang TC"/>
+                <a:ea typeface="PingFang TC"/>
+              </a:rPr>
+              <a:t>命中 → 302 ✅ 不碰 DB</a:t>
+            </a:r>
+          </a:p>
+        </p:txBody>
+      </p:sp>
+      <p:cxnSp>
+        <p:nvCxnSpPr>
+          <p:cNvPr id="8" name="Connector 7"/>
+          <p:cNvCxnSpPr/>
+          <p:nvPr/>
+        </p:nvCxnSpPr>
+        <p:spPr>
+          <a:xfrm>
+            <a:off x="4727448" y="2697480"/>
+            <a:ext cx="0" cy="274320"/>
+          </a:xfrm>
+          <a:prstGeom prst="line">
+            <a:avLst/>
+          </a:prstGeom>
+          <a:ln w="15240">
+            <a:solidFill>
+              <a:srgbClr val="059669"/>
+            </a:solidFill>
+            <a:tailEnd type="triangle" w="med" len="med"/>
+          </a:ln>
+        </p:spPr>
+        <p:style>
+          <a:lnRef idx="2">
+            <a:schemeClr val="accent1"/>
+          </a:lnRef>
+          <a:fillRef idx="0">
+            <a:schemeClr val="accent1"/>
+          </a:fillRef>
+          <a:effectRef idx="1">
+            <a:schemeClr val="accent1"/>
+          </a:effectRef>
+          <a:fontRef idx="minor">
+            <a:schemeClr val="tx1"/>
+          </a:fontRef>
+        </p:style>
+      </p:cxnSp>
+      <p:sp>
+        <p:nvSpPr>
+          <p:cNvPr id="9" name="Rounded Rectangle 8"/>
+          <p:cNvSpPr/>
+          <p:nvPr/>
+        </p:nvSpPr>
+        <p:spPr>
+          <a:xfrm>
+            <a:off x="6720840" y="1874519"/>
+            <a:ext cx="4937760" cy="822960"/>
+          </a:xfrm>
+          <a:prstGeom prst="roundRect">
+            <a:avLst/>
+          </a:prstGeom>
+          <a:solidFill>
+            <a:srgbClr val="059669"/>
+          </a:solidFill>
+          <a:ln>
+            <a:solidFill>
+              <a:srgbClr val="059669"/>
+            </a:solidFill>
+          </a:ln>
+          <a:effectLst/>
+        </p:spPr>
+        <p:style>
+          <a:lnRef idx="1">
+            <a:schemeClr val="accent1"/>
+          </a:lnRef>
+          <a:fillRef idx="3">
+            <a:schemeClr val="accent1"/>
+          </a:fillRef>
+          <a:effectRef idx="2">
+            <a:schemeClr val="accent1"/>
+          </a:effectRef>
+          <a:fontRef idx="minor">
+            <a:schemeClr val="lt1"/>
+          </a:fontRef>
+        </p:style>
+        <p:txBody>
+          <a:bodyPr rtlCol="0" anchor="ctr" wrap="square" tIns="25400" bIns="25400"/>
+          <a:lstStyle/>
+          <a:p>
+            <a:pPr algn="ctr"/>
+            <a:r>
+              <a:rPr sz="1200" b="1">
+                <a:solidFill>
+                  <a:srgbClr val="FFFFFF"/>
+                </a:solidFill>
+                <a:latin typeface="PingFang TC"/>
+                <a:ea typeface="PingFang TC"/>
+              </a:rPr>
+              <a:t>② miss → SELECT WHERE token=?</a:t>
+            </a:r>
+          </a:p>
+          <a:p>
+            <a:pPr algn="ctr"/>
+            <a:r>
+              <a:rPr sz="1200" b="0">
+                <a:solidFill>
+                  <a:srgbClr val="FFFFFF"/>
+                </a:solidFill>
+                <a:latin typeface="PingFang TC"/>
+                <a:ea typeface="PingFang TC"/>
+              </a:rPr>
+              <a:t>走 ix_url_mappings_token · O(log n)</a:t>
+            </a:r>
+          </a:p>
+        </p:txBody>
+      </p:sp>
+      <p:cxnSp>
+        <p:nvCxnSpPr>
+          <p:cNvPr id="10" name="Connector 9"/>
+          <p:cNvCxnSpPr/>
+          <p:nvPr/>
+        </p:nvCxnSpPr>
+        <p:spPr>
+          <a:xfrm>
+            <a:off x="6263640" y="2286000"/>
+            <a:ext cx="457200" cy="0"/>
+          </a:xfrm>
+          <a:prstGeom prst="line">
+            <a:avLst/>
+          </a:prstGeom>
+          <a:ln w="22225">
+            <a:solidFill>
+              <a:srgbClr val="64748B"/>
+            </a:solidFill>
+            <a:tailEnd type="triangle" w="med" len="med"/>
+          </a:ln>
+        </p:spPr>
+        <p:style>
+          <a:lnRef idx="2">
+            <a:schemeClr val="accent1"/>
+          </a:lnRef>
+          <a:fillRef idx="0">
+            <a:schemeClr val="accent1"/>
+          </a:fillRef>
+          <a:effectRef idx="1">
+            <a:schemeClr val="accent1"/>
+          </a:effectRef>
+          <a:fontRef idx="minor">
+            <a:schemeClr val="tx1"/>
+          </a:fontRef>
+        </p:style>
+      </p:cxnSp>
+      <p:sp>
+        <p:nvSpPr>
+          <p:cNvPr id="11" name="Rounded Rectangle 10"/>
+          <p:cNvSpPr/>
+          <p:nvPr/>
+        </p:nvSpPr>
+        <p:spPr>
+          <a:xfrm>
+            <a:off x="6720840" y="2971800"/>
+            <a:ext cx="4937760" cy="731520"/>
+          </a:xfrm>
+          <a:prstGeom prst="roundRect">
+            <a:avLst/>
+          </a:prstGeom>
+          <a:solidFill>
+            <a:srgbClr val="2563EB"/>
+          </a:solidFill>
+          <a:ln>
+            <a:solidFill>
+              <a:srgbClr val="2563EB"/>
+            </a:solidFill>
+          </a:ln>
+          <a:effectLst/>
+        </p:spPr>
+        <p:style>
+          <a:lnRef idx="1">
+            <a:schemeClr val="accent1"/>
+          </a:lnRef>
+          <a:fillRef idx="3">
+            <a:schemeClr val="accent1"/>
+          </a:fillRef>
+          <a:effectRef idx="2">
+            <a:schemeClr val="accent1"/>
+          </a:effectRef>
+          <a:fontRef idx="minor">
+            <a:schemeClr val="lt1"/>
+          </a:fontRef>
+        </p:style>
+        <p:txBody>
+          <a:bodyPr rtlCol="0" anchor="ctr" wrap="square" tIns="25400" bIns="25400"/>
+          <a:lstStyle/>
+          <a:p>
+            <a:pPr algn="ctr"/>
+            <a:r>
+              <a:rPr sz="1200" b="1">
+                <a:solidFill>
+                  <a:srgbClr val="FFFFFF"/>
+                </a:solidFill>
+                <a:latin typeface="PingFang TC"/>
+                <a:ea typeface="PingFang TC"/>
+              </a:rPr>
+              <a:t>回填 cache → 302</a:t>
+            </a:r>
+          </a:p>
+        </p:txBody>
+      </p:sp>
+      <p:cxnSp>
+        <p:nvCxnSpPr>
+          <p:cNvPr id="12" name="Connector 11"/>
+          <p:cNvCxnSpPr/>
+          <p:nvPr/>
+        </p:nvCxnSpPr>
+        <p:spPr>
+          <a:xfrm>
+            <a:off x="9189720" y="2697480"/>
+            <a:ext cx="0" cy="274320"/>
+          </a:xfrm>
+          <a:prstGeom prst="line">
+            <a:avLst/>
+          </a:prstGeom>
+          <a:ln w="15240">
+            <a:solidFill>
+              <a:srgbClr val="64748B"/>
+            </a:solidFill>
+            <a:tailEnd type="triangle" w="med" len="med"/>
+          </a:ln>
+        </p:spPr>
+        <p:style>
+          <a:lnRef idx="2">
+            <a:schemeClr val="accent1"/>
+          </a:lnRef>
+          <a:fillRef idx="0">
+            <a:schemeClr val="accent1"/>
+          </a:fillRef>
+          <a:effectRef idx="1">
+            <a:schemeClr val="accent1"/>
+          </a:effectRef>
+          <a:fontRef idx="minor">
+            <a:schemeClr val="tx1"/>
+          </a:fontRef>
+        </p:style>
+      </p:cxnSp>
+      <p:sp>
+        <p:nvSpPr>
+          <p:cNvPr id="13" name="TextBox 12"/>
           <p:cNvSpPr txBox="1"/>
           <p:nvPr/>
         </p:nvSpPr>
         <p:spPr>
           <a:xfrm>
-            <a:off x="640080" y="1737360"/>
-            <a:ext cx="10789920" cy="4572000"/>
+            <a:off x="548640" y="4114800"/>
+            <a:ext cx="11247120" cy="2377440"/>
           </a:xfrm>
           <a:prstGeom prst="rect">
             <a:avLst/>
@@ -11149,14 +13347,14 @@
               </a:spcAft>
             </a:pPr>
             <a:r>
-              <a:rPr sz="1500" b="0">
+              <a:rPr sz="1400" b="0">
                 <a:solidFill>
                   <a:srgbClr val="0F172A"/>
                 </a:solidFill>
                 <a:latin typeface="PingFang TC"/>
                 <a:ea typeface="PingFang TC"/>
               </a:rPr>
-              <a:t>•  演算法：SHA-256(url + nonce) → Base62 → 取前 8 碼</a:t>
+              <a:t>•  索引對比（查 1 個 token、10 億筆）：無索引 = 全表掃描 O(n)，數秒；有索引 = B-tree O(log n)，次毫秒</a:t>
             </a:r>
           </a:p>
           <a:p>
@@ -11166,18 +13364,18 @@
               </a:spcAft>
             </a:pPr>
             <a:r>
-              <a:rPr sz="1500" b="0">
+              <a:rPr sz="1400" b="0">
                 <a:solidFill>
                   <a:srgbClr val="0F172A"/>
                 </a:solidFill>
                 <a:latin typeface="PingFang TC"/>
                 <a:ea typeface="PingFang TC"/>
               </a:rPr>
-              <a:t>•  nonce = 時間戳_重試次數，打破 SHA-256 的確定性</a:t>
-            </a:r>
-          </a:p>
-          <a:p>
-            <a:pPr lvl="1">
+              <a:t>•  scan 記錄非同步（BackgroundTasks），不算進這條延遲</a:t>
+            </a:r>
+          </a:p>
+          <a:p>
+            <a:pPr>
               <a:spcAft>
                 <a:spcPts val="800"/>
               </a:spcAft>
@@ -11185,16 +13383,16 @@
             <a:r>
               <a:rPr sz="1400" b="0">
                 <a:solidFill>
-                  <a:srgbClr val="64748B"/>
-                </a:solidFill>
-                <a:latin typeface="PingFang TC"/>
-                <a:ea typeface="PingFang TC"/>
-              </a:rPr>
-              <a:t>–  作用：讓同一個 URL 每次也產生不同 token（第 4 題：不去重）</a:t>
-            </a:r>
-          </a:p>
-          <a:p>
-            <a:pPr lvl="1">
+                  <a:srgbClr val="0F172A"/>
+                </a:solidFill>
+                <a:latin typeface="PingFang TC"/>
+                <a:ea typeface="PingFang TC"/>
+              </a:rPr>
+              <a:t>•  三道防線：cache 擋多數讀（第 7 題）+ token 索引讓 miss 也快（第 2 題）+ scan 非同步不擋路（第 8 題）</a:t>
+            </a:r>
+          </a:p>
+          <a:p>
+            <a:pPr>
               <a:spcAft>
                 <a:spcPts val="800"/>
               </a:spcAft>
@@ -11202,97 +13400,12 @@
             <a:r>
               <a:rPr sz="1400" b="0">
                 <a:solidFill>
-                  <a:srgbClr val="64748B"/>
-                </a:solidFill>
-                <a:latin typeface="PingFang TC"/>
-                <a:ea typeface="PingFang TC"/>
-              </a:rPr>
-              <a:t>–  ⚠ nonce 只解決『確定性』，不解決『碰撞』</a:t>
-            </a:r>
-          </a:p>
-          <a:p>
-            <a:pPr>
-              <a:spcAft>
-                <a:spcPts val="800"/>
-              </a:spcAft>
-            </a:pPr>
-            <a:r>
-              <a:rPr sz="1500" b="0">
-                <a:solidFill>
                   <a:srgbClr val="0F172A"/>
                 </a:solidFill>
                 <a:latin typeface="PingFang TC"/>
                 <a:ea typeface="PingFang TC"/>
               </a:rPr>
-              <a:t>•  碰撞數學：截斷成 8 碼後空間 = 62^8 ≈ 2.18×10^14</a:t>
-            </a:r>
-          </a:p>
-          <a:p>
-            <a:pPr lvl="1">
-              <a:spcAft>
-                <a:spcPts val="800"/>
-              </a:spcAft>
-            </a:pPr>
-            <a:r>
-              <a:rPr sz="1400" b="0">
-                <a:solidFill>
-                  <a:srgbClr val="64748B"/>
-                </a:solidFill>
-                <a:latin typeface="PingFang TC"/>
-                <a:ea typeface="PingFang TC"/>
-              </a:rPr>
-              <a:t>–  10 億規模下碰撞『必然』發生（預期 ~2,290 次）</a:t>
-            </a:r>
-          </a:p>
-          <a:p>
-            <a:pPr lvl="1">
-              <a:spcAft>
-                <a:spcPts val="800"/>
-              </a:spcAft>
-            </a:pPr>
-            <a:r>
-              <a:rPr sz="1400" b="0">
-                <a:solidFill>
-                  <a:srgbClr val="64748B"/>
-                </a:solidFill>
-                <a:latin typeface="PingFang TC"/>
-                <a:ea typeface="PingFang TC"/>
-              </a:rPr>
-              <a:t>–  7 碼 → 8 碼：空間 ×62、預期碰撞降到 1/62</a:t>
-            </a:r>
-          </a:p>
-          <a:p>
-            <a:pPr>
-              <a:spcAft>
-                <a:spcPts val="800"/>
-              </a:spcAft>
-            </a:pPr>
-            <a:r>
-              <a:rPr sz="1500" b="0">
-                <a:solidFill>
-                  <a:srgbClr val="0F172A"/>
-                </a:solidFill>
-                <a:latin typeface="PingFang TC"/>
-                <a:ea typeface="PingFang TC"/>
-              </a:rPr>
-              <a:t>•  安全網：DB token UNIQUE + 直接插入例外重試（≤10）</a:t>
-            </a:r>
-          </a:p>
-          <a:p>
-            <a:pPr lvl="1">
-              <a:spcAft>
-                <a:spcPts val="800"/>
-              </a:spcAft>
-            </a:pPr>
-            <a:r>
-              <a:rPr sz="1400" b="0">
-                <a:solidFill>
-                  <a:srgbClr val="64748B"/>
-                </a:solidFill>
-                <a:latin typeface="PingFang TC"/>
-                <a:ea typeface="PingFang TC"/>
-              </a:rPr>
-              <a:t>–  每筆插入碰撞率 ~0.0005%，重試幾乎都第 2 次成功</a:t>
+              <a:t>•  正式版再加 read replica 分攤 ~5,800 QPS（第 16 題）</a:t>
             </a:r>
           </a:p>
         </p:txBody>

--- a/QR Code Generator/QR_Code_Generator.pptx
+++ b/QR Code Generator/QR_Code_Generator.pptx
@@ -22,6 +22,7 @@
     <p:sldId id="270" r:id="rId21"/>
     <p:sldId id="271" r:id="rId22"/>
     <p:sldId id="272" r:id="rId23"/>
+    <p:sldId id="273" r:id="rId24"/>
   </p:sldIdLst>
   <p:sldSz cx="12191695" cy="6858000" type="screen4x3"/>
   <p:notesSz cx="6858000" cy="9144000"/>
@@ -7124,6 +7125,938 @@
 </file>
 
 <file path=ppt/slides/slide17.xml><?xml version="1.0" encoding="utf-8"?>
+<p:sld xmlns:a="http://schemas.openxmlformats.org/drawingml/2006/main" xmlns:p="http://schemas.openxmlformats.org/presentationml/2006/main" xmlns:r="http://schemas.openxmlformats.org/officeDocument/2006/relationships">
+  <p:cSld>
+    <p:spTree>
+      <p:nvGrpSpPr>
+        <p:cNvPr id="1" name=""/>
+        <p:cNvGrpSpPr/>
+        <p:nvPr/>
+      </p:nvGrpSpPr>
+      <p:grpSpPr/>
+      <p:sp>
+        <p:nvSpPr>
+          <p:cNvPr id="2" name="Rectangle 1"/>
+          <p:cNvSpPr/>
+          <p:nvPr/>
+        </p:nvSpPr>
+        <p:spPr>
+          <a:xfrm>
+            <a:off x="0" y="0"/>
+            <a:ext cx="164592" cy="6858000"/>
+          </a:xfrm>
+          <a:prstGeom prst="rect">
+            <a:avLst/>
+          </a:prstGeom>
+          <a:solidFill>
+            <a:srgbClr val="2563EB"/>
+          </a:solidFill>
+          <a:ln>
+            <a:noFill/>
+          </a:ln>
+          <a:effectLst/>
+        </p:spPr>
+        <p:style>
+          <a:lnRef idx="1">
+            <a:schemeClr val="accent1"/>
+          </a:lnRef>
+          <a:fillRef idx="3">
+            <a:schemeClr val="accent1"/>
+          </a:fillRef>
+          <a:effectRef idx="2">
+            <a:schemeClr val="accent1"/>
+          </a:effectRef>
+          <a:fontRef idx="minor">
+            <a:schemeClr val="lt1"/>
+          </a:fontRef>
+        </p:style>
+        <p:txBody>
+          <a:bodyPr rtlCol="0" anchor="ctr"/>
+          <a:lstStyle/>
+          <a:p>
+            <a:pPr algn="ctr"/>
+          </a:p>
+        </p:txBody>
+      </p:sp>
+      <p:sp>
+        <p:nvSpPr>
+          <p:cNvPr id="3" name="TextBox 2"/>
+          <p:cNvSpPr txBox="1"/>
+          <p:nvPr/>
+        </p:nvSpPr>
+        <p:spPr>
+          <a:xfrm>
+            <a:off x="502920" y="320040"/>
+            <a:ext cx="10972800" cy="1005840"/>
+          </a:xfrm>
+          <a:prstGeom prst="rect">
+            <a:avLst/>
+          </a:prstGeom>
+          <a:noFill/>
+        </p:spPr>
+        <p:txBody>
+          <a:bodyPr wrap="square" anchor="t">
+            <a:spAutoFit/>
+          </a:bodyPr>
+          <a:lstStyle/>
+          <a:p>
+            <a:pPr algn="l">
+              <a:spcAft>
+                <a:spcPts val="200"/>
+              </a:spcAft>
+            </a:pPr>
+            <a:r>
+              <a:rPr sz="1300" b="1">
+                <a:solidFill>
+                  <a:srgbClr val="2563EB"/>
+                </a:solidFill>
+                <a:latin typeface="PingFang TC"/>
+                <a:ea typeface="PingFang TC"/>
+              </a:rPr>
+              <a:t>附錄 · NOSQL</a:t>
+            </a:r>
+          </a:p>
+          <a:p>
+            <a:pPr algn="l">
+              <a:spcAft>
+                <a:spcPts val="400"/>
+              </a:spcAft>
+            </a:pPr>
+            <a:r>
+              <a:rPr sz="3000" b="1">
+                <a:solidFill>
+                  <a:srgbClr val="0F172A"/>
+                </a:solidFill>
+                <a:latin typeface="PingFang TC"/>
+                <a:ea typeface="PingFang TC"/>
+              </a:rPr>
+              <a:t>替代方案 — DynamoDB 風格 key 設計</a:t>
+            </a:r>
+          </a:p>
+        </p:txBody>
+      </p:sp>
+      <p:sp>
+        <p:nvSpPr>
+          <p:cNvPr id="4" name="Rounded Rectangle 3"/>
+          <p:cNvSpPr/>
+          <p:nvPr/>
+        </p:nvSpPr>
+        <p:spPr>
+          <a:xfrm>
+            <a:off x="548640" y="1508760"/>
+            <a:ext cx="5486400" cy="548640"/>
+          </a:xfrm>
+          <a:prstGeom prst="roundRect">
+            <a:avLst/>
+          </a:prstGeom>
+          <a:solidFill>
+            <a:srgbClr val="D97706"/>
+          </a:solidFill>
+          <a:ln>
+            <a:solidFill>
+              <a:srgbClr val="D97706"/>
+            </a:solidFill>
+          </a:ln>
+          <a:effectLst/>
+        </p:spPr>
+        <p:style>
+          <a:lnRef idx="1">
+            <a:schemeClr val="accent1"/>
+          </a:lnRef>
+          <a:fillRef idx="3">
+            <a:schemeClr val="accent1"/>
+          </a:fillRef>
+          <a:effectRef idx="2">
+            <a:schemeClr val="accent1"/>
+          </a:effectRef>
+          <a:fontRef idx="minor">
+            <a:schemeClr val="lt1"/>
+          </a:fontRef>
+        </p:style>
+        <p:txBody>
+          <a:bodyPr rtlCol="0" anchor="ctr" wrap="square" tIns="25400" bIns="25400"/>
+          <a:lstStyle/>
+          <a:p>
+            <a:pPr algn="ctr"/>
+            <a:r>
+              <a:rPr sz="1200" b="1">
+                <a:solidFill>
+                  <a:srgbClr val="FFFFFF"/>
+                </a:solidFill>
+                <a:latin typeface="PingFang TC"/>
+                <a:ea typeface="PingFang TC"/>
+              </a:rPr>
+              <a:t>直覺方案  PK=user_id · SK=created_at#qr_token</a:t>
+            </a:r>
+          </a:p>
+        </p:txBody>
+      </p:sp>
+      <p:sp>
+        <p:nvSpPr>
+          <p:cNvPr id="5" name="Rounded Rectangle 4"/>
+          <p:cNvSpPr/>
+          <p:nvPr/>
+        </p:nvSpPr>
+        <p:spPr>
+          <a:xfrm>
+            <a:off x="548640" y="2103120"/>
+            <a:ext cx="5486400" cy="1737360"/>
+          </a:xfrm>
+          <a:prstGeom prst="roundRect">
+            <a:avLst/>
+          </a:prstGeom>
+          <a:solidFill>
+            <a:srgbClr val="F1F5F9"/>
+          </a:solidFill>
+          <a:ln>
+            <a:solidFill>
+              <a:srgbClr val="F1F5F9"/>
+            </a:solidFill>
+          </a:ln>
+          <a:effectLst/>
+        </p:spPr>
+        <p:style>
+          <a:lnRef idx="1">
+            <a:schemeClr val="accent1"/>
+          </a:lnRef>
+          <a:fillRef idx="3">
+            <a:schemeClr val="accent1"/>
+          </a:fillRef>
+          <a:effectRef idx="2">
+            <a:schemeClr val="accent1"/>
+          </a:effectRef>
+          <a:fontRef idx="minor">
+            <a:schemeClr val="lt1"/>
+          </a:fontRef>
+        </p:style>
+        <p:txBody>
+          <a:bodyPr rtlCol="0" anchor="ctr"/>
+          <a:lstStyle/>
+          <a:p>
+            <a:pPr algn="ctr"/>
+          </a:p>
+        </p:txBody>
+      </p:sp>
+      <p:sp>
+        <p:nvSpPr>
+          <p:cNvPr id="6" name="TextBox 5"/>
+          <p:cNvSpPr txBox="1"/>
+          <p:nvPr/>
+        </p:nvSpPr>
+        <p:spPr>
+          <a:xfrm>
+            <a:off x="731520" y="2240280"/>
+            <a:ext cx="5120640" cy="1554480"/>
+          </a:xfrm>
+          <a:prstGeom prst="rect">
+            <a:avLst/>
+          </a:prstGeom>
+          <a:noFill/>
+        </p:spPr>
+        <p:txBody>
+          <a:bodyPr wrap="square">
+            <a:spAutoFit/>
+          </a:bodyPr>
+          <a:lstStyle/>
+          <a:p>
+            <a:pPr>
+              <a:spcAft>
+                <a:spcPts val="600"/>
+              </a:spcAft>
+            </a:pPr>
+            <a:r>
+              <a:rPr sz="1300" b="0">
+                <a:solidFill>
+                  <a:srgbClr val="0F172A"/>
+                </a:solidFill>
+                <a:latin typeface="PingFang TC"/>
+                <a:ea typeface="PingFang TC"/>
+              </a:rPr>
+              <a:t>•  ✅ 列出我的 QR：Query PK=user_id 天生最佳</a:t>
+            </a:r>
+          </a:p>
+          <a:p>
+            <a:pPr>
+              <a:spcAft>
+                <a:spcPts val="600"/>
+              </a:spcAft>
+            </a:pPr>
+            <a:r>
+              <a:rPr sz="1300" b="0">
+                <a:solidFill>
+                  <a:srgbClr val="0F172A"/>
+                </a:solidFill>
+                <a:latin typeface="PingFang TC"/>
+                <a:ea typeface="PingFang TC"/>
+              </a:rPr>
+              <a:t>•  ❌ redirect 只有 token、沒 user_id → 定位不到分區</a:t>
+            </a:r>
+          </a:p>
+          <a:p>
+            <a:pPr lvl="1">
+              <a:spcAft>
+                <a:spcPts val="600"/>
+              </a:spcAft>
+            </a:pPr>
+            <a:r>
+              <a:rPr sz="1200" b="0">
+                <a:solidFill>
+                  <a:srgbClr val="64748B"/>
+                </a:solidFill>
+                <a:latin typeface="PingFang TC"/>
+                <a:ea typeface="PingFang TC"/>
+              </a:rPr>
+              <a:t>–  → 退化成 Scan O(n)，違反 &lt;100ms（致命）</a:t>
+            </a:r>
+          </a:p>
+        </p:txBody>
+      </p:sp>
+      <p:sp>
+        <p:nvSpPr>
+          <p:cNvPr id="7" name="Rounded Rectangle 6"/>
+          <p:cNvSpPr/>
+          <p:nvPr/>
+        </p:nvSpPr>
+        <p:spPr>
+          <a:xfrm>
+            <a:off x="6263640" y="1508760"/>
+            <a:ext cx="5394960" cy="548640"/>
+          </a:xfrm>
+          <a:prstGeom prst="roundRect">
+            <a:avLst/>
+          </a:prstGeom>
+          <a:solidFill>
+            <a:srgbClr val="059669"/>
+          </a:solidFill>
+          <a:ln>
+            <a:solidFill>
+              <a:srgbClr val="059669"/>
+            </a:solidFill>
+          </a:ln>
+          <a:effectLst/>
+        </p:spPr>
+        <p:style>
+          <a:lnRef idx="1">
+            <a:schemeClr val="accent1"/>
+          </a:lnRef>
+          <a:fillRef idx="3">
+            <a:schemeClr val="accent1"/>
+          </a:fillRef>
+          <a:effectRef idx="2">
+            <a:schemeClr val="accent1"/>
+          </a:effectRef>
+          <a:fontRef idx="minor">
+            <a:schemeClr val="lt1"/>
+          </a:fontRef>
+        </p:style>
+        <p:txBody>
+          <a:bodyPr rtlCol="0" anchor="ctr" wrap="square" tIns="25400" bIns="25400"/>
+          <a:lstStyle/>
+          <a:p>
+            <a:pPr algn="ctr"/>
+            <a:r>
+              <a:rPr sz="1200" b="1">
+                <a:solidFill>
+                  <a:srgbClr val="FFFFFF"/>
+                </a:solidFill>
+                <a:latin typeface="PingFang TC"/>
+                <a:ea typeface="PingFang TC"/>
+              </a:rPr>
+              <a:t>建議  base PK=qr_token + GSI(user_id, created_at)</a:t>
+            </a:r>
+          </a:p>
+        </p:txBody>
+      </p:sp>
+      <p:sp>
+        <p:nvSpPr>
+          <p:cNvPr id="8" name="Rounded Rectangle 7"/>
+          <p:cNvSpPr/>
+          <p:nvPr/>
+        </p:nvSpPr>
+        <p:spPr>
+          <a:xfrm>
+            <a:off x="6263640" y="2103120"/>
+            <a:ext cx="5394960" cy="1737360"/>
+          </a:xfrm>
+          <a:prstGeom prst="roundRect">
+            <a:avLst/>
+          </a:prstGeom>
+          <a:solidFill>
+            <a:srgbClr val="F1F5F9"/>
+          </a:solidFill>
+          <a:ln>
+            <a:solidFill>
+              <a:srgbClr val="F1F5F9"/>
+            </a:solidFill>
+          </a:ln>
+          <a:effectLst/>
+        </p:spPr>
+        <p:style>
+          <a:lnRef idx="1">
+            <a:schemeClr val="accent1"/>
+          </a:lnRef>
+          <a:fillRef idx="3">
+            <a:schemeClr val="accent1"/>
+          </a:fillRef>
+          <a:effectRef idx="2">
+            <a:schemeClr val="accent1"/>
+          </a:effectRef>
+          <a:fontRef idx="minor">
+            <a:schemeClr val="lt1"/>
+          </a:fontRef>
+        </p:style>
+        <p:txBody>
+          <a:bodyPr rtlCol="0" anchor="ctr"/>
+          <a:lstStyle/>
+          <a:p>
+            <a:pPr algn="ctr"/>
+          </a:p>
+        </p:txBody>
+      </p:sp>
+      <p:sp>
+        <p:nvSpPr>
+          <p:cNvPr id="9" name="TextBox 8"/>
+          <p:cNvSpPr txBox="1"/>
+          <p:nvPr/>
+        </p:nvSpPr>
+        <p:spPr>
+          <a:xfrm>
+            <a:off x="6446520" y="2240280"/>
+            <a:ext cx="5029200" cy="1554480"/>
+          </a:xfrm>
+          <a:prstGeom prst="rect">
+            <a:avLst/>
+          </a:prstGeom>
+          <a:noFill/>
+        </p:spPr>
+        <p:txBody>
+          <a:bodyPr wrap="square">
+            <a:spAutoFit/>
+          </a:bodyPr>
+          <a:lstStyle/>
+          <a:p>
+            <a:pPr>
+              <a:spcAft>
+                <a:spcPts val="500"/>
+              </a:spcAft>
+            </a:pPr>
+            <a:r>
+              <a:rPr sz="1300" b="0">
+                <a:solidFill>
+                  <a:srgbClr val="0F172A"/>
+                </a:solidFill>
+                <a:latin typeface="PingFang TC"/>
+                <a:ea typeface="PingFang TC"/>
+              </a:rPr>
+              <a:t>•  ✅ redirect：GetItem(PK=qr_token) O(1)、強一致</a:t>
+            </a:r>
+          </a:p>
+          <a:p>
+            <a:pPr>
+              <a:spcAft>
+                <a:spcPts val="500"/>
+              </a:spcAft>
+            </a:pPr>
+            <a:r>
+              <a:rPr sz="1300" b="0">
+                <a:solidFill>
+                  <a:srgbClr val="0F172A"/>
+                </a:solidFill>
+                <a:latin typeface="PingFang TC"/>
+                <a:ea typeface="PingFang TC"/>
+              </a:rPr>
+              <a:t>•  ✅ 列我的 QR：走 GSI(PK=user_id)</a:t>
+            </a:r>
+          </a:p>
+          <a:p>
+            <a:pPr>
+              <a:spcAft>
+                <a:spcPts val="500"/>
+              </a:spcAft>
+            </a:pPr>
+            <a:r>
+              <a:rPr sz="1300" b="0">
+                <a:solidFill>
+                  <a:srgbClr val="0F172A"/>
+                </a:solidFill>
+                <a:latin typeface="PingFang TC"/>
+                <a:ea typeface="PingFang TC"/>
+              </a:rPr>
+              <a:t>•  qr_token 高亂度 → 均勻分區，避免 hot partition</a:t>
+            </a:r>
+          </a:p>
+          <a:p>
+            <a:pPr>
+              <a:spcAft>
+                <a:spcPts val="500"/>
+              </a:spcAft>
+            </a:pPr>
+            <a:r>
+              <a:rPr sz="1300" b="0">
+                <a:solidFill>
+                  <a:srgbClr val="0F172A"/>
+                </a:solidFill>
+                <a:latin typeface="PingFang TC"/>
+                <a:ea typeface="PingFang TC"/>
+              </a:rPr>
+              <a:t>•  唯一性：條件寫入 attribute_not_exists</a:t>
+            </a:r>
+          </a:p>
+        </p:txBody>
+      </p:sp>
+      <p:graphicFrame>
+        <p:nvGraphicFramePr>
+          <p:cNvPr id="10" name="Table 9"/>
+          <p:cNvGraphicFramePr>
+            <a:graphicFrameLocks noGrp="1"/>
+          </p:cNvGraphicFramePr>
+          <p:nvPr/>
+        </p:nvGraphicFramePr>
+        <p:xfrm>
+          <a:off x="548640" y="4114800"/>
+          <a:ext cx="11109960" cy="1920240"/>
+        </p:xfrm>
+        <a:graphic>
+          <a:graphicData uri="http://schemas.openxmlformats.org/drawingml/2006/table">
+            <a:tbl>
+              <a:tblPr firstRow="1" bandRow="1">
+                <a:tableStyleId>{5C22544A-7EE6-4342-B048-85BDC9FD1C3A}</a:tableStyleId>
+              </a:tblPr>
+              <a:tblGrid>
+                <a:gridCol w="2743200"/>
+                <a:gridCol w="2788920"/>
+                <a:gridCol w="2788920"/>
+                <a:gridCol w="2788920"/>
+              </a:tblGrid>
+              <a:tr h="480060">
+                <a:tc>
+                  <a:txBody>
+                    <a:bodyPr/>
+                    <a:lstStyle/>
+                    <a:p>
+                      <a:r>
+                        <a:rPr sz="1100" b="1">
+                          <a:solidFill>
+                            <a:srgbClr val="FFFFFF"/>
+                          </a:solidFill>
+                          <a:latin typeface="PingFang TC"/>
+                          <a:ea typeface="PingFang TC"/>
+                        </a:rPr>
+                        <a:t>存取模式</a:t>
+                      </a:r>
+                    </a:p>
+                  </a:txBody>
+                  <a:tcPr marT="25400" marB="25400" marL="101600" anchor="ctr">
+                    <a:solidFill>
+                      <a:srgbClr val="2563EB"/>
+                    </a:solidFill>
+                  </a:tcPr>
+                </a:tc>
+                <a:tc>
+                  <a:txBody>
+                    <a:bodyPr/>
+                    <a:lstStyle/>
+                    <a:p>
+                      <a:r>
+                        <a:rPr sz="1100" b="1">
+                          <a:solidFill>
+                            <a:srgbClr val="FFFFFF"/>
+                          </a:solidFill>
+                          <a:latin typeface="PingFang TC"/>
+                          <a:ea typeface="PingFang TC"/>
+                        </a:rPr>
+                        <a:t>SQL（現況）</a:t>
+                      </a:r>
+                    </a:p>
+                  </a:txBody>
+                  <a:tcPr marT="25400" marB="25400" marL="101600" anchor="ctr">
+                    <a:solidFill>
+                      <a:srgbClr val="2563EB"/>
+                    </a:solidFill>
+                  </a:tcPr>
+                </a:tc>
+                <a:tc>
+                  <a:txBody>
+                    <a:bodyPr/>
+                    <a:lstStyle/>
+                    <a:p>
+                      <a:r>
+                        <a:rPr sz="1100" b="1">
+                          <a:solidFill>
+                            <a:srgbClr val="FFFFFF"/>
+                          </a:solidFill>
+                          <a:latin typeface="PingFang TC"/>
+                          <a:ea typeface="PingFang TC"/>
+                        </a:rPr>
+                        <a:t>NoSQL PK=user_id</a:t>
+                      </a:r>
+                    </a:p>
+                  </a:txBody>
+                  <a:tcPr marT="25400" marB="25400" marL="101600" anchor="ctr">
+                    <a:solidFill>
+                      <a:srgbClr val="2563EB"/>
+                    </a:solidFill>
+                  </a:tcPr>
+                </a:tc>
+                <a:tc>
+                  <a:txBody>
+                    <a:bodyPr/>
+                    <a:lstStyle/>
+                    <a:p>
+                      <a:r>
+                        <a:rPr sz="1100" b="1">
+                          <a:solidFill>
+                            <a:srgbClr val="FFFFFF"/>
+                          </a:solidFill>
+                          <a:latin typeface="PingFang TC"/>
+                          <a:ea typeface="PingFang TC"/>
+                        </a:rPr>
+                        <a:t>NoSQL PK=qr_token</a:t>
+                      </a:r>
+                    </a:p>
+                  </a:txBody>
+                  <a:tcPr marT="25400" marB="25400" marL="101600" anchor="ctr">
+                    <a:solidFill>
+                      <a:srgbClr val="2563EB"/>
+                    </a:solidFill>
+                  </a:tcPr>
+                </a:tc>
+              </a:tr>
+              <a:tr h="480060">
+                <a:tc>
+                  <a:txBody>
+                    <a:bodyPr/>
+                    <a:lstStyle/>
+                    <a:p>
+                      <a:r>
+                        <a:rPr sz="1100" b="1">
+                          <a:solidFill>
+                            <a:srgbClr val="0F172A"/>
+                          </a:solidFill>
+                          <a:latin typeface="PingFang TC"/>
+                          <a:ea typeface="PingFang TC"/>
+                        </a:rPr>
+                        <a:t>redirect 查 token</a:t>
+                      </a:r>
+                    </a:p>
+                  </a:txBody>
+                  <a:tcPr marT="25400" marB="25400" marL="101600" anchor="ctr">
+                    <a:solidFill>
+                      <a:srgbClr val="FFFFFF"/>
+                    </a:solidFill>
+                  </a:tcPr>
+                </a:tc>
+                <a:tc>
+                  <a:txBody>
+                    <a:bodyPr/>
+                    <a:lstStyle/>
+                    <a:p>
+                      <a:r>
+                        <a:rPr sz="1100" b="0">
+                          <a:solidFill>
+                            <a:srgbClr val="64748B"/>
+                          </a:solidFill>
+                          <a:latin typeface="PingFang TC"/>
+                          <a:ea typeface="PingFang TC"/>
+                        </a:rPr>
+                        <a:t>B-tree O(log n) ✅</a:t>
+                      </a:r>
+                    </a:p>
+                  </a:txBody>
+                  <a:tcPr marT="25400" marB="25400" marL="101600" anchor="ctr">
+                    <a:solidFill>
+                      <a:srgbClr val="FFFFFF"/>
+                    </a:solidFill>
+                  </a:tcPr>
+                </a:tc>
+                <a:tc>
+                  <a:txBody>
+                    <a:bodyPr/>
+                    <a:lstStyle/>
+                    <a:p>
+                      <a:r>
+                        <a:rPr sz="1100" b="0">
+                          <a:solidFill>
+                            <a:srgbClr val="64748B"/>
+                          </a:solidFill>
+                          <a:latin typeface="PingFang TC"/>
+                          <a:ea typeface="PingFang TC"/>
+                        </a:rPr>
+                        <a:t>Scan O(n) ❌</a:t>
+                      </a:r>
+                    </a:p>
+                  </a:txBody>
+                  <a:tcPr marT="25400" marB="25400" marL="101600" anchor="ctr">
+                    <a:solidFill>
+                      <a:srgbClr val="FFFFFF"/>
+                    </a:solidFill>
+                  </a:tcPr>
+                </a:tc>
+                <a:tc>
+                  <a:txBody>
+                    <a:bodyPr/>
+                    <a:lstStyle/>
+                    <a:p>
+                      <a:r>
+                        <a:rPr sz="1100" b="0">
+                          <a:solidFill>
+                            <a:srgbClr val="64748B"/>
+                          </a:solidFill>
+                          <a:latin typeface="PingFang TC"/>
+                          <a:ea typeface="PingFang TC"/>
+                        </a:rPr>
+                        <a:t>GetItem O(1) ✅</a:t>
+                      </a:r>
+                    </a:p>
+                  </a:txBody>
+                  <a:tcPr marT="25400" marB="25400" marL="101600" anchor="ctr">
+                    <a:solidFill>
+                      <a:srgbClr val="FFFFFF"/>
+                    </a:solidFill>
+                  </a:tcPr>
+                </a:tc>
+              </a:tr>
+              <a:tr h="480060">
+                <a:tc>
+                  <a:txBody>
+                    <a:bodyPr/>
+                    <a:lstStyle/>
+                    <a:p>
+                      <a:r>
+                        <a:rPr sz="1100" b="1">
+                          <a:solidFill>
+                            <a:srgbClr val="0F172A"/>
+                          </a:solidFill>
+                          <a:latin typeface="PingFang TC"/>
+                          <a:ea typeface="PingFang TC"/>
+                        </a:rPr>
+                        <a:t>列出我的 QR</a:t>
+                      </a:r>
+                    </a:p>
+                  </a:txBody>
+                  <a:tcPr marT="25400" marB="25400" marL="101600" anchor="ctr">
+                    <a:solidFill>
+                      <a:srgbClr val="F1F5F9"/>
+                    </a:solidFill>
+                  </a:tcPr>
+                </a:tc>
+                <a:tc>
+                  <a:txBody>
+                    <a:bodyPr/>
+                    <a:lstStyle/>
+                    <a:p>
+                      <a:r>
+                        <a:rPr sz="1100" b="0">
+                          <a:solidFill>
+                            <a:srgbClr val="64748B"/>
+                          </a:solidFill>
+                          <a:latin typeface="PingFang TC"/>
+                          <a:ea typeface="PingFang TC"/>
+                        </a:rPr>
+                        <a:t>WHERE user_id ✅</a:t>
+                      </a:r>
+                    </a:p>
+                  </a:txBody>
+                  <a:tcPr marT="25400" marB="25400" marL="101600" anchor="ctr">
+                    <a:solidFill>
+                      <a:srgbClr val="F1F5F9"/>
+                    </a:solidFill>
+                  </a:tcPr>
+                </a:tc>
+                <a:tc>
+                  <a:txBody>
+                    <a:bodyPr/>
+                    <a:lstStyle/>
+                    <a:p>
+                      <a:r>
+                        <a:rPr sz="1100" b="0">
+                          <a:solidFill>
+                            <a:srgbClr val="64748B"/>
+                          </a:solidFill>
+                          <a:latin typeface="PingFang TC"/>
+                          <a:ea typeface="PingFang TC"/>
+                        </a:rPr>
+                        <a:t>天生最佳 ✅</a:t>
+                      </a:r>
+                    </a:p>
+                  </a:txBody>
+                  <a:tcPr marT="25400" marB="25400" marL="101600" anchor="ctr">
+                    <a:solidFill>
+                      <a:srgbClr val="F1F5F9"/>
+                    </a:solidFill>
+                  </a:tcPr>
+                </a:tc>
+                <a:tc>
+                  <a:txBody>
+                    <a:bodyPr/>
+                    <a:lstStyle/>
+                    <a:p>
+                      <a:r>
+                        <a:rPr sz="1100" b="0">
+                          <a:solidFill>
+                            <a:srgbClr val="64748B"/>
+                          </a:solidFill>
+                          <a:latin typeface="PingFang TC"/>
+                          <a:ea typeface="PingFang TC"/>
+                        </a:rPr>
+                        <a:t>GSI 查 ✅</a:t>
+                      </a:r>
+                    </a:p>
+                  </a:txBody>
+                  <a:tcPr marT="25400" marB="25400" marL="101600" anchor="ctr">
+                    <a:solidFill>
+                      <a:srgbClr val="F1F5F9"/>
+                    </a:solidFill>
+                  </a:tcPr>
+                </a:tc>
+              </a:tr>
+              <a:tr h="480060">
+                <a:tc>
+                  <a:txBody>
+                    <a:bodyPr/>
+                    <a:lstStyle/>
+                    <a:p>
+                      <a:r>
+                        <a:rPr sz="1100" b="1">
+                          <a:solidFill>
+                            <a:srgbClr val="0F172A"/>
+                          </a:solidFill>
+                          <a:latin typeface="PingFang TC"/>
+                          <a:ea typeface="PingFang TC"/>
+                        </a:rPr>
+                        <a:t>token 唯一</a:t>
+                      </a:r>
+                    </a:p>
+                  </a:txBody>
+                  <a:tcPr marT="25400" marB="25400" marL="101600" anchor="ctr">
+                    <a:solidFill>
+                      <a:srgbClr val="FFFFFF"/>
+                    </a:solidFill>
+                  </a:tcPr>
+                </a:tc>
+                <a:tc>
+                  <a:txBody>
+                    <a:bodyPr/>
+                    <a:lstStyle/>
+                    <a:p>
+                      <a:r>
+                        <a:rPr sz="1100" b="0">
+                          <a:solidFill>
+                            <a:srgbClr val="64748B"/>
+                          </a:solidFill>
+                          <a:latin typeface="PingFang TC"/>
+                          <a:ea typeface="PingFang TC"/>
+                        </a:rPr>
+                        <a:t>UNIQUE ✅</a:t>
+                      </a:r>
+                    </a:p>
+                  </a:txBody>
+                  <a:tcPr marT="25400" marB="25400" marL="101600" anchor="ctr">
+                    <a:solidFill>
+                      <a:srgbClr val="FFFFFF"/>
+                    </a:solidFill>
+                  </a:tcPr>
+                </a:tc>
+                <a:tc>
+                  <a:txBody>
+                    <a:bodyPr/>
+                    <a:lstStyle/>
+                    <a:p>
+                      <a:r>
+                        <a:rPr sz="1100" b="0">
+                          <a:solidFill>
+                            <a:srgbClr val="64748B"/>
+                          </a:solidFill>
+                          <a:latin typeface="PingFang TC"/>
+                          <a:ea typeface="PingFang TC"/>
+                        </a:rPr>
+                        <a:t>需額外處理</a:t>
+                      </a:r>
+                    </a:p>
+                  </a:txBody>
+                  <a:tcPr marT="25400" marB="25400" marL="101600" anchor="ctr">
+                    <a:solidFill>
+                      <a:srgbClr val="FFFFFF"/>
+                    </a:solidFill>
+                  </a:tcPr>
+                </a:tc>
+                <a:tc>
+                  <a:txBody>
+                    <a:bodyPr/>
+                    <a:lstStyle/>
+                    <a:p>
+                      <a:r>
+                        <a:rPr sz="1100" b="0">
+                          <a:solidFill>
+                            <a:srgbClr val="64748B"/>
+                          </a:solidFill>
+                          <a:latin typeface="PingFang TC"/>
+                          <a:ea typeface="PingFang TC"/>
+                        </a:rPr>
+                        <a:t>條件寫入 ✅</a:t>
+                      </a:r>
+                    </a:p>
+                  </a:txBody>
+                  <a:tcPr marT="25400" marB="25400" marL="101600" anchor="ctr">
+                    <a:solidFill>
+                      <a:srgbClr val="FFFFFF"/>
+                    </a:solidFill>
+                  </a:tcPr>
+                </a:tc>
+              </a:tr>
+            </a:tbl>
+          </a:graphicData>
+        </a:graphic>
+      </p:graphicFrame>
+      <p:sp>
+        <p:nvSpPr>
+          <p:cNvPr id="11" name="TextBox 10"/>
+          <p:cNvSpPr txBox="1"/>
+          <p:nvPr/>
+        </p:nvSpPr>
+        <p:spPr>
+          <a:xfrm>
+            <a:off x="548640" y="6172200"/>
+            <a:ext cx="11155680" cy="548640"/>
+          </a:xfrm>
+          <a:prstGeom prst="rect">
+            <a:avLst/>
+          </a:prstGeom>
+          <a:noFill/>
+        </p:spPr>
+        <p:txBody>
+          <a:bodyPr wrap="square" anchor="t">
+            <a:spAutoFit/>
+          </a:bodyPr>
+          <a:lstStyle/>
+          <a:p>
+            <a:pPr algn="l">
+              <a:spcAft>
+                <a:spcPts val="400"/>
+              </a:spcAft>
+            </a:pPr>
+            <a:r>
+              <a:rPr sz="1200" b="0">
+                <a:solidFill>
+                  <a:srgbClr val="64748B"/>
+                </a:solidFill>
+                <a:latin typeface="PingFang TC"/>
+                <a:ea typeface="PingFang TC"/>
+              </a:rPr>
+              <a:t>NoSQL 先列存取模式、再決定 key；redirect（token→URL）是這個系統的第一公民。</a:t>
+            </a:r>
+          </a:p>
+        </p:txBody>
+      </p:sp>
+    </p:spTree>
+  </p:cSld>
+  <p:clrMapOvr>
+    <a:masterClrMapping/>
+  </p:clrMapOvr>
+</p:sld>
+</file>
+
+<file path=ppt/slides/slide18.xml><?xml version="1.0" encoding="utf-8"?>
 <p:sld xmlns:a="http://schemas.openxmlformats.org/drawingml/2006/main" xmlns:p="http://schemas.openxmlformats.org/presentationml/2006/main" xmlns:r="http://schemas.openxmlformats.org/officeDocument/2006/relationships">
   <p:cSld>
     <p:spTree>

--- a/QR Code Generator/QR_Code_Generator.pptx
+++ b/QR Code Generator/QR_Code_Generator.pptx
@@ -23,6 +23,8 @@
     <p:sldId id="271" r:id="rId22"/>
     <p:sldId id="272" r:id="rId23"/>
     <p:sldId id="273" r:id="rId24"/>
+    <p:sldId id="274" r:id="rId25"/>
+    <p:sldId id="275" r:id="rId26"/>
   </p:sldIdLst>
   <p:sldSz cx="12191695" cy="6858000" type="screen4x3"/>
   <p:notesSz cx="6858000" cy="9144000"/>
@@ -6299,7 +6301,7 @@
                 <a:latin typeface="PingFang TC"/>
                 <a:ea typeface="PingFang TC"/>
               </a:rPr>
-              <a:t>12 · IMPROVEMENTS</a:t>
+              <a:t>11b · READ REPLICA</a:t>
             </a:r>
           </a:p>
           <a:p>
@@ -6316,21 +6318,146 @@
                 <a:latin typeface="PingFang TC"/>
                 <a:ea typeface="PingFang TC"/>
               </a:rPr>
-              <a:t>對參考 repo 的關鍵改良</a:t>
-            </a:r>
-          </a:p>
-        </p:txBody>
-      </p:sp>
-      <p:sp>
-        <p:nvSpPr>
-          <p:cNvPr id="4" name="Rounded Rectangle 3"/>
+              <a:t>Read-heavy → 讀寫分離 + Read Replica</a:t>
+            </a:r>
+          </a:p>
+        </p:txBody>
+      </p:sp>
+      <p:sp>
+        <p:nvSpPr>
+          <p:cNvPr id="4" name="TextBox 3"/>
+          <p:cNvSpPr txBox="1"/>
+          <p:nvPr/>
+        </p:nvSpPr>
+        <p:spPr>
+          <a:xfrm>
+            <a:off x="548640" y="1645920"/>
+            <a:ext cx="5486400" cy="2926080"/>
+          </a:xfrm>
+          <a:prstGeom prst="rect">
+            <a:avLst/>
+          </a:prstGeom>
+          <a:noFill/>
+        </p:spPr>
+        <p:txBody>
+          <a:bodyPr wrap="square" anchor="t">
+            <a:spAutoFit/>
+          </a:bodyPr>
+          <a:lstStyle/>
+          <a:p>
+            <a:pPr algn="l">
+              <a:spcAft>
+                <a:spcPts val="800"/>
+              </a:spcAft>
+            </a:pPr>
+            <a:r>
+              <a:rPr sz="1500" b="0">
+                <a:solidFill>
+                  <a:srgbClr val="0F172A"/>
+                </a:solidFill>
+                <a:latin typeface="PingFang TC"/>
+                <a:ea typeface="PingFang TC"/>
+              </a:rPr>
+              <a:t>容量：1B × 200B = 200GB（單機放得下）</a:t>
+            </a:r>
+          </a:p>
+          <a:p>
+            <a:pPr algn="l">
+              <a:spcAft>
+                <a:spcPts val="400"/>
+              </a:spcAft>
+            </a:pPr>
+            <a:r>
+              <a:rPr sz="1500" b="0">
+                <a:solidFill>
+                  <a:srgbClr val="0F172A"/>
+                </a:solidFill>
+                <a:latin typeface="PingFang TC"/>
+                <a:ea typeface="PingFang TC"/>
+              </a:rPr>
+              <a:t>讀流量：1 億 users × 5/日 = 5 億 redirects/日</a:t>
+            </a:r>
+          </a:p>
+          <a:p>
+            <a:pPr algn="l">
+              <a:spcAft>
+                <a:spcPts val="800"/>
+              </a:spcAft>
+            </a:pPr>
+            <a:r>
+              <a:rPr sz="1600" b="1">
+                <a:solidFill>
+                  <a:srgbClr val="2563EB"/>
+                </a:solidFill>
+                <a:latin typeface="PingFang TC"/>
+                <a:ea typeface="PingFang TC"/>
+              </a:rPr>
+              <a:t>            5 億 ÷ 86,400s ≈ 5,787 redirects/秒</a:t>
+            </a:r>
+          </a:p>
+          <a:p>
+            <a:pPr algn="l">
+              <a:spcAft>
+                <a:spcPts val="1200"/>
+              </a:spcAft>
+            </a:pPr>
+            <a:r>
+              <a:rPr sz="1500" b="0">
+                <a:solidFill>
+                  <a:srgbClr val="0F172A"/>
+                </a:solidFill>
+                <a:latin typeface="PingFang TC"/>
+                <a:ea typeface="PingFang TC"/>
+              </a:rPr>
+              <a:t>讀寫比：≈ 100:1（讀 ≫ 寫）</a:t>
+            </a:r>
+          </a:p>
+          <a:p>
+            <a:pPr algn="l">
+              <a:spcAft>
+                <a:spcPts val="400"/>
+              </a:spcAft>
+            </a:pPr>
+            <a:r>
+              <a:rPr sz="1500" b="1">
+                <a:solidFill>
+                  <a:srgbClr val="0F172A"/>
+                </a:solidFill>
+                <a:latin typeface="PingFang TC"/>
+                <a:ea typeface="PingFang TC"/>
+              </a:rPr>
+              <a:t>→ 瓶頸是「讀吞吐」、不是容量</a:t>
+            </a:r>
+          </a:p>
+          <a:p>
+            <a:pPr algn="l">
+              <a:spcAft>
+                <a:spcPts val="400"/>
+              </a:spcAft>
+            </a:pPr>
+            <a:r>
+              <a:rPr sz="1600" b="1">
+                <a:solidFill>
+                  <a:srgbClr val="059669"/>
+                </a:solidFill>
+                <a:latin typeface="PingFang TC"/>
+                <a:ea typeface="PingFang TC"/>
+              </a:rPr>
+              <a:t>→ 讀寫分離 + 多個 read replica</a:t>
+            </a:r>
+          </a:p>
+        </p:txBody>
+      </p:sp>
+      <p:sp>
+        <p:nvSpPr>
+          <p:cNvPr id="5" name="Rounded Rectangle 4"/>
           <p:cNvSpPr/>
           <p:nvPr/>
         </p:nvSpPr>
         <p:spPr>
           <a:xfrm>
-            <a:off x="640080" y="1691640"/>
-            <a:ext cx="640080" cy="731520"/>
+            <a:off x="6126480" y="2286000"/>
+            <a:ext cx="1645920" cy="914400"/>
           </a:xfrm>
           <a:prstGeom prst="roundRect">
             <a:avLst/>
@@ -6365,6 +6492,792 @@
           <a:p>
             <a:pPr algn="ctr"/>
             <a:r>
+              <a:rPr sz="1300" b="1">
+                <a:solidFill>
+                  <a:srgbClr val="FFFFFF"/>
+                </a:solidFill>
+                <a:latin typeface="PingFang TC"/>
+                <a:ea typeface="PingFang TC"/>
+              </a:rPr>
+              <a:t>App</a:t>
+            </a:r>
+          </a:p>
+          <a:p>
+            <a:pPr algn="ctr"/>
+            <a:r>
+              <a:rPr sz="1300" b="0">
+                <a:solidFill>
+                  <a:srgbClr val="FFFFFF"/>
+                </a:solidFill>
+                <a:latin typeface="PingFang TC"/>
+                <a:ea typeface="PingFang TC"/>
+              </a:rPr>
+              <a:t>(stateless)</a:t>
+            </a:r>
+          </a:p>
+        </p:txBody>
+      </p:sp>
+      <p:sp>
+        <p:nvSpPr>
+          <p:cNvPr id="6" name="Rounded Rectangle 5"/>
+          <p:cNvSpPr/>
+          <p:nvPr/>
+        </p:nvSpPr>
+        <p:spPr>
+          <a:xfrm>
+            <a:off x="8595360" y="1737360"/>
+            <a:ext cx="3017520" cy="731520"/>
+          </a:xfrm>
+          <a:prstGeom prst="roundRect">
+            <a:avLst/>
+          </a:prstGeom>
+          <a:solidFill>
+            <a:srgbClr val="059669"/>
+          </a:solidFill>
+          <a:ln>
+            <a:solidFill>
+              <a:srgbClr val="059669"/>
+            </a:solidFill>
+          </a:ln>
+          <a:effectLst/>
+        </p:spPr>
+        <p:style>
+          <a:lnRef idx="1">
+            <a:schemeClr val="accent1"/>
+          </a:lnRef>
+          <a:fillRef idx="3">
+            <a:schemeClr val="accent1"/>
+          </a:fillRef>
+          <a:effectRef idx="2">
+            <a:schemeClr val="accent1"/>
+          </a:effectRef>
+          <a:fontRef idx="minor">
+            <a:schemeClr val="lt1"/>
+          </a:fontRef>
+        </p:style>
+        <p:txBody>
+          <a:bodyPr rtlCol="0" anchor="ctr" wrap="square" tIns="25400" bIns="25400"/>
+          <a:lstStyle/>
+          <a:p>
+            <a:pPr algn="ctr"/>
+            <a:r>
+              <a:rPr sz="1300" b="1">
+                <a:solidFill>
+                  <a:srgbClr val="FFFFFF"/>
+                </a:solidFill>
+                <a:latin typeface="PingFang TC"/>
+                <a:ea typeface="PingFang TC"/>
+              </a:rPr>
+              <a:t>Primary (Write)</a:t>
+            </a:r>
+          </a:p>
+        </p:txBody>
+      </p:sp>
+      <p:sp>
+        <p:nvSpPr>
+          <p:cNvPr id="7" name="Rounded Rectangle 6"/>
+          <p:cNvSpPr/>
+          <p:nvPr/>
+        </p:nvSpPr>
+        <p:spPr>
+          <a:xfrm>
+            <a:off x="8595360" y="2697480"/>
+            <a:ext cx="3017520" cy="594360"/>
+          </a:xfrm>
+          <a:prstGeom prst="roundRect">
+            <a:avLst/>
+          </a:prstGeom>
+          <a:solidFill>
+            <a:srgbClr val="0EA5E9"/>
+          </a:solidFill>
+          <a:ln>
+            <a:solidFill>
+              <a:srgbClr val="0EA5E9"/>
+            </a:solidFill>
+          </a:ln>
+          <a:effectLst/>
+        </p:spPr>
+        <p:style>
+          <a:lnRef idx="1">
+            <a:schemeClr val="accent1"/>
+          </a:lnRef>
+          <a:fillRef idx="3">
+            <a:schemeClr val="accent1"/>
+          </a:fillRef>
+          <a:effectRef idx="2">
+            <a:schemeClr val="accent1"/>
+          </a:effectRef>
+          <a:fontRef idx="minor">
+            <a:schemeClr val="lt1"/>
+          </a:fontRef>
+        </p:style>
+        <p:txBody>
+          <a:bodyPr rtlCol="0" anchor="ctr" wrap="square" tIns="25400" bIns="25400"/>
+          <a:lstStyle/>
+          <a:p>
+            <a:pPr algn="ctr"/>
+            <a:r>
+              <a:rPr sz="1200" b="1">
+                <a:solidFill>
+                  <a:srgbClr val="FFFFFF"/>
+                </a:solidFill>
+                <a:latin typeface="PingFang TC"/>
+                <a:ea typeface="PingFang TC"/>
+              </a:rPr>
+              <a:t>Read Replica 1</a:t>
+            </a:r>
+          </a:p>
+        </p:txBody>
+      </p:sp>
+      <p:sp>
+        <p:nvSpPr>
+          <p:cNvPr id="8" name="Rounded Rectangle 7"/>
+          <p:cNvSpPr/>
+          <p:nvPr/>
+        </p:nvSpPr>
+        <p:spPr>
+          <a:xfrm>
+            <a:off x="8595360" y="3429000"/>
+            <a:ext cx="3017520" cy="594360"/>
+          </a:xfrm>
+          <a:prstGeom prst="roundRect">
+            <a:avLst/>
+          </a:prstGeom>
+          <a:solidFill>
+            <a:srgbClr val="0EA5E9"/>
+          </a:solidFill>
+          <a:ln>
+            <a:solidFill>
+              <a:srgbClr val="0EA5E9"/>
+            </a:solidFill>
+          </a:ln>
+          <a:effectLst/>
+        </p:spPr>
+        <p:style>
+          <a:lnRef idx="1">
+            <a:schemeClr val="accent1"/>
+          </a:lnRef>
+          <a:fillRef idx="3">
+            <a:schemeClr val="accent1"/>
+          </a:fillRef>
+          <a:effectRef idx="2">
+            <a:schemeClr val="accent1"/>
+          </a:effectRef>
+          <a:fontRef idx="minor">
+            <a:schemeClr val="lt1"/>
+          </a:fontRef>
+        </p:style>
+        <p:txBody>
+          <a:bodyPr rtlCol="0" anchor="ctr" wrap="square" tIns="25400" bIns="25400"/>
+          <a:lstStyle/>
+          <a:p>
+            <a:pPr algn="ctr"/>
+            <a:r>
+              <a:rPr sz="1200" b="1">
+                <a:solidFill>
+                  <a:srgbClr val="FFFFFF"/>
+                </a:solidFill>
+                <a:latin typeface="PingFang TC"/>
+                <a:ea typeface="PingFang TC"/>
+              </a:rPr>
+              <a:t>Read Replica 2</a:t>
+            </a:r>
+          </a:p>
+        </p:txBody>
+      </p:sp>
+      <p:sp>
+        <p:nvSpPr>
+          <p:cNvPr id="9" name="Rounded Rectangle 8"/>
+          <p:cNvSpPr/>
+          <p:nvPr/>
+        </p:nvSpPr>
+        <p:spPr>
+          <a:xfrm>
+            <a:off x="8595360" y="4160520"/>
+            <a:ext cx="3017520" cy="594360"/>
+          </a:xfrm>
+          <a:prstGeom prst="roundRect">
+            <a:avLst/>
+          </a:prstGeom>
+          <a:solidFill>
+            <a:srgbClr val="0EA5E9"/>
+          </a:solidFill>
+          <a:ln>
+            <a:solidFill>
+              <a:srgbClr val="0EA5E9"/>
+            </a:solidFill>
+          </a:ln>
+          <a:effectLst/>
+        </p:spPr>
+        <p:style>
+          <a:lnRef idx="1">
+            <a:schemeClr val="accent1"/>
+          </a:lnRef>
+          <a:fillRef idx="3">
+            <a:schemeClr val="accent1"/>
+          </a:fillRef>
+          <a:effectRef idx="2">
+            <a:schemeClr val="accent1"/>
+          </a:effectRef>
+          <a:fontRef idx="minor">
+            <a:schemeClr val="lt1"/>
+          </a:fontRef>
+        </p:style>
+        <p:txBody>
+          <a:bodyPr rtlCol="0" anchor="ctr" wrap="square" tIns="25400" bIns="25400"/>
+          <a:lstStyle/>
+          <a:p>
+            <a:pPr algn="ctr"/>
+            <a:r>
+              <a:rPr sz="1200" b="1">
+                <a:solidFill>
+                  <a:srgbClr val="FFFFFF"/>
+                </a:solidFill>
+                <a:latin typeface="PingFang TC"/>
+                <a:ea typeface="PingFang TC"/>
+              </a:rPr>
+              <a:t>Read Replica N</a:t>
+            </a:r>
+          </a:p>
+        </p:txBody>
+      </p:sp>
+      <p:cxnSp>
+        <p:nvCxnSpPr>
+          <p:cNvPr id="10" name="Connector 9"/>
+          <p:cNvCxnSpPr/>
+          <p:nvPr/>
+        </p:nvCxnSpPr>
+        <p:spPr>
+          <a:xfrm flipV="1">
+            <a:off x="7772400" y="2103120"/>
+            <a:ext cx="822960" cy="457200"/>
+          </a:xfrm>
+          <a:prstGeom prst="line">
+            <a:avLst/>
+          </a:prstGeom>
+          <a:ln w="20320">
+            <a:solidFill>
+              <a:srgbClr val="DC2626"/>
+            </a:solidFill>
+            <a:tailEnd type="triangle" w="med" len="med"/>
+          </a:ln>
+        </p:spPr>
+        <p:style>
+          <a:lnRef idx="2">
+            <a:schemeClr val="accent1"/>
+          </a:lnRef>
+          <a:fillRef idx="0">
+            <a:schemeClr val="accent1"/>
+          </a:fillRef>
+          <a:effectRef idx="1">
+            <a:schemeClr val="accent1"/>
+          </a:effectRef>
+          <a:fontRef idx="minor">
+            <a:schemeClr val="tx1"/>
+          </a:fontRef>
+        </p:style>
+      </p:cxnSp>
+      <p:cxnSp>
+        <p:nvCxnSpPr>
+          <p:cNvPr id="11" name="Connector 10"/>
+          <p:cNvCxnSpPr/>
+          <p:nvPr/>
+        </p:nvCxnSpPr>
+        <p:spPr>
+          <a:xfrm>
+            <a:off x="7772400" y="2880360"/>
+            <a:ext cx="822960" cy="109728"/>
+          </a:xfrm>
+          <a:prstGeom prst="line">
+            <a:avLst/>
+          </a:prstGeom>
+          <a:ln w="17780">
+            <a:solidFill>
+              <a:srgbClr val="059669"/>
+            </a:solidFill>
+            <a:tailEnd type="triangle" w="med" len="med"/>
+          </a:ln>
+        </p:spPr>
+        <p:style>
+          <a:lnRef idx="2">
+            <a:schemeClr val="accent1"/>
+          </a:lnRef>
+          <a:fillRef idx="0">
+            <a:schemeClr val="accent1"/>
+          </a:fillRef>
+          <a:effectRef idx="1">
+            <a:schemeClr val="accent1"/>
+          </a:effectRef>
+          <a:fontRef idx="minor">
+            <a:schemeClr val="tx1"/>
+          </a:fontRef>
+        </p:style>
+      </p:cxnSp>
+      <p:cxnSp>
+        <p:nvCxnSpPr>
+          <p:cNvPr id="12" name="Connector 11"/>
+          <p:cNvCxnSpPr/>
+          <p:nvPr/>
+        </p:nvCxnSpPr>
+        <p:spPr>
+          <a:xfrm>
+            <a:off x="7772400" y="3017520"/>
+            <a:ext cx="822960" cy="704088"/>
+          </a:xfrm>
+          <a:prstGeom prst="line">
+            <a:avLst/>
+          </a:prstGeom>
+          <a:ln w="17780">
+            <a:solidFill>
+              <a:srgbClr val="059669"/>
+            </a:solidFill>
+            <a:tailEnd type="triangle" w="med" len="med"/>
+          </a:ln>
+        </p:spPr>
+        <p:style>
+          <a:lnRef idx="2">
+            <a:schemeClr val="accent1"/>
+          </a:lnRef>
+          <a:fillRef idx="0">
+            <a:schemeClr val="accent1"/>
+          </a:fillRef>
+          <a:effectRef idx="1">
+            <a:schemeClr val="accent1"/>
+          </a:effectRef>
+          <a:fontRef idx="minor">
+            <a:schemeClr val="tx1"/>
+          </a:fontRef>
+        </p:style>
+      </p:cxnSp>
+      <p:cxnSp>
+        <p:nvCxnSpPr>
+          <p:cNvPr id="13" name="Connector 12"/>
+          <p:cNvCxnSpPr/>
+          <p:nvPr/>
+        </p:nvCxnSpPr>
+        <p:spPr>
+          <a:xfrm>
+            <a:off x="7772400" y="3108960"/>
+            <a:ext cx="822960" cy="1344168"/>
+          </a:xfrm>
+          <a:prstGeom prst="line">
+            <a:avLst/>
+          </a:prstGeom>
+          <a:ln w="17780">
+            <a:solidFill>
+              <a:srgbClr val="059669"/>
+            </a:solidFill>
+            <a:tailEnd type="triangle" w="med" len="med"/>
+          </a:ln>
+        </p:spPr>
+        <p:style>
+          <a:lnRef idx="2">
+            <a:schemeClr val="accent1"/>
+          </a:lnRef>
+          <a:fillRef idx="0">
+            <a:schemeClr val="accent1"/>
+          </a:fillRef>
+          <a:effectRef idx="1">
+            <a:schemeClr val="accent1"/>
+          </a:effectRef>
+          <a:fontRef idx="minor">
+            <a:schemeClr val="tx1"/>
+          </a:fontRef>
+        </p:style>
+      </p:cxnSp>
+      <p:sp>
+        <p:nvSpPr>
+          <p:cNvPr id="14" name="TextBox 13"/>
+          <p:cNvSpPr txBox="1"/>
+          <p:nvPr/>
+        </p:nvSpPr>
+        <p:spPr>
+          <a:xfrm>
+            <a:off x="7635240" y="2057400"/>
+            <a:ext cx="914400" cy="274320"/>
+          </a:xfrm>
+          <a:prstGeom prst="rect">
+            <a:avLst/>
+          </a:prstGeom>
+          <a:noFill/>
+        </p:spPr>
+        <p:txBody>
+          <a:bodyPr wrap="square" anchor="t">
+            <a:spAutoFit/>
+          </a:bodyPr>
+          <a:lstStyle/>
+          <a:p>
+            <a:pPr algn="l">
+              <a:spcAft>
+                <a:spcPts val="400"/>
+              </a:spcAft>
+            </a:pPr>
+            <a:r>
+              <a:rPr sz="1200" b="1">
+                <a:solidFill>
+                  <a:srgbClr val="DC2626"/>
+                </a:solidFill>
+                <a:latin typeface="PingFang TC"/>
+                <a:ea typeface="PingFang TC"/>
+              </a:rPr>
+              <a:t>寫</a:t>
+            </a:r>
+          </a:p>
+        </p:txBody>
+      </p:sp>
+      <p:sp>
+        <p:nvSpPr>
+          <p:cNvPr id="15" name="TextBox 14"/>
+          <p:cNvSpPr txBox="1"/>
+          <p:nvPr/>
+        </p:nvSpPr>
+        <p:spPr>
+          <a:xfrm>
+            <a:off x="7589520" y="3200400"/>
+            <a:ext cx="914400" cy="274320"/>
+          </a:xfrm>
+          <a:prstGeom prst="rect">
+            <a:avLst/>
+          </a:prstGeom>
+          <a:noFill/>
+        </p:spPr>
+        <p:txBody>
+          <a:bodyPr wrap="square" anchor="t">
+            <a:spAutoFit/>
+          </a:bodyPr>
+          <a:lstStyle/>
+          <a:p>
+            <a:pPr algn="l">
+              <a:spcAft>
+                <a:spcPts val="400"/>
+              </a:spcAft>
+            </a:pPr>
+            <a:r>
+              <a:rPr sz="1200" b="1">
+                <a:solidFill>
+                  <a:srgbClr val="059669"/>
+                </a:solidFill>
+                <a:latin typeface="PingFang TC"/>
+                <a:ea typeface="PingFang TC"/>
+              </a:rPr>
+              <a:t>讀</a:t>
+            </a:r>
+          </a:p>
+        </p:txBody>
+      </p:sp>
+      <p:cxnSp>
+        <p:nvCxnSpPr>
+          <p:cNvPr id="16" name="Connector 15"/>
+          <p:cNvCxnSpPr/>
+          <p:nvPr/>
+        </p:nvCxnSpPr>
+        <p:spPr>
+          <a:xfrm>
+            <a:off x="10104120" y="2468880"/>
+            <a:ext cx="0" cy="228600"/>
+          </a:xfrm>
+          <a:prstGeom prst="line">
+            <a:avLst/>
+          </a:prstGeom>
+          <a:ln w="13970">
+            <a:solidFill>
+              <a:srgbClr val="64748B"/>
+            </a:solidFill>
+            <a:tailEnd type="triangle" w="med" len="med"/>
+          </a:ln>
+        </p:spPr>
+        <p:style>
+          <a:lnRef idx="2">
+            <a:schemeClr val="accent1"/>
+          </a:lnRef>
+          <a:fillRef idx="0">
+            <a:schemeClr val="accent1"/>
+          </a:fillRef>
+          <a:effectRef idx="1">
+            <a:schemeClr val="accent1"/>
+          </a:effectRef>
+          <a:fontRef idx="minor">
+            <a:schemeClr val="tx1"/>
+          </a:fontRef>
+        </p:style>
+      </p:cxnSp>
+      <p:sp>
+        <p:nvSpPr>
+          <p:cNvPr id="17" name="TextBox 16"/>
+          <p:cNvSpPr txBox="1"/>
+          <p:nvPr/>
+        </p:nvSpPr>
+        <p:spPr>
+          <a:xfrm>
+            <a:off x="10241280" y="2395728"/>
+            <a:ext cx="1463040" cy="274320"/>
+          </a:xfrm>
+          <a:prstGeom prst="rect">
+            <a:avLst/>
+          </a:prstGeom>
+          <a:noFill/>
+        </p:spPr>
+        <p:txBody>
+          <a:bodyPr wrap="square" anchor="t">
+            <a:spAutoFit/>
+          </a:bodyPr>
+          <a:lstStyle/>
+          <a:p>
+            <a:pPr algn="l">
+              <a:spcAft>
+                <a:spcPts val="400"/>
+              </a:spcAft>
+            </a:pPr>
+            <a:r>
+              <a:rPr sz="1000" b="0">
+                <a:solidFill>
+                  <a:srgbClr val="64748B"/>
+                </a:solidFill>
+                <a:latin typeface="PingFang TC"/>
+                <a:ea typeface="PingFang TC"/>
+              </a:rPr>
+              <a:t>非同步複寫</a:t>
+            </a:r>
+          </a:p>
+        </p:txBody>
+      </p:sp>
+      <p:sp>
+        <p:nvSpPr>
+          <p:cNvPr id="18" name="TextBox 17"/>
+          <p:cNvSpPr txBox="1"/>
+          <p:nvPr/>
+        </p:nvSpPr>
+        <p:spPr>
+          <a:xfrm>
+            <a:off x="548640" y="5029200"/>
+            <a:ext cx="11247120" cy="1554480"/>
+          </a:xfrm>
+          <a:prstGeom prst="rect">
+            <a:avLst/>
+          </a:prstGeom>
+          <a:noFill/>
+        </p:spPr>
+        <p:txBody>
+          <a:bodyPr wrap="square">
+            <a:spAutoFit/>
+          </a:bodyPr>
+          <a:lstStyle/>
+          <a:p>
+            <a:pPr>
+              <a:spcAft>
+                <a:spcPts val="600"/>
+              </a:spcAft>
+            </a:pPr>
+            <a:r>
+              <a:rPr sz="1300" b="0">
+                <a:solidFill>
+                  <a:srgbClr val="0F172A"/>
+                </a:solidFill>
+                <a:latin typeface="PingFang TC"/>
+                <a:ea typeface="PingFang TC"/>
+              </a:rPr>
+              <a:t>•  寫走 primary、讀走 replica（load-balanced）；讀不夠就加 replica 水平擴讀</a:t>
+            </a:r>
+          </a:p>
+          <a:p>
+            <a:pPr>
+              <a:spcAft>
+                <a:spcPts val="600"/>
+              </a:spcAft>
+            </a:pPr>
+            <a:r>
+              <a:rPr sz="1300" b="0">
+                <a:solidFill>
+                  <a:srgbClr val="0F172A"/>
+                </a:solidFill>
+                <a:latin typeface="PingFang TC"/>
+                <a:ea typeface="PingFang TC"/>
+              </a:rPr>
+              <a:t>•  配合 Redis cache，真正打到 DB 的讀已先被擋掉一大半</a:t>
+            </a:r>
+          </a:p>
+          <a:p>
+            <a:pPr>
+              <a:spcAft>
+                <a:spcPts val="600"/>
+              </a:spcAft>
+            </a:pPr>
+            <a:r>
+              <a:rPr sz="1300" b="0">
+                <a:solidFill>
+                  <a:srgbClr val="0F172A"/>
+                </a:solidFill>
+                <a:latin typeface="PingFang TC"/>
+                <a:ea typeface="PingFang TC"/>
+              </a:rPr>
+              <a:t>•  failover：primary 掛 → 升一台 read replica 為新 primary；複寫延遲靠 create 後暖 cache 緩解</a:t>
+            </a:r>
+          </a:p>
+        </p:txBody>
+      </p:sp>
+    </p:spTree>
+  </p:cSld>
+  <p:clrMapOvr>
+    <a:masterClrMapping/>
+  </p:clrMapOvr>
+</p:sld>
+</file>
+
+<file path=ppt/slides/slide17.xml><?xml version="1.0" encoding="utf-8"?>
+<p:sld xmlns:a="http://schemas.openxmlformats.org/drawingml/2006/main" xmlns:p="http://schemas.openxmlformats.org/presentationml/2006/main" xmlns:r="http://schemas.openxmlformats.org/officeDocument/2006/relationships">
+  <p:cSld>
+    <p:spTree>
+      <p:nvGrpSpPr>
+        <p:cNvPr id="1" name=""/>
+        <p:cNvGrpSpPr/>
+        <p:nvPr/>
+      </p:nvGrpSpPr>
+      <p:grpSpPr/>
+      <p:sp>
+        <p:nvSpPr>
+          <p:cNvPr id="2" name="Rectangle 1"/>
+          <p:cNvSpPr/>
+          <p:nvPr/>
+        </p:nvSpPr>
+        <p:spPr>
+          <a:xfrm>
+            <a:off x="0" y="0"/>
+            <a:ext cx="164592" cy="6858000"/>
+          </a:xfrm>
+          <a:prstGeom prst="rect">
+            <a:avLst/>
+          </a:prstGeom>
+          <a:solidFill>
+            <a:srgbClr val="2563EB"/>
+          </a:solidFill>
+          <a:ln>
+            <a:noFill/>
+          </a:ln>
+          <a:effectLst/>
+        </p:spPr>
+        <p:style>
+          <a:lnRef idx="1">
+            <a:schemeClr val="accent1"/>
+          </a:lnRef>
+          <a:fillRef idx="3">
+            <a:schemeClr val="accent1"/>
+          </a:fillRef>
+          <a:effectRef idx="2">
+            <a:schemeClr val="accent1"/>
+          </a:effectRef>
+          <a:fontRef idx="minor">
+            <a:schemeClr val="lt1"/>
+          </a:fontRef>
+        </p:style>
+        <p:txBody>
+          <a:bodyPr rtlCol="0" anchor="ctr"/>
+          <a:lstStyle/>
+          <a:p>
+            <a:pPr algn="ctr"/>
+          </a:p>
+        </p:txBody>
+      </p:sp>
+      <p:sp>
+        <p:nvSpPr>
+          <p:cNvPr id="3" name="TextBox 2"/>
+          <p:cNvSpPr txBox="1"/>
+          <p:nvPr/>
+        </p:nvSpPr>
+        <p:spPr>
+          <a:xfrm>
+            <a:off x="502920" y="320040"/>
+            <a:ext cx="10972800" cy="1005840"/>
+          </a:xfrm>
+          <a:prstGeom prst="rect">
+            <a:avLst/>
+          </a:prstGeom>
+          <a:noFill/>
+        </p:spPr>
+        <p:txBody>
+          <a:bodyPr wrap="square" anchor="t">
+            <a:spAutoFit/>
+          </a:bodyPr>
+          <a:lstStyle/>
+          <a:p>
+            <a:pPr algn="l">
+              <a:spcAft>
+                <a:spcPts val="200"/>
+              </a:spcAft>
+            </a:pPr>
+            <a:r>
+              <a:rPr sz="1300" b="1">
+                <a:solidFill>
+                  <a:srgbClr val="2563EB"/>
+                </a:solidFill>
+                <a:latin typeface="PingFang TC"/>
+                <a:ea typeface="PingFang TC"/>
+              </a:rPr>
+              <a:t>12 · IMPROVEMENTS</a:t>
+            </a:r>
+          </a:p>
+          <a:p>
+            <a:pPr algn="l">
+              <a:spcAft>
+                <a:spcPts val="400"/>
+              </a:spcAft>
+            </a:pPr>
+            <a:r>
+              <a:rPr sz="3000" b="1">
+                <a:solidFill>
+                  <a:srgbClr val="0F172A"/>
+                </a:solidFill>
+                <a:latin typeface="PingFang TC"/>
+                <a:ea typeface="PingFang TC"/>
+              </a:rPr>
+              <a:t>對參考 repo 的關鍵改良</a:t>
+            </a:r>
+          </a:p>
+        </p:txBody>
+      </p:sp>
+      <p:sp>
+        <p:nvSpPr>
+          <p:cNvPr id="4" name="Rounded Rectangle 3"/>
+          <p:cNvSpPr/>
+          <p:nvPr/>
+        </p:nvSpPr>
+        <p:spPr>
+          <a:xfrm>
+            <a:off x="640080" y="1691640"/>
+            <a:ext cx="640080" cy="731520"/>
+          </a:xfrm>
+          <a:prstGeom prst="roundRect">
+            <a:avLst/>
+          </a:prstGeom>
+          <a:solidFill>
+            <a:srgbClr val="2563EB"/>
+          </a:solidFill>
+          <a:ln>
+            <a:solidFill>
+              <a:srgbClr val="2563EB"/>
+            </a:solidFill>
+          </a:ln>
+          <a:effectLst/>
+        </p:spPr>
+        <p:style>
+          <a:lnRef idx="1">
+            <a:schemeClr val="accent1"/>
+          </a:lnRef>
+          <a:fillRef idx="3">
+            <a:schemeClr val="accent1"/>
+          </a:fillRef>
+          <a:effectRef idx="2">
+            <a:schemeClr val="accent1"/>
+          </a:effectRef>
+          <a:fontRef idx="minor">
+            <a:schemeClr val="lt1"/>
+          </a:fontRef>
+        </p:style>
+        <p:txBody>
+          <a:bodyPr rtlCol="0" anchor="ctr" wrap="square" tIns="25400" bIns="25400"/>
+          <a:lstStyle/>
+          <a:p>
+            <a:pPr algn="ctr"/>
+            <a:r>
               <a:rPr sz="1800" b="1">
                 <a:solidFill>
                   <a:srgbClr val="FFFFFF"/>
@@ -7124,7 +8037,7 @@
 </p:sld>
 </file>
 
-<file path=ppt/slides/slide17.xml><?xml version="1.0" encoding="utf-8"?>
+<file path=ppt/slides/slide18.xml><?xml version="1.0" encoding="utf-8"?>
 <p:sld xmlns:a="http://schemas.openxmlformats.org/drawingml/2006/main" xmlns:p="http://schemas.openxmlformats.org/presentationml/2006/main" xmlns:r="http://schemas.openxmlformats.org/officeDocument/2006/relationships">
   <p:cSld>
     <p:spTree>
@@ -8056,7 +8969,7 @@
 </p:sld>
 </file>
 
-<file path=ppt/slides/slide18.xml><?xml version="1.0" encoding="utf-8"?>
+<file path=ppt/slides/slide19.xml><?xml version="1.0" encoding="utf-8"?>
 <p:sld xmlns:a="http://schemas.openxmlformats.org/drawingml/2006/main" xmlns:p="http://schemas.openxmlformats.org/presentationml/2006/main" xmlns:r="http://schemas.openxmlformats.org/officeDocument/2006/relationships">
   <p:cSld>
     <p:spTree>
@@ -8075,13 +8988,13 @@
         <p:spPr>
           <a:xfrm>
             <a:off x="0" y="0"/>
-            <a:ext cx="12191695" cy="6858000"/>
+            <a:ext cx="164592" cy="6858000"/>
           </a:xfrm>
           <a:prstGeom prst="rect">
             <a:avLst/>
           </a:prstGeom>
           <a:solidFill>
-            <a:srgbClr val="0F172A"/>
+            <a:srgbClr val="2563EB"/>
           </a:solidFill>
           <a:ln>
             <a:noFill/>
@@ -8118,8 +9031,8 @@
         </p:nvSpPr>
         <p:spPr>
           <a:xfrm>
-            <a:off x="822960" y="1097280"/>
-            <a:ext cx="10515600" cy="1097280"/>
+            <a:off x="502920" y="320040"/>
+            <a:ext cx="10972800" cy="1005840"/>
           </a:xfrm>
           <a:prstGeom prst="rect">
             <a:avLst/>
@@ -8134,35 +9047,35 @@
           <a:p>
             <a:pPr algn="l">
               <a:spcAft>
+                <a:spcPts val="200"/>
+              </a:spcAft>
+            </a:pPr>
+            <a:r>
+              <a:rPr sz="1300" b="1">
+                <a:solidFill>
+                  <a:srgbClr val="2563EB"/>
+                </a:solidFill>
+                <a:latin typeface="PingFang TC"/>
+                <a:ea typeface="PingFang TC"/>
+              </a:rPr>
+              <a:t>附錄 · CDN EDGE</a:t>
+            </a:r>
+          </a:p>
+          <a:p>
+            <a:pPr algn="l">
+              <a:spcAft>
                 <a:spcPts val="400"/>
               </a:spcAft>
             </a:pPr>
             <a:r>
-              <a:rPr sz="1600" b="1">
-                <a:solidFill>
-                  <a:srgbClr val="2563EB"/>
-                </a:solidFill>
-                <a:latin typeface="PingFang TC"/>
-                <a:ea typeface="PingFang TC"/>
-              </a:rPr>
-              <a:t>原型狀態</a:t>
-            </a:r>
-          </a:p>
-          <a:p>
-            <a:pPr algn="l">
-              <a:spcAft>
-                <a:spcPts val="400"/>
-              </a:spcAft>
-            </a:pPr>
-            <a:r>
               <a:rPr sz="3000" b="1">
                 <a:solidFill>
-                  <a:srgbClr val="FFFFFF"/>
-                </a:solidFill>
-                <a:latin typeface="PingFang TC"/>
-                <a:ea typeface="PingFang TC"/>
-              </a:rPr>
-              <a:t>可跑的 FastAPI 實作 + 管理頁前端</a:t>
+                  <a:srgbClr val="0F172A"/>
+                </a:solidFill>
+                <a:latin typeface="PingFang TC"/>
+                <a:ea typeface="PingFang TC"/>
+              </a:rPr>
+              <a:t>CDN 邊緣 redirect 變體（可選最佳化）</a:t>
             </a:r>
           </a:p>
         </p:txBody>
@@ -8175,8 +9088,8 @@
         </p:nvSpPr>
         <p:spPr>
           <a:xfrm>
-            <a:off x="822960" y="2743200"/>
-            <a:ext cx="10515600" cy="2743200"/>
+            <a:off x="548640" y="1371600"/>
+            <a:ext cx="11155680" cy="548640"/>
           </a:xfrm>
           <a:prstGeom prst="rect">
             <a:avLst/>
@@ -8184,76 +9097,790 @@
           <a:noFill/>
         </p:spPr>
         <p:txBody>
-          <a:bodyPr wrap="square">
+          <a:bodyPr wrap="square" anchor="t">
             <a:spAutoFit/>
           </a:bodyPr>
           <a:lstStyle/>
           <a:p>
-            <a:pPr>
-              <a:spcAft>
-                <a:spcPts val="1200"/>
-              </a:spcAft>
-            </a:pPr>
-            <a:r>
-              <a:rPr sz="1600" b="0">
-                <a:solidFill>
-                  <a:srgbClr val="E2E8F0"/>
-                </a:solidFill>
-                <a:latin typeface="PingFang TC"/>
-                <a:ea typeface="PingFang TC"/>
-              </a:rPr>
-              <a:t>✓  7 個 API 端點 + 管理頁前端（建立/清單/編輯/刪除/分析）</a:t>
-            </a:r>
-          </a:p>
-          <a:p>
-            <a:pPr>
-              <a:spcAft>
-                <a:spcPts val="1200"/>
-              </a:spcAft>
-            </a:pPr>
-            <a:r>
-              <a:rPr sz="1600" b="0">
-                <a:solidFill>
-                  <a:srgbClr val="E2E8F0"/>
-                </a:solidFill>
-                <a:latin typeface="PingFang TC"/>
-                <a:ea typeface="PingFang TC"/>
-              </a:rPr>
-              <a:t>✓  全部 curl 驗證通過：302 / 404 / 410 / 8 碼 token / 正規化 / SSRF / 過期</a:t>
-            </a:r>
-          </a:p>
-          <a:p>
-            <a:pPr>
-              <a:spcAft>
-                <a:spcPts val="1200"/>
-              </a:spcAft>
-            </a:pPr>
-            <a:r>
-              <a:rPr sz="1600" b="0">
-                <a:solidFill>
-                  <a:srgbClr val="E2E8F0"/>
-                </a:solidFill>
-                <a:latin typeface="PingFang TC"/>
-                <a:ea typeface="PingFang TC"/>
-              </a:rPr>
-              <a:t>✓  production 替換點已在程式註解標明（Redis / 佇列 / CDN / 預聚合 / PostgreSQL）</a:t>
-            </a:r>
-          </a:p>
-          <a:p>
-            <a:pPr>
-              <a:spcAft>
-                <a:spcPts val="1200"/>
-              </a:spcAft>
-            </a:pPr>
-            <a:r>
-              <a:rPr sz="1600" b="0">
-                <a:solidFill>
-                  <a:srgbClr val="E2E8F0"/>
-                </a:solidFill>
-                <a:latin typeface="PingFang TC"/>
-                <a:ea typeface="PingFang TC"/>
-              </a:rPr>
-              <a:t>✓  設計依據：DESIGN.md（16 題決策 + 優劣分析）</a:t>
+            <a:pPr algn="l">
+              <a:spcAft>
+                <a:spcPts val="200"/>
+              </a:spcAft>
+            </a:pPr>
+            <a:r>
+              <a:rPr sz="1200" b="0">
+                <a:solidFill>
+                  <a:srgbClr val="64748B"/>
+                </a:solidFill>
+                <a:latin typeface="PingFang TC"/>
+                <a:ea typeface="PingFang TC"/>
+              </a:rPr>
+              <a:t>主設計選擇不快取 redirect（回源保即時改/刪 + 分析）。302 與 CDN 無因果——302 仍可設短 TTL 讓 CDN 快取；</a:t>
+            </a:r>
+          </a:p>
+          <a:p>
+            <a:pPr algn="l">
+              <a:spcAft>
+                <a:spcPts val="400"/>
+              </a:spcAft>
+            </a:pPr>
+            <a:r>
+              <a:rPr sz="1200" b="0">
+                <a:solidFill>
+                  <a:srgbClr val="64748B"/>
+                </a:solidFill>
+                <a:latin typeface="PingFang TC"/>
+                <a:ea typeface="PingFang TC"/>
+              </a:rPr>
+              <a:t>真正取捨是「快取 redirect vs 即時性/分析」。本變體：熱門 token 的 302 設短 TTL、邊緣直接跳，換更低延遲。</a:t>
+            </a:r>
+          </a:p>
+        </p:txBody>
+      </p:sp>
+      <p:sp>
+        <p:nvSpPr>
+          <p:cNvPr id="5" name="Rounded Rectangle 4"/>
+          <p:cNvSpPr/>
+          <p:nvPr/>
+        </p:nvSpPr>
+        <p:spPr>
+          <a:xfrm>
+            <a:off x="548640" y="2011680"/>
+            <a:ext cx="2011680" cy="868680"/>
+          </a:xfrm>
+          <a:prstGeom prst="roundRect">
+            <a:avLst/>
+          </a:prstGeom>
+          <a:solidFill>
+            <a:srgbClr val="64748B"/>
+          </a:solidFill>
+          <a:ln>
+            <a:solidFill>
+              <a:srgbClr val="64748B"/>
+            </a:solidFill>
+          </a:ln>
+          <a:effectLst/>
+        </p:spPr>
+        <p:style>
+          <a:lnRef idx="1">
+            <a:schemeClr val="accent1"/>
+          </a:lnRef>
+          <a:fillRef idx="3">
+            <a:schemeClr val="accent1"/>
+          </a:fillRef>
+          <a:effectRef idx="2">
+            <a:schemeClr val="accent1"/>
+          </a:effectRef>
+          <a:fontRef idx="minor">
+            <a:schemeClr val="lt1"/>
+          </a:fontRef>
+        </p:style>
+        <p:txBody>
+          <a:bodyPr rtlCol="0" anchor="ctr" wrap="square" tIns="25400" bIns="25400"/>
+          <a:lstStyle/>
+          <a:p>
+            <a:pPr algn="ctr"/>
+            <a:r>
+              <a:rPr sz="1200" b="1">
+                <a:solidFill>
+                  <a:srgbClr val="FFFFFF"/>
+                </a:solidFill>
+                <a:latin typeface="PingFang TC"/>
+                <a:ea typeface="PingFang TC"/>
+              </a:rPr>
+              <a:t>掃描者</a:t>
+            </a:r>
+          </a:p>
+          <a:p>
+            <a:pPr algn="ctr"/>
+            <a:r>
+              <a:rPr sz="1200" b="0">
+                <a:solidFill>
+                  <a:srgbClr val="FFFFFF"/>
+                </a:solidFill>
+                <a:latin typeface="PingFang TC"/>
+                <a:ea typeface="PingFang TC"/>
+              </a:rPr>
+              <a:t>GET /r/{token}</a:t>
+            </a:r>
+          </a:p>
+        </p:txBody>
+      </p:sp>
+      <p:sp>
+        <p:nvSpPr>
+          <p:cNvPr id="6" name="Rounded Rectangle 5"/>
+          <p:cNvSpPr/>
+          <p:nvPr/>
+        </p:nvSpPr>
+        <p:spPr>
+          <a:xfrm>
+            <a:off x="3017520" y="1920240"/>
+            <a:ext cx="3291840" cy="1051560"/>
+          </a:xfrm>
+          <a:prstGeom prst="roundRect">
+            <a:avLst/>
+          </a:prstGeom>
+          <a:solidFill>
+            <a:srgbClr val="7C3AED"/>
+          </a:solidFill>
+          <a:ln>
+            <a:solidFill>
+              <a:srgbClr val="7C3AED"/>
+            </a:solidFill>
+          </a:ln>
+          <a:effectLst/>
+        </p:spPr>
+        <p:style>
+          <a:lnRef idx="1">
+            <a:schemeClr val="accent1"/>
+          </a:lnRef>
+          <a:fillRef idx="3">
+            <a:schemeClr val="accent1"/>
+          </a:fillRef>
+          <a:effectRef idx="2">
+            <a:schemeClr val="accent1"/>
+          </a:effectRef>
+          <a:fontRef idx="minor">
+            <a:schemeClr val="lt1"/>
+          </a:fontRef>
+        </p:style>
+        <p:txBody>
+          <a:bodyPr rtlCol="0" anchor="ctr" wrap="square" tIns="25400" bIns="25400"/>
+          <a:lstStyle/>
+          <a:p>
+            <a:pPr algn="ctr"/>
+            <a:r>
+              <a:rPr sz="1200" b="1">
+                <a:solidFill>
+                  <a:srgbClr val="FFFFFF"/>
+                </a:solidFill>
+                <a:latin typeface="PingFang TC"/>
+                <a:ea typeface="PingFang TC"/>
+              </a:rPr>
+              <a:t>CDN Edge（近使用者）</a:t>
+            </a:r>
+          </a:p>
+          <a:p>
+            <a:pPr algn="ctr"/>
+            <a:r>
+              <a:rPr sz="1200" b="0">
+                <a:solidFill>
+                  <a:srgbClr val="FFFFFF"/>
+                </a:solidFill>
+                <a:latin typeface="PingFang TC"/>
+                <a:ea typeface="PingFang TC"/>
+              </a:rPr>
+              <a:t>edge cache: token→URL</a:t>
+            </a:r>
+          </a:p>
+          <a:p>
+            <a:pPr algn="ctr"/>
+            <a:r>
+              <a:rPr sz="1200" b="0">
+                <a:solidFill>
+                  <a:srgbClr val="FFFFFF"/>
+                </a:solidFill>
+                <a:latin typeface="PingFang TC"/>
+                <a:ea typeface="PingFang TC"/>
+              </a:rPr>
+              <a:t>短 TTL（例 60s）</a:t>
+            </a:r>
+          </a:p>
+        </p:txBody>
+      </p:sp>
+      <p:cxnSp>
+        <p:nvCxnSpPr>
+          <p:cNvPr id="7" name="Connector 6"/>
+          <p:cNvCxnSpPr/>
+          <p:nvPr/>
+        </p:nvCxnSpPr>
+        <p:spPr>
+          <a:xfrm>
+            <a:off x="2560320" y="2423160"/>
+            <a:ext cx="457200" cy="0"/>
+          </a:xfrm>
+          <a:prstGeom prst="line">
+            <a:avLst/>
+          </a:prstGeom>
+          <a:ln w="22225">
+            <a:solidFill>
+              <a:srgbClr val="64748B"/>
+            </a:solidFill>
+            <a:tailEnd type="triangle" w="med" len="med"/>
+          </a:ln>
+        </p:spPr>
+        <p:style>
+          <a:lnRef idx="2">
+            <a:schemeClr val="accent1"/>
+          </a:lnRef>
+          <a:fillRef idx="0">
+            <a:schemeClr val="accent1"/>
+          </a:fillRef>
+          <a:effectRef idx="1">
+            <a:schemeClr val="accent1"/>
+          </a:effectRef>
+          <a:fontRef idx="minor">
+            <a:schemeClr val="tx1"/>
+          </a:fontRef>
+        </p:style>
+      </p:cxnSp>
+      <p:sp>
+        <p:nvSpPr>
+          <p:cNvPr id="8" name="Rounded Rectangle 7"/>
+          <p:cNvSpPr/>
+          <p:nvPr/>
+        </p:nvSpPr>
+        <p:spPr>
+          <a:xfrm>
+            <a:off x="3017520" y="3337560"/>
+            <a:ext cx="3291840" cy="777240"/>
+          </a:xfrm>
+          <a:prstGeom prst="roundRect">
+            <a:avLst/>
+          </a:prstGeom>
+          <a:solidFill>
+            <a:srgbClr val="059669"/>
+          </a:solidFill>
+          <a:ln>
+            <a:solidFill>
+              <a:srgbClr val="059669"/>
+            </a:solidFill>
+          </a:ln>
+          <a:effectLst/>
+        </p:spPr>
+        <p:style>
+          <a:lnRef idx="1">
+            <a:schemeClr val="accent1"/>
+          </a:lnRef>
+          <a:fillRef idx="3">
+            <a:schemeClr val="accent1"/>
+          </a:fillRef>
+          <a:effectRef idx="2">
+            <a:schemeClr val="accent1"/>
+          </a:effectRef>
+          <a:fontRef idx="minor">
+            <a:schemeClr val="lt1"/>
+          </a:fontRef>
+        </p:style>
+        <p:txBody>
+          <a:bodyPr rtlCol="0" anchor="ctr" wrap="square" tIns="25400" bIns="25400"/>
+          <a:lstStyle/>
+          <a:p>
+            <a:pPr algn="ctr"/>
+            <a:r>
+              <a:rPr sz="1200" b="1">
+                <a:solidFill>
+                  <a:srgbClr val="FFFFFF"/>
+                </a:solidFill>
+                <a:latin typeface="PingFang TC"/>
+                <a:ea typeface="PingFang TC"/>
+              </a:rPr>
+              <a:t>命中 → CDN 直接回 302</a:t>
+            </a:r>
+          </a:p>
+          <a:p>
+            <a:pPr algn="ctr"/>
+            <a:r>
+              <a:rPr sz="1200" b="0">
+                <a:solidFill>
+                  <a:srgbClr val="FFFFFF"/>
+                </a:solidFill>
+                <a:latin typeface="PingFang TC"/>
+                <a:ea typeface="PingFang TC"/>
+              </a:rPr>
+              <a:t>不回源 · 最低延遲</a:t>
+            </a:r>
+          </a:p>
+        </p:txBody>
+      </p:sp>
+      <p:cxnSp>
+        <p:nvCxnSpPr>
+          <p:cNvPr id="9" name="Connector 8"/>
+          <p:cNvCxnSpPr/>
+          <p:nvPr/>
+        </p:nvCxnSpPr>
+        <p:spPr>
+          <a:xfrm>
+            <a:off x="4663440" y="2971800"/>
+            <a:ext cx="0" cy="365760"/>
+          </a:xfrm>
+          <a:prstGeom prst="line">
+            <a:avLst/>
+          </a:prstGeom>
+          <a:ln w="16510">
+            <a:solidFill>
+              <a:srgbClr val="059669"/>
+            </a:solidFill>
+            <a:tailEnd type="triangle" w="med" len="med"/>
+          </a:ln>
+        </p:spPr>
+        <p:style>
+          <a:lnRef idx="2">
+            <a:schemeClr val="accent1"/>
+          </a:lnRef>
+          <a:fillRef idx="0">
+            <a:schemeClr val="accent1"/>
+          </a:fillRef>
+          <a:effectRef idx="1">
+            <a:schemeClr val="accent1"/>
+          </a:effectRef>
+          <a:fontRef idx="minor">
+            <a:schemeClr val="tx1"/>
+          </a:fontRef>
+        </p:style>
+      </p:cxnSp>
+      <p:sp>
+        <p:nvSpPr>
+          <p:cNvPr id="10" name="Rounded Rectangle 9"/>
+          <p:cNvSpPr/>
+          <p:nvPr/>
+        </p:nvSpPr>
+        <p:spPr>
+          <a:xfrm>
+            <a:off x="6675120" y="2057400"/>
+            <a:ext cx="4937760" cy="868680"/>
+          </a:xfrm>
+          <a:prstGeom prst="roundRect">
+            <a:avLst/>
+          </a:prstGeom>
+          <a:solidFill>
+            <a:srgbClr val="059669"/>
+          </a:solidFill>
+          <a:ln>
+            <a:solidFill>
+              <a:srgbClr val="059669"/>
+            </a:solidFill>
+          </a:ln>
+          <a:effectLst/>
+        </p:spPr>
+        <p:style>
+          <a:lnRef idx="1">
+            <a:schemeClr val="accent1"/>
+          </a:lnRef>
+          <a:fillRef idx="3">
+            <a:schemeClr val="accent1"/>
+          </a:fillRef>
+          <a:effectRef idx="2">
+            <a:schemeClr val="accent1"/>
+          </a:effectRef>
+          <a:fontRef idx="minor">
+            <a:schemeClr val="lt1"/>
+          </a:fontRef>
+        </p:style>
+        <p:txBody>
+          <a:bodyPr rtlCol="0" anchor="ctr" wrap="square" tIns="25400" bIns="25400"/>
+          <a:lstStyle/>
+          <a:p>
+            <a:pPr algn="ctr"/>
+            <a:r>
+              <a:rPr sz="1200" b="1">
+                <a:solidFill>
+                  <a:srgbClr val="FFFFFF"/>
+                </a:solidFill>
+                <a:latin typeface="PingFang TC"/>
+                <a:ea typeface="PingFang TC"/>
+              </a:rPr>
+              <a:t>miss → 回源 Service</a:t>
+            </a:r>
+          </a:p>
+          <a:p>
+            <a:pPr algn="ctr"/>
+            <a:r>
+              <a:rPr sz="1200" b="0">
+                <a:solidFill>
+                  <a:srgbClr val="FFFFFF"/>
+                </a:solidFill>
+                <a:latin typeface="PingFang TC"/>
+                <a:ea typeface="PingFang TC"/>
+              </a:rPr>
+              <a:t>→ Cache/DB → 回 302（CDN 記短 TTL）</a:t>
+            </a:r>
+          </a:p>
+        </p:txBody>
+      </p:sp>
+      <p:cxnSp>
+        <p:nvCxnSpPr>
+          <p:cNvPr id="11" name="Connector 10"/>
+          <p:cNvCxnSpPr/>
+          <p:nvPr/>
+        </p:nvCxnSpPr>
+        <p:spPr>
+          <a:xfrm>
+            <a:off x="6309360" y="2423160"/>
+            <a:ext cx="365760" cy="0"/>
+          </a:xfrm>
+          <a:prstGeom prst="line">
+            <a:avLst/>
+          </a:prstGeom>
+          <a:ln w="22225">
+            <a:solidFill>
+              <a:srgbClr val="64748B"/>
+            </a:solidFill>
+            <a:tailEnd type="triangle" w="med" len="med"/>
+          </a:ln>
+        </p:spPr>
+        <p:style>
+          <a:lnRef idx="2">
+            <a:schemeClr val="accent1"/>
+          </a:lnRef>
+          <a:fillRef idx="0">
+            <a:schemeClr val="accent1"/>
+          </a:fillRef>
+          <a:effectRef idx="1">
+            <a:schemeClr val="accent1"/>
+          </a:effectRef>
+          <a:fontRef idx="minor">
+            <a:schemeClr val="tx1"/>
+          </a:fontRef>
+        </p:style>
+      </p:cxnSp>
+      <p:graphicFrame>
+        <p:nvGraphicFramePr>
+          <p:cNvPr id="12" name="Table 11"/>
+          <p:cNvGraphicFramePr>
+            <a:graphicFrameLocks noGrp="1"/>
+          </p:cNvGraphicFramePr>
+          <p:nvPr/>
+        </p:nvGraphicFramePr>
+        <p:xfrm>
+          <a:off x="548640" y="4343400"/>
+          <a:ext cx="11109960" cy="1828800"/>
+        </p:xfrm>
+        <a:graphic>
+          <a:graphicData uri="http://schemas.openxmlformats.org/drawingml/2006/table">
+            <a:tbl>
+              <a:tblPr firstRow="1" bandRow="1">
+                <a:tableStyleId>{5C22544A-7EE6-4342-B048-85BDC9FD1C3A}</a:tableStyleId>
+              </a:tblPr>
+              <a:tblGrid>
+                <a:gridCol w="2743200"/>
+                <a:gridCol w="4160520"/>
+                <a:gridCol w="4206240"/>
+              </a:tblGrid>
+              <a:tr h="457200">
+                <a:tc>
+                  <a:txBody>
+                    <a:bodyPr/>
+                    <a:lstStyle/>
+                    <a:p>
+                      <a:r>
+                        <a:rPr sz="1200" b="1">
+                          <a:solidFill>
+                            <a:srgbClr val="FFFFFF"/>
+                          </a:solidFill>
+                          <a:latin typeface="PingFang TC"/>
+                          <a:ea typeface="PingFang TC"/>
+                        </a:rPr>
+                        <a:t>面向</a:t>
+                      </a:r>
+                    </a:p>
+                  </a:txBody>
+                  <a:tcPr marT="25400" marB="25400" marL="101600" anchor="ctr">
+                    <a:solidFill>
+                      <a:srgbClr val="2563EB"/>
+                    </a:solidFill>
+                  </a:tcPr>
+                </a:tc>
+                <a:tc>
+                  <a:txBody>
+                    <a:bodyPr/>
+                    <a:lstStyle/>
+                    <a:p>
+                      <a:r>
+                        <a:rPr sz="1200" b="1">
+                          <a:solidFill>
+                            <a:srgbClr val="FFFFFF"/>
+                          </a:solidFill>
+                          <a:latin typeface="PingFang TC"/>
+                          <a:ea typeface="PingFang TC"/>
+                        </a:rPr>
+                        <a:t>主設計（回源 + Redis）</a:t>
+                      </a:r>
+                    </a:p>
+                  </a:txBody>
+                  <a:tcPr marT="25400" marB="25400" marL="101600" anchor="ctr">
+                    <a:solidFill>
+                      <a:srgbClr val="2563EB"/>
+                    </a:solidFill>
+                  </a:tcPr>
+                </a:tc>
+                <a:tc>
+                  <a:txBody>
+                    <a:bodyPr/>
+                    <a:lstStyle/>
+                    <a:p>
+                      <a:r>
+                        <a:rPr sz="1200" b="1">
+                          <a:solidFill>
+                            <a:srgbClr val="FFFFFF"/>
+                          </a:solidFill>
+                          <a:latin typeface="PingFang TC"/>
+                          <a:ea typeface="PingFang TC"/>
+                        </a:rPr>
+                        <a:t>CDN 邊緣變體</a:t>
+                      </a:r>
+                    </a:p>
+                  </a:txBody>
+                  <a:tcPr marT="25400" marB="25400" marL="101600" anchor="ctr">
+                    <a:solidFill>
+                      <a:srgbClr val="2563EB"/>
+                    </a:solidFill>
+                  </a:tcPr>
+                </a:tc>
+              </a:tr>
+              <a:tr h="457200">
+                <a:tc>
+                  <a:txBody>
+                    <a:bodyPr/>
+                    <a:lstStyle/>
+                    <a:p>
+                      <a:r>
+                        <a:rPr sz="1200" b="1">
+                          <a:solidFill>
+                            <a:srgbClr val="0F172A"/>
+                          </a:solidFill>
+                          <a:latin typeface="PingFang TC"/>
+                          <a:ea typeface="PingFang TC"/>
+                        </a:rPr>
+                        <a:t>延遲</a:t>
+                      </a:r>
+                    </a:p>
+                  </a:txBody>
+                  <a:tcPr marT="25400" marB="25400" marL="101600" anchor="ctr">
+                    <a:solidFill>
+                      <a:srgbClr val="FFFFFF"/>
+                    </a:solidFill>
+                  </a:tcPr>
+                </a:tc>
+                <a:tc>
+                  <a:txBody>
+                    <a:bodyPr/>
+                    <a:lstStyle/>
+                    <a:p>
+                      <a:r>
+                        <a:rPr sz="1200" b="0">
+                          <a:solidFill>
+                            <a:srgbClr val="64748B"/>
+                          </a:solidFill>
+                          <a:latin typeface="PingFang TC"/>
+                          <a:ea typeface="PingFang TC"/>
+                        </a:rPr>
+                        <a:t>低（回源 + Redis）</a:t>
+                      </a:r>
+                    </a:p>
+                  </a:txBody>
+                  <a:tcPr marT="25400" marB="25400" marL="101600" anchor="ctr">
+                    <a:solidFill>
+                      <a:srgbClr val="FFFFFF"/>
+                    </a:solidFill>
+                  </a:tcPr>
+                </a:tc>
+                <a:tc>
+                  <a:txBody>
+                    <a:bodyPr/>
+                    <a:lstStyle/>
+                    <a:p>
+                      <a:r>
+                        <a:rPr sz="1200" b="0">
+                          <a:solidFill>
+                            <a:srgbClr val="64748B"/>
+                          </a:solidFill>
+                          <a:latin typeface="PingFang TC"/>
+                          <a:ea typeface="PingFang TC"/>
+                        </a:rPr>
+                        <a:t>最低（邊緣直接跳）</a:t>
+                      </a:r>
+                    </a:p>
+                  </a:txBody>
+                  <a:tcPr marT="25400" marB="25400" marL="101600" anchor="ctr">
+                    <a:solidFill>
+                      <a:srgbClr val="FFFFFF"/>
+                    </a:solidFill>
+                  </a:tcPr>
+                </a:tc>
+              </a:tr>
+              <a:tr h="457200">
+                <a:tc>
+                  <a:txBody>
+                    <a:bodyPr/>
+                    <a:lstStyle/>
+                    <a:p>
+                      <a:r>
+                        <a:rPr sz="1200" b="1">
+                          <a:solidFill>
+                            <a:srgbClr val="0F172A"/>
+                          </a:solidFill>
+                          <a:latin typeface="PingFang TC"/>
+                          <a:ea typeface="PingFang TC"/>
+                        </a:rPr>
+                        <a:t>改 / 刪即時性</a:t>
+                      </a:r>
+                    </a:p>
+                  </a:txBody>
+                  <a:tcPr marT="25400" marB="25400" marL="101600" anchor="ctr">
+                    <a:solidFill>
+                      <a:srgbClr val="F1F5F9"/>
+                    </a:solidFill>
+                  </a:tcPr>
+                </a:tc>
+                <a:tc>
+                  <a:txBody>
+                    <a:bodyPr/>
+                    <a:lstStyle/>
+                    <a:p>
+                      <a:r>
+                        <a:rPr sz="1200" b="0">
+                          <a:solidFill>
+                            <a:srgbClr val="64748B"/>
+                          </a:solidFill>
+                          <a:latin typeface="PingFang TC"/>
+                          <a:ea typeface="PingFang TC"/>
+                        </a:rPr>
+                        <a:t>立即生效</a:t>
+                      </a:r>
+                    </a:p>
+                  </a:txBody>
+                  <a:tcPr marT="25400" marB="25400" marL="101600" anchor="ctr">
+                    <a:solidFill>
+                      <a:srgbClr val="F1F5F9"/>
+                    </a:solidFill>
+                  </a:tcPr>
+                </a:tc>
+                <a:tc>
+                  <a:txBody>
+                    <a:bodyPr/>
+                    <a:lstStyle/>
+                    <a:p>
+                      <a:r>
+                        <a:rPr sz="1200" b="0">
+                          <a:solidFill>
+                            <a:srgbClr val="64748B"/>
+                          </a:solidFill>
+                          <a:latin typeface="PingFang TC"/>
+                          <a:ea typeface="PingFang TC"/>
+                        </a:rPr>
+                        <a:t>TTL 內延遲</a:t>
+                      </a:r>
+                    </a:p>
+                  </a:txBody>
+                  <a:tcPr marT="25400" marB="25400" marL="101600" anchor="ctr">
+                    <a:solidFill>
+                      <a:srgbClr val="F1F5F9"/>
+                    </a:solidFill>
+                  </a:tcPr>
+                </a:tc>
+              </a:tr>
+              <a:tr h="457200">
+                <a:tc>
+                  <a:txBody>
+                    <a:bodyPr/>
+                    <a:lstStyle/>
+                    <a:p>
+                      <a:r>
+                        <a:rPr sz="1200" b="1">
+                          <a:solidFill>
+                            <a:srgbClr val="0F172A"/>
+                          </a:solidFill>
+                          <a:latin typeface="PingFang TC"/>
+                          <a:ea typeface="PingFang TC"/>
+                        </a:rPr>
+                        <a:t>掃描分析</a:t>
+                      </a:r>
+                    </a:p>
+                  </a:txBody>
+                  <a:tcPr marT="25400" marB="25400" marL="101600" anchor="ctr">
+                    <a:solidFill>
+                      <a:srgbClr val="FFFFFF"/>
+                    </a:solidFill>
+                  </a:tcPr>
+                </a:tc>
+                <a:tc>
+                  <a:txBody>
+                    <a:bodyPr/>
+                    <a:lstStyle/>
+                    <a:p>
+                      <a:r>
+                        <a:rPr sz="1200" b="0">
+                          <a:solidFill>
+                            <a:srgbClr val="64748B"/>
+                          </a:solidFill>
+                          <a:latin typeface="PingFang TC"/>
+                          <a:ea typeface="PingFang TC"/>
+                        </a:rPr>
+                        <a:t>每次都記</a:t>
+                      </a:r>
+                    </a:p>
+                  </a:txBody>
+                  <a:tcPr marT="25400" marB="25400" marL="101600" anchor="ctr">
+                    <a:solidFill>
+                      <a:srgbClr val="FFFFFF"/>
+                    </a:solidFill>
+                  </a:tcPr>
+                </a:tc>
+                <a:tc>
+                  <a:txBody>
+                    <a:bodyPr/>
+                    <a:lstStyle/>
+                    <a:p>
+                      <a:r>
+                        <a:rPr sz="1200" b="0">
+                          <a:solidFill>
+                            <a:srgbClr val="64748B"/>
+                          </a:solidFill>
+                          <a:latin typeface="PingFang TC"/>
+                          <a:ea typeface="PingFang TC"/>
+                        </a:rPr>
+                        <a:t>TTL 內漏記</a:t>
+                      </a:r>
+                    </a:p>
+                  </a:txBody>
+                  <a:tcPr marT="25400" marB="25400" marL="101600" anchor="ctr">
+                    <a:solidFill>
+                      <a:srgbClr val="FFFFFF"/>
+                    </a:solidFill>
+                  </a:tcPr>
+                </a:tc>
+              </a:tr>
+            </a:tbl>
+          </a:graphicData>
+        </a:graphic>
+      </p:graphicFrame>
+      <p:sp>
+        <p:nvSpPr>
+          <p:cNvPr id="13" name="TextBox 12"/>
+          <p:cNvSpPr txBox="1"/>
+          <p:nvPr/>
+        </p:nvSpPr>
+        <p:spPr>
+          <a:xfrm>
+            <a:off x="548640" y="6263640"/>
+            <a:ext cx="11155680" cy="457200"/>
+          </a:xfrm>
+          <a:prstGeom prst="rect">
+            <a:avLst/>
+          </a:prstGeom>
+          <a:noFill/>
+        </p:spPr>
+        <p:txBody>
+          <a:bodyPr wrap="square" anchor="t">
+            <a:spAutoFit/>
+          </a:bodyPr>
+          <a:lstStyle/>
+          <a:p>
+            <a:pPr algn="l">
+              <a:spcAft>
+                <a:spcPts val="400"/>
+              </a:spcAft>
+            </a:pPr>
+            <a:r>
+              <a:rPr sz="1200" b="0">
+                <a:solidFill>
+                  <a:srgbClr val="64748B"/>
+                </a:solidFill>
+                <a:latin typeface="PingFang TC"/>
+                <a:ea typeface="PingFang TC"/>
+              </a:rPr>
+              <a:t>預設不採用；列為超高流量、目標穩定的熱門 QR 之可選最佳化（短 TTL 控制誤差）。</a:t>
             </a:r>
           </a:p>
         </p:txBody>
@@ -8969,6 +10596,216 @@
                 <a:ea typeface="PingFang TC"/>
               </a:rPr>
               <a:t>•  圖片 + redirect 為主流量</a:t>
+            </a:r>
+          </a:p>
+        </p:txBody>
+      </p:sp>
+    </p:spTree>
+  </p:cSld>
+  <p:clrMapOvr>
+    <a:masterClrMapping/>
+  </p:clrMapOvr>
+</p:sld>
+</file>
+
+<file path=ppt/slides/slide20.xml><?xml version="1.0" encoding="utf-8"?>
+<p:sld xmlns:a="http://schemas.openxmlformats.org/drawingml/2006/main" xmlns:p="http://schemas.openxmlformats.org/presentationml/2006/main" xmlns:r="http://schemas.openxmlformats.org/officeDocument/2006/relationships">
+  <p:cSld>
+    <p:spTree>
+      <p:nvGrpSpPr>
+        <p:cNvPr id="1" name=""/>
+        <p:cNvGrpSpPr/>
+        <p:nvPr/>
+      </p:nvGrpSpPr>
+      <p:grpSpPr/>
+      <p:sp>
+        <p:nvSpPr>
+          <p:cNvPr id="2" name="Rectangle 1"/>
+          <p:cNvSpPr/>
+          <p:nvPr/>
+        </p:nvSpPr>
+        <p:spPr>
+          <a:xfrm>
+            <a:off x="0" y="0"/>
+            <a:ext cx="12191695" cy="6858000"/>
+          </a:xfrm>
+          <a:prstGeom prst="rect">
+            <a:avLst/>
+          </a:prstGeom>
+          <a:solidFill>
+            <a:srgbClr val="0F172A"/>
+          </a:solidFill>
+          <a:ln>
+            <a:noFill/>
+          </a:ln>
+          <a:effectLst/>
+        </p:spPr>
+        <p:style>
+          <a:lnRef idx="1">
+            <a:schemeClr val="accent1"/>
+          </a:lnRef>
+          <a:fillRef idx="3">
+            <a:schemeClr val="accent1"/>
+          </a:fillRef>
+          <a:effectRef idx="2">
+            <a:schemeClr val="accent1"/>
+          </a:effectRef>
+          <a:fontRef idx="minor">
+            <a:schemeClr val="lt1"/>
+          </a:fontRef>
+        </p:style>
+        <p:txBody>
+          <a:bodyPr rtlCol="0" anchor="ctr"/>
+          <a:lstStyle/>
+          <a:p>
+            <a:pPr algn="ctr"/>
+          </a:p>
+        </p:txBody>
+      </p:sp>
+      <p:sp>
+        <p:nvSpPr>
+          <p:cNvPr id="3" name="TextBox 2"/>
+          <p:cNvSpPr txBox="1"/>
+          <p:nvPr/>
+        </p:nvSpPr>
+        <p:spPr>
+          <a:xfrm>
+            <a:off x="822960" y="1097280"/>
+            <a:ext cx="10515600" cy="1097280"/>
+          </a:xfrm>
+          <a:prstGeom prst="rect">
+            <a:avLst/>
+          </a:prstGeom>
+          <a:noFill/>
+        </p:spPr>
+        <p:txBody>
+          <a:bodyPr wrap="square" anchor="t">
+            <a:spAutoFit/>
+          </a:bodyPr>
+          <a:lstStyle/>
+          <a:p>
+            <a:pPr algn="l">
+              <a:spcAft>
+                <a:spcPts val="400"/>
+              </a:spcAft>
+            </a:pPr>
+            <a:r>
+              <a:rPr sz="1600" b="1">
+                <a:solidFill>
+                  <a:srgbClr val="2563EB"/>
+                </a:solidFill>
+                <a:latin typeface="PingFang TC"/>
+                <a:ea typeface="PingFang TC"/>
+              </a:rPr>
+              <a:t>原型狀態</a:t>
+            </a:r>
+          </a:p>
+          <a:p>
+            <a:pPr algn="l">
+              <a:spcAft>
+                <a:spcPts val="400"/>
+              </a:spcAft>
+            </a:pPr>
+            <a:r>
+              <a:rPr sz="3000" b="1">
+                <a:solidFill>
+                  <a:srgbClr val="FFFFFF"/>
+                </a:solidFill>
+                <a:latin typeface="PingFang TC"/>
+                <a:ea typeface="PingFang TC"/>
+              </a:rPr>
+              <a:t>可跑的 FastAPI 實作 + 管理頁前端</a:t>
+            </a:r>
+          </a:p>
+        </p:txBody>
+      </p:sp>
+      <p:sp>
+        <p:nvSpPr>
+          <p:cNvPr id="4" name="TextBox 3"/>
+          <p:cNvSpPr txBox="1"/>
+          <p:nvPr/>
+        </p:nvSpPr>
+        <p:spPr>
+          <a:xfrm>
+            <a:off x="822960" y="2743200"/>
+            <a:ext cx="10515600" cy="2743200"/>
+          </a:xfrm>
+          <a:prstGeom prst="rect">
+            <a:avLst/>
+          </a:prstGeom>
+          <a:noFill/>
+        </p:spPr>
+        <p:txBody>
+          <a:bodyPr wrap="square">
+            <a:spAutoFit/>
+          </a:bodyPr>
+          <a:lstStyle/>
+          <a:p>
+            <a:pPr>
+              <a:spcAft>
+                <a:spcPts val="1200"/>
+              </a:spcAft>
+            </a:pPr>
+            <a:r>
+              <a:rPr sz="1600" b="0">
+                <a:solidFill>
+                  <a:srgbClr val="E2E8F0"/>
+                </a:solidFill>
+                <a:latin typeface="PingFang TC"/>
+                <a:ea typeface="PingFang TC"/>
+              </a:rPr>
+              <a:t>✓  7 個 API 端點 + 管理頁前端（建立/清單/編輯/刪除/分析）</a:t>
+            </a:r>
+          </a:p>
+          <a:p>
+            <a:pPr>
+              <a:spcAft>
+                <a:spcPts val="1200"/>
+              </a:spcAft>
+            </a:pPr>
+            <a:r>
+              <a:rPr sz="1600" b="0">
+                <a:solidFill>
+                  <a:srgbClr val="E2E8F0"/>
+                </a:solidFill>
+                <a:latin typeface="PingFang TC"/>
+                <a:ea typeface="PingFang TC"/>
+              </a:rPr>
+              <a:t>✓  全部 curl 驗證通過：302 / 404 / 410 / 8 碼 token / 正規化 / SSRF / 過期</a:t>
+            </a:r>
+          </a:p>
+          <a:p>
+            <a:pPr>
+              <a:spcAft>
+                <a:spcPts val="1200"/>
+              </a:spcAft>
+            </a:pPr>
+            <a:r>
+              <a:rPr sz="1600" b="0">
+                <a:solidFill>
+                  <a:srgbClr val="E2E8F0"/>
+                </a:solidFill>
+                <a:latin typeface="PingFang TC"/>
+                <a:ea typeface="PingFang TC"/>
+              </a:rPr>
+              <a:t>✓  production 替換點已在程式註解標明（Redis / 佇列 / CDN / 預聚合 / PostgreSQL）</a:t>
+            </a:r>
+          </a:p>
+          <a:p>
+            <a:pPr>
+              <a:spcAft>
+                <a:spcPts val="1200"/>
+              </a:spcAft>
+            </a:pPr>
+            <a:r>
+              <a:rPr sz="1600" b="0">
+                <a:solidFill>
+                  <a:srgbClr val="E2E8F0"/>
+                </a:solidFill>
+                <a:latin typeface="PingFang TC"/>
+                <a:ea typeface="PingFang TC"/>
+              </a:rPr>
+              <a:t>✓  設計依據：DESIGN.md（16 題決策 + 優劣分析）</a:t>
             </a:r>
           </a:p>
         </p:txBody>

--- a/QR Code Generator/QR_Code_Generator.pptx
+++ b/QR Code Generator/QR_Code_Generator.pptx
@@ -25,6 +25,8 @@
     <p:sldId id="273" r:id="rId24"/>
     <p:sldId id="274" r:id="rId25"/>
     <p:sldId id="275" r:id="rId26"/>
+    <p:sldId id="276" r:id="rId27"/>
+    <p:sldId id="277" r:id="rId28"/>
   </p:sldIdLst>
   <p:sldSz cx="12191695" cy="6858000" type="screen4x3"/>
   <p:notesSz cx="6858000" cy="9144000"/>
@@ -5393,7 +5395,7 @@
                 <a:latin typeface="PingFang TC"/>
                 <a:ea typeface="PingFang TC"/>
               </a:rPr>
-              <a:t>09 · DEEP DIVE</a:t>
+              <a:t>08c · TOKEN 策略</a:t>
             </a:r>
           </a:p>
           <a:p>
@@ -5410,21 +5412,869 @@
                 <a:latin typeface="PingFang TC"/>
                 <a:ea typeface="PingFang TC"/>
               </a:rPr>
-              <a:t>決策 2 — 302、快取、非同步</a:t>
-            </a:r>
-          </a:p>
-        </p:txBody>
-      </p:sp>
-      <p:sp>
-        <p:nvSpPr>
-          <p:cNvPr id="4" name="TextBox 3"/>
+              <a:t>Token 生成策略比較（演進路徑）</a:t>
+            </a:r>
+          </a:p>
+        </p:txBody>
+      </p:sp>
+      <p:graphicFrame>
+        <p:nvGraphicFramePr>
+          <p:cNvPr id="4" name="Table 3"/>
+          <p:cNvGraphicFramePr>
+            <a:graphicFrameLocks noGrp="1"/>
+          </p:cNvGraphicFramePr>
+          <p:nvPr/>
+        </p:nvGraphicFramePr>
+        <p:xfrm>
+          <a:off x="548640" y="1600200"/>
+          <a:ext cx="11109960" cy="3291840"/>
+        </p:xfrm>
+        <a:graphic>
+          <a:graphicData uri="http://schemas.openxmlformats.org/drawingml/2006/table">
+            <a:tbl>
+              <a:tblPr firstRow="1" bandRow="1">
+                <a:tableStyleId>{5C22544A-7EE6-4342-B048-85BDC9FD1C3A}</a:tableStyleId>
+              </a:tblPr>
+              <a:tblGrid>
+                <a:gridCol w="3291840"/>
+                <a:gridCol w="1600200"/>
+                <a:gridCol w="1600200"/>
+                <a:gridCol w="1600200"/>
+                <a:gridCol w="3017520"/>
+              </a:tblGrid>
+              <a:tr h="470262">
+                <a:tc>
+                  <a:txBody>
+                    <a:bodyPr/>
+                    <a:lstStyle/>
+                    <a:p>
+                      <a:r>
+                        <a:rPr sz="1200" b="1">
+                          <a:solidFill>
+                            <a:srgbClr val="FFFFFF"/>
+                          </a:solidFill>
+                          <a:latin typeface="PingFang TC"/>
+                          <a:ea typeface="PingFang TC"/>
+                        </a:rPr>
+                        <a:t>策略</a:t>
+                      </a:r>
+                    </a:p>
+                  </a:txBody>
+                  <a:tcPr marT="25400" marB="25400" marL="101600" anchor="ctr">
+                    <a:solidFill>
+                      <a:srgbClr val="2563EB"/>
+                    </a:solidFill>
+                  </a:tcPr>
+                </a:tc>
+                <a:tc>
+                  <a:txBody>
+                    <a:bodyPr/>
+                    <a:lstStyle/>
+                    <a:p>
+                      <a:r>
+                        <a:rPr sz="1200" b="1">
+                          <a:solidFill>
+                            <a:srgbClr val="FFFFFF"/>
+                          </a:solidFill>
+                          <a:latin typeface="PingFang TC"/>
+                          <a:ea typeface="PingFang TC"/>
+                        </a:rPr>
+                        <a:t>簡單度</a:t>
+                      </a:r>
+                    </a:p>
+                  </a:txBody>
+                  <a:tcPr marT="25400" marB="25400" marL="101600" anchor="ctr">
+                    <a:solidFill>
+                      <a:srgbClr val="2563EB"/>
+                    </a:solidFill>
+                  </a:tcPr>
+                </a:tc>
+                <a:tc>
+                  <a:txBody>
+                    <a:bodyPr/>
+                    <a:lstStyle/>
+                    <a:p>
+                      <a:r>
+                        <a:rPr sz="1200" b="1">
+                          <a:solidFill>
+                            <a:srgbClr val="FFFFFF"/>
+                          </a:solidFill>
+                          <a:latin typeface="PingFang TC"/>
+                          <a:ea typeface="PingFang TC"/>
+                        </a:rPr>
+                        <a:t>唯一性</a:t>
+                      </a:r>
+                    </a:p>
+                  </a:txBody>
+                  <a:tcPr marT="25400" marB="25400" marL="101600" anchor="ctr">
+                    <a:solidFill>
+                      <a:srgbClr val="2563EB"/>
+                    </a:solidFill>
+                  </a:tcPr>
+                </a:tc>
+                <a:tc>
+                  <a:txBody>
+                    <a:bodyPr/>
+                    <a:lstStyle/>
+                    <a:p>
+                      <a:r>
+                        <a:rPr sz="1200" b="1">
+                          <a:solidFill>
+                            <a:srgbClr val="FFFFFF"/>
+                          </a:solidFill>
+                          <a:latin typeface="PingFang TC"/>
+                          <a:ea typeface="PingFang TC"/>
+                        </a:rPr>
+                        <a:t>可預測</a:t>
+                      </a:r>
+                    </a:p>
+                  </a:txBody>
+                  <a:tcPr marT="25400" marB="25400" marL="101600" anchor="ctr">
+                    <a:solidFill>
+                      <a:srgbClr val="2563EB"/>
+                    </a:solidFill>
+                  </a:tcPr>
+                </a:tc>
+                <a:tc>
+                  <a:txBody>
+                    <a:bodyPr/>
+                    <a:lstStyle/>
+                    <a:p>
+                      <a:r>
+                        <a:rPr sz="1200" b="1">
+                          <a:solidFill>
+                            <a:srgbClr val="FFFFFF"/>
+                          </a:solidFill>
+                          <a:latin typeface="PingFang TC"/>
+                          <a:ea typeface="PingFang TC"/>
+                        </a:rPr>
+                        <a:t>適用場景</a:t>
+                      </a:r>
+                    </a:p>
+                  </a:txBody>
+                  <a:tcPr marT="25400" marB="25400" marL="101600" anchor="ctr">
+                    <a:solidFill>
+                      <a:srgbClr val="2563EB"/>
+                    </a:solidFill>
+                  </a:tcPr>
+                </a:tc>
+              </a:tr>
+              <a:tr h="470262">
+                <a:tc>
+                  <a:txBody>
+                    <a:bodyPr/>
+                    <a:lstStyle/>
+                    <a:p>
+                      <a:r>
+                        <a:rPr sz="1200" b="1">
+                          <a:solidFill>
+                            <a:srgbClr val="0F172A"/>
+                          </a:solidFill>
+                          <a:latin typeface="PingFang TC"/>
+                          <a:ea typeface="PingFang TC"/>
+                        </a:rPr>
+                        <a:t>Auto-increment</a:t>
+                      </a:r>
+                    </a:p>
+                  </a:txBody>
+                  <a:tcPr marT="25400" marB="25400" marL="101600" anchor="ctr">
+                    <a:solidFill>
+                      <a:srgbClr val="FFFFFF"/>
+                    </a:solidFill>
+                  </a:tcPr>
+                </a:tc>
+                <a:tc>
+                  <a:txBody>
+                    <a:bodyPr/>
+                    <a:lstStyle/>
+                    <a:p>
+                      <a:r>
+                        <a:rPr sz="1200" b="0">
+                          <a:solidFill>
+                            <a:srgbClr val="0F172A"/>
+                          </a:solidFill>
+                          <a:latin typeface="PingFang TC"/>
+                          <a:ea typeface="PingFang TC"/>
+                        </a:rPr>
+                        <a:t>高</a:t>
+                      </a:r>
+                    </a:p>
+                  </a:txBody>
+                  <a:tcPr marT="25400" marB="25400" marL="101600" anchor="ctr">
+                    <a:solidFill>
+                      <a:srgbClr val="FFFFFF"/>
+                    </a:solidFill>
+                  </a:tcPr>
+                </a:tc>
+                <a:tc>
+                  <a:txBody>
+                    <a:bodyPr/>
+                    <a:lstStyle/>
+                    <a:p>
+                      <a:r>
+                        <a:rPr sz="1200" b="0">
+                          <a:solidFill>
+                            <a:srgbClr val="0F172A"/>
+                          </a:solidFill>
+                          <a:latin typeface="PingFang TC"/>
+                          <a:ea typeface="PingFang TC"/>
+                        </a:rPr>
+                        <a:t>高</a:t>
+                      </a:r>
+                    </a:p>
+                  </a:txBody>
+                  <a:tcPr marT="25400" marB="25400" marL="101600" anchor="ctr">
+                    <a:solidFill>
+                      <a:srgbClr val="FFFFFF"/>
+                    </a:solidFill>
+                  </a:tcPr>
+                </a:tc>
+                <a:tc>
+                  <a:txBody>
+                    <a:bodyPr/>
+                    <a:lstStyle/>
+                    <a:p>
+                      <a:r>
+                        <a:rPr sz="1200" b="0">
+                          <a:solidFill>
+                            <a:srgbClr val="0F172A"/>
+                          </a:solidFill>
+                          <a:latin typeface="PingFang TC"/>
+                          <a:ea typeface="PingFang TC"/>
+                        </a:rPr>
+                        <a:t>高（危險）</a:t>
+                      </a:r>
+                    </a:p>
+                  </a:txBody>
+                  <a:tcPr marT="25400" marB="25400" marL="101600" anchor="ctr">
+                    <a:solidFill>
+                      <a:srgbClr val="FFFFFF"/>
+                    </a:solidFill>
+                  </a:tcPr>
+                </a:tc>
+                <a:tc>
+                  <a:txBody>
+                    <a:bodyPr/>
+                    <a:lstStyle/>
+                    <a:p>
+                      <a:r>
+                        <a:rPr sz="1200" b="0">
+                          <a:solidFill>
+                            <a:srgbClr val="0F172A"/>
+                          </a:solidFill>
+                          <a:latin typeface="PingFang TC"/>
+                          <a:ea typeface="PingFang TC"/>
+                        </a:rPr>
+                        <a:t>內部系統</a:t>
+                      </a:r>
+                    </a:p>
+                  </a:txBody>
+                  <a:tcPr marT="25400" marB="25400" marL="101600" anchor="ctr">
+                    <a:solidFill>
+                      <a:srgbClr val="FFFFFF"/>
+                    </a:solidFill>
+                  </a:tcPr>
+                </a:tc>
+              </a:tr>
+              <a:tr h="470262">
+                <a:tc>
+                  <a:txBody>
+                    <a:bodyPr/>
+                    <a:lstStyle/>
+                    <a:p>
+                      <a:r>
+                        <a:rPr sz="1200" b="1">
+                          <a:solidFill>
+                            <a:srgbClr val="0F172A"/>
+                          </a:solidFill>
+                          <a:latin typeface="PingFang TC"/>
+                          <a:ea typeface="PingFang TC"/>
+                        </a:rPr>
+                        <a:t>隨機字串 / UUID 截短</a:t>
+                      </a:r>
+                    </a:p>
+                  </a:txBody>
+                  <a:tcPr marT="25400" marB="25400" marL="101600" anchor="ctr">
+                    <a:solidFill>
+                      <a:srgbClr val="F1F5F9"/>
+                    </a:solidFill>
+                  </a:tcPr>
+                </a:tc>
+                <a:tc>
+                  <a:txBody>
+                    <a:bodyPr/>
+                    <a:lstStyle/>
+                    <a:p>
+                      <a:r>
+                        <a:rPr sz="1200" b="0">
+                          <a:solidFill>
+                            <a:srgbClr val="0F172A"/>
+                          </a:solidFill>
+                          <a:latin typeface="PingFang TC"/>
+                          <a:ea typeface="PingFang TC"/>
+                        </a:rPr>
+                        <a:t>中</a:t>
+                      </a:r>
+                    </a:p>
+                  </a:txBody>
+                  <a:tcPr marT="25400" marB="25400" marL="101600" anchor="ctr">
+                    <a:solidFill>
+                      <a:srgbClr val="F1F5F9"/>
+                    </a:solidFill>
+                  </a:tcPr>
+                </a:tc>
+                <a:tc>
+                  <a:txBody>
+                    <a:bodyPr/>
+                    <a:lstStyle/>
+                    <a:p>
+                      <a:r>
+                        <a:rPr sz="1200" b="0">
+                          <a:solidFill>
+                            <a:srgbClr val="0F172A"/>
+                          </a:solidFill>
+                          <a:latin typeface="PingFang TC"/>
+                          <a:ea typeface="PingFang TC"/>
+                        </a:rPr>
+                        <a:t>中</a:t>
+                      </a:r>
+                    </a:p>
+                  </a:txBody>
+                  <a:tcPr marT="25400" marB="25400" marL="101600" anchor="ctr">
+                    <a:solidFill>
+                      <a:srgbClr val="F1F5F9"/>
+                    </a:solidFill>
+                  </a:tcPr>
+                </a:tc>
+                <a:tc>
+                  <a:txBody>
+                    <a:bodyPr/>
+                    <a:lstStyle/>
+                    <a:p>
+                      <a:r>
+                        <a:rPr sz="1200" b="0">
+                          <a:solidFill>
+                            <a:srgbClr val="0F172A"/>
+                          </a:solidFill>
+                          <a:latin typeface="PingFang TC"/>
+                          <a:ea typeface="PingFang TC"/>
+                        </a:rPr>
+                        <a:t>低</a:t>
+                      </a:r>
+                    </a:p>
+                  </a:txBody>
+                  <a:tcPr marT="25400" marB="25400" marL="101600" anchor="ctr">
+                    <a:solidFill>
+                      <a:srgbClr val="F1F5F9"/>
+                    </a:solidFill>
+                  </a:tcPr>
+                </a:tc>
+                <a:tc>
+                  <a:txBody>
+                    <a:bodyPr/>
+                    <a:lstStyle/>
+                    <a:p>
+                      <a:r>
+                        <a:rPr sz="1200" b="0">
+                          <a:solidFill>
+                            <a:srgbClr val="0F172A"/>
+                          </a:solidFill>
+                          <a:latin typeface="PingFang TC"/>
+                          <a:ea typeface="PingFang TC"/>
+                        </a:rPr>
+                        <a:t>低流量</a:t>
+                      </a:r>
+                    </a:p>
+                  </a:txBody>
+                  <a:tcPr marT="25400" marB="25400" marL="101600" anchor="ctr">
+                    <a:solidFill>
+                      <a:srgbClr val="F1F5F9"/>
+                    </a:solidFill>
+                  </a:tcPr>
+                </a:tc>
+              </a:tr>
+              <a:tr h="470262">
+                <a:tc>
+                  <a:txBody>
+                    <a:bodyPr/>
+                    <a:lstStyle/>
+                    <a:p>
+                      <a:r>
+                        <a:rPr sz="1200" b="1">
+                          <a:solidFill>
+                            <a:srgbClr val="0F172A"/>
+                          </a:solidFill>
+                          <a:latin typeface="PingFang TC"/>
+                          <a:ea typeface="PingFang TC"/>
+                        </a:rPr>
+                        <a:t>純 hash(URL)</a:t>
+                      </a:r>
+                    </a:p>
+                  </a:txBody>
+                  <a:tcPr marT="25400" marB="25400" marL="101600" anchor="ctr">
+                    <a:solidFill>
+                      <a:srgbClr val="FFFFFF"/>
+                    </a:solidFill>
+                  </a:tcPr>
+                </a:tc>
+                <a:tc>
+                  <a:txBody>
+                    <a:bodyPr/>
+                    <a:lstStyle/>
+                    <a:p>
+                      <a:r>
+                        <a:rPr sz="1200" b="0">
+                          <a:solidFill>
+                            <a:srgbClr val="0F172A"/>
+                          </a:solidFill>
+                          <a:latin typeface="PingFang TC"/>
+                          <a:ea typeface="PingFang TC"/>
+                        </a:rPr>
+                        <a:t>中</a:t>
+                      </a:r>
+                    </a:p>
+                  </a:txBody>
+                  <a:tcPr marT="25400" marB="25400" marL="101600" anchor="ctr">
+                    <a:solidFill>
+                      <a:srgbClr val="FFFFFF"/>
+                    </a:solidFill>
+                  </a:tcPr>
+                </a:tc>
+                <a:tc>
+                  <a:txBody>
+                    <a:bodyPr/>
+                    <a:lstStyle/>
+                    <a:p>
+                      <a:r>
+                        <a:rPr sz="1200" b="0">
+                          <a:solidFill>
+                            <a:srgbClr val="0F172A"/>
+                          </a:solidFill>
+                          <a:latin typeface="PingFang TC"/>
+                          <a:ea typeface="PingFang TC"/>
+                        </a:rPr>
+                        <a:t>低</a:t>
+                      </a:r>
+                    </a:p>
+                  </a:txBody>
+                  <a:tcPr marT="25400" marB="25400" marL="101600" anchor="ctr">
+                    <a:solidFill>
+                      <a:srgbClr val="FFFFFF"/>
+                    </a:solidFill>
+                  </a:tcPr>
+                </a:tc>
+                <a:tc>
+                  <a:txBody>
+                    <a:bodyPr/>
+                    <a:lstStyle/>
+                    <a:p>
+                      <a:r>
+                        <a:rPr sz="1200" b="0">
+                          <a:solidFill>
+                            <a:srgbClr val="0F172A"/>
+                          </a:solidFill>
+                          <a:latin typeface="PingFang TC"/>
+                          <a:ea typeface="PingFang TC"/>
+                        </a:rPr>
+                        <a:t>低</a:t>
+                      </a:r>
+                    </a:p>
+                  </a:txBody>
+                  <a:tcPr marT="25400" marB="25400" marL="101600" anchor="ctr">
+                    <a:solidFill>
+                      <a:srgbClr val="FFFFFF"/>
+                    </a:solidFill>
+                  </a:tcPr>
+                </a:tc>
+                <a:tc>
+                  <a:txBody>
+                    <a:bodyPr/>
+                    <a:lstStyle/>
+                    <a:p>
+                      <a:r>
+                        <a:rPr sz="1200" b="0">
+                          <a:solidFill>
+                            <a:srgbClr val="0F172A"/>
+                          </a:solidFill>
+                          <a:latin typeface="PingFang TC"/>
+                          <a:ea typeface="PingFang TC"/>
+                        </a:rPr>
+                        <a:t>✗ 同 URL 同 token</a:t>
+                      </a:r>
+                    </a:p>
+                  </a:txBody>
+                  <a:tcPr marT="25400" marB="25400" marL="101600" anchor="ctr">
+                    <a:solidFill>
+                      <a:srgbClr val="FFFFFF"/>
+                    </a:solidFill>
+                  </a:tcPr>
+                </a:tc>
+              </a:tr>
+              <a:tr h="470262">
+                <a:tc>
+                  <a:txBody>
+                    <a:bodyPr/>
+                    <a:lstStyle/>
+                    <a:p>
+                      <a:r>
+                        <a:rPr sz="1200" b="1">
+                          <a:solidFill>
+                            <a:srgbClr val="0F172A"/>
+                          </a:solidFill>
+                          <a:latin typeface="PingFang TC"/>
+                          <a:ea typeface="PingFang TC"/>
+                        </a:rPr>
+                        <a:t>SHA-256+nonce+Base62</a:t>
+                      </a:r>
+                    </a:p>
+                  </a:txBody>
+                  <a:tcPr marT="25400" marB="25400" marL="101600" anchor="ctr">
+                    <a:solidFill>
+                      <a:srgbClr val="DBEAFE"/>
+                    </a:solidFill>
+                  </a:tcPr>
+                </a:tc>
+                <a:tc>
+                  <a:txBody>
+                    <a:bodyPr/>
+                    <a:lstStyle/>
+                    <a:p>
+                      <a:r>
+                        <a:rPr sz="1200" b="1">
+                          <a:solidFill>
+                            <a:srgbClr val="0F172A"/>
+                          </a:solidFill>
+                          <a:latin typeface="PingFang TC"/>
+                          <a:ea typeface="PingFang TC"/>
+                        </a:rPr>
+                        <a:t>中</a:t>
+                      </a:r>
+                    </a:p>
+                  </a:txBody>
+                  <a:tcPr marT="25400" marB="25400" marL="101600" anchor="ctr">
+                    <a:solidFill>
+                      <a:srgbClr val="DBEAFE"/>
+                    </a:solidFill>
+                  </a:tcPr>
+                </a:tc>
+                <a:tc>
+                  <a:txBody>
+                    <a:bodyPr/>
+                    <a:lstStyle/>
+                    <a:p>
+                      <a:r>
+                        <a:rPr sz="1200" b="1">
+                          <a:solidFill>
+                            <a:srgbClr val="0F172A"/>
+                          </a:solidFill>
+                          <a:latin typeface="PingFang TC"/>
+                          <a:ea typeface="PingFang TC"/>
+                        </a:rPr>
+                        <a:t>高</a:t>
+                      </a:r>
+                    </a:p>
+                  </a:txBody>
+                  <a:tcPr marT="25400" marB="25400" marL="101600" anchor="ctr">
+                    <a:solidFill>
+                      <a:srgbClr val="DBEAFE"/>
+                    </a:solidFill>
+                  </a:tcPr>
+                </a:tc>
+                <a:tc>
+                  <a:txBody>
+                    <a:bodyPr/>
+                    <a:lstStyle/>
+                    <a:p>
+                      <a:r>
+                        <a:rPr sz="1200" b="1">
+                          <a:solidFill>
+                            <a:srgbClr val="0F172A"/>
+                          </a:solidFill>
+                          <a:latin typeface="PingFang TC"/>
+                          <a:ea typeface="PingFang TC"/>
+                        </a:rPr>
+                        <a:t>低</a:t>
+                      </a:r>
+                    </a:p>
+                  </a:txBody>
+                  <a:tcPr marT="25400" marB="25400" marL="101600" anchor="ctr">
+                    <a:solidFill>
+                      <a:srgbClr val="DBEAFE"/>
+                    </a:solidFill>
+                  </a:tcPr>
+                </a:tc>
+                <a:tc>
+                  <a:txBody>
+                    <a:bodyPr/>
+                    <a:lstStyle/>
+                    <a:p>
+                      <a:r>
+                        <a:rPr sz="1200" b="1">
+                          <a:solidFill>
+                            <a:srgbClr val="0F172A"/>
+                          </a:solidFill>
+                          <a:latin typeface="PingFang TC"/>
+                          <a:ea typeface="PingFang TC"/>
+                        </a:rPr>
+                        <a:t>通用方案 ← 採用</a:t>
+                      </a:r>
+                    </a:p>
+                  </a:txBody>
+                  <a:tcPr marT="25400" marB="25400" marL="101600" anchor="ctr">
+                    <a:solidFill>
+                      <a:srgbClr val="DBEAFE"/>
+                    </a:solidFill>
+                  </a:tcPr>
+                </a:tc>
+              </a:tr>
+              <a:tr h="470262">
+                <a:tc>
+                  <a:txBody>
+                    <a:bodyPr/>
+                    <a:lstStyle/>
+                    <a:p>
+                      <a:r>
+                        <a:rPr sz="1200" b="1">
+                          <a:solidFill>
+                            <a:srgbClr val="0F172A"/>
+                          </a:solidFill>
+                          <a:latin typeface="PingFang TC"/>
+                          <a:ea typeface="PingFang TC"/>
+                        </a:rPr>
+                        <a:t>Pre-generated Pool</a:t>
+                      </a:r>
+                    </a:p>
+                  </a:txBody>
+                  <a:tcPr marT="25400" marB="25400" marL="101600" anchor="ctr">
+                    <a:solidFill>
+                      <a:srgbClr val="FFFFFF"/>
+                    </a:solidFill>
+                  </a:tcPr>
+                </a:tc>
+                <a:tc>
+                  <a:txBody>
+                    <a:bodyPr/>
+                    <a:lstStyle/>
+                    <a:p>
+                      <a:r>
+                        <a:rPr sz="1200" b="0">
+                          <a:solidFill>
+                            <a:srgbClr val="0F172A"/>
+                          </a:solidFill>
+                          <a:latin typeface="PingFang TC"/>
+                          <a:ea typeface="PingFang TC"/>
+                        </a:rPr>
+                        <a:t>低</a:t>
+                      </a:r>
+                    </a:p>
+                  </a:txBody>
+                  <a:tcPr marT="25400" marB="25400" marL="101600" anchor="ctr">
+                    <a:solidFill>
+                      <a:srgbClr val="FFFFFF"/>
+                    </a:solidFill>
+                  </a:tcPr>
+                </a:tc>
+                <a:tc>
+                  <a:txBody>
+                    <a:bodyPr/>
+                    <a:lstStyle/>
+                    <a:p>
+                      <a:r>
+                        <a:rPr sz="1200" b="0">
+                          <a:solidFill>
+                            <a:srgbClr val="0F172A"/>
+                          </a:solidFill>
+                          <a:latin typeface="PingFang TC"/>
+                          <a:ea typeface="PingFang TC"/>
+                        </a:rPr>
+                        <a:t>高</a:t>
+                      </a:r>
+                    </a:p>
+                  </a:txBody>
+                  <a:tcPr marT="25400" marB="25400" marL="101600" anchor="ctr">
+                    <a:solidFill>
+                      <a:srgbClr val="FFFFFF"/>
+                    </a:solidFill>
+                  </a:tcPr>
+                </a:tc>
+                <a:tc>
+                  <a:txBody>
+                    <a:bodyPr/>
+                    <a:lstStyle/>
+                    <a:p>
+                      <a:r>
+                        <a:rPr sz="1200" b="0">
+                          <a:solidFill>
+                            <a:srgbClr val="0F172A"/>
+                          </a:solidFill>
+                          <a:latin typeface="PingFang TC"/>
+                          <a:ea typeface="PingFang TC"/>
+                        </a:rPr>
+                        <a:t>低</a:t>
+                      </a:r>
+                    </a:p>
+                  </a:txBody>
+                  <a:tcPr marT="25400" marB="25400" marL="101600" anchor="ctr">
+                    <a:solidFill>
+                      <a:srgbClr val="FFFFFF"/>
+                    </a:solidFill>
+                  </a:tcPr>
+                </a:tc>
+                <a:tc>
+                  <a:txBody>
+                    <a:bodyPr/>
+                    <a:lstStyle/>
+                    <a:p>
+                      <a:r>
+                        <a:rPr sz="1200" b="0">
+                          <a:solidFill>
+                            <a:srgbClr val="0F172A"/>
+                          </a:solidFill>
+                          <a:latin typeface="PingFang TC"/>
+                          <a:ea typeface="PingFang TC"/>
+                        </a:rPr>
+                        <a:t>高流量 · 零碰撞</a:t>
+                      </a:r>
+                    </a:p>
+                  </a:txBody>
+                  <a:tcPr marT="25400" marB="25400" marL="101600" anchor="ctr">
+                    <a:solidFill>
+                      <a:srgbClr val="FFFFFF"/>
+                    </a:solidFill>
+                  </a:tcPr>
+                </a:tc>
+              </a:tr>
+              <a:tr h="470268">
+                <a:tc>
+                  <a:txBody>
+                    <a:bodyPr/>
+                    <a:lstStyle/>
+                    <a:p>
+                      <a:r>
+                        <a:rPr sz="1200" b="1">
+                          <a:solidFill>
+                            <a:srgbClr val="0F172A"/>
+                          </a:solidFill>
+                          <a:latin typeface="PingFang TC"/>
+                          <a:ea typeface="PingFang TC"/>
+                        </a:rPr>
+                        <a:t>Snowflake-like</a:t>
+                      </a:r>
+                    </a:p>
+                  </a:txBody>
+                  <a:tcPr marT="25400" marB="25400" marL="101600" anchor="ctr">
+                    <a:solidFill>
+                      <a:srgbClr val="F1F5F9"/>
+                    </a:solidFill>
+                  </a:tcPr>
+                </a:tc>
+                <a:tc>
+                  <a:txBody>
+                    <a:bodyPr/>
+                    <a:lstStyle/>
+                    <a:p>
+                      <a:r>
+                        <a:rPr sz="1200" b="0">
+                          <a:solidFill>
+                            <a:srgbClr val="0F172A"/>
+                          </a:solidFill>
+                          <a:latin typeface="PingFang TC"/>
+                          <a:ea typeface="PingFang TC"/>
+                        </a:rPr>
+                        <a:t>低</a:t>
+                      </a:r>
+                    </a:p>
+                  </a:txBody>
+                  <a:tcPr marT="25400" marB="25400" marL="101600" anchor="ctr">
+                    <a:solidFill>
+                      <a:srgbClr val="F1F5F9"/>
+                    </a:solidFill>
+                  </a:tcPr>
+                </a:tc>
+                <a:tc>
+                  <a:txBody>
+                    <a:bodyPr/>
+                    <a:lstStyle/>
+                    <a:p>
+                      <a:r>
+                        <a:rPr sz="1200" b="0">
+                          <a:solidFill>
+                            <a:srgbClr val="0F172A"/>
+                          </a:solidFill>
+                          <a:latin typeface="PingFang TC"/>
+                          <a:ea typeface="PingFang TC"/>
+                        </a:rPr>
+                        <a:t>高</a:t>
+                      </a:r>
+                    </a:p>
+                  </a:txBody>
+                  <a:tcPr marT="25400" marB="25400" marL="101600" anchor="ctr">
+                    <a:solidFill>
+                      <a:srgbClr val="F1F5F9"/>
+                    </a:solidFill>
+                  </a:tcPr>
+                </a:tc>
+                <a:tc>
+                  <a:txBody>
+                    <a:bodyPr/>
+                    <a:lstStyle/>
+                    <a:p>
+                      <a:r>
+                        <a:rPr sz="1200" b="0">
+                          <a:solidFill>
+                            <a:srgbClr val="0F172A"/>
+                          </a:solidFill>
+                          <a:latin typeface="PingFang TC"/>
+                          <a:ea typeface="PingFang TC"/>
+                        </a:rPr>
+                        <a:t>中</a:t>
+                      </a:r>
+                    </a:p>
+                  </a:txBody>
+                  <a:tcPr marT="25400" marB="25400" marL="101600" anchor="ctr">
+                    <a:solidFill>
+                      <a:srgbClr val="F1F5F9"/>
+                    </a:solidFill>
+                  </a:tcPr>
+                </a:tc>
+                <a:tc>
+                  <a:txBody>
+                    <a:bodyPr/>
+                    <a:lstStyle/>
+                    <a:p>
+                      <a:r>
+                        <a:rPr sz="1200" b="0">
+                          <a:solidFill>
+                            <a:srgbClr val="0F172A"/>
+                          </a:solidFill>
+                          <a:latin typeface="PingFang TC"/>
+                          <a:ea typeface="PingFang TC"/>
+                        </a:rPr>
+                        <a:t>分散式系統</a:t>
+                      </a:r>
+                    </a:p>
+                  </a:txBody>
+                  <a:tcPr marT="25400" marB="25400" marL="101600" anchor="ctr">
+                    <a:solidFill>
+                      <a:srgbClr val="F1F5F9"/>
+                    </a:solidFill>
+                  </a:tcPr>
+                </a:tc>
+              </a:tr>
+            </a:tbl>
+          </a:graphicData>
+        </a:graphic>
+      </p:graphicFrame>
+      <p:sp>
+        <p:nvSpPr>
+          <p:cNvPr id="5" name="TextBox 4"/>
           <p:cNvSpPr txBox="1"/>
           <p:nvPr/>
         </p:nvSpPr>
         <p:spPr>
           <a:xfrm>
-            <a:off x="640080" y="1737360"/>
-            <a:ext cx="5486400" cy="4572000"/>
+            <a:off x="548640" y="5120640"/>
+            <a:ext cx="11247120" cy="1463040"/>
           </a:xfrm>
           <a:prstGeom prst="rect">
             <a:avLst/>
@@ -5439,245 +6289,52 @@
           <a:p>
             <a:pPr>
               <a:spcAft>
-                <a:spcPts val="800"/>
-              </a:spcAft>
-            </a:pPr>
-            <a:r>
-              <a:rPr sz="1400" b="0">
+                <a:spcPts val="600"/>
+              </a:spcAft>
+            </a:pPr>
+            <a:r>
+              <a:rPr sz="1300" b="0">
                 <a:solidFill>
                   <a:srgbClr val="0F172A"/>
                 </a:solidFill>
                 <a:latin typeface="PingFang TC"/>
                 <a:ea typeface="PingFang TC"/>
               </a:rPr>
-              <a:t>•  302 而非 301</a:t>
-            </a:r>
-          </a:p>
-          <a:p>
-            <a:pPr lvl="1">
-              <a:spcAft>
-                <a:spcPts val="800"/>
+              <a:t>•  演進：隨機（碰撞靠運氣）→ 純 hash（同 URL 同 token、無法獨立追蹤）→ SHA-256+nonce（換 nonce 確定性重試 + DB 兜底）</a:t>
+            </a:r>
+          </a:p>
+          <a:p>
+            <a:pPr>
+              <a:spcAft>
+                <a:spcPts val="600"/>
               </a:spcAft>
             </a:pPr>
             <a:r>
               <a:rPr sz="1300" b="0">
                 <a:solidFill>
-                  <a:srgbClr val="64748B"/>
-                </a:solidFill>
-                <a:latin typeface="PingFang TC"/>
-                <a:ea typeface="PingFang TC"/>
-              </a:rPr>
-              <a:t>–  301 被瀏覽器快取 → 跳過我方 server</a:t>
-            </a:r>
-          </a:p>
-          <a:p>
-            <a:pPr lvl="1">
-              <a:spcAft>
-                <a:spcPts val="800"/>
+                  <a:srgbClr val="0F172A"/>
+                </a:solidFill>
+                <a:latin typeface="PingFang TC"/>
+                <a:ea typeface="PingFang TC"/>
+              </a:rPr>
+              <a:t>•  進階：Pre-generated Pool（寫入零碰撞，適合超高寫入）· Snowflake-like（分散式本地生成）</a:t>
+            </a:r>
+          </a:p>
+          <a:p>
+            <a:pPr>
+              <a:spcAft>
+                <a:spcPts val="600"/>
               </a:spcAft>
             </a:pPr>
             <a:r>
               <a:rPr sz="1300" b="0">
                 <a:solidFill>
-                  <a:srgbClr val="64748B"/>
-                </a:solidFill>
-                <a:latin typeface="PingFang TC"/>
-                <a:ea typeface="PingFang TC"/>
-              </a:rPr>
-              <a:t>–  → 無法改/刪/統計；故選 302 每次回源</a:t>
-            </a:r>
-          </a:p>
-          <a:p>
-            <a:pPr>
-              <a:spcAft>
-                <a:spcPts val="800"/>
-              </a:spcAft>
-            </a:pPr>
-            <a:r>
-              <a:rPr sz="1400" b="0">
-                <a:solidFill>
                   <a:srgbClr val="0F172A"/>
                 </a:solidFill>
                 <a:latin typeface="PingFang TC"/>
                 <a:ea typeface="PingFang TC"/>
               </a:rPr>
-              <a:t>•  Cache：Redis（非行程內 dict）</a:t>
-            </a:r>
-          </a:p>
-          <a:p>
-            <a:pPr lvl="1">
-              <a:spcAft>
-                <a:spcPts val="800"/>
-              </a:spcAft>
-            </a:pPr>
-            <a:r>
-              <a:rPr sz="1300" b="0">
-                <a:solidFill>
-                  <a:srgbClr val="64748B"/>
-                </a:solidFill>
-                <a:latin typeface="PingFang TC"/>
-                <a:ea typeface="PingFang TC"/>
-              </a:rPr>
-              <a:t>–  stateless 多台共享 + 全域 invalidation</a:t>
-            </a:r>
-          </a:p>
-          <a:p>
-            <a:pPr lvl="1">
-              <a:spcAft>
-                <a:spcPts val="800"/>
-              </a:spcAft>
-            </a:pPr>
-            <a:r>
-              <a:rPr sz="1300" b="0">
-                <a:solidFill>
-                  <a:srgbClr val="64748B"/>
-                </a:solidFill>
-                <a:latin typeface="PingFang TC"/>
-                <a:ea typeface="PingFang TC"/>
-              </a:rPr>
-              <a:t>–  行程內 dict 會讓 PATCH/DELETE 失效漏清</a:t>
-            </a:r>
-          </a:p>
-          <a:p>
-            <a:pPr lvl="1">
-              <a:spcAft>
-                <a:spcPts val="800"/>
-              </a:spcAft>
-            </a:pPr>
-            <a:r>
-              <a:rPr sz="1300" b="0">
-                <a:solidFill>
-                  <a:srgbClr val="64748B"/>
-                </a:solidFill>
-                <a:latin typeface="PingFang TC"/>
-                <a:ea typeface="PingFang TC"/>
-              </a:rPr>
-              <a:t>–  含 TTL 作最終一致性保險</a:t>
-            </a:r>
-          </a:p>
-        </p:txBody>
-      </p:sp>
-      <p:sp>
-        <p:nvSpPr>
-          <p:cNvPr id="5" name="TextBox 4"/>
-          <p:cNvSpPr txBox="1"/>
-          <p:nvPr/>
-        </p:nvSpPr>
-        <p:spPr>
-          <a:xfrm>
-            <a:off x="6309360" y="1737360"/>
-            <a:ext cx="5486400" cy="4572000"/>
-          </a:xfrm>
-          <a:prstGeom prst="rect">
-            <a:avLst/>
-          </a:prstGeom>
-          <a:noFill/>
-        </p:spPr>
-        <p:txBody>
-          <a:bodyPr wrap="square">
-            <a:spAutoFit/>
-          </a:bodyPr>
-          <a:lstStyle/>
-          <a:p>
-            <a:pPr>
-              <a:spcAft>
-                <a:spcPts val="800"/>
-              </a:spcAft>
-            </a:pPr>
-            <a:r>
-              <a:rPr sz="1400" b="0">
-                <a:solidFill>
-                  <a:srgbClr val="0F172A"/>
-                </a:solidFill>
-                <a:latin typeface="PingFang TC"/>
-                <a:ea typeface="PingFang TC"/>
-              </a:rPr>
-              <a:t>•  Scan 非同步寫</a:t>
-            </a:r>
-          </a:p>
-          <a:p>
-            <a:pPr lvl="1">
-              <a:spcAft>
-                <a:spcPts val="800"/>
-              </a:spcAft>
-            </a:pPr>
-            <a:r>
-              <a:rPr sz="1300" b="0">
-                <a:solidFill>
-                  <a:srgbClr val="64748B"/>
-                </a:solidFill>
-                <a:latin typeface="PingFang TC"/>
-                <a:ea typeface="PingFang TC"/>
-              </a:rPr>
-              <a:t>–  redirect 是 &lt;100ms + ~5,800 QPS 熱路徑</a:t>
-            </a:r>
-          </a:p>
-          <a:p>
-            <a:pPr lvl="1">
-              <a:spcAft>
-                <a:spcPts val="800"/>
-              </a:spcAft>
-            </a:pPr>
-            <a:r>
-              <a:rPr sz="1300" b="0">
-                <a:solidFill>
-                  <a:srgbClr val="64748B"/>
-                </a:solidFill>
-                <a:latin typeface="PingFang TC"/>
-                <a:ea typeface="PingFang TC"/>
-              </a:rPr>
-              <a:t>–  分析可容忍延遲/少量遺失 → 不擋跳轉</a:t>
-            </a:r>
-          </a:p>
-          <a:p>
-            <a:pPr lvl="1">
-              <a:spcAft>
-                <a:spcPts val="800"/>
-              </a:spcAft>
-            </a:pPr>
-            <a:r>
-              <a:rPr sz="1300" b="0">
-                <a:solidFill>
-                  <a:srgbClr val="64748B"/>
-                </a:solidFill>
-                <a:latin typeface="PingFang TC"/>
-                <a:ea typeface="PingFang TC"/>
-              </a:rPr>
-              <a:t>–  原型 BackgroundTasks；正式版佇列+worker</a:t>
-            </a:r>
-          </a:p>
-          <a:p>
-            <a:pPr>
-              <a:spcAft>
-                <a:spcPts val="800"/>
-              </a:spcAft>
-            </a:pPr>
-            <a:r>
-              <a:rPr sz="1400" b="0">
-                <a:solidFill>
-                  <a:srgbClr val="0F172A"/>
-                </a:solidFill>
-                <a:latin typeface="PingFang TC"/>
-                <a:ea typeface="PingFang TC"/>
-              </a:rPr>
-              <a:t>•  token index</a:t>
-            </a:r>
-          </a:p>
-          <a:p>
-            <a:pPr lvl="1">
-              <a:spcAft>
-                <a:spcPts val="800"/>
-              </a:spcAft>
-            </a:pPr>
-            <a:r>
-              <a:rPr sz="1300" b="0">
-                <a:solidFill>
-                  <a:srgbClr val="64748B"/>
-                </a:solidFill>
-                <a:latin typeface="PingFang TC"/>
-                <a:ea typeface="PingFang TC"/>
-              </a:rPr>
-              <a:t>–  避免全表掃描，redirect 直接命中</a:t>
+              <a:t>•  我們選 SHA-256+nonce 為通用方案；寫入流量再上去可換 Pre-generated Pool</a:t>
             </a:r>
           </a:p>
         </p:txBody>
@@ -5779,7 +6436,7 @@
                 <a:latin typeface="PingFang TC"/>
                 <a:ea typeface="PingFang TC"/>
               </a:rPr>
-              <a:t>10 · DEEP DIVE</a:t>
+              <a:t>09 · DEEP DIVE</a:t>
             </a:r>
           </a:p>
           <a:p>
@@ -5796,7 +6453,7 @@
                 <a:latin typeface="PingFang TC"/>
                 <a:ea typeface="PingFang TC"/>
               </a:rPr>
-              <a:t>決策 3 — 可靠性與資料語意</a:t>
+              <a:t>決策 2 — 302、快取、非同步</a:t>
             </a:r>
           </a:p>
         </p:txBody>
@@ -5810,7 +6467,7 @@
         <p:spPr>
           <a:xfrm>
             <a:off x="640080" y="1737360"/>
-            <a:ext cx="10789920" cy="4572000"/>
+            <a:ext cx="5486400" cy="4572000"/>
           </a:xfrm>
           <a:prstGeom prst="rect">
             <a:avLst/>
@@ -5825,120 +6482,245 @@
           <a:p>
             <a:pPr>
               <a:spcAft>
-                <a:spcPts val="900"/>
-              </a:spcAft>
-            </a:pPr>
-            <a:r>
-              <a:rPr sz="1500" b="0">
+                <a:spcPts val="800"/>
+              </a:spcAft>
+            </a:pPr>
+            <a:r>
+              <a:rPr sz="1400" b="0">
                 <a:solidFill>
                   <a:srgbClr val="0F172A"/>
                 </a:solidFill>
                 <a:latin typeface="PingFang TC"/>
                 <a:ea typeface="PingFang TC"/>
               </a:rPr>
-              <a:t>•  軟刪除（is_deleted）：支撐 410 語意、保留分析、避免 token 回收風險</a:t>
+              <a:t>•  302 而非 301</a:t>
+            </a:r>
+          </a:p>
+          <a:p>
+            <a:pPr lvl="1">
+              <a:spcAft>
+                <a:spcPts val="800"/>
+              </a:spcAft>
+            </a:pPr>
+            <a:r>
+              <a:rPr sz="1300" b="0">
+                <a:solidFill>
+                  <a:srgbClr val="64748B"/>
+                </a:solidFill>
+                <a:latin typeface="PingFang TC"/>
+                <a:ea typeface="PingFang TC"/>
+              </a:rPr>
+              <a:t>–  301 被瀏覽器快取 → 跳過我方 server</a:t>
+            </a:r>
+          </a:p>
+          <a:p>
+            <a:pPr lvl="1">
+              <a:spcAft>
+                <a:spcPts val="800"/>
+              </a:spcAft>
+            </a:pPr>
+            <a:r>
+              <a:rPr sz="1300" b="0">
+                <a:solidFill>
+                  <a:srgbClr val="64748B"/>
+                </a:solidFill>
+                <a:latin typeface="PingFang TC"/>
+                <a:ea typeface="PingFang TC"/>
+              </a:rPr>
+              <a:t>–  → 無法改/刪/統計；故選 302 每次回源</a:t>
             </a:r>
           </a:p>
           <a:p>
             <a:pPr>
               <a:spcAft>
-                <a:spcPts val="900"/>
-              </a:spcAft>
-            </a:pPr>
-            <a:r>
-              <a:rPr sz="1500" b="0">
+                <a:spcPts val="800"/>
+              </a:spcAft>
+            </a:pPr>
+            <a:r>
+              <a:rPr sz="1400" b="0">
                 <a:solidFill>
                   <a:srgbClr val="0F172A"/>
                 </a:solidFill>
                 <a:latin typeface="PingFang TC"/>
                 <a:ea typeface="PingFang TC"/>
               </a:rPr>
-              <a:t>•  錯誤語意：404（從未存在） vs 410（曾存在已刪/過期）</a:t>
+              <a:t>•  Cache：Redis（非行程內 dict）</a:t>
             </a:r>
           </a:p>
           <a:p>
             <a:pPr lvl="1">
               <a:spcAft>
-                <a:spcPts val="900"/>
+                <a:spcPts val="800"/>
+              </a:spcAft>
+            </a:pPr>
+            <a:r>
+              <a:rPr sz="1300" b="0">
+                <a:solidFill>
+                  <a:srgbClr val="64748B"/>
+                </a:solidFill>
+                <a:latin typeface="PingFang TC"/>
+                <a:ea typeface="PingFang TC"/>
+              </a:rPr>
+              <a:t>–  stateless 多台共享 + 全域 invalidation</a:t>
+            </a:r>
+          </a:p>
+          <a:p>
+            <a:pPr lvl="1">
+              <a:spcAft>
+                <a:spcPts val="800"/>
+              </a:spcAft>
+            </a:pPr>
+            <a:r>
+              <a:rPr sz="1300" b="0">
+                <a:solidFill>
+                  <a:srgbClr val="64748B"/>
+                </a:solidFill>
+                <a:latin typeface="PingFang TC"/>
+                <a:ea typeface="PingFang TC"/>
+              </a:rPr>
+              <a:t>–  行程內 dict 會讓 PATCH/DELETE 失效漏清</a:t>
+            </a:r>
+          </a:p>
+          <a:p>
+            <a:pPr lvl="1">
+              <a:spcAft>
+                <a:spcPts val="800"/>
+              </a:spcAft>
+            </a:pPr>
+            <a:r>
+              <a:rPr sz="1300" b="0">
+                <a:solidFill>
+                  <a:srgbClr val="64748B"/>
+                </a:solidFill>
+                <a:latin typeface="PingFang TC"/>
+                <a:ea typeface="PingFang TC"/>
+              </a:rPr>
+              <a:t>–  含 TTL 作最終一致性保險</a:t>
+            </a:r>
+          </a:p>
+        </p:txBody>
+      </p:sp>
+      <p:sp>
+        <p:nvSpPr>
+          <p:cNvPr id="5" name="TextBox 4"/>
+          <p:cNvSpPr txBox="1"/>
+          <p:nvPr/>
+        </p:nvSpPr>
+        <p:spPr>
+          <a:xfrm>
+            <a:off x="6309360" y="1737360"/>
+            <a:ext cx="5486400" cy="4572000"/>
+          </a:xfrm>
+          <a:prstGeom prst="rect">
+            <a:avLst/>
+          </a:prstGeom>
+          <a:noFill/>
+        </p:spPr>
+        <p:txBody>
+          <a:bodyPr wrap="square">
+            <a:spAutoFit/>
+          </a:bodyPr>
+          <a:lstStyle/>
+          <a:p>
+            <a:pPr>
+              <a:spcAft>
+                <a:spcPts val="800"/>
               </a:spcAft>
             </a:pPr>
             <a:r>
               <a:rPr sz="1400" b="0">
                 <a:solidFill>
+                  <a:srgbClr val="0F172A"/>
+                </a:solidFill>
+                <a:latin typeface="PingFang TC"/>
+                <a:ea typeface="PingFang TC"/>
+              </a:rPr>
+              <a:t>•  Scan 非同步寫</a:t>
+            </a:r>
+          </a:p>
+          <a:p>
+            <a:pPr lvl="1">
+              <a:spcAft>
+                <a:spcPts val="800"/>
+              </a:spcAft>
+            </a:pPr>
+            <a:r>
+              <a:rPr sz="1300" b="0">
+                <a:solidFill>
                   <a:srgbClr val="64748B"/>
                 </a:solidFill>
                 <a:latin typeface="PingFang TC"/>
                 <a:ea typeface="PingFang TC"/>
               </a:rPr>
-              <a:t>–  掃描路徑刪除回 410；管理 API 已刪回 404（刻意差異）</a:t>
+              <a:t>–  redirect 是 &lt;100ms + ~5,800 QPS 熱路徑</a:t>
+            </a:r>
+          </a:p>
+          <a:p>
+            <a:pPr lvl="1">
+              <a:spcAft>
+                <a:spcPts val="800"/>
+              </a:spcAft>
+            </a:pPr>
+            <a:r>
+              <a:rPr sz="1300" b="0">
+                <a:solidFill>
+                  <a:srgbClr val="64748B"/>
+                </a:solidFill>
+                <a:latin typeface="PingFang TC"/>
+                <a:ea typeface="PingFang TC"/>
+              </a:rPr>
+              <a:t>–  分析可容忍延遲/少量遺失 → 不擋跳轉</a:t>
+            </a:r>
+          </a:p>
+          <a:p>
+            <a:pPr lvl="1">
+              <a:spcAft>
+                <a:spcPts val="800"/>
+              </a:spcAft>
+            </a:pPr>
+            <a:r>
+              <a:rPr sz="1300" b="0">
+                <a:solidFill>
+                  <a:srgbClr val="64748B"/>
+                </a:solidFill>
+                <a:latin typeface="PingFang TC"/>
+                <a:ea typeface="PingFang TC"/>
+              </a:rPr>
+              <a:t>–  原型 BackgroundTasks；正式版佇列+worker</a:t>
             </a:r>
           </a:p>
           <a:p>
             <a:pPr>
               <a:spcAft>
-                <a:spcPts val="900"/>
-              </a:spcAft>
-            </a:pPr>
-            <a:r>
-              <a:rPr sz="1500" b="0">
+                <a:spcPts val="800"/>
+              </a:spcAft>
+            </a:pPr>
+            <a:r>
+              <a:rPr sz="1400" b="0">
                 <a:solidFill>
                   <a:srgbClr val="0F172A"/>
                 </a:solidFill>
                 <a:latin typeface="PingFang TC"/>
                 <a:ea typeface="PingFang TC"/>
               </a:rPr>
-              <a:t>•  惰性過期 + cron 兜底：掃描即時檢查過期；cron 清過期/通知未點擊/物理清理</a:t>
-            </a:r>
-          </a:p>
-          <a:p>
-            <a:pPr>
-              <a:spcAft>
-                <a:spcPts val="900"/>
-              </a:spcAft>
-            </a:pPr>
-            <a:r>
-              <a:rPr sz="1500" b="0">
-                <a:solidFill>
-                  <a:srgbClr val="0F172A"/>
-                </a:solidFill>
-                <a:latin typeface="PingFang TC"/>
-                <a:ea typeface="PingFang TC"/>
-              </a:rPr>
-              <a:t>•  URL 保守正規化：只 lower-case host，保留 path/query 與原 scheme</a:t>
+              <a:t>•  token index</a:t>
             </a:r>
           </a:p>
           <a:p>
             <a:pPr lvl="1">
               <a:spcAft>
-                <a:spcPts val="900"/>
-              </a:spcAft>
-            </a:pPr>
-            <a:r>
-              <a:rPr sz="1400" b="0">
+                <a:spcPts val="800"/>
+              </a:spcAft>
+            </a:pPr>
+            <a:r>
+              <a:rPr sz="1300" b="0">
                 <a:solidFill>
                   <a:srgbClr val="64748B"/>
                 </a:solidFill>
                 <a:latin typeface="PingFang TC"/>
                 <a:ea typeface="PingFang TC"/>
               </a:rPr>
-              <a:t>–  修正 repo 的整串小寫（破壞 path）+ 強制 https（導向失效站）</a:t>
-            </a:r>
-          </a:p>
-          <a:p>
-            <a:pPr>
-              <a:spcAft>
-                <a:spcPts val="900"/>
-              </a:spcAft>
-            </a:pPr>
-            <a:r>
-              <a:rPr sz="1500" b="0">
-                <a:solidFill>
-                  <a:srgbClr val="0F172A"/>
-                </a:solidFill>
-                <a:latin typeface="PingFang TC"/>
-                <a:ea typeface="PingFang TC"/>
-              </a:rPr>
-              <a:t>•  惡意阻擋：黑名單 + SSRF/內網位址（localhost·127.*·私網），正式版接 Safe Browsing</a:t>
+              <a:t>–  避免全表掃描，redirect 直接命中</a:t>
             </a:r>
           </a:p>
         </p:txBody>
@@ -6040,7 +6822,7 @@
                 <a:latin typeface="PingFang TC"/>
                 <a:ea typeface="PingFang TC"/>
               </a:rPr>
-              <a:t>11 · SCALING</a:t>
+              <a:t>10 · DEEP DIVE</a:t>
             </a:r>
           </a:p>
           <a:p>
@@ -6057,7 +6839,7 @@
                 <a:latin typeface="PingFang TC"/>
                 <a:ea typeface="PingFang TC"/>
               </a:rPr>
-              <a:t>擴展策略</a:t>
+              <a:t>決策 3 — 可靠性與資料語意</a:t>
             </a:r>
           </a:p>
         </p:txBody>
@@ -6097,7 +6879,7 @@
                 <a:latin typeface="PingFang TC"/>
                 <a:ea typeface="PingFang TC"/>
               </a:rPr>
-              <a:t>•  App server stateless → 增加 instance 水平擴展（cache 外置 Redis）</a:t>
+              <a:t>•  軟刪除（is_deleted）：支撐 410 語意、保留分析、避免 token 回收風險</a:t>
             </a:r>
           </a:p>
           <a:p>
@@ -6114,7 +6896,7 @@
                 <a:latin typeface="PingFang TC"/>
                 <a:ea typeface="PingFang TC"/>
               </a:rPr>
-              <a:t>•  DB：單 primary + 多 read replica（讀走副）+ primary 掛 failover 升主</a:t>
+              <a:t>•  錯誤語意：404（從未存在） vs 410（曾存在已刪/過期）</a:t>
             </a:r>
           </a:p>
           <a:p>
@@ -6131,7 +6913,7 @@
                 <a:latin typeface="PingFang TC"/>
                 <a:ea typeface="PingFang TC"/>
               </a:rPr>
-              <a:t>–  複寫延遲：create 後暖 cache 緩解</a:t>
+              <a:t>–  掃描路徑刪除回 410；管理 API 已刪回 404（刻意差異）</a:t>
             </a:r>
           </a:p>
           <a:p>
@@ -6148,7 +6930,7 @@
                 <a:latin typeface="PingFang TC"/>
                 <a:ea typeface="PingFang TC"/>
               </a:rPr>
-              <a:t>•  分片：以 token hash 為鍵（均勻），列為未來選項（200GB 目前單機足夠）</a:t>
+              <a:t>•  惰性過期 + cron 兜底：掃描即時檢查過期；cron 清過期/通知未點擊/物理清理</a:t>
             </a:r>
           </a:p>
           <a:p>
@@ -6165,7 +6947,24 @@
                 <a:latin typeface="PingFang TC"/>
                 <a:ea typeface="PingFang TC"/>
               </a:rPr>
-              <a:t>•  QR 圖片：object store + CDN（靜態內容，目標 URL 改不需重生圖）</a:t>
+              <a:t>•  URL 保守正規化：只 lower-case host，保留 path/query 與原 scheme</a:t>
+            </a:r>
+          </a:p>
+          <a:p>
+            <a:pPr lvl="1">
+              <a:spcAft>
+                <a:spcPts val="900"/>
+              </a:spcAft>
+            </a:pPr>
+            <a:r>
+              <a:rPr sz="1400" b="0">
+                <a:solidFill>
+                  <a:srgbClr val="64748B"/>
+                </a:solidFill>
+                <a:latin typeface="PingFang TC"/>
+                <a:ea typeface="PingFang TC"/>
+              </a:rPr>
+              <a:t>–  修正 repo 的整串小寫（破壞 path）+ 強制 https（導向失效站）</a:t>
             </a:r>
           </a:p>
           <a:p>
@@ -6182,24 +6981,7 @@
                 <a:latin typeface="PingFang TC"/>
                 <a:ea typeface="PingFang TC"/>
               </a:rPr>
-              <a:t>•  分析：佇列 → 獨立分析庫 + 預聚合每日計數表</a:t>
-            </a:r>
-          </a:p>
-          <a:p>
-            <a:pPr>
-              <a:spcAft>
-                <a:spcPts val="900"/>
-              </a:spcAft>
-            </a:pPr>
-            <a:r>
-              <a:rPr sz="1500" b="0">
-                <a:solidFill>
-                  <a:srgbClr val="0F172A"/>
-                </a:solidFill>
-                <a:latin typeface="PingFang TC"/>
-                <a:ea typeface="PingFang TC"/>
-              </a:rPr>
-              <a:t>•  清理 cron：清過期 / 通知後刪長期未點擊 / 物理清理超期軟刪 + invalidate cache</a:t>
+              <a:t>•  惡意阻擋：黑名單 + SSRF/內網位址（localhost·127.*·私網），正式版接 Safe Browsing</a:t>
             </a:r>
           </a:p>
         </p:txBody>
@@ -6301,7 +7083,7 @@
                 <a:latin typeface="PingFang TC"/>
                 <a:ea typeface="PingFang TC"/>
               </a:rPr>
-              <a:t>11b · READ REPLICA</a:t>
+              <a:t>11 · SCALING</a:t>
             </a:r>
           </a:p>
           <a:p>
@@ -6318,7 +7100,7 @@
                 <a:latin typeface="PingFang TC"/>
                 <a:ea typeface="PingFang TC"/>
               </a:rPr>
-              <a:t>Read-heavy → 讀寫分離 + Read Replica</a:t>
+              <a:t>擴展策略</a:t>
             </a:r>
           </a:p>
         </p:txBody>
@@ -6331,726 +7113,8 @@
         </p:nvSpPr>
         <p:spPr>
           <a:xfrm>
-            <a:off x="548640" y="1645920"/>
-            <a:ext cx="5486400" cy="2926080"/>
-          </a:xfrm>
-          <a:prstGeom prst="rect">
-            <a:avLst/>
-          </a:prstGeom>
-          <a:noFill/>
-        </p:spPr>
-        <p:txBody>
-          <a:bodyPr wrap="square" anchor="t">
-            <a:spAutoFit/>
-          </a:bodyPr>
-          <a:lstStyle/>
-          <a:p>
-            <a:pPr algn="l">
-              <a:spcAft>
-                <a:spcPts val="800"/>
-              </a:spcAft>
-            </a:pPr>
-            <a:r>
-              <a:rPr sz="1500" b="0">
-                <a:solidFill>
-                  <a:srgbClr val="0F172A"/>
-                </a:solidFill>
-                <a:latin typeface="PingFang TC"/>
-                <a:ea typeface="PingFang TC"/>
-              </a:rPr>
-              <a:t>容量：1B × 200B = 200GB（單機放得下）</a:t>
-            </a:r>
-          </a:p>
-          <a:p>
-            <a:pPr algn="l">
-              <a:spcAft>
-                <a:spcPts val="400"/>
-              </a:spcAft>
-            </a:pPr>
-            <a:r>
-              <a:rPr sz="1500" b="0">
-                <a:solidFill>
-                  <a:srgbClr val="0F172A"/>
-                </a:solidFill>
-                <a:latin typeface="PingFang TC"/>
-                <a:ea typeface="PingFang TC"/>
-              </a:rPr>
-              <a:t>讀流量：1 億 users × 5/日 = 5 億 redirects/日</a:t>
-            </a:r>
-          </a:p>
-          <a:p>
-            <a:pPr algn="l">
-              <a:spcAft>
-                <a:spcPts val="800"/>
-              </a:spcAft>
-            </a:pPr>
-            <a:r>
-              <a:rPr sz="1600" b="1">
-                <a:solidFill>
-                  <a:srgbClr val="2563EB"/>
-                </a:solidFill>
-                <a:latin typeface="PingFang TC"/>
-                <a:ea typeface="PingFang TC"/>
-              </a:rPr>
-              <a:t>            5 億 ÷ 86,400s ≈ 5,787 redirects/秒</a:t>
-            </a:r>
-          </a:p>
-          <a:p>
-            <a:pPr algn="l">
-              <a:spcAft>
-                <a:spcPts val="1200"/>
-              </a:spcAft>
-            </a:pPr>
-            <a:r>
-              <a:rPr sz="1500" b="0">
-                <a:solidFill>
-                  <a:srgbClr val="0F172A"/>
-                </a:solidFill>
-                <a:latin typeface="PingFang TC"/>
-                <a:ea typeface="PingFang TC"/>
-              </a:rPr>
-              <a:t>讀寫比：≈ 100:1（讀 ≫ 寫）</a:t>
-            </a:r>
-          </a:p>
-          <a:p>
-            <a:pPr algn="l">
-              <a:spcAft>
-                <a:spcPts val="400"/>
-              </a:spcAft>
-            </a:pPr>
-            <a:r>
-              <a:rPr sz="1500" b="1">
-                <a:solidFill>
-                  <a:srgbClr val="0F172A"/>
-                </a:solidFill>
-                <a:latin typeface="PingFang TC"/>
-                <a:ea typeface="PingFang TC"/>
-              </a:rPr>
-              <a:t>→ 瓶頸是「讀吞吐」、不是容量</a:t>
-            </a:r>
-          </a:p>
-          <a:p>
-            <a:pPr algn="l">
-              <a:spcAft>
-                <a:spcPts val="400"/>
-              </a:spcAft>
-            </a:pPr>
-            <a:r>
-              <a:rPr sz="1600" b="1">
-                <a:solidFill>
-                  <a:srgbClr val="059669"/>
-                </a:solidFill>
-                <a:latin typeface="PingFang TC"/>
-                <a:ea typeface="PingFang TC"/>
-              </a:rPr>
-              <a:t>→ 讀寫分離 + 多個 read replica</a:t>
-            </a:r>
-          </a:p>
-        </p:txBody>
-      </p:sp>
-      <p:sp>
-        <p:nvSpPr>
-          <p:cNvPr id="5" name="Rounded Rectangle 4"/>
-          <p:cNvSpPr/>
-          <p:nvPr/>
-        </p:nvSpPr>
-        <p:spPr>
-          <a:xfrm>
-            <a:off x="6126480" y="2286000"/>
-            <a:ext cx="1645920" cy="914400"/>
-          </a:xfrm>
-          <a:prstGeom prst="roundRect">
-            <a:avLst/>
-          </a:prstGeom>
-          <a:solidFill>
-            <a:srgbClr val="2563EB"/>
-          </a:solidFill>
-          <a:ln>
-            <a:solidFill>
-              <a:srgbClr val="2563EB"/>
-            </a:solidFill>
-          </a:ln>
-          <a:effectLst/>
-        </p:spPr>
-        <p:style>
-          <a:lnRef idx="1">
-            <a:schemeClr val="accent1"/>
-          </a:lnRef>
-          <a:fillRef idx="3">
-            <a:schemeClr val="accent1"/>
-          </a:fillRef>
-          <a:effectRef idx="2">
-            <a:schemeClr val="accent1"/>
-          </a:effectRef>
-          <a:fontRef idx="minor">
-            <a:schemeClr val="lt1"/>
-          </a:fontRef>
-        </p:style>
-        <p:txBody>
-          <a:bodyPr rtlCol="0" anchor="ctr" wrap="square" tIns="25400" bIns="25400"/>
-          <a:lstStyle/>
-          <a:p>
-            <a:pPr algn="ctr"/>
-            <a:r>
-              <a:rPr sz="1300" b="1">
-                <a:solidFill>
-                  <a:srgbClr val="FFFFFF"/>
-                </a:solidFill>
-                <a:latin typeface="PingFang TC"/>
-                <a:ea typeface="PingFang TC"/>
-              </a:rPr>
-              <a:t>App</a:t>
-            </a:r>
-          </a:p>
-          <a:p>
-            <a:pPr algn="ctr"/>
-            <a:r>
-              <a:rPr sz="1300" b="0">
-                <a:solidFill>
-                  <a:srgbClr val="FFFFFF"/>
-                </a:solidFill>
-                <a:latin typeface="PingFang TC"/>
-                <a:ea typeface="PingFang TC"/>
-              </a:rPr>
-              <a:t>(stateless)</a:t>
-            </a:r>
-          </a:p>
-        </p:txBody>
-      </p:sp>
-      <p:sp>
-        <p:nvSpPr>
-          <p:cNvPr id="6" name="Rounded Rectangle 5"/>
-          <p:cNvSpPr/>
-          <p:nvPr/>
-        </p:nvSpPr>
-        <p:spPr>
-          <a:xfrm>
-            <a:off x="8595360" y="1737360"/>
-            <a:ext cx="3017520" cy="731520"/>
-          </a:xfrm>
-          <a:prstGeom prst="roundRect">
-            <a:avLst/>
-          </a:prstGeom>
-          <a:solidFill>
-            <a:srgbClr val="059669"/>
-          </a:solidFill>
-          <a:ln>
-            <a:solidFill>
-              <a:srgbClr val="059669"/>
-            </a:solidFill>
-          </a:ln>
-          <a:effectLst/>
-        </p:spPr>
-        <p:style>
-          <a:lnRef idx="1">
-            <a:schemeClr val="accent1"/>
-          </a:lnRef>
-          <a:fillRef idx="3">
-            <a:schemeClr val="accent1"/>
-          </a:fillRef>
-          <a:effectRef idx="2">
-            <a:schemeClr val="accent1"/>
-          </a:effectRef>
-          <a:fontRef idx="minor">
-            <a:schemeClr val="lt1"/>
-          </a:fontRef>
-        </p:style>
-        <p:txBody>
-          <a:bodyPr rtlCol="0" anchor="ctr" wrap="square" tIns="25400" bIns="25400"/>
-          <a:lstStyle/>
-          <a:p>
-            <a:pPr algn="ctr"/>
-            <a:r>
-              <a:rPr sz="1300" b="1">
-                <a:solidFill>
-                  <a:srgbClr val="FFFFFF"/>
-                </a:solidFill>
-                <a:latin typeface="PingFang TC"/>
-                <a:ea typeface="PingFang TC"/>
-              </a:rPr>
-              <a:t>Primary (Write)</a:t>
-            </a:r>
-          </a:p>
-        </p:txBody>
-      </p:sp>
-      <p:sp>
-        <p:nvSpPr>
-          <p:cNvPr id="7" name="Rounded Rectangle 6"/>
-          <p:cNvSpPr/>
-          <p:nvPr/>
-        </p:nvSpPr>
-        <p:spPr>
-          <a:xfrm>
-            <a:off x="8595360" y="2697480"/>
-            <a:ext cx="3017520" cy="594360"/>
-          </a:xfrm>
-          <a:prstGeom prst="roundRect">
-            <a:avLst/>
-          </a:prstGeom>
-          <a:solidFill>
-            <a:srgbClr val="0EA5E9"/>
-          </a:solidFill>
-          <a:ln>
-            <a:solidFill>
-              <a:srgbClr val="0EA5E9"/>
-            </a:solidFill>
-          </a:ln>
-          <a:effectLst/>
-        </p:spPr>
-        <p:style>
-          <a:lnRef idx="1">
-            <a:schemeClr val="accent1"/>
-          </a:lnRef>
-          <a:fillRef idx="3">
-            <a:schemeClr val="accent1"/>
-          </a:fillRef>
-          <a:effectRef idx="2">
-            <a:schemeClr val="accent1"/>
-          </a:effectRef>
-          <a:fontRef idx="minor">
-            <a:schemeClr val="lt1"/>
-          </a:fontRef>
-        </p:style>
-        <p:txBody>
-          <a:bodyPr rtlCol="0" anchor="ctr" wrap="square" tIns="25400" bIns="25400"/>
-          <a:lstStyle/>
-          <a:p>
-            <a:pPr algn="ctr"/>
-            <a:r>
-              <a:rPr sz="1200" b="1">
-                <a:solidFill>
-                  <a:srgbClr val="FFFFFF"/>
-                </a:solidFill>
-                <a:latin typeface="PingFang TC"/>
-                <a:ea typeface="PingFang TC"/>
-              </a:rPr>
-              <a:t>Read Replica 1</a:t>
-            </a:r>
-          </a:p>
-        </p:txBody>
-      </p:sp>
-      <p:sp>
-        <p:nvSpPr>
-          <p:cNvPr id="8" name="Rounded Rectangle 7"/>
-          <p:cNvSpPr/>
-          <p:nvPr/>
-        </p:nvSpPr>
-        <p:spPr>
-          <a:xfrm>
-            <a:off x="8595360" y="3429000"/>
-            <a:ext cx="3017520" cy="594360"/>
-          </a:xfrm>
-          <a:prstGeom prst="roundRect">
-            <a:avLst/>
-          </a:prstGeom>
-          <a:solidFill>
-            <a:srgbClr val="0EA5E9"/>
-          </a:solidFill>
-          <a:ln>
-            <a:solidFill>
-              <a:srgbClr val="0EA5E9"/>
-            </a:solidFill>
-          </a:ln>
-          <a:effectLst/>
-        </p:spPr>
-        <p:style>
-          <a:lnRef idx="1">
-            <a:schemeClr val="accent1"/>
-          </a:lnRef>
-          <a:fillRef idx="3">
-            <a:schemeClr val="accent1"/>
-          </a:fillRef>
-          <a:effectRef idx="2">
-            <a:schemeClr val="accent1"/>
-          </a:effectRef>
-          <a:fontRef idx="minor">
-            <a:schemeClr val="lt1"/>
-          </a:fontRef>
-        </p:style>
-        <p:txBody>
-          <a:bodyPr rtlCol="0" anchor="ctr" wrap="square" tIns="25400" bIns="25400"/>
-          <a:lstStyle/>
-          <a:p>
-            <a:pPr algn="ctr"/>
-            <a:r>
-              <a:rPr sz="1200" b="1">
-                <a:solidFill>
-                  <a:srgbClr val="FFFFFF"/>
-                </a:solidFill>
-                <a:latin typeface="PingFang TC"/>
-                <a:ea typeface="PingFang TC"/>
-              </a:rPr>
-              <a:t>Read Replica 2</a:t>
-            </a:r>
-          </a:p>
-        </p:txBody>
-      </p:sp>
-      <p:sp>
-        <p:nvSpPr>
-          <p:cNvPr id="9" name="Rounded Rectangle 8"/>
-          <p:cNvSpPr/>
-          <p:nvPr/>
-        </p:nvSpPr>
-        <p:spPr>
-          <a:xfrm>
-            <a:off x="8595360" y="4160520"/>
-            <a:ext cx="3017520" cy="594360"/>
-          </a:xfrm>
-          <a:prstGeom prst="roundRect">
-            <a:avLst/>
-          </a:prstGeom>
-          <a:solidFill>
-            <a:srgbClr val="0EA5E9"/>
-          </a:solidFill>
-          <a:ln>
-            <a:solidFill>
-              <a:srgbClr val="0EA5E9"/>
-            </a:solidFill>
-          </a:ln>
-          <a:effectLst/>
-        </p:spPr>
-        <p:style>
-          <a:lnRef idx="1">
-            <a:schemeClr val="accent1"/>
-          </a:lnRef>
-          <a:fillRef idx="3">
-            <a:schemeClr val="accent1"/>
-          </a:fillRef>
-          <a:effectRef idx="2">
-            <a:schemeClr val="accent1"/>
-          </a:effectRef>
-          <a:fontRef idx="minor">
-            <a:schemeClr val="lt1"/>
-          </a:fontRef>
-        </p:style>
-        <p:txBody>
-          <a:bodyPr rtlCol="0" anchor="ctr" wrap="square" tIns="25400" bIns="25400"/>
-          <a:lstStyle/>
-          <a:p>
-            <a:pPr algn="ctr"/>
-            <a:r>
-              <a:rPr sz="1200" b="1">
-                <a:solidFill>
-                  <a:srgbClr val="FFFFFF"/>
-                </a:solidFill>
-                <a:latin typeface="PingFang TC"/>
-                <a:ea typeface="PingFang TC"/>
-              </a:rPr>
-              <a:t>Read Replica N</a:t>
-            </a:r>
-          </a:p>
-        </p:txBody>
-      </p:sp>
-      <p:cxnSp>
-        <p:nvCxnSpPr>
-          <p:cNvPr id="10" name="Connector 9"/>
-          <p:cNvCxnSpPr/>
-          <p:nvPr/>
-        </p:nvCxnSpPr>
-        <p:spPr>
-          <a:xfrm flipV="1">
-            <a:off x="7772400" y="2103120"/>
-            <a:ext cx="822960" cy="457200"/>
-          </a:xfrm>
-          <a:prstGeom prst="line">
-            <a:avLst/>
-          </a:prstGeom>
-          <a:ln w="20320">
-            <a:solidFill>
-              <a:srgbClr val="DC2626"/>
-            </a:solidFill>
-            <a:tailEnd type="triangle" w="med" len="med"/>
-          </a:ln>
-        </p:spPr>
-        <p:style>
-          <a:lnRef idx="2">
-            <a:schemeClr val="accent1"/>
-          </a:lnRef>
-          <a:fillRef idx="0">
-            <a:schemeClr val="accent1"/>
-          </a:fillRef>
-          <a:effectRef idx="1">
-            <a:schemeClr val="accent1"/>
-          </a:effectRef>
-          <a:fontRef idx="minor">
-            <a:schemeClr val="tx1"/>
-          </a:fontRef>
-        </p:style>
-      </p:cxnSp>
-      <p:cxnSp>
-        <p:nvCxnSpPr>
-          <p:cNvPr id="11" name="Connector 10"/>
-          <p:cNvCxnSpPr/>
-          <p:nvPr/>
-        </p:nvCxnSpPr>
-        <p:spPr>
-          <a:xfrm>
-            <a:off x="7772400" y="2880360"/>
-            <a:ext cx="822960" cy="109728"/>
-          </a:xfrm>
-          <a:prstGeom prst="line">
-            <a:avLst/>
-          </a:prstGeom>
-          <a:ln w="17780">
-            <a:solidFill>
-              <a:srgbClr val="059669"/>
-            </a:solidFill>
-            <a:tailEnd type="triangle" w="med" len="med"/>
-          </a:ln>
-        </p:spPr>
-        <p:style>
-          <a:lnRef idx="2">
-            <a:schemeClr val="accent1"/>
-          </a:lnRef>
-          <a:fillRef idx="0">
-            <a:schemeClr val="accent1"/>
-          </a:fillRef>
-          <a:effectRef idx="1">
-            <a:schemeClr val="accent1"/>
-          </a:effectRef>
-          <a:fontRef idx="minor">
-            <a:schemeClr val="tx1"/>
-          </a:fontRef>
-        </p:style>
-      </p:cxnSp>
-      <p:cxnSp>
-        <p:nvCxnSpPr>
-          <p:cNvPr id="12" name="Connector 11"/>
-          <p:cNvCxnSpPr/>
-          <p:nvPr/>
-        </p:nvCxnSpPr>
-        <p:spPr>
-          <a:xfrm>
-            <a:off x="7772400" y="3017520"/>
-            <a:ext cx="822960" cy="704088"/>
-          </a:xfrm>
-          <a:prstGeom prst="line">
-            <a:avLst/>
-          </a:prstGeom>
-          <a:ln w="17780">
-            <a:solidFill>
-              <a:srgbClr val="059669"/>
-            </a:solidFill>
-            <a:tailEnd type="triangle" w="med" len="med"/>
-          </a:ln>
-        </p:spPr>
-        <p:style>
-          <a:lnRef idx="2">
-            <a:schemeClr val="accent1"/>
-          </a:lnRef>
-          <a:fillRef idx="0">
-            <a:schemeClr val="accent1"/>
-          </a:fillRef>
-          <a:effectRef idx="1">
-            <a:schemeClr val="accent1"/>
-          </a:effectRef>
-          <a:fontRef idx="minor">
-            <a:schemeClr val="tx1"/>
-          </a:fontRef>
-        </p:style>
-      </p:cxnSp>
-      <p:cxnSp>
-        <p:nvCxnSpPr>
-          <p:cNvPr id="13" name="Connector 12"/>
-          <p:cNvCxnSpPr/>
-          <p:nvPr/>
-        </p:nvCxnSpPr>
-        <p:spPr>
-          <a:xfrm>
-            <a:off x="7772400" y="3108960"/>
-            <a:ext cx="822960" cy="1344168"/>
-          </a:xfrm>
-          <a:prstGeom prst="line">
-            <a:avLst/>
-          </a:prstGeom>
-          <a:ln w="17780">
-            <a:solidFill>
-              <a:srgbClr val="059669"/>
-            </a:solidFill>
-            <a:tailEnd type="triangle" w="med" len="med"/>
-          </a:ln>
-        </p:spPr>
-        <p:style>
-          <a:lnRef idx="2">
-            <a:schemeClr val="accent1"/>
-          </a:lnRef>
-          <a:fillRef idx="0">
-            <a:schemeClr val="accent1"/>
-          </a:fillRef>
-          <a:effectRef idx="1">
-            <a:schemeClr val="accent1"/>
-          </a:effectRef>
-          <a:fontRef idx="minor">
-            <a:schemeClr val="tx1"/>
-          </a:fontRef>
-        </p:style>
-      </p:cxnSp>
-      <p:sp>
-        <p:nvSpPr>
-          <p:cNvPr id="14" name="TextBox 13"/>
-          <p:cNvSpPr txBox="1"/>
-          <p:nvPr/>
-        </p:nvSpPr>
-        <p:spPr>
-          <a:xfrm>
-            <a:off x="7635240" y="2057400"/>
-            <a:ext cx="914400" cy="274320"/>
-          </a:xfrm>
-          <a:prstGeom prst="rect">
-            <a:avLst/>
-          </a:prstGeom>
-          <a:noFill/>
-        </p:spPr>
-        <p:txBody>
-          <a:bodyPr wrap="square" anchor="t">
-            <a:spAutoFit/>
-          </a:bodyPr>
-          <a:lstStyle/>
-          <a:p>
-            <a:pPr algn="l">
-              <a:spcAft>
-                <a:spcPts val="400"/>
-              </a:spcAft>
-            </a:pPr>
-            <a:r>
-              <a:rPr sz="1200" b="1">
-                <a:solidFill>
-                  <a:srgbClr val="DC2626"/>
-                </a:solidFill>
-                <a:latin typeface="PingFang TC"/>
-                <a:ea typeface="PingFang TC"/>
-              </a:rPr>
-              <a:t>寫</a:t>
-            </a:r>
-          </a:p>
-        </p:txBody>
-      </p:sp>
-      <p:sp>
-        <p:nvSpPr>
-          <p:cNvPr id="15" name="TextBox 14"/>
-          <p:cNvSpPr txBox="1"/>
-          <p:nvPr/>
-        </p:nvSpPr>
-        <p:spPr>
-          <a:xfrm>
-            <a:off x="7589520" y="3200400"/>
-            <a:ext cx="914400" cy="274320"/>
-          </a:xfrm>
-          <a:prstGeom prst="rect">
-            <a:avLst/>
-          </a:prstGeom>
-          <a:noFill/>
-        </p:spPr>
-        <p:txBody>
-          <a:bodyPr wrap="square" anchor="t">
-            <a:spAutoFit/>
-          </a:bodyPr>
-          <a:lstStyle/>
-          <a:p>
-            <a:pPr algn="l">
-              <a:spcAft>
-                <a:spcPts val="400"/>
-              </a:spcAft>
-            </a:pPr>
-            <a:r>
-              <a:rPr sz="1200" b="1">
-                <a:solidFill>
-                  <a:srgbClr val="059669"/>
-                </a:solidFill>
-                <a:latin typeface="PingFang TC"/>
-                <a:ea typeface="PingFang TC"/>
-              </a:rPr>
-              <a:t>讀</a:t>
-            </a:r>
-          </a:p>
-        </p:txBody>
-      </p:sp>
-      <p:cxnSp>
-        <p:nvCxnSpPr>
-          <p:cNvPr id="16" name="Connector 15"/>
-          <p:cNvCxnSpPr/>
-          <p:nvPr/>
-        </p:nvCxnSpPr>
-        <p:spPr>
-          <a:xfrm>
-            <a:off x="10104120" y="2468880"/>
-            <a:ext cx="0" cy="228600"/>
-          </a:xfrm>
-          <a:prstGeom prst="line">
-            <a:avLst/>
-          </a:prstGeom>
-          <a:ln w="13970">
-            <a:solidFill>
-              <a:srgbClr val="64748B"/>
-            </a:solidFill>
-            <a:tailEnd type="triangle" w="med" len="med"/>
-          </a:ln>
-        </p:spPr>
-        <p:style>
-          <a:lnRef idx="2">
-            <a:schemeClr val="accent1"/>
-          </a:lnRef>
-          <a:fillRef idx="0">
-            <a:schemeClr val="accent1"/>
-          </a:fillRef>
-          <a:effectRef idx="1">
-            <a:schemeClr val="accent1"/>
-          </a:effectRef>
-          <a:fontRef idx="minor">
-            <a:schemeClr val="tx1"/>
-          </a:fontRef>
-        </p:style>
-      </p:cxnSp>
-      <p:sp>
-        <p:nvSpPr>
-          <p:cNvPr id="17" name="TextBox 16"/>
-          <p:cNvSpPr txBox="1"/>
-          <p:nvPr/>
-        </p:nvSpPr>
-        <p:spPr>
-          <a:xfrm>
-            <a:off x="10241280" y="2395728"/>
-            <a:ext cx="1463040" cy="274320"/>
-          </a:xfrm>
-          <a:prstGeom prst="rect">
-            <a:avLst/>
-          </a:prstGeom>
-          <a:noFill/>
-        </p:spPr>
-        <p:txBody>
-          <a:bodyPr wrap="square" anchor="t">
-            <a:spAutoFit/>
-          </a:bodyPr>
-          <a:lstStyle/>
-          <a:p>
-            <a:pPr algn="l">
-              <a:spcAft>
-                <a:spcPts val="400"/>
-              </a:spcAft>
-            </a:pPr>
-            <a:r>
-              <a:rPr sz="1000" b="0">
-                <a:solidFill>
-                  <a:srgbClr val="64748B"/>
-                </a:solidFill>
-                <a:latin typeface="PingFang TC"/>
-                <a:ea typeface="PingFang TC"/>
-              </a:rPr>
-              <a:t>非同步複寫</a:t>
-            </a:r>
-          </a:p>
-        </p:txBody>
-      </p:sp>
-      <p:sp>
-        <p:nvSpPr>
-          <p:cNvPr id="18" name="TextBox 17"/>
-          <p:cNvSpPr txBox="1"/>
-          <p:nvPr/>
-        </p:nvSpPr>
-        <p:spPr>
-          <a:xfrm>
-            <a:off x="548640" y="5029200"/>
-            <a:ext cx="11247120" cy="1554480"/>
+            <a:off x="640080" y="1737360"/>
+            <a:ext cx="10789920" cy="4572000"/>
           </a:xfrm>
           <a:prstGeom prst="rect">
             <a:avLst/>
@@ -7065,52 +7129,120 @@
           <a:p>
             <a:pPr>
               <a:spcAft>
-                <a:spcPts val="600"/>
-              </a:spcAft>
-            </a:pPr>
-            <a:r>
-              <a:rPr sz="1300" b="0">
+                <a:spcPts val="900"/>
+              </a:spcAft>
+            </a:pPr>
+            <a:r>
+              <a:rPr sz="1500" b="0">
                 <a:solidFill>
                   <a:srgbClr val="0F172A"/>
                 </a:solidFill>
                 <a:latin typeface="PingFang TC"/>
                 <a:ea typeface="PingFang TC"/>
               </a:rPr>
-              <a:t>•  寫走 primary、讀走 replica（load-balanced）；讀不夠就加 replica 水平擴讀</a:t>
+              <a:t>•  App server stateless → 增加 instance 水平擴展（cache 外置 Redis）</a:t>
             </a:r>
           </a:p>
           <a:p>
             <a:pPr>
               <a:spcAft>
-                <a:spcPts val="600"/>
-              </a:spcAft>
-            </a:pPr>
-            <a:r>
-              <a:rPr sz="1300" b="0">
+                <a:spcPts val="900"/>
+              </a:spcAft>
+            </a:pPr>
+            <a:r>
+              <a:rPr sz="1500" b="0">
                 <a:solidFill>
                   <a:srgbClr val="0F172A"/>
                 </a:solidFill>
                 <a:latin typeface="PingFang TC"/>
                 <a:ea typeface="PingFang TC"/>
               </a:rPr>
-              <a:t>•  配合 Redis cache，真正打到 DB 的讀已先被擋掉一大半</a:t>
+              <a:t>•  DB：單 primary + 多 read replica（讀走副）+ primary 掛 failover 升主</a:t>
+            </a:r>
+          </a:p>
+          <a:p>
+            <a:pPr lvl="1">
+              <a:spcAft>
+                <a:spcPts val="900"/>
+              </a:spcAft>
+            </a:pPr>
+            <a:r>
+              <a:rPr sz="1400" b="0">
+                <a:solidFill>
+                  <a:srgbClr val="64748B"/>
+                </a:solidFill>
+                <a:latin typeface="PingFang TC"/>
+                <a:ea typeface="PingFang TC"/>
+              </a:rPr>
+              <a:t>–  複寫延遲：create 後暖 cache 緩解</a:t>
             </a:r>
           </a:p>
           <a:p>
             <a:pPr>
               <a:spcAft>
-                <a:spcPts val="600"/>
-              </a:spcAft>
-            </a:pPr>
-            <a:r>
-              <a:rPr sz="1300" b="0">
+                <a:spcPts val="900"/>
+              </a:spcAft>
+            </a:pPr>
+            <a:r>
+              <a:rPr sz="1500" b="0">
                 <a:solidFill>
                   <a:srgbClr val="0F172A"/>
                 </a:solidFill>
                 <a:latin typeface="PingFang TC"/>
                 <a:ea typeface="PingFang TC"/>
               </a:rPr>
-              <a:t>•  failover：primary 掛 → 升一台 read replica 為新 primary；複寫延遲靠 create 後暖 cache 緩解</a:t>
+              <a:t>•  分片：以 token hash 為鍵（均勻），列為未來選項（200GB 目前單機足夠）</a:t>
+            </a:r>
+          </a:p>
+          <a:p>
+            <a:pPr>
+              <a:spcAft>
+                <a:spcPts val="900"/>
+              </a:spcAft>
+            </a:pPr>
+            <a:r>
+              <a:rPr sz="1500" b="0">
+                <a:solidFill>
+                  <a:srgbClr val="0F172A"/>
+                </a:solidFill>
+                <a:latin typeface="PingFang TC"/>
+                <a:ea typeface="PingFang TC"/>
+              </a:rPr>
+              <a:t>•  QR 圖片：object store + CDN（靜態內容，目標 URL 改不需重生圖）</a:t>
+            </a:r>
+          </a:p>
+          <a:p>
+            <a:pPr>
+              <a:spcAft>
+                <a:spcPts val="900"/>
+              </a:spcAft>
+            </a:pPr>
+            <a:r>
+              <a:rPr sz="1500" b="0">
+                <a:solidFill>
+                  <a:srgbClr val="0F172A"/>
+                </a:solidFill>
+                <a:latin typeface="PingFang TC"/>
+                <a:ea typeface="PingFang TC"/>
+              </a:rPr>
+              <a:t>•  分析：佇列 → 獨立分析庫 + 預聚合每日計數表</a:t>
+            </a:r>
+          </a:p>
+          <a:p>
+            <a:pPr>
+              <a:spcAft>
+                <a:spcPts val="900"/>
+              </a:spcAft>
+            </a:pPr>
+            <a:r>
+              <a:rPr sz="1500" b="0">
+                <a:solidFill>
+                  <a:srgbClr val="0F172A"/>
+                </a:solidFill>
+                <a:latin typeface="PingFang TC"/>
+                <a:ea typeface="PingFang TC"/>
+              </a:rPr>
+              <a:t>•  清理 cron：清過期 / 通知後刪長期未點擊 / 物理清理超期軟刪 + invalidate cache</a:t>
             </a:r>
           </a:p>
         </p:txBody>
@@ -7212,7 +7344,7 @@
                 <a:latin typeface="PingFang TC"/>
                 <a:ea typeface="PingFang TC"/>
               </a:rPr>
-              <a:t>12 · IMPROVEMENTS</a:t>
+              <a:t>11b · READ REPLICA</a:t>
             </a:r>
           </a:p>
           <a:p>
@@ -7229,21 +7361,146 @@
                 <a:latin typeface="PingFang TC"/>
                 <a:ea typeface="PingFang TC"/>
               </a:rPr>
-              <a:t>對參考 repo 的關鍵改良</a:t>
-            </a:r>
-          </a:p>
-        </p:txBody>
-      </p:sp>
-      <p:sp>
-        <p:nvSpPr>
-          <p:cNvPr id="4" name="Rounded Rectangle 3"/>
+              <a:t>Read-heavy → 讀寫分離 + Read Replica</a:t>
+            </a:r>
+          </a:p>
+        </p:txBody>
+      </p:sp>
+      <p:sp>
+        <p:nvSpPr>
+          <p:cNvPr id="4" name="TextBox 3"/>
+          <p:cNvSpPr txBox="1"/>
+          <p:nvPr/>
+        </p:nvSpPr>
+        <p:spPr>
+          <a:xfrm>
+            <a:off x="548640" y="1645920"/>
+            <a:ext cx="5486400" cy="2926080"/>
+          </a:xfrm>
+          <a:prstGeom prst="rect">
+            <a:avLst/>
+          </a:prstGeom>
+          <a:noFill/>
+        </p:spPr>
+        <p:txBody>
+          <a:bodyPr wrap="square" anchor="t">
+            <a:spAutoFit/>
+          </a:bodyPr>
+          <a:lstStyle/>
+          <a:p>
+            <a:pPr algn="l">
+              <a:spcAft>
+                <a:spcPts val="800"/>
+              </a:spcAft>
+            </a:pPr>
+            <a:r>
+              <a:rPr sz="1500" b="0">
+                <a:solidFill>
+                  <a:srgbClr val="0F172A"/>
+                </a:solidFill>
+                <a:latin typeface="PingFang TC"/>
+                <a:ea typeface="PingFang TC"/>
+              </a:rPr>
+              <a:t>容量：1B × 200B = 200GB（單機放得下）</a:t>
+            </a:r>
+          </a:p>
+          <a:p>
+            <a:pPr algn="l">
+              <a:spcAft>
+                <a:spcPts val="400"/>
+              </a:spcAft>
+            </a:pPr>
+            <a:r>
+              <a:rPr sz="1500" b="0">
+                <a:solidFill>
+                  <a:srgbClr val="0F172A"/>
+                </a:solidFill>
+                <a:latin typeface="PingFang TC"/>
+                <a:ea typeface="PingFang TC"/>
+              </a:rPr>
+              <a:t>讀流量：1 億 users × 5/日 = 5 億 redirects/日</a:t>
+            </a:r>
+          </a:p>
+          <a:p>
+            <a:pPr algn="l">
+              <a:spcAft>
+                <a:spcPts val="800"/>
+              </a:spcAft>
+            </a:pPr>
+            <a:r>
+              <a:rPr sz="1600" b="1">
+                <a:solidFill>
+                  <a:srgbClr val="2563EB"/>
+                </a:solidFill>
+                <a:latin typeface="PingFang TC"/>
+                <a:ea typeface="PingFang TC"/>
+              </a:rPr>
+              <a:t>            5 億 ÷ 86,400s ≈ 5,787 redirects/秒</a:t>
+            </a:r>
+          </a:p>
+          <a:p>
+            <a:pPr algn="l">
+              <a:spcAft>
+                <a:spcPts val="1200"/>
+              </a:spcAft>
+            </a:pPr>
+            <a:r>
+              <a:rPr sz="1500" b="0">
+                <a:solidFill>
+                  <a:srgbClr val="0F172A"/>
+                </a:solidFill>
+                <a:latin typeface="PingFang TC"/>
+                <a:ea typeface="PingFang TC"/>
+              </a:rPr>
+              <a:t>讀寫比：≈ 100:1（讀 ≫ 寫）</a:t>
+            </a:r>
+          </a:p>
+          <a:p>
+            <a:pPr algn="l">
+              <a:spcAft>
+                <a:spcPts val="400"/>
+              </a:spcAft>
+            </a:pPr>
+            <a:r>
+              <a:rPr sz="1500" b="1">
+                <a:solidFill>
+                  <a:srgbClr val="0F172A"/>
+                </a:solidFill>
+                <a:latin typeface="PingFang TC"/>
+                <a:ea typeface="PingFang TC"/>
+              </a:rPr>
+              <a:t>→ 瓶頸是「讀吞吐」、不是容量</a:t>
+            </a:r>
+          </a:p>
+          <a:p>
+            <a:pPr algn="l">
+              <a:spcAft>
+                <a:spcPts val="400"/>
+              </a:spcAft>
+            </a:pPr>
+            <a:r>
+              <a:rPr sz="1600" b="1">
+                <a:solidFill>
+                  <a:srgbClr val="059669"/>
+                </a:solidFill>
+                <a:latin typeface="PingFang TC"/>
+                <a:ea typeface="PingFang TC"/>
+              </a:rPr>
+              <a:t>→ 讀寫分離 + 多個 read replica</a:t>
+            </a:r>
+          </a:p>
+        </p:txBody>
+      </p:sp>
+      <p:sp>
+        <p:nvSpPr>
+          <p:cNvPr id="5" name="Rounded Rectangle 4"/>
           <p:cNvSpPr/>
           <p:nvPr/>
         </p:nvSpPr>
         <p:spPr>
           <a:xfrm>
-            <a:off x="640080" y="1691640"/>
-            <a:ext cx="640080" cy="731520"/>
+            <a:off x="6126480" y="2286000"/>
+            <a:ext cx="1645920" cy="914400"/>
           </a:xfrm>
           <a:prstGeom prst="roundRect">
             <a:avLst/>
@@ -7278,6 +7535,792 @@
           <a:p>
             <a:pPr algn="ctr"/>
             <a:r>
+              <a:rPr sz="1300" b="1">
+                <a:solidFill>
+                  <a:srgbClr val="FFFFFF"/>
+                </a:solidFill>
+                <a:latin typeface="PingFang TC"/>
+                <a:ea typeface="PingFang TC"/>
+              </a:rPr>
+              <a:t>App</a:t>
+            </a:r>
+          </a:p>
+          <a:p>
+            <a:pPr algn="ctr"/>
+            <a:r>
+              <a:rPr sz="1300" b="0">
+                <a:solidFill>
+                  <a:srgbClr val="FFFFFF"/>
+                </a:solidFill>
+                <a:latin typeface="PingFang TC"/>
+                <a:ea typeface="PingFang TC"/>
+              </a:rPr>
+              <a:t>(stateless)</a:t>
+            </a:r>
+          </a:p>
+        </p:txBody>
+      </p:sp>
+      <p:sp>
+        <p:nvSpPr>
+          <p:cNvPr id="6" name="Rounded Rectangle 5"/>
+          <p:cNvSpPr/>
+          <p:nvPr/>
+        </p:nvSpPr>
+        <p:spPr>
+          <a:xfrm>
+            <a:off x="8595360" y="1737360"/>
+            <a:ext cx="3017520" cy="731520"/>
+          </a:xfrm>
+          <a:prstGeom prst="roundRect">
+            <a:avLst/>
+          </a:prstGeom>
+          <a:solidFill>
+            <a:srgbClr val="059669"/>
+          </a:solidFill>
+          <a:ln>
+            <a:solidFill>
+              <a:srgbClr val="059669"/>
+            </a:solidFill>
+          </a:ln>
+          <a:effectLst/>
+        </p:spPr>
+        <p:style>
+          <a:lnRef idx="1">
+            <a:schemeClr val="accent1"/>
+          </a:lnRef>
+          <a:fillRef idx="3">
+            <a:schemeClr val="accent1"/>
+          </a:fillRef>
+          <a:effectRef idx="2">
+            <a:schemeClr val="accent1"/>
+          </a:effectRef>
+          <a:fontRef idx="minor">
+            <a:schemeClr val="lt1"/>
+          </a:fontRef>
+        </p:style>
+        <p:txBody>
+          <a:bodyPr rtlCol="0" anchor="ctr" wrap="square" tIns="25400" bIns="25400"/>
+          <a:lstStyle/>
+          <a:p>
+            <a:pPr algn="ctr"/>
+            <a:r>
+              <a:rPr sz="1300" b="1">
+                <a:solidFill>
+                  <a:srgbClr val="FFFFFF"/>
+                </a:solidFill>
+                <a:latin typeface="PingFang TC"/>
+                <a:ea typeface="PingFang TC"/>
+              </a:rPr>
+              <a:t>Primary (Write)</a:t>
+            </a:r>
+          </a:p>
+        </p:txBody>
+      </p:sp>
+      <p:sp>
+        <p:nvSpPr>
+          <p:cNvPr id="7" name="Rounded Rectangle 6"/>
+          <p:cNvSpPr/>
+          <p:nvPr/>
+        </p:nvSpPr>
+        <p:spPr>
+          <a:xfrm>
+            <a:off x="8595360" y="2697480"/>
+            <a:ext cx="3017520" cy="594360"/>
+          </a:xfrm>
+          <a:prstGeom prst="roundRect">
+            <a:avLst/>
+          </a:prstGeom>
+          <a:solidFill>
+            <a:srgbClr val="0EA5E9"/>
+          </a:solidFill>
+          <a:ln>
+            <a:solidFill>
+              <a:srgbClr val="0EA5E9"/>
+            </a:solidFill>
+          </a:ln>
+          <a:effectLst/>
+        </p:spPr>
+        <p:style>
+          <a:lnRef idx="1">
+            <a:schemeClr val="accent1"/>
+          </a:lnRef>
+          <a:fillRef idx="3">
+            <a:schemeClr val="accent1"/>
+          </a:fillRef>
+          <a:effectRef idx="2">
+            <a:schemeClr val="accent1"/>
+          </a:effectRef>
+          <a:fontRef idx="minor">
+            <a:schemeClr val="lt1"/>
+          </a:fontRef>
+        </p:style>
+        <p:txBody>
+          <a:bodyPr rtlCol="0" anchor="ctr" wrap="square" tIns="25400" bIns="25400"/>
+          <a:lstStyle/>
+          <a:p>
+            <a:pPr algn="ctr"/>
+            <a:r>
+              <a:rPr sz="1200" b="1">
+                <a:solidFill>
+                  <a:srgbClr val="FFFFFF"/>
+                </a:solidFill>
+                <a:latin typeface="PingFang TC"/>
+                <a:ea typeface="PingFang TC"/>
+              </a:rPr>
+              <a:t>Read Replica 1</a:t>
+            </a:r>
+          </a:p>
+        </p:txBody>
+      </p:sp>
+      <p:sp>
+        <p:nvSpPr>
+          <p:cNvPr id="8" name="Rounded Rectangle 7"/>
+          <p:cNvSpPr/>
+          <p:nvPr/>
+        </p:nvSpPr>
+        <p:spPr>
+          <a:xfrm>
+            <a:off x="8595360" y="3429000"/>
+            <a:ext cx="3017520" cy="594360"/>
+          </a:xfrm>
+          <a:prstGeom prst="roundRect">
+            <a:avLst/>
+          </a:prstGeom>
+          <a:solidFill>
+            <a:srgbClr val="0EA5E9"/>
+          </a:solidFill>
+          <a:ln>
+            <a:solidFill>
+              <a:srgbClr val="0EA5E9"/>
+            </a:solidFill>
+          </a:ln>
+          <a:effectLst/>
+        </p:spPr>
+        <p:style>
+          <a:lnRef idx="1">
+            <a:schemeClr val="accent1"/>
+          </a:lnRef>
+          <a:fillRef idx="3">
+            <a:schemeClr val="accent1"/>
+          </a:fillRef>
+          <a:effectRef idx="2">
+            <a:schemeClr val="accent1"/>
+          </a:effectRef>
+          <a:fontRef idx="minor">
+            <a:schemeClr val="lt1"/>
+          </a:fontRef>
+        </p:style>
+        <p:txBody>
+          <a:bodyPr rtlCol="0" anchor="ctr" wrap="square" tIns="25400" bIns="25400"/>
+          <a:lstStyle/>
+          <a:p>
+            <a:pPr algn="ctr"/>
+            <a:r>
+              <a:rPr sz="1200" b="1">
+                <a:solidFill>
+                  <a:srgbClr val="FFFFFF"/>
+                </a:solidFill>
+                <a:latin typeface="PingFang TC"/>
+                <a:ea typeface="PingFang TC"/>
+              </a:rPr>
+              <a:t>Read Replica 2</a:t>
+            </a:r>
+          </a:p>
+        </p:txBody>
+      </p:sp>
+      <p:sp>
+        <p:nvSpPr>
+          <p:cNvPr id="9" name="Rounded Rectangle 8"/>
+          <p:cNvSpPr/>
+          <p:nvPr/>
+        </p:nvSpPr>
+        <p:spPr>
+          <a:xfrm>
+            <a:off x="8595360" y="4160520"/>
+            <a:ext cx="3017520" cy="594360"/>
+          </a:xfrm>
+          <a:prstGeom prst="roundRect">
+            <a:avLst/>
+          </a:prstGeom>
+          <a:solidFill>
+            <a:srgbClr val="0EA5E9"/>
+          </a:solidFill>
+          <a:ln>
+            <a:solidFill>
+              <a:srgbClr val="0EA5E9"/>
+            </a:solidFill>
+          </a:ln>
+          <a:effectLst/>
+        </p:spPr>
+        <p:style>
+          <a:lnRef idx="1">
+            <a:schemeClr val="accent1"/>
+          </a:lnRef>
+          <a:fillRef idx="3">
+            <a:schemeClr val="accent1"/>
+          </a:fillRef>
+          <a:effectRef idx="2">
+            <a:schemeClr val="accent1"/>
+          </a:effectRef>
+          <a:fontRef idx="minor">
+            <a:schemeClr val="lt1"/>
+          </a:fontRef>
+        </p:style>
+        <p:txBody>
+          <a:bodyPr rtlCol="0" anchor="ctr" wrap="square" tIns="25400" bIns="25400"/>
+          <a:lstStyle/>
+          <a:p>
+            <a:pPr algn="ctr"/>
+            <a:r>
+              <a:rPr sz="1200" b="1">
+                <a:solidFill>
+                  <a:srgbClr val="FFFFFF"/>
+                </a:solidFill>
+                <a:latin typeface="PingFang TC"/>
+                <a:ea typeface="PingFang TC"/>
+              </a:rPr>
+              <a:t>Read Replica N</a:t>
+            </a:r>
+          </a:p>
+        </p:txBody>
+      </p:sp>
+      <p:cxnSp>
+        <p:nvCxnSpPr>
+          <p:cNvPr id="10" name="Connector 9"/>
+          <p:cNvCxnSpPr/>
+          <p:nvPr/>
+        </p:nvCxnSpPr>
+        <p:spPr>
+          <a:xfrm flipV="1">
+            <a:off x="7772400" y="2103120"/>
+            <a:ext cx="822960" cy="457200"/>
+          </a:xfrm>
+          <a:prstGeom prst="line">
+            <a:avLst/>
+          </a:prstGeom>
+          <a:ln w="20320">
+            <a:solidFill>
+              <a:srgbClr val="DC2626"/>
+            </a:solidFill>
+            <a:tailEnd type="triangle" w="med" len="med"/>
+          </a:ln>
+        </p:spPr>
+        <p:style>
+          <a:lnRef idx="2">
+            <a:schemeClr val="accent1"/>
+          </a:lnRef>
+          <a:fillRef idx="0">
+            <a:schemeClr val="accent1"/>
+          </a:fillRef>
+          <a:effectRef idx="1">
+            <a:schemeClr val="accent1"/>
+          </a:effectRef>
+          <a:fontRef idx="minor">
+            <a:schemeClr val="tx1"/>
+          </a:fontRef>
+        </p:style>
+      </p:cxnSp>
+      <p:cxnSp>
+        <p:nvCxnSpPr>
+          <p:cNvPr id="11" name="Connector 10"/>
+          <p:cNvCxnSpPr/>
+          <p:nvPr/>
+        </p:nvCxnSpPr>
+        <p:spPr>
+          <a:xfrm>
+            <a:off x="7772400" y="2880360"/>
+            <a:ext cx="822960" cy="109728"/>
+          </a:xfrm>
+          <a:prstGeom prst="line">
+            <a:avLst/>
+          </a:prstGeom>
+          <a:ln w="17780">
+            <a:solidFill>
+              <a:srgbClr val="059669"/>
+            </a:solidFill>
+            <a:tailEnd type="triangle" w="med" len="med"/>
+          </a:ln>
+        </p:spPr>
+        <p:style>
+          <a:lnRef idx="2">
+            <a:schemeClr val="accent1"/>
+          </a:lnRef>
+          <a:fillRef idx="0">
+            <a:schemeClr val="accent1"/>
+          </a:fillRef>
+          <a:effectRef idx="1">
+            <a:schemeClr val="accent1"/>
+          </a:effectRef>
+          <a:fontRef idx="minor">
+            <a:schemeClr val="tx1"/>
+          </a:fontRef>
+        </p:style>
+      </p:cxnSp>
+      <p:cxnSp>
+        <p:nvCxnSpPr>
+          <p:cNvPr id="12" name="Connector 11"/>
+          <p:cNvCxnSpPr/>
+          <p:nvPr/>
+        </p:nvCxnSpPr>
+        <p:spPr>
+          <a:xfrm>
+            <a:off x="7772400" y="3017520"/>
+            <a:ext cx="822960" cy="704088"/>
+          </a:xfrm>
+          <a:prstGeom prst="line">
+            <a:avLst/>
+          </a:prstGeom>
+          <a:ln w="17780">
+            <a:solidFill>
+              <a:srgbClr val="059669"/>
+            </a:solidFill>
+            <a:tailEnd type="triangle" w="med" len="med"/>
+          </a:ln>
+        </p:spPr>
+        <p:style>
+          <a:lnRef idx="2">
+            <a:schemeClr val="accent1"/>
+          </a:lnRef>
+          <a:fillRef idx="0">
+            <a:schemeClr val="accent1"/>
+          </a:fillRef>
+          <a:effectRef idx="1">
+            <a:schemeClr val="accent1"/>
+          </a:effectRef>
+          <a:fontRef idx="minor">
+            <a:schemeClr val="tx1"/>
+          </a:fontRef>
+        </p:style>
+      </p:cxnSp>
+      <p:cxnSp>
+        <p:nvCxnSpPr>
+          <p:cNvPr id="13" name="Connector 12"/>
+          <p:cNvCxnSpPr/>
+          <p:nvPr/>
+        </p:nvCxnSpPr>
+        <p:spPr>
+          <a:xfrm>
+            <a:off x="7772400" y="3108960"/>
+            <a:ext cx="822960" cy="1344168"/>
+          </a:xfrm>
+          <a:prstGeom prst="line">
+            <a:avLst/>
+          </a:prstGeom>
+          <a:ln w="17780">
+            <a:solidFill>
+              <a:srgbClr val="059669"/>
+            </a:solidFill>
+            <a:tailEnd type="triangle" w="med" len="med"/>
+          </a:ln>
+        </p:spPr>
+        <p:style>
+          <a:lnRef idx="2">
+            <a:schemeClr val="accent1"/>
+          </a:lnRef>
+          <a:fillRef idx="0">
+            <a:schemeClr val="accent1"/>
+          </a:fillRef>
+          <a:effectRef idx="1">
+            <a:schemeClr val="accent1"/>
+          </a:effectRef>
+          <a:fontRef idx="minor">
+            <a:schemeClr val="tx1"/>
+          </a:fontRef>
+        </p:style>
+      </p:cxnSp>
+      <p:sp>
+        <p:nvSpPr>
+          <p:cNvPr id="14" name="TextBox 13"/>
+          <p:cNvSpPr txBox="1"/>
+          <p:nvPr/>
+        </p:nvSpPr>
+        <p:spPr>
+          <a:xfrm>
+            <a:off x="7635240" y="2057400"/>
+            <a:ext cx="914400" cy="274320"/>
+          </a:xfrm>
+          <a:prstGeom prst="rect">
+            <a:avLst/>
+          </a:prstGeom>
+          <a:noFill/>
+        </p:spPr>
+        <p:txBody>
+          <a:bodyPr wrap="square" anchor="t">
+            <a:spAutoFit/>
+          </a:bodyPr>
+          <a:lstStyle/>
+          <a:p>
+            <a:pPr algn="l">
+              <a:spcAft>
+                <a:spcPts val="400"/>
+              </a:spcAft>
+            </a:pPr>
+            <a:r>
+              <a:rPr sz="1200" b="1">
+                <a:solidFill>
+                  <a:srgbClr val="DC2626"/>
+                </a:solidFill>
+                <a:latin typeface="PingFang TC"/>
+                <a:ea typeface="PingFang TC"/>
+              </a:rPr>
+              <a:t>寫</a:t>
+            </a:r>
+          </a:p>
+        </p:txBody>
+      </p:sp>
+      <p:sp>
+        <p:nvSpPr>
+          <p:cNvPr id="15" name="TextBox 14"/>
+          <p:cNvSpPr txBox="1"/>
+          <p:nvPr/>
+        </p:nvSpPr>
+        <p:spPr>
+          <a:xfrm>
+            <a:off x="7589520" y="3200400"/>
+            <a:ext cx="914400" cy="274320"/>
+          </a:xfrm>
+          <a:prstGeom prst="rect">
+            <a:avLst/>
+          </a:prstGeom>
+          <a:noFill/>
+        </p:spPr>
+        <p:txBody>
+          <a:bodyPr wrap="square" anchor="t">
+            <a:spAutoFit/>
+          </a:bodyPr>
+          <a:lstStyle/>
+          <a:p>
+            <a:pPr algn="l">
+              <a:spcAft>
+                <a:spcPts val="400"/>
+              </a:spcAft>
+            </a:pPr>
+            <a:r>
+              <a:rPr sz="1200" b="1">
+                <a:solidFill>
+                  <a:srgbClr val="059669"/>
+                </a:solidFill>
+                <a:latin typeface="PingFang TC"/>
+                <a:ea typeface="PingFang TC"/>
+              </a:rPr>
+              <a:t>讀</a:t>
+            </a:r>
+          </a:p>
+        </p:txBody>
+      </p:sp>
+      <p:cxnSp>
+        <p:nvCxnSpPr>
+          <p:cNvPr id="16" name="Connector 15"/>
+          <p:cNvCxnSpPr/>
+          <p:nvPr/>
+        </p:nvCxnSpPr>
+        <p:spPr>
+          <a:xfrm>
+            <a:off x="10104120" y="2468880"/>
+            <a:ext cx="0" cy="228600"/>
+          </a:xfrm>
+          <a:prstGeom prst="line">
+            <a:avLst/>
+          </a:prstGeom>
+          <a:ln w="13970">
+            <a:solidFill>
+              <a:srgbClr val="64748B"/>
+            </a:solidFill>
+            <a:tailEnd type="triangle" w="med" len="med"/>
+          </a:ln>
+        </p:spPr>
+        <p:style>
+          <a:lnRef idx="2">
+            <a:schemeClr val="accent1"/>
+          </a:lnRef>
+          <a:fillRef idx="0">
+            <a:schemeClr val="accent1"/>
+          </a:fillRef>
+          <a:effectRef idx="1">
+            <a:schemeClr val="accent1"/>
+          </a:effectRef>
+          <a:fontRef idx="minor">
+            <a:schemeClr val="tx1"/>
+          </a:fontRef>
+        </p:style>
+      </p:cxnSp>
+      <p:sp>
+        <p:nvSpPr>
+          <p:cNvPr id="17" name="TextBox 16"/>
+          <p:cNvSpPr txBox="1"/>
+          <p:nvPr/>
+        </p:nvSpPr>
+        <p:spPr>
+          <a:xfrm>
+            <a:off x="10241280" y="2395728"/>
+            <a:ext cx="1463040" cy="274320"/>
+          </a:xfrm>
+          <a:prstGeom prst="rect">
+            <a:avLst/>
+          </a:prstGeom>
+          <a:noFill/>
+        </p:spPr>
+        <p:txBody>
+          <a:bodyPr wrap="square" anchor="t">
+            <a:spAutoFit/>
+          </a:bodyPr>
+          <a:lstStyle/>
+          <a:p>
+            <a:pPr algn="l">
+              <a:spcAft>
+                <a:spcPts val="400"/>
+              </a:spcAft>
+            </a:pPr>
+            <a:r>
+              <a:rPr sz="1000" b="0">
+                <a:solidFill>
+                  <a:srgbClr val="64748B"/>
+                </a:solidFill>
+                <a:latin typeface="PingFang TC"/>
+                <a:ea typeface="PingFang TC"/>
+              </a:rPr>
+              <a:t>非同步複寫</a:t>
+            </a:r>
+          </a:p>
+        </p:txBody>
+      </p:sp>
+      <p:sp>
+        <p:nvSpPr>
+          <p:cNvPr id="18" name="TextBox 17"/>
+          <p:cNvSpPr txBox="1"/>
+          <p:nvPr/>
+        </p:nvSpPr>
+        <p:spPr>
+          <a:xfrm>
+            <a:off x="548640" y="5029200"/>
+            <a:ext cx="11247120" cy="1554480"/>
+          </a:xfrm>
+          <a:prstGeom prst="rect">
+            <a:avLst/>
+          </a:prstGeom>
+          <a:noFill/>
+        </p:spPr>
+        <p:txBody>
+          <a:bodyPr wrap="square">
+            <a:spAutoFit/>
+          </a:bodyPr>
+          <a:lstStyle/>
+          <a:p>
+            <a:pPr>
+              <a:spcAft>
+                <a:spcPts val="600"/>
+              </a:spcAft>
+            </a:pPr>
+            <a:r>
+              <a:rPr sz="1300" b="0">
+                <a:solidFill>
+                  <a:srgbClr val="0F172A"/>
+                </a:solidFill>
+                <a:latin typeface="PingFang TC"/>
+                <a:ea typeface="PingFang TC"/>
+              </a:rPr>
+              <a:t>•  寫走 primary、讀走 replica（load-balanced）；讀不夠就加 replica 水平擴讀</a:t>
+            </a:r>
+          </a:p>
+          <a:p>
+            <a:pPr>
+              <a:spcAft>
+                <a:spcPts val="600"/>
+              </a:spcAft>
+            </a:pPr>
+            <a:r>
+              <a:rPr sz="1300" b="0">
+                <a:solidFill>
+                  <a:srgbClr val="0F172A"/>
+                </a:solidFill>
+                <a:latin typeface="PingFang TC"/>
+                <a:ea typeface="PingFang TC"/>
+              </a:rPr>
+              <a:t>•  配合 Redis cache，真正打到 DB 的讀已先被擋掉一大半</a:t>
+            </a:r>
+          </a:p>
+          <a:p>
+            <a:pPr>
+              <a:spcAft>
+                <a:spcPts val="600"/>
+              </a:spcAft>
+            </a:pPr>
+            <a:r>
+              <a:rPr sz="1300" b="0">
+                <a:solidFill>
+                  <a:srgbClr val="0F172A"/>
+                </a:solidFill>
+                <a:latin typeface="PingFang TC"/>
+                <a:ea typeface="PingFang TC"/>
+              </a:rPr>
+              <a:t>•  failover：primary 掛 → 升一台 read replica 為新 primary；複寫延遲靠 create 後暖 cache 緩解</a:t>
+            </a:r>
+          </a:p>
+        </p:txBody>
+      </p:sp>
+    </p:spTree>
+  </p:cSld>
+  <p:clrMapOvr>
+    <a:masterClrMapping/>
+  </p:clrMapOvr>
+</p:sld>
+</file>
+
+<file path=ppt/slides/slide18.xml><?xml version="1.0" encoding="utf-8"?>
+<p:sld xmlns:a="http://schemas.openxmlformats.org/drawingml/2006/main" xmlns:p="http://schemas.openxmlformats.org/presentationml/2006/main" xmlns:r="http://schemas.openxmlformats.org/officeDocument/2006/relationships">
+  <p:cSld>
+    <p:spTree>
+      <p:nvGrpSpPr>
+        <p:cNvPr id="1" name=""/>
+        <p:cNvGrpSpPr/>
+        <p:nvPr/>
+      </p:nvGrpSpPr>
+      <p:grpSpPr/>
+      <p:sp>
+        <p:nvSpPr>
+          <p:cNvPr id="2" name="Rectangle 1"/>
+          <p:cNvSpPr/>
+          <p:nvPr/>
+        </p:nvSpPr>
+        <p:spPr>
+          <a:xfrm>
+            <a:off x="0" y="0"/>
+            <a:ext cx="164592" cy="6858000"/>
+          </a:xfrm>
+          <a:prstGeom prst="rect">
+            <a:avLst/>
+          </a:prstGeom>
+          <a:solidFill>
+            <a:srgbClr val="2563EB"/>
+          </a:solidFill>
+          <a:ln>
+            <a:noFill/>
+          </a:ln>
+          <a:effectLst/>
+        </p:spPr>
+        <p:style>
+          <a:lnRef idx="1">
+            <a:schemeClr val="accent1"/>
+          </a:lnRef>
+          <a:fillRef idx="3">
+            <a:schemeClr val="accent1"/>
+          </a:fillRef>
+          <a:effectRef idx="2">
+            <a:schemeClr val="accent1"/>
+          </a:effectRef>
+          <a:fontRef idx="minor">
+            <a:schemeClr val="lt1"/>
+          </a:fontRef>
+        </p:style>
+        <p:txBody>
+          <a:bodyPr rtlCol="0" anchor="ctr"/>
+          <a:lstStyle/>
+          <a:p>
+            <a:pPr algn="ctr"/>
+          </a:p>
+        </p:txBody>
+      </p:sp>
+      <p:sp>
+        <p:nvSpPr>
+          <p:cNvPr id="3" name="TextBox 2"/>
+          <p:cNvSpPr txBox="1"/>
+          <p:nvPr/>
+        </p:nvSpPr>
+        <p:spPr>
+          <a:xfrm>
+            <a:off x="502920" y="320040"/>
+            <a:ext cx="10972800" cy="1005840"/>
+          </a:xfrm>
+          <a:prstGeom prst="rect">
+            <a:avLst/>
+          </a:prstGeom>
+          <a:noFill/>
+        </p:spPr>
+        <p:txBody>
+          <a:bodyPr wrap="square" anchor="t">
+            <a:spAutoFit/>
+          </a:bodyPr>
+          <a:lstStyle/>
+          <a:p>
+            <a:pPr algn="l">
+              <a:spcAft>
+                <a:spcPts val="200"/>
+              </a:spcAft>
+            </a:pPr>
+            <a:r>
+              <a:rPr sz="1300" b="1">
+                <a:solidFill>
+                  <a:srgbClr val="2563EB"/>
+                </a:solidFill>
+                <a:latin typeface="PingFang TC"/>
+                <a:ea typeface="PingFang TC"/>
+              </a:rPr>
+              <a:t>12 · IMPROVEMENTS</a:t>
+            </a:r>
+          </a:p>
+          <a:p>
+            <a:pPr algn="l">
+              <a:spcAft>
+                <a:spcPts val="400"/>
+              </a:spcAft>
+            </a:pPr>
+            <a:r>
+              <a:rPr sz="3000" b="1">
+                <a:solidFill>
+                  <a:srgbClr val="0F172A"/>
+                </a:solidFill>
+                <a:latin typeface="PingFang TC"/>
+                <a:ea typeface="PingFang TC"/>
+              </a:rPr>
+              <a:t>對參考 repo 的關鍵改良</a:t>
+            </a:r>
+          </a:p>
+        </p:txBody>
+      </p:sp>
+      <p:sp>
+        <p:nvSpPr>
+          <p:cNvPr id="4" name="Rounded Rectangle 3"/>
+          <p:cNvSpPr/>
+          <p:nvPr/>
+        </p:nvSpPr>
+        <p:spPr>
+          <a:xfrm>
+            <a:off x="640080" y="1691640"/>
+            <a:ext cx="640080" cy="731520"/>
+          </a:xfrm>
+          <a:prstGeom prst="roundRect">
+            <a:avLst/>
+          </a:prstGeom>
+          <a:solidFill>
+            <a:srgbClr val="2563EB"/>
+          </a:solidFill>
+          <a:ln>
+            <a:solidFill>
+              <a:srgbClr val="2563EB"/>
+            </a:solidFill>
+          </a:ln>
+          <a:effectLst/>
+        </p:spPr>
+        <p:style>
+          <a:lnRef idx="1">
+            <a:schemeClr val="accent1"/>
+          </a:lnRef>
+          <a:fillRef idx="3">
+            <a:schemeClr val="accent1"/>
+          </a:fillRef>
+          <a:effectRef idx="2">
+            <a:schemeClr val="accent1"/>
+          </a:effectRef>
+          <a:fontRef idx="minor">
+            <a:schemeClr val="lt1"/>
+          </a:fontRef>
+        </p:style>
+        <p:txBody>
+          <a:bodyPr rtlCol="0" anchor="ctr" wrap="square" tIns="25400" bIns="25400"/>
+          <a:lstStyle/>
+          <a:p>
+            <a:pPr algn="ctr"/>
+            <a:r>
               <a:rPr sz="1800" b="1">
                 <a:solidFill>
                   <a:srgbClr val="FFFFFF"/>
@@ -8037,7 +9080,7 @@
 </p:sld>
 </file>
 
-<file path=ppt/slides/slide18.xml><?xml version="1.0" encoding="utf-8"?>
+<file path=ppt/slides/slide19.xml><?xml version="1.0" encoding="utf-8"?>
 <p:sld xmlns:a="http://schemas.openxmlformats.org/drawingml/2006/main" xmlns:p="http://schemas.openxmlformats.org/presentationml/2006/main" xmlns:r="http://schemas.openxmlformats.org/officeDocument/2006/relationships">
   <p:cSld>
     <p:spTree>
@@ -8969,7 +10012,722 @@
 </p:sld>
 </file>
 
-<file path=ppt/slides/slide19.xml><?xml version="1.0" encoding="utf-8"?>
+<file path=ppt/slides/slide2.xml><?xml version="1.0" encoding="utf-8"?>
+<p:sld xmlns:a="http://schemas.openxmlformats.org/drawingml/2006/main" xmlns:p="http://schemas.openxmlformats.org/presentationml/2006/main" xmlns:r="http://schemas.openxmlformats.org/officeDocument/2006/relationships">
+  <p:cSld>
+    <p:spTree>
+      <p:nvGrpSpPr>
+        <p:cNvPr id="1" name=""/>
+        <p:cNvGrpSpPr/>
+        <p:nvPr/>
+      </p:nvGrpSpPr>
+      <p:grpSpPr/>
+      <p:sp>
+        <p:nvSpPr>
+          <p:cNvPr id="2" name="Rectangle 1"/>
+          <p:cNvSpPr/>
+          <p:nvPr/>
+        </p:nvSpPr>
+        <p:spPr>
+          <a:xfrm>
+            <a:off x="0" y="0"/>
+            <a:ext cx="164592" cy="6858000"/>
+          </a:xfrm>
+          <a:prstGeom prst="rect">
+            <a:avLst/>
+          </a:prstGeom>
+          <a:solidFill>
+            <a:srgbClr val="2563EB"/>
+          </a:solidFill>
+          <a:ln>
+            <a:noFill/>
+          </a:ln>
+          <a:effectLst/>
+        </p:spPr>
+        <p:style>
+          <a:lnRef idx="1">
+            <a:schemeClr val="accent1"/>
+          </a:lnRef>
+          <a:fillRef idx="3">
+            <a:schemeClr val="accent1"/>
+          </a:fillRef>
+          <a:effectRef idx="2">
+            <a:schemeClr val="accent1"/>
+          </a:effectRef>
+          <a:fontRef idx="minor">
+            <a:schemeClr val="lt1"/>
+          </a:fontRef>
+        </p:style>
+        <p:txBody>
+          <a:bodyPr rtlCol="0" anchor="ctr"/>
+          <a:lstStyle/>
+          <a:p>
+            <a:pPr algn="ctr"/>
+          </a:p>
+        </p:txBody>
+      </p:sp>
+      <p:sp>
+        <p:nvSpPr>
+          <p:cNvPr id="3" name="TextBox 2"/>
+          <p:cNvSpPr txBox="1"/>
+          <p:nvPr/>
+        </p:nvSpPr>
+        <p:spPr>
+          <a:xfrm>
+            <a:off x="502920" y="320040"/>
+            <a:ext cx="10972800" cy="1005840"/>
+          </a:xfrm>
+          <a:prstGeom prst="rect">
+            <a:avLst/>
+          </a:prstGeom>
+          <a:noFill/>
+        </p:spPr>
+        <p:txBody>
+          <a:bodyPr wrap="square" anchor="t">
+            <a:spAutoFit/>
+          </a:bodyPr>
+          <a:lstStyle/>
+          <a:p>
+            <a:pPr algn="l">
+              <a:spcAft>
+                <a:spcPts val="200"/>
+              </a:spcAft>
+            </a:pPr>
+            <a:r>
+              <a:rPr sz="1300" b="1">
+                <a:solidFill>
+                  <a:srgbClr val="2563EB"/>
+                </a:solidFill>
+                <a:latin typeface="PingFang TC"/>
+                <a:ea typeface="PingFang TC"/>
+              </a:rPr>
+              <a:t>01 · REQUIREMENTS</a:t>
+            </a:r>
+          </a:p>
+          <a:p>
+            <a:pPr algn="l">
+              <a:spcAft>
+                <a:spcPts val="400"/>
+              </a:spcAft>
+            </a:pPr>
+            <a:r>
+              <a:rPr sz="3000" b="1">
+                <a:solidFill>
+                  <a:srgbClr val="0F172A"/>
+                </a:solidFill>
+                <a:latin typeface="PingFang TC"/>
+                <a:ea typeface="PingFang TC"/>
+              </a:rPr>
+              <a:t>需求與規模</a:t>
+            </a:r>
+          </a:p>
+        </p:txBody>
+      </p:sp>
+      <p:sp>
+        <p:nvSpPr>
+          <p:cNvPr id="4" name="Rounded Rectangle 3"/>
+          <p:cNvSpPr/>
+          <p:nvPr/>
+        </p:nvSpPr>
+        <p:spPr>
+          <a:xfrm>
+            <a:off x="548640" y="1645920"/>
+            <a:ext cx="3566160" cy="548640"/>
+          </a:xfrm>
+          <a:prstGeom prst="roundRect">
+            <a:avLst/>
+          </a:prstGeom>
+          <a:solidFill>
+            <a:srgbClr val="2563EB"/>
+          </a:solidFill>
+          <a:ln>
+            <a:solidFill>
+              <a:srgbClr val="2563EB"/>
+            </a:solidFill>
+          </a:ln>
+          <a:effectLst/>
+        </p:spPr>
+        <p:style>
+          <a:lnRef idx="1">
+            <a:schemeClr val="accent1"/>
+          </a:lnRef>
+          <a:fillRef idx="3">
+            <a:schemeClr val="accent1"/>
+          </a:fillRef>
+          <a:effectRef idx="2">
+            <a:schemeClr val="accent1"/>
+          </a:effectRef>
+          <a:fontRef idx="minor">
+            <a:schemeClr val="lt1"/>
+          </a:fontRef>
+        </p:style>
+        <p:txBody>
+          <a:bodyPr rtlCol="0" anchor="ctr" wrap="square" tIns="25400" bIns="25400"/>
+          <a:lstStyle/>
+          <a:p>
+            <a:pPr algn="ctr"/>
+            <a:r>
+              <a:rPr sz="1600" b="1">
+                <a:solidFill>
+                  <a:srgbClr val="FFFFFF"/>
+                </a:solidFill>
+                <a:latin typeface="PingFang TC"/>
+                <a:ea typeface="PingFang TC"/>
+              </a:rPr>
+              <a:t>功能性 (FR)</a:t>
+            </a:r>
+          </a:p>
+        </p:txBody>
+      </p:sp>
+      <p:sp>
+        <p:nvSpPr>
+          <p:cNvPr id="5" name="Rounded Rectangle 4"/>
+          <p:cNvSpPr/>
+          <p:nvPr/>
+        </p:nvSpPr>
+        <p:spPr>
+          <a:xfrm>
+            <a:off x="548640" y="2286000"/>
+            <a:ext cx="3566160" cy="4023360"/>
+          </a:xfrm>
+          <a:prstGeom prst="roundRect">
+            <a:avLst/>
+          </a:prstGeom>
+          <a:solidFill>
+            <a:srgbClr val="F1F5F9"/>
+          </a:solidFill>
+          <a:ln>
+            <a:solidFill>
+              <a:srgbClr val="F1F5F9"/>
+            </a:solidFill>
+          </a:ln>
+          <a:effectLst/>
+        </p:spPr>
+        <p:style>
+          <a:lnRef idx="1">
+            <a:schemeClr val="accent1"/>
+          </a:lnRef>
+          <a:fillRef idx="3">
+            <a:schemeClr val="accent1"/>
+          </a:fillRef>
+          <a:effectRef idx="2">
+            <a:schemeClr val="accent1"/>
+          </a:effectRef>
+          <a:fontRef idx="minor">
+            <a:schemeClr val="lt1"/>
+          </a:fontRef>
+        </p:style>
+        <p:txBody>
+          <a:bodyPr rtlCol="0" anchor="ctr"/>
+          <a:lstStyle/>
+          <a:p>
+            <a:pPr algn="ctr"/>
+          </a:p>
+        </p:txBody>
+      </p:sp>
+      <p:sp>
+        <p:nvSpPr>
+          <p:cNvPr id="6" name="TextBox 5"/>
+          <p:cNvSpPr txBox="1"/>
+          <p:nvPr/>
+        </p:nvSpPr>
+        <p:spPr>
+          <a:xfrm>
+            <a:off x="731520" y="2468880"/>
+            <a:ext cx="3200400" cy="3657600"/>
+          </a:xfrm>
+          <a:prstGeom prst="rect">
+            <a:avLst/>
+          </a:prstGeom>
+          <a:noFill/>
+        </p:spPr>
+        <p:txBody>
+          <a:bodyPr wrap="square">
+            <a:spAutoFit/>
+          </a:bodyPr>
+          <a:lstStyle/>
+          <a:p>
+            <a:pPr>
+              <a:spcAft>
+                <a:spcPts val="1000"/>
+              </a:spcAft>
+            </a:pPr>
+            <a:r>
+              <a:rPr sz="1400" b="0">
+                <a:solidFill>
+                  <a:srgbClr val="0F172A"/>
+                </a:solidFill>
+                <a:latin typeface="PingFang TC"/>
+                <a:ea typeface="PingFang TC"/>
+              </a:rPr>
+              <a:t>•  提交 URL → 回 token + QR 圖</a:t>
+            </a:r>
+          </a:p>
+          <a:p>
+            <a:pPr>
+              <a:spcAft>
+                <a:spcPts val="1000"/>
+              </a:spcAft>
+            </a:pPr>
+            <a:r>
+              <a:rPr sz="1400" b="0">
+                <a:solidFill>
+                  <a:srgbClr val="0F172A"/>
+                </a:solidFill>
+                <a:latin typeface="PingFang TC"/>
+                <a:ea typeface="PingFang TC"/>
+              </a:rPr>
+              <a:t>•  掃描短碼 → 302 導向原始 URL</a:t>
+            </a:r>
+          </a:p>
+          <a:p>
+            <a:pPr>
+              <a:spcAft>
+                <a:spcPts val="1000"/>
+              </a:spcAft>
+            </a:pPr>
+            <a:r>
+              <a:rPr sz="1400" b="0">
+                <a:solidFill>
+                  <a:srgbClr val="0F172A"/>
+                </a:solidFill>
+                <a:latin typeface="PingFang TC"/>
+                <a:ea typeface="PingFang TC"/>
+              </a:rPr>
+              <a:t>•  可改目標 URL / 軟刪 / 設過期</a:t>
+            </a:r>
+          </a:p>
+          <a:p>
+            <a:pPr>
+              <a:spcAft>
+                <a:spcPts val="1000"/>
+              </a:spcAft>
+            </a:pPr>
+            <a:r>
+              <a:rPr sz="1400" b="0">
+                <a:solidFill>
+                  <a:srgbClr val="0F172A"/>
+                </a:solidFill>
+                <a:latin typeface="PingFang TC"/>
+                <a:ea typeface="PingFang TC"/>
+              </a:rPr>
+              <a:t>•  掃描分析（總數、每日）</a:t>
+            </a:r>
+          </a:p>
+          <a:p>
+            <a:pPr>
+              <a:spcAft>
+                <a:spcPts val="1000"/>
+              </a:spcAft>
+            </a:pPr>
+            <a:r>
+              <a:rPr sz="1400" b="0">
+                <a:solidFill>
+                  <a:srgbClr val="0F172A"/>
+                </a:solidFill>
+                <a:latin typeface="PingFang TC"/>
+                <a:ea typeface="PingFang TC"/>
+              </a:rPr>
+              <a:t>•  URL 驗證：正規化 + 惡意阻擋</a:t>
+            </a:r>
+          </a:p>
+        </p:txBody>
+      </p:sp>
+      <p:sp>
+        <p:nvSpPr>
+          <p:cNvPr id="7" name="Rounded Rectangle 6"/>
+          <p:cNvSpPr/>
+          <p:nvPr/>
+        </p:nvSpPr>
+        <p:spPr>
+          <a:xfrm>
+            <a:off x="4343400" y="1645920"/>
+            <a:ext cx="3566160" cy="548640"/>
+          </a:xfrm>
+          <a:prstGeom prst="roundRect">
+            <a:avLst/>
+          </a:prstGeom>
+          <a:solidFill>
+            <a:srgbClr val="059669"/>
+          </a:solidFill>
+          <a:ln>
+            <a:solidFill>
+              <a:srgbClr val="059669"/>
+            </a:solidFill>
+          </a:ln>
+          <a:effectLst/>
+        </p:spPr>
+        <p:style>
+          <a:lnRef idx="1">
+            <a:schemeClr val="accent1"/>
+          </a:lnRef>
+          <a:fillRef idx="3">
+            <a:schemeClr val="accent1"/>
+          </a:fillRef>
+          <a:effectRef idx="2">
+            <a:schemeClr val="accent1"/>
+          </a:effectRef>
+          <a:fontRef idx="minor">
+            <a:schemeClr val="lt1"/>
+          </a:fontRef>
+        </p:style>
+        <p:txBody>
+          <a:bodyPr rtlCol="0" anchor="ctr" wrap="square" tIns="25400" bIns="25400"/>
+          <a:lstStyle/>
+          <a:p>
+            <a:pPr algn="ctr"/>
+            <a:r>
+              <a:rPr sz="1600" b="1">
+                <a:solidFill>
+                  <a:srgbClr val="FFFFFF"/>
+                </a:solidFill>
+                <a:latin typeface="PingFang TC"/>
+                <a:ea typeface="PingFang TC"/>
+              </a:rPr>
+              <a:t>非功能性 (NFR)</a:t>
+            </a:r>
+          </a:p>
+        </p:txBody>
+      </p:sp>
+      <p:sp>
+        <p:nvSpPr>
+          <p:cNvPr id="8" name="Rounded Rectangle 7"/>
+          <p:cNvSpPr/>
+          <p:nvPr/>
+        </p:nvSpPr>
+        <p:spPr>
+          <a:xfrm>
+            <a:off x="4343400" y="2286000"/>
+            <a:ext cx="3566160" cy="4023360"/>
+          </a:xfrm>
+          <a:prstGeom prst="roundRect">
+            <a:avLst/>
+          </a:prstGeom>
+          <a:solidFill>
+            <a:srgbClr val="F1F5F9"/>
+          </a:solidFill>
+          <a:ln>
+            <a:solidFill>
+              <a:srgbClr val="F1F5F9"/>
+            </a:solidFill>
+          </a:ln>
+          <a:effectLst/>
+        </p:spPr>
+        <p:style>
+          <a:lnRef idx="1">
+            <a:schemeClr val="accent1"/>
+          </a:lnRef>
+          <a:fillRef idx="3">
+            <a:schemeClr val="accent1"/>
+          </a:fillRef>
+          <a:effectRef idx="2">
+            <a:schemeClr val="accent1"/>
+          </a:effectRef>
+          <a:fontRef idx="minor">
+            <a:schemeClr val="lt1"/>
+          </a:fontRef>
+        </p:style>
+        <p:txBody>
+          <a:bodyPr rtlCol="0" anchor="ctr"/>
+          <a:lstStyle/>
+          <a:p>
+            <a:pPr algn="ctr"/>
+          </a:p>
+        </p:txBody>
+      </p:sp>
+      <p:sp>
+        <p:nvSpPr>
+          <p:cNvPr id="9" name="TextBox 8"/>
+          <p:cNvSpPr txBox="1"/>
+          <p:nvPr/>
+        </p:nvSpPr>
+        <p:spPr>
+          <a:xfrm>
+            <a:off x="4526280" y="2468880"/>
+            <a:ext cx="3200400" cy="3657600"/>
+          </a:xfrm>
+          <a:prstGeom prst="rect">
+            <a:avLst/>
+          </a:prstGeom>
+          <a:noFill/>
+        </p:spPr>
+        <p:txBody>
+          <a:bodyPr wrap="square">
+            <a:spAutoFit/>
+          </a:bodyPr>
+          <a:lstStyle/>
+          <a:p>
+            <a:pPr>
+              <a:spcAft>
+                <a:spcPts val="1000"/>
+              </a:spcAft>
+            </a:pPr>
+            <a:r>
+              <a:rPr sz="1400" b="0">
+                <a:solidFill>
+                  <a:srgbClr val="0F172A"/>
+                </a:solidFill>
+                <a:latin typeface="PingFang TC"/>
+                <a:ea typeface="PingFang TC"/>
+              </a:rPr>
+              <a:t>•  24/7 高可用 (HA)</a:t>
+            </a:r>
+          </a:p>
+          <a:p>
+            <a:pPr>
+              <a:spcAft>
+                <a:spcPts val="1000"/>
+              </a:spcAft>
+            </a:pPr>
+            <a:r>
+              <a:rPr sz="1400" b="0">
+                <a:solidFill>
+                  <a:srgbClr val="0F172A"/>
+                </a:solidFill>
+                <a:latin typeface="PingFang TC"/>
+                <a:ea typeface="PingFang TC"/>
+              </a:rPr>
+              <a:t>•  Redirect 延遲 &lt; 100ms</a:t>
+            </a:r>
+          </a:p>
+          <a:p>
+            <a:pPr>
+              <a:spcAft>
+                <a:spcPts val="1000"/>
+              </a:spcAft>
+            </a:pPr>
+            <a:r>
+              <a:rPr sz="1400" b="0">
+                <a:solidFill>
+                  <a:srgbClr val="0F172A"/>
+                </a:solidFill>
+                <a:latin typeface="PingFang TC"/>
+                <a:ea typeface="PingFang TC"/>
+              </a:rPr>
+              <a:t>•  10 億 QR、1 億用戶</a:t>
+            </a:r>
+          </a:p>
+          <a:p>
+            <a:pPr>
+              <a:spcAft>
+                <a:spcPts val="1000"/>
+              </a:spcAft>
+            </a:pPr>
+            <a:r>
+              <a:rPr sz="1400" b="0">
+                <a:solidFill>
+                  <a:srgbClr val="0F172A"/>
+                </a:solidFill>
+                <a:latin typeface="PingFang TC"/>
+                <a:ea typeface="PingFang TC"/>
+              </a:rPr>
+              <a:t>•  讀多寫少 ≈ 100:1</a:t>
+            </a:r>
+          </a:p>
+        </p:txBody>
+      </p:sp>
+      <p:sp>
+        <p:nvSpPr>
+          <p:cNvPr id="10" name="Rounded Rectangle 9"/>
+          <p:cNvSpPr/>
+          <p:nvPr/>
+        </p:nvSpPr>
+        <p:spPr>
+          <a:xfrm>
+            <a:off x="8138160" y="1645920"/>
+            <a:ext cx="3566160" cy="548640"/>
+          </a:xfrm>
+          <a:prstGeom prst="roundRect">
+            <a:avLst/>
+          </a:prstGeom>
+          <a:solidFill>
+            <a:srgbClr val="D97706"/>
+          </a:solidFill>
+          <a:ln>
+            <a:solidFill>
+              <a:srgbClr val="D97706"/>
+            </a:solidFill>
+          </a:ln>
+          <a:effectLst/>
+        </p:spPr>
+        <p:style>
+          <a:lnRef idx="1">
+            <a:schemeClr val="accent1"/>
+          </a:lnRef>
+          <a:fillRef idx="3">
+            <a:schemeClr val="accent1"/>
+          </a:fillRef>
+          <a:effectRef idx="2">
+            <a:schemeClr val="accent1"/>
+          </a:effectRef>
+          <a:fontRef idx="minor">
+            <a:schemeClr val="lt1"/>
+          </a:fontRef>
+        </p:style>
+        <p:txBody>
+          <a:bodyPr rtlCol="0" anchor="ctr" wrap="square" tIns="25400" bIns="25400"/>
+          <a:lstStyle/>
+          <a:p>
+            <a:pPr algn="ctr"/>
+            <a:r>
+              <a:rPr sz="1600" b="1">
+                <a:solidFill>
+                  <a:srgbClr val="FFFFFF"/>
+                </a:solidFill>
+                <a:latin typeface="PingFang TC"/>
+                <a:ea typeface="PingFang TC"/>
+              </a:rPr>
+              <a:t>容量估算</a:t>
+            </a:r>
+          </a:p>
+        </p:txBody>
+      </p:sp>
+      <p:sp>
+        <p:nvSpPr>
+          <p:cNvPr id="11" name="Rounded Rectangle 10"/>
+          <p:cNvSpPr/>
+          <p:nvPr/>
+        </p:nvSpPr>
+        <p:spPr>
+          <a:xfrm>
+            <a:off x="8138160" y="2286000"/>
+            <a:ext cx="3566160" cy="4023360"/>
+          </a:xfrm>
+          <a:prstGeom prst="roundRect">
+            <a:avLst/>
+          </a:prstGeom>
+          <a:solidFill>
+            <a:srgbClr val="F1F5F9"/>
+          </a:solidFill>
+          <a:ln>
+            <a:solidFill>
+              <a:srgbClr val="F1F5F9"/>
+            </a:solidFill>
+          </a:ln>
+          <a:effectLst/>
+        </p:spPr>
+        <p:style>
+          <a:lnRef idx="1">
+            <a:schemeClr val="accent1"/>
+          </a:lnRef>
+          <a:fillRef idx="3">
+            <a:schemeClr val="accent1"/>
+          </a:fillRef>
+          <a:effectRef idx="2">
+            <a:schemeClr val="accent1"/>
+          </a:effectRef>
+          <a:fontRef idx="minor">
+            <a:schemeClr val="lt1"/>
+          </a:fontRef>
+        </p:style>
+        <p:txBody>
+          <a:bodyPr rtlCol="0" anchor="ctr"/>
+          <a:lstStyle/>
+          <a:p>
+            <a:pPr algn="ctr"/>
+          </a:p>
+        </p:txBody>
+      </p:sp>
+      <p:sp>
+        <p:nvSpPr>
+          <p:cNvPr id="12" name="TextBox 11"/>
+          <p:cNvSpPr txBox="1"/>
+          <p:nvPr/>
+        </p:nvSpPr>
+        <p:spPr>
+          <a:xfrm>
+            <a:off x="8321040" y="2468880"/>
+            <a:ext cx="3200400" cy="3657600"/>
+          </a:xfrm>
+          <a:prstGeom prst="rect">
+            <a:avLst/>
+          </a:prstGeom>
+          <a:noFill/>
+        </p:spPr>
+        <p:txBody>
+          <a:bodyPr wrap="square">
+            <a:spAutoFit/>
+          </a:bodyPr>
+          <a:lstStyle/>
+          <a:p>
+            <a:pPr>
+              <a:spcAft>
+                <a:spcPts val="1000"/>
+              </a:spcAft>
+            </a:pPr>
+            <a:r>
+              <a:rPr sz="1400" b="0">
+                <a:solidFill>
+                  <a:srgbClr val="0F172A"/>
+                </a:solidFill>
+                <a:latin typeface="PingFang TC"/>
+                <a:ea typeface="PingFang TC"/>
+              </a:rPr>
+              <a:t>•  1B × ~200B ≈ 200GB</a:t>
+            </a:r>
+          </a:p>
+          <a:p>
+            <a:pPr>
+              <a:spcAft>
+                <a:spcPts val="1000"/>
+              </a:spcAft>
+            </a:pPr>
+            <a:r>
+              <a:rPr sz="1400" b="0">
+                <a:solidFill>
+                  <a:srgbClr val="0F172A"/>
+                </a:solidFill>
+                <a:latin typeface="PingFang TC"/>
+                <a:ea typeface="PingFang TC"/>
+              </a:rPr>
+              <a:t>•  ≈ 5,800 redirect / 秒</a:t>
+            </a:r>
+          </a:p>
+          <a:p>
+            <a:pPr>
+              <a:spcAft>
+                <a:spcPts val="1000"/>
+              </a:spcAft>
+            </a:pPr>
+            <a:r>
+              <a:rPr sz="1400" b="0">
+                <a:solidFill>
+                  <a:srgbClr val="0F172A"/>
+                </a:solidFill>
+                <a:latin typeface="PingFang TC"/>
+                <a:ea typeface="PingFang TC"/>
+              </a:rPr>
+              <a:t>•  1 億用戶 × 5 次/日</a:t>
+            </a:r>
+          </a:p>
+          <a:p>
+            <a:pPr>
+              <a:spcAft>
+                <a:spcPts val="1000"/>
+              </a:spcAft>
+            </a:pPr>
+            <a:r>
+              <a:rPr sz="1400" b="0">
+                <a:solidFill>
+                  <a:srgbClr val="0F172A"/>
+                </a:solidFill>
+                <a:latin typeface="PingFang TC"/>
+                <a:ea typeface="PingFang TC"/>
+              </a:rPr>
+              <a:t>•  圖片 + redirect 為主流量</a:t>
+            </a:r>
+          </a:p>
+        </p:txBody>
+      </p:sp>
+    </p:spTree>
+  </p:cSld>
+  <p:clrMapOvr>
+    <a:masterClrMapping/>
+  </p:clrMapOvr>
+</p:sld>
+</file>
+
+<file path=ppt/slides/slide20.xml><?xml version="1.0" encoding="utf-8"?>
 <p:sld xmlns:a="http://schemas.openxmlformats.org/drawingml/2006/main" xmlns:p="http://schemas.openxmlformats.org/presentationml/2006/main" xmlns:r="http://schemas.openxmlformats.org/officeDocument/2006/relationships">
   <p:cSld>
     <p:spTree>
@@ -9893,7 +11651,7 @@
 </p:sld>
 </file>
 
-<file path=ppt/slides/slide2.xml><?xml version="1.0" encoding="utf-8"?>
+<file path=ppt/slides/slide21.xml><?xml version="1.0" encoding="utf-8"?>
 <p:sld xmlns:a="http://schemas.openxmlformats.org/drawingml/2006/main" xmlns:p="http://schemas.openxmlformats.org/presentationml/2006/main" xmlns:r="http://schemas.openxmlformats.org/officeDocument/2006/relationships">
   <p:cSld>
     <p:spTree>
@@ -9982,7 +11740,7 @@
                 <a:latin typeface="PingFang TC"/>
                 <a:ea typeface="PingFang TC"/>
               </a:rPr>
-              <a:t>01 · REQUIREMENTS</a:t>
+              <a:t>附錄 · PROD GAP</a:t>
             </a:r>
           </a:p>
           <a:p>
@@ -9999,113 +11757,575 @@
                 <a:latin typeface="PingFang TC"/>
                 <a:ea typeface="PingFang TC"/>
               </a:rPr>
-              <a:t>需求與規模</a:t>
-            </a:r>
-          </a:p>
-        </p:txBody>
-      </p:sp>
-      <p:sp>
-        <p:nvSpPr>
-          <p:cNvPr id="4" name="Rounded Rectangle 3"/>
-          <p:cNvSpPr/>
-          <p:nvPr/>
-        </p:nvSpPr>
-        <p:spPr>
-          <a:xfrm>
-            <a:off x="548640" y="1645920"/>
-            <a:ext cx="3566160" cy="548640"/>
-          </a:xfrm>
-          <a:prstGeom prst="roundRect">
-            <a:avLst/>
-          </a:prstGeom>
-          <a:solidFill>
-            <a:srgbClr val="2563EB"/>
-          </a:solidFill>
-          <a:ln>
-            <a:solidFill>
-              <a:srgbClr val="2563EB"/>
-            </a:solidFill>
-          </a:ln>
-          <a:effectLst/>
-        </p:spPr>
-        <p:style>
-          <a:lnRef idx="1">
-            <a:schemeClr val="accent1"/>
-          </a:lnRef>
-          <a:fillRef idx="3">
-            <a:schemeClr val="accent1"/>
-          </a:fillRef>
-          <a:effectRef idx="2">
-            <a:schemeClr val="accent1"/>
-          </a:effectRef>
-          <a:fontRef idx="minor">
-            <a:schemeClr val="lt1"/>
-          </a:fontRef>
-        </p:style>
-        <p:txBody>
-          <a:bodyPr rtlCol="0" anchor="ctr" wrap="square" tIns="25400" bIns="25400"/>
-          <a:lstStyle/>
-          <a:p>
-            <a:pPr algn="ctr"/>
-            <a:r>
-              <a:rPr sz="1600" b="1">
-                <a:solidFill>
-                  <a:srgbClr val="FFFFFF"/>
-                </a:solidFill>
-                <a:latin typeface="PingFang TC"/>
-                <a:ea typeface="PingFang TC"/>
-              </a:rPr>
-              <a:t>功能性 (FR)</a:t>
-            </a:r>
-          </a:p>
-        </p:txBody>
-      </p:sp>
-      <p:sp>
-        <p:nvSpPr>
-          <p:cNvPr id="5" name="Rounded Rectangle 4"/>
-          <p:cNvSpPr/>
-          <p:nvPr/>
-        </p:nvSpPr>
-        <p:spPr>
-          <a:xfrm>
-            <a:off x="548640" y="2286000"/>
-            <a:ext cx="3566160" cy="4023360"/>
-          </a:xfrm>
-          <a:prstGeom prst="roundRect">
-            <a:avLst/>
-          </a:prstGeom>
-          <a:solidFill>
-            <a:srgbClr val="F1F5F9"/>
-          </a:solidFill>
-          <a:ln>
-            <a:solidFill>
-              <a:srgbClr val="F1F5F9"/>
-            </a:solidFill>
-          </a:ln>
-          <a:effectLst/>
-        </p:spPr>
-        <p:style>
-          <a:lnRef idx="1">
-            <a:schemeClr val="accent1"/>
-          </a:lnRef>
-          <a:fillRef idx="3">
-            <a:schemeClr val="accent1"/>
-          </a:fillRef>
-          <a:effectRef idx="2">
-            <a:schemeClr val="accent1"/>
-          </a:effectRef>
-          <a:fontRef idx="minor">
-            <a:schemeClr val="lt1"/>
-          </a:fontRef>
-        </p:style>
-        <p:txBody>
-          <a:bodyPr rtlCol="0" anchor="ctr"/>
-          <a:lstStyle/>
-          <a:p>
-            <a:pPr algn="ctr"/>
-          </a:p>
-        </p:txBody>
-      </p:sp>
+              <a:t>從 Prototype 到 Production 的落差</a:t>
+            </a:r>
+          </a:p>
+        </p:txBody>
+      </p:sp>
+      <p:sp>
+        <p:nvSpPr>
+          <p:cNvPr id="4" name="TextBox 3"/>
+          <p:cNvSpPr txBox="1"/>
+          <p:nvPr/>
+        </p:nvSpPr>
+        <p:spPr>
+          <a:xfrm>
+            <a:off x="548640" y="1371600"/>
+            <a:ext cx="11155680" cy="457200"/>
+          </a:xfrm>
+          <a:prstGeom prst="rect">
+            <a:avLst/>
+          </a:prstGeom>
+          <a:noFill/>
+        </p:spPr>
+        <p:txBody>
+          <a:bodyPr wrap="square" anchor="t">
+            <a:spAutoFit/>
+          </a:bodyPr>
+          <a:lstStyle/>
+          <a:p>
+            <a:pPr algn="l">
+              <a:spcAft>
+                <a:spcPts val="400"/>
+              </a:spcAft>
+            </a:pPr>
+            <a:r>
+              <a:rPr sz="1300" b="0">
+                <a:solidFill>
+                  <a:srgbClr val="64748B"/>
+                </a:solidFill>
+                <a:latin typeface="PingFang TC"/>
+                <a:ea typeface="PingFang TC"/>
+              </a:rPr>
+              <a:t>動態 QR 把 server 變成 SPOF → caching + CDN + monitoring 不是加分項，是必要代價。</a:t>
+            </a:r>
+          </a:p>
+        </p:txBody>
+      </p:sp>
+      <p:graphicFrame>
+        <p:nvGraphicFramePr>
+          <p:cNvPr id="5" name="Table 4"/>
+          <p:cNvGraphicFramePr>
+            <a:graphicFrameLocks noGrp="1"/>
+          </p:cNvGraphicFramePr>
+          <p:nvPr/>
+        </p:nvGraphicFramePr>
+        <p:xfrm>
+          <a:off x="548640" y="1965960"/>
+          <a:ext cx="11109960" cy="3657600"/>
+        </p:xfrm>
+        <a:graphic>
+          <a:graphicData uri="http://schemas.openxmlformats.org/drawingml/2006/table">
+            <a:tbl>
+              <a:tblPr firstRow="1" bandRow="1">
+                <a:tableStyleId>{5C22544A-7EE6-4342-B048-85BDC9FD1C3A}</a:tableStyleId>
+              </a:tblPr>
+              <a:tblGrid>
+                <a:gridCol w="2926080"/>
+                <a:gridCol w="3840480"/>
+                <a:gridCol w="4343400"/>
+              </a:tblGrid>
+              <a:tr h="522514">
+                <a:tc>
+                  <a:txBody>
+                    <a:bodyPr/>
+                    <a:lstStyle/>
+                    <a:p>
+                      <a:r>
+                        <a:rPr sz="1200" b="1">
+                          <a:solidFill>
+                            <a:srgbClr val="FFFFFF"/>
+                          </a:solidFill>
+                          <a:latin typeface="PingFang TC"/>
+                          <a:ea typeface="PingFang TC"/>
+                        </a:rPr>
+                        <a:t>面向</a:t>
+                      </a:r>
+                    </a:p>
+                  </a:txBody>
+                  <a:tcPr marT="25400" marB="25400" marL="101600" anchor="ctr">
+                    <a:solidFill>
+                      <a:srgbClr val="2563EB"/>
+                    </a:solidFill>
+                  </a:tcPr>
+                </a:tc>
+                <a:tc>
+                  <a:txBody>
+                    <a:bodyPr/>
+                    <a:lstStyle/>
+                    <a:p>
+                      <a:r>
+                        <a:rPr sz="1200" b="1">
+                          <a:solidFill>
+                            <a:srgbClr val="FFFFFF"/>
+                          </a:solidFill>
+                          <a:latin typeface="PingFang TC"/>
+                          <a:ea typeface="PingFang TC"/>
+                        </a:rPr>
+                        <a:t>原型現況</a:t>
+                      </a:r>
+                    </a:p>
+                  </a:txBody>
+                  <a:tcPr marT="25400" marB="25400" marL="101600" anchor="ctr">
+                    <a:solidFill>
+                      <a:srgbClr val="2563EB"/>
+                    </a:solidFill>
+                  </a:tcPr>
+                </a:tc>
+                <a:tc>
+                  <a:txBody>
+                    <a:bodyPr/>
+                    <a:lstStyle/>
+                    <a:p>
+                      <a:r>
+                        <a:rPr sz="1200" b="1">
+                          <a:solidFill>
+                            <a:srgbClr val="FFFFFF"/>
+                          </a:solidFill>
+                          <a:latin typeface="PingFang TC"/>
+                          <a:ea typeface="PingFang TC"/>
+                        </a:rPr>
+                        <a:t>Production 需要</a:t>
+                      </a:r>
+                    </a:p>
+                  </a:txBody>
+                  <a:tcPr marT="25400" marB="25400" marL="101600" anchor="ctr">
+                    <a:solidFill>
+                      <a:srgbClr val="2563EB"/>
+                    </a:solidFill>
+                  </a:tcPr>
+                </a:tc>
+              </a:tr>
+              <a:tr h="522514">
+                <a:tc>
+                  <a:txBody>
+                    <a:bodyPr/>
+                    <a:lstStyle/>
+                    <a:p>
+                      <a:r>
+                        <a:rPr sz="1200" b="1">
+                          <a:solidFill>
+                            <a:srgbClr val="0F172A"/>
+                          </a:solidFill>
+                          <a:latin typeface="PingFang TC"/>
+                          <a:ea typeface="PingFang TC"/>
+                        </a:rPr>
+                        <a:t>Error handling</a:t>
+                      </a:r>
+                    </a:p>
+                  </a:txBody>
+                  <a:tcPr marT="25400" marB="25400" marL="101600" anchor="ctr">
+                    <a:solidFill>
+                      <a:srgbClr val="FFFFFF"/>
+                    </a:solidFill>
+                  </a:tcPr>
+                </a:tc>
+                <a:tc>
+                  <a:txBody>
+                    <a:bodyPr/>
+                    <a:lstStyle/>
+                    <a:p>
+                      <a:r>
+                        <a:rPr sz="1200" b="0">
+                          <a:solidFill>
+                            <a:srgbClr val="0F172A"/>
+                          </a:solidFill>
+                          <a:latin typeface="PingFang TC"/>
+                          <a:ea typeface="PingFang TC"/>
+                        </a:rPr>
+                        <a:t>驗證回 400，未全面</a:t>
+                      </a:r>
+                    </a:p>
+                  </a:txBody>
+                  <a:tcPr marT="25400" marB="25400" marL="101600" anchor="ctr">
+                    <a:solidFill>
+                      <a:srgbClr val="FFFFFF"/>
+                    </a:solidFill>
+                  </a:tcPr>
+                </a:tc>
+                <a:tc>
+                  <a:txBody>
+                    <a:bodyPr/>
+                    <a:lstStyle/>
+                    <a:p>
+                      <a:r>
+                        <a:rPr sz="1200" b="0">
+                          <a:solidFill>
+                            <a:srgbClr val="0F172A"/>
+                          </a:solidFill>
+                          <a:latin typeface="PingFang TC"/>
+                          <a:ea typeface="PingFang TC"/>
+                        </a:rPr>
+                        <a:t>全面驗證 · 結構化錯誤 · 不 crash</a:t>
+                      </a:r>
+                    </a:p>
+                  </a:txBody>
+                  <a:tcPr marT="25400" marB="25400" marL="101600" anchor="ctr">
+                    <a:solidFill>
+                      <a:srgbClr val="FFFFFF"/>
+                    </a:solidFill>
+                  </a:tcPr>
+                </a:tc>
+              </a:tr>
+              <a:tr h="522514">
+                <a:tc>
+                  <a:txBody>
+                    <a:bodyPr/>
+                    <a:lstStyle/>
+                    <a:p>
+                      <a:r>
+                        <a:rPr sz="1200" b="1">
+                          <a:solidFill>
+                            <a:srgbClr val="0F172A"/>
+                          </a:solidFill>
+                          <a:latin typeface="PingFang TC"/>
+                          <a:ea typeface="PingFang TC"/>
+                        </a:rPr>
+                        <a:t>Rate limiting</a:t>
+                      </a:r>
+                    </a:p>
+                  </a:txBody>
+                  <a:tcPr marT="25400" marB="25400" marL="101600" anchor="ctr">
+                    <a:solidFill>
+                      <a:srgbClr val="F1F5F9"/>
+                    </a:solidFill>
+                  </a:tcPr>
+                </a:tc>
+                <a:tc>
+                  <a:txBody>
+                    <a:bodyPr/>
+                    <a:lstStyle/>
+                    <a:p>
+                      <a:r>
+                        <a:rPr sz="1200" b="0">
+                          <a:solidFill>
+                            <a:srgbClr val="0F172A"/>
+                          </a:solidFill>
+                          <a:latin typeface="PingFang TC"/>
+                          <a:ea typeface="PingFang TC"/>
+                        </a:rPr>
+                        <a:t>無</a:t>
+                      </a:r>
+                    </a:p>
+                  </a:txBody>
+                  <a:tcPr marT="25400" marB="25400" marL="101600" anchor="ctr">
+                    <a:solidFill>
+                      <a:srgbClr val="FEE2E2"/>
+                    </a:solidFill>
+                  </a:tcPr>
+                </a:tc>
+                <a:tc>
+                  <a:txBody>
+                    <a:bodyPr/>
+                    <a:lstStyle/>
+                    <a:p>
+                      <a:r>
+                        <a:rPr sz="1200" b="0">
+                          <a:solidFill>
+                            <a:srgbClr val="0F172A"/>
+                          </a:solidFill>
+                          <a:latin typeface="PingFang TC"/>
+                          <a:ea typeface="PingFang TC"/>
+                        </a:rPr>
+                        <a:t>端點限流，防 script 灌爆</a:t>
+                      </a:r>
+                    </a:p>
+                  </a:txBody>
+                  <a:tcPr marT="25400" marB="25400" marL="101600" anchor="ctr">
+                    <a:solidFill>
+                      <a:srgbClr val="F1F5F9"/>
+                    </a:solidFill>
+                  </a:tcPr>
+                </a:tc>
+              </a:tr>
+              <a:tr h="522514">
+                <a:tc>
+                  <a:txBody>
+                    <a:bodyPr/>
+                    <a:lstStyle/>
+                    <a:p>
+                      <a:r>
+                        <a:rPr sz="1200" b="1">
+                          <a:solidFill>
+                            <a:srgbClr val="0F172A"/>
+                          </a:solidFill>
+                          <a:latin typeface="PingFang TC"/>
+                          <a:ea typeface="PingFang TC"/>
+                        </a:rPr>
+                        <a:t>Auth &amp; 多租戶</a:t>
+                      </a:r>
+                    </a:p>
+                  </a:txBody>
+                  <a:tcPr marT="25400" marB="25400" marL="101600" anchor="ctr">
+                    <a:solidFill>
+                      <a:srgbClr val="FFFFFF"/>
+                    </a:solidFill>
+                  </a:tcPr>
+                </a:tc>
+                <a:tc>
+                  <a:txBody>
+                    <a:bodyPr/>
+                    <a:lstStyle/>
+                    <a:p>
+                      <a:r>
+                        <a:rPr sz="1200" b="0">
+                          <a:solidFill>
+                            <a:srgbClr val="0F172A"/>
+                          </a:solidFill>
+                          <a:latin typeface="PingFang TC"/>
+                          <a:ea typeface="PingFang TC"/>
+                        </a:rPr>
+                        <a:t>無 user，資料全域</a:t>
+                      </a:r>
+                    </a:p>
+                  </a:txBody>
+                  <a:tcPr marT="25400" marB="25400" marL="101600" anchor="ctr">
+                    <a:solidFill>
+                      <a:srgbClr val="FFFFFF"/>
+                    </a:solidFill>
+                  </a:tcPr>
+                </a:tc>
+                <a:tc>
+                  <a:txBody>
+                    <a:bodyPr/>
+                    <a:lstStyle/>
+                    <a:p>
+                      <a:r>
+                        <a:rPr sz="1200" b="0">
+                          <a:solidFill>
+                            <a:srgbClr val="0F172A"/>
+                          </a:solidFill>
+                          <a:latin typeface="PingFang TC"/>
+                          <a:ea typeface="PingFang TC"/>
+                        </a:rPr>
+                        <a:t>登入 + user_id 隔離</a:t>
+                      </a:r>
+                    </a:p>
+                  </a:txBody>
+                  <a:tcPr marT="25400" marB="25400" marL="101600" anchor="ctr">
+                    <a:solidFill>
+                      <a:srgbClr val="FFFFFF"/>
+                    </a:solidFill>
+                  </a:tcPr>
+                </a:tc>
+              </a:tr>
+              <a:tr h="522514">
+                <a:tc>
+                  <a:txBody>
+                    <a:bodyPr/>
+                    <a:lstStyle/>
+                    <a:p>
+                      <a:r>
+                        <a:rPr sz="1200" b="1">
+                          <a:solidFill>
+                            <a:srgbClr val="0F172A"/>
+                          </a:solidFill>
+                          <a:latin typeface="PingFang TC"/>
+                          <a:ea typeface="PingFang TC"/>
+                        </a:rPr>
+                        <a:t>Monitoring / Alerting</a:t>
+                      </a:r>
+                    </a:p>
+                  </a:txBody>
+                  <a:tcPr marT="25400" marB="25400" marL="101600" anchor="ctr">
+                    <a:solidFill>
+                      <a:srgbClr val="F1F5F9"/>
+                    </a:solidFill>
+                  </a:tcPr>
+                </a:tc>
+                <a:tc>
+                  <a:txBody>
+                    <a:bodyPr/>
+                    <a:lstStyle/>
+                    <a:p>
+                      <a:r>
+                        <a:rPr sz="1200" b="0">
+                          <a:solidFill>
+                            <a:srgbClr val="0F172A"/>
+                          </a:solidFill>
+                          <a:latin typeface="PingFang TC"/>
+                          <a:ea typeface="PingFang TC"/>
+                        </a:rPr>
+                        <a:t>無</a:t>
+                      </a:r>
+                    </a:p>
+                  </a:txBody>
+                  <a:tcPr marT="25400" marB="25400" marL="101600" anchor="ctr">
+                    <a:solidFill>
+                      <a:srgbClr val="FEE2E2"/>
+                    </a:solidFill>
+                  </a:tcPr>
+                </a:tc>
+                <a:tc>
+                  <a:txBody>
+                    <a:bodyPr/>
+                    <a:lstStyle/>
+                    <a:p>
+                      <a:r>
+                        <a:rPr sz="1200" b="0">
+                          <a:solidFill>
+                            <a:srgbClr val="0F172A"/>
+                          </a:solidFill>
+                          <a:latin typeface="PingFang TC"/>
+                          <a:ea typeface="PingFang TC"/>
+                        </a:rPr>
+                        <a:t>metrics · 日誌 · 掛掉告警</a:t>
+                      </a:r>
+                    </a:p>
+                  </a:txBody>
+                  <a:tcPr marT="25400" marB="25400" marL="101600" anchor="ctr">
+                    <a:solidFill>
+                      <a:srgbClr val="F1F5F9"/>
+                    </a:solidFill>
+                  </a:tcPr>
+                </a:tc>
+              </a:tr>
+              <a:tr h="522514">
+                <a:tc>
+                  <a:txBody>
+                    <a:bodyPr/>
+                    <a:lstStyle/>
+                    <a:p>
+                      <a:r>
+                        <a:rPr sz="1200" b="1">
+                          <a:solidFill>
+                            <a:srgbClr val="0F172A"/>
+                          </a:solidFill>
+                          <a:latin typeface="PingFang TC"/>
+                          <a:ea typeface="PingFang TC"/>
+                        </a:rPr>
+                        <a:t>Data cleanup</a:t>
+                      </a:r>
+                    </a:p>
+                  </a:txBody>
+                  <a:tcPr marT="25400" marB="25400" marL="101600" anchor="ctr">
+                    <a:solidFill>
+                      <a:srgbClr val="FFFFFF"/>
+                    </a:solidFill>
+                  </a:tcPr>
+                </a:tc>
+                <a:tc>
+                  <a:txBody>
+                    <a:bodyPr/>
+                    <a:lstStyle/>
+                    <a:p>
+                      <a:r>
+                        <a:rPr sz="1200" b="0">
+                          <a:solidFill>
+                            <a:srgbClr val="0F172A"/>
+                          </a:solidFill>
+                          <a:latin typeface="PingFang TC"/>
+                          <a:ea typeface="PingFang TC"/>
+                        </a:rPr>
+                        <a:t>設計有 cron，未實作</a:t>
+                      </a:r>
+                    </a:p>
+                  </a:txBody>
+                  <a:tcPr marT="25400" marB="25400" marL="101600" anchor="ctr">
+                    <a:solidFill>
+                      <a:srgbClr val="FFFFFF"/>
+                    </a:solidFill>
+                  </a:tcPr>
+                </a:tc>
+                <a:tc>
+                  <a:txBody>
+                    <a:bodyPr/>
+                    <a:lstStyle/>
+                    <a:p>
+                      <a:r>
+                        <a:rPr sz="1200" b="0">
+                          <a:solidFill>
+                            <a:srgbClr val="0F172A"/>
+                          </a:solidFill>
+                          <a:latin typeface="PingFang TC"/>
+                          <a:ea typeface="PingFang TC"/>
+                        </a:rPr>
+                        <a:t>定期清過期/未點擊，防 DB bloat</a:t>
+                      </a:r>
+                    </a:p>
+                  </a:txBody>
+                  <a:tcPr marT="25400" marB="25400" marL="101600" anchor="ctr">
+                    <a:solidFill>
+                      <a:srgbClr val="FFFFFF"/>
+                    </a:solidFill>
+                  </a:tcPr>
+                </a:tc>
+              </a:tr>
+              <a:tr h="522516">
+                <a:tc>
+                  <a:txBody>
+                    <a:bodyPr/>
+                    <a:lstStyle/>
+                    <a:p>
+                      <a:r>
+                        <a:rPr sz="1200" b="1">
+                          <a:solidFill>
+                            <a:srgbClr val="0F172A"/>
+                          </a:solidFill>
+                          <a:latin typeface="PingFang TC"/>
+                          <a:ea typeface="PingFang TC"/>
+                        </a:rPr>
+                        <a:t>Caching / CDN</a:t>
+                      </a:r>
+                    </a:p>
+                  </a:txBody>
+                  <a:tcPr marT="25400" marB="25400" marL="101600" anchor="ctr">
+                    <a:solidFill>
+                      <a:srgbClr val="F1F5F9"/>
+                    </a:solidFill>
+                  </a:tcPr>
+                </a:tc>
+                <a:tc>
+                  <a:txBody>
+                    <a:bodyPr/>
+                    <a:lstStyle/>
+                    <a:p>
+                      <a:r>
+                        <a:rPr sz="1200" b="0">
+                          <a:solidFill>
+                            <a:srgbClr val="0F172A"/>
+                          </a:solidFill>
+                          <a:latin typeface="PingFang TC"/>
+                          <a:ea typeface="PingFang TC"/>
+                        </a:rPr>
+                        <a:t>記憶體 + 即時生圖</a:t>
+                      </a:r>
+                    </a:p>
+                  </a:txBody>
+                  <a:tcPr marT="25400" marB="25400" marL="101600" anchor="ctr">
+                    <a:solidFill>
+                      <a:srgbClr val="F1F5F9"/>
+                    </a:solidFill>
+                  </a:tcPr>
+                </a:tc>
+                <a:tc>
+                  <a:txBody>
+                    <a:bodyPr/>
+                    <a:lstStyle/>
+                    <a:p>
+                      <a:r>
+                        <a:rPr sz="1200" b="0">
+                          <a:solidFill>
+                            <a:srgbClr val="0F172A"/>
+                          </a:solidFill>
+                          <a:latin typeface="PingFang TC"/>
+                          <a:ea typeface="PingFang TC"/>
+                        </a:rPr>
+                        <a:t>Redis + object store + CDN</a:t>
+                      </a:r>
+                    </a:p>
+                  </a:txBody>
+                  <a:tcPr marT="25400" marB="25400" marL="101600" anchor="ctr">
+                    <a:solidFill>
+                      <a:srgbClr val="F1F5F9"/>
+                    </a:solidFill>
+                  </a:tcPr>
+                </a:tc>
+              </a:tr>
+            </a:tbl>
+          </a:graphicData>
+        </a:graphic>
+      </p:graphicFrame>
       <p:sp>
         <p:nvSpPr>
           <p:cNvPr id="6" name="TextBox 5"/>
@@ -10114,8 +12334,8 @@
         </p:nvSpPr>
         <p:spPr>
           <a:xfrm>
-            <a:off x="731520" y="2468880"/>
-            <a:ext cx="3200400" cy="3657600"/>
+            <a:off x="548640" y="5806440"/>
+            <a:ext cx="11155680" cy="457200"/>
           </a:xfrm>
           <a:prstGeom prst="rect">
             <a:avLst/>
@@ -10123,479 +12343,25 @@
           <a:noFill/>
         </p:spPr>
         <p:txBody>
-          <a:bodyPr wrap="square">
+          <a:bodyPr wrap="square" anchor="t">
             <a:spAutoFit/>
           </a:bodyPr>
           <a:lstStyle/>
           <a:p>
-            <a:pPr>
-              <a:spcAft>
-                <a:spcPts val="1000"/>
-              </a:spcAft>
-            </a:pPr>
-            <a:r>
-              <a:rPr sz="1400" b="0">
-                <a:solidFill>
-                  <a:srgbClr val="0F172A"/>
-                </a:solidFill>
-                <a:latin typeface="PingFang TC"/>
-                <a:ea typeface="PingFang TC"/>
-              </a:rPr>
-              <a:t>•  提交 URL → 回 token + QR 圖</a:t>
-            </a:r>
-          </a:p>
-          <a:p>
-            <a:pPr>
-              <a:spcAft>
-                <a:spcPts val="1000"/>
-              </a:spcAft>
-            </a:pPr>
-            <a:r>
-              <a:rPr sz="1400" b="0">
-                <a:solidFill>
-                  <a:srgbClr val="0F172A"/>
-                </a:solidFill>
-                <a:latin typeface="PingFang TC"/>
-                <a:ea typeface="PingFang TC"/>
-              </a:rPr>
-              <a:t>•  掃描短碼 → 302 導向原始 URL</a:t>
-            </a:r>
-          </a:p>
-          <a:p>
-            <a:pPr>
-              <a:spcAft>
-                <a:spcPts val="1000"/>
-              </a:spcAft>
-            </a:pPr>
-            <a:r>
-              <a:rPr sz="1400" b="0">
-                <a:solidFill>
-                  <a:srgbClr val="0F172A"/>
-                </a:solidFill>
-                <a:latin typeface="PingFang TC"/>
-                <a:ea typeface="PingFang TC"/>
-              </a:rPr>
-              <a:t>•  可改目標 URL / 軟刪 / 設過期</a:t>
-            </a:r>
-          </a:p>
-          <a:p>
-            <a:pPr>
-              <a:spcAft>
-                <a:spcPts val="1000"/>
-              </a:spcAft>
-            </a:pPr>
-            <a:r>
-              <a:rPr sz="1400" b="0">
-                <a:solidFill>
-                  <a:srgbClr val="0F172A"/>
-                </a:solidFill>
-                <a:latin typeface="PingFang TC"/>
-                <a:ea typeface="PingFang TC"/>
-              </a:rPr>
-              <a:t>•  掃描分析（總數、每日）</a:t>
-            </a:r>
-          </a:p>
-          <a:p>
-            <a:pPr>
-              <a:spcAft>
-                <a:spcPts val="1000"/>
-              </a:spcAft>
-            </a:pPr>
-            <a:r>
-              <a:rPr sz="1400" b="0">
-                <a:solidFill>
-                  <a:srgbClr val="0F172A"/>
-                </a:solidFill>
-                <a:latin typeface="PingFang TC"/>
-                <a:ea typeface="PingFang TC"/>
-              </a:rPr>
-              <a:t>•  URL 驗證：正規化 + 惡意阻擋</a:t>
-            </a:r>
-          </a:p>
-        </p:txBody>
-      </p:sp>
-      <p:sp>
-        <p:nvSpPr>
-          <p:cNvPr id="7" name="Rounded Rectangle 6"/>
-          <p:cNvSpPr/>
-          <p:nvPr/>
-        </p:nvSpPr>
-        <p:spPr>
-          <a:xfrm>
-            <a:off x="4343400" y="1645920"/>
-            <a:ext cx="3566160" cy="548640"/>
-          </a:xfrm>
-          <a:prstGeom prst="roundRect">
-            <a:avLst/>
-          </a:prstGeom>
-          <a:solidFill>
-            <a:srgbClr val="059669"/>
-          </a:solidFill>
-          <a:ln>
-            <a:solidFill>
-              <a:srgbClr val="059669"/>
-            </a:solidFill>
-          </a:ln>
-          <a:effectLst/>
-        </p:spPr>
-        <p:style>
-          <a:lnRef idx="1">
-            <a:schemeClr val="accent1"/>
-          </a:lnRef>
-          <a:fillRef idx="3">
-            <a:schemeClr val="accent1"/>
-          </a:fillRef>
-          <a:effectRef idx="2">
-            <a:schemeClr val="accent1"/>
-          </a:effectRef>
-          <a:fontRef idx="minor">
-            <a:schemeClr val="lt1"/>
-          </a:fontRef>
-        </p:style>
-        <p:txBody>
-          <a:bodyPr rtlCol="0" anchor="ctr" wrap="square" tIns="25400" bIns="25400"/>
-          <a:lstStyle/>
-          <a:p>
-            <a:pPr algn="ctr"/>
-            <a:r>
-              <a:rPr sz="1600" b="1">
-                <a:solidFill>
-                  <a:srgbClr val="FFFFFF"/>
-                </a:solidFill>
-                <a:latin typeface="PingFang TC"/>
-                <a:ea typeface="PingFang TC"/>
-              </a:rPr>
-              <a:t>非功能性 (NFR)</a:t>
-            </a:r>
-          </a:p>
-        </p:txBody>
-      </p:sp>
-      <p:sp>
-        <p:nvSpPr>
-          <p:cNvPr id="8" name="Rounded Rectangle 7"/>
-          <p:cNvSpPr/>
-          <p:nvPr/>
-        </p:nvSpPr>
-        <p:spPr>
-          <a:xfrm>
-            <a:off x="4343400" y="2286000"/>
-            <a:ext cx="3566160" cy="4023360"/>
-          </a:xfrm>
-          <a:prstGeom prst="roundRect">
-            <a:avLst/>
-          </a:prstGeom>
-          <a:solidFill>
-            <a:srgbClr val="F1F5F9"/>
-          </a:solidFill>
-          <a:ln>
-            <a:solidFill>
-              <a:srgbClr val="F1F5F9"/>
-            </a:solidFill>
-          </a:ln>
-          <a:effectLst/>
-        </p:spPr>
-        <p:style>
-          <a:lnRef idx="1">
-            <a:schemeClr val="accent1"/>
-          </a:lnRef>
-          <a:fillRef idx="3">
-            <a:schemeClr val="accent1"/>
-          </a:fillRef>
-          <a:effectRef idx="2">
-            <a:schemeClr val="accent1"/>
-          </a:effectRef>
-          <a:fontRef idx="minor">
-            <a:schemeClr val="lt1"/>
-          </a:fontRef>
-        </p:style>
-        <p:txBody>
-          <a:bodyPr rtlCol="0" anchor="ctr"/>
-          <a:lstStyle/>
-          <a:p>
-            <a:pPr algn="ctr"/>
-          </a:p>
-        </p:txBody>
-      </p:sp>
-      <p:sp>
-        <p:nvSpPr>
-          <p:cNvPr id="9" name="TextBox 8"/>
-          <p:cNvSpPr txBox="1"/>
-          <p:nvPr/>
-        </p:nvSpPr>
-        <p:spPr>
-          <a:xfrm>
-            <a:off x="4526280" y="2468880"/>
-            <a:ext cx="3200400" cy="3657600"/>
-          </a:xfrm>
-          <a:prstGeom prst="rect">
-            <a:avLst/>
-          </a:prstGeom>
-          <a:noFill/>
-        </p:spPr>
-        <p:txBody>
-          <a:bodyPr wrap="square">
-            <a:spAutoFit/>
-          </a:bodyPr>
-          <a:lstStyle/>
-          <a:p>
-            <a:pPr>
-              <a:spcAft>
-                <a:spcPts val="1000"/>
-              </a:spcAft>
-            </a:pPr>
-            <a:r>
-              <a:rPr sz="1400" b="0">
-                <a:solidFill>
-                  <a:srgbClr val="0F172A"/>
-                </a:solidFill>
-                <a:latin typeface="PingFang TC"/>
-                <a:ea typeface="PingFang TC"/>
-              </a:rPr>
-              <a:t>•  24/7 高可用 (HA)</a:t>
-            </a:r>
-          </a:p>
-          <a:p>
-            <a:pPr>
-              <a:spcAft>
-                <a:spcPts val="1000"/>
-              </a:spcAft>
-            </a:pPr>
-            <a:r>
-              <a:rPr sz="1400" b="0">
-                <a:solidFill>
-                  <a:srgbClr val="0F172A"/>
-                </a:solidFill>
-                <a:latin typeface="PingFang TC"/>
-                <a:ea typeface="PingFang TC"/>
-              </a:rPr>
-              <a:t>•  Redirect 延遲 &lt; 100ms</a:t>
-            </a:r>
-          </a:p>
-          <a:p>
-            <a:pPr>
-              <a:spcAft>
-                <a:spcPts val="1000"/>
-              </a:spcAft>
-            </a:pPr>
-            <a:r>
-              <a:rPr sz="1400" b="0">
-                <a:solidFill>
-                  <a:srgbClr val="0F172A"/>
-                </a:solidFill>
-                <a:latin typeface="PingFang TC"/>
-                <a:ea typeface="PingFang TC"/>
-              </a:rPr>
-              <a:t>•  10 億 QR、1 億用戶</a:t>
-            </a:r>
-          </a:p>
-          <a:p>
-            <a:pPr>
-              <a:spcAft>
-                <a:spcPts val="1000"/>
-              </a:spcAft>
-            </a:pPr>
-            <a:r>
-              <a:rPr sz="1400" b="0">
-                <a:solidFill>
-                  <a:srgbClr val="0F172A"/>
-                </a:solidFill>
-                <a:latin typeface="PingFang TC"/>
-                <a:ea typeface="PingFang TC"/>
-              </a:rPr>
-              <a:t>•  讀多寫少 ≈ 100:1</a:t>
-            </a:r>
-          </a:p>
-        </p:txBody>
-      </p:sp>
-      <p:sp>
-        <p:nvSpPr>
-          <p:cNvPr id="10" name="Rounded Rectangle 9"/>
-          <p:cNvSpPr/>
-          <p:nvPr/>
-        </p:nvSpPr>
-        <p:spPr>
-          <a:xfrm>
-            <a:off x="8138160" y="1645920"/>
-            <a:ext cx="3566160" cy="548640"/>
-          </a:xfrm>
-          <a:prstGeom prst="roundRect">
-            <a:avLst/>
-          </a:prstGeom>
-          <a:solidFill>
-            <a:srgbClr val="D97706"/>
-          </a:solidFill>
-          <a:ln>
-            <a:solidFill>
-              <a:srgbClr val="D97706"/>
-            </a:solidFill>
-          </a:ln>
-          <a:effectLst/>
-        </p:spPr>
-        <p:style>
-          <a:lnRef idx="1">
-            <a:schemeClr val="accent1"/>
-          </a:lnRef>
-          <a:fillRef idx="3">
-            <a:schemeClr val="accent1"/>
-          </a:fillRef>
-          <a:effectRef idx="2">
-            <a:schemeClr val="accent1"/>
-          </a:effectRef>
-          <a:fontRef idx="minor">
-            <a:schemeClr val="lt1"/>
-          </a:fontRef>
-        </p:style>
-        <p:txBody>
-          <a:bodyPr rtlCol="0" anchor="ctr" wrap="square" tIns="25400" bIns="25400"/>
-          <a:lstStyle/>
-          <a:p>
-            <a:pPr algn="ctr"/>
-            <a:r>
-              <a:rPr sz="1600" b="1">
-                <a:solidFill>
-                  <a:srgbClr val="FFFFFF"/>
-                </a:solidFill>
-                <a:latin typeface="PingFang TC"/>
-                <a:ea typeface="PingFang TC"/>
-              </a:rPr>
-              <a:t>容量估算</a:t>
-            </a:r>
-          </a:p>
-        </p:txBody>
-      </p:sp>
-      <p:sp>
-        <p:nvSpPr>
-          <p:cNvPr id="11" name="Rounded Rectangle 10"/>
-          <p:cNvSpPr/>
-          <p:nvPr/>
-        </p:nvSpPr>
-        <p:spPr>
-          <a:xfrm>
-            <a:off x="8138160" y="2286000"/>
-            <a:ext cx="3566160" cy="4023360"/>
-          </a:xfrm>
-          <a:prstGeom prst="roundRect">
-            <a:avLst/>
-          </a:prstGeom>
-          <a:solidFill>
-            <a:srgbClr val="F1F5F9"/>
-          </a:solidFill>
-          <a:ln>
-            <a:solidFill>
-              <a:srgbClr val="F1F5F9"/>
-            </a:solidFill>
-          </a:ln>
-          <a:effectLst/>
-        </p:spPr>
-        <p:style>
-          <a:lnRef idx="1">
-            <a:schemeClr val="accent1"/>
-          </a:lnRef>
-          <a:fillRef idx="3">
-            <a:schemeClr val="accent1"/>
-          </a:fillRef>
-          <a:effectRef idx="2">
-            <a:schemeClr val="accent1"/>
-          </a:effectRef>
-          <a:fontRef idx="minor">
-            <a:schemeClr val="lt1"/>
-          </a:fontRef>
-        </p:style>
-        <p:txBody>
-          <a:bodyPr rtlCol="0" anchor="ctr"/>
-          <a:lstStyle/>
-          <a:p>
-            <a:pPr algn="ctr"/>
-          </a:p>
-        </p:txBody>
-      </p:sp>
-      <p:sp>
-        <p:nvSpPr>
-          <p:cNvPr id="12" name="TextBox 11"/>
-          <p:cNvSpPr txBox="1"/>
-          <p:nvPr/>
-        </p:nvSpPr>
-        <p:spPr>
-          <a:xfrm>
-            <a:off x="8321040" y="2468880"/>
-            <a:ext cx="3200400" cy="3657600"/>
-          </a:xfrm>
-          <a:prstGeom prst="rect">
-            <a:avLst/>
-          </a:prstGeom>
-          <a:noFill/>
-        </p:spPr>
-        <p:txBody>
-          <a:bodyPr wrap="square">
-            <a:spAutoFit/>
-          </a:bodyPr>
-          <a:lstStyle/>
-          <a:p>
-            <a:pPr>
-              <a:spcAft>
-                <a:spcPts val="1000"/>
-              </a:spcAft>
-            </a:pPr>
-            <a:r>
-              <a:rPr sz="1400" b="0">
-                <a:solidFill>
-                  <a:srgbClr val="0F172A"/>
-                </a:solidFill>
-                <a:latin typeface="PingFang TC"/>
-                <a:ea typeface="PingFang TC"/>
-              </a:rPr>
-              <a:t>•  1B × ~200B ≈ 200GB</a:t>
-            </a:r>
-          </a:p>
-          <a:p>
-            <a:pPr>
-              <a:spcAft>
-                <a:spcPts val="1000"/>
-              </a:spcAft>
-            </a:pPr>
-            <a:r>
-              <a:rPr sz="1400" b="0">
-                <a:solidFill>
-                  <a:srgbClr val="0F172A"/>
-                </a:solidFill>
-                <a:latin typeface="PingFang TC"/>
-                <a:ea typeface="PingFang TC"/>
-              </a:rPr>
-              <a:t>•  ≈ 5,800 redirect / 秒</a:t>
-            </a:r>
-          </a:p>
-          <a:p>
-            <a:pPr>
-              <a:spcAft>
-                <a:spcPts val="1000"/>
-              </a:spcAft>
-            </a:pPr>
-            <a:r>
-              <a:rPr sz="1400" b="0">
-                <a:solidFill>
-                  <a:srgbClr val="0F172A"/>
-                </a:solidFill>
-                <a:latin typeface="PingFang TC"/>
-                <a:ea typeface="PingFang TC"/>
-              </a:rPr>
-              <a:t>•  1 億用戶 × 5 次/日</a:t>
-            </a:r>
-          </a:p>
-          <a:p>
-            <a:pPr>
-              <a:spcAft>
-                <a:spcPts val="1000"/>
-              </a:spcAft>
-            </a:pPr>
-            <a:r>
-              <a:rPr sz="1400" b="0">
-                <a:solidFill>
-                  <a:srgbClr val="0F172A"/>
-                </a:solidFill>
-                <a:latin typeface="PingFang TC"/>
-                <a:ea typeface="PingFang TC"/>
-              </a:rPr>
-              <a:t>•  圖片 + redirect 為主流量</a:t>
+            <a:pPr algn="l">
+              <a:spcAft>
+                <a:spcPts val="400"/>
+              </a:spcAft>
+            </a:pPr>
+            <a:r>
+              <a:rPr sz="1200" b="0">
+                <a:solidFill>
+                  <a:srgbClr val="64748B"/>
+                </a:solidFill>
+                <a:latin typeface="PingFang TC"/>
+                <a:ea typeface="PingFang TC"/>
+              </a:rPr>
+              <a:t>rate limiting · auth/多租戶 · monitoring 是目前完全沒談、production 前必補的三塊。</a:t>
             </a:r>
           </a:p>
         </p:txBody>
@@ -10608,7 +12374,7 @@
 </p:sld>
 </file>
 
-<file path=ppt/slides/slide20.xml><?xml version="1.0" encoding="utf-8"?>
+<file path=ppt/slides/slide22.xml><?xml version="1.0" encoding="utf-8"?>
 <p:sld xmlns:a="http://schemas.openxmlformats.org/drawingml/2006/main" xmlns:p="http://schemas.openxmlformats.org/presentationml/2006/main" xmlns:r="http://schemas.openxmlformats.org/officeDocument/2006/relationships">
   <p:cSld>
     <p:spTree>

--- a/QR Code Generator/QR_Code_Generator.pptx
+++ b/QR Code Generator/QR_Code_Generator.pptx
@@ -27,6 +27,7 @@
     <p:sldId id="275" r:id="rId26"/>
     <p:sldId id="276" r:id="rId27"/>
     <p:sldId id="277" r:id="rId28"/>
+    <p:sldId id="278" r:id="rId29"/>
   </p:sldIdLst>
   <p:sldSz cx="12191695" cy="6858000" type="screen4x3"/>
   <p:notesSz cx="6858000" cy="9144000"/>
@@ -3380,7 +3381,7 @@
                 <a:latin typeface="PingFang TC"/>
                 <a:ea typeface="PingFang TC"/>
               </a:rPr>
-              <a:t>07 · QR IMAGE</a:t>
+              <a:t>06b · LATENCY</a:t>
             </a:r>
           </a:p>
           <a:p>
@@ -3397,7 +3398,7 @@
                 <a:latin typeface="PingFang TC"/>
                 <a:ea typeface="PingFang TC"/>
               </a:rPr>
-              <a:t>取 QR 圖片流程  ·  GET /api/v1/qr/{token}/image</a:t>
+              <a:t>redirect &lt; 100ms — 兩層查找 + 索引</a:t>
             </a:r>
           </a:p>
         </p:txBody>
@@ -3410,8 +3411,379 @@
         </p:nvSpPr>
         <p:spPr>
           <a:xfrm>
-            <a:off x="457200" y="2194560"/>
-            <a:ext cx="1737360" cy="1371600"/>
+            <a:off x="548640" y="1874519"/>
+            <a:ext cx="2194560" cy="822960"/>
+          </a:xfrm>
+          <a:prstGeom prst="roundRect">
+            <a:avLst/>
+          </a:prstGeom>
+          <a:solidFill>
+            <a:srgbClr val="64748B"/>
+          </a:solidFill>
+          <a:ln>
+            <a:solidFill>
+              <a:srgbClr val="64748B"/>
+            </a:solidFill>
+          </a:ln>
+          <a:effectLst/>
+        </p:spPr>
+        <p:style>
+          <a:lnRef idx="1">
+            <a:schemeClr val="accent1"/>
+          </a:lnRef>
+          <a:fillRef idx="3">
+            <a:schemeClr val="accent1"/>
+          </a:fillRef>
+          <a:effectRef idx="2">
+            <a:schemeClr val="accent1"/>
+          </a:effectRef>
+          <a:fontRef idx="minor">
+            <a:schemeClr val="lt1"/>
+          </a:fontRef>
+        </p:style>
+        <p:txBody>
+          <a:bodyPr rtlCol="0" anchor="ctr" wrap="square" tIns="25400" bIns="25400"/>
+          <a:lstStyle/>
+          <a:p>
+            <a:pPr algn="ctr"/>
+            <a:r>
+              <a:rPr sz="1300" b="1">
+                <a:solidFill>
+                  <a:srgbClr val="FFFFFF"/>
+                </a:solidFill>
+                <a:latin typeface="PingFang TC"/>
+                <a:ea typeface="PingFang TC"/>
+              </a:rPr>
+              <a:t>掃描</a:t>
+            </a:r>
+          </a:p>
+          <a:p>
+            <a:pPr algn="ctr"/>
+            <a:r>
+              <a:rPr sz="1300" b="0">
+                <a:solidFill>
+                  <a:srgbClr val="FFFFFF"/>
+                </a:solidFill>
+                <a:latin typeface="PingFang TC"/>
+                <a:ea typeface="PingFang TC"/>
+              </a:rPr>
+              <a:t>GET /r/{token}</a:t>
+            </a:r>
+          </a:p>
+        </p:txBody>
+      </p:sp>
+      <p:sp>
+        <p:nvSpPr>
+          <p:cNvPr id="5" name="Rounded Rectangle 4"/>
+          <p:cNvSpPr/>
+          <p:nvPr/>
+        </p:nvSpPr>
+        <p:spPr>
+          <a:xfrm>
+            <a:off x="3200400" y="1874519"/>
+            <a:ext cx="3063240" cy="822960"/>
+          </a:xfrm>
+          <a:prstGeom prst="roundRect">
+            <a:avLst/>
+          </a:prstGeom>
+          <a:solidFill>
+            <a:srgbClr val="DC2626"/>
+          </a:solidFill>
+          <a:ln>
+            <a:solidFill>
+              <a:srgbClr val="DC2626"/>
+            </a:solidFill>
+          </a:ln>
+          <a:effectLst/>
+        </p:spPr>
+        <p:style>
+          <a:lnRef idx="1">
+            <a:schemeClr val="accent1"/>
+          </a:lnRef>
+          <a:fillRef idx="3">
+            <a:schemeClr val="accent1"/>
+          </a:fillRef>
+          <a:effectRef idx="2">
+            <a:schemeClr val="accent1"/>
+          </a:effectRef>
+          <a:fontRef idx="minor">
+            <a:schemeClr val="lt1"/>
+          </a:fontRef>
+        </p:style>
+        <p:txBody>
+          <a:bodyPr rtlCol="0" anchor="ctr" wrap="square" tIns="25400" bIns="25400"/>
+          <a:lstStyle/>
+          <a:p>
+            <a:pPr algn="ctr"/>
+            <a:r>
+              <a:rPr sz="1300" b="1">
+                <a:solidFill>
+                  <a:srgbClr val="FFFFFF"/>
+                </a:solidFill>
+                <a:latin typeface="PingFang TC"/>
+                <a:ea typeface="PingFang TC"/>
+              </a:rPr>
+              <a:t>① Cache (Redis)</a:t>
+            </a:r>
+          </a:p>
+          <a:p>
+            <a:pPr algn="ctr"/>
+            <a:r>
+              <a:rPr sz="1300" b="0">
+                <a:solidFill>
+                  <a:srgbClr val="FFFFFF"/>
+                </a:solidFill>
+                <a:latin typeface="PingFang TC"/>
+                <a:ea typeface="PingFang TC"/>
+              </a:rPr>
+              <a:t>O(1) · &lt;1ms</a:t>
+            </a:r>
+          </a:p>
+        </p:txBody>
+      </p:sp>
+      <p:cxnSp>
+        <p:nvCxnSpPr>
+          <p:cNvPr id="6" name="Connector 5"/>
+          <p:cNvCxnSpPr/>
+          <p:nvPr/>
+        </p:nvCxnSpPr>
+        <p:spPr>
+          <a:xfrm>
+            <a:off x="2743200" y="2286000"/>
+            <a:ext cx="457200" cy="0"/>
+          </a:xfrm>
+          <a:prstGeom prst="line">
+            <a:avLst/>
+          </a:prstGeom>
+          <a:ln w="22225">
+            <a:solidFill>
+              <a:srgbClr val="64748B"/>
+            </a:solidFill>
+            <a:tailEnd type="triangle" w="med" len="med"/>
+          </a:ln>
+        </p:spPr>
+        <p:style>
+          <a:lnRef idx="2">
+            <a:schemeClr val="accent1"/>
+          </a:lnRef>
+          <a:fillRef idx="0">
+            <a:schemeClr val="accent1"/>
+          </a:fillRef>
+          <a:effectRef idx="1">
+            <a:schemeClr val="accent1"/>
+          </a:effectRef>
+          <a:fontRef idx="minor">
+            <a:schemeClr val="tx1"/>
+          </a:fontRef>
+        </p:style>
+      </p:cxnSp>
+      <p:sp>
+        <p:nvSpPr>
+          <p:cNvPr id="7" name="Rounded Rectangle 6"/>
+          <p:cNvSpPr/>
+          <p:nvPr/>
+        </p:nvSpPr>
+        <p:spPr>
+          <a:xfrm>
+            <a:off x="3200400" y="2971800"/>
+            <a:ext cx="3063240" cy="731520"/>
+          </a:xfrm>
+          <a:prstGeom prst="roundRect">
+            <a:avLst/>
+          </a:prstGeom>
+          <a:solidFill>
+            <a:srgbClr val="059669"/>
+          </a:solidFill>
+          <a:ln>
+            <a:solidFill>
+              <a:srgbClr val="059669"/>
+            </a:solidFill>
+          </a:ln>
+          <a:effectLst/>
+        </p:spPr>
+        <p:style>
+          <a:lnRef idx="1">
+            <a:schemeClr val="accent1"/>
+          </a:lnRef>
+          <a:fillRef idx="3">
+            <a:schemeClr val="accent1"/>
+          </a:fillRef>
+          <a:effectRef idx="2">
+            <a:schemeClr val="accent1"/>
+          </a:effectRef>
+          <a:fontRef idx="minor">
+            <a:schemeClr val="lt1"/>
+          </a:fontRef>
+        </p:style>
+        <p:txBody>
+          <a:bodyPr rtlCol="0" anchor="ctr" wrap="square" tIns="25400" bIns="25400"/>
+          <a:lstStyle/>
+          <a:p>
+            <a:pPr algn="ctr"/>
+            <a:r>
+              <a:rPr sz="1200" b="1">
+                <a:solidFill>
+                  <a:srgbClr val="FFFFFF"/>
+                </a:solidFill>
+                <a:latin typeface="PingFang TC"/>
+                <a:ea typeface="PingFang TC"/>
+              </a:rPr>
+              <a:t>命中 → 302 ✅ 不碰 DB</a:t>
+            </a:r>
+          </a:p>
+        </p:txBody>
+      </p:sp>
+      <p:cxnSp>
+        <p:nvCxnSpPr>
+          <p:cNvPr id="8" name="Connector 7"/>
+          <p:cNvCxnSpPr/>
+          <p:nvPr/>
+        </p:nvCxnSpPr>
+        <p:spPr>
+          <a:xfrm>
+            <a:off x="4727448" y="2697480"/>
+            <a:ext cx="0" cy="274320"/>
+          </a:xfrm>
+          <a:prstGeom prst="line">
+            <a:avLst/>
+          </a:prstGeom>
+          <a:ln w="15240">
+            <a:solidFill>
+              <a:srgbClr val="059669"/>
+            </a:solidFill>
+            <a:tailEnd type="triangle" w="med" len="med"/>
+          </a:ln>
+        </p:spPr>
+        <p:style>
+          <a:lnRef idx="2">
+            <a:schemeClr val="accent1"/>
+          </a:lnRef>
+          <a:fillRef idx="0">
+            <a:schemeClr val="accent1"/>
+          </a:fillRef>
+          <a:effectRef idx="1">
+            <a:schemeClr val="accent1"/>
+          </a:effectRef>
+          <a:fontRef idx="minor">
+            <a:schemeClr val="tx1"/>
+          </a:fontRef>
+        </p:style>
+      </p:cxnSp>
+      <p:sp>
+        <p:nvSpPr>
+          <p:cNvPr id="9" name="Rounded Rectangle 8"/>
+          <p:cNvSpPr/>
+          <p:nvPr/>
+        </p:nvSpPr>
+        <p:spPr>
+          <a:xfrm>
+            <a:off x="6720840" y="1874519"/>
+            <a:ext cx="4937760" cy="822960"/>
+          </a:xfrm>
+          <a:prstGeom prst="roundRect">
+            <a:avLst/>
+          </a:prstGeom>
+          <a:solidFill>
+            <a:srgbClr val="059669"/>
+          </a:solidFill>
+          <a:ln>
+            <a:solidFill>
+              <a:srgbClr val="059669"/>
+            </a:solidFill>
+          </a:ln>
+          <a:effectLst/>
+        </p:spPr>
+        <p:style>
+          <a:lnRef idx="1">
+            <a:schemeClr val="accent1"/>
+          </a:lnRef>
+          <a:fillRef idx="3">
+            <a:schemeClr val="accent1"/>
+          </a:fillRef>
+          <a:effectRef idx="2">
+            <a:schemeClr val="accent1"/>
+          </a:effectRef>
+          <a:fontRef idx="minor">
+            <a:schemeClr val="lt1"/>
+          </a:fontRef>
+        </p:style>
+        <p:txBody>
+          <a:bodyPr rtlCol="0" anchor="ctr" wrap="square" tIns="25400" bIns="25400"/>
+          <a:lstStyle/>
+          <a:p>
+            <a:pPr algn="ctr"/>
+            <a:r>
+              <a:rPr sz="1200" b="1">
+                <a:solidFill>
+                  <a:srgbClr val="FFFFFF"/>
+                </a:solidFill>
+                <a:latin typeface="PingFang TC"/>
+                <a:ea typeface="PingFang TC"/>
+              </a:rPr>
+              <a:t>② miss → SELECT WHERE token=?</a:t>
+            </a:r>
+          </a:p>
+          <a:p>
+            <a:pPr algn="ctr"/>
+            <a:r>
+              <a:rPr sz="1200" b="0">
+                <a:solidFill>
+                  <a:srgbClr val="FFFFFF"/>
+                </a:solidFill>
+                <a:latin typeface="PingFang TC"/>
+                <a:ea typeface="PingFang TC"/>
+              </a:rPr>
+              <a:t>走 ix_url_mappings_token · O(log n)</a:t>
+            </a:r>
+          </a:p>
+        </p:txBody>
+      </p:sp>
+      <p:cxnSp>
+        <p:nvCxnSpPr>
+          <p:cNvPr id="10" name="Connector 9"/>
+          <p:cNvCxnSpPr/>
+          <p:nvPr/>
+        </p:nvCxnSpPr>
+        <p:spPr>
+          <a:xfrm>
+            <a:off x="6263640" y="2286000"/>
+            <a:ext cx="457200" cy="0"/>
+          </a:xfrm>
+          <a:prstGeom prst="line">
+            <a:avLst/>
+          </a:prstGeom>
+          <a:ln w="22225">
+            <a:solidFill>
+              <a:srgbClr val="64748B"/>
+            </a:solidFill>
+            <a:tailEnd type="triangle" w="med" len="med"/>
+          </a:ln>
+        </p:spPr>
+        <p:style>
+          <a:lnRef idx="2">
+            <a:schemeClr val="accent1"/>
+          </a:lnRef>
+          <a:fillRef idx="0">
+            <a:schemeClr val="accent1"/>
+          </a:fillRef>
+          <a:effectRef idx="1">
+            <a:schemeClr val="accent1"/>
+          </a:effectRef>
+          <a:fontRef idx="minor">
+            <a:schemeClr val="tx1"/>
+          </a:fontRef>
+        </p:style>
+      </p:cxnSp>
+      <p:sp>
+        <p:nvSpPr>
+          <p:cNvPr id="11" name="Rounded Rectangle 10"/>
+          <p:cNvSpPr/>
+          <p:nvPr/>
+        </p:nvSpPr>
+        <p:spPr>
+          <a:xfrm>
+            <a:off x="6720840" y="2971800"/>
+            <a:ext cx="4937760" cy="731520"/>
           </a:xfrm>
           <a:prstGeom prst="roundRect">
             <a:avLst/>
@@ -3453,52 +3825,26 @@
                 <a:latin typeface="PingFang TC"/>
                 <a:ea typeface="PingFang TC"/>
               </a:rPr>
-              <a:t>① 驗證 token</a:t>
-            </a:r>
-          </a:p>
-          <a:p>
-            <a:pPr algn="ctr"/>
-            <a:r>
-              <a:rPr sz="1200" b="0">
-                <a:solidFill>
-                  <a:srgbClr val="FFFFFF"/>
-                </a:solidFill>
-                <a:latin typeface="PingFang TC"/>
-                <a:ea typeface="PingFang TC"/>
-              </a:rPr>
-              <a:t>找不到/已軟刪</a:t>
-            </a:r>
-          </a:p>
-          <a:p>
-            <a:pPr algn="ctr"/>
-            <a:r>
-              <a:rPr sz="1200" b="0">
-                <a:solidFill>
-                  <a:srgbClr val="FFFFFF"/>
-                </a:solidFill>
-                <a:latin typeface="PingFang TC"/>
-                <a:ea typeface="PingFang TC"/>
-              </a:rPr>
-              <a:t>→ 404</a:t>
+              <a:t>回填 cache → 302</a:t>
             </a:r>
           </a:p>
         </p:txBody>
       </p:sp>
       <p:cxnSp>
         <p:nvCxnSpPr>
-          <p:cNvPr id="5" name="Connector 4"/>
+          <p:cNvPr id="12" name="Connector 11"/>
           <p:cNvCxnSpPr/>
           <p:nvPr/>
         </p:nvCxnSpPr>
         <p:spPr>
           <a:xfrm>
-            <a:off x="2194560" y="2880360"/>
-            <a:ext cx="128016" cy="0"/>
+            <a:off x="9189720" y="2697480"/>
+            <a:ext cx="0" cy="274320"/>
           </a:xfrm>
           <a:prstGeom prst="line">
             <a:avLst/>
           </a:prstGeom>
-          <a:ln w="22225">
+          <a:ln w="15240">
             <a:solidFill>
               <a:srgbClr val="64748B"/>
             </a:solidFill>
@@ -3522,568 +3868,14 @@
       </p:cxnSp>
       <p:sp>
         <p:nvSpPr>
-          <p:cNvPr id="6" name="Rounded Rectangle 5"/>
-          <p:cNvSpPr/>
-          <p:nvPr/>
-        </p:nvSpPr>
-        <p:spPr>
-          <a:xfrm>
-            <a:off x="2322576" y="2194560"/>
-            <a:ext cx="1737360" cy="1371600"/>
-          </a:xfrm>
-          <a:prstGeom prst="roundRect">
-            <a:avLst/>
-          </a:prstGeom>
-          <a:solidFill>
-            <a:srgbClr val="0EA5E9"/>
-          </a:solidFill>
-          <a:ln>
-            <a:solidFill>
-              <a:srgbClr val="0EA5E9"/>
-            </a:solidFill>
-          </a:ln>
-          <a:effectLst/>
-        </p:spPr>
-        <p:style>
-          <a:lnRef idx="1">
-            <a:schemeClr val="accent1"/>
-          </a:lnRef>
-          <a:fillRef idx="3">
-            <a:schemeClr val="accent1"/>
-          </a:fillRef>
-          <a:effectRef idx="2">
-            <a:schemeClr val="accent1"/>
-          </a:effectRef>
-          <a:fontRef idx="minor">
-            <a:schemeClr val="lt1"/>
-          </a:fontRef>
-        </p:style>
-        <p:txBody>
-          <a:bodyPr rtlCol="0" anchor="ctr" wrap="square" tIns="25400" bIns="25400"/>
-          <a:lstStyle/>
-          <a:p>
-            <a:pPr algn="ctr"/>
-            <a:r>
-              <a:rPr sz="1200" b="1">
-                <a:solidFill>
-                  <a:srgbClr val="FFFFFF"/>
-                </a:solidFill>
-                <a:latin typeface="PingFang TC"/>
-                <a:ea typeface="PingFang TC"/>
-              </a:rPr>
-              <a:t>② 組短碼</a:t>
-            </a:r>
-          </a:p>
-          <a:p>
-            <a:pPr algn="ctr"/>
-            <a:r>
-              <a:rPr sz="1200" b="0">
-                <a:solidFill>
-                  <a:srgbClr val="FFFFFF"/>
-                </a:solidFill>
-                <a:latin typeface="PingFang TC"/>
-                <a:ea typeface="PingFang TC"/>
-              </a:rPr>
-              <a:t>short_url =</a:t>
-            </a:r>
-          </a:p>
-          <a:p>
-            <a:pPr algn="ctr"/>
-            <a:r>
-              <a:rPr sz="1200" b="0">
-                <a:solidFill>
-                  <a:srgbClr val="FFFFFF"/>
-                </a:solidFill>
-                <a:latin typeface="PingFang TC"/>
-                <a:ea typeface="PingFang TC"/>
-              </a:rPr>
-              <a:t>BASE_URL+"/r/{token}"</a:t>
-            </a:r>
-          </a:p>
-        </p:txBody>
-      </p:sp>
-      <p:cxnSp>
-        <p:nvCxnSpPr>
-          <p:cNvPr id="7" name="Connector 6"/>
-          <p:cNvCxnSpPr/>
-          <p:nvPr/>
-        </p:nvCxnSpPr>
-        <p:spPr>
-          <a:xfrm>
-            <a:off x="4059936" y="2880360"/>
-            <a:ext cx="128016" cy="0"/>
-          </a:xfrm>
-          <a:prstGeom prst="line">
-            <a:avLst/>
-          </a:prstGeom>
-          <a:ln w="22225">
-            <a:solidFill>
-              <a:srgbClr val="64748B"/>
-            </a:solidFill>
-            <a:tailEnd type="triangle" w="med" len="med"/>
-          </a:ln>
-        </p:spPr>
-        <p:style>
-          <a:lnRef idx="2">
-            <a:schemeClr val="accent1"/>
-          </a:lnRef>
-          <a:fillRef idx="0">
-            <a:schemeClr val="accent1"/>
-          </a:fillRef>
-          <a:effectRef idx="1">
-            <a:schemeClr val="accent1"/>
-          </a:effectRef>
-          <a:fontRef idx="minor">
-            <a:schemeClr val="tx1"/>
-          </a:fontRef>
-        </p:style>
-      </p:cxnSp>
-      <p:sp>
-        <p:nvSpPr>
-          <p:cNvPr id="8" name="Rounded Rectangle 7"/>
-          <p:cNvSpPr/>
-          <p:nvPr/>
-        </p:nvSpPr>
-        <p:spPr>
-          <a:xfrm>
-            <a:off x="4187952" y="2194560"/>
-            <a:ext cx="1737360" cy="1371600"/>
-          </a:xfrm>
-          <a:prstGeom prst="roundRect">
-            <a:avLst/>
-          </a:prstGeom>
-          <a:solidFill>
-            <a:srgbClr val="059669"/>
-          </a:solidFill>
-          <a:ln>
-            <a:solidFill>
-              <a:srgbClr val="059669"/>
-            </a:solidFill>
-          </a:ln>
-          <a:effectLst/>
-        </p:spPr>
-        <p:style>
-          <a:lnRef idx="1">
-            <a:schemeClr val="accent1"/>
-          </a:lnRef>
-          <a:fillRef idx="3">
-            <a:schemeClr val="accent1"/>
-          </a:fillRef>
-          <a:effectRef idx="2">
-            <a:schemeClr val="accent1"/>
-          </a:effectRef>
-          <a:fontRef idx="minor">
-            <a:schemeClr val="lt1"/>
-          </a:fontRef>
-        </p:style>
-        <p:txBody>
-          <a:bodyPr rtlCol="0" anchor="ctr" wrap="square" tIns="25400" bIns="25400"/>
-          <a:lstStyle/>
-          <a:p>
-            <a:pPr algn="ctr"/>
-            <a:r>
-              <a:rPr sz="1200" b="1">
-                <a:solidFill>
-                  <a:srgbClr val="FFFFFF"/>
-                </a:solidFill>
-                <a:latin typeface="PingFang TC"/>
-                <a:ea typeface="PingFang TC"/>
-              </a:rPr>
-              <a:t>③④ 算矩陣</a:t>
-            </a:r>
-          </a:p>
-          <a:p>
-            <a:pPr algn="ctr"/>
-            <a:r>
-              <a:rPr sz="1200" b="0">
-                <a:solidFill>
-                  <a:srgbClr val="FFFFFF"/>
-                </a:solidFill>
-                <a:latin typeface="PingFang TC"/>
-                <a:ea typeface="PingFang TC"/>
-              </a:rPr>
-              <a:t>編碼→糾錯(RS)</a:t>
-            </a:r>
-          </a:p>
-          <a:p>
-            <a:pPr algn="ctr"/>
-            <a:r>
-              <a:rPr sz="1200" b="0">
-                <a:solidFill>
-                  <a:srgbClr val="FFFFFF"/>
-                </a:solidFill>
-                <a:latin typeface="PingFang TC"/>
-                <a:ea typeface="PingFang TC"/>
-              </a:rPr>
-              <a:t>→2D 模組矩陣</a:t>
-            </a:r>
-          </a:p>
-        </p:txBody>
-      </p:sp>
-      <p:cxnSp>
-        <p:nvCxnSpPr>
-          <p:cNvPr id="9" name="Connector 8"/>
-          <p:cNvCxnSpPr/>
-          <p:nvPr/>
-        </p:nvCxnSpPr>
-        <p:spPr>
-          <a:xfrm>
-            <a:off x="5925312" y="2880360"/>
-            <a:ext cx="128016" cy="0"/>
-          </a:xfrm>
-          <a:prstGeom prst="line">
-            <a:avLst/>
-          </a:prstGeom>
-          <a:ln w="22225">
-            <a:solidFill>
-              <a:srgbClr val="64748B"/>
-            </a:solidFill>
-            <a:tailEnd type="triangle" w="med" len="med"/>
-          </a:ln>
-        </p:spPr>
-        <p:style>
-          <a:lnRef idx="2">
-            <a:schemeClr val="accent1"/>
-          </a:lnRef>
-          <a:fillRef idx="0">
-            <a:schemeClr val="accent1"/>
-          </a:fillRef>
-          <a:effectRef idx="1">
-            <a:schemeClr val="accent1"/>
-          </a:effectRef>
-          <a:fontRef idx="minor">
-            <a:schemeClr val="tx1"/>
-          </a:fontRef>
-        </p:style>
-      </p:cxnSp>
-      <p:sp>
-        <p:nvSpPr>
-          <p:cNvPr id="10" name="Rounded Rectangle 9"/>
-          <p:cNvSpPr/>
-          <p:nvPr/>
-        </p:nvSpPr>
-        <p:spPr>
-          <a:xfrm>
-            <a:off x="6053328" y="2194560"/>
-            <a:ext cx="1737360" cy="1371600"/>
-          </a:xfrm>
-          <a:prstGeom prst="roundRect">
-            <a:avLst/>
-          </a:prstGeom>
-          <a:solidFill>
-            <a:srgbClr val="7C3AED"/>
-          </a:solidFill>
-          <a:ln>
-            <a:solidFill>
-              <a:srgbClr val="7C3AED"/>
-            </a:solidFill>
-          </a:ln>
-          <a:effectLst/>
-        </p:spPr>
-        <p:style>
-          <a:lnRef idx="1">
-            <a:schemeClr val="accent1"/>
-          </a:lnRef>
-          <a:fillRef idx="3">
-            <a:schemeClr val="accent1"/>
-          </a:fillRef>
-          <a:effectRef idx="2">
-            <a:schemeClr val="accent1"/>
-          </a:effectRef>
-          <a:fontRef idx="minor">
-            <a:schemeClr val="lt1"/>
-          </a:fontRef>
-        </p:style>
-        <p:txBody>
-          <a:bodyPr rtlCol="0" anchor="ctr" wrap="square" tIns="25400" bIns="25400"/>
-          <a:lstStyle/>
-          <a:p>
-            <a:pPr algn="ctr"/>
-            <a:r>
-              <a:rPr sz="1200" b="1">
-                <a:solidFill>
-                  <a:srgbClr val="FFFFFF"/>
-                </a:solidFill>
-                <a:latin typeface="PingFang TC"/>
-                <a:ea typeface="PingFang TC"/>
-              </a:rPr>
-              <a:t>⑤ 算像素</a:t>
-            </a:r>
-          </a:p>
-          <a:p>
-            <a:pPr algn="ctr"/>
-            <a:r>
-              <a:rPr sz="1200" b="0">
-                <a:solidFill>
-                  <a:srgbClr val="FFFFFF"/>
-                </a:solidFill>
-                <a:latin typeface="PingFang TC"/>
-                <a:ea typeface="PingFang TC"/>
-              </a:rPr>
-              <a:t>每模組→方塊</a:t>
-            </a:r>
-          </a:p>
-          <a:p>
-            <a:pPr algn="ctr"/>
-            <a:r>
-              <a:rPr sz="1200" b="0">
-                <a:solidFill>
-                  <a:srgbClr val="FFFFFF"/>
-                </a:solidFill>
-                <a:latin typeface="PingFang TC"/>
-                <a:ea typeface="PingFang TC"/>
-              </a:rPr>
-              <a:t>border=quiet zone</a:t>
-            </a:r>
-          </a:p>
-        </p:txBody>
-      </p:sp>
-      <p:cxnSp>
-        <p:nvCxnSpPr>
-          <p:cNvPr id="11" name="Connector 10"/>
-          <p:cNvCxnSpPr/>
-          <p:nvPr/>
-        </p:nvCxnSpPr>
-        <p:spPr>
-          <a:xfrm>
-            <a:off x="7790688" y="2880360"/>
-            <a:ext cx="128016" cy="0"/>
-          </a:xfrm>
-          <a:prstGeom prst="line">
-            <a:avLst/>
-          </a:prstGeom>
-          <a:ln w="22225">
-            <a:solidFill>
-              <a:srgbClr val="64748B"/>
-            </a:solidFill>
-            <a:tailEnd type="triangle" w="med" len="med"/>
-          </a:ln>
-        </p:spPr>
-        <p:style>
-          <a:lnRef idx="2">
-            <a:schemeClr val="accent1"/>
-          </a:lnRef>
-          <a:fillRef idx="0">
-            <a:schemeClr val="accent1"/>
-          </a:fillRef>
-          <a:effectRef idx="1">
-            <a:schemeClr val="accent1"/>
-          </a:effectRef>
-          <a:fontRef idx="minor">
-            <a:schemeClr val="tx1"/>
-          </a:fontRef>
-        </p:style>
-      </p:cxnSp>
-      <p:sp>
-        <p:nvSpPr>
-          <p:cNvPr id="12" name="Rounded Rectangle 11"/>
-          <p:cNvSpPr/>
-          <p:nvPr/>
-        </p:nvSpPr>
-        <p:spPr>
-          <a:xfrm>
-            <a:off x="7918704" y="2194560"/>
-            <a:ext cx="1737360" cy="1371600"/>
-          </a:xfrm>
-          <a:prstGeom prst="roundRect">
-            <a:avLst/>
-          </a:prstGeom>
-          <a:solidFill>
-            <a:srgbClr val="DC2626"/>
-          </a:solidFill>
-          <a:ln>
-            <a:solidFill>
-              <a:srgbClr val="DC2626"/>
-            </a:solidFill>
-          </a:ln>
-          <a:effectLst/>
-        </p:spPr>
-        <p:style>
-          <a:lnRef idx="1">
-            <a:schemeClr val="accent1"/>
-          </a:lnRef>
-          <a:fillRef idx="3">
-            <a:schemeClr val="accent1"/>
-          </a:fillRef>
-          <a:effectRef idx="2">
-            <a:schemeClr val="accent1"/>
-          </a:effectRef>
-          <a:fontRef idx="minor">
-            <a:schemeClr val="lt1"/>
-          </a:fontRef>
-        </p:style>
-        <p:txBody>
-          <a:bodyPr rtlCol="0" anchor="ctr" wrap="square" tIns="25400" bIns="25400"/>
-          <a:lstStyle/>
-          <a:p>
-            <a:pPr algn="ctr"/>
-            <a:r>
-              <a:rPr sz="1200" b="1">
-                <a:solidFill>
-                  <a:srgbClr val="FFFFFF"/>
-                </a:solidFill>
-                <a:latin typeface="PingFang TC"/>
-                <a:ea typeface="PingFang TC"/>
-              </a:rPr>
-              <a:t>⑥⑦ PNG</a:t>
-            </a:r>
-          </a:p>
-          <a:p>
-            <a:pPr algn="ctr"/>
-            <a:r>
-              <a:rPr sz="1200" b="0">
-                <a:solidFill>
-                  <a:srgbClr val="FFFFFF"/>
-                </a:solidFill>
-                <a:latin typeface="PingFang TC"/>
-                <a:ea typeface="PingFang TC"/>
-              </a:rPr>
-              <a:t>BytesIO</a:t>
-            </a:r>
-          </a:p>
-          <a:p>
-            <a:pPr algn="ctr"/>
-            <a:r>
-              <a:rPr sz="1200" b="0">
-                <a:solidFill>
-                  <a:srgbClr val="FFFFFF"/>
-                </a:solidFill>
-                <a:latin typeface="PingFang TC"/>
-                <a:ea typeface="PingFang TC"/>
-              </a:rPr>
-              <a:t>選填 dimension 縮放</a:t>
-            </a:r>
-          </a:p>
-        </p:txBody>
-      </p:sp>
-      <p:cxnSp>
-        <p:nvCxnSpPr>
-          <p:cNvPr id="13" name="Connector 12"/>
-          <p:cNvCxnSpPr/>
-          <p:nvPr/>
-        </p:nvCxnSpPr>
-        <p:spPr>
-          <a:xfrm>
-            <a:off x="9656064" y="2880360"/>
-            <a:ext cx="128016" cy="0"/>
-          </a:xfrm>
-          <a:prstGeom prst="line">
-            <a:avLst/>
-          </a:prstGeom>
-          <a:ln w="22225">
-            <a:solidFill>
-              <a:srgbClr val="64748B"/>
-            </a:solidFill>
-            <a:tailEnd type="triangle" w="med" len="med"/>
-          </a:ln>
-        </p:spPr>
-        <p:style>
-          <a:lnRef idx="2">
-            <a:schemeClr val="accent1"/>
-          </a:lnRef>
-          <a:fillRef idx="0">
-            <a:schemeClr val="accent1"/>
-          </a:fillRef>
-          <a:effectRef idx="1">
-            <a:schemeClr val="accent1"/>
-          </a:effectRef>
-          <a:fontRef idx="minor">
-            <a:schemeClr val="tx1"/>
-          </a:fontRef>
-        </p:style>
-      </p:cxnSp>
-      <p:sp>
-        <p:nvSpPr>
-          <p:cNvPr id="14" name="Rounded Rectangle 13"/>
-          <p:cNvSpPr/>
-          <p:nvPr/>
-        </p:nvSpPr>
-        <p:spPr>
-          <a:xfrm>
-            <a:off x="9784080" y="2194560"/>
-            <a:ext cx="1737360" cy="1371600"/>
-          </a:xfrm>
-          <a:prstGeom prst="roundRect">
-            <a:avLst/>
-          </a:prstGeom>
-          <a:solidFill>
-            <a:srgbClr val="D97706"/>
-          </a:solidFill>
-          <a:ln>
-            <a:solidFill>
-              <a:srgbClr val="D97706"/>
-            </a:solidFill>
-          </a:ln>
-          <a:effectLst/>
-        </p:spPr>
-        <p:style>
-          <a:lnRef idx="1">
-            <a:schemeClr val="accent1"/>
-          </a:lnRef>
-          <a:fillRef idx="3">
-            <a:schemeClr val="accent1"/>
-          </a:fillRef>
-          <a:effectRef idx="2">
-            <a:schemeClr val="accent1"/>
-          </a:effectRef>
-          <a:fontRef idx="minor">
-            <a:schemeClr val="lt1"/>
-          </a:fontRef>
-        </p:style>
-        <p:txBody>
-          <a:bodyPr rtlCol="0" anchor="ctr" wrap="square" tIns="25400" bIns="25400"/>
-          <a:lstStyle/>
-          <a:p>
-            <a:pPr algn="ctr"/>
-            <a:r>
-              <a:rPr sz="1200" b="1">
-                <a:solidFill>
-                  <a:srgbClr val="FFFFFF"/>
-                </a:solidFill>
-                <a:latin typeface="PingFang TC"/>
-                <a:ea typeface="PingFang TC"/>
-              </a:rPr>
-              <a:t>⑧ 串流</a:t>
-            </a:r>
-          </a:p>
-          <a:p>
-            <a:pPr algn="ctr"/>
-            <a:r>
-              <a:rPr sz="1200" b="0">
-                <a:solidFill>
-                  <a:srgbClr val="FFFFFF"/>
-                </a:solidFill>
-                <a:latin typeface="PingFang TC"/>
-                <a:ea typeface="PingFang TC"/>
-              </a:rPr>
-              <a:t>StreamingResponse</a:t>
-            </a:r>
-          </a:p>
-          <a:p>
-            <a:pPr algn="ctr"/>
-            <a:r>
-              <a:rPr sz="1200" b="0">
-                <a:solidFill>
-                  <a:srgbClr val="FFFFFF"/>
-                </a:solidFill>
-                <a:latin typeface="PingFang TC"/>
-                <a:ea typeface="PingFang TC"/>
-              </a:rPr>
-              <a:t>image/png</a:t>
-            </a:r>
-          </a:p>
-        </p:txBody>
-      </p:sp>
-      <p:sp>
-        <p:nvSpPr>
-          <p:cNvPr id="15" name="TextBox 14"/>
+          <p:cNvPr id="13" name="TextBox 12"/>
           <p:cNvSpPr txBox="1"/>
           <p:nvPr/>
         </p:nvSpPr>
         <p:spPr>
           <a:xfrm>
-            <a:off x="502920" y="4023360"/>
-            <a:ext cx="11155680" cy="2194560"/>
+            <a:off x="548640" y="4114800"/>
+            <a:ext cx="11247120" cy="2377440"/>
           </a:xfrm>
           <a:prstGeom prst="rect">
             <a:avLst/>
@@ -4091,76 +3883,76 @@
           <a:noFill/>
         </p:spPr>
         <p:txBody>
-          <a:bodyPr wrap="square" anchor="t">
+          <a:bodyPr wrap="square">
             <a:spAutoFit/>
           </a:bodyPr>
           <a:lstStyle/>
           <a:p>
-            <a:pPr algn="l">
+            <a:pPr>
               <a:spcAft>
                 <a:spcPts val="800"/>
               </a:spcAft>
             </a:pPr>
             <a:r>
-              <a:rPr sz="1400" b="1">
+              <a:rPr sz="1400" b="0">
                 <a:solidFill>
                   <a:srgbClr val="0F172A"/>
                 </a:solidFill>
                 <a:latin typeface="PingFang TC"/>
                 <a:ea typeface="PingFang TC"/>
               </a:rPr>
-              <a:t>⚠ 編進 QR 的是『不變的短碼 /r/{token}』，不是原始 URL —— dynamic QR 關鍵：改目標 URL 不需重生圖。</a:t>
-            </a:r>
-          </a:p>
-          <a:p>
-            <a:pPr algn="l">
-              <a:spcAft>
-                <a:spcPts val="600"/>
-              </a:spcAft>
-            </a:pPr>
-            <a:r>
-              <a:rPr sz="1300" b="0">
-                <a:solidFill>
-                  <a:srgbClr val="64748B"/>
-                </a:solidFill>
-                <a:latin typeface="PingFang TC"/>
-                <a:ea typeface="PingFang TC"/>
-              </a:rPr>
-              <a:t>QR 原理：字串 → byte 編碼 → Reed-Solomon 糾錯（破損仍可掃）→ 排入矩陣（finder/timing/alignment + 遮罩）。</a:t>
-            </a:r>
-          </a:p>
-          <a:p>
-            <a:pPr algn="l">
-              <a:spcAft>
-                <a:spcPts val="600"/>
-              </a:spcAft>
-            </a:pPr>
-            <a:r>
-              <a:rPr sz="1300" b="0">
-                <a:solidFill>
-                  <a:srgbClr val="64748B"/>
-                </a:solidFill>
-                <a:latin typeface="PingFang TC"/>
-                <a:ea typeface="PingFang TC"/>
-              </a:rPr>
-              <a:t>圖片是靜態內容 → 原型即時生成；正式版預生成存 object store + CDN（第 15 題）。</a:t>
-            </a:r>
-          </a:p>
-          <a:p>
-            <a:pPr algn="l">
-              <a:spcAft>
-                <a:spcPts val="400"/>
-              </a:spcAft>
-            </a:pPr>
-            <a:r>
-              <a:rPr sz="1300" b="0">
-                <a:solidFill>
-                  <a:srgbClr val="64748B"/>
-                </a:solidFill>
-                <a:latin typeface="PingFang TC"/>
-                <a:ea typeface="PingFang TC"/>
-              </a:rPr>
-              <a:t>樣式參數：dimension（像素邊長）· color（hex 黑塊色）· border（quiet zone 模組數）。</a:t>
+              <a:t>•  索引對比（查 1 個 token、10 億筆）：無索引 = 全表掃描 O(n)，數秒；有索引 = B-tree O(log n)，次毫秒</a:t>
+            </a:r>
+          </a:p>
+          <a:p>
+            <a:pPr>
+              <a:spcAft>
+                <a:spcPts val="800"/>
+              </a:spcAft>
+            </a:pPr>
+            <a:r>
+              <a:rPr sz="1400" b="0">
+                <a:solidFill>
+                  <a:srgbClr val="0F172A"/>
+                </a:solidFill>
+                <a:latin typeface="PingFang TC"/>
+                <a:ea typeface="PingFang TC"/>
+              </a:rPr>
+              <a:t>•  scan 記錄非同步（BackgroundTasks），不算進這條延遲</a:t>
+            </a:r>
+          </a:p>
+          <a:p>
+            <a:pPr>
+              <a:spcAft>
+                <a:spcPts val="800"/>
+              </a:spcAft>
+            </a:pPr>
+            <a:r>
+              <a:rPr sz="1400" b="0">
+                <a:solidFill>
+                  <a:srgbClr val="0F172A"/>
+                </a:solidFill>
+                <a:latin typeface="PingFang TC"/>
+                <a:ea typeface="PingFang TC"/>
+              </a:rPr>
+              <a:t>•  三道防線：cache 擋多數讀（第 7 題）+ token 索引讓 miss 也快（第 2 題）+ scan 非同步不擋路（第 8 題）</a:t>
+            </a:r>
+          </a:p>
+          <a:p>
+            <a:pPr>
+              <a:spcAft>
+                <a:spcPts val="800"/>
+              </a:spcAft>
+            </a:pPr>
+            <a:r>
+              <a:rPr sz="1400" b="0">
+                <a:solidFill>
+                  <a:srgbClr val="0F172A"/>
+                </a:solidFill>
+                <a:latin typeface="PingFang TC"/>
+                <a:ea typeface="PingFang TC"/>
+              </a:rPr>
+              <a:t>•  正式版再加 read replica 分攤 ~5,800 QPS（第 16 題）</a:t>
             </a:r>
           </a:p>
         </p:txBody>
@@ -4262,7 +4054,7 @@
                 <a:latin typeface="PingFang TC"/>
                 <a:ea typeface="PingFang TC"/>
               </a:rPr>
-              <a:t>08 · DEEP DIVE</a:t>
+              <a:t>07 · QR IMAGE</a:t>
             </a:r>
           </a:p>
           <a:p>
@@ -4279,21 +4071,693 @@
                 <a:latin typeface="PingFang TC"/>
                 <a:ea typeface="PingFang TC"/>
               </a:rPr>
-              <a:t>決策 1 — Token 生成與碰撞</a:t>
-            </a:r>
-          </a:p>
-        </p:txBody>
-      </p:sp>
-      <p:sp>
-        <p:nvSpPr>
-          <p:cNvPr id="4" name="TextBox 3"/>
+              <a:t>取 QR 圖片流程  ·  GET /api/v1/qr/{token}/image</a:t>
+            </a:r>
+          </a:p>
+        </p:txBody>
+      </p:sp>
+      <p:sp>
+        <p:nvSpPr>
+          <p:cNvPr id="4" name="Rounded Rectangle 3"/>
+          <p:cNvSpPr/>
+          <p:nvPr/>
+        </p:nvSpPr>
+        <p:spPr>
+          <a:xfrm>
+            <a:off x="457200" y="2194560"/>
+            <a:ext cx="1737360" cy="1371600"/>
+          </a:xfrm>
+          <a:prstGeom prst="roundRect">
+            <a:avLst/>
+          </a:prstGeom>
+          <a:solidFill>
+            <a:srgbClr val="2563EB"/>
+          </a:solidFill>
+          <a:ln>
+            <a:solidFill>
+              <a:srgbClr val="2563EB"/>
+            </a:solidFill>
+          </a:ln>
+          <a:effectLst/>
+        </p:spPr>
+        <p:style>
+          <a:lnRef idx="1">
+            <a:schemeClr val="accent1"/>
+          </a:lnRef>
+          <a:fillRef idx="3">
+            <a:schemeClr val="accent1"/>
+          </a:fillRef>
+          <a:effectRef idx="2">
+            <a:schemeClr val="accent1"/>
+          </a:effectRef>
+          <a:fontRef idx="minor">
+            <a:schemeClr val="lt1"/>
+          </a:fontRef>
+        </p:style>
+        <p:txBody>
+          <a:bodyPr rtlCol="0" anchor="ctr" wrap="square" tIns="25400" bIns="25400"/>
+          <a:lstStyle/>
+          <a:p>
+            <a:pPr algn="ctr"/>
+            <a:r>
+              <a:rPr sz="1200" b="1">
+                <a:solidFill>
+                  <a:srgbClr val="FFFFFF"/>
+                </a:solidFill>
+                <a:latin typeface="PingFang TC"/>
+                <a:ea typeface="PingFang TC"/>
+              </a:rPr>
+              <a:t>① 驗證 token</a:t>
+            </a:r>
+          </a:p>
+          <a:p>
+            <a:pPr algn="ctr"/>
+            <a:r>
+              <a:rPr sz="1200" b="0">
+                <a:solidFill>
+                  <a:srgbClr val="FFFFFF"/>
+                </a:solidFill>
+                <a:latin typeface="PingFang TC"/>
+                <a:ea typeface="PingFang TC"/>
+              </a:rPr>
+              <a:t>找不到/已軟刪</a:t>
+            </a:r>
+          </a:p>
+          <a:p>
+            <a:pPr algn="ctr"/>
+            <a:r>
+              <a:rPr sz="1200" b="0">
+                <a:solidFill>
+                  <a:srgbClr val="FFFFFF"/>
+                </a:solidFill>
+                <a:latin typeface="PingFang TC"/>
+                <a:ea typeface="PingFang TC"/>
+              </a:rPr>
+              <a:t>→ 404</a:t>
+            </a:r>
+          </a:p>
+        </p:txBody>
+      </p:sp>
+      <p:cxnSp>
+        <p:nvCxnSpPr>
+          <p:cNvPr id="5" name="Connector 4"/>
+          <p:cNvCxnSpPr/>
+          <p:nvPr/>
+        </p:nvCxnSpPr>
+        <p:spPr>
+          <a:xfrm>
+            <a:off x="2194560" y="2880360"/>
+            <a:ext cx="128016" cy="0"/>
+          </a:xfrm>
+          <a:prstGeom prst="line">
+            <a:avLst/>
+          </a:prstGeom>
+          <a:ln w="22225">
+            <a:solidFill>
+              <a:srgbClr val="64748B"/>
+            </a:solidFill>
+            <a:tailEnd type="triangle" w="med" len="med"/>
+          </a:ln>
+        </p:spPr>
+        <p:style>
+          <a:lnRef idx="2">
+            <a:schemeClr val="accent1"/>
+          </a:lnRef>
+          <a:fillRef idx="0">
+            <a:schemeClr val="accent1"/>
+          </a:fillRef>
+          <a:effectRef idx="1">
+            <a:schemeClr val="accent1"/>
+          </a:effectRef>
+          <a:fontRef idx="minor">
+            <a:schemeClr val="tx1"/>
+          </a:fontRef>
+        </p:style>
+      </p:cxnSp>
+      <p:sp>
+        <p:nvSpPr>
+          <p:cNvPr id="6" name="Rounded Rectangle 5"/>
+          <p:cNvSpPr/>
+          <p:nvPr/>
+        </p:nvSpPr>
+        <p:spPr>
+          <a:xfrm>
+            <a:off x="2322576" y="2194560"/>
+            <a:ext cx="1737360" cy="1371600"/>
+          </a:xfrm>
+          <a:prstGeom prst="roundRect">
+            <a:avLst/>
+          </a:prstGeom>
+          <a:solidFill>
+            <a:srgbClr val="0EA5E9"/>
+          </a:solidFill>
+          <a:ln>
+            <a:solidFill>
+              <a:srgbClr val="0EA5E9"/>
+            </a:solidFill>
+          </a:ln>
+          <a:effectLst/>
+        </p:spPr>
+        <p:style>
+          <a:lnRef idx="1">
+            <a:schemeClr val="accent1"/>
+          </a:lnRef>
+          <a:fillRef idx="3">
+            <a:schemeClr val="accent1"/>
+          </a:fillRef>
+          <a:effectRef idx="2">
+            <a:schemeClr val="accent1"/>
+          </a:effectRef>
+          <a:fontRef idx="minor">
+            <a:schemeClr val="lt1"/>
+          </a:fontRef>
+        </p:style>
+        <p:txBody>
+          <a:bodyPr rtlCol="0" anchor="ctr" wrap="square" tIns="25400" bIns="25400"/>
+          <a:lstStyle/>
+          <a:p>
+            <a:pPr algn="ctr"/>
+            <a:r>
+              <a:rPr sz="1200" b="1">
+                <a:solidFill>
+                  <a:srgbClr val="FFFFFF"/>
+                </a:solidFill>
+                <a:latin typeface="PingFang TC"/>
+                <a:ea typeface="PingFang TC"/>
+              </a:rPr>
+              <a:t>② 組短碼</a:t>
+            </a:r>
+          </a:p>
+          <a:p>
+            <a:pPr algn="ctr"/>
+            <a:r>
+              <a:rPr sz="1200" b="0">
+                <a:solidFill>
+                  <a:srgbClr val="FFFFFF"/>
+                </a:solidFill>
+                <a:latin typeface="PingFang TC"/>
+                <a:ea typeface="PingFang TC"/>
+              </a:rPr>
+              <a:t>short_url =</a:t>
+            </a:r>
+          </a:p>
+          <a:p>
+            <a:pPr algn="ctr"/>
+            <a:r>
+              <a:rPr sz="1200" b="0">
+                <a:solidFill>
+                  <a:srgbClr val="FFFFFF"/>
+                </a:solidFill>
+                <a:latin typeface="PingFang TC"/>
+                <a:ea typeface="PingFang TC"/>
+              </a:rPr>
+              <a:t>BASE_URL+"/r/{token}"</a:t>
+            </a:r>
+          </a:p>
+        </p:txBody>
+      </p:sp>
+      <p:cxnSp>
+        <p:nvCxnSpPr>
+          <p:cNvPr id="7" name="Connector 6"/>
+          <p:cNvCxnSpPr/>
+          <p:nvPr/>
+        </p:nvCxnSpPr>
+        <p:spPr>
+          <a:xfrm>
+            <a:off x="4059936" y="2880360"/>
+            <a:ext cx="128016" cy="0"/>
+          </a:xfrm>
+          <a:prstGeom prst="line">
+            <a:avLst/>
+          </a:prstGeom>
+          <a:ln w="22225">
+            <a:solidFill>
+              <a:srgbClr val="64748B"/>
+            </a:solidFill>
+            <a:tailEnd type="triangle" w="med" len="med"/>
+          </a:ln>
+        </p:spPr>
+        <p:style>
+          <a:lnRef idx="2">
+            <a:schemeClr val="accent1"/>
+          </a:lnRef>
+          <a:fillRef idx="0">
+            <a:schemeClr val="accent1"/>
+          </a:fillRef>
+          <a:effectRef idx="1">
+            <a:schemeClr val="accent1"/>
+          </a:effectRef>
+          <a:fontRef idx="minor">
+            <a:schemeClr val="tx1"/>
+          </a:fontRef>
+        </p:style>
+      </p:cxnSp>
+      <p:sp>
+        <p:nvSpPr>
+          <p:cNvPr id="8" name="Rounded Rectangle 7"/>
+          <p:cNvSpPr/>
+          <p:nvPr/>
+        </p:nvSpPr>
+        <p:spPr>
+          <a:xfrm>
+            <a:off x="4187952" y="2194560"/>
+            <a:ext cx="1737360" cy="1371600"/>
+          </a:xfrm>
+          <a:prstGeom prst="roundRect">
+            <a:avLst/>
+          </a:prstGeom>
+          <a:solidFill>
+            <a:srgbClr val="059669"/>
+          </a:solidFill>
+          <a:ln>
+            <a:solidFill>
+              <a:srgbClr val="059669"/>
+            </a:solidFill>
+          </a:ln>
+          <a:effectLst/>
+        </p:spPr>
+        <p:style>
+          <a:lnRef idx="1">
+            <a:schemeClr val="accent1"/>
+          </a:lnRef>
+          <a:fillRef idx="3">
+            <a:schemeClr val="accent1"/>
+          </a:fillRef>
+          <a:effectRef idx="2">
+            <a:schemeClr val="accent1"/>
+          </a:effectRef>
+          <a:fontRef idx="minor">
+            <a:schemeClr val="lt1"/>
+          </a:fontRef>
+        </p:style>
+        <p:txBody>
+          <a:bodyPr rtlCol="0" anchor="ctr" wrap="square" tIns="25400" bIns="25400"/>
+          <a:lstStyle/>
+          <a:p>
+            <a:pPr algn="ctr"/>
+            <a:r>
+              <a:rPr sz="1200" b="1">
+                <a:solidFill>
+                  <a:srgbClr val="FFFFFF"/>
+                </a:solidFill>
+                <a:latin typeface="PingFang TC"/>
+                <a:ea typeface="PingFang TC"/>
+              </a:rPr>
+              <a:t>③④ 算矩陣</a:t>
+            </a:r>
+          </a:p>
+          <a:p>
+            <a:pPr algn="ctr"/>
+            <a:r>
+              <a:rPr sz="1200" b="0">
+                <a:solidFill>
+                  <a:srgbClr val="FFFFFF"/>
+                </a:solidFill>
+                <a:latin typeface="PingFang TC"/>
+                <a:ea typeface="PingFang TC"/>
+              </a:rPr>
+              <a:t>編碼→糾錯(RS)</a:t>
+            </a:r>
+          </a:p>
+          <a:p>
+            <a:pPr algn="ctr"/>
+            <a:r>
+              <a:rPr sz="1200" b="0">
+                <a:solidFill>
+                  <a:srgbClr val="FFFFFF"/>
+                </a:solidFill>
+                <a:latin typeface="PingFang TC"/>
+                <a:ea typeface="PingFang TC"/>
+              </a:rPr>
+              <a:t>→2D 模組矩陣</a:t>
+            </a:r>
+          </a:p>
+        </p:txBody>
+      </p:sp>
+      <p:cxnSp>
+        <p:nvCxnSpPr>
+          <p:cNvPr id="9" name="Connector 8"/>
+          <p:cNvCxnSpPr/>
+          <p:nvPr/>
+        </p:nvCxnSpPr>
+        <p:spPr>
+          <a:xfrm>
+            <a:off x="5925312" y="2880360"/>
+            <a:ext cx="128016" cy="0"/>
+          </a:xfrm>
+          <a:prstGeom prst="line">
+            <a:avLst/>
+          </a:prstGeom>
+          <a:ln w="22225">
+            <a:solidFill>
+              <a:srgbClr val="64748B"/>
+            </a:solidFill>
+            <a:tailEnd type="triangle" w="med" len="med"/>
+          </a:ln>
+        </p:spPr>
+        <p:style>
+          <a:lnRef idx="2">
+            <a:schemeClr val="accent1"/>
+          </a:lnRef>
+          <a:fillRef idx="0">
+            <a:schemeClr val="accent1"/>
+          </a:fillRef>
+          <a:effectRef idx="1">
+            <a:schemeClr val="accent1"/>
+          </a:effectRef>
+          <a:fontRef idx="minor">
+            <a:schemeClr val="tx1"/>
+          </a:fontRef>
+        </p:style>
+      </p:cxnSp>
+      <p:sp>
+        <p:nvSpPr>
+          <p:cNvPr id="10" name="Rounded Rectangle 9"/>
+          <p:cNvSpPr/>
+          <p:nvPr/>
+        </p:nvSpPr>
+        <p:spPr>
+          <a:xfrm>
+            <a:off x="6053328" y="2194560"/>
+            <a:ext cx="1737360" cy="1371600"/>
+          </a:xfrm>
+          <a:prstGeom prst="roundRect">
+            <a:avLst/>
+          </a:prstGeom>
+          <a:solidFill>
+            <a:srgbClr val="7C3AED"/>
+          </a:solidFill>
+          <a:ln>
+            <a:solidFill>
+              <a:srgbClr val="7C3AED"/>
+            </a:solidFill>
+          </a:ln>
+          <a:effectLst/>
+        </p:spPr>
+        <p:style>
+          <a:lnRef idx="1">
+            <a:schemeClr val="accent1"/>
+          </a:lnRef>
+          <a:fillRef idx="3">
+            <a:schemeClr val="accent1"/>
+          </a:fillRef>
+          <a:effectRef idx="2">
+            <a:schemeClr val="accent1"/>
+          </a:effectRef>
+          <a:fontRef idx="minor">
+            <a:schemeClr val="lt1"/>
+          </a:fontRef>
+        </p:style>
+        <p:txBody>
+          <a:bodyPr rtlCol="0" anchor="ctr" wrap="square" tIns="25400" bIns="25400"/>
+          <a:lstStyle/>
+          <a:p>
+            <a:pPr algn="ctr"/>
+            <a:r>
+              <a:rPr sz="1200" b="1">
+                <a:solidFill>
+                  <a:srgbClr val="FFFFFF"/>
+                </a:solidFill>
+                <a:latin typeface="PingFang TC"/>
+                <a:ea typeface="PingFang TC"/>
+              </a:rPr>
+              <a:t>⑤ 算像素</a:t>
+            </a:r>
+          </a:p>
+          <a:p>
+            <a:pPr algn="ctr"/>
+            <a:r>
+              <a:rPr sz="1200" b="0">
+                <a:solidFill>
+                  <a:srgbClr val="FFFFFF"/>
+                </a:solidFill>
+                <a:latin typeface="PingFang TC"/>
+                <a:ea typeface="PingFang TC"/>
+              </a:rPr>
+              <a:t>每模組→方塊</a:t>
+            </a:r>
+          </a:p>
+          <a:p>
+            <a:pPr algn="ctr"/>
+            <a:r>
+              <a:rPr sz="1200" b="0">
+                <a:solidFill>
+                  <a:srgbClr val="FFFFFF"/>
+                </a:solidFill>
+                <a:latin typeface="PingFang TC"/>
+                <a:ea typeface="PingFang TC"/>
+              </a:rPr>
+              <a:t>border=quiet zone</a:t>
+            </a:r>
+          </a:p>
+        </p:txBody>
+      </p:sp>
+      <p:cxnSp>
+        <p:nvCxnSpPr>
+          <p:cNvPr id="11" name="Connector 10"/>
+          <p:cNvCxnSpPr/>
+          <p:nvPr/>
+        </p:nvCxnSpPr>
+        <p:spPr>
+          <a:xfrm>
+            <a:off x="7790688" y="2880360"/>
+            <a:ext cx="128016" cy="0"/>
+          </a:xfrm>
+          <a:prstGeom prst="line">
+            <a:avLst/>
+          </a:prstGeom>
+          <a:ln w="22225">
+            <a:solidFill>
+              <a:srgbClr val="64748B"/>
+            </a:solidFill>
+            <a:tailEnd type="triangle" w="med" len="med"/>
+          </a:ln>
+        </p:spPr>
+        <p:style>
+          <a:lnRef idx="2">
+            <a:schemeClr val="accent1"/>
+          </a:lnRef>
+          <a:fillRef idx="0">
+            <a:schemeClr val="accent1"/>
+          </a:fillRef>
+          <a:effectRef idx="1">
+            <a:schemeClr val="accent1"/>
+          </a:effectRef>
+          <a:fontRef idx="minor">
+            <a:schemeClr val="tx1"/>
+          </a:fontRef>
+        </p:style>
+      </p:cxnSp>
+      <p:sp>
+        <p:nvSpPr>
+          <p:cNvPr id="12" name="Rounded Rectangle 11"/>
+          <p:cNvSpPr/>
+          <p:nvPr/>
+        </p:nvSpPr>
+        <p:spPr>
+          <a:xfrm>
+            <a:off x="7918704" y="2194560"/>
+            <a:ext cx="1737360" cy="1371600"/>
+          </a:xfrm>
+          <a:prstGeom prst="roundRect">
+            <a:avLst/>
+          </a:prstGeom>
+          <a:solidFill>
+            <a:srgbClr val="DC2626"/>
+          </a:solidFill>
+          <a:ln>
+            <a:solidFill>
+              <a:srgbClr val="DC2626"/>
+            </a:solidFill>
+          </a:ln>
+          <a:effectLst/>
+        </p:spPr>
+        <p:style>
+          <a:lnRef idx="1">
+            <a:schemeClr val="accent1"/>
+          </a:lnRef>
+          <a:fillRef idx="3">
+            <a:schemeClr val="accent1"/>
+          </a:fillRef>
+          <a:effectRef idx="2">
+            <a:schemeClr val="accent1"/>
+          </a:effectRef>
+          <a:fontRef idx="minor">
+            <a:schemeClr val="lt1"/>
+          </a:fontRef>
+        </p:style>
+        <p:txBody>
+          <a:bodyPr rtlCol="0" anchor="ctr" wrap="square" tIns="25400" bIns="25400"/>
+          <a:lstStyle/>
+          <a:p>
+            <a:pPr algn="ctr"/>
+            <a:r>
+              <a:rPr sz="1200" b="1">
+                <a:solidFill>
+                  <a:srgbClr val="FFFFFF"/>
+                </a:solidFill>
+                <a:latin typeface="PingFang TC"/>
+                <a:ea typeface="PingFang TC"/>
+              </a:rPr>
+              <a:t>⑥⑦ PNG</a:t>
+            </a:r>
+          </a:p>
+          <a:p>
+            <a:pPr algn="ctr"/>
+            <a:r>
+              <a:rPr sz="1200" b="0">
+                <a:solidFill>
+                  <a:srgbClr val="FFFFFF"/>
+                </a:solidFill>
+                <a:latin typeface="PingFang TC"/>
+                <a:ea typeface="PingFang TC"/>
+              </a:rPr>
+              <a:t>BytesIO</a:t>
+            </a:r>
+          </a:p>
+          <a:p>
+            <a:pPr algn="ctr"/>
+            <a:r>
+              <a:rPr sz="1200" b="0">
+                <a:solidFill>
+                  <a:srgbClr val="FFFFFF"/>
+                </a:solidFill>
+                <a:latin typeface="PingFang TC"/>
+                <a:ea typeface="PingFang TC"/>
+              </a:rPr>
+              <a:t>選填 dimension 縮放</a:t>
+            </a:r>
+          </a:p>
+        </p:txBody>
+      </p:sp>
+      <p:cxnSp>
+        <p:nvCxnSpPr>
+          <p:cNvPr id="13" name="Connector 12"/>
+          <p:cNvCxnSpPr/>
+          <p:nvPr/>
+        </p:nvCxnSpPr>
+        <p:spPr>
+          <a:xfrm>
+            <a:off x="9656064" y="2880360"/>
+            <a:ext cx="128016" cy="0"/>
+          </a:xfrm>
+          <a:prstGeom prst="line">
+            <a:avLst/>
+          </a:prstGeom>
+          <a:ln w="22225">
+            <a:solidFill>
+              <a:srgbClr val="64748B"/>
+            </a:solidFill>
+            <a:tailEnd type="triangle" w="med" len="med"/>
+          </a:ln>
+        </p:spPr>
+        <p:style>
+          <a:lnRef idx="2">
+            <a:schemeClr val="accent1"/>
+          </a:lnRef>
+          <a:fillRef idx="0">
+            <a:schemeClr val="accent1"/>
+          </a:fillRef>
+          <a:effectRef idx="1">
+            <a:schemeClr val="accent1"/>
+          </a:effectRef>
+          <a:fontRef idx="minor">
+            <a:schemeClr val="tx1"/>
+          </a:fontRef>
+        </p:style>
+      </p:cxnSp>
+      <p:sp>
+        <p:nvSpPr>
+          <p:cNvPr id="14" name="Rounded Rectangle 13"/>
+          <p:cNvSpPr/>
+          <p:nvPr/>
+        </p:nvSpPr>
+        <p:spPr>
+          <a:xfrm>
+            <a:off x="9784080" y="2194560"/>
+            <a:ext cx="1737360" cy="1371600"/>
+          </a:xfrm>
+          <a:prstGeom prst="roundRect">
+            <a:avLst/>
+          </a:prstGeom>
+          <a:solidFill>
+            <a:srgbClr val="D97706"/>
+          </a:solidFill>
+          <a:ln>
+            <a:solidFill>
+              <a:srgbClr val="D97706"/>
+            </a:solidFill>
+          </a:ln>
+          <a:effectLst/>
+        </p:spPr>
+        <p:style>
+          <a:lnRef idx="1">
+            <a:schemeClr val="accent1"/>
+          </a:lnRef>
+          <a:fillRef idx="3">
+            <a:schemeClr val="accent1"/>
+          </a:fillRef>
+          <a:effectRef idx="2">
+            <a:schemeClr val="accent1"/>
+          </a:effectRef>
+          <a:fontRef idx="minor">
+            <a:schemeClr val="lt1"/>
+          </a:fontRef>
+        </p:style>
+        <p:txBody>
+          <a:bodyPr rtlCol="0" anchor="ctr" wrap="square" tIns="25400" bIns="25400"/>
+          <a:lstStyle/>
+          <a:p>
+            <a:pPr algn="ctr"/>
+            <a:r>
+              <a:rPr sz="1200" b="1">
+                <a:solidFill>
+                  <a:srgbClr val="FFFFFF"/>
+                </a:solidFill>
+                <a:latin typeface="PingFang TC"/>
+                <a:ea typeface="PingFang TC"/>
+              </a:rPr>
+              <a:t>⑧ 串流</a:t>
+            </a:r>
+          </a:p>
+          <a:p>
+            <a:pPr algn="ctr"/>
+            <a:r>
+              <a:rPr sz="1200" b="0">
+                <a:solidFill>
+                  <a:srgbClr val="FFFFFF"/>
+                </a:solidFill>
+                <a:latin typeface="PingFang TC"/>
+                <a:ea typeface="PingFang TC"/>
+              </a:rPr>
+              <a:t>StreamingResponse</a:t>
+            </a:r>
+          </a:p>
+          <a:p>
+            <a:pPr algn="ctr"/>
+            <a:r>
+              <a:rPr sz="1200" b="0">
+                <a:solidFill>
+                  <a:srgbClr val="FFFFFF"/>
+                </a:solidFill>
+                <a:latin typeface="PingFang TC"/>
+                <a:ea typeface="PingFang TC"/>
+              </a:rPr>
+              <a:t>image/png</a:t>
+            </a:r>
+          </a:p>
+        </p:txBody>
+      </p:sp>
+      <p:sp>
+        <p:nvSpPr>
+          <p:cNvPr id="15" name="TextBox 14"/>
           <p:cNvSpPr txBox="1"/>
           <p:nvPr/>
         </p:nvSpPr>
         <p:spPr>
           <a:xfrm>
-            <a:off x="640080" y="1737360"/>
-            <a:ext cx="10789920" cy="4572000"/>
+            <a:off x="502920" y="4023360"/>
+            <a:ext cx="11155680" cy="2194560"/>
           </a:xfrm>
           <a:prstGeom prst="rect">
             <a:avLst/>
@@ -4301,161 +4765,76 @@
           <a:noFill/>
         </p:spPr>
         <p:txBody>
-          <a:bodyPr wrap="square">
+          <a:bodyPr wrap="square" anchor="t">
             <a:spAutoFit/>
           </a:bodyPr>
           <a:lstStyle/>
           <a:p>
-            <a:pPr>
+            <a:pPr algn="l">
               <a:spcAft>
                 <a:spcPts val="800"/>
               </a:spcAft>
             </a:pPr>
             <a:r>
-              <a:rPr sz="1500" b="0">
+              <a:rPr sz="1400" b="1">
                 <a:solidFill>
                   <a:srgbClr val="0F172A"/>
                 </a:solidFill>
                 <a:latin typeface="PingFang TC"/>
                 <a:ea typeface="PingFang TC"/>
               </a:rPr>
-              <a:t>•  演算法：SHA-256(url + nonce) → Base62 → 取前 8 碼</a:t>
-            </a:r>
-          </a:p>
-          <a:p>
-            <a:pPr>
-              <a:spcAft>
-                <a:spcPts val="800"/>
-              </a:spcAft>
-            </a:pPr>
-            <a:r>
-              <a:rPr sz="1500" b="0">
-                <a:solidFill>
-                  <a:srgbClr val="0F172A"/>
-                </a:solidFill>
-                <a:latin typeface="PingFang TC"/>
-                <a:ea typeface="PingFang TC"/>
-              </a:rPr>
-              <a:t>•  nonce = 時間戳_重試次數，打破 SHA-256 的確定性</a:t>
-            </a:r>
-          </a:p>
-          <a:p>
-            <a:pPr lvl="1">
-              <a:spcAft>
-                <a:spcPts val="800"/>
-              </a:spcAft>
-            </a:pPr>
-            <a:r>
-              <a:rPr sz="1400" b="0">
+              <a:t>⚠ 編進 QR 的是『不變的短碼 /r/{token}』，不是原始 URL —— dynamic QR 關鍵：改目標 URL 不需重生圖。</a:t>
+            </a:r>
+          </a:p>
+          <a:p>
+            <a:pPr algn="l">
+              <a:spcAft>
+                <a:spcPts val="600"/>
+              </a:spcAft>
+            </a:pPr>
+            <a:r>
+              <a:rPr sz="1300" b="0">
                 <a:solidFill>
                   <a:srgbClr val="64748B"/>
                 </a:solidFill>
                 <a:latin typeface="PingFang TC"/>
                 <a:ea typeface="PingFang TC"/>
               </a:rPr>
-              <a:t>–  作用：讓同一個 URL 每次也產生不同 token（第 4 題：不去重）</a:t>
-            </a:r>
-          </a:p>
-          <a:p>
-            <a:pPr lvl="1">
-              <a:spcAft>
-                <a:spcPts val="800"/>
-              </a:spcAft>
-            </a:pPr>
-            <a:r>
-              <a:rPr sz="1400" b="0">
+              <a:t>QR 原理：字串 → byte 編碼 → Reed-Solomon 糾錯（破損仍可掃）→ 排入矩陣（finder/timing/alignment + 遮罩）。</a:t>
+            </a:r>
+          </a:p>
+          <a:p>
+            <a:pPr algn="l">
+              <a:spcAft>
+                <a:spcPts val="600"/>
+              </a:spcAft>
+            </a:pPr>
+            <a:r>
+              <a:rPr sz="1300" b="0">
                 <a:solidFill>
                   <a:srgbClr val="64748B"/>
                 </a:solidFill>
                 <a:latin typeface="PingFang TC"/>
                 <a:ea typeface="PingFang TC"/>
               </a:rPr>
-              <a:t>–  ⚠ nonce 只解決『確定性』，不解決『碰撞』</a:t>
-            </a:r>
-          </a:p>
-          <a:p>
-            <a:pPr>
-              <a:spcAft>
-                <a:spcPts val="800"/>
-              </a:spcAft>
-            </a:pPr>
-            <a:r>
-              <a:rPr sz="1500" b="0">
-                <a:solidFill>
-                  <a:srgbClr val="0F172A"/>
-                </a:solidFill>
-                <a:latin typeface="PingFang TC"/>
-                <a:ea typeface="PingFang TC"/>
-              </a:rPr>
-              <a:t>•  碰撞數學：截斷成 8 碼後空間 = 62^8 ≈ 2.18×10^14</a:t>
-            </a:r>
-          </a:p>
-          <a:p>
-            <a:pPr lvl="1">
-              <a:spcAft>
-                <a:spcPts val="800"/>
-              </a:spcAft>
-            </a:pPr>
-            <a:r>
-              <a:rPr sz="1400" b="0">
+              <a:t>圖片是靜態內容 → 原型即時生成；正式版預生成存 object store + CDN（第 15 題）。</a:t>
+            </a:r>
+          </a:p>
+          <a:p>
+            <a:pPr algn="l">
+              <a:spcAft>
+                <a:spcPts val="400"/>
+              </a:spcAft>
+            </a:pPr>
+            <a:r>
+              <a:rPr sz="1300" b="0">
                 <a:solidFill>
                   <a:srgbClr val="64748B"/>
                 </a:solidFill>
                 <a:latin typeface="PingFang TC"/>
                 <a:ea typeface="PingFang TC"/>
               </a:rPr>
-              <a:t>–  10 億規模下碰撞『必然』發生（預期 ~2,290 次）</a:t>
-            </a:r>
-          </a:p>
-          <a:p>
-            <a:pPr lvl="1">
-              <a:spcAft>
-                <a:spcPts val="800"/>
-              </a:spcAft>
-            </a:pPr>
-            <a:r>
-              <a:rPr sz="1400" b="0">
-                <a:solidFill>
-                  <a:srgbClr val="64748B"/>
-                </a:solidFill>
-                <a:latin typeface="PingFang TC"/>
-                <a:ea typeface="PingFang TC"/>
-              </a:rPr>
-              <a:t>–  7 碼 → 8 碼：空間 ×62、預期碰撞降到 1/62</a:t>
-            </a:r>
-          </a:p>
-          <a:p>
-            <a:pPr>
-              <a:spcAft>
-                <a:spcPts val="800"/>
-              </a:spcAft>
-            </a:pPr>
-            <a:r>
-              <a:rPr sz="1500" b="0">
-                <a:solidFill>
-                  <a:srgbClr val="0F172A"/>
-                </a:solidFill>
-                <a:latin typeface="PingFang TC"/>
-                <a:ea typeface="PingFang TC"/>
-              </a:rPr>
-              <a:t>•  安全網：DB token UNIQUE + 直接插入例外重試（≤10）</a:t>
-            </a:r>
-          </a:p>
-          <a:p>
-            <a:pPr lvl="1">
-              <a:spcAft>
-                <a:spcPts val="800"/>
-              </a:spcAft>
-            </a:pPr>
-            <a:r>
-              <a:rPr sz="1400" b="0">
-                <a:solidFill>
-                  <a:srgbClr val="64748B"/>
-                </a:solidFill>
-                <a:latin typeface="PingFang TC"/>
-                <a:ea typeface="PingFang TC"/>
-              </a:rPr>
-              <a:t>–  每筆插入碰撞率 ~0.0005%，重試幾乎都第 2 次成功</a:t>
+              <a:t>樣式參數：dimension（像素邊長）· color（hex 黑塊色）· border（quiet zone 模組數）。</a:t>
             </a:r>
           </a:p>
         </p:txBody>
@@ -4557,6 +4936,301 @@
                 <a:latin typeface="PingFang TC"/>
                 <a:ea typeface="PingFang TC"/>
               </a:rPr>
+              <a:t>08 · DEEP DIVE</a:t>
+            </a:r>
+          </a:p>
+          <a:p>
+            <a:pPr algn="l">
+              <a:spcAft>
+                <a:spcPts val="400"/>
+              </a:spcAft>
+            </a:pPr>
+            <a:r>
+              <a:rPr sz="3000" b="1">
+                <a:solidFill>
+                  <a:srgbClr val="0F172A"/>
+                </a:solidFill>
+                <a:latin typeface="PingFang TC"/>
+                <a:ea typeface="PingFang TC"/>
+              </a:rPr>
+              <a:t>決策 1 — Token 生成與碰撞</a:t>
+            </a:r>
+          </a:p>
+        </p:txBody>
+      </p:sp>
+      <p:sp>
+        <p:nvSpPr>
+          <p:cNvPr id="4" name="TextBox 3"/>
+          <p:cNvSpPr txBox="1"/>
+          <p:nvPr/>
+        </p:nvSpPr>
+        <p:spPr>
+          <a:xfrm>
+            <a:off x="640080" y="1737360"/>
+            <a:ext cx="10789920" cy="4572000"/>
+          </a:xfrm>
+          <a:prstGeom prst="rect">
+            <a:avLst/>
+          </a:prstGeom>
+          <a:noFill/>
+        </p:spPr>
+        <p:txBody>
+          <a:bodyPr wrap="square">
+            <a:spAutoFit/>
+          </a:bodyPr>
+          <a:lstStyle/>
+          <a:p>
+            <a:pPr>
+              <a:spcAft>
+                <a:spcPts val="800"/>
+              </a:spcAft>
+            </a:pPr>
+            <a:r>
+              <a:rPr sz="1500" b="0">
+                <a:solidFill>
+                  <a:srgbClr val="0F172A"/>
+                </a:solidFill>
+                <a:latin typeface="PingFang TC"/>
+                <a:ea typeface="PingFang TC"/>
+              </a:rPr>
+              <a:t>•  演算法：SHA-256(url + nonce) → Base62 → 取前 8 碼</a:t>
+            </a:r>
+          </a:p>
+          <a:p>
+            <a:pPr>
+              <a:spcAft>
+                <a:spcPts val="800"/>
+              </a:spcAft>
+            </a:pPr>
+            <a:r>
+              <a:rPr sz="1500" b="0">
+                <a:solidFill>
+                  <a:srgbClr val="0F172A"/>
+                </a:solidFill>
+                <a:latin typeface="PingFang TC"/>
+                <a:ea typeface="PingFang TC"/>
+              </a:rPr>
+              <a:t>•  nonce = 時間戳_重試次數，打破 SHA-256 的確定性</a:t>
+            </a:r>
+          </a:p>
+          <a:p>
+            <a:pPr lvl="1">
+              <a:spcAft>
+                <a:spcPts val="800"/>
+              </a:spcAft>
+            </a:pPr>
+            <a:r>
+              <a:rPr sz="1400" b="0">
+                <a:solidFill>
+                  <a:srgbClr val="64748B"/>
+                </a:solidFill>
+                <a:latin typeface="PingFang TC"/>
+                <a:ea typeface="PingFang TC"/>
+              </a:rPr>
+              <a:t>–  作用：讓同一個 URL 每次也產生不同 token（第 4 題：不去重）</a:t>
+            </a:r>
+          </a:p>
+          <a:p>
+            <a:pPr lvl="1">
+              <a:spcAft>
+                <a:spcPts val="800"/>
+              </a:spcAft>
+            </a:pPr>
+            <a:r>
+              <a:rPr sz="1400" b="0">
+                <a:solidFill>
+                  <a:srgbClr val="64748B"/>
+                </a:solidFill>
+                <a:latin typeface="PingFang TC"/>
+                <a:ea typeface="PingFang TC"/>
+              </a:rPr>
+              <a:t>–  ⚠ nonce 只解決『確定性』，不解決『碰撞』</a:t>
+            </a:r>
+          </a:p>
+          <a:p>
+            <a:pPr>
+              <a:spcAft>
+                <a:spcPts val="800"/>
+              </a:spcAft>
+            </a:pPr>
+            <a:r>
+              <a:rPr sz="1500" b="0">
+                <a:solidFill>
+                  <a:srgbClr val="0F172A"/>
+                </a:solidFill>
+                <a:latin typeface="PingFang TC"/>
+                <a:ea typeface="PingFang TC"/>
+              </a:rPr>
+              <a:t>•  碰撞數學：截斷成 8 碼後空間 = 62^8 ≈ 2.18×10^14</a:t>
+            </a:r>
+          </a:p>
+          <a:p>
+            <a:pPr lvl="1">
+              <a:spcAft>
+                <a:spcPts val="800"/>
+              </a:spcAft>
+            </a:pPr>
+            <a:r>
+              <a:rPr sz="1400" b="0">
+                <a:solidFill>
+                  <a:srgbClr val="64748B"/>
+                </a:solidFill>
+                <a:latin typeface="PingFang TC"/>
+                <a:ea typeface="PingFang TC"/>
+              </a:rPr>
+              <a:t>–  10 億規模下碰撞『必然』發生（預期 ~2,290 次）</a:t>
+            </a:r>
+          </a:p>
+          <a:p>
+            <a:pPr lvl="1">
+              <a:spcAft>
+                <a:spcPts val="800"/>
+              </a:spcAft>
+            </a:pPr>
+            <a:r>
+              <a:rPr sz="1400" b="0">
+                <a:solidFill>
+                  <a:srgbClr val="64748B"/>
+                </a:solidFill>
+                <a:latin typeface="PingFang TC"/>
+                <a:ea typeface="PingFang TC"/>
+              </a:rPr>
+              <a:t>–  7 碼 → 8 碼：空間 ×62、預期碰撞降到 1/62</a:t>
+            </a:r>
+          </a:p>
+          <a:p>
+            <a:pPr>
+              <a:spcAft>
+                <a:spcPts val="800"/>
+              </a:spcAft>
+            </a:pPr>
+            <a:r>
+              <a:rPr sz="1500" b="0">
+                <a:solidFill>
+                  <a:srgbClr val="0F172A"/>
+                </a:solidFill>
+                <a:latin typeface="PingFang TC"/>
+                <a:ea typeface="PingFang TC"/>
+              </a:rPr>
+              <a:t>•  安全網：DB token UNIQUE + 直接插入例外重試（≤10）</a:t>
+            </a:r>
+          </a:p>
+          <a:p>
+            <a:pPr lvl="1">
+              <a:spcAft>
+                <a:spcPts val="800"/>
+              </a:spcAft>
+            </a:pPr>
+            <a:r>
+              <a:rPr sz="1400" b="0">
+                <a:solidFill>
+                  <a:srgbClr val="64748B"/>
+                </a:solidFill>
+                <a:latin typeface="PingFang TC"/>
+                <a:ea typeface="PingFang TC"/>
+              </a:rPr>
+              <a:t>–  每筆插入碰撞率 ~0.0005%，重試幾乎都第 2 次成功</a:t>
+            </a:r>
+          </a:p>
+        </p:txBody>
+      </p:sp>
+    </p:spTree>
+  </p:cSld>
+  <p:clrMapOvr>
+    <a:masterClrMapping/>
+  </p:clrMapOvr>
+</p:sld>
+</file>
+
+<file path=ppt/slides/slide13.xml><?xml version="1.0" encoding="utf-8"?>
+<p:sld xmlns:a="http://schemas.openxmlformats.org/drawingml/2006/main" xmlns:p="http://schemas.openxmlformats.org/presentationml/2006/main" xmlns:r="http://schemas.openxmlformats.org/officeDocument/2006/relationships">
+  <p:cSld>
+    <p:spTree>
+      <p:nvGrpSpPr>
+        <p:cNvPr id="1" name=""/>
+        <p:cNvGrpSpPr/>
+        <p:nvPr/>
+      </p:nvGrpSpPr>
+      <p:grpSpPr/>
+      <p:sp>
+        <p:nvSpPr>
+          <p:cNvPr id="2" name="Rectangle 1"/>
+          <p:cNvSpPr/>
+          <p:nvPr/>
+        </p:nvSpPr>
+        <p:spPr>
+          <a:xfrm>
+            <a:off x="0" y="0"/>
+            <a:ext cx="164592" cy="6858000"/>
+          </a:xfrm>
+          <a:prstGeom prst="rect">
+            <a:avLst/>
+          </a:prstGeom>
+          <a:solidFill>
+            <a:srgbClr val="2563EB"/>
+          </a:solidFill>
+          <a:ln>
+            <a:noFill/>
+          </a:ln>
+          <a:effectLst/>
+        </p:spPr>
+        <p:style>
+          <a:lnRef idx="1">
+            <a:schemeClr val="accent1"/>
+          </a:lnRef>
+          <a:fillRef idx="3">
+            <a:schemeClr val="accent1"/>
+          </a:fillRef>
+          <a:effectRef idx="2">
+            <a:schemeClr val="accent1"/>
+          </a:effectRef>
+          <a:fontRef idx="minor">
+            <a:schemeClr val="lt1"/>
+          </a:fontRef>
+        </p:style>
+        <p:txBody>
+          <a:bodyPr rtlCol="0" anchor="ctr"/>
+          <a:lstStyle/>
+          <a:p>
+            <a:pPr algn="ctr"/>
+          </a:p>
+        </p:txBody>
+      </p:sp>
+      <p:sp>
+        <p:nvSpPr>
+          <p:cNvPr id="3" name="TextBox 2"/>
+          <p:cNvSpPr txBox="1"/>
+          <p:nvPr/>
+        </p:nvSpPr>
+        <p:spPr>
+          <a:xfrm>
+            <a:off x="502920" y="320040"/>
+            <a:ext cx="10972800" cy="1005840"/>
+          </a:xfrm>
+          <a:prstGeom prst="rect">
+            <a:avLst/>
+          </a:prstGeom>
+          <a:noFill/>
+        </p:spPr>
+        <p:txBody>
+          <a:bodyPr wrap="square" anchor="t">
+            <a:spAutoFit/>
+          </a:bodyPr>
+          <a:lstStyle/>
+          <a:p>
+            <a:pPr algn="l">
+              <a:spcAft>
+                <a:spcPts val="200"/>
+              </a:spcAft>
+            </a:pPr>
+            <a:r>
+              <a:rPr sz="1300" b="1">
+                <a:solidFill>
+                  <a:srgbClr val="2563EB"/>
+                </a:solidFill>
+                <a:latin typeface="PingFang TC"/>
+                <a:ea typeface="PingFang TC"/>
+              </a:rPr>
               <a:t>08b · TOKEN INTERNALS</a:t>
             </a:r>
           </a:p>
@@ -5306,7 +5980,7 @@
 </p:sld>
 </file>
 
-<file path=ppt/slides/slide13.xml><?xml version="1.0" encoding="utf-8"?>
+<file path=ppt/slides/slide14.xml><?xml version="1.0" encoding="utf-8"?>
 <p:sld xmlns:a="http://schemas.openxmlformats.org/drawingml/2006/main" xmlns:p="http://schemas.openxmlformats.org/presentationml/2006/main" xmlns:r="http://schemas.openxmlformats.org/officeDocument/2006/relationships">
   <p:cSld>
     <p:spTree>
@@ -6347,392 +7021,6 @@
 </p:sld>
 </file>
 
-<file path=ppt/slides/slide14.xml><?xml version="1.0" encoding="utf-8"?>
-<p:sld xmlns:a="http://schemas.openxmlformats.org/drawingml/2006/main" xmlns:p="http://schemas.openxmlformats.org/presentationml/2006/main" xmlns:r="http://schemas.openxmlformats.org/officeDocument/2006/relationships">
-  <p:cSld>
-    <p:spTree>
-      <p:nvGrpSpPr>
-        <p:cNvPr id="1" name=""/>
-        <p:cNvGrpSpPr/>
-        <p:nvPr/>
-      </p:nvGrpSpPr>
-      <p:grpSpPr/>
-      <p:sp>
-        <p:nvSpPr>
-          <p:cNvPr id="2" name="Rectangle 1"/>
-          <p:cNvSpPr/>
-          <p:nvPr/>
-        </p:nvSpPr>
-        <p:spPr>
-          <a:xfrm>
-            <a:off x="0" y="0"/>
-            <a:ext cx="164592" cy="6858000"/>
-          </a:xfrm>
-          <a:prstGeom prst="rect">
-            <a:avLst/>
-          </a:prstGeom>
-          <a:solidFill>
-            <a:srgbClr val="2563EB"/>
-          </a:solidFill>
-          <a:ln>
-            <a:noFill/>
-          </a:ln>
-          <a:effectLst/>
-        </p:spPr>
-        <p:style>
-          <a:lnRef idx="1">
-            <a:schemeClr val="accent1"/>
-          </a:lnRef>
-          <a:fillRef idx="3">
-            <a:schemeClr val="accent1"/>
-          </a:fillRef>
-          <a:effectRef idx="2">
-            <a:schemeClr val="accent1"/>
-          </a:effectRef>
-          <a:fontRef idx="minor">
-            <a:schemeClr val="lt1"/>
-          </a:fontRef>
-        </p:style>
-        <p:txBody>
-          <a:bodyPr rtlCol="0" anchor="ctr"/>
-          <a:lstStyle/>
-          <a:p>
-            <a:pPr algn="ctr"/>
-          </a:p>
-        </p:txBody>
-      </p:sp>
-      <p:sp>
-        <p:nvSpPr>
-          <p:cNvPr id="3" name="TextBox 2"/>
-          <p:cNvSpPr txBox="1"/>
-          <p:nvPr/>
-        </p:nvSpPr>
-        <p:spPr>
-          <a:xfrm>
-            <a:off x="502920" y="320040"/>
-            <a:ext cx="10972800" cy="1005840"/>
-          </a:xfrm>
-          <a:prstGeom prst="rect">
-            <a:avLst/>
-          </a:prstGeom>
-          <a:noFill/>
-        </p:spPr>
-        <p:txBody>
-          <a:bodyPr wrap="square" anchor="t">
-            <a:spAutoFit/>
-          </a:bodyPr>
-          <a:lstStyle/>
-          <a:p>
-            <a:pPr algn="l">
-              <a:spcAft>
-                <a:spcPts val="200"/>
-              </a:spcAft>
-            </a:pPr>
-            <a:r>
-              <a:rPr sz="1300" b="1">
-                <a:solidFill>
-                  <a:srgbClr val="2563EB"/>
-                </a:solidFill>
-                <a:latin typeface="PingFang TC"/>
-                <a:ea typeface="PingFang TC"/>
-              </a:rPr>
-              <a:t>09 · DEEP DIVE</a:t>
-            </a:r>
-          </a:p>
-          <a:p>
-            <a:pPr algn="l">
-              <a:spcAft>
-                <a:spcPts val="400"/>
-              </a:spcAft>
-            </a:pPr>
-            <a:r>
-              <a:rPr sz="3000" b="1">
-                <a:solidFill>
-                  <a:srgbClr val="0F172A"/>
-                </a:solidFill>
-                <a:latin typeface="PingFang TC"/>
-                <a:ea typeface="PingFang TC"/>
-              </a:rPr>
-              <a:t>決策 2 — 302、快取、非同步</a:t>
-            </a:r>
-          </a:p>
-        </p:txBody>
-      </p:sp>
-      <p:sp>
-        <p:nvSpPr>
-          <p:cNvPr id="4" name="TextBox 3"/>
-          <p:cNvSpPr txBox="1"/>
-          <p:nvPr/>
-        </p:nvSpPr>
-        <p:spPr>
-          <a:xfrm>
-            <a:off x="640080" y="1737360"/>
-            <a:ext cx="5486400" cy="4572000"/>
-          </a:xfrm>
-          <a:prstGeom prst="rect">
-            <a:avLst/>
-          </a:prstGeom>
-          <a:noFill/>
-        </p:spPr>
-        <p:txBody>
-          <a:bodyPr wrap="square">
-            <a:spAutoFit/>
-          </a:bodyPr>
-          <a:lstStyle/>
-          <a:p>
-            <a:pPr>
-              <a:spcAft>
-                <a:spcPts val="800"/>
-              </a:spcAft>
-            </a:pPr>
-            <a:r>
-              <a:rPr sz="1400" b="0">
-                <a:solidFill>
-                  <a:srgbClr val="0F172A"/>
-                </a:solidFill>
-                <a:latin typeface="PingFang TC"/>
-                <a:ea typeface="PingFang TC"/>
-              </a:rPr>
-              <a:t>•  302 而非 301</a:t>
-            </a:r>
-          </a:p>
-          <a:p>
-            <a:pPr lvl="1">
-              <a:spcAft>
-                <a:spcPts val="800"/>
-              </a:spcAft>
-            </a:pPr>
-            <a:r>
-              <a:rPr sz="1300" b="0">
-                <a:solidFill>
-                  <a:srgbClr val="64748B"/>
-                </a:solidFill>
-                <a:latin typeface="PingFang TC"/>
-                <a:ea typeface="PingFang TC"/>
-              </a:rPr>
-              <a:t>–  301 被瀏覽器快取 → 跳過我方 server</a:t>
-            </a:r>
-          </a:p>
-          <a:p>
-            <a:pPr lvl="1">
-              <a:spcAft>
-                <a:spcPts val="800"/>
-              </a:spcAft>
-            </a:pPr>
-            <a:r>
-              <a:rPr sz="1300" b="0">
-                <a:solidFill>
-                  <a:srgbClr val="64748B"/>
-                </a:solidFill>
-                <a:latin typeface="PingFang TC"/>
-                <a:ea typeface="PingFang TC"/>
-              </a:rPr>
-              <a:t>–  → 無法改/刪/統計；故選 302 每次回源</a:t>
-            </a:r>
-          </a:p>
-          <a:p>
-            <a:pPr>
-              <a:spcAft>
-                <a:spcPts val="800"/>
-              </a:spcAft>
-            </a:pPr>
-            <a:r>
-              <a:rPr sz="1400" b="0">
-                <a:solidFill>
-                  <a:srgbClr val="0F172A"/>
-                </a:solidFill>
-                <a:latin typeface="PingFang TC"/>
-                <a:ea typeface="PingFang TC"/>
-              </a:rPr>
-              <a:t>•  Cache：Redis（非行程內 dict）</a:t>
-            </a:r>
-          </a:p>
-          <a:p>
-            <a:pPr lvl="1">
-              <a:spcAft>
-                <a:spcPts val="800"/>
-              </a:spcAft>
-            </a:pPr>
-            <a:r>
-              <a:rPr sz="1300" b="0">
-                <a:solidFill>
-                  <a:srgbClr val="64748B"/>
-                </a:solidFill>
-                <a:latin typeface="PingFang TC"/>
-                <a:ea typeface="PingFang TC"/>
-              </a:rPr>
-              <a:t>–  stateless 多台共享 + 全域 invalidation</a:t>
-            </a:r>
-          </a:p>
-          <a:p>
-            <a:pPr lvl="1">
-              <a:spcAft>
-                <a:spcPts val="800"/>
-              </a:spcAft>
-            </a:pPr>
-            <a:r>
-              <a:rPr sz="1300" b="0">
-                <a:solidFill>
-                  <a:srgbClr val="64748B"/>
-                </a:solidFill>
-                <a:latin typeface="PingFang TC"/>
-                <a:ea typeface="PingFang TC"/>
-              </a:rPr>
-              <a:t>–  行程內 dict 會讓 PATCH/DELETE 失效漏清</a:t>
-            </a:r>
-          </a:p>
-          <a:p>
-            <a:pPr lvl="1">
-              <a:spcAft>
-                <a:spcPts val="800"/>
-              </a:spcAft>
-            </a:pPr>
-            <a:r>
-              <a:rPr sz="1300" b="0">
-                <a:solidFill>
-                  <a:srgbClr val="64748B"/>
-                </a:solidFill>
-                <a:latin typeface="PingFang TC"/>
-                <a:ea typeface="PingFang TC"/>
-              </a:rPr>
-              <a:t>–  含 TTL 作最終一致性保險</a:t>
-            </a:r>
-          </a:p>
-        </p:txBody>
-      </p:sp>
-      <p:sp>
-        <p:nvSpPr>
-          <p:cNvPr id="5" name="TextBox 4"/>
-          <p:cNvSpPr txBox="1"/>
-          <p:nvPr/>
-        </p:nvSpPr>
-        <p:spPr>
-          <a:xfrm>
-            <a:off x="6309360" y="1737360"/>
-            <a:ext cx="5486400" cy="4572000"/>
-          </a:xfrm>
-          <a:prstGeom prst="rect">
-            <a:avLst/>
-          </a:prstGeom>
-          <a:noFill/>
-        </p:spPr>
-        <p:txBody>
-          <a:bodyPr wrap="square">
-            <a:spAutoFit/>
-          </a:bodyPr>
-          <a:lstStyle/>
-          <a:p>
-            <a:pPr>
-              <a:spcAft>
-                <a:spcPts val="800"/>
-              </a:spcAft>
-            </a:pPr>
-            <a:r>
-              <a:rPr sz="1400" b="0">
-                <a:solidFill>
-                  <a:srgbClr val="0F172A"/>
-                </a:solidFill>
-                <a:latin typeface="PingFang TC"/>
-                <a:ea typeface="PingFang TC"/>
-              </a:rPr>
-              <a:t>•  Scan 非同步寫</a:t>
-            </a:r>
-          </a:p>
-          <a:p>
-            <a:pPr lvl="1">
-              <a:spcAft>
-                <a:spcPts val="800"/>
-              </a:spcAft>
-            </a:pPr>
-            <a:r>
-              <a:rPr sz="1300" b="0">
-                <a:solidFill>
-                  <a:srgbClr val="64748B"/>
-                </a:solidFill>
-                <a:latin typeface="PingFang TC"/>
-                <a:ea typeface="PingFang TC"/>
-              </a:rPr>
-              <a:t>–  redirect 是 &lt;100ms + ~5,800 QPS 熱路徑</a:t>
-            </a:r>
-          </a:p>
-          <a:p>
-            <a:pPr lvl="1">
-              <a:spcAft>
-                <a:spcPts val="800"/>
-              </a:spcAft>
-            </a:pPr>
-            <a:r>
-              <a:rPr sz="1300" b="0">
-                <a:solidFill>
-                  <a:srgbClr val="64748B"/>
-                </a:solidFill>
-                <a:latin typeface="PingFang TC"/>
-                <a:ea typeface="PingFang TC"/>
-              </a:rPr>
-              <a:t>–  分析可容忍延遲/少量遺失 → 不擋跳轉</a:t>
-            </a:r>
-          </a:p>
-          <a:p>
-            <a:pPr lvl="1">
-              <a:spcAft>
-                <a:spcPts val="800"/>
-              </a:spcAft>
-            </a:pPr>
-            <a:r>
-              <a:rPr sz="1300" b="0">
-                <a:solidFill>
-                  <a:srgbClr val="64748B"/>
-                </a:solidFill>
-                <a:latin typeface="PingFang TC"/>
-                <a:ea typeface="PingFang TC"/>
-              </a:rPr>
-              <a:t>–  原型 BackgroundTasks；正式版佇列+worker</a:t>
-            </a:r>
-          </a:p>
-          <a:p>
-            <a:pPr>
-              <a:spcAft>
-                <a:spcPts val="800"/>
-              </a:spcAft>
-            </a:pPr>
-            <a:r>
-              <a:rPr sz="1400" b="0">
-                <a:solidFill>
-                  <a:srgbClr val="0F172A"/>
-                </a:solidFill>
-                <a:latin typeface="PingFang TC"/>
-                <a:ea typeface="PingFang TC"/>
-              </a:rPr>
-              <a:t>•  token index</a:t>
-            </a:r>
-          </a:p>
-          <a:p>
-            <a:pPr lvl="1">
-              <a:spcAft>
-                <a:spcPts val="800"/>
-              </a:spcAft>
-            </a:pPr>
-            <a:r>
-              <a:rPr sz="1300" b="0">
-                <a:solidFill>
-                  <a:srgbClr val="64748B"/>
-                </a:solidFill>
-                <a:latin typeface="PingFang TC"/>
-                <a:ea typeface="PingFang TC"/>
-              </a:rPr>
-              <a:t>–  避免全表掃描，redirect 直接命中</a:t>
-            </a:r>
-          </a:p>
-        </p:txBody>
-      </p:sp>
-    </p:spTree>
-  </p:cSld>
-  <p:clrMapOvr>
-    <a:masterClrMapping/>
-  </p:clrMapOvr>
-</p:sld>
-</file>
-
 <file path=ppt/slides/slide15.xml><?xml version="1.0" encoding="utf-8"?>
 <p:sld xmlns:a="http://schemas.openxmlformats.org/drawingml/2006/main" xmlns:p="http://schemas.openxmlformats.org/presentationml/2006/main" xmlns:r="http://schemas.openxmlformats.org/officeDocument/2006/relationships">
   <p:cSld>
@@ -6822,7 +7110,7 @@
                 <a:latin typeface="PingFang TC"/>
                 <a:ea typeface="PingFang TC"/>
               </a:rPr>
-              <a:t>10 · DEEP DIVE</a:t>
+              <a:t>09 · DEEP DIVE</a:t>
             </a:r>
           </a:p>
           <a:p>
@@ -6839,7 +7127,7 @@
                 <a:latin typeface="PingFang TC"/>
                 <a:ea typeface="PingFang TC"/>
               </a:rPr>
-              <a:t>決策 3 — 可靠性與資料語意</a:t>
+              <a:t>決策 2 — 302、快取、非同步</a:t>
             </a:r>
           </a:p>
         </p:txBody>
@@ -6853,7 +7141,7 @@
         <p:spPr>
           <a:xfrm>
             <a:off x="640080" y="1737360"/>
-            <a:ext cx="10789920" cy="4572000"/>
+            <a:ext cx="5486400" cy="4572000"/>
           </a:xfrm>
           <a:prstGeom prst="rect">
             <a:avLst/>
@@ -6868,120 +7156,245 @@
           <a:p>
             <a:pPr>
               <a:spcAft>
-                <a:spcPts val="900"/>
-              </a:spcAft>
-            </a:pPr>
-            <a:r>
-              <a:rPr sz="1500" b="0">
+                <a:spcPts val="800"/>
+              </a:spcAft>
+            </a:pPr>
+            <a:r>
+              <a:rPr sz="1400" b="0">
                 <a:solidFill>
                   <a:srgbClr val="0F172A"/>
                 </a:solidFill>
                 <a:latin typeface="PingFang TC"/>
                 <a:ea typeface="PingFang TC"/>
               </a:rPr>
-              <a:t>•  軟刪除（is_deleted）：支撐 410 語意、保留分析、避免 token 回收風險</a:t>
+              <a:t>•  302 而非 301</a:t>
+            </a:r>
+          </a:p>
+          <a:p>
+            <a:pPr lvl="1">
+              <a:spcAft>
+                <a:spcPts val="800"/>
+              </a:spcAft>
+            </a:pPr>
+            <a:r>
+              <a:rPr sz="1300" b="0">
+                <a:solidFill>
+                  <a:srgbClr val="64748B"/>
+                </a:solidFill>
+                <a:latin typeface="PingFang TC"/>
+                <a:ea typeface="PingFang TC"/>
+              </a:rPr>
+              <a:t>–  301 被瀏覽器快取 → 跳過我方 server</a:t>
+            </a:r>
+          </a:p>
+          <a:p>
+            <a:pPr lvl="1">
+              <a:spcAft>
+                <a:spcPts val="800"/>
+              </a:spcAft>
+            </a:pPr>
+            <a:r>
+              <a:rPr sz="1300" b="0">
+                <a:solidFill>
+                  <a:srgbClr val="64748B"/>
+                </a:solidFill>
+                <a:latin typeface="PingFang TC"/>
+                <a:ea typeface="PingFang TC"/>
+              </a:rPr>
+              <a:t>–  → 無法改/刪/統計；故選 302 每次回源</a:t>
             </a:r>
           </a:p>
           <a:p>
             <a:pPr>
               <a:spcAft>
-                <a:spcPts val="900"/>
-              </a:spcAft>
-            </a:pPr>
-            <a:r>
-              <a:rPr sz="1500" b="0">
+                <a:spcPts val="800"/>
+              </a:spcAft>
+            </a:pPr>
+            <a:r>
+              <a:rPr sz="1400" b="0">
                 <a:solidFill>
                   <a:srgbClr val="0F172A"/>
                 </a:solidFill>
                 <a:latin typeface="PingFang TC"/>
                 <a:ea typeface="PingFang TC"/>
               </a:rPr>
-              <a:t>•  錯誤語意：404（從未存在） vs 410（曾存在已刪/過期）</a:t>
+              <a:t>•  Cache：Redis（非行程內 dict）</a:t>
             </a:r>
           </a:p>
           <a:p>
             <a:pPr lvl="1">
               <a:spcAft>
-                <a:spcPts val="900"/>
+                <a:spcPts val="800"/>
+              </a:spcAft>
+            </a:pPr>
+            <a:r>
+              <a:rPr sz="1300" b="0">
+                <a:solidFill>
+                  <a:srgbClr val="64748B"/>
+                </a:solidFill>
+                <a:latin typeface="PingFang TC"/>
+                <a:ea typeface="PingFang TC"/>
+              </a:rPr>
+              <a:t>–  stateless 多台共享 + 全域 invalidation</a:t>
+            </a:r>
+          </a:p>
+          <a:p>
+            <a:pPr lvl="1">
+              <a:spcAft>
+                <a:spcPts val="800"/>
+              </a:spcAft>
+            </a:pPr>
+            <a:r>
+              <a:rPr sz="1300" b="0">
+                <a:solidFill>
+                  <a:srgbClr val="64748B"/>
+                </a:solidFill>
+                <a:latin typeface="PingFang TC"/>
+                <a:ea typeface="PingFang TC"/>
+              </a:rPr>
+              <a:t>–  行程內 dict 會讓 PATCH/DELETE 失效漏清</a:t>
+            </a:r>
+          </a:p>
+          <a:p>
+            <a:pPr lvl="1">
+              <a:spcAft>
+                <a:spcPts val="800"/>
+              </a:spcAft>
+            </a:pPr>
+            <a:r>
+              <a:rPr sz="1300" b="0">
+                <a:solidFill>
+                  <a:srgbClr val="64748B"/>
+                </a:solidFill>
+                <a:latin typeface="PingFang TC"/>
+                <a:ea typeface="PingFang TC"/>
+              </a:rPr>
+              <a:t>–  含 TTL 作最終一致性保險</a:t>
+            </a:r>
+          </a:p>
+        </p:txBody>
+      </p:sp>
+      <p:sp>
+        <p:nvSpPr>
+          <p:cNvPr id="5" name="TextBox 4"/>
+          <p:cNvSpPr txBox="1"/>
+          <p:nvPr/>
+        </p:nvSpPr>
+        <p:spPr>
+          <a:xfrm>
+            <a:off x="6309360" y="1737360"/>
+            <a:ext cx="5486400" cy="4572000"/>
+          </a:xfrm>
+          <a:prstGeom prst="rect">
+            <a:avLst/>
+          </a:prstGeom>
+          <a:noFill/>
+        </p:spPr>
+        <p:txBody>
+          <a:bodyPr wrap="square">
+            <a:spAutoFit/>
+          </a:bodyPr>
+          <a:lstStyle/>
+          <a:p>
+            <a:pPr>
+              <a:spcAft>
+                <a:spcPts val="800"/>
               </a:spcAft>
             </a:pPr>
             <a:r>
               <a:rPr sz="1400" b="0">
                 <a:solidFill>
+                  <a:srgbClr val="0F172A"/>
+                </a:solidFill>
+                <a:latin typeface="PingFang TC"/>
+                <a:ea typeface="PingFang TC"/>
+              </a:rPr>
+              <a:t>•  Scan 非同步寫</a:t>
+            </a:r>
+          </a:p>
+          <a:p>
+            <a:pPr lvl="1">
+              <a:spcAft>
+                <a:spcPts val="800"/>
+              </a:spcAft>
+            </a:pPr>
+            <a:r>
+              <a:rPr sz="1300" b="0">
+                <a:solidFill>
                   <a:srgbClr val="64748B"/>
                 </a:solidFill>
                 <a:latin typeface="PingFang TC"/>
                 <a:ea typeface="PingFang TC"/>
               </a:rPr>
-              <a:t>–  掃描路徑刪除回 410；管理 API 已刪回 404（刻意差異）</a:t>
+              <a:t>–  redirect 是 &lt;100ms + ~5,800 QPS 熱路徑</a:t>
+            </a:r>
+          </a:p>
+          <a:p>
+            <a:pPr lvl="1">
+              <a:spcAft>
+                <a:spcPts val="800"/>
+              </a:spcAft>
+            </a:pPr>
+            <a:r>
+              <a:rPr sz="1300" b="0">
+                <a:solidFill>
+                  <a:srgbClr val="64748B"/>
+                </a:solidFill>
+                <a:latin typeface="PingFang TC"/>
+                <a:ea typeface="PingFang TC"/>
+              </a:rPr>
+              <a:t>–  分析可容忍延遲/少量遺失 → 不擋跳轉</a:t>
+            </a:r>
+          </a:p>
+          <a:p>
+            <a:pPr lvl="1">
+              <a:spcAft>
+                <a:spcPts val="800"/>
+              </a:spcAft>
+            </a:pPr>
+            <a:r>
+              <a:rPr sz="1300" b="0">
+                <a:solidFill>
+                  <a:srgbClr val="64748B"/>
+                </a:solidFill>
+                <a:latin typeface="PingFang TC"/>
+                <a:ea typeface="PingFang TC"/>
+              </a:rPr>
+              <a:t>–  原型 BackgroundTasks；正式版佇列+worker</a:t>
             </a:r>
           </a:p>
           <a:p>
             <a:pPr>
               <a:spcAft>
-                <a:spcPts val="900"/>
-              </a:spcAft>
-            </a:pPr>
-            <a:r>
-              <a:rPr sz="1500" b="0">
+                <a:spcPts val="800"/>
+              </a:spcAft>
+            </a:pPr>
+            <a:r>
+              <a:rPr sz="1400" b="0">
                 <a:solidFill>
                   <a:srgbClr val="0F172A"/>
                 </a:solidFill>
                 <a:latin typeface="PingFang TC"/>
                 <a:ea typeface="PingFang TC"/>
               </a:rPr>
-              <a:t>•  惰性過期 + cron 兜底：掃描即時檢查過期；cron 清過期/通知未點擊/物理清理</a:t>
-            </a:r>
-          </a:p>
-          <a:p>
-            <a:pPr>
-              <a:spcAft>
-                <a:spcPts val="900"/>
-              </a:spcAft>
-            </a:pPr>
-            <a:r>
-              <a:rPr sz="1500" b="0">
-                <a:solidFill>
-                  <a:srgbClr val="0F172A"/>
-                </a:solidFill>
-                <a:latin typeface="PingFang TC"/>
-                <a:ea typeface="PingFang TC"/>
-              </a:rPr>
-              <a:t>•  URL 保守正規化：只 lower-case host，保留 path/query 與原 scheme</a:t>
+              <a:t>•  token index</a:t>
             </a:r>
           </a:p>
           <a:p>
             <a:pPr lvl="1">
               <a:spcAft>
-                <a:spcPts val="900"/>
-              </a:spcAft>
-            </a:pPr>
-            <a:r>
-              <a:rPr sz="1400" b="0">
+                <a:spcPts val="800"/>
+              </a:spcAft>
+            </a:pPr>
+            <a:r>
+              <a:rPr sz="1300" b="0">
                 <a:solidFill>
                   <a:srgbClr val="64748B"/>
                 </a:solidFill>
                 <a:latin typeface="PingFang TC"/>
                 <a:ea typeface="PingFang TC"/>
               </a:rPr>
-              <a:t>–  修正 repo 的整串小寫（破壞 path）+ 強制 https（導向失效站）</a:t>
-            </a:r>
-          </a:p>
-          <a:p>
-            <a:pPr>
-              <a:spcAft>
-                <a:spcPts val="900"/>
-              </a:spcAft>
-            </a:pPr>
-            <a:r>
-              <a:rPr sz="1500" b="0">
-                <a:solidFill>
-                  <a:srgbClr val="0F172A"/>
-                </a:solidFill>
-                <a:latin typeface="PingFang TC"/>
-                <a:ea typeface="PingFang TC"/>
-              </a:rPr>
-              <a:t>•  惡意阻擋：黑名單 + SSRF/內網位址（localhost·127.*·私網），正式版接 Safe Browsing</a:t>
+              <a:t>–  避免全表掃描，redirect 直接命中</a:t>
             </a:r>
           </a:p>
         </p:txBody>
@@ -7083,7 +7496,7 @@
                 <a:latin typeface="PingFang TC"/>
                 <a:ea typeface="PingFang TC"/>
               </a:rPr>
-              <a:t>11 · SCALING</a:t>
+              <a:t>10 · DEEP DIVE</a:t>
             </a:r>
           </a:p>
           <a:p>
@@ -7100,7 +7513,7 @@
                 <a:latin typeface="PingFang TC"/>
                 <a:ea typeface="PingFang TC"/>
               </a:rPr>
-              <a:t>擴展策略</a:t>
+              <a:t>決策 3 — 可靠性與資料語意</a:t>
             </a:r>
           </a:p>
         </p:txBody>
@@ -7140,7 +7553,7 @@
                 <a:latin typeface="PingFang TC"/>
                 <a:ea typeface="PingFang TC"/>
               </a:rPr>
-              <a:t>•  App server stateless → 增加 instance 水平擴展（cache 外置 Redis）</a:t>
+              <a:t>•  軟刪除（is_deleted）：支撐 410 語意、保留分析、避免 token 回收風險</a:t>
             </a:r>
           </a:p>
           <a:p>
@@ -7157,7 +7570,7 @@
                 <a:latin typeface="PingFang TC"/>
                 <a:ea typeface="PingFang TC"/>
               </a:rPr>
-              <a:t>•  DB：單 primary + 多 read replica（讀走副）+ primary 掛 failover 升主</a:t>
+              <a:t>•  錯誤語意：404（從未存在） vs 410（曾存在已刪/過期）</a:t>
             </a:r>
           </a:p>
           <a:p>
@@ -7174,7 +7587,7 @@
                 <a:latin typeface="PingFang TC"/>
                 <a:ea typeface="PingFang TC"/>
               </a:rPr>
-              <a:t>–  複寫延遲：create 後暖 cache 緩解</a:t>
+              <a:t>–  掃描路徑刪除回 410；管理 API 已刪回 404（刻意差異）</a:t>
             </a:r>
           </a:p>
           <a:p>
@@ -7191,7 +7604,7 @@
                 <a:latin typeface="PingFang TC"/>
                 <a:ea typeface="PingFang TC"/>
               </a:rPr>
-              <a:t>•  分片：以 token hash 為鍵（均勻），列為未來選項（200GB 目前單機足夠）</a:t>
+              <a:t>•  惰性過期 + cron 兜底：掃描即時檢查過期；cron 清過期/通知未點擊/物理清理</a:t>
             </a:r>
           </a:p>
           <a:p>
@@ -7208,7 +7621,24 @@
                 <a:latin typeface="PingFang TC"/>
                 <a:ea typeface="PingFang TC"/>
               </a:rPr>
-              <a:t>•  QR 圖片：object store + CDN（靜態內容，目標 URL 改不需重生圖）</a:t>
+              <a:t>•  URL 保守正規化：只 lower-case host，保留 path/query 與原 scheme</a:t>
+            </a:r>
+          </a:p>
+          <a:p>
+            <a:pPr lvl="1">
+              <a:spcAft>
+                <a:spcPts val="900"/>
+              </a:spcAft>
+            </a:pPr>
+            <a:r>
+              <a:rPr sz="1400" b="0">
+                <a:solidFill>
+                  <a:srgbClr val="64748B"/>
+                </a:solidFill>
+                <a:latin typeface="PingFang TC"/>
+                <a:ea typeface="PingFang TC"/>
+              </a:rPr>
+              <a:t>–  修正 repo 的整串小寫（破壞 path）+ 強制 https（導向失效站）</a:t>
             </a:r>
           </a:p>
           <a:p>
@@ -7225,24 +7655,7 @@
                 <a:latin typeface="PingFang TC"/>
                 <a:ea typeface="PingFang TC"/>
               </a:rPr>
-              <a:t>•  分析：佇列 → 獨立分析庫 + 預聚合每日計數表</a:t>
-            </a:r>
-          </a:p>
-          <a:p>
-            <a:pPr>
-              <a:spcAft>
-                <a:spcPts val="900"/>
-              </a:spcAft>
-            </a:pPr>
-            <a:r>
-              <a:rPr sz="1500" b="0">
-                <a:solidFill>
-                  <a:srgbClr val="0F172A"/>
-                </a:solidFill>
-                <a:latin typeface="PingFang TC"/>
-                <a:ea typeface="PingFang TC"/>
-              </a:rPr>
-              <a:t>•  清理 cron：清過期 / 通知後刪長期未點擊 / 物理清理超期軟刪 + invalidate cache</a:t>
+              <a:t>•  惡意阻擋：黑名單 + SSRF/內網位址（localhost·127.*·私網），正式版接 Safe Browsing</a:t>
             </a:r>
           </a:p>
         </p:txBody>
@@ -7344,7 +7757,7 @@
                 <a:latin typeface="PingFang TC"/>
                 <a:ea typeface="PingFang TC"/>
               </a:rPr>
-              <a:t>11b · READ REPLICA</a:t>
+              <a:t>11 · SCALING</a:t>
             </a:r>
           </a:p>
           <a:p>
@@ -7361,7 +7774,7 @@
                 <a:latin typeface="PingFang TC"/>
                 <a:ea typeface="PingFang TC"/>
               </a:rPr>
-              <a:t>Read-heavy → 讀寫分離 + Read Replica</a:t>
+              <a:t>擴展策略</a:t>
             </a:r>
           </a:p>
         </p:txBody>
@@ -7374,726 +7787,8 @@
         </p:nvSpPr>
         <p:spPr>
           <a:xfrm>
-            <a:off x="548640" y="1645920"/>
-            <a:ext cx="5486400" cy="2926080"/>
-          </a:xfrm>
-          <a:prstGeom prst="rect">
-            <a:avLst/>
-          </a:prstGeom>
-          <a:noFill/>
-        </p:spPr>
-        <p:txBody>
-          <a:bodyPr wrap="square" anchor="t">
-            <a:spAutoFit/>
-          </a:bodyPr>
-          <a:lstStyle/>
-          <a:p>
-            <a:pPr algn="l">
-              <a:spcAft>
-                <a:spcPts val="800"/>
-              </a:spcAft>
-            </a:pPr>
-            <a:r>
-              <a:rPr sz="1500" b="0">
-                <a:solidFill>
-                  <a:srgbClr val="0F172A"/>
-                </a:solidFill>
-                <a:latin typeface="PingFang TC"/>
-                <a:ea typeface="PingFang TC"/>
-              </a:rPr>
-              <a:t>容量：1B × 200B = 200GB（單機放得下）</a:t>
-            </a:r>
-          </a:p>
-          <a:p>
-            <a:pPr algn="l">
-              <a:spcAft>
-                <a:spcPts val="400"/>
-              </a:spcAft>
-            </a:pPr>
-            <a:r>
-              <a:rPr sz="1500" b="0">
-                <a:solidFill>
-                  <a:srgbClr val="0F172A"/>
-                </a:solidFill>
-                <a:latin typeface="PingFang TC"/>
-                <a:ea typeface="PingFang TC"/>
-              </a:rPr>
-              <a:t>讀流量：1 億 users × 5/日 = 5 億 redirects/日</a:t>
-            </a:r>
-          </a:p>
-          <a:p>
-            <a:pPr algn="l">
-              <a:spcAft>
-                <a:spcPts val="800"/>
-              </a:spcAft>
-            </a:pPr>
-            <a:r>
-              <a:rPr sz="1600" b="1">
-                <a:solidFill>
-                  <a:srgbClr val="2563EB"/>
-                </a:solidFill>
-                <a:latin typeface="PingFang TC"/>
-                <a:ea typeface="PingFang TC"/>
-              </a:rPr>
-              <a:t>            5 億 ÷ 86,400s ≈ 5,787 redirects/秒</a:t>
-            </a:r>
-          </a:p>
-          <a:p>
-            <a:pPr algn="l">
-              <a:spcAft>
-                <a:spcPts val="1200"/>
-              </a:spcAft>
-            </a:pPr>
-            <a:r>
-              <a:rPr sz="1500" b="0">
-                <a:solidFill>
-                  <a:srgbClr val="0F172A"/>
-                </a:solidFill>
-                <a:latin typeface="PingFang TC"/>
-                <a:ea typeface="PingFang TC"/>
-              </a:rPr>
-              <a:t>讀寫比：≈ 100:1（讀 ≫ 寫）</a:t>
-            </a:r>
-          </a:p>
-          <a:p>
-            <a:pPr algn="l">
-              <a:spcAft>
-                <a:spcPts val="400"/>
-              </a:spcAft>
-            </a:pPr>
-            <a:r>
-              <a:rPr sz="1500" b="1">
-                <a:solidFill>
-                  <a:srgbClr val="0F172A"/>
-                </a:solidFill>
-                <a:latin typeface="PingFang TC"/>
-                <a:ea typeface="PingFang TC"/>
-              </a:rPr>
-              <a:t>→ 瓶頸是「讀吞吐」、不是容量</a:t>
-            </a:r>
-          </a:p>
-          <a:p>
-            <a:pPr algn="l">
-              <a:spcAft>
-                <a:spcPts val="400"/>
-              </a:spcAft>
-            </a:pPr>
-            <a:r>
-              <a:rPr sz="1600" b="1">
-                <a:solidFill>
-                  <a:srgbClr val="059669"/>
-                </a:solidFill>
-                <a:latin typeface="PingFang TC"/>
-                <a:ea typeface="PingFang TC"/>
-              </a:rPr>
-              <a:t>→ 讀寫分離 + 多個 read replica</a:t>
-            </a:r>
-          </a:p>
-        </p:txBody>
-      </p:sp>
-      <p:sp>
-        <p:nvSpPr>
-          <p:cNvPr id="5" name="Rounded Rectangle 4"/>
-          <p:cNvSpPr/>
-          <p:nvPr/>
-        </p:nvSpPr>
-        <p:spPr>
-          <a:xfrm>
-            <a:off x="6126480" y="2286000"/>
-            <a:ext cx="1645920" cy="914400"/>
-          </a:xfrm>
-          <a:prstGeom prst="roundRect">
-            <a:avLst/>
-          </a:prstGeom>
-          <a:solidFill>
-            <a:srgbClr val="2563EB"/>
-          </a:solidFill>
-          <a:ln>
-            <a:solidFill>
-              <a:srgbClr val="2563EB"/>
-            </a:solidFill>
-          </a:ln>
-          <a:effectLst/>
-        </p:spPr>
-        <p:style>
-          <a:lnRef idx="1">
-            <a:schemeClr val="accent1"/>
-          </a:lnRef>
-          <a:fillRef idx="3">
-            <a:schemeClr val="accent1"/>
-          </a:fillRef>
-          <a:effectRef idx="2">
-            <a:schemeClr val="accent1"/>
-          </a:effectRef>
-          <a:fontRef idx="minor">
-            <a:schemeClr val="lt1"/>
-          </a:fontRef>
-        </p:style>
-        <p:txBody>
-          <a:bodyPr rtlCol="0" anchor="ctr" wrap="square" tIns="25400" bIns="25400"/>
-          <a:lstStyle/>
-          <a:p>
-            <a:pPr algn="ctr"/>
-            <a:r>
-              <a:rPr sz="1300" b="1">
-                <a:solidFill>
-                  <a:srgbClr val="FFFFFF"/>
-                </a:solidFill>
-                <a:latin typeface="PingFang TC"/>
-                <a:ea typeface="PingFang TC"/>
-              </a:rPr>
-              <a:t>App</a:t>
-            </a:r>
-          </a:p>
-          <a:p>
-            <a:pPr algn="ctr"/>
-            <a:r>
-              <a:rPr sz="1300" b="0">
-                <a:solidFill>
-                  <a:srgbClr val="FFFFFF"/>
-                </a:solidFill>
-                <a:latin typeface="PingFang TC"/>
-                <a:ea typeface="PingFang TC"/>
-              </a:rPr>
-              <a:t>(stateless)</a:t>
-            </a:r>
-          </a:p>
-        </p:txBody>
-      </p:sp>
-      <p:sp>
-        <p:nvSpPr>
-          <p:cNvPr id="6" name="Rounded Rectangle 5"/>
-          <p:cNvSpPr/>
-          <p:nvPr/>
-        </p:nvSpPr>
-        <p:spPr>
-          <a:xfrm>
-            <a:off x="8595360" y="1737360"/>
-            <a:ext cx="3017520" cy="731520"/>
-          </a:xfrm>
-          <a:prstGeom prst="roundRect">
-            <a:avLst/>
-          </a:prstGeom>
-          <a:solidFill>
-            <a:srgbClr val="059669"/>
-          </a:solidFill>
-          <a:ln>
-            <a:solidFill>
-              <a:srgbClr val="059669"/>
-            </a:solidFill>
-          </a:ln>
-          <a:effectLst/>
-        </p:spPr>
-        <p:style>
-          <a:lnRef idx="1">
-            <a:schemeClr val="accent1"/>
-          </a:lnRef>
-          <a:fillRef idx="3">
-            <a:schemeClr val="accent1"/>
-          </a:fillRef>
-          <a:effectRef idx="2">
-            <a:schemeClr val="accent1"/>
-          </a:effectRef>
-          <a:fontRef idx="minor">
-            <a:schemeClr val="lt1"/>
-          </a:fontRef>
-        </p:style>
-        <p:txBody>
-          <a:bodyPr rtlCol="0" anchor="ctr" wrap="square" tIns="25400" bIns="25400"/>
-          <a:lstStyle/>
-          <a:p>
-            <a:pPr algn="ctr"/>
-            <a:r>
-              <a:rPr sz="1300" b="1">
-                <a:solidFill>
-                  <a:srgbClr val="FFFFFF"/>
-                </a:solidFill>
-                <a:latin typeface="PingFang TC"/>
-                <a:ea typeface="PingFang TC"/>
-              </a:rPr>
-              <a:t>Primary (Write)</a:t>
-            </a:r>
-          </a:p>
-        </p:txBody>
-      </p:sp>
-      <p:sp>
-        <p:nvSpPr>
-          <p:cNvPr id="7" name="Rounded Rectangle 6"/>
-          <p:cNvSpPr/>
-          <p:nvPr/>
-        </p:nvSpPr>
-        <p:spPr>
-          <a:xfrm>
-            <a:off x="8595360" y="2697480"/>
-            <a:ext cx="3017520" cy="594360"/>
-          </a:xfrm>
-          <a:prstGeom prst="roundRect">
-            <a:avLst/>
-          </a:prstGeom>
-          <a:solidFill>
-            <a:srgbClr val="0EA5E9"/>
-          </a:solidFill>
-          <a:ln>
-            <a:solidFill>
-              <a:srgbClr val="0EA5E9"/>
-            </a:solidFill>
-          </a:ln>
-          <a:effectLst/>
-        </p:spPr>
-        <p:style>
-          <a:lnRef idx="1">
-            <a:schemeClr val="accent1"/>
-          </a:lnRef>
-          <a:fillRef idx="3">
-            <a:schemeClr val="accent1"/>
-          </a:fillRef>
-          <a:effectRef idx="2">
-            <a:schemeClr val="accent1"/>
-          </a:effectRef>
-          <a:fontRef idx="minor">
-            <a:schemeClr val="lt1"/>
-          </a:fontRef>
-        </p:style>
-        <p:txBody>
-          <a:bodyPr rtlCol="0" anchor="ctr" wrap="square" tIns="25400" bIns="25400"/>
-          <a:lstStyle/>
-          <a:p>
-            <a:pPr algn="ctr"/>
-            <a:r>
-              <a:rPr sz="1200" b="1">
-                <a:solidFill>
-                  <a:srgbClr val="FFFFFF"/>
-                </a:solidFill>
-                <a:latin typeface="PingFang TC"/>
-                <a:ea typeface="PingFang TC"/>
-              </a:rPr>
-              <a:t>Read Replica 1</a:t>
-            </a:r>
-          </a:p>
-        </p:txBody>
-      </p:sp>
-      <p:sp>
-        <p:nvSpPr>
-          <p:cNvPr id="8" name="Rounded Rectangle 7"/>
-          <p:cNvSpPr/>
-          <p:nvPr/>
-        </p:nvSpPr>
-        <p:spPr>
-          <a:xfrm>
-            <a:off x="8595360" y="3429000"/>
-            <a:ext cx="3017520" cy="594360"/>
-          </a:xfrm>
-          <a:prstGeom prst="roundRect">
-            <a:avLst/>
-          </a:prstGeom>
-          <a:solidFill>
-            <a:srgbClr val="0EA5E9"/>
-          </a:solidFill>
-          <a:ln>
-            <a:solidFill>
-              <a:srgbClr val="0EA5E9"/>
-            </a:solidFill>
-          </a:ln>
-          <a:effectLst/>
-        </p:spPr>
-        <p:style>
-          <a:lnRef idx="1">
-            <a:schemeClr val="accent1"/>
-          </a:lnRef>
-          <a:fillRef idx="3">
-            <a:schemeClr val="accent1"/>
-          </a:fillRef>
-          <a:effectRef idx="2">
-            <a:schemeClr val="accent1"/>
-          </a:effectRef>
-          <a:fontRef idx="minor">
-            <a:schemeClr val="lt1"/>
-          </a:fontRef>
-        </p:style>
-        <p:txBody>
-          <a:bodyPr rtlCol="0" anchor="ctr" wrap="square" tIns="25400" bIns="25400"/>
-          <a:lstStyle/>
-          <a:p>
-            <a:pPr algn="ctr"/>
-            <a:r>
-              <a:rPr sz="1200" b="1">
-                <a:solidFill>
-                  <a:srgbClr val="FFFFFF"/>
-                </a:solidFill>
-                <a:latin typeface="PingFang TC"/>
-                <a:ea typeface="PingFang TC"/>
-              </a:rPr>
-              <a:t>Read Replica 2</a:t>
-            </a:r>
-          </a:p>
-        </p:txBody>
-      </p:sp>
-      <p:sp>
-        <p:nvSpPr>
-          <p:cNvPr id="9" name="Rounded Rectangle 8"/>
-          <p:cNvSpPr/>
-          <p:nvPr/>
-        </p:nvSpPr>
-        <p:spPr>
-          <a:xfrm>
-            <a:off x="8595360" y="4160520"/>
-            <a:ext cx="3017520" cy="594360"/>
-          </a:xfrm>
-          <a:prstGeom prst="roundRect">
-            <a:avLst/>
-          </a:prstGeom>
-          <a:solidFill>
-            <a:srgbClr val="0EA5E9"/>
-          </a:solidFill>
-          <a:ln>
-            <a:solidFill>
-              <a:srgbClr val="0EA5E9"/>
-            </a:solidFill>
-          </a:ln>
-          <a:effectLst/>
-        </p:spPr>
-        <p:style>
-          <a:lnRef idx="1">
-            <a:schemeClr val="accent1"/>
-          </a:lnRef>
-          <a:fillRef idx="3">
-            <a:schemeClr val="accent1"/>
-          </a:fillRef>
-          <a:effectRef idx="2">
-            <a:schemeClr val="accent1"/>
-          </a:effectRef>
-          <a:fontRef idx="minor">
-            <a:schemeClr val="lt1"/>
-          </a:fontRef>
-        </p:style>
-        <p:txBody>
-          <a:bodyPr rtlCol="0" anchor="ctr" wrap="square" tIns="25400" bIns="25400"/>
-          <a:lstStyle/>
-          <a:p>
-            <a:pPr algn="ctr"/>
-            <a:r>
-              <a:rPr sz="1200" b="1">
-                <a:solidFill>
-                  <a:srgbClr val="FFFFFF"/>
-                </a:solidFill>
-                <a:latin typeface="PingFang TC"/>
-                <a:ea typeface="PingFang TC"/>
-              </a:rPr>
-              <a:t>Read Replica N</a:t>
-            </a:r>
-          </a:p>
-        </p:txBody>
-      </p:sp>
-      <p:cxnSp>
-        <p:nvCxnSpPr>
-          <p:cNvPr id="10" name="Connector 9"/>
-          <p:cNvCxnSpPr/>
-          <p:nvPr/>
-        </p:nvCxnSpPr>
-        <p:spPr>
-          <a:xfrm flipV="1">
-            <a:off x="7772400" y="2103120"/>
-            <a:ext cx="822960" cy="457200"/>
-          </a:xfrm>
-          <a:prstGeom prst="line">
-            <a:avLst/>
-          </a:prstGeom>
-          <a:ln w="20320">
-            <a:solidFill>
-              <a:srgbClr val="DC2626"/>
-            </a:solidFill>
-            <a:tailEnd type="triangle" w="med" len="med"/>
-          </a:ln>
-        </p:spPr>
-        <p:style>
-          <a:lnRef idx="2">
-            <a:schemeClr val="accent1"/>
-          </a:lnRef>
-          <a:fillRef idx="0">
-            <a:schemeClr val="accent1"/>
-          </a:fillRef>
-          <a:effectRef idx="1">
-            <a:schemeClr val="accent1"/>
-          </a:effectRef>
-          <a:fontRef idx="minor">
-            <a:schemeClr val="tx1"/>
-          </a:fontRef>
-        </p:style>
-      </p:cxnSp>
-      <p:cxnSp>
-        <p:nvCxnSpPr>
-          <p:cNvPr id="11" name="Connector 10"/>
-          <p:cNvCxnSpPr/>
-          <p:nvPr/>
-        </p:nvCxnSpPr>
-        <p:spPr>
-          <a:xfrm>
-            <a:off x="7772400" y="2880360"/>
-            <a:ext cx="822960" cy="109728"/>
-          </a:xfrm>
-          <a:prstGeom prst="line">
-            <a:avLst/>
-          </a:prstGeom>
-          <a:ln w="17780">
-            <a:solidFill>
-              <a:srgbClr val="059669"/>
-            </a:solidFill>
-            <a:tailEnd type="triangle" w="med" len="med"/>
-          </a:ln>
-        </p:spPr>
-        <p:style>
-          <a:lnRef idx="2">
-            <a:schemeClr val="accent1"/>
-          </a:lnRef>
-          <a:fillRef idx="0">
-            <a:schemeClr val="accent1"/>
-          </a:fillRef>
-          <a:effectRef idx="1">
-            <a:schemeClr val="accent1"/>
-          </a:effectRef>
-          <a:fontRef idx="minor">
-            <a:schemeClr val="tx1"/>
-          </a:fontRef>
-        </p:style>
-      </p:cxnSp>
-      <p:cxnSp>
-        <p:nvCxnSpPr>
-          <p:cNvPr id="12" name="Connector 11"/>
-          <p:cNvCxnSpPr/>
-          <p:nvPr/>
-        </p:nvCxnSpPr>
-        <p:spPr>
-          <a:xfrm>
-            <a:off x="7772400" y="3017520"/>
-            <a:ext cx="822960" cy="704088"/>
-          </a:xfrm>
-          <a:prstGeom prst="line">
-            <a:avLst/>
-          </a:prstGeom>
-          <a:ln w="17780">
-            <a:solidFill>
-              <a:srgbClr val="059669"/>
-            </a:solidFill>
-            <a:tailEnd type="triangle" w="med" len="med"/>
-          </a:ln>
-        </p:spPr>
-        <p:style>
-          <a:lnRef idx="2">
-            <a:schemeClr val="accent1"/>
-          </a:lnRef>
-          <a:fillRef idx="0">
-            <a:schemeClr val="accent1"/>
-          </a:fillRef>
-          <a:effectRef idx="1">
-            <a:schemeClr val="accent1"/>
-          </a:effectRef>
-          <a:fontRef idx="minor">
-            <a:schemeClr val="tx1"/>
-          </a:fontRef>
-        </p:style>
-      </p:cxnSp>
-      <p:cxnSp>
-        <p:nvCxnSpPr>
-          <p:cNvPr id="13" name="Connector 12"/>
-          <p:cNvCxnSpPr/>
-          <p:nvPr/>
-        </p:nvCxnSpPr>
-        <p:spPr>
-          <a:xfrm>
-            <a:off x="7772400" y="3108960"/>
-            <a:ext cx="822960" cy="1344168"/>
-          </a:xfrm>
-          <a:prstGeom prst="line">
-            <a:avLst/>
-          </a:prstGeom>
-          <a:ln w="17780">
-            <a:solidFill>
-              <a:srgbClr val="059669"/>
-            </a:solidFill>
-            <a:tailEnd type="triangle" w="med" len="med"/>
-          </a:ln>
-        </p:spPr>
-        <p:style>
-          <a:lnRef idx="2">
-            <a:schemeClr val="accent1"/>
-          </a:lnRef>
-          <a:fillRef idx="0">
-            <a:schemeClr val="accent1"/>
-          </a:fillRef>
-          <a:effectRef idx="1">
-            <a:schemeClr val="accent1"/>
-          </a:effectRef>
-          <a:fontRef idx="minor">
-            <a:schemeClr val="tx1"/>
-          </a:fontRef>
-        </p:style>
-      </p:cxnSp>
-      <p:sp>
-        <p:nvSpPr>
-          <p:cNvPr id="14" name="TextBox 13"/>
-          <p:cNvSpPr txBox="1"/>
-          <p:nvPr/>
-        </p:nvSpPr>
-        <p:spPr>
-          <a:xfrm>
-            <a:off x="7635240" y="2057400"/>
-            <a:ext cx="914400" cy="274320"/>
-          </a:xfrm>
-          <a:prstGeom prst="rect">
-            <a:avLst/>
-          </a:prstGeom>
-          <a:noFill/>
-        </p:spPr>
-        <p:txBody>
-          <a:bodyPr wrap="square" anchor="t">
-            <a:spAutoFit/>
-          </a:bodyPr>
-          <a:lstStyle/>
-          <a:p>
-            <a:pPr algn="l">
-              <a:spcAft>
-                <a:spcPts val="400"/>
-              </a:spcAft>
-            </a:pPr>
-            <a:r>
-              <a:rPr sz="1200" b="1">
-                <a:solidFill>
-                  <a:srgbClr val="DC2626"/>
-                </a:solidFill>
-                <a:latin typeface="PingFang TC"/>
-                <a:ea typeface="PingFang TC"/>
-              </a:rPr>
-              <a:t>寫</a:t>
-            </a:r>
-          </a:p>
-        </p:txBody>
-      </p:sp>
-      <p:sp>
-        <p:nvSpPr>
-          <p:cNvPr id="15" name="TextBox 14"/>
-          <p:cNvSpPr txBox="1"/>
-          <p:nvPr/>
-        </p:nvSpPr>
-        <p:spPr>
-          <a:xfrm>
-            <a:off x="7589520" y="3200400"/>
-            <a:ext cx="914400" cy="274320"/>
-          </a:xfrm>
-          <a:prstGeom prst="rect">
-            <a:avLst/>
-          </a:prstGeom>
-          <a:noFill/>
-        </p:spPr>
-        <p:txBody>
-          <a:bodyPr wrap="square" anchor="t">
-            <a:spAutoFit/>
-          </a:bodyPr>
-          <a:lstStyle/>
-          <a:p>
-            <a:pPr algn="l">
-              <a:spcAft>
-                <a:spcPts val="400"/>
-              </a:spcAft>
-            </a:pPr>
-            <a:r>
-              <a:rPr sz="1200" b="1">
-                <a:solidFill>
-                  <a:srgbClr val="059669"/>
-                </a:solidFill>
-                <a:latin typeface="PingFang TC"/>
-                <a:ea typeface="PingFang TC"/>
-              </a:rPr>
-              <a:t>讀</a:t>
-            </a:r>
-          </a:p>
-        </p:txBody>
-      </p:sp>
-      <p:cxnSp>
-        <p:nvCxnSpPr>
-          <p:cNvPr id="16" name="Connector 15"/>
-          <p:cNvCxnSpPr/>
-          <p:nvPr/>
-        </p:nvCxnSpPr>
-        <p:spPr>
-          <a:xfrm>
-            <a:off x="10104120" y="2468880"/>
-            <a:ext cx="0" cy="228600"/>
-          </a:xfrm>
-          <a:prstGeom prst="line">
-            <a:avLst/>
-          </a:prstGeom>
-          <a:ln w="13970">
-            <a:solidFill>
-              <a:srgbClr val="64748B"/>
-            </a:solidFill>
-            <a:tailEnd type="triangle" w="med" len="med"/>
-          </a:ln>
-        </p:spPr>
-        <p:style>
-          <a:lnRef idx="2">
-            <a:schemeClr val="accent1"/>
-          </a:lnRef>
-          <a:fillRef idx="0">
-            <a:schemeClr val="accent1"/>
-          </a:fillRef>
-          <a:effectRef idx="1">
-            <a:schemeClr val="accent1"/>
-          </a:effectRef>
-          <a:fontRef idx="minor">
-            <a:schemeClr val="tx1"/>
-          </a:fontRef>
-        </p:style>
-      </p:cxnSp>
-      <p:sp>
-        <p:nvSpPr>
-          <p:cNvPr id="17" name="TextBox 16"/>
-          <p:cNvSpPr txBox="1"/>
-          <p:nvPr/>
-        </p:nvSpPr>
-        <p:spPr>
-          <a:xfrm>
-            <a:off x="10241280" y="2395728"/>
-            <a:ext cx="1463040" cy="274320"/>
-          </a:xfrm>
-          <a:prstGeom prst="rect">
-            <a:avLst/>
-          </a:prstGeom>
-          <a:noFill/>
-        </p:spPr>
-        <p:txBody>
-          <a:bodyPr wrap="square" anchor="t">
-            <a:spAutoFit/>
-          </a:bodyPr>
-          <a:lstStyle/>
-          <a:p>
-            <a:pPr algn="l">
-              <a:spcAft>
-                <a:spcPts val="400"/>
-              </a:spcAft>
-            </a:pPr>
-            <a:r>
-              <a:rPr sz="1000" b="0">
-                <a:solidFill>
-                  <a:srgbClr val="64748B"/>
-                </a:solidFill>
-                <a:latin typeface="PingFang TC"/>
-                <a:ea typeface="PingFang TC"/>
-              </a:rPr>
-              <a:t>非同步複寫</a:t>
-            </a:r>
-          </a:p>
-        </p:txBody>
-      </p:sp>
-      <p:sp>
-        <p:nvSpPr>
-          <p:cNvPr id="18" name="TextBox 17"/>
-          <p:cNvSpPr txBox="1"/>
-          <p:nvPr/>
-        </p:nvSpPr>
-        <p:spPr>
-          <a:xfrm>
-            <a:off x="548640" y="5029200"/>
-            <a:ext cx="11247120" cy="1554480"/>
+            <a:off x="640080" y="1737360"/>
+            <a:ext cx="10789920" cy="4572000"/>
           </a:xfrm>
           <a:prstGeom prst="rect">
             <a:avLst/>
@@ -8108,52 +7803,120 @@
           <a:p>
             <a:pPr>
               <a:spcAft>
-                <a:spcPts val="600"/>
-              </a:spcAft>
-            </a:pPr>
-            <a:r>
-              <a:rPr sz="1300" b="0">
+                <a:spcPts val="900"/>
+              </a:spcAft>
+            </a:pPr>
+            <a:r>
+              <a:rPr sz="1500" b="0">
                 <a:solidFill>
                   <a:srgbClr val="0F172A"/>
                 </a:solidFill>
                 <a:latin typeface="PingFang TC"/>
                 <a:ea typeface="PingFang TC"/>
               </a:rPr>
-              <a:t>•  寫走 primary、讀走 replica（load-balanced）；讀不夠就加 replica 水平擴讀</a:t>
+              <a:t>•  App server stateless → 增加 instance 水平擴展（cache 外置 Redis）</a:t>
             </a:r>
           </a:p>
           <a:p>
             <a:pPr>
               <a:spcAft>
-                <a:spcPts val="600"/>
-              </a:spcAft>
-            </a:pPr>
-            <a:r>
-              <a:rPr sz="1300" b="0">
+                <a:spcPts val="900"/>
+              </a:spcAft>
+            </a:pPr>
+            <a:r>
+              <a:rPr sz="1500" b="0">
                 <a:solidFill>
                   <a:srgbClr val="0F172A"/>
                 </a:solidFill>
                 <a:latin typeface="PingFang TC"/>
                 <a:ea typeface="PingFang TC"/>
               </a:rPr>
-              <a:t>•  配合 Redis cache，真正打到 DB 的讀已先被擋掉一大半</a:t>
+              <a:t>•  DB：單 primary + 多 read replica（讀走副）+ primary 掛 failover 升主</a:t>
+            </a:r>
+          </a:p>
+          <a:p>
+            <a:pPr lvl="1">
+              <a:spcAft>
+                <a:spcPts val="900"/>
+              </a:spcAft>
+            </a:pPr>
+            <a:r>
+              <a:rPr sz="1400" b="0">
+                <a:solidFill>
+                  <a:srgbClr val="64748B"/>
+                </a:solidFill>
+                <a:latin typeface="PingFang TC"/>
+                <a:ea typeface="PingFang TC"/>
+              </a:rPr>
+              <a:t>–  複寫延遲：create 後暖 cache 緩解</a:t>
             </a:r>
           </a:p>
           <a:p>
             <a:pPr>
               <a:spcAft>
-                <a:spcPts val="600"/>
-              </a:spcAft>
-            </a:pPr>
-            <a:r>
-              <a:rPr sz="1300" b="0">
+                <a:spcPts val="900"/>
+              </a:spcAft>
+            </a:pPr>
+            <a:r>
+              <a:rPr sz="1500" b="0">
                 <a:solidFill>
                   <a:srgbClr val="0F172A"/>
                 </a:solidFill>
                 <a:latin typeface="PingFang TC"/>
                 <a:ea typeface="PingFang TC"/>
               </a:rPr>
-              <a:t>•  failover：primary 掛 → 升一台 read replica 為新 primary；複寫延遲靠 create 後暖 cache 緩解</a:t>
+              <a:t>•  分片：以 token hash 為鍵（均勻），列為未來選項（200GB 目前單機足夠）</a:t>
+            </a:r>
+          </a:p>
+          <a:p>
+            <a:pPr>
+              <a:spcAft>
+                <a:spcPts val="900"/>
+              </a:spcAft>
+            </a:pPr>
+            <a:r>
+              <a:rPr sz="1500" b="0">
+                <a:solidFill>
+                  <a:srgbClr val="0F172A"/>
+                </a:solidFill>
+                <a:latin typeface="PingFang TC"/>
+                <a:ea typeface="PingFang TC"/>
+              </a:rPr>
+              <a:t>•  QR 圖片：object store + CDN（靜態內容，目標 URL 改不需重生圖）</a:t>
+            </a:r>
+          </a:p>
+          <a:p>
+            <a:pPr>
+              <a:spcAft>
+                <a:spcPts val="900"/>
+              </a:spcAft>
+            </a:pPr>
+            <a:r>
+              <a:rPr sz="1500" b="0">
+                <a:solidFill>
+                  <a:srgbClr val="0F172A"/>
+                </a:solidFill>
+                <a:latin typeface="PingFang TC"/>
+                <a:ea typeface="PingFang TC"/>
+              </a:rPr>
+              <a:t>•  分析：佇列 → 獨立分析庫 + 預聚合每日計數表</a:t>
+            </a:r>
+          </a:p>
+          <a:p>
+            <a:pPr>
+              <a:spcAft>
+                <a:spcPts val="900"/>
+              </a:spcAft>
+            </a:pPr>
+            <a:r>
+              <a:rPr sz="1500" b="0">
+                <a:solidFill>
+                  <a:srgbClr val="0F172A"/>
+                </a:solidFill>
+                <a:latin typeface="PingFang TC"/>
+                <a:ea typeface="PingFang TC"/>
+              </a:rPr>
+              <a:t>•  清理 cron：清過期 / 通知後刪長期未點擊 / 物理清理超期軟刪 + invalidate cache</a:t>
             </a:r>
           </a:p>
         </p:txBody>
@@ -8255,7 +8018,7 @@
                 <a:latin typeface="PingFang TC"/>
                 <a:ea typeface="PingFang TC"/>
               </a:rPr>
-              <a:t>12 · IMPROVEMENTS</a:t>
+              <a:t>11b · READ REPLICA</a:t>
             </a:r>
           </a:p>
           <a:p>
@@ -8272,21 +8035,146 @@
                 <a:latin typeface="PingFang TC"/>
                 <a:ea typeface="PingFang TC"/>
               </a:rPr>
-              <a:t>對參考 repo 的關鍵改良</a:t>
-            </a:r>
-          </a:p>
-        </p:txBody>
-      </p:sp>
-      <p:sp>
-        <p:nvSpPr>
-          <p:cNvPr id="4" name="Rounded Rectangle 3"/>
+              <a:t>Read-heavy → 讀寫分離 + Read Replica</a:t>
+            </a:r>
+          </a:p>
+        </p:txBody>
+      </p:sp>
+      <p:sp>
+        <p:nvSpPr>
+          <p:cNvPr id="4" name="TextBox 3"/>
+          <p:cNvSpPr txBox="1"/>
+          <p:nvPr/>
+        </p:nvSpPr>
+        <p:spPr>
+          <a:xfrm>
+            <a:off x="548640" y="1645920"/>
+            <a:ext cx="5486400" cy="2926080"/>
+          </a:xfrm>
+          <a:prstGeom prst="rect">
+            <a:avLst/>
+          </a:prstGeom>
+          <a:noFill/>
+        </p:spPr>
+        <p:txBody>
+          <a:bodyPr wrap="square" anchor="t">
+            <a:spAutoFit/>
+          </a:bodyPr>
+          <a:lstStyle/>
+          <a:p>
+            <a:pPr algn="l">
+              <a:spcAft>
+                <a:spcPts val="800"/>
+              </a:spcAft>
+            </a:pPr>
+            <a:r>
+              <a:rPr sz="1500" b="0">
+                <a:solidFill>
+                  <a:srgbClr val="0F172A"/>
+                </a:solidFill>
+                <a:latin typeface="PingFang TC"/>
+                <a:ea typeface="PingFang TC"/>
+              </a:rPr>
+              <a:t>容量：1B × 200B = 200GB（單機放得下）</a:t>
+            </a:r>
+          </a:p>
+          <a:p>
+            <a:pPr algn="l">
+              <a:spcAft>
+                <a:spcPts val="400"/>
+              </a:spcAft>
+            </a:pPr>
+            <a:r>
+              <a:rPr sz="1500" b="0">
+                <a:solidFill>
+                  <a:srgbClr val="0F172A"/>
+                </a:solidFill>
+                <a:latin typeface="PingFang TC"/>
+                <a:ea typeface="PingFang TC"/>
+              </a:rPr>
+              <a:t>讀流量：1 億 users × 5/日 = 5 億 redirects/日</a:t>
+            </a:r>
+          </a:p>
+          <a:p>
+            <a:pPr algn="l">
+              <a:spcAft>
+                <a:spcPts val="800"/>
+              </a:spcAft>
+            </a:pPr>
+            <a:r>
+              <a:rPr sz="1600" b="1">
+                <a:solidFill>
+                  <a:srgbClr val="2563EB"/>
+                </a:solidFill>
+                <a:latin typeface="PingFang TC"/>
+                <a:ea typeface="PingFang TC"/>
+              </a:rPr>
+              <a:t>            5 億 ÷ 86,400s ≈ 5,787 redirects/秒</a:t>
+            </a:r>
+          </a:p>
+          <a:p>
+            <a:pPr algn="l">
+              <a:spcAft>
+                <a:spcPts val="1200"/>
+              </a:spcAft>
+            </a:pPr>
+            <a:r>
+              <a:rPr sz="1500" b="0">
+                <a:solidFill>
+                  <a:srgbClr val="0F172A"/>
+                </a:solidFill>
+                <a:latin typeface="PingFang TC"/>
+                <a:ea typeface="PingFang TC"/>
+              </a:rPr>
+              <a:t>讀寫比：≈ 100:1（讀 ≫ 寫）</a:t>
+            </a:r>
+          </a:p>
+          <a:p>
+            <a:pPr algn="l">
+              <a:spcAft>
+                <a:spcPts val="400"/>
+              </a:spcAft>
+            </a:pPr>
+            <a:r>
+              <a:rPr sz="1500" b="1">
+                <a:solidFill>
+                  <a:srgbClr val="0F172A"/>
+                </a:solidFill>
+                <a:latin typeface="PingFang TC"/>
+                <a:ea typeface="PingFang TC"/>
+              </a:rPr>
+              <a:t>→ 瓶頸是「讀吞吐」、不是容量</a:t>
+            </a:r>
+          </a:p>
+          <a:p>
+            <a:pPr algn="l">
+              <a:spcAft>
+                <a:spcPts val="400"/>
+              </a:spcAft>
+            </a:pPr>
+            <a:r>
+              <a:rPr sz="1600" b="1">
+                <a:solidFill>
+                  <a:srgbClr val="059669"/>
+                </a:solidFill>
+                <a:latin typeface="PingFang TC"/>
+                <a:ea typeface="PingFang TC"/>
+              </a:rPr>
+              <a:t>→ 讀寫分離 + 多個 read replica</a:t>
+            </a:r>
+          </a:p>
+        </p:txBody>
+      </p:sp>
+      <p:sp>
+        <p:nvSpPr>
+          <p:cNvPr id="5" name="Rounded Rectangle 4"/>
           <p:cNvSpPr/>
           <p:nvPr/>
         </p:nvSpPr>
         <p:spPr>
           <a:xfrm>
-            <a:off x="640080" y="1691640"/>
-            <a:ext cx="640080" cy="731520"/>
+            <a:off x="6126480" y="2286000"/>
+            <a:ext cx="1645920" cy="914400"/>
           </a:xfrm>
           <a:prstGeom prst="roundRect">
             <a:avLst/>
@@ -8321,6 +8209,792 @@
           <a:p>
             <a:pPr algn="ctr"/>
             <a:r>
+              <a:rPr sz="1300" b="1">
+                <a:solidFill>
+                  <a:srgbClr val="FFFFFF"/>
+                </a:solidFill>
+                <a:latin typeface="PingFang TC"/>
+                <a:ea typeface="PingFang TC"/>
+              </a:rPr>
+              <a:t>App</a:t>
+            </a:r>
+          </a:p>
+          <a:p>
+            <a:pPr algn="ctr"/>
+            <a:r>
+              <a:rPr sz="1300" b="0">
+                <a:solidFill>
+                  <a:srgbClr val="FFFFFF"/>
+                </a:solidFill>
+                <a:latin typeface="PingFang TC"/>
+                <a:ea typeface="PingFang TC"/>
+              </a:rPr>
+              <a:t>(stateless)</a:t>
+            </a:r>
+          </a:p>
+        </p:txBody>
+      </p:sp>
+      <p:sp>
+        <p:nvSpPr>
+          <p:cNvPr id="6" name="Rounded Rectangle 5"/>
+          <p:cNvSpPr/>
+          <p:nvPr/>
+        </p:nvSpPr>
+        <p:spPr>
+          <a:xfrm>
+            <a:off x="8595360" y="1737360"/>
+            <a:ext cx="3017520" cy="731520"/>
+          </a:xfrm>
+          <a:prstGeom prst="roundRect">
+            <a:avLst/>
+          </a:prstGeom>
+          <a:solidFill>
+            <a:srgbClr val="059669"/>
+          </a:solidFill>
+          <a:ln>
+            <a:solidFill>
+              <a:srgbClr val="059669"/>
+            </a:solidFill>
+          </a:ln>
+          <a:effectLst/>
+        </p:spPr>
+        <p:style>
+          <a:lnRef idx="1">
+            <a:schemeClr val="accent1"/>
+          </a:lnRef>
+          <a:fillRef idx="3">
+            <a:schemeClr val="accent1"/>
+          </a:fillRef>
+          <a:effectRef idx="2">
+            <a:schemeClr val="accent1"/>
+          </a:effectRef>
+          <a:fontRef idx="minor">
+            <a:schemeClr val="lt1"/>
+          </a:fontRef>
+        </p:style>
+        <p:txBody>
+          <a:bodyPr rtlCol="0" anchor="ctr" wrap="square" tIns="25400" bIns="25400"/>
+          <a:lstStyle/>
+          <a:p>
+            <a:pPr algn="ctr"/>
+            <a:r>
+              <a:rPr sz="1300" b="1">
+                <a:solidFill>
+                  <a:srgbClr val="FFFFFF"/>
+                </a:solidFill>
+                <a:latin typeface="PingFang TC"/>
+                <a:ea typeface="PingFang TC"/>
+              </a:rPr>
+              <a:t>Primary (Write)</a:t>
+            </a:r>
+          </a:p>
+        </p:txBody>
+      </p:sp>
+      <p:sp>
+        <p:nvSpPr>
+          <p:cNvPr id="7" name="Rounded Rectangle 6"/>
+          <p:cNvSpPr/>
+          <p:nvPr/>
+        </p:nvSpPr>
+        <p:spPr>
+          <a:xfrm>
+            <a:off x="8595360" y="2697480"/>
+            <a:ext cx="3017520" cy="594360"/>
+          </a:xfrm>
+          <a:prstGeom prst="roundRect">
+            <a:avLst/>
+          </a:prstGeom>
+          <a:solidFill>
+            <a:srgbClr val="0EA5E9"/>
+          </a:solidFill>
+          <a:ln>
+            <a:solidFill>
+              <a:srgbClr val="0EA5E9"/>
+            </a:solidFill>
+          </a:ln>
+          <a:effectLst/>
+        </p:spPr>
+        <p:style>
+          <a:lnRef idx="1">
+            <a:schemeClr val="accent1"/>
+          </a:lnRef>
+          <a:fillRef idx="3">
+            <a:schemeClr val="accent1"/>
+          </a:fillRef>
+          <a:effectRef idx="2">
+            <a:schemeClr val="accent1"/>
+          </a:effectRef>
+          <a:fontRef idx="minor">
+            <a:schemeClr val="lt1"/>
+          </a:fontRef>
+        </p:style>
+        <p:txBody>
+          <a:bodyPr rtlCol="0" anchor="ctr" wrap="square" tIns="25400" bIns="25400"/>
+          <a:lstStyle/>
+          <a:p>
+            <a:pPr algn="ctr"/>
+            <a:r>
+              <a:rPr sz="1200" b="1">
+                <a:solidFill>
+                  <a:srgbClr val="FFFFFF"/>
+                </a:solidFill>
+                <a:latin typeface="PingFang TC"/>
+                <a:ea typeface="PingFang TC"/>
+              </a:rPr>
+              <a:t>Read Replica 1</a:t>
+            </a:r>
+          </a:p>
+        </p:txBody>
+      </p:sp>
+      <p:sp>
+        <p:nvSpPr>
+          <p:cNvPr id="8" name="Rounded Rectangle 7"/>
+          <p:cNvSpPr/>
+          <p:nvPr/>
+        </p:nvSpPr>
+        <p:spPr>
+          <a:xfrm>
+            <a:off x="8595360" y="3429000"/>
+            <a:ext cx="3017520" cy="594360"/>
+          </a:xfrm>
+          <a:prstGeom prst="roundRect">
+            <a:avLst/>
+          </a:prstGeom>
+          <a:solidFill>
+            <a:srgbClr val="0EA5E9"/>
+          </a:solidFill>
+          <a:ln>
+            <a:solidFill>
+              <a:srgbClr val="0EA5E9"/>
+            </a:solidFill>
+          </a:ln>
+          <a:effectLst/>
+        </p:spPr>
+        <p:style>
+          <a:lnRef idx="1">
+            <a:schemeClr val="accent1"/>
+          </a:lnRef>
+          <a:fillRef idx="3">
+            <a:schemeClr val="accent1"/>
+          </a:fillRef>
+          <a:effectRef idx="2">
+            <a:schemeClr val="accent1"/>
+          </a:effectRef>
+          <a:fontRef idx="minor">
+            <a:schemeClr val="lt1"/>
+          </a:fontRef>
+        </p:style>
+        <p:txBody>
+          <a:bodyPr rtlCol="0" anchor="ctr" wrap="square" tIns="25400" bIns="25400"/>
+          <a:lstStyle/>
+          <a:p>
+            <a:pPr algn="ctr"/>
+            <a:r>
+              <a:rPr sz="1200" b="1">
+                <a:solidFill>
+                  <a:srgbClr val="FFFFFF"/>
+                </a:solidFill>
+                <a:latin typeface="PingFang TC"/>
+                <a:ea typeface="PingFang TC"/>
+              </a:rPr>
+              <a:t>Read Replica 2</a:t>
+            </a:r>
+          </a:p>
+        </p:txBody>
+      </p:sp>
+      <p:sp>
+        <p:nvSpPr>
+          <p:cNvPr id="9" name="Rounded Rectangle 8"/>
+          <p:cNvSpPr/>
+          <p:nvPr/>
+        </p:nvSpPr>
+        <p:spPr>
+          <a:xfrm>
+            <a:off x="8595360" y="4160520"/>
+            <a:ext cx="3017520" cy="594360"/>
+          </a:xfrm>
+          <a:prstGeom prst="roundRect">
+            <a:avLst/>
+          </a:prstGeom>
+          <a:solidFill>
+            <a:srgbClr val="0EA5E9"/>
+          </a:solidFill>
+          <a:ln>
+            <a:solidFill>
+              <a:srgbClr val="0EA5E9"/>
+            </a:solidFill>
+          </a:ln>
+          <a:effectLst/>
+        </p:spPr>
+        <p:style>
+          <a:lnRef idx="1">
+            <a:schemeClr val="accent1"/>
+          </a:lnRef>
+          <a:fillRef idx="3">
+            <a:schemeClr val="accent1"/>
+          </a:fillRef>
+          <a:effectRef idx="2">
+            <a:schemeClr val="accent1"/>
+          </a:effectRef>
+          <a:fontRef idx="minor">
+            <a:schemeClr val="lt1"/>
+          </a:fontRef>
+        </p:style>
+        <p:txBody>
+          <a:bodyPr rtlCol="0" anchor="ctr" wrap="square" tIns="25400" bIns="25400"/>
+          <a:lstStyle/>
+          <a:p>
+            <a:pPr algn="ctr"/>
+            <a:r>
+              <a:rPr sz="1200" b="1">
+                <a:solidFill>
+                  <a:srgbClr val="FFFFFF"/>
+                </a:solidFill>
+                <a:latin typeface="PingFang TC"/>
+                <a:ea typeface="PingFang TC"/>
+              </a:rPr>
+              <a:t>Read Replica N</a:t>
+            </a:r>
+          </a:p>
+        </p:txBody>
+      </p:sp>
+      <p:cxnSp>
+        <p:nvCxnSpPr>
+          <p:cNvPr id="10" name="Connector 9"/>
+          <p:cNvCxnSpPr/>
+          <p:nvPr/>
+        </p:nvCxnSpPr>
+        <p:spPr>
+          <a:xfrm flipV="1">
+            <a:off x="7772400" y="2103120"/>
+            <a:ext cx="822960" cy="457200"/>
+          </a:xfrm>
+          <a:prstGeom prst="line">
+            <a:avLst/>
+          </a:prstGeom>
+          <a:ln w="20320">
+            <a:solidFill>
+              <a:srgbClr val="DC2626"/>
+            </a:solidFill>
+            <a:tailEnd type="triangle" w="med" len="med"/>
+          </a:ln>
+        </p:spPr>
+        <p:style>
+          <a:lnRef idx="2">
+            <a:schemeClr val="accent1"/>
+          </a:lnRef>
+          <a:fillRef idx="0">
+            <a:schemeClr val="accent1"/>
+          </a:fillRef>
+          <a:effectRef idx="1">
+            <a:schemeClr val="accent1"/>
+          </a:effectRef>
+          <a:fontRef idx="minor">
+            <a:schemeClr val="tx1"/>
+          </a:fontRef>
+        </p:style>
+      </p:cxnSp>
+      <p:cxnSp>
+        <p:nvCxnSpPr>
+          <p:cNvPr id="11" name="Connector 10"/>
+          <p:cNvCxnSpPr/>
+          <p:nvPr/>
+        </p:nvCxnSpPr>
+        <p:spPr>
+          <a:xfrm>
+            <a:off x="7772400" y="2880360"/>
+            <a:ext cx="822960" cy="109728"/>
+          </a:xfrm>
+          <a:prstGeom prst="line">
+            <a:avLst/>
+          </a:prstGeom>
+          <a:ln w="17780">
+            <a:solidFill>
+              <a:srgbClr val="059669"/>
+            </a:solidFill>
+            <a:tailEnd type="triangle" w="med" len="med"/>
+          </a:ln>
+        </p:spPr>
+        <p:style>
+          <a:lnRef idx="2">
+            <a:schemeClr val="accent1"/>
+          </a:lnRef>
+          <a:fillRef idx="0">
+            <a:schemeClr val="accent1"/>
+          </a:fillRef>
+          <a:effectRef idx="1">
+            <a:schemeClr val="accent1"/>
+          </a:effectRef>
+          <a:fontRef idx="minor">
+            <a:schemeClr val="tx1"/>
+          </a:fontRef>
+        </p:style>
+      </p:cxnSp>
+      <p:cxnSp>
+        <p:nvCxnSpPr>
+          <p:cNvPr id="12" name="Connector 11"/>
+          <p:cNvCxnSpPr/>
+          <p:nvPr/>
+        </p:nvCxnSpPr>
+        <p:spPr>
+          <a:xfrm>
+            <a:off x="7772400" y="3017520"/>
+            <a:ext cx="822960" cy="704088"/>
+          </a:xfrm>
+          <a:prstGeom prst="line">
+            <a:avLst/>
+          </a:prstGeom>
+          <a:ln w="17780">
+            <a:solidFill>
+              <a:srgbClr val="059669"/>
+            </a:solidFill>
+            <a:tailEnd type="triangle" w="med" len="med"/>
+          </a:ln>
+        </p:spPr>
+        <p:style>
+          <a:lnRef idx="2">
+            <a:schemeClr val="accent1"/>
+          </a:lnRef>
+          <a:fillRef idx="0">
+            <a:schemeClr val="accent1"/>
+          </a:fillRef>
+          <a:effectRef idx="1">
+            <a:schemeClr val="accent1"/>
+          </a:effectRef>
+          <a:fontRef idx="minor">
+            <a:schemeClr val="tx1"/>
+          </a:fontRef>
+        </p:style>
+      </p:cxnSp>
+      <p:cxnSp>
+        <p:nvCxnSpPr>
+          <p:cNvPr id="13" name="Connector 12"/>
+          <p:cNvCxnSpPr/>
+          <p:nvPr/>
+        </p:nvCxnSpPr>
+        <p:spPr>
+          <a:xfrm>
+            <a:off x="7772400" y="3108960"/>
+            <a:ext cx="822960" cy="1344168"/>
+          </a:xfrm>
+          <a:prstGeom prst="line">
+            <a:avLst/>
+          </a:prstGeom>
+          <a:ln w="17780">
+            <a:solidFill>
+              <a:srgbClr val="059669"/>
+            </a:solidFill>
+            <a:tailEnd type="triangle" w="med" len="med"/>
+          </a:ln>
+        </p:spPr>
+        <p:style>
+          <a:lnRef idx="2">
+            <a:schemeClr val="accent1"/>
+          </a:lnRef>
+          <a:fillRef idx="0">
+            <a:schemeClr val="accent1"/>
+          </a:fillRef>
+          <a:effectRef idx="1">
+            <a:schemeClr val="accent1"/>
+          </a:effectRef>
+          <a:fontRef idx="minor">
+            <a:schemeClr val="tx1"/>
+          </a:fontRef>
+        </p:style>
+      </p:cxnSp>
+      <p:sp>
+        <p:nvSpPr>
+          <p:cNvPr id="14" name="TextBox 13"/>
+          <p:cNvSpPr txBox="1"/>
+          <p:nvPr/>
+        </p:nvSpPr>
+        <p:spPr>
+          <a:xfrm>
+            <a:off x="7635240" y="2057400"/>
+            <a:ext cx="914400" cy="274320"/>
+          </a:xfrm>
+          <a:prstGeom prst="rect">
+            <a:avLst/>
+          </a:prstGeom>
+          <a:noFill/>
+        </p:spPr>
+        <p:txBody>
+          <a:bodyPr wrap="square" anchor="t">
+            <a:spAutoFit/>
+          </a:bodyPr>
+          <a:lstStyle/>
+          <a:p>
+            <a:pPr algn="l">
+              <a:spcAft>
+                <a:spcPts val="400"/>
+              </a:spcAft>
+            </a:pPr>
+            <a:r>
+              <a:rPr sz="1200" b="1">
+                <a:solidFill>
+                  <a:srgbClr val="DC2626"/>
+                </a:solidFill>
+                <a:latin typeface="PingFang TC"/>
+                <a:ea typeface="PingFang TC"/>
+              </a:rPr>
+              <a:t>寫</a:t>
+            </a:r>
+          </a:p>
+        </p:txBody>
+      </p:sp>
+      <p:sp>
+        <p:nvSpPr>
+          <p:cNvPr id="15" name="TextBox 14"/>
+          <p:cNvSpPr txBox="1"/>
+          <p:nvPr/>
+        </p:nvSpPr>
+        <p:spPr>
+          <a:xfrm>
+            <a:off x="7589520" y="3200400"/>
+            <a:ext cx="914400" cy="274320"/>
+          </a:xfrm>
+          <a:prstGeom prst="rect">
+            <a:avLst/>
+          </a:prstGeom>
+          <a:noFill/>
+        </p:spPr>
+        <p:txBody>
+          <a:bodyPr wrap="square" anchor="t">
+            <a:spAutoFit/>
+          </a:bodyPr>
+          <a:lstStyle/>
+          <a:p>
+            <a:pPr algn="l">
+              <a:spcAft>
+                <a:spcPts val="400"/>
+              </a:spcAft>
+            </a:pPr>
+            <a:r>
+              <a:rPr sz="1200" b="1">
+                <a:solidFill>
+                  <a:srgbClr val="059669"/>
+                </a:solidFill>
+                <a:latin typeface="PingFang TC"/>
+                <a:ea typeface="PingFang TC"/>
+              </a:rPr>
+              <a:t>讀</a:t>
+            </a:r>
+          </a:p>
+        </p:txBody>
+      </p:sp>
+      <p:cxnSp>
+        <p:nvCxnSpPr>
+          <p:cNvPr id="16" name="Connector 15"/>
+          <p:cNvCxnSpPr/>
+          <p:nvPr/>
+        </p:nvCxnSpPr>
+        <p:spPr>
+          <a:xfrm>
+            <a:off x="10104120" y="2468880"/>
+            <a:ext cx="0" cy="228600"/>
+          </a:xfrm>
+          <a:prstGeom prst="line">
+            <a:avLst/>
+          </a:prstGeom>
+          <a:ln w="13970">
+            <a:solidFill>
+              <a:srgbClr val="64748B"/>
+            </a:solidFill>
+            <a:tailEnd type="triangle" w="med" len="med"/>
+          </a:ln>
+        </p:spPr>
+        <p:style>
+          <a:lnRef idx="2">
+            <a:schemeClr val="accent1"/>
+          </a:lnRef>
+          <a:fillRef idx="0">
+            <a:schemeClr val="accent1"/>
+          </a:fillRef>
+          <a:effectRef idx="1">
+            <a:schemeClr val="accent1"/>
+          </a:effectRef>
+          <a:fontRef idx="minor">
+            <a:schemeClr val="tx1"/>
+          </a:fontRef>
+        </p:style>
+      </p:cxnSp>
+      <p:sp>
+        <p:nvSpPr>
+          <p:cNvPr id="17" name="TextBox 16"/>
+          <p:cNvSpPr txBox="1"/>
+          <p:nvPr/>
+        </p:nvSpPr>
+        <p:spPr>
+          <a:xfrm>
+            <a:off x="10241280" y="2395728"/>
+            <a:ext cx="1463040" cy="274320"/>
+          </a:xfrm>
+          <a:prstGeom prst="rect">
+            <a:avLst/>
+          </a:prstGeom>
+          <a:noFill/>
+        </p:spPr>
+        <p:txBody>
+          <a:bodyPr wrap="square" anchor="t">
+            <a:spAutoFit/>
+          </a:bodyPr>
+          <a:lstStyle/>
+          <a:p>
+            <a:pPr algn="l">
+              <a:spcAft>
+                <a:spcPts val="400"/>
+              </a:spcAft>
+            </a:pPr>
+            <a:r>
+              <a:rPr sz="1000" b="0">
+                <a:solidFill>
+                  <a:srgbClr val="64748B"/>
+                </a:solidFill>
+                <a:latin typeface="PingFang TC"/>
+                <a:ea typeface="PingFang TC"/>
+              </a:rPr>
+              <a:t>非同步複寫</a:t>
+            </a:r>
+          </a:p>
+        </p:txBody>
+      </p:sp>
+      <p:sp>
+        <p:nvSpPr>
+          <p:cNvPr id="18" name="TextBox 17"/>
+          <p:cNvSpPr txBox="1"/>
+          <p:nvPr/>
+        </p:nvSpPr>
+        <p:spPr>
+          <a:xfrm>
+            <a:off x="548640" y="5029200"/>
+            <a:ext cx="11247120" cy="1554480"/>
+          </a:xfrm>
+          <a:prstGeom prst="rect">
+            <a:avLst/>
+          </a:prstGeom>
+          <a:noFill/>
+        </p:spPr>
+        <p:txBody>
+          <a:bodyPr wrap="square">
+            <a:spAutoFit/>
+          </a:bodyPr>
+          <a:lstStyle/>
+          <a:p>
+            <a:pPr>
+              <a:spcAft>
+                <a:spcPts val="600"/>
+              </a:spcAft>
+            </a:pPr>
+            <a:r>
+              <a:rPr sz="1300" b="0">
+                <a:solidFill>
+                  <a:srgbClr val="0F172A"/>
+                </a:solidFill>
+                <a:latin typeface="PingFang TC"/>
+                <a:ea typeface="PingFang TC"/>
+              </a:rPr>
+              <a:t>•  寫走 primary、讀走 replica（load-balanced）；讀不夠就加 replica 水平擴讀</a:t>
+            </a:r>
+          </a:p>
+          <a:p>
+            <a:pPr>
+              <a:spcAft>
+                <a:spcPts val="600"/>
+              </a:spcAft>
+            </a:pPr>
+            <a:r>
+              <a:rPr sz="1300" b="0">
+                <a:solidFill>
+                  <a:srgbClr val="0F172A"/>
+                </a:solidFill>
+                <a:latin typeface="PingFang TC"/>
+                <a:ea typeface="PingFang TC"/>
+              </a:rPr>
+              <a:t>•  配合 Redis cache，真正打到 DB 的讀已先被擋掉一大半</a:t>
+            </a:r>
+          </a:p>
+          <a:p>
+            <a:pPr>
+              <a:spcAft>
+                <a:spcPts val="600"/>
+              </a:spcAft>
+            </a:pPr>
+            <a:r>
+              <a:rPr sz="1300" b="0">
+                <a:solidFill>
+                  <a:srgbClr val="0F172A"/>
+                </a:solidFill>
+                <a:latin typeface="PingFang TC"/>
+                <a:ea typeface="PingFang TC"/>
+              </a:rPr>
+              <a:t>•  failover：primary 掛 → 升一台 read replica 為新 primary；複寫延遲靠 create 後暖 cache 緩解</a:t>
+            </a:r>
+          </a:p>
+        </p:txBody>
+      </p:sp>
+    </p:spTree>
+  </p:cSld>
+  <p:clrMapOvr>
+    <a:masterClrMapping/>
+  </p:clrMapOvr>
+</p:sld>
+</file>
+
+<file path=ppt/slides/slide19.xml><?xml version="1.0" encoding="utf-8"?>
+<p:sld xmlns:a="http://schemas.openxmlformats.org/drawingml/2006/main" xmlns:p="http://schemas.openxmlformats.org/presentationml/2006/main" xmlns:r="http://schemas.openxmlformats.org/officeDocument/2006/relationships">
+  <p:cSld>
+    <p:spTree>
+      <p:nvGrpSpPr>
+        <p:cNvPr id="1" name=""/>
+        <p:cNvGrpSpPr/>
+        <p:nvPr/>
+      </p:nvGrpSpPr>
+      <p:grpSpPr/>
+      <p:sp>
+        <p:nvSpPr>
+          <p:cNvPr id="2" name="Rectangle 1"/>
+          <p:cNvSpPr/>
+          <p:nvPr/>
+        </p:nvSpPr>
+        <p:spPr>
+          <a:xfrm>
+            <a:off x="0" y="0"/>
+            <a:ext cx="164592" cy="6858000"/>
+          </a:xfrm>
+          <a:prstGeom prst="rect">
+            <a:avLst/>
+          </a:prstGeom>
+          <a:solidFill>
+            <a:srgbClr val="2563EB"/>
+          </a:solidFill>
+          <a:ln>
+            <a:noFill/>
+          </a:ln>
+          <a:effectLst/>
+        </p:spPr>
+        <p:style>
+          <a:lnRef idx="1">
+            <a:schemeClr val="accent1"/>
+          </a:lnRef>
+          <a:fillRef idx="3">
+            <a:schemeClr val="accent1"/>
+          </a:fillRef>
+          <a:effectRef idx="2">
+            <a:schemeClr val="accent1"/>
+          </a:effectRef>
+          <a:fontRef idx="minor">
+            <a:schemeClr val="lt1"/>
+          </a:fontRef>
+        </p:style>
+        <p:txBody>
+          <a:bodyPr rtlCol="0" anchor="ctr"/>
+          <a:lstStyle/>
+          <a:p>
+            <a:pPr algn="ctr"/>
+          </a:p>
+        </p:txBody>
+      </p:sp>
+      <p:sp>
+        <p:nvSpPr>
+          <p:cNvPr id="3" name="TextBox 2"/>
+          <p:cNvSpPr txBox="1"/>
+          <p:nvPr/>
+        </p:nvSpPr>
+        <p:spPr>
+          <a:xfrm>
+            <a:off x="502920" y="320040"/>
+            <a:ext cx="10972800" cy="1005840"/>
+          </a:xfrm>
+          <a:prstGeom prst="rect">
+            <a:avLst/>
+          </a:prstGeom>
+          <a:noFill/>
+        </p:spPr>
+        <p:txBody>
+          <a:bodyPr wrap="square" anchor="t">
+            <a:spAutoFit/>
+          </a:bodyPr>
+          <a:lstStyle/>
+          <a:p>
+            <a:pPr algn="l">
+              <a:spcAft>
+                <a:spcPts val="200"/>
+              </a:spcAft>
+            </a:pPr>
+            <a:r>
+              <a:rPr sz="1300" b="1">
+                <a:solidFill>
+                  <a:srgbClr val="2563EB"/>
+                </a:solidFill>
+                <a:latin typeface="PingFang TC"/>
+                <a:ea typeface="PingFang TC"/>
+              </a:rPr>
+              <a:t>12 · IMPROVEMENTS</a:t>
+            </a:r>
+          </a:p>
+          <a:p>
+            <a:pPr algn="l">
+              <a:spcAft>
+                <a:spcPts val="400"/>
+              </a:spcAft>
+            </a:pPr>
+            <a:r>
+              <a:rPr sz="3000" b="1">
+                <a:solidFill>
+                  <a:srgbClr val="0F172A"/>
+                </a:solidFill>
+                <a:latin typeface="PingFang TC"/>
+                <a:ea typeface="PingFang TC"/>
+              </a:rPr>
+              <a:t>對參考 repo 的關鍵改良</a:t>
+            </a:r>
+          </a:p>
+        </p:txBody>
+      </p:sp>
+      <p:sp>
+        <p:nvSpPr>
+          <p:cNvPr id="4" name="Rounded Rectangle 3"/>
+          <p:cNvSpPr/>
+          <p:nvPr/>
+        </p:nvSpPr>
+        <p:spPr>
+          <a:xfrm>
+            <a:off x="640080" y="1691640"/>
+            <a:ext cx="640080" cy="731520"/>
+          </a:xfrm>
+          <a:prstGeom prst="roundRect">
+            <a:avLst/>
+          </a:prstGeom>
+          <a:solidFill>
+            <a:srgbClr val="2563EB"/>
+          </a:solidFill>
+          <a:ln>
+            <a:solidFill>
+              <a:srgbClr val="2563EB"/>
+            </a:solidFill>
+          </a:ln>
+          <a:effectLst/>
+        </p:spPr>
+        <p:style>
+          <a:lnRef idx="1">
+            <a:schemeClr val="accent1"/>
+          </a:lnRef>
+          <a:fillRef idx="3">
+            <a:schemeClr val="accent1"/>
+          </a:fillRef>
+          <a:effectRef idx="2">
+            <a:schemeClr val="accent1"/>
+          </a:effectRef>
+          <a:fontRef idx="minor">
+            <a:schemeClr val="lt1"/>
+          </a:fontRef>
+        </p:style>
+        <p:txBody>
+          <a:bodyPr rtlCol="0" anchor="ctr" wrap="square" tIns="25400" bIns="25400"/>
+          <a:lstStyle/>
+          <a:p>
+            <a:pPr algn="ctr"/>
+            <a:r>
               <a:rPr sz="1800" b="1">
                 <a:solidFill>
                   <a:srgbClr val="FFFFFF"/>
@@ -9080,7 +9754,722 @@
 </p:sld>
 </file>
 
-<file path=ppt/slides/slide19.xml><?xml version="1.0" encoding="utf-8"?>
+<file path=ppt/slides/slide2.xml><?xml version="1.0" encoding="utf-8"?>
+<p:sld xmlns:a="http://schemas.openxmlformats.org/drawingml/2006/main" xmlns:p="http://schemas.openxmlformats.org/presentationml/2006/main" xmlns:r="http://schemas.openxmlformats.org/officeDocument/2006/relationships">
+  <p:cSld>
+    <p:spTree>
+      <p:nvGrpSpPr>
+        <p:cNvPr id="1" name=""/>
+        <p:cNvGrpSpPr/>
+        <p:nvPr/>
+      </p:nvGrpSpPr>
+      <p:grpSpPr/>
+      <p:sp>
+        <p:nvSpPr>
+          <p:cNvPr id="2" name="Rectangle 1"/>
+          <p:cNvSpPr/>
+          <p:nvPr/>
+        </p:nvSpPr>
+        <p:spPr>
+          <a:xfrm>
+            <a:off x="0" y="0"/>
+            <a:ext cx="164592" cy="6858000"/>
+          </a:xfrm>
+          <a:prstGeom prst="rect">
+            <a:avLst/>
+          </a:prstGeom>
+          <a:solidFill>
+            <a:srgbClr val="2563EB"/>
+          </a:solidFill>
+          <a:ln>
+            <a:noFill/>
+          </a:ln>
+          <a:effectLst/>
+        </p:spPr>
+        <p:style>
+          <a:lnRef idx="1">
+            <a:schemeClr val="accent1"/>
+          </a:lnRef>
+          <a:fillRef idx="3">
+            <a:schemeClr val="accent1"/>
+          </a:fillRef>
+          <a:effectRef idx="2">
+            <a:schemeClr val="accent1"/>
+          </a:effectRef>
+          <a:fontRef idx="minor">
+            <a:schemeClr val="lt1"/>
+          </a:fontRef>
+        </p:style>
+        <p:txBody>
+          <a:bodyPr rtlCol="0" anchor="ctr"/>
+          <a:lstStyle/>
+          <a:p>
+            <a:pPr algn="ctr"/>
+          </a:p>
+        </p:txBody>
+      </p:sp>
+      <p:sp>
+        <p:nvSpPr>
+          <p:cNvPr id="3" name="TextBox 2"/>
+          <p:cNvSpPr txBox="1"/>
+          <p:nvPr/>
+        </p:nvSpPr>
+        <p:spPr>
+          <a:xfrm>
+            <a:off x="502920" y="320040"/>
+            <a:ext cx="10972800" cy="1005840"/>
+          </a:xfrm>
+          <a:prstGeom prst="rect">
+            <a:avLst/>
+          </a:prstGeom>
+          <a:noFill/>
+        </p:spPr>
+        <p:txBody>
+          <a:bodyPr wrap="square" anchor="t">
+            <a:spAutoFit/>
+          </a:bodyPr>
+          <a:lstStyle/>
+          <a:p>
+            <a:pPr algn="l">
+              <a:spcAft>
+                <a:spcPts val="200"/>
+              </a:spcAft>
+            </a:pPr>
+            <a:r>
+              <a:rPr sz="1300" b="1">
+                <a:solidFill>
+                  <a:srgbClr val="2563EB"/>
+                </a:solidFill>
+                <a:latin typeface="PingFang TC"/>
+                <a:ea typeface="PingFang TC"/>
+              </a:rPr>
+              <a:t>01 · REQUIREMENTS</a:t>
+            </a:r>
+          </a:p>
+          <a:p>
+            <a:pPr algn="l">
+              <a:spcAft>
+                <a:spcPts val="400"/>
+              </a:spcAft>
+            </a:pPr>
+            <a:r>
+              <a:rPr sz="3000" b="1">
+                <a:solidFill>
+                  <a:srgbClr val="0F172A"/>
+                </a:solidFill>
+                <a:latin typeface="PingFang TC"/>
+                <a:ea typeface="PingFang TC"/>
+              </a:rPr>
+              <a:t>需求與規模</a:t>
+            </a:r>
+          </a:p>
+        </p:txBody>
+      </p:sp>
+      <p:sp>
+        <p:nvSpPr>
+          <p:cNvPr id="4" name="Rounded Rectangle 3"/>
+          <p:cNvSpPr/>
+          <p:nvPr/>
+        </p:nvSpPr>
+        <p:spPr>
+          <a:xfrm>
+            <a:off x="548640" y="1645920"/>
+            <a:ext cx="3566160" cy="548640"/>
+          </a:xfrm>
+          <a:prstGeom prst="roundRect">
+            <a:avLst/>
+          </a:prstGeom>
+          <a:solidFill>
+            <a:srgbClr val="2563EB"/>
+          </a:solidFill>
+          <a:ln>
+            <a:solidFill>
+              <a:srgbClr val="2563EB"/>
+            </a:solidFill>
+          </a:ln>
+          <a:effectLst/>
+        </p:spPr>
+        <p:style>
+          <a:lnRef idx="1">
+            <a:schemeClr val="accent1"/>
+          </a:lnRef>
+          <a:fillRef idx="3">
+            <a:schemeClr val="accent1"/>
+          </a:fillRef>
+          <a:effectRef idx="2">
+            <a:schemeClr val="accent1"/>
+          </a:effectRef>
+          <a:fontRef idx="minor">
+            <a:schemeClr val="lt1"/>
+          </a:fontRef>
+        </p:style>
+        <p:txBody>
+          <a:bodyPr rtlCol="0" anchor="ctr" wrap="square" tIns="25400" bIns="25400"/>
+          <a:lstStyle/>
+          <a:p>
+            <a:pPr algn="ctr"/>
+            <a:r>
+              <a:rPr sz="1600" b="1">
+                <a:solidFill>
+                  <a:srgbClr val="FFFFFF"/>
+                </a:solidFill>
+                <a:latin typeface="PingFang TC"/>
+                <a:ea typeface="PingFang TC"/>
+              </a:rPr>
+              <a:t>功能性 (FR)</a:t>
+            </a:r>
+          </a:p>
+        </p:txBody>
+      </p:sp>
+      <p:sp>
+        <p:nvSpPr>
+          <p:cNvPr id="5" name="Rounded Rectangle 4"/>
+          <p:cNvSpPr/>
+          <p:nvPr/>
+        </p:nvSpPr>
+        <p:spPr>
+          <a:xfrm>
+            <a:off x="548640" y="2286000"/>
+            <a:ext cx="3566160" cy="4023360"/>
+          </a:xfrm>
+          <a:prstGeom prst="roundRect">
+            <a:avLst/>
+          </a:prstGeom>
+          <a:solidFill>
+            <a:srgbClr val="F1F5F9"/>
+          </a:solidFill>
+          <a:ln>
+            <a:solidFill>
+              <a:srgbClr val="F1F5F9"/>
+            </a:solidFill>
+          </a:ln>
+          <a:effectLst/>
+        </p:spPr>
+        <p:style>
+          <a:lnRef idx="1">
+            <a:schemeClr val="accent1"/>
+          </a:lnRef>
+          <a:fillRef idx="3">
+            <a:schemeClr val="accent1"/>
+          </a:fillRef>
+          <a:effectRef idx="2">
+            <a:schemeClr val="accent1"/>
+          </a:effectRef>
+          <a:fontRef idx="minor">
+            <a:schemeClr val="lt1"/>
+          </a:fontRef>
+        </p:style>
+        <p:txBody>
+          <a:bodyPr rtlCol="0" anchor="ctr"/>
+          <a:lstStyle/>
+          <a:p>
+            <a:pPr algn="ctr"/>
+          </a:p>
+        </p:txBody>
+      </p:sp>
+      <p:sp>
+        <p:nvSpPr>
+          <p:cNvPr id="6" name="TextBox 5"/>
+          <p:cNvSpPr txBox="1"/>
+          <p:nvPr/>
+        </p:nvSpPr>
+        <p:spPr>
+          <a:xfrm>
+            <a:off x="731520" y="2468880"/>
+            <a:ext cx="3200400" cy="3657600"/>
+          </a:xfrm>
+          <a:prstGeom prst="rect">
+            <a:avLst/>
+          </a:prstGeom>
+          <a:noFill/>
+        </p:spPr>
+        <p:txBody>
+          <a:bodyPr wrap="square">
+            <a:spAutoFit/>
+          </a:bodyPr>
+          <a:lstStyle/>
+          <a:p>
+            <a:pPr>
+              <a:spcAft>
+                <a:spcPts val="1000"/>
+              </a:spcAft>
+            </a:pPr>
+            <a:r>
+              <a:rPr sz="1400" b="0">
+                <a:solidFill>
+                  <a:srgbClr val="0F172A"/>
+                </a:solidFill>
+                <a:latin typeface="PingFang TC"/>
+                <a:ea typeface="PingFang TC"/>
+              </a:rPr>
+              <a:t>•  提交 URL → 回 token + QR 圖</a:t>
+            </a:r>
+          </a:p>
+          <a:p>
+            <a:pPr>
+              <a:spcAft>
+                <a:spcPts val="1000"/>
+              </a:spcAft>
+            </a:pPr>
+            <a:r>
+              <a:rPr sz="1400" b="0">
+                <a:solidFill>
+                  <a:srgbClr val="0F172A"/>
+                </a:solidFill>
+                <a:latin typeface="PingFang TC"/>
+                <a:ea typeface="PingFang TC"/>
+              </a:rPr>
+              <a:t>•  掃描短碼 → 302 導向原始 URL</a:t>
+            </a:r>
+          </a:p>
+          <a:p>
+            <a:pPr>
+              <a:spcAft>
+                <a:spcPts val="1000"/>
+              </a:spcAft>
+            </a:pPr>
+            <a:r>
+              <a:rPr sz="1400" b="0">
+                <a:solidFill>
+                  <a:srgbClr val="0F172A"/>
+                </a:solidFill>
+                <a:latin typeface="PingFang TC"/>
+                <a:ea typeface="PingFang TC"/>
+              </a:rPr>
+              <a:t>•  可改目標 URL / 軟刪 / 設過期</a:t>
+            </a:r>
+          </a:p>
+          <a:p>
+            <a:pPr>
+              <a:spcAft>
+                <a:spcPts val="1000"/>
+              </a:spcAft>
+            </a:pPr>
+            <a:r>
+              <a:rPr sz="1400" b="0">
+                <a:solidFill>
+                  <a:srgbClr val="0F172A"/>
+                </a:solidFill>
+                <a:latin typeface="PingFang TC"/>
+                <a:ea typeface="PingFang TC"/>
+              </a:rPr>
+              <a:t>•  掃描分析（總數、每日）</a:t>
+            </a:r>
+          </a:p>
+          <a:p>
+            <a:pPr>
+              <a:spcAft>
+                <a:spcPts val="1000"/>
+              </a:spcAft>
+            </a:pPr>
+            <a:r>
+              <a:rPr sz="1400" b="0">
+                <a:solidFill>
+                  <a:srgbClr val="0F172A"/>
+                </a:solidFill>
+                <a:latin typeface="PingFang TC"/>
+                <a:ea typeface="PingFang TC"/>
+              </a:rPr>
+              <a:t>•  URL 驗證：正規化 + 惡意阻擋</a:t>
+            </a:r>
+          </a:p>
+        </p:txBody>
+      </p:sp>
+      <p:sp>
+        <p:nvSpPr>
+          <p:cNvPr id="7" name="Rounded Rectangle 6"/>
+          <p:cNvSpPr/>
+          <p:nvPr/>
+        </p:nvSpPr>
+        <p:spPr>
+          <a:xfrm>
+            <a:off x="4343400" y="1645920"/>
+            <a:ext cx="3566160" cy="548640"/>
+          </a:xfrm>
+          <a:prstGeom prst="roundRect">
+            <a:avLst/>
+          </a:prstGeom>
+          <a:solidFill>
+            <a:srgbClr val="059669"/>
+          </a:solidFill>
+          <a:ln>
+            <a:solidFill>
+              <a:srgbClr val="059669"/>
+            </a:solidFill>
+          </a:ln>
+          <a:effectLst/>
+        </p:spPr>
+        <p:style>
+          <a:lnRef idx="1">
+            <a:schemeClr val="accent1"/>
+          </a:lnRef>
+          <a:fillRef idx="3">
+            <a:schemeClr val="accent1"/>
+          </a:fillRef>
+          <a:effectRef idx="2">
+            <a:schemeClr val="accent1"/>
+          </a:effectRef>
+          <a:fontRef idx="minor">
+            <a:schemeClr val="lt1"/>
+          </a:fontRef>
+        </p:style>
+        <p:txBody>
+          <a:bodyPr rtlCol="0" anchor="ctr" wrap="square" tIns="25400" bIns="25400"/>
+          <a:lstStyle/>
+          <a:p>
+            <a:pPr algn="ctr"/>
+            <a:r>
+              <a:rPr sz="1600" b="1">
+                <a:solidFill>
+                  <a:srgbClr val="FFFFFF"/>
+                </a:solidFill>
+                <a:latin typeface="PingFang TC"/>
+                <a:ea typeface="PingFang TC"/>
+              </a:rPr>
+              <a:t>非功能性 (NFR)</a:t>
+            </a:r>
+          </a:p>
+        </p:txBody>
+      </p:sp>
+      <p:sp>
+        <p:nvSpPr>
+          <p:cNvPr id="8" name="Rounded Rectangle 7"/>
+          <p:cNvSpPr/>
+          <p:nvPr/>
+        </p:nvSpPr>
+        <p:spPr>
+          <a:xfrm>
+            <a:off x="4343400" y="2286000"/>
+            <a:ext cx="3566160" cy="4023360"/>
+          </a:xfrm>
+          <a:prstGeom prst="roundRect">
+            <a:avLst/>
+          </a:prstGeom>
+          <a:solidFill>
+            <a:srgbClr val="F1F5F9"/>
+          </a:solidFill>
+          <a:ln>
+            <a:solidFill>
+              <a:srgbClr val="F1F5F9"/>
+            </a:solidFill>
+          </a:ln>
+          <a:effectLst/>
+        </p:spPr>
+        <p:style>
+          <a:lnRef idx="1">
+            <a:schemeClr val="accent1"/>
+          </a:lnRef>
+          <a:fillRef idx="3">
+            <a:schemeClr val="accent1"/>
+          </a:fillRef>
+          <a:effectRef idx="2">
+            <a:schemeClr val="accent1"/>
+          </a:effectRef>
+          <a:fontRef idx="minor">
+            <a:schemeClr val="lt1"/>
+          </a:fontRef>
+        </p:style>
+        <p:txBody>
+          <a:bodyPr rtlCol="0" anchor="ctr"/>
+          <a:lstStyle/>
+          <a:p>
+            <a:pPr algn="ctr"/>
+          </a:p>
+        </p:txBody>
+      </p:sp>
+      <p:sp>
+        <p:nvSpPr>
+          <p:cNvPr id="9" name="TextBox 8"/>
+          <p:cNvSpPr txBox="1"/>
+          <p:nvPr/>
+        </p:nvSpPr>
+        <p:spPr>
+          <a:xfrm>
+            <a:off x="4526280" y="2468880"/>
+            <a:ext cx="3200400" cy="3657600"/>
+          </a:xfrm>
+          <a:prstGeom prst="rect">
+            <a:avLst/>
+          </a:prstGeom>
+          <a:noFill/>
+        </p:spPr>
+        <p:txBody>
+          <a:bodyPr wrap="square">
+            <a:spAutoFit/>
+          </a:bodyPr>
+          <a:lstStyle/>
+          <a:p>
+            <a:pPr>
+              <a:spcAft>
+                <a:spcPts val="1000"/>
+              </a:spcAft>
+            </a:pPr>
+            <a:r>
+              <a:rPr sz="1400" b="0">
+                <a:solidFill>
+                  <a:srgbClr val="0F172A"/>
+                </a:solidFill>
+                <a:latin typeface="PingFang TC"/>
+                <a:ea typeface="PingFang TC"/>
+              </a:rPr>
+              <a:t>•  24/7 高可用 (HA)</a:t>
+            </a:r>
+          </a:p>
+          <a:p>
+            <a:pPr>
+              <a:spcAft>
+                <a:spcPts val="1000"/>
+              </a:spcAft>
+            </a:pPr>
+            <a:r>
+              <a:rPr sz="1400" b="0">
+                <a:solidFill>
+                  <a:srgbClr val="0F172A"/>
+                </a:solidFill>
+                <a:latin typeface="PingFang TC"/>
+                <a:ea typeface="PingFang TC"/>
+              </a:rPr>
+              <a:t>•  Redirect 延遲 &lt; 100ms</a:t>
+            </a:r>
+          </a:p>
+          <a:p>
+            <a:pPr>
+              <a:spcAft>
+                <a:spcPts val="1000"/>
+              </a:spcAft>
+            </a:pPr>
+            <a:r>
+              <a:rPr sz="1400" b="0">
+                <a:solidFill>
+                  <a:srgbClr val="0F172A"/>
+                </a:solidFill>
+                <a:latin typeface="PingFang TC"/>
+                <a:ea typeface="PingFang TC"/>
+              </a:rPr>
+              <a:t>•  10 億 QR、1 億用戶</a:t>
+            </a:r>
+          </a:p>
+          <a:p>
+            <a:pPr>
+              <a:spcAft>
+                <a:spcPts val="1000"/>
+              </a:spcAft>
+            </a:pPr>
+            <a:r>
+              <a:rPr sz="1400" b="0">
+                <a:solidFill>
+                  <a:srgbClr val="0F172A"/>
+                </a:solidFill>
+                <a:latin typeface="PingFang TC"/>
+                <a:ea typeface="PingFang TC"/>
+              </a:rPr>
+              <a:t>•  讀多寫少 ≈ 100:1</a:t>
+            </a:r>
+          </a:p>
+        </p:txBody>
+      </p:sp>
+      <p:sp>
+        <p:nvSpPr>
+          <p:cNvPr id="10" name="Rounded Rectangle 9"/>
+          <p:cNvSpPr/>
+          <p:nvPr/>
+        </p:nvSpPr>
+        <p:spPr>
+          <a:xfrm>
+            <a:off x="8138160" y="1645920"/>
+            <a:ext cx="3566160" cy="548640"/>
+          </a:xfrm>
+          <a:prstGeom prst="roundRect">
+            <a:avLst/>
+          </a:prstGeom>
+          <a:solidFill>
+            <a:srgbClr val="D97706"/>
+          </a:solidFill>
+          <a:ln>
+            <a:solidFill>
+              <a:srgbClr val="D97706"/>
+            </a:solidFill>
+          </a:ln>
+          <a:effectLst/>
+        </p:spPr>
+        <p:style>
+          <a:lnRef idx="1">
+            <a:schemeClr val="accent1"/>
+          </a:lnRef>
+          <a:fillRef idx="3">
+            <a:schemeClr val="accent1"/>
+          </a:fillRef>
+          <a:effectRef idx="2">
+            <a:schemeClr val="accent1"/>
+          </a:effectRef>
+          <a:fontRef idx="minor">
+            <a:schemeClr val="lt1"/>
+          </a:fontRef>
+        </p:style>
+        <p:txBody>
+          <a:bodyPr rtlCol="0" anchor="ctr" wrap="square" tIns="25400" bIns="25400"/>
+          <a:lstStyle/>
+          <a:p>
+            <a:pPr algn="ctr"/>
+            <a:r>
+              <a:rPr sz="1600" b="1">
+                <a:solidFill>
+                  <a:srgbClr val="FFFFFF"/>
+                </a:solidFill>
+                <a:latin typeface="PingFang TC"/>
+                <a:ea typeface="PingFang TC"/>
+              </a:rPr>
+              <a:t>容量估算</a:t>
+            </a:r>
+          </a:p>
+        </p:txBody>
+      </p:sp>
+      <p:sp>
+        <p:nvSpPr>
+          <p:cNvPr id="11" name="Rounded Rectangle 10"/>
+          <p:cNvSpPr/>
+          <p:nvPr/>
+        </p:nvSpPr>
+        <p:spPr>
+          <a:xfrm>
+            <a:off x="8138160" y="2286000"/>
+            <a:ext cx="3566160" cy="4023360"/>
+          </a:xfrm>
+          <a:prstGeom prst="roundRect">
+            <a:avLst/>
+          </a:prstGeom>
+          <a:solidFill>
+            <a:srgbClr val="F1F5F9"/>
+          </a:solidFill>
+          <a:ln>
+            <a:solidFill>
+              <a:srgbClr val="F1F5F9"/>
+            </a:solidFill>
+          </a:ln>
+          <a:effectLst/>
+        </p:spPr>
+        <p:style>
+          <a:lnRef idx="1">
+            <a:schemeClr val="accent1"/>
+          </a:lnRef>
+          <a:fillRef idx="3">
+            <a:schemeClr val="accent1"/>
+          </a:fillRef>
+          <a:effectRef idx="2">
+            <a:schemeClr val="accent1"/>
+          </a:effectRef>
+          <a:fontRef idx="minor">
+            <a:schemeClr val="lt1"/>
+          </a:fontRef>
+        </p:style>
+        <p:txBody>
+          <a:bodyPr rtlCol="0" anchor="ctr"/>
+          <a:lstStyle/>
+          <a:p>
+            <a:pPr algn="ctr"/>
+          </a:p>
+        </p:txBody>
+      </p:sp>
+      <p:sp>
+        <p:nvSpPr>
+          <p:cNvPr id="12" name="TextBox 11"/>
+          <p:cNvSpPr txBox="1"/>
+          <p:nvPr/>
+        </p:nvSpPr>
+        <p:spPr>
+          <a:xfrm>
+            <a:off x="8321040" y="2468880"/>
+            <a:ext cx="3200400" cy="3657600"/>
+          </a:xfrm>
+          <a:prstGeom prst="rect">
+            <a:avLst/>
+          </a:prstGeom>
+          <a:noFill/>
+        </p:spPr>
+        <p:txBody>
+          <a:bodyPr wrap="square">
+            <a:spAutoFit/>
+          </a:bodyPr>
+          <a:lstStyle/>
+          <a:p>
+            <a:pPr>
+              <a:spcAft>
+                <a:spcPts val="1000"/>
+              </a:spcAft>
+            </a:pPr>
+            <a:r>
+              <a:rPr sz="1400" b="0">
+                <a:solidFill>
+                  <a:srgbClr val="0F172A"/>
+                </a:solidFill>
+                <a:latin typeface="PingFang TC"/>
+                <a:ea typeface="PingFang TC"/>
+              </a:rPr>
+              <a:t>•  1B × ~200B ≈ 200GB</a:t>
+            </a:r>
+          </a:p>
+          <a:p>
+            <a:pPr>
+              <a:spcAft>
+                <a:spcPts val="1000"/>
+              </a:spcAft>
+            </a:pPr>
+            <a:r>
+              <a:rPr sz="1400" b="0">
+                <a:solidFill>
+                  <a:srgbClr val="0F172A"/>
+                </a:solidFill>
+                <a:latin typeface="PingFang TC"/>
+                <a:ea typeface="PingFang TC"/>
+              </a:rPr>
+              <a:t>•  ≈ 5,800 redirect / 秒</a:t>
+            </a:r>
+          </a:p>
+          <a:p>
+            <a:pPr>
+              <a:spcAft>
+                <a:spcPts val="1000"/>
+              </a:spcAft>
+            </a:pPr>
+            <a:r>
+              <a:rPr sz="1400" b="0">
+                <a:solidFill>
+                  <a:srgbClr val="0F172A"/>
+                </a:solidFill>
+                <a:latin typeface="PingFang TC"/>
+                <a:ea typeface="PingFang TC"/>
+              </a:rPr>
+              <a:t>•  1 億用戶 × 5 次/日</a:t>
+            </a:r>
+          </a:p>
+          <a:p>
+            <a:pPr>
+              <a:spcAft>
+                <a:spcPts val="1000"/>
+              </a:spcAft>
+            </a:pPr>
+            <a:r>
+              <a:rPr sz="1400" b="0">
+                <a:solidFill>
+                  <a:srgbClr val="0F172A"/>
+                </a:solidFill>
+                <a:latin typeface="PingFang TC"/>
+                <a:ea typeface="PingFang TC"/>
+              </a:rPr>
+              <a:t>•  圖片 + redirect 為主流量</a:t>
+            </a:r>
+          </a:p>
+        </p:txBody>
+      </p:sp>
+    </p:spTree>
+  </p:cSld>
+  <p:clrMapOvr>
+    <a:masterClrMapping/>
+  </p:clrMapOvr>
+</p:sld>
+</file>
+
+<file path=ppt/slides/slide20.xml><?xml version="1.0" encoding="utf-8"?>
 <p:sld xmlns:a="http://schemas.openxmlformats.org/drawingml/2006/main" xmlns:p="http://schemas.openxmlformats.org/presentationml/2006/main" xmlns:r="http://schemas.openxmlformats.org/officeDocument/2006/relationships">
   <p:cSld>
     <p:spTree>
@@ -10012,722 +11401,7 @@
 </p:sld>
 </file>
 
-<file path=ppt/slides/slide2.xml><?xml version="1.0" encoding="utf-8"?>
-<p:sld xmlns:a="http://schemas.openxmlformats.org/drawingml/2006/main" xmlns:p="http://schemas.openxmlformats.org/presentationml/2006/main" xmlns:r="http://schemas.openxmlformats.org/officeDocument/2006/relationships">
-  <p:cSld>
-    <p:spTree>
-      <p:nvGrpSpPr>
-        <p:cNvPr id="1" name=""/>
-        <p:cNvGrpSpPr/>
-        <p:nvPr/>
-      </p:nvGrpSpPr>
-      <p:grpSpPr/>
-      <p:sp>
-        <p:nvSpPr>
-          <p:cNvPr id="2" name="Rectangle 1"/>
-          <p:cNvSpPr/>
-          <p:nvPr/>
-        </p:nvSpPr>
-        <p:spPr>
-          <a:xfrm>
-            <a:off x="0" y="0"/>
-            <a:ext cx="164592" cy="6858000"/>
-          </a:xfrm>
-          <a:prstGeom prst="rect">
-            <a:avLst/>
-          </a:prstGeom>
-          <a:solidFill>
-            <a:srgbClr val="2563EB"/>
-          </a:solidFill>
-          <a:ln>
-            <a:noFill/>
-          </a:ln>
-          <a:effectLst/>
-        </p:spPr>
-        <p:style>
-          <a:lnRef idx="1">
-            <a:schemeClr val="accent1"/>
-          </a:lnRef>
-          <a:fillRef idx="3">
-            <a:schemeClr val="accent1"/>
-          </a:fillRef>
-          <a:effectRef idx="2">
-            <a:schemeClr val="accent1"/>
-          </a:effectRef>
-          <a:fontRef idx="minor">
-            <a:schemeClr val="lt1"/>
-          </a:fontRef>
-        </p:style>
-        <p:txBody>
-          <a:bodyPr rtlCol="0" anchor="ctr"/>
-          <a:lstStyle/>
-          <a:p>
-            <a:pPr algn="ctr"/>
-          </a:p>
-        </p:txBody>
-      </p:sp>
-      <p:sp>
-        <p:nvSpPr>
-          <p:cNvPr id="3" name="TextBox 2"/>
-          <p:cNvSpPr txBox="1"/>
-          <p:nvPr/>
-        </p:nvSpPr>
-        <p:spPr>
-          <a:xfrm>
-            <a:off x="502920" y="320040"/>
-            <a:ext cx="10972800" cy="1005840"/>
-          </a:xfrm>
-          <a:prstGeom prst="rect">
-            <a:avLst/>
-          </a:prstGeom>
-          <a:noFill/>
-        </p:spPr>
-        <p:txBody>
-          <a:bodyPr wrap="square" anchor="t">
-            <a:spAutoFit/>
-          </a:bodyPr>
-          <a:lstStyle/>
-          <a:p>
-            <a:pPr algn="l">
-              <a:spcAft>
-                <a:spcPts val="200"/>
-              </a:spcAft>
-            </a:pPr>
-            <a:r>
-              <a:rPr sz="1300" b="1">
-                <a:solidFill>
-                  <a:srgbClr val="2563EB"/>
-                </a:solidFill>
-                <a:latin typeface="PingFang TC"/>
-                <a:ea typeface="PingFang TC"/>
-              </a:rPr>
-              <a:t>01 · REQUIREMENTS</a:t>
-            </a:r>
-          </a:p>
-          <a:p>
-            <a:pPr algn="l">
-              <a:spcAft>
-                <a:spcPts val="400"/>
-              </a:spcAft>
-            </a:pPr>
-            <a:r>
-              <a:rPr sz="3000" b="1">
-                <a:solidFill>
-                  <a:srgbClr val="0F172A"/>
-                </a:solidFill>
-                <a:latin typeface="PingFang TC"/>
-                <a:ea typeface="PingFang TC"/>
-              </a:rPr>
-              <a:t>需求與規模</a:t>
-            </a:r>
-          </a:p>
-        </p:txBody>
-      </p:sp>
-      <p:sp>
-        <p:nvSpPr>
-          <p:cNvPr id="4" name="Rounded Rectangle 3"/>
-          <p:cNvSpPr/>
-          <p:nvPr/>
-        </p:nvSpPr>
-        <p:spPr>
-          <a:xfrm>
-            <a:off x="548640" y="1645920"/>
-            <a:ext cx="3566160" cy="548640"/>
-          </a:xfrm>
-          <a:prstGeom prst="roundRect">
-            <a:avLst/>
-          </a:prstGeom>
-          <a:solidFill>
-            <a:srgbClr val="2563EB"/>
-          </a:solidFill>
-          <a:ln>
-            <a:solidFill>
-              <a:srgbClr val="2563EB"/>
-            </a:solidFill>
-          </a:ln>
-          <a:effectLst/>
-        </p:spPr>
-        <p:style>
-          <a:lnRef idx="1">
-            <a:schemeClr val="accent1"/>
-          </a:lnRef>
-          <a:fillRef idx="3">
-            <a:schemeClr val="accent1"/>
-          </a:fillRef>
-          <a:effectRef idx="2">
-            <a:schemeClr val="accent1"/>
-          </a:effectRef>
-          <a:fontRef idx="minor">
-            <a:schemeClr val="lt1"/>
-          </a:fontRef>
-        </p:style>
-        <p:txBody>
-          <a:bodyPr rtlCol="0" anchor="ctr" wrap="square" tIns="25400" bIns="25400"/>
-          <a:lstStyle/>
-          <a:p>
-            <a:pPr algn="ctr"/>
-            <a:r>
-              <a:rPr sz="1600" b="1">
-                <a:solidFill>
-                  <a:srgbClr val="FFFFFF"/>
-                </a:solidFill>
-                <a:latin typeface="PingFang TC"/>
-                <a:ea typeface="PingFang TC"/>
-              </a:rPr>
-              <a:t>功能性 (FR)</a:t>
-            </a:r>
-          </a:p>
-        </p:txBody>
-      </p:sp>
-      <p:sp>
-        <p:nvSpPr>
-          <p:cNvPr id="5" name="Rounded Rectangle 4"/>
-          <p:cNvSpPr/>
-          <p:nvPr/>
-        </p:nvSpPr>
-        <p:spPr>
-          <a:xfrm>
-            <a:off x="548640" y="2286000"/>
-            <a:ext cx="3566160" cy="4023360"/>
-          </a:xfrm>
-          <a:prstGeom prst="roundRect">
-            <a:avLst/>
-          </a:prstGeom>
-          <a:solidFill>
-            <a:srgbClr val="F1F5F9"/>
-          </a:solidFill>
-          <a:ln>
-            <a:solidFill>
-              <a:srgbClr val="F1F5F9"/>
-            </a:solidFill>
-          </a:ln>
-          <a:effectLst/>
-        </p:spPr>
-        <p:style>
-          <a:lnRef idx="1">
-            <a:schemeClr val="accent1"/>
-          </a:lnRef>
-          <a:fillRef idx="3">
-            <a:schemeClr val="accent1"/>
-          </a:fillRef>
-          <a:effectRef idx="2">
-            <a:schemeClr val="accent1"/>
-          </a:effectRef>
-          <a:fontRef idx="minor">
-            <a:schemeClr val="lt1"/>
-          </a:fontRef>
-        </p:style>
-        <p:txBody>
-          <a:bodyPr rtlCol="0" anchor="ctr"/>
-          <a:lstStyle/>
-          <a:p>
-            <a:pPr algn="ctr"/>
-          </a:p>
-        </p:txBody>
-      </p:sp>
-      <p:sp>
-        <p:nvSpPr>
-          <p:cNvPr id="6" name="TextBox 5"/>
-          <p:cNvSpPr txBox="1"/>
-          <p:nvPr/>
-        </p:nvSpPr>
-        <p:spPr>
-          <a:xfrm>
-            <a:off x="731520" y="2468880"/>
-            <a:ext cx="3200400" cy="3657600"/>
-          </a:xfrm>
-          <a:prstGeom prst="rect">
-            <a:avLst/>
-          </a:prstGeom>
-          <a:noFill/>
-        </p:spPr>
-        <p:txBody>
-          <a:bodyPr wrap="square">
-            <a:spAutoFit/>
-          </a:bodyPr>
-          <a:lstStyle/>
-          <a:p>
-            <a:pPr>
-              <a:spcAft>
-                <a:spcPts val="1000"/>
-              </a:spcAft>
-            </a:pPr>
-            <a:r>
-              <a:rPr sz="1400" b="0">
-                <a:solidFill>
-                  <a:srgbClr val="0F172A"/>
-                </a:solidFill>
-                <a:latin typeface="PingFang TC"/>
-                <a:ea typeface="PingFang TC"/>
-              </a:rPr>
-              <a:t>•  提交 URL → 回 token + QR 圖</a:t>
-            </a:r>
-          </a:p>
-          <a:p>
-            <a:pPr>
-              <a:spcAft>
-                <a:spcPts val="1000"/>
-              </a:spcAft>
-            </a:pPr>
-            <a:r>
-              <a:rPr sz="1400" b="0">
-                <a:solidFill>
-                  <a:srgbClr val="0F172A"/>
-                </a:solidFill>
-                <a:latin typeface="PingFang TC"/>
-                <a:ea typeface="PingFang TC"/>
-              </a:rPr>
-              <a:t>•  掃描短碼 → 302 導向原始 URL</a:t>
-            </a:r>
-          </a:p>
-          <a:p>
-            <a:pPr>
-              <a:spcAft>
-                <a:spcPts val="1000"/>
-              </a:spcAft>
-            </a:pPr>
-            <a:r>
-              <a:rPr sz="1400" b="0">
-                <a:solidFill>
-                  <a:srgbClr val="0F172A"/>
-                </a:solidFill>
-                <a:latin typeface="PingFang TC"/>
-                <a:ea typeface="PingFang TC"/>
-              </a:rPr>
-              <a:t>•  可改目標 URL / 軟刪 / 設過期</a:t>
-            </a:r>
-          </a:p>
-          <a:p>
-            <a:pPr>
-              <a:spcAft>
-                <a:spcPts val="1000"/>
-              </a:spcAft>
-            </a:pPr>
-            <a:r>
-              <a:rPr sz="1400" b="0">
-                <a:solidFill>
-                  <a:srgbClr val="0F172A"/>
-                </a:solidFill>
-                <a:latin typeface="PingFang TC"/>
-                <a:ea typeface="PingFang TC"/>
-              </a:rPr>
-              <a:t>•  掃描分析（總數、每日）</a:t>
-            </a:r>
-          </a:p>
-          <a:p>
-            <a:pPr>
-              <a:spcAft>
-                <a:spcPts val="1000"/>
-              </a:spcAft>
-            </a:pPr>
-            <a:r>
-              <a:rPr sz="1400" b="0">
-                <a:solidFill>
-                  <a:srgbClr val="0F172A"/>
-                </a:solidFill>
-                <a:latin typeface="PingFang TC"/>
-                <a:ea typeface="PingFang TC"/>
-              </a:rPr>
-              <a:t>•  URL 驗證：正規化 + 惡意阻擋</a:t>
-            </a:r>
-          </a:p>
-        </p:txBody>
-      </p:sp>
-      <p:sp>
-        <p:nvSpPr>
-          <p:cNvPr id="7" name="Rounded Rectangle 6"/>
-          <p:cNvSpPr/>
-          <p:nvPr/>
-        </p:nvSpPr>
-        <p:spPr>
-          <a:xfrm>
-            <a:off x="4343400" y="1645920"/>
-            <a:ext cx="3566160" cy="548640"/>
-          </a:xfrm>
-          <a:prstGeom prst="roundRect">
-            <a:avLst/>
-          </a:prstGeom>
-          <a:solidFill>
-            <a:srgbClr val="059669"/>
-          </a:solidFill>
-          <a:ln>
-            <a:solidFill>
-              <a:srgbClr val="059669"/>
-            </a:solidFill>
-          </a:ln>
-          <a:effectLst/>
-        </p:spPr>
-        <p:style>
-          <a:lnRef idx="1">
-            <a:schemeClr val="accent1"/>
-          </a:lnRef>
-          <a:fillRef idx="3">
-            <a:schemeClr val="accent1"/>
-          </a:fillRef>
-          <a:effectRef idx="2">
-            <a:schemeClr val="accent1"/>
-          </a:effectRef>
-          <a:fontRef idx="minor">
-            <a:schemeClr val="lt1"/>
-          </a:fontRef>
-        </p:style>
-        <p:txBody>
-          <a:bodyPr rtlCol="0" anchor="ctr" wrap="square" tIns="25400" bIns="25400"/>
-          <a:lstStyle/>
-          <a:p>
-            <a:pPr algn="ctr"/>
-            <a:r>
-              <a:rPr sz="1600" b="1">
-                <a:solidFill>
-                  <a:srgbClr val="FFFFFF"/>
-                </a:solidFill>
-                <a:latin typeface="PingFang TC"/>
-                <a:ea typeface="PingFang TC"/>
-              </a:rPr>
-              <a:t>非功能性 (NFR)</a:t>
-            </a:r>
-          </a:p>
-        </p:txBody>
-      </p:sp>
-      <p:sp>
-        <p:nvSpPr>
-          <p:cNvPr id="8" name="Rounded Rectangle 7"/>
-          <p:cNvSpPr/>
-          <p:nvPr/>
-        </p:nvSpPr>
-        <p:spPr>
-          <a:xfrm>
-            <a:off x="4343400" y="2286000"/>
-            <a:ext cx="3566160" cy="4023360"/>
-          </a:xfrm>
-          <a:prstGeom prst="roundRect">
-            <a:avLst/>
-          </a:prstGeom>
-          <a:solidFill>
-            <a:srgbClr val="F1F5F9"/>
-          </a:solidFill>
-          <a:ln>
-            <a:solidFill>
-              <a:srgbClr val="F1F5F9"/>
-            </a:solidFill>
-          </a:ln>
-          <a:effectLst/>
-        </p:spPr>
-        <p:style>
-          <a:lnRef idx="1">
-            <a:schemeClr val="accent1"/>
-          </a:lnRef>
-          <a:fillRef idx="3">
-            <a:schemeClr val="accent1"/>
-          </a:fillRef>
-          <a:effectRef idx="2">
-            <a:schemeClr val="accent1"/>
-          </a:effectRef>
-          <a:fontRef idx="minor">
-            <a:schemeClr val="lt1"/>
-          </a:fontRef>
-        </p:style>
-        <p:txBody>
-          <a:bodyPr rtlCol="0" anchor="ctr"/>
-          <a:lstStyle/>
-          <a:p>
-            <a:pPr algn="ctr"/>
-          </a:p>
-        </p:txBody>
-      </p:sp>
-      <p:sp>
-        <p:nvSpPr>
-          <p:cNvPr id="9" name="TextBox 8"/>
-          <p:cNvSpPr txBox="1"/>
-          <p:nvPr/>
-        </p:nvSpPr>
-        <p:spPr>
-          <a:xfrm>
-            <a:off x="4526280" y="2468880"/>
-            <a:ext cx="3200400" cy="3657600"/>
-          </a:xfrm>
-          <a:prstGeom prst="rect">
-            <a:avLst/>
-          </a:prstGeom>
-          <a:noFill/>
-        </p:spPr>
-        <p:txBody>
-          <a:bodyPr wrap="square">
-            <a:spAutoFit/>
-          </a:bodyPr>
-          <a:lstStyle/>
-          <a:p>
-            <a:pPr>
-              <a:spcAft>
-                <a:spcPts val="1000"/>
-              </a:spcAft>
-            </a:pPr>
-            <a:r>
-              <a:rPr sz="1400" b="0">
-                <a:solidFill>
-                  <a:srgbClr val="0F172A"/>
-                </a:solidFill>
-                <a:latin typeface="PingFang TC"/>
-                <a:ea typeface="PingFang TC"/>
-              </a:rPr>
-              <a:t>•  24/7 高可用 (HA)</a:t>
-            </a:r>
-          </a:p>
-          <a:p>
-            <a:pPr>
-              <a:spcAft>
-                <a:spcPts val="1000"/>
-              </a:spcAft>
-            </a:pPr>
-            <a:r>
-              <a:rPr sz="1400" b="0">
-                <a:solidFill>
-                  <a:srgbClr val="0F172A"/>
-                </a:solidFill>
-                <a:latin typeface="PingFang TC"/>
-                <a:ea typeface="PingFang TC"/>
-              </a:rPr>
-              <a:t>•  Redirect 延遲 &lt; 100ms</a:t>
-            </a:r>
-          </a:p>
-          <a:p>
-            <a:pPr>
-              <a:spcAft>
-                <a:spcPts val="1000"/>
-              </a:spcAft>
-            </a:pPr>
-            <a:r>
-              <a:rPr sz="1400" b="0">
-                <a:solidFill>
-                  <a:srgbClr val="0F172A"/>
-                </a:solidFill>
-                <a:latin typeface="PingFang TC"/>
-                <a:ea typeface="PingFang TC"/>
-              </a:rPr>
-              <a:t>•  10 億 QR、1 億用戶</a:t>
-            </a:r>
-          </a:p>
-          <a:p>
-            <a:pPr>
-              <a:spcAft>
-                <a:spcPts val="1000"/>
-              </a:spcAft>
-            </a:pPr>
-            <a:r>
-              <a:rPr sz="1400" b="0">
-                <a:solidFill>
-                  <a:srgbClr val="0F172A"/>
-                </a:solidFill>
-                <a:latin typeface="PingFang TC"/>
-                <a:ea typeface="PingFang TC"/>
-              </a:rPr>
-              <a:t>•  讀多寫少 ≈ 100:1</a:t>
-            </a:r>
-          </a:p>
-        </p:txBody>
-      </p:sp>
-      <p:sp>
-        <p:nvSpPr>
-          <p:cNvPr id="10" name="Rounded Rectangle 9"/>
-          <p:cNvSpPr/>
-          <p:nvPr/>
-        </p:nvSpPr>
-        <p:spPr>
-          <a:xfrm>
-            <a:off x="8138160" y="1645920"/>
-            <a:ext cx="3566160" cy="548640"/>
-          </a:xfrm>
-          <a:prstGeom prst="roundRect">
-            <a:avLst/>
-          </a:prstGeom>
-          <a:solidFill>
-            <a:srgbClr val="D97706"/>
-          </a:solidFill>
-          <a:ln>
-            <a:solidFill>
-              <a:srgbClr val="D97706"/>
-            </a:solidFill>
-          </a:ln>
-          <a:effectLst/>
-        </p:spPr>
-        <p:style>
-          <a:lnRef idx="1">
-            <a:schemeClr val="accent1"/>
-          </a:lnRef>
-          <a:fillRef idx="3">
-            <a:schemeClr val="accent1"/>
-          </a:fillRef>
-          <a:effectRef idx="2">
-            <a:schemeClr val="accent1"/>
-          </a:effectRef>
-          <a:fontRef idx="minor">
-            <a:schemeClr val="lt1"/>
-          </a:fontRef>
-        </p:style>
-        <p:txBody>
-          <a:bodyPr rtlCol="0" anchor="ctr" wrap="square" tIns="25400" bIns="25400"/>
-          <a:lstStyle/>
-          <a:p>
-            <a:pPr algn="ctr"/>
-            <a:r>
-              <a:rPr sz="1600" b="1">
-                <a:solidFill>
-                  <a:srgbClr val="FFFFFF"/>
-                </a:solidFill>
-                <a:latin typeface="PingFang TC"/>
-                <a:ea typeface="PingFang TC"/>
-              </a:rPr>
-              <a:t>容量估算</a:t>
-            </a:r>
-          </a:p>
-        </p:txBody>
-      </p:sp>
-      <p:sp>
-        <p:nvSpPr>
-          <p:cNvPr id="11" name="Rounded Rectangle 10"/>
-          <p:cNvSpPr/>
-          <p:nvPr/>
-        </p:nvSpPr>
-        <p:spPr>
-          <a:xfrm>
-            <a:off x="8138160" y="2286000"/>
-            <a:ext cx="3566160" cy="4023360"/>
-          </a:xfrm>
-          <a:prstGeom prst="roundRect">
-            <a:avLst/>
-          </a:prstGeom>
-          <a:solidFill>
-            <a:srgbClr val="F1F5F9"/>
-          </a:solidFill>
-          <a:ln>
-            <a:solidFill>
-              <a:srgbClr val="F1F5F9"/>
-            </a:solidFill>
-          </a:ln>
-          <a:effectLst/>
-        </p:spPr>
-        <p:style>
-          <a:lnRef idx="1">
-            <a:schemeClr val="accent1"/>
-          </a:lnRef>
-          <a:fillRef idx="3">
-            <a:schemeClr val="accent1"/>
-          </a:fillRef>
-          <a:effectRef idx="2">
-            <a:schemeClr val="accent1"/>
-          </a:effectRef>
-          <a:fontRef idx="minor">
-            <a:schemeClr val="lt1"/>
-          </a:fontRef>
-        </p:style>
-        <p:txBody>
-          <a:bodyPr rtlCol="0" anchor="ctr"/>
-          <a:lstStyle/>
-          <a:p>
-            <a:pPr algn="ctr"/>
-          </a:p>
-        </p:txBody>
-      </p:sp>
-      <p:sp>
-        <p:nvSpPr>
-          <p:cNvPr id="12" name="TextBox 11"/>
-          <p:cNvSpPr txBox="1"/>
-          <p:nvPr/>
-        </p:nvSpPr>
-        <p:spPr>
-          <a:xfrm>
-            <a:off x="8321040" y="2468880"/>
-            <a:ext cx="3200400" cy="3657600"/>
-          </a:xfrm>
-          <a:prstGeom prst="rect">
-            <a:avLst/>
-          </a:prstGeom>
-          <a:noFill/>
-        </p:spPr>
-        <p:txBody>
-          <a:bodyPr wrap="square">
-            <a:spAutoFit/>
-          </a:bodyPr>
-          <a:lstStyle/>
-          <a:p>
-            <a:pPr>
-              <a:spcAft>
-                <a:spcPts val="1000"/>
-              </a:spcAft>
-            </a:pPr>
-            <a:r>
-              <a:rPr sz="1400" b="0">
-                <a:solidFill>
-                  <a:srgbClr val="0F172A"/>
-                </a:solidFill>
-                <a:latin typeface="PingFang TC"/>
-                <a:ea typeface="PingFang TC"/>
-              </a:rPr>
-              <a:t>•  1B × ~200B ≈ 200GB</a:t>
-            </a:r>
-          </a:p>
-          <a:p>
-            <a:pPr>
-              <a:spcAft>
-                <a:spcPts val="1000"/>
-              </a:spcAft>
-            </a:pPr>
-            <a:r>
-              <a:rPr sz="1400" b="0">
-                <a:solidFill>
-                  <a:srgbClr val="0F172A"/>
-                </a:solidFill>
-                <a:latin typeface="PingFang TC"/>
-                <a:ea typeface="PingFang TC"/>
-              </a:rPr>
-              <a:t>•  ≈ 5,800 redirect / 秒</a:t>
-            </a:r>
-          </a:p>
-          <a:p>
-            <a:pPr>
-              <a:spcAft>
-                <a:spcPts val="1000"/>
-              </a:spcAft>
-            </a:pPr>
-            <a:r>
-              <a:rPr sz="1400" b="0">
-                <a:solidFill>
-                  <a:srgbClr val="0F172A"/>
-                </a:solidFill>
-                <a:latin typeface="PingFang TC"/>
-                <a:ea typeface="PingFang TC"/>
-              </a:rPr>
-              <a:t>•  1 億用戶 × 5 次/日</a:t>
-            </a:r>
-          </a:p>
-          <a:p>
-            <a:pPr>
-              <a:spcAft>
-                <a:spcPts val="1000"/>
-              </a:spcAft>
-            </a:pPr>
-            <a:r>
-              <a:rPr sz="1400" b="0">
-                <a:solidFill>
-                  <a:srgbClr val="0F172A"/>
-                </a:solidFill>
-                <a:latin typeface="PingFang TC"/>
-                <a:ea typeface="PingFang TC"/>
-              </a:rPr>
-              <a:t>•  圖片 + redirect 為主流量</a:t>
-            </a:r>
-          </a:p>
-        </p:txBody>
-      </p:sp>
-    </p:spTree>
-  </p:cSld>
-  <p:clrMapOvr>
-    <a:masterClrMapping/>
-  </p:clrMapOvr>
-</p:sld>
-</file>
-
-<file path=ppt/slides/slide20.xml><?xml version="1.0" encoding="utf-8"?>
+<file path=ppt/slides/slide21.xml><?xml version="1.0" encoding="utf-8"?>
 <p:sld xmlns:a="http://schemas.openxmlformats.org/drawingml/2006/main" xmlns:p="http://schemas.openxmlformats.org/presentationml/2006/main" xmlns:r="http://schemas.openxmlformats.org/officeDocument/2006/relationships">
   <p:cSld>
     <p:spTree>
@@ -11651,7 +12325,7 @@
 </p:sld>
 </file>
 
-<file path=ppt/slides/slide21.xml><?xml version="1.0" encoding="utf-8"?>
+<file path=ppt/slides/slide22.xml><?xml version="1.0" encoding="utf-8"?>
 <p:sld xmlns:a="http://schemas.openxmlformats.org/drawingml/2006/main" xmlns:p="http://schemas.openxmlformats.org/presentationml/2006/main" xmlns:r="http://schemas.openxmlformats.org/officeDocument/2006/relationships">
   <p:cSld>
     <p:spTree>
@@ -12374,7 +13048,7 @@
 </p:sld>
 </file>
 
-<file path=ppt/slides/slide22.xml><?xml version="1.0" encoding="utf-8"?>
+<file path=ppt/slides/slide23.xml><?xml version="1.0" encoding="utf-8"?>
 <p:sld xmlns:a="http://schemas.openxmlformats.org/drawingml/2006/main" xmlns:p="http://schemas.openxmlformats.org/presentationml/2006/main" xmlns:r="http://schemas.openxmlformats.org/officeDocument/2006/relationships">
   <p:cSld>
     <p:spTree>
@@ -15529,7 +16203,7 @@
                 <a:latin typeface="PingFang TC"/>
                 <a:ea typeface="PingFang TC"/>
               </a:rPr>
-              <a:t>05 · CREATE FLOW</a:t>
+              <a:t>決策地圖</a:t>
             </a:r>
           </a:p>
           <a:p>
@@ -15546,7 +16220,7 @@
                 <a:latin typeface="PingFang TC"/>
                 <a:ea typeface="PingFang TC"/>
               </a:rPr>
-              <a:t>建立流程</a:t>
+              <a:t>三大關鍵架構決策（環環相扣）</a:t>
             </a:r>
           </a:p>
         </p:txBody>
@@ -15559,8 +16233,8 @@
         </p:nvSpPr>
         <p:spPr>
           <a:xfrm>
-            <a:off x="502920" y="2468880"/>
-            <a:ext cx="1691640" cy="1371600"/>
+            <a:off x="457200" y="1920240"/>
+            <a:ext cx="3566160" cy="548640"/>
           </a:xfrm>
           <a:prstGeom prst="roundRect">
             <a:avLst/>
@@ -15595,208 +16269,28 @@
           <a:p>
             <a:pPr algn="ctr"/>
             <a:r>
-              <a:rPr sz="1300" b="1">
+              <a:rPr sz="1500" b="1">
                 <a:solidFill>
                   <a:srgbClr val="FFFFFF"/>
                 </a:solidFill>
                 <a:latin typeface="PingFang TC"/>
                 <a:ea typeface="PingFang TC"/>
               </a:rPr>
-              <a:t>① 驗證</a:t>
-            </a:r>
-          </a:p>
-          <a:p>
-            <a:pPr algn="ctr"/>
-            <a:r>
-              <a:rPr sz="1300" b="0">
-                <a:solidFill>
-                  <a:srgbClr val="FFFFFF"/>
-                </a:solidFill>
-                <a:latin typeface="PingFang TC"/>
-                <a:ea typeface="PingFang TC"/>
-              </a:rPr>
-              <a:t>保守正規化</a:t>
-            </a:r>
-          </a:p>
-          <a:p>
-            <a:pPr algn="ctr"/>
-            <a:r>
-              <a:rPr sz="1300" b="0">
-                <a:solidFill>
-                  <a:srgbClr val="FFFFFF"/>
-                </a:solidFill>
-                <a:latin typeface="PingFang TC"/>
-                <a:ea typeface="PingFang TC"/>
-              </a:rPr>
-              <a:t>+ 惡意/SSRF 檢查</a:t>
-            </a:r>
-          </a:p>
-        </p:txBody>
-      </p:sp>
-      <p:cxnSp>
-        <p:nvCxnSpPr>
-          <p:cNvPr id="5" name="Connector 4"/>
-          <p:cNvCxnSpPr/>
-          <p:nvPr/>
-        </p:nvCxnSpPr>
-        <p:spPr>
-          <a:xfrm>
-            <a:off x="2194560" y="3154680"/>
-            <a:ext cx="164592" cy="0"/>
-          </a:xfrm>
-          <a:prstGeom prst="line">
-            <a:avLst/>
-          </a:prstGeom>
-          <a:ln w="22225">
-            <a:solidFill>
-              <a:srgbClr val="64748B"/>
-            </a:solidFill>
-            <a:tailEnd type="triangle" w="med" len="med"/>
-          </a:ln>
-        </p:spPr>
-        <p:style>
-          <a:lnRef idx="2">
-            <a:schemeClr val="accent1"/>
-          </a:lnRef>
-          <a:fillRef idx="0">
-            <a:schemeClr val="accent1"/>
-          </a:fillRef>
-          <a:effectRef idx="1">
-            <a:schemeClr val="accent1"/>
-          </a:effectRef>
-          <a:fontRef idx="minor">
-            <a:schemeClr val="tx1"/>
-          </a:fontRef>
-        </p:style>
-      </p:cxnSp>
-      <p:sp>
-        <p:nvSpPr>
-          <p:cNvPr id="6" name="Rounded Rectangle 5"/>
+              <a:t>① 動態 vs 靜態</a:t>
+            </a:r>
+          </a:p>
+        </p:txBody>
+      </p:sp>
+      <p:sp>
+        <p:nvSpPr>
+          <p:cNvPr id="5" name="Rounded Rectangle 4"/>
           <p:cNvSpPr/>
           <p:nvPr/>
         </p:nvSpPr>
         <p:spPr>
           <a:xfrm>
-            <a:off x="2359152" y="2468880"/>
-            <a:ext cx="1691640" cy="1371600"/>
-          </a:xfrm>
-          <a:prstGeom prst="roundRect">
-            <a:avLst/>
-          </a:prstGeom>
-          <a:solidFill>
-            <a:srgbClr val="0EA5E9"/>
-          </a:solidFill>
-          <a:ln>
-            <a:solidFill>
-              <a:srgbClr val="0EA5E9"/>
-            </a:solidFill>
-          </a:ln>
-          <a:effectLst/>
-        </p:spPr>
-        <p:style>
-          <a:lnRef idx="1">
-            <a:schemeClr val="accent1"/>
-          </a:lnRef>
-          <a:fillRef idx="3">
-            <a:schemeClr val="accent1"/>
-          </a:fillRef>
-          <a:effectRef idx="2">
-            <a:schemeClr val="accent1"/>
-          </a:effectRef>
-          <a:fontRef idx="minor">
-            <a:schemeClr val="lt1"/>
-          </a:fontRef>
-        </p:style>
-        <p:txBody>
-          <a:bodyPr rtlCol="0" anchor="ctr" wrap="square" tIns="25400" bIns="25400"/>
-          <a:lstStyle/>
-          <a:p>
-            <a:pPr algn="ctr"/>
-            <a:r>
-              <a:rPr sz="1300" b="1">
-                <a:solidFill>
-                  <a:srgbClr val="FFFFFF"/>
-                </a:solidFill>
-                <a:latin typeface="PingFang TC"/>
-                <a:ea typeface="PingFang TC"/>
-              </a:rPr>
-              <a:t>② 生 token</a:t>
-            </a:r>
-          </a:p>
-          <a:p>
-            <a:pPr algn="ctr"/>
-            <a:r>
-              <a:rPr sz="1300" b="0">
-                <a:solidFill>
-                  <a:srgbClr val="FFFFFF"/>
-                </a:solidFill>
-                <a:latin typeface="PingFang TC"/>
-                <a:ea typeface="PingFang TC"/>
-              </a:rPr>
-              <a:t>SHA-256+nonce</a:t>
-            </a:r>
-          </a:p>
-          <a:p>
-            <a:pPr algn="ctr"/>
-            <a:r>
-              <a:rPr sz="1300" b="0">
-                <a:solidFill>
-                  <a:srgbClr val="FFFFFF"/>
-                </a:solidFill>
-                <a:latin typeface="PingFang TC"/>
-                <a:ea typeface="PingFang TC"/>
-              </a:rPr>
-              <a:t>→Base62→8 碼</a:t>
-            </a:r>
-          </a:p>
-        </p:txBody>
-      </p:sp>
-      <p:cxnSp>
-        <p:nvCxnSpPr>
-          <p:cNvPr id="7" name="Connector 6"/>
-          <p:cNvCxnSpPr/>
-          <p:nvPr/>
-        </p:nvCxnSpPr>
-        <p:spPr>
-          <a:xfrm>
-            <a:off x="4050792" y="3154680"/>
-            <a:ext cx="164592" cy="0"/>
-          </a:xfrm>
-          <a:prstGeom prst="line">
-            <a:avLst/>
-          </a:prstGeom>
-          <a:ln w="22225">
-            <a:solidFill>
-              <a:srgbClr val="64748B"/>
-            </a:solidFill>
-            <a:tailEnd type="triangle" w="med" len="med"/>
-          </a:ln>
-        </p:spPr>
-        <p:style>
-          <a:lnRef idx="2">
-            <a:schemeClr val="accent1"/>
-          </a:lnRef>
-          <a:fillRef idx="0">
-            <a:schemeClr val="accent1"/>
-          </a:fillRef>
-          <a:effectRef idx="1">
-            <a:schemeClr val="accent1"/>
-          </a:effectRef>
-          <a:fontRef idx="minor">
-            <a:schemeClr val="tx1"/>
-          </a:fontRef>
-        </p:style>
-      </p:cxnSp>
-      <p:sp>
-        <p:nvSpPr>
-          <p:cNvPr id="8" name="Rounded Rectangle 7"/>
-          <p:cNvSpPr/>
-          <p:nvPr/>
-        </p:nvSpPr>
-        <p:spPr>
-          <a:xfrm>
-            <a:off x="4215384" y="2468880"/>
-            <a:ext cx="1691640" cy="1371600"/>
+            <a:off x="457200" y="2542032"/>
+            <a:ext cx="3566160" cy="502920"/>
           </a:xfrm>
           <a:prstGeom prst="roundRect">
             <a:avLst/>
@@ -15838,47 +16332,158 @@
                 <a:latin typeface="PingFang TC"/>
                 <a:ea typeface="PingFang TC"/>
               </a:rPr>
-              <a:t>③ 寫 DB</a:t>
-            </a:r>
-          </a:p>
+              <a:t>選：動態 QR</a:t>
+            </a:r>
+          </a:p>
+        </p:txBody>
+      </p:sp>
+      <p:sp>
+        <p:nvSpPr>
+          <p:cNvPr id="6" name="Rounded Rectangle 5"/>
+          <p:cNvSpPr/>
+          <p:nvPr/>
+        </p:nvSpPr>
+        <p:spPr>
+          <a:xfrm>
+            <a:off x="457200" y="3127248"/>
+            <a:ext cx="3566160" cy="2468880"/>
+          </a:xfrm>
+          <a:prstGeom prst="roundRect">
+            <a:avLst/>
+          </a:prstGeom>
+          <a:solidFill>
+            <a:srgbClr val="F1F5F9"/>
+          </a:solidFill>
+          <a:ln>
+            <a:solidFill>
+              <a:srgbClr val="F1F5F9"/>
+            </a:solidFill>
+          </a:ln>
+          <a:effectLst/>
+        </p:spPr>
+        <p:style>
+          <a:lnRef idx="1">
+            <a:schemeClr val="accent1"/>
+          </a:lnRef>
+          <a:fillRef idx="3">
+            <a:schemeClr val="accent1"/>
+          </a:fillRef>
+          <a:effectRef idx="2">
+            <a:schemeClr val="accent1"/>
+          </a:effectRef>
+          <a:fontRef idx="minor">
+            <a:schemeClr val="lt1"/>
+          </a:fontRef>
+        </p:style>
+        <p:txBody>
+          <a:bodyPr rtlCol="0" anchor="ctr"/>
+          <a:lstStyle/>
           <a:p>
             <a:pPr algn="ctr"/>
-            <a:r>
-              <a:rPr sz="1300" b="0">
-                <a:solidFill>
-                  <a:srgbClr val="FFFFFF"/>
-                </a:solidFill>
-                <a:latin typeface="PingFang TC"/>
-                <a:ea typeface="PingFang TC"/>
-              </a:rPr>
-              <a:t>直接插入</a:t>
-            </a:r>
-          </a:p>
-          <a:p>
-            <a:pPr algn="ctr"/>
-            <a:r>
-              <a:rPr sz="1300" b="0">
-                <a:solidFill>
-                  <a:srgbClr val="FFFFFF"/>
-                </a:solidFill>
-                <a:latin typeface="PingFang TC"/>
-                <a:ea typeface="PingFang TC"/>
-              </a:rPr>
-              <a:t>UNIQUE 重試 ≤10</a:t>
+          </a:p>
+        </p:txBody>
+      </p:sp>
+      <p:sp>
+        <p:nvSpPr>
+          <p:cNvPr id="7" name="TextBox 6"/>
+          <p:cNvSpPr txBox="1"/>
+          <p:nvPr/>
+        </p:nvSpPr>
+        <p:spPr>
+          <a:xfrm>
+            <a:off x="640080" y="3273552"/>
+            <a:ext cx="3200400" cy="2194560"/>
+          </a:xfrm>
+          <a:prstGeom prst="rect">
+            <a:avLst/>
+          </a:prstGeom>
+          <a:noFill/>
+        </p:spPr>
+        <p:txBody>
+          <a:bodyPr wrap="square">
+            <a:spAutoFit/>
+          </a:bodyPr>
+          <a:lstStyle/>
+          <a:p>
+            <a:pPr>
+              <a:spcAft>
+                <a:spcPts val="800"/>
+              </a:spcAft>
+            </a:pPr>
+            <a:r>
+              <a:rPr sz="1200" b="0">
+                <a:solidFill>
+                  <a:srgbClr val="0F172A"/>
+                </a:solidFill>
+                <a:latin typeface="PingFang TC"/>
+                <a:ea typeface="PingFang TC"/>
+              </a:rPr>
+              <a:t>•  QR 編 short URL → server redirect</a:t>
+            </a:r>
+          </a:p>
+          <a:p>
+            <a:pPr>
+              <a:spcAft>
+                <a:spcPts val="800"/>
+              </a:spcAft>
+            </a:pPr>
+            <a:r>
+              <a:rPr sz="1200" b="0">
+                <a:solidFill>
+                  <a:srgbClr val="0F172A"/>
+                </a:solidFill>
+                <a:latin typeface="PingFang TC"/>
+                <a:ea typeface="PingFang TC"/>
+              </a:rPr>
+              <a:t>•  可修改目標 + 可追蹤掃描</a:t>
+            </a:r>
+          </a:p>
+          <a:p>
+            <a:pPr>
+              <a:spcAft>
+                <a:spcPts val="800"/>
+              </a:spcAft>
+            </a:pPr>
+            <a:r>
+              <a:rPr sz="1200" b="0">
+                <a:solidFill>
+                  <a:srgbClr val="0F172A"/>
+                </a:solidFill>
+                <a:latin typeface="PingFang TC"/>
+                <a:ea typeface="PingFang TC"/>
+              </a:rPr>
+              <a:t>•  代價：server = SPOF</a:t>
+            </a:r>
+          </a:p>
+          <a:p>
+            <a:pPr>
+              <a:spcAft>
+                <a:spcPts val="800"/>
+              </a:spcAft>
+            </a:pPr>
+            <a:r>
+              <a:rPr sz="1200" b="0">
+                <a:solidFill>
+                  <a:srgbClr val="0F172A"/>
+                </a:solidFill>
+                <a:latin typeface="PingFang TC"/>
+                <a:ea typeface="PingFang TC"/>
+              </a:rPr>
+              <a:t>•  → 逼出 cache / CDN / monitoring</a:t>
             </a:r>
           </a:p>
         </p:txBody>
       </p:sp>
       <p:cxnSp>
         <p:nvCxnSpPr>
-          <p:cNvPr id="9" name="Connector 8"/>
+          <p:cNvPr id="8" name="Connector 7"/>
           <p:cNvCxnSpPr/>
           <p:nvPr/>
         </p:nvCxnSpPr>
         <p:spPr>
           <a:xfrm>
-            <a:off x="5907024" y="3154680"/>
-            <a:ext cx="164592" cy="0"/>
+            <a:off x="4023360" y="2194560"/>
+            <a:ext cx="274320" cy="0"/>
           </a:xfrm>
           <a:prstGeom prst="line">
             <a:avLst/>
@@ -15907,14 +16512,299 @@
       </p:cxnSp>
       <p:sp>
         <p:nvSpPr>
+          <p:cNvPr id="9" name="Rounded Rectangle 8"/>
+          <p:cNvSpPr/>
+          <p:nvPr/>
+        </p:nvSpPr>
+        <p:spPr>
+          <a:xfrm>
+            <a:off x="4297680" y="1920240"/>
+            <a:ext cx="3566160" cy="548640"/>
+          </a:xfrm>
+          <a:prstGeom prst="roundRect">
+            <a:avLst/>
+          </a:prstGeom>
+          <a:solidFill>
+            <a:srgbClr val="059669"/>
+          </a:solidFill>
+          <a:ln>
+            <a:solidFill>
+              <a:srgbClr val="059669"/>
+            </a:solidFill>
+          </a:ln>
+          <a:effectLst/>
+        </p:spPr>
+        <p:style>
+          <a:lnRef idx="1">
+            <a:schemeClr val="accent1"/>
+          </a:lnRef>
+          <a:fillRef idx="3">
+            <a:schemeClr val="accent1"/>
+          </a:fillRef>
+          <a:effectRef idx="2">
+            <a:schemeClr val="accent1"/>
+          </a:effectRef>
+          <a:fontRef idx="minor">
+            <a:schemeClr val="lt1"/>
+          </a:fontRef>
+        </p:style>
+        <p:txBody>
+          <a:bodyPr rtlCol="0" anchor="ctr" wrap="square" tIns="25400" bIns="25400"/>
+          <a:lstStyle/>
+          <a:p>
+            <a:pPr algn="ctr"/>
+            <a:r>
+              <a:rPr sz="1500" b="1">
+                <a:solidFill>
+                  <a:srgbClr val="FFFFFF"/>
+                </a:solidFill>
+                <a:latin typeface="PingFang TC"/>
+                <a:ea typeface="PingFang TC"/>
+              </a:rPr>
+              <a:t>② Token 生成策略</a:t>
+            </a:r>
+          </a:p>
+        </p:txBody>
+      </p:sp>
+      <p:sp>
+        <p:nvSpPr>
           <p:cNvPr id="10" name="Rounded Rectangle 9"/>
           <p:cNvSpPr/>
           <p:nvPr/>
         </p:nvSpPr>
         <p:spPr>
           <a:xfrm>
-            <a:off x="6071616" y="2468880"/>
-            <a:ext cx="1691640" cy="1371600"/>
+            <a:off x="4297680" y="2542032"/>
+            <a:ext cx="3566160" cy="502920"/>
+          </a:xfrm>
+          <a:prstGeom prst="roundRect">
+            <a:avLst/>
+          </a:prstGeom>
+          <a:solidFill>
+            <a:srgbClr val="059669"/>
+          </a:solidFill>
+          <a:ln>
+            <a:solidFill>
+              <a:srgbClr val="059669"/>
+            </a:solidFill>
+          </a:ln>
+          <a:effectLst/>
+        </p:spPr>
+        <p:style>
+          <a:lnRef idx="1">
+            <a:schemeClr val="accent1"/>
+          </a:lnRef>
+          <a:fillRef idx="3">
+            <a:schemeClr val="accent1"/>
+          </a:fillRef>
+          <a:effectRef idx="2">
+            <a:schemeClr val="accent1"/>
+          </a:effectRef>
+          <a:fontRef idx="minor">
+            <a:schemeClr val="lt1"/>
+          </a:fontRef>
+        </p:style>
+        <p:txBody>
+          <a:bodyPr rtlCol="0" anchor="ctr" wrap="square" tIns="25400" bIns="25400"/>
+          <a:lstStyle/>
+          <a:p>
+            <a:pPr algn="ctr"/>
+            <a:r>
+              <a:rPr sz="1300" b="1">
+                <a:solidFill>
+                  <a:srgbClr val="FFFFFF"/>
+                </a:solidFill>
+                <a:latin typeface="PingFang TC"/>
+                <a:ea typeface="PingFang TC"/>
+              </a:rPr>
+              <a:t>SHA-256+nonce+Base62</a:t>
+            </a:r>
+          </a:p>
+        </p:txBody>
+      </p:sp>
+      <p:sp>
+        <p:nvSpPr>
+          <p:cNvPr id="11" name="Rounded Rectangle 10"/>
+          <p:cNvSpPr/>
+          <p:nvPr/>
+        </p:nvSpPr>
+        <p:spPr>
+          <a:xfrm>
+            <a:off x="4297680" y="3127248"/>
+            <a:ext cx="3566160" cy="2468880"/>
+          </a:xfrm>
+          <a:prstGeom prst="roundRect">
+            <a:avLst/>
+          </a:prstGeom>
+          <a:solidFill>
+            <a:srgbClr val="F1F5F9"/>
+          </a:solidFill>
+          <a:ln>
+            <a:solidFill>
+              <a:srgbClr val="F1F5F9"/>
+            </a:solidFill>
+          </a:ln>
+          <a:effectLst/>
+        </p:spPr>
+        <p:style>
+          <a:lnRef idx="1">
+            <a:schemeClr val="accent1"/>
+          </a:lnRef>
+          <a:fillRef idx="3">
+            <a:schemeClr val="accent1"/>
+          </a:fillRef>
+          <a:effectRef idx="2">
+            <a:schemeClr val="accent1"/>
+          </a:effectRef>
+          <a:fontRef idx="minor">
+            <a:schemeClr val="lt1"/>
+          </a:fontRef>
+        </p:style>
+        <p:txBody>
+          <a:bodyPr rtlCol="0" anchor="ctr"/>
+          <a:lstStyle/>
+          <a:p>
+            <a:pPr algn="ctr"/>
+          </a:p>
+        </p:txBody>
+      </p:sp>
+      <p:sp>
+        <p:nvSpPr>
+          <p:cNvPr id="12" name="TextBox 11"/>
+          <p:cNvSpPr txBox="1"/>
+          <p:nvPr/>
+        </p:nvSpPr>
+        <p:spPr>
+          <a:xfrm>
+            <a:off x="4480560" y="3273552"/>
+            <a:ext cx="3200400" cy="2194560"/>
+          </a:xfrm>
+          <a:prstGeom prst="rect">
+            <a:avLst/>
+          </a:prstGeom>
+          <a:noFill/>
+        </p:spPr>
+        <p:txBody>
+          <a:bodyPr wrap="square">
+            <a:spAutoFit/>
+          </a:bodyPr>
+          <a:lstStyle/>
+          <a:p>
+            <a:pPr>
+              <a:spcAft>
+                <a:spcPts val="800"/>
+              </a:spcAft>
+            </a:pPr>
+            <a:r>
+              <a:rPr sz="1200" b="0">
+                <a:solidFill>
+                  <a:srgbClr val="0F172A"/>
+                </a:solidFill>
+                <a:latin typeface="PingFang TC"/>
+                <a:ea typeface="PingFang TC"/>
+              </a:rPr>
+              <a:t>•  隨機（碰撞靠運氣）</a:t>
+            </a:r>
+          </a:p>
+          <a:p>
+            <a:pPr>
+              <a:spcAft>
+                <a:spcPts val="800"/>
+              </a:spcAft>
+            </a:pPr>
+            <a:r>
+              <a:rPr sz="1200" b="0">
+                <a:solidFill>
+                  <a:srgbClr val="0F172A"/>
+                </a:solidFill>
+                <a:latin typeface="PingFang TC"/>
+                <a:ea typeface="PingFang TC"/>
+              </a:rPr>
+              <a:t>•  → 純 hash（同 URL 同 token）</a:t>
+            </a:r>
+          </a:p>
+          <a:p>
+            <a:pPr>
+              <a:spcAft>
+                <a:spcPts val="800"/>
+              </a:spcAft>
+            </a:pPr>
+            <a:r>
+              <a:rPr sz="1200" b="0">
+                <a:solidFill>
+                  <a:srgbClr val="0F172A"/>
+                </a:solidFill>
+                <a:latin typeface="PingFang TC"/>
+                <a:ea typeface="PingFang TC"/>
+              </a:rPr>
+              <a:t>•  → +nonce（確定性重試 + DB 兜底）</a:t>
+            </a:r>
+          </a:p>
+          <a:p>
+            <a:pPr>
+              <a:spcAft>
+                <a:spcPts val="800"/>
+              </a:spcAft>
+            </a:pPr>
+            <a:r>
+              <a:rPr sz="1200" b="0">
+                <a:solidFill>
+                  <a:srgbClr val="0F172A"/>
+                </a:solidFill>
+                <a:latin typeface="PingFang TC"/>
+                <a:ea typeface="PingFang TC"/>
+              </a:rPr>
+              <a:t>•  高流量可換 Pre-gen Pool</a:t>
+            </a:r>
+          </a:p>
+        </p:txBody>
+      </p:sp>
+      <p:cxnSp>
+        <p:nvCxnSpPr>
+          <p:cNvPr id="13" name="Connector 12"/>
+          <p:cNvCxnSpPr/>
+          <p:nvPr/>
+        </p:nvCxnSpPr>
+        <p:spPr>
+          <a:xfrm>
+            <a:off x="7863840" y="2194560"/>
+            <a:ext cx="274320" cy="0"/>
+          </a:xfrm>
+          <a:prstGeom prst="line">
+            <a:avLst/>
+          </a:prstGeom>
+          <a:ln w="22225">
+            <a:solidFill>
+              <a:srgbClr val="64748B"/>
+            </a:solidFill>
+            <a:tailEnd type="triangle" w="med" len="med"/>
+          </a:ln>
+        </p:spPr>
+        <p:style>
+          <a:lnRef idx="2">
+            <a:schemeClr val="accent1"/>
+          </a:lnRef>
+          <a:fillRef idx="0">
+            <a:schemeClr val="accent1"/>
+          </a:fillRef>
+          <a:effectRef idx="1">
+            <a:schemeClr val="accent1"/>
+          </a:effectRef>
+          <a:fontRef idx="minor">
+            <a:schemeClr val="tx1"/>
+          </a:fontRef>
+        </p:style>
+      </p:cxnSp>
+      <p:sp>
+        <p:nvSpPr>
+          <p:cNvPr id="14" name="Rounded Rectangle 13"/>
+          <p:cNvSpPr/>
+          <p:nvPr/>
+        </p:nvSpPr>
+        <p:spPr>
+          <a:xfrm>
+            <a:off x="8138160" y="1920240"/>
+            <a:ext cx="3566160" cy="548640"/>
           </a:xfrm>
           <a:prstGeom prst="roundRect">
             <a:avLst/>
@@ -15949,100 +16839,38 @@
           <a:p>
             <a:pPr algn="ctr"/>
             <a:r>
-              <a:rPr sz="1300" b="1">
+              <a:rPr sz="1500" b="1">
                 <a:solidFill>
                   <a:srgbClr val="FFFFFF"/>
                 </a:solidFill>
                 <a:latin typeface="PingFang TC"/>
                 <a:ea typeface="PingFang TC"/>
               </a:rPr>
-              <a:t>④ 暖 cache</a:t>
-            </a:r>
-          </a:p>
-          <a:p>
-            <a:pPr algn="ctr"/>
-            <a:r>
-              <a:rPr sz="1300" b="0">
-                <a:solidFill>
-                  <a:srgbClr val="FFFFFF"/>
-                </a:solidFill>
-                <a:latin typeface="PingFang TC"/>
-                <a:ea typeface="PingFang TC"/>
-              </a:rPr>
-              <a:t>token→URL</a:t>
-            </a:r>
-          </a:p>
-          <a:p>
-            <a:pPr algn="ctr"/>
-            <a:r>
-              <a:rPr sz="1300" b="0">
-                <a:solidFill>
-                  <a:srgbClr val="FFFFFF"/>
-                </a:solidFill>
-                <a:latin typeface="PingFang TC"/>
-                <a:ea typeface="PingFang TC"/>
-              </a:rPr>
-              <a:t>寫進 Redis</a:t>
-            </a:r>
-          </a:p>
-        </p:txBody>
-      </p:sp>
-      <p:cxnSp>
-        <p:nvCxnSpPr>
-          <p:cNvPr id="11" name="Connector 10"/>
-          <p:cNvCxnSpPr/>
-          <p:nvPr/>
-        </p:nvCxnSpPr>
-        <p:spPr>
-          <a:xfrm>
-            <a:off x="7763256" y="3154680"/>
-            <a:ext cx="164592" cy="0"/>
-          </a:xfrm>
-          <a:prstGeom prst="line">
-            <a:avLst/>
-          </a:prstGeom>
-          <a:ln w="22225">
-            <a:solidFill>
-              <a:srgbClr val="64748B"/>
-            </a:solidFill>
-            <a:tailEnd type="triangle" w="med" len="med"/>
-          </a:ln>
-        </p:spPr>
-        <p:style>
-          <a:lnRef idx="2">
-            <a:schemeClr val="accent1"/>
-          </a:lnRef>
-          <a:fillRef idx="0">
-            <a:schemeClr val="accent1"/>
-          </a:fillRef>
-          <a:effectRef idx="1">
-            <a:schemeClr val="accent1"/>
-          </a:effectRef>
-          <a:fontRef idx="minor">
-            <a:schemeClr val="tx1"/>
-          </a:fontRef>
-        </p:style>
-      </p:cxnSp>
-      <p:sp>
-        <p:nvSpPr>
-          <p:cNvPr id="12" name="Rounded Rectangle 11"/>
+              <a:t>③ 301 vs 302</a:t>
+            </a:r>
+          </a:p>
+        </p:txBody>
+      </p:sp>
+      <p:sp>
+        <p:nvSpPr>
+          <p:cNvPr id="15" name="Rounded Rectangle 14"/>
           <p:cNvSpPr/>
           <p:nvPr/>
         </p:nvSpPr>
         <p:spPr>
           <a:xfrm>
-            <a:off x="7927848" y="2468880"/>
-            <a:ext cx="1691640" cy="1371600"/>
+            <a:off x="8138160" y="2542032"/>
+            <a:ext cx="3566160" cy="502920"/>
           </a:xfrm>
           <a:prstGeom prst="roundRect">
             <a:avLst/>
           </a:prstGeom>
           <a:solidFill>
-            <a:srgbClr val="7C3AED"/>
+            <a:srgbClr val="059669"/>
           </a:solidFill>
           <a:ln>
             <a:solidFill>
-              <a:srgbClr val="7C3AED"/>
+              <a:srgbClr val="059669"/>
             </a:solidFill>
           </a:ln>
           <a:effectLst/>
@@ -16074,93 +16902,31 @@
                 <a:latin typeface="PingFang TC"/>
                 <a:ea typeface="PingFang TC"/>
               </a:rPr>
-              <a:t>⑤ 生圖</a:t>
-            </a:r>
-          </a:p>
-          <a:p>
-            <a:pPr algn="ctr"/>
-            <a:r>
-              <a:rPr sz="1300" b="0">
-                <a:solidFill>
-                  <a:srgbClr val="FFFFFF"/>
-                </a:solidFill>
-                <a:latin typeface="PingFang TC"/>
-                <a:ea typeface="PingFang TC"/>
-              </a:rPr>
-              <a:t>預生成 QR</a:t>
-            </a:r>
-          </a:p>
-          <a:p>
-            <a:pPr algn="ctr"/>
-            <a:r>
-              <a:rPr sz="1300" b="0">
-                <a:solidFill>
-                  <a:srgbClr val="FFFFFF"/>
-                </a:solidFill>
-                <a:latin typeface="PingFang TC"/>
-                <a:ea typeface="PingFang TC"/>
-              </a:rPr>
-              <a:t>→ object store</a:t>
-            </a:r>
-          </a:p>
-        </p:txBody>
-      </p:sp>
-      <p:cxnSp>
-        <p:nvCxnSpPr>
-          <p:cNvPr id="13" name="Connector 12"/>
-          <p:cNvCxnSpPr/>
-          <p:nvPr/>
-        </p:nvCxnSpPr>
-        <p:spPr>
-          <a:xfrm>
-            <a:off x="9619488" y="3154680"/>
-            <a:ext cx="164592" cy="0"/>
-          </a:xfrm>
-          <a:prstGeom prst="line">
-            <a:avLst/>
-          </a:prstGeom>
-          <a:ln w="22225">
-            <a:solidFill>
-              <a:srgbClr val="64748B"/>
-            </a:solidFill>
-            <a:tailEnd type="triangle" w="med" len="med"/>
-          </a:ln>
-        </p:spPr>
-        <p:style>
-          <a:lnRef idx="2">
-            <a:schemeClr val="accent1"/>
-          </a:lnRef>
-          <a:fillRef idx="0">
-            <a:schemeClr val="accent1"/>
-          </a:fillRef>
-          <a:effectRef idx="1">
-            <a:schemeClr val="accent1"/>
-          </a:effectRef>
-          <a:fontRef idx="minor">
-            <a:schemeClr val="tx1"/>
-          </a:fontRef>
-        </p:style>
-      </p:cxnSp>
-      <p:sp>
-        <p:nvSpPr>
-          <p:cNvPr id="14" name="Rounded Rectangle 13"/>
+              <a:t>選：302（暫時）</a:t>
+            </a:r>
+          </a:p>
+        </p:txBody>
+      </p:sp>
+      <p:sp>
+        <p:nvSpPr>
+          <p:cNvPr id="16" name="Rounded Rectangle 15"/>
           <p:cNvSpPr/>
           <p:nvPr/>
         </p:nvSpPr>
         <p:spPr>
           <a:xfrm>
-            <a:off x="9784080" y="2468880"/>
-            <a:ext cx="1691640" cy="1371600"/>
+            <a:off x="8138160" y="3127248"/>
+            <a:ext cx="3566160" cy="2468880"/>
           </a:xfrm>
           <a:prstGeom prst="roundRect">
             <a:avLst/>
           </a:prstGeom>
           <a:solidFill>
-            <a:srgbClr val="D97706"/>
+            <a:srgbClr val="F1F5F9"/>
           </a:solidFill>
           <a:ln>
             <a:solidFill>
-              <a:srgbClr val="D97706"/>
+              <a:srgbClr val="F1F5F9"/>
             </a:solidFill>
           </a:ln>
           <a:effectLst/>
@@ -16180,59 +16946,114 @@
           </a:fontRef>
         </p:style>
         <p:txBody>
-          <a:bodyPr rtlCol="0" anchor="ctr" wrap="square" tIns="25400" bIns="25400"/>
+          <a:bodyPr rtlCol="0" anchor="ctr"/>
           <a:lstStyle/>
           <a:p>
             <a:pPr algn="ctr"/>
-            <a:r>
-              <a:rPr sz="1300" b="1">
-                <a:solidFill>
-                  <a:srgbClr val="FFFFFF"/>
-                </a:solidFill>
-                <a:latin typeface="PingFang TC"/>
-                <a:ea typeface="PingFang TC"/>
-              </a:rPr>
-              <a:t>⑥ 回應</a:t>
-            </a:r>
-          </a:p>
-          <a:p>
-            <a:pPr algn="ctr"/>
-            <a:r>
-              <a:rPr sz="1300" b="0">
-                <a:solidFill>
-                  <a:srgbClr val="FFFFFF"/>
-                </a:solidFill>
-                <a:latin typeface="PingFang TC"/>
-                <a:ea typeface="PingFang TC"/>
-              </a:rPr>
-              <a:t>token / short_url</a:t>
-            </a:r>
-          </a:p>
-          <a:p>
-            <a:pPr algn="ctr"/>
-            <a:r>
-              <a:rPr sz="1300" b="0">
-                <a:solidFill>
-                  <a:srgbClr val="FFFFFF"/>
-                </a:solidFill>
-                <a:latin typeface="PingFang TC"/>
-                <a:ea typeface="PingFang TC"/>
-              </a:rPr>
-              <a:t>/ qr_code_url</a:t>
-            </a:r>
-          </a:p>
-        </p:txBody>
-      </p:sp>
-      <p:sp>
-        <p:nvSpPr>
-          <p:cNvPr id="15" name="TextBox 14"/>
+          </a:p>
+        </p:txBody>
+      </p:sp>
+      <p:sp>
+        <p:nvSpPr>
+          <p:cNvPr id="17" name="TextBox 16"/>
           <p:cNvSpPr txBox="1"/>
           <p:nvPr/>
         </p:nvSpPr>
         <p:spPr>
           <a:xfrm>
-            <a:off x="502920" y="4297680"/>
-            <a:ext cx="10972800" cy="1097280"/>
+            <a:off x="8321040" y="3273552"/>
+            <a:ext cx="3200400" cy="2194560"/>
+          </a:xfrm>
+          <a:prstGeom prst="rect">
+            <a:avLst/>
+          </a:prstGeom>
+          <a:noFill/>
+        </p:spPr>
+        <p:txBody>
+          <a:bodyPr wrap="square">
+            <a:spAutoFit/>
+          </a:bodyPr>
+          <a:lstStyle/>
+          <a:p>
+            <a:pPr>
+              <a:spcAft>
+                <a:spcPts val="800"/>
+              </a:spcAft>
+            </a:pPr>
+            <a:r>
+              <a:rPr sz="1200" b="0">
+                <a:solidFill>
+                  <a:srgbClr val="0F172A"/>
+                </a:solidFill>
+                <a:latin typeface="PingFang TC"/>
+                <a:ea typeface="PingFang TC"/>
+              </a:rPr>
+              <a:t>•  301 永久快取 → 跳過 server</a:t>
+            </a:r>
+          </a:p>
+          <a:p>
+            <a:pPr>
+              <a:spcAft>
+                <a:spcPts val="800"/>
+              </a:spcAft>
+            </a:pPr>
+            <a:r>
+              <a:rPr sz="1200" b="0">
+                <a:solidFill>
+                  <a:srgbClr val="0F172A"/>
+                </a:solidFill>
+                <a:latin typeface="PingFang TC"/>
+                <a:ea typeface="PingFang TC"/>
+              </a:rPr>
+              <a:t>•  → 分析流失、改不了目標</a:t>
+            </a:r>
+          </a:p>
+          <a:p>
+            <a:pPr>
+              <a:spcAft>
+                <a:spcPts val="800"/>
+              </a:spcAft>
+            </a:pPr>
+            <a:r>
+              <a:rPr sz="1200" b="0">
+                <a:solidFill>
+                  <a:srgbClr val="0F172A"/>
+                </a:solidFill>
+                <a:latin typeface="PingFang TC"/>
+                <a:ea typeface="PingFang TC"/>
+              </a:rPr>
+              <a:t>•  302 每次回源 → 可改/刪/分析</a:t>
+            </a:r>
+          </a:p>
+          <a:p>
+            <a:pPr>
+              <a:spcAft>
+                <a:spcPts val="800"/>
+              </a:spcAft>
+            </a:pPr>
+            <a:r>
+              <a:rPr sz="1200" b="0">
+                <a:solidFill>
+                  <a:srgbClr val="0F172A"/>
+                </a:solidFill>
+                <a:latin typeface="PingFang TC"/>
+                <a:ea typeface="PingFang TC"/>
+              </a:rPr>
+              <a:t>•  代價：latency → cache + CDN</a:t>
+            </a:r>
+          </a:p>
+        </p:txBody>
+      </p:sp>
+      <p:sp>
+        <p:nvSpPr>
+          <p:cNvPr id="18" name="TextBox 17"/>
+          <p:cNvSpPr txBox="1"/>
+          <p:nvPr/>
+        </p:nvSpPr>
+        <p:spPr>
+          <a:xfrm>
+            <a:off x="457200" y="5806440"/>
+            <a:ext cx="11247120" cy="548640"/>
           </a:xfrm>
           <a:prstGeom prst="rect">
             <a:avLst/>
@@ -16247,23 +17068,6 @@
           <a:p>
             <a:pPr algn="l">
               <a:spcAft>
-                <a:spcPts val="600"/>
-              </a:spcAft>
-            </a:pPr>
-            <a:r>
-              <a:rPr sz="1400" b="1">
-                <a:solidFill>
-                  <a:srgbClr val="0F172A"/>
-                </a:solidFill>
-                <a:latin typeface="PingFang TC"/>
-                <a:ea typeface="PingFang TC"/>
-              </a:rPr>
-              <a:t>關鍵：第 ③ 步「直接插入 + UNIQUE 例外重試」取代 repo 的「先查再插」，消除高並發 race。</a:t>
-            </a:r>
-          </a:p>
-          <a:p>
-            <a:pPr algn="l">
-              <a:spcAft>
                 <a:spcPts val="400"/>
               </a:spcAft>
             </a:pPr>
@@ -16275,7 +17079,7 @@
                 <a:latin typeface="PingFang TC"/>
                 <a:ea typeface="PingFang TC"/>
               </a:rPr>
-              <a:t>token 碰撞在大規模下必然發生，靠 DB UNIQUE + 重試兜底（nonce 只防『同 URL 同 token』，不防碰撞）。</a:t>
+              <a:t>①決定要 server、②決定短碼怎麼來、③決定 redirect 怎麼回 —— 三者串成主架構，其下才是 16 項實作決策。</a:t>
             </a:r>
           </a:p>
         </p:txBody>
@@ -16377,7 +17181,7 @@
                 <a:latin typeface="PingFang TC"/>
                 <a:ea typeface="PingFang TC"/>
               </a:rPr>
-              <a:t>06 · REDIRECT FLOW</a:t>
+              <a:t>05 · CREATE FLOW</a:t>
             </a:r>
           </a:p>
           <a:p>
@@ -16394,7 +17198,7 @@
                 <a:latin typeface="PingFang TC"/>
                 <a:ea typeface="PingFang TC"/>
               </a:rPr>
-              <a:t>掃描 / Redirect 流程（&lt; 100ms 關鍵路徑）</a:t>
+              <a:t>建立流程</a:t>
             </a:r>
           </a:p>
         </p:txBody>
@@ -16407,18 +17211,18 @@
         </p:nvSpPr>
         <p:spPr>
           <a:xfrm>
-            <a:off x="548640" y="1554480"/>
-            <a:ext cx="2103120" cy="731520"/>
+            <a:off x="502920" y="2468880"/>
+            <a:ext cx="1691640" cy="1371600"/>
           </a:xfrm>
           <a:prstGeom prst="roundRect">
             <a:avLst/>
           </a:prstGeom>
           <a:solidFill>
-            <a:srgbClr val="64748B"/>
+            <a:srgbClr val="2563EB"/>
           </a:solidFill>
           <a:ln>
             <a:solidFill>
-              <a:srgbClr val="64748B"/>
+              <a:srgbClr val="2563EB"/>
             </a:solidFill>
           </a:ln>
           <a:effectLst/>
@@ -16443,41 +17247,326 @@
           <a:p>
             <a:pPr algn="ctr"/>
             <a:r>
-              <a:rPr sz="1200" b="1">
+              <a:rPr sz="1300" b="1">
                 <a:solidFill>
                   <a:srgbClr val="FFFFFF"/>
                 </a:solidFill>
                 <a:latin typeface="PingFang TC"/>
                 <a:ea typeface="PingFang TC"/>
               </a:rPr>
-              <a:t>GET /r/{token}</a:t>
+              <a:t>① 驗證</a:t>
             </a:r>
           </a:p>
           <a:p>
             <a:pPr algn="ctr"/>
             <a:r>
-              <a:rPr sz="1200" b="0">
+              <a:rPr sz="1300" b="0">
                 <a:solidFill>
                   <a:srgbClr val="FFFFFF"/>
                 </a:solidFill>
                 <a:latin typeface="PingFang TC"/>
                 <a:ea typeface="PingFang TC"/>
               </a:rPr>
-              <a:t>掃描者瀏覽器</a:t>
-            </a:r>
-          </a:p>
-        </p:txBody>
-      </p:sp>
-      <p:sp>
-        <p:nvSpPr>
-          <p:cNvPr id="5" name="Rounded Rectangle 4"/>
+              <a:t>保守正規化</a:t>
+            </a:r>
+          </a:p>
+          <a:p>
+            <a:pPr algn="ctr"/>
+            <a:r>
+              <a:rPr sz="1300" b="0">
+                <a:solidFill>
+                  <a:srgbClr val="FFFFFF"/>
+                </a:solidFill>
+                <a:latin typeface="PingFang TC"/>
+                <a:ea typeface="PingFang TC"/>
+              </a:rPr>
+              <a:t>+ 惡意/SSRF 檢查</a:t>
+            </a:r>
+          </a:p>
+        </p:txBody>
+      </p:sp>
+      <p:cxnSp>
+        <p:nvCxnSpPr>
+          <p:cNvPr id="5" name="Connector 4"/>
+          <p:cNvCxnSpPr/>
+          <p:nvPr/>
+        </p:nvCxnSpPr>
+        <p:spPr>
+          <a:xfrm>
+            <a:off x="2194560" y="3154680"/>
+            <a:ext cx="164592" cy="0"/>
+          </a:xfrm>
+          <a:prstGeom prst="line">
+            <a:avLst/>
+          </a:prstGeom>
+          <a:ln w="22225">
+            <a:solidFill>
+              <a:srgbClr val="64748B"/>
+            </a:solidFill>
+            <a:tailEnd type="triangle" w="med" len="med"/>
+          </a:ln>
+        </p:spPr>
+        <p:style>
+          <a:lnRef idx="2">
+            <a:schemeClr val="accent1"/>
+          </a:lnRef>
+          <a:fillRef idx="0">
+            <a:schemeClr val="accent1"/>
+          </a:fillRef>
+          <a:effectRef idx="1">
+            <a:schemeClr val="accent1"/>
+          </a:effectRef>
+          <a:fontRef idx="minor">
+            <a:schemeClr val="tx1"/>
+          </a:fontRef>
+        </p:style>
+      </p:cxnSp>
+      <p:sp>
+        <p:nvSpPr>
+          <p:cNvPr id="6" name="Rounded Rectangle 5"/>
           <p:cNvSpPr/>
           <p:nvPr/>
         </p:nvSpPr>
         <p:spPr>
           <a:xfrm>
-            <a:off x="3017520" y="1554480"/>
-            <a:ext cx="2377440" cy="731520"/>
+            <a:off x="2359152" y="2468880"/>
+            <a:ext cx="1691640" cy="1371600"/>
+          </a:xfrm>
+          <a:prstGeom prst="roundRect">
+            <a:avLst/>
+          </a:prstGeom>
+          <a:solidFill>
+            <a:srgbClr val="0EA5E9"/>
+          </a:solidFill>
+          <a:ln>
+            <a:solidFill>
+              <a:srgbClr val="0EA5E9"/>
+            </a:solidFill>
+          </a:ln>
+          <a:effectLst/>
+        </p:spPr>
+        <p:style>
+          <a:lnRef idx="1">
+            <a:schemeClr val="accent1"/>
+          </a:lnRef>
+          <a:fillRef idx="3">
+            <a:schemeClr val="accent1"/>
+          </a:fillRef>
+          <a:effectRef idx="2">
+            <a:schemeClr val="accent1"/>
+          </a:effectRef>
+          <a:fontRef idx="minor">
+            <a:schemeClr val="lt1"/>
+          </a:fontRef>
+        </p:style>
+        <p:txBody>
+          <a:bodyPr rtlCol="0" anchor="ctr" wrap="square" tIns="25400" bIns="25400"/>
+          <a:lstStyle/>
+          <a:p>
+            <a:pPr algn="ctr"/>
+            <a:r>
+              <a:rPr sz="1300" b="1">
+                <a:solidFill>
+                  <a:srgbClr val="FFFFFF"/>
+                </a:solidFill>
+                <a:latin typeface="PingFang TC"/>
+                <a:ea typeface="PingFang TC"/>
+              </a:rPr>
+              <a:t>② 生 token</a:t>
+            </a:r>
+          </a:p>
+          <a:p>
+            <a:pPr algn="ctr"/>
+            <a:r>
+              <a:rPr sz="1300" b="0">
+                <a:solidFill>
+                  <a:srgbClr val="FFFFFF"/>
+                </a:solidFill>
+                <a:latin typeface="PingFang TC"/>
+                <a:ea typeface="PingFang TC"/>
+              </a:rPr>
+              <a:t>SHA-256+nonce</a:t>
+            </a:r>
+          </a:p>
+          <a:p>
+            <a:pPr algn="ctr"/>
+            <a:r>
+              <a:rPr sz="1300" b="0">
+                <a:solidFill>
+                  <a:srgbClr val="FFFFFF"/>
+                </a:solidFill>
+                <a:latin typeface="PingFang TC"/>
+                <a:ea typeface="PingFang TC"/>
+              </a:rPr>
+              <a:t>→Base62→8 碼</a:t>
+            </a:r>
+          </a:p>
+        </p:txBody>
+      </p:sp>
+      <p:cxnSp>
+        <p:nvCxnSpPr>
+          <p:cNvPr id="7" name="Connector 6"/>
+          <p:cNvCxnSpPr/>
+          <p:nvPr/>
+        </p:nvCxnSpPr>
+        <p:spPr>
+          <a:xfrm>
+            <a:off x="4050792" y="3154680"/>
+            <a:ext cx="164592" cy="0"/>
+          </a:xfrm>
+          <a:prstGeom prst="line">
+            <a:avLst/>
+          </a:prstGeom>
+          <a:ln w="22225">
+            <a:solidFill>
+              <a:srgbClr val="64748B"/>
+            </a:solidFill>
+            <a:tailEnd type="triangle" w="med" len="med"/>
+          </a:ln>
+        </p:spPr>
+        <p:style>
+          <a:lnRef idx="2">
+            <a:schemeClr val="accent1"/>
+          </a:lnRef>
+          <a:fillRef idx="0">
+            <a:schemeClr val="accent1"/>
+          </a:fillRef>
+          <a:effectRef idx="1">
+            <a:schemeClr val="accent1"/>
+          </a:effectRef>
+          <a:fontRef idx="minor">
+            <a:schemeClr val="tx1"/>
+          </a:fontRef>
+        </p:style>
+      </p:cxnSp>
+      <p:sp>
+        <p:nvSpPr>
+          <p:cNvPr id="8" name="Rounded Rectangle 7"/>
+          <p:cNvSpPr/>
+          <p:nvPr/>
+        </p:nvSpPr>
+        <p:spPr>
+          <a:xfrm>
+            <a:off x="4215384" y="2468880"/>
+            <a:ext cx="1691640" cy="1371600"/>
+          </a:xfrm>
+          <a:prstGeom prst="roundRect">
+            <a:avLst/>
+          </a:prstGeom>
+          <a:solidFill>
+            <a:srgbClr val="059669"/>
+          </a:solidFill>
+          <a:ln>
+            <a:solidFill>
+              <a:srgbClr val="059669"/>
+            </a:solidFill>
+          </a:ln>
+          <a:effectLst/>
+        </p:spPr>
+        <p:style>
+          <a:lnRef idx="1">
+            <a:schemeClr val="accent1"/>
+          </a:lnRef>
+          <a:fillRef idx="3">
+            <a:schemeClr val="accent1"/>
+          </a:fillRef>
+          <a:effectRef idx="2">
+            <a:schemeClr val="accent1"/>
+          </a:effectRef>
+          <a:fontRef idx="minor">
+            <a:schemeClr val="lt1"/>
+          </a:fontRef>
+        </p:style>
+        <p:txBody>
+          <a:bodyPr rtlCol="0" anchor="ctr" wrap="square" tIns="25400" bIns="25400"/>
+          <a:lstStyle/>
+          <a:p>
+            <a:pPr algn="ctr"/>
+            <a:r>
+              <a:rPr sz="1300" b="1">
+                <a:solidFill>
+                  <a:srgbClr val="FFFFFF"/>
+                </a:solidFill>
+                <a:latin typeface="PingFang TC"/>
+                <a:ea typeface="PingFang TC"/>
+              </a:rPr>
+              <a:t>③ 寫 DB</a:t>
+            </a:r>
+          </a:p>
+          <a:p>
+            <a:pPr algn="ctr"/>
+            <a:r>
+              <a:rPr sz="1300" b="0">
+                <a:solidFill>
+                  <a:srgbClr val="FFFFFF"/>
+                </a:solidFill>
+                <a:latin typeface="PingFang TC"/>
+                <a:ea typeface="PingFang TC"/>
+              </a:rPr>
+              <a:t>直接插入</a:t>
+            </a:r>
+          </a:p>
+          <a:p>
+            <a:pPr algn="ctr"/>
+            <a:r>
+              <a:rPr sz="1300" b="0">
+                <a:solidFill>
+                  <a:srgbClr val="FFFFFF"/>
+                </a:solidFill>
+                <a:latin typeface="PingFang TC"/>
+                <a:ea typeface="PingFang TC"/>
+              </a:rPr>
+              <a:t>UNIQUE 重試 ≤10</a:t>
+            </a:r>
+          </a:p>
+        </p:txBody>
+      </p:sp>
+      <p:cxnSp>
+        <p:nvCxnSpPr>
+          <p:cNvPr id="9" name="Connector 8"/>
+          <p:cNvCxnSpPr/>
+          <p:nvPr/>
+        </p:nvCxnSpPr>
+        <p:spPr>
+          <a:xfrm>
+            <a:off x="5907024" y="3154680"/>
+            <a:ext cx="164592" cy="0"/>
+          </a:xfrm>
+          <a:prstGeom prst="line">
+            <a:avLst/>
+          </a:prstGeom>
+          <a:ln w="22225">
+            <a:solidFill>
+              <a:srgbClr val="64748B"/>
+            </a:solidFill>
+            <a:tailEnd type="triangle" w="med" len="med"/>
+          </a:ln>
+        </p:spPr>
+        <p:style>
+          <a:lnRef idx="2">
+            <a:schemeClr val="accent1"/>
+          </a:lnRef>
+          <a:fillRef idx="0">
+            <a:schemeClr val="accent1"/>
+          </a:fillRef>
+          <a:effectRef idx="1">
+            <a:schemeClr val="accent1"/>
+          </a:effectRef>
+          <a:fontRef idx="minor">
+            <a:schemeClr val="tx1"/>
+          </a:fontRef>
+        </p:style>
+      </p:cxnSp>
+      <p:sp>
+        <p:nvSpPr>
+          <p:cNvPr id="10" name="Rounded Rectangle 9"/>
+          <p:cNvSpPr/>
+          <p:nvPr/>
+        </p:nvSpPr>
+        <p:spPr>
+          <a:xfrm>
+            <a:off x="6071616" y="2468880"/>
+            <a:ext cx="1691640" cy="1371600"/>
           </a:xfrm>
           <a:prstGeom prst="roundRect">
             <a:avLst/>
@@ -16519,21 +17608,47 @@
                 <a:latin typeface="PingFang TC"/>
                 <a:ea typeface="PingFang TC"/>
               </a:rPr>
-              <a:t>① 查 Cache (Redis)</a:t>
+              <a:t>④ 暖 cache</a:t>
+            </a:r>
+          </a:p>
+          <a:p>
+            <a:pPr algn="ctr"/>
+            <a:r>
+              <a:rPr sz="1300" b="0">
+                <a:solidFill>
+                  <a:srgbClr val="FFFFFF"/>
+                </a:solidFill>
+                <a:latin typeface="PingFang TC"/>
+                <a:ea typeface="PingFang TC"/>
+              </a:rPr>
+              <a:t>token→URL</a:t>
+            </a:r>
+          </a:p>
+          <a:p>
+            <a:pPr algn="ctr"/>
+            <a:r>
+              <a:rPr sz="1300" b="0">
+                <a:solidFill>
+                  <a:srgbClr val="FFFFFF"/>
+                </a:solidFill>
+                <a:latin typeface="PingFang TC"/>
+                <a:ea typeface="PingFang TC"/>
+              </a:rPr>
+              <a:t>寫進 Redis</a:t>
             </a:r>
           </a:p>
         </p:txBody>
       </p:sp>
       <p:cxnSp>
         <p:nvCxnSpPr>
-          <p:cNvPr id="6" name="Connector 5"/>
+          <p:cNvPr id="11" name="Connector 10"/>
           <p:cNvCxnSpPr/>
           <p:nvPr/>
         </p:nvCxnSpPr>
         <p:spPr>
           <a:xfrm>
-            <a:off x="2651760" y="1920240"/>
-            <a:ext cx="365760" cy="0"/>
+            <a:off x="7763256" y="3154680"/>
+            <a:ext cx="164592" cy="0"/>
           </a:xfrm>
           <a:prstGeom prst="line">
             <a:avLst/>
@@ -16562,24 +17677,24 @@
       </p:cxnSp>
       <p:sp>
         <p:nvSpPr>
-          <p:cNvPr id="7" name="Rounded Rectangle 6"/>
+          <p:cNvPr id="12" name="Rounded Rectangle 11"/>
           <p:cNvSpPr/>
           <p:nvPr/>
         </p:nvSpPr>
         <p:spPr>
           <a:xfrm>
-            <a:off x="3017520" y="2651760"/>
-            <a:ext cx="2377440" cy="640080"/>
+            <a:off x="7927848" y="2468880"/>
+            <a:ext cx="1691640" cy="1371600"/>
           </a:xfrm>
           <a:prstGeom prst="roundRect">
             <a:avLst/>
           </a:prstGeom>
           <a:solidFill>
-            <a:srgbClr val="059669"/>
+            <a:srgbClr val="7C3AED"/>
           </a:solidFill>
           <a:ln>
             <a:solidFill>
-              <a:srgbClr val="059669"/>
+              <a:srgbClr val="7C3AED"/>
             </a:solidFill>
           </a:ln>
           <a:effectLst/>
@@ -16604,97 +17719,54 @@
           <a:p>
             <a:pPr algn="ctr"/>
             <a:r>
-              <a:rPr sz="1200" b="1">
+              <a:rPr sz="1300" b="1">
                 <a:solidFill>
                   <a:srgbClr val="FFFFFF"/>
                 </a:solidFill>
                 <a:latin typeface="PingFang TC"/>
                 <a:ea typeface="PingFang TC"/>
               </a:rPr>
-              <a:t>命中 + 未過期</a:t>
-            </a:r>
-          </a:p>
-        </p:txBody>
-      </p:sp>
-      <p:sp>
-        <p:nvSpPr>
-          <p:cNvPr id="8" name="Rounded Rectangle 7"/>
-          <p:cNvSpPr/>
-          <p:nvPr/>
-        </p:nvSpPr>
-        <p:spPr>
-          <a:xfrm>
-            <a:off x="5852160" y="1554480"/>
-            <a:ext cx="2468880" cy="731520"/>
-          </a:xfrm>
-          <a:prstGeom prst="roundRect">
-            <a:avLst/>
-          </a:prstGeom>
-          <a:solidFill>
-            <a:srgbClr val="059669"/>
-          </a:solidFill>
-          <a:ln>
-            <a:solidFill>
-              <a:srgbClr val="059669"/>
-            </a:solidFill>
-          </a:ln>
-          <a:effectLst/>
-        </p:spPr>
-        <p:style>
-          <a:lnRef idx="1">
-            <a:schemeClr val="accent1"/>
-          </a:lnRef>
-          <a:fillRef idx="3">
-            <a:schemeClr val="accent1"/>
-          </a:fillRef>
-          <a:effectRef idx="2">
-            <a:schemeClr val="accent1"/>
-          </a:effectRef>
-          <a:fontRef idx="minor">
-            <a:schemeClr val="lt1"/>
-          </a:fontRef>
-        </p:style>
-        <p:txBody>
-          <a:bodyPr rtlCol="0" anchor="ctr" wrap="square" tIns="25400" bIns="25400"/>
-          <a:lstStyle/>
+              <a:t>⑤ 生圖</a:t>
+            </a:r>
+          </a:p>
           <a:p>
             <a:pPr algn="ctr"/>
             <a:r>
-              <a:rPr sz="1200" b="1">
+              <a:rPr sz="1300" b="0">
                 <a:solidFill>
                   <a:srgbClr val="FFFFFF"/>
                 </a:solidFill>
                 <a:latin typeface="PingFang TC"/>
                 <a:ea typeface="PingFang TC"/>
               </a:rPr>
-              <a:t>② miss → 查 DB</a:t>
+              <a:t>預生成 QR</a:t>
             </a:r>
           </a:p>
           <a:p>
             <a:pPr algn="ctr"/>
             <a:r>
-              <a:rPr sz="1200" b="0">
+              <a:rPr sz="1300" b="0">
                 <a:solidFill>
                   <a:srgbClr val="FFFFFF"/>
                 </a:solidFill>
                 <a:latin typeface="PingFang TC"/>
                 <a:ea typeface="PingFang TC"/>
               </a:rPr>
-              <a:t>(read replica)</a:t>
+              <a:t>→ object store</a:t>
             </a:r>
           </a:p>
         </p:txBody>
       </p:sp>
       <p:cxnSp>
         <p:nvCxnSpPr>
-          <p:cNvPr id="9" name="Connector 8"/>
+          <p:cNvPr id="13" name="Connector 12"/>
           <p:cNvCxnSpPr/>
           <p:nvPr/>
         </p:nvCxnSpPr>
         <p:spPr>
           <a:xfrm>
-            <a:off x="5394960" y="1920240"/>
-            <a:ext cx="457200" cy="0"/>
+            <a:off x="9619488" y="3154680"/>
+            <a:ext cx="164592" cy="0"/>
           </a:xfrm>
           <a:prstGeom prst="line">
             <a:avLst/>
@@ -16723,382 +17795,14 @@
       </p:cxnSp>
       <p:sp>
         <p:nvSpPr>
-          <p:cNvPr id="10" name="Rounded Rectangle 9"/>
-          <p:cNvSpPr/>
-          <p:nvPr/>
-        </p:nvSpPr>
-        <p:spPr>
-          <a:xfrm>
-            <a:off x="8686800" y="1234440"/>
-            <a:ext cx="3017520" cy="640080"/>
-          </a:xfrm>
-          <a:prstGeom prst="roundRect">
-            <a:avLst/>
-          </a:prstGeom>
-          <a:solidFill>
-            <a:srgbClr val="DC2626"/>
-          </a:solidFill>
-          <a:ln>
-            <a:solidFill>
-              <a:srgbClr val="DC2626"/>
-            </a:solidFill>
-          </a:ln>
-          <a:effectLst/>
-        </p:spPr>
-        <p:style>
-          <a:lnRef idx="1">
-            <a:schemeClr val="accent1"/>
-          </a:lnRef>
-          <a:fillRef idx="3">
-            <a:schemeClr val="accent1"/>
-          </a:fillRef>
-          <a:effectRef idx="2">
-            <a:schemeClr val="accent1"/>
-          </a:effectRef>
-          <a:fontRef idx="minor">
-            <a:schemeClr val="lt1"/>
-          </a:fontRef>
-        </p:style>
-        <p:txBody>
-          <a:bodyPr rtlCol="0" anchor="ctr" wrap="square" tIns="25400" bIns="25400"/>
-          <a:lstStyle/>
-          <a:p>
-            <a:pPr algn="ctr"/>
-            <a:r>
-              <a:rPr sz="1200" b="1">
-                <a:solidFill>
-                  <a:srgbClr val="FFFFFF"/>
-                </a:solidFill>
-                <a:latin typeface="PingFang TC"/>
-                <a:ea typeface="PingFang TC"/>
-              </a:rPr>
-              <a:t>找不到  →  404</a:t>
-            </a:r>
-          </a:p>
-        </p:txBody>
-      </p:sp>
-      <p:cxnSp>
-        <p:nvCxnSpPr>
-          <p:cNvPr id="11" name="Connector 10"/>
-          <p:cNvCxnSpPr/>
-          <p:nvPr/>
-        </p:nvCxnSpPr>
-        <p:spPr>
-          <a:xfrm flipV="1">
-            <a:off x="8321040" y="1554480"/>
-            <a:ext cx="365760" cy="365760"/>
-          </a:xfrm>
-          <a:prstGeom prst="line">
-            <a:avLst/>
-          </a:prstGeom>
-          <a:ln w="15240">
-            <a:solidFill>
-              <a:srgbClr val="64748B"/>
-            </a:solidFill>
-            <a:tailEnd type="triangle" w="med" len="med"/>
-          </a:ln>
-        </p:spPr>
-        <p:style>
-          <a:lnRef idx="2">
-            <a:schemeClr val="accent1"/>
-          </a:lnRef>
-          <a:fillRef idx="0">
-            <a:schemeClr val="accent1"/>
-          </a:fillRef>
-          <a:effectRef idx="1">
-            <a:schemeClr val="accent1"/>
-          </a:effectRef>
-          <a:fontRef idx="minor">
-            <a:schemeClr val="tx1"/>
-          </a:fontRef>
-        </p:style>
-      </p:cxnSp>
-      <p:sp>
-        <p:nvSpPr>
-          <p:cNvPr id="12" name="Rounded Rectangle 11"/>
-          <p:cNvSpPr/>
-          <p:nvPr/>
-        </p:nvSpPr>
-        <p:spPr>
-          <a:xfrm>
-            <a:off x="8686800" y="2057400"/>
-            <a:ext cx="3017520" cy="640080"/>
-          </a:xfrm>
-          <a:prstGeom prst="roundRect">
-            <a:avLst/>
-          </a:prstGeom>
-          <a:solidFill>
-            <a:srgbClr val="DC2626"/>
-          </a:solidFill>
-          <a:ln>
-            <a:solidFill>
-              <a:srgbClr val="DC2626"/>
-            </a:solidFill>
-          </a:ln>
-          <a:effectLst/>
-        </p:spPr>
-        <p:style>
-          <a:lnRef idx="1">
-            <a:schemeClr val="accent1"/>
-          </a:lnRef>
-          <a:fillRef idx="3">
-            <a:schemeClr val="accent1"/>
-          </a:fillRef>
-          <a:effectRef idx="2">
-            <a:schemeClr val="accent1"/>
-          </a:effectRef>
-          <a:fontRef idx="minor">
-            <a:schemeClr val="lt1"/>
-          </a:fontRef>
-        </p:style>
-        <p:txBody>
-          <a:bodyPr rtlCol="0" anchor="ctr" wrap="square" tIns="25400" bIns="25400"/>
-          <a:lstStyle/>
-          <a:p>
-            <a:pPr algn="ctr"/>
-            <a:r>
-              <a:rPr sz="1200" b="1">
-                <a:solidFill>
-                  <a:srgbClr val="FFFFFF"/>
-                </a:solidFill>
-                <a:latin typeface="PingFang TC"/>
-                <a:ea typeface="PingFang TC"/>
-              </a:rPr>
-              <a:t>is_deleted  →  410</a:t>
-            </a:r>
-          </a:p>
-        </p:txBody>
-      </p:sp>
-      <p:cxnSp>
-        <p:nvCxnSpPr>
-          <p:cNvPr id="13" name="Connector 12"/>
-          <p:cNvCxnSpPr/>
-          <p:nvPr/>
-        </p:nvCxnSpPr>
-        <p:spPr>
-          <a:xfrm>
-            <a:off x="8321040" y="1920240"/>
-            <a:ext cx="365760" cy="457200"/>
-          </a:xfrm>
-          <a:prstGeom prst="line">
-            <a:avLst/>
-          </a:prstGeom>
-          <a:ln w="15240">
-            <a:solidFill>
-              <a:srgbClr val="64748B"/>
-            </a:solidFill>
-            <a:tailEnd type="triangle" w="med" len="med"/>
-          </a:ln>
-        </p:spPr>
-        <p:style>
-          <a:lnRef idx="2">
-            <a:schemeClr val="accent1"/>
-          </a:lnRef>
-          <a:fillRef idx="0">
-            <a:schemeClr val="accent1"/>
-          </a:fillRef>
-          <a:effectRef idx="1">
-            <a:schemeClr val="accent1"/>
-          </a:effectRef>
-          <a:fontRef idx="minor">
-            <a:schemeClr val="tx1"/>
-          </a:fontRef>
-        </p:style>
-      </p:cxnSp>
-      <p:sp>
-        <p:nvSpPr>
           <p:cNvPr id="14" name="Rounded Rectangle 13"/>
           <p:cNvSpPr/>
           <p:nvPr/>
         </p:nvSpPr>
         <p:spPr>
           <a:xfrm>
-            <a:off x="8686800" y="2880360"/>
-            <a:ext cx="3017520" cy="640080"/>
-          </a:xfrm>
-          <a:prstGeom prst="roundRect">
-            <a:avLst/>
-          </a:prstGeom>
-          <a:solidFill>
-            <a:srgbClr val="DC2626"/>
-          </a:solidFill>
-          <a:ln>
-            <a:solidFill>
-              <a:srgbClr val="DC2626"/>
-            </a:solidFill>
-          </a:ln>
-          <a:effectLst/>
-        </p:spPr>
-        <p:style>
-          <a:lnRef idx="1">
-            <a:schemeClr val="accent1"/>
-          </a:lnRef>
-          <a:fillRef idx="3">
-            <a:schemeClr val="accent1"/>
-          </a:fillRef>
-          <a:effectRef idx="2">
-            <a:schemeClr val="accent1"/>
-          </a:effectRef>
-          <a:fontRef idx="minor">
-            <a:schemeClr val="lt1"/>
-          </a:fontRef>
-        </p:style>
-        <p:txBody>
-          <a:bodyPr rtlCol="0" anchor="ctr" wrap="square" tIns="25400" bIns="25400"/>
-          <a:lstStyle/>
-          <a:p>
-            <a:pPr algn="ctr"/>
-            <a:r>
-              <a:rPr sz="1200" b="1">
-                <a:solidFill>
-                  <a:srgbClr val="FFFFFF"/>
-                </a:solidFill>
-                <a:latin typeface="PingFang TC"/>
-                <a:ea typeface="PingFang TC"/>
-              </a:rPr>
-              <a:t>已過期  →  410</a:t>
-            </a:r>
-          </a:p>
-        </p:txBody>
-      </p:sp>
-      <p:cxnSp>
-        <p:nvCxnSpPr>
-          <p:cNvPr id="15" name="Connector 14"/>
-          <p:cNvCxnSpPr/>
-          <p:nvPr/>
-        </p:nvCxnSpPr>
-        <p:spPr>
-          <a:xfrm>
-            <a:off x="8321040" y="1920240"/>
-            <a:ext cx="365760" cy="1280160"/>
-          </a:xfrm>
-          <a:prstGeom prst="line">
-            <a:avLst/>
-          </a:prstGeom>
-          <a:ln w="15240">
-            <a:solidFill>
-              <a:srgbClr val="64748B"/>
-            </a:solidFill>
-            <a:tailEnd type="triangle" w="med" len="med"/>
-          </a:ln>
-        </p:spPr>
-        <p:style>
-          <a:lnRef idx="2">
-            <a:schemeClr val="accent1"/>
-          </a:lnRef>
-          <a:fillRef idx="0">
-            <a:schemeClr val="accent1"/>
-          </a:fillRef>
-          <a:effectRef idx="1">
-            <a:schemeClr val="accent1"/>
-          </a:effectRef>
-          <a:fontRef idx="minor">
-            <a:schemeClr val="tx1"/>
-          </a:fontRef>
-        </p:style>
-      </p:cxnSp>
-      <p:sp>
-        <p:nvSpPr>
-          <p:cNvPr id="16" name="Rounded Rectangle 15"/>
-          <p:cNvSpPr/>
-          <p:nvPr/>
-        </p:nvSpPr>
-        <p:spPr>
-          <a:xfrm>
-            <a:off x="8686800" y="3703320"/>
-            <a:ext cx="3017520" cy="640080"/>
-          </a:xfrm>
-          <a:prstGeom prst="roundRect">
-            <a:avLst/>
-          </a:prstGeom>
-          <a:solidFill>
-            <a:srgbClr val="059669"/>
-          </a:solidFill>
-          <a:ln>
-            <a:solidFill>
-              <a:srgbClr val="059669"/>
-            </a:solidFill>
-          </a:ln>
-          <a:effectLst/>
-        </p:spPr>
-        <p:style>
-          <a:lnRef idx="1">
-            <a:schemeClr val="accent1"/>
-          </a:lnRef>
-          <a:fillRef idx="3">
-            <a:schemeClr val="accent1"/>
-          </a:fillRef>
-          <a:effectRef idx="2">
-            <a:schemeClr val="accent1"/>
-          </a:effectRef>
-          <a:fontRef idx="minor">
-            <a:schemeClr val="lt1"/>
-          </a:fontRef>
-        </p:style>
-        <p:txBody>
-          <a:bodyPr rtlCol="0" anchor="ctr" wrap="square" tIns="25400" bIns="25400"/>
-          <a:lstStyle/>
-          <a:p>
-            <a:pPr algn="ctr"/>
-            <a:r>
-              <a:rPr sz="1200" b="1">
-                <a:solidFill>
-                  <a:srgbClr val="FFFFFF"/>
-                </a:solidFill>
-                <a:latin typeface="PingFang TC"/>
-                <a:ea typeface="PingFang TC"/>
-              </a:rPr>
-              <a:t>正常  →  ③ 回填 cache</a:t>
-            </a:r>
-          </a:p>
-        </p:txBody>
-      </p:sp>
-      <p:cxnSp>
-        <p:nvCxnSpPr>
-          <p:cNvPr id="17" name="Connector 16"/>
-          <p:cNvCxnSpPr/>
-          <p:nvPr/>
-        </p:nvCxnSpPr>
-        <p:spPr>
-          <a:xfrm>
-            <a:off x="8321040" y="1920240"/>
-            <a:ext cx="365760" cy="2103120"/>
-          </a:xfrm>
-          <a:prstGeom prst="line">
-            <a:avLst/>
-          </a:prstGeom>
-          <a:ln w="15240">
-            <a:solidFill>
-              <a:srgbClr val="64748B"/>
-            </a:solidFill>
-            <a:tailEnd type="triangle" w="med" len="med"/>
-          </a:ln>
-        </p:spPr>
-        <p:style>
-          <a:lnRef idx="2">
-            <a:schemeClr val="accent1"/>
-          </a:lnRef>
-          <a:fillRef idx="0">
-            <a:schemeClr val="accent1"/>
-          </a:fillRef>
-          <a:effectRef idx="1">
-            <a:schemeClr val="accent1"/>
-          </a:effectRef>
-          <a:fontRef idx="minor">
-            <a:schemeClr val="tx1"/>
-          </a:fontRef>
-        </p:style>
-      </p:cxnSp>
-      <p:sp>
-        <p:nvSpPr>
-          <p:cNvPr id="18" name="Rounded Rectangle 17"/>
-          <p:cNvSpPr/>
-          <p:nvPr/>
-        </p:nvSpPr>
-        <p:spPr>
-          <a:xfrm>
-            <a:off x="3017520" y="4480560"/>
-            <a:ext cx="5303520" cy="731520"/>
+            <a:off x="9784080" y="2468880"/>
+            <a:ext cx="1691640" cy="1371600"/>
           </a:xfrm>
           <a:prstGeom prst="roundRect">
             <a:avLst/>
@@ -17133,146 +17837,101 @@
           <a:p>
             <a:pPr algn="ctr"/>
             <a:r>
-              <a:rPr sz="1200" b="1">
+              <a:rPr sz="1300" b="1">
                 <a:solidFill>
                   <a:srgbClr val="FFFFFF"/>
                 </a:solidFill>
                 <a:latin typeface="PingFang TC"/>
                 <a:ea typeface="PingFang TC"/>
               </a:rPr>
-              <a:t>④ 排程非同步記 scan (BackgroundTasks) → 不擋跳轉</a:t>
-            </a:r>
-          </a:p>
-        </p:txBody>
-      </p:sp>
-      <p:sp>
-        <p:nvSpPr>
-          <p:cNvPr id="19" name="Rounded Rectangle 18"/>
-          <p:cNvSpPr/>
-          <p:nvPr/>
-        </p:nvSpPr>
-        <p:spPr>
-          <a:xfrm>
-            <a:off x="3017520" y="5394960"/>
-            <a:ext cx="5303520" cy="731520"/>
-          </a:xfrm>
-          <a:prstGeom prst="roundRect">
-            <a:avLst/>
-          </a:prstGeom>
-          <a:solidFill>
-            <a:srgbClr val="2563EB"/>
-          </a:solidFill>
-          <a:ln>
-            <a:solidFill>
-              <a:srgbClr val="2563EB"/>
-            </a:solidFill>
-          </a:ln>
-          <a:effectLst/>
-        </p:spPr>
-        <p:style>
-          <a:lnRef idx="1">
-            <a:schemeClr val="accent1"/>
-          </a:lnRef>
-          <a:fillRef idx="3">
-            <a:schemeClr val="accent1"/>
-          </a:fillRef>
-          <a:effectRef idx="2">
-            <a:schemeClr val="accent1"/>
-          </a:effectRef>
-          <a:fontRef idx="minor">
-            <a:schemeClr val="lt1"/>
-          </a:fontRef>
-        </p:style>
-        <p:txBody>
-          <a:bodyPr rtlCol="0" anchor="ctr" wrap="square" tIns="25400" bIns="25400"/>
-          <a:lstStyle/>
+              <a:t>⑥ 回應</a:t>
+            </a:r>
+          </a:p>
           <a:p>
             <a:pPr algn="ctr"/>
             <a:r>
-              <a:rPr sz="1300" b="1">
+              <a:rPr sz="1300" b="0">
                 <a:solidFill>
                   <a:srgbClr val="FFFFFF"/>
                 </a:solidFill>
                 <a:latin typeface="PingFang TC"/>
                 <a:ea typeface="PingFang TC"/>
               </a:rPr>
-              <a:t>⑤ 回 302  Location: 原始 URL  → 瀏覽器自動跟隨</a:t>
-            </a:r>
-          </a:p>
-        </p:txBody>
-      </p:sp>
-      <p:cxnSp>
-        <p:nvCxnSpPr>
-          <p:cNvPr id="20" name="Connector 19"/>
-          <p:cNvCxnSpPr/>
-          <p:nvPr/>
-        </p:nvCxnSpPr>
-        <p:spPr>
-          <a:xfrm>
-            <a:off x="4206240" y="3291840"/>
-            <a:ext cx="0" cy="1188720"/>
-          </a:xfrm>
-          <a:prstGeom prst="line">
-            <a:avLst/>
-          </a:prstGeom>
-          <a:ln w="22225">
-            <a:solidFill>
-              <a:srgbClr val="059669"/>
-            </a:solidFill>
-            <a:tailEnd type="triangle" w="med" len="med"/>
-          </a:ln>
-        </p:spPr>
-        <p:style>
-          <a:lnRef idx="2">
-            <a:schemeClr val="accent1"/>
-          </a:lnRef>
-          <a:fillRef idx="0">
-            <a:schemeClr val="accent1"/>
-          </a:fillRef>
-          <a:effectRef idx="1">
-            <a:schemeClr val="accent1"/>
-          </a:effectRef>
-          <a:fontRef idx="minor">
-            <a:schemeClr val="tx1"/>
-          </a:fontRef>
-        </p:style>
-      </p:cxnSp>
-      <p:cxnSp>
-        <p:nvCxnSpPr>
-          <p:cNvPr id="21" name="Connector 20"/>
-          <p:cNvCxnSpPr/>
-          <p:nvPr/>
-        </p:nvCxnSpPr>
-        <p:spPr>
-          <a:xfrm flipH="1">
-            <a:off x="8321040" y="4343400"/>
-            <a:ext cx="1828800" cy="502920"/>
-          </a:xfrm>
-          <a:prstGeom prst="line">
-            <a:avLst/>
-          </a:prstGeom>
-          <a:ln w="15240">
-            <a:solidFill>
-              <a:srgbClr val="059669"/>
-            </a:solidFill>
-            <a:tailEnd type="triangle" w="med" len="med"/>
-          </a:ln>
-        </p:spPr>
-        <p:style>
-          <a:lnRef idx="2">
-            <a:schemeClr val="accent1"/>
-          </a:lnRef>
-          <a:fillRef idx="0">
-            <a:schemeClr val="accent1"/>
-          </a:fillRef>
-          <a:effectRef idx="1">
-            <a:schemeClr val="accent1"/>
-          </a:effectRef>
-          <a:fontRef idx="minor">
-            <a:schemeClr val="tx1"/>
-          </a:fontRef>
-        </p:style>
-      </p:cxnSp>
+              <a:t>token / short_url</a:t>
+            </a:r>
+          </a:p>
+          <a:p>
+            <a:pPr algn="ctr"/>
+            <a:r>
+              <a:rPr sz="1300" b="0">
+                <a:solidFill>
+                  <a:srgbClr val="FFFFFF"/>
+                </a:solidFill>
+                <a:latin typeface="PingFang TC"/>
+                <a:ea typeface="PingFang TC"/>
+              </a:rPr>
+              <a:t>/ qr_code_url</a:t>
+            </a:r>
+          </a:p>
+        </p:txBody>
+      </p:sp>
+      <p:sp>
+        <p:nvSpPr>
+          <p:cNvPr id="15" name="TextBox 14"/>
+          <p:cNvSpPr txBox="1"/>
+          <p:nvPr/>
+        </p:nvSpPr>
+        <p:spPr>
+          <a:xfrm>
+            <a:off x="502920" y="4297680"/>
+            <a:ext cx="10972800" cy="1097280"/>
+          </a:xfrm>
+          <a:prstGeom prst="rect">
+            <a:avLst/>
+          </a:prstGeom>
+          <a:noFill/>
+        </p:spPr>
+        <p:txBody>
+          <a:bodyPr wrap="square" anchor="t">
+            <a:spAutoFit/>
+          </a:bodyPr>
+          <a:lstStyle/>
+          <a:p>
+            <a:pPr algn="l">
+              <a:spcAft>
+                <a:spcPts val="600"/>
+              </a:spcAft>
+            </a:pPr>
+            <a:r>
+              <a:rPr sz="1400" b="1">
+                <a:solidFill>
+                  <a:srgbClr val="0F172A"/>
+                </a:solidFill>
+                <a:latin typeface="PingFang TC"/>
+                <a:ea typeface="PingFang TC"/>
+              </a:rPr>
+              <a:t>關鍵：第 ③ 步「直接插入 + UNIQUE 例外重試」取代 repo 的「先查再插」，消除高並發 race。</a:t>
+            </a:r>
+          </a:p>
+          <a:p>
+            <a:pPr algn="l">
+              <a:spcAft>
+                <a:spcPts val="400"/>
+              </a:spcAft>
+            </a:pPr>
+            <a:r>
+              <a:rPr sz="1300" b="0">
+                <a:solidFill>
+                  <a:srgbClr val="64748B"/>
+                </a:solidFill>
+                <a:latin typeface="PingFang TC"/>
+                <a:ea typeface="PingFang TC"/>
+              </a:rPr>
+              <a:t>token 碰撞在大規模下必然發生，靠 DB UNIQUE + 重試兜底（nonce 只防『同 URL 同 token』，不防碰撞）。</a:t>
+            </a:r>
+          </a:p>
+        </p:txBody>
+      </p:sp>
     </p:spTree>
   </p:cSld>
   <p:clrMapOvr>
@@ -17370,7 +18029,7 @@
                 <a:latin typeface="PingFang TC"/>
                 <a:ea typeface="PingFang TC"/>
               </a:rPr>
-              <a:t>06b · LATENCY</a:t>
+              <a:t>06 · REDIRECT FLOW</a:t>
             </a:r>
           </a:p>
           <a:p>
@@ -17387,7 +18046,7 @@
                 <a:latin typeface="PingFang TC"/>
                 <a:ea typeface="PingFang TC"/>
               </a:rPr>
-              <a:t>redirect &lt; 100ms — 兩層查找 + 索引</a:t>
+              <a:t>掃描 / Redirect 流程（&lt; 100ms 關鍵路徑）</a:t>
             </a:r>
           </a:p>
         </p:txBody>
@@ -17400,8 +18059,8 @@
         </p:nvSpPr>
         <p:spPr>
           <a:xfrm>
-            <a:off x="548640" y="1874519"/>
-            <a:ext cx="2194560" cy="822960"/>
+            <a:off x="548640" y="1554480"/>
+            <a:ext cx="2103120" cy="731520"/>
           </a:xfrm>
           <a:prstGeom prst="roundRect">
             <a:avLst/>
@@ -17436,27 +18095,27 @@
           <a:p>
             <a:pPr algn="ctr"/>
             <a:r>
-              <a:rPr sz="1300" b="1">
+              <a:rPr sz="1200" b="1">
                 <a:solidFill>
                   <a:srgbClr val="FFFFFF"/>
                 </a:solidFill>
                 <a:latin typeface="PingFang TC"/>
                 <a:ea typeface="PingFang TC"/>
               </a:rPr>
-              <a:t>掃描</a:t>
+              <a:t>GET /r/{token}</a:t>
             </a:r>
           </a:p>
           <a:p>
             <a:pPr algn="ctr"/>
             <a:r>
-              <a:rPr sz="1300" b="0">
+              <a:rPr sz="1200" b="0">
                 <a:solidFill>
                   <a:srgbClr val="FFFFFF"/>
                 </a:solidFill>
                 <a:latin typeface="PingFang TC"/>
                 <a:ea typeface="PingFang TC"/>
               </a:rPr>
-              <a:t>GET /r/{token}</a:t>
+              <a:t>掃描者瀏覽器</a:t>
             </a:r>
           </a:p>
         </p:txBody>
@@ -17469,8 +18128,8 @@
         </p:nvSpPr>
         <p:spPr>
           <a:xfrm>
-            <a:off x="3200400" y="1874519"/>
-            <a:ext cx="3063240" cy="822960"/>
+            <a:off x="3017520" y="1554480"/>
+            <a:ext cx="2377440" cy="731520"/>
           </a:xfrm>
           <a:prstGeom prst="roundRect">
             <a:avLst/>
@@ -17512,20 +18171,7 @@
                 <a:latin typeface="PingFang TC"/>
                 <a:ea typeface="PingFang TC"/>
               </a:rPr>
-              <a:t>① Cache (Redis)</a:t>
-            </a:r>
-          </a:p>
-          <a:p>
-            <a:pPr algn="ctr"/>
-            <a:r>
-              <a:rPr sz="1300" b="0">
-                <a:solidFill>
-                  <a:srgbClr val="FFFFFF"/>
-                </a:solidFill>
-                <a:latin typeface="PingFang TC"/>
-                <a:ea typeface="PingFang TC"/>
-              </a:rPr>
-              <a:t>O(1) · &lt;1ms</a:t>
+              <a:t>① 查 Cache (Redis)</a:t>
             </a:r>
           </a:p>
         </p:txBody>
@@ -17538,8 +18184,8 @@
         </p:nvCxnSpPr>
         <p:spPr>
           <a:xfrm>
-            <a:off x="2743200" y="2286000"/>
-            <a:ext cx="457200" cy="0"/>
+            <a:off x="2651760" y="1920240"/>
+            <a:ext cx="365760" cy="0"/>
           </a:xfrm>
           <a:prstGeom prst="line">
             <a:avLst/>
@@ -17574,8 +18220,8 @@
         </p:nvSpPr>
         <p:spPr>
           <a:xfrm>
-            <a:off x="3200400" y="2971800"/>
-            <a:ext cx="3063240" cy="731520"/>
+            <a:off x="3017520" y="2651760"/>
+            <a:ext cx="2377440" cy="640080"/>
           </a:xfrm>
           <a:prstGeom prst="roundRect">
             <a:avLst/>
@@ -17617,57 +18263,21 @@
                 <a:latin typeface="PingFang TC"/>
                 <a:ea typeface="PingFang TC"/>
               </a:rPr>
-              <a:t>命中 → 302 ✅ 不碰 DB</a:t>
-            </a:r>
-          </a:p>
-        </p:txBody>
-      </p:sp>
-      <p:cxnSp>
-        <p:nvCxnSpPr>
-          <p:cNvPr id="8" name="Connector 7"/>
-          <p:cNvCxnSpPr/>
-          <p:nvPr/>
-        </p:nvCxnSpPr>
-        <p:spPr>
-          <a:xfrm>
-            <a:off x="4727448" y="2697480"/>
-            <a:ext cx="0" cy="274320"/>
-          </a:xfrm>
-          <a:prstGeom prst="line">
-            <a:avLst/>
-          </a:prstGeom>
-          <a:ln w="15240">
-            <a:solidFill>
-              <a:srgbClr val="059669"/>
-            </a:solidFill>
-            <a:tailEnd type="triangle" w="med" len="med"/>
-          </a:ln>
-        </p:spPr>
-        <p:style>
-          <a:lnRef idx="2">
-            <a:schemeClr val="accent1"/>
-          </a:lnRef>
-          <a:fillRef idx="0">
-            <a:schemeClr val="accent1"/>
-          </a:fillRef>
-          <a:effectRef idx="1">
-            <a:schemeClr val="accent1"/>
-          </a:effectRef>
-          <a:fontRef idx="minor">
-            <a:schemeClr val="tx1"/>
-          </a:fontRef>
-        </p:style>
-      </p:cxnSp>
-      <p:sp>
-        <p:nvSpPr>
-          <p:cNvPr id="9" name="Rounded Rectangle 8"/>
+              <a:t>命中 + 未過期</a:t>
+            </a:r>
+          </a:p>
+        </p:txBody>
+      </p:sp>
+      <p:sp>
+        <p:nvSpPr>
+          <p:cNvPr id="8" name="Rounded Rectangle 7"/>
           <p:cNvSpPr/>
           <p:nvPr/>
         </p:nvSpPr>
         <p:spPr>
           <a:xfrm>
-            <a:off x="6720840" y="1874519"/>
-            <a:ext cx="4937760" cy="822960"/>
+            <a:off x="5852160" y="1554480"/>
+            <a:ext cx="2468880" cy="731520"/>
           </a:xfrm>
           <a:prstGeom prst="roundRect">
             <a:avLst/>
@@ -17709,7 +18319,7 @@
                 <a:latin typeface="PingFang TC"/>
                 <a:ea typeface="PingFang TC"/>
               </a:rPr>
-              <a:t>② miss → SELECT WHERE token=?</a:t>
+              <a:t>② miss → 查 DB</a:t>
             </a:r>
           </a:p>
           <a:p>
@@ -17722,20 +18332,20 @@
                 <a:latin typeface="PingFang TC"/>
                 <a:ea typeface="PingFang TC"/>
               </a:rPr>
-              <a:t>走 ix_url_mappings_token · O(log n)</a:t>
+              <a:t>(read replica)</a:t>
             </a:r>
           </a:p>
         </p:txBody>
       </p:sp>
       <p:cxnSp>
         <p:nvCxnSpPr>
-          <p:cNvPr id="10" name="Connector 9"/>
+          <p:cNvPr id="9" name="Connector 8"/>
           <p:cNvCxnSpPr/>
           <p:nvPr/>
         </p:nvCxnSpPr>
         <p:spPr>
           <a:xfrm>
-            <a:off x="6263640" y="2286000"/>
+            <a:off x="5394960" y="1920240"/>
             <a:ext cx="457200" cy="0"/>
           </a:xfrm>
           <a:prstGeom prst="line">
@@ -17765,14 +18375,438 @@
       </p:cxnSp>
       <p:sp>
         <p:nvSpPr>
-          <p:cNvPr id="11" name="Rounded Rectangle 10"/>
+          <p:cNvPr id="10" name="Rounded Rectangle 9"/>
           <p:cNvSpPr/>
           <p:nvPr/>
         </p:nvSpPr>
         <p:spPr>
           <a:xfrm>
-            <a:off x="6720840" y="2971800"/>
-            <a:ext cx="4937760" cy="731520"/>
+            <a:off x="8686800" y="1234440"/>
+            <a:ext cx="3017520" cy="640080"/>
+          </a:xfrm>
+          <a:prstGeom prst="roundRect">
+            <a:avLst/>
+          </a:prstGeom>
+          <a:solidFill>
+            <a:srgbClr val="DC2626"/>
+          </a:solidFill>
+          <a:ln>
+            <a:solidFill>
+              <a:srgbClr val="DC2626"/>
+            </a:solidFill>
+          </a:ln>
+          <a:effectLst/>
+        </p:spPr>
+        <p:style>
+          <a:lnRef idx="1">
+            <a:schemeClr val="accent1"/>
+          </a:lnRef>
+          <a:fillRef idx="3">
+            <a:schemeClr val="accent1"/>
+          </a:fillRef>
+          <a:effectRef idx="2">
+            <a:schemeClr val="accent1"/>
+          </a:effectRef>
+          <a:fontRef idx="minor">
+            <a:schemeClr val="lt1"/>
+          </a:fontRef>
+        </p:style>
+        <p:txBody>
+          <a:bodyPr rtlCol="0" anchor="ctr" wrap="square" tIns="25400" bIns="25400"/>
+          <a:lstStyle/>
+          <a:p>
+            <a:pPr algn="ctr"/>
+            <a:r>
+              <a:rPr sz="1200" b="1">
+                <a:solidFill>
+                  <a:srgbClr val="FFFFFF"/>
+                </a:solidFill>
+                <a:latin typeface="PingFang TC"/>
+                <a:ea typeface="PingFang TC"/>
+              </a:rPr>
+              <a:t>找不到  →  404</a:t>
+            </a:r>
+          </a:p>
+        </p:txBody>
+      </p:sp>
+      <p:cxnSp>
+        <p:nvCxnSpPr>
+          <p:cNvPr id="11" name="Connector 10"/>
+          <p:cNvCxnSpPr/>
+          <p:nvPr/>
+        </p:nvCxnSpPr>
+        <p:spPr>
+          <a:xfrm flipV="1">
+            <a:off x="8321040" y="1554480"/>
+            <a:ext cx="365760" cy="365760"/>
+          </a:xfrm>
+          <a:prstGeom prst="line">
+            <a:avLst/>
+          </a:prstGeom>
+          <a:ln w="15240">
+            <a:solidFill>
+              <a:srgbClr val="64748B"/>
+            </a:solidFill>
+            <a:tailEnd type="triangle" w="med" len="med"/>
+          </a:ln>
+        </p:spPr>
+        <p:style>
+          <a:lnRef idx="2">
+            <a:schemeClr val="accent1"/>
+          </a:lnRef>
+          <a:fillRef idx="0">
+            <a:schemeClr val="accent1"/>
+          </a:fillRef>
+          <a:effectRef idx="1">
+            <a:schemeClr val="accent1"/>
+          </a:effectRef>
+          <a:fontRef idx="minor">
+            <a:schemeClr val="tx1"/>
+          </a:fontRef>
+        </p:style>
+      </p:cxnSp>
+      <p:sp>
+        <p:nvSpPr>
+          <p:cNvPr id="12" name="Rounded Rectangle 11"/>
+          <p:cNvSpPr/>
+          <p:nvPr/>
+        </p:nvSpPr>
+        <p:spPr>
+          <a:xfrm>
+            <a:off x="8686800" y="2057400"/>
+            <a:ext cx="3017520" cy="640080"/>
+          </a:xfrm>
+          <a:prstGeom prst="roundRect">
+            <a:avLst/>
+          </a:prstGeom>
+          <a:solidFill>
+            <a:srgbClr val="DC2626"/>
+          </a:solidFill>
+          <a:ln>
+            <a:solidFill>
+              <a:srgbClr val="DC2626"/>
+            </a:solidFill>
+          </a:ln>
+          <a:effectLst/>
+        </p:spPr>
+        <p:style>
+          <a:lnRef idx="1">
+            <a:schemeClr val="accent1"/>
+          </a:lnRef>
+          <a:fillRef idx="3">
+            <a:schemeClr val="accent1"/>
+          </a:fillRef>
+          <a:effectRef idx="2">
+            <a:schemeClr val="accent1"/>
+          </a:effectRef>
+          <a:fontRef idx="minor">
+            <a:schemeClr val="lt1"/>
+          </a:fontRef>
+        </p:style>
+        <p:txBody>
+          <a:bodyPr rtlCol="0" anchor="ctr" wrap="square" tIns="25400" bIns="25400"/>
+          <a:lstStyle/>
+          <a:p>
+            <a:pPr algn="ctr"/>
+            <a:r>
+              <a:rPr sz="1200" b="1">
+                <a:solidFill>
+                  <a:srgbClr val="FFFFFF"/>
+                </a:solidFill>
+                <a:latin typeface="PingFang TC"/>
+                <a:ea typeface="PingFang TC"/>
+              </a:rPr>
+              <a:t>is_deleted  →  410</a:t>
+            </a:r>
+          </a:p>
+        </p:txBody>
+      </p:sp>
+      <p:cxnSp>
+        <p:nvCxnSpPr>
+          <p:cNvPr id="13" name="Connector 12"/>
+          <p:cNvCxnSpPr/>
+          <p:nvPr/>
+        </p:nvCxnSpPr>
+        <p:spPr>
+          <a:xfrm>
+            <a:off x="8321040" y="1920240"/>
+            <a:ext cx="365760" cy="457200"/>
+          </a:xfrm>
+          <a:prstGeom prst="line">
+            <a:avLst/>
+          </a:prstGeom>
+          <a:ln w="15240">
+            <a:solidFill>
+              <a:srgbClr val="64748B"/>
+            </a:solidFill>
+            <a:tailEnd type="triangle" w="med" len="med"/>
+          </a:ln>
+        </p:spPr>
+        <p:style>
+          <a:lnRef idx="2">
+            <a:schemeClr val="accent1"/>
+          </a:lnRef>
+          <a:fillRef idx="0">
+            <a:schemeClr val="accent1"/>
+          </a:fillRef>
+          <a:effectRef idx="1">
+            <a:schemeClr val="accent1"/>
+          </a:effectRef>
+          <a:fontRef idx="minor">
+            <a:schemeClr val="tx1"/>
+          </a:fontRef>
+        </p:style>
+      </p:cxnSp>
+      <p:sp>
+        <p:nvSpPr>
+          <p:cNvPr id="14" name="Rounded Rectangle 13"/>
+          <p:cNvSpPr/>
+          <p:nvPr/>
+        </p:nvSpPr>
+        <p:spPr>
+          <a:xfrm>
+            <a:off x="8686800" y="2880360"/>
+            <a:ext cx="3017520" cy="640080"/>
+          </a:xfrm>
+          <a:prstGeom prst="roundRect">
+            <a:avLst/>
+          </a:prstGeom>
+          <a:solidFill>
+            <a:srgbClr val="DC2626"/>
+          </a:solidFill>
+          <a:ln>
+            <a:solidFill>
+              <a:srgbClr val="DC2626"/>
+            </a:solidFill>
+          </a:ln>
+          <a:effectLst/>
+        </p:spPr>
+        <p:style>
+          <a:lnRef idx="1">
+            <a:schemeClr val="accent1"/>
+          </a:lnRef>
+          <a:fillRef idx="3">
+            <a:schemeClr val="accent1"/>
+          </a:fillRef>
+          <a:effectRef idx="2">
+            <a:schemeClr val="accent1"/>
+          </a:effectRef>
+          <a:fontRef idx="minor">
+            <a:schemeClr val="lt1"/>
+          </a:fontRef>
+        </p:style>
+        <p:txBody>
+          <a:bodyPr rtlCol="0" anchor="ctr" wrap="square" tIns="25400" bIns="25400"/>
+          <a:lstStyle/>
+          <a:p>
+            <a:pPr algn="ctr"/>
+            <a:r>
+              <a:rPr sz="1200" b="1">
+                <a:solidFill>
+                  <a:srgbClr val="FFFFFF"/>
+                </a:solidFill>
+                <a:latin typeface="PingFang TC"/>
+                <a:ea typeface="PingFang TC"/>
+              </a:rPr>
+              <a:t>已過期  →  410</a:t>
+            </a:r>
+          </a:p>
+        </p:txBody>
+      </p:sp>
+      <p:cxnSp>
+        <p:nvCxnSpPr>
+          <p:cNvPr id="15" name="Connector 14"/>
+          <p:cNvCxnSpPr/>
+          <p:nvPr/>
+        </p:nvCxnSpPr>
+        <p:spPr>
+          <a:xfrm>
+            <a:off x="8321040" y="1920240"/>
+            <a:ext cx="365760" cy="1280160"/>
+          </a:xfrm>
+          <a:prstGeom prst="line">
+            <a:avLst/>
+          </a:prstGeom>
+          <a:ln w="15240">
+            <a:solidFill>
+              <a:srgbClr val="64748B"/>
+            </a:solidFill>
+            <a:tailEnd type="triangle" w="med" len="med"/>
+          </a:ln>
+        </p:spPr>
+        <p:style>
+          <a:lnRef idx="2">
+            <a:schemeClr val="accent1"/>
+          </a:lnRef>
+          <a:fillRef idx="0">
+            <a:schemeClr val="accent1"/>
+          </a:fillRef>
+          <a:effectRef idx="1">
+            <a:schemeClr val="accent1"/>
+          </a:effectRef>
+          <a:fontRef idx="minor">
+            <a:schemeClr val="tx1"/>
+          </a:fontRef>
+        </p:style>
+      </p:cxnSp>
+      <p:sp>
+        <p:nvSpPr>
+          <p:cNvPr id="16" name="Rounded Rectangle 15"/>
+          <p:cNvSpPr/>
+          <p:nvPr/>
+        </p:nvSpPr>
+        <p:spPr>
+          <a:xfrm>
+            <a:off x="8686800" y="3703320"/>
+            <a:ext cx="3017520" cy="640080"/>
+          </a:xfrm>
+          <a:prstGeom prst="roundRect">
+            <a:avLst/>
+          </a:prstGeom>
+          <a:solidFill>
+            <a:srgbClr val="059669"/>
+          </a:solidFill>
+          <a:ln>
+            <a:solidFill>
+              <a:srgbClr val="059669"/>
+            </a:solidFill>
+          </a:ln>
+          <a:effectLst/>
+        </p:spPr>
+        <p:style>
+          <a:lnRef idx="1">
+            <a:schemeClr val="accent1"/>
+          </a:lnRef>
+          <a:fillRef idx="3">
+            <a:schemeClr val="accent1"/>
+          </a:fillRef>
+          <a:effectRef idx="2">
+            <a:schemeClr val="accent1"/>
+          </a:effectRef>
+          <a:fontRef idx="minor">
+            <a:schemeClr val="lt1"/>
+          </a:fontRef>
+        </p:style>
+        <p:txBody>
+          <a:bodyPr rtlCol="0" anchor="ctr" wrap="square" tIns="25400" bIns="25400"/>
+          <a:lstStyle/>
+          <a:p>
+            <a:pPr algn="ctr"/>
+            <a:r>
+              <a:rPr sz="1200" b="1">
+                <a:solidFill>
+                  <a:srgbClr val="FFFFFF"/>
+                </a:solidFill>
+                <a:latin typeface="PingFang TC"/>
+                <a:ea typeface="PingFang TC"/>
+              </a:rPr>
+              <a:t>正常  →  ③ 回填 cache</a:t>
+            </a:r>
+          </a:p>
+        </p:txBody>
+      </p:sp>
+      <p:cxnSp>
+        <p:nvCxnSpPr>
+          <p:cNvPr id="17" name="Connector 16"/>
+          <p:cNvCxnSpPr/>
+          <p:nvPr/>
+        </p:nvCxnSpPr>
+        <p:spPr>
+          <a:xfrm>
+            <a:off x="8321040" y="1920240"/>
+            <a:ext cx="365760" cy="2103120"/>
+          </a:xfrm>
+          <a:prstGeom prst="line">
+            <a:avLst/>
+          </a:prstGeom>
+          <a:ln w="15240">
+            <a:solidFill>
+              <a:srgbClr val="64748B"/>
+            </a:solidFill>
+            <a:tailEnd type="triangle" w="med" len="med"/>
+          </a:ln>
+        </p:spPr>
+        <p:style>
+          <a:lnRef idx="2">
+            <a:schemeClr val="accent1"/>
+          </a:lnRef>
+          <a:fillRef idx="0">
+            <a:schemeClr val="accent1"/>
+          </a:fillRef>
+          <a:effectRef idx="1">
+            <a:schemeClr val="accent1"/>
+          </a:effectRef>
+          <a:fontRef idx="minor">
+            <a:schemeClr val="tx1"/>
+          </a:fontRef>
+        </p:style>
+      </p:cxnSp>
+      <p:sp>
+        <p:nvSpPr>
+          <p:cNvPr id="18" name="Rounded Rectangle 17"/>
+          <p:cNvSpPr/>
+          <p:nvPr/>
+        </p:nvSpPr>
+        <p:spPr>
+          <a:xfrm>
+            <a:off x="3017520" y="4480560"/>
+            <a:ext cx="5303520" cy="731520"/>
+          </a:xfrm>
+          <a:prstGeom prst="roundRect">
+            <a:avLst/>
+          </a:prstGeom>
+          <a:solidFill>
+            <a:srgbClr val="D97706"/>
+          </a:solidFill>
+          <a:ln>
+            <a:solidFill>
+              <a:srgbClr val="D97706"/>
+            </a:solidFill>
+          </a:ln>
+          <a:effectLst/>
+        </p:spPr>
+        <p:style>
+          <a:lnRef idx="1">
+            <a:schemeClr val="accent1"/>
+          </a:lnRef>
+          <a:fillRef idx="3">
+            <a:schemeClr val="accent1"/>
+          </a:fillRef>
+          <a:effectRef idx="2">
+            <a:schemeClr val="accent1"/>
+          </a:effectRef>
+          <a:fontRef idx="minor">
+            <a:schemeClr val="lt1"/>
+          </a:fontRef>
+        </p:style>
+        <p:txBody>
+          <a:bodyPr rtlCol="0" anchor="ctr" wrap="square" tIns="25400" bIns="25400"/>
+          <a:lstStyle/>
+          <a:p>
+            <a:pPr algn="ctr"/>
+            <a:r>
+              <a:rPr sz="1200" b="1">
+                <a:solidFill>
+                  <a:srgbClr val="FFFFFF"/>
+                </a:solidFill>
+                <a:latin typeface="PingFang TC"/>
+                <a:ea typeface="PingFang TC"/>
+              </a:rPr>
+              <a:t>④ 排程非同步記 scan (BackgroundTasks) → 不擋跳轉</a:t>
+            </a:r>
+          </a:p>
+        </p:txBody>
+      </p:sp>
+      <p:sp>
+        <p:nvSpPr>
+          <p:cNvPr id="19" name="Rounded Rectangle 18"/>
+          <p:cNvSpPr/>
+          <p:nvPr/>
+        </p:nvSpPr>
+        <p:spPr>
+          <a:xfrm>
+            <a:off x="3017520" y="5394960"/>
+            <a:ext cx="5303520" cy="731520"/>
           </a:xfrm>
           <a:prstGeom prst="roundRect">
             <a:avLst/>
@@ -17807,35 +18841,35 @@
           <a:p>
             <a:pPr algn="ctr"/>
             <a:r>
-              <a:rPr sz="1200" b="1">
+              <a:rPr sz="1300" b="1">
                 <a:solidFill>
                   <a:srgbClr val="FFFFFF"/>
                 </a:solidFill>
                 <a:latin typeface="PingFang TC"/>
                 <a:ea typeface="PingFang TC"/>
               </a:rPr>
-              <a:t>回填 cache → 302</a:t>
+              <a:t>⑤ 回 302  Location: 原始 URL  → 瀏覽器自動跟隨</a:t>
             </a:r>
           </a:p>
         </p:txBody>
       </p:sp>
       <p:cxnSp>
         <p:nvCxnSpPr>
-          <p:cNvPr id="12" name="Connector 11"/>
+          <p:cNvPr id="20" name="Connector 19"/>
           <p:cNvCxnSpPr/>
           <p:nvPr/>
         </p:nvCxnSpPr>
         <p:spPr>
           <a:xfrm>
-            <a:off x="9189720" y="2697480"/>
-            <a:ext cx="0" cy="274320"/>
+            <a:off x="4206240" y="3291840"/>
+            <a:ext cx="0" cy="1188720"/>
           </a:xfrm>
           <a:prstGeom prst="line">
             <a:avLst/>
           </a:prstGeom>
-          <a:ln w="15240">
+          <a:ln w="22225">
             <a:solidFill>
-              <a:srgbClr val="64748B"/>
+              <a:srgbClr val="059669"/>
             </a:solidFill>
             <a:tailEnd type="triangle" w="med" len="med"/>
           </a:ln>
@@ -17855,97 +18889,42 @@
           </a:fontRef>
         </p:style>
       </p:cxnSp>
-      <p:sp>
-        <p:nvSpPr>
-          <p:cNvPr id="13" name="TextBox 12"/>
-          <p:cNvSpPr txBox="1"/>
-          <p:nvPr/>
-        </p:nvSpPr>
-        <p:spPr>
-          <a:xfrm>
-            <a:off x="548640" y="4114800"/>
-            <a:ext cx="11247120" cy="2377440"/>
-          </a:xfrm>
-          <a:prstGeom prst="rect">
-            <a:avLst/>
-          </a:prstGeom>
-          <a:noFill/>
-        </p:spPr>
-        <p:txBody>
-          <a:bodyPr wrap="square">
-            <a:spAutoFit/>
-          </a:bodyPr>
-          <a:lstStyle/>
-          <a:p>
-            <a:pPr>
-              <a:spcAft>
-                <a:spcPts val="800"/>
-              </a:spcAft>
-            </a:pPr>
-            <a:r>
-              <a:rPr sz="1400" b="0">
-                <a:solidFill>
-                  <a:srgbClr val="0F172A"/>
-                </a:solidFill>
-                <a:latin typeface="PingFang TC"/>
-                <a:ea typeface="PingFang TC"/>
-              </a:rPr>
-              <a:t>•  索引對比（查 1 個 token、10 億筆）：無索引 = 全表掃描 O(n)，數秒；有索引 = B-tree O(log n)，次毫秒</a:t>
-            </a:r>
-          </a:p>
-          <a:p>
-            <a:pPr>
-              <a:spcAft>
-                <a:spcPts val="800"/>
-              </a:spcAft>
-            </a:pPr>
-            <a:r>
-              <a:rPr sz="1400" b="0">
-                <a:solidFill>
-                  <a:srgbClr val="0F172A"/>
-                </a:solidFill>
-                <a:latin typeface="PingFang TC"/>
-                <a:ea typeface="PingFang TC"/>
-              </a:rPr>
-              <a:t>•  scan 記錄非同步（BackgroundTasks），不算進這條延遲</a:t>
-            </a:r>
-          </a:p>
-          <a:p>
-            <a:pPr>
-              <a:spcAft>
-                <a:spcPts val="800"/>
-              </a:spcAft>
-            </a:pPr>
-            <a:r>
-              <a:rPr sz="1400" b="0">
-                <a:solidFill>
-                  <a:srgbClr val="0F172A"/>
-                </a:solidFill>
-                <a:latin typeface="PingFang TC"/>
-                <a:ea typeface="PingFang TC"/>
-              </a:rPr>
-              <a:t>•  三道防線：cache 擋多數讀（第 7 題）+ token 索引讓 miss 也快（第 2 題）+ scan 非同步不擋路（第 8 題）</a:t>
-            </a:r>
-          </a:p>
-          <a:p>
-            <a:pPr>
-              <a:spcAft>
-                <a:spcPts val="800"/>
-              </a:spcAft>
-            </a:pPr>
-            <a:r>
-              <a:rPr sz="1400" b="0">
-                <a:solidFill>
-                  <a:srgbClr val="0F172A"/>
-                </a:solidFill>
-                <a:latin typeface="PingFang TC"/>
-                <a:ea typeface="PingFang TC"/>
-              </a:rPr>
-              <a:t>•  正式版再加 read replica 分攤 ~5,800 QPS（第 16 題）</a:t>
-            </a:r>
-          </a:p>
-        </p:txBody>
-      </p:sp>
+      <p:cxnSp>
+        <p:nvCxnSpPr>
+          <p:cNvPr id="21" name="Connector 20"/>
+          <p:cNvCxnSpPr/>
+          <p:nvPr/>
+        </p:nvCxnSpPr>
+        <p:spPr>
+          <a:xfrm flipH="1">
+            <a:off x="8321040" y="4343400"/>
+            <a:ext cx="1828800" cy="502920"/>
+          </a:xfrm>
+          <a:prstGeom prst="line">
+            <a:avLst/>
+          </a:prstGeom>
+          <a:ln w="15240">
+            <a:solidFill>
+              <a:srgbClr val="059669"/>
+            </a:solidFill>
+            <a:tailEnd type="triangle" w="med" len="med"/>
+          </a:ln>
+        </p:spPr>
+        <p:style>
+          <a:lnRef idx="2">
+            <a:schemeClr val="accent1"/>
+          </a:lnRef>
+          <a:fillRef idx="0">
+            <a:schemeClr val="accent1"/>
+          </a:fillRef>
+          <a:effectRef idx="1">
+            <a:schemeClr val="accent1"/>
+          </a:effectRef>
+          <a:fontRef idx="minor">
+            <a:schemeClr val="tx1"/>
+          </a:fontRef>
+        </p:style>
+      </p:cxnSp>
     </p:spTree>
   </p:cSld>
   <p:clrMapOvr>

--- a/QR Code Generator/QR_Code_Generator.pptx
+++ b/QR Code Generator/QR_Code_Generator.pptx
@@ -28,6 +28,8 @@
     <p:sldId id="276" r:id="rId27"/>
     <p:sldId id="277" r:id="rId28"/>
     <p:sldId id="278" r:id="rId29"/>
+    <p:sldId id="279" r:id="rId30"/>
+    <p:sldId id="280" r:id="rId31"/>
   </p:sldIdLst>
   <p:sldSz cx="12191695" cy="6858000" type="screen4x3"/>
   <p:notesSz cx="6858000" cy="9144000"/>
@@ -13067,6 +13069,1957 @@
         <p:spPr>
           <a:xfrm>
             <a:off x="0" y="0"/>
+            <a:ext cx="164592" cy="6858000"/>
+          </a:xfrm>
+          <a:prstGeom prst="rect">
+            <a:avLst/>
+          </a:prstGeom>
+          <a:solidFill>
+            <a:srgbClr val="2563EB"/>
+          </a:solidFill>
+          <a:ln>
+            <a:noFill/>
+          </a:ln>
+          <a:effectLst/>
+        </p:spPr>
+        <p:style>
+          <a:lnRef idx="1">
+            <a:schemeClr val="accent1"/>
+          </a:lnRef>
+          <a:fillRef idx="3">
+            <a:schemeClr val="accent1"/>
+          </a:fillRef>
+          <a:effectRef idx="2">
+            <a:schemeClr val="accent1"/>
+          </a:effectRef>
+          <a:fontRef idx="minor">
+            <a:schemeClr val="lt1"/>
+          </a:fontRef>
+        </p:style>
+        <p:txBody>
+          <a:bodyPr rtlCol="0" anchor="ctr"/>
+          <a:lstStyle/>
+          <a:p>
+            <a:pPr algn="ctr"/>
+          </a:p>
+        </p:txBody>
+      </p:sp>
+      <p:sp>
+        <p:nvSpPr>
+          <p:cNvPr id="3" name="TextBox 2"/>
+          <p:cNvSpPr txBox="1"/>
+          <p:nvPr/>
+        </p:nvSpPr>
+        <p:spPr>
+          <a:xfrm>
+            <a:off x="502920" y="320040"/>
+            <a:ext cx="10972800" cy="1005840"/>
+          </a:xfrm>
+          <a:prstGeom prst="rect">
+            <a:avLst/>
+          </a:prstGeom>
+          <a:noFill/>
+        </p:spPr>
+        <p:txBody>
+          <a:bodyPr wrap="square" anchor="t">
+            <a:spAutoFit/>
+          </a:bodyPr>
+          <a:lstStyle/>
+          <a:p>
+            <a:pPr algn="l">
+              <a:spcAft>
+                <a:spcPts val="200"/>
+              </a:spcAft>
+            </a:pPr>
+            <a:r>
+              <a:rPr sz="1300" b="1">
+                <a:solidFill>
+                  <a:srgbClr val="2563EB"/>
+                </a:solidFill>
+                <a:latin typeface="PingFang TC"/>
+                <a:ea typeface="PingFang TC"/>
+              </a:rPr>
+              <a:t>部署 · AWS</a:t>
+            </a:r>
+          </a:p>
+          <a:p>
+            <a:pPr algn="l">
+              <a:spcAft>
+                <a:spcPts val="400"/>
+              </a:spcAft>
+            </a:pPr>
+            <a:r>
+              <a:rPr sz="3000" b="1">
+                <a:solidFill>
+                  <a:srgbClr val="0F172A"/>
+                </a:solidFill>
+                <a:latin typeface="PingFang TC"/>
+                <a:ea typeface="PingFang TC"/>
+              </a:rPr>
+              <a:t>AWS 部署架構（Terraform，已上線）</a:t>
+            </a:r>
+          </a:p>
+        </p:txBody>
+      </p:sp>
+      <p:sp>
+        <p:nvSpPr>
+          <p:cNvPr id="4" name="Rounded Rectangle 3"/>
+          <p:cNvSpPr/>
+          <p:nvPr/>
+        </p:nvSpPr>
+        <p:spPr>
+          <a:xfrm>
+            <a:off x="457200" y="2468880"/>
+            <a:ext cx="1554480" cy="777240"/>
+          </a:xfrm>
+          <a:prstGeom prst="roundRect">
+            <a:avLst/>
+          </a:prstGeom>
+          <a:solidFill>
+            <a:srgbClr val="64748B"/>
+          </a:solidFill>
+          <a:ln>
+            <a:solidFill>
+              <a:srgbClr val="64748B"/>
+            </a:solidFill>
+          </a:ln>
+          <a:effectLst/>
+        </p:spPr>
+        <p:style>
+          <a:lnRef idx="1">
+            <a:schemeClr val="accent1"/>
+          </a:lnRef>
+          <a:fillRef idx="3">
+            <a:schemeClr val="accent1"/>
+          </a:fillRef>
+          <a:effectRef idx="2">
+            <a:schemeClr val="accent1"/>
+          </a:effectRef>
+          <a:fontRef idx="minor">
+            <a:schemeClr val="lt1"/>
+          </a:fontRef>
+        </p:style>
+        <p:txBody>
+          <a:bodyPr rtlCol="0" anchor="ctr" wrap="square" tIns="25400" bIns="25400"/>
+          <a:lstStyle/>
+          <a:p>
+            <a:pPr algn="ctr"/>
+            <a:r>
+              <a:rPr sz="1300" b="1">
+                <a:solidFill>
+                  <a:srgbClr val="FFFFFF"/>
+                </a:solidFill>
+                <a:latin typeface="PingFang TC"/>
+                <a:ea typeface="PingFang TC"/>
+              </a:rPr>
+              <a:t>Client</a:t>
+            </a:r>
+          </a:p>
+        </p:txBody>
+      </p:sp>
+      <p:sp>
+        <p:nvSpPr>
+          <p:cNvPr id="5" name="Rounded Rectangle 4"/>
+          <p:cNvSpPr/>
+          <p:nvPr/>
+        </p:nvSpPr>
+        <p:spPr>
+          <a:xfrm>
+            <a:off x="2240280" y="2468880"/>
+            <a:ext cx="1828800" cy="777240"/>
+          </a:xfrm>
+          <a:prstGeom prst="roundRect">
+            <a:avLst/>
+          </a:prstGeom>
+          <a:solidFill>
+            <a:srgbClr val="7C3AED"/>
+          </a:solidFill>
+          <a:ln>
+            <a:solidFill>
+              <a:srgbClr val="7C3AED"/>
+            </a:solidFill>
+          </a:ln>
+          <a:effectLst/>
+        </p:spPr>
+        <p:style>
+          <a:lnRef idx="1">
+            <a:schemeClr val="accent1"/>
+          </a:lnRef>
+          <a:fillRef idx="3">
+            <a:schemeClr val="accent1"/>
+          </a:fillRef>
+          <a:effectRef idx="2">
+            <a:schemeClr val="accent1"/>
+          </a:effectRef>
+          <a:fontRef idx="minor">
+            <a:schemeClr val="lt1"/>
+          </a:fontRef>
+        </p:style>
+        <p:txBody>
+          <a:bodyPr rtlCol="0" anchor="ctr" wrap="square" tIns="25400" bIns="25400"/>
+          <a:lstStyle/>
+          <a:p>
+            <a:pPr algn="ctr"/>
+            <a:r>
+              <a:rPr sz="1200" b="1">
+                <a:solidFill>
+                  <a:srgbClr val="FFFFFF"/>
+                </a:solidFill>
+                <a:latin typeface="PingFang TC"/>
+                <a:ea typeface="PingFang TC"/>
+              </a:rPr>
+              <a:t>CloudFront</a:t>
+            </a:r>
+          </a:p>
+          <a:p>
+            <a:pPr algn="ctr"/>
+            <a:r>
+              <a:rPr sz="1200" b="0">
+                <a:solidFill>
+                  <a:srgbClr val="FFFFFF"/>
+                </a:solidFill>
+                <a:latin typeface="PingFang TC"/>
+                <a:ea typeface="PingFang TC"/>
+              </a:rPr>
+              <a:t>(CDN)</a:t>
+            </a:r>
+          </a:p>
+        </p:txBody>
+      </p:sp>
+      <p:sp>
+        <p:nvSpPr>
+          <p:cNvPr id="6" name="Rounded Rectangle 5"/>
+          <p:cNvSpPr/>
+          <p:nvPr/>
+        </p:nvSpPr>
+        <p:spPr>
+          <a:xfrm>
+            <a:off x="2240280" y="1417320"/>
+            <a:ext cx="1828800" cy="640080"/>
+          </a:xfrm>
+          <a:prstGeom prst="roundRect">
+            <a:avLst/>
+          </a:prstGeom>
+          <a:solidFill>
+            <a:srgbClr val="D97706"/>
+          </a:solidFill>
+          <a:ln>
+            <a:solidFill>
+              <a:srgbClr val="D97706"/>
+            </a:solidFill>
+          </a:ln>
+          <a:effectLst/>
+        </p:spPr>
+        <p:style>
+          <a:lnRef idx="1">
+            <a:schemeClr val="accent1"/>
+          </a:lnRef>
+          <a:fillRef idx="3">
+            <a:schemeClr val="accent1"/>
+          </a:fillRef>
+          <a:effectRef idx="2">
+            <a:schemeClr val="accent1"/>
+          </a:effectRef>
+          <a:fontRef idx="minor">
+            <a:schemeClr val="lt1"/>
+          </a:fontRef>
+        </p:style>
+        <p:txBody>
+          <a:bodyPr rtlCol="0" anchor="ctr" wrap="square" tIns="25400" bIns="25400"/>
+          <a:lstStyle/>
+          <a:p>
+            <a:pPr algn="ctr"/>
+            <a:r>
+              <a:rPr sz="1100" b="1">
+                <a:solidFill>
+                  <a:srgbClr val="FFFFFF"/>
+                </a:solidFill>
+                <a:latin typeface="PingFang TC"/>
+                <a:ea typeface="PingFang TC"/>
+              </a:rPr>
+              <a:t>S3 (QR PNG)</a:t>
+            </a:r>
+          </a:p>
+          <a:p>
+            <a:pPr algn="ctr"/>
+            <a:r>
+              <a:rPr sz="1100" b="0">
+                <a:solidFill>
+                  <a:srgbClr val="FFFFFF"/>
+                </a:solidFill>
+                <a:latin typeface="PingFang TC"/>
+                <a:ea typeface="PingFang TC"/>
+              </a:rPr>
+              <a:t>/qr-img/*</a:t>
+            </a:r>
+          </a:p>
+        </p:txBody>
+      </p:sp>
+      <p:sp>
+        <p:nvSpPr>
+          <p:cNvPr id="7" name="Rounded Rectangle 6"/>
+          <p:cNvSpPr/>
+          <p:nvPr/>
+        </p:nvSpPr>
+        <p:spPr>
+          <a:xfrm>
+            <a:off x="4297680" y="2468880"/>
+            <a:ext cx="1828800" cy="777240"/>
+          </a:xfrm>
+          <a:prstGeom prst="roundRect">
+            <a:avLst/>
+          </a:prstGeom>
+          <a:solidFill>
+            <a:srgbClr val="0EA5E9"/>
+          </a:solidFill>
+          <a:ln>
+            <a:solidFill>
+              <a:srgbClr val="0EA5E9"/>
+            </a:solidFill>
+          </a:ln>
+          <a:effectLst/>
+        </p:spPr>
+        <p:style>
+          <a:lnRef idx="1">
+            <a:schemeClr val="accent1"/>
+          </a:lnRef>
+          <a:fillRef idx="3">
+            <a:schemeClr val="accent1"/>
+          </a:fillRef>
+          <a:effectRef idx="2">
+            <a:schemeClr val="accent1"/>
+          </a:effectRef>
+          <a:fontRef idx="minor">
+            <a:schemeClr val="lt1"/>
+          </a:fontRef>
+        </p:style>
+        <p:txBody>
+          <a:bodyPr rtlCol="0" anchor="ctr" wrap="square" tIns="25400" bIns="25400"/>
+          <a:lstStyle/>
+          <a:p>
+            <a:pPr algn="ctr"/>
+            <a:r>
+              <a:rPr sz="1200" b="1">
+                <a:solidFill>
+                  <a:srgbClr val="FFFFFF"/>
+                </a:solidFill>
+                <a:latin typeface="PingFang TC"/>
+                <a:ea typeface="PingFang TC"/>
+              </a:rPr>
+              <a:t>API Gateway</a:t>
+            </a:r>
+          </a:p>
+          <a:p>
+            <a:pPr algn="ctr"/>
+            <a:r>
+              <a:rPr sz="1200" b="0">
+                <a:solidFill>
+                  <a:srgbClr val="FFFFFF"/>
+                </a:solidFill>
+                <a:latin typeface="PingFang TC"/>
+                <a:ea typeface="PingFang TC"/>
+              </a:rPr>
+              <a:t>(HTTP API)</a:t>
+            </a:r>
+          </a:p>
+        </p:txBody>
+      </p:sp>
+      <p:sp>
+        <p:nvSpPr>
+          <p:cNvPr id="8" name="Rounded Rectangle 7"/>
+          <p:cNvSpPr/>
+          <p:nvPr/>
+        </p:nvSpPr>
+        <p:spPr>
+          <a:xfrm>
+            <a:off x="6355080" y="2468880"/>
+            <a:ext cx="1463040" cy="777240"/>
+          </a:xfrm>
+          <a:prstGeom prst="roundRect">
+            <a:avLst/>
+          </a:prstGeom>
+          <a:solidFill>
+            <a:srgbClr val="2563EB"/>
+          </a:solidFill>
+          <a:ln>
+            <a:solidFill>
+              <a:srgbClr val="2563EB"/>
+            </a:solidFill>
+          </a:ln>
+          <a:effectLst/>
+        </p:spPr>
+        <p:style>
+          <a:lnRef idx="1">
+            <a:schemeClr val="accent1"/>
+          </a:lnRef>
+          <a:fillRef idx="3">
+            <a:schemeClr val="accent1"/>
+          </a:fillRef>
+          <a:effectRef idx="2">
+            <a:schemeClr val="accent1"/>
+          </a:effectRef>
+          <a:fontRef idx="minor">
+            <a:schemeClr val="lt1"/>
+          </a:fontRef>
+        </p:style>
+        <p:txBody>
+          <a:bodyPr rtlCol="0" anchor="ctr" wrap="square" tIns="25400" bIns="25400"/>
+          <a:lstStyle/>
+          <a:p>
+            <a:pPr algn="ctr"/>
+            <a:r>
+              <a:rPr sz="1200" b="1">
+                <a:solidFill>
+                  <a:srgbClr val="FFFFFF"/>
+                </a:solidFill>
+                <a:latin typeface="PingFang TC"/>
+                <a:ea typeface="PingFang TC"/>
+              </a:rPr>
+              <a:t>內部 ALB</a:t>
+            </a:r>
+          </a:p>
+          <a:p>
+            <a:pPr algn="ctr"/>
+            <a:r>
+              <a:rPr sz="1200" b="0">
+                <a:solidFill>
+                  <a:srgbClr val="FFFFFF"/>
+                </a:solidFill>
+                <a:latin typeface="PingFang TC"/>
+                <a:ea typeface="PingFang TC"/>
+              </a:rPr>
+              <a:t>/health</a:t>
+            </a:r>
+          </a:p>
+        </p:txBody>
+      </p:sp>
+      <p:sp>
+        <p:nvSpPr>
+          <p:cNvPr id="9" name="Rounded Rectangle 8"/>
+          <p:cNvSpPr/>
+          <p:nvPr/>
+        </p:nvSpPr>
+        <p:spPr>
+          <a:xfrm>
+            <a:off x="8046720" y="2468880"/>
+            <a:ext cx="1920240" cy="868680"/>
+          </a:xfrm>
+          <a:prstGeom prst="roundRect">
+            <a:avLst/>
+          </a:prstGeom>
+          <a:solidFill>
+            <a:srgbClr val="0F172A"/>
+          </a:solidFill>
+          <a:ln>
+            <a:solidFill>
+              <a:srgbClr val="0F172A"/>
+            </a:solidFill>
+          </a:ln>
+          <a:effectLst/>
+        </p:spPr>
+        <p:style>
+          <a:lnRef idx="1">
+            <a:schemeClr val="accent1"/>
+          </a:lnRef>
+          <a:fillRef idx="3">
+            <a:schemeClr val="accent1"/>
+          </a:fillRef>
+          <a:effectRef idx="2">
+            <a:schemeClr val="accent1"/>
+          </a:effectRef>
+          <a:fontRef idx="minor">
+            <a:schemeClr val="lt1"/>
+          </a:fontRef>
+        </p:style>
+        <p:txBody>
+          <a:bodyPr rtlCol="0" anchor="ctr" wrap="square" tIns="25400" bIns="25400"/>
+          <a:lstStyle/>
+          <a:p>
+            <a:pPr algn="ctr"/>
+            <a:r>
+              <a:rPr sz="1200" b="1">
+                <a:solidFill>
+                  <a:srgbClr val="FFFFFF"/>
+                </a:solidFill>
+                <a:latin typeface="PingFang TC"/>
+                <a:ea typeface="PingFang TC"/>
+              </a:rPr>
+              <a:t>EC2 ASG</a:t>
+            </a:r>
+          </a:p>
+          <a:p>
+            <a:pPr algn="ctr"/>
+            <a:r>
+              <a:rPr sz="1200" b="0">
+                <a:solidFill>
+                  <a:srgbClr val="FFFFFF"/>
+                </a:solidFill>
+                <a:latin typeface="PingFang TC"/>
+                <a:ea typeface="PingFang TC"/>
+              </a:rPr>
+              <a:t>Docker/gunicorn</a:t>
+            </a:r>
+          </a:p>
+        </p:txBody>
+      </p:sp>
+      <p:sp>
+        <p:nvSpPr>
+          <p:cNvPr id="10" name="Rounded Rectangle 9"/>
+          <p:cNvSpPr/>
+          <p:nvPr/>
+        </p:nvSpPr>
+        <p:spPr>
+          <a:xfrm>
+            <a:off x="8046720" y="3611880"/>
+            <a:ext cx="1920240" cy="640080"/>
+          </a:xfrm>
+          <a:prstGeom prst="roundRect">
+            <a:avLst/>
+          </a:prstGeom>
+          <a:solidFill>
+            <a:srgbClr val="059669"/>
+          </a:solidFill>
+          <a:ln>
+            <a:solidFill>
+              <a:srgbClr val="059669"/>
+            </a:solidFill>
+          </a:ln>
+          <a:effectLst/>
+        </p:spPr>
+        <p:style>
+          <a:lnRef idx="1">
+            <a:schemeClr val="accent1"/>
+          </a:lnRef>
+          <a:fillRef idx="3">
+            <a:schemeClr val="accent1"/>
+          </a:fillRef>
+          <a:effectRef idx="2">
+            <a:schemeClr val="accent1"/>
+          </a:effectRef>
+          <a:fontRef idx="minor">
+            <a:schemeClr val="lt1"/>
+          </a:fontRef>
+        </p:style>
+        <p:txBody>
+          <a:bodyPr rtlCol="0" anchor="ctr" wrap="square" tIns="25400" bIns="25400"/>
+          <a:lstStyle/>
+          <a:p>
+            <a:pPr algn="ctr"/>
+            <a:r>
+              <a:rPr sz="1100" b="1">
+                <a:solidFill>
+                  <a:srgbClr val="FFFFFF"/>
+                </a:solidFill>
+                <a:latin typeface="PingFang TC"/>
+                <a:ea typeface="PingFang TC"/>
+              </a:rPr>
+              <a:t>RDS PostgreSQL</a:t>
+            </a:r>
+          </a:p>
+        </p:txBody>
+      </p:sp>
+      <p:sp>
+        <p:nvSpPr>
+          <p:cNvPr id="11" name="Rounded Rectangle 10"/>
+          <p:cNvSpPr/>
+          <p:nvPr/>
+        </p:nvSpPr>
+        <p:spPr>
+          <a:xfrm>
+            <a:off x="8046720" y="4389120"/>
+            <a:ext cx="1920240" cy="640080"/>
+          </a:xfrm>
+          <a:prstGeom prst="roundRect">
+            <a:avLst/>
+          </a:prstGeom>
+          <a:solidFill>
+            <a:srgbClr val="DC2626"/>
+          </a:solidFill>
+          <a:ln>
+            <a:solidFill>
+              <a:srgbClr val="DC2626"/>
+            </a:solidFill>
+          </a:ln>
+          <a:effectLst/>
+        </p:spPr>
+        <p:style>
+          <a:lnRef idx="1">
+            <a:schemeClr val="accent1"/>
+          </a:lnRef>
+          <a:fillRef idx="3">
+            <a:schemeClr val="accent1"/>
+          </a:fillRef>
+          <a:effectRef idx="2">
+            <a:schemeClr val="accent1"/>
+          </a:effectRef>
+          <a:fontRef idx="minor">
+            <a:schemeClr val="lt1"/>
+          </a:fontRef>
+        </p:style>
+        <p:txBody>
+          <a:bodyPr rtlCol="0" anchor="ctr" wrap="square" tIns="25400" bIns="25400"/>
+          <a:lstStyle/>
+          <a:p>
+            <a:pPr algn="ctr"/>
+            <a:r>
+              <a:rPr sz="1100" b="1">
+                <a:solidFill>
+                  <a:srgbClr val="FFFFFF"/>
+                </a:solidFill>
+                <a:latin typeface="PingFang TC"/>
+                <a:ea typeface="PingFang TC"/>
+              </a:rPr>
+              <a:t>ElastiCache Redis</a:t>
+            </a:r>
+          </a:p>
+        </p:txBody>
+      </p:sp>
+      <p:cxnSp>
+        <p:nvCxnSpPr>
+          <p:cNvPr id="12" name="Connector 11"/>
+          <p:cNvCxnSpPr/>
+          <p:nvPr/>
+        </p:nvCxnSpPr>
+        <p:spPr>
+          <a:xfrm>
+            <a:off x="2011680" y="2852928"/>
+            <a:ext cx="228600" cy="0"/>
+          </a:xfrm>
+          <a:prstGeom prst="line">
+            <a:avLst/>
+          </a:prstGeom>
+          <a:ln w="22225">
+            <a:solidFill>
+              <a:srgbClr val="64748B"/>
+            </a:solidFill>
+            <a:tailEnd type="triangle" w="med" len="med"/>
+          </a:ln>
+        </p:spPr>
+        <p:style>
+          <a:lnRef idx="2">
+            <a:schemeClr val="accent1"/>
+          </a:lnRef>
+          <a:fillRef idx="0">
+            <a:schemeClr val="accent1"/>
+          </a:fillRef>
+          <a:effectRef idx="1">
+            <a:schemeClr val="accent1"/>
+          </a:effectRef>
+          <a:fontRef idx="minor">
+            <a:schemeClr val="tx1"/>
+          </a:fontRef>
+        </p:style>
+      </p:cxnSp>
+      <p:cxnSp>
+        <p:nvCxnSpPr>
+          <p:cNvPr id="13" name="Connector 12"/>
+          <p:cNvCxnSpPr/>
+          <p:nvPr/>
+        </p:nvCxnSpPr>
+        <p:spPr>
+          <a:xfrm flipV="1">
+            <a:off x="3154680" y="2057400"/>
+            <a:ext cx="0" cy="411480"/>
+          </a:xfrm>
+          <a:prstGeom prst="line">
+            <a:avLst/>
+          </a:prstGeom>
+          <a:ln w="15240">
+            <a:solidFill>
+              <a:srgbClr val="64748B"/>
+            </a:solidFill>
+            <a:tailEnd type="triangle" w="med" len="med"/>
+          </a:ln>
+        </p:spPr>
+        <p:style>
+          <a:lnRef idx="2">
+            <a:schemeClr val="accent1"/>
+          </a:lnRef>
+          <a:fillRef idx="0">
+            <a:schemeClr val="accent1"/>
+          </a:fillRef>
+          <a:effectRef idx="1">
+            <a:schemeClr val="accent1"/>
+          </a:effectRef>
+          <a:fontRef idx="minor">
+            <a:schemeClr val="tx1"/>
+          </a:fontRef>
+        </p:style>
+      </p:cxnSp>
+      <p:cxnSp>
+        <p:nvCxnSpPr>
+          <p:cNvPr id="14" name="Connector 13"/>
+          <p:cNvCxnSpPr/>
+          <p:nvPr/>
+        </p:nvCxnSpPr>
+        <p:spPr>
+          <a:xfrm>
+            <a:off x="4069080" y="2852928"/>
+            <a:ext cx="228600" cy="0"/>
+          </a:xfrm>
+          <a:prstGeom prst="line">
+            <a:avLst/>
+          </a:prstGeom>
+          <a:ln w="22225">
+            <a:solidFill>
+              <a:srgbClr val="64748B"/>
+            </a:solidFill>
+            <a:tailEnd type="triangle" w="med" len="med"/>
+          </a:ln>
+        </p:spPr>
+        <p:style>
+          <a:lnRef idx="2">
+            <a:schemeClr val="accent1"/>
+          </a:lnRef>
+          <a:fillRef idx="0">
+            <a:schemeClr val="accent1"/>
+          </a:fillRef>
+          <a:effectRef idx="1">
+            <a:schemeClr val="accent1"/>
+          </a:effectRef>
+          <a:fontRef idx="minor">
+            <a:schemeClr val="tx1"/>
+          </a:fontRef>
+        </p:style>
+      </p:cxnSp>
+      <p:cxnSp>
+        <p:nvCxnSpPr>
+          <p:cNvPr id="15" name="Connector 14"/>
+          <p:cNvCxnSpPr/>
+          <p:nvPr/>
+        </p:nvCxnSpPr>
+        <p:spPr>
+          <a:xfrm>
+            <a:off x="6126480" y="2852928"/>
+            <a:ext cx="228600" cy="0"/>
+          </a:xfrm>
+          <a:prstGeom prst="line">
+            <a:avLst/>
+          </a:prstGeom>
+          <a:ln w="22225">
+            <a:solidFill>
+              <a:srgbClr val="64748B"/>
+            </a:solidFill>
+            <a:tailEnd type="triangle" w="med" len="med"/>
+          </a:ln>
+        </p:spPr>
+        <p:style>
+          <a:lnRef idx="2">
+            <a:schemeClr val="accent1"/>
+          </a:lnRef>
+          <a:fillRef idx="0">
+            <a:schemeClr val="accent1"/>
+          </a:fillRef>
+          <a:effectRef idx="1">
+            <a:schemeClr val="accent1"/>
+          </a:effectRef>
+          <a:fontRef idx="minor">
+            <a:schemeClr val="tx1"/>
+          </a:fontRef>
+        </p:style>
+      </p:cxnSp>
+      <p:cxnSp>
+        <p:nvCxnSpPr>
+          <p:cNvPr id="16" name="Connector 15"/>
+          <p:cNvCxnSpPr/>
+          <p:nvPr/>
+        </p:nvCxnSpPr>
+        <p:spPr>
+          <a:xfrm>
+            <a:off x="7818120" y="2852928"/>
+            <a:ext cx="228600" cy="0"/>
+          </a:xfrm>
+          <a:prstGeom prst="line">
+            <a:avLst/>
+          </a:prstGeom>
+          <a:ln w="22225">
+            <a:solidFill>
+              <a:srgbClr val="64748B"/>
+            </a:solidFill>
+            <a:tailEnd type="triangle" w="med" len="med"/>
+          </a:ln>
+        </p:spPr>
+        <p:style>
+          <a:lnRef idx="2">
+            <a:schemeClr val="accent1"/>
+          </a:lnRef>
+          <a:fillRef idx="0">
+            <a:schemeClr val="accent1"/>
+          </a:fillRef>
+          <a:effectRef idx="1">
+            <a:schemeClr val="accent1"/>
+          </a:effectRef>
+          <a:fontRef idx="minor">
+            <a:schemeClr val="tx1"/>
+          </a:fontRef>
+        </p:style>
+      </p:cxnSp>
+      <p:cxnSp>
+        <p:nvCxnSpPr>
+          <p:cNvPr id="17" name="Connector 16"/>
+          <p:cNvCxnSpPr/>
+          <p:nvPr/>
+        </p:nvCxnSpPr>
+        <p:spPr>
+          <a:xfrm>
+            <a:off x="9006840" y="3337560"/>
+            <a:ext cx="0" cy="274320"/>
+          </a:xfrm>
+          <a:prstGeom prst="line">
+            <a:avLst/>
+          </a:prstGeom>
+          <a:ln w="15240">
+            <a:solidFill>
+              <a:srgbClr val="64748B"/>
+            </a:solidFill>
+            <a:tailEnd type="triangle" w="med" len="med"/>
+          </a:ln>
+        </p:spPr>
+        <p:style>
+          <a:lnRef idx="2">
+            <a:schemeClr val="accent1"/>
+          </a:lnRef>
+          <a:fillRef idx="0">
+            <a:schemeClr val="accent1"/>
+          </a:fillRef>
+          <a:effectRef idx="1">
+            <a:schemeClr val="accent1"/>
+          </a:effectRef>
+          <a:fontRef idx="minor">
+            <a:schemeClr val="tx1"/>
+          </a:fontRef>
+        </p:style>
+      </p:cxnSp>
+      <p:cxnSp>
+        <p:nvCxnSpPr>
+          <p:cNvPr id="18" name="Connector 17"/>
+          <p:cNvCxnSpPr/>
+          <p:nvPr/>
+        </p:nvCxnSpPr>
+        <p:spPr>
+          <a:xfrm>
+            <a:off x="9006840" y="4251960"/>
+            <a:ext cx="0" cy="137160"/>
+          </a:xfrm>
+          <a:prstGeom prst="line">
+            <a:avLst/>
+          </a:prstGeom>
+          <a:ln w="15240">
+            <a:solidFill>
+              <a:srgbClr val="64748B"/>
+            </a:solidFill>
+            <a:tailEnd type="triangle" w="med" len="med"/>
+          </a:ln>
+        </p:spPr>
+        <p:style>
+          <a:lnRef idx="2">
+            <a:schemeClr val="accent1"/>
+          </a:lnRef>
+          <a:fillRef idx="0">
+            <a:schemeClr val="accent1"/>
+          </a:fillRef>
+          <a:effectRef idx="1">
+            <a:schemeClr val="accent1"/>
+          </a:effectRef>
+          <a:fontRef idx="minor">
+            <a:schemeClr val="tx1"/>
+          </a:fontRef>
+        </p:style>
+      </p:cxnSp>
+      <p:sp>
+        <p:nvSpPr>
+          <p:cNvPr id="19" name="TextBox 18"/>
+          <p:cNvSpPr txBox="1"/>
+          <p:nvPr/>
+        </p:nvSpPr>
+        <p:spPr>
+          <a:xfrm>
+            <a:off x="4297680" y="3310128"/>
+            <a:ext cx="2011680" cy="274320"/>
+          </a:xfrm>
+          <a:prstGeom prst="rect">
+            <a:avLst/>
+          </a:prstGeom>
+          <a:noFill/>
+        </p:spPr>
+        <p:txBody>
+          <a:bodyPr wrap="square" anchor="t">
+            <a:spAutoFit/>
+          </a:bodyPr>
+          <a:lstStyle/>
+          <a:p>
+            <a:pPr algn="l">
+              <a:spcAft>
+                <a:spcPts val="400"/>
+              </a:spcAft>
+            </a:pPr>
+            <a:r>
+              <a:rPr sz="1000" b="0">
+                <a:solidFill>
+                  <a:srgbClr val="64748B"/>
+                </a:solidFill>
+                <a:latin typeface="PingFang TC"/>
+                <a:ea typeface="PingFang TC"/>
+              </a:rPr>
+              <a:t>VPC Link</a:t>
+            </a:r>
+          </a:p>
+        </p:txBody>
+      </p:sp>
+      <p:sp>
+        <p:nvSpPr>
+          <p:cNvPr id="20" name="TextBox 19"/>
+          <p:cNvSpPr txBox="1"/>
+          <p:nvPr/>
+        </p:nvSpPr>
+        <p:spPr>
+          <a:xfrm>
+            <a:off x="457200" y="5212080"/>
+            <a:ext cx="11247120" cy="1280160"/>
+          </a:xfrm>
+          <a:prstGeom prst="rect">
+            <a:avLst/>
+          </a:prstGeom>
+          <a:noFill/>
+        </p:spPr>
+        <p:txBody>
+          <a:bodyPr wrap="square" anchor="t">
+            <a:spAutoFit/>
+          </a:bodyPr>
+          <a:lstStyle/>
+          <a:p>
+            <a:pPr algn="l">
+              <a:spcAft>
+                <a:spcPts val="400"/>
+              </a:spcAft>
+            </a:pPr>
+            <a:r>
+              <a:rPr sz="1300" b="0">
+                <a:solidFill>
+                  <a:srgbClr val="0F172A"/>
+                </a:solidFill>
+                <a:latin typeface="PingFang TC"/>
+                <a:ea typeface="PingFang TC"/>
+              </a:rPr>
+              <a:t>/qr-img/* → S3 長快取;/, /r/*, /api/* → API Gateway,redirect 不快取(第 6 題每次回源)。</a:t>
+            </a:r>
+          </a:p>
+          <a:p>
+            <a:pPr algn="l">
+              <a:spcAft>
+                <a:spcPts val="400"/>
+              </a:spcAft>
+            </a:pPr>
+            <a:r>
+              <a:rPr sz="1200" b="0">
+                <a:solidFill>
+                  <a:srgbClr val="64748B"/>
+                </a:solidFill>
+                <a:latin typeface="PingFang TC"/>
+                <a:ea typeface="PingFang TC"/>
+              </a:rPr>
+              <a:t>設定/密鑰:SSM Parameter Store(DATABASE_URL/REDIS_URL/S3_BUCKET/CDN_BASE/BASE_URL/IMAGE_URI)·Secrets Manager(DB 密碼)·ECR·NAT Gateway。</a:t>
+            </a:r>
+          </a:p>
+        </p:txBody>
+      </p:sp>
+    </p:spTree>
+  </p:cSld>
+  <p:clrMapOvr>
+    <a:masterClrMapping/>
+  </p:clrMapOvr>
+</p:sld>
+</file>
+
+<file path=ppt/slides/slide24.xml><?xml version="1.0" encoding="utf-8"?>
+<p:sld xmlns:a="http://schemas.openxmlformats.org/drawingml/2006/main" xmlns:p="http://schemas.openxmlformats.org/presentationml/2006/main" xmlns:r="http://schemas.openxmlformats.org/officeDocument/2006/relationships">
+  <p:cSld>
+    <p:spTree>
+      <p:nvGrpSpPr>
+        <p:cNvPr id="1" name=""/>
+        <p:cNvGrpSpPr/>
+        <p:nvPr/>
+      </p:nvGrpSpPr>
+      <p:grpSpPr/>
+      <p:sp>
+        <p:nvSpPr>
+          <p:cNvPr id="2" name="Rectangle 1"/>
+          <p:cNvSpPr/>
+          <p:nvPr/>
+        </p:nvSpPr>
+        <p:spPr>
+          <a:xfrm>
+            <a:off x="0" y="0"/>
+            <a:ext cx="164592" cy="6858000"/>
+          </a:xfrm>
+          <a:prstGeom prst="rect">
+            <a:avLst/>
+          </a:prstGeom>
+          <a:solidFill>
+            <a:srgbClr val="2563EB"/>
+          </a:solidFill>
+          <a:ln>
+            <a:noFill/>
+          </a:ln>
+          <a:effectLst/>
+        </p:spPr>
+        <p:style>
+          <a:lnRef idx="1">
+            <a:schemeClr val="accent1"/>
+          </a:lnRef>
+          <a:fillRef idx="3">
+            <a:schemeClr val="accent1"/>
+          </a:fillRef>
+          <a:effectRef idx="2">
+            <a:schemeClr val="accent1"/>
+          </a:effectRef>
+          <a:fontRef idx="minor">
+            <a:schemeClr val="lt1"/>
+          </a:fontRef>
+        </p:style>
+        <p:txBody>
+          <a:bodyPr rtlCol="0" anchor="ctr"/>
+          <a:lstStyle/>
+          <a:p>
+            <a:pPr algn="ctr"/>
+          </a:p>
+        </p:txBody>
+      </p:sp>
+      <p:sp>
+        <p:nvSpPr>
+          <p:cNvPr id="3" name="TextBox 2"/>
+          <p:cNvSpPr txBox="1"/>
+          <p:nvPr/>
+        </p:nvSpPr>
+        <p:spPr>
+          <a:xfrm>
+            <a:off x="502920" y="320040"/>
+            <a:ext cx="10972800" cy="1005840"/>
+          </a:xfrm>
+          <a:prstGeom prst="rect">
+            <a:avLst/>
+          </a:prstGeom>
+          <a:noFill/>
+        </p:spPr>
+        <p:txBody>
+          <a:bodyPr wrap="square" anchor="t">
+            <a:spAutoFit/>
+          </a:bodyPr>
+          <a:lstStyle/>
+          <a:p>
+            <a:pPr algn="l">
+              <a:spcAft>
+                <a:spcPts val="200"/>
+              </a:spcAft>
+            </a:pPr>
+            <a:r>
+              <a:rPr sz="1300" b="1">
+                <a:solidFill>
+                  <a:srgbClr val="2563EB"/>
+                </a:solidFill>
+                <a:latin typeface="PingFang TC"/>
+                <a:ea typeface="PingFang TC"/>
+              </a:rPr>
+              <a:t>部署 · CI/CD</a:t>
+            </a:r>
+          </a:p>
+          <a:p>
+            <a:pPr algn="l">
+              <a:spcAft>
+                <a:spcPts val="400"/>
+              </a:spcAft>
+            </a:pPr>
+            <a:r>
+              <a:rPr sz="3000" b="1">
+                <a:solidFill>
+                  <a:srgbClr val="0F172A"/>
+                </a:solidFill>
+                <a:latin typeface="PingFang TC"/>
+                <a:ea typeface="PingFang TC"/>
+              </a:rPr>
+              <a:t>CI/CD 流程（GitHub Actions + OIDC）</a:t>
+            </a:r>
+          </a:p>
+        </p:txBody>
+      </p:sp>
+      <p:sp>
+        <p:nvSpPr>
+          <p:cNvPr id="4" name="Rounded Rectangle 3"/>
+          <p:cNvSpPr/>
+          <p:nvPr/>
+        </p:nvSpPr>
+        <p:spPr>
+          <a:xfrm>
+            <a:off x="457200" y="2286000"/>
+            <a:ext cx="1481328" cy="1280160"/>
+          </a:xfrm>
+          <a:prstGeom prst="roundRect">
+            <a:avLst/>
+          </a:prstGeom>
+          <a:solidFill>
+            <a:srgbClr val="64748B"/>
+          </a:solidFill>
+          <a:ln>
+            <a:solidFill>
+              <a:srgbClr val="64748B"/>
+            </a:solidFill>
+          </a:ln>
+          <a:effectLst/>
+        </p:spPr>
+        <p:style>
+          <a:lnRef idx="1">
+            <a:schemeClr val="accent1"/>
+          </a:lnRef>
+          <a:fillRef idx="3">
+            <a:schemeClr val="accent1"/>
+          </a:fillRef>
+          <a:effectRef idx="2">
+            <a:schemeClr val="accent1"/>
+          </a:effectRef>
+          <a:fontRef idx="minor">
+            <a:schemeClr val="lt1"/>
+          </a:fontRef>
+        </p:style>
+        <p:txBody>
+          <a:bodyPr rtlCol="0" anchor="ctr" wrap="square" tIns="25400" bIns="25400"/>
+          <a:lstStyle/>
+          <a:p>
+            <a:pPr algn="ctr"/>
+            <a:r>
+              <a:rPr sz="1100" b="1">
+                <a:solidFill>
+                  <a:srgbClr val="FFFFFF"/>
+                </a:solidFill>
+                <a:latin typeface="PingFang TC"/>
+                <a:ea typeface="PingFang TC"/>
+              </a:rPr>
+              <a:t>git push</a:t>
+            </a:r>
+          </a:p>
+          <a:p>
+            <a:pPr algn="ctr"/>
+            <a:r>
+              <a:rPr sz="1100" b="0">
+                <a:solidFill>
+                  <a:srgbClr val="FFFFFF"/>
+                </a:solidFill>
+                <a:latin typeface="PingFang TC"/>
+                <a:ea typeface="PingFang TC"/>
+              </a:rPr>
+              <a:t>QR Code Generator/**</a:t>
+            </a:r>
+          </a:p>
+        </p:txBody>
+      </p:sp>
+      <p:cxnSp>
+        <p:nvCxnSpPr>
+          <p:cNvPr id="5" name="Connector 4"/>
+          <p:cNvCxnSpPr/>
+          <p:nvPr/>
+        </p:nvCxnSpPr>
+        <p:spPr>
+          <a:xfrm>
+            <a:off x="1938528" y="2926080"/>
+            <a:ext cx="118872" cy="0"/>
+          </a:xfrm>
+          <a:prstGeom prst="line">
+            <a:avLst/>
+          </a:prstGeom>
+          <a:ln w="22225">
+            <a:solidFill>
+              <a:srgbClr val="64748B"/>
+            </a:solidFill>
+            <a:tailEnd type="triangle" w="med" len="med"/>
+          </a:ln>
+        </p:spPr>
+        <p:style>
+          <a:lnRef idx="2">
+            <a:schemeClr val="accent1"/>
+          </a:lnRef>
+          <a:fillRef idx="0">
+            <a:schemeClr val="accent1"/>
+          </a:fillRef>
+          <a:effectRef idx="1">
+            <a:schemeClr val="accent1"/>
+          </a:effectRef>
+          <a:fontRef idx="minor">
+            <a:schemeClr val="tx1"/>
+          </a:fontRef>
+        </p:style>
+      </p:cxnSp>
+      <p:sp>
+        <p:nvSpPr>
+          <p:cNvPr id="6" name="Rounded Rectangle 5"/>
+          <p:cNvSpPr/>
+          <p:nvPr/>
+        </p:nvSpPr>
+        <p:spPr>
+          <a:xfrm>
+            <a:off x="2057400" y="2286000"/>
+            <a:ext cx="1481328" cy="1280160"/>
+          </a:xfrm>
+          <a:prstGeom prst="roundRect">
+            <a:avLst/>
+          </a:prstGeom>
+          <a:solidFill>
+            <a:srgbClr val="0EA5E9"/>
+          </a:solidFill>
+          <a:ln>
+            <a:solidFill>
+              <a:srgbClr val="0EA5E9"/>
+            </a:solidFill>
+          </a:ln>
+          <a:effectLst/>
+        </p:spPr>
+        <p:style>
+          <a:lnRef idx="1">
+            <a:schemeClr val="accent1"/>
+          </a:lnRef>
+          <a:fillRef idx="3">
+            <a:schemeClr val="accent1"/>
+          </a:fillRef>
+          <a:effectRef idx="2">
+            <a:schemeClr val="accent1"/>
+          </a:effectRef>
+          <a:fontRef idx="minor">
+            <a:schemeClr val="lt1"/>
+          </a:fontRef>
+        </p:style>
+        <p:txBody>
+          <a:bodyPr rtlCol="0" anchor="ctr" wrap="square" tIns="25400" bIns="25400"/>
+          <a:lstStyle/>
+          <a:p>
+            <a:pPr algn="ctr"/>
+            <a:r>
+              <a:rPr sz="1100" b="1">
+                <a:solidFill>
+                  <a:srgbClr val="FFFFFF"/>
+                </a:solidFill>
+                <a:latin typeface="PingFang TC"/>
+                <a:ea typeface="PingFang TC"/>
+              </a:rPr>
+              <a:t>GitHub Actions</a:t>
+            </a:r>
+          </a:p>
+          <a:p>
+            <a:pPr algn="ctr"/>
+            <a:r>
+              <a:rPr sz="1100" b="0">
+                <a:solidFill>
+                  <a:srgbClr val="FFFFFF"/>
+                </a:solidFill>
+                <a:latin typeface="PingFang TC"/>
+                <a:ea typeface="PingFang TC"/>
+              </a:rPr>
+              <a:t>OIDC assume role</a:t>
+            </a:r>
+          </a:p>
+          <a:p>
+            <a:pPr algn="ctr"/>
+            <a:r>
+              <a:rPr sz="1100" b="0">
+                <a:solidFill>
+                  <a:srgbClr val="FFFFFF"/>
+                </a:solidFill>
+                <a:latin typeface="PingFang TC"/>
+                <a:ea typeface="PingFang TC"/>
+              </a:rPr>
+              <a:t>(無長期金鑰)</a:t>
+            </a:r>
+          </a:p>
+        </p:txBody>
+      </p:sp>
+      <p:cxnSp>
+        <p:nvCxnSpPr>
+          <p:cNvPr id="7" name="Connector 6"/>
+          <p:cNvCxnSpPr/>
+          <p:nvPr/>
+        </p:nvCxnSpPr>
+        <p:spPr>
+          <a:xfrm>
+            <a:off x="3538728" y="2926080"/>
+            <a:ext cx="118872" cy="0"/>
+          </a:xfrm>
+          <a:prstGeom prst="line">
+            <a:avLst/>
+          </a:prstGeom>
+          <a:ln w="22225">
+            <a:solidFill>
+              <a:srgbClr val="64748B"/>
+            </a:solidFill>
+            <a:tailEnd type="triangle" w="med" len="med"/>
+          </a:ln>
+        </p:spPr>
+        <p:style>
+          <a:lnRef idx="2">
+            <a:schemeClr val="accent1"/>
+          </a:lnRef>
+          <a:fillRef idx="0">
+            <a:schemeClr val="accent1"/>
+          </a:fillRef>
+          <a:effectRef idx="1">
+            <a:schemeClr val="accent1"/>
+          </a:effectRef>
+          <a:fontRef idx="minor">
+            <a:schemeClr val="tx1"/>
+          </a:fontRef>
+        </p:style>
+      </p:cxnSp>
+      <p:sp>
+        <p:nvSpPr>
+          <p:cNvPr id="8" name="Rounded Rectangle 7"/>
+          <p:cNvSpPr/>
+          <p:nvPr/>
+        </p:nvSpPr>
+        <p:spPr>
+          <a:xfrm>
+            <a:off x="3657600" y="2286000"/>
+            <a:ext cx="1481328" cy="1280160"/>
+          </a:xfrm>
+          <a:prstGeom prst="roundRect">
+            <a:avLst/>
+          </a:prstGeom>
+          <a:solidFill>
+            <a:srgbClr val="2563EB"/>
+          </a:solidFill>
+          <a:ln>
+            <a:solidFill>
+              <a:srgbClr val="2563EB"/>
+            </a:solidFill>
+          </a:ln>
+          <a:effectLst/>
+        </p:spPr>
+        <p:style>
+          <a:lnRef idx="1">
+            <a:schemeClr val="accent1"/>
+          </a:lnRef>
+          <a:fillRef idx="3">
+            <a:schemeClr val="accent1"/>
+          </a:fillRef>
+          <a:effectRef idx="2">
+            <a:schemeClr val="accent1"/>
+          </a:effectRef>
+          <a:fontRef idx="minor">
+            <a:schemeClr val="lt1"/>
+          </a:fontRef>
+        </p:style>
+        <p:txBody>
+          <a:bodyPr rtlCol="0" anchor="ctr" wrap="square" tIns="25400" bIns="25400"/>
+          <a:lstStyle/>
+          <a:p>
+            <a:pPr algn="ctr"/>
+            <a:r>
+              <a:rPr sz="1100" b="1">
+                <a:solidFill>
+                  <a:srgbClr val="FFFFFF"/>
+                </a:solidFill>
+                <a:latin typeface="PingFang TC"/>
+                <a:ea typeface="PingFang TC"/>
+              </a:rPr>
+              <a:t>buildx</a:t>
+            </a:r>
+          </a:p>
+          <a:p>
+            <a:pPr algn="ctr"/>
+            <a:r>
+              <a:rPr sz="1100" b="0">
+                <a:solidFill>
+                  <a:srgbClr val="FFFFFF"/>
+                </a:solidFill>
+                <a:latin typeface="PingFang TC"/>
+                <a:ea typeface="PingFang TC"/>
+              </a:rPr>
+              <a:t>--platform</a:t>
+            </a:r>
+          </a:p>
+          <a:p>
+            <a:pPr algn="ctr"/>
+            <a:r>
+              <a:rPr sz="1100" b="0">
+                <a:solidFill>
+                  <a:srgbClr val="FFFFFF"/>
+                </a:solidFill>
+                <a:latin typeface="PingFang TC"/>
+                <a:ea typeface="PingFang TC"/>
+              </a:rPr>
+              <a:t>linux/arm64</a:t>
+            </a:r>
+          </a:p>
+        </p:txBody>
+      </p:sp>
+      <p:cxnSp>
+        <p:nvCxnSpPr>
+          <p:cNvPr id="9" name="Connector 8"/>
+          <p:cNvCxnSpPr/>
+          <p:nvPr/>
+        </p:nvCxnSpPr>
+        <p:spPr>
+          <a:xfrm>
+            <a:off x="5138928" y="2926080"/>
+            <a:ext cx="118872" cy="0"/>
+          </a:xfrm>
+          <a:prstGeom prst="line">
+            <a:avLst/>
+          </a:prstGeom>
+          <a:ln w="22225">
+            <a:solidFill>
+              <a:srgbClr val="64748B"/>
+            </a:solidFill>
+            <a:tailEnd type="triangle" w="med" len="med"/>
+          </a:ln>
+        </p:spPr>
+        <p:style>
+          <a:lnRef idx="2">
+            <a:schemeClr val="accent1"/>
+          </a:lnRef>
+          <a:fillRef idx="0">
+            <a:schemeClr val="accent1"/>
+          </a:fillRef>
+          <a:effectRef idx="1">
+            <a:schemeClr val="accent1"/>
+          </a:effectRef>
+          <a:fontRef idx="minor">
+            <a:schemeClr val="tx1"/>
+          </a:fontRef>
+        </p:style>
+      </p:cxnSp>
+      <p:sp>
+        <p:nvSpPr>
+          <p:cNvPr id="10" name="Rounded Rectangle 9"/>
+          <p:cNvSpPr/>
+          <p:nvPr/>
+        </p:nvSpPr>
+        <p:spPr>
+          <a:xfrm>
+            <a:off x="5257800" y="2286000"/>
+            <a:ext cx="1481328" cy="1280160"/>
+          </a:xfrm>
+          <a:prstGeom prst="roundRect">
+            <a:avLst/>
+          </a:prstGeom>
+          <a:solidFill>
+            <a:srgbClr val="059669"/>
+          </a:solidFill>
+          <a:ln>
+            <a:solidFill>
+              <a:srgbClr val="059669"/>
+            </a:solidFill>
+          </a:ln>
+          <a:effectLst/>
+        </p:spPr>
+        <p:style>
+          <a:lnRef idx="1">
+            <a:schemeClr val="accent1"/>
+          </a:lnRef>
+          <a:fillRef idx="3">
+            <a:schemeClr val="accent1"/>
+          </a:fillRef>
+          <a:effectRef idx="2">
+            <a:schemeClr val="accent1"/>
+          </a:effectRef>
+          <a:fontRef idx="minor">
+            <a:schemeClr val="lt1"/>
+          </a:fontRef>
+        </p:style>
+        <p:txBody>
+          <a:bodyPr rtlCol="0" anchor="ctr" wrap="square" tIns="25400" bIns="25400"/>
+          <a:lstStyle/>
+          <a:p>
+            <a:pPr algn="ctr"/>
+            <a:r>
+              <a:rPr sz="1100" b="1">
+                <a:solidFill>
+                  <a:srgbClr val="FFFFFF"/>
+                </a:solidFill>
+                <a:latin typeface="PingFang TC"/>
+                <a:ea typeface="PingFang TC"/>
+              </a:rPr>
+              <a:t>ECR push</a:t>
+            </a:r>
+          </a:p>
+          <a:p>
+            <a:pPr algn="ctr"/>
+            <a:r>
+              <a:rPr sz="1100" b="0">
+                <a:solidFill>
+                  <a:srgbClr val="FFFFFF"/>
+                </a:solidFill>
+                <a:latin typeface="PingFang TC"/>
+                <a:ea typeface="PingFang TC"/>
+              </a:rPr>
+              <a:t>tag = SHA</a:t>
+            </a:r>
+          </a:p>
+          <a:p>
+            <a:pPr algn="ctr"/>
+            <a:r>
+              <a:rPr sz="1100" b="0">
+                <a:solidFill>
+                  <a:srgbClr val="FFFFFF"/>
+                </a:solidFill>
+                <a:latin typeface="PingFang TC"/>
+                <a:ea typeface="PingFang TC"/>
+              </a:rPr>
+              <a:t>+ latest</a:t>
+            </a:r>
+          </a:p>
+        </p:txBody>
+      </p:sp>
+      <p:cxnSp>
+        <p:nvCxnSpPr>
+          <p:cNvPr id="11" name="Connector 10"/>
+          <p:cNvCxnSpPr/>
+          <p:nvPr/>
+        </p:nvCxnSpPr>
+        <p:spPr>
+          <a:xfrm>
+            <a:off x="6739128" y="2926080"/>
+            <a:ext cx="118872" cy="0"/>
+          </a:xfrm>
+          <a:prstGeom prst="line">
+            <a:avLst/>
+          </a:prstGeom>
+          <a:ln w="22225">
+            <a:solidFill>
+              <a:srgbClr val="64748B"/>
+            </a:solidFill>
+            <a:tailEnd type="triangle" w="med" len="med"/>
+          </a:ln>
+        </p:spPr>
+        <p:style>
+          <a:lnRef idx="2">
+            <a:schemeClr val="accent1"/>
+          </a:lnRef>
+          <a:fillRef idx="0">
+            <a:schemeClr val="accent1"/>
+          </a:fillRef>
+          <a:effectRef idx="1">
+            <a:schemeClr val="accent1"/>
+          </a:effectRef>
+          <a:fontRef idx="minor">
+            <a:schemeClr val="tx1"/>
+          </a:fontRef>
+        </p:style>
+      </p:cxnSp>
+      <p:sp>
+        <p:nvSpPr>
+          <p:cNvPr id="12" name="Rounded Rectangle 11"/>
+          <p:cNvSpPr/>
+          <p:nvPr/>
+        </p:nvSpPr>
+        <p:spPr>
+          <a:xfrm>
+            <a:off x="6858000" y="2286000"/>
+            <a:ext cx="1481328" cy="1280160"/>
+          </a:xfrm>
+          <a:prstGeom prst="roundRect">
+            <a:avLst/>
+          </a:prstGeom>
+          <a:solidFill>
+            <a:srgbClr val="7C3AED"/>
+          </a:solidFill>
+          <a:ln>
+            <a:solidFill>
+              <a:srgbClr val="7C3AED"/>
+            </a:solidFill>
+          </a:ln>
+          <a:effectLst/>
+        </p:spPr>
+        <p:style>
+          <a:lnRef idx="1">
+            <a:schemeClr val="accent1"/>
+          </a:lnRef>
+          <a:fillRef idx="3">
+            <a:schemeClr val="accent1"/>
+          </a:fillRef>
+          <a:effectRef idx="2">
+            <a:schemeClr val="accent1"/>
+          </a:effectRef>
+          <a:fontRef idx="minor">
+            <a:schemeClr val="lt1"/>
+          </a:fontRef>
+        </p:style>
+        <p:txBody>
+          <a:bodyPr rtlCol="0" anchor="ctr" wrap="square" tIns="25400" bIns="25400"/>
+          <a:lstStyle/>
+          <a:p>
+            <a:pPr algn="ctr"/>
+            <a:r>
+              <a:rPr sz="1100" b="1">
+                <a:solidFill>
+                  <a:srgbClr val="FFFFFF"/>
+                </a:solidFill>
+                <a:latin typeface="PingFang TC"/>
+                <a:ea typeface="PingFang TC"/>
+              </a:rPr>
+              <a:t>SSM 更新</a:t>
+            </a:r>
+          </a:p>
+          <a:p>
+            <a:pPr algn="ctr"/>
+            <a:r>
+              <a:rPr sz="1100" b="0">
+                <a:solidFill>
+                  <a:srgbClr val="FFFFFF"/>
+                </a:solidFill>
+                <a:latin typeface="PingFang TC"/>
+                <a:ea typeface="PingFang TC"/>
+              </a:rPr>
+              <a:t>/qrcode/</a:t>
+            </a:r>
+          </a:p>
+          <a:p>
+            <a:pPr algn="ctr"/>
+            <a:r>
+              <a:rPr sz="1100" b="0">
+                <a:solidFill>
+                  <a:srgbClr val="FFFFFF"/>
+                </a:solidFill>
+                <a:latin typeface="PingFang TC"/>
+                <a:ea typeface="PingFang TC"/>
+              </a:rPr>
+              <a:t>IMAGE_URI</a:t>
+            </a:r>
+          </a:p>
+        </p:txBody>
+      </p:sp>
+      <p:cxnSp>
+        <p:nvCxnSpPr>
+          <p:cNvPr id="13" name="Connector 12"/>
+          <p:cNvCxnSpPr/>
+          <p:nvPr/>
+        </p:nvCxnSpPr>
+        <p:spPr>
+          <a:xfrm>
+            <a:off x="8339328" y="2926080"/>
+            <a:ext cx="118872" cy="0"/>
+          </a:xfrm>
+          <a:prstGeom prst="line">
+            <a:avLst/>
+          </a:prstGeom>
+          <a:ln w="22225">
+            <a:solidFill>
+              <a:srgbClr val="64748B"/>
+            </a:solidFill>
+            <a:tailEnd type="triangle" w="med" len="med"/>
+          </a:ln>
+        </p:spPr>
+        <p:style>
+          <a:lnRef idx="2">
+            <a:schemeClr val="accent1"/>
+          </a:lnRef>
+          <a:fillRef idx="0">
+            <a:schemeClr val="accent1"/>
+          </a:fillRef>
+          <a:effectRef idx="1">
+            <a:schemeClr val="accent1"/>
+          </a:effectRef>
+          <a:fontRef idx="minor">
+            <a:schemeClr val="tx1"/>
+          </a:fontRef>
+        </p:style>
+      </p:cxnSp>
+      <p:sp>
+        <p:nvSpPr>
+          <p:cNvPr id="14" name="Rounded Rectangle 13"/>
+          <p:cNvSpPr/>
+          <p:nvPr/>
+        </p:nvSpPr>
+        <p:spPr>
+          <a:xfrm>
+            <a:off x="8458200" y="2286000"/>
+            <a:ext cx="1481328" cy="1280160"/>
+          </a:xfrm>
+          <a:prstGeom prst="roundRect">
+            <a:avLst/>
+          </a:prstGeom>
+          <a:solidFill>
+            <a:srgbClr val="D97706"/>
+          </a:solidFill>
+          <a:ln>
+            <a:solidFill>
+              <a:srgbClr val="D97706"/>
+            </a:solidFill>
+          </a:ln>
+          <a:effectLst/>
+        </p:spPr>
+        <p:style>
+          <a:lnRef idx="1">
+            <a:schemeClr val="accent1"/>
+          </a:lnRef>
+          <a:fillRef idx="3">
+            <a:schemeClr val="accent1"/>
+          </a:fillRef>
+          <a:effectRef idx="2">
+            <a:schemeClr val="accent1"/>
+          </a:effectRef>
+          <a:fontRef idx="minor">
+            <a:schemeClr val="lt1"/>
+          </a:fontRef>
+        </p:style>
+        <p:txBody>
+          <a:bodyPr rtlCol="0" anchor="ctr" wrap="square" tIns="25400" bIns="25400"/>
+          <a:lstStyle/>
+          <a:p>
+            <a:pPr algn="ctr"/>
+            <a:r>
+              <a:rPr sz="1100" b="1">
+                <a:solidFill>
+                  <a:srgbClr val="FFFFFF"/>
+                </a:solidFill>
+                <a:latin typeface="PingFang TC"/>
+                <a:ea typeface="PingFang TC"/>
+              </a:rPr>
+              <a:t>SSM 部署</a:t>
+            </a:r>
+          </a:p>
+          <a:p>
+            <a:pPr algn="ctr"/>
+            <a:r>
+              <a:rPr sz="1100" b="0">
+                <a:solidFill>
+                  <a:srgbClr val="FFFFFF"/>
+                </a:solidFill>
+                <a:latin typeface="PingFang TC"/>
+                <a:ea typeface="PingFang TC"/>
+              </a:rPr>
+              <a:t>→ EC2</a:t>
+            </a:r>
+          </a:p>
+          <a:p>
+            <a:pPr algn="ctr"/>
+            <a:r>
+              <a:rPr sz="1100" b="0">
+                <a:solidFill>
+                  <a:srgbClr val="FFFFFF"/>
+                </a:solidFill>
+                <a:latin typeface="PingFang TC"/>
+                <a:ea typeface="PingFang TC"/>
+              </a:rPr>
+              <a:t>deploy-app.sh</a:t>
+            </a:r>
+          </a:p>
+        </p:txBody>
+      </p:sp>
+      <p:cxnSp>
+        <p:nvCxnSpPr>
+          <p:cNvPr id="15" name="Connector 14"/>
+          <p:cNvCxnSpPr/>
+          <p:nvPr/>
+        </p:nvCxnSpPr>
+        <p:spPr>
+          <a:xfrm>
+            <a:off x="9939528" y="2926080"/>
+            <a:ext cx="118872" cy="0"/>
+          </a:xfrm>
+          <a:prstGeom prst="line">
+            <a:avLst/>
+          </a:prstGeom>
+          <a:ln w="22225">
+            <a:solidFill>
+              <a:srgbClr val="64748B"/>
+            </a:solidFill>
+            <a:tailEnd type="triangle" w="med" len="med"/>
+          </a:ln>
+        </p:spPr>
+        <p:style>
+          <a:lnRef idx="2">
+            <a:schemeClr val="accent1"/>
+          </a:lnRef>
+          <a:fillRef idx="0">
+            <a:schemeClr val="accent1"/>
+          </a:fillRef>
+          <a:effectRef idx="1">
+            <a:schemeClr val="accent1"/>
+          </a:effectRef>
+          <a:fontRef idx="minor">
+            <a:schemeClr val="tx1"/>
+          </a:fontRef>
+        </p:style>
+      </p:cxnSp>
+      <p:sp>
+        <p:nvSpPr>
+          <p:cNvPr id="16" name="Rounded Rectangle 15"/>
+          <p:cNvSpPr/>
+          <p:nvPr/>
+        </p:nvSpPr>
+        <p:spPr>
+          <a:xfrm>
+            <a:off x="10058400" y="2286000"/>
+            <a:ext cx="1481328" cy="1280160"/>
+          </a:xfrm>
+          <a:prstGeom prst="roundRect">
+            <a:avLst/>
+          </a:prstGeom>
+          <a:solidFill>
+            <a:srgbClr val="059669"/>
+          </a:solidFill>
+          <a:ln>
+            <a:solidFill>
+              <a:srgbClr val="059669"/>
+            </a:solidFill>
+          </a:ln>
+          <a:effectLst/>
+        </p:spPr>
+        <p:style>
+          <a:lnRef idx="1">
+            <a:schemeClr val="accent1"/>
+          </a:lnRef>
+          <a:fillRef idx="3">
+            <a:schemeClr val="accent1"/>
+          </a:fillRef>
+          <a:effectRef idx="2">
+            <a:schemeClr val="accent1"/>
+          </a:effectRef>
+          <a:fontRef idx="minor">
+            <a:schemeClr val="lt1"/>
+          </a:fontRef>
+        </p:style>
+        <p:txBody>
+          <a:bodyPr rtlCol="0" anchor="ctr" wrap="square" tIns="25400" bIns="25400"/>
+          <a:lstStyle/>
+          <a:p>
+            <a:pPr algn="ctr"/>
+            <a:r>
+              <a:rPr sz="1100" b="1">
+                <a:solidFill>
+                  <a:srgbClr val="FFFFFF"/>
+                </a:solidFill>
+                <a:latin typeface="PingFang TC"/>
+                <a:ea typeface="PingFang TC"/>
+              </a:rPr>
+              <a:t>上線</a:t>
+            </a:r>
+          </a:p>
+          <a:p>
+            <a:pPr algn="ctr"/>
+            <a:r>
+              <a:rPr sz="1100" b="0">
+                <a:solidFill>
+                  <a:srgbClr val="FFFFFF"/>
+                </a:solidFill>
+                <a:latin typeface="PingFang TC"/>
+                <a:ea typeface="PingFang TC"/>
+              </a:rPr>
+              <a:t>ALB /health</a:t>
+            </a:r>
+          </a:p>
+          <a:p>
+            <a:pPr algn="ctr"/>
+            <a:r>
+              <a:rPr sz="1100" b="0">
+                <a:solidFill>
+                  <a:srgbClr val="FFFFFF"/>
+                </a:solidFill>
+                <a:latin typeface="PingFang TC"/>
+                <a:ea typeface="PingFang TC"/>
+              </a:rPr>
+              <a:t>通過</a:t>
+            </a:r>
+          </a:p>
+        </p:txBody>
+      </p:sp>
+      <p:sp>
+        <p:nvSpPr>
+          <p:cNvPr id="17" name="TextBox 16"/>
+          <p:cNvSpPr txBox="1"/>
+          <p:nvPr/>
+        </p:nvSpPr>
+        <p:spPr>
+          <a:xfrm>
+            <a:off x="548640" y="4023360"/>
+            <a:ext cx="11247120" cy="2194560"/>
+          </a:xfrm>
+          <a:prstGeom prst="rect">
+            <a:avLst/>
+          </a:prstGeom>
+          <a:noFill/>
+        </p:spPr>
+        <p:txBody>
+          <a:bodyPr wrap="square">
+            <a:spAutoFit/>
+          </a:bodyPr>
+          <a:lstStyle/>
+          <a:p>
+            <a:pPr>
+              <a:spcAft>
+                <a:spcPts val="900"/>
+              </a:spcAft>
+            </a:pPr>
+            <a:r>
+              <a:rPr sz="1400" b="0">
+                <a:solidFill>
+                  <a:srgbClr val="0F172A"/>
+                </a:solidFill>
+                <a:latin typeface="PingFang TC"/>
+                <a:ea typeface="PingFang TC"/>
+              </a:rPr>
+              <a:t>•  EC2 deploy-app.sh:從 SSM 撈設定 → ECR login → docker pull → docker run(換新容器)</a:t>
+            </a:r>
+          </a:p>
+          <a:p>
+            <a:pPr>
+              <a:spcAft>
+                <a:spcPts val="900"/>
+              </a:spcAft>
+            </a:pPr>
+            <a:r>
+              <a:rPr sz="1400" b="0">
+                <a:solidFill>
+                  <a:srgbClr val="0F172A"/>
+                </a:solidFill>
+                <a:latin typeface="PingFang TC"/>
+                <a:ea typeface="PingFang TC"/>
+              </a:rPr>
+              <a:t>•  全 env-gated:本機無這些環境變數 → 維持 SQLite + 記憶體 cache + 即時生圖,不受影響</a:t>
+            </a:r>
+          </a:p>
+          <a:p>
+            <a:pPr>
+              <a:spcAft>
+                <a:spcPts val="900"/>
+              </a:spcAft>
+            </a:pPr>
+            <a:r>
+              <a:rPr sz="1400" b="0">
+                <a:solidFill>
+                  <a:srgbClr val="0F172A"/>
+                </a:solidFill>
+                <a:latin typeface="PingFang TC"/>
+                <a:ea typeface="PingFang TC"/>
+              </a:rPr>
+              <a:t>•  部署踩到的兩個坑:① EC2 role 少 s3:PutObject(500)② CI build amd64 但 EC2 arm64(502)→ buildx 跨平台修正</a:t>
+            </a:r>
+          </a:p>
+        </p:txBody>
+      </p:sp>
+    </p:spTree>
+  </p:cSld>
+  <p:clrMapOvr>
+    <a:masterClrMapping/>
+  </p:clrMapOvr>
+</p:sld>
+</file>
+
+<file path=ppt/slides/slide25.xml><?xml version="1.0" encoding="utf-8"?>
+<p:sld xmlns:a="http://schemas.openxmlformats.org/drawingml/2006/main" xmlns:p="http://schemas.openxmlformats.org/presentationml/2006/main" xmlns:r="http://schemas.openxmlformats.org/officeDocument/2006/relationships">
+  <p:cSld>
+    <p:spTree>
+      <p:nvGrpSpPr>
+        <p:cNvPr id="1" name=""/>
+        <p:cNvGrpSpPr/>
+        <p:nvPr/>
+      </p:nvGrpSpPr>
+      <p:grpSpPr/>
+      <p:sp>
+        <p:nvSpPr>
+          <p:cNvPr id="2" name="Rectangle 1"/>
+          <p:cNvSpPr/>
+          <p:nvPr/>
+        </p:nvSpPr>
+        <p:spPr>
+          <a:xfrm>
+            <a:off x="0" y="0"/>
             <a:ext cx="12191695" cy="6858000"/>
           </a:xfrm>
           <a:prstGeom prst="rect">

--- a/QR Code Generator/QR_Code_Generator.pptx
+++ b/QR Code Generator/QR_Code_Generator.pptx
@@ -30,6 +30,9 @@
     <p:sldId id="278" r:id="rId29"/>
     <p:sldId id="279" r:id="rId30"/>
     <p:sldId id="280" r:id="rId31"/>
+    <p:sldId id="281" r:id="rId32"/>
+    <p:sldId id="282" r:id="rId33"/>
+    <p:sldId id="283" r:id="rId34"/>
   </p:sldIdLst>
   <p:sldSz cx="12191695" cy="6858000" type="screen4x3"/>
   <p:notesSz cx="6858000" cy="9144000"/>
@@ -12680,13 +12683,13 @@
                           <a:latin typeface="PingFang TC"/>
                           <a:ea typeface="PingFang TC"/>
                         </a:rPr>
-                        <a:t>無</a:t>
+                        <a:t>✅ 已實作</a:t>
                       </a:r>
                     </a:p>
                   </a:txBody>
                   <a:tcPr marT="25400" marB="25400" marL="101600" anchor="ctr">
                     <a:solidFill>
-                      <a:srgbClr val="FEE2E2"/>
+                      <a:srgbClr val="F1F5F9"/>
                     </a:solidFill>
                   </a:tcPr>
                 </a:tc>
@@ -12703,7 +12706,7 @@
                           <a:latin typeface="PingFang TC"/>
                           <a:ea typeface="PingFang TC"/>
                         </a:rPr>
-                        <a:t>端點限流，防 script 灌爆</a:t>
+                        <a:t>WAF per-IP + API GW 節流</a:t>
                       </a:r>
                     </a:p>
                   </a:txBody>
@@ -13281,7 +13284,7 @@
                 <a:latin typeface="PingFang TC"/>
                 <a:ea typeface="PingFang TC"/>
               </a:rPr>
-              <a:t>(CDN)</a:t>
+              <a:t>(CDN + WAF)</a:t>
             </a:r>
           </a:p>
         </p:txBody>
@@ -13419,7 +13422,7 @@
                 <a:latin typeface="PingFang TC"/>
                 <a:ea typeface="PingFang TC"/>
               </a:rPr>
-              <a:t>(HTTP API)</a:t>
+              <a:t>(HTTP API · 節流)</a:t>
             </a:r>
           </a:p>
         </p:txBody>
@@ -14001,7 +14004,7 @@
                 <a:latin typeface="PingFang TC"/>
                 <a:ea typeface="PingFang TC"/>
               </a:rPr>
-              <a:t>/qr-img/* → S3 長快取;/, /r/*, /api/* → API Gateway,redirect 不快取(第 6 題每次回源)。</a:t>
+              <a:t>WAF(per-IP rate limit)掛在 CloudFront 邊緣;/qr-img/* → S3 長快取;/, /r/*, /api/* → API Gateway,redirect 不快取。</a:t>
             </a:r>
           </a:p>
           <a:p>
@@ -14120,7 +14123,7 @@
                 <a:latin typeface="PingFang TC"/>
                 <a:ea typeface="PingFang TC"/>
               </a:rPr>
-              <a:t>部署 · CI/CD</a:t>
+              <a:t>安全 · RATE LIMITING</a:t>
             </a:r>
           </a:p>
           <a:p>
@@ -14137,7 +14140,7 @@
                 <a:latin typeface="PingFang TC"/>
                 <a:ea typeface="PingFang TC"/>
               </a:rPr>
-              <a:t>CI/CD 流程（GitHub Actions + OIDC）</a:t>
+              <a:t>防灌爆：WAF per-IP + API Gateway 節流（縱深）</a:t>
             </a:r>
           </a:p>
         </p:txBody>
@@ -14150,8 +14153,8 @@
         </p:nvSpPr>
         <p:spPr>
           <a:xfrm>
-            <a:off x="457200" y="2286000"/>
-            <a:ext cx="1481328" cy="1280160"/>
+            <a:off x="457200" y="1828800"/>
+            <a:ext cx="1645920" cy="822960"/>
           </a:xfrm>
           <a:prstGeom prst="roundRect">
             <a:avLst/>
@@ -14186,67 +14189,87 @@
           <a:p>
             <a:pPr algn="ctr"/>
             <a:r>
-              <a:rPr sz="1100" b="1">
+              <a:rPr sz="1200" b="1">
                 <a:solidFill>
                   <a:srgbClr val="FFFFFF"/>
                 </a:solidFill>
                 <a:latin typeface="PingFang TC"/>
                 <a:ea typeface="PingFang TC"/>
               </a:rPr>
-              <a:t>git push</a:t>
-            </a:r>
-          </a:p>
-          <a:p>
-            <a:pPr algn="ctr"/>
-            <a:r>
-              <a:rPr sz="1100" b="0">
-                <a:solidFill>
-                  <a:srgbClr val="FFFFFF"/>
-                </a:solidFill>
-                <a:latin typeface="PingFang TC"/>
-                <a:ea typeface="PingFang TC"/>
-              </a:rPr>
-              <a:t>QR Code Generator/**</a:t>
-            </a:r>
-          </a:p>
-        </p:txBody>
-      </p:sp>
-      <p:cxnSp>
-        <p:nvCxnSpPr>
-          <p:cNvPr id="5" name="Connector 4"/>
-          <p:cNvCxnSpPr/>
-          <p:nvPr/>
-        </p:nvCxnSpPr>
-        <p:spPr>
-          <a:xfrm>
-            <a:off x="1938528" y="2926080"/>
-            <a:ext cx="118872" cy="0"/>
-          </a:xfrm>
-          <a:prstGeom prst="line">
-            <a:avLst/>
-          </a:prstGeom>
-          <a:ln w="22225">
+              <a:t>掃描者 / Script</a:t>
+            </a:r>
+          </a:p>
+        </p:txBody>
+      </p:sp>
+      <p:sp>
+        <p:nvSpPr>
+          <p:cNvPr id="5" name="Rounded Rectangle 4"/>
+          <p:cNvSpPr/>
+          <p:nvPr/>
+        </p:nvSpPr>
+        <p:spPr>
+          <a:xfrm>
+            <a:off x="2423160" y="1828800"/>
+            <a:ext cx="2286000" cy="822960"/>
+          </a:xfrm>
+          <a:prstGeom prst="roundRect">
+            <a:avLst/>
+          </a:prstGeom>
+          <a:solidFill>
+            <a:srgbClr val="DC2626"/>
+          </a:solidFill>
+          <a:ln>
             <a:solidFill>
-              <a:srgbClr val="64748B"/>
+              <a:srgbClr val="DC2626"/>
             </a:solidFill>
-            <a:tailEnd type="triangle" w="med" len="med"/>
           </a:ln>
+          <a:effectLst/>
         </p:spPr>
         <p:style>
-          <a:lnRef idx="2">
+          <a:lnRef idx="1">
             <a:schemeClr val="accent1"/>
           </a:lnRef>
-          <a:fillRef idx="0">
+          <a:fillRef idx="3">
             <a:schemeClr val="accent1"/>
           </a:fillRef>
-          <a:effectRef idx="1">
+          <a:effectRef idx="2">
             <a:schemeClr val="accent1"/>
           </a:effectRef>
           <a:fontRef idx="minor">
-            <a:schemeClr val="tx1"/>
+            <a:schemeClr val="lt1"/>
           </a:fontRef>
         </p:style>
-      </p:cxnSp>
+        <p:txBody>
+          <a:bodyPr rtlCol="0" anchor="ctr" wrap="square" tIns="25400" bIns="25400"/>
+          <a:lstStyle/>
+          <a:p>
+            <a:pPr algn="ctr"/>
+            <a:r>
+              <a:rPr sz="1200" b="1">
+                <a:solidFill>
+                  <a:srgbClr val="FFFFFF"/>
+                </a:solidFill>
+                <a:latin typeface="PingFang TC"/>
+                <a:ea typeface="PingFang TC"/>
+              </a:rPr>
+              <a:t>WAF (per-IP)</a:t>
+            </a:r>
+          </a:p>
+          <a:p>
+            <a:pPr algn="ctr"/>
+            <a:r>
+              <a:rPr sz="1200" b="0">
+                <a:solidFill>
+                  <a:srgbClr val="FFFFFF"/>
+                </a:solidFill>
+                <a:latin typeface="PingFang TC"/>
+                <a:ea typeface="PingFang TC"/>
+              </a:rPr>
+              <a:t>超量 → 403</a:t>
+            </a:r>
+          </a:p>
+        </p:txBody>
+      </p:sp>
       <p:sp>
         <p:nvSpPr>
           <p:cNvPr id="6" name="Rounded Rectangle 5"/>
@@ -14255,8 +14278,64 @@
         </p:nvSpPr>
         <p:spPr>
           <a:xfrm>
-            <a:off x="2057400" y="2286000"/>
-            <a:ext cx="1481328" cy="1280160"/>
+            <a:off x="5074920" y="1828800"/>
+            <a:ext cx="1737360" cy="822960"/>
+          </a:xfrm>
+          <a:prstGeom prst="roundRect">
+            <a:avLst/>
+          </a:prstGeom>
+          <a:solidFill>
+            <a:srgbClr val="7C3AED"/>
+          </a:solidFill>
+          <a:ln>
+            <a:solidFill>
+              <a:srgbClr val="7C3AED"/>
+            </a:solidFill>
+          </a:ln>
+          <a:effectLst/>
+        </p:spPr>
+        <p:style>
+          <a:lnRef idx="1">
+            <a:schemeClr val="accent1"/>
+          </a:lnRef>
+          <a:fillRef idx="3">
+            <a:schemeClr val="accent1"/>
+          </a:fillRef>
+          <a:effectRef idx="2">
+            <a:schemeClr val="accent1"/>
+          </a:effectRef>
+          <a:fontRef idx="minor">
+            <a:schemeClr val="lt1"/>
+          </a:fontRef>
+        </p:style>
+        <p:txBody>
+          <a:bodyPr rtlCol="0" anchor="ctr" wrap="square" tIns="25400" bIns="25400"/>
+          <a:lstStyle/>
+          <a:p>
+            <a:pPr algn="ctr"/>
+            <a:r>
+              <a:rPr sz="1200" b="1">
+                <a:solidFill>
+                  <a:srgbClr val="FFFFFF"/>
+                </a:solidFill>
+                <a:latin typeface="PingFang TC"/>
+                <a:ea typeface="PingFang TC"/>
+              </a:rPr>
+              <a:t>CloudFront</a:t>
+            </a:r>
+          </a:p>
+        </p:txBody>
+      </p:sp>
+      <p:sp>
+        <p:nvSpPr>
+          <p:cNvPr id="7" name="Rounded Rectangle 6"/>
+          <p:cNvSpPr/>
+          <p:nvPr/>
+        </p:nvSpPr>
+        <p:spPr>
+          <a:xfrm>
+            <a:off x="7178040" y="1828800"/>
+            <a:ext cx="2468880" cy="822960"/>
           </a:xfrm>
           <a:prstGeom prst="roundRect">
             <a:avLst/>
@@ -14291,80 +14370,31 @@
           <a:p>
             <a:pPr algn="ctr"/>
             <a:r>
-              <a:rPr sz="1100" b="1">
+              <a:rPr sz="1200" b="1">
                 <a:solidFill>
                   <a:srgbClr val="FFFFFF"/>
                 </a:solidFill>
                 <a:latin typeface="PingFang TC"/>
                 <a:ea typeface="PingFang TC"/>
               </a:rPr>
-              <a:t>GitHub Actions</a:t>
+              <a:t>API GW 整體節流</a:t>
             </a:r>
           </a:p>
           <a:p>
             <a:pPr algn="ctr"/>
             <a:r>
-              <a:rPr sz="1100" b="0">
+              <a:rPr sz="1200" b="0">
                 <a:solidFill>
                   <a:srgbClr val="FFFFFF"/>
                 </a:solidFill>
                 <a:latin typeface="PingFang TC"/>
                 <a:ea typeface="PingFang TC"/>
               </a:rPr>
-              <a:t>OIDC assume role</a:t>
-            </a:r>
-          </a:p>
-          <a:p>
-            <a:pPr algn="ctr"/>
-            <a:r>
-              <a:rPr sz="1100" b="0">
-                <a:solidFill>
-                  <a:srgbClr val="FFFFFF"/>
-                </a:solidFill>
-                <a:latin typeface="PingFang TC"/>
-                <a:ea typeface="PingFang TC"/>
-              </a:rPr>
-              <a:t>(無長期金鑰)</a:t>
-            </a:r>
-          </a:p>
-        </p:txBody>
-      </p:sp>
-      <p:cxnSp>
-        <p:nvCxnSpPr>
-          <p:cNvPr id="7" name="Connector 6"/>
-          <p:cNvCxnSpPr/>
-          <p:nvPr/>
-        </p:nvCxnSpPr>
-        <p:spPr>
-          <a:xfrm>
-            <a:off x="3538728" y="2926080"/>
-            <a:ext cx="118872" cy="0"/>
-          </a:xfrm>
-          <a:prstGeom prst="line">
-            <a:avLst/>
-          </a:prstGeom>
-          <a:ln w="22225">
-            <a:solidFill>
-              <a:srgbClr val="64748B"/>
-            </a:solidFill>
-            <a:tailEnd type="triangle" w="med" len="med"/>
-          </a:ln>
-        </p:spPr>
-        <p:style>
-          <a:lnRef idx="2">
-            <a:schemeClr val="accent1"/>
-          </a:lnRef>
-          <a:fillRef idx="0">
-            <a:schemeClr val="accent1"/>
-          </a:fillRef>
-          <a:effectRef idx="1">
-            <a:schemeClr val="accent1"/>
-          </a:effectRef>
-          <a:fontRef idx="minor">
-            <a:schemeClr val="tx1"/>
-          </a:fontRef>
-        </p:style>
-      </p:cxnSp>
+              <a:t>超量 → 429</a:t>
+            </a:r>
+          </a:p>
+        </p:txBody>
+      </p:sp>
       <p:sp>
         <p:nvSpPr>
           <p:cNvPr id="8" name="Rounded Rectangle 7"/>
@@ -14373,8 +14403,8 @@
         </p:nvSpPr>
         <p:spPr>
           <a:xfrm>
-            <a:off x="3657600" y="2286000"/>
-            <a:ext cx="1481328" cy="1280160"/>
+            <a:off x="10012680" y="1828800"/>
+            <a:ext cx="1691640" cy="822960"/>
           </a:xfrm>
           <a:prstGeom prst="roundRect">
             <a:avLst/>
@@ -14416,33 +14446,7 @@
                 <a:latin typeface="PingFang TC"/>
                 <a:ea typeface="PingFang TC"/>
               </a:rPr>
-              <a:t>buildx</a:t>
-            </a:r>
-          </a:p>
-          <a:p>
-            <a:pPr algn="ctr"/>
-            <a:r>
-              <a:rPr sz="1100" b="0">
-                <a:solidFill>
-                  <a:srgbClr val="FFFFFF"/>
-                </a:solidFill>
-                <a:latin typeface="PingFang TC"/>
-                <a:ea typeface="PingFang TC"/>
-              </a:rPr>
-              <a:t>--platform</a:t>
-            </a:r>
-          </a:p>
-          <a:p>
-            <a:pPr algn="ctr"/>
-            <a:r>
-              <a:rPr sz="1100" b="0">
-                <a:solidFill>
-                  <a:srgbClr val="FFFFFF"/>
-                </a:solidFill>
-                <a:latin typeface="PingFang TC"/>
-                <a:ea typeface="PingFang TC"/>
-              </a:rPr>
-              <a:t>linux/arm64</a:t>
+              <a:t>ALB → EC2</a:t>
             </a:r>
           </a:p>
         </p:txBody>
@@ -14455,8 +14459,8 @@
         </p:nvCxnSpPr>
         <p:spPr>
           <a:xfrm>
-            <a:off x="5138928" y="2926080"/>
-            <a:ext cx="118872" cy="0"/>
+            <a:off x="2103120" y="2240280"/>
+            <a:ext cx="320040" cy="0"/>
           </a:xfrm>
           <a:prstGeom prst="line">
             <a:avLst/>
@@ -14483,98 +14487,16 @@
           </a:fontRef>
         </p:style>
       </p:cxnSp>
-      <p:sp>
-        <p:nvSpPr>
-          <p:cNvPr id="10" name="Rounded Rectangle 9"/>
-          <p:cNvSpPr/>
-          <p:nvPr/>
-        </p:nvSpPr>
-        <p:spPr>
-          <a:xfrm>
-            <a:off x="5257800" y="2286000"/>
-            <a:ext cx="1481328" cy="1280160"/>
-          </a:xfrm>
-          <a:prstGeom prst="roundRect">
-            <a:avLst/>
-          </a:prstGeom>
-          <a:solidFill>
-            <a:srgbClr val="059669"/>
-          </a:solidFill>
-          <a:ln>
-            <a:solidFill>
-              <a:srgbClr val="059669"/>
-            </a:solidFill>
-          </a:ln>
-          <a:effectLst/>
-        </p:spPr>
-        <p:style>
-          <a:lnRef idx="1">
-            <a:schemeClr val="accent1"/>
-          </a:lnRef>
-          <a:fillRef idx="3">
-            <a:schemeClr val="accent1"/>
-          </a:fillRef>
-          <a:effectRef idx="2">
-            <a:schemeClr val="accent1"/>
-          </a:effectRef>
-          <a:fontRef idx="minor">
-            <a:schemeClr val="lt1"/>
-          </a:fontRef>
-        </p:style>
-        <p:txBody>
-          <a:bodyPr rtlCol="0" anchor="ctr" wrap="square" tIns="25400" bIns="25400"/>
-          <a:lstStyle/>
-          <a:p>
-            <a:pPr algn="ctr"/>
-            <a:r>
-              <a:rPr sz="1100" b="1">
-                <a:solidFill>
-                  <a:srgbClr val="FFFFFF"/>
-                </a:solidFill>
-                <a:latin typeface="PingFang TC"/>
-                <a:ea typeface="PingFang TC"/>
-              </a:rPr>
-              <a:t>ECR push</a:t>
-            </a:r>
-          </a:p>
-          <a:p>
-            <a:pPr algn="ctr"/>
-            <a:r>
-              <a:rPr sz="1100" b="0">
-                <a:solidFill>
-                  <a:srgbClr val="FFFFFF"/>
-                </a:solidFill>
-                <a:latin typeface="PingFang TC"/>
-                <a:ea typeface="PingFang TC"/>
-              </a:rPr>
-              <a:t>tag = SHA</a:t>
-            </a:r>
-          </a:p>
-          <a:p>
-            <a:pPr algn="ctr"/>
-            <a:r>
-              <a:rPr sz="1100" b="0">
-                <a:solidFill>
-                  <a:srgbClr val="FFFFFF"/>
-                </a:solidFill>
-                <a:latin typeface="PingFang TC"/>
-                <a:ea typeface="PingFang TC"/>
-              </a:rPr>
-              <a:t>+ latest</a:t>
-            </a:r>
-          </a:p>
-        </p:txBody>
-      </p:sp>
       <p:cxnSp>
         <p:nvCxnSpPr>
-          <p:cNvPr id="11" name="Connector 10"/>
+          <p:cNvPr id="10" name="Connector 9"/>
           <p:cNvCxnSpPr/>
           <p:nvPr/>
         </p:nvCxnSpPr>
         <p:spPr>
           <a:xfrm>
-            <a:off x="6739128" y="2926080"/>
-            <a:ext cx="118872" cy="0"/>
+            <a:off x="4709160" y="2240280"/>
+            <a:ext cx="365760" cy="0"/>
           </a:xfrm>
           <a:prstGeom prst="line">
             <a:avLst/>
@@ -14601,98 +14523,16 @@
           </a:fontRef>
         </p:style>
       </p:cxnSp>
-      <p:sp>
-        <p:nvSpPr>
-          <p:cNvPr id="12" name="Rounded Rectangle 11"/>
-          <p:cNvSpPr/>
-          <p:nvPr/>
-        </p:nvSpPr>
-        <p:spPr>
-          <a:xfrm>
-            <a:off x="6858000" y="2286000"/>
-            <a:ext cx="1481328" cy="1280160"/>
-          </a:xfrm>
-          <a:prstGeom prst="roundRect">
-            <a:avLst/>
-          </a:prstGeom>
-          <a:solidFill>
-            <a:srgbClr val="7C3AED"/>
-          </a:solidFill>
-          <a:ln>
-            <a:solidFill>
-              <a:srgbClr val="7C3AED"/>
-            </a:solidFill>
-          </a:ln>
-          <a:effectLst/>
-        </p:spPr>
-        <p:style>
-          <a:lnRef idx="1">
-            <a:schemeClr val="accent1"/>
-          </a:lnRef>
-          <a:fillRef idx="3">
-            <a:schemeClr val="accent1"/>
-          </a:fillRef>
-          <a:effectRef idx="2">
-            <a:schemeClr val="accent1"/>
-          </a:effectRef>
-          <a:fontRef idx="minor">
-            <a:schemeClr val="lt1"/>
-          </a:fontRef>
-        </p:style>
-        <p:txBody>
-          <a:bodyPr rtlCol="0" anchor="ctr" wrap="square" tIns="25400" bIns="25400"/>
-          <a:lstStyle/>
-          <a:p>
-            <a:pPr algn="ctr"/>
-            <a:r>
-              <a:rPr sz="1100" b="1">
-                <a:solidFill>
-                  <a:srgbClr val="FFFFFF"/>
-                </a:solidFill>
-                <a:latin typeface="PingFang TC"/>
-                <a:ea typeface="PingFang TC"/>
-              </a:rPr>
-              <a:t>SSM 更新</a:t>
-            </a:r>
-          </a:p>
-          <a:p>
-            <a:pPr algn="ctr"/>
-            <a:r>
-              <a:rPr sz="1100" b="0">
-                <a:solidFill>
-                  <a:srgbClr val="FFFFFF"/>
-                </a:solidFill>
-                <a:latin typeface="PingFang TC"/>
-                <a:ea typeface="PingFang TC"/>
-              </a:rPr>
-              <a:t>/qrcode/</a:t>
-            </a:r>
-          </a:p>
-          <a:p>
-            <a:pPr algn="ctr"/>
-            <a:r>
-              <a:rPr sz="1100" b="0">
-                <a:solidFill>
-                  <a:srgbClr val="FFFFFF"/>
-                </a:solidFill>
-                <a:latin typeface="PingFang TC"/>
-                <a:ea typeface="PingFang TC"/>
-              </a:rPr>
-              <a:t>IMAGE_URI</a:t>
-            </a:r>
-          </a:p>
-        </p:txBody>
-      </p:sp>
       <p:cxnSp>
         <p:nvCxnSpPr>
-          <p:cNvPr id="13" name="Connector 12"/>
+          <p:cNvPr id="11" name="Connector 10"/>
           <p:cNvCxnSpPr/>
           <p:nvPr/>
         </p:nvCxnSpPr>
         <p:spPr>
           <a:xfrm>
-            <a:off x="8339328" y="2926080"/>
-            <a:ext cx="118872" cy="0"/>
+            <a:off x="6812280" y="2240280"/>
+            <a:ext cx="365760" cy="0"/>
           </a:xfrm>
           <a:prstGeom prst="line">
             <a:avLst/>
@@ -14719,98 +14559,16 @@
           </a:fontRef>
         </p:style>
       </p:cxnSp>
-      <p:sp>
-        <p:nvSpPr>
-          <p:cNvPr id="14" name="Rounded Rectangle 13"/>
-          <p:cNvSpPr/>
-          <p:nvPr/>
-        </p:nvSpPr>
-        <p:spPr>
-          <a:xfrm>
-            <a:off x="8458200" y="2286000"/>
-            <a:ext cx="1481328" cy="1280160"/>
-          </a:xfrm>
-          <a:prstGeom prst="roundRect">
-            <a:avLst/>
-          </a:prstGeom>
-          <a:solidFill>
-            <a:srgbClr val="D97706"/>
-          </a:solidFill>
-          <a:ln>
-            <a:solidFill>
-              <a:srgbClr val="D97706"/>
-            </a:solidFill>
-          </a:ln>
-          <a:effectLst/>
-        </p:spPr>
-        <p:style>
-          <a:lnRef idx="1">
-            <a:schemeClr val="accent1"/>
-          </a:lnRef>
-          <a:fillRef idx="3">
-            <a:schemeClr val="accent1"/>
-          </a:fillRef>
-          <a:effectRef idx="2">
-            <a:schemeClr val="accent1"/>
-          </a:effectRef>
-          <a:fontRef idx="minor">
-            <a:schemeClr val="lt1"/>
-          </a:fontRef>
-        </p:style>
-        <p:txBody>
-          <a:bodyPr rtlCol="0" anchor="ctr" wrap="square" tIns="25400" bIns="25400"/>
-          <a:lstStyle/>
-          <a:p>
-            <a:pPr algn="ctr"/>
-            <a:r>
-              <a:rPr sz="1100" b="1">
-                <a:solidFill>
-                  <a:srgbClr val="FFFFFF"/>
-                </a:solidFill>
-                <a:latin typeface="PingFang TC"/>
-                <a:ea typeface="PingFang TC"/>
-              </a:rPr>
-              <a:t>SSM 部署</a:t>
-            </a:r>
-          </a:p>
-          <a:p>
-            <a:pPr algn="ctr"/>
-            <a:r>
-              <a:rPr sz="1100" b="0">
-                <a:solidFill>
-                  <a:srgbClr val="FFFFFF"/>
-                </a:solidFill>
-                <a:latin typeface="PingFang TC"/>
-                <a:ea typeface="PingFang TC"/>
-              </a:rPr>
-              <a:t>→ EC2</a:t>
-            </a:r>
-          </a:p>
-          <a:p>
-            <a:pPr algn="ctr"/>
-            <a:r>
-              <a:rPr sz="1100" b="0">
-                <a:solidFill>
-                  <a:srgbClr val="FFFFFF"/>
-                </a:solidFill>
-                <a:latin typeface="PingFang TC"/>
-                <a:ea typeface="PingFang TC"/>
-              </a:rPr>
-              <a:t>deploy-app.sh</a:t>
-            </a:r>
-          </a:p>
-        </p:txBody>
-      </p:sp>
       <p:cxnSp>
         <p:nvCxnSpPr>
-          <p:cNvPr id="15" name="Connector 14"/>
+          <p:cNvPr id="12" name="Connector 11"/>
           <p:cNvCxnSpPr/>
           <p:nvPr/>
         </p:nvCxnSpPr>
         <p:spPr>
           <a:xfrm>
-            <a:off x="9939528" y="2926080"/>
-            <a:ext cx="118872" cy="0"/>
+            <a:off x="9646920" y="2240280"/>
+            <a:ext cx="365760" cy="0"/>
           </a:xfrm>
           <a:prstGeom prst="line">
             <a:avLst/>
@@ -14837,98 +14595,420 @@
           </a:fontRef>
         </p:style>
       </p:cxnSp>
-      <p:sp>
-        <p:nvSpPr>
-          <p:cNvPr id="16" name="Rounded Rectangle 15"/>
-          <p:cNvSpPr/>
-          <p:nvPr/>
-        </p:nvSpPr>
-        <p:spPr>
-          <a:xfrm>
-            <a:off x="10058400" y="2286000"/>
-            <a:ext cx="1481328" cy="1280160"/>
-          </a:xfrm>
-          <a:prstGeom prst="roundRect">
-            <a:avLst/>
-          </a:prstGeom>
-          <a:solidFill>
-            <a:srgbClr val="059669"/>
-          </a:solidFill>
-          <a:ln>
-            <a:solidFill>
-              <a:srgbClr val="059669"/>
-            </a:solidFill>
-          </a:ln>
-          <a:effectLst/>
-        </p:spPr>
-        <p:style>
-          <a:lnRef idx="1">
-            <a:schemeClr val="accent1"/>
-          </a:lnRef>
-          <a:fillRef idx="3">
-            <a:schemeClr val="accent1"/>
-          </a:fillRef>
-          <a:effectRef idx="2">
-            <a:schemeClr val="accent1"/>
-          </a:effectRef>
-          <a:fontRef idx="minor">
-            <a:schemeClr val="lt1"/>
-          </a:fontRef>
-        </p:style>
-        <p:txBody>
-          <a:bodyPr rtlCol="0" anchor="ctr" wrap="square" tIns="25400" bIns="25400"/>
-          <a:lstStyle/>
-          <a:p>
-            <a:pPr algn="ctr"/>
-            <a:r>
-              <a:rPr sz="1100" b="1">
-                <a:solidFill>
-                  <a:srgbClr val="FFFFFF"/>
-                </a:solidFill>
-                <a:latin typeface="PingFang TC"/>
-                <a:ea typeface="PingFang TC"/>
-              </a:rPr>
-              <a:t>上線</a:t>
-            </a:r>
-          </a:p>
-          <a:p>
-            <a:pPr algn="ctr"/>
-            <a:r>
-              <a:rPr sz="1100" b="0">
-                <a:solidFill>
-                  <a:srgbClr val="FFFFFF"/>
-                </a:solidFill>
-                <a:latin typeface="PingFang TC"/>
-                <a:ea typeface="PingFang TC"/>
-              </a:rPr>
-              <a:t>ALB /health</a:t>
-            </a:r>
-          </a:p>
-          <a:p>
-            <a:pPr algn="ctr"/>
-            <a:r>
-              <a:rPr sz="1100" b="0">
-                <a:solidFill>
-                  <a:srgbClr val="FFFFFF"/>
-                </a:solidFill>
-                <a:latin typeface="PingFang TC"/>
-                <a:ea typeface="PingFang TC"/>
-              </a:rPr>
-              <a:t>通過</a:t>
-            </a:r>
-          </a:p>
-        </p:txBody>
-      </p:sp>
-      <p:sp>
-        <p:nvSpPr>
-          <p:cNvPr id="17" name="TextBox 16"/>
+      <p:graphicFrame>
+        <p:nvGraphicFramePr>
+          <p:cNvPr id="13" name="Table 12"/>
+          <p:cNvGraphicFramePr>
+            <a:graphicFrameLocks noGrp="1"/>
+          </p:cNvGraphicFramePr>
+          <p:nvPr/>
+        </p:nvGraphicFramePr>
+        <p:xfrm>
+          <a:off x="548640" y="3017520"/>
+          <a:ext cx="11109960" cy="1828800"/>
+        </p:xfrm>
+        <a:graphic>
+          <a:graphicData uri="http://schemas.openxmlformats.org/drawingml/2006/table">
+            <a:tbl>
+              <a:tblPr firstRow="1" bandRow="1">
+                <a:tableStyleId>{5C22544A-7EE6-4342-B048-85BDC9FD1C3A}</a:tableStyleId>
+              </a:tblPr>
+              <a:tblGrid>
+                <a:gridCol w="2743200"/>
+                <a:gridCol w="2743200"/>
+                <a:gridCol w="3794760"/>
+                <a:gridCol w="1828800"/>
+              </a:tblGrid>
+              <a:tr h="457200">
+                <a:tc>
+                  <a:txBody>
+                    <a:bodyPr/>
+                    <a:lstStyle/>
+                    <a:p>
+                      <a:r>
+                        <a:rPr sz="1200" b="1">
+                          <a:solidFill>
+                            <a:srgbClr val="FFFFFF"/>
+                          </a:solidFill>
+                          <a:latin typeface="PingFang TC"/>
+                          <a:ea typeface="PingFang TC"/>
+                        </a:rPr>
+                        <a:t>層</a:t>
+                      </a:r>
+                    </a:p>
+                  </a:txBody>
+                  <a:tcPr marT="25400" marB="25400" marL="101600" anchor="ctr">
+                    <a:solidFill>
+                      <a:srgbClr val="2563EB"/>
+                    </a:solidFill>
+                  </a:tcPr>
+                </a:tc>
+                <a:tc>
+                  <a:txBody>
+                    <a:bodyPr/>
+                    <a:lstStyle/>
+                    <a:p>
+                      <a:r>
+                        <a:rPr sz="1200" b="1">
+                          <a:solidFill>
+                            <a:srgbClr val="FFFFFF"/>
+                          </a:solidFill>
+                          <a:latin typeface="PingFang TC"/>
+                          <a:ea typeface="PingFang TC"/>
+                        </a:rPr>
+                        <a:t>機制</a:t>
+                      </a:r>
+                    </a:p>
+                  </a:txBody>
+                  <a:tcPr marT="25400" marB="25400" marL="101600" anchor="ctr">
+                    <a:solidFill>
+                      <a:srgbClr val="2563EB"/>
+                    </a:solidFill>
+                  </a:tcPr>
+                </a:tc>
+                <a:tc>
+                  <a:txBody>
+                    <a:bodyPr/>
+                    <a:lstStyle/>
+                    <a:p>
+                      <a:r>
+                        <a:rPr sz="1200" b="1">
+                          <a:solidFill>
+                            <a:srgbClr val="FFFFFF"/>
+                          </a:solidFill>
+                          <a:latin typeface="PingFang TC"/>
+                          <a:ea typeface="PingFang TC"/>
+                        </a:rPr>
+                        <a:t>上限</a:t>
+                      </a:r>
+                    </a:p>
+                  </a:txBody>
+                  <a:tcPr marT="25400" marB="25400" marL="101600" anchor="ctr">
+                    <a:solidFill>
+                      <a:srgbClr val="2563EB"/>
+                    </a:solidFill>
+                  </a:tcPr>
+                </a:tc>
+                <a:tc>
+                  <a:txBody>
+                    <a:bodyPr/>
+                    <a:lstStyle/>
+                    <a:p>
+                      <a:r>
+                        <a:rPr sz="1200" b="1">
+                          <a:solidFill>
+                            <a:srgbClr val="FFFFFF"/>
+                          </a:solidFill>
+                          <a:latin typeface="PingFang TC"/>
+                          <a:ea typeface="PingFang TC"/>
+                        </a:rPr>
+                        <a:t>超量</a:t>
+                      </a:r>
+                    </a:p>
+                  </a:txBody>
+                  <a:tcPr marT="25400" marB="25400" marL="101600" anchor="ctr">
+                    <a:solidFill>
+                      <a:srgbClr val="2563EB"/>
+                    </a:solidFill>
+                  </a:tcPr>
+                </a:tc>
+              </a:tr>
+              <a:tr h="457200">
+                <a:tc>
+                  <a:txBody>
+                    <a:bodyPr/>
+                    <a:lstStyle/>
+                    <a:p>
+                      <a:r>
+                        <a:rPr sz="1200" b="1">
+                          <a:solidFill>
+                            <a:srgbClr val="0F172A"/>
+                          </a:solidFill>
+                          <a:latin typeface="PingFang TC"/>
+                          <a:ea typeface="PingFang TC"/>
+                        </a:rPr>
+                        <a:t>CloudFront WAF</a:t>
+                      </a:r>
+                    </a:p>
+                  </a:txBody>
+                  <a:tcPr marT="25400" marB="25400" marL="101600" anchor="ctr">
+                    <a:solidFill>
+                      <a:srgbClr val="FFFFFF"/>
+                    </a:solidFill>
+                  </a:tcPr>
+                </a:tc>
+                <a:tc>
+                  <a:txBody>
+                    <a:bodyPr/>
+                    <a:lstStyle/>
+                    <a:p>
+                      <a:r>
+                        <a:rPr sz="1200" b="0">
+                          <a:solidFill>
+                            <a:srgbClr val="0F172A"/>
+                          </a:solidFill>
+                          <a:latin typeface="PingFang TC"/>
+                          <a:ea typeface="PingFang TC"/>
+                        </a:rPr>
+                        <a:t>per-IP · /api/*</a:t>
+                      </a:r>
+                    </a:p>
+                  </a:txBody>
+                  <a:tcPr marT="25400" marB="25400" marL="101600" anchor="ctr">
+                    <a:solidFill>
+                      <a:srgbClr val="FFFFFF"/>
+                    </a:solidFill>
+                  </a:tcPr>
+                </a:tc>
+                <a:tc>
+                  <a:txBody>
+                    <a:bodyPr/>
+                    <a:lstStyle/>
+                    <a:p>
+                      <a:r>
+                        <a:rPr sz="1200" b="0">
+                          <a:solidFill>
+                            <a:srgbClr val="0F172A"/>
+                          </a:solidFill>
+                          <a:latin typeface="PingFang TC"/>
+                          <a:ea typeface="PingFang TC"/>
+                        </a:rPr>
+                        <a:t>300 / 5 分 / IP</a:t>
+                      </a:r>
+                    </a:p>
+                  </a:txBody>
+                  <a:tcPr marT="25400" marB="25400" marL="101600" anchor="ctr">
+                    <a:solidFill>
+                      <a:srgbClr val="FFFFFF"/>
+                    </a:solidFill>
+                  </a:tcPr>
+                </a:tc>
+                <a:tc>
+                  <a:txBody>
+                    <a:bodyPr/>
+                    <a:lstStyle/>
+                    <a:p>
+                      <a:r>
+                        <a:rPr sz="1200" b="0">
+                          <a:solidFill>
+                            <a:srgbClr val="0F172A"/>
+                          </a:solidFill>
+                          <a:latin typeface="PingFang TC"/>
+                          <a:ea typeface="PingFang TC"/>
+                        </a:rPr>
+                        <a:t>403</a:t>
+                      </a:r>
+                    </a:p>
+                  </a:txBody>
+                  <a:tcPr marT="25400" marB="25400" marL="101600" anchor="ctr">
+                    <a:solidFill>
+                      <a:srgbClr val="FFFFFF"/>
+                    </a:solidFill>
+                  </a:tcPr>
+                </a:tc>
+              </a:tr>
+              <a:tr h="457200">
+                <a:tc>
+                  <a:txBody>
+                    <a:bodyPr/>
+                    <a:lstStyle/>
+                    <a:p>
+                      <a:r>
+                        <a:rPr sz="1200" b="1">
+                          <a:solidFill>
+                            <a:srgbClr val="0F172A"/>
+                          </a:solidFill>
+                          <a:latin typeface="PingFang TC"/>
+                          <a:ea typeface="PingFang TC"/>
+                        </a:rPr>
+                        <a:t>CloudFront WAF</a:t>
+                      </a:r>
+                    </a:p>
+                  </a:txBody>
+                  <a:tcPr marT="25400" marB="25400" marL="101600" anchor="ctr">
+                    <a:solidFill>
+                      <a:srgbClr val="F1F5F9"/>
+                    </a:solidFill>
+                  </a:tcPr>
+                </a:tc>
+                <a:tc>
+                  <a:txBody>
+                    <a:bodyPr/>
+                    <a:lstStyle/>
+                    <a:p>
+                      <a:r>
+                        <a:rPr sz="1200" b="0">
+                          <a:solidFill>
+                            <a:srgbClr val="0F172A"/>
+                          </a:solidFill>
+                          <a:latin typeface="PingFang TC"/>
+                          <a:ea typeface="PingFang TC"/>
+                        </a:rPr>
+                        <a:t>per-IP · 全域</a:t>
+                      </a:r>
+                    </a:p>
+                  </a:txBody>
+                  <a:tcPr marT="25400" marB="25400" marL="101600" anchor="ctr">
+                    <a:solidFill>
+                      <a:srgbClr val="F1F5F9"/>
+                    </a:solidFill>
+                  </a:tcPr>
+                </a:tc>
+                <a:tc>
+                  <a:txBody>
+                    <a:bodyPr/>
+                    <a:lstStyle/>
+                    <a:p>
+                      <a:r>
+                        <a:rPr sz="1200" b="0">
+                          <a:solidFill>
+                            <a:srgbClr val="0F172A"/>
+                          </a:solidFill>
+                          <a:latin typeface="PingFang TC"/>
+                          <a:ea typeface="PingFang TC"/>
+                        </a:rPr>
+                        <a:t>2000 / 5 分 / IP</a:t>
+                      </a:r>
+                    </a:p>
+                  </a:txBody>
+                  <a:tcPr marT="25400" marB="25400" marL="101600" anchor="ctr">
+                    <a:solidFill>
+                      <a:srgbClr val="F1F5F9"/>
+                    </a:solidFill>
+                  </a:tcPr>
+                </a:tc>
+                <a:tc>
+                  <a:txBody>
+                    <a:bodyPr/>
+                    <a:lstStyle/>
+                    <a:p>
+                      <a:r>
+                        <a:rPr sz="1200" b="0">
+                          <a:solidFill>
+                            <a:srgbClr val="0F172A"/>
+                          </a:solidFill>
+                          <a:latin typeface="PingFang TC"/>
+                          <a:ea typeface="PingFang TC"/>
+                        </a:rPr>
+                        <a:t>403</a:t>
+                      </a:r>
+                    </a:p>
+                  </a:txBody>
+                  <a:tcPr marT="25400" marB="25400" marL="101600" anchor="ctr">
+                    <a:solidFill>
+                      <a:srgbClr val="F1F5F9"/>
+                    </a:solidFill>
+                  </a:tcPr>
+                </a:tc>
+              </a:tr>
+              <a:tr h="457200">
+                <a:tc>
+                  <a:txBody>
+                    <a:bodyPr/>
+                    <a:lstStyle/>
+                    <a:p>
+                      <a:r>
+                        <a:rPr sz="1200" b="1">
+                          <a:solidFill>
+                            <a:srgbClr val="0F172A"/>
+                          </a:solidFill>
+                          <a:latin typeface="PingFang TC"/>
+                          <a:ea typeface="PingFang TC"/>
+                        </a:rPr>
+                        <a:t>API Gateway</a:t>
+                      </a:r>
+                    </a:p>
+                  </a:txBody>
+                  <a:tcPr marT="25400" marB="25400" marL="101600" anchor="ctr">
+                    <a:solidFill>
+                      <a:srgbClr val="FFFFFF"/>
+                    </a:solidFill>
+                  </a:tcPr>
+                </a:tc>
+                <a:tc>
+                  <a:txBody>
+                    <a:bodyPr/>
+                    <a:lstStyle/>
+                    <a:p>
+                      <a:r>
+                        <a:rPr sz="1200" b="0">
+                          <a:solidFill>
+                            <a:srgbClr val="0F172A"/>
+                          </a:solidFill>
+                          <a:latin typeface="PingFang TC"/>
+                          <a:ea typeface="PingFang TC"/>
+                        </a:rPr>
+                        <a:t>整體 throttle</a:t>
+                      </a:r>
+                    </a:p>
+                  </a:txBody>
+                  <a:tcPr marT="25400" marB="25400" marL="101600" anchor="ctr">
+                    <a:solidFill>
+                      <a:srgbClr val="FFFFFF"/>
+                    </a:solidFill>
+                  </a:tcPr>
+                </a:tc>
+                <a:tc>
+                  <a:txBody>
+                    <a:bodyPr/>
+                    <a:lstStyle/>
+                    <a:p>
+                      <a:r>
+                        <a:rPr sz="1200" b="0">
+                          <a:solidFill>
+                            <a:srgbClr val="0F172A"/>
+                          </a:solidFill>
+                          <a:latin typeface="PingFang TC"/>
+                          <a:ea typeface="PingFang TC"/>
+                        </a:rPr>
+                        <a:t>1000 req/s · burst 2000</a:t>
+                      </a:r>
+                    </a:p>
+                  </a:txBody>
+                  <a:tcPr marT="25400" marB="25400" marL="101600" anchor="ctr">
+                    <a:solidFill>
+                      <a:srgbClr val="FFFFFF"/>
+                    </a:solidFill>
+                  </a:tcPr>
+                </a:tc>
+                <a:tc>
+                  <a:txBody>
+                    <a:bodyPr/>
+                    <a:lstStyle/>
+                    <a:p>
+                      <a:r>
+                        <a:rPr sz="1200" b="0">
+                          <a:solidFill>
+                            <a:srgbClr val="0F172A"/>
+                          </a:solidFill>
+                          <a:latin typeface="PingFang TC"/>
+                          <a:ea typeface="PingFang TC"/>
+                        </a:rPr>
+                        <a:t>429</a:t>
+                      </a:r>
+                    </a:p>
+                  </a:txBody>
+                  <a:tcPr marT="25400" marB="25400" marL="101600" anchor="ctr">
+                    <a:solidFill>
+                      <a:srgbClr val="FFFFFF"/>
+                    </a:solidFill>
+                  </a:tcPr>
+                </a:tc>
+              </a:tr>
+            </a:tbl>
+          </a:graphicData>
+        </a:graphic>
+      </p:graphicFrame>
+      <p:sp>
+        <p:nvSpPr>
+          <p:cNvPr id="14" name="TextBox 13"/>
           <p:cNvSpPr txBox="1"/>
           <p:nvPr/>
         </p:nvSpPr>
         <p:spPr>
           <a:xfrm>
-            <a:off x="548640" y="4023360"/>
-            <a:ext cx="11247120" cy="2194560"/>
+            <a:off x="548640" y="5074920"/>
+            <a:ext cx="11247120" cy="1463040"/>
           </a:xfrm>
           <a:prstGeom prst="rect">
             <a:avLst/>
@@ -14943,52 +15023,52 @@
           <a:p>
             <a:pPr>
               <a:spcAft>
-                <a:spcPts val="900"/>
-              </a:spcAft>
-            </a:pPr>
-            <a:r>
-              <a:rPr sz="1400" b="0">
+                <a:spcPts val="700"/>
+              </a:spcAft>
+            </a:pPr>
+            <a:r>
+              <a:rPr sz="1300" b="0">
                 <a:solidFill>
                   <a:srgbClr val="0F172A"/>
                 </a:solidFill>
                 <a:latin typeface="PingFang TC"/>
                 <a:ea typeface="PingFang TC"/>
               </a:rPr>
-              <a:t>•  EC2 deploy-app.sh:從 SSM 撈設定 → ECR login → docker pull → docker run(換新容器)</a:t>
+              <a:t>•  為何不能只靠 API GW:HTTP API 內建節流是『整體』非 per-IP、也無 API key → 擋單一 IP 濫用必須靠 WAF</a:t>
             </a:r>
           </a:p>
           <a:p>
             <a:pPr>
               <a:spcAft>
-                <a:spcPts val="900"/>
-              </a:spcAft>
-            </a:pPr>
-            <a:r>
-              <a:rPr sz="1400" b="0">
+                <a:spcPts val="700"/>
+              </a:spcAft>
+            </a:pPr>
+            <a:r>
+              <a:rPr sz="1300" b="0">
                 <a:solidFill>
                   <a:srgbClr val="0F172A"/>
                 </a:solidFill>
                 <a:latin typeface="PingFang TC"/>
                 <a:ea typeface="PingFang TC"/>
               </a:rPr>
-              <a:t>•  全 env-gated:本機無這些環境變數 → 維持 SQLite + 記憶體 cache + 即時生圖,不受影響</a:t>
+              <a:t>•  限速值皆 Terraform 變數可調;WAF 阻擋數進 CloudWatch（BlockedRequests）</a:t>
             </a:r>
           </a:p>
           <a:p>
             <a:pPr>
               <a:spcAft>
-                <a:spcPts val="900"/>
-              </a:spcAft>
-            </a:pPr>
-            <a:r>
-              <a:rPr sz="1400" b="0">
+                <a:spcPts val="700"/>
+              </a:spcAft>
+            </a:pPr>
+            <a:r>
+              <a:rPr sz="1300" b="0">
                 <a:solidFill>
                   <a:srgbClr val="0F172A"/>
                 </a:solidFill>
                 <a:latin typeface="PingFang TC"/>
                 <a:ea typeface="PingFang TC"/>
               </a:rPr>
-              <a:t>•  部署踩到的兩個坑:① EC2 role 少 s3:PutObject(500)② CI build amd64 但 EC2 arm64(502)→ buildx 跨平台修正</a:t>
+              <a:t>•  純 infra 變更,不動 app;已 validate/plan 通過(未 apply)</a:t>
             </a:r>
           </a:p>
         </p:txBody>
@@ -15020,6 +15100,976 @@
         <p:spPr>
           <a:xfrm>
             <a:off x="0" y="0"/>
+            <a:ext cx="164592" cy="6858000"/>
+          </a:xfrm>
+          <a:prstGeom prst="rect">
+            <a:avLst/>
+          </a:prstGeom>
+          <a:solidFill>
+            <a:srgbClr val="2563EB"/>
+          </a:solidFill>
+          <a:ln>
+            <a:noFill/>
+          </a:ln>
+          <a:effectLst/>
+        </p:spPr>
+        <p:style>
+          <a:lnRef idx="1">
+            <a:schemeClr val="accent1"/>
+          </a:lnRef>
+          <a:fillRef idx="3">
+            <a:schemeClr val="accent1"/>
+          </a:fillRef>
+          <a:effectRef idx="2">
+            <a:schemeClr val="accent1"/>
+          </a:effectRef>
+          <a:fontRef idx="minor">
+            <a:schemeClr val="lt1"/>
+          </a:fontRef>
+        </p:style>
+        <p:txBody>
+          <a:bodyPr rtlCol="0" anchor="ctr"/>
+          <a:lstStyle/>
+          <a:p>
+            <a:pPr algn="ctr"/>
+          </a:p>
+        </p:txBody>
+      </p:sp>
+      <p:sp>
+        <p:nvSpPr>
+          <p:cNvPr id="3" name="TextBox 2"/>
+          <p:cNvSpPr txBox="1"/>
+          <p:nvPr/>
+        </p:nvSpPr>
+        <p:spPr>
+          <a:xfrm>
+            <a:off x="502920" y="320040"/>
+            <a:ext cx="10972800" cy="1005840"/>
+          </a:xfrm>
+          <a:prstGeom prst="rect">
+            <a:avLst/>
+          </a:prstGeom>
+          <a:noFill/>
+        </p:spPr>
+        <p:txBody>
+          <a:bodyPr wrap="square" anchor="t">
+            <a:spAutoFit/>
+          </a:bodyPr>
+          <a:lstStyle/>
+          <a:p>
+            <a:pPr algn="l">
+              <a:spcAft>
+                <a:spcPts val="200"/>
+              </a:spcAft>
+            </a:pPr>
+            <a:r>
+              <a:rPr sz="1300" b="1">
+                <a:solidFill>
+                  <a:srgbClr val="2563EB"/>
+                </a:solidFill>
+                <a:latin typeface="PingFang TC"/>
+                <a:ea typeface="PingFang TC"/>
+              </a:rPr>
+              <a:t>部署 · CI/CD</a:t>
+            </a:r>
+          </a:p>
+          <a:p>
+            <a:pPr algn="l">
+              <a:spcAft>
+                <a:spcPts val="400"/>
+              </a:spcAft>
+            </a:pPr>
+            <a:r>
+              <a:rPr sz="3000" b="1">
+                <a:solidFill>
+                  <a:srgbClr val="0F172A"/>
+                </a:solidFill>
+                <a:latin typeface="PingFang TC"/>
+                <a:ea typeface="PingFang TC"/>
+              </a:rPr>
+              <a:t>CI/CD 流程（GitHub Actions + OIDC）</a:t>
+            </a:r>
+          </a:p>
+        </p:txBody>
+      </p:sp>
+      <p:sp>
+        <p:nvSpPr>
+          <p:cNvPr id="4" name="Rounded Rectangle 3"/>
+          <p:cNvSpPr/>
+          <p:nvPr/>
+        </p:nvSpPr>
+        <p:spPr>
+          <a:xfrm>
+            <a:off x="457200" y="2286000"/>
+            <a:ext cx="1481328" cy="1280160"/>
+          </a:xfrm>
+          <a:prstGeom prst="roundRect">
+            <a:avLst/>
+          </a:prstGeom>
+          <a:solidFill>
+            <a:srgbClr val="64748B"/>
+          </a:solidFill>
+          <a:ln>
+            <a:solidFill>
+              <a:srgbClr val="64748B"/>
+            </a:solidFill>
+          </a:ln>
+          <a:effectLst/>
+        </p:spPr>
+        <p:style>
+          <a:lnRef idx="1">
+            <a:schemeClr val="accent1"/>
+          </a:lnRef>
+          <a:fillRef idx="3">
+            <a:schemeClr val="accent1"/>
+          </a:fillRef>
+          <a:effectRef idx="2">
+            <a:schemeClr val="accent1"/>
+          </a:effectRef>
+          <a:fontRef idx="minor">
+            <a:schemeClr val="lt1"/>
+          </a:fontRef>
+        </p:style>
+        <p:txBody>
+          <a:bodyPr rtlCol="0" anchor="ctr" wrap="square" tIns="25400" bIns="25400"/>
+          <a:lstStyle/>
+          <a:p>
+            <a:pPr algn="ctr"/>
+            <a:r>
+              <a:rPr sz="1100" b="1">
+                <a:solidFill>
+                  <a:srgbClr val="FFFFFF"/>
+                </a:solidFill>
+                <a:latin typeface="PingFang TC"/>
+                <a:ea typeface="PingFang TC"/>
+              </a:rPr>
+              <a:t>git push</a:t>
+            </a:r>
+          </a:p>
+          <a:p>
+            <a:pPr algn="ctr"/>
+            <a:r>
+              <a:rPr sz="1100" b="0">
+                <a:solidFill>
+                  <a:srgbClr val="FFFFFF"/>
+                </a:solidFill>
+                <a:latin typeface="PingFang TC"/>
+                <a:ea typeface="PingFang TC"/>
+              </a:rPr>
+              <a:t>QR Code Generator/**</a:t>
+            </a:r>
+          </a:p>
+        </p:txBody>
+      </p:sp>
+      <p:cxnSp>
+        <p:nvCxnSpPr>
+          <p:cNvPr id="5" name="Connector 4"/>
+          <p:cNvCxnSpPr/>
+          <p:nvPr/>
+        </p:nvCxnSpPr>
+        <p:spPr>
+          <a:xfrm>
+            <a:off x="1938528" y="2926080"/>
+            <a:ext cx="118872" cy="0"/>
+          </a:xfrm>
+          <a:prstGeom prst="line">
+            <a:avLst/>
+          </a:prstGeom>
+          <a:ln w="22225">
+            <a:solidFill>
+              <a:srgbClr val="64748B"/>
+            </a:solidFill>
+            <a:tailEnd type="triangle" w="med" len="med"/>
+          </a:ln>
+        </p:spPr>
+        <p:style>
+          <a:lnRef idx="2">
+            <a:schemeClr val="accent1"/>
+          </a:lnRef>
+          <a:fillRef idx="0">
+            <a:schemeClr val="accent1"/>
+          </a:fillRef>
+          <a:effectRef idx="1">
+            <a:schemeClr val="accent1"/>
+          </a:effectRef>
+          <a:fontRef idx="minor">
+            <a:schemeClr val="tx1"/>
+          </a:fontRef>
+        </p:style>
+      </p:cxnSp>
+      <p:sp>
+        <p:nvSpPr>
+          <p:cNvPr id="6" name="Rounded Rectangle 5"/>
+          <p:cNvSpPr/>
+          <p:nvPr/>
+        </p:nvSpPr>
+        <p:spPr>
+          <a:xfrm>
+            <a:off x="2057400" y="2286000"/>
+            <a:ext cx="1481328" cy="1280160"/>
+          </a:xfrm>
+          <a:prstGeom prst="roundRect">
+            <a:avLst/>
+          </a:prstGeom>
+          <a:solidFill>
+            <a:srgbClr val="0EA5E9"/>
+          </a:solidFill>
+          <a:ln>
+            <a:solidFill>
+              <a:srgbClr val="0EA5E9"/>
+            </a:solidFill>
+          </a:ln>
+          <a:effectLst/>
+        </p:spPr>
+        <p:style>
+          <a:lnRef idx="1">
+            <a:schemeClr val="accent1"/>
+          </a:lnRef>
+          <a:fillRef idx="3">
+            <a:schemeClr val="accent1"/>
+          </a:fillRef>
+          <a:effectRef idx="2">
+            <a:schemeClr val="accent1"/>
+          </a:effectRef>
+          <a:fontRef idx="minor">
+            <a:schemeClr val="lt1"/>
+          </a:fontRef>
+        </p:style>
+        <p:txBody>
+          <a:bodyPr rtlCol="0" anchor="ctr" wrap="square" tIns="25400" bIns="25400"/>
+          <a:lstStyle/>
+          <a:p>
+            <a:pPr algn="ctr"/>
+            <a:r>
+              <a:rPr sz="1100" b="1">
+                <a:solidFill>
+                  <a:srgbClr val="FFFFFF"/>
+                </a:solidFill>
+                <a:latin typeface="PingFang TC"/>
+                <a:ea typeface="PingFang TC"/>
+              </a:rPr>
+              <a:t>GitHub Actions</a:t>
+            </a:r>
+          </a:p>
+          <a:p>
+            <a:pPr algn="ctr"/>
+            <a:r>
+              <a:rPr sz="1100" b="0">
+                <a:solidFill>
+                  <a:srgbClr val="FFFFFF"/>
+                </a:solidFill>
+                <a:latin typeface="PingFang TC"/>
+                <a:ea typeface="PingFang TC"/>
+              </a:rPr>
+              <a:t>OIDC assume role</a:t>
+            </a:r>
+          </a:p>
+          <a:p>
+            <a:pPr algn="ctr"/>
+            <a:r>
+              <a:rPr sz="1100" b="0">
+                <a:solidFill>
+                  <a:srgbClr val="FFFFFF"/>
+                </a:solidFill>
+                <a:latin typeface="PingFang TC"/>
+                <a:ea typeface="PingFang TC"/>
+              </a:rPr>
+              <a:t>(無長期金鑰)</a:t>
+            </a:r>
+          </a:p>
+        </p:txBody>
+      </p:sp>
+      <p:cxnSp>
+        <p:nvCxnSpPr>
+          <p:cNvPr id="7" name="Connector 6"/>
+          <p:cNvCxnSpPr/>
+          <p:nvPr/>
+        </p:nvCxnSpPr>
+        <p:spPr>
+          <a:xfrm>
+            <a:off x="3538728" y="2926080"/>
+            <a:ext cx="118872" cy="0"/>
+          </a:xfrm>
+          <a:prstGeom prst="line">
+            <a:avLst/>
+          </a:prstGeom>
+          <a:ln w="22225">
+            <a:solidFill>
+              <a:srgbClr val="64748B"/>
+            </a:solidFill>
+            <a:tailEnd type="triangle" w="med" len="med"/>
+          </a:ln>
+        </p:spPr>
+        <p:style>
+          <a:lnRef idx="2">
+            <a:schemeClr val="accent1"/>
+          </a:lnRef>
+          <a:fillRef idx="0">
+            <a:schemeClr val="accent1"/>
+          </a:fillRef>
+          <a:effectRef idx="1">
+            <a:schemeClr val="accent1"/>
+          </a:effectRef>
+          <a:fontRef idx="minor">
+            <a:schemeClr val="tx1"/>
+          </a:fontRef>
+        </p:style>
+      </p:cxnSp>
+      <p:sp>
+        <p:nvSpPr>
+          <p:cNvPr id="8" name="Rounded Rectangle 7"/>
+          <p:cNvSpPr/>
+          <p:nvPr/>
+        </p:nvSpPr>
+        <p:spPr>
+          <a:xfrm>
+            <a:off x="3657600" y="2286000"/>
+            <a:ext cx="1481328" cy="1280160"/>
+          </a:xfrm>
+          <a:prstGeom prst="roundRect">
+            <a:avLst/>
+          </a:prstGeom>
+          <a:solidFill>
+            <a:srgbClr val="2563EB"/>
+          </a:solidFill>
+          <a:ln>
+            <a:solidFill>
+              <a:srgbClr val="2563EB"/>
+            </a:solidFill>
+          </a:ln>
+          <a:effectLst/>
+        </p:spPr>
+        <p:style>
+          <a:lnRef idx="1">
+            <a:schemeClr val="accent1"/>
+          </a:lnRef>
+          <a:fillRef idx="3">
+            <a:schemeClr val="accent1"/>
+          </a:fillRef>
+          <a:effectRef idx="2">
+            <a:schemeClr val="accent1"/>
+          </a:effectRef>
+          <a:fontRef idx="minor">
+            <a:schemeClr val="lt1"/>
+          </a:fontRef>
+        </p:style>
+        <p:txBody>
+          <a:bodyPr rtlCol="0" anchor="ctr" wrap="square" tIns="25400" bIns="25400"/>
+          <a:lstStyle/>
+          <a:p>
+            <a:pPr algn="ctr"/>
+            <a:r>
+              <a:rPr sz="1100" b="1">
+                <a:solidFill>
+                  <a:srgbClr val="FFFFFF"/>
+                </a:solidFill>
+                <a:latin typeface="PingFang TC"/>
+                <a:ea typeface="PingFang TC"/>
+              </a:rPr>
+              <a:t>buildx</a:t>
+            </a:r>
+          </a:p>
+          <a:p>
+            <a:pPr algn="ctr"/>
+            <a:r>
+              <a:rPr sz="1100" b="0">
+                <a:solidFill>
+                  <a:srgbClr val="FFFFFF"/>
+                </a:solidFill>
+                <a:latin typeface="PingFang TC"/>
+                <a:ea typeface="PingFang TC"/>
+              </a:rPr>
+              <a:t>--platform</a:t>
+            </a:r>
+          </a:p>
+          <a:p>
+            <a:pPr algn="ctr"/>
+            <a:r>
+              <a:rPr sz="1100" b="0">
+                <a:solidFill>
+                  <a:srgbClr val="FFFFFF"/>
+                </a:solidFill>
+                <a:latin typeface="PingFang TC"/>
+                <a:ea typeface="PingFang TC"/>
+              </a:rPr>
+              <a:t>linux/arm64</a:t>
+            </a:r>
+          </a:p>
+        </p:txBody>
+      </p:sp>
+      <p:cxnSp>
+        <p:nvCxnSpPr>
+          <p:cNvPr id="9" name="Connector 8"/>
+          <p:cNvCxnSpPr/>
+          <p:nvPr/>
+        </p:nvCxnSpPr>
+        <p:spPr>
+          <a:xfrm>
+            <a:off x="5138928" y="2926080"/>
+            <a:ext cx="118872" cy="0"/>
+          </a:xfrm>
+          <a:prstGeom prst="line">
+            <a:avLst/>
+          </a:prstGeom>
+          <a:ln w="22225">
+            <a:solidFill>
+              <a:srgbClr val="64748B"/>
+            </a:solidFill>
+            <a:tailEnd type="triangle" w="med" len="med"/>
+          </a:ln>
+        </p:spPr>
+        <p:style>
+          <a:lnRef idx="2">
+            <a:schemeClr val="accent1"/>
+          </a:lnRef>
+          <a:fillRef idx="0">
+            <a:schemeClr val="accent1"/>
+          </a:fillRef>
+          <a:effectRef idx="1">
+            <a:schemeClr val="accent1"/>
+          </a:effectRef>
+          <a:fontRef idx="minor">
+            <a:schemeClr val="tx1"/>
+          </a:fontRef>
+        </p:style>
+      </p:cxnSp>
+      <p:sp>
+        <p:nvSpPr>
+          <p:cNvPr id="10" name="Rounded Rectangle 9"/>
+          <p:cNvSpPr/>
+          <p:nvPr/>
+        </p:nvSpPr>
+        <p:spPr>
+          <a:xfrm>
+            <a:off x="5257800" y="2286000"/>
+            <a:ext cx="1481328" cy="1280160"/>
+          </a:xfrm>
+          <a:prstGeom prst="roundRect">
+            <a:avLst/>
+          </a:prstGeom>
+          <a:solidFill>
+            <a:srgbClr val="059669"/>
+          </a:solidFill>
+          <a:ln>
+            <a:solidFill>
+              <a:srgbClr val="059669"/>
+            </a:solidFill>
+          </a:ln>
+          <a:effectLst/>
+        </p:spPr>
+        <p:style>
+          <a:lnRef idx="1">
+            <a:schemeClr val="accent1"/>
+          </a:lnRef>
+          <a:fillRef idx="3">
+            <a:schemeClr val="accent1"/>
+          </a:fillRef>
+          <a:effectRef idx="2">
+            <a:schemeClr val="accent1"/>
+          </a:effectRef>
+          <a:fontRef idx="minor">
+            <a:schemeClr val="lt1"/>
+          </a:fontRef>
+        </p:style>
+        <p:txBody>
+          <a:bodyPr rtlCol="0" anchor="ctr" wrap="square" tIns="25400" bIns="25400"/>
+          <a:lstStyle/>
+          <a:p>
+            <a:pPr algn="ctr"/>
+            <a:r>
+              <a:rPr sz="1100" b="1">
+                <a:solidFill>
+                  <a:srgbClr val="FFFFFF"/>
+                </a:solidFill>
+                <a:latin typeface="PingFang TC"/>
+                <a:ea typeface="PingFang TC"/>
+              </a:rPr>
+              <a:t>ECR push</a:t>
+            </a:r>
+          </a:p>
+          <a:p>
+            <a:pPr algn="ctr"/>
+            <a:r>
+              <a:rPr sz="1100" b="0">
+                <a:solidFill>
+                  <a:srgbClr val="FFFFFF"/>
+                </a:solidFill>
+                <a:latin typeface="PingFang TC"/>
+                <a:ea typeface="PingFang TC"/>
+              </a:rPr>
+              <a:t>tag = SHA</a:t>
+            </a:r>
+          </a:p>
+          <a:p>
+            <a:pPr algn="ctr"/>
+            <a:r>
+              <a:rPr sz="1100" b="0">
+                <a:solidFill>
+                  <a:srgbClr val="FFFFFF"/>
+                </a:solidFill>
+                <a:latin typeface="PingFang TC"/>
+                <a:ea typeface="PingFang TC"/>
+              </a:rPr>
+              <a:t>+ latest</a:t>
+            </a:r>
+          </a:p>
+        </p:txBody>
+      </p:sp>
+      <p:cxnSp>
+        <p:nvCxnSpPr>
+          <p:cNvPr id="11" name="Connector 10"/>
+          <p:cNvCxnSpPr/>
+          <p:nvPr/>
+        </p:nvCxnSpPr>
+        <p:spPr>
+          <a:xfrm>
+            <a:off x="6739128" y="2926080"/>
+            <a:ext cx="118872" cy="0"/>
+          </a:xfrm>
+          <a:prstGeom prst="line">
+            <a:avLst/>
+          </a:prstGeom>
+          <a:ln w="22225">
+            <a:solidFill>
+              <a:srgbClr val="64748B"/>
+            </a:solidFill>
+            <a:tailEnd type="triangle" w="med" len="med"/>
+          </a:ln>
+        </p:spPr>
+        <p:style>
+          <a:lnRef idx="2">
+            <a:schemeClr val="accent1"/>
+          </a:lnRef>
+          <a:fillRef idx="0">
+            <a:schemeClr val="accent1"/>
+          </a:fillRef>
+          <a:effectRef idx="1">
+            <a:schemeClr val="accent1"/>
+          </a:effectRef>
+          <a:fontRef idx="minor">
+            <a:schemeClr val="tx1"/>
+          </a:fontRef>
+        </p:style>
+      </p:cxnSp>
+      <p:sp>
+        <p:nvSpPr>
+          <p:cNvPr id="12" name="Rounded Rectangle 11"/>
+          <p:cNvSpPr/>
+          <p:nvPr/>
+        </p:nvSpPr>
+        <p:spPr>
+          <a:xfrm>
+            <a:off x="6858000" y="2286000"/>
+            <a:ext cx="1481328" cy="1280160"/>
+          </a:xfrm>
+          <a:prstGeom prst="roundRect">
+            <a:avLst/>
+          </a:prstGeom>
+          <a:solidFill>
+            <a:srgbClr val="7C3AED"/>
+          </a:solidFill>
+          <a:ln>
+            <a:solidFill>
+              <a:srgbClr val="7C3AED"/>
+            </a:solidFill>
+          </a:ln>
+          <a:effectLst/>
+        </p:spPr>
+        <p:style>
+          <a:lnRef idx="1">
+            <a:schemeClr val="accent1"/>
+          </a:lnRef>
+          <a:fillRef idx="3">
+            <a:schemeClr val="accent1"/>
+          </a:fillRef>
+          <a:effectRef idx="2">
+            <a:schemeClr val="accent1"/>
+          </a:effectRef>
+          <a:fontRef idx="minor">
+            <a:schemeClr val="lt1"/>
+          </a:fontRef>
+        </p:style>
+        <p:txBody>
+          <a:bodyPr rtlCol="0" anchor="ctr" wrap="square" tIns="25400" bIns="25400"/>
+          <a:lstStyle/>
+          <a:p>
+            <a:pPr algn="ctr"/>
+            <a:r>
+              <a:rPr sz="1100" b="1">
+                <a:solidFill>
+                  <a:srgbClr val="FFFFFF"/>
+                </a:solidFill>
+                <a:latin typeface="PingFang TC"/>
+                <a:ea typeface="PingFang TC"/>
+              </a:rPr>
+              <a:t>SSM 更新</a:t>
+            </a:r>
+          </a:p>
+          <a:p>
+            <a:pPr algn="ctr"/>
+            <a:r>
+              <a:rPr sz="1100" b="0">
+                <a:solidFill>
+                  <a:srgbClr val="FFFFFF"/>
+                </a:solidFill>
+                <a:latin typeface="PingFang TC"/>
+                <a:ea typeface="PingFang TC"/>
+              </a:rPr>
+              <a:t>/qrcode/</a:t>
+            </a:r>
+          </a:p>
+          <a:p>
+            <a:pPr algn="ctr"/>
+            <a:r>
+              <a:rPr sz="1100" b="0">
+                <a:solidFill>
+                  <a:srgbClr val="FFFFFF"/>
+                </a:solidFill>
+                <a:latin typeface="PingFang TC"/>
+                <a:ea typeface="PingFang TC"/>
+              </a:rPr>
+              <a:t>IMAGE_URI</a:t>
+            </a:r>
+          </a:p>
+        </p:txBody>
+      </p:sp>
+      <p:cxnSp>
+        <p:nvCxnSpPr>
+          <p:cNvPr id="13" name="Connector 12"/>
+          <p:cNvCxnSpPr/>
+          <p:nvPr/>
+        </p:nvCxnSpPr>
+        <p:spPr>
+          <a:xfrm>
+            <a:off x="8339328" y="2926080"/>
+            <a:ext cx="118872" cy="0"/>
+          </a:xfrm>
+          <a:prstGeom prst="line">
+            <a:avLst/>
+          </a:prstGeom>
+          <a:ln w="22225">
+            <a:solidFill>
+              <a:srgbClr val="64748B"/>
+            </a:solidFill>
+            <a:tailEnd type="triangle" w="med" len="med"/>
+          </a:ln>
+        </p:spPr>
+        <p:style>
+          <a:lnRef idx="2">
+            <a:schemeClr val="accent1"/>
+          </a:lnRef>
+          <a:fillRef idx="0">
+            <a:schemeClr val="accent1"/>
+          </a:fillRef>
+          <a:effectRef idx="1">
+            <a:schemeClr val="accent1"/>
+          </a:effectRef>
+          <a:fontRef idx="minor">
+            <a:schemeClr val="tx1"/>
+          </a:fontRef>
+        </p:style>
+      </p:cxnSp>
+      <p:sp>
+        <p:nvSpPr>
+          <p:cNvPr id="14" name="Rounded Rectangle 13"/>
+          <p:cNvSpPr/>
+          <p:nvPr/>
+        </p:nvSpPr>
+        <p:spPr>
+          <a:xfrm>
+            <a:off x="8458200" y="2286000"/>
+            <a:ext cx="1481328" cy="1280160"/>
+          </a:xfrm>
+          <a:prstGeom prst="roundRect">
+            <a:avLst/>
+          </a:prstGeom>
+          <a:solidFill>
+            <a:srgbClr val="D97706"/>
+          </a:solidFill>
+          <a:ln>
+            <a:solidFill>
+              <a:srgbClr val="D97706"/>
+            </a:solidFill>
+          </a:ln>
+          <a:effectLst/>
+        </p:spPr>
+        <p:style>
+          <a:lnRef idx="1">
+            <a:schemeClr val="accent1"/>
+          </a:lnRef>
+          <a:fillRef idx="3">
+            <a:schemeClr val="accent1"/>
+          </a:fillRef>
+          <a:effectRef idx="2">
+            <a:schemeClr val="accent1"/>
+          </a:effectRef>
+          <a:fontRef idx="minor">
+            <a:schemeClr val="lt1"/>
+          </a:fontRef>
+        </p:style>
+        <p:txBody>
+          <a:bodyPr rtlCol="0" anchor="ctr" wrap="square" tIns="25400" bIns="25400"/>
+          <a:lstStyle/>
+          <a:p>
+            <a:pPr algn="ctr"/>
+            <a:r>
+              <a:rPr sz="1100" b="1">
+                <a:solidFill>
+                  <a:srgbClr val="FFFFFF"/>
+                </a:solidFill>
+                <a:latin typeface="PingFang TC"/>
+                <a:ea typeface="PingFang TC"/>
+              </a:rPr>
+              <a:t>SSM 部署</a:t>
+            </a:r>
+          </a:p>
+          <a:p>
+            <a:pPr algn="ctr"/>
+            <a:r>
+              <a:rPr sz="1100" b="0">
+                <a:solidFill>
+                  <a:srgbClr val="FFFFFF"/>
+                </a:solidFill>
+                <a:latin typeface="PingFang TC"/>
+                <a:ea typeface="PingFang TC"/>
+              </a:rPr>
+              <a:t>→ EC2</a:t>
+            </a:r>
+          </a:p>
+          <a:p>
+            <a:pPr algn="ctr"/>
+            <a:r>
+              <a:rPr sz="1100" b="0">
+                <a:solidFill>
+                  <a:srgbClr val="FFFFFF"/>
+                </a:solidFill>
+                <a:latin typeface="PingFang TC"/>
+                <a:ea typeface="PingFang TC"/>
+              </a:rPr>
+              <a:t>deploy-app.sh</a:t>
+            </a:r>
+          </a:p>
+        </p:txBody>
+      </p:sp>
+      <p:cxnSp>
+        <p:nvCxnSpPr>
+          <p:cNvPr id="15" name="Connector 14"/>
+          <p:cNvCxnSpPr/>
+          <p:nvPr/>
+        </p:nvCxnSpPr>
+        <p:spPr>
+          <a:xfrm>
+            <a:off x="9939528" y="2926080"/>
+            <a:ext cx="118872" cy="0"/>
+          </a:xfrm>
+          <a:prstGeom prst="line">
+            <a:avLst/>
+          </a:prstGeom>
+          <a:ln w="22225">
+            <a:solidFill>
+              <a:srgbClr val="64748B"/>
+            </a:solidFill>
+            <a:tailEnd type="triangle" w="med" len="med"/>
+          </a:ln>
+        </p:spPr>
+        <p:style>
+          <a:lnRef idx="2">
+            <a:schemeClr val="accent1"/>
+          </a:lnRef>
+          <a:fillRef idx="0">
+            <a:schemeClr val="accent1"/>
+          </a:fillRef>
+          <a:effectRef idx="1">
+            <a:schemeClr val="accent1"/>
+          </a:effectRef>
+          <a:fontRef idx="minor">
+            <a:schemeClr val="tx1"/>
+          </a:fontRef>
+        </p:style>
+      </p:cxnSp>
+      <p:sp>
+        <p:nvSpPr>
+          <p:cNvPr id="16" name="Rounded Rectangle 15"/>
+          <p:cNvSpPr/>
+          <p:nvPr/>
+        </p:nvSpPr>
+        <p:spPr>
+          <a:xfrm>
+            <a:off x="10058400" y="2286000"/>
+            <a:ext cx="1481328" cy="1280160"/>
+          </a:xfrm>
+          <a:prstGeom prst="roundRect">
+            <a:avLst/>
+          </a:prstGeom>
+          <a:solidFill>
+            <a:srgbClr val="059669"/>
+          </a:solidFill>
+          <a:ln>
+            <a:solidFill>
+              <a:srgbClr val="059669"/>
+            </a:solidFill>
+          </a:ln>
+          <a:effectLst/>
+        </p:spPr>
+        <p:style>
+          <a:lnRef idx="1">
+            <a:schemeClr val="accent1"/>
+          </a:lnRef>
+          <a:fillRef idx="3">
+            <a:schemeClr val="accent1"/>
+          </a:fillRef>
+          <a:effectRef idx="2">
+            <a:schemeClr val="accent1"/>
+          </a:effectRef>
+          <a:fontRef idx="minor">
+            <a:schemeClr val="lt1"/>
+          </a:fontRef>
+        </p:style>
+        <p:txBody>
+          <a:bodyPr rtlCol="0" anchor="ctr" wrap="square" tIns="25400" bIns="25400"/>
+          <a:lstStyle/>
+          <a:p>
+            <a:pPr algn="ctr"/>
+            <a:r>
+              <a:rPr sz="1100" b="1">
+                <a:solidFill>
+                  <a:srgbClr val="FFFFFF"/>
+                </a:solidFill>
+                <a:latin typeface="PingFang TC"/>
+                <a:ea typeface="PingFang TC"/>
+              </a:rPr>
+              <a:t>上線</a:t>
+            </a:r>
+          </a:p>
+          <a:p>
+            <a:pPr algn="ctr"/>
+            <a:r>
+              <a:rPr sz="1100" b="0">
+                <a:solidFill>
+                  <a:srgbClr val="FFFFFF"/>
+                </a:solidFill>
+                <a:latin typeface="PingFang TC"/>
+                <a:ea typeface="PingFang TC"/>
+              </a:rPr>
+              <a:t>ALB /health</a:t>
+            </a:r>
+          </a:p>
+          <a:p>
+            <a:pPr algn="ctr"/>
+            <a:r>
+              <a:rPr sz="1100" b="0">
+                <a:solidFill>
+                  <a:srgbClr val="FFFFFF"/>
+                </a:solidFill>
+                <a:latin typeface="PingFang TC"/>
+                <a:ea typeface="PingFang TC"/>
+              </a:rPr>
+              <a:t>通過</a:t>
+            </a:r>
+          </a:p>
+        </p:txBody>
+      </p:sp>
+      <p:sp>
+        <p:nvSpPr>
+          <p:cNvPr id="17" name="TextBox 16"/>
+          <p:cNvSpPr txBox="1"/>
+          <p:nvPr/>
+        </p:nvSpPr>
+        <p:spPr>
+          <a:xfrm>
+            <a:off x="548640" y="4023360"/>
+            <a:ext cx="11247120" cy="2194560"/>
+          </a:xfrm>
+          <a:prstGeom prst="rect">
+            <a:avLst/>
+          </a:prstGeom>
+          <a:noFill/>
+        </p:spPr>
+        <p:txBody>
+          <a:bodyPr wrap="square">
+            <a:spAutoFit/>
+          </a:bodyPr>
+          <a:lstStyle/>
+          <a:p>
+            <a:pPr>
+              <a:spcAft>
+                <a:spcPts val="900"/>
+              </a:spcAft>
+            </a:pPr>
+            <a:r>
+              <a:rPr sz="1400" b="0">
+                <a:solidFill>
+                  <a:srgbClr val="0F172A"/>
+                </a:solidFill>
+                <a:latin typeface="PingFang TC"/>
+                <a:ea typeface="PingFang TC"/>
+              </a:rPr>
+              <a:t>•  EC2 deploy-app.sh:從 SSM 撈設定 → ECR login → docker pull → docker run(換新容器)</a:t>
+            </a:r>
+          </a:p>
+          <a:p>
+            <a:pPr>
+              <a:spcAft>
+                <a:spcPts val="900"/>
+              </a:spcAft>
+            </a:pPr>
+            <a:r>
+              <a:rPr sz="1400" b="0">
+                <a:solidFill>
+                  <a:srgbClr val="0F172A"/>
+                </a:solidFill>
+                <a:latin typeface="PingFang TC"/>
+                <a:ea typeface="PingFang TC"/>
+              </a:rPr>
+              <a:t>•  全 env-gated:本機無這些環境變數 → 維持 SQLite + 記憶體 cache + 即時生圖,不受影響</a:t>
+            </a:r>
+          </a:p>
+          <a:p>
+            <a:pPr>
+              <a:spcAft>
+                <a:spcPts val="900"/>
+              </a:spcAft>
+            </a:pPr>
+            <a:r>
+              <a:rPr sz="1400" b="0">
+                <a:solidFill>
+                  <a:srgbClr val="0F172A"/>
+                </a:solidFill>
+                <a:latin typeface="PingFang TC"/>
+                <a:ea typeface="PingFang TC"/>
+              </a:rPr>
+              <a:t>•  部署踩到的兩個坑:① EC2 role 少 s3:PutObject(500)② CI build amd64 但 EC2 arm64(502)→ buildx 跨平台修正</a:t>
+            </a:r>
+          </a:p>
+        </p:txBody>
+      </p:sp>
+    </p:spTree>
+  </p:cSld>
+  <p:clrMapOvr>
+    <a:masterClrMapping/>
+  </p:clrMapOvr>
+</p:sld>
+</file>
+
+<file path=ppt/slides/slide26.xml><?xml version="1.0" encoding="utf-8"?>
+<p:sld xmlns:a="http://schemas.openxmlformats.org/drawingml/2006/main" xmlns:p="http://schemas.openxmlformats.org/presentationml/2006/main" xmlns:r="http://schemas.openxmlformats.org/officeDocument/2006/relationships">
+  <p:cSld>
+    <p:spTree>
+      <p:nvGrpSpPr>
+        <p:cNvPr id="1" name=""/>
+        <p:cNvGrpSpPr/>
+        <p:nvPr/>
+      </p:nvGrpSpPr>
+      <p:grpSpPr/>
+      <p:sp>
+        <p:nvSpPr>
+          <p:cNvPr id="2" name="Rectangle 1"/>
+          <p:cNvSpPr/>
+          <p:nvPr/>
+        </p:nvSpPr>
+        <p:spPr>
+          <a:xfrm>
+            <a:off x="0" y="0"/>
             <a:ext cx="12191695" cy="6858000"/>
           </a:xfrm>
           <a:prstGeom prst="rect">
@@ -15199,6 +16249,1479 @@
                 <a:ea typeface="PingFang TC"/>
               </a:rPr>
               <a:t>✓  設計依據：DESIGN.md（16 題決策 + 優劣分析）</a:t>
+            </a:r>
+          </a:p>
+        </p:txBody>
+      </p:sp>
+    </p:spTree>
+  </p:cSld>
+  <p:clrMapOvr>
+    <a:masterClrMapping/>
+  </p:clrMapOvr>
+</p:sld>
+</file>
+
+<file path=ppt/slides/slide27.xml><?xml version="1.0" encoding="utf-8"?>
+<p:sld xmlns:a="http://schemas.openxmlformats.org/drawingml/2006/main" xmlns:p="http://schemas.openxmlformats.org/presentationml/2006/main" xmlns:r="http://schemas.openxmlformats.org/officeDocument/2006/relationships">
+  <p:cSld>
+    <p:spTree>
+      <p:nvGrpSpPr>
+        <p:cNvPr id="1" name=""/>
+        <p:cNvGrpSpPr/>
+        <p:nvPr/>
+      </p:nvGrpSpPr>
+      <p:grpSpPr/>
+      <p:sp>
+        <p:nvSpPr>
+          <p:cNvPr id="2" name="Rectangle 1"/>
+          <p:cNvSpPr/>
+          <p:nvPr/>
+        </p:nvSpPr>
+        <p:spPr>
+          <a:xfrm>
+            <a:off x="0" y="0"/>
+            <a:ext cx="164592" cy="6858000"/>
+          </a:xfrm>
+          <a:prstGeom prst="rect">
+            <a:avLst/>
+          </a:prstGeom>
+          <a:solidFill>
+            <a:srgbClr val="2563EB"/>
+          </a:solidFill>
+          <a:ln>
+            <a:noFill/>
+          </a:ln>
+          <a:effectLst/>
+        </p:spPr>
+        <p:style>
+          <a:lnRef idx="1">
+            <a:schemeClr val="accent1"/>
+          </a:lnRef>
+          <a:fillRef idx="3">
+            <a:schemeClr val="accent1"/>
+          </a:fillRef>
+          <a:effectRef idx="2">
+            <a:schemeClr val="accent1"/>
+          </a:effectRef>
+          <a:fontRef idx="minor">
+            <a:schemeClr val="lt1"/>
+          </a:fontRef>
+        </p:style>
+        <p:txBody>
+          <a:bodyPr rtlCol="0" anchor="ctr"/>
+          <a:lstStyle/>
+          <a:p>
+            <a:pPr algn="ctr"/>
+          </a:p>
+        </p:txBody>
+      </p:sp>
+      <p:sp>
+        <p:nvSpPr>
+          <p:cNvPr id="3" name="TextBox 2"/>
+          <p:cNvSpPr txBox="1"/>
+          <p:nvPr/>
+        </p:nvSpPr>
+        <p:spPr>
+          <a:xfrm>
+            <a:off x="502920" y="320040"/>
+            <a:ext cx="10972800" cy="1005840"/>
+          </a:xfrm>
+          <a:prstGeom prst="rect">
+            <a:avLst/>
+          </a:prstGeom>
+          <a:noFill/>
+        </p:spPr>
+        <p:txBody>
+          <a:bodyPr wrap="square" anchor="t">
+            <a:spAutoFit/>
+          </a:bodyPr>
+          <a:lstStyle/>
+          <a:p>
+            <a:pPr algn="l">
+              <a:spcAft>
+                <a:spcPts val="200"/>
+              </a:spcAft>
+            </a:pPr>
+            <a:r>
+              <a:rPr sz="1300" b="1">
+                <a:solidFill>
+                  <a:srgbClr val="2563EB"/>
+                </a:solidFill>
+                <a:latin typeface="PingFang TC"/>
+                <a:ea typeface="PingFang TC"/>
+              </a:rPr>
+              <a:t>下週預告 · NEXT WEEK</a:t>
+            </a:r>
+          </a:p>
+          <a:p>
+            <a:pPr algn="l">
+              <a:spcAft>
+                <a:spcPts val="400"/>
+              </a:spcAft>
+            </a:pPr>
+            <a:r>
+              <a:rPr sz="3000" b="1">
+                <a:solidFill>
+                  <a:srgbClr val="0F172A"/>
+                </a:solidFill>
+                <a:latin typeface="PingFang TC"/>
+                <a:ea typeface="PingFang TC"/>
+              </a:rPr>
+              <a:t>從 Prototype 到 Production 的巨大鴻溝</a:t>
+            </a:r>
+          </a:p>
+        </p:txBody>
+      </p:sp>
+      <p:sp>
+        <p:nvSpPr>
+          <p:cNvPr id="4" name="TextBox 3"/>
+          <p:cNvSpPr txBox="1"/>
+          <p:nvPr/>
+        </p:nvSpPr>
+        <p:spPr>
+          <a:xfrm>
+            <a:off x="548640" y="1371600"/>
+            <a:ext cx="10972800" cy="365760"/>
+          </a:xfrm>
+          <a:prstGeom prst="rect">
+            <a:avLst/>
+          </a:prstGeom>
+          <a:noFill/>
+        </p:spPr>
+        <p:txBody>
+          <a:bodyPr wrap="square" anchor="t">
+            <a:spAutoFit/>
+          </a:bodyPr>
+          <a:lstStyle/>
+          <a:p>
+            <a:pPr algn="l">
+              <a:spcAft>
+                <a:spcPts val="400"/>
+              </a:spcAft>
+            </a:pPr>
+            <a:r>
+              <a:rPr sz="1400" b="0">
+                <a:solidFill>
+                  <a:srgbClr val="64748B"/>
+                </a:solidFill>
+                <a:latin typeface="PingFang TC"/>
+                <a:ea typeface="PingFang TC"/>
+              </a:rPr>
+              <a:t>快速掃過，建立全貌 — 下週 Deep Dive 才是主菜</a:t>
+            </a:r>
+          </a:p>
+        </p:txBody>
+      </p:sp>
+      <p:sp>
+        <p:nvSpPr>
+          <p:cNvPr id="5" name="Rounded Rectangle 4"/>
+          <p:cNvSpPr/>
+          <p:nvPr/>
+        </p:nvSpPr>
+        <p:spPr>
+          <a:xfrm>
+            <a:off x="548640" y="1965960"/>
+            <a:ext cx="3611880" cy="1600200"/>
+          </a:xfrm>
+          <a:prstGeom prst="roundRect">
+            <a:avLst/>
+          </a:prstGeom>
+          <a:solidFill>
+            <a:srgbClr val="F1F5F9"/>
+          </a:solidFill>
+          <a:ln>
+            <a:solidFill>
+              <a:srgbClr val="F1F5F9"/>
+            </a:solidFill>
+          </a:ln>
+          <a:effectLst/>
+        </p:spPr>
+        <p:style>
+          <a:lnRef idx="1">
+            <a:schemeClr val="accent1"/>
+          </a:lnRef>
+          <a:fillRef idx="3">
+            <a:schemeClr val="accent1"/>
+          </a:fillRef>
+          <a:effectRef idx="2">
+            <a:schemeClr val="accent1"/>
+          </a:effectRef>
+          <a:fontRef idx="minor">
+            <a:schemeClr val="lt1"/>
+          </a:fontRef>
+        </p:style>
+        <p:txBody>
+          <a:bodyPr rtlCol="0" anchor="ctr"/>
+          <a:lstStyle/>
+          <a:p>
+            <a:pPr algn="ctr"/>
+          </a:p>
+        </p:txBody>
+      </p:sp>
+      <p:sp>
+        <p:nvSpPr>
+          <p:cNvPr id="6" name="Rectangle 5"/>
+          <p:cNvSpPr/>
+          <p:nvPr/>
+        </p:nvSpPr>
+        <p:spPr>
+          <a:xfrm>
+            <a:off x="548640" y="1965960"/>
+            <a:ext cx="82296" cy="1600200"/>
+          </a:xfrm>
+          <a:prstGeom prst="rect">
+            <a:avLst/>
+          </a:prstGeom>
+          <a:solidFill>
+            <a:srgbClr val="D97706"/>
+          </a:solidFill>
+          <a:ln>
+            <a:noFill/>
+          </a:ln>
+          <a:effectLst/>
+        </p:spPr>
+        <p:style>
+          <a:lnRef idx="1">
+            <a:schemeClr val="accent1"/>
+          </a:lnRef>
+          <a:fillRef idx="3">
+            <a:schemeClr val="accent1"/>
+          </a:fillRef>
+          <a:effectRef idx="2">
+            <a:schemeClr val="accent1"/>
+          </a:effectRef>
+          <a:fontRef idx="minor">
+            <a:schemeClr val="lt1"/>
+          </a:fontRef>
+        </p:style>
+        <p:txBody>
+          <a:bodyPr rtlCol="0" anchor="ctr"/>
+          <a:lstStyle/>
+          <a:p>
+            <a:pPr algn="ctr"/>
+          </a:p>
+        </p:txBody>
+      </p:sp>
+      <p:sp>
+        <p:nvSpPr>
+          <p:cNvPr id="7" name="TextBox 6"/>
+          <p:cNvSpPr txBox="1"/>
+          <p:nvPr/>
+        </p:nvSpPr>
+        <p:spPr>
+          <a:xfrm>
+            <a:off x="822960" y="2148840"/>
+            <a:ext cx="3154680" cy="1325880"/>
+          </a:xfrm>
+          <a:prstGeom prst="rect">
+            <a:avLst/>
+          </a:prstGeom>
+          <a:noFill/>
+        </p:spPr>
+        <p:txBody>
+          <a:bodyPr wrap="square" anchor="t">
+            <a:spAutoFit/>
+          </a:bodyPr>
+          <a:lstStyle/>
+          <a:p>
+            <a:pPr algn="l">
+              <a:spcAft>
+                <a:spcPts val="800"/>
+              </a:spcAft>
+            </a:pPr>
+            <a:r>
+              <a:rPr sz="1600" b="1">
+                <a:solidFill>
+                  <a:srgbClr val="0F172A"/>
+                </a:solidFill>
+                <a:latin typeface="PingFang TC"/>
+                <a:ea typeface="PingFang TC"/>
+              </a:rPr>
+              <a:t>[Error Handling]</a:t>
+            </a:r>
+          </a:p>
+          <a:p>
+            <a:pPr algn="l">
+              <a:spcAft>
+                <a:spcPts val="400"/>
+              </a:spcAft>
+            </a:pPr>
+            <a:r>
+              <a:rPr sz="1300" b="0">
+                <a:solidFill>
+                  <a:srgbClr val="64748B"/>
+                </a:solidFill>
+                <a:latin typeface="PingFang TC"/>
+                <a:ea typeface="PingFang TC"/>
+              </a:rPr>
+              <a:t>遇到不合法輸入直接 Crash。</a:t>
+            </a:r>
+          </a:p>
+        </p:txBody>
+      </p:sp>
+      <p:sp>
+        <p:nvSpPr>
+          <p:cNvPr id="8" name="Rounded Rectangle 7"/>
+          <p:cNvSpPr/>
+          <p:nvPr/>
+        </p:nvSpPr>
+        <p:spPr>
+          <a:xfrm>
+            <a:off x="4407408" y="1965960"/>
+            <a:ext cx="3611880" cy="1600200"/>
+          </a:xfrm>
+          <a:prstGeom prst="roundRect">
+            <a:avLst/>
+          </a:prstGeom>
+          <a:solidFill>
+            <a:srgbClr val="F1F5F9"/>
+          </a:solidFill>
+          <a:ln>
+            <a:solidFill>
+              <a:srgbClr val="F1F5F9"/>
+            </a:solidFill>
+          </a:ln>
+          <a:effectLst/>
+        </p:spPr>
+        <p:style>
+          <a:lnRef idx="1">
+            <a:schemeClr val="accent1"/>
+          </a:lnRef>
+          <a:fillRef idx="3">
+            <a:schemeClr val="accent1"/>
+          </a:fillRef>
+          <a:effectRef idx="2">
+            <a:schemeClr val="accent1"/>
+          </a:effectRef>
+          <a:fontRef idx="minor">
+            <a:schemeClr val="lt1"/>
+          </a:fontRef>
+        </p:style>
+        <p:txBody>
+          <a:bodyPr rtlCol="0" anchor="ctr"/>
+          <a:lstStyle/>
+          <a:p>
+            <a:pPr algn="ctr"/>
+          </a:p>
+        </p:txBody>
+      </p:sp>
+      <p:sp>
+        <p:nvSpPr>
+          <p:cNvPr id="9" name="Rectangle 8"/>
+          <p:cNvSpPr/>
+          <p:nvPr/>
+        </p:nvSpPr>
+        <p:spPr>
+          <a:xfrm>
+            <a:off x="4407408" y="1965960"/>
+            <a:ext cx="82296" cy="1600200"/>
+          </a:xfrm>
+          <a:prstGeom prst="rect">
+            <a:avLst/>
+          </a:prstGeom>
+          <a:solidFill>
+            <a:srgbClr val="D97706"/>
+          </a:solidFill>
+          <a:ln>
+            <a:noFill/>
+          </a:ln>
+          <a:effectLst/>
+        </p:spPr>
+        <p:style>
+          <a:lnRef idx="1">
+            <a:schemeClr val="accent1"/>
+          </a:lnRef>
+          <a:fillRef idx="3">
+            <a:schemeClr val="accent1"/>
+          </a:fillRef>
+          <a:effectRef idx="2">
+            <a:schemeClr val="accent1"/>
+          </a:effectRef>
+          <a:fontRef idx="minor">
+            <a:schemeClr val="lt1"/>
+          </a:fontRef>
+        </p:style>
+        <p:txBody>
+          <a:bodyPr rtlCol="0" anchor="ctr"/>
+          <a:lstStyle/>
+          <a:p>
+            <a:pPr algn="ctr"/>
+          </a:p>
+        </p:txBody>
+      </p:sp>
+      <p:sp>
+        <p:nvSpPr>
+          <p:cNvPr id="10" name="TextBox 9"/>
+          <p:cNvSpPr txBox="1"/>
+          <p:nvPr/>
+        </p:nvSpPr>
+        <p:spPr>
+          <a:xfrm>
+            <a:off x="4681728" y="2148840"/>
+            <a:ext cx="3154680" cy="1325880"/>
+          </a:xfrm>
+          <a:prstGeom prst="rect">
+            <a:avLst/>
+          </a:prstGeom>
+          <a:noFill/>
+        </p:spPr>
+        <p:txBody>
+          <a:bodyPr wrap="square" anchor="t">
+            <a:spAutoFit/>
+          </a:bodyPr>
+          <a:lstStyle/>
+          <a:p>
+            <a:pPr algn="l">
+              <a:spcAft>
+                <a:spcPts val="800"/>
+              </a:spcAft>
+            </a:pPr>
+            <a:r>
+              <a:rPr sz="1600" b="1">
+                <a:solidFill>
+                  <a:srgbClr val="0F172A"/>
+                </a:solidFill>
+                <a:latin typeface="PingFang TC"/>
+                <a:ea typeface="PingFang TC"/>
+              </a:rPr>
+              <a:t>[Rate Limiting]</a:t>
+            </a:r>
+          </a:p>
+          <a:p>
+            <a:pPr algn="l">
+              <a:spcAft>
+                <a:spcPts val="400"/>
+              </a:spcAft>
+            </a:pPr>
+            <a:r>
+              <a:rPr sz="1300" b="0">
+                <a:solidFill>
+                  <a:srgbClr val="64748B"/>
+                </a:solidFill>
+                <a:latin typeface="PingFang TC"/>
+                <a:ea typeface="PingFang TC"/>
+              </a:rPr>
+              <a:t>毫無防護，極易被 Script 惡意灌爆 API。</a:t>
+            </a:r>
+          </a:p>
+        </p:txBody>
+      </p:sp>
+      <p:sp>
+        <p:nvSpPr>
+          <p:cNvPr id="11" name="Rounded Rectangle 10"/>
+          <p:cNvSpPr/>
+          <p:nvPr/>
+        </p:nvSpPr>
+        <p:spPr>
+          <a:xfrm>
+            <a:off x="8266176" y="1965960"/>
+            <a:ext cx="3611880" cy="1600200"/>
+          </a:xfrm>
+          <a:prstGeom prst="roundRect">
+            <a:avLst/>
+          </a:prstGeom>
+          <a:solidFill>
+            <a:srgbClr val="F1F5F9"/>
+          </a:solidFill>
+          <a:ln>
+            <a:solidFill>
+              <a:srgbClr val="F1F5F9"/>
+            </a:solidFill>
+          </a:ln>
+          <a:effectLst/>
+        </p:spPr>
+        <p:style>
+          <a:lnRef idx="1">
+            <a:schemeClr val="accent1"/>
+          </a:lnRef>
+          <a:fillRef idx="3">
+            <a:schemeClr val="accent1"/>
+          </a:fillRef>
+          <a:effectRef idx="2">
+            <a:schemeClr val="accent1"/>
+          </a:effectRef>
+          <a:fontRef idx="minor">
+            <a:schemeClr val="lt1"/>
+          </a:fontRef>
+        </p:style>
+        <p:txBody>
+          <a:bodyPr rtlCol="0" anchor="ctr"/>
+          <a:lstStyle/>
+          <a:p>
+            <a:pPr algn="ctr"/>
+          </a:p>
+        </p:txBody>
+      </p:sp>
+      <p:sp>
+        <p:nvSpPr>
+          <p:cNvPr id="12" name="Rectangle 11"/>
+          <p:cNvSpPr/>
+          <p:nvPr/>
+        </p:nvSpPr>
+        <p:spPr>
+          <a:xfrm>
+            <a:off x="8266176" y="1965960"/>
+            <a:ext cx="82296" cy="1600200"/>
+          </a:xfrm>
+          <a:prstGeom prst="rect">
+            <a:avLst/>
+          </a:prstGeom>
+          <a:solidFill>
+            <a:srgbClr val="D97706"/>
+          </a:solidFill>
+          <a:ln>
+            <a:noFill/>
+          </a:ln>
+          <a:effectLst/>
+        </p:spPr>
+        <p:style>
+          <a:lnRef idx="1">
+            <a:schemeClr val="accent1"/>
+          </a:lnRef>
+          <a:fillRef idx="3">
+            <a:schemeClr val="accent1"/>
+          </a:fillRef>
+          <a:effectRef idx="2">
+            <a:schemeClr val="accent1"/>
+          </a:effectRef>
+          <a:fontRef idx="minor">
+            <a:schemeClr val="lt1"/>
+          </a:fontRef>
+        </p:style>
+        <p:txBody>
+          <a:bodyPr rtlCol="0" anchor="ctr"/>
+          <a:lstStyle/>
+          <a:p>
+            <a:pPr algn="ctr"/>
+          </a:p>
+        </p:txBody>
+      </p:sp>
+      <p:sp>
+        <p:nvSpPr>
+          <p:cNvPr id="13" name="TextBox 12"/>
+          <p:cNvSpPr txBox="1"/>
+          <p:nvPr/>
+        </p:nvSpPr>
+        <p:spPr>
+          <a:xfrm>
+            <a:off x="8540496" y="2148840"/>
+            <a:ext cx="3154680" cy="1325880"/>
+          </a:xfrm>
+          <a:prstGeom prst="rect">
+            <a:avLst/>
+          </a:prstGeom>
+          <a:noFill/>
+        </p:spPr>
+        <p:txBody>
+          <a:bodyPr wrap="square" anchor="t">
+            <a:spAutoFit/>
+          </a:bodyPr>
+          <a:lstStyle/>
+          <a:p>
+            <a:pPr algn="l">
+              <a:spcAft>
+                <a:spcPts val="800"/>
+              </a:spcAft>
+            </a:pPr>
+            <a:r>
+              <a:rPr sz="1600" b="1">
+                <a:solidFill>
+                  <a:srgbClr val="0F172A"/>
+                </a:solidFill>
+                <a:latin typeface="PingFang TC"/>
+                <a:ea typeface="PingFang TC"/>
+              </a:rPr>
+              <a:t>[Auth &amp; Isolation]</a:t>
+            </a:r>
+          </a:p>
+          <a:p>
+            <a:pPr algn="l">
+              <a:spcAft>
+                <a:spcPts val="400"/>
+              </a:spcAft>
+            </a:pPr>
+            <a:r>
+              <a:rPr sz="1300" b="0">
+                <a:solidFill>
+                  <a:srgbClr val="64748B"/>
+                </a:solidFill>
+                <a:latin typeface="PingFang TC"/>
+                <a:ea typeface="PingFang TC"/>
+              </a:rPr>
+              <a:t>缺乏多租戶概念，資料全公開。</a:t>
+            </a:r>
+          </a:p>
+        </p:txBody>
+      </p:sp>
+      <p:sp>
+        <p:nvSpPr>
+          <p:cNvPr id="14" name="Rounded Rectangle 13"/>
+          <p:cNvSpPr/>
+          <p:nvPr/>
+        </p:nvSpPr>
+        <p:spPr>
+          <a:xfrm>
+            <a:off x="548640" y="3840480"/>
+            <a:ext cx="3611880" cy="1600200"/>
+          </a:xfrm>
+          <a:prstGeom prst="roundRect">
+            <a:avLst/>
+          </a:prstGeom>
+          <a:solidFill>
+            <a:srgbClr val="F1F5F9"/>
+          </a:solidFill>
+          <a:ln>
+            <a:solidFill>
+              <a:srgbClr val="F1F5F9"/>
+            </a:solidFill>
+          </a:ln>
+          <a:effectLst/>
+        </p:spPr>
+        <p:style>
+          <a:lnRef idx="1">
+            <a:schemeClr val="accent1"/>
+          </a:lnRef>
+          <a:fillRef idx="3">
+            <a:schemeClr val="accent1"/>
+          </a:fillRef>
+          <a:effectRef idx="2">
+            <a:schemeClr val="accent1"/>
+          </a:effectRef>
+          <a:fontRef idx="minor">
+            <a:schemeClr val="lt1"/>
+          </a:fontRef>
+        </p:style>
+        <p:txBody>
+          <a:bodyPr rtlCol="0" anchor="ctr"/>
+          <a:lstStyle/>
+          <a:p>
+            <a:pPr algn="ctr"/>
+          </a:p>
+        </p:txBody>
+      </p:sp>
+      <p:sp>
+        <p:nvSpPr>
+          <p:cNvPr id="15" name="Rectangle 14"/>
+          <p:cNvSpPr/>
+          <p:nvPr/>
+        </p:nvSpPr>
+        <p:spPr>
+          <a:xfrm>
+            <a:off x="548640" y="3840480"/>
+            <a:ext cx="82296" cy="1600200"/>
+          </a:xfrm>
+          <a:prstGeom prst="rect">
+            <a:avLst/>
+          </a:prstGeom>
+          <a:solidFill>
+            <a:srgbClr val="0EA5E9"/>
+          </a:solidFill>
+          <a:ln>
+            <a:noFill/>
+          </a:ln>
+          <a:effectLst/>
+        </p:spPr>
+        <p:style>
+          <a:lnRef idx="1">
+            <a:schemeClr val="accent1"/>
+          </a:lnRef>
+          <a:fillRef idx="3">
+            <a:schemeClr val="accent1"/>
+          </a:fillRef>
+          <a:effectRef idx="2">
+            <a:schemeClr val="accent1"/>
+          </a:effectRef>
+          <a:fontRef idx="minor">
+            <a:schemeClr val="lt1"/>
+          </a:fontRef>
+        </p:style>
+        <p:txBody>
+          <a:bodyPr rtlCol="0" anchor="ctr"/>
+          <a:lstStyle/>
+          <a:p>
+            <a:pPr algn="ctr"/>
+          </a:p>
+        </p:txBody>
+      </p:sp>
+      <p:sp>
+        <p:nvSpPr>
+          <p:cNvPr id="16" name="TextBox 15"/>
+          <p:cNvSpPr txBox="1"/>
+          <p:nvPr/>
+        </p:nvSpPr>
+        <p:spPr>
+          <a:xfrm>
+            <a:off x="822960" y="4023360"/>
+            <a:ext cx="3154680" cy="1325880"/>
+          </a:xfrm>
+          <a:prstGeom prst="rect">
+            <a:avLst/>
+          </a:prstGeom>
+          <a:noFill/>
+        </p:spPr>
+        <p:txBody>
+          <a:bodyPr wrap="square" anchor="t">
+            <a:spAutoFit/>
+          </a:bodyPr>
+          <a:lstStyle/>
+          <a:p>
+            <a:pPr algn="l">
+              <a:spcAft>
+                <a:spcPts val="800"/>
+              </a:spcAft>
+            </a:pPr>
+            <a:r>
+              <a:rPr sz="1600" b="1">
+                <a:solidFill>
+                  <a:srgbClr val="0F172A"/>
+                </a:solidFill>
+                <a:latin typeface="PingFang TC"/>
+                <a:ea typeface="PingFang TC"/>
+              </a:rPr>
+              <a:t>[Monitoring]</a:t>
+            </a:r>
+          </a:p>
+          <a:p>
+            <a:pPr algn="l">
+              <a:spcAft>
+                <a:spcPts val="400"/>
+              </a:spcAft>
+            </a:pPr>
+            <a:r>
+              <a:rPr sz="1300" b="0">
+                <a:solidFill>
+                  <a:srgbClr val="64748B"/>
+                </a:solidFill>
+                <a:latin typeface="PingFang TC"/>
+                <a:ea typeface="PingFang TC"/>
+              </a:rPr>
+              <a:t>服務掛了完全沒有 Alerting，處於盲飛狀態。</a:t>
+            </a:r>
+          </a:p>
+        </p:txBody>
+      </p:sp>
+      <p:sp>
+        <p:nvSpPr>
+          <p:cNvPr id="17" name="Rounded Rectangle 16"/>
+          <p:cNvSpPr/>
+          <p:nvPr/>
+        </p:nvSpPr>
+        <p:spPr>
+          <a:xfrm>
+            <a:off x="4407408" y="3840480"/>
+            <a:ext cx="3611880" cy="1600200"/>
+          </a:xfrm>
+          <a:prstGeom prst="roundRect">
+            <a:avLst/>
+          </a:prstGeom>
+          <a:solidFill>
+            <a:srgbClr val="F1F5F9"/>
+          </a:solidFill>
+          <a:ln>
+            <a:solidFill>
+              <a:srgbClr val="F1F5F9"/>
+            </a:solidFill>
+          </a:ln>
+          <a:effectLst/>
+        </p:spPr>
+        <p:style>
+          <a:lnRef idx="1">
+            <a:schemeClr val="accent1"/>
+          </a:lnRef>
+          <a:fillRef idx="3">
+            <a:schemeClr val="accent1"/>
+          </a:fillRef>
+          <a:effectRef idx="2">
+            <a:schemeClr val="accent1"/>
+          </a:effectRef>
+          <a:fontRef idx="minor">
+            <a:schemeClr val="lt1"/>
+          </a:fontRef>
+        </p:style>
+        <p:txBody>
+          <a:bodyPr rtlCol="0" anchor="ctr"/>
+          <a:lstStyle/>
+          <a:p>
+            <a:pPr algn="ctr"/>
+          </a:p>
+        </p:txBody>
+      </p:sp>
+      <p:sp>
+        <p:nvSpPr>
+          <p:cNvPr id="18" name="Rectangle 17"/>
+          <p:cNvSpPr/>
+          <p:nvPr/>
+        </p:nvSpPr>
+        <p:spPr>
+          <a:xfrm>
+            <a:off x="4407408" y="3840480"/>
+            <a:ext cx="82296" cy="1600200"/>
+          </a:xfrm>
+          <a:prstGeom prst="rect">
+            <a:avLst/>
+          </a:prstGeom>
+          <a:solidFill>
+            <a:srgbClr val="0EA5E9"/>
+          </a:solidFill>
+          <a:ln>
+            <a:noFill/>
+          </a:ln>
+          <a:effectLst/>
+        </p:spPr>
+        <p:style>
+          <a:lnRef idx="1">
+            <a:schemeClr val="accent1"/>
+          </a:lnRef>
+          <a:fillRef idx="3">
+            <a:schemeClr val="accent1"/>
+          </a:fillRef>
+          <a:effectRef idx="2">
+            <a:schemeClr val="accent1"/>
+          </a:effectRef>
+          <a:fontRef idx="minor">
+            <a:schemeClr val="lt1"/>
+          </a:fontRef>
+        </p:style>
+        <p:txBody>
+          <a:bodyPr rtlCol="0" anchor="ctr"/>
+          <a:lstStyle/>
+          <a:p>
+            <a:pPr algn="ctr"/>
+          </a:p>
+        </p:txBody>
+      </p:sp>
+      <p:sp>
+        <p:nvSpPr>
+          <p:cNvPr id="19" name="TextBox 18"/>
+          <p:cNvSpPr txBox="1"/>
+          <p:nvPr/>
+        </p:nvSpPr>
+        <p:spPr>
+          <a:xfrm>
+            <a:off x="4681728" y="4023360"/>
+            <a:ext cx="3154680" cy="1325880"/>
+          </a:xfrm>
+          <a:prstGeom prst="rect">
+            <a:avLst/>
+          </a:prstGeom>
+          <a:noFill/>
+        </p:spPr>
+        <p:txBody>
+          <a:bodyPr wrap="square" anchor="t">
+            <a:spAutoFit/>
+          </a:bodyPr>
+          <a:lstStyle/>
+          <a:p>
+            <a:pPr algn="l">
+              <a:spcAft>
+                <a:spcPts val="800"/>
+              </a:spcAft>
+            </a:pPr>
+            <a:r>
+              <a:rPr sz="1600" b="1">
+                <a:solidFill>
+                  <a:srgbClr val="0F172A"/>
+                </a:solidFill>
+                <a:latin typeface="PingFang TC"/>
+                <a:ea typeface="PingFang TC"/>
+              </a:rPr>
+              <a:t>[Data Cleanup]</a:t>
+            </a:r>
+          </a:p>
+          <a:p>
+            <a:pPr algn="l">
+              <a:spcAft>
+                <a:spcPts val="400"/>
+              </a:spcAft>
+            </a:pPr>
+            <a:r>
+              <a:rPr sz="1300" b="0">
+                <a:solidFill>
+                  <a:srgbClr val="64748B"/>
+                </a:solidFill>
+                <a:latin typeface="PingFang TC"/>
+                <a:ea typeface="PingFang TC"/>
+              </a:rPr>
+              <a:t>過期資料永不刪除，一年後 DB 將面臨嚴重 Bloat。</a:t>
+            </a:r>
+          </a:p>
+        </p:txBody>
+      </p:sp>
+      <p:sp>
+        <p:nvSpPr>
+          <p:cNvPr id="20" name="Rounded Rectangle 19"/>
+          <p:cNvSpPr/>
+          <p:nvPr/>
+        </p:nvSpPr>
+        <p:spPr>
+          <a:xfrm>
+            <a:off x="8266176" y="3840480"/>
+            <a:ext cx="3611880" cy="1600200"/>
+          </a:xfrm>
+          <a:prstGeom prst="roundRect">
+            <a:avLst/>
+          </a:prstGeom>
+          <a:solidFill>
+            <a:srgbClr val="F1F5F9"/>
+          </a:solidFill>
+          <a:ln>
+            <a:solidFill>
+              <a:srgbClr val="F1F5F9"/>
+            </a:solidFill>
+          </a:ln>
+          <a:effectLst/>
+        </p:spPr>
+        <p:style>
+          <a:lnRef idx="1">
+            <a:schemeClr val="accent1"/>
+          </a:lnRef>
+          <a:fillRef idx="3">
+            <a:schemeClr val="accent1"/>
+          </a:fillRef>
+          <a:effectRef idx="2">
+            <a:schemeClr val="accent1"/>
+          </a:effectRef>
+          <a:fontRef idx="minor">
+            <a:schemeClr val="lt1"/>
+          </a:fontRef>
+        </p:style>
+        <p:txBody>
+          <a:bodyPr rtlCol="0" anchor="ctr"/>
+          <a:lstStyle/>
+          <a:p>
+            <a:pPr algn="ctr"/>
+          </a:p>
+        </p:txBody>
+      </p:sp>
+      <p:sp>
+        <p:nvSpPr>
+          <p:cNvPr id="21" name="Rectangle 20"/>
+          <p:cNvSpPr/>
+          <p:nvPr/>
+        </p:nvSpPr>
+        <p:spPr>
+          <a:xfrm>
+            <a:off x="8266176" y="3840480"/>
+            <a:ext cx="82296" cy="1600200"/>
+          </a:xfrm>
+          <a:prstGeom prst="rect">
+            <a:avLst/>
+          </a:prstGeom>
+          <a:solidFill>
+            <a:srgbClr val="0EA5E9"/>
+          </a:solidFill>
+          <a:ln>
+            <a:noFill/>
+          </a:ln>
+          <a:effectLst/>
+        </p:spPr>
+        <p:style>
+          <a:lnRef idx="1">
+            <a:schemeClr val="accent1"/>
+          </a:lnRef>
+          <a:fillRef idx="3">
+            <a:schemeClr val="accent1"/>
+          </a:fillRef>
+          <a:effectRef idx="2">
+            <a:schemeClr val="accent1"/>
+          </a:effectRef>
+          <a:fontRef idx="minor">
+            <a:schemeClr val="lt1"/>
+          </a:fontRef>
+        </p:style>
+        <p:txBody>
+          <a:bodyPr rtlCol="0" anchor="ctr"/>
+          <a:lstStyle/>
+          <a:p>
+            <a:pPr algn="ctr"/>
+          </a:p>
+        </p:txBody>
+      </p:sp>
+      <p:sp>
+        <p:nvSpPr>
+          <p:cNvPr id="22" name="TextBox 21"/>
+          <p:cNvSpPr txBox="1"/>
+          <p:nvPr/>
+        </p:nvSpPr>
+        <p:spPr>
+          <a:xfrm>
+            <a:off x="8540496" y="4023360"/>
+            <a:ext cx="3154680" cy="1325880"/>
+          </a:xfrm>
+          <a:prstGeom prst="rect">
+            <a:avLst/>
+          </a:prstGeom>
+          <a:noFill/>
+        </p:spPr>
+        <p:txBody>
+          <a:bodyPr wrap="square" anchor="t">
+            <a:spAutoFit/>
+          </a:bodyPr>
+          <a:lstStyle/>
+          <a:p>
+            <a:pPr algn="l">
+              <a:spcAft>
+                <a:spcPts val="800"/>
+              </a:spcAft>
+            </a:pPr>
+            <a:r>
+              <a:rPr sz="1600" b="1">
+                <a:solidFill>
+                  <a:srgbClr val="0F172A"/>
+                </a:solidFill>
+                <a:latin typeface="PingFang TC"/>
+                <a:ea typeface="PingFang TC"/>
+              </a:rPr>
+              <a:t>[Caching / CDN]</a:t>
+            </a:r>
+          </a:p>
+          <a:p>
+            <a:pPr algn="l">
+              <a:spcAft>
+                <a:spcPts val="400"/>
+              </a:spcAft>
+            </a:pPr>
+            <a:r>
+              <a:rPr sz="1300" b="0">
+                <a:solidFill>
+                  <a:srgbClr val="64748B"/>
+                </a:solidFill>
+                <a:latin typeface="PingFang TC"/>
+                <a:ea typeface="PingFang TC"/>
+              </a:rPr>
+              <a:t>每次轉址都直擊 DB，流量一來直接癱瘓。
+→ 下週 Deep Dive 展開</a:t>
+            </a:r>
+          </a:p>
+        </p:txBody>
+      </p:sp>
+    </p:spTree>
+  </p:cSld>
+  <p:clrMapOvr>
+    <a:masterClrMapping/>
+  </p:clrMapOvr>
+</p:sld>
+</file>
+
+<file path=ppt/slides/slide28.xml><?xml version="1.0" encoding="utf-8"?>
+<p:sld xmlns:a="http://schemas.openxmlformats.org/drawingml/2006/main" xmlns:p="http://schemas.openxmlformats.org/presentationml/2006/main" xmlns:r="http://schemas.openxmlformats.org/officeDocument/2006/relationships">
+  <p:cSld>
+    <p:spTree>
+      <p:nvGrpSpPr>
+        <p:cNvPr id="1" name=""/>
+        <p:cNvGrpSpPr/>
+        <p:nvPr/>
+      </p:nvGrpSpPr>
+      <p:grpSpPr/>
+      <p:sp>
+        <p:nvSpPr>
+          <p:cNvPr id="2" name="Rectangle 1"/>
+          <p:cNvSpPr/>
+          <p:nvPr/>
+        </p:nvSpPr>
+        <p:spPr>
+          <a:xfrm>
+            <a:off x="0" y="0"/>
+            <a:ext cx="164592" cy="6858000"/>
+          </a:xfrm>
+          <a:prstGeom prst="rect">
+            <a:avLst/>
+          </a:prstGeom>
+          <a:solidFill>
+            <a:srgbClr val="2563EB"/>
+          </a:solidFill>
+          <a:ln>
+            <a:noFill/>
+          </a:ln>
+          <a:effectLst/>
+        </p:spPr>
+        <p:style>
+          <a:lnRef idx="1">
+            <a:schemeClr val="accent1"/>
+          </a:lnRef>
+          <a:fillRef idx="3">
+            <a:schemeClr val="accent1"/>
+          </a:fillRef>
+          <a:effectRef idx="2">
+            <a:schemeClr val="accent1"/>
+          </a:effectRef>
+          <a:fontRef idx="minor">
+            <a:schemeClr val="lt1"/>
+          </a:fontRef>
+        </p:style>
+        <p:txBody>
+          <a:bodyPr rtlCol="0" anchor="ctr"/>
+          <a:lstStyle/>
+          <a:p>
+            <a:pPr algn="ctr"/>
+          </a:p>
+        </p:txBody>
+      </p:sp>
+      <p:sp>
+        <p:nvSpPr>
+          <p:cNvPr id="3" name="TextBox 2"/>
+          <p:cNvSpPr txBox="1"/>
+          <p:nvPr/>
+        </p:nvSpPr>
+        <p:spPr>
+          <a:xfrm>
+            <a:off x="502920" y="320040"/>
+            <a:ext cx="10972800" cy="1005840"/>
+          </a:xfrm>
+          <a:prstGeom prst="rect">
+            <a:avLst/>
+          </a:prstGeom>
+          <a:noFill/>
+        </p:spPr>
+        <p:txBody>
+          <a:bodyPr wrap="square" anchor="t">
+            <a:spAutoFit/>
+          </a:bodyPr>
+          <a:lstStyle/>
+          <a:p>
+            <a:pPr algn="l">
+              <a:spcAft>
+                <a:spcPts val="200"/>
+              </a:spcAft>
+            </a:pPr>
+            <a:r>
+              <a:rPr sz="1300" b="1">
+                <a:solidFill>
+                  <a:srgbClr val="2563EB"/>
+                </a:solidFill>
+                <a:latin typeface="PingFang TC"/>
+                <a:ea typeface="PingFang TC"/>
+              </a:rPr>
+              <a:t>下週預告 · DEEP DIVE</a:t>
+            </a:r>
+          </a:p>
+          <a:p>
+            <a:pPr algn="l">
+              <a:spcAft>
+                <a:spcPts val="400"/>
+              </a:spcAft>
+            </a:pPr>
+            <a:r>
+              <a:rPr sz="3000" b="1">
+                <a:solidFill>
+                  <a:srgbClr val="0F172A"/>
+                </a:solidFill>
+                <a:latin typeface="PingFang TC"/>
+                <a:ea typeface="PingFang TC"/>
+              </a:rPr>
+              <a:t>壓力測試與極限擴展 (Deep Dive)</a:t>
+            </a:r>
+          </a:p>
+        </p:txBody>
+      </p:sp>
+      <p:sp>
+        <p:nvSpPr>
+          <p:cNvPr id="4" name="TextBox 3"/>
+          <p:cNvSpPr txBox="1"/>
+          <p:nvPr/>
+        </p:nvSpPr>
+        <p:spPr>
+          <a:xfrm>
+            <a:off x="548640" y="2011680"/>
+            <a:ext cx="5486400" cy="2926080"/>
+          </a:xfrm>
+          <a:prstGeom prst="rect">
+            <a:avLst/>
+          </a:prstGeom>
+          <a:noFill/>
+        </p:spPr>
+        <p:txBody>
+          <a:bodyPr wrap="square" anchor="t">
+            <a:spAutoFit/>
+          </a:bodyPr>
+          <a:lstStyle/>
+          <a:p>
+            <a:pPr algn="l">
+              <a:spcAft>
+                <a:spcPts val="1600"/>
+              </a:spcAft>
+            </a:pPr>
+            <a:r>
+              <a:rPr sz="2600" b="1">
+                <a:solidFill>
+                  <a:srgbClr val="2563EB"/>
+                </a:solidFill>
+                <a:latin typeface="PingFang TC"/>
+                <a:ea typeface="PingFang TC"/>
+              </a:rPr>
+              <a:t>1,000 QPS  →  50,000 QPS</a:t>
+            </a:r>
+          </a:p>
+          <a:p>
+            <a:pPr algn="l">
+              <a:spcAft>
+                <a:spcPts val="400"/>
+              </a:spcAft>
+            </a:pPr>
+            <a:r>
+              <a:rPr sz="1900" b="1">
+                <a:solidFill>
+                  <a:srgbClr val="0F172A"/>
+                </a:solidFill>
+                <a:latin typeface="PingFang TC"/>
+                <a:ea typeface="PingFang TC"/>
+              </a:rPr>
+              <a:t>當大型客戶上線，</a:t>
+            </a:r>
+          </a:p>
+          <a:p>
+            <a:pPr algn="l">
+              <a:spcAft>
+                <a:spcPts val="400"/>
+              </a:spcAft>
+            </a:pPr>
+            <a:r>
+              <a:rPr sz="1900" b="1">
+                <a:solidFill>
+                  <a:srgbClr val="0F172A"/>
+                </a:solidFill>
+                <a:latin typeface="PingFang TC"/>
+                <a:ea typeface="PingFang TC"/>
+              </a:rPr>
+              <a:t>流量瞬間暴增 50 倍，</a:t>
+            </a:r>
+          </a:p>
+          <a:p>
+            <a:pPr algn="l">
+              <a:spcAft>
+                <a:spcPts val="400"/>
+              </a:spcAft>
+            </a:pPr>
+            <a:r>
+              <a:rPr sz="1900" b="1">
+                <a:solidFill>
+                  <a:srgbClr val="0F172A"/>
+                </a:solidFill>
+                <a:latin typeface="PingFang TC"/>
+                <a:ea typeface="PingFang TC"/>
+              </a:rPr>
+              <a:t>這個架構哪會先崩潰？</a:t>
+            </a:r>
+          </a:p>
+        </p:txBody>
+      </p:sp>
+      <p:sp>
+        <p:nvSpPr>
+          <p:cNvPr id="5" name="TextBox 4"/>
+          <p:cNvSpPr txBox="1"/>
+          <p:nvPr/>
+        </p:nvSpPr>
+        <p:spPr>
+          <a:xfrm>
+            <a:off x="6400800" y="2057400"/>
+            <a:ext cx="5303520" cy="2194560"/>
+          </a:xfrm>
+          <a:prstGeom prst="rect">
+            <a:avLst/>
+          </a:prstGeom>
+          <a:noFill/>
+        </p:spPr>
+        <p:txBody>
+          <a:bodyPr wrap="square">
+            <a:spAutoFit/>
+          </a:bodyPr>
+          <a:lstStyle/>
+          <a:p>
+            <a:pPr>
+              <a:spcAft>
+                <a:spcPts val="1400"/>
+              </a:spcAft>
+            </a:pPr>
+            <a:r>
+              <a:rPr sz="1600" b="0">
+                <a:solidFill>
+                  <a:srgbClr val="0F172A"/>
+                </a:solidFill>
+                <a:latin typeface="PingFang TC"/>
+                <a:ea typeface="PingFang TC"/>
+              </a:rPr>
+              <a:t>•  流量暴增 Scenario 推演（Server vs DB vs Network）</a:t>
+            </a:r>
+          </a:p>
+          <a:p>
+            <a:pPr>
+              <a:spcAft>
+                <a:spcPts val="1400"/>
+              </a:spcAft>
+            </a:pPr>
+            <a:r>
+              <a:rPr sz="1600" b="0">
+                <a:solidFill>
+                  <a:srgbClr val="0F172A"/>
+                </a:solidFill>
+                <a:latin typeface="PingFang TC"/>
+                <a:ea typeface="PingFang TC"/>
+              </a:rPr>
+              <a:t>•  Event-Driven Analytics Pipeline 架構</a:t>
+            </a:r>
+          </a:p>
+          <a:p>
+            <a:pPr>
+              <a:spcAft>
+                <a:spcPts val="1400"/>
+              </a:spcAft>
+            </a:pPr>
+            <a:r>
+              <a:rPr sz="1600" b="0">
+                <a:solidFill>
+                  <a:srgbClr val="0F172A"/>
+                </a:solidFill>
+                <a:latin typeface="PingFang TC"/>
+                <a:ea typeface="PingFang TC"/>
+              </a:rPr>
+              <a:t>•  System Design 面試實戰答題框架</a:t>
+            </a:r>
+          </a:p>
+        </p:txBody>
+      </p:sp>
+      <p:sp>
+        <p:nvSpPr>
+          <p:cNvPr id="6" name="Rounded Rectangle 5"/>
+          <p:cNvSpPr/>
+          <p:nvPr/>
+        </p:nvSpPr>
+        <p:spPr>
+          <a:xfrm>
+            <a:off x="6400800" y="4343400"/>
+            <a:ext cx="5303520" cy="1051560"/>
+          </a:xfrm>
+          <a:prstGeom prst="roundRect">
+            <a:avLst/>
+          </a:prstGeom>
+          <a:solidFill>
+            <a:srgbClr val="F1F5F9"/>
+          </a:solidFill>
+          <a:ln>
+            <a:solidFill>
+              <a:srgbClr val="F1F5F9"/>
+            </a:solidFill>
+          </a:ln>
+          <a:effectLst/>
+        </p:spPr>
+        <p:style>
+          <a:lnRef idx="1">
+            <a:schemeClr val="accent1"/>
+          </a:lnRef>
+          <a:fillRef idx="3">
+            <a:schemeClr val="accent1"/>
+          </a:fillRef>
+          <a:effectRef idx="2">
+            <a:schemeClr val="accent1"/>
+          </a:effectRef>
+          <a:fontRef idx="minor">
+            <a:schemeClr val="lt1"/>
+          </a:fontRef>
+        </p:style>
+        <p:txBody>
+          <a:bodyPr rtlCol="0" anchor="ctr"/>
+          <a:lstStyle/>
+          <a:p>
+            <a:pPr algn="ctr"/>
+          </a:p>
+        </p:txBody>
+      </p:sp>
+      <p:sp>
+        <p:nvSpPr>
+          <p:cNvPr id="7" name="Rectangle 6"/>
+          <p:cNvSpPr/>
+          <p:nvPr/>
+        </p:nvSpPr>
+        <p:spPr>
+          <a:xfrm>
+            <a:off x="6400800" y="4343400"/>
+            <a:ext cx="82296" cy="1051560"/>
+          </a:xfrm>
+          <a:prstGeom prst="rect">
+            <a:avLst/>
+          </a:prstGeom>
+          <a:solidFill>
+            <a:srgbClr val="0EA5E9"/>
+          </a:solidFill>
+          <a:ln>
+            <a:noFill/>
+          </a:ln>
+          <a:effectLst/>
+        </p:spPr>
+        <p:style>
+          <a:lnRef idx="1">
+            <a:schemeClr val="accent1"/>
+          </a:lnRef>
+          <a:fillRef idx="3">
+            <a:schemeClr val="accent1"/>
+          </a:fillRef>
+          <a:effectRef idx="2">
+            <a:schemeClr val="accent1"/>
+          </a:effectRef>
+          <a:fontRef idx="minor">
+            <a:schemeClr val="lt1"/>
+          </a:fontRef>
+        </p:style>
+        <p:txBody>
+          <a:bodyPr rtlCol="0" anchor="ctr"/>
+          <a:lstStyle/>
+          <a:p>
+            <a:pPr algn="ctr"/>
+          </a:p>
+        </p:txBody>
+      </p:sp>
+      <p:sp>
+        <p:nvSpPr>
+          <p:cNvPr id="8" name="TextBox 7"/>
+          <p:cNvSpPr txBox="1"/>
+          <p:nvPr/>
+        </p:nvSpPr>
+        <p:spPr>
+          <a:xfrm>
+            <a:off x="6675120" y="4526280"/>
+            <a:ext cx="4846320" cy="822960"/>
+          </a:xfrm>
+          <a:prstGeom prst="rect">
+            <a:avLst/>
+          </a:prstGeom>
+          <a:noFill/>
+        </p:spPr>
+        <p:txBody>
+          <a:bodyPr wrap="square" anchor="t">
+            <a:spAutoFit/>
+          </a:bodyPr>
+          <a:lstStyle/>
+          <a:p>
+            <a:pPr algn="l">
+              <a:spcAft>
+                <a:spcPts val="600"/>
+              </a:spcAft>
+            </a:pPr>
+            <a:r>
+              <a:rPr sz="1500" b="1">
+                <a:solidFill>
+                  <a:srgbClr val="0F172A"/>
+                </a:solidFill>
+                <a:latin typeface="PingFang TC"/>
+                <a:ea typeface="PingFang TC"/>
+              </a:rPr>
+              <a:t>課前準備</a:t>
+            </a:r>
+          </a:p>
+          <a:p>
+            <a:pPr algn="l">
+              <a:spcAft>
+                <a:spcPts val="400"/>
+              </a:spcAft>
+            </a:pPr>
+            <a:r>
+              <a:rPr sz="1400" b="0">
+                <a:solidFill>
+                  <a:srgbClr val="64748B"/>
+                </a:solidFill>
+                <a:latin typeface="PingFang TC"/>
+                <a:ea typeface="PingFang TC"/>
+              </a:rPr>
+              <a:t>複習教材 Deep Dive 章節</a:t>
             </a:r>
           </a:p>
         </p:txBody>

--- a/QR Code Generator/QR_Code_Generator.pptx
+++ b/QR Code Generator/QR_Code_Generator.pptx
@@ -33,6 +33,7 @@
     <p:sldId id="281" r:id="rId32"/>
     <p:sldId id="282" r:id="rId33"/>
     <p:sldId id="283" r:id="rId34"/>
+    <p:sldId id="284" r:id="rId35"/>
   </p:sldIdLst>
   <p:sldSz cx="12191695" cy="6858000" type="screen4x3"/>
   <p:notesSz cx="6858000" cy="9144000"/>
@@ -12754,7 +12755,7 @@
                           <a:latin typeface="PingFang TC"/>
                           <a:ea typeface="PingFang TC"/>
                         </a:rPr>
-                        <a:t>無 user，資料全域</a:t>
+                        <a:t>✅ 已實作</a:t>
                       </a:r>
                     </a:p>
                   </a:txBody>
@@ -12777,7 +12778,7 @@
                           <a:latin typeface="PingFang TC"/>
                           <a:ea typeface="PingFang TC"/>
                         </a:rPr>
-                        <a:t>登入 + user_id 隔離</a:t>
+                        <a:t>Cognito + JWT + owner_id 隔離</a:t>
                       </a:r>
                     </a:p>
                   </a:txBody>
@@ -13422,7 +13423,7 @@
                 <a:latin typeface="PingFang TC"/>
                 <a:ea typeface="PingFang TC"/>
               </a:rPr>
-              <a:t>(HTTP API · 節流)</a:t>
+              <a:t>(JWT auth · 節流)</a:t>
             </a:r>
           </a:p>
         </p:txBody>
@@ -13430,6 +13431,111 @@
       <p:sp>
         <p:nvSpPr>
           <p:cNvPr id="8" name="Rounded Rectangle 7"/>
+          <p:cNvSpPr/>
+          <p:nvPr/>
+        </p:nvSpPr>
+        <p:spPr>
+          <a:xfrm>
+            <a:off x="4297680" y="1417320"/>
+            <a:ext cx="1828800" cy="640080"/>
+          </a:xfrm>
+          <a:prstGeom prst="roundRect">
+            <a:avLst/>
+          </a:prstGeom>
+          <a:solidFill>
+            <a:srgbClr val="059669"/>
+          </a:solidFill>
+          <a:ln>
+            <a:solidFill>
+              <a:srgbClr val="059669"/>
+            </a:solidFill>
+          </a:ln>
+          <a:effectLst/>
+        </p:spPr>
+        <p:style>
+          <a:lnRef idx="1">
+            <a:schemeClr val="accent1"/>
+          </a:lnRef>
+          <a:fillRef idx="3">
+            <a:schemeClr val="accent1"/>
+          </a:fillRef>
+          <a:effectRef idx="2">
+            <a:schemeClr val="accent1"/>
+          </a:effectRef>
+          <a:fontRef idx="minor">
+            <a:schemeClr val="lt1"/>
+          </a:fontRef>
+        </p:style>
+        <p:txBody>
+          <a:bodyPr rtlCol="0" anchor="ctr" wrap="square" tIns="25400" bIns="25400"/>
+          <a:lstStyle/>
+          <a:p>
+            <a:pPr algn="ctr"/>
+            <a:r>
+              <a:rPr sz="1100" b="1">
+                <a:solidFill>
+                  <a:srgbClr val="FFFFFF"/>
+                </a:solidFill>
+                <a:latin typeface="PingFang TC"/>
+                <a:ea typeface="PingFang TC"/>
+              </a:rPr>
+              <a:t>Cognito</a:t>
+            </a:r>
+          </a:p>
+          <a:p>
+            <a:pPr algn="ctr"/>
+            <a:r>
+              <a:rPr sz="1100" b="0">
+                <a:solidFill>
+                  <a:srgbClr val="FFFFFF"/>
+                </a:solidFill>
+                <a:latin typeface="PingFang TC"/>
+                <a:ea typeface="PingFang TC"/>
+              </a:rPr>
+              <a:t>(user pool)</a:t>
+            </a:r>
+          </a:p>
+        </p:txBody>
+      </p:sp>
+      <p:cxnSp>
+        <p:nvCxnSpPr>
+          <p:cNvPr id="9" name="Connector 8"/>
+          <p:cNvCxnSpPr/>
+          <p:nvPr/>
+        </p:nvCxnSpPr>
+        <p:spPr>
+          <a:xfrm flipV="1">
+            <a:off x="5212080" y="2057400"/>
+            <a:ext cx="0" cy="411480"/>
+          </a:xfrm>
+          <a:prstGeom prst="line">
+            <a:avLst/>
+          </a:prstGeom>
+          <a:ln w="15240">
+            <a:solidFill>
+              <a:srgbClr val="64748B"/>
+            </a:solidFill>
+            <a:tailEnd type="triangle" w="med" len="med"/>
+          </a:ln>
+        </p:spPr>
+        <p:style>
+          <a:lnRef idx="2">
+            <a:schemeClr val="accent1"/>
+          </a:lnRef>
+          <a:fillRef idx="0">
+            <a:schemeClr val="accent1"/>
+          </a:fillRef>
+          <a:effectRef idx="1">
+            <a:schemeClr val="accent1"/>
+          </a:effectRef>
+          <a:fontRef idx="minor">
+            <a:schemeClr val="tx1"/>
+          </a:fontRef>
+        </p:style>
+      </p:cxnSp>
+      <p:sp>
+        <p:nvSpPr>
+          <p:cNvPr id="10" name="Rounded Rectangle 9"/>
           <p:cNvSpPr/>
           <p:nvPr/>
         </p:nvSpPr>
@@ -13498,7 +13604,7 @@
       </p:sp>
       <p:sp>
         <p:nvSpPr>
-          <p:cNvPr id="9" name="Rounded Rectangle 8"/>
+          <p:cNvPr id="11" name="Rounded Rectangle 10"/>
           <p:cNvSpPr/>
           <p:nvPr/>
         </p:nvSpPr>
@@ -13567,7 +13673,7 @@
       </p:sp>
       <p:sp>
         <p:nvSpPr>
-          <p:cNvPr id="10" name="Rounded Rectangle 9"/>
+          <p:cNvPr id="12" name="Rounded Rectangle 11"/>
           <p:cNvSpPr/>
           <p:nvPr/>
         </p:nvSpPr>
@@ -13623,7 +13729,7 @@
       </p:sp>
       <p:sp>
         <p:nvSpPr>
-          <p:cNvPr id="11" name="Rounded Rectangle 10"/>
+          <p:cNvPr id="13" name="Rounded Rectangle 12"/>
           <p:cNvSpPr/>
           <p:nvPr/>
         </p:nvSpPr>
@@ -13679,85 +13785,13 @@
       </p:sp>
       <p:cxnSp>
         <p:nvCxnSpPr>
-          <p:cNvPr id="12" name="Connector 11"/>
-          <p:cNvCxnSpPr/>
-          <p:nvPr/>
-        </p:nvCxnSpPr>
-        <p:spPr>
-          <a:xfrm>
-            <a:off x="2011680" y="2852928"/>
-            <a:ext cx="228600" cy="0"/>
-          </a:xfrm>
-          <a:prstGeom prst="line">
-            <a:avLst/>
-          </a:prstGeom>
-          <a:ln w="22225">
-            <a:solidFill>
-              <a:srgbClr val="64748B"/>
-            </a:solidFill>
-            <a:tailEnd type="triangle" w="med" len="med"/>
-          </a:ln>
-        </p:spPr>
-        <p:style>
-          <a:lnRef idx="2">
-            <a:schemeClr val="accent1"/>
-          </a:lnRef>
-          <a:fillRef idx="0">
-            <a:schemeClr val="accent1"/>
-          </a:fillRef>
-          <a:effectRef idx="1">
-            <a:schemeClr val="accent1"/>
-          </a:effectRef>
-          <a:fontRef idx="minor">
-            <a:schemeClr val="tx1"/>
-          </a:fontRef>
-        </p:style>
-      </p:cxnSp>
-      <p:cxnSp>
-        <p:nvCxnSpPr>
-          <p:cNvPr id="13" name="Connector 12"/>
-          <p:cNvCxnSpPr/>
-          <p:nvPr/>
-        </p:nvCxnSpPr>
-        <p:spPr>
-          <a:xfrm flipV="1">
-            <a:off x="3154680" y="2057400"/>
-            <a:ext cx="0" cy="411480"/>
-          </a:xfrm>
-          <a:prstGeom prst="line">
-            <a:avLst/>
-          </a:prstGeom>
-          <a:ln w="15240">
-            <a:solidFill>
-              <a:srgbClr val="64748B"/>
-            </a:solidFill>
-            <a:tailEnd type="triangle" w="med" len="med"/>
-          </a:ln>
-        </p:spPr>
-        <p:style>
-          <a:lnRef idx="2">
-            <a:schemeClr val="accent1"/>
-          </a:lnRef>
-          <a:fillRef idx="0">
-            <a:schemeClr val="accent1"/>
-          </a:fillRef>
-          <a:effectRef idx="1">
-            <a:schemeClr val="accent1"/>
-          </a:effectRef>
-          <a:fontRef idx="minor">
-            <a:schemeClr val="tx1"/>
-          </a:fontRef>
-        </p:style>
-      </p:cxnSp>
-      <p:cxnSp>
-        <p:nvCxnSpPr>
           <p:cNvPr id="14" name="Connector 13"/>
           <p:cNvCxnSpPr/>
           <p:nvPr/>
         </p:nvCxnSpPr>
         <p:spPr>
           <a:xfrm>
-            <a:off x="4069080" y="2852928"/>
+            <a:off x="2011680" y="2852928"/>
             <a:ext cx="228600" cy="0"/>
           </a:xfrm>
           <a:prstGeom prst="line">
@@ -13792,14 +13826,14 @@
           <p:nvPr/>
         </p:nvCxnSpPr>
         <p:spPr>
-          <a:xfrm>
-            <a:off x="6126480" y="2852928"/>
-            <a:ext cx="228600" cy="0"/>
+          <a:xfrm flipV="1">
+            <a:off x="3154680" y="2057400"/>
+            <a:ext cx="0" cy="411480"/>
           </a:xfrm>
           <a:prstGeom prst="line">
             <a:avLst/>
           </a:prstGeom>
-          <a:ln w="22225">
+          <a:ln w="15240">
             <a:solidFill>
               <a:srgbClr val="64748B"/>
             </a:solidFill>
@@ -13829,7 +13863,7 @@
         </p:nvCxnSpPr>
         <p:spPr>
           <a:xfrm>
-            <a:off x="7818120" y="2852928"/>
+            <a:off x="4069080" y="2852928"/>
             <a:ext cx="228600" cy="0"/>
           </a:xfrm>
           <a:prstGeom prst="line">
@@ -13865,13 +13899,13 @@
         </p:nvCxnSpPr>
         <p:spPr>
           <a:xfrm>
-            <a:off x="9006840" y="3337560"/>
-            <a:ext cx="0" cy="274320"/>
+            <a:off x="6126480" y="2852928"/>
+            <a:ext cx="228600" cy="0"/>
           </a:xfrm>
           <a:prstGeom prst="line">
             <a:avLst/>
           </a:prstGeom>
-          <a:ln w="15240">
+          <a:ln w="22225">
             <a:solidFill>
               <a:srgbClr val="64748B"/>
             </a:solidFill>
@@ -13901,8 +13935,44 @@
         </p:nvCxnSpPr>
         <p:spPr>
           <a:xfrm>
-            <a:off x="9006840" y="4251960"/>
-            <a:ext cx="0" cy="137160"/>
+            <a:off x="7818120" y="2852928"/>
+            <a:ext cx="228600" cy="0"/>
+          </a:xfrm>
+          <a:prstGeom prst="line">
+            <a:avLst/>
+          </a:prstGeom>
+          <a:ln w="22225">
+            <a:solidFill>
+              <a:srgbClr val="64748B"/>
+            </a:solidFill>
+            <a:tailEnd type="triangle" w="med" len="med"/>
+          </a:ln>
+        </p:spPr>
+        <p:style>
+          <a:lnRef idx="2">
+            <a:schemeClr val="accent1"/>
+          </a:lnRef>
+          <a:fillRef idx="0">
+            <a:schemeClr val="accent1"/>
+          </a:fillRef>
+          <a:effectRef idx="1">
+            <a:schemeClr val="accent1"/>
+          </a:effectRef>
+          <a:fontRef idx="minor">
+            <a:schemeClr val="tx1"/>
+          </a:fontRef>
+        </p:style>
+      </p:cxnSp>
+      <p:cxnSp>
+        <p:nvCxnSpPr>
+          <p:cNvPr id="19" name="Connector 18"/>
+          <p:cNvCxnSpPr/>
+          <p:nvPr/>
+        </p:nvCxnSpPr>
+        <p:spPr>
+          <a:xfrm>
+            <a:off x="9006840" y="3337560"/>
+            <a:ext cx="0" cy="274320"/>
           </a:xfrm>
           <a:prstGeom prst="line">
             <a:avLst/>
@@ -13929,9 +13999,45 @@
           </a:fontRef>
         </p:style>
       </p:cxnSp>
-      <p:sp>
-        <p:nvSpPr>
-          <p:cNvPr id="19" name="TextBox 18"/>
+      <p:cxnSp>
+        <p:nvCxnSpPr>
+          <p:cNvPr id="20" name="Connector 19"/>
+          <p:cNvCxnSpPr/>
+          <p:nvPr/>
+        </p:nvCxnSpPr>
+        <p:spPr>
+          <a:xfrm>
+            <a:off x="9006840" y="4251960"/>
+            <a:ext cx="0" cy="137160"/>
+          </a:xfrm>
+          <a:prstGeom prst="line">
+            <a:avLst/>
+          </a:prstGeom>
+          <a:ln w="15240">
+            <a:solidFill>
+              <a:srgbClr val="64748B"/>
+            </a:solidFill>
+            <a:tailEnd type="triangle" w="med" len="med"/>
+          </a:ln>
+        </p:spPr>
+        <p:style>
+          <a:lnRef idx="2">
+            <a:schemeClr val="accent1"/>
+          </a:lnRef>
+          <a:fillRef idx="0">
+            <a:schemeClr val="accent1"/>
+          </a:fillRef>
+          <a:effectRef idx="1">
+            <a:schemeClr val="accent1"/>
+          </a:effectRef>
+          <a:fontRef idx="minor">
+            <a:schemeClr val="tx1"/>
+          </a:fontRef>
+        </p:style>
+      </p:cxnSp>
+      <p:sp>
+        <p:nvSpPr>
+          <p:cNvPr id="21" name="TextBox 20"/>
           <p:cNvSpPr txBox="1"/>
           <p:nvPr/>
         </p:nvSpPr>
@@ -13971,7 +14077,7 @@
       </p:sp>
       <p:sp>
         <p:nvSpPr>
-          <p:cNvPr id="20" name="TextBox 19"/>
+          <p:cNvPr id="22" name="TextBox 21"/>
           <p:cNvSpPr txBox="1"/>
           <p:nvPr/>
         </p:nvSpPr>
@@ -15170,7 +15276,7 @@
                 <a:latin typeface="PingFang TC"/>
                 <a:ea typeface="PingFang TC"/>
               </a:rPr>
-              <a:t>部署 · CI/CD</a:t>
+              <a:t>安全 · AUTH &amp; 多租戶</a:t>
             </a:r>
           </a:p>
           <a:p>
@@ -15187,7 +15293,7 @@
                 <a:latin typeface="PingFang TC"/>
                 <a:ea typeface="PingFang TC"/>
               </a:rPr>
-              <a:t>CI/CD 流程（GitHub Actions + OIDC）</a:t>
+              <a:t>Cognito + API GW JWT authorizer + owner_id 隔離</a:t>
             </a:r>
           </a:p>
         </p:txBody>
@@ -15200,8 +15306,8 @@
         </p:nvSpPr>
         <p:spPr>
           <a:xfrm>
-            <a:off x="457200" y="2286000"/>
-            <a:ext cx="1481328" cy="1280160"/>
+            <a:off x="457200" y="1828800"/>
+            <a:ext cx="2011680" cy="822960"/>
           </a:xfrm>
           <a:prstGeom prst="roundRect">
             <a:avLst/>
@@ -15236,67 +15342,100 @@
           <a:p>
             <a:pPr algn="ctr"/>
             <a:r>
-              <a:rPr sz="1100" b="1">
+              <a:rPr sz="1200" b="1">
                 <a:solidFill>
                   <a:srgbClr val="FFFFFF"/>
                 </a:solidFill>
                 <a:latin typeface="PingFang TC"/>
                 <a:ea typeface="PingFang TC"/>
               </a:rPr>
-              <a:t>git push</a:t>
+              <a:t>前端</a:t>
             </a:r>
           </a:p>
           <a:p>
             <a:pPr algn="ctr"/>
             <a:r>
-              <a:rPr sz="1100" b="0">
+              <a:rPr sz="1200" b="0">
                 <a:solidFill>
                   <a:srgbClr val="FFFFFF"/>
                 </a:solidFill>
                 <a:latin typeface="PingFang TC"/>
                 <a:ea typeface="PingFang TC"/>
               </a:rPr>
-              <a:t>QR Code Generator/**</a:t>
-            </a:r>
-          </a:p>
-        </p:txBody>
-      </p:sp>
-      <p:cxnSp>
-        <p:nvCxnSpPr>
-          <p:cNvPr id="5" name="Connector 4"/>
-          <p:cNvCxnSpPr/>
-          <p:nvPr/>
-        </p:nvCxnSpPr>
-        <p:spPr>
-          <a:xfrm>
-            <a:off x="1938528" y="2926080"/>
-            <a:ext cx="118872" cy="0"/>
-          </a:xfrm>
-          <a:prstGeom prst="line">
-            <a:avLst/>
-          </a:prstGeom>
-          <a:ln w="22225">
+              <a:t>(管理頁)</a:t>
+            </a:r>
+          </a:p>
+        </p:txBody>
+      </p:sp>
+      <p:sp>
+        <p:nvSpPr>
+          <p:cNvPr id="5" name="Rounded Rectangle 4"/>
+          <p:cNvSpPr/>
+          <p:nvPr/>
+        </p:nvSpPr>
+        <p:spPr>
+          <a:xfrm>
+            <a:off x="2743200" y="1828800"/>
+            <a:ext cx="2377440" cy="822960"/>
+          </a:xfrm>
+          <a:prstGeom prst="roundRect">
+            <a:avLst/>
+          </a:prstGeom>
+          <a:solidFill>
+            <a:srgbClr val="059669"/>
+          </a:solidFill>
+          <a:ln>
             <a:solidFill>
-              <a:srgbClr val="64748B"/>
+              <a:srgbClr val="059669"/>
             </a:solidFill>
-            <a:tailEnd type="triangle" w="med" len="med"/>
           </a:ln>
+          <a:effectLst/>
         </p:spPr>
         <p:style>
-          <a:lnRef idx="2">
+          <a:lnRef idx="1">
             <a:schemeClr val="accent1"/>
           </a:lnRef>
-          <a:fillRef idx="0">
+          <a:fillRef idx="3">
             <a:schemeClr val="accent1"/>
           </a:fillRef>
-          <a:effectRef idx="1">
+          <a:effectRef idx="2">
             <a:schemeClr val="accent1"/>
           </a:effectRef>
           <a:fontRef idx="minor">
-            <a:schemeClr val="tx1"/>
+            <a:schemeClr val="lt1"/>
           </a:fontRef>
         </p:style>
-      </p:cxnSp>
+        <p:txBody>
+          <a:bodyPr rtlCol="0" anchor="ctr" wrap="square" tIns="25400" bIns="25400"/>
+          <a:lstStyle/>
+          <a:p>
+            <a:pPr algn="ctr"/>
+            <a:r>
+              <a:rPr sz="1100" b="1">
+                <a:solidFill>
+                  <a:srgbClr val="FFFFFF"/>
+                </a:solidFill>
+                <a:latin typeface="PingFang TC"/>
+                <a:ea typeface="PingFang TC"/>
+              </a:rPr>
+              <a:t>Cognito Hosted UI</a:t>
+            </a:r>
+          </a:p>
+          <a:p>
+            <a:pPr algn="ctr"/>
+            <a:r>
+              <a:rPr sz="1100" b="0">
+                <a:solidFill>
+                  <a:srgbClr val="FFFFFF"/>
+                </a:solidFill>
+                <a:latin typeface="PingFang TC"/>
+                <a:ea typeface="PingFang TC"/>
+              </a:rPr>
+              <a:t>登入(PKCE)→ id token</a:t>
+            </a:r>
+          </a:p>
+        </p:txBody>
+      </p:sp>
       <p:sp>
         <p:nvSpPr>
           <p:cNvPr id="6" name="Rounded Rectangle 5"/>
@@ -15305,8 +15444,8 @@
         </p:nvSpPr>
         <p:spPr>
           <a:xfrm>
-            <a:off x="2057400" y="2286000"/>
-            <a:ext cx="1481328" cy="1280160"/>
+            <a:off x="5440680" y="1828800"/>
+            <a:ext cx="2560320" cy="822960"/>
           </a:xfrm>
           <a:prstGeom prst="roundRect">
             <a:avLst/>
@@ -15348,7 +15487,7 @@
                 <a:latin typeface="PingFang TC"/>
                 <a:ea typeface="PingFang TC"/>
               </a:rPr>
-              <a:t>GitHub Actions</a:t>
+              <a:t>API GW JWT authorizer</a:t>
             </a:r>
           </a:p>
           <a:p>
@@ -15361,70 +15500,21 @@
                 <a:latin typeface="PingFang TC"/>
                 <a:ea typeface="PingFang TC"/>
               </a:rPr>
-              <a:t>OIDC assume role</a:t>
-            </a:r>
-          </a:p>
-          <a:p>
-            <a:pPr algn="ctr"/>
-            <a:r>
-              <a:rPr sz="1100" b="0">
-                <a:solidFill>
-                  <a:srgbClr val="FFFFFF"/>
-                </a:solidFill>
-                <a:latin typeface="PingFang TC"/>
-                <a:ea typeface="PingFang TC"/>
-              </a:rPr>
-              <a:t>(無長期金鑰)</a:t>
-            </a:r>
-          </a:p>
-        </p:txBody>
-      </p:sp>
-      <p:cxnSp>
-        <p:nvCxnSpPr>
-          <p:cNvPr id="7" name="Connector 6"/>
-          <p:cNvCxnSpPr/>
-          <p:nvPr/>
-        </p:nvCxnSpPr>
-        <p:spPr>
-          <a:xfrm>
-            <a:off x="3538728" y="2926080"/>
-            <a:ext cx="118872" cy="0"/>
-          </a:xfrm>
-          <a:prstGeom prst="line">
-            <a:avLst/>
-          </a:prstGeom>
-          <a:ln w="22225">
-            <a:solidFill>
-              <a:srgbClr val="64748B"/>
-            </a:solidFill>
-            <a:tailEnd type="triangle" w="med" len="med"/>
-          </a:ln>
-        </p:spPr>
-        <p:style>
-          <a:lnRef idx="2">
-            <a:schemeClr val="accent1"/>
-          </a:lnRef>
-          <a:fillRef idx="0">
-            <a:schemeClr val="accent1"/>
-          </a:fillRef>
-          <a:effectRef idx="1">
-            <a:schemeClr val="accent1"/>
-          </a:effectRef>
-          <a:fontRef idx="minor">
-            <a:schemeClr val="tx1"/>
-          </a:fontRef>
-        </p:style>
-      </p:cxnSp>
-      <p:sp>
-        <p:nvSpPr>
-          <p:cNvPr id="8" name="Rounded Rectangle 7"/>
+              <a:t>未帶/無效 → 401</a:t>
+            </a:r>
+          </a:p>
+        </p:txBody>
+      </p:sp>
+      <p:sp>
+        <p:nvSpPr>
+          <p:cNvPr id="7" name="Rounded Rectangle 6"/>
           <p:cNvSpPr/>
           <p:nvPr/>
         </p:nvSpPr>
         <p:spPr>
           <a:xfrm>
-            <a:off x="3657600" y="2286000"/>
-            <a:ext cx="1481328" cy="1280160"/>
+            <a:off x="8321040" y="1828800"/>
+            <a:ext cx="3108960" cy="822960"/>
           </a:xfrm>
           <a:prstGeom prst="roundRect">
             <a:avLst/>
@@ -15466,7 +15556,7 @@
                 <a:latin typeface="PingFang TC"/>
                 <a:ea typeface="PingFang TC"/>
               </a:rPr>
-              <a:t>buildx</a:t>
+              <a:t>EC2:取 sub=owner_id</a:t>
             </a:r>
           </a:p>
           <a:p>
@@ -15479,34 +15569,21 @@
                 <a:latin typeface="PingFang TC"/>
                 <a:ea typeface="PingFang TC"/>
               </a:rPr>
-              <a:t>--platform</a:t>
-            </a:r>
-          </a:p>
-          <a:p>
-            <a:pPr algn="ctr"/>
-            <a:r>
-              <a:rPr sz="1100" b="0">
-                <a:solidFill>
-                  <a:srgbClr val="FFFFFF"/>
-                </a:solidFill>
-                <a:latin typeface="PingFang TC"/>
-                <a:ea typeface="PingFang TC"/>
-              </a:rPr>
-              <a:t>linux/arm64</a:t>
+              <a:t>依 owner 過濾/授權</a:t>
             </a:r>
           </a:p>
         </p:txBody>
       </p:sp>
       <p:cxnSp>
         <p:nvCxnSpPr>
-          <p:cNvPr id="9" name="Connector 8"/>
+          <p:cNvPr id="8" name="Connector 7"/>
           <p:cNvCxnSpPr/>
           <p:nvPr/>
         </p:nvCxnSpPr>
         <p:spPr>
           <a:xfrm>
-            <a:off x="5138928" y="2926080"/>
-            <a:ext cx="118872" cy="0"/>
+            <a:off x="2468880" y="2240280"/>
+            <a:ext cx="274320" cy="0"/>
           </a:xfrm>
           <a:prstGeom prst="line">
             <a:avLst/>
@@ -15533,98 +15610,16 @@
           </a:fontRef>
         </p:style>
       </p:cxnSp>
-      <p:sp>
-        <p:nvSpPr>
-          <p:cNvPr id="10" name="Rounded Rectangle 9"/>
-          <p:cNvSpPr/>
-          <p:nvPr/>
-        </p:nvSpPr>
-        <p:spPr>
-          <a:xfrm>
-            <a:off x="5257800" y="2286000"/>
-            <a:ext cx="1481328" cy="1280160"/>
-          </a:xfrm>
-          <a:prstGeom prst="roundRect">
-            <a:avLst/>
-          </a:prstGeom>
-          <a:solidFill>
-            <a:srgbClr val="059669"/>
-          </a:solidFill>
-          <a:ln>
-            <a:solidFill>
-              <a:srgbClr val="059669"/>
-            </a:solidFill>
-          </a:ln>
-          <a:effectLst/>
-        </p:spPr>
-        <p:style>
-          <a:lnRef idx="1">
-            <a:schemeClr val="accent1"/>
-          </a:lnRef>
-          <a:fillRef idx="3">
-            <a:schemeClr val="accent1"/>
-          </a:fillRef>
-          <a:effectRef idx="2">
-            <a:schemeClr val="accent1"/>
-          </a:effectRef>
-          <a:fontRef idx="minor">
-            <a:schemeClr val="lt1"/>
-          </a:fontRef>
-        </p:style>
-        <p:txBody>
-          <a:bodyPr rtlCol="0" anchor="ctr" wrap="square" tIns="25400" bIns="25400"/>
-          <a:lstStyle/>
-          <a:p>
-            <a:pPr algn="ctr"/>
-            <a:r>
-              <a:rPr sz="1100" b="1">
-                <a:solidFill>
-                  <a:srgbClr val="FFFFFF"/>
-                </a:solidFill>
-                <a:latin typeface="PingFang TC"/>
-                <a:ea typeface="PingFang TC"/>
-              </a:rPr>
-              <a:t>ECR push</a:t>
-            </a:r>
-          </a:p>
-          <a:p>
-            <a:pPr algn="ctr"/>
-            <a:r>
-              <a:rPr sz="1100" b="0">
-                <a:solidFill>
-                  <a:srgbClr val="FFFFFF"/>
-                </a:solidFill>
-                <a:latin typeface="PingFang TC"/>
-                <a:ea typeface="PingFang TC"/>
-              </a:rPr>
-              <a:t>tag = SHA</a:t>
-            </a:r>
-          </a:p>
-          <a:p>
-            <a:pPr algn="ctr"/>
-            <a:r>
-              <a:rPr sz="1100" b="0">
-                <a:solidFill>
-                  <a:srgbClr val="FFFFFF"/>
-                </a:solidFill>
-                <a:latin typeface="PingFang TC"/>
-                <a:ea typeface="PingFang TC"/>
-              </a:rPr>
-              <a:t>+ latest</a:t>
-            </a:r>
-          </a:p>
-        </p:txBody>
-      </p:sp>
       <p:cxnSp>
         <p:nvCxnSpPr>
-          <p:cNvPr id="11" name="Connector 10"/>
+          <p:cNvPr id="9" name="Connector 8"/>
           <p:cNvCxnSpPr/>
           <p:nvPr/>
         </p:nvCxnSpPr>
         <p:spPr>
           <a:xfrm>
-            <a:off x="6739128" y="2926080"/>
-            <a:ext cx="118872" cy="0"/>
+            <a:off x="5120640" y="2240280"/>
+            <a:ext cx="320040" cy="0"/>
           </a:xfrm>
           <a:prstGeom prst="line">
             <a:avLst/>
@@ -15651,98 +15646,16 @@
           </a:fontRef>
         </p:style>
       </p:cxnSp>
-      <p:sp>
-        <p:nvSpPr>
-          <p:cNvPr id="12" name="Rounded Rectangle 11"/>
-          <p:cNvSpPr/>
-          <p:nvPr/>
-        </p:nvSpPr>
-        <p:spPr>
-          <a:xfrm>
-            <a:off x="6858000" y="2286000"/>
-            <a:ext cx="1481328" cy="1280160"/>
-          </a:xfrm>
-          <a:prstGeom prst="roundRect">
-            <a:avLst/>
-          </a:prstGeom>
-          <a:solidFill>
-            <a:srgbClr val="7C3AED"/>
-          </a:solidFill>
-          <a:ln>
-            <a:solidFill>
-              <a:srgbClr val="7C3AED"/>
-            </a:solidFill>
-          </a:ln>
-          <a:effectLst/>
-        </p:spPr>
-        <p:style>
-          <a:lnRef idx="1">
-            <a:schemeClr val="accent1"/>
-          </a:lnRef>
-          <a:fillRef idx="3">
-            <a:schemeClr val="accent1"/>
-          </a:fillRef>
-          <a:effectRef idx="2">
-            <a:schemeClr val="accent1"/>
-          </a:effectRef>
-          <a:fontRef idx="minor">
-            <a:schemeClr val="lt1"/>
-          </a:fontRef>
-        </p:style>
-        <p:txBody>
-          <a:bodyPr rtlCol="0" anchor="ctr" wrap="square" tIns="25400" bIns="25400"/>
-          <a:lstStyle/>
-          <a:p>
-            <a:pPr algn="ctr"/>
-            <a:r>
-              <a:rPr sz="1100" b="1">
-                <a:solidFill>
-                  <a:srgbClr val="FFFFFF"/>
-                </a:solidFill>
-                <a:latin typeface="PingFang TC"/>
-                <a:ea typeface="PingFang TC"/>
-              </a:rPr>
-              <a:t>SSM 更新</a:t>
-            </a:r>
-          </a:p>
-          <a:p>
-            <a:pPr algn="ctr"/>
-            <a:r>
-              <a:rPr sz="1100" b="0">
-                <a:solidFill>
-                  <a:srgbClr val="FFFFFF"/>
-                </a:solidFill>
-                <a:latin typeface="PingFang TC"/>
-                <a:ea typeface="PingFang TC"/>
-              </a:rPr>
-              <a:t>/qrcode/</a:t>
-            </a:r>
-          </a:p>
-          <a:p>
-            <a:pPr algn="ctr"/>
-            <a:r>
-              <a:rPr sz="1100" b="0">
-                <a:solidFill>
-                  <a:srgbClr val="FFFFFF"/>
-                </a:solidFill>
-                <a:latin typeface="PingFang TC"/>
-                <a:ea typeface="PingFang TC"/>
-              </a:rPr>
-              <a:t>IMAGE_URI</a:t>
-            </a:r>
-          </a:p>
-        </p:txBody>
-      </p:sp>
       <p:cxnSp>
         <p:nvCxnSpPr>
-          <p:cNvPr id="13" name="Connector 12"/>
+          <p:cNvPr id="10" name="Connector 9"/>
           <p:cNvCxnSpPr/>
           <p:nvPr/>
         </p:nvCxnSpPr>
         <p:spPr>
           <a:xfrm>
-            <a:off x="8339328" y="2926080"/>
-            <a:ext cx="118872" cy="0"/>
+            <a:off x="8001000" y="2240280"/>
+            <a:ext cx="320040" cy="0"/>
           </a:xfrm>
           <a:prstGeom prst="line">
             <a:avLst/>
@@ -15769,216 +15682,256 @@
           </a:fontRef>
         </p:style>
       </p:cxnSp>
-      <p:sp>
-        <p:nvSpPr>
-          <p:cNvPr id="14" name="Rounded Rectangle 13"/>
-          <p:cNvSpPr/>
-          <p:nvPr/>
-        </p:nvSpPr>
-        <p:spPr>
-          <a:xfrm>
-            <a:off x="8458200" y="2286000"/>
-            <a:ext cx="1481328" cy="1280160"/>
-          </a:xfrm>
-          <a:prstGeom prst="roundRect">
-            <a:avLst/>
-          </a:prstGeom>
-          <a:solidFill>
-            <a:srgbClr val="D97706"/>
-          </a:solidFill>
-          <a:ln>
-            <a:solidFill>
-              <a:srgbClr val="D97706"/>
-            </a:solidFill>
-          </a:ln>
-          <a:effectLst/>
-        </p:spPr>
-        <p:style>
-          <a:lnRef idx="1">
-            <a:schemeClr val="accent1"/>
-          </a:lnRef>
-          <a:fillRef idx="3">
-            <a:schemeClr val="accent1"/>
-          </a:fillRef>
-          <a:effectRef idx="2">
-            <a:schemeClr val="accent1"/>
-          </a:effectRef>
-          <a:fontRef idx="minor">
-            <a:schemeClr val="lt1"/>
-          </a:fontRef>
-        </p:style>
-        <p:txBody>
-          <a:bodyPr rtlCol="0" anchor="ctr" wrap="square" tIns="25400" bIns="25400"/>
-          <a:lstStyle/>
-          <a:p>
-            <a:pPr algn="ctr"/>
-            <a:r>
-              <a:rPr sz="1100" b="1">
-                <a:solidFill>
-                  <a:srgbClr val="FFFFFF"/>
-                </a:solidFill>
-                <a:latin typeface="PingFang TC"/>
-                <a:ea typeface="PingFang TC"/>
-              </a:rPr>
-              <a:t>SSM 部署</a:t>
-            </a:r>
-          </a:p>
-          <a:p>
-            <a:pPr algn="ctr"/>
-            <a:r>
-              <a:rPr sz="1100" b="0">
-                <a:solidFill>
-                  <a:srgbClr val="FFFFFF"/>
-                </a:solidFill>
-                <a:latin typeface="PingFang TC"/>
-                <a:ea typeface="PingFang TC"/>
-              </a:rPr>
-              <a:t>→ EC2</a:t>
-            </a:r>
-          </a:p>
-          <a:p>
-            <a:pPr algn="ctr"/>
-            <a:r>
-              <a:rPr sz="1100" b="0">
-                <a:solidFill>
-                  <a:srgbClr val="FFFFFF"/>
-                </a:solidFill>
-                <a:latin typeface="PingFang TC"/>
-                <a:ea typeface="PingFang TC"/>
-              </a:rPr>
-              <a:t>deploy-app.sh</a:t>
-            </a:r>
-          </a:p>
-        </p:txBody>
-      </p:sp>
-      <p:cxnSp>
-        <p:nvCxnSpPr>
-          <p:cNvPr id="15" name="Connector 14"/>
-          <p:cNvCxnSpPr/>
-          <p:nvPr/>
-        </p:nvCxnSpPr>
-        <p:spPr>
-          <a:xfrm>
-            <a:off x="9939528" y="2926080"/>
-            <a:ext cx="118872" cy="0"/>
-          </a:xfrm>
-          <a:prstGeom prst="line">
-            <a:avLst/>
-          </a:prstGeom>
-          <a:ln w="22225">
-            <a:solidFill>
-              <a:srgbClr val="64748B"/>
-            </a:solidFill>
-            <a:tailEnd type="triangle" w="med" len="med"/>
-          </a:ln>
-        </p:spPr>
-        <p:style>
-          <a:lnRef idx="2">
-            <a:schemeClr val="accent1"/>
-          </a:lnRef>
-          <a:fillRef idx="0">
-            <a:schemeClr val="accent1"/>
-          </a:fillRef>
-          <a:effectRef idx="1">
-            <a:schemeClr val="accent1"/>
-          </a:effectRef>
-          <a:fontRef idx="minor">
-            <a:schemeClr val="tx1"/>
-          </a:fontRef>
-        </p:style>
-      </p:cxnSp>
-      <p:sp>
-        <p:nvSpPr>
-          <p:cNvPr id="16" name="Rounded Rectangle 15"/>
-          <p:cNvSpPr/>
-          <p:nvPr/>
-        </p:nvSpPr>
-        <p:spPr>
-          <a:xfrm>
-            <a:off x="10058400" y="2286000"/>
-            <a:ext cx="1481328" cy="1280160"/>
-          </a:xfrm>
-          <a:prstGeom prst="roundRect">
-            <a:avLst/>
-          </a:prstGeom>
-          <a:solidFill>
-            <a:srgbClr val="059669"/>
-          </a:solidFill>
-          <a:ln>
-            <a:solidFill>
-              <a:srgbClr val="059669"/>
-            </a:solidFill>
-          </a:ln>
-          <a:effectLst/>
-        </p:spPr>
-        <p:style>
-          <a:lnRef idx="1">
-            <a:schemeClr val="accent1"/>
-          </a:lnRef>
-          <a:fillRef idx="3">
-            <a:schemeClr val="accent1"/>
-          </a:fillRef>
-          <a:effectRef idx="2">
-            <a:schemeClr val="accent1"/>
-          </a:effectRef>
-          <a:fontRef idx="minor">
-            <a:schemeClr val="lt1"/>
-          </a:fontRef>
-        </p:style>
-        <p:txBody>
-          <a:bodyPr rtlCol="0" anchor="ctr" wrap="square" tIns="25400" bIns="25400"/>
-          <a:lstStyle/>
-          <a:p>
-            <a:pPr algn="ctr"/>
-            <a:r>
-              <a:rPr sz="1100" b="1">
-                <a:solidFill>
-                  <a:srgbClr val="FFFFFF"/>
-                </a:solidFill>
-                <a:latin typeface="PingFang TC"/>
-                <a:ea typeface="PingFang TC"/>
-              </a:rPr>
-              <a:t>上線</a:t>
-            </a:r>
-          </a:p>
-          <a:p>
-            <a:pPr algn="ctr"/>
-            <a:r>
-              <a:rPr sz="1100" b="0">
-                <a:solidFill>
-                  <a:srgbClr val="FFFFFF"/>
-                </a:solidFill>
-                <a:latin typeface="PingFang TC"/>
-                <a:ea typeface="PingFang TC"/>
-              </a:rPr>
-              <a:t>ALB /health</a:t>
-            </a:r>
-          </a:p>
-          <a:p>
-            <a:pPr algn="ctr"/>
-            <a:r>
-              <a:rPr sz="1100" b="0">
-                <a:solidFill>
-                  <a:srgbClr val="FFFFFF"/>
-                </a:solidFill>
-                <a:latin typeface="PingFang TC"/>
-                <a:ea typeface="PingFang TC"/>
-              </a:rPr>
-              <a:t>通過</a:t>
-            </a:r>
-          </a:p>
-        </p:txBody>
-      </p:sp>
-      <p:sp>
-        <p:nvSpPr>
-          <p:cNvPr id="17" name="TextBox 16"/>
+      <p:graphicFrame>
+        <p:nvGraphicFramePr>
+          <p:cNvPr id="11" name="Table 10"/>
+          <p:cNvGraphicFramePr>
+            <a:graphicFrameLocks noGrp="1"/>
+          </p:cNvGraphicFramePr>
+          <p:nvPr/>
+        </p:nvGraphicFramePr>
+        <p:xfrm>
+          <a:off x="548640" y="3108960"/>
+          <a:ext cx="11109960" cy="1554480"/>
+        </p:xfrm>
+        <a:graphic>
+          <a:graphicData uri="http://schemas.openxmlformats.org/drawingml/2006/table">
+            <a:tbl>
+              <a:tblPr firstRow="1" bandRow="1">
+                <a:tableStyleId>{5C22544A-7EE6-4342-B048-85BDC9FD1C3A}</a:tableStyleId>
+              </a:tblPr>
+              <a:tblGrid>
+                <a:gridCol w="1463040"/>
+                <a:gridCol w="5806440"/>
+                <a:gridCol w="3840480"/>
+              </a:tblGrid>
+              <a:tr h="518160">
+                <a:tc>
+                  <a:txBody>
+                    <a:bodyPr/>
+                    <a:lstStyle/>
+                    <a:p>
+                      <a:r>
+                        <a:rPr sz="1200" b="1">
+                          <a:solidFill>
+                            <a:srgbClr val="FFFFFF"/>
+                          </a:solidFill>
+                          <a:latin typeface="PingFang TC"/>
+                          <a:ea typeface="PingFang TC"/>
+                        </a:rPr>
+                        <a:t/>
+                      </a:r>
+                    </a:p>
+                  </a:txBody>
+                  <a:tcPr marT="25400" marB="25400" marL="101600" anchor="ctr">
+                    <a:solidFill>
+                      <a:srgbClr val="2563EB"/>
+                    </a:solidFill>
+                  </a:tcPr>
+                </a:tc>
+                <a:tc>
+                  <a:txBody>
+                    <a:bodyPr/>
+                    <a:lstStyle/>
+                    <a:p>
+                      <a:r>
+                        <a:rPr sz="1200" b="1">
+                          <a:solidFill>
+                            <a:srgbClr val="FFFFFF"/>
+                          </a:solidFill>
+                          <a:latin typeface="PingFang TC"/>
+                          <a:ea typeface="PingFang TC"/>
+                        </a:rPr>
+                        <a:t>需登入 (JWT)</a:t>
+                      </a:r>
+                    </a:p>
+                  </a:txBody>
+                  <a:tcPr marT="25400" marB="25400" marL="101600" anchor="ctr">
+                    <a:solidFill>
+                      <a:srgbClr val="2563EB"/>
+                    </a:solidFill>
+                  </a:tcPr>
+                </a:tc>
+                <a:tc>
+                  <a:txBody>
+                    <a:bodyPr/>
+                    <a:lstStyle/>
+                    <a:p>
+                      <a:r>
+                        <a:rPr sz="1200" b="1">
+                          <a:solidFill>
+                            <a:srgbClr val="FFFFFF"/>
+                          </a:solidFill>
+                          <a:latin typeface="PingFang TC"/>
+                          <a:ea typeface="PingFang TC"/>
+                        </a:rPr>
+                        <a:t>公開 (無 auth)</a:t>
+                      </a:r>
+                    </a:p>
+                  </a:txBody>
+                  <a:tcPr marT="25400" marB="25400" marL="101600" anchor="ctr">
+                    <a:solidFill>
+                      <a:srgbClr val="2563EB"/>
+                    </a:solidFill>
+                  </a:tcPr>
+                </a:tc>
+              </a:tr>
+              <a:tr h="518160">
+                <a:tc>
+                  <a:txBody>
+                    <a:bodyPr/>
+                    <a:lstStyle/>
+                    <a:p>
+                      <a:r>
+                        <a:rPr sz="1200" b="1">
+                          <a:solidFill>
+                            <a:srgbClr val="0F172A"/>
+                          </a:solidFill>
+                          <a:latin typeface="PingFang TC"/>
+                          <a:ea typeface="PingFang TC"/>
+                        </a:rPr>
+                        <a:t>端點</a:t>
+                      </a:r>
+                    </a:p>
+                  </a:txBody>
+                  <a:tcPr marT="25400" marB="25400" marL="101600" anchor="ctr">
+                    <a:solidFill>
+                      <a:srgbClr val="FFFFFF"/>
+                    </a:solidFill>
+                  </a:tcPr>
+                </a:tc>
+                <a:tc>
+                  <a:txBody>
+                    <a:bodyPr/>
+                    <a:lstStyle/>
+                    <a:p>
+                      <a:r>
+                        <a:rPr sz="1200" b="0">
+                          <a:solidFill>
+                            <a:srgbClr val="0F172A"/>
+                          </a:solidFill>
+                          <a:latin typeface="PingFang TC"/>
+                          <a:ea typeface="PingFang TC"/>
+                        </a:rPr>
+                        <a:t>create / list / get / patch / delete / analytics</a:t>
+                      </a:r>
+                    </a:p>
+                  </a:txBody>
+                  <a:tcPr marT="25400" marB="25400" marL="101600" anchor="ctr">
+                    <a:solidFill>
+                      <a:srgbClr val="FFFFFF"/>
+                    </a:solidFill>
+                  </a:tcPr>
+                </a:tc>
+                <a:tc>
+                  <a:txBody>
+                    <a:bodyPr/>
+                    <a:lstStyle/>
+                    <a:p>
+                      <a:r>
+                        <a:rPr sz="1200" b="0">
+                          <a:solidFill>
+                            <a:srgbClr val="0F172A"/>
+                          </a:solidFill>
+                          <a:latin typeface="PingFang TC"/>
+                          <a:ea typeface="PingFang TC"/>
+                        </a:rPr>
+                        <a:t>/r/{token} 掃描 · QR 圖 · /health</a:t>
+                      </a:r>
+                    </a:p>
+                  </a:txBody>
+                  <a:tcPr marT="25400" marB="25400" marL="101600" anchor="ctr">
+                    <a:solidFill>
+                      <a:srgbClr val="FFFFFF"/>
+                    </a:solidFill>
+                  </a:tcPr>
+                </a:tc>
+              </a:tr>
+              <a:tr h="518160">
+                <a:tc>
+                  <a:txBody>
+                    <a:bodyPr/>
+                    <a:lstStyle/>
+                    <a:p>
+                      <a:r>
+                        <a:rPr sz="1200" b="1">
+                          <a:solidFill>
+                            <a:srgbClr val="0F172A"/>
+                          </a:solidFill>
+                          <a:latin typeface="PingFang TC"/>
+                          <a:ea typeface="PingFang TC"/>
+                        </a:rPr>
+                        <a:t>隔離</a:t>
+                      </a:r>
+                    </a:p>
+                  </a:txBody>
+                  <a:tcPr marT="25400" marB="25400" marL="101600" anchor="ctr">
+                    <a:solidFill>
+                      <a:srgbClr val="F1F5F9"/>
+                    </a:solidFill>
+                  </a:tcPr>
+                </a:tc>
+                <a:tc>
+                  <a:txBody>
+                    <a:bodyPr/>
+                    <a:lstStyle/>
+                    <a:p>
+                      <a:r>
+                        <a:rPr sz="1200" b="0">
+                          <a:solidFill>
+                            <a:srgbClr val="0F172A"/>
+                          </a:solidFill>
+                          <a:latin typeface="PingFang TC"/>
+                          <a:ea typeface="PingFang TC"/>
+                        </a:rPr>
+                        <a:t>owner_id = Cognito sub;非擁有者一律 404</a:t>
+                      </a:r>
+                    </a:p>
+                  </a:txBody>
+                  <a:tcPr marT="25400" marB="25400" marL="101600" anchor="ctr">
+                    <a:solidFill>
+                      <a:srgbClr val="F1F5F9"/>
+                    </a:solidFill>
+                  </a:tcPr>
+                </a:tc>
+                <a:tc>
+                  <a:txBody>
+                    <a:bodyPr/>
+                    <a:lstStyle/>
+                    <a:p>
+                      <a:r>
+                        <a:rPr sz="1200" b="0">
+                          <a:solidFill>
+                            <a:srgbClr val="0F172A"/>
+                          </a:solidFill>
+                          <a:latin typeface="PingFang TC"/>
+                          <a:ea typeface="PingFang TC"/>
+                        </a:rPr>
+                        <a:t>redirect/圖不分 owner</a:t>
+                      </a:r>
+                    </a:p>
+                  </a:txBody>
+                  <a:tcPr marT="25400" marB="25400" marL="101600" anchor="ctr">
+                    <a:solidFill>
+                      <a:srgbClr val="F1F5F9"/>
+                    </a:solidFill>
+                  </a:tcPr>
+                </a:tc>
+              </a:tr>
+            </a:tbl>
+          </a:graphicData>
+        </a:graphic>
+      </p:graphicFrame>
+      <p:sp>
+        <p:nvSpPr>
+          <p:cNvPr id="12" name="TextBox 11"/>
           <p:cNvSpPr txBox="1"/>
           <p:nvPr/>
         </p:nvSpPr>
         <p:spPr>
           <a:xfrm>
-            <a:off x="548640" y="4023360"/>
-            <a:ext cx="11247120" cy="2194560"/>
+            <a:off x="548640" y="4937760"/>
+            <a:ext cx="11247120" cy="1463040"/>
           </a:xfrm>
           <a:prstGeom prst="rect">
             <a:avLst/>
@@ -15993,52 +15946,52 @@
           <a:p>
             <a:pPr>
               <a:spcAft>
-                <a:spcPts val="900"/>
-              </a:spcAft>
-            </a:pPr>
-            <a:r>
-              <a:rPr sz="1400" b="0">
+                <a:spcPts val="700"/>
+              </a:spcAft>
+            </a:pPr>
+            <a:r>
+              <a:rPr sz="1300" b="0">
                 <a:solidFill>
                   <a:srgbClr val="0F172A"/>
                 </a:solidFill>
                 <a:latin typeface="PingFang TC"/>
                 <a:ea typeface="PingFang TC"/>
               </a:rPr>
-              <a:t>•  EC2 deploy-app.sh:從 SSM 撈設定 → ECR login → docker pull → docker run(換新容器)</a:t>
+              <a:t>•  前端用 id token(帶 aud+email);API GW authorizer 在邊緣擋未授權,app 再取 sub 當 owner_id</a:t>
             </a:r>
           </a:p>
           <a:p>
             <a:pPr>
               <a:spcAft>
-                <a:spcPts val="900"/>
-              </a:spcAft>
-            </a:pPr>
-            <a:r>
-              <a:rPr sz="1400" b="0">
+                <a:spcPts val="700"/>
+              </a:spcAft>
+            </a:pPr>
+            <a:r>
+              <a:rPr sz="1300" b="0">
                 <a:solidFill>
                   <a:srgbClr val="0F172A"/>
                 </a:solidFill>
                 <a:latin typeface="PingFang TC"/>
                 <a:ea typeface="PingFang TC"/>
               </a:rPr>
-              <a:t>•  全 env-gated:本機無這些環境變數 → 維持 SQLite + 記憶體 cache + 即時生圖,不受影響</a:t>
+              <a:t>•  env-gated:本機不設 AUTH_ENABLED → dev user『local-dev』、免登入,SQLite 照跑</a:t>
             </a:r>
           </a:p>
           <a:p>
             <a:pPr>
               <a:spcAft>
-                <a:spcPts val="900"/>
-              </a:spcAft>
-            </a:pPr>
-            <a:r>
-              <a:rPr sz="1400" b="0">
+                <a:spcPts val="700"/>
+              </a:spcAft>
+            </a:pPr>
+            <a:r>
+              <a:rPr sz="1300" b="0">
                 <a:solidFill>
                   <a:srgbClr val="0F172A"/>
                 </a:solidFill>
                 <a:latin typeface="PingFang TC"/>
                 <a:ea typeface="PingFang TC"/>
               </a:rPr>
-              <a:t>•  部署踩到的兩個坑:① EC2 role 少 s3:PutObject(500)② CI build amd64 但 EC2 arm64(502)→ buildx 跨平台修正</a:t>
+              <a:t>•  純 env 開關 + 新 infra(Cognito/authorizer),已 validate/plan 通過(未 apply)</a:t>
             </a:r>
           </a:p>
         </p:txBody>
@@ -16070,13 +16023,13 @@
         <p:spPr>
           <a:xfrm>
             <a:off x="0" y="0"/>
-            <a:ext cx="12191695" cy="6858000"/>
+            <a:ext cx="164592" cy="6858000"/>
           </a:xfrm>
           <a:prstGeom prst="rect">
             <a:avLst/>
           </a:prstGeom>
           <a:solidFill>
-            <a:srgbClr val="0F172A"/>
+            <a:srgbClr val="2563EB"/>
           </a:solidFill>
           <a:ln>
             <a:noFill/>
@@ -16113,8 +16066,8 @@
         </p:nvSpPr>
         <p:spPr>
           <a:xfrm>
-            <a:off x="822960" y="1097280"/>
-            <a:ext cx="10515600" cy="1097280"/>
+            <a:off x="502920" y="320040"/>
+            <a:ext cx="10972800" cy="1005840"/>
           </a:xfrm>
           <a:prstGeom prst="rect">
             <a:avLst/>
@@ -16129,49 +16082,826 @@
           <a:p>
             <a:pPr algn="l">
               <a:spcAft>
+                <a:spcPts val="200"/>
+              </a:spcAft>
+            </a:pPr>
+            <a:r>
+              <a:rPr sz="1300" b="1">
+                <a:solidFill>
+                  <a:srgbClr val="2563EB"/>
+                </a:solidFill>
+                <a:latin typeface="PingFang TC"/>
+                <a:ea typeface="PingFang TC"/>
+              </a:rPr>
+              <a:t>部署 · CI/CD</a:t>
+            </a:r>
+          </a:p>
+          <a:p>
+            <a:pPr algn="l">
+              <a:spcAft>
                 <a:spcPts val="400"/>
               </a:spcAft>
             </a:pPr>
             <a:r>
-              <a:rPr sz="1600" b="1">
-                <a:solidFill>
-                  <a:srgbClr val="2563EB"/>
-                </a:solidFill>
-                <a:latin typeface="PingFang TC"/>
-                <a:ea typeface="PingFang TC"/>
-              </a:rPr>
-              <a:t>原型狀態</a:t>
-            </a:r>
-          </a:p>
-          <a:p>
-            <a:pPr algn="l">
-              <a:spcAft>
-                <a:spcPts val="400"/>
-              </a:spcAft>
-            </a:pPr>
-            <a:r>
               <a:rPr sz="3000" b="1">
                 <a:solidFill>
+                  <a:srgbClr val="0F172A"/>
+                </a:solidFill>
+                <a:latin typeface="PingFang TC"/>
+                <a:ea typeface="PingFang TC"/>
+              </a:rPr>
+              <a:t>CI/CD 流程（GitHub Actions + OIDC）</a:t>
+            </a:r>
+          </a:p>
+        </p:txBody>
+      </p:sp>
+      <p:sp>
+        <p:nvSpPr>
+          <p:cNvPr id="4" name="Rounded Rectangle 3"/>
+          <p:cNvSpPr/>
+          <p:nvPr/>
+        </p:nvSpPr>
+        <p:spPr>
+          <a:xfrm>
+            <a:off x="457200" y="2286000"/>
+            <a:ext cx="1481328" cy="1280160"/>
+          </a:xfrm>
+          <a:prstGeom prst="roundRect">
+            <a:avLst/>
+          </a:prstGeom>
+          <a:solidFill>
+            <a:srgbClr val="64748B"/>
+          </a:solidFill>
+          <a:ln>
+            <a:solidFill>
+              <a:srgbClr val="64748B"/>
+            </a:solidFill>
+          </a:ln>
+          <a:effectLst/>
+        </p:spPr>
+        <p:style>
+          <a:lnRef idx="1">
+            <a:schemeClr val="accent1"/>
+          </a:lnRef>
+          <a:fillRef idx="3">
+            <a:schemeClr val="accent1"/>
+          </a:fillRef>
+          <a:effectRef idx="2">
+            <a:schemeClr val="accent1"/>
+          </a:effectRef>
+          <a:fontRef idx="minor">
+            <a:schemeClr val="lt1"/>
+          </a:fontRef>
+        </p:style>
+        <p:txBody>
+          <a:bodyPr rtlCol="0" anchor="ctr" wrap="square" tIns="25400" bIns="25400"/>
+          <a:lstStyle/>
+          <a:p>
+            <a:pPr algn="ctr"/>
+            <a:r>
+              <a:rPr sz="1100" b="1">
+                <a:solidFill>
                   <a:srgbClr val="FFFFFF"/>
                 </a:solidFill>
                 <a:latin typeface="PingFang TC"/>
                 <a:ea typeface="PingFang TC"/>
               </a:rPr>
-              <a:t>可跑的 FastAPI 實作 + 管理頁前端</a:t>
-            </a:r>
-          </a:p>
-        </p:txBody>
-      </p:sp>
-      <p:sp>
-        <p:nvSpPr>
-          <p:cNvPr id="4" name="TextBox 3"/>
+              <a:t>git push</a:t>
+            </a:r>
+          </a:p>
+          <a:p>
+            <a:pPr algn="ctr"/>
+            <a:r>
+              <a:rPr sz="1100" b="0">
+                <a:solidFill>
+                  <a:srgbClr val="FFFFFF"/>
+                </a:solidFill>
+                <a:latin typeface="PingFang TC"/>
+                <a:ea typeface="PingFang TC"/>
+              </a:rPr>
+              <a:t>QR Code Generator/**</a:t>
+            </a:r>
+          </a:p>
+        </p:txBody>
+      </p:sp>
+      <p:cxnSp>
+        <p:nvCxnSpPr>
+          <p:cNvPr id="5" name="Connector 4"/>
+          <p:cNvCxnSpPr/>
+          <p:nvPr/>
+        </p:nvCxnSpPr>
+        <p:spPr>
+          <a:xfrm>
+            <a:off x="1938528" y="2926080"/>
+            <a:ext cx="118872" cy="0"/>
+          </a:xfrm>
+          <a:prstGeom prst="line">
+            <a:avLst/>
+          </a:prstGeom>
+          <a:ln w="22225">
+            <a:solidFill>
+              <a:srgbClr val="64748B"/>
+            </a:solidFill>
+            <a:tailEnd type="triangle" w="med" len="med"/>
+          </a:ln>
+        </p:spPr>
+        <p:style>
+          <a:lnRef idx="2">
+            <a:schemeClr val="accent1"/>
+          </a:lnRef>
+          <a:fillRef idx="0">
+            <a:schemeClr val="accent1"/>
+          </a:fillRef>
+          <a:effectRef idx="1">
+            <a:schemeClr val="accent1"/>
+          </a:effectRef>
+          <a:fontRef idx="minor">
+            <a:schemeClr val="tx1"/>
+          </a:fontRef>
+        </p:style>
+      </p:cxnSp>
+      <p:sp>
+        <p:nvSpPr>
+          <p:cNvPr id="6" name="Rounded Rectangle 5"/>
+          <p:cNvSpPr/>
+          <p:nvPr/>
+        </p:nvSpPr>
+        <p:spPr>
+          <a:xfrm>
+            <a:off x="2057400" y="2286000"/>
+            <a:ext cx="1481328" cy="1280160"/>
+          </a:xfrm>
+          <a:prstGeom prst="roundRect">
+            <a:avLst/>
+          </a:prstGeom>
+          <a:solidFill>
+            <a:srgbClr val="0EA5E9"/>
+          </a:solidFill>
+          <a:ln>
+            <a:solidFill>
+              <a:srgbClr val="0EA5E9"/>
+            </a:solidFill>
+          </a:ln>
+          <a:effectLst/>
+        </p:spPr>
+        <p:style>
+          <a:lnRef idx="1">
+            <a:schemeClr val="accent1"/>
+          </a:lnRef>
+          <a:fillRef idx="3">
+            <a:schemeClr val="accent1"/>
+          </a:fillRef>
+          <a:effectRef idx="2">
+            <a:schemeClr val="accent1"/>
+          </a:effectRef>
+          <a:fontRef idx="minor">
+            <a:schemeClr val="lt1"/>
+          </a:fontRef>
+        </p:style>
+        <p:txBody>
+          <a:bodyPr rtlCol="0" anchor="ctr" wrap="square" tIns="25400" bIns="25400"/>
+          <a:lstStyle/>
+          <a:p>
+            <a:pPr algn="ctr"/>
+            <a:r>
+              <a:rPr sz="1100" b="1">
+                <a:solidFill>
+                  <a:srgbClr val="FFFFFF"/>
+                </a:solidFill>
+                <a:latin typeface="PingFang TC"/>
+                <a:ea typeface="PingFang TC"/>
+              </a:rPr>
+              <a:t>GitHub Actions</a:t>
+            </a:r>
+          </a:p>
+          <a:p>
+            <a:pPr algn="ctr"/>
+            <a:r>
+              <a:rPr sz="1100" b="0">
+                <a:solidFill>
+                  <a:srgbClr val="FFFFFF"/>
+                </a:solidFill>
+                <a:latin typeface="PingFang TC"/>
+                <a:ea typeface="PingFang TC"/>
+              </a:rPr>
+              <a:t>OIDC assume role</a:t>
+            </a:r>
+          </a:p>
+          <a:p>
+            <a:pPr algn="ctr"/>
+            <a:r>
+              <a:rPr sz="1100" b="0">
+                <a:solidFill>
+                  <a:srgbClr val="FFFFFF"/>
+                </a:solidFill>
+                <a:latin typeface="PingFang TC"/>
+                <a:ea typeface="PingFang TC"/>
+              </a:rPr>
+              <a:t>(無長期金鑰)</a:t>
+            </a:r>
+          </a:p>
+        </p:txBody>
+      </p:sp>
+      <p:cxnSp>
+        <p:nvCxnSpPr>
+          <p:cNvPr id="7" name="Connector 6"/>
+          <p:cNvCxnSpPr/>
+          <p:nvPr/>
+        </p:nvCxnSpPr>
+        <p:spPr>
+          <a:xfrm>
+            <a:off x="3538728" y="2926080"/>
+            <a:ext cx="118872" cy="0"/>
+          </a:xfrm>
+          <a:prstGeom prst="line">
+            <a:avLst/>
+          </a:prstGeom>
+          <a:ln w="22225">
+            <a:solidFill>
+              <a:srgbClr val="64748B"/>
+            </a:solidFill>
+            <a:tailEnd type="triangle" w="med" len="med"/>
+          </a:ln>
+        </p:spPr>
+        <p:style>
+          <a:lnRef idx="2">
+            <a:schemeClr val="accent1"/>
+          </a:lnRef>
+          <a:fillRef idx="0">
+            <a:schemeClr val="accent1"/>
+          </a:fillRef>
+          <a:effectRef idx="1">
+            <a:schemeClr val="accent1"/>
+          </a:effectRef>
+          <a:fontRef idx="minor">
+            <a:schemeClr val="tx1"/>
+          </a:fontRef>
+        </p:style>
+      </p:cxnSp>
+      <p:sp>
+        <p:nvSpPr>
+          <p:cNvPr id="8" name="Rounded Rectangle 7"/>
+          <p:cNvSpPr/>
+          <p:nvPr/>
+        </p:nvSpPr>
+        <p:spPr>
+          <a:xfrm>
+            <a:off x="3657600" y="2286000"/>
+            <a:ext cx="1481328" cy="1280160"/>
+          </a:xfrm>
+          <a:prstGeom prst="roundRect">
+            <a:avLst/>
+          </a:prstGeom>
+          <a:solidFill>
+            <a:srgbClr val="2563EB"/>
+          </a:solidFill>
+          <a:ln>
+            <a:solidFill>
+              <a:srgbClr val="2563EB"/>
+            </a:solidFill>
+          </a:ln>
+          <a:effectLst/>
+        </p:spPr>
+        <p:style>
+          <a:lnRef idx="1">
+            <a:schemeClr val="accent1"/>
+          </a:lnRef>
+          <a:fillRef idx="3">
+            <a:schemeClr val="accent1"/>
+          </a:fillRef>
+          <a:effectRef idx="2">
+            <a:schemeClr val="accent1"/>
+          </a:effectRef>
+          <a:fontRef idx="minor">
+            <a:schemeClr val="lt1"/>
+          </a:fontRef>
+        </p:style>
+        <p:txBody>
+          <a:bodyPr rtlCol="0" anchor="ctr" wrap="square" tIns="25400" bIns="25400"/>
+          <a:lstStyle/>
+          <a:p>
+            <a:pPr algn="ctr"/>
+            <a:r>
+              <a:rPr sz="1100" b="1">
+                <a:solidFill>
+                  <a:srgbClr val="FFFFFF"/>
+                </a:solidFill>
+                <a:latin typeface="PingFang TC"/>
+                <a:ea typeface="PingFang TC"/>
+              </a:rPr>
+              <a:t>buildx</a:t>
+            </a:r>
+          </a:p>
+          <a:p>
+            <a:pPr algn="ctr"/>
+            <a:r>
+              <a:rPr sz="1100" b="0">
+                <a:solidFill>
+                  <a:srgbClr val="FFFFFF"/>
+                </a:solidFill>
+                <a:latin typeface="PingFang TC"/>
+                <a:ea typeface="PingFang TC"/>
+              </a:rPr>
+              <a:t>--platform</a:t>
+            </a:r>
+          </a:p>
+          <a:p>
+            <a:pPr algn="ctr"/>
+            <a:r>
+              <a:rPr sz="1100" b="0">
+                <a:solidFill>
+                  <a:srgbClr val="FFFFFF"/>
+                </a:solidFill>
+                <a:latin typeface="PingFang TC"/>
+                <a:ea typeface="PingFang TC"/>
+              </a:rPr>
+              <a:t>linux/arm64</a:t>
+            </a:r>
+          </a:p>
+        </p:txBody>
+      </p:sp>
+      <p:cxnSp>
+        <p:nvCxnSpPr>
+          <p:cNvPr id="9" name="Connector 8"/>
+          <p:cNvCxnSpPr/>
+          <p:nvPr/>
+        </p:nvCxnSpPr>
+        <p:spPr>
+          <a:xfrm>
+            <a:off x="5138928" y="2926080"/>
+            <a:ext cx="118872" cy="0"/>
+          </a:xfrm>
+          <a:prstGeom prst="line">
+            <a:avLst/>
+          </a:prstGeom>
+          <a:ln w="22225">
+            <a:solidFill>
+              <a:srgbClr val="64748B"/>
+            </a:solidFill>
+            <a:tailEnd type="triangle" w="med" len="med"/>
+          </a:ln>
+        </p:spPr>
+        <p:style>
+          <a:lnRef idx="2">
+            <a:schemeClr val="accent1"/>
+          </a:lnRef>
+          <a:fillRef idx="0">
+            <a:schemeClr val="accent1"/>
+          </a:fillRef>
+          <a:effectRef idx="1">
+            <a:schemeClr val="accent1"/>
+          </a:effectRef>
+          <a:fontRef idx="minor">
+            <a:schemeClr val="tx1"/>
+          </a:fontRef>
+        </p:style>
+      </p:cxnSp>
+      <p:sp>
+        <p:nvSpPr>
+          <p:cNvPr id="10" name="Rounded Rectangle 9"/>
+          <p:cNvSpPr/>
+          <p:nvPr/>
+        </p:nvSpPr>
+        <p:spPr>
+          <a:xfrm>
+            <a:off x="5257800" y="2286000"/>
+            <a:ext cx="1481328" cy="1280160"/>
+          </a:xfrm>
+          <a:prstGeom prst="roundRect">
+            <a:avLst/>
+          </a:prstGeom>
+          <a:solidFill>
+            <a:srgbClr val="059669"/>
+          </a:solidFill>
+          <a:ln>
+            <a:solidFill>
+              <a:srgbClr val="059669"/>
+            </a:solidFill>
+          </a:ln>
+          <a:effectLst/>
+        </p:spPr>
+        <p:style>
+          <a:lnRef idx="1">
+            <a:schemeClr val="accent1"/>
+          </a:lnRef>
+          <a:fillRef idx="3">
+            <a:schemeClr val="accent1"/>
+          </a:fillRef>
+          <a:effectRef idx="2">
+            <a:schemeClr val="accent1"/>
+          </a:effectRef>
+          <a:fontRef idx="minor">
+            <a:schemeClr val="lt1"/>
+          </a:fontRef>
+        </p:style>
+        <p:txBody>
+          <a:bodyPr rtlCol="0" anchor="ctr" wrap="square" tIns="25400" bIns="25400"/>
+          <a:lstStyle/>
+          <a:p>
+            <a:pPr algn="ctr"/>
+            <a:r>
+              <a:rPr sz="1100" b="1">
+                <a:solidFill>
+                  <a:srgbClr val="FFFFFF"/>
+                </a:solidFill>
+                <a:latin typeface="PingFang TC"/>
+                <a:ea typeface="PingFang TC"/>
+              </a:rPr>
+              <a:t>ECR push</a:t>
+            </a:r>
+          </a:p>
+          <a:p>
+            <a:pPr algn="ctr"/>
+            <a:r>
+              <a:rPr sz="1100" b="0">
+                <a:solidFill>
+                  <a:srgbClr val="FFFFFF"/>
+                </a:solidFill>
+                <a:latin typeface="PingFang TC"/>
+                <a:ea typeface="PingFang TC"/>
+              </a:rPr>
+              <a:t>tag = SHA</a:t>
+            </a:r>
+          </a:p>
+          <a:p>
+            <a:pPr algn="ctr"/>
+            <a:r>
+              <a:rPr sz="1100" b="0">
+                <a:solidFill>
+                  <a:srgbClr val="FFFFFF"/>
+                </a:solidFill>
+                <a:latin typeface="PingFang TC"/>
+                <a:ea typeface="PingFang TC"/>
+              </a:rPr>
+              <a:t>+ latest</a:t>
+            </a:r>
+          </a:p>
+        </p:txBody>
+      </p:sp>
+      <p:cxnSp>
+        <p:nvCxnSpPr>
+          <p:cNvPr id="11" name="Connector 10"/>
+          <p:cNvCxnSpPr/>
+          <p:nvPr/>
+        </p:nvCxnSpPr>
+        <p:spPr>
+          <a:xfrm>
+            <a:off x="6739128" y="2926080"/>
+            <a:ext cx="118872" cy="0"/>
+          </a:xfrm>
+          <a:prstGeom prst="line">
+            <a:avLst/>
+          </a:prstGeom>
+          <a:ln w="22225">
+            <a:solidFill>
+              <a:srgbClr val="64748B"/>
+            </a:solidFill>
+            <a:tailEnd type="triangle" w="med" len="med"/>
+          </a:ln>
+        </p:spPr>
+        <p:style>
+          <a:lnRef idx="2">
+            <a:schemeClr val="accent1"/>
+          </a:lnRef>
+          <a:fillRef idx="0">
+            <a:schemeClr val="accent1"/>
+          </a:fillRef>
+          <a:effectRef idx="1">
+            <a:schemeClr val="accent1"/>
+          </a:effectRef>
+          <a:fontRef idx="minor">
+            <a:schemeClr val="tx1"/>
+          </a:fontRef>
+        </p:style>
+      </p:cxnSp>
+      <p:sp>
+        <p:nvSpPr>
+          <p:cNvPr id="12" name="Rounded Rectangle 11"/>
+          <p:cNvSpPr/>
+          <p:nvPr/>
+        </p:nvSpPr>
+        <p:spPr>
+          <a:xfrm>
+            <a:off x="6858000" y="2286000"/>
+            <a:ext cx="1481328" cy="1280160"/>
+          </a:xfrm>
+          <a:prstGeom prst="roundRect">
+            <a:avLst/>
+          </a:prstGeom>
+          <a:solidFill>
+            <a:srgbClr val="7C3AED"/>
+          </a:solidFill>
+          <a:ln>
+            <a:solidFill>
+              <a:srgbClr val="7C3AED"/>
+            </a:solidFill>
+          </a:ln>
+          <a:effectLst/>
+        </p:spPr>
+        <p:style>
+          <a:lnRef idx="1">
+            <a:schemeClr val="accent1"/>
+          </a:lnRef>
+          <a:fillRef idx="3">
+            <a:schemeClr val="accent1"/>
+          </a:fillRef>
+          <a:effectRef idx="2">
+            <a:schemeClr val="accent1"/>
+          </a:effectRef>
+          <a:fontRef idx="minor">
+            <a:schemeClr val="lt1"/>
+          </a:fontRef>
+        </p:style>
+        <p:txBody>
+          <a:bodyPr rtlCol="0" anchor="ctr" wrap="square" tIns="25400" bIns="25400"/>
+          <a:lstStyle/>
+          <a:p>
+            <a:pPr algn="ctr"/>
+            <a:r>
+              <a:rPr sz="1100" b="1">
+                <a:solidFill>
+                  <a:srgbClr val="FFFFFF"/>
+                </a:solidFill>
+                <a:latin typeface="PingFang TC"/>
+                <a:ea typeface="PingFang TC"/>
+              </a:rPr>
+              <a:t>SSM 更新</a:t>
+            </a:r>
+          </a:p>
+          <a:p>
+            <a:pPr algn="ctr"/>
+            <a:r>
+              <a:rPr sz="1100" b="0">
+                <a:solidFill>
+                  <a:srgbClr val="FFFFFF"/>
+                </a:solidFill>
+                <a:latin typeface="PingFang TC"/>
+                <a:ea typeface="PingFang TC"/>
+              </a:rPr>
+              <a:t>/qrcode/</a:t>
+            </a:r>
+          </a:p>
+          <a:p>
+            <a:pPr algn="ctr"/>
+            <a:r>
+              <a:rPr sz="1100" b="0">
+                <a:solidFill>
+                  <a:srgbClr val="FFFFFF"/>
+                </a:solidFill>
+                <a:latin typeface="PingFang TC"/>
+                <a:ea typeface="PingFang TC"/>
+              </a:rPr>
+              <a:t>IMAGE_URI</a:t>
+            </a:r>
+          </a:p>
+        </p:txBody>
+      </p:sp>
+      <p:cxnSp>
+        <p:nvCxnSpPr>
+          <p:cNvPr id="13" name="Connector 12"/>
+          <p:cNvCxnSpPr/>
+          <p:nvPr/>
+        </p:nvCxnSpPr>
+        <p:spPr>
+          <a:xfrm>
+            <a:off x="8339328" y="2926080"/>
+            <a:ext cx="118872" cy="0"/>
+          </a:xfrm>
+          <a:prstGeom prst="line">
+            <a:avLst/>
+          </a:prstGeom>
+          <a:ln w="22225">
+            <a:solidFill>
+              <a:srgbClr val="64748B"/>
+            </a:solidFill>
+            <a:tailEnd type="triangle" w="med" len="med"/>
+          </a:ln>
+        </p:spPr>
+        <p:style>
+          <a:lnRef idx="2">
+            <a:schemeClr val="accent1"/>
+          </a:lnRef>
+          <a:fillRef idx="0">
+            <a:schemeClr val="accent1"/>
+          </a:fillRef>
+          <a:effectRef idx="1">
+            <a:schemeClr val="accent1"/>
+          </a:effectRef>
+          <a:fontRef idx="minor">
+            <a:schemeClr val="tx1"/>
+          </a:fontRef>
+        </p:style>
+      </p:cxnSp>
+      <p:sp>
+        <p:nvSpPr>
+          <p:cNvPr id="14" name="Rounded Rectangle 13"/>
+          <p:cNvSpPr/>
+          <p:nvPr/>
+        </p:nvSpPr>
+        <p:spPr>
+          <a:xfrm>
+            <a:off x="8458200" y="2286000"/>
+            <a:ext cx="1481328" cy="1280160"/>
+          </a:xfrm>
+          <a:prstGeom prst="roundRect">
+            <a:avLst/>
+          </a:prstGeom>
+          <a:solidFill>
+            <a:srgbClr val="D97706"/>
+          </a:solidFill>
+          <a:ln>
+            <a:solidFill>
+              <a:srgbClr val="D97706"/>
+            </a:solidFill>
+          </a:ln>
+          <a:effectLst/>
+        </p:spPr>
+        <p:style>
+          <a:lnRef idx="1">
+            <a:schemeClr val="accent1"/>
+          </a:lnRef>
+          <a:fillRef idx="3">
+            <a:schemeClr val="accent1"/>
+          </a:fillRef>
+          <a:effectRef idx="2">
+            <a:schemeClr val="accent1"/>
+          </a:effectRef>
+          <a:fontRef idx="minor">
+            <a:schemeClr val="lt1"/>
+          </a:fontRef>
+        </p:style>
+        <p:txBody>
+          <a:bodyPr rtlCol="0" anchor="ctr" wrap="square" tIns="25400" bIns="25400"/>
+          <a:lstStyle/>
+          <a:p>
+            <a:pPr algn="ctr"/>
+            <a:r>
+              <a:rPr sz="1100" b="1">
+                <a:solidFill>
+                  <a:srgbClr val="FFFFFF"/>
+                </a:solidFill>
+                <a:latin typeface="PingFang TC"/>
+                <a:ea typeface="PingFang TC"/>
+              </a:rPr>
+              <a:t>SSM 部署</a:t>
+            </a:r>
+          </a:p>
+          <a:p>
+            <a:pPr algn="ctr"/>
+            <a:r>
+              <a:rPr sz="1100" b="0">
+                <a:solidFill>
+                  <a:srgbClr val="FFFFFF"/>
+                </a:solidFill>
+                <a:latin typeface="PingFang TC"/>
+                <a:ea typeface="PingFang TC"/>
+              </a:rPr>
+              <a:t>→ EC2</a:t>
+            </a:r>
+          </a:p>
+          <a:p>
+            <a:pPr algn="ctr"/>
+            <a:r>
+              <a:rPr sz="1100" b="0">
+                <a:solidFill>
+                  <a:srgbClr val="FFFFFF"/>
+                </a:solidFill>
+                <a:latin typeface="PingFang TC"/>
+                <a:ea typeface="PingFang TC"/>
+              </a:rPr>
+              <a:t>deploy-app.sh</a:t>
+            </a:r>
+          </a:p>
+        </p:txBody>
+      </p:sp>
+      <p:cxnSp>
+        <p:nvCxnSpPr>
+          <p:cNvPr id="15" name="Connector 14"/>
+          <p:cNvCxnSpPr/>
+          <p:nvPr/>
+        </p:nvCxnSpPr>
+        <p:spPr>
+          <a:xfrm>
+            <a:off x="9939528" y="2926080"/>
+            <a:ext cx="118872" cy="0"/>
+          </a:xfrm>
+          <a:prstGeom prst="line">
+            <a:avLst/>
+          </a:prstGeom>
+          <a:ln w="22225">
+            <a:solidFill>
+              <a:srgbClr val="64748B"/>
+            </a:solidFill>
+            <a:tailEnd type="triangle" w="med" len="med"/>
+          </a:ln>
+        </p:spPr>
+        <p:style>
+          <a:lnRef idx="2">
+            <a:schemeClr val="accent1"/>
+          </a:lnRef>
+          <a:fillRef idx="0">
+            <a:schemeClr val="accent1"/>
+          </a:fillRef>
+          <a:effectRef idx="1">
+            <a:schemeClr val="accent1"/>
+          </a:effectRef>
+          <a:fontRef idx="minor">
+            <a:schemeClr val="tx1"/>
+          </a:fontRef>
+        </p:style>
+      </p:cxnSp>
+      <p:sp>
+        <p:nvSpPr>
+          <p:cNvPr id="16" name="Rounded Rectangle 15"/>
+          <p:cNvSpPr/>
+          <p:nvPr/>
+        </p:nvSpPr>
+        <p:spPr>
+          <a:xfrm>
+            <a:off x="10058400" y="2286000"/>
+            <a:ext cx="1481328" cy="1280160"/>
+          </a:xfrm>
+          <a:prstGeom prst="roundRect">
+            <a:avLst/>
+          </a:prstGeom>
+          <a:solidFill>
+            <a:srgbClr val="059669"/>
+          </a:solidFill>
+          <a:ln>
+            <a:solidFill>
+              <a:srgbClr val="059669"/>
+            </a:solidFill>
+          </a:ln>
+          <a:effectLst/>
+        </p:spPr>
+        <p:style>
+          <a:lnRef idx="1">
+            <a:schemeClr val="accent1"/>
+          </a:lnRef>
+          <a:fillRef idx="3">
+            <a:schemeClr val="accent1"/>
+          </a:fillRef>
+          <a:effectRef idx="2">
+            <a:schemeClr val="accent1"/>
+          </a:effectRef>
+          <a:fontRef idx="minor">
+            <a:schemeClr val="lt1"/>
+          </a:fontRef>
+        </p:style>
+        <p:txBody>
+          <a:bodyPr rtlCol="0" anchor="ctr" wrap="square" tIns="25400" bIns="25400"/>
+          <a:lstStyle/>
+          <a:p>
+            <a:pPr algn="ctr"/>
+            <a:r>
+              <a:rPr sz="1100" b="1">
+                <a:solidFill>
+                  <a:srgbClr val="FFFFFF"/>
+                </a:solidFill>
+                <a:latin typeface="PingFang TC"/>
+                <a:ea typeface="PingFang TC"/>
+              </a:rPr>
+              <a:t>上線</a:t>
+            </a:r>
+          </a:p>
+          <a:p>
+            <a:pPr algn="ctr"/>
+            <a:r>
+              <a:rPr sz="1100" b="0">
+                <a:solidFill>
+                  <a:srgbClr val="FFFFFF"/>
+                </a:solidFill>
+                <a:latin typeface="PingFang TC"/>
+                <a:ea typeface="PingFang TC"/>
+              </a:rPr>
+              <a:t>ALB /health</a:t>
+            </a:r>
+          </a:p>
+          <a:p>
+            <a:pPr algn="ctr"/>
+            <a:r>
+              <a:rPr sz="1100" b="0">
+                <a:solidFill>
+                  <a:srgbClr val="FFFFFF"/>
+                </a:solidFill>
+                <a:latin typeface="PingFang TC"/>
+                <a:ea typeface="PingFang TC"/>
+              </a:rPr>
+              <a:t>通過</a:t>
+            </a:r>
+          </a:p>
+        </p:txBody>
+      </p:sp>
+      <p:sp>
+        <p:nvSpPr>
+          <p:cNvPr id="17" name="TextBox 16"/>
           <p:cNvSpPr txBox="1"/>
           <p:nvPr/>
         </p:nvSpPr>
         <p:spPr>
           <a:xfrm>
-            <a:off x="822960" y="2743200"/>
-            <a:ext cx="10515600" cy="2743200"/>
+            <a:off x="548640" y="4023360"/>
+            <a:ext cx="11247120" cy="2194560"/>
           </a:xfrm>
           <a:prstGeom prst="rect">
             <a:avLst/>
@@ -16186,69 +16916,52 @@
           <a:p>
             <a:pPr>
               <a:spcAft>
-                <a:spcPts val="1200"/>
-              </a:spcAft>
-            </a:pPr>
-            <a:r>
-              <a:rPr sz="1600" b="0">
-                <a:solidFill>
-                  <a:srgbClr val="E2E8F0"/>
-                </a:solidFill>
-                <a:latin typeface="PingFang TC"/>
-                <a:ea typeface="PingFang TC"/>
-              </a:rPr>
-              <a:t>✓  7 個 API 端點 + 管理頁前端（建立/清單/編輯/刪除/分析）</a:t>
+                <a:spcPts val="900"/>
+              </a:spcAft>
+            </a:pPr>
+            <a:r>
+              <a:rPr sz="1400" b="0">
+                <a:solidFill>
+                  <a:srgbClr val="0F172A"/>
+                </a:solidFill>
+                <a:latin typeface="PingFang TC"/>
+                <a:ea typeface="PingFang TC"/>
+              </a:rPr>
+              <a:t>•  EC2 deploy-app.sh:從 SSM 撈設定 → ECR login → docker pull → docker run(換新容器)</a:t>
             </a:r>
           </a:p>
           <a:p>
             <a:pPr>
               <a:spcAft>
-                <a:spcPts val="1200"/>
-              </a:spcAft>
-            </a:pPr>
-            <a:r>
-              <a:rPr sz="1600" b="0">
-                <a:solidFill>
-                  <a:srgbClr val="E2E8F0"/>
-                </a:solidFill>
-                <a:latin typeface="PingFang TC"/>
-                <a:ea typeface="PingFang TC"/>
-              </a:rPr>
-              <a:t>✓  全部 curl 驗證通過：302 / 404 / 410 / 8 碼 token / 正規化 / SSRF / 過期</a:t>
+                <a:spcPts val="900"/>
+              </a:spcAft>
+            </a:pPr>
+            <a:r>
+              <a:rPr sz="1400" b="0">
+                <a:solidFill>
+                  <a:srgbClr val="0F172A"/>
+                </a:solidFill>
+                <a:latin typeface="PingFang TC"/>
+                <a:ea typeface="PingFang TC"/>
+              </a:rPr>
+              <a:t>•  全 env-gated:本機無這些環境變數 → 維持 SQLite + 記憶體 cache + 即時生圖,不受影響</a:t>
             </a:r>
           </a:p>
           <a:p>
             <a:pPr>
               <a:spcAft>
-                <a:spcPts val="1200"/>
-              </a:spcAft>
-            </a:pPr>
-            <a:r>
-              <a:rPr sz="1600" b="0">
-                <a:solidFill>
-                  <a:srgbClr val="E2E8F0"/>
-                </a:solidFill>
-                <a:latin typeface="PingFang TC"/>
-                <a:ea typeface="PingFang TC"/>
-              </a:rPr>
-              <a:t>✓  production 替換點已在程式註解標明（Redis / 佇列 / CDN / 預聚合 / PostgreSQL）</a:t>
-            </a:r>
-          </a:p>
-          <a:p>
-            <a:pPr>
-              <a:spcAft>
-                <a:spcPts val="1200"/>
-              </a:spcAft>
-            </a:pPr>
-            <a:r>
-              <a:rPr sz="1600" b="0">
-                <a:solidFill>
-                  <a:srgbClr val="E2E8F0"/>
-                </a:solidFill>
-                <a:latin typeface="PingFang TC"/>
-                <a:ea typeface="PingFang TC"/>
-              </a:rPr>
-              <a:t>✓  設計依據：DESIGN.md（16 題決策 + 優劣分析）</a:t>
+                <a:spcPts val="900"/>
+              </a:spcAft>
+            </a:pPr>
+            <a:r>
+              <a:rPr sz="1400" b="0">
+                <a:solidFill>
+                  <a:srgbClr val="0F172A"/>
+                </a:solidFill>
+                <a:latin typeface="PingFang TC"/>
+                <a:ea typeface="PingFang TC"/>
+              </a:rPr>
+              <a:t>•  部署踩到的兩個坑:① EC2 role 少 s3:PutObject(500)② CI build amd64 但 EC2 arm64(502)→ buildx 跨平台修正</a:t>
             </a:r>
           </a:p>
         </p:txBody>
@@ -16280,6 +16993,216 @@
         <p:spPr>
           <a:xfrm>
             <a:off x="0" y="0"/>
+            <a:ext cx="12191695" cy="6858000"/>
+          </a:xfrm>
+          <a:prstGeom prst="rect">
+            <a:avLst/>
+          </a:prstGeom>
+          <a:solidFill>
+            <a:srgbClr val="0F172A"/>
+          </a:solidFill>
+          <a:ln>
+            <a:noFill/>
+          </a:ln>
+          <a:effectLst/>
+        </p:spPr>
+        <p:style>
+          <a:lnRef idx="1">
+            <a:schemeClr val="accent1"/>
+          </a:lnRef>
+          <a:fillRef idx="3">
+            <a:schemeClr val="accent1"/>
+          </a:fillRef>
+          <a:effectRef idx="2">
+            <a:schemeClr val="accent1"/>
+          </a:effectRef>
+          <a:fontRef idx="minor">
+            <a:schemeClr val="lt1"/>
+          </a:fontRef>
+        </p:style>
+        <p:txBody>
+          <a:bodyPr rtlCol="0" anchor="ctr"/>
+          <a:lstStyle/>
+          <a:p>
+            <a:pPr algn="ctr"/>
+          </a:p>
+        </p:txBody>
+      </p:sp>
+      <p:sp>
+        <p:nvSpPr>
+          <p:cNvPr id="3" name="TextBox 2"/>
+          <p:cNvSpPr txBox="1"/>
+          <p:nvPr/>
+        </p:nvSpPr>
+        <p:spPr>
+          <a:xfrm>
+            <a:off x="822960" y="1097280"/>
+            <a:ext cx="10515600" cy="1097280"/>
+          </a:xfrm>
+          <a:prstGeom prst="rect">
+            <a:avLst/>
+          </a:prstGeom>
+          <a:noFill/>
+        </p:spPr>
+        <p:txBody>
+          <a:bodyPr wrap="square" anchor="t">
+            <a:spAutoFit/>
+          </a:bodyPr>
+          <a:lstStyle/>
+          <a:p>
+            <a:pPr algn="l">
+              <a:spcAft>
+                <a:spcPts val="400"/>
+              </a:spcAft>
+            </a:pPr>
+            <a:r>
+              <a:rPr sz="1600" b="1">
+                <a:solidFill>
+                  <a:srgbClr val="2563EB"/>
+                </a:solidFill>
+                <a:latin typeface="PingFang TC"/>
+                <a:ea typeface="PingFang TC"/>
+              </a:rPr>
+              <a:t>原型狀態</a:t>
+            </a:r>
+          </a:p>
+          <a:p>
+            <a:pPr algn="l">
+              <a:spcAft>
+                <a:spcPts val="400"/>
+              </a:spcAft>
+            </a:pPr>
+            <a:r>
+              <a:rPr sz="3000" b="1">
+                <a:solidFill>
+                  <a:srgbClr val="FFFFFF"/>
+                </a:solidFill>
+                <a:latin typeface="PingFang TC"/>
+                <a:ea typeface="PingFang TC"/>
+              </a:rPr>
+              <a:t>可跑的 FastAPI 實作 + 管理頁前端</a:t>
+            </a:r>
+          </a:p>
+        </p:txBody>
+      </p:sp>
+      <p:sp>
+        <p:nvSpPr>
+          <p:cNvPr id="4" name="TextBox 3"/>
+          <p:cNvSpPr txBox="1"/>
+          <p:nvPr/>
+        </p:nvSpPr>
+        <p:spPr>
+          <a:xfrm>
+            <a:off x="822960" y="2743200"/>
+            <a:ext cx="10515600" cy="2743200"/>
+          </a:xfrm>
+          <a:prstGeom prst="rect">
+            <a:avLst/>
+          </a:prstGeom>
+          <a:noFill/>
+        </p:spPr>
+        <p:txBody>
+          <a:bodyPr wrap="square">
+            <a:spAutoFit/>
+          </a:bodyPr>
+          <a:lstStyle/>
+          <a:p>
+            <a:pPr>
+              <a:spcAft>
+                <a:spcPts val="1200"/>
+              </a:spcAft>
+            </a:pPr>
+            <a:r>
+              <a:rPr sz="1600" b="0">
+                <a:solidFill>
+                  <a:srgbClr val="E2E8F0"/>
+                </a:solidFill>
+                <a:latin typeface="PingFang TC"/>
+                <a:ea typeface="PingFang TC"/>
+              </a:rPr>
+              <a:t>✓  7 個 API 端點 + 管理頁前端（建立/清單/編輯/刪除/分析）</a:t>
+            </a:r>
+          </a:p>
+          <a:p>
+            <a:pPr>
+              <a:spcAft>
+                <a:spcPts val="1200"/>
+              </a:spcAft>
+            </a:pPr>
+            <a:r>
+              <a:rPr sz="1600" b="0">
+                <a:solidFill>
+                  <a:srgbClr val="E2E8F0"/>
+                </a:solidFill>
+                <a:latin typeface="PingFang TC"/>
+                <a:ea typeface="PingFang TC"/>
+              </a:rPr>
+              <a:t>✓  全部 curl 驗證通過：302 / 404 / 410 / 8 碼 token / 正規化 / SSRF / 過期</a:t>
+            </a:r>
+          </a:p>
+          <a:p>
+            <a:pPr>
+              <a:spcAft>
+                <a:spcPts val="1200"/>
+              </a:spcAft>
+            </a:pPr>
+            <a:r>
+              <a:rPr sz="1600" b="0">
+                <a:solidFill>
+                  <a:srgbClr val="E2E8F0"/>
+                </a:solidFill>
+                <a:latin typeface="PingFang TC"/>
+                <a:ea typeface="PingFang TC"/>
+              </a:rPr>
+              <a:t>✓  production 替換點已在程式註解標明（Redis / 佇列 / CDN / 預聚合 / PostgreSQL）</a:t>
+            </a:r>
+          </a:p>
+          <a:p>
+            <a:pPr>
+              <a:spcAft>
+                <a:spcPts val="1200"/>
+              </a:spcAft>
+            </a:pPr>
+            <a:r>
+              <a:rPr sz="1600" b="0">
+                <a:solidFill>
+                  <a:srgbClr val="E2E8F0"/>
+                </a:solidFill>
+                <a:latin typeface="PingFang TC"/>
+                <a:ea typeface="PingFang TC"/>
+              </a:rPr>
+              <a:t>✓  設計依據：DESIGN.md（16 題決策 + 優劣分析）</a:t>
+            </a:r>
+          </a:p>
+        </p:txBody>
+      </p:sp>
+    </p:spTree>
+  </p:cSld>
+  <p:clrMapOvr>
+    <a:masterClrMapping/>
+  </p:clrMapOvr>
+</p:sld>
+</file>
+
+<file path=ppt/slides/slide28.xml><?xml version="1.0" encoding="utf-8"?>
+<p:sld xmlns:a="http://schemas.openxmlformats.org/drawingml/2006/main" xmlns:p="http://schemas.openxmlformats.org/presentationml/2006/main" xmlns:r="http://schemas.openxmlformats.org/officeDocument/2006/relationships">
+  <p:cSld>
+    <p:spTree>
+      <p:nvGrpSpPr>
+        <p:cNvPr id="1" name=""/>
+        <p:cNvGrpSpPr/>
+        <p:nvPr/>
+      </p:nvGrpSpPr>
+      <p:grpSpPr/>
+      <p:sp>
+        <p:nvSpPr>
+          <p:cNvPr id="2" name="Rectangle 1"/>
+          <p:cNvSpPr/>
+          <p:nvPr/>
+        </p:nvSpPr>
+        <p:spPr>
+          <a:xfrm>
+            <a:off x="0" y="0"/>
             <a:ext cx="164592" cy="6858000"/>
           </a:xfrm>
           <a:prstGeom prst="rect">
@@ -17303,7 +18226,7 @@
 </p:sld>
 </file>
 
-<file path=ppt/slides/slide28.xml><?xml version="1.0" encoding="utf-8"?>
+<file path=ppt/slides/slide29.xml><?xml version="1.0" encoding="utf-8"?>
 <p:sld xmlns:a="http://schemas.openxmlformats.org/drawingml/2006/main" xmlns:p="http://schemas.openxmlformats.org/presentationml/2006/main" xmlns:r="http://schemas.openxmlformats.org/officeDocument/2006/relationships">
   <p:cSld>
     <p:spTree>

--- a/QR Code Generator/QR_Code_Generator.pptx
+++ b/QR Code Generator/QR_Code_Generator.pptx
@@ -34,6 +34,7 @@
     <p:sldId id="282" r:id="rId33"/>
     <p:sldId id="283" r:id="rId34"/>
     <p:sldId id="284" r:id="rId35"/>
+    <p:sldId id="285" r:id="rId36"/>
   </p:sldIdLst>
   <p:sldSz cx="12191695" cy="6858000" type="screen4x3"/>
   <p:notesSz cx="6858000" cy="9144000"/>
@@ -12897,7 +12898,7 @@
                           <a:latin typeface="PingFang TC"/>
                           <a:ea typeface="PingFang TC"/>
                         </a:rPr>
-                        <a:t>設計有 cron，未實作</a:t>
+                        <a:t>✅ 已實作</a:t>
                       </a:r>
                     </a:p>
                   </a:txBody>
@@ -12920,7 +12921,7 @@
                           <a:latin typeface="PingFang TC"/>
                           <a:ea typeface="PingFang TC"/>
                         </a:rPr>
-                        <a:t>定期清過期/未點擊，防 DB bloat</a:t>
+                        <a:t>EventBridge + Lambda 定時清理</a:t>
                       </a:r>
                     </a:p>
                   </a:txBody>
@@ -16093,7 +16094,7 @@
                 <a:latin typeface="PingFang TC"/>
                 <a:ea typeface="PingFang TC"/>
               </a:rPr>
-              <a:t>部署 · CI/CD</a:t>
+              <a:t>可靠性 · DATA CLEANUP</a:t>
             </a:r>
           </a:p>
           <a:p>
@@ -16110,7 +16111,7 @@
                 <a:latin typeface="PingFang TC"/>
                 <a:ea typeface="PingFang TC"/>
               </a:rPr>
-              <a:t>CI/CD 流程（GitHub Actions + OIDC）</a:t>
+              <a:t>定時清理:EventBridge + Lambda（防 DB bloat）</a:t>
             </a:r>
           </a:p>
         </p:txBody>
@@ -16123,18 +16124,18 @@
         </p:nvSpPr>
         <p:spPr>
           <a:xfrm>
-            <a:off x="457200" y="2286000"/>
-            <a:ext cx="1481328" cy="1280160"/>
+            <a:off x="548640" y="1920240"/>
+            <a:ext cx="2743200" cy="868680"/>
           </a:xfrm>
           <a:prstGeom prst="roundRect">
             <a:avLst/>
           </a:prstGeom>
           <a:solidFill>
-            <a:srgbClr val="64748B"/>
+            <a:srgbClr val="D97706"/>
           </a:solidFill>
           <a:ln>
             <a:solidFill>
-              <a:srgbClr val="64748B"/>
+              <a:srgbClr val="D97706"/>
             </a:solidFill>
           </a:ln>
           <a:effectLst/>
@@ -16159,195 +16160,41 @@
           <a:p>
             <a:pPr algn="ctr"/>
             <a:r>
-              <a:rPr sz="1100" b="1">
+              <a:rPr sz="1200" b="1">
                 <a:solidFill>
                   <a:srgbClr val="FFFFFF"/>
                 </a:solidFill>
                 <a:latin typeface="PingFang TC"/>
                 <a:ea typeface="PingFang TC"/>
               </a:rPr>
-              <a:t>git push</a:t>
+              <a:t>EventBridge Scheduler</a:t>
             </a:r>
           </a:p>
           <a:p>
             <a:pPr algn="ctr"/>
             <a:r>
-              <a:rPr sz="1100" b="0">
+              <a:rPr sz="1200" b="0">
                 <a:solidFill>
                   <a:srgbClr val="FFFFFF"/>
                 </a:solidFill>
                 <a:latin typeface="PingFang TC"/>
                 <a:ea typeface="PingFang TC"/>
               </a:rPr>
-              <a:t>QR Code Generator/**</a:t>
-            </a:r>
-          </a:p>
-        </p:txBody>
-      </p:sp>
-      <p:cxnSp>
-        <p:nvCxnSpPr>
-          <p:cNvPr id="5" name="Connector 4"/>
-          <p:cNvCxnSpPr/>
-          <p:nvPr/>
-        </p:nvCxnSpPr>
-        <p:spPr>
-          <a:xfrm>
-            <a:off x="1938528" y="2926080"/>
-            <a:ext cx="118872" cy="0"/>
-          </a:xfrm>
-          <a:prstGeom prst="line">
-            <a:avLst/>
-          </a:prstGeom>
-          <a:ln w="22225">
-            <a:solidFill>
-              <a:srgbClr val="64748B"/>
-            </a:solidFill>
-            <a:tailEnd type="triangle" w="med" len="med"/>
-          </a:ln>
-        </p:spPr>
-        <p:style>
-          <a:lnRef idx="2">
-            <a:schemeClr val="accent1"/>
-          </a:lnRef>
-          <a:fillRef idx="0">
-            <a:schemeClr val="accent1"/>
-          </a:fillRef>
-          <a:effectRef idx="1">
-            <a:schemeClr val="accent1"/>
-          </a:effectRef>
-          <a:fontRef idx="minor">
-            <a:schemeClr val="tx1"/>
-          </a:fontRef>
-        </p:style>
-      </p:cxnSp>
-      <p:sp>
-        <p:nvSpPr>
-          <p:cNvPr id="6" name="Rounded Rectangle 5"/>
+              <a:t>每日 03:00 UTC</a:t>
+            </a:r>
+          </a:p>
+        </p:txBody>
+      </p:sp>
+      <p:sp>
+        <p:nvSpPr>
+          <p:cNvPr id="5" name="Rounded Rectangle 4"/>
           <p:cNvSpPr/>
           <p:nvPr/>
         </p:nvSpPr>
         <p:spPr>
           <a:xfrm>
-            <a:off x="2057400" y="2286000"/>
-            <a:ext cx="1481328" cy="1280160"/>
-          </a:xfrm>
-          <a:prstGeom prst="roundRect">
-            <a:avLst/>
-          </a:prstGeom>
-          <a:solidFill>
-            <a:srgbClr val="0EA5E9"/>
-          </a:solidFill>
-          <a:ln>
-            <a:solidFill>
-              <a:srgbClr val="0EA5E9"/>
-            </a:solidFill>
-          </a:ln>
-          <a:effectLst/>
-        </p:spPr>
-        <p:style>
-          <a:lnRef idx="1">
-            <a:schemeClr val="accent1"/>
-          </a:lnRef>
-          <a:fillRef idx="3">
-            <a:schemeClr val="accent1"/>
-          </a:fillRef>
-          <a:effectRef idx="2">
-            <a:schemeClr val="accent1"/>
-          </a:effectRef>
-          <a:fontRef idx="minor">
-            <a:schemeClr val="lt1"/>
-          </a:fontRef>
-        </p:style>
-        <p:txBody>
-          <a:bodyPr rtlCol="0" anchor="ctr" wrap="square" tIns="25400" bIns="25400"/>
-          <a:lstStyle/>
-          <a:p>
-            <a:pPr algn="ctr"/>
-            <a:r>
-              <a:rPr sz="1100" b="1">
-                <a:solidFill>
-                  <a:srgbClr val="FFFFFF"/>
-                </a:solidFill>
-                <a:latin typeface="PingFang TC"/>
-                <a:ea typeface="PingFang TC"/>
-              </a:rPr>
-              <a:t>GitHub Actions</a:t>
-            </a:r>
-          </a:p>
-          <a:p>
-            <a:pPr algn="ctr"/>
-            <a:r>
-              <a:rPr sz="1100" b="0">
-                <a:solidFill>
-                  <a:srgbClr val="FFFFFF"/>
-                </a:solidFill>
-                <a:latin typeface="PingFang TC"/>
-                <a:ea typeface="PingFang TC"/>
-              </a:rPr>
-              <a:t>OIDC assume role</a:t>
-            </a:r>
-          </a:p>
-          <a:p>
-            <a:pPr algn="ctr"/>
-            <a:r>
-              <a:rPr sz="1100" b="0">
-                <a:solidFill>
-                  <a:srgbClr val="FFFFFF"/>
-                </a:solidFill>
-                <a:latin typeface="PingFang TC"/>
-                <a:ea typeface="PingFang TC"/>
-              </a:rPr>
-              <a:t>(無長期金鑰)</a:t>
-            </a:r>
-          </a:p>
-        </p:txBody>
-      </p:sp>
-      <p:cxnSp>
-        <p:nvCxnSpPr>
-          <p:cNvPr id="7" name="Connector 6"/>
-          <p:cNvCxnSpPr/>
-          <p:nvPr/>
-        </p:nvCxnSpPr>
-        <p:spPr>
-          <a:xfrm>
-            <a:off x="3538728" y="2926080"/>
-            <a:ext cx="118872" cy="0"/>
-          </a:xfrm>
-          <a:prstGeom prst="line">
-            <a:avLst/>
-          </a:prstGeom>
-          <a:ln w="22225">
-            <a:solidFill>
-              <a:srgbClr val="64748B"/>
-            </a:solidFill>
-            <a:tailEnd type="triangle" w="med" len="med"/>
-          </a:ln>
-        </p:spPr>
-        <p:style>
-          <a:lnRef idx="2">
-            <a:schemeClr val="accent1"/>
-          </a:lnRef>
-          <a:fillRef idx="0">
-            <a:schemeClr val="accent1"/>
-          </a:fillRef>
-          <a:effectRef idx="1">
-            <a:schemeClr val="accent1"/>
-          </a:effectRef>
-          <a:fontRef idx="minor">
-            <a:schemeClr val="tx1"/>
-          </a:fontRef>
-        </p:style>
-      </p:cxnSp>
-      <p:sp>
-        <p:nvSpPr>
-          <p:cNvPr id="8" name="Rounded Rectangle 7"/>
-          <p:cNvSpPr/>
-          <p:nvPr/>
-        </p:nvSpPr>
-        <p:spPr>
-          <a:xfrm>
-            <a:off x="3657600" y="2286000"/>
-            <a:ext cx="1481328" cy="1280160"/>
+            <a:off x="3657600" y="1920240"/>
+            <a:ext cx="2743200" cy="868680"/>
           </a:xfrm>
           <a:prstGeom prst="roundRect">
             <a:avLst/>
@@ -16382,90 +16229,41 @@
           <a:p>
             <a:pPr algn="ctr"/>
             <a:r>
-              <a:rPr sz="1100" b="1">
+              <a:rPr sz="1200" b="1">
                 <a:solidFill>
                   <a:srgbClr val="FFFFFF"/>
                 </a:solidFill>
                 <a:latin typeface="PingFang TC"/>
                 <a:ea typeface="PingFang TC"/>
               </a:rPr>
-              <a:t>buildx</a:t>
+              <a:t>Lambda (VPC)</a:t>
             </a:r>
           </a:p>
           <a:p>
             <a:pPr algn="ctr"/>
             <a:r>
-              <a:rPr sz="1100" b="0">
+              <a:rPr sz="1200" b="0">
                 <a:solidFill>
                   <a:srgbClr val="FFFFFF"/>
                 </a:solidFill>
                 <a:latin typeface="PingFang TC"/>
                 <a:ea typeface="PingFang TC"/>
               </a:rPr>
-              <a:t>--platform</a:t>
-            </a:r>
-          </a:p>
-          <a:p>
-            <a:pPr algn="ctr"/>
-            <a:r>
-              <a:rPr sz="1100" b="0">
-                <a:solidFill>
-                  <a:srgbClr val="FFFFFF"/>
-                </a:solidFill>
-                <a:latin typeface="PingFang TC"/>
-                <a:ea typeface="PingFang TC"/>
-              </a:rPr>
-              <a:t>linux/arm64</a:t>
-            </a:r>
-          </a:p>
-        </p:txBody>
-      </p:sp>
-      <p:cxnSp>
-        <p:nvCxnSpPr>
-          <p:cNvPr id="9" name="Connector 8"/>
-          <p:cNvCxnSpPr/>
-          <p:nvPr/>
-        </p:nvCxnSpPr>
-        <p:spPr>
-          <a:xfrm>
-            <a:off x="5138928" y="2926080"/>
-            <a:ext cx="118872" cy="0"/>
-          </a:xfrm>
-          <a:prstGeom prst="line">
-            <a:avLst/>
-          </a:prstGeom>
-          <a:ln w="22225">
-            <a:solidFill>
-              <a:srgbClr val="64748B"/>
-            </a:solidFill>
-            <a:tailEnd type="triangle" w="med" len="med"/>
-          </a:ln>
-        </p:spPr>
-        <p:style>
-          <a:lnRef idx="2">
-            <a:schemeClr val="accent1"/>
-          </a:lnRef>
-          <a:fillRef idx="0">
-            <a:schemeClr val="accent1"/>
-          </a:fillRef>
-          <a:effectRef idx="1">
-            <a:schemeClr val="accent1"/>
-          </a:effectRef>
-          <a:fontRef idx="minor">
-            <a:schemeClr val="tx1"/>
-          </a:fontRef>
-        </p:style>
-      </p:cxnSp>
-      <p:sp>
-        <p:nvSpPr>
-          <p:cNvPr id="10" name="Rounded Rectangle 9"/>
+              <a:t>pg8000 純 Python</a:t>
+            </a:r>
+          </a:p>
+        </p:txBody>
+      </p:sp>
+      <p:sp>
+        <p:nvSpPr>
+          <p:cNvPr id="6" name="Rounded Rectangle 5"/>
           <p:cNvSpPr/>
           <p:nvPr/>
         </p:nvSpPr>
         <p:spPr>
           <a:xfrm>
-            <a:off x="5257800" y="2286000"/>
-            <a:ext cx="1481328" cy="1280160"/>
+            <a:off x="6766560" y="1920240"/>
+            <a:ext cx="2377440" cy="868680"/>
           </a:xfrm>
           <a:prstGeom prst="roundRect">
             <a:avLst/>
@@ -16500,54 +16298,41 @@
           <a:p>
             <a:pPr algn="ctr"/>
             <a:r>
-              <a:rPr sz="1100" b="1">
+              <a:rPr sz="1200" b="1">
                 <a:solidFill>
                   <a:srgbClr val="FFFFFF"/>
                 </a:solidFill>
                 <a:latin typeface="PingFang TC"/>
                 <a:ea typeface="PingFang TC"/>
               </a:rPr>
-              <a:t>ECR push</a:t>
+              <a:t>RDS PostgreSQL</a:t>
             </a:r>
           </a:p>
           <a:p>
             <a:pPr algn="ctr"/>
             <a:r>
-              <a:rPr sz="1100" b="0">
+              <a:rPr sz="1200" b="0">
                 <a:solidFill>
                   <a:srgbClr val="FFFFFF"/>
                 </a:solidFill>
                 <a:latin typeface="PingFang TC"/>
                 <a:ea typeface="PingFang TC"/>
               </a:rPr>
-              <a:t>tag = SHA</a:t>
-            </a:r>
-          </a:p>
-          <a:p>
-            <a:pPr algn="ctr"/>
-            <a:r>
-              <a:rPr sz="1100" b="0">
-                <a:solidFill>
-                  <a:srgbClr val="FFFFFF"/>
-                </a:solidFill>
-                <a:latin typeface="PingFang TC"/>
-                <a:ea typeface="PingFang TC"/>
-              </a:rPr>
-              <a:t>+ latest</a:t>
+              <a:t>DELETE</a:t>
             </a:r>
           </a:p>
         </p:txBody>
       </p:sp>
       <p:cxnSp>
         <p:nvCxnSpPr>
-          <p:cNvPr id="11" name="Connector 10"/>
+          <p:cNvPr id="7" name="Connector 6"/>
           <p:cNvCxnSpPr/>
           <p:nvPr/>
         </p:nvCxnSpPr>
         <p:spPr>
           <a:xfrm>
-            <a:off x="6739128" y="2926080"/>
-            <a:ext cx="118872" cy="0"/>
+            <a:off x="3291840" y="2350008"/>
+            <a:ext cx="365760" cy="0"/>
           </a:xfrm>
           <a:prstGeom prst="line">
             <a:avLst/>
@@ -16574,98 +16359,16 @@
           </a:fontRef>
         </p:style>
       </p:cxnSp>
-      <p:sp>
-        <p:nvSpPr>
-          <p:cNvPr id="12" name="Rounded Rectangle 11"/>
-          <p:cNvSpPr/>
-          <p:nvPr/>
-        </p:nvSpPr>
-        <p:spPr>
-          <a:xfrm>
-            <a:off x="6858000" y="2286000"/>
-            <a:ext cx="1481328" cy="1280160"/>
-          </a:xfrm>
-          <a:prstGeom prst="roundRect">
-            <a:avLst/>
-          </a:prstGeom>
-          <a:solidFill>
-            <a:srgbClr val="7C3AED"/>
-          </a:solidFill>
-          <a:ln>
-            <a:solidFill>
-              <a:srgbClr val="7C3AED"/>
-            </a:solidFill>
-          </a:ln>
-          <a:effectLst/>
-        </p:spPr>
-        <p:style>
-          <a:lnRef idx="1">
-            <a:schemeClr val="accent1"/>
-          </a:lnRef>
-          <a:fillRef idx="3">
-            <a:schemeClr val="accent1"/>
-          </a:fillRef>
-          <a:effectRef idx="2">
-            <a:schemeClr val="accent1"/>
-          </a:effectRef>
-          <a:fontRef idx="minor">
-            <a:schemeClr val="lt1"/>
-          </a:fontRef>
-        </p:style>
-        <p:txBody>
-          <a:bodyPr rtlCol="0" anchor="ctr" wrap="square" tIns="25400" bIns="25400"/>
-          <a:lstStyle/>
-          <a:p>
-            <a:pPr algn="ctr"/>
-            <a:r>
-              <a:rPr sz="1100" b="1">
-                <a:solidFill>
-                  <a:srgbClr val="FFFFFF"/>
-                </a:solidFill>
-                <a:latin typeface="PingFang TC"/>
-                <a:ea typeface="PingFang TC"/>
-              </a:rPr>
-              <a:t>SSM 更新</a:t>
-            </a:r>
-          </a:p>
-          <a:p>
-            <a:pPr algn="ctr"/>
-            <a:r>
-              <a:rPr sz="1100" b="0">
-                <a:solidFill>
-                  <a:srgbClr val="FFFFFF"/>
-                </a:solidFill>
-                <a:latin typeface="PingFang TC"/>
-                <a:ea typeface="PingFang TC"/>
-              </a:rPr>
-              <a:t>/qrcode/</a:t>
-            </a:r>
-          </a:p>
-          <a:p>
-            <a:pPr algn="ctr"/>
-            <a:r>
-              <a:rPr sz="1100" b="0">
-                <a:solidFill>
-                  <a:srgbClr val="FFFFFF"/>
-                </a:solidFill>
-                <a:latin typeface="PingFang TC"/>
-                <a:ea typeface="PingFang TC"/>
-              </a:rPr>
-              <a:t>IMAGE_URI</a:t>
-            </a:r>
-          </a:p>
-        </p:txBody>
-      </p:sp>
       <p:cxnSp>
         <p:nvCxnSpPr>
-          <p:cNvPr id="13" name="Connector 12"/>
+          <p:cNvPr id="8" name="Connector 7"/>
           <p:cNvCxnSpPr/>
           <p:nvPr/>
         </p:nvCxnSpPr>
         <p:spPr>
           <a:xfrm>
-            <a:off x="8339328" y="2926080"/>
-            <a:ext cx="118872" cy="0"/>
+            <a:off x="6400800" y="2350008"/>
+            <a:ext cx="365760" cy="0"/>
           </a:xfrm>
           <a:prstGeom prst="line">
             <a:avLst/>
@@ -16692,216 +16395,327 @@
           </a:fontRef>
         </p:style>
       </p:cxnSp>
-      <p:sp>
-        <p:nvSpPr>
-          <p:cNvPr id="14" name="Rounded Rectangle 13"/>
-          <p:cNvSpPr/>
-          <p:nvPr/>
-        </p:nvSpPr>
-        <p:spPr>
-          <a:xfrm>
-            <a:off x="8458200" y="2286000"/>
-            <a:ext cx="1481328" cy="1280160"/>
-          </a:xfrm>
-          <a:prstGeom prst="roundRect">
-            <a:avLst/>
-          </a:prstGeom>
-          <a:solidFill>
-            <a:srgbClr val="D97706"/>
-          </a:solidFill>
-          <a:ln>
-            <a:solidFill>
-              <a:srgbClr val="D97706"/>
-            </a:solidFill>
-          </a:ln>
-          <a:effectLst/>
-        </p:spPr>
-        <p:style>
-          <a:lnRef idx="1">
-            <a:schemeClr val="accent1"/>
-          </a:lnRef>
-          <a:fillRef idx="3">
-            <a:schemeClr val="accent1"/>
-          </a:fillRef>
-          <a:effectRef idx="2">
-            <a:schemeClr val="accent1"/>
-          </a:effectRef>
-          <a:fontRef idx="minor">
-            <a:schemeClr val="lt1"/>
-          </a:fontRef>
-        </p:style>
-        <p:txBody>
-          <a:bodyPr rtlCol="0" anchor="ctr" wrap="square" tIns="25400" bIns="25400"/>
-          <a:lstStyle/>
-          <a:p>
-            <a:pPr algn="ctr"/>
-            <a:r>
-              <a:rPr sz="1100" b="1">
-                <a:solidFill>
-                  <a:srgbClr val="FFFFFF"/>
-                </a:solidFill>
-                <a:latin typeface="PingFang TC"/>
-                <a:ea typeface="PingFang TC"/>
-              </a:rPr>
-              <a:t>SSM 部署</a:t>
-            </a:r>
-          </a:p>
-          <a:p>
-            <a:pPr algn="ctr"/>
-            <a:r>
-              <a:rPr sz="1100" b="0">
-                <a:solidFill>
-                  <a:srgbClr val="FFFFFF"/>
-                </a:solidFill>
-                <a:latin typeface="PingFang TC"/>
-                <a:ea typeface="PingFang TC"/>
-              </a:rPr>
-              <a:t>→ EC2</a:t>
-            </a:r>
-          </a:p>
-          <a:p>
-            <a:pPr algn="ctr"/>
-            <a:r>
-              <a:rPr sz="1100" b="0">
-                <a:solidFill>
-                  <a:srgbClr val="FFFFFF"/>
-                </a:solidFill>
-                <a:latin typeface="PingFang TC"/>
-                <a:ea typeface="PingFang TC"/>
-              </a:rPr>
-              <a:t>deploy-app.sh</a:t>
-            </a:r>
-          </a:p>
-        </p:txBody>
-      </p:sp>
-      <p:cxnSp>
-        <p:nvCxnSpPr>
-          <p:cNvPr id="15" name="Connector 14"/>
-          <p:cNvCxnSpPr/>
-          <p:nvPr/>
-        </p:nvCxnSpPr>
-        <p:spPr>
-          <a:xfrm>
-            <a:off x="9939528" y="2926080"/>
-            <a:ext cx="118872" cy="0"/>
-          </a:xfrm>
-          <a:prstGeom prst="line">
-            <a:avLst/>
-          </a:prstGeom>
-          <a:ln w="22225">
-            <a:solidFill>
-              <a:srgbClr val="64748B"/>
-            </a:solidFill>
-            <a:tailEnd type="triangle" w="med" len="med"/>
-          </a:ln>
-        </p:spPr>
-        <p:style>
-          <a:lnRef idx="2">
-            <a:schemeClr val="accent1"/>
-          </a:lnRef>
-          <a:fillRef idx="0">
-            <a:schemeClr val="accent1"/>
-          </a:fillRef>
-          <a:effectRef idx="1">
-            <a:schemeClr val="accent1"/>
-          </a:effectRef>
-          <a:fontRef idx="minor">
-            <a:schemeClr val="tx1"/>
-          </a:fontRef>
-        </p:style>
-      </p:cxnSp>
-      <p:sp>
-        <p:nvSpPr>
-          <p:cNvPr id="16" name="Rounded Rectangle 15"/>
-          <p:cNvSpPr/>
-          <p:nvPr/>
-        </p:nvSpPr>
-        <p:spPr>
-          <a:xfrm>
-            <a:off x="10058400" y="2286000"/>
-            <a:ext cx="1481328" cy="1280160"/>
-          </a:xfrm>
-          <a:prstGeom prst="roundRect">
-            <a:avLst/>
-          </a:prstGeom>
-          <a:solidFill>
-            <a:srgbClr val="059669"/>
-          </a:solidFill>
-          <a:ln>
-            <a:solidFill>
-              <a:srgbClr val="059669"/>
-            </a:solidFill>
-          </a:ln>
-          <a:effectLst/>
-        </p:spPr>
-        <p:style>
-          <a:lnRef idx="1">
-            <a:schemeClr val="accent1"/>
-          </a:lnRef>
-          <a:fillRef idx="3">
-            <a:schemeClr val="accent1"/>
-          </a:fillRef>
-          <a:effectRef idx="2">
-            <a:schemeClr val="accent1"/>
-          </a:effectRef>
-          <a:fontRef idx="minor">
-            <a:schemeClr val="lt1"/>
-          </a:fontRef>
-        </p:style>
-        <p:txBody>
-          <a:bodyPr rtlCol="0" anchor="ctr" wrap="square" tIns="25400" bIns="25400"/>
-          <a:lstStyle/>
-          <a:p>
-            <a:pPr algn="ctr"/>
-            <a:r>
-              <a:rPr sz="1100" b="1">
-                <a:solidFill>
-                  <a:srgbClr val="FFFFFF"/>
-                </a:solidFill>
-                <a:latin typeface="PingFang TC"/>
-                <a:ea typeface="PingFang TC"/>
-              </a:rPr>
-              <a:t>上線</a:t>
-            </a:r>
-          </a:p>
-          <a:p>
-            <a:pPr algn="ctr"/>
-            <a:r>
-              <a:rPr sz="1100" b="0">
-                <a:solidFill>
-                  <a:srgbClr val="FFFFFF"/>
-                </a:solidFill>
-                <a:latin typeface="PingFang TC"/>
-                <a:ea typeface="PingFang TC"/>
-              </a:rPr>
-              <a:t>ALB /health</a:t>
-            </a:r>
-          </a:p>
-          <a:p>
-            <a:pPr algn="ctr"/>
-            <a:r>
-              <a:rPr sz="1100" b="0">
-                <a:solidFill>
-                  <a:srgbClr val="FFFFFF"/>
-                </a:solidFill>
-                <a:latin typeface="PingFang TC"/>
-                <a:ea typeface="PingFang TC"/>
-              </a:rPr>
-              <a:t>通過</a:t>
-            </a:r>
-          </a:p>
-        </p:txBody>
-      </p:sp>
-      <p:sp>
-        <p:nvSpPr>
-          <p:cNvPr id="17" name="TextBox 16"/>
+      <p:graphicFrame>
+        <p:nvGraphicFramePr>
+          <p:cNvPr id="9" name="Table 8"/>
+          <p:cNvGraphicFramePr>
+            <a:graphicFrameLocks noGrp="1"/>
+          </p:cNvGraphicFramePr>
+          <p:nvPr/>
+        </p:nvGraphicFramePr>
+        <p:xfrm>
+          <a:off x="548640" y="3200400"/>
+          <a:ext cx="11109960" cy="1737360"/>
+        </p:xfrm>
+        <a:graphic>
+          <a:graphicData uri="http://schemas.openxmlformats.org/drawingml/2006/table">
+            <a:tbl>
+              <a:tblPr firstRow="1" bandRow="1">
+                <a:tableStyleId>{5C22544A-7EE6-4342-B048-85BDC9FD1C3A}</a:tableStyleId>
+              </a:tblPr>
+              <a:tblGrid>
+                <a:gridCol w="2377440"/>
+                <a:gridCol w="6446520"/>
+                <a:gridCol w="2286000"/>
+              </a:tblGrid>
+              <a:tr h="434340">
+                <a:tc>
+                  <a:txBody>
+                    <a:bodyPr/>
+                    <a:lstStyle/>
+                    <a:p>
+                      <a:r>
+                        <a:rPr sz="1200" b="1">
+                          <a:solidFill>
+                            <a:srgbClr val="FFFFFF"/>
+                          </a:solidFill>
+                          <a:latin typeface="PingFang TC"/>
+                          <a:ea typeface="PingFang TC"/>
+                        </a:rPr>
+                        <a:t>清理目標</a:t>
+                      </a:r>
+                    </a:p>
+                  </a:txBody>
+                  <a:tcPr marT="25400" marB="25400" marL="101600" anchor="ctr">
+                    <a:solidFill>
+                      <a:srgbClr val="2563EB"/>
+                    </a:solidFill>
+                  </a:tcPr>
+                </a:tc>
+                <a:tc>
+                  <a:txBody>
+                    <a:bodyPr/>
+                    <a:lstStyle/>
+                    <a:p>
+                      <a:r>
+                        <a:rPr sz="1200" b="1">
+                          <a:solidFill>
+                            <a:srgbClr val="FFFFFF"/>
+                          </a:solidFill>
+                          <a:latin typeface="PingFang TC"/>
+                          <a:ea typeface="PingFang TC"/>
+                        </a:rPr>
+                        <a:t>條件</a:t>
+                      </a:r>
+                    </a:p>
+                  </a:txBody>
+                  <a:tcPr marT="25400" marB="25400" marL="101600" anchor="ctr">
+                    <a:solidFill>
+                      <a:srgbClr val="2563EB"/>
+                    </a:solidFill>
+                  </a:tcPr>
+                </a:tc>
+                <a:tc>
+                  <a:txBody>
+                    <a:bodyPr/>
+                    <a:lstStyle/>
+                    <a:p>
+                      <a:r>
+                        <a:rPr sz="1200" b="1">
+                          <a:solidFill>
+                            <a:srgbClr val="FFFFFF"/>
+                          </a:solidFill>
+                          <a:latin typeface="PingFang TC"/>
+                          <a:ea typeface="PingFang TC"/>
+                        </a:rPr>
+                        <a:t>預設保留</a:t>
+                      </a:r>
+                    </a:p>
+                  </a:txBody>
+                  <a:tcPr marT="25400" marB="25400" marL="101600" anchor="ctr">
+                    <a:solidFill>
+                      <a:srgbClr val="2563EB"/>
+                    </a:solidFill>
+                  </a:tcPr>
+                </a:tc>
+              </a:tr>
+              <a:tr h="434340">
+                <a:tc>
+                  <a:txBody>
+                    <a:bodyPr/>
+                    <a:lstStyle/>
+                    <a:p>
+                      <a:r>
+                        <a:rPr sz="1200" b="1">
+                          <a:solidFill>
+                            <a:srgbClr val="0F172A"/>
+                          </a:solidFill>
+                          <a:latin typeface="PingFang TC"/>
+                          <a:ea typeface="PingFang TC"/>
+                        </a:rPr>
+                        <a:t>過期 QR</a:t>
+                      </a:r>
+                    </a:p>
+                  </a:txBody>
+                  <a:tcPr marT="25400" marB="25400" marL="101600" anchor="ctr">
+                    <a:solidFill>
+                      <a:srgbClr val="FFFFFF"/>
+                    </a:solidFill>
+                  </a:tcPr>
+                </a:tc>
+                <a:tc>
+                  <a:txBody>
+                    <a:bodyPr/>
+                    <a:lstStyle/>
+                    <a:p>
+                      <a:r>
+                        <a:rPr sz="1200" b="0">
+                          <a:solidFill>
+                            <a:srgbClr val="0F172A"/>
+                          </a:solidFill>
+                          <a:latin typeface="PingFang TC"/>
+                          <a:ea typeface="PingFang TC"/>
+                        </a:rPr>
+                        <a:t>expires_at &lt; now - grace</a:t>
+                      </a:r>
+                    </a:p>
+                  </a:txBody>
+                  <a:tcPr marT="25400" marB="25400" marL="101600" anchor="ctr">
+                    <a:solidFill>
+                      <a:srgbClr val="FFFFFF"/>
+                    </a:solidFill>
+                  </a:tcPr>
+                </a:tc>
+                <a:tc>
+                  <a:txBody>
+                    <a:bodyPr/>
+                    <a:lstStyle/>
+                    <a:p>
+                      <a:r>
+                        <a:rPr sz="1200" b="0">
+                          <a:solidFill>
+                            <a:srgbClr val="0F172A"/>
+                          </a:solidFill>
+                          <a:latin typeface="PingFang TC"/>
+                          <a:ea typeface="PingFang TC"/>
+                        </a:rPr>
+                        <a:t>30 天</a:t>
+                      </a:r>
+                    </a:p>
+                  </a:txBody>
+                  <a:tcPr marT="25400" marB="25400" marL="101600" anchor="ctr">
+                    <a:solidFill>
+                      <a:srgbClr val="FFFFFF"/>
+                    </a:solidFill>
+                  </a:tcPr>
+                </a:tc>
+              </a:tr>
+              <a:tr h="434340">
+                <a:tc>
+                  <a:txBody>
+                    <a:bodyPr/>
+                    <a:lstStyle/>
+                    <a:p>
+                      <a:r>
+                        <a:rPr sz="1200" b="1">
+                          <a:solidFill>
+                            <a:srgbClr val="0F172A"/>
+                          </a:solidFill>
+                          <a:latin typeface="PingFang TC"/>
+                          <a:ea typeface="PingFang TC"/>
+                        </a:rPr>
+                        <a:t>軟刪除超期</a:t>
+                      </a:r>
+                    </a:p>
+                  </a:txBody>
+                  <a:tcPr marT="25400" marB="25400" marL="101600" anchor="ctr">
+                    <a:solidFill>
+                      <a:srgbClr val="F1F5F9"/>
+                    </a:solidFill>
+                  </a:tcPr>
+                </a:tc>
+                <a:tc>
+                  <a:txBody>
+                    <a:bodyPr/>
+                    <a:lstStyle/>
+                    <a:p>
+                      <a:r>
+                        <a:rPr sz="1200" b="0">
+                          <a:solidFill>
+                            <a:srgbClr val="0F172A"/>
+                          </a:solidFill>
+                          <a:latin typeface="PingFang TC"/>
+                          <a:ea typeface="PingFang TC"/>
+                        </a:rPr>
+                        <a:t>is_deleted 且 updated_at &lt; now - retention</a:t>
+                      </a:r>
+                    </a:p>
+                  </a:txBody>
+                  <a:tcPr marT="25400" marB="25400" marL="101600" anchor="ctr">
+                    <a:solidFill>
+                      <a:srgbClr val="F1F5F9"/>
+                    </a:solidFill>
+                  </a:tcPr>
+                </a:tc>
+                <a:tc>
+                  <a:txBody>
+                    <a:bodyPr/>
+                    <a:lstStyle/>
+                    <a:p>
+                      <a:r>
+                        <a:rPr sz="1200" b="0">
+                          <a:solidFill>
+                            <a:srgbClr val="0F172A"/>
+                          </a:solidFill>
+                          <a:latin typeface="PingFang TC"/>
+                          <a:ea typeface="PingFang TC"/>
+                        </a:rPr>
+                        <a:t>30 天</a:t>
+                      </a:r>
+                    </a:p>
+                  </a:txBody>
+                  <a:tcPr marT="25400" marB="25400" marL="101600" anchor="ctr">
+                    <a:solidFill>
+                      <a:srgbClr val="F1F5F9"/>
+                    </a:solidFill>
+                  </a:tcPr>
+                </a:tc>
+              </a:tr>
+              <a:tr h="434340">
+                <a:tc>
+                  <a:txBody>
+                    <a:bodyPr/>
+                    <a:lstStyle/>
+                    <a:p>
+                      <a:r>
+                        <a:rPr sz="1200" b="1">
+                          <a:solidFill>
+                            <a:srgbClr val="0F172A"/>
+                          </a:solidFill>
+                          <a:latin typeface="PingFang TC"/>
+                          <a:ea typeface="PingFang TC"/>
+                        </a:rPr>
+                        <a:t>連帶</a:t>
+                      </a:r>
+                    </a:p>
+                  </a:txBody>
+                  <a:tcPr marT="25400" marB="25400" marL="101600" anchor="ctr">
+                    <a:solidFill>
+                      <a:srgbClr val="FFFFFF"/>
+                    </a:solidFill>
+                  </a:tcPr>
+                </a:tc>
+                <a:tc>
+                  <a:txBody>
+                    <a:bodyPr/>
+                    <a:lstStyle/>
+                    <a:p>
+                      <a:r>
+                        <a:rPr sz="1200" b="0">
+                          <a:solidFill>
+                            <a:srgbClr val="0F172A"/>
+                          </a:solidFill>
+                          <a:latin typeface="PingFang TC"/>
+                          <a:ea typeface="PingFang TC"/>
+                        </a:rPr>
+                        <a:t>上述 token 的 scan_events 一併刪</a:t>
+                      </a:r>
+                    </a:p>
+                  </a:txBody>
+                  <a:tcPr marT="25400" marB="25400" marL="101600" anchor="ctr">
+                    <a:solidFill>
+                      <a:srgbClr val="FFFFFF"/>
+                    </a:solidFill>
+                  </a:tcPr>
+                </a:tc>
+                <a:tc>
+                  <a:txBody>
+                    <a:bodyPr/>
+                    <a:lstStyle/>
+                    <a:p>
+                      <a:r>
+                        <a:rPr sz="1200" b="0">
+                          <a:solidFill>
+                            <a:srgbClr val="0F172A"/>
+                          </a:solidFill>
+                          <a:latin typeface="PingFang TC"/>
+                          <a:ea typeface="PingFang TC"/>
+                        </a:rPr>
+                        <a:t>—</a:t>
+                      </a:r>
+                    </a:p>
+                  </a:txBody>
+                  <a:tcPr marT="25400" marB="25400" marL="101600" anchor="ctr">
+                    <a:solidFill>
+                      <a:srgbClr val="FFFFFF"/>
+                    </a:solidFill>
+                  </a:tcPr>
+                </a:tc>
+              </a:tr>
+            </a:tbl>
+          </a:graphicData>
+        </a:graphic>
+      </p:graphicFrame>
+      <p:sp>
+        <p:nvSpPr>
+          <p:cNvPr id="10" name="TextBox 9"/>
           <p:cNvSpPr txBox="1"/>
           <p:nvPr/>
         </p:nvSpPr>
         <p:spPr>
           <a:xfrm>
-            <a:off x="548640" y="4023360"/>
-            <a:ext cx="11247120" cy="2194560"/>
+            <a:off x="548640" y="5120640"/>
+            <a:ext cx="11247120" cy="1280160"/>
           </a:xfrm>
           <a:prstGeom prst="rect">
             <a:avLst/>
@@ -16916,52 +16730,35 @@
           <a:p>
             <a:pPr>
               <a:spcAft>
-                <a:spcPts val="900"/>
+                <a:spcPts val="800"/>
               </a:spcAft>
             </a:pPr>
             <a:r>
-              <a:rPr sz="1400" b="0">
+              <a:rPr sz="1300" b="0">
                 <a:solidFill>
                   <a:srgbClr val="0F172A"/>
                 </a:solidFill>
                 <a:latin typeface="PingFang TC"/>
                 <a:ea typeface="PingFang TC"/>
               </a:rPr>
-              <a:t>•  EC2 deploy-app.sh:從 SSM 撈設定 → ECR login → docker pull → docker run(換新容器)</a:t>
+              <a:t>•  單一來源:cleanup.py(SQLAlchemy+text SQL)Lambda 與本機共用;Lambda 用純 Python pg8000 免二進位打包</a:t>
             </a:r>
           </a:p>
           <a:p>
             <a:pPr>
               <a:spcAft>
-                <a:spcPts val="900"/>
+                <a:spcPts val="800"/>
               </a:spcAft>
             </a:pPr>
             <a:r>
-              <a:rPr sz="1400" b="0">
+              <a:rPr sz="1300" b="0">
                 <a:solidFill>
                   <a:srgbClr val="0F172A"/>
                 </a:solidFill>
                 <a:latin typeface="PingFang TC"/>
                 <a:ea typeface="PingFang TC"/>
               </a:rPr>
-              <a:t>•  全 env-gated:本機無這些環境變數 → 維持 SQLite + 記憶體 cache + 即時生圖,不受影響</a:t>
-            </a:r>
-          </a:p>
-          <a:p>
-            <a:pPr>
-              <a:spcAft>
-                <a:spcPts val="900"/>
-              </a:spcAft>
-            </a:pPr>
-            <a:r>
-              <a:rPr sz="1400" b="0">
-                <a:solidFill>
-                  <a:srgbClr val="0F172A"/>
-                </a:solidFill>
-                <a:latin typeface="PingFang TC"/>
-                <a:ea typeface="PingFang TC"/>
-              </a:rPr>
-              <a:t>•  部署踩到的兩個坑:① EC2 role 少 s3:PutObject(500)② CI build amd64 但 EC2 arm64(502)→ buildx 跨平台修正</a:t>
+              <a:t>•  與 app 實例解耦(不用 app 內排程,免多實例重複跑/leader election);保留天數皆 Terraform 變數可調</a:t>
             </a:r>
           </a:p>
         </p:txBody>
@@ -16993,13 +16790,13 @@
         <p:spPr>
           <a:xfrm>
             <a:off x="0" y="0"/>
-            <a:ext cx="12191695" cy="6858000"/>
+            <a:ext cx="164592" cy="6858000"/>
           </a:xfrm>
           <a:prstGeom prst="rect">
             <a:avLst/>
           </a:prstGeom>
           <a:solidFill>
-            <a:srgbClr val="0F172A"/>
+            <a:srgbClr val="2563EB"/>
           </a:solidFill>
           <a:ln>
             <a:noFill/>
@@ -17036,8 +16833,8 @@
         </p:nvSpPr>
         <p:spPr>
           <a:xfrm>
-            <a:off x="822960" y="1097280"/>
-            <a:ext cx="10515600" cy="1097280"/>
+            <a:off x="502920" y="320040"/>
+            <a:ext cx="10972800" cy="1005840"/>
           </a:xfrm>
           <a:prstGeom prst="rect">
             <a:avLst/>
@@ -17049,6 +16846,23 @@
             <a:spAutoFit/>
           </a:bodyPr>
           <a:lstStyle/>
+          <a:p>
+            <a:pPr algn="l">
+              <a:spcAft>
+                <a:spcPts val="200"/>
+              </a:spcAft>
+            </a:pPr>
+            <a:r>
+              <a:rPr sz="1300" b="1">
+                <a:solidFill>
+                  <a:srgbClr val="2563EB"/>
+                </a:solidFill>
+                <a:latin typeface="PingFang TC"/>
+                <a:ea typeface="PingFang TC"/>
+              </a:rPr>
+              <a:t>部署 · CI/CD</a:t>
+            </a:r>
+          </a:p>
           <a:p>
             <a:pPr algn="l">
               <a:spcAft>
@@ -17056,45 +16870,805 @@
               </a:spcAft>
             </a:pPr>
             <a:r>
-              <a:rPr sz="1600" b="1">
-                <a:solidFill>
-                  <a:srgbClr val="2563EB"/>
-                </a:solidFill>
-                <a:latin typeface="PingFang TC"/>
-                <a:ea typeface="PingFang TC"/>
-              </a:rPr>
-              <a:t>原型狀態</a:t>
-            </a:r>
-          </a:p>
-          <a:p>
-            <a:pPr algn="l">
-              <a:spcAft>
-                <a:spcPts val="400"/>
-              </a:spcAft>
-            </a:pPr>
-            <a:r>
               <a:rPr sz="3000" b="1">
                 <a:solidFill>
+                  <a:srgbClr val="0F172A"/>
+                </a:solidFill>
+                <a:latin typeface="PingFang TC"/>
+                <a:ea typeface="PingFang TC"/>
+              </a:rPr>
+              <a:t>CI/CD 流程（GitHub Actions + OIDC）</a:t>
+            </a:r>
+          </a:p>
+        </p:txBody>
+      </p:sp>
+      <p:sp>
+        <p:nvSpPr>
+          <p:cNvPr id="4" name="Rounded Rectangle 3"/>
+          <p:cNvSpPr/>
+          <p:nvPr/>
+        </p:nvSpPr>
+        <p:spPr>
+          <a:xfrm>
+            <a:off x="457200" y="2286000"/>
+            <a:ext cx="1481328" cy="1280160"/>
+          </a:xfrm>
+          <a:prstGeom prst="roundRect">
+            <a:avLst/>
+          </a:prstGeom>
+          <a:solidFill>
+            <a:srgbClr val="64748B"/>
+          </a:solidFill>
+          <a:ln>
+            <a:solidFill>
+              <a:srgbClr val="64748B"/>
+            </a:solidFill>
+          </a:ln>
+          <a:effectLst/>
+        </p:spPr>
+        <p:style>
+          <a:lnRef idx="1">
+            <a:schemeClr val="accent1"/>
+          </a:lnRef>
+          <a:fillRef idx="3">
+            <a:schemeClr val="accent1"/>
+          </a:fillRef>
+          <a:effectRef idx="2">
+            <a:schemeClr val="accent1"/>
+          </a:effectRef>
+          <a:fontRef idx="minor">
+            <a:schemeClr val="lt1"/>
+          </a:fontRef>
+        </p:style>
+        <p:txBody>
+          <a:bodyPr rtlCol="0" anchor="ctr" wrap="square" tIns="25400" bIns="25400"/>
+          <a:lstStyle/>
+          <a:p>
+            <a:pPr algn="ctr"/>
+            <a:r>
+              <a:rPr sz="1100" b="1">
+                <a:solidFill>
                   <a:srgbClr val="FFFFFF"/>
                 </a:solidFill>
                 <a:latin typeface="PingFang TC"/>
                 <a:ea typeface="PingFang TC"/>
               </a:rPr>
-              <a:t>可跑的 FastAPI 實作 + 管理頁前端</a:t>
-            </a:r>
-          </a:p>
-        </p:txBody>
-      </p:sp>
-      <p:sp>
-        <p:nvSpPr>
-          <p:cNvPr id="4" name="TextBox 3"/>
+              <a:t>git push</a:t>
+            </a:r>
+          </a:p>
+          <a:p>
+            <a:pPr algn="ctr"/>
+            <a:r>
+              <a:rPr sz="1100" b="0">
+                <a:solidFill>
+                  <a:srgbClr val="FFFFFF"/>
+                </a:solidFill>
+                <a:latin typeface="PingFang TC"/>
+                <a:ea typeface="PingFang TC"/>
+              </a:rPr>
+              <a:t>QR Code Generator/**</a:t>
+            </a:r>
+          </a:p>
+        </p:txBody>
+      </p:sp>
+      <p:cxnSp>
+        <p:nvCxnSpPr>
+          <p:cNvPr id="5" name="Connector 4"/>
+          <p:cNvCxnSpPr/>
+          <p:nvPr/>
+        </p:nvCxnSpPr>
+        <p:spPr>
+          <a:xfrm>
+            <a:off x="1938528" y="2926080"/>
+            <a:ext cx="118872" cy="0"/>
+          </a:xfrm>
+          <a:prstGeom prst="line">
+            <a:avLst/>
+          </a:prstGeom>
+          <a:ln w="22225">
+            <a:solidFill>
+              <a:srgbClr val="64748B"/>
+            </a:solidFill>
+            <a:tailEnd type="triangle" w="med" len="med"/>
+          </a:ln>
+        </p:spPr>
+        <p:style>
+          <a:lnRef idx="2">
+            <a:schemeClr val="accent1"/>
+          </a:lnRef>
+          <a:fillRef idx="0">
+            <a:schemeClr val="accent1"/>
+          </a:fillRef>
+          <a:effectRef idx="1">
+            <a:schemeClr val="accent1"/>
+          </a:effectRef>
+          <a:fontRef idx="minor">
+            <a:schemeClr val="tx1"/>
+          </a:fontRef>
+        </p:style>
+      </p:cxnSp>
+      <p:sp>
+        <p:nvSpPr>
+          <p:cNvPr id="6" name="Rounded Rectangle 5"/>
+          <p:cNvSpPr/>
+          <p:nvPr/>
+        </p:nvSpPr>
+        <p:spPr>
+          <a:xfrm>
+            <a:off x="2057400" y="2286000"/>
+            <a:ext cx="1481328" cy="1280160"/>
+          </a:xfrm>
+          <a:prstGeom prst="roundRect">
+            <a:avLst/>
+          </a:prstGeom>
+          <a:solidFill>
+            <a:srgbClr val="0EA5E9"/>
+          </a:solidFill>
+          <a:ln>
+            <a:solidFill>
+              <a:srgbClr val="0EA5E9"/>
+            </a:solidFill>
+          </a:ln>
+          <a:effectLst/>
+        </p:spPr>
+        <p:style>
+          <a:lnRef idx="1">
+            <a:schemeClr val="accent1"/>
+          </a:lnRef>
+          <a:fillRef idx="3">
+            <a:schemeClr val="accent1"/>
+          </a:fillRef>
+          <a:effectRef idx="2">
+            <a:schemeClr val="accent1"/>
+          </a:effectRef>
+          <a:fontRef idx="minor">
+            <a:schemeClr val="lt1"/>
+          </a:fontRef>
+        </p:style>
+        <p:txBody>
+          <a:bodyPr rtlCol="0" anchor="ctr" wrap="square" tIns="25400" bIns="25400"/>
+          <a:lstStyle/>
+          <a:p>
+            <a:pPr algn="ctr"/>
+            <a:r>
+              <a:rPr sz="1100" b="1">
+                <a:solidFill>
+                  <a:srgbClr val="FFFFFF"/>
+                </a:solidFill>
+                <a:latin typeface="PingFang TC"/>
+                <a:ea typeface="PingFang TC"/>
+              </a:rPr>
+              <a:t>GitHub Actions</a:t>
+            </a:r>
+          </a:p>
+          <a:p>
+            <a:pPr algn="ctr"/>
+            <a:r>
+              <a:rPr sz="1100" b="0">
+                <a:solidFill>
+                  <a:srgbClr val="FFFFFF"/>
+                </a:solidFill>
+                <a:latin typeface="PingFang TC"/>
+                <a:ea typeface="PingFang TC"/>
+              </a:rPr>
+              <a:t>OIDC assume role</a:t>
+            </a:r>
+          </a:p>
+          <a:p>
+            <a:pPr algn="ctr"/>
+            <a:r>
+              <a:rPr sz="1100" b="0">
+                <a:solidFill>
+                  <a:srgbClr val="FFFFFF"/>
+                </a:solidFill>
+                <a:latin typeface="PingFang TC"/>
+                <a:ea typeface="PingFang TC"/>
+              </a:rPr>
+              <a:t>(無長期金鑰)</a:t>
+            </a:r>
+          </a:p>
+        </p:txBody>
+      </p:sp>
+      <p:cxnSp>
+        <p:nvCxnSpPr>
+          <p:cNvPr id="7" name="Connector 6"/>
+          <p:cNvCxnSpPr/>
+          <p:nvPr/>
+        </p:nvCxnSpPr>
+        <p:spPr>
+          <a:xfrm>
+            <a:off x="3538728" y="2926080"/>
+            <a:ext cx="118872" cy="0"/>
+          </a:xfrm>
+          <a:prstGeom prst="line">
+            <a:avLst/>
+          </a:prstGeom>
+          <a:ln w="22225">
+            <a:solidFill>
+              <a:srgbClr val="64748B"/>
+            </a:solidFill>
+            <a:tailEnd type="triangle" w="med" len="med"/>
+          </a:ln>
+        </p:spPr>
+        <p:style>
+          <a:lnRef idx="2">
+            <a:schemeClr val="accent1"/>
+          </a:lnRef>
+          <a:fillRef idx="0">
+            <a:schemeClr val="accent1"/>
+          </a:fillRef>
+          <a:effectRef idx="1">
+            <a:schemeClr val="accent1"/>
+          </a:effectRef>
+          <a:fontRef idx="minor">
+            <a:schemeClr val="tx1"/>
+          </a:fontRef>
+        </p:style>
+      </p:cxnSp>
+      <p:sp>
+        <p:nvSpPr>
+          <p:cNvPr id="8" name="Rounded Rectangle 7"/>
+          <p:cNvSpPr/>
+          <p:nvPr/>
+        </p:nvSpPr>
+        <p:spPr>
+          <a:xfrm>
+            <a:off x="3657600" y="2286000"/>
+            <a:ext cx="1481328" cy="1280160"/>
+          </a:xfrm>
+          <a:prstGeom prst="roundRect">
+            <a:avLst/>
+          </a:prstGeom>
+          <a:solidFill>
+            <a:srgbClr val="2563EB"/>
+          </a:solidFill>
+          <a:ln>
+            <a:solidFill>
+              <a:srgbClr val="2563EB"/>
+            </a:solidFill>
+          </a:ln>
+          <a:effectLst/>
+        </p:spPr>
+        <p:style>
+          <a:lnRef idx="1">
+            <a:schemeClr val="accent1"/>
+          </a:lnRef>
+          <a:fillRef idx="3">
+            <a:schemeClr val="accent1"/>
+          </a:fillRef>
+          <a:effectRef idx="2">
+            <a:schemeClr val="accent1"/>
+          </a:effectRef>
+          <a:fontRef idx="minor">
+            <a:schemeClr val="lt1"/>
+          </a:fontRef>
+        </p:style>
+        <p:txBody>
+          <a:bodyPr rtlCol="0" anchor="ctr" wrap="square" tIns="25400" bIns="25400"/>
+          <a:lstStyle/>
+          <a:p>
+            <a:pPr algn="ctr"/>
+            <a:r>
+              <a:rPr sz="1100" b="1">
+                <a:solidFill>
+                  <a:srgbClr val="FFFFFF"/>
+                </a:solidFill>
+                <a:latin typeface="PingFang TC"/>
+                <a:ea typeface="PingFang TC"/>
+              </a:rPr>
+              <a:t>buildx</a:t>
+            </a:r>
+          </a:p>
+          <a:p>
+            <a:pPr algn="ctr"/>
+            <a:r>
+              <a:rPr sz="1100" b="0">
+                <a:solidFill>
+                  <a:srgbClr val="FFFFFF"/>
+                </a:solidFill>
+                <a:latin typeface="PingFang TC"/>
+                <a:ea typeface="PingFang TC"/>
+              </a:rPr>
+              <a:t>--platform</a:t>
+            </a:r>
+          </a:p>
+          <a:p>
+            <a:pPr algn="ctr"/>
+            <a:r>
+              <a:rPr sz="1100" b="0">
+                <a:solidFill>
+                  <a:srgbClr val="FFFFFF"/>
+                </a:solidFill>
+                <a:latin typeface="PingFang TC"/>
+                <a:ea typeface="PingFang TC"/>
+              </a:rPr>
+              <a:t>linux/arm64</a:t>
+            </a:r>
+          </a:p>
+        </p:txBody>
+      </p:sp>
+      <p:cxnSp>
+        <p:nvCxnSpPr>
+          <p:cNvPr id="9" name="Connector 8"/>
+          <p:cNvCxnSpPr/>
+          <p:nvPr/>
+        </p:nvCxnSpPr>
+        <p:spPr>
+          <a:xfrm>
+            <a:off x="5138928" y="2926080"/>
+            <a:ext cx="118872" cy="0"/>
+          </a:xfrm>
+          <a:prstGeom prst="line">
+            <a:avLst/>
+          </a:prstGeom>
+          <a:ln w="22225">
+            <a:solidFill>
+              <a:srgbClr val="64748B"/>
+            </a:solidFill>
+            <a:tailEnd type="triangle" w="med" len="med"/>
+          </a:ln>
+        </p:spPr>
+        <p:style>
+          <a:lnRef idx="2">
+            <a:schemeClr val="accent1"/>
+          </a:lnRef>
+          <a:fillRef idx="0">
+            <a:schemeClr val="accent1"/>
+          </a:fillRef>
+          <a:effectRef idx="1">
+            <a:schemeClr val="accent1"/>
+          </a:effectRef>
+          <a:fontRef idx="minor">
+            <a:schemeClr val="tx1"/>
+          </a:fontRef>
+        </p:style>
+      </p:cxnSp>
+      <p:sp>
+        <p:nvSpPr>
+          <p:cNvPr id="10" name="Rounded Rectangle 9"/>
+          <p:cNvSpPr/>
+          <p:nvPr/>
+        </p:nvSpPr>
+        <p:spPr>
+          <a:xfrm>
+            <a:off x="5257800" y="2286000"/>
+            <a:ext cx="1481328" cy="1280160"/>
+          </a:xfrm>
+          <a:prstGeom prst="roundRect">
+            <a:avLst/>
+          </a:prstGeom>
+          <a:solidFill>
+            <a:srgbClr val="059669"/>
+          </a:solidFill>
+          <a:ln>
+            <a:solidFill>
+              <a:srgbClr val="059669"/>
+            </a:solidFill>
+          </a:ln>
+          <a:effectLst/>
+        </p:spPr>
+        <p:style>
+          <a:lnRef idx="1">
+            <a:schemeClr val="accent1"/>
+          </a:lnRef>
+          <a:fillRef idx="3">
+            <a:schemeClr val="accent1"/>
+          </a:fillRef>
+          <a:effectRef idx="2">
+            <a:schemeClr val="accent1"/>
+          </a:effectRef>
+          <a:fontRef idx="minor">
+            <a:schemeClr val="lt1"/>
+          </a:fontRef>
+        </p:style>
+        <p:txBody>
+          <a:bodyPr rtlCol="0" anchor="ctr" wrap="square" tIns="25400" bIns="25400"/>
+          <a:lstStyle/>
+          <a:p>
+            <a:pPr algn="ctr"/>
+            <a:r>
+              <a:rPr sz="1100" b="1">
+                <a:solidFill>
+                  <a:srgbClr val="FFFFFF"/>
+                </a:solidFill>
+                <a:latin typeface="PingFang TC"/>
+                <a:ea typeface="PingFang TC"/>
+              </a:rPr>
+              <a:t>ECR push</a:t>
+            </a:r>
+          </a:p>
+          <a:p>
+            <a:pPr algn="ctr"/>
+            <a:r>
+              <a:rPr sz="1100" b="0">
+                <a:solidFill>
+                  <a:srgbClr val="FFFFFF"/>
+                </a:solidFill>
+                <a:latin typeface="PingFang TC"/>
+                <a:ea typeface="PingFang TC"/>
+              </a:rPr>
+              <a:t>tag = SHA</a:t>
+            </a:r>
+          </a:p>
+          <a:p>
+            <a:pPr algn="ctr"/>
+            <a:r>
+              <a:rPr sz="1100" b="0">
+                <a:solidFill>
+                  <a:srgbClr val="FFFFFF"/>
+                </a:solidFill>
+                <a:latin typeface="PingFang TC"/>
+                <a:ea typeface="PingFang TC"/>
+              </a:rPr>
+              <a:t>+ latest</a:t>
+            </a:r>
+          </a:p>
+        </p:txBody>
+      </p:sp>
+      <p:cxnSp>
+        <p:nvCxnSpPr>
+          <p:cNvPr id="11" name="Connector 10"/>
+          <p:cNvCxnSpPr/>
+          <p:nvPr/>
+        </p:nvCxnSpPr>
+        <p:spPr>
+          <a:xfrm>
+            <a:off x="6739128" y="2926080"/>
+            <a:ext cx="118872" cy="0"/>
+          </a:xfrm>
+          <a:prstGeom prst="line">
+            <a:avLst/>
+          </a:prstGeom>
+          <a:ln w="22225">
+            <a:solidFill>
+              <a:srgbClr val="64748B"/>
+            </a:solidFill>
+            <a:tailEnd type="triangle" w="med" len="med"/>
+          </a:ln>
+        </p:spPr>
+        <p:style>
+          <a:lnRef idx="2">
+            <a:schemeClr val="accent1"/>
+          </a:lnRef>
+          <a:fillRef idx="0">
+            <a:schemeClr val="accent1"/>
+          </a:fillRef>
+          <a:effectRef idx="1">
+            <a:schemeClr val="accent1"/>
+          </a:effectRef>
+          <a:fontRef idx="minor">
+            <a:schemeClr val="tx1"/>
+          </a:fontRef>
+        </p:style>
+      </p:cxnSp>
+      <p:sp>
+        <p:nvSpPr>
+          <p:cNvPr id="12" name="Rounded Rectangle 11"/>
+          <p:cNvSpPr/>
+          <p:nvPr/>
+        </p:nvSpPr>
+        <p:spPr>
+          <a:xfrm>
+            <a:off x="6858000" y="2286000"/>
+            <a:ext cx="1481328" cy="1280160"/>
+          </a:xfrm>
+          <a:prstGeom prst="roundRect">
+            <a:avLst/>
+          </a:prstGeom>
+          <a:solidFill>
+            <a:srgbClr val="7C3AED"/>
+          </a:solidFill>
+          <a:ln>
+            <a:solidFill>
+              <a:srgbClr val="7C3AED"/>
+            </a:solidFill>
+          </a:ln>
+          <a:effectLst/>
+        </p:spPr>
+        <p:style>
+          <a:lnRef idx="1">
+            <a:schemeClr val="accent1"/>
+          </a:lnRef>
+          <a:fillRef idx="3">
+            <a:schemeClr val="accent1"/>
+          </a:fillRef>
+          <a:effectRef idx="2">
+            <a:schemeClr val="accent1"/>
+          </a:effectRef>
+          <a:fontRef idx="minor">
+            <a:schemeClr val="lt1"/>
+          </a:fontRef>
+        </p:style>
+        <p:txBody>
+          <a:bodyPr rtlCol="0" anchor="ctr" wrap="square" tIns="25400" bIns="25400"/>
+          <a:lstStyle/>
+          <a:p>
+            <a:pPr algn="ctr"/>
+            <a:r>
+              <a:rPr sz="1100" b="1">
+                <a:solidFill>
+                  <a:srgbClr val="FFFFFF"/>
+                </a:solidFill>
+                <a:latin typeface="PingFang TC"/>
+                <a:ea typeface="PingFang TC"/>
+              </a:rPr>
+              <a:t>SSM 更新</a:t>
+            </a:r>
+          </a:p>
+          <a:p>
+            <a:pPr algn="ctr"/>
+            <a:r>
+              <a:rPr sz="1100" b="0">
+                <a:solidFill>
+                  <a:srgbClr val="FFFFFF"/>
+                </a:solidFill>
+                <a:latin typeface="PingFang TC"/>
+                <a:ea typeface="PingFang TC"/>
+              </a:rPr>
+              <a:t>/qrcode/</a:t>
+            </a:r>
+          </a:p>
+          <a:p>
+            <a:pPr algn="ctr"/>
+            <a:r>
+              <a:rPr sz="1100" b="0">
+                <a:solidFill>
+                  <a:srgbClr val="FFFFFF"/>
+                </a:solidFill>
+                <a:latin typeface="PingFang TC"/>
+                <a:ea typeface="PingFang TC"/>
+              </a:rPr>
+              <a:t>IMAGE_URI</a:t>
+            </a:r>
+          </a:p>
+        </p:txBody>
+      </p:sp>
+      <p:cxnSp>
+        <p:nvCxnSpPr>
+          <p:cNvPr id="13" name="Connector 12"/>
+          <p:cNvCxnSpPr/>
+          <p:nvPr/>
+        </p:nvCxnSpPr>
+        <p:spPr>
+          <a:xfrm>
+            <a:off x="8339328" y="2926080"/>
+            <a:ext cx="118872" cy="0"/>
+          </a:xfrm>
+          <a:prstGeom prst="line">
+            <a:avLst/>
+          </a:prstGeom>
+          <a:ln w="22225">
+            <a:solidFill>
+              <a:srgbClr val="64748B"/>
+            </a:solidFill>
+            <a:tailEnd type="triangle" w="med" len="med"/>
+          </a:ln>
+        </p:spPr>
+        <p:style>
+          <a:lnRef idx="2">
+            <a:schemeClr val="accent1"/>
+          </a:lnRef>
+          <a:fillRef idx="0">
+            <a:schemeClr val="accent1"/>
+          </a:fillRef>
+          <a:effectRef idx="1">
+            <a:schemeClr val="accent1"/>
+          </a:effectRef>
+          <a:fontRef idx="minor">
+            <a:schemeClr val="tx1"/>
+          </a:fontRef>
+        </p:style>
+      </p:cxnSp>
+      <p:sp>
+        <p:nvSpPr>
+          <p:cNvPr id="14" name="Rounded Rectangle 13"/>
+          <p:cNvSpPr/>
+          <p:nvPr/>
+        </p:nvSpPr>
+        <p:spPr>
+          <a:xfrm>
+            <a:off x="8458200" y="2286000"/>
+            <a:ext cx="1481328" cy="1280160"/>
+          </a:xfrm>
+          <a:prstGeom prst="roundRect">
+            <a:avLst/>
+          </a:prstGeom>
+          <a:solidFill>
+            <a:srgbClr val="D97706"/>
+          </a:solidFill>
+          <a:ln>
+            <a:solidFill>
+              <a:srgbClr val="D97706"/>
+            </a:solidFill>
+          </a:ln>
+          <a:effectLst/>
+        </p:spPr>
+        <p:style>
+          <a:lnRef idx="1">
+            <a:schemeClr val="accent1"/>
+          </a:lnRef>
+          <a:fillRef idx="3">
+            <a:schemeClr val="accent1"/>
+          </a:fillRef>
+          <a:effectRef idx="2">
+            <a:schemeClr val="accent1"/>
+          </a:effectRef>
+          <a:fontRef idx="minor">
+            <a:schemeClr val="lt1"/>
+          </a:fontRef>
+        </p:style>
+        <p:txBody>
+          <a:bodyPr rtlCol="0" anchor="ctr" wrap="square" tIns="25400" bIns="25400"/>
+          <a:lstStyle/>
+          <a:p>
+            <a:pPr algn="ctr"/>
+            <a:r>
+              <a:rPr sz="1100" b="1">
+                <a:solidFill>
+                  <a:srgbClr val="FFFFFF"/>
+                </a:solidFill>
+                <a:latin typeface="PingFang TC"/>
+                <a:ea typeface="PingFang TC"/>
+              </a:rPr>
+              <a:t>SSM 部署</a:t>
+            </a:r>
+          </a:p>
+          <a:p>
+            <a:pPr algn="ctr"/>
+            <a:r>
+              <a:rPr sz="1100" b="0">
+                <a:solidFill>
+                  <a:srgbClr val="FFFFFF"/>
+                </a:solidFill>
+                <a:latin typeface="PingFang TC"/>
+                <a:ea typeface="PingFang TC"/>
+              </a:rPr>
+              <a:t>→ EC2</a:t>
+            </a:r>
+          </a:p>
+          <a:p>
+            <a:pPr algn="ctr"/>
+            <a:r>
+              <a:rPr sz="1100" b="0">
+                <a:solidFill>
+                  <a:srgbClr val="FFFFFF"/>
+                </a:solidFill>
+                <a:latin typeface="PingFang TC"/>
+                <a:ea typeface="PingFang TC"/>
+              </a:rPr>
+              <a:t>deploy-app.sh</a:t>
+            </a:r>
+          </a:p>
+        </p:txBody>
+      </p:sp>
+      <p:cxnSp>
+        <p:nvCxnSpPr>
+          <p:cNvPr id="15" name="Connector 14"/>
+          <p:cNvCxnSpPr/>
+          <p:nvPr/>
+        </p:nvCxnSpPr>
+        <p:spPr>
+          <a:xfrm>
+            <a:off x="9939528" y="2926080"/>
+            <a:ext cx="118872" cy="0"/>
+          </a:xfrm>
+          <a:prstGeom prst="line">
+            <a:avLst/>
+          </a:prstGeom>
+          <a:ln w="22225">
+            <a:solidFill>
+              <a:srgbClr val="64748B"/>
+            </a:solidFill>
+            <a:tailEnd type="triangle" w="med" len="med"/>
+          </a:ln>
+        </p:spPr>
+        <p:style>
+          <a:lnRef idx="2">
+            <a:schemeClr val="accent1"/>
+          </a:lnRef>
+          <a:fillRef idx="0">
+            <a:schemeClr val="accent1"/>
+          </a:fillRef>
+          <a:effectRef idx="1">
+            <a:schemeClr val="accent1"/>
+          </a:effectRef>
+          <a:fontRef idx="minor">
+            <a:schemeClr val="tx1"/>
+          </a:fontRef>
+        </p:style>
+      </p:cxnSp>
+      <p:sp>
+        <p:nvSpPr>
+          <p:cNvPr id="16" name="Rounded Rectangle 15"/>
+          <p:cNvSpPr/>
+          <p:nvPr/>
+        </p:nvSpPr>
+        <p:spPr>
+          <a:xfrm>
+            <a:off x="10058400" y="2286000"/>
+            <a:ext cx="1481328" cy="1280160"/>
+          </a:xfrm>
+          <a:prstGeom prst="roundRect">
+            <a:avLst/>
+          </a:prstGeom>
+          <a:solidFill>
+            <a:srgbClr val="059669"/>
+          </a:solidFill>
+          <a:ln>
+            <a:solidFill>
+              <a:srgbClr val="059669"/>
+            </a:solidFill>
+          </a:ln>
+          <a:effectLst/>
+        </p:spPr>
+        <p:style>
+          <a:lnRef idx="1">
+            <a:schemeClr val="accent1"/>
+          </a:lnRef>
+          <a:fillRef idx="3">
+            <a:schemeClr val="accent1"/>
+          </a:fillRef>
+          <a:effectRef idx="2">
+            <a:schemeClr val="accent1"/>
+          </a:effectRef>
+          <a:fontRef idx="minor">
+            <a:schemeClr val="lt1"/>
+          </a:fontRef>
+        </p:style>
+        <p:txBody>
+          <a:bodyPr rtlCol="0" anchor="ctr" wrap="square" tIns="25400" bIns="25400"/>
+          <a:lstStyle/>
+          <a:p>
+            <a:pPr algn="ctr"/>
+            <a:r>
+              <a:rPr sz="1100" b="1">
+                <a:solidFill>
+                  <a:srgbClr val="FFFFFF"/>
+                </a:solidFill>
+                <a:latin typeface="PingFang TC"/>
+                <a:ea typeface="PingFang TC"/>
+              </a:rPr>
+              <a:t>上線</a:t>
+            </a:r>
+          </a:p>
+          <a:p>
+            <a:pPr algn="ctr"/>
+            <a:r>
+              <a:rPr sz="1100" b="0">
+                <a:solidFill>
+                  <a:srgbClr val="FFFFFF"/>
+                </a:solidFill>
+                <a:latin typeface="PingFang TC"/>
+                <a:ea typeface="PingFang TC"/>
+              </a:rPr>
+              <a:t>ALB /health</a:t>
+            </a:r>
+          </a:p>
+          <a:p>
+            <a:pPr algn="ctr"/>
+            <a:r>
+              <a:rPr sz="1100" b="0">
+                <a:solidFill>
+                  <a:srgbClr val="FFFFFF"/>
+                </a:solidFill>
+                <a:latin typeface="PingFang TC"/>
+                <a:ea typeface="PingFang TC"/>
+              </a:rPr>
+              <a:t>通過</a:t>
+            </a:r>
+          </a:p>
+        </p:txBody>
+      </p:sp>
+      <p:sp>
+        <p:nvSpPr>
+          <p:cNvPr id="17" name="TextBox 16"/>
           <p:cNvSpPr txBox="1"/>
           <p:nvPr/>
         </p:nvSpPr>
         <p:spPr>
           <a:xfrm>
-            <a:off x="822960" y="2743200"/>
-            <a:ext cx="10515600" cy="2743200"/>
+            <a:off x="548640" y="4023360"/>
+            <a:ext cx="11247120" cy="2194560"/>
           </a:xfrm>
           <a:prstGeom prst="rect">
             <a:avLst/>
@@ -17109,69 +17683,52 @@
           <a:p>
             <a:pPr>
               <a:spcAft>
-                <a:spcPts val="1200"/>
+                <a:spcPts val="900"/>
               </a:spcAft>
             </a:pPr>
             <a:r>
-              <a:rPr sz="1600" b="0">
-                <a:solidFill>
-                  <a:srgbClr val="E2E8F0"/>
-                </a:solidFill>
-                <a:latin typeface="PingFang TC"/>
-                <a:ea typeface="PingFang TC"/>
-              </a:rPr>
-              <a:t>✓  7 個 API 端點 + 管理頁前端（建立/清單/編輯/刪除/分析）</a:t>
+              <a:rPr sz="1400" b="0">
+                <a:solidFill>
+                  <a:srgbClr val="0F172A"/>
+                </a:solidFill>
+                <a:latin typeface="PingFang TC"/>
+                <a:ea typeface="PingFang TC"/>
+              </a:rPr>
+              <a:t>•  EC2 deploy-app.sh:從 SSM 撈設定 → ECR login → docker pull → docker run(換新容器)</a:t>
             </a:r>
           </a:p>
           <a:p>
             <a:pPr>
               <a:spcAft>
-                <a:spcPts val="1200"/>
+                <a:spcPts val="900"/>
               </a:spcAft>
             </a:pPr>
             <a:r>
-              <a:rPr sz="1600" b="0">
-                <a:solidFill>
-                  <a:srgbClr val="E2E8F0"/>
-                </a:solidFill>
-                <a:latin typeface="PingFang TC"/>
-                <a:ea typeface="PingFang TC"/>
-              </a:rPr>
-              <a:t>✓  全部 curl 驗證通過：302 / 404 / 410 / 8 碼 token / 正規化 / SSRF / 過期</a:t>
+              <a:rPr sz="1400" b="0">
+                <a:solidFill>
+                  <a:srgbClr val="0F172A"/>
+                </a:solidFill>
+                <a:latin typeface="PingFang TC"/>
+                <a:ea typeface="PingFang TC"/>
+              </a:rPr>
+              <a:t>•  全 env-gated:本機無這些環境變數 → 維持 SQLite + 記憶體 cache + 即時生圖,不受影響</a:t>
             </a:r>
           </a:p>
           <a:p>
             <a:pPr>
               <a:spcAft>
-                <a:spcPts val="1200"/>
+                <a:spcPts val="900"/>
               </a:spcAft>
             </a:pPr>
             <a:r>
-              <a:rPr sz="1600" b="0">
-                <a:solidFill>
-                  <a:srgbClr val="E2E8F0"/>
-                </a:solidFill>
-                <a:latin typeface="PingFang TC"/>
-                <a:ea typeface="PingFang TC"/>
-              </a:rPr>
-              <a:t>✓  production 替換點已在程式註解標明（Redis / 佇列 / CDN / 預聚合 / PostgreSQL）</a:t>
-            </a:r>
-          </a:p>
-          <a:p>
-            <a:pPr>
-              <a:spcAft>
-                <a:spcPts val="1200"/>
-              </a:spcAft>
-            </a:pPr>
-            <a:r>
-              <a:rPr sz="1600" b="0">
-                <a:solidFill>
-                  <a:srgbClr val="E2E8F0"/>
-                </a:solidFill>
-                <a:latin typeface="PingFang TC"/>
-                <a:ea typeface="PingFang TC"/>
-              </a:rPr>
-              <a:t>✓  設計依據：DESIGN.md（16 題決策 + 優劣分析）</a:t>
+              <a:rPr sz="1400" b="0">
+                <a:solidFill>
+                  <a:srgbClr val="0F172A"/>
+                </a:solidFill>
+                <a:latin typeface="PingFang TC"/>
+                <a:ea typeface="PingFang TC"/>
+              </a:rPr>
+              <a:t>•  部署踩到的兩個坑:① EC2 role 少 s3:PutObject(500)② CI build amd64 但 EC2 arm64(502)→ buildx 跨平台修正</a:t>
             </a:r>
           </a:p>
         </p:txBody>
@@ -17203,13 +17760,13 @@
         <p:spPr>
           <a:xfrm>
             <a:off x="0" y="0"/>
-            <a:ext cx="164592" cy="6858000"/>
+            <a:ext cx="12191695" cy="6858000"/>
           </a:xfrm>
           <a:prstGeom prst="rect">
             <a:avLst/>
           </a:prstGeom>
           <a:solidFill>
-            <a:srgbClr val="2563EB"/>
+            <a:srgbClr val="0F172A"/>
           </a:solidFill>
           <a:ln>
             <a:noFill/>
@@ -17246,8 +17803,8 @@
         </p:nvSpPr>
         <p:spPr>
           <a:xfrm>
-            <a:off x="502920" y="320040"/>
-            <a:ext cx="10972800" cy="1005840"/>
+            <a:off x="822960" y="1097280"/>
+            <a:ext cx="10515600" cy="1097280"/>
           </a:xfrm>
           <a:prstGeom prst="rect">
             <a:avLst/>
@@ -17259,23 +17816,6 @@
             <a:spAutoFit/>
           </a:bodyPr>
           <a:lstStyle/>
-          <a:p>
-            <a:pPr algn="l">
-              <a:spcAft>
-                <a:spcPts val="200"/>
-              </a:spcAft>
-            </a:pPr>
-            <a:r>
-              <a:rPr sz="1300" b="1">
-                <a:solidFill>
-                  <a:srgbClr val="2563EB"/>
-                </a:solidFill>
-                <a:latin typeface="PingFang TC"/>
-                <a:ea typeface="PingFang TC"/>
-              </a:rPr>
-              <a:t>下週預告 · NEXT WEEK</a:t>
-            </a:r>
-          </a:p>
           <a:p>
             <a:pPr algn="l">
               <a:spcAft>
@@ -17283,39 +17823,16 @@
               </a:spcAft>
             </a:pPr>
             <a:r>
-              <a:rPr sz="3000" b="1">
-                <a:solidFill>
-                  <a:srgbClr val="0F172A"/>
-                </a:solidFill>
-                <a:latin typeface="PingFang TC"/>
-                <a:ea typeface="PingFang TC"/>
-              </a:rPr>
-              <a:t>從 Prototype 到 Production 的巨大鴻溝</a:t>
-            </a:r>
-          </a:p>
-        </p:txBody>
-      </p:sp>
-      <p:sp>
-        <p:nvSpPr>
-          <p:cNvPr id="4" name="TextBox 3"/>
-          <p:cNvSpPr txBox="1"/>
-          <p:nvPr/>
-        </p:nvSpPr>
-        <p:spPr>
-          <a:xfrm>
-            <a:off x="548640" y="1371600"/>
-            <a:ext cx="10972800" cy="365760"/>
-          </a:xfrm>
-          <a:prstGeom prst="rect">
-            <a:avLst/>
-          </a:prstGeom>
-          <a:noFill/>
-        </p:spPr>
-        <p:txBody>
-          <a:bodyPr wrap="square" anchor="t">
-            <a:spAutoFit/>
-          </a:bodyPr>
-          <a:lstStyle/>
+              <a:rPr sz="1600" b="1">
+                <a:solidFill>
+                  <a:srgbClr val="2563EB"/>
+                </a:solidFill>
+                <a:latin typeface="PingFang TC"/>
+                <a:ea typeface="PingFang TC"/>
+              </a:rPr>
+              <a:t>原型狀態</a:t>
+            </a:r>
+          </a:p>
           <a:p>
             <a:pPr algn="l">
               <a:spcAft>
@@ -17323,897 +17840,105 @@
               </a:spcAft>
             </a:pPr>
             <a:r>
-              <a:rPr sz="1400" b="0">
-                <a:solidFill>
-                  <a:srgbClr val="64748B"/>
-                </a:solidFill>
-                <a:latin typeface="PingFang TC"/>
-                <a:ea typeface="PingFang TC"/>
-              </a:rPr>
-              <a:t>快速掃過，建立全貌 — 下週 Deep Dive 才是主菜</a:t>
-            </a:r>
-          </a:p>
-        </p:txBody>
-      </p:sp>
-      <p:sp>
-        <p:nvSpPr>
-          <p:cNvPr id="5" name="Rounded Rectangle 4"/>
-          <p:cNvSpPr/>
-          <p:nvPr/>
-        </p:nvSpPr>
-        <p:spPr>
-          <a:xfrm>
-            <a:off x="548640" y="1965960"/>
-            <a:ext cx="3611880" cy="1600200"/>
-          </a:xfrm>
-          <a:prstGeom prst="roundRect">
-            <a:avLst/>
-          </a:prstGeom>
-          <a:solidFill>
-            <a:srgbClr val="F1F5F9"/>
-          </a:solidFill>
-          <a:ln>
-            <a:solidFill>
-              <a:srgbClr val="F1F5F9"/>
-            </a:solidFill>
-          </a:ln>
-          <a:effectLst/>
-        </p:spPr>
-        <p:style>
-          <a:lnRef idx="1">
-            <a:schemeClr val="accent1"/>
-          </a:lnRef>
-          <a:fillRef idx="3">
-            <a:schemeClr val="accent1"/>
-          </a:fillRef>
-          <a:effectRef idx="2">
-            <a:schemeClr val="accent1"/>
-          </a:effectRef>
-          <a:fontRef idx="minor">
-            <a:schemeClr val="lt1"/>
-          </a:fontRef>
-        </p:style>
-        <p:txBody>
-          <a:bodyPr rtlCol="0" anchor="ctr"/>
-          <a:lstStyle/>
-          <a:p>
-            <a:pPr algn="ctr"/>
-          </a:p>
-        </p:txBody>
-      </p:sp>
-      <p:sp>
-        <p:nvSpPr>
-          <p:cNvPr id="6" name="Rectangle 5"/>
-          <p:cNvSpPr/>
-          <p:nvPr/>
-        </p:nvSpPr>
-        <p:spPr>
-          <a:xfrm>
-            <a:off x="548640" y="1965960"/>
-            <a:ext cx="82296" cy="1600200"/>
+              <a:rPr sz="3000" b="1">
+                <a:solidFill>
+                  <a:srgbClr val="FFFFFF"/>
+                </a:solidFill>
+                <a:latin typeface="PingFang TC"/>
+                <a:ea typeface="PingFang TC"/>
+              </a:rPr>
+              <a:t>可跑的 FastAPI 實作 + 管理頁前端</a:t>
+            </a:r>
+          </a:p>
+        </p:txBody>
+      </p:sp>
+      <p:sp>
+        <p:nvSpPr>
+          <p:cNvPr id="4" name="TextBox 3"/>
+          <p:cNvSpPr txBox="1"/>
+          <p:nvPr/>
+        </p:nvSpPr>
+        <p:spPr>
+          <a:xfrm>
+            <a:off x="822960" y="2743200"/>
+            <a:ext cx="10515600" cy="2743200"/>
           </a:xfrm>
           <a:prstGeom prst="rect">
             <a:avLst/>
           </a:prstGeom>
-          <a:solidFill>
-            <a:srgbClr val="D97706"/>
-          </a:solidFill>
-          <a:ln>
-            <a:noFill/>
-          </a:ln>
-          <a:effectLst/>
-        </p:spPr>
-        <p:style>
-          <a:lnRef idx="1">
-            <a:schemeClr val="accent1"/>
-          </a:lnRef>
-          <a:fillRef idx="3">
-            <a:schemeClr val="accent1"/>
-          </a:fillRef>
-          <a:effectRef idx="2">
-            <a:schemeClr val="accent1"/>
-          </a:effectRef>
-          <a:fontRef idx="minor">
-            <a:schemeClr val="lt1"/>
-          </a:fontRef>
-        </p:style>
-        <p:txBody>
-          <a:bodyPr rtlCol="0" anchor="ctr"/>
-          <a:lstStyle/>
-          <a:p>
-            <a:pPr algn="ctr"/>
-          </a:p>
-        </p:txBody>
-      </p:sp>
-      <p:sp>
-        <p:nvSpPr>
-          <p:cNvPr id="7" name="TextBox 6"/>
-          <p:cNvSpPr txBox="1"/>
-          <p:nvPr/>
-        </p:nvSpPr>
-        <p:spPr>
-          <a:xfrm>
-            <a:off x="822960" y="2148840"/>
-            <a:ext cx="3154680" cy="1325880"/>
-          </a:xfrm>
-          <a:prstGeom prst="rect">
-            <a:avLst/>
-          </a:prstGeom>
           <a:noFill/>
         </p:spPr>
         <p:txBody>
-          <a:bodyPr wrap="square" anchor="t">
+          <a:bodyPr wrap="square">
             <a:spAutoFit/>
           </a:bodyPr>
           <a:lstStyle/>
           <a:p>
-            <a:pPr algn="l">
+            <a:pPr>
               <a:spcAft>
-                <a:spcPts val="800"/>
+                <a:spcPts val="1200"/>
               </a:spcAft>
             </a:pPr>
             <a:r>
-              <a:rPr sz="1600" b="1">
-                <a:solidFill>
-                  <a:srgbClr val="0F172A"/>
-                </a:solidFill>
-                <a:latin typeface="PingFang TC"/>
-                <a:ea typeface="PingFang TC"/>
-              </a:rPr>
-              <a:t>[Error Handling]</a:t>
-            </a:r>
-          </a:p>
-          <a:p>
-            <a:pPr algn="l">
+              <a:rPr sz="1600" b="0">
+                <a:solidFill>
+                  <a:srgbClr val="E2E8F0"/>
+                </a:solidFill>
+                <a:latin typeface="PingFang TC"/>
+                <a:ea typeface="PingFang TC"/>
+              </a:rPr>
+              <a:t>✓  7 個 API 端點 + 管理頁前端（建立/清單/編輯/刪除/分析）</a:t>
+            </a:r>
+          </a:p>
+          <a:p>
+            <a:pPr>
               <a:spcAft>
-                <a:spcPts val="400"/>
+                <a:spcPts val="1200"/>
               </a:spcAft>
             </a:pPr>
             <a:r>
-              <a:rPr sz="1300" b="0">
-                <a:solidFill>
-                  <a:srgbClr val="64748B"/>
-                </a:solidFill>
-                <a:latin typeface="PingFang TC"/>
-                <a:ea typeface="PingFang TC"/>
-              </a:rPr>
-              <a:t>遇到不合法輸入直接 Crash。</a:t>
-            </a:r>
-          </a:p>
-        </p:txBody>
-      </p:sp>
-      <p:sp>
-        <p:nvSpPr>
-          <p:cNvPr id="8" name="Rounded Rectangle 7"/>
-          <p:cNvSpPr/>
-          <p:nvPr/>
-        </p:nvSpPr>
-        <p:spPr>
-          <a:xfrm>
-            <a:off x="4407408" y="1965960"/>
-            <a:ext cx="3611880" cy="1600200"/>
-          </a:xfrm>
-          <a:prstGeom prst="roundRect">
-            <a:avLst/>
-          </a:prstGeom>
-          <a:solidFill>
-            <a:srgbClr val="F1F5F9"/>
-          </a:solidFill>
-          <a:ln>
-            <a:solidFill>
-              <a:srgbClr val="F1F5F9"/>
-            </a:solidFill>
-          </a:ln>
-          <a:effectLst/>
-        </p:spPr>
-        <p:style>
-          <a:lnRef idx="1">
-            <a:schemeClr val="accent1"/>
-          </a:lnRef>
-          <a:fillRef idx="3">
-            <a:schemeClr val="accent1"/>
-          </a:fillRef>
-          <a:effectRef idx="2">
-            <a:schemeClr val="accent1"/>
-          </a:effectRef>
-          <a:fontRef idx="minor">
-            <a:schemeClr val="lt1"/>
-          </a:fontRef>
-        </p:style>
-        <p:txBody>
-          <a:bodyPr rtlCol="0" anchor="ctr"/>
-          <a:lstStyle/>
-          <a:p>
-            <a:pPr algn="ctr"/>
-          </a:p>
-        </p:txBody>
-      </p:sp>
-      <p:sp>
-        <p:nvSpPr>
-          <p:cNvPr id="9" name="Rectangle 8"/>
-          <p:cNvSpPr/>
-          <p:nvPr/>
-        </p:nvSpPr>
-        <p:spPr>
-          <a:xfrm>
-            <a:off x="4407408" y="1965960"/>
-            <a:ext cx="82296" cy="1600200"/>
-          </a:xfrm>
-          <a:prstGeom prst="rect">
-            <a:avLst/>
-          </a:prstGeom>
-          <a:solidFill>
-            <a:srgbClr val="D97706"/>
-          </a:solidFill>
-          <a:ln>
-            <a:noFill/>
-          </a:ln>
-          <a:effectLst/>
-        </p:spPr>
-        <p:style>
-          <a:lnRef idx="1">
-            <a:schemeClr val="accent1"/>
-          </a:lnRef>
-          <a:fillRef idx="3">
-            <a:schemeClr val="accent1"/>
-          </a:fillRef>
-          <a:effectRef idx="2">
-            <a:schemeClr val="accent1"/>
-          </a:effectRef>
-          <a:fontRef idx="minor">
-            <a:schemeClr val="lt1"/>
-          </a:fontRef>
-        </p:style>
-        <p:txBody>
-          <a:bodyPr rtlCol="0" anchor="ctr"/>
-          <a:lstStyle/>
-          <a:p>
-            <a:pPr algn="ctr"/>
-          </a:p>
-        </p:txBody>
-      </p:sp>
-      <p:sp>
-        <p:nvSpPr>
-          <p:cNvPr id="10" name="TextBox 9"/>
-          <p:cNvSpPr txBox="1"/>
-          <p:nvPr/>
-        </p:nvSpPr>
-        <p:spPr>
-          <a:xfrm>
-            <a:off x="4681728" y="2148840"/>
-            <a:ext cx="3154680" cy="1325880"/>
-          </a:xfrm>
-          <a:prstGeom prst="rect">
-            <a:avLst/>
-          </a:prstGeom>
-          <a:noFill/>
-        </p:spPr>
-        <p:txBody>
-          <a:bodyPr wrap="square" anchor="t">
-            <a:spAutoFit/>
-          </a:bodyPr>
-          <a:lstStyle/>
-          <a:p>
-            <a:pPr algn="l">
+              <a:rPr sz="1600" b="0">
+                <a:solidFill>
+                  <a:srgbClr val="E2E8F0"/>
+                </a:solidFill>
+                <a:latin typeface="PingFang TC"/>
+                <a:ea typeface="PingFang TC"/>
+              </a:rPr>
+              <a:t>✓  全部 curl 驗證通過：302 / 404 / 410 / 8 碼 token / 正規化 / SSRF / 過期</a:t>
+            </a:r>
+          </a:p>
+          <a:p>
+            <a:pPr>
               <a:spcAft>
-                <a:spcPts val="800"/>
+                <a:spcPts val="1200"/>
               </a:spcAft>
             </a:pPr>
             <a:r>
-              <a:rPr sz="1600" b="1">
-                <a:solidFill>
-                  <a:srgbClr val="0F172A"/>
-                </a:solidFill>
-                <a:latin typeface="PingFang TC"/>
-                <a:ea typeface="PingFang TC"/>
-              </a:rPr>
-              <a:t>[Rate Limiting]</a:t>
-            </a:r>
-          </a:p>
-          <a:p>
-            <a:pPr algn="l">
+              <a:rPr sz="1600" b="0">
+                <a:solidFill>
+                  <a:srgbClr val="E2E8F0"/>
+                </a:solidFill>
+                <a:latin typeface="PingFang TC"/>
+                <a:ea typeface="PingFang TC"/>
+              </a:rPr>
+              <a:t>✓  production 替換點已在程式註解標明（Redis / 佇列 / CDN / 預聚合 / PostgreSQL）</a:t>
+            </a:r>
+          </a:p>
+          <a:p>
+            <a:pPr>
               <a:spcAft>
-                <a:spcPts val="400"/>
+                <a:spcPts val="1200"/>
               </a:spcAft>
             </a:pPr>
             <a:r>
-              <a:rPr sz="1300" b="0">
-                <a:solidFill>
-                  <a:srgbClr val="64748B"/>
-                </a:solidFill>
-                <a:latin typeface="PingFang TC"/>
-                <a:ea typeface="PingFang TC"/>
-              </a:rPr>
-              <a:t>毫無防護，極易被 Script 惡意灌爆 API。</a:t>
-            </a:r>
-          </a:p>
-        </p:txBody>
-      </p:sp>
-      <p:sp>
-        <p:nvSpPr>
-          <p:cNvPr id="11" name="Rounded Rectangle 10"/>
-          <p:cNvSpPr/>
-          <p:nvPr/>
-        </p:nvSpPr>
-        <p:spPr>
-          <a:xfrm>
-            <a:off x="8266176" y="1965960"/>
-            <a:ext cx="3611880" cy="1600200"/>
-          </a:xfrm>
-          <a:prstGeom prst="roundRect">
-            <a:avLst/>
-          </a:prstGeom>
-          <a:solidFill>
-            <a:srgbClr val="F1F5F9"/>
-          </a:solidFill>
-          <a:ln>
-            <a:solidFill>
-              <a:srgbClr val="F1F5F9"/>
-            </a:solidFill>
-          </a:ln>
-          <a:effectLst/>
-        </p:spPr>
-        <p:style>
-          <a:lnRef idx="1">
-            <a:schemeClr val="accent1"/>
-          </a:lnRef>
-          <a:fillRef idx="3">
-            <a:schemeClr val="accent1"/>
-          </a:fillRef>
-          <a:effectRef idx="2">
-            <a:schemeClr val="accent1"/>
-          </a:effectRef>
-          <a:fontRef idx="minor">
-            <a:schemeClr val="lt1"/>
-          </a:fontRef>
-        </p:style>
-        <p:txBody>
-          <a:bodyPr rtlCol="0" anchor="ctr"/>
-          <a:lstStyle/>
-          <a:p>
-            <a:pPr algn="ctr"/>
-          </a:p>
-        </p:txBody>
-      </p:sp>
-      <p:sp>
-        <p:nvSpPr>
-          <p:cNvPr id="12" name="Rectangle 11"/>
-          <p:cNvSpPr/>
-          <p:nvPr/>
-        </p:nvSpPr>
-        <p:spPr>
-          <a:xfrm>
-            <a:off x="8266176" y="1965960"/>
-            <a:ext cx="82296" cy="1600200"/>
-          </a:xfrm>
-          <a:prstGeom prst="rect">
-            <a:avLst/>
-          </a:prstGeom>
-          <a:solidFill>
-            <a:srgbClr val="D97706"/>
-          </a:solidFill>
-          <a:ln>
-            <a:noFill/>
-          </a:ln>
-          <a:effectLst/>
-        </p:spPr>
-        <p:style>
-          <a:lnRef idx="1">
-            <a:schemeClr val="accent1"/>
-          </a:lnRef>
-          <a:fillRef idx="3">
-            <a:schemeClr val="accent1"/>
-          </a:fillRef>
-          <a:effectRef idx="2">
-            <a:schemeClr val="accent1"/>
-          </a:effectRef>
-          <a:fontRef idx="minor">
-            <a:schemeClr val="lt1"/>
-          </a:fontRef>
-        </p:style>
-        <p:txBody>
-          <a:bodyPr rtlCol="0" anchor="ctr"/>
-          <a:lstStyle/>
-          <a:p>
-            <a:pPr algn="ctr"/>
-          </a:p>
-        </p:txBody>
-      </p:sp>
-      <p:sp>
-        <p:nvSpPr>
-          <p:cNvPr id="13" name="TextBox 12"/>
-          <p:cNvSpPr txBox="1"/>
-          <p:nvPr/>
-        </p:nvSpPr>
-        <p:spPr>
-          <a:xfrm>
-            <a:off x="8540496" y="2148840"/>
-            <a:ext cx="3154680" cy="1325880"/>
-          </a:xfrm>
-          <a:prstGeom prst="rect">
-            <a:avLst/>
-          </a:prstGeom>
-          <a:noFill/>
-        </p:spPr>
-        <p:txBody>
-          <a:bodyPr wrap="square" anchor="t">
-            <a:spAutoFit/>
-          </a:bodyPr>
-          <a:lstStyle/>
-          <a:p>
-            <a:pPr algn="l">
-              <a:spcAft>
-                <a:spcPts val="800"/>
-              </a:spcAft>
-            </a:pPr>
-            <a:r>
-              <a:rPr sz="1600" b="1">
-                <a:solidFill>
-                  <a:srgbClr val="0F172A"/>
-                </a:solidFill>
-                <a:latin typeface="PingFang TC"/>
-                <a:ea typeface="PingFang TC"/>
-              </a:rPr>
-              <a:t>[Auth &amp; Isolation]</a:t>
-            </a:r>
-          </a:p>
-          <a:p>
-            <a:pPr algn="l">
-              <a:spcAft>
-                <a:spcPts val="400"/>
-              </a:spcAft>
-            </a:pPr>
-            <a:r>
-              <a:rPr sz="1300" b="0">
-                <a:solidFill>
-                  <a:srgbClr val="64748B"/>
-                </a:solidFill>
-                <a:latin typeface="PingFang TC"/>
-                <a:ea typeface="PingFang TC"/>
-              </a:rPr>
-              <a:t>缺乏多租戶概念，資料全公開。</a:t>
-            </a:r>
-          </a:p>
-        </p:txBody>
-      </p:sp>
-      <p:sp>
-        <p:nvSpPr>
-          <p:cNvPr id="14" name="Rounded Rectangle 13"/>
-          <p:cNvSpPr/>
-          <p:nvPr/>
-        </p:nvSpPr>
-        <p:spPr>
-          <a:xfrm>
-            <a:off x="548640" y="3840480"/>
-            <a:ext cx="3611880" cy="1600200"/>
-          </a:xfrm>
-          <a:prstGeom prst="roundRect">
-            <a:avLst/>
-          </a:prstGeom>
-          <a:solidFill>
-            <a:srgbClr val="F1F5F9"/>
-          </a:solidFill>
-          <a:ln>
-            <a:solidFill>
-              <a:srgbClr val="F1F5F9"/>
-            </a:solidFill>
-          </a:ln>
-          <a:effectLst/>
-        </p:spPr>
-        <p:style>
-          <a:lnRef idx="1">
-            <a:schemeClr val="accent1"/>
-          </a:lnRef>
-          <a:fillRef idx="3">
-            <a:schemeClr val="accent1"/>
-          </a:fillRef>
-          <a:effectRef idx="2">
-            <a:schemeClr val="accent1"/>
-          </a:effectRef>
-          <a:fontRef idx="minor">
-            <a:schemeClr val="lt1"/>
-          </a:fontRef>
-        </p:style>
-        <p:txBody>
-          <a:bodyPr rtlCol="0" anchor="ctr"/>
-          <a:lstStyle/>
-          <a:p>
-            <a:pPr algn="ctr"/>
-          </a:p>
-        </p:txBody>
-      </p:sp>
-      <p:sp>
-        <p:nvSpPr>
-          <p:cNvPr id="15" name="Rectangle 14"/>
-          <p:cNvSpPr/>
-          <p:nvPr/>
-        </p:nvSpPr>
-        <p:spPr>
-          <a:xfrm>
-            <a:off x="548640" y="3840480"/>
-            <a:ext cx="82296" cy="1600200"/>
-          </a:xfrm>
-          <a:prstGeom prst="rect">
-            <a:avLst/>
-          </a:prstGeom>
-          <a:solidFill>
-            <a:srgbClr val="0EA5E9"/>
-          </a:solidFill>
-          <a:ln>
-            <a:noFill/>
-          </a:ln>
-          <a:effectLst/>
-        </p:spPr>
-        <p:style>
-          <a:lnRef idx="1">
-            <a:schemeClr val="accent1"/>
-          </a:lnRef>
-          <a:fillRef idx="3">
-            <a:schemeClr val="accent1"/>
-          </a:fillRef>
-          <a:effectRef idx="2">
-            <a:schemeClr val="accent1"/>
-          </a:effectRef>
-          <a:fontRef idx="minor">
-            <a:schemeClr val="lt1"/>
-          </a:fontRef>
-        </p:style>
-        <p:txBody>
-          <a:bodyPr rtlCol="0" anchor="ctr"/>
-          <a:lstStyle/>
-          <a:p>
-            <a:pPr algn="ctr"/>
-          </a:p>
-        </p:txBody>
-      </p:sp>
-      <p:sp>
-        <p:nvSpPr>
-          <p:cNvPr id="16" name="TextBox 15"/>
-          <p:cNvSpPr txBox="1"/>
-          <p:nvPr/>
-        </p:nvSpPr>
-        <p:spPr>
-          <a:xfrm>
-            <a:off x="822960" y="4023360"/>
-            <a:ext cx="3154680" cy="1325880"/>
-          </a:xfrm>
-          <a:prstGeom prst="rect">
-            <a:avLst/>
-          </a:prstGeom>
-          <a:noFill/>
-        </p:spPr>
-        <p:txBody>
-          <a:bodyPr wrap="square" anchor="t">
-            <a:spAutoFit/>
-          </a:bodyPr>
-          <a:lstStyle/>
-          <a:p>
-            <a:pPr algn="l">
-              <a:spcAft>
-                <a:spcPts val="800"/>
-              </a:spcAft>
-            </a:pPr>
-            <a:r>
-              <a:rPr sz="1600" b="1">
-                <a:solidFill>
-                  <a:srgbClr val="0F172A"/>
-                </a:solidFill>
-                <a:latin typeface="PingFang TC"/>
-                <a:ea typeface="PingFang TC"/>
-              </a:rPr>
-              <a:t>[Monitoring]</a:t>
-            </a:r>
-          </a:p>
-          <a:p>
-            <a:pPr algn="l">
-              <a:spcAft>
-                <a:spcPts val="400"/>
-              </a:spcAft>
-            </a:pPr>
-            <a:r>
-              <a:rPr sz="1300" b="0">
-                <a:solidFill>
-                  <a:srgbClr val="64748B"/>
-                </a:solidFill>
-                <a:latin typeface="PingFang TC"/>
-                <a:ea typeface="PingFang TC"/>
-              </a:rPr>
-              <a:t>服務掛了完全沒有 Alerting，處於盲飛狀態。</a:t>
-            </a:r>
-          </a:p>
-        </p:txBody>
-      </p:sp>
-      <p:sp>
-        <p:nvSpPr>
-          <p:cNvPr id="17" name="Rounded Rectangle 16"/>
-          <p:cNvSpPr/>
-          <p:nvPr/>
-        </p:nvSpPr>
-        <p:spPr>
-          <a:xfrm>
-            <a:off x="4407408" y="3840480"/>
-            <a:ext cx="3611880" cy="1600200"/>
-          </a:xfrm>
-          <a:prstGeom prst="roundRect">
-            <a:avLst/>
-          </a:prstGeom>
-          <a:solidFill>
-            <a:srgbClr val="F1F5F9"/>
-          </a:solidFill>
-          <a:ln>
-            <a:solidFill>
-              <a:srgbClr val="F1F5F9"/>
-            </a:solidFill>
-          </a:ln>
-          <a:effectLst/>
-        </p:spPr>
-        <p:style>
-          <a:lnRef idx="1">
-            <a:schemeClr val="accent1"/>
-          </a:lnRef>
-          <a:fillRef idx="3">
-            <a:schemeClr val="accent1"/>
-          </a:fillRef>
-          <a:effectRef idx="2">
-            <a:schemeClr val="accent1"/>
-          </a:effectRef>
-          <a:fontRef idx="minor">
-            <a:schemeClr val="lt1"/>
-          </a:fontRef>
-        </p:style>
-        <p:txBody>
-          <a:bodyPr rtlCol="0" anchor="ctr"/>
-          <a:lstStyle/>
-          <a:p>
-            <a:pPr algn="ctr"/>
-          </a:p>
-        </p:txBody>
-      </p:sp>
-      <p:sp>
-        <p:nvSpPr>
-          <p:cNvPr id="18" name="Rectangle 17"/>
-          <p:cNvSpPr/>
-          <p:nvPr/>
-        </p:nvSpPr>
-        <p:spPr>
-          <a:xfrm>
-            <a:off x="4407408" y="3840480"/>
-            <a:ext cx="82296" cy="1600200"/>
-          </a:xfrm>
-          <a:prstGeom prst="rect">
-            <a:avLst/>
-          </a:prstGeom>
-          <a:solidFill>
-            <a:srgbClr val="0EA5E9"/>
-          </a:solidFill>
-          <a:ln>
-            <a:noFill/>
-          </a:ln>
-          <a:effectLst/>
-        </p:spPr>
-        <p:style>
-          <a:lnRef idx="1">
-            <a:schemeClr val="accent1"/>
-          </a:lnRef>
-          <a:fillRef idx="3">
-            <a:schemeClr val="accent1"/>
-          </a:fillRef>
-          <a:effectRef idx="2">
-            <a:schemeClr val="accent1"/>
-          </a:effectRef>
-          <a:fontRef idx="minor">
-            <a:schemeClr val="lt1"/>
-          </a:fontRef>
-        </p:style>
-        <p:txBody>
-          <a:bodyPr rtlCol="0" anchor="ctr"/>
-          <a:lstStyle/>
-          <a:p>
-            <a:pPr algn="ctr"/>
-          </a:p>
-        </p:txBody>
-      </p:sp>
-      <p:sp>
-        <p:nvSpPr>
-          <p:cNvPr id="19" name="TextBox 18"/>
-          <p:cNvSpPr txBox="1"/>
-          <p:nvPr/>
-        </p:nvSpPr>
-        <p:spPr>
-          <a:xfrm>
-            <a:off x="4681728" y="4023360"/>
-            <a:ext cx="3154680" cy="1325880"/>
-          </a:xfrm>
-          <a:prstGeom prst="rect">
-            <a:avLst/>
-          </a:prstGeom>
-          <a:noFill/>
-        </p:spPr>
-        <p:txBody>
-          <a:bodyPr wrap="square" anchor="t">
-            <a:spAutoFit/>
-          </a:bodyPr>
-          <a:lstStyle/>
-          <a:p>
-            <a:pPr algn="l">
-              <a:spcAft>
-                <a:spcPts val="800"/>
-              </a:spcAft>
-            </a:pPr>
-            <a:r>
-              <a:rPr sz="1600" b="1">
-                <a:solidFill>
-                  <a:srgbClr val="0F172A"/>
-                </a:solidFill>
-                <a:latin typeface="PingFang TC"/>
-                <a:ea typeface="PingFang TC"/>
-              </a:rPr>
-              <a:t>[Data Cleanup]</a:t>
-            </a:r>
-          </a:p>
-          <a:p>
-            <a:pPr algn="l">
-              <a:spcAft>
-                <a:spcPts val="400"/>
-              </a:spcAft>
-            </a:pPr>
-            <a:r>
-              <a:rPr sz="1300" b="0">
-                <a:solidFill>
-                  <a:srgbClr val="64748B"/>
-                </a:solidFill>
-                <a:latin typeface="PingFang TC"/>
-                <a:ea typeface="PingFang TC"/>
-              </a:rPr>
-              <a:t>過期資料永不刪除，一年後 DB 將面臨嚴重 Bloat。</a:t>
-            </a:r>
-          </a:p>
-        </p:txBody>
-      </p:sp>
-      <p:sp>
-        <p:nvSpPr>
-          <p:cNvPr id="20" name="Rounded Rectangle 19"/>
-          <p:cNvSpPr/>
-          <p:nvPr/>
-        </p:nvSpPr>
-        <p:spPr>
-          <a:xfrm>
-            <a:off x="8266176" y="3840480"/>
-            <a:ext cx="3611880" cy="1600200"/>
-          </a:xfrm>
-          <a:prstGeom prst="roundRect">
-            <a:avLst/>
-          </a:prstGeom>
-          <a:solidFill>
-            <a:srgbClr val="F1F5F9"/>
-          </a:solidFill>
-          <a:ln>
-            <a:solidFill>
-              <a:srgbClr val="F1F5F9"/>
-            </a:solidFill>
-          </a:ln>
-          <a:effectLst/>
-        </p:spPr>
-        <p:style>
-          <a:lnRef idx="1">
-            <a:schemeClr val="accent1"/>
-          </a:lnRef>
-          <a:fillRef idx="3">
-            <a:schemeClr val="accent1"/>
-          </a:fillRef>
-          <a:effectRef idx="2">
-            <a:schemeClr val="accent1"/>
-          </a:effectRef>
-          <a:fontRef idx="minor">
-            <a:schemeClr val="lt1"/>
-          </a:fontRef>
-        </p:style>
-        <p:txBody>
-          <a:bodyPr rtlCol="0" anchor="ctr"/>
-          <a:lstStyle/>
-          <a:p>
-            <a:pPr algn="ctr"/>
-          </a:p>
-        </p:txBody>
-      </p:sp>
-      <p:sp>
-        <p:nvSpPr>
-          <p:cNvPr id="21" name="Rectangle 20"/>
-          <p:cNvSpPr/>
-          <p:nvPr/>
-        </p:nvSpPr>
-        <p:spPr>
-          <a:xfrm>
-            <a:off x="8266176" y="3840480"/>
-            <a:ext cx="82296" cy="1600200"/>
-          </a:xfrm>
-          <a:prstGeom prst="rect">
-            <a:avLst/>
-          </a:prstGeom>
-          <a:solidFill>
-            <a:srgbClr val="0EA5E9"/>
-          </a:solidFill>
-          <a:ln>
-            <a:noFill/>
-          </a:ln>
-          <a:effectLst/>
-        </p:spPr>
-        <p:style>
-          <a:lnRef idx="1">
-            <a:schemeClr val="accent1"/>
-          </a:lnRef>
-          <a:fillRef idx="3">
-            <a:schemeClr val="accent1"/>
-          </a:fillRef>
-          <a:effectRef idx="2">
-            <a:schemeClr val="accent1"/>
-          </a:effectRef>
-          <a:fontRef idx="minor">
-            <a:schemeClr val="lt1"/>
-          </a:fontRef>
-        </p:style>
-        <p:txBody>
-          <a:bodyPr rtlCol="0" anchor="ctr"/>
-          <a:lstStyle/>
-          <a:p>
-            <a:pPr algn="ctr"/>
-          </a:p>
-        </p:txBody>
-      </p:sp>
-      <p:sp>
-        <p:nvSpPr>
-          <p:cNvPr id="22" name="TextBox 21"/>
-          <p:cNvSpPr txBox="1"/>
-          <p:nvPr/>
-        </p:nvSpPr>
-        <p:spPr>
-          <a:xfrm>
-            <a:off x="8540496" y="4023360"/>
-            <a:ext cx="3154680" cy="1325880"/>
-          </a:xfrm>
-          <a:prstGeom prst="rect">
-            <a:avLst/>
-          </a:prstGeom>
-          <a:noFill/>
-        </p:spPr>
-        <p:txBody>
-          <a:bodyPr wrap="square" anchor="t">
-            <a:spAutoFit/>
-          </a:bodyPr>
-          <a:lstStyle/>
-          <a:p>
-            <a:pPr algn="l">
-              <a:spcAft>
-                <a:spcPts val="800"/>
-              </a:spcAft>
-            </a:pPr>
-            <a:r>
-              <a:rPr sz="1600" b="1">
-                <a:solidFill>
-                  <a:srgbClr val="0F172A"/>
-                </a:solidFill>
-                <a:latin typeface="PingFang TC"/>
-                <a:ea typeface="PingFang TC"/>
-              </a:rPr>
-              <a:t>[Caching / CDN]</a:t>
-            </a:r>
-          </a:p>
-          <a:p>
-            <a:pPr algn="l">
-              <a:spcAft>
-                <a:spcPts val="400"/>
-              </a:spcAft>
-            </a:pPr>
-            <a:r>
-              <a:rPr sz="1300" b="0">
-                <a:solidFill>
-                  <a:srgbClr val="64748B"/>
-                </a:solidFill>
-                <a:latin typeface="PingFang TC"/>
-                <a:ea typeface="PingFang TC"/>
-              </a:rPr>
-              <a:t>每次轉址都直擊 DB，流量一來直接癱瘓。
-→ 下週 Deep Dive 展開</a:t>
+              <a:rPr sz="1600" b="0">
+                <a:solidFill>
+                  <a:srgbClr val="E2E8F0"/>
+                </a:solidFill>
+                <a:latin typeface="PingFang TC"/>
+                <a:ea typeface="PingFang TC"/>
+              </a:rPr>
+              <a:t>✓  設計依據：DESIGN.md（16 題決策 + 優劣分析）</a:t>
             </a:r>
           </a:p>
         </p:txBody>
@@ -18315,7 +18040,7 @@
                 <a:latin typeface="PingFang TC"/>
                 <a:ea typeface="PingFang TC"/>
               </a:rPr>
-              <a:t>下週預告 · DEEP DIVE</a:t>
+              <a:t>下週預告 · NEXT WEEK</a:t>
             </a:r>
           </a:p>
           <a:p>
@@ -18332,7 +18057,7 @@
                 <a:latin typeface="PingFang TC"/>
                 <a:ea typeface="PingFang TC"/>
               </a:rPr>
-              <a:t>壓力測試與極限擴展 (Deep Dive)</a:t>
+              <a:t>從 Prototype 到 Production 的巨大鴻溝</a:t>
             </a:r>
           </a:p>
         </p:txBody>
@@ -18345,8 +18070,8 @@
         </p:nvSpPr>
         <p:spPr>
           <a:xfrm>
-            <a:off x="548640" y="2011680"/>
-            <a:ext cx="5486400" cy="2926080"/>
+            <a:off x="548640" y="1371600"/>
+            <a:ext cx="10972800" cy="365760"/>
           </a:xfrm>
           <a:prstGeom prst="rect">
             <a:avLst/>
@@ -18358,23 +18083,6 @@
             <a:spAutoFit/>
           </a:bodyPr>
           <a:lstStyle/>
-          <a:p>
-            <a:pPr algn="l">
-              <a:spcAft>
-                <a:spcPts val="1600"/>
-              </a:spcAft>
-            </a:pPr>
-            <a:r>
-              <a:rPr sz="2600" b="1">
-                <a:solidFill>
-                  <a:srgbClr val="2563EB"/>
-                </a:solidFill>
-                <a:latin typeface="PingFang TC"/>
-                <a:ea typeface="PingFang TC"/>
-              </a:rPr>
-              <a:t>1,000 QPS  →  50,000 QPS</a:t>
-            </a:r>
-          </a:p>
           <a:p>
             <a:pPr algn="l">
               <a:spcAft>
@@ -18382,136 +18090,28 @@
               </a:spcAft>
             </a:pPr>
             <a:r>
-              <a:rPr sz="1900" b="1">
-                <a:solidFill>
-                  <a:srgbClr val="0F172A"/>
-                </a:solidFill>
-                <a:latin typeface="PingFang TC"/>
-                <a:ea typeface="PingFang TC"/>
-              </a:rPr>
-              <a:t>當大型客戶上線，</a:t>
-            </a:r>
-          </a:p>
-          <a:p>
-            <a:pPr algn="l">
-              <a:spcAft>
-                <a:spcPts val="400"/>
-              </a:spcAft>
-            </a:pPr>
-            <a:r>
-              <a:rPr sz="1900" b="1">
-                <a:solidFill>
-                  <a:srgbClr val="0F172A"/>
-                </a:solidFill>
-                <a:latin typeface="PingFang TC"/>
-                <a:ea typeface="PingFang TC"/>
-              </a:rPr>
-              <a:t>流量瞬間暴增 50 倍，</a:t>
-            </a:r>
-          </a:p>
-          <a:p>
-            <a:pPr algn="l">
-              <a:spcAft>
-                <a:spcPts val="400"/>
-              </a:spcAft>
-            </a:pPr>
-            <a:r>
-              <a:rPr sz="1900" b="1">
-                <a:solidFill>
-                  <a:srgbClr val="0F172A"/>
-                </a:solidFill>
-                <a:latin typeface="PingFang TC"/>
-                <a:ea typeface="PingFang TC"/>
-              </a:rPr>
-              <a:t>這個架構哪會先崩潰？</a:t>
-            </a:r>
-          </a:p>
-        </p:txBody>
-      </p:sp>
-      <p:sp>
-        <p:nvSpPr>
-          <p:cNvPr id="5" name="TextBox 4"/>
-          <p:cNvSpPr txBox="1"/>
-          <p:nvPr/>
-        </p:nvSpPr>
-        <p:spPr>
-          <a:xfrm>
-            <a:off x="6400800" y="2057400"/>
-            <a:ext cx="5303520" cy="2194560"/>
-          </a:xfrm>
-          <a:prstGeom prst="rect">
-            <a:avLst/>
-          </a:prstGeom>
-          <a:noFill/>
-        </p:spPr>
-        <p:txBody>
-          <a:bodyPr wrap="square">
-            <a:spAutoFit/>
-          </a:bodyPr>
-          <a:lstStyle/>
-          <a:p>
-            <a:pPr>
-              <a:spcAft>
-                <a:spcPts val="1400"/>
-              </a:spcAft>
-            </a:pPr>
-            <a:r>
-              <a:rPr sz="1600" b="0">
-                <a:solidFill>
-                  <a:srgbClr val="0F172A"/>
-                </a:solidFill>
-                <a:latin typeface="PingFang TC"/>
-                <a:ea typeface="PingFang TC"/>
-              </a:rPr>
-              <a:t>•  流量暴增 Scenario 推演（Server vs DB vs Network）</a:t>
-            </a:r>
-          </a:p>
-          <a:p>
-            <a:pPr>
-              <a:spcAft>
-                <a:spcPts val="1400"/>
-              </a:spcAft>
-            </a:pPr>
-            <a:r>
-              <a:rPr sz="1600" b="0">
-                <a:solidFill>
-                  <a:srgbClr val="0F172A"/>
-                </a:solidFill>
-                <a:latin typeface="PingFang TC"/>
-                <a:ea typeface="PingFang TC"/>
-              </a:rPr>
-              <a:t>•  Event-Driven Analytics Pipeline 架構</a:t>
-            </a:r>
-          </a:p>
-          <a:p>
-            <a:pPr>
-              <a:spcAft>
-                <a:spcPts val="1400"/>
-              </a:spcAft>
-            </a:pPr>
-            <a:r>
-              <a:rPr sz="1600" b="0">
-                <a:solidFill>
-                  <a:srgbClr val="0F172A"/>
-                </a:solidFill>
-                <a:latin typeface="PingFang TC"/>
-                <a:ea typeface="PingFang TC"/>
-              </a:rPr>
-              <a:t>•  System Design 面試實戰答題框架</a:t>
-            </a:r>
-          </a:p>
-        </p:txBody>
-      </p:sp>
-      <p:sp>
-        <p:nvSpPr>
-          <p:cNvPr id="6" name="Rounded Rectangle 5"/>
+              <a:rPr sz="1400" b="0">
+                <a:solidFill>
+                  <a:srgbClr val="64748B"/>
+                </a:solidFill>
+                <a:latin typeface="PingFang TC"/>
+                <a:ea typeface="PingFang TC"/>
+              </a:rPr>
+              <a:t>快速掃過，建立全貌 — 下週 Deep Dive 才是主菜</a:t>
+            </a:r>
+          </a:p>
+        </p:txBody>
+      </p:sp>
+      <p:sp>
+        <p:nvSpPr>
+          <p:cNvPr id="5" name="Rounded Rectangle 4"/>
           <p:cNvSpPr/>
           <p:nvPr/>
         </p:nvSpPr>
         <p:spPr>
           <a:xfrm>
-            <a:off x="6400800" y="4343400"/>
-            <a:ext cx="5303520" cy="1051560"/>
+            <a:off x="548640" y="1965960"/>
+            <a:ext cx="3611880" cy="1600200"/>
           </a:xfrm>
           <a:prstGeom prst="roundRect">
             <a:avLst/>
@@ -18550,14 +18150,455 @@
       </p:sp>
       <p:sp>
         <p:nvSpPr>
-          <p:cNvPr id="7" name="Rectangle 6"/>
+          <p:cNvPr id="6" name="Rectangle 5"/>
           <p:cNvSpPr/>
           <p:nvPr/>
         </p:nvSpPr>
         <p:spPr>
           <a:xfrm>
-            <a:off x="6400800" y="4343400"/>
-            <a:ext cx="82296" cy="1051560"/>
+            <a:off x="548640" y="1965960"/>
+            <a:ext cx="82296" cy="1600200"/>
+          </a:xfrm>
+          <a:prstGeom prst="rect">
+            <a:avLst/>
+          </a:prstGeom>
+          <a:solidFill>
+            <a:srgbClr val="D97706"/>
+          </a:solidFill>
+          <a:ln>
+            <a:noFill/>
+          </a:ln>
+          <a:effectLst/>
+        </p:spPr>
+        <p:style>
+          <a:lnRef idx="1">
+            <a:schemeClr val="accent1"/>
+          </a:lnRef>
+          <a:fillRef idx="3">
+            <a:schemeClr val="accent1"/>
+          </a:fillRef>
+          <a:effectRef idx="2">
+            <a:schemeClr val="accent1"/>
+          </a:effectRef>
+          <a:fontRef idx="minor">
+            <a:schemeClr val="lt1"/>
+          </a:fontRef>
+        </p:style>
+        <p:txBody>
+          <a:bodyPr rtlCol="0" anchor="ctr"/>
+          <a:lstStyle/>
+          <a:p>
+            <a:pPr algn="ctr"/>
+          </a:p>
+        </p:txBody>
+      </p:sp>
+      <p:sp>
+        <p:nvSpPr>
+          <p:cNvPr id="7" name="TextBox 6"/>
+          <p:cNvSpPr txBox="1"/>
+          <p:nvPr/>
+        </p:nvSpPr>
+        <p:spPr>
+          <a:xfrm>
+            <a:off x="822960" y="2148840"/>
+            <a:ext cx="3154680" cy="1325880"/>
+          </a:xfrm>
+          <a:prstGeom prst="rect">
+            <a:avLst/>
+          </a:prstGeom>
+          <a:noFill/>
+        </p:spPr>
+        <p:txBody>
+          <a:bodyPr wrap="square" anchor="t">
+            <a:spAutoFit/>
+          </a:bodyPr>
+          <a:lstStyle/>
+          <a:p>
+            <a:pPr algn="l">
+              <a:spcAft>
+                <a:spcPts val="800"/>
+              </a:spcAft>
+            </a:pPr>
+            <a:r>
+              <a:rPr sz="1600" b="1">
+                <a:solidFill>
+                  <a:srgbClr val="0F172A"/>
+                </a:solidFill>
+                <a:latin typeface="PingFang TC"/>
+                <a:ea typeface="PingFang TC"/>
+              </a:rPr>
+              <a:t>[Error Handling]</a:t>
+            </a:r>
+          </a:p>
+          <a:p>
+            <a:pPr algn="l">
+              <a:spcAft>
+                <a:spcPts val="400"/>
+              </a:spcAft>
+            </a:pPr>
+            <a:r>
+              <a:rPr sz="1300" b="0">
+                <a:solidFill>
+                  <a:srgbClr val="64748B"/>
+                </a:solidFill>
+                <a:latin typeface="PingFang TC"/>
+                <a:ea typeface="PingFang TC"/>
+              </a:rPr>
+              <a:t>遇到不合法輸入直接 Crash。</a:t>
+            </a:r>
+          </a:p>
+        </p:txBody>
+      </p:sp>
+      <p:sp>
+        <p:nvSpPr>
+          <p:cNvPr id="8" name="Rounded Rectangle 7"/>
+          <p:cNvSpPr/>
+          <p:nvPr/>
+        </p:nvSpPr>
+        <p:spPr>
+          <a:xfrm>
+            <a:off x="4407408" y="1965960"/>
+            <a:ext cx="3611880" cy="1600200"/>
+          </a:xfrm>
+          <a:prstGeom prst="roundRect">
+            <a:avLst/>
+          </a:prstGeom>
+          <a:solidFill>
+            <a:srgbClr val="F1F5F9"/>
+          </a:solidFill>
+          <a:ln>
+            <a:solidFill>
+              <a:srgbClr val="F1F5F9"/>
+            </a:solidFill>
+          </a:ln>
+          <a:effectLst/>
+        </p:spPr>
+        <p:style>
+          <a:lnRef idx="1">
+            <a:schemeClr val="accent1"/>
+          </a:lnRef>
+          <a:fillRef idx="3">
+            <a:schemeClr val="accent1"/>
+          </a:fillRef>
+          <a:effectRef idx="2">
+            <a:schemeClr val="accent1"/>
+          </a:effectRef>
+          <a:fontRef idx="minor">
+            <a:schemeClr val="lt1"/>
+          </a:fontRef>
+        </p:style>
+        <p:txBody>
+          <a:bodyPr rtlCol="0" anchor="ctr"/>
+          <a:lstStyle/>
+          <a:p>
+            <a:pPr algn="ctr"/>
+          </a:p>
+        </p:txBody>
+      </p:sp>
+      <p:sp>
+        <p:nvSpPr>
+          <p:cNvPr id="9" name="Rectangle 8"/>
+          <p:cNvSpPr/>
+          <p:nvPr/>
+        </p:nvSpPr>
+        <p:spPr>
+          <a:xfrm>
+            <a:off x="4407408" y="1965960"/>
+            <a:ext cx="82296" cy="1600200"/>
+          </a:xfrm>
+          <a:prstGeom prst="rect">
+            <a:avLst/>
+          </a:prstGeom>
+          <a:solidFill>
+            <a:srgbClr val="D97706"/>
+          </a:solidFill>
+          <a:ln>
+            <a:noFill/>
+          </a:ln>
+          <a:effectLst/>
+        </p:spPr>
+        <p:style>
+          <a:lnRef idx="1">
+            <a:schemeClr val="accent1"/>
+          </a:lnRef>
+          <a:fillRef idx="3">
+            <a:schemeClr val="accent1"/>
+          </a:fillRef>
+          <a:effectRef idx="2">
+            <a:schemeClr val="accent1"/>
+          </a:effectRef>
+          <a:fontRef idx="minor">
+            <a:schemeClr val="lt1"/>
+          </a:fontRef>
+        </p:style>
+        <p:txBody>
+          <a:bodyPr rtlCol="0" anchor="ctr"/>
+          <a:lstStyle/>
+          <a:p>
+            <a:pPr algn="ctr"/>
+          </a:p>
+        </p:txBody>
+      </p:sp>
+      <p:sp>
+        <p:nvSpPr>
+          <p:cNvPr id="10" name="TextBox 9"/>
+          <p:cNvSpPr txBox="1"/>
+          <p:nvPr/>
+        </p:nvSpPr>
+        <p:spPr>
+          <a:xfrm>
+            <a:off x="4681728" y="2148840"/>
+            <a:ext cx="3154680" cy="1325880"/>
+          </a:xfrm>
+          <a:prstGeom prst="rect">
+            <a:avLst/>
+          </a:prstGeom>
+          <a:noFill/>
+        </p:spPr>
+        <p:txBody>
+          <a:bodyPr wrap="square" anchor="t">
+            <a:spAutoFit/>
+          </a:bodyPr>
+          <a:lstStyle/>
+          <a:p>
+            <a:pPr algn="l">
+              <a:spcAft>
+                <a:spcPts val="800"/>
+              </a:spcAft>
+            </a:pPr>
+            <a:r>
+              <a:rPr sz="1600" b="1">
+                <a:solidFill>
+                  <a:srgbClr val="0F172A"/>
+                </a:solidFill>
+                <a:latin typeface="PingFang TC"/>
+                <a:ea typeface="PingFang TC"/>
+              </a:rPr>
+              <a:t>[Rate Limiting]</a:t>
+            </a:r>
+          </a:p>
+          <a:p>
+            <a:pPr algn="l">
+              <a:spcAft>
+                <a:spcPts val="400"/>
+              </a:spcAft>
+            </a:pPr>
+            <a:r>
+              <a:rPr sz="1300" b="0">
+                <a:solidFill>
+                  <a:srgbClr val="64748B"/>
+                </a:solidFill>
+                <a:latin typeface="PingFang TC"/>
+                <a:ea typeface="PingFang TC"/>
+              </a:rPr>
+              <a:t>毫無防護，極易被 Script 惡意灌爆 API。</a:t>
+            </a:r>
+          </a:p>
+        </p:txBody>
+      </p:sp>
+      <p:sp>
+        <p:nvSpPr>
+          <p:cNvPr id="11" name="Rounded Rectangle 10"/>
+          <p:cNvSpPr/>
+          <p:nvPr/>
+        </p:nvSpPr>
+        <p:spPr>
+          <a:xfrm>
+            <a:off x="8266176" y="1965960"/>
+            <a:ext cx="3611880" cy="1600200"/>
+          </a:xfrm>
+          <a:prstGeom prst="roundRect">
+            <a:avLst/>
+          </a:prstGeom>
+          <a:solidFill>
+            <a:srgbClr val="F1F5F9"/>
+          </a:solidFill>
+          <a:ln>
+            <a:solidFill>
+              <a:srgbClr val="F1F5F9"/>
+            </a:solidFill>
+          </a:ln>
+          <a:effectLst/>
+        </p:spPr>
+        <p:style>
+          <a:lnRef idx="1">
+            <a:schemeClr val="accent1"/>
+          </a:lnRef>
+          <a:fillRef idx="3">
+            <a:schemeClr val="accent1"/>
+          </a:fillRef>
+          <a:effectRef idx="2">
+            <a:schemeClr val="accent1"/>
+          </a:effectRef>
+          <a:fontRef idx="minor">
+            <a:schemeClr val="lt1"/>
+          </a:fontRef>
+        </p:style>
+        <p:txBody>
+          <a:bodyPr rtlCol="0" anchor="ctr"/>
+          <a:lstStyle/>
+          <a:p>
+            <a:pPr algn="ctr"/>
+          </a:p>
+        </p:txBody>
+      </p:sp>
+      <p:sp>
+        <p:nvSpPr>
+          <p:cNvPr id="12" name="Rectangle 11"/>
+          <p:cNvSpPr/>
+          <p:nvPr/>
+        </p:nvSpPr>
+        <p:spPr>
+          <a:xfrm>
+            <a:off x="8266176" y="1965960"/>
+            <a:ext cx="82296" cy="1600200"/>
+          </a:xfrm>
+          <a:prstGeom prst="rect">
+            <a:avLst/>
+          </a:prstGeom>
+          <a:solidFill>
+            <a:srgbClr val="D97706"/>
+          </a:solidFill>
+          <a:ln>
+            <a:noFill/>
+          </a:ln>
+          <a:effectLst/>
+        </p:spPr>
+        <p:style>
+          <a:lnRef idx="1">
+            <a:schemeClr val="accent1"/>
+          </a:lnRef>
+          <a:fillRef idx="3">
+            <a:schemeClr val="accent1"/>
+          </a:fillRef>
+          <a:effectRef idx="2">
+            <a:schemeClr val="accent1"/>
+          </a:effectRef>
+          <a:fontRef idx="minor">
+            <a:schemeClr val="lt1"/>
+          </a:fontRef>
+        </p:style>
+        <p:txBody>
+          <a:bodyPr rtlCol="0" anchor="ctr"/>
+          <a:lstStyle/>
+          <a:p>
+            <a:pPr algn="ctr"/>
+          </a:p>
+        </p:txBody>
+      </p:sp>
+      <p:sp>
+        <p:nvSpPr>
+          <p:cNvPr id="13" name="TextBox 12"/>
+          <p:cNvSpPr txBox="1"/>
+          <p:nvPr/>
+        </p:nvSpPr>
+        <p:spPr>
+          <a:xfrm>
+            <a:off x="8540496" y="2148840"/>
+            <a:ext cx="3154680" cy="1325880"/>
+          </a:xfrm>
+          <a:prstGeom prst="rect">
+            <a:avLst/>
+          </a:prstGeom>
+          <a:noFill/>
+        </p:spPr>
+        <p:txBody>
+          <a:bodyPr wrap="square" anchor="t">
+            <a:spAutoFit/>
+          </a:bodyPr>
+          <a:lstStyle/>
+          <a:p>
+            <a:pPr algn="l">
+              <a:spcAft>
+                <a:spcPts val="800"/>
+              </a:spcAft>
+            </a:pPr>
+            <a:r>
+              <a:rPr sz="1600" b="1">
+                <a:solidFill>
+                  <a:srgbClr val="0F172A"/>
+                </a:solidFill>
+                <a:latin typeface="PingFang TC"/>
+                <a:ea typeface="PingFang TC"/>
+              </a:rPr>
+              <a:t>[Auth &amp; Isolation]</a:t>
+            </a:r>
+          </a:p>
+          <a:p>
+            <a:pPr algn="l">
+              <a:spcAft>
+                <a:spcPts val="400"/>
+              </a:spcAft>
+            </a:pPr>
+            <a:r>
+              <a:rPr sz="1300" b="0">
+                <a:solidFill>
+                  <a:srgbClr val="64748B"/>
+                </a:solidFill>
+                <a:latin typeface="PingFang TC"/>
+                <a:ea typeface="PingFang TC"/>
+              </a:rPr>
+              <a:t>缺乏多租戶概念，資料全公開。</a:t>
+            </a:r>
+          </a:p>
+        </p:txBody>
+      </p:sp>
+      <p:sp>
+        <p:nvSpPr>
+          <p:cNvPr id="14" name="Rounded Rectangle 13"/>
+          <p:cNvSpPr/>
+          <p:nvPr/>
+        </p:nvSpPr>
+        <p:spPr>
+          <a:xfrm>
+            <a:off x="548640" y="3840480"/>
+            <a:ext cx="3611880" cy="1600200"/>
+          </a:xfrm>
+          <a:prstGeom prst="roundRect">
+            <a:avLst/>
+          </a:prstGeom>
+          <a:solidFill>
+            <a:srgbClr val="F1F5F9"/>
+          </a:solidFill>
+          <a:ln>
+            <a:solidFill>
+              <a:srgbClr val="F1F5F9"/>
+            </a:solidFill>
+          </a:ln>
+          <a:effectLst/>
+        </p:spPr>
+        <p:style>
+          <a:lnRef idx="1">
+            <a:schemeClr val="accent1"/>
+          </a:lnRef>
+          <a:fillRef idx="3">
+            <a:schemeClr val="accent1"/>
+          </a:fillRef>
+          <a:effectRef idx="2">
+            <a:schemeClr val="accent1"/>
+          </a:effectRef>
+          <a:fontRef idx="minor">
+            <a:schemeClr val="lt1"/>
+          </a:fontRef>
+        </p:style>
+        <p:txBody>
+          <a:bodyPr rtlCol="0" anchor="ctr"/>
+          <a:lstStyle/>
+          <a:p>
+            <a:pPr algn="ctr"/>
+          </a:p>
+        </p:txBody>
+      </p:sp>
+      <p:sp>
+        <p:nvSpPr>
+          <p:cNvPr id="15" name="Rectangle 14"/>
+          <p:cNvSpPr/>
+          <p:nvPr/>
+        </p:nvSpPr>
+        <p:spPr>
+          <a:xfrm>
+            <a:off x="548640" y="3840480"/>
+            <a:ext cx="82296" cy="1600200"/>
           </a:xfrm>
           <a:prstGeom prst="rect">
             <a:avLst/>
@@ -18594,14 +18635,14 @@
       </p:sp>
       <p:sp>
         <p:nvSpPr>
-          <p:cNvPr id="8" name="TextBox 7"/>
+          <p:cNvPr id="16" name="TextBox 15"/>
           <p:cNvSpPr txBox="1"/>
           <p:nvPr/>
         </p:nvSpPr>
         <p:spPr>
           <a:xfrm>
-            <a:off x="6675120" y="4526280"/>
-            <a:ext cx="4846320" cy="822960"/>
+            <a:off x="822960" y="4023360"/>
+            <a:ext cx="3154680" cy="1325880"/>
           </a:xfrm>
           <a:prstGeom prst="rect">
             <a:avLst/>
@@ -18616,18 +18657,18 @@
           <a:p>
             <a:pPr algn="l">
               <a:spcAft>
-                <a:spcPts val="600"/>
+                <a:spcPts val="800"/>
               </a:spcAft>
             </a:pPr>
             <a:r>
-              <a:rPr sz="1500" b="1">
+              <a:rPr sz="1600" b="1">
                 <a:solidFill>
                   <a:srgbClr val="0F172A"/>
                 </a:solidFill>
                 <a:latin typeface="PingFang TC"/>
                 <a:ea typeface="PingFang TC"/>
               </a:rPr>
-              <a:t>課前準備</a:t>
+              <a:t>[Monitoring]</a:t>
             </a:r>
           </a:p>
           <a:p>
@@ -18637,14 +18678,309 @@
               </a:spcAft>
             </a:pPr>
             <a:r>
-              <a:rPr sz="1400" b="0">
+              <a:rPr sz="1300" b="0">
                 <a:solidFill>
                   <a:srgbClr val="64748B"/>
                 </a:solidFill>
                 <a:latin typeface="PingFang TC"/>
                 <a:ea typeface="PingFang TC"/>
               </a:rPr>
-              <a:t>複習教材 Deep Dive 章節</a:t>
+              <a:t>服務掛了完全沒有 Alerting，處於盲飛狀態。</a:t>
+            </a:r>
+          </a:p>
+        </p:txBody>
+      </p:sp>
+      <p:sp>
+        <p:nvSpPr>
+          <p:cNvPr id="17" name="Rounded Rectangle 16"/>
+          <p:cNvSpPr/>
+          <p:nvPr/>
+        </p:nvSpPr>
+        <p:spPr>
+          <a:xfrm>
+            <a:off x="4407408" y="3840480"/>
+            <a:ext cx="3611880" cy="1600200"/>
+          </a:xfrm>
+          <a:prstGeom prst="roundRect">
+            <a:avLst/>
+          </a:prstGeom>
+          <a:solidFill>
+            <a:srgbClr val="F1F5F9"/>
+          </a:solidFill>
+          <a:ln>
+            <a:solidFill>
+              <a:srgbClr val="F1F5F9"/>
+            </a:solidFill>
+          </a:ln>
+          <a:effectLst/>
+        </p:spPr>
+        <p:style>
+          <a:lnRef idx="1">
+            <a:schemeClr val="accent1"/>
+          </a:lnRef>
+          <a:fillRef idx="3">
+            <a:schemeClr val="accent1"/>
+          </a:fillRef>
+          <a:effectRef idx="2">
+            <a:schemeClr val="accent1"/>
+          </a:effectRef>
+          <a:fontRef idx="minor">
+            <a:schemeClr val="lt1"/>
+          </a:fontRef>
+        </p:style>
+        <p:txBody>
+          <a:bodyPr rtlCol="0" anchor="ctr"/>
+          <a:lstStyle/>
+          <a:p>
+            <a:pPr algn="ctr"/>
+          </a:p>
+        </p:txBody>
+      </p:sp>
+      <p:sp>
+        <p:nvSpPr>
+          <p:cNvPr id="18" name="Rectangle 17"/>
+          <p:cNvSpPr/>
+          <p:nvPr/>
+        </p:nvSpPr>
+        <p:spPr>
+          <a:xfrm>
+            <a:off x="4407408" y="3840480"/>
+            <a:ext cx="82296" cy="1600200"/>
+          </a:xfrm>
+          <a:prstGeom prst="rect">
+            <a:avLst/>
+          </a:prstGeom>
+          <a:solidFill>
+            <a:srgbClr val="0EA5E9"/>
+          </a:solidFill>
+          <a:ln>
+            <a:noFill/>
+          </a:ln>
+          <a:effectLst/>
+        </p:spPr>
+        <p:style>
+          <a:lnRef idx="1">
+            <a:schemeClr val="accent1"/>
+          </a:lnRef>
+          <a:fillRef idx="3">
+            <a:schemeClr val="accent1"/>
+          </a:fillRef>
+          <a:effectRef idx="2">
+            <a:schemeClr val="accent1"/>
+          </a:effectRef>
+          <a:fontRef idx="minor">
+            <a:schemeClr val="lt1"/>
+          </a:fontRef>
+        </p:style>
+        <p:txBody>
+          <a:bodyPr rtlCol="0" anchor="ctr"/>
+          <a:lstStyle/>
+          <a:p>
+            <a:pPr algn="ctr"/>
+          </a:p>
+        </p:txBody>
+      </p:sp>
+      <p:sp>
+        <p:nvSpPr>
+          <p:cNvPr id="19" name="TextBox 18"/>
+          <p:cNvSpPr txBox="1"/>
+          <p:nvPr/>
+        </p:nvSpPr>
+        <p:spPr>
+          <a:xfrm>
+            <a:off x="4681728" y="4023360"/>
+            <a:ext cx="3154680" cy="1325880"/>
+          </a:xfrm>
+          <a:prstGeom prst="rect">
+            <a:avLst/>
+          </a:prstGeom>
+          <a:noFill/>
+        </p:spPr>
+        <p:txBody>
+          <a:bodyPr wrap="square" anchor="t">
+            <a:spAutoFit/>
+          </a:bodyPr>
+          <a:lstStyle/>
+          <a:p>
+            <a:pPr algn="l">
+              <a:spcAft>
+                <a:spcPts val="800"/>
+              </a:spcAft>
+            </a:pPr>
+            <a:r>
+              <a:rPr sz="1600" b="1">
+                <a:solidFill>
+                  <a:srgbClr val="0F172A"/>
+                </a:solidFill>
+                <a:latin typeface="PingFang TC"/>
+                <a:ea typeface="PingFang TC"/>
+              </a:rPr>
+              <a:t>[Data Cleanup]</a:t>
+            </a:r>
+          </a:p>
+          <a:p>
+            <a:pPr algn="l">
+              <a:spcAft>
+                <a:spcPts val="400"/>
+              </a:spcAft>
+            </a:pPr>
+            <a:r>
+              <a:rPr sz="1300" b="0">
+                <a:solidFill>
+                  <a:srgbClr val="64748B"/>
+                </a:solidFill>
+                <a:latin typeface="PingFang TC"/>
+                <a:ea typeface="PingFang TC"/>
+              </a:rPr>
+              <a:t>過期資料永不刪除，一年後 DB 將面臨嚴重 Bloat。</a:t>
+            </a:r>
+          </a:p>
+        </p:txBody>
+      </p:sp>
+      <p:sp>
+        <p:nvSpPr>
+          <p:cNvPr id="20" name="Rounded Rectangle 19"/>
+          <p:cNvSpPr/>
+          <p:nvPr/>
+        </p:nvSpPr>
+        <p:spPr>
+          <a:xfrm>
+            <a:off x="8266176" y="3840480"/>
+            <a:ext cx="3611880" cy="1600200"/>
+          </a:xfrm>
+          <a:prstGeom prst="roundRect">
+            <a:avLst/>
+          </a:prstGeom>
+          <a:solidFill>
+            <a:srgbClr val="F1F5F9"/>
+          </a:solidFill>
+          <a:ln>
+            <a:solidFill>
+              <a:srgbClr val="F1F5F9"/>
+            </a:solidFill>
+          </a:ln>
+          <a:effectLst/>
+        </p:spPr>
+        <p:style>
+          <a:lnRef idx="1">
+            <a:schemeClr val="accent1"/>
+          </a:lnRef>
+          <a:fillRef idx="3">
+            <a:schemeClr val="accent1"/>
+          </a:fillRef>
+          <a:effectRef idx="2">
+            <a:schemeClr val="accent1"/>
+          </a:effectRef>
+          <a:fontRef idx="minor">
+            <a:schemeClr val="lt1"/>
+          </a:fontRef>
+        </p:style>
+        <p:txBody>
+          <a:bodyPr rtlCol="0" anchor="ctr"/>
+          <a:lstStyle/>
+          <a:p>
+            <a:pPr algn="ctr"/>
+          </a:p>
+        </p:txBody>
+      </p:sp>
+      <p:sp>
+        <p:nvSpPr>
+          <p:cNvPr id="21" name="Rectangle 20"/>
+          <p:cNvSpPr/>
+          <p:nvPr/>
+        </p:nvSpPr>
+        <p:spPr>
+          <a:xfrm>
+            <a:off x="8266176" y="3840480"/>
+            <a:ext cx="82296" cy="1600200"/>
+          </a:xfrm>
+          <a:prstGeom prst="rect">
+            <a:avLst/>
+          </a:prstGeom>
+          <a:solidFill>
+            <a:srgbClr val="0EA5E9"/>
+          </a:solidFill>
+          <a:ln>
+            <a:noFill/>
+          </a:ln>
+          <a:effectLst/>
+        </p:spPr>
+        <p:style>
+          <a:lnRef idx="1">
+            <a:schemeClr val="accent1"/>
+          </a:lnRef>
+          <a:fillRef idx="3">
+            <a:schemeClr val="accent1"/>
+          </a:fillRef>
+          <a:effectRef idx="2">
+            <a:schemeClr val="accent1"/>
+          </a:effectRef>
+          <a:fontRef idx="minor">
+            <a:schemeClr val="lt1"/>
+          </a:fontRef>
+        </p:style>
+        <p:txBody>
+          <a:bodyPr rtlCol="0" anchor="ctr"/>
+          <a:lstStyle/>
+          <a:p>
+            <a:pPr algn="ctr"/>
+          </a:p>
+        </p:txBody>
+      </p:sp>
+      <p:sp>
+        <p:nvSpPr>
+          <p:cNvPr id="22" name="TextBox 21"/>
+          <p:cNvSpPr txBox="1"/>
+          <p:nvPr/>
+        </p:nvSpPr>
+        <p:spPr>
+          <a:xfrm>
+            <a:off x="8540496" y="4023360"/>
+            <a:ext cx="3154680" cy="1325880"/>
+          </a:xfrm>
+          <a:prstGeom prst="rect">
+            <a:avLst/>
+          </a:prstGeom>
+          <a:noFill/>
+        </p:spPr>
+        <p:txBody>
+          <a:bodyPr wrap="square" anchor="t">
+            <a:spAutoFit/>
+          </a:bodyPr>
+          <a:lstStyle/>
+          <a:p>
+            <a:pPr algn="l">
+              <a:spcAft>
+                <a:spcPts val="800"/>
+              </a:spcAft>
+            </a:pPr>
+            <a:r>
+              <a:rPr sz="1600" b="1">
+                <a:solidFill>
+                  <a:srgbClr val="0F172A"/>
+                </a:solidFill>
+                <a:latin typeface="PingFang TC"/>
+                <a:ea typeface="PingFang TC"/>
+              </a:rPr>
+              <a:t>[Caching / CDN]</a:t>
+            </a:r>
+          </a:p>
+          <a:p>
+            <a:pPr algn="l">
+              <a:spcAft>
+                <a:spcPts val="400"/>
+              </a:spcAft>
+            </a:pPr>
+            <a:r>
+              <a:rPr sz="1300" b="0">
+                <a:solidFill>
+                  <a:srgbClr val="64748B"/>
+                </a:solidFill>
+                <a:latin typeface="PingFang TC"/>
+                <a:ea typeface="PingFang TC"/>
+              </a:rPr>
+              <a:t>每次轉址都直擊 DB，流量一來直接癱瘓。
+→ 下週 Deep Dive 展開</a:t>
             </a:r>
           </a:p>
         </p:txBody>
@@ -19513,6 +19849,437 @@
 </p:sld>
 </file>
 
+<file path=ppt/slides/slide30.xml><?xml version="1.0" encoding="utf-8"?>
+<p:sld xmlns:a="http://schemas.openxmlformats.org/drawingml/2006/main" xmlns:p="http://schemas.openxmlformats.org/presentationml/2006/main" xmlns:r="http://schemas.openxmlformats.org/officeDocument/2006/relationships">
+  <p:cSld>
+    <p:spTree>
+      <p:nvGrpSpPr>
+        <p:cNvPr id="1" name=""/>
+        <p:cNvGrpSpPr/>
+        <p:nvPr/>
+      </p:nvGrpSpPr>
+      <p:grpSpPr/>
+      <p:sp>
+        <p:nvSpPr>
+          <p:cNvPr id="2" name="Rectangle 1"/>
+          <p:cNvSpPr/>
+          <p:nvPr/>
+        </p:nvSpPr>
+        <p:spPr>
+          <a:xfrm>
+            <a:off x="0" y="0"/>
+            <a:ext cx="164592" cy="6858000"/>
+          </a:xfrm>
+          <a:prstGeom prst="rect">
+            <a:avLst/>
+          </a:prstGeom>
+          <a:solidFill>
+            <a:srgbClr val="2563EB"/>
+          </a:solidFill>
+          <a:ln>
+            <a:noFill/>
+          </a:ln>
+          <a:effectLst/>
+        </p:spPr>
+        <p:style>
+          <a:lnRef idx="1">
+            <a:schemeClr val="accent1"/>
+          </a:lnRef>
+          <a:fillRef idx="3">
+            <a:schemeClr val="accent1"/>
+          </a:fillRef>
+          <a:effectRef idx="2">
+            <a:schemeClr val="accent1"/>
+          </a:effectRef>
+          <a:fontRef idx="minor">
+            <a:schemeClr val="lt1"/>
+          </a:fontRef>
+        </p:style>
+        <p:txBody>
+          <a:bodyPr rtlCol="0" anchor="ctr"/>
+          <a:lstStyle/>
+          <a:p>
+            <a:pPr algn="ctr"/>
+          </a:p>
+        </p:txBody>
+      </p:sp>
+      <p:sp>
+        <p:nvSpPr>
+          <p:cNvPr id="3" name="TextBox 2"/>
+          <p:cNvSpPr txBox="1"/>
+          <p:nvPr/>
+        </p:nvSpPr>
+        <p:spPr>
+          <a:xfrm>
+            <a:off x="502920" y="320040"/>
+            <a:ext cx="10972800" cy="1005840"/>
+          </a:xfrm>
+          <a:prstGeom prst="rect">
+            <a:avLst/>
+          </a:prstGeom>
+          <a:noFill/>
+        </p:spPr>
+        <p:txBody>
+          <a:bodyPr wrap="square" anchor="t">
+            <a:spAutoFit/>
+          </a:bodyPr>
+          <a:lstStyle/>
+          <a:p>
+            <a:pPr algn="l">
+              <a:spcAft>
+                <a:spcPts val="200"/>
+              </a:spcAft>
+            </a:pPr>
+            <a:r>
+              <a:rPr sz="1300" b="1">
+                <a:solidFill>
+                  <a:srgbClr val="2563EB"/>
+                </a:solidFill>
+                <a:latin typeface="PingFang TC"/>
+                <a:ea typeface="PingFang TC"/>
+              </a:rPr>
+              <a:t>下週預告 · DEEP DIVE</a:t>
+            </a:r>
+          </a:p>
+          <a:p>
+            <a:pPr algn="l">
+              <a:spcAft>
+                <a:spcPts val="400"/>
+              </a:spcAft>
+            </a:pPr>
+            <a:r>
+              <a:rPr sz="3000" b="1">
+                <a:solidFill>
+                  <a:srgbClr val="0F172A"/>
+                </a:solidFill>
+                <a:latin typeface="PingFang TC"/>
+                <a:ea typeface="PingFang TC"/>
+              </a:rPr>
+              <a:t>壓力測試與極限擴展 (Deep Dive)</a:t>
+            </a:r>
+          </a:p>
+        </p:txBody>
+      </p:sp>
+      <p:sp>
+        <p:nvSpPr>
+          <p:cNvPr id="4" name="TextBox 3"/>
+          <p:cNvSpPr txBox="1"/>
+          <p:nvPr/>
+        </p:nvSpPr>
+        <p:spPr>
+          <a:xfrm>
+            <a:off x="548640" y="2011680"/>
+            <a:ext cx="5486400" cy="2926080"/>
+          </a:xfrm>
+          <a:prstGeom prst="rect">
+            <a:avLst/>
+          </a:prstGeom>
+          <a:noFill/>
+        </p:spPr>
+        <p:txBody>
+          <a:bodyPr wrap="square" anchor="t">
+            <a:spAutoFit/>
+          </a:bodyPr>
+          <a:lstStyle/>
+          <a:p>
+            <a:pPr algn="l">
+              <a:spcAft>
+                <a:spcPts val="1600"/>
+              </a:spcAft>
+            </a:pPr>
+            <a:r>
+              <a:rPr sz="2600" b="1">
+                <a:solidFill>
+                  <a:srgbClr val="2563EB"/>
+                </a:solidFill>
+                <a:latin typeface="PingFang TC"/>
+                <a:ea typeface="PingFang TC"/>
+              </a:rPr>
+              <a:t>1,000 QPS  →  50,000 QPS</a:t>
+            </a:r>
+          </a:p>
+          <a:p>
+            <a:pPr algn="l">
+              <a:spcAft>
+                <a:spcPts val="400"/>
+              </a:spcAft>
+            </a:pPr>
+            <a:r>
+              <a:rPr sz="1900" b="1">
+                <a:solidFill>
+                  <a:srgbClr val="0F172A"/>
+                </a:solidFill>
+                <a:latin typeface="PingFang TC"/>
+                <a:ea typeface="PingFang TC"/>
+              </a:rPr>
+              <a:t>當大型客戶上線，</a:t>
+            </a:r>
+          </a:p>
+          <a:p>
+            <a:pPr algn="l">
+              <a:spcAft>
+                <a:spcPts val="400"/>
+              </a:spcAft>
+            </a:pPr>
+            <a:r>
+              <a:rPr sz="1900" b="1">
+                <a:solidFill>
+                  <a:srgbClr val="0F172A"/>
+                </a:solidFill>
+                <a:latin typeface="PingFang TC"/>
+                <a:ea typeface="PingFang TC"/>
+              </a:rPr>
+              <a:t>流量瞬間暴增 50 倍，</a:t>
+            </a:r>
+          </a:p>
+          <a:p>
+            <a:pPr algn="l">
+              <a:spcAft>
+                <a:spcPts val="400"/>
+              </a:spcAft>
+            </a:pPr>
+            <a:r>
+              <a:rPr sz="1900" b="1">
+                <a:solidFill>
+                  <a:srgbClr val="0F172A"/>
+                </a:solidFill>
+                <a:latin typeface="PingFang TC"/>
+                <a:ea typeface="PingFang TC"/>
+              </a:rPr>
+              <a:t>這個架構哪會先崩潰？</a:t>
+            </a:r>
+          </a:p>
+        </p:txBody>
+      </p:sp>
+      <p:sp>
+        <p:nvSpPr>
+          <p:cNvPr id="5" name="TextBox 4"/>
+          <p:cNvSpPr txBox="1"/>
+          <p:nvPr/>
+        </p:nvSpPr>
+        <p:spPr>
+          <a:xfrm>
+            <a:off x="6400800" y="2057400"/>
+            <a:ext cx="5303520" cy="2194560"/>
+          </a:xfrm>
+          <a:prstGeom prst="rect">
+            <a:avLst/>
+          </a:prstGeom>
+          <a:noFill/>
+        </p:spPr>
+        <p:txBody>
+          <a:bodyPr wrap="square">
+            <a:spAutoFit/>
+          </a:bodyPr>
+          <a:lstStyle/>
+          <a:p>
+            <a:pPr>
+              <a:spcAft>
+                <a:spcPts val="1400"/>
+              </a:spcAft>
+            </a:pPr>
+            <a:r>
+              <a:rPr sz="1600" b="0">
+                <a:solidFill>
+                  <a:srgbClr val="0F172A"/>
+                </a:solidFill>
+                <a:latin typeface="PingFang TC"/>
+                <a:ea typeface="PingFang TC"/>
+              </a:rPr>
+              <a:t>•  流量暴增 Scenario 推演（Server vs DB vs Network）</a:t>
+            </a:r>
+          </a:p>
+          <a:p>
+            <a:pPr>
+              <a:spcAft>
+                <a:spcPts val="1400"/>
+              </a:spcAft>
+            </a:pPr>
+            <a:r>
+              <a:rPr sz="1600" b="0">
+                <a:solidFill>
+                  <a:srgbClr val="0F172A"/>
+                </a:solidFill>
+                <a:latin typeface="PingFang TC"/>
+                <a:ea typeface="PingFang TC"/>
+              </a:rPr>
+              <a:t>•  Event-Driven Analytics Pipeline 架構</a:t>
+            </a:r>
+          </a:p>
+          <a:p>
+            <a:pPr>
+              <a:spcAft>
+                <a:spcPts val="1400"/>
+              </a:spcAft>
+            </a:pPr>
+            <a:r>
+              <a:rPr sz="1600" b="0">
+                <a:solidFill>
+                  <a:srgbClr val="0F172A"/>
+                </a:solidFill>
+                <a:latin typeface="PingFang TC"/>
+                <a:ea typeface="PingFang TC"/>
+              </a:rPr>
+              <a:t>•  System Design 面試實戰答題框架</a:t>
+            </a:r>
+          </a:p>
+        </p:txBody>
+      </p:sp>
+      <p:sp>
+        <p:nvSpPr>
+          <p:cNvPr id="6" name="Rounded Rectangle 5"/>
+          <p:cNvSpPr/>
+          <p:nvPr/>
+        </p:nvSpPr>
+        <p:spPr>
+          <a:xfrm>
+            <a:off x="6400800" y="4343400"/>
+            <a:ext cx="5303520" cy="1051560"/>
+          </a:xfrm>
+          <a:prstGeom prst="roundRect">
+            <a:avLst/>
+          </a:prstGeom>
+          <a:solidFill>
+            <a:srgbClr val="F1F5F9"/>
+          </a:solidFill>
+          <a:ln>
+            <a:solidFill>
+              <a:srgbClr val="F1F5F9"/>
+            </a:solidFill>
+          </a:ln>
+          <a:effectLst/>
+        </p:spPr>
+        <p:style>
+          <a:lnRef idx="1">
+            <a:schemeClr val="accent1"/>
+          </a:lnRef>
+          <a:fillRef idx="3">
+            <a:schemeClr val="accent1"/>
+          </a:fillRef>
+          <a:effectRef idx="2">
+            <a:schemeClr val="accent1"/>
+          </a:effectRef>
+          <a:fontRef idx="minor">
+            <a:schemeClr val="lt1"/>
+          </a:fontRef>
+        </p:style>
+        <p:txBody>
+          <a:bodyPr rtlCol="0" anchor="ctr"/>
+          <a:lstStyle/>
+          <a:p>
+            <a:pPr algn="ctr"/>
+          </a:p>
+        </p:txBody>
+      </p:sp>
+      <p:sp>
+        <p:nvSpPr>
+          <p:cNvPr id="7" name="Rectangle 6"/>
+          <p:cNvSpPr/>
+          <p:nvPr/>
+        </p:nvSpPr>
+        <p:spPr>
+          <a:xfrm>
+            <a:off x="6400800" y="4343400"/>
+            <a:ext cx="82296" cy="1051560"/>
+          </a:xfrm>
+          <a:prstGeom prst="rect">
+            <a:avLst/>
+          </a:prstGeom>
+          <a:solidFill>
+            <a:srgbClr val="0EA5E9"/>
+          </a:solidFill>
+          <a:ln>
+            <a:noFill/>
+          </a:ln>
+          <a:effectLst/>
+        </p:spPr>
+        <p:style>
+          <a:lnRef idx="1">
+            <a:schemeClr val="accent1"/>
+          </a:lnRef>
+          <a:fillRef idx="3">
+            <a:schemeClr val="accent1"/>
+          </a:fillRef>
+          <a:effectRef idx="2">
+            <a:schemeClr val="accent1"/>
+          </a:effectRef>
+          <a:fontRef idx="minor">
+            <a:schemeClr val="lt1"/>
+          </a:fontRef>
+        </p:style>
+        <p:txBody>
+          <a:bodyPr rtlCol="0" anchor="ctr"/>
+          <a:lstStyle/>
+          <a:p>
+            <a:pPr algn="ctr"/>
+          </a:p>
+        </p:txBody>
+      </p:sp>
+      <p:sp>
+        <p:nvSpPr>
+          <p:cNvPr id="8" name="TextBox 7"/>
+          <p:cNvSpPr txBox="1"/>
+          <p:nvPr/>
+        </p:nvSpPr>
+        <p:spPr>
+          <a:xfrm>
+            <a:off x="6675120" y="4526280"/>
+            <a:ext cx="4846320" cy="822960"/>
+          </a:xfrm>
+          <a:prstGeom prst="rect">
+            <a:avLst/>
+          </a:prstGeom>
+          <a:noFill/>
+        </p:spPr>
+        <p:txBody>
+          <a:bodyPr wrap="square" anchor="t">
+            <a:spAutoFit/>
+          </a:bodyPr>
+          <a:lstStyle/>
+          <a:p>
+            <a:pPr algn="l">
+              <a:spcAft>
+                <a:spcPts val="600"/>
+              </a:spcAft>
+            </a:pPr>
+            <a:r>
+              <a:rPr sz="1500" b="1">
+                <a:solidFill>
+                  <a:srgbClr val="0F172A"/>
+                </a:solidFill>
+                <a:latin typeface="PingFang TC"/>
+                <a:ea typeface="PingFang TC"/>
+              </a:rPr>
+              <a:t>課前準備</a:t>
+            </a:r>
+          </a:p>
+          <a:p>
+            <a:pPr algn="l">
+              <a:spcAft>
+                <a:spcPts val="400"/>
+              </a:spcAft>
+            </a:pPr>
+            <a:r>
+              <a:rPr sz="1400" b="0">
+                <a:solidFill>
+                  <a:srgbClr val="64748B"/>
+                </a:solidFill>
+                <a:latin typeface="PingFang TC"/>
+                <a:ea typeface="PingFang TC"/>
+              </a:rPr>
+              <a:t>複習教材 Deep Dive 章節</a:t>
+            </a:r>
+          </a:p>
+        </p:txBody>
+      </p:sp>
+    </p:spTree>
+  </p:cSld>
+  <p:clrMapOvr>
+    <a:masterClrMapping/>
+  </p:clrMapOvr>
+</p:sld>
+</file>
+
 <file path=ppt/slides/slide4.xml><?xml version="1.0" encoding="utf-8"?>
 <p:sld xmlns:a="http://schemas.openxmlformats.org/drawingml/2006/main" xmlns:p="http://schemas.openxmlformats.org/presentationml/2006/main" xmlns:r="http://schemas.openxmlformats.org/officeDocument/2006/relationships">
   <p:cSld>

--- a/QR Code Generator/QR_Code_Generator.pptx
+++ b/QR Code Generator/QR_Code_Generator.pptx
@@ -35,6 +35,7 @@
     <p:sldId id="283" r:id="rId34"/>
     <p:sldId id="284" r:id="rId35"/>
     <p:sldId id="285" r:id="rId36"/>
+    <p:sldId id="286" r:id="rId37"/>
   </p:sldIdLst>
   <p:sldSz cx="12191695" cy="6858000" type="screen4x3"/>
   <p:notesSz cx="6858000" cy="9144000"/>
@@ -12827,13 +12828,13 @@
                           <a:latin typeface="PingFang TC"/>
                           <a:ea typeface="PingFang TC"/>
                         </a:rPr>
-                        <a:t>無</a:t>
+                        <a:t>✅ 已實作</a:t>
                       </a:r>
                     </a:p>
                   </a:txBody>
                   <a:tcPr marT="25400" marB="25400" marL="101600" anchor="ctr">
                     <a:solidFill>
-                      <a:srgbClr val="FEE2E2"/>
+                      <a:srgbClr val="F1F5F9"/>
                     </a:solidFill>
                   </a:tcPr>
                 </a:tc>
@@ -12850,7 +12851,7 @@
                           <a:latin typeface="PingFang TC"/>
                           <a:ea typeface="PingFang TC"/>
                         </a:rPr>
-                        <a:t>metrics · 日誌 · 掛掉告警</a:t>
+                        <a:t>CloudWatch alarms→SNS + Logs + canary</a:t>
                       </a:r>
                     </a:p>
                   </a:txBody>
@@ -16860,7 +16861,7 @@
                 <a:latin typeface="PingFang TC"/>
                 <a:ea typeface="PingFang TC"/>
               </a:rPr>
-              <a:t>部署 · CI/CD</a:t>
+              <a:t>可靠性 · MONITORING</a:t>
             </a:r>
           </a:p>
           <a:p>
@@ -16877,7 +16878,7 @@
                 <a:latin typeface="PingFang TC"/>
                 <a:ea typeface="PingFang TC"/>
               </a:rPr>
-              <a:t>CI/CD 流程（GitHub Actions + OIDC）</a:t>
+              <a:t>CloudWatch alarms → SNS + Logs + Dashboard + Canary</a:t>
             </a:r>
           </a:p>
         </p:txBody>
@@ -16890,231 +16891,8 @@
         </p:nvSpPr>
         <p:spPr>
           <a:xfrm>
-            <a:off x="457200" y="2286000"/>
-            <a:ext cx="1481328" cy="1280160"/>
-          </a:xfrm>
-          <a:prstGeom prst="roundRect">
-            <a:avLst/>
-          </a:prstGeom>
-          <a:solidFill>
-            <a:srgbClr val="64748B"/>
-          </a:solidFill>
-          <a:ln>
-            <a:solidFill>
-              <a:srgbClr val="64748B"/>
-            </a:solidFill>
-          </a:ln>
-          <a:effectLst/>
-        </p:spPr>
-        <p:style>
-          <a:lnRef idx="1">
-            <a:schemeClr val="accent1"/>
-          </a:lnRef>
-          <a:fillRef idx="3">
-            <a:schemeClr val="accent1"/>
-          </a:fillRef>
-          <a:effectRef idx="2">
-            <a:schemeClr val="accent1"/>
-          </a:effectRef>
-          <a:fontRef idx="minor">
-            <a:schemeClr val="lt1"/>
-          </a:fontRef>
-        </p:style>
-        <p:txBody>
-          <a:bodyPr rtlCol="0" anchor="ctr" wrap="square" tIns="25400" bIns="25400"/>
-          <a:lstStyle/>
-          <a:p>
-            <a:pPr algn="ctr"/>
-            <a:r>
-              <a:rPr sz="1100" b="1">
-                <a:solidFill>
-                  <a:srgbClr val="FFFFFF"/>
-                </a:solidFill>
-                <a:latin typeface="PingFang TC"/>
-                <a:ea typeface="PingFang TC"/>
-              </a:rPr>
-              <a:t>git push</a:t>
-            </a:r>
-          </a:p>
-          <a:p>
-            <a:pPr algn="ctr"/>
-            <a:r>
-              <a:rPr sz="1100" b="0">
-                <a:solidFill>
-                  <a:srgbClr val="FFFFFF"/>
-                </a:solidFill>
-                <a:latin typeface="PingFang TC"/>
-                <a:ea typeface="PingFang TC"/>
-              </a:rPr>
-              <a:t>QR Code Generator/**</a:t>
-            </a:r>
-          </a:p>
-        </p:txBody>
-      </p:sp>
-      <p:cxnSp>
-        <p:nvCxnSpPr>
-          <p:cNvPr id="5" name="Connector 4"/>
-          <p:cNvCxnSpPr/>
-          <p:nvPr/>
-        </p:nvCxnSpPr>
-        <p:spPr>
-          <a:xfrm>
-            <a:off x="1938528" y="2926080"/>
-            <a:ext cx="118872" cy="0"/>
-          </a:xfrm>
-          <a:prstGeom prst="line">
-            <a:avLst/>
-          </a:prstGeom>
-          <a:ln w="22225">
-            <a:solidFill>
-              <a:srgbClr val="64748B"/>
-            </a:solidFill>
-            <a:tailEnd type="triangle" w="med" len="med"/>
-          </a:ln>
-        </p:spPr>
-        <p:style>
-          <a:lnRef idx="2">
-            <a:schemeClr val="accent1"/>
-          </a:lnRef>
-          <a:fillRef idx="0">
-            <a:schemeClr val="accent1"/>
-          </a:fillRef>
-          <a:effectRef idx="1">
-            <a:schemeClr val="accent1"/>
-          </a:effectRef>
-          <a:fontRef idx="minor">
-            <a:schemeClr val="tx1"/>
-          </a:fontRef>
-        </p:style>
-      </p:cxnSp>
-      <p:sp>
-        <p:nvSpPr>
-          <p:cNvPr id="6" name="Rounded Rectangle 5"/>
-          <p:cNvSpPr/>
-          <p:nvPr/>
-        </p:nvSpPr>
-        <p:spPr>
-          <a:xfrm>
-            <a:off x="2057400" y="2286000"/>
-            <a:ext cx="1481328" cy="1280160"/>
-          </a:xfrm>
-          <a:prstGeom prst="roundRect">
-            <a:avLst/>
-          </a:prstGeom>
-          <a:solidFill>
-            <a:srgbClr val="0EA5E9"/>
-          </a:solidFill>
-          <a:ln>
-            <a:solidFill>
-              <a:srgbClr val="0EA5E9"/>
-            </a:solidFill>
-          </a:ln>
-          <a:effectLst/>
-        </p:spPr>
-        <p:style>
-          <a:lnRef idx="1">
-            <a:schemeClr val="accent1"/>
-          </a:lnRef>
-          <a:fillRef idx="3">
-            <a:schemeClr val="accent1"/>
-          </a:fillRef>
-          <a:effectRef idx="2">
-            <a:schemeClr val="accent1"/>
-          </a:effectRef>
-          <a:fontRef idx="minor">
-            <a:schemeClr val="lt1"/>
-          </a:fontRef>
-        </p:style>
-        <p:txBody>
-          <a:bodyPr rtlCol="0" anchor="ctr" wrap="square" tIns="25400" bIns="25400"/>
-          <a:lstStyle/>
-          <a:p>
-            <a:pPr algn="ctr"/>
-            <a:r>
-              <a:rPr sz="1100" b="1">
-                <a:solidFill>
-                  <a:srgbClr val="FFFFFF"/>
-                </a:solidFill>
-                <a:latin typeface="PingFang TC"/>
-                <a:ea typeface="PingFang TC"/>
-              </a:rPr>
-              <a:t>GitHub Actions</a:t>
-            </a:r>
-          </a:p>
-          <a:p>
-            <a:pPr algn="ctr"/>
-            <a:r>
-              <a:rPr sz="1100" b="0">
-                <a:solidFill>
-                  <a:srgbClr val="FFFFFF"/>
-                </a:solidFill>
-                <a:latin typeface="PingFang TC"/>
-                <a:ea typeface="PingFang TC"/>
-              </a:rPr>
-              <a:t>OIDC assume role</a:t>
-            </a:r>
-          </a:p>
-          <a:p>
-            <a:pPr algn="ctr"/>
-            <a:r>
-              <a:rPr sz="1100" b="0">
-                <a:solidFill>
-                  <a:srgbClr val="FFFFFF"/>
-                </a:solidFill>
-                <a:latin typeface="PingFang TC"/>
-                <a:ea typeface="PingFang TC"/>
-              </a:rPr>
-              <a:t>(無長期金鑰)</a:t>
-            </a:r>
-          </a:p>
-        </p:txBody>
-      </p:sp>
-      <p:cxnSp>
-        <p:nvCxnSpPr>
-          <p:cNvPr id="7" name="Connector 6"/>
-          <p:cNvCxnSpPr/>
-          <p:nvPr/>
-        </p:nvCxnSpPr>
-        <p:spPr>
-          <a:xfrm>
-            <a:off x="3538728" y="2926080"/>
-            <a:ext cx="118872" cy="0"/>
-          </a:xfrm>
-          <a:prstGeom prst="line">
-            <a:avLst/>
-          </a:prstGeom>
-          <a:ln w="22225">
-            <a:solidFill>
-              <a:srgbClr val="64748B"/>
-            </a:solidFill>
-            <a:tailEnd type="triangle" w="med" len="med"/>
-          </a:ln>
-        </p:spPr>
-        <p:style>
-          <a:lnRef idx="2">
-            <a:schemeClr val="accent1"/>
-          </a:lnRef>
-          <a:fillRef idx="0">
-            <a:schemeClr val="accent1"/>
-          </a:fillRef>
-          <a:effectRef idx="1">
-            <a:schemeClr val="accent1"/>
-          </a:effectRef>
-          <a:fontRef idx="minor">
-            <a:schemeClr val="tx1"/>
-          </a:fontRef>
-        </p:style>
-      </p:cxnSp>
-      <p:sp>
-        <p:nvSpPr>
-          <p:cNvPr id="8" name="Rounded Rectangle 7"/>
-          <p:cNvSpPr/>
-          <p:nvPr/>
-        </p:nvSpPr>
-        <p:spPr>
-          <a:xfrm>
-            <a:off x="3657600" y="2286000"/>
-            <a:ext cx="1481328" cy="1280160"/>
+            <a:off x="548640" y="1828800"/>
+            <a:ext cx="2926080" cy="822960"/>
           </a:xfrm>
           <a:prstGeom prst="roundRect">
             <a:avLst/>
@@ -17156,7 +16934,7 @@
                 <a:latin typeface="PingFang TC"/>
                 <a:ea typeface="PingFang TC"/>
               </a:rPr>
-              <a:t>buildx</a:t>
+              <a:t>CloudWatch Alarms</a:t>
             </a:r>
           </a:p>
           <a:p>
@@ -17169,70 +16947,90 @@
                 <a:latin typeface="PingFang TC"/>
                 <a:ea typeface="PingFang TC"/>
               </a:rPr>
-              <a:t>--platform</a:t>
-            </a:r>
-          </a:p>
-          <a:p>
-            <a:pPr algn="ctr"/>
-            <a:r>
-              <a:rPr sz="1100" b="0">
-                <a:solidFill>
-                  <a:srgbClr val="FFFFFF"/>
-                </a:solidFill>
-                <a:latin typeface="PingFang TC"/>
-                <a:ea typeface="PingFang TC"/>
-              </a:rPr>
-              <a:t>linux/arm64</a:t>
-            </a:r>
-          </a:p>
-        </p:txBody>
-      </p:sp>
-      <p:cxnSp>
-        <p:nvCxnSpPr>
-          <p:cNvPr id="9" name="Connector 8"/>
-          <p:cNvCxnSpPr/>
-          <p:nvPr/>
-        </p:nvCxnSpPr>
-        <p:spPr>
-          <a:xfrm>
-            <a:off x="5138928" y="2926080"/>
-            <a:ext cx="118872" cy="0"/>
-          </a:xfrm>
-          <a:prstGeom prst="line">
-            <a:avLst/>
-          </a:prstGeom>
-          <a:ln w="22225">
+              <a:t>ALB/RDS/EC2/API GW/Lambda/CF</a:t>
+            </a:r>
+          </a:p>
+        </p:txBody>
+      </p:sp>
+      <p:sp>
+        <p:nvSpPr>
+          <p:cNvPr id="5" name="Rounded Rectangle 4"/>
+          <p:cNvSpPr/>
+          <p:nvPr/>
+        </p:nvSpPr>
+        <p:spPr>
+          <a:xfrm>
+            <a:off x="3931920" y="1828800"/>
+            <a:ext cx="2377440" cy="822960"/>
+          </a:xfrm>
+          <a:prstGeom prst="roundRect">
+            <a:avLst/>
+          </a:prstGeom>
+          <a:solidFill>
+            <a:srgbClr val="D97706"/>
+          </a:solidFill>
+          <a:ln>
             <a:solidFill>
-              <a:srgbClr val="64748B"/>
+              <a:srgbClr val="D97706"/>
             </a:solidFill>
-            <a:tailEnd type="triangle" w="med" len="med"/>
           </a:ln>
+          <a:effectLst/>
         </p:spPr>
         <p:style>
-          <a:lnRef idx="2">
+          <a:lnRef idx="1">
             <a:schemeClr val="accent1"/>
           </a:lnRef>
-          <a:fillRef idx="0">
+          <a:fillRef idx="3">
             <a:schemeClr val="accent1"/>
           </a:fillRef>
-          <a:effectRef idx="1">
+          <a:effectRef idx="2">
             <a:schemeClr val="accent1"/>
           </a:effectRef>
           <a:fontRef idx="minor">
-            <a:schemeClr val="tx1"/>
+            <a:schemeClr val="lt1"/>
           </a:fontRef>
         </p:style>
-      </p:cxnSp>
-      <p:sp>
-        <p:nvSpPr>
-          <p:cNvPr id="10" name="Rounded Rectangle 9"/>
+        <p:txBody>
+          <a:bodyPr rtlCol="0" anchor="ctr" wrap="square" tIns="25400" bIns="25400"/>
+          <a:lstStyle/>
+          <a:p>
+            <a:pPr algn="ctr"/>
+            <a:r>
+              <a:rPr sz="1200" b="1">
+                <a:solidFill>
+                  <a:srgbClr val="FFFFFF"/>
+                </a:solidFill>
+                <a:latin typeface="PingFang TC"/>
+                <a:ea typeface="PingFang TC"/>
+              </a:rPr>
+              <a:t>SNS topic</a:t>
+            </a:r>
+          </a:p>
+          <a:p>
+            <a:pPr algn="ctr"/>
+            <a:r>
+              <a:rPr sz="1200" b="0">
+                <a:solidFill>
+                  <a:srgbClr val="FFFFFF"/>
+                </a:solidFill>
+                <a:latin typeface="PingFang TC"/>
+                <a:ea typeface="PingFang TC"/>
+              </a:rPr>
+              <a:t>→ Email 通知</a:t>
+            </a:r>
+          </a:p>
+        </p:txBody>
+      </p:sp>
+      <p:sp>
+        <p:nvSpPr>
+          <p:cNvPr id="6" name="Rounded Rectangle 5"/>
           <p:cNvSpPr/>
           <p:nvPr/>
         </p:nvSpPr>
         <p:spPr>
           <a:xfrm>
-            <a:off x="5257800" y="2286000"/>
-            <a:ext cx="1481328" cy="1280160"/>
+            <a:off x="6766560" y="1828800"/>
+            <a:ext cx="2377440" cy="822960"/>
           </a:xfrm>
           <a:prstGeom prst="roundRect">
             <a:avLst/>
@@ -17267,54 +17065,41 @@
           <a:p>
             <a:pPr algn="ctr"/>
             <a:r>
-              <a:rPr sz="1100" b="1">
+              <a:rPr sz="1200" b="1">
                 <a:solidFill>
                   <a:srgbClr val="FFFFFF"/>
                 </a:solidFill>
                 <a:latin typeface="PingFang TC"/>
                 <a:ea typeface="PingFang TC"/>
               </a:rPr>
-              <a:t>ECR push</a:t>
+              <a:t>Synthetic Canary</a:t>
             </a:r>
           </a:p>
           <a:p>
             <a:pPr algn="ctr"/>
             <a:r>
-              <a:rPr sz="1100" b="0">
+              <a:rPr sz="1200" b="0">
                 <a:solidFill>
                   <a:srgbClr val="FFFFFF"/>
                 </a:solidFill>
                 <a:latin typeface="PingFang TC"/>
                 <a:ea typeface="PingFang TC"/>
               </a:rPr>
-              <a:t>tag = SHA</a:t>
-            </a:r>
-          </a:p>
-          <a:p>
-            <a:pPr algn="ctr"/>
-            <a:r>
-              <a:rPr sz="1100" b="0">
-                <a:solidFill>
-                  <a:srgbClr val="FFFFFF"/>
-                </a:solidFill>
-                <a:latin typeface="PingFang TC"/>
-                <a:ea typeface="PingFang TC"/>
-              </a:rPr>
-              <a:t>+ latest</a:t>
+              <a:t>每 5 分 /health</a:t>
             </a:r>
           </a:p>
         </p:txBody>
       </p:sp>
       <p:cxnSp>
         <p:nvCxnSpPr>
-          <p:cNvPr id="11" name="Connector 10"/>
+          <p:cNvPr id="7" name="Connector 6"/>
           <p:cNvCxnSpPr/>
           <p:nvPr/>
         </p:nvCxnSpPr>
         <p:spPr>
           <a:xfrm>
-            <a:off x="6739128" y="2926080"/>
-            <a:ext cx="118872" cy="0"/>
+            <a:off x="3474720" y="2240280"/>
+            <a:ext cx="457200" cy="0"/>
           </a:xfrm>
           <a:prstGeom prst="line">
             <a:avLst/>
@@ -17341,103 +17126,21 @@
           </a:fontRef>
         </p:style>
       </p:cxnSp>
-      <p:sp>
-        <p:nvSpPr>
-          <p:cNvPr id="12" name="Rounded Rectangle 11"/>
-          <p:cNvSpPr/>
-          <p:nvPr/>
-        </p:nvSpPr>
-        <p:spPr>
-          <a:xfrm>
-            <a:off x="6858000" y="2286000"/>
-            <a:ext cx="1481328" cy="1280160"/>
-          </a:xfrm>
-          <a:prstGeom prst="roundRect">
-            <a:avLst/>
-          </a:prstGeom>
-          <a:solidFill>
-            <a:srgbClr val="7C3AED"/>
-          </a:solidFill>
-          <a:ln>
-            <a:solidFill>
-              <a:srgbClr val="7C3AED"/>
-            </a:solidFill>
-          </a:ln>
-          <a:effectLst/>
-        </p:spPr>
-        <p:style>
-          <a:lnRef idx="1">
-            <a:schemeClr val="accent1"/>
-          </a:lnRef>
-          <a:fillRef idx="3">
-            <a:schemeClr val="accent1"/>
-          </a:fillRef>
-          <a:effectRef idx="2">
-            <a:schemeClr val="accent1"/>
-          </a:effectRef>
-          <a:fontRef idx="minor">
-            <a:schemeClr val="lt1"/>
-          </a:fontRef>
-        </p:style>
-        <p:txBody>
-          <a:bodyPr rtlCol="0" anchor="ctr" wrap="square" tIns="25400" bIns="25400"/>
-          <a:lstStyle/>
-          <a:p>
-            <a:pPr algn="ctr"/>
-            <a:r>
-              <a:rPr sz="1100" b="1">
-                <a:solidFill>
-                  <a:srgbClr val="FFFFFF"/>
-                </a:solidFill>
-                <a:latin typeface="PingFang TC"/>
-                <a:ea typeface="PingFang TC"/>
-              </a:rPr>
-              <a:t>SSM 更新</a:t>
-            </a:r>
-          </a:p>
-          <a:p>
-            <a:pPr algn="ctr"/>
-            <a:r>
-              <a:rPr sz="1100" b="0">
-                <a:solidFill>
-                  <a:srgbClr val="FFFFFF"/>
-                </a:solidFill>
-                <a:latin typeface="PingFang TC"/>
-                <a:ea typeface="PingFang TC"/>
-              </a:rPr>
-              <a:t>/qrcode/</a:t>
-            </a:r>
-          </a:p>
-          <a:p>
-            <a:pPr algn="ctr"/>
-            <a:r>
-              <a:rPr sz="1100" b="0">
-                <a:solidFill>
-                  <a:srgbClr val="FFFFFF"/>
-                </a:solidFill>
-                <a:latin typeface="PingFang TC"/>
-                <a:ea typeface="PingFang TC"/>
-              </a:rPr>
-              <a:t>IMAGE_URI</a:t>
-            </a:r>
-          </a:p>
-        </p:txBody>
-      </p:sp>
       <p:cxnSp>
         <p:nvCxnSpPr>
-          <p:cNvPr id="13" name="Connector 12"/>
+          <p:cNvPr id="8" name="Connector 7"/>
           <p:cNvCxnSpPr/>
           <p:nvPr/>
         </p:nvCxnSpPr>
         <p:spPr>
-          <a:xfrm>
-            <a:off x="8339328" y="2926080"/>
-            <a:ext cx="118872" cy="0"/>
+          <a:xfrm flipH="1">
+            <a:off x="6309360" y="2240280"/>
+            <a:ext cx="457200" cy="0"/>
           </a:xfrm>
           <a:prstGeom prst="line">
             <a:avLst/>
           </a:prstGeom>
-          <a:ln w="22225">
+          <a:ln w="15240">
             <a:solidFill>
               <a:srgbClr val="64748B"/>
             </a:solidFill>
@@ -17459,216 +17162,330 @@
           </a:fontRef>
         </p:style>
       </p:cxnSp>
-      <p:sp>
-        <p:nvSpPr>
-          <p:cNvPr id="14" name="Rounded Rectangle 13"/>
-          <p:cNvSpPr/>
-          <p:nvPr/>
-        </p:nvSpPr>
-        <p:spPr>
-          <a:xfrm>
-            <a:off x="8458200" y="2286000"/>
-            <a:ext cx="1481328" cy="1280160"/>
-          </a:xfrm>
-          <a:prstGeom prst="roundRect">
-            <a:avLst/>
-          </a:prstGeom>
-          <a:solidFill>
-            <a:srgbClr val="D97706"/>
-          </a:solidFill>
-          <a:ln>
-            <a:solidFill>
-              <a:srgbClr val="D97706"/>
-            </a:solidFill>
-          </a:ln>
-          <a:effectLst/>
-        </p:spPr>
-        <p:style>
-          <a:lnRef idx="1">
-            <a:schemeClr val="accent1"/>
-          </a:lnRef>
-          <a:fillRef idx="3">
-            <a:schemeClr val="accent1"/>
-          </a:fillRef>
-          <a:effectRef idx="2">
-            <a:schemeClr val="accent1"/>
-          </a:effectRef>
-          <a:fontRef idx="minor">
-            <a:schemeClr val="lt1"/>
-          </a:fontRef>
-        </p:style>
-        <p:txBody>
-          <a:bodyPr rtlCol="0" anchor="ctr" wrap="square" tIns="25400" bIns="25400"/>
-          <a:lstStyle/>
-          <a:p>
-            <a:pPr algn="ctr"/>
-            <a:r>
-              <a:rPr sz="1100" b="1">
-                <a:solidFill>
-                  <a:srgbClr val="FFFFFF"/>
-                </a:solidFill>
-                <a:latin typeface="PingFang TC"/>
-                <a:ea typeface="PingFang TC"/>
-              </a:rPr>
-              <a:t>SSM 部署</a:t>
-            </a:r>
-          </a:p>
-          <a:p>
-            <a:pPr algn="ctr"/>
-            <a:r>
-              <a:rPr sz="1100" b="0">
-                <a:solidFill>
-                  <a:srgbClr val="FFFFFF"/>
-                </a:solidFill>
-                <a:latin typeface="PingFang TC"/>
-                <a:ea typeface="PingFang TC"/>
-              </a:rPr>
-              <a:t>→ EC2</a:t>
-            </a:r>
-          </a:p>
-          <a:p>
-            <a:pPr algn="ctr"/>
-            <a:r>
-              <a:rPr sz="1100" b="0">
-                <a:solidFill>
-                  <a:srgbClr val="FFFFFF"/>
-                </a:solidFill>
-                <a:latin typeface="PingFang TC"/>
-                <a:ea typeface="PingFang TC"/>
-              </a:rPr>
-              <a:t>deploy-app.sh</a:t>
-            </a:r>
-          </a:p>
-        </p:txBody>
-      </p:sp>
-      <p:cxnSp>
-        <p:nvCxnSpPr>
-          <p:cNvPr id="15" name="Connector 14"/>
-          <p:cNvCxnSpPr/>
-          <p:nvPr/>
-        </p:nvCxnSpPr>
-        <p:spPr>
-          <a:xfrm>
-            <a:off x="9939528" y="2926080"/>
-            <a:ext cx="118872" cy="0"/>
-          </a:xfrm>
-          <a:prstGeom prst="line">
-            <a:avLst/>
-          </a:prstGeom>
-          <a:ln w="22225">
-            <a:solidFill>
-              <a:srgbClr val="64748B"/>
-            </a:solidFill>
-            <a:tailEnd type="triangle" w="med" len="med"/>
-          </a:ln>
-        </p:spPr>
-        <p:style>
-          <a:lnRef idx="2">
-            <a:schemeClr val="accent1"/>
-          </a:lnRef>
-          <a:fillRef idx="0">
-            <a:schemeClr val="accent1"/>
-          </a:fillRef>
-          <a:effectRef idx="1">
-            <a:schemeClr val="accent1"/>
-          </a:effectRef>
-          <a:fontRef idx="minor">
-            <a:schemeClr val="tx1"/>
-          </a:fontRef>
-        </p:style>
-      </p:cxnSp>
-      <p:sp>
-        <p:nvSpPr>
-          <p:cNvPr id="16" name="Rounded Rectangle 15"/>
-          <p:cNvSpPr/>
-          <p:nvPr/>
-        </p:nvSpPr>
-        <p:spPr>
-          <a:xfrm>
-            <a:off x="10058400" y="2286000"/>
-            <a:ext cx="1481328" cy="1280160"/>
-          </a:xfrm>
-          <a:prstGeom prst="roundRect">
-            <a:avLst/>
-          </a:prstGeom>
-          <a:solidFill>
-            <a:srgbClr val="059669"/>
-          </a:solidFill>
-          <a:ln>
-            <a:solidFill>
-              <a:srgbClr val="059669"/>
-            </a:solidFill>
-          </a:ln>
-          <a:effectLst/>
-        </p:spPr>
-        <p:style>
-          <a:lnRef idx="1">
-            <a:schemeClr val="accent1"/>
-          </a:lnRef>
-          <a:fillRef idx="3">
-            <a:schemeClr val="accent1"/>
-          </a:fillRef>
-          <a:effectRef idx="2">
-            <a:schemeClr val="accent1"/>
-          </a:effectRef>
-          <a:fontRef idx="minor">
-            <a:schemeClr val="lt1"/>
-          </a:fontRef>
-        </p:style>
-        <p:txBody>
-          <a:bodyPr rtlCol="0" anchor="ctr" wrap="square" tIns="25400" bIns="25400"/>
-          <a:lstStyle/>
-          <a:p>
-            <a:pPr algn="ctr"/>
-            <a:r>
-              <a:rPr sz="1100" b="1">
-                <a:solidFill>
-                  <a:srgbClr val="FFFFFF"/>
-                </a:solidFill>
-                <a:latin typeface="PingFang TC"/>
-                <a:ea typeface="PingFang TC"/>
-              </a:rPr>
-              <a:t>上線</a:t>
-            </a:r>
-          </a:p>
-          <a:p>
-            <a:pPr algn="ctr"/>
-            <a:r>
-              <a:rPr sz="1100" b="0">
-                <a:solidFill>
-                  <a:srgbClr val="FFFFFF"/>
-                </a:solidFill>
-                <a:latin typeface="PingFang TC"/>
-                <a:ea typeface="PingFang TC"/>
-              </a:rPr>
-              <a:t>ALB /health</a:t>
-            </a:r>
-          </a:p>
-          <a:p>
-            <a:pPr algn="ctr"/>
-            <a:r>
-              <a:rPr sz="1100" b="0">
-                <a:solidFill>
-                  <a:srgbClr val="FFFFFF"/>
-                </a:solidFill>
-                <a:latin typeface="PingFang TC"/>
-                <a:ea typeface="PingFang TC"/>
-              </a:rPr>
-              <a:t>通過</a:t>
-            </a:r>
-          </a:p>
-        </p:txBody>
-      </p:sp>
-      <p:sp>
-        <p:nvSpPr>
-          <p:cNvPr id="17" name="TextBox 16"/>
+      <p:graphicFrame>
+        <p:nvGraphicFramePr>
+          <p:cNvPr id="9" name="Table 8"/>
+          <p:cNvGraphicFramePr>
+            <a:graphicFrameLocks noGrp="1"/>
+          </p:cNvGraphicFramePr>
+          <p:nvPr/>
+        </p:nvGraphicFramePr>
+        <p:xfrm>
+          <a:off x="548640" y="3017520"/>
+          <a:ext cx="11109960" cy="2651760"/>
+        </p:xfrm>
+        <a:graphic>
+          <a:graphicData uri="http://schemas.openxmlformats.org/drawingml/2006/table">
+            <a:tbl>
+              <a:tblPr firstRow="1" bandRow="1">
+                <a:tableStyleId>{5C22544A-7EE6-4342-B048-85BDC9FD1C3A}</a:tableStyleId>
+              </a:tblPr>
+              <a:tblGrid>
+                <a:gridCol w="2011680"/>
+                <a:gridCol w="9098280"/>
+              </a:tblGrid>
+              <a:tr h="441960">
+                <a:tc>
+                  <a:txBody>
+                    <a:bodyPr/>
+                    <a:lstStyle/>
+                    <a:p>
+                      <a:r>
+                        <a:rPr sz="1200" b="1">
+                          <a:solidFill>
+                            <a:srgbClr val="FFFFFF"/>
+                          </a:solidFill>
+                          <a:latin typeface="PingFang TC"/>
+                          <a:ea typeface="PingFang TC"/>
+                        </a:rPr>
+                        <a:t>面向</a:t>
+                      </a:r>
+                    </a:p>
+                  </a:txBody>
+                  <a:tcPr marT="25400" marB="25400" marL="101600" anchor="ctr">
+                    <a:solidFill>
+                      <a:srgbClr val="2563EB"/>
+                    </a:solidFill>
+                  </a:tcPr>
+                </a:tc>
+                <a:tc>
+                  <a:txBody>
+                    <a:bodyPr/>
+                    <a:lstStyle/>
+                    <a:p>
+                      <a:r>
+                        <a:rPr sz="1200" b="1">
+                          <a:solidFill>
+                            <a:srgbClr val="FFFFFF"/>
+                          </a:solidFill>
+                          <a:latin typeface="PingFang TC"/>
+                          <a:ea typeface="PingFang TC"/>
+                        </a:rPr>
+                        <a:t>內容</a:t>
+                      </a:r>
+                    </a:p>
+                  </a:txBody>
+                  <a:tcPr marT="25400" marB="25400" marL="101600" anchor="ctr">
+                    <a:solidFill>
+                      <a:srgbClr val="2563EB"/>
+                    </a:solidFill>
+                  </a:tcPr>
+                </a:tc>
+              </a:tr>
+              <a:tr h="441960">
+                <a:tc>
+                  <a:txBody>
+                    <a:bodyPr/>
+                    <a:lstStyle/>
+                    <a:p>
+                      <a:r>
+                        <a:rPr sz="1200" b="1">
+                          <a:solidFill>
+                            <a:srgbClr val="0F172A"/>
+                          </a:solidFill>
+                          <a:latin typeface="PingFang TC"/>
+                          <a:ea typeface="PingFang TC"/>
+                        </a:rPr>
+                        <a:t>告警 alarms</a:t>
+                      </a:r>
+                    </a:p>
+                  </a:txBody>
+                  <a:tcPr marT="25400" marB="25400" marL="101600" anchor="ctr">
+                    <a:solidFill>
+                      <a:srgbClr val="FFFFFF"/>
+                    </a:solidFill>
+                  </a:tcPr>
+                </a:tc>
+                <a:tc>
+                  <a:txBody>
+                    <a:bodyPr/>
+                    <a:lstStyle/>
+                    <a:p>
+                      <a:r>
+                        <a:rPr sz="1200" b="0">
+                          <a:solidFill>
+                            <a:srgbClr val="0F172A"/>
+                          </a:solidFill>
+                          <a:latin typeface="PingFang TC"/>
+                          <a:ea typeface="PingFang TC"/>
+                        </a:rPr>
+                        <a:t>ALB unhealthy/5xx/latency · RDS CPU/storage · ElastiCache · API GW 5xx · Lambda errors · CloudFront 5xx(us-east-1)</a:t>
+                      </a:r>
+                    </a:p>
+                  </a:txBody>
+                  <a:tcPr marT="25400" marB="25400" marL="101600" anchor="ctr">
+                    <a:solidFill>
+                      <a:srgbClr val="FFFFFF"/>
+                    </a:solidFill>
+                  </a:tcPr>
+                </a:tc>
+              </a:tr>
+              <a:tr h="441960">
+                <a:tc>
+                  <a:txBody>
+                    <a:bodyPr/>
+                    <a:lstStyle/>
+                    <a:p>
+                      <a:r>
+                        <a:rPr sz="1200" b="1">
+                          <a:solidFill>
+                            <a:srgbClr val="0F172A"/>
+                          </a:solidFill>
+                          <a:latin typeface="PingFang TC"/>
+                          <a:ea typeface="PingFang TC"/>
+                        </a:rPr>
+                        <a:t>通知</a:t>
+                      </a:r>
+                    </a:p>
+                  </a:txBody>
+                  <a:tcPr marT="25400" marB="25400" marL="101600" anchor="ctr">
+                    <a:solidFill>
+                      <a:srgbClr val="F1F5F9"/>
+                    </a:solidFill>
+                  </a:tcPr>
+                </a:tc>
+                <a:tc>
+                  <a:txBody>
+                    <a:bodyPr/>
+                    <a:lstStyle/>
+                    <a:p>
+                      <a:r>
+                        <a:rPr sz="1200" b="0">
+                          <a:solidFill>
+                            <a:srgbClr val="0F172A"/>
+                          </a:solidFill>
+                          <a:latin typeface="PingFang TC"/>
+                          <a:ea typeface="PingFang TC"/>
+                        </a:rPr>
+                        <a:t>CloudWatch alarm → SNS topic → email（alert_email,需點確認信）</a:t>
+                      </a:r>
+                    </a:p>
+                  </a:txBody>
+                  <a:tcPr marT="25400" marB="25400" marL="101600" anchor="ctr">
+                    <a:solidFill>
+                      <a:srgbClr val="F1F5F9"/>
+                    </a:solidFill>
+                  </a:tcPr>
+                </a:tc>
+              </a:tr>
+              <a:tr h="441960">
+                <a:tc>
+                  <a:txBody>
+                    <a:bodyPr/>
+                    <a:lstStyle/>
+                    <a:p>
+                      <a:r>
+                        <a:rPr sz="1200" b="1">
+                          <a:solidFill>
+                            <a:srgbClr val="0F172A"/>
+                          </a:solidFill>
+                          <a:latin typeface="PingFang TC"/>
+                          <a:ea typeface="PingFang TC"/>
+                        </a:rPr>
+                        <a:t>App logs</a:t>
+                      </a:r>
+                    </a:p>
+                  </a:txBody>
+                  <a:tcPr marT="25400" marB="25400" marL="101600" anchor="ctr">
+                    <a:solidFill>
+                      <a:srgbClr val="FFFFFF"/>
+                    </a:solidFill>
+                  </a:tcPr>
+                </a:tc>
+                <a:tc>
+                  <a:txBody>
+                    <a:bodyPr/>
+                    <a:lstStyle/>
+                    <a:p>
+                      <a:r>
+                        <a:rPr sz="1200" b="0">
+                          <a:solidFill>
+                            <a:srgbClr val="0F172A"/>
+                          </a:solidFill>
+                          <a:latin typeface="PingFang TC"/>
+                          <a:ea typeface="PingFang TC"/>
+                        </a:rPr>
+                        <a:t>EC2 容器 awslogs driver → CloudWatch Logs /qrcode/app（retention 14d）</a:t>
+                      </a:r>
+                    </a:p>
+                  </a:txBody>
+                  <a:tcPr marT="25400" marB="25400" marL="101600" anchor="ctr">
+                    <a:solidFill>
+                      <a:srgbClr val="FFFFFF"/>
+                    </a:solidFill>
+                  </a:tcPr>
+                </a:tc>
+              </a:tr>
+              <a:tr h="441960">
+                <a:tc>
+                  <a:txBody>
+                    <a:bodyPr/>
+                    <a:lstStyle/>
+                    <a:p>
+                      <a:r>
+                        <a:rPr sz="1200" b="1">
+                          <a:solidFill>
+                            <a:srgbClr val="0F172A"/>
+                          </a:solidFill>
+                          <a:latin typeface="PingFang TC"/>
+                          <a:ea typeface="PingFang TC"/>
+                        </a:rPr>
+                        <a:t>Dashboard</a:t>
+                      </a:r>
+                    </a:p>
+                  </a:txBody>
+                  <a:tcPr marT="25400" marB="25400" marL="101600" anchor="ctr">
+                    <a:solidFill>
+                      <a:srgbClr val="F1F5F9"/>
+                    </a:solidFill>
+                  </a:tcPr>
+                </a:tc>
+                <a:tc>
+                  <a:txBody>
+                    <a:bodyPr/>
+                    <a:lstStyle/>
+                    <a:p>
+                      <a:r>
+                        <a:rPr sz="1200" b="0">
+                          <a:solidFill>
+                            <a:srgbClr val="0F172A"/>
+                          </a:solidFill>
+                          <a:latin typeface="PingFang TC"/>
+                          <a:ea typeface="PingFang TC"/>
+                        </a:rPr>
+                        <a:t>qrcode-overview：ALB/RDS/EC2/API GW/Lambda 一頁</a:t>
+                      </a:r>
+                    </a:p>
+                  </a:txBody>
+                  <a:tcPr marT="25400" marB="25400" marL="101600" anchor="ctr">
+                    <a:solidFill>
+                      <a:srgbClr val="F1F5F9"/>
+                    </a:solidFill>
+                  </a:tcPr>
+                </a:tc>
+              </a:tr>
+              <a:tr h="441960">
+                <a:tc>
+                  <a:txBody>
+                    <a:bodyPr/>
+                    <a:lstStyle/>
+                    <a:p>
+                      <a:r>
+                        <a:rPr sz="1200" b="1">
+                          <a:solidFill>
+                            <a:srgbClr val="0F172A"/>
+                          </a:solidFill>
+                          <a:latin typeface="PingFang TC"/>
+                          <a:ea typeface="PingFang TC"/>
+                        </a:rPr>
+                        <a:t>Canary</a:t>
+                      </a:r>
+                    </a:p>
+                  </a:txBody>
+                  <a:tcPr marT="25400" marB="25400" marL="101600" anchor="ctr">
+                    <a:solidFill>
+                      <a:srgbClr val="FFFFFF"/>
+                    </a:solidFill>
+                  </a:tcPr>
+                </a:tc>
+                <a:tc>
+                  <a:txBody>
+                    <a:bodyPr/>
+                    <a:lstStyle/>
+                    <a:p>
+                      <a:r>
+                        <a:rPr sz="1200" b="0">
+                          <a:solidFill>
+                            <a:srgbClr val="0F172A"/>
+                          </a:solidFill>
+                          <a:latin typeface="PingFang TC"/>
+                          <a:ea typeface="PingFang TC"/>
+                        </a:rPr>
+                        <a:t>syn-nodejs-puppeteer 每 5 分探測 CloudFront /health → 失敗即 alarm</a:t>
+                      </a:r>
+                    </a:p>
+                  </a:txBody>
+                  <a:tcPr marT="25400" marB="25400" marL="101600" anchor="ctr">
+                    <a:solidFill>
+                      <a:srgbClr val="FFFFFF"/>
+                    </a:solidFill>
+                  </a:tcPr>
+                </a:tc>
+              </a:tr>
+            </a:tbl>
+          </a:graphicData>
+        </a:graphic>
+      </p:graphicFrame>
+      <p:sp>
+        <p:nvSpPr>
+          <p:cNvPr id="10" name="TextBox 9"/>
           <p:cNvSpPr txBox="1"/>
           <p:nvPr/>
         </p:nvSpPr>
         <p:spPr>
           <a:xfrm>
-            <a:off x="548640" y="4023360"/>
-            <a:ext cx="11247120" cy="2194560"/>
+            <a:off x="548640" y="5852160"/>
+            <a:ext cx="11247120" cy="731520"/>
           </a:xfrm>
           <a:prstGeom prst="rect">
             <a:avLst/>
@@ -17683,52 +17500,18 @@
           <a:p>
             <a:pPr>
               <a:spcAft>
-                <a:spcPts val="900"/>
+                <a:spcPts val="400"/>
               </a:spcAft>
             </a:pPr>
             <a:r>
-              <a:rPr sz="1400" b="0">
+              <a:rPr sz="1200" b="0">
                 <a:solidFill>
                   <a:srgbClr val="0F172A"/>
                 </a:solidFill>
                 <a:latin typeface="PingFang TC"/>
                 <a:ea typeface="PingFang TC"/>
               </a:rPr>
-              <a:t>•  EC2 deploy-app.sh:從 SSM 撈設定 → ECR login → docker pull → docker run(換新容器)</a:t>
-            </a:r>
-          </a:p>
-          <a:p>
-            <a:pPr>
-              <a:spcAft>
-                <a:spcPts val="900"/>
-              </a:spcAft>
-            </a:pPr>
-            <a:r>
-              <a:rPr sz="1400" b="0">
-                <a:solidFill>
-                  <a:srgbClr val="0F172A"/>
-                </a:solidFill>
-                <a:latin typeface="PingFang TC"/>
-                <a:ea typeface="PingFang TC"/>
-              </a:rPr>
-              <a:t>•  全 env-gated:本機無這些環境變數 → 維持 SQLite + 記憶體 cache + 即時生圖,不受影響</a:t>
-            </a:r>
-          </a:p>
-          <a:p>
-            <a:pPr>
-              <a:spcAft>
-                <a:spcPts val="900"/>
-              </a:spcAft>
-            </a:pPr>
-            <a:r>
-              <a:rPr sz="1400" b="0">
-                <a:solidFill>
-                  <a:srgbClr val="0F172A"/>
-                </a:solidFill>
-                <a:latin typeface="PingFang TC"/>
-                <a:ea typeface="PingFang TC"/>
-              </a:rPr>
-              <a:t>•  部署踩到的兩個坑:① EC2 role 少 s3:PutObject(500)② CI build amd64 但 EC2 arm64(502)→ buildx 跨平台修正</a:t>
+              <a:t>•  解決『服務掛了沒人知道』;canary 是端到端外部探測(連 CloudFront/整鏈路掛掉都測得到)。純 infra,已 validate/plan 通過(未 apply)。</a:t>
             </a:r>
           </a:p>
         </p:txBody>
@@ -17760,13 +17543,13 @@
         <p:spPr>
           <a:xfrm>
             <a:off x="0" y="0"/>
-            <a:ext cx="12191695" cy="6858000"/>
+            <a:ext cx="164592" cy="6858000"/>
           </a:xfrm>
           <a:prstGeom prst="rect">
             <a:avLst/>
           </a:prstGeom>
           <a:solidFill>
-            <a:srgbClr val="0F172A"/>
+            <a:srgbClr val="2563EB"/>
           </a:solidFill>
           <a:ln>
             <a:noFill/>
@@ -17803,8 +17586,8 @@
         </p:nvSpPr>
         <p:spPr>
           <a:xfrm>
-            <a:off x="822960" y="1097280"/>
-            <a:ext cx="10515600" cy="1097280"/>
+            <a:off x="502920" y="320040"/>
+            <a:ext cx="10972800" cy="1005840"/>
           </a:xfrm>
           <a:prstGeom prst="rect">
             <a:avLst/>
@@ -17816,6 +17599,23 @@
             <a:spAutoFit/>
           </a:bodyPr>
           <a:lstStyle/>
+          <a:p>
+            <a:pPr algn="l">
+              <a:spcAft>
+                <a:spcPts val="200"/>
+              </a:spcAft>
+            </a:pPr>
+            <a:r>
+              <a:rPr sz="1300" b="1">
+                <a:solidFill>
+                  <a:srgbClr val="2563EB"/>
+                </a:solidFill>
+                <a:latin typeface="PingFang TC"/>
+                <a:ea typeface="PingFang TC"/>
+              </a:rPr>
+              <a:t>部署 · CI/CD</a:t>
+            </a:r>
+          </a:p>
           <a:p>
             <a:pPr algn="l">
               <a:spcAft>
@@ -17823,45 +17623,805 @@
               </a:spcAft>
             </a:pPr>
             <a:r>
-              <a:rPr sz="1600" b="1">
-                <a:solidFill>
-                  <a:srgbClr val="2563EB"/>
-                </a:solidFill>
-                <a:latin typeface="PingFang TC"/>
-                <a:ea typeface="PingFang TC"/>
-              </a:rPr>
-              <a:t>原型狀態</a:t>
-            </a:r>
-          </a:p>
-          <a:p>
-            <a:pPr algn="l">
-              <a:spcAft>
-                <a:spcPts val="400"/>
-              </a:spcAft>
-            </a:pPr>
-            <a:r>
               <a:rPr sz="3000" b="1">
                 <a:solidFill>
+                  <a:srgbClr val="0F172A"/>
+                </a:solidFill>
+                <a:latin typeface="PingFang TC"/>
+                <a:ea typeface="PingFang TC"/>
+              </a:rPr>
+              <a:t>CI/CD 流程（GitHub Actions + OIDC）</a:t>
+            </a:r>
+          </a:p>
+        </p:txBody>
+      </p:sp>
+      <p:sp>
+        <p:nvSpPr>
+          <p:cNvPr id="4" name="Rounded Rectangle 3"/>
+          <p:cNvSpPr/>
+          <p:nvPr/>
+        </p:nvSpPr>
+        <p:spPr>
+          <a:xfrm>
+            <a:off x="457200" y="2286000"/>
+            <a:ext cx="1481328" cy="1280160"/>
+          </a:xfrm>
+          <a:prstGeom prst="roundRect">
+            <a:avLst/>
+          </a:prstGeom>
+          <a:solidFill>
+            <a:srgbClr val="64748B"/>
+          </a:solidFill>
+          <a:ln>
+            <a:solidFill>
+              <a:srgbClr val="64748B"/>
+            </a:solidFill>
+          </a:ln>
+          <a:effectLst/>
+        </p:spPr>
+        <p:style>
+          <a:lnRef idx="1">
+            <a:schemeClr val="accent1"/>
+          </a:lnRef>
+          <a:fillRef idx="3">
+            <a:schemeClr val="accent1"/>
+          </a:fillRef>
+          <a:effectRef idx="2">
+            <a:schemeClr val="accent1"/>
+          </a:effectRef>
+          <a:fontRef idx="minor">
+            <a:schemeClr val="lt1"/>
+          </a:fontRef>
+        </p:style>
+        <p:txBody>
+          <a:bodyPr rtlCol="0" anchor="ctr" wrap="square" tIns="25400" bIns="25400"/>
+          <a:lstStyle/>
+          <a:p>
+            <a:pPr algn="ctr"/>
+            <a:r>
+              <a:rPr sz="1100" b="1">
+                <a:solidFill>
                   <a:srgbClr val="FFFFFF"/>
                 </a:solidFill>
                 <a:latin typeface="PingFang TC"/>
                 <a:ea typeface="PingFang TC"/>
               </a:rPr>
-              <a:t>可跑的 FastAPI 實作 + 管理頁前端</a:t>
-            </a:r>
-          </a:p>
-        </p:txBody>
-      </p:sp>
-      <p:sp>
-        <p:nvSpPr>
-          <p:cNvPr id="4" name="TextBox 3"/>
+              <a:t>git push</a:t>
+            </a:r>
+          </a:p>
+          <a:p>
+            <a:pPr algn="ctr"/>
+            <a:r>
+              <a:rPr sz="1100" b="0">
+                <a:solidFill>
+                  <a:srgbClr val="FFFFFF"/>
+                </a:solidFill>
+                <a:latin typeface="PingFang TC"/>
+                <a:ea typeface="PingFang TC"/>
+              </a:rPr>
+              <a:t>QR Code Generator/**</a:t>
+            </a:r>
+          </a:p>
+        </p:txBody>
+      </p:sp>
+      <p:cxnSp>
+        <p:nvCxnSpPr>
+          <p:cNvPr id="5" name="Connector 4"/>
+          <p:cNvCxnSpPr/>
+          <p:nvPr/>
+        </p:nvCxnSpPr>
+        <p:spPr>
+          <a:xfrm>
+            <a:off x="1938528" y="2926080"/>
+            <a:ext cx="118872" cy="0"/>
+          </a:xfrm>
+          <a:prstGeom prst="line">
+            <a:avLst/>
+          </a:prstGeom>
+          <a:ln w="22225">
+            <a:solidFill>
+              <a:srgbClr val="64748B"/>
+            </a:solidFill>
+            <a:tailEnd type="triangle" w="med" len="med"/>
+          </a:ln>
+        </p:spPr>
+        <p:style>
+          <a:lnRef idx="2">
+            <a:schemeClr val="accent1"/>
+          </a:lnRef>
+          <a:fillRef idx="0">
+            <a:schemeClr val="accent1"/>
+          </a:fillRef>
+          <a:effectRef idx="1">
+            <a:schemeClr val="accent1"/>
+          </a:effectRef>
+          <a:fontRef idx="minor">
+            <a:schemeClr val="tx1"/>
+          </a:fontRef>
+        </p:style>
+      </p:cxnSp>
+      <p:sp>
+        <p:nvSpPr>
+          <p:cNvPr id="6" name="Rounded Rectangle 5"/>
+          <p:cNvSpPr/>
+          <p:nvPr/>
+        </p:nvSpPr>
+        <p:spPr>
+          <a:xfrm>
+            <a:off x="2057400" y="2286000"/>
+            <a:ext cx="1481328" cy="1280160"/>
+          </a:xfrm>
+          <a:prstGeom prst="roundRect">
+            <a:avLst/>
+          </a:prstGeom>
+          <a:solidFill>
+            <a:srgbClr val="0EA5E9"/>
+          </a:solidFill>
+          <a:ln>
+            <a:solidFill>
+              <a:srgbClr val="0EA5E9"/>
+            </a:solidFill>
+          </a:ln>
+          <a:effectLst/>
+        </p:spPr>
+        <p:style>
+          <a:lnRef idx="1">
+            <a:schemeClr val="accent1"/>
+          </a:lnRef>
+          <a:fillRef idx="3">
+            <a:schemeClr val="accent1"/>
+          </a:fillRef>
+          <a:effectRef idx="2">
+            <a:schemeClr val="accent1"/>
+          </a:effectRef>
+          <a:fontRef idx="minor">
+            <a:schemeClr val="lt1"/>
+          </a:fontRef>
+        </p:style>
+        <p:txBody>
+          <a:bodyPr rtlCol="0" anchor="ctr" wrap="square" tIns="25400" bIns="25400"/>
+          <a:lstStyle/>
+          <a:p>
+            <a:pPr algn="ctr"/>
+            <a:r>
+              <a:rPr sz="1100" b="1">
+                <a:solidFill>
+                  <a:srgbClr val="FFFFFF"/>
+                </a:solidFill>
+                <a:latin typeface="PingFang TC"/>
+                <a:ea typeface="PingFang TC"/>
+              </a:rPr>
+              <a:t>GitHub Actions</a:t>
+            </a:r>
+          </a:p>
+          <a:p>
+            <a:pPr algn="ctr"/>
+            <a:r>
+              <a:rPr sz="1100" b="0">
+                <a:solidFill>
+                  <a:srgbClr val="FFFFFF"/>
+                </a:solidFill>
+                <a:latin typeface="PingFang TC"/>
+                <a:ea typeface="PingFang TC"/>
+              </a:rPr>
+              <a:t>OIDC assume role</a:t>
+            </a:r>
+          </a:p>
+          <a:p>
+            <a:pPr algn="ctr"/>
+            <a:r>
+              <a:rPr sz="1100" b="0">
+                <a:solidFill>
+                  <a:srgbClr val="FFFFFF"/>
+                </a:solidFill>
+                <a:latin typeface="PingFang TC"/>
+                <a:ea typeface="PingFang TC"/>
+              </a:rPr>
+              <a:t>(無長期金鑰)</a:t>
+            </a:r>
+          </a:p>
+        </p:txBody>
+      </p:sp>
+      <p:cxnSp>
+        <p:nvCxnSpPr>
+          <p:cNvPr id="7" name="Connector 6"/>
+          <p:cNvCxnSpPr/>
+          <p:nvPr/>
+        </p:nvCxnSpPr>
+        <p:spPr>
+          <a:xfrm>
+            <a:off x="3538728" y="2926080"/>
+            <a:ext cx="118872" cy="0"/>
+          </a:xfrm>
+          <a:prstGeom prst="line">
+            <a:avLst/>
+          </a:prstGeom>
+          <a:ln w="22225">
+            <a:solidFill>
+              <a:srgbClr val="64748B"/>
+            </a:solidFill>
+            <a:tailEnd type="triangle" w="med" len="med"/>
+          </a:ln>
+        </p:spPr>
+        <p:style>
+          <a:lnRef idx="2">
+            <a:schemeClr val="accent1"/>
+          </a:lnRef>
+          <a:fillRef idx="0">
+            <a:schemeClr val="accent1"/>
+          </a:fillRef>
+          <a:effectRef idx="1">
+            <a:schemeClr val="accent1"/>
+          </a:effectRef>
+          <a:fontRef idx="minor">
+            <a:schemeClr val="tx1"/>
+          </a:fontRef>
+        </p:style>
+      </p:cxnSp>
+      <p:sp>
+        <p:nvSpPr>
+          <p:cNvPr id="8" name="Rounded Rectangle 7"/>
+          <p:cNvSpPr/>
+          <p:nvPr/>
+        </p:nvSpPr>
+        <p:spPr>
+          <a:xfrm>
+            <a:off x="3657600" y="2286000"/>
+            <a:ext cx="1481328" cy="1280160"/>
+          </a:xfrm>
+          <a:prstGeom prst="roundRect">
+            <a:avLst/>
+          </a:prstGeom>
+          <a:solidFill>
+            <a:srgbClr val="2563EB"/>
+          </a:solidFill>
+          <a:ln>
+            <a:solidFill>
+              <a:srgbClr val="2563EB"/>
+            </a:solidFill>
+          </a:ln>
+          <a:effectLst/>
+        </p:spPr>
+        <p:style>
+          <a:lnRef idx="1">
+            <a:schemeClr val="accent1"/>
+          </a:lnRef>
+          <a:fillRef idx="3">
+            <a:schemeClr val="accent1"/>
+          </a:fillRef>
+          <a:effectRef idx="2">
+            <a:schemeClr val="accent1"/>
+          </a:effectRef>
+          <a:fontRef idx="minor">
+            <a:schemeClr val="lt1"/>
+          </a:fontRef>
+        </p:style>
+        <p:txBody>
+          <a:bodyPr rtlCol="0" anchor="ctr" wrap="square" tIns="25400" bIns="25400"/>
+          <a:lstStyle/>
+          <a:p>
+            <a:pPr algn="ctr"/>
+            <a:r>
+              <a:rPr sz="1100" b="1">
+                <a:solidFill>
+                  <a:srgbClr val="FFFFFF"/>
+                </a:solidFill>
+                <a:latin typeface="PingFang TC"/>
+                <a:ea typeface="PingFang TC"/>
+              </a:rPr>
+              <a:t>buildx</a:t>
+            </a:r>
+          </a:p>
+          <a:p>
+            <a:pPr algn="ctr"/>
+            <a:r>
+              <a:rPr sz="1100" b="0">
+                <a:solidFill>
+                  <a:srgbClr val="FFFFFF"/>
+                </a:solidFill>
+                <a:latin typeface="PingFang TC"/>
+                <a:ea typeface="PingFang TC"/>
+              </a:rPr>
+              <a:t>--platform</a:t>
+            </a:r>
+          </a:p>
+          <a:p>
+            <a:pPr algn="ctr"/>
+            <a:r>
+              <a:rPr sz="1100" b="0">
+                <a:solidFill>
+                  <a:srgbClr val="FFFFFF"/>
+                </a:solidFill>
+                <a:latin typeface="PingFang TC"/>
+                <a:ea typeface="PingFang TC"/>
+              </a:rPr>
+              <a:t>linux/arm64</a:t>
+            </a:r>
+          </a:p>
+        </p:txBody>
+      </p:sp>
+      <p:cxnSp>
+        <p:nvCxnSpPr>
+          <p:cNvPr id="9" name="Connector 8"/>
+          <p:cNvCxnSpPr/>
+          <p:nvPr/>
+        </p:nvCxnSpPr>
+        <p:spPr>
+          <a:xfrm>
+            <a:off x="5138928" y="2926080"/>
+            <a:ext cx="118872" cy="0"/>
+          </a:xfrm>
+          <a:prstGeom prst="line">
+            <a:avLst/>
+          </a:prstGeom>
+          <a:ln w="22225">
+            <a:solidFill>
+              <a:srgbClr val="64748B"/>
+            </a:solidFill>
+            <a:tailEnd type="triangle" w="med" len="med"/>
+          </a:ln>
+        </p:spPr>
+        <p:style>
+          <a:lnRef idx="2">
+            <a:schemeClr val="accent1"/>
+          </a:lnRef>
+          <a:fillRef idx="0">
+            <a:schemeClr val="accent1"/>
+          </a:fillRef>
+          <a:effectRef idx="1">
+            <a:schemeClr val="accent1"/>
+          </a:effectRef>
+          <a:fontRef idx="minor">
+            <a:schemeClr val="tx1"/>
+          </a:fontRef>
+        </p:style>
+      </p:cxnSp>
+      <p:sp>
+        <p:nvSpPr>
+          <p:cNvPr id="10" name="Rounded Rectangle 9"/>
+          <p:cNvSpPr/>
+          <p:nvPr/>
+        </p:nvSpPr>
+        <p:spPr>
+          <a:xfrm>
+            <a:off x="5257800" y="2286000"/>
+            <a:ext cx="1481328" cy="1280160"/>
+          </a:xfrm>
+          <a:prstGeom prst="roundRect">
+            <a:avLst/>
+          </a:prstGeom>
+          <a:solidFill>
+            <a:srgbClr val="059669"/>
+          </a:solidFill>
+          <a:ln>
+            <a:solidFill>
+              <a:srgbClr val="059669"/>
+            </a:solidFill>
+          </a:ln>
+          <a:effectLst/>
+        </p:spPr>
+        <p:style>
+          <a:lnRef idx="1">
+            <a:schemeClr val="accent1"/>
+          </a:lnRef>
+          <a:fillRef idx="3">
+            <a:schemeClr val="accent1"/>
+          </a:fillRef>
+          <a:effectRef idx="2">
+            <a:schemeClr val="accent1"/>
+          </a:effectRef>
+          <a:fontRef idx="minor">
+            <a:schemeClr val="lt1"/>
+          </a:fontRef>
+        </p:style>
+        <p:txBody>
+          <a:bodyPr rtlCol="0" anchor="ctr" wrap="square" tIns="25400" bIns="25400"/>
+          <a:lstStyle/>
+          <a:p>
+            <a:pPr algn="ctr"/>
+            <a:r>
+              <a:rPr sz="1100" b="1">
+                <a:solidFill>
+                  <a:srgbClr val="FFFFFF"/>
+                </a:solidFill>
+                <a:latin typeface="PingFang TC"/>
+                <a:ea typeface="PingFang TC"/>
+              </a:rPr>
+              <a:t>ECR push</a:t>
+            </a:r>
+          </a:p>
+          <a:p>
+            <a:pPr algn="ctr"/>
+            <a:r>
+              <a:rPr sz="1100" b="0">
+                <a:solidFill>
+                  <a:srgbClr val="FFFFFF"/>
+                </a:solidFill>
+                <a:latin typeface="PingFang TC"/>
+                <a:ea typeface="PingFang TC"/>
+              </a:rPr>
+              <a:t>tag = SHA</a:t>
+            </a:r>
+          </a:p>
+          <a:p>
+            <a:pPr algn="ctr"/>
+            <a:r>
+              <a:rPr sz="1100" b="0">
+                <a:solidFill>
+                  <a:srgbClr val="FFFFFF"/>
+                </a:solidFill>
+                <a:latin typeface="PingFang TC"/>
+                <a:ea typeface="PingFang TC"/>
+              </a:rPr>
+              <a:t>+ latest</a:t>
+            </a:r>
+          </a:p>
+        </p:txBody>
+      </p:sp>
+      <p:cxnSp>
+        <p:nvCxnSpPr>
+          <p:cNvPr id="11" name="Connector 10"/>
+          <p:cNvCxnSpPr/>
+          <p:nvPr/>
+        </p:nvCxnSpPr>
+        <p:spPr>
+          <a:xfrm>
+            <a:off x="6739128" y="2926080"/>
+            <a:ext cx="118872" cy="0"/>
+          </a:xfrm>
+          <a:prstGeom prst="line">
+            <a:avLst/>
+          </a:prstGeom>
+          <a:ln w="22225">
+            <a:solidFill>
+              <a:srgbClr val="64748B"/>
+            </a:solidFill>
+            <a:tailEnd type="triangle" w="med" len="med"/>
+          </a:ln>
+        </p:spPr>
+        <p:style>
+          <a:lnRef idx="2">
+            <a:schemeClr val="accent1"/>
+          </a:lnRef>
+          <a:fillRef idx="0">
+            <a:schemeClr val="accent1"/>
+          </a:fillRef>
+          <a:effectRef idx="1">
+            <a:schemeClr val="accent1"/>
+          </a:effectRef>
+          <a:fontRef idx="minor">
+            <a:schemeClr val="tx1"/>
+          </a:fontRef>
+        </p:style>
+      </p:cxnSp>
+      <p:sp>
+        <p:nvSpPr>
+          <p:cNvPr id="12" name="Rounded Rectangle 11"/>
+          <p:cNvSpPr/>
+          <p:nvPr/>
+        </p:nvSpPr>
+        <p:spPr>
+          <a:xfrm>
+            <a:off x="6858000" y="2286000"/>
+            <a:ext cx="1481328" cy="1280160"/>
+          </a:xfrm>
+          <a:prstGeom prst="roundRect">
+            <a:avLst/>
+          </a:prstGeom>
+          <a:solidFill>
+            <a:srgbClr val="7C3AED"/>
+          </a:solidFill>
+          <a:ln>
+            <a:solidFill>
+              <a:srgbClr val="7C3AED"/>
+            </a:solidFill>
+          </a:ln>
+          <a:effectLst/>
+        </p:spPr>
+        <p:style>
+          <a:lnRef idx="1">
+            <a:schemeClr val="accent1"/>
+          </a:lnRef>
+          <a:fillRef idx="3">
+            <a:schemeClr val="accent1"/>
+          </a:fillRef>
+          <a:effectRef idx="2">
+            <a:schemeClr val="accent1"/>
+          </a:effectRef>
+          <a:fontRef idx="minor">
+            <a:schemeClr val="lt1"/>
+          </a:fontRef>
+        </p:style>
+        <p:txBody>
+          <a:bodyPr rtlCol="0" anchor="ctr" wrap="square" tIns="25400" bIns="25400"/>
+          <a:lstStyle/>
+          <a:p>
+            <a:pPr algn="ctr"/>
+            <a:r>
+              <a:rPr sz="1100" b="1">
+                <a:solidFill>
+                  <a:srgbClr val="FFFFFF"/>
+                </a:solidFill>
+                <a:latin typeface="PingFang TC"/>
+                <a:ea typeface="PingFang TC"/>
+              </a:rPr>
+              <a:t>SSM 更新</a:t>
+            </a:r>
+          </a:p>
+          <a:p>
+            <a:pPr algn="ctr"/>
+            <a:r>
+              <a:rPr sz="1100" b="0">
+                <a:solidFill>
+                  <a:srgbClr val="FFFFFF"/>
+                </a:solidFill>
+                <a:latin typeface="PingFang TC"/>
+                <a:ea typeface="PingFang TC"/>
+              </a:rPr>
+              <a:t>/qrcode/</a:t>
+            </a:r>
+          </a:p>
+          <a:p>
+            <a:pPr algn="ctr"/>
+            <a:r>
+              <a:rPr sz="1100" b="0">
+                <a:solidFill>
+                  <a:srgbClr val="FFFFFF"/>
+                </a:solidFill>
+                <a:latin typeface="PingFang TC"/>
+                <a:ea typeface="PingFang TC"/>
+              </a:rPr>
+              <a:t>IMAGE_URI</a:t>
+            </a:r>
+          </a:p>
+        </p:txBody>
+      </p:sp>
+      <p:cxnSp>
+        <p:nvCxnSpPr>
+          <p:cNvPr id="13" name="Connector 12"/>
+          <p:cNvCxnSpPr/>
+          <p:nvPr/>
+        </p:nvCxnSpPr>
+        <p:spPr>
+          <a:xfrm>
+            <a:off x="8339328" y="2926080"/>
+            <a:ext cx="118872" cy="0"/>
+          </a:xfrm>
+          <a:prstGeom prst="line">
+            <a:avLst/>
+          </a:prstGeom>
+          <a:ln w="22225">
+            <a:solidFill>
+              <a:srgbClr val="64748B"/>
+            </a:solidFill>
+            <a:tailEnd type="triangle" w="med" len="med"/>
+          </a:ln>
+        </p:spPr>
+        <p:style>
+          <a:lnRef idx="2">
+            <a:schemeClr val="accent1"/>
+          </a:lnRef>
+          <a:fillRef idx="0">
+            <a:schemeClr val="accent1"/>
+          </a:fillRef>
+          <a:effectRef idx="1">
+            <a:schemeClr val="accent1"/>
+          </a:effectRef>
+          <a:fontRef idx="minor">
+            <a:schemeClr val="tx1"/>
+          </a:fontRef>
+        </p:style>
+      </p:cxnSp>
+      <p:sp>
+        <p:nvSpPr>
+          <p:cNvPr id="14" name="Rounded Rectangle 13"/>
+          <p:cNvSpPr/>
+          <p:nvPr/>
+        </p:nvSpPr>
+        <p:spPr>
+          <a:xfrm>
+            <a:off x="8458200" y="2286000"/>
+            <a:ext cx="1481328" cy="1280160"/>
+          </a:xfrm>
+          <a:prstGeom prst="roundRect">
+            <a:avLst/>
+          </a:prstGeom>
+          <a:solidFill>
+            <a:srgbClr val="D97706"/>
+          </a:solidFill>
+          <a:ln>
+            <a:solidFill>
+              <a:srgbClr val="D97706"/>
+            </a:solidFill>
+          </a:ln>
+          <a:effectLst/>
+        </p:spPr>
+        <p:style>
+          <a:lnRef idx="1">
+            <a:schemeClr val="accent1"/>
+          </a:lnRef>
+          <a:fillRef idx="3">
+            <a:schemeClr val="accent1"/>
+          </a:fillRef>
+          <a:effectRef idx="2">
+            <a:schemeClr val="accent1"/>
+          </a:effectRef>
+          <a:fontRef idx="minor">
+            <a:schemeClr val="lt1"/>
+          </a:fontRef>
+        </p:style>
+        <p:txBody>
+          <a:bodyPr rtlCol="0" anchor="ctr" wrap="square" tIns="25400" bIns="25400"/>
+          <a:lstStyle/>
+          <a:p>
+            <a:pPr algn="ctr"/>
+            <a:r>
+              <a:rPr sz="1100" b="1">
+                <a:solidFill>
+                  <a:srgbClr val="FFFFFF"/>
+                </a:solidFill>
+                <a:latin typeface="PingFang TC"/>
+                <a:ea typeface="PingFang TC"/>
+              </a:rPr>
+              <a:t>SSM 部署</a:t>
+            </a:r>
+          </a:p>
+          <a:p>
+            <a:pPr algn="ctr"/>
+            <a:r>
+              <a:rPr sz="1100" b="0">
+                <a:solidFill>
+                  <a:srgbClr val="FFFFFF"/>
+                </a:solidFill>
+                <a:latin typeface="PingFang TC"/>
+                <a:ea typeface="PingFang TC"/>
+              </a:rPr>
+              <a:t>→ EC2</a:t>
+            </a:r>
+          </a:p>
+          <a:p>
+            <a:pPr algn="ctr"/>
+            <a:r>
+              <a:rPr sz="1100" b="0">
+                <a:solidFill>
+                  <a:srgbClr val="FFFFFF"/>
+                </a:solidFill>
+                <a:latin typeface="PingFang TC"/>
+                <a:ea typeface="PingFang TC"/>
+              </a:rPr>
+              <a:t>deploy-app.sh</a:t>
+            </a:r>
+          </a:p>
+        </p:txBody>
+      </p:sp>
+      <p:cxnSp>
+        <p:nvCxnSpPr>
+          <p:cNvPr id="15" name="Connector 14"/>
+          <p:cNvCxnSpPr/>
+          <p:nvPr/>
+        </p:nvCxnSpPr>
+        <p:spPr>
+          <a:xfrm>
+            <a:off x="9939528" y="2926080"/>
+            <a:ext cx="118872" cy="0"/>
+          </a:xfrm>
+          <a:prstGeom prst="line">
+            <a:avLst/>
+          </a:prstGeom>
+          <a:ln w="22225">
+            <a:solidFill>
+              <a:srgbClr val="64748B"/>
+            </a:solidFill>
+            <a:tailEnd type="triangle" w="med" len="med"/>
+          </a:ln>
+        </p:spPr>
+        <p:style>
+          <a:lnRef idx="2">
+            <a:schemeClr val="accent1"/>
+          </a:lnRef>
+          <a:fillRef idx="0">
+            <a:schemeClr val="accent1"/>
+          </a:fillRef>
+          <a:effectRef idx="1">
+            <a:schemeClr val="accent1"/>
+          </a:effectRef>
+          <a:fontRef idx="minor">
+            <a:schemeClr val="tx1"/>
+          </a:fontRef>
+        </p:style>
+      </p:cxnSp>
+      <p:sp>
+        <p:nvSpPr>
+          <p:cNvPr id="16" name="Rounded Rectangle 15"/>
+          <p:cNvSpPr/>
+          <p:nvPr/>
+        </p:nvSpPr>
+        <p:spPr>
+          <a:xfrm>
+            <a:off x="10058400" y="2286000"/>
+            <a:ext cx="1481328" cy="1280160"/>
+          </a:xfrm>
+          <a:prstGeom prst="roundRect">
+            <a:avLst/>
+          </a:prstGeom>
+          <a:solidFill>
+            <a:srgbClr val="059669"/>
+          </a:solidFill>
+          <a:ln>
+            <a:solidFill>
+              <a:srgbClr val="059669"/>
+            </a:solidFill>
+          </a:ln>
+          <a:effectLst/>
+        </p:spPr>
+        <p:style>
+          <a:lnRef idx="1">
+            <a:schemeClr val="accent1"/>
+          </a:lnRef>
+          <a:fillRef idx="3">
+            <a:schemeClr val="accent1"/>
+          </a:fillRef>
+          <a:effectRef idx="2">
+            <a:schemeClr val="accent1"/>
+          </a:effectRef>
+          <a:fontRef idx="minor">
+            <a:schemeClr val="lt1"/>
+          </a:fontRef>
+        </p:style>
+        <p:txBody>
+          <a:bodyPr rtlCol="0" anchor="ctr" wrap="square" tIns="25400" bIns="25400"/>
+          <a:lstStyle/>
+          <a:p>
+            <a:pPr algn="ctr"/>
+            <a:r>
+              <a:rPr sz="1100" b="1">
+                <a:solidFill>
+                  <a:srgbClr val="FFFFFF"/>
+                </a:solidFill>
+                <a:latin typeface="PingFang TC"/>
+                <a:ea typeface="PingFang TC"/>
+              </a:rPr>
+              <a:t>上線</a:t>
+            </a:r>
+          </a:p>
+          <a:p>
+            <a:pPr algn="ctr"/>
+            <a:r>
+              <a:rPr sz="1100" b="0">
+                <a:solidFill>
+                  <a:srgbClr val="FFFFFF"/>
+                </a:solidFill>
+                <a:latin typeface="PingFang TC"/>
+                <a:ea typeface="PingFang TC"/>
+              </a:rPr>
+              <a:t>ALB /health</a:t>
+            </a:r>
+          </a:p>
+          <a:p>
+            <a:pPr algn="ctr"/>
+            <a:r>
+              <a:rPr sz="1100" b="0">
+                <a:solidFill>
+                  <a:srgbClr val="FFFFFF"/>
+                </a:solidFill>
+                <a:latin typeface="PingFang TC"/>
+                <a:ea typeface="PingFang TC"/>
+              </a:rPr>
+              <a:t>通過</a:t>
+            </a:r>
+          </a:p>
+        </p:txBody>
+      </p:sp>
+      <p:sp>
+        <p:nvSpPr>
+          <p:cNvPr id="17" name="TextBox 16"/>
           <p:cNvSpPr txBox="1"/>
           <p:nvPr/>
         </p:nvSpPr>
         <p:spPr>
           <a:xfrm>
-            <a:off x="822960" y="2743200"/>
-            <a:ext cx="10515600" cy="2743200"/>
+            <a:off x="548640" y="4023360"/>
+            <a:ext cx="11247120" cy="2194560"/>
           </a:xfrm>
           <a:prstGeom prst="rect">
             <a:avLst/>
@@ -17876,69 +18436,52 @@
           <a:p>
             <a:pPr>
               <a:spcAft>
-                <a:spcPts val="1200"/>
+                <a:spcPts val="900"/>
               </a:spcAft>
             </a:pPr>
             <a:r>
-              <a:rPr sz="1600" b="0">
-                <a:solidFill>
-                  <a:srgbClr val="E2E8F0"/>
-                </a:solidFill>
-                <a:latin typeface="PingFang TC"/>
-                <a:ea typeface="PingFang TC"/>
-              </a:rPr>
-              <a:t>✓  7 個 API 端點 + 管理頁前端（建立/清單/編輯/刪除/分析）</a:t>
+              <a:rPr sz="1400" b="0">
+                <a:solidFill>
+                  <a:srgbClr val="0F172A"/>
+                </a:solidFill>
+                <a:latin typeface="PingFang TC"/>
+                <a:ea typeface="PingFang TC"/>
+              </a:rPr>
+              <a:t>•  EC2 deploy-app.sh:從 SSM 撈設定 → ECR login → docker pull → docker run(換新容器)</a:t>
             </a:r>
           </a:p>
           <a:p>
             <a:pPr>
               <a:spcAft>
-                <a:spcPts val="1200"/>
+                <a:spcPts val="900"/>
               </a:spcAft>
             </a:pPr>
             <a:r>
-              <a:rPr sz="1600" b="0">
-                <a:solidFill>
-                  <a:srgbClr val="E2E8F0"/>
-                </a:solidFill>
-                <a:latin typeface="PingFang TC"/>
-                <a:ea typeface="PingFang TC"/>
-              </a:rPr>
-              <a:t>✓  全部 curl 驗證通過：302 / 404 / 410 / 8 碼 token / 正規化 / SSRF / 過期</a:t>
+              <a:rPr sz="1400" b="0">
+                <a:solidFill>
+                  <a:srgbClr val="0F172A"/>
+                </a:solidFill>
+                <a:latin typeface="PingFang TC"/>
+                <a:ea typeface="PingFang TC"/>
+              </a:rPr>
+              <a:t>•  全 env-gated:本機無這些環境變數 → 維持 SQLite + 記憶體 cache + 即時生圖,不受影響</a:t>
             </a:r>
           </a:p>
           <a:p>
             <a:pPr>
               <a:spcAft>
-                <a:spcPts val="1200"/>
+                <a:spcPts val="900"/>
               </a:spcAft>
             </a:pPr>
             <a:r>
-              <a:rPr sz="1600" b="0">
-                <a:solidFill>
-                  <a:srgbClr val="E2E8F0"/>
-                </a:solidFill>
-                <a:latin typeface="PingFang TC"/>
-                <a:ea typeface="PingFang TC"/>
-              </a:rPr>
-              <a:t>✓  production 替換點已在程式註解標明（Redis / 佇列 / CDN / 預聚合 / PostgreSQL）</a:t>
-            </a:r>
-          </a:p>
-          <a:p>
-            <a:pPr>
-              <a:spcAft>
-                <a:spcPts val="1200"/>
-              </a:spcAft>
-            </a:pPr>
-            <a:r>
-              <a:rPr sz="1600" b="0">
-                <a:solidFill>
-                  <a:srgbClr val="E2E8F0"/>
-                </a:solidFill>
-                <a:latin typeface="PingFang TC"/>
-                <a:ea typeface="PingFang TC"/>
-              </a:rPr>
-              <a:t>✓  設計依據：DESIGN.md（16 題決策 + 優劣分析）</a:t>
+              <a:rPr sz="1400" b="0">
+                <a:solidFill>
+                  <a:srgbClr val="0F172A"/>
+                </a:solidFill>
+                <a:latin typeface="PingFang TC"/>
+                <a:ea typeface="PingFang TC"/>
+              </a:rPr>
+              <a:t>•  部署踩到的兩個坑:① EC2 role 少 s3:PutObject(500)② CI build amd64 但 EC2 arm64(502)→ buildx 跨平台修正</a:t>
             </a:r>
           </a:p>
         </p:txBody>
@@ -17970,13 +18513,13 @@
         <p:spPr>
           <a:xfrm>
             <a:off x="0" y="0"/>
-            <a:ext cx="164592" cy="6858000"/>
+            <a:ext cx="12191695" cy="6858000"/>
           </a:xfrm>
           <a:prstGeom prst="rect">
             <a:avLst/>
           </a:prstGeom>
           <a:solidFill>
-            <a:srgbClr val="2563EB"/>
+            <a:srgbClr val="0F172A"/>
           </a:solidFill>
           <a:ln>
             <a:noFill/>
@@ -18013,8 +18556,8 @@
         </p:nvSpPr>
         <p:spPr>
           <a:xfrm>
-            <a:off x="502920" y="320040"/>
-            <a:ext cx="10972800" cy="1005840"/>
+            <a:off x="822960" y="1097280"/>
+            <a:ext cx="10515600" cy="1097280"/>
           </a:xfrm>
           <a:prstGeom prst="rect">
             <a:avLst/>
@@ -18026,23 +18569,6 @@
             <a:spAutoFit/>
           </a:bodyPr>
           <a:lstStyle/>
-          <a:p>
-            <a:pPr algn="l">
-              <a:spcAft>
-                <a:spcPts val="200"/>
-              </a:spcAft>
-            </a:pPr>
-            <a:r>
-              <a:rPr sz="1300" b="1">
-                <a:solidFill>
-                  <a:srgbClr val="2563EB"/>
-                </a:solidFill>
-                <a:latin typeface="PingFang TC"/>
-                <a:ea typeface="PingFang TC"/>
-              </a:rPr>
-              <a:t>下週預告 · NEXT WEEK</a:t>
-            </a:r>
-          </a:p>
           <a:p>
             <a:pPr algn="l">
               <a:spcAft>
@@ -18050,39 +18576,16 @@
               </a:spcAft>
             </a:pPr>
             <a:r>
-              <a:rPr sz="3000" b="1">
-                <a:solidFill>
-                  <a:srgbClr val="0F172A"/>
-                </a:solidFill>
-                <a:latin typeface="PingFang TC"/>
-                <a:ea typeface="PingFang TC"/>
-              </a:rPr>
-              <a:t>從 Prototype 到 Production 的巨大鴻溝</a:t>
-            </a:r>
-          </a:p>
-        </p:txBody>
-      </p:sp>
-      <p:sp>
-        <p:nvSpPr>
-          <p:cNvPr id="4" name="TextBox 3"/>
-          <p:cNvSpPr txBox="1"/>
-          <p:nvPr/>
-        </p:nvSpPr>
-        <p:spPr>
-          <a:xfrm>
-            <a:off x="548640" y="1371600"/>
-            <a:ext cx="10972800" cy="365760"/>
-          </a:xfrm>
-          <a:prstGeom prst="rect">
-            <a:avLst/>
-          </a:prstGeom>
-          <a:noFill/>
-        </p:spPr>
-        <p:txBody>
-          <a:bodyPr wrap="square" anchor="t">
-            <a:spAutoFit/>
-          </a:bodyPr>
-          <a:lstStyle/>
+              <a:rPr sz="1600" b="1">
+                <a:solidFill>
+                  <a:srgbClr val="2563EB"/>
+                </a:solidFill>
+                <a:latin typeface="PingFang TC"/>
+                <a:ea typeface="PingFang TC"/>
+              </a:rPr>
+              <a:t>原型狀態</a:t>
+            </a:r>
+          </a:p>
           <a:p>
             <a:pPr algn="l">
               <a:spcAft>
@@ -18090,897 +18593,105 @@
               </a:spcAft>
             </a:pPr>
             <a:r>
-              <a:rPr sz="1400" b="0">
-                <a:solidFill>
-                  <a:srgbClr val="64748B"/>
-                </a:solidFill>
-                <a:latin typeface="PingFang TC"/>
-                <a:ea typeface="PingFang TC"/>
-              </a:rPr>
-              <a:t>快速掃過，建立全貌 — 下週 Deep Dive 才是主菜</a:t>
-            </a:r>
-          </a:p>
-        </p:txBody>
-      </p:sp>
-      <p:sp>
-        <p:nvSpPr>
-          <p:cNvPr id="5" name="Rounded Rectangle 4"/>
-          <p:cNvSpPr/>
-          <p:nvPr/>
-        </p:nvSpPr>
-        <p:spPr>
-          <a:xfrm>
-            <a:off x="548640" y="1965960"/>
-            <a:ext cx="3611880" cy="1600200"/>
-          </a:xfrm>
-          <a:prstGeom prst="roundRect">
-            <a:avLst/>
-          </a:prstGeom>
-          <a:solidFill>
-            <a:srgbClr val="F1F5F9"/>
-          </a:solidFill>
-          <a:ln>
-            <a:solidFill>
-              <a:srgbClr val="F1F5F9"/>
-            </a:solidFill>
-          </a:ln>
-          <a:effectLst/>
-        </p:spPr>
-        <p:style>
-          <a:lnRef idx="1">
-            <a:schemeClr val="accent1"/>
-          </a:lnRef>
-          <a:fillRef idx="3">
-            <a:schemeClr val="accent1"/>
-          </a:fillRef>
-          <a:effectRef idx="2">
-            <a:schemeClr val="accent1"/>
-          </a:effectRef>
-          <a:fontRef idx="minor">
-            <a:schemeClr val="lt1"/>
-          </a:fontRef>
-        </p:style>
-        <p:txBody>
-          <a:bodyPr rtlCol="0" anchor="ctr"/>
-          <a:lstStyle/>
-          <a:p>
-            <a:pPr algn="ctr"/>
-          </a:p>
-        </p:txBody>
-      </p:sp>
-      <p:sp>
-        <p:nvSpPr>
-          <p:cNvPr id="6" name="Rectangle 5"/>
-          <p:cNvSpPr/>
-          <p:nvPr/>
-        </p:nvSpPr>
-        <p:spPr>
-          <a:xfrm>
-            <a:off x="548640" y="1965960"/>
-            <a:ext cx="82296" cy="1600200"/>
+              <a:rPr sz="3000" b="1">
+                <a:solidFill>
+                  <a:srgbClr val="FFFFFF"/>
+                </a:solidFill>
+                <a:latin typeface="PingFang TC"/>
+                <a:ea typeface="PingFang TC"/>
+              </a:rPr>
+              <a:t>可跑的 FastAPI 實作 + 管理頁前端</a:t>
+            </a:r>
+          </a:p>
+        </p:txBody>
+      </p:sp>
+      <p:sp>
+        <p:nvSpPr>
+          <p:cNvPr id="4" name="TextBox 3"/>
+          <p:cNvSpPr txBox="1"/>
+          <p:nvPr/>
+        </p:nvSpPr>
+        <p:spPr>
+          <a:xfrm>
+            <a:off x="822960" y="2743200"/>
+            <a:ext cx="10515600" cy="2743200"/>
           </a:xfrm>
           <a:prstGeom prst="rect">
             <a:avLst/>
           </a:prstGeom>
-          <a:solidFill>
-            <a:srgbClr val="D97706"/>
-          </a:solidFill>
-          <a:ln>
-            <a:noFill/>
-          </a:ln>
-          <a:effectLst/>
-        </p:spPr>
-        <p:style>
-          <a:lnRef idx="1">
-            <a:schemeClr val="accent1"/>
-          </a:lnRef>
-          <a:fillRef idx="3">
-            <a:schemeClr val="accent1"/>
-          </a:fillRef>
-          <a:effectRef idx="2">
-            <a:schemeClr val="accent1"/>
-          </a:effectRef>
-          <a:fontRef idx="minor">
-            <a:schemeClr val="lt1"/>
-          </a:fontRef>
-        </p:style>
-        <p:txBody>
-          <a:bodyPr rtlCol="0" anchor="ctr"/>
-          <a:lstStyle/>
-          <a:p>
-            <a:pPr algn="ctr"/>
-          </a:p>
-        </p:txBody>
-      </p:sp>
-      <p:sp>
-        <p:nvSpPr>
-          <p:cNvPr id="7" name="TextBox 6"/>
-          <p:cNvSpPr txBox="1"/>
-          <p:nvPr/>
-        </p:nvSpPr>
-        <p:spPr>
-          <a:xfrm>
-            <a:off x="822960" y="2148840"/>
-            <a:ext cx="3154680" cy="1325880"/>
-          </a:xfrm>
-          <a:prstGeom prst="rect">
-            <a:avLst/>
-          </a:prstGeom>
           <a:noFill/>
         </p:spPr>
         <p:txBody>
-          <a:bodyPr wrap="square" anchor="t">
+          <a:bodyPr wrap="square">
             <a:spAutoFit/>
           </a:bodyPr>
           <a:lstStyle/>
           <a:p>
-            <a:pPr algn="l">
+            <a:pPr>
               <a:spcAft>
-                <a:spcPts val="800"/>
+                <a:spcPts val="1200"/>
               </a:spcAft>
             </a:pPr>
             <a:r>
-              <a:rPr sz="1600" b="1">
-                <a:solidFill>
-                  <a:srgbClr val="0F172A"/>
-                </a:solidFill>
-                <a:latin typeface="PingFang TC"/>
-                <a:ea typeface="PingFang TC"/>
-              </a:rPr>
-              <a:t>[Error Handling]</a:t>
-            </a:r>
-          </a:p>
-          <a:p>
-            <a:pPr algn="l">
+              <a:rPr sz="1600" b="0">
+                <a:solidFill>
+                  <a:srgbClr val="E2E8F0"/>
+                </a:solidFill>
+                <a:latin typeface="PingFang TC"/>
+                <a:ea typeface="PingFang TC"/>
+              </a:rPr>
+              <a:t>✓  7 個 API 端點 + 管理頁前端（建立/清單/編輯/刪除/分析）</a:t>
+            </a:r>
+          </a:p>
+          <a:p>
+            <a:pPr>
               <a:spcAft>
-                <a:spcPts val="400"/>
+                <a:spcPts val="1200"/>
               </a:spcAft>
             </a:pPr>
             <a:r>
-              <a:rPr sz="1300" b="0">
-                <a:solidFill>
-                  <a:srgbClr val="64748B"/>
-                </a:solidFill>
-                <a:latin typeface="PingFang TC"/>
-                <a:ea typeface="PingFang TC"/>
-              </a:rPr>
-              <a:t>遇到不合法輸入直接 Crash。</a:t>
-            </a:r>
-          </a:p>
-        </p:txBody>
-      </p:sp>
-      <p:sp>
-        <p:nvSpPr>
-          <p:cNvPr id="8" name="Rounded Rectangle 7"/>
-          <p:cNvSpPr/>
-          <p:nvPr/>
-        </p:nvSpPr>
-        <p:spPr>
-          <a:xfrm>
-            <a:off x="4407408" y="1965960"/>
-            <a:ext cx="3611880" cy="1600200"/>
-          </a:xfrm>
-          <a:prstGeom prst="roundRect">
-            <a:avLst/>
-          </a:prstGeom>
-          <a:solidFill>
-            <a:srgbClr val="F1F5F9"/>
-          </a:solidFill>
-          <a:ln>
-            <a:solidFill>
-              <a:srgbClr val="F1F5F9"/>
-            </a:solidFill>
-          </a:ln>
-          <a:effectLst/>
-        </p:spPr>
-        <p:style>
-          <a:lnRef idx="1">
-            <a:schemeClr val="accent1"/>
-          </a:lnRef>
-          <a:fillRef idx="3">
-            <a:schemeClr val="accent1"/>
-          </a:fillRef>
-          <a:effectRef idx="2">
-            <a:schemeClr val="accent1"/>
-          </a:effectRef>
-          <a:fontRef idx="minor">
-            <a:schemeClr val="lt1"/>
-          </a:fontRef>
-        </p:style>
-        <p:txBody>
-          <a:bodyPr rtlCol="0" anchor="ctr"/>
-          <a:lstStyle/>
-          <a:p>
-            <a:pPr algn="ctr"/>
-          </a:p>
-        </p:txBody>
-      </p:sp>
-      <p:sp>
-        <p:nvSpPr>
-          <p:cNvPr id="9" name="Rectangle 8"/>
-          <p:cNvSpPr/>
-          <p:nvPr/>
-        </p:nvSpPr>
-        <p:spPr>
-          <a:xfrm>
-            <a:off x="4407408" y="1965960"/>
-            <a:ext cx="82296" cy="1600200"/>
-          </a:xfrm>
-          <a:prstGeom prst="rect">
-            <a:avLst/>
-          </a:prstGeom>
-          <a:solidFill>
-            <a:srgbClr val="D97706"/>
-          </a:solidFill>
-          <a:ln>
-            <a:noFill/>
-          </a:ln>
-          <a:effectLst/>
-        </p:spPr>
-        <p:style>
-          <a:lnRef idx="1">
-            <a:schemeClr val="accent1"/>
-          </a:lnRef>
-          <a:fillRef idx="3">
-            <a:schemeClr val="accent1"/>
-          </a:fillRef>
-          <a:effectRef idx="2">
-            <a:schemeClr val="accent1"/>
-          </a:effectRef>
-          <a:fontRef idx="minor">
-            <a:schemeClr val="lt1"/>
-          </a:fontRef>
-        </p:style>
-        <p:txBody>
-          <a:bodyPr rtlCol="0" anchor="ctr"/>
-          <a:lstStyle/>
-          <a:p>
-            <a:pPr algn="ctr"/>
-          </a:p>
-        </p:txBody>
-      </p:sp>
-      <p:sp>
-        <p:nvSpPr>
-          <p:cNvPr id="10" name="TextBox 9"/>
-          <p:cNvSpPr txBox="1"/>
-          <p:nvPr/>
-        </p:nvSpPr>
-        <p:spPr>
-          <a:xfrm>
-            <a:off x="4681728" y="2148840"/>
-            <a:ext cx="3154680" cy="1325880"/>
-          </a:xfrm>
-          <a:prstGeom prst="rect">
-            <a:avLst/>
-          </a:prstGeom>
-          <a:noFill/>
-        </p:spPr>
-        <p:txBody>
-          <a:bodyPr wrap="square" anchor="t">
-            <a:spAutoFit/>
-          </a:bodyPr>
-          <a:lstStyle/>
-          <a:p>
-            <a:pPr algn="l">
+              <a:rPr sz="1600" b="0">
+                <a:solidFill>
+                  <a:srgbClr val="E2E8F0"/>
+                </a:solidFill>
+                <a:latin typeface="PingFang TC"/>
+                <a:ea typeface="PingFang TC"/>
+              </a:rPr>
+              <a:t>✓  全部 curl 驗證通過：302 / 404 / 410 / 8 碼 token / 正規化 / SSRF / 過期</a:t>
+            </a:r>
+          </a:p>
+          <a:p>
+            <a:pPr>
               <a:spcAft>
-                <a:spcPts val="800"/>
+                <a:spcPts val="1200"/>
               </a:spcAft>
             </a:pPr>
             <a:r>
-              <a:rPr sz="1600" b="1">
-                <a:solidFill>
-                  <a:srgbClr val="0F172A"/>
-                </a:solidFill>
-                <a:latin typeface="PingFang TC"/>
-                <a:ea typeface="PingFang TC"/>
-              </a:rPr>
-              <a:t>[Rate Limiting]</a:t>
-            </a:r>
-          </a:p>
-          <a:p>
-            <a:pPr algn="l">
+              <a:rPr sz="1600" b="0">
+                <a:solidFill>
+                  <a:srgbClr val="E2E8F0"/>
+                </a:solidFill>
+                <a:latin typeface="PingFang TC"/>
+                <a:ea typeface="PingFang TC"/>
+              </a:rPr>
+              <a:t>✓  production 替換點已在程式註解標明（Redis / 佇列 / CDN / 預聚合 / PostgreSQL）</a:t>
+            </a:r>
+          </a:p>
+          <a:p>
+            <a:pPr>
               <a:spcAft>
-                <a:spcPts val="400"/>
+                <a:spcPts val="1200"/>
               </a:spcAft>
             </a:pPr>
             <a:r>
-              <a:rPr sz="1300" b="0">
-                <a:solidFill>
-                  <a:srgbClr val="64748B"/>
-                </a:solidFill>
-                <a:latin typeface="PingFang TC"/>
-                <a:ea typeface="PingFang TC"/>
-              </a:rPr>
-              <a:t>毫無防護，極易被 Script 惡意灌爆 API。</a:t>
-            </a:r>
-          </a:p>
-        </p:txBody>
-      </p:sp>
-      <p:sp>
-        <p:nvSpPr>
-          <p:cNvPr id="11" name="Rounded Rectangle 10"/>
-          <p:cNvSpPr/>
-          <p:nvPr/>
-        </p:nvSpPr>
-        <p:spPr>
-          <a:xfrm>
-            <a:off x="8266176" y="1965960"/>
-            <a:ext cx="3611880" cy="1600200"/>
-          </a:xfrm>
-          <a:prstGeom prst="roundRect">
-            <a:avLst/>
-          </a:prstGeom>
-          <a:solidFill>
-            <a:srgbClr val="F1F5F9"/>
-          </a:solidFill>
-          <a:ln>
-            <a:solidFill>
-              <a:srgbClr val="F1F5F9"/>
-            </a:solidFill>
-          </a:ln>
-          <a:effectLst/>
-        </p:spPr>
-        <p:style>
-          <a:lnRef idx="1">
-            <a:schemeClr val="accent1"/>
-          </a:lnRef>
-          <a:fillRef idx="3">
-            <a:schemeClr val="accent1"/>
-          </a:fillRef>
-          <a:effectRef idx="2">
-            <a:schemeClr val="accent1"/>
-          </a:effectRef>
-          <a:fontRef idx="minor">
-            <a:schemeClr val="lt1"/>
-          </a:fontRef>
-        </p:style>
-        <p:txBody>
-          <a:bodyPr rtlCol="0" anchor="ctr"/>
-          <a:lstStyle/>
-          <a:p>
-            <a:pPr algn="ctr"/>
-          </a:p>
-        </p:txBody>
-      </p:sp>
-      <p:sp>
-        <p:nvSpPr>
-          <p:cNvPr id="12" name="Rectangle 11"/>
-          <p:cNvSpPr/>
-          <p:nvPr/>
-        </p:nvSpPr>
-        <p:spPr>
-          <a:xfrm>
-            <a:off x="8266176" y="1965960"/>
-            <a:ext cx="82296" cy="1600200"/>
-          </a:xfrm>
-          <a:prstGeom prst="rect">
-            <a:avLst/>
-          </a:prstGeom>
-          <a:solidFill>
-            <a:srgbClr val="D97706"/>
-          </a:solidFill>
-          <a:ln>
-            <a:noFill/>
-          </a:ln>
-          <a:effectLst/>
-        </p:spPr>
-        <p:style>
-          <a:lnRef idx="1">
-            <a:schemeClr val="accent1"/>
-          </a:lnRef>
-          <a:fillRef idx="3">
-            <a:schemeClr val="accent1"/>
-          </a:fillRef>
-          <a:effectRef idx="2">
-            <a:schemeClr val="accent1"/>
-          </a:effectRef>
-          <a:fontRef idx="minor">
-            <a:schemeClr val="lt1"/>
-          </a:fontRef>
-        </p:style>
-        <p:txBody>
-          <a:bodyPr rtlCol="0" anchor="ctr"/>
-          <a:lstStyle/>
-          <a:p>
-            <a:pPr algn="ctr"/>
-          </a:p>
-        </p:txBody>
-      </p:sp>
-      <p:sp>
-        <p:nvSpPr>
-          <p:cNvPr id="13" name="TextBox 12"/>
-          <p:cNvSpPr txBox="1"/>
-          <p:nvPr/>
-        </p:nvSpPr>
-        <p:spPr>
-          <a:xfrm>
-            <a:off x="8540496" y="2148840"/>
-            <a:ext cx="3154680" cy="1325880"/>
-          </a:xfrm>
-          <a:prstGeom prst="rect">
-            <a:avLst/>
-          </a:prstGeom>
-          <a:noFill/>
-        </p:spPr>
-        <p:txBody>
-          <a:bodyPr wrap="square" anchor="t">
-            <a:spAutoFit/>
-          </a:bodyPr>
-          <a:lstStyle/>
-          <a:p>
-            <a:pPr algn="l">
-              <a:spcAft>
-                <a:spcPts val="800"/>
-              </a:spcAft>
-            </a:pPr>
-            <a:r>
-              <a:rPr sz="1600" b="1">
-                <a:solidFill>
-                  <a:srgbClr val="0F172A"/>
-                </a:solidFill>
-                <a:latin typeface="PingFang TC"/>
-                <a:ea typeface="PingFang TC"/>
-              </a:rPr>
-              <a:t>[Auth &amp; Isolation]</a:t>
-            </a:r>
-          </a:p>
-          <a:p>
-            <a:pPr algn="l">
-              <a:spcAft>
-                <a:spcPts val="400"/>
-              </a:spcAft>
-            </a:pPr>
-            <a:r>
-              <a:rPr sz="1300" b="0">
-                <a:solidFill>
-                  <a:srgbClr val="64748B"/>
-                </a:solidFill>
-                <a:latin typeface="PingFang TC"/>
-                <a:ea typeface="PingFang TC"/>
-              </a:rPr>
-              <a:t>缺乏多租戶概念，資料全公開。</a:t>
-            </a:r>
-          </a:p>
-        </p:txBody>
-      </p:sp>
-      <p:sp>
-        <p:nvSpPr>
-          <p:cNvPr id="14" name="Rounded Rectangle 13"/>
-          <p:cNvSpPr/>
-          <p:nvPr/>
-        </p:nvSpPr>
-        <p:spPr>
-          <a:xfrm>
-            <a:off x="548640" y="3840480"/>
-            <a:ext cx="3611880" cy="1600200"/>
-          </a:xfrm>
-          <a:prstGeom prst="roundRect">
-            <a:avLst/>
-          </a:prstGeom>
-          <a:solidFill>
-            <a:srgbClr val="F1F5F9"/>
-          </a:solidFill>
-          <a:ln>
-            <a:solidFill>
-              <a:srgbClr val="F1F5F9"/>
-            </a:solidFill>
-          </a:ln>
-          <a:effectLst/>
-        </p:spPr>
-        <p:style>
-          <a:lnRef idx="1">
-            <a:schemeClr val="accent1"/>
-          </a:lnRef>
-          <a:fillRef idx="3">
-            <a:schemeClr val="accent1"/>
-          </a:fillRef>
-          <a:effectRef idx="2">
-            <a:schemeClr val="accent1"/>
-          </a:effectRef>
-          <a:fontRef idx="minor">
-            <a:schemeClr val="lt1"/>
-          </a:fontRef>
-        </p:style>
-        <p:txBody>
-          <a:bodyPr rtlCol="0" anchor="ctr"/>
-          <a:lstStyle/>
-          <a:p>
-            <a:pPr algn="ctr"/>
-          </a:p>
-        </p:txBody>
-      </p:sp>
-      <p:sp>
-        <p:nvSpPr>
-          <p:cNvPr id="15" name="Rectangle 14"/>
-          <p:cNvSpPr/>
-          <p:nvPr/>
-        </p:nvSpPr>
-        <p:spPr>
-          <a:xfrm>
-            <a:off x="548640" y="3840480"/>
-            <a:ext cx="82296" cy="1600200"/>
-          </a:xfrm>
-          <a:prstGeom prst="rect">
-            <a:avLst/>
-          </a:prstGeom>
-          <a:solidFill>
-            <a:srgbClr val="0EA5E9"/>
-          </a:solidFill>
-          <a:ln>
-            <a:noFill/>
-          </a:ln>
-          <a:effectLst/>
-        </p:spPr>
-        <p:style>
-          <a:lnRef idx="1">
-            <a:schemeClr val="accent1"/>
-          </a:lnRef>
-          <a:fillRef idx="3">
-            <a:schemeClr val="accent1"/>
-          </a:fillRef>
-          <a:effectRef idx="2">
-            <a:schemeClr val="accent1"/>
-          </a:effectRef>
-          <a:fontRef idx="minor">
-            <a:schemeClr val="lt1"/>
-          </a:fontRef>
-        </p:style>
-        <p:txBody>
-          <a:bodyPr rtlCol="0" anchor="ctr"/>
-          <a:lstStyle/>
-          <a:p>
-            <a:pPr algn="ctr"/>
-          </a:p>
-        </p:txBody>
-      </p:sp>
-      <p:sp>
-        <p:nvSpPr>
-          <p:cNvPr id="16" name="TextBox 15"/>
-          <p:cNvSpPr txBox="1"/>
-          <p:nvPr/>
-        </p:nvSpPr>
-        <p:spPr>
-          <a:xfrm>
-            <a:off x="822960" y="4023360"/>
-            <a:ext cx="3154680" cy="1325880"/>
-          </a:xfrm>
-          <a:prstGeom prst="rect">
-            <a:avLst/>
-          </a:prstGeom>
-          <a:noFill/>
-        </p:spPr>
-        <p:txBody>
-          <a:bodyPr wrap="square" anchor="t">
-            <a:spAutoFit/>
-          </a:bodyPr>
-          <a:lstStyle/>
-          <a:p>
-            <a:pPr algn="l">
-              <a:spcAft>
-                <a:spcPts val="800"/>
-              </a:spcAft>
-            </a:pPr>
-            <a:r>
-              <a:rPr sz="1600" b="1">
-                <a:solidFill>
-                  <a:srgbClr val="0F172A"/>
-                </a:solidFill>
-                <a:latin typeface="PingFang TC"/>
-                <a:ea typeface="PingFang TC"/>
-              </a:rPr>
-              <a:t>[Monitoring]</a:t>
-            </a:r>
-          </a:p>
-          <a:p>
-            <a:pPr algn="l">
-              <a:spcAft>
-                <a:spcPts val="400"/>
-              </a:spcAft>
-            </a:pPr>
-            <a:r>
-              <a:rPr sz="1300" b="0">
-                <a:solidFill>
-                  <a:srgbClr val="64748B"/>
-                </a:solidFill>
-                <a:latin typeface="PingFang TC"/>
-                <a:ea typeface="PingFang TC"/>
-              </a:rPr>
-              <a:t>服務掛了完全沒有 Alerting，處於盲飛狀態。</a:t>
-            </a:r>
-          </a:p>
-        </p:txBody>
-      </p:sp>
-      <p:sp>
-        <p:nvSpPr>
-          <p:cNvPr id="17" name="Rounded Rectangle 16"/>
-          <p:cNvSpPr/>
-          <p:nvPr/>
-        </p:nvSpPr>
-        <p:spPr>
-          <a:xfrm>
-            <a:off x="4407408" y="3840480"/>
-            <a:ext cx="3611880" cy="1600200"/>
-          </a:xfrm>
-          <a:prstGeom prst="roundRect">
-            <a:avLst/>
-          </a:prstGeom>
-          <a:solidFill>
-            <a:srgbClr val="F1F5F9"/>
-          </a:solidFill>
-          <a:ln>
-            <a:solidFill>
-              <a:srgbClr val="F1F5F9"/>
-            </a:solidFill>
-          </a:ln>
-          <a:effectLst/>
-        </p:spPr>
-        <p:style>
-          <a:lnRef idx="1">
-            <a:schemeClr val="accent1"/>
-          </a:lnRef>
-          <a:fillRef idx="3">
-            <a:schemeClr val="accent1"/>
-          </a:fillRef>
-          <a:effectRef idx="2">
-            <a:schemeClr val="accent1"/>
-          </a:effectRef>
-          <a:fontRef idx="minor">
-            <a:schemeClr val="lt1"/>
-          </a:fontRef>
-        </p:style>
-        <p:txBody>
-          <a:bodyPr rtlCol="0" anchor="ctr"/>
-          <a:lstStyle/>
-          <a:p>
-            <a:pPr algn="ctr"/>
-          </a:p>
-        </p:txBody>
-      </p:sp>
-      <p:sp>
-        <p:nvSpPr>
-          <p:cNvPr id="18" name="Rectangle 17"/>
-          <p:cNvSpPr/>
-          <p:nvPr/>
-        </p:nvSpPr>
-        <p:spPr>
-          <a:xfrm>
-            <a:off x="4407408" y="3840480"/>
-            <a:ext cx="82296" cy="1600200"/>
-          </a:xfrm>
-          <a:prstGeom prst="rect">
-            <a:avLst/>
-          </a:prstGeom>
-          <a:solidFill>
-            <a:srgbClr val="0EA5E9"/>
-          </a:solidFill>
-          <a:ln>
-            <a:noFill/>
-          </a:ln>
-          <a:effectLst/>
-        </p:spPr>
-        <p:style>
-          <a:lnRef idx="1">
-            <a:schemeClr val="accent1"/>
-          </a:lnRef>
-          <a:fillRef idx="3">
-            <a:schemeClr val="accent1"/>
-          </a:fillRef>
-          <a:effectRef idx="2">
-            <a:schemeClr val="accent1"/>
-          </a:effectRef>
-          <a:fontRef idx="minor">
-            <a:schemeClr val="lt1"/>
-          </a:fontRef>
-        </p:style>
-        <p:txBody>
-          <a:bodyPr rtlCol="0" anchor="ctr"/>
-          <a:lstStyle/>
-          <a:p>
-            <a:pPr algn="ctr"/>
-          </a:p>
-        </p:txBody>
-      </p:sp>
-      <p:sp>
-        <p:nvSpPr>
-          <p:cNvPr id="19" name="TextBox 18"/>
-          <p:cNvSpPr txBox="1"/>
-          <p:nvPr/>
-        </p:nvSpPr>
-        <p:spPr>
-          <a:xfrm>
-            <a:off x="4681728" y="4023360"/>
-            <a:ext cx="3154680" cy="1325880"/>
-          </a:xfrm>
-          <a:prstGeom prst="rect">
-            <a:avLst/>
-          </a:prstGeom>
-          <a:noFill/>
-        </p:spPr>
-        <p:txBody>
-          <a:bodyPr wrap="square" anchor="t">
-            <a:spAutoFit/>
-          </a:bodyPr>
-          <a:lstStyle/>
-          <a:p>
-            <a:pPr algn="l">
-              <a:spcAft>
-                <a:spcPts val="800"/>
-              </a:spcAft>
-            </a:pPr>
-            <a:r>
-              <a:rPr sz="1600" b="1">
-                <a:solidFill>
-                  <a:srgbClr val="0F172A"/>
-                </a:solidFill>
-                <a:latin typeface="PingFang TC"/>
-                <a:ea typeface="PingFang TC"/>
-              </a:rPr>
-              <a:t>[Data Cleanup]</a:t>
-            </a:r>
-          </a:p>
-          <a:p>
-            <a:pPr algn="l">
-              <a:spcAft>
-                <a:spcPts val="400"/>
-              </a:spcAft>
-            </a:pPr>
-            <a:r>
-              <a:rPr sz="1300" b="0">
-                <a:solidFill>
-                  <a:srgbClr val="64748B"/>
-                </a:solidFill>
-                <a:latin typeface="PingFang TC"/>
-                <a:ea typeface="PingFang TC"/>
-              </a:rPr>
-              <a:t>過期資料永不刪除，一年後 DB 將面臨嚴重 Bloat。</a:t>
-            </a:r>
-          </a:p>
-        </p:txBody>
-      </p:sp>
-      <p:sp>
-        <p:nvSpPr>
-          <p:cNvPr id="20" name="Rounded Rectangle 19"/>
-          <p:cNvSpPr/>
-          <p:nvPr/>
-        </p:nvSpPr>
-        <p:spPr>
-          <a:xfrm>
-            <a:off x="8266176" y="3840480"/>
-            <a:ext cx="3611880" cy="1600200"/>
-          </a:xfrm>
-          <a:prstGeom prst="roundRect">
-            <a:avLst/>
-          </a:prstGeom>
-          <a:solidFill>
-            <a:srgbClr val="F1F5F9"/>
-          </a:solidFill>
-          <a:ln>
-            <a:solidFill>
-              <a:srgbClr val="F1F5F9"/>
-            </a:solidFill>
-          </a:ln>
-          <a:effectLst/>
-        </p:spPr>
-        <p:style>
-          <a:lnRef idx="1">
-            <a:schemeClr val="accent1"/>
-          </a:lnRef>
-          <a:fillRef idx="3">
-            <a:schemeClr val="accent1"/>
-          </a:fillRef>
-          <a:effectRef idx="2">
-            <a:schemeClr val="accent1"/>
-          </a:effectRef>
-          <a:fontRef idx="minor">
-            <a:schemeClr val="lt1"/>
-          </a:fontRef>
-        </p:style>
-        <p:txBody>
-          <a:bodyPr rtlCol="0" anchor="ctr"/>
-          <a:lstStyle/>
-          <a:p>
-            <a:pPr algn="ctr"/>
-          </a:p>
-        </p:txBody>
-      </p:sp>
-      <p:sp>
-        <p:nvSpPr>
-          <p:cNvPr id="21" name="Rectangle 20"/>
-          <p:cNvSpPr/>
-          <p:nvPr/>
-        </p:nvSpPr>
-        <p:spPr>
-          <a:xfrm>
-            <a:off x="8266176" y="3840480"/>
-            <a:ext cx="82296" cy="1600200"/>
-          </a:xfrm>
-          <a:prstGeom prst="rect">
-            <a:avLst/>
-          </a:prstGeom>
-          <a:solidFill>
-            <a:srgbClr val="0EA5E9"/>
-          </a:solidFill>
-          <a:ln>
-            <a:noFill/>
-          </a:ln>
-          <a:effectLst/>
-        </p:spPr>
-        <p:style>
-          <a:lnRef idx="1">
-            <a:schemeClr val="accent1"/>
-          </a:lnRef>
-          <a:fillRef idx="3">
-            <a:schemeClr val="accent1"/>
-          </a:fillRef>
-          <a:effectRef idx="2">
-            <a:schemeClr val="accent1"/>
-          </a:effectRef>
-          <a:fontRef idx="minor">
-            <a:schemeClr val="lt1"/>
-          </a:fontRef>
-        </p:style>
-        <p:txBody>
-          <a:bodyPr rtlCol="0" anchor="ctr"/>
-          <a:lstStyle/>
-          <a:p>
-            <a:pPr algn="ctr"/>
-          </a:p>
-        </p:txBody>
-      </p:sp>
-      <p:sp>
-        <p:nvSpPr>
-          <p:cNvPr id="22" name="TextBox 21"/>
-          <p:cNvSpPr txBox="1"/>
-          <p:nvPr/>
-        </p:nvSpPr>
-        <p:spPr>
-          <a:xfrm>
-            <a:off x="8540496" y="4023360"/>
-            <a:ext cx="3154680" cy="1325880"/>
-          </a:xfrm>
-          <a:prstGeom prst="rect">
-            <a:avLst/>
-          </a:prstGeom>
-          <a:noFill/>
-        </p:spPr>
-        <p:txBody>
-          <a:bodyPr wrap="square" anchor="t">
-            <a:spAutoFit/>
-          </a:bodyPr>
-          <a:lstStyle/>
-          <a:p>
-            <a:pPr algn="l">
-              <a:spcAft>
-                <a:spcPts val="800"/>
-              </a:spcAft>
-            </a:pPr>
-            <a:r>
-              <a:rPr sz="1600" b="1">
-                <a:solidFill>
-                  <a:srgbClr val="0F172A"/>
-                </a:solidFill>
-                <a:latin typeface="PingFang TC"/>
-                <a:ea typeface="PingFang TC"/>
-              </a:rPr>
-              <a:t>[Caching / CDN]</a:t>
-            </a:r>
-          </a:p>
-          <a:p>
-            <a:pPr algn="l">
-              <a:spcAft>
-                <a:spcPts val="400"/>
-              </a:spcAft>
-            </a:pPr>
-            <a:r>
-              <a:rPr sz="1300" b="0">
-                <a:solidFill>
-                  <a:srgbClr val="64748B"/>
-                </a:solidFill>
-                <a:latin typeface="PingFang TC"/>
-                <a:ea typeface="PingFang TC"/>
-              </a:rPr>
-              <a:t>每次轉址都直擊 DB，流量一來直接癱瘓。
-→ 下週 Deep Dive 展開</a:t>
+              <a:rPr sz="1600" b="0">
+                <a:solidFill>
+                  <a:srgbClr val="E2E8F0"/>
+                </a:solidFill>
+                <a:latin typeface="PingFang TC"/>
+                <a:ea typeface="PingFang TC"/>
+              </a:rPr>
+              <a:t>✓  設計依據：DESIGN.md（16 題決策 + 優劣分析）</a:t>
             </a:r>
           </a:p>
         </p:txBody>
@@ -19938,6 +19649,1048 @@
                 <a:latin typeface="PingFang TC"/>
                 <a:ea typeface="PingFang TC"/>
               </a:rPr>
+              <a:t>下週預告 · NEXT WEEK</a:t>
+            </a:r>
+          </a:p>
+          <a:p>
+            <a:pPr algn="l">
+              <a:spcAft>
+                <a:spcPts val="400"/>
+              </a:spcAft>
+            </a:pPr>
+            <a:r>
+              <a:rPr sz="3000" b="1">
+                <a:solidFill>
+                  <a:srgbClr val="0F172A"/>
+                </a:solidFill>
+                <a:latin typeface="PingFang TC"/>
+                <a:ea typeface="PingFang TC"/>
+              </a:rPr>
+              <a:t>從 Prototype 到 Production 的巨大鴻溝</a:t>
+            </a:r>
+          </a:p>
+        </p:txBody>
+      </p:sp>
+      <p:sp>
+        <p:nvSpPr>
+          <p:cNvPr id="4" name="TextBox 3"/>
+          <p:cNvSpPr txBox="1"/>
+          <p:nvPr/>
+        </p:nvSpPr>
+        <p:spPr>
+          <a:xfrm>
+            <a:off x="548640" y="1371600"/>
+            <a:ext cx="10972800" cy="365760"/>
+          </a:xfrm>
+          <a:prstGeom prst="rect">
+            <a:avLst/>
+          </a:prstGeom>
+          <a:noFill/>
+        </p:spPr>
+        <p:txBody>
+          <a:bodyPr wrap="square" anchor="t">
+            <a:spAutoFit/>
+          </a:bodyPr>
+          <a:lstStyle/>
+          <a:p>
+            <a:pPr algn="l">
+              <a:spcAft>
+                <a:spcPts val="400"/>
+              </a:spcAft>
+            </a:pPr>
+            <a:r>
+              <a:rPr sz="1400" b="0">
+                <a:solidFill>
+                  <a:srgbClr val="64748B"/>
+                </a:solidFill>
+                <a:latin typeface="PingFang TC"/>
+                <a:ea typeface="PingFang TC"/>
+              </a:rPr>
+              <a:t>快速掃過，建立全貌 — 下週 Deep Dive 才是主菜</a:t>
+            </a:r>
+          </a:p>
+        </p:txBody>
+      </p:sp>
+      <p:sp>
+        <p:nvSpPr>
+          <p:cNvPr id="5" name="Rounded Rectangle 4"/>
+          <p:cNvSpPr/>
+          <p:nvPr/>
+        </p:nvSpPr>
+        <p:spPr>
+          <a:xfrm>
+            <a:off x="548640" y="1965960"/>
+            <a:ext cx="3611880" cy="1600200"/>
+          </a:xfrm>
+          <a:prstGeom prst="roundRect">
+            <a:avLst/>
+          </a:prstGeom>
+          <a:solidFill>
+            <a:srgbClr val="F1F5F9"/>
+          </a:solidFill>
+          <a:ln>
+            <a:solidFill>
+              <a:srgbClr val="F1F5F9"/>
+            </a:solidFill>
+          </a:ln>
+          <a:effectLst/>
+        </p:spPr>
+        <p:style>
+          <a:lnRef idx="1">
+            <a:schemeClr val="accent1"/>
+          </a:lnRef>
+          <a:fillRef idx="3">
+            <a:schemeClr val="accent1"/>
+          </a:fillRef>
+          <a:effectRef idx="2">
+            <a:schemeClr val="accent1"/>
+          </a:effectRef>
+          <a:fontRef idx="minor">
+            <a:schemeClr val="lt1"/>
+          </a:fontRef>
+        </p:style>
+        <p:txBody>
+          <a:bodyPr rtlCol="0" anchor="ctr"/>
+          <a:lstStyle/>
+          <a:p>
+            <a:pPr algn="ctr"/>
+          </a:p>
+        </p:txBody>
+      </p:sp>
+      <p:sp>
+        <p:nvSpPr>
+          <p:cNvPr id="6" name="Rectangle 5"/>
+          <p:cNvSpPr/>
+          <p:nvPr/>
+        </p:nvSpPr>
+        <p:spPr>
+          <a:xfrm>
+            <a:off x="548640" y="1965960"/>
+            <a:ext cx="82296" cy="1600200"/>
+          </a:xfrm>
+          <a:prstGeom prst="rect">
+            <a:avLst/>
+          </a:prstGeom>
+          <a:solidFill>
+            <a:srgbClr val="D97706"/>
+          </a:solidFill>
+          <a:ln>
+            <a:noFill/>
+          </a:ln>
+          <a:effectLst/>
+        </p:spPr>
+        <p:style>
+          <a:lnRef idx="1">
+            <a:schemeClr val="accent1"/>
+          </a:lnRef>
+          <a:fillRef idx="3">
+            <a:schemeClr val="accent1"/>
+          </a:fillRef>
+          <a:effectRef idx="2">
+            <a:schemeClr val="accent1"/>
+          </a:effectRef>
+          <a:fontRef idx="minor">
+            <a:schemeClr val="lt1"/>
+          </a:fontRef>
+        </p:style>
+        <p:txBody>
+          <a:bodyPr rtlCol="0" anchor="ctr"/>
+          <a:lstStyle/>
+          <a:p>
+            <a:pPr algn="ctr"/>
+          </a:p>
+        </p:txBody>
+      </p:sp>
+      <p:sp>
+        <p:nvSpPr>
+          <p:cNvPr id="7" name="TextBox 6"/>
+          <p:cNvSpPr txBox="1"/>
+          <p:nvPr/>
+        </p:nvSpPr>
+        <p:spPr>
+          <a:xfrm>
+            <a:off x="822960" y="2148840"/>
+            <a:ext cx="3154680" cy="1325880"/>
+          </a:xfrm>
+          <a:prstGeom prst="rect">
+            <a:avLst/>
+          </a:prstGeom>
+          <a:noFill/>
+        </p:spPr>
+        <p:txBody>
+          <a:bodyPr wrap="square" anchor="t">
+            <a:spAutoFit/>
+          </a:bodyPr>
+          <a:lstStyle/>
+          <a:p>
+            <a:pPr algn="l">
+              <a:spcAft>
+                <a:spcPts val="800"/>
+              </a:spcAft>
+            </a:pPr>
+            <a:r>
+              <a:rPr sz="1600" b="1">
+                <a:solidFill>
+                  <a:srgbClr val="0F172A"/>
+                </a:solidFill>
+                <a:latin typeface="PingFang TC"/>
+                <a:ea typeface="PingFang TC"/>
+              </a:rPr>
+              <a:t>[Error Handling]</a:t>
+            </a:r>
+          </a:p>
+          <a:p>
+            <a:pPr algn="l">
+              <a:spcAft>
+                <a:spcPts val="400"/>
+              </a:spcAft>
+            </a:pPr>
+            <a:r>
+              <a:rPr sz="1300" b="0">
+                <a:solidFill>
+                  <a:srgbClr val="64748B"/>
+                </a:solidFill>
+                <a:latin typeface="PingFang TC"/>
+                <a:ea typeface="PingFang TC"/>
+              </a:rPr>
+              <a:t>遇到不合法輸入直接 Crash。</a:t>
+            </a:r>
+          </a:p>
+        </p:txBody>
+      </p:sp>
+      <p:sp>
+        <p:nvSpPr>
+          <p:cNvPr id="8" name="Rounded Rectangle 7"/>
+          <p:cNvSpPr/>
+          <p:nvPr/>
+        </p:nvSpPr>
+        <p:spPr>
+          <a:xfrm>
+            <a:off x="4407408" y="1965960"/>
+            <a:ext cx="3611880" cy="1600200"/>
+          </a:xfrm>
+          <a:prstGeom prst="roundRect">
+            <a:avLst/>
+          </a:prstGeom>
+          <a:solidFill>
+            <a:srgbClr val="F1F5F9"/>
+          </a:solidFill>
+          <a:ln>
+            <a:solidFill>
+              <a:srgbClr val="F1F5F9"/>
+            </a:solidFill>
+          </a:ln>
+          <a:effectLst/>
+        </p:spPr>
+        <p:style>
+          <a:lnRef idx="1">
+            <a:schemeClr val="accent1"/>
+          </a:lnRef>
+          <a:fillRef idx="3">
+            <a:schemeClr val="accent1"/>
+          </a:fillRef>
+          <a:effectRef idx="2">
+            <a:schemeClr val="accent1"/>
+          </a:effectRef>
+          <a:fontRef idx="minor">
+            <a:schemeClr val="lt1"/>
+          </a:fontRef>
+        </p:style>
+        <p:txBody>
+          <a:bodyPr rtlCol="0" anchor="ctr"/>
+          <a:lstStyle/>
+          <a:p>
+            <a:pPr algn="ctr"/>
+          </a:p>
+        </p:txBody>
+      </p:sp>
+      <p:sp>
+        <p:nvSpPr>
+          <p:cNvPr id="9" name="Rectangle 8"/>
+          <p:cNvSpPr/>
+          <p:nvPr/>
+        </p:nvSpPr>
+        <p:spPr>
+          <a:xfrm>
+            <a:off x="4407408" y="1965960"/>
+            <a:ext cx="82296" cy="1600200"/>
+          </a:xfrm>
+          <a:prstGeom prst="rect">
+            <a:avLst/>
+          </a:prstGeom>
+          <a:solidFill>
+            <a:srgbClr val="D97706"/>
+          </a:solidFill>
+          <a:ln>
+            <a:noFill/>
+          </a:ln>
+          <a:effectLst/>
+        </p:spPr>
+        <p:style>
+          <a:lnRef idx="1">
+            <a:schemeClr val="accent1"/>
+          </a:lnRef>
+          <a:fillRef idx="3">
+            <a:schemeClr val="accent1"/>
+          </a:fillRef>
+          <a:effectRef idx="2">
+            <a:schemeClr val="accent1"/>
+          </a:effectRef>
+          <a:fontRef idx="minor">
+            <a:schemeClr val="lt1"/>
+          </a:fontRef>
+        </p:style>
+        <p:txBody>
+          <a:bodyPr rtlCol="0" anchor="ctr"/>
+          <a:lstStyle/>
+          <a:p>
+            <a:pPr algn="ctr"/>
+          </a:p>
+        </p:txBody>
+      </p:sp>
+      <p:sp>
+        <p:nvSpPr>
+          <p:cNvPr id="10" name="TextBox 9"/>
+          <p:cNvSpPr txBox="1"/>
+          <p:nvPr/>
+        </p:nvSpPr>
+        <p:spPr>
+          <a:xfrm>
+            <a:off x="4681728" y="2148840"/>
+            <a:ext cx="3154680" cy="1325880"/>
+          </a:xfrm>
+          <a:prstGeom prst="rect">
+            <a:avLst/>
+          </a:prstGeom>
+          <a:noFill/>
+        </p:spPr>
+        <p:txBody>
+          <a:bodyPr wrap="square" anchor="t">
+            <a:spAutoFit/>
+          </a:bodyPr>
+          <a:lstStyle/>
+          <a:p>
+            <a:pPr algn="l">
+              <a:spcAft>
+                <a:spcPts val="800"/>
+              </a:spcAft>
+            </a:pPr>
+            <a:r>
+              <a:rPr sz="1600" b="1">
+                <a:solidFill>
+                  <a:srgbClr val="0F172A"/>
+                </a:solidFill>
+                <a:latin typeface="PingFang TC"/>
+                <a:ea typeface="PingFang TC"/>
+              </a:rPr>
+              <a:t>[Rate Limiting]</a:t>
+            </a:r>
+          </a:p>
+          <a:p>
+            <a:pPr algn="l">
+              <a:spcAft>
+                <a:spcPts val="400"/>
+              </a:spcAft>
+            </a:pPr>
+            <a:r>
+              <a:rPr sz="1300" b="0">
+                <a:solidFill>
+                  <a:srgbClr val="64748B"/>
+                </a:solidFill>
+                <a:latin typeface="PingFang TC"/>
+                <a:ea typeface="PingFang TC"/>
+              </a:rPr>
+              <a:t>毫無防護，極易被 Script 惡意灌爆 API。</a:t>
+            </a:r>
+          </a:p>
+        </p:txBody>
+      </p:sp>
+      <p:sp>
+        <p:nvSpPr>
+          <p:cNvPr id="11" name="Rounded Rectangle 10"/>
+          <p:cNvSpPr/>
+          <p:nvPr/>
+        </p:nvSpPr>
+        <p:spPr>
+          <a:xfrm>
+            <a:off x="8266176" y="1965960"/>
+            <a:ext cx="3611880" cy="1600200"/>
+          </a:xfrm>
+          <a:prstGeom prst="roundRect">
+            <a:avLst/>
+          </a:prstGeom>
+          <a:solidFill>
+            <a:srgbClr val="F1F5F9"/>
+          </a:solidFill>
+          <a:ln>
+            <a:solidFill>
+              <a:srgbClr val="F1F5F9"/>
+            </a:solidFill>
+          </a:ln>
+          <a:effectLst/>
+        </p:spPr>
+        <p:style>
+          <a:lnRef idx="1">
+            <a:schemeClr val="accent1"/>
+          </a:lnRef>
+          <a:fillRef idx="3">
+            <a:schemeClr val="accent1"/>
+          </a:fillRef>
+          <a:effectRef idx="2">
+            <a:schemeClr val="accent1"/>
+          </a:effectRef>
+          <a:fontRef idx="minor">
+            <a:schemeClr val="lt1"/>
+          </a:fontRef>
+        </p:style>
+        <p:txBody>
+          <a:bodyPr rtlCol="0" anchor="ctr"/>
+          <a:lstStyle/>
+          <a:p>
+            <a:pPr algn="ctr"/>
+          </a:p>
+        </p:txBody>
+      </p:sp>
+      <p:sp>
+        <p:nvSpPr>
+          <p:cNvPr id="12" name="Rectangle 11"/>
+          <p:cNvSpPr/>
+          <p:nvPr/>
+        </p:nvSpPr>
+        <p:spPr>
+          <a:xfrm>
+            <a:off x="8266176" y="1965960"/>
+            <a:ext cx="82296" cy="1600200"/>
+          </a:xfrm>
+          <a:prstGeom prst="rect">
+            <a:avLst/>
+          </a:prstGeom>
+          <a:solidFill>
+            <a:srgbClr val="D97706"/>
+          </a:solidFill>
+          <a:ln>
+            <a:noFill/>
+          </a:ln>
+          <a:effectLst/>
+        </p:spPr>
+        <p:style>
+          <a:lnRef idx="1">
+            <a:schemeClr val="accent1"/>
+          </a:lnRef>
+          <a:fillRef idx="3">
+            <a:schemeClr val="accent1"/>
+          </a:fillRef>
+          <a:effectRef idx="2">
+            <a:schemeClr val="accent1"/>
+          </a:effectRef>
+          <a:fontRef idx="minor">
+            <a:schemeClr val="lt1"/>
+          </a:fontRef>
+        </p:style>
+        <p:txBody>
+          <a:bodyPr rtlCol="0" anchor="ctr"/>
+          <a:lstStyle/>
+          <a:p>
+            <a:pPr algn="ctr"/>
+          </a:p>
+        </p:txBody>
+      </p:sp>
+      <p:sp>
+        <p:nvSpPr>
+          <p:cNvPr id="13" name="TextBox 12"/>
+          <p:cNvSpPr txBox="1"/>
+          <p:nvPr/>
+        </p:nvSpPr>
+        <p:spPr>
+          <a:xfrm>
+            <a:off x="8540496" y="2148840"/>
+            <a:ext cx="3154680" cy="1325880"/>
+          </a:xfrm>
+          <a:prstGeom prst="rect">
+            <a:avLst/>
+          </a:prstGeom>
+          <a:noFill/>
+        </p:spPr>
+        <p:txBody>
+          <a:bodyPr wrap="square" anchor="t">
+            <a:spAutoFit/>
+          </a:bodyPr>
+          <a:lstStyle/>
+          <a:p>
+            <a:pPr algn="l">
+              <a:spcAft>
+                <a:spcPts val="800"/>
+              </a:spcAft>
+            </a:pPr>
+            <a:r>
+              <a:rPr sz="1600" b="1">
+                <a:solidFill>
+                  <a:srgbClr val="0F172A"/>
+                </a:solidFill>
+                <a:latin typeface="PingFang TC"/>
+                <a:ea typeface="PingFang TC"/>
+              </a:rPr>
+              <a:t>[Auth &amp; Isolation]</a:t>
+            </a:r>
+          </a:p>
+          <a:p>
+            <a:pPr algn="l">
+              <a:spcAft>
+                <a:spcPts val="400"/>
+              </a:spcAft>
+            </a:pPr>
+            <a:r>
+              <a:rPr sz="1300" b="0">
+                <a:solidFill>
+                  <a:srgbClr val="64748B"/>
+                </a:solidFill>
+                <a:latin typeface="PingFang TC"/>
+                <a:ea typeface="PingFang TC"/>
+              </a:rPr>
+              <a:t>缺乏多租戶概念，資料全公開。</a:t>
+            </a:r>
+          </a:p>
+        </p:txBody>
+      </p:sp>
+      <p:sp>
+        <p:nvSpPr>
+          <p:cNvPr id="14" name="Rounded Rectangle 13"/>
+          <p:cNvSpPr/>
+          <p:nvPr/>
+        </p:nvSpPr>
+        <p:spPr>
+          <a:xfrm>
+            <a:off x="548640" y="3840480"/>
+            <a:ext cx="3611880" cy="1600200"/>
+          </a:xfrm>
+          <a:prstGeom prst="roundRect">
+            <a:avLst/>
+          </a:prstGeom>
+          <a:solidFill>
+            <a:srgbClr val="F1F5F9"/>
+          </a:solidFill>
+          <a:ln>
+            <a:solidFill>
+              <a:srgbClr val="F1F5F9"/>
+            </a:solidFill>
+          </a:ln>
+          <a:effectLst/>
+        </p:spPr>
+        <p:style>
+          <a:lnRef idx="1">
+            <a:schemeClr val="accent1"/>
+          </a:lnRef>
+          <a:fillRef idx="3">
+            <a:schemeClr val="accent1"/>
+          </a:fillRef>
+          <a:effectRef idx="2">
+            <a:schemeClr val="accent1"/>
+          </a:effectRef>
+          <a:fontRef idx="minor">
+            <a:schemeClr val="lt1"/>
+          </a:fontRef>
+        </p:style>
+        <p:txBody>
+          <a:bodyPr rtlCol="0" anchor="ctr"/>
+          <a:lstStyle/>
+          <a:p>
+            <a:pPr algn="ctr"/>
+          </a:p>
+        </p:txBody>
+      </p:sp>
+      <p:sp>
+        <p:nvSpPr>
+          <p:cNvPr id="15" name="Rectangle 14"/>
+          <p:cNvSpPr/>
+          <p:nvPr/>
+        </p:nvSpPr>
+        <p:spPr>
+          <a:xfrm>
+            <a:off x="548640" y="3840480"/>
+            <a:ext cx="82296" cy="1600200"/>
+          </a:xfrm>
+          <a:prstGeom prst="rect">
+            <a:avLst/>
+          </a:prstGeom>
+          <a:solidFill>
+            <a:srgbClr val="0EA5E9"/>
+          </a:solidFill>
+          <a:ln>
+            <a:noFill/>
+          </a:ln>
+          <a:effectLst/>
+        </p:spPr>
+        <p:style>
+          <a:lnRef idx="1">
+            <a:schemeClr val="accent1"/>
+          </a:lnRef>
+          <a:fillRef idx="3">
+            <a:schemeClr val="accent1"/>
+          </a:fillRef>
+          <a:effectRef idx="2">
+            <a:schemeClr val="accent1"/>
+          </a:effectRef>
+          <a:fontRef idx="minor">
+            <a:schemeClr val="lt1"/>
+          </a:fontRef>
+        </p:style>
+        <p:txBody>
+          <a:bodyPr rtlCol="0" anchor="ctr"/>
+          <a:lstStyle/>
+          <a:p>
+            <a:pPr algn="ctr"/>
+          </a:p>
+        </p:txBody>
+      </p:sp>
+      <p:sp>
+        <p:nvSpPr>
+          <p:cNvPr id="16" name="TextBox 15"/>
+          <p:cNvSpPr txBox="1"/>
+          <p:nvPr/>
+        </p:nvSpPr>
+        <p:spPr>
+          <a:xfrm>
+            <a:off x="822960" y="4023360"/>
+            <a:ext cx="3154680" cy="1325880"/>
+          </a:xfrm>
+          <a:prstGeom prst="rect">
+            <a:avLst/>
+          </a:prstGeom>
+          <a:noFill/>
+        </p:spPr>
+        <p:txBody>
+          <a:bodyPr wrap="square" anchor="t">
+            <a:spAutoFit/>
+          </a:bodyPr>
+          <a:lstStyle/>
+          <a:p>
+            <a:pPr algn="l">
+              <a:spcAft>
+                <a:spcPts val="800"/>
+              </a:spcAft>
+            </a:pPr>
+            <a:r>
+              <a:rPr sz="1600" b="1">
+                <a:solidFill>
+                  <a:srgbClr val="0F172A"/>
+                </a:solidFill>
+                <a:latin typeface="PingFang TC"/>
+                <a:ea typeface="PingFang TC"/>
+              </a:rPr>
+              <a:t>[Monitoring]</a:t>
+            </a:r>
+          </a:p>
+          <a:p>
+            <a:pPr algn="l">
+              <a:spcAft>
+                <a:spcPts val="400"/>
+              </a:spcAft>
+            </a:pPr>
+            <a:r>
+              <a:rPr sz="1300" b="0">
+                <a:solidFill>
+                  <a:srgbClr val="64748B"/>
+                </a:solidFill>
+                <a:latin typeface="PingFang TC"/>
+                <a:ea typeface="PingFang TC"/>
+              </a:rPr>
+              <a:t>服務掛了完全沒有 Alerting，處於盲飛狀態。</a:t>
+            </a:r>
+          </a:p>
+        </p:txBody>
+      </p:sp>
+      <p:sp>
+        <p:nvSpPr>
+          <p:cNvPr id="17" name="Rounded Rectangle 16"/>
+          <p:cNvSpPr/>
+          <p:nvPr/>
+        </p:nvSpPr>
+        <p:spPr>
+          <a:xfrm>
+            <a:off x="4407408" y="3840480"/>
+            <a:ext cx="3611880" cy="1600200"/>
+          </a:xfrm>
+          <a:prstGeom prst="roundRect">
+            <a:avLst/>
+          </a:prstGeom>
+          <a:solidFill>
+            <a:srgbClr val="F1F5F9"/>
+          </a:solidFill>
+          <a:ln>
+            <a:solidFill>
+              <a:srgbClr val="F1F5F9"/>
+            </a:solidFill>
+          </a:ln>
+          <a:effectLst/>
+        </p:spPr>
+        <p:style>
+          <a:lnRef idx="1">
+            <a:schemeClr val="accent1"/>
+          </a:lnRef>
+          <a:fillRef idx="3">
+            <a:schemeClr val="accent1"/>
+          </a:fillRef>
+          <a:effectRef idx="2">
+            <a:schemeClr val="accent1"/>
+          </a:effectRef>
+          <a:fontRef idx="minor">
+            <a:schemeClr val="lt1"/>
+          </a:fontRef>
+        </p:style>
+        <p:txBody>
+          <a:bodyPr rtlCol="0" anchor="ctr"/>
+          <a:lstStyle/>
+          <a:p>
+            <a:pPr algn="ctr"/>
+          </a:p>
+        </p:txBody>
+      </p:sp>
+      <p:sp>
+        <p:nvSpPr>
+          <p:cNvPr id="18" name="Rectangle 17"/>
+          <p:cNvSpPr/>
+          <p:nvPr/>
+        </p:nvSpPr>
+        <p:spPr>
+          <a:xfrm>
+            <a:off x="4407408" y="3840480"/>
+            <a:ext cx="82296" cy="1600200"/>
+          </a:xfrm>
+          <a:prstGeom prst="rect">
+            <a:avLst/>
+          </a:prstGeom>
+          <a:solidFill>
+            <a:srgbClr val="0EA5E9"/>
+          </a:solidFill>
+          <a:ln>
+            <a:noFill/>
+          </a:ln>
+          <a:effectLst/>
+        </p:spPr>
+        <p:style>
+          <a:lnRef idx="1">
+            <a:schemeClr val="accent1"/>
+          </a:lnRef>
+          <a:fillRef idx="3">
+            <a:schemeClr val="accent1"/>
+          </a:fillRef>
+          <a:effectRef idx="2">
+            <a:schemeClr val="accent1"/>
+          </a:effectRef>
+          <a:fontRef idx="minor">
+            <a:schemeClr val="lt1"/>
+          </a:fontRef>
+        </p:style>
+        <p:txBody>
+          <a:bodyPr rtlCol="0" anchor="ctr"/>
+          <a:lstStyle/>
+          <a:p>
+            <a:pPr algn="ctr"/>
+          </a:p>
+        </p:txBody>
+      </p:sp>
+      <p:sp>
+        <p:nvSpPr>
+          <p:cNvPr id="19" name="TextBox 18"/>
+          <p:cNvSpPr txBox="1"/>
+          <p:nvPr/>
+        </p:nvSpPr>
+        <p:spPr>
+          <a:xfrm>
+            <a:off x="4681728" y="4023360"/>
+            <a:ext cx="3154680" cy="1325880"/>
+          </a:xfrm>
+          <a:prstGeom prst="rect">
+            <a:avLst/>
+          </a:prstGeom>
+          <a:noFill/>
+        </p:spPr>
+        <p:txBody>
+          <a:bodyPr wrap="square" anchor="t">
+            <a:spAutoFit/>
+          </a:bodyPr>
+          <a:lstStyle/>
+          <a:p>
+            <a:pPr algn="l">
+              <a:spcAft>
+                <a:spcPts val="800"/>
+              </a:spcAft>
+            </a:pPr>
+            <a:r>
+              <a:rPr sz="1600" b="1">
+                <a:solidFill>
+                  <a:srgbClr val="0F172A"/>
+                </a:solidFill>
+                <a:latin typeface="PingFang TC"/>
+                <a:ea typeface="PingFang TC"/>
+              </a:rPr>
+              <a:t>[Data Cleanup]</a:t>
+            </a:r>
+          </a:p>
+          <a:p>
+            <a:pPr algn="l">
+              <a:spcAft>
+                <a:spcPts val="400"/>
+              </a:spcAft>
+            </a:pPr>
+            <a:r>
+              <a:rPr sz="1300" b="0">
+                <a:solidFill>
+                  <a:srgbClr val="64748B"/>
+                </a:solidFill>
+                <a:latin typeface="PingFang TC"/>
+                <a:ea typeface="PingFang TC"/>
+              </a:rPr>
+              <a:t>過期資料永不刪除，一年後 DB 將面臨嚴重 Bloat。</a:t>
+            </a:r>
+          </a:p>
+        </p:txBody>
+      </p:sp>
+      <p:sp>
+        <p:nvSpPr>
+          <p:cNvPr id="20" name="Rounded Rectangle 19"/>
+          <p:cNvSpPr/>
+          <p:nvPr/>
+        </p:nvSpPr>
+        <p:spPr>
+          <a:xfrm>
+            <a:off x="8266176" y="3840480"/>
+            <a:ext cx="3611880" cy="1600200"/>
+          </a:xfrm>
+          <a:prstGeom prst="roundRect">
+            <a:avLst/>
+          </a:prstGeom>
+          <a:solidFill>
+            <a:srgbClr val="F1F5F9"/>
+          </a:solidFill>
+          <a:ln>
+            <a:solidFill>
+              <a:srgbClr val="F1F5F9"/>
+            </a:solidFill>
+          </a:ln>
+          <a:effectLst/>
+        </p:spPr>
+        <p:style>
+          <a:lnRef idx="1">
+            <a:schemeClr val="accent1"/>
+          </a:lnRef>
+          <a:fillRef idx="3">
+            <a:schemeClr val="accent1"/>
+          </a:fillRef>
+          <a:effectRef idx="2">
+            <a:schemeClr val="accent1"/>
+          </a:effectRef>
+          <a:fontRef idx="minor">
+            <a:schemeClr val="lt1"/>
+          </a:fontRef>
+        </p:style>
+        <p:txBody>
+          <a:bodyPr rtlCol="0" anchor="ctr"/>
+          <a:lstStyle/>
+          <a:p>
+            <a:pPr algn="ctr"/>
+          </a:p>
+        </p:txBody>
+      </p:sp>
+      <p:sp>
+        <p:nvSpPr>
+          <p:cNvPr id="21" name="Rectangle 20"/>
+          <p:cNvSpPr/>
+          <p:nvPr/>
+        </p:nvSpPr>
+        <p:spPr>
+          <a:xfrm>
+            <a:off x="8266176" y="3840480"/>
+            <a:ext cx="82296" cy="1600200"/>
+          </a:xfrm>
+          <a:prstGeom prst="rect">
+            <a:avLst/>
+          </a:prstGeom>
+          <a:solidFill>
+            <a:srgbClr val="0EA5E9"/>
+          </a:solidFill>
+          <a:ln>
+            <a:noFill/>
+          </a:ln>
+          <a:effectLst/>
+        </p:spPr>
+        <p:style>
+          <a:lnRef idx="1">
+            <a:schemeClr val="accent1"/>
+          </a:lnRef>
+          <a:fillRef idx="3">
+            <a:schemeClr val="accent1"/>
+          </a:fillRef>
+          <a:effectRef idx="2">
+            <a:schemeClr val="accent1"/>
+          </a:effectRef>
+          <a:fontRef idx="minor">
+            <a:schemeClr val="lt1"/>
+          </a:fontRef>
+        </p:style>
+        <p:txBody>
+          <a:bodyPr rtlCol="0" anchor="ctr"/>
+          <a:lstStyle/>
+          <a:p>
+            <a:pPr algn="ctr"/>
+          </a:p>
+        </p:txBody>
+      </p:sp>
+      <p:sp>
+        <p:nvSpPr>
+          <p:cNvPr id="22" name="TextBox 21"/>
+          <p:cNvSpPr txBox="1"/>
+          <p:nvPr/>
+        </p:nvSpPr>
+        <p:spPr>
+          <a:xfrm>
+            <a:off x="8540496" y="4023360"/>
+            <a:ext cx="3154680" cy="1325880"/>
+          </a:xfrm>
+          <a:prstGeom prst="rect">
+            <a:avLst/>
+          </a:prstGeom>
+          <a:noFill/>
+        </p:spPr>
+        <p:txBody>
+          <a:bodyPr wrap="square" anchor="t">
+            <a:spAutoFit/>
+          </a:bodyPr>
+          <a:lstStyle/>
+          <a:p>
+            <a:pPr algn="l">
+              <a:spcAft>
+                <a:spcPts val="800"/>
+              </a:spcAft>
+            </a:pPr>
+            <a:r>
+              <a:rPr sz="1600" b="1">
+                <a:solidFill>
+                  <a:srgbClr val="0F172A"/>
+                </a:solidFill>
+                <a:latin typeface="PingFang TC"/>
+                <a:ea typeface="PingFang TC"/>
+              </a:rPr>
+              <a:t>[Caching / CDN]</a:t>
+            </a:r>
+          </a:p>
+          <a:p>
+            <a:pPr algn="l">
+              <a:spcAft>
+                <a:spcPts val="400"/>
+              </a:spcAft>
+            </a:pPr>
+            <a:r>
+              <a:rPr sz="1300" b="0">
+                <a:solidFill>
+                  <a:srgbClr val="64748B"/>
+                </a:solidFill>
+                <a:latin typeface="PingFang TC"/>
+                <a:ea typeface="PingFang TC"/>
+              </a:rPr>
+              <a:t>每次轉址都直擊 DB，流量一來直接癱瘓。
+→ 下週 Deep Dive 展開</a:t>
+            </a:r>
+          </a:p>
+        </p:txBody>
+      </p:sp>
+    </p:spTree>
+  </p:cSld>
+  <p:clrMapOvr>
+    <a:masterClrMapping/>
+  </p:clrMapOvr>
+</p:sld>
+</file>
+
+<file path=ppt/slides/slide31.xml><?xml version="1.0" encoding="utf-8"?>
+<p:sld xmlns:a="http://schemas.openxmlformats.org/drawingml/2006/main" xmlns:p="http://schemas.openxmlformats.org/presentationml/2006/main" xmlns:r="http://schemas.openxmlformats.org/officeDocument/2006/relationships">
+  <p:cSld>
+    <p:spTree>
+      <p:nvGrpSpPr>
+        <p:cNvPr id="1" name=""/>
+        <p:cNvGrpSpPr/>
+        <p:nvPr/>
+      </p:nvGrpSpPr>
+      <p:grpSpPr/>
+      <p:sp>
+        <p:nvSpPr>
+          <p:cNvPr id="2" name="Rectangle 1"/>
+          <p:cNvSpPr/>
+          <p:nvPr/>
+        </p:nvSpPr>
+        <p:spPr>
+          <a:xfrm>
+            <a:off x="0" y="0"/>
+            <a:ext cx="164592" cy="6858000"/>
+          </a:xfrm>
+          <a:prstGeom prst="rect">
+            <a:avLst/>
+          </a:prstGeom>
+          <a:solidFill>
+            <a:srgbClr val="2563EB"/>
+          </a:solidFill>
+          <a:ln>
+            <a:noFill/>
+          </a:ln>
+          <a:effectLst/>
+        </p:spPr>
+        <p:style>
+          <a:lnRef idx="1">
+            <a:schemeClr val="accent1"/>
+          </a:lnRef>
+          <a:fillRef idx="3">
+            <a:schemeClr val="accent1"/>
+          </a:fillRef>
+          <a:effectRef idx="2">
+            <a:schemeClr val="accent1"/>
+          </a:effectRef>
+          <a:fontRef idx="minor">
+            <a:schemeClr val="lt1"/>
+          </a:fontRef>
+        </p:style>
+        <p:txBody>
+          <a:bodyPr rtlCol="0" anchor="ctr"/>
+          <a:lstStyle/>
+          <a:p>
+            <a:pPr algn="ctr"/>
+          </a:p>
+        </p:txBody>
+      </p:sp>
+      <p:sp>
+        <p:nvSpPr>
+          <p:cNvPr id="3" name="TextBox 2"/>
+          <p:cNvSpPr txBox="1"/>
+          <p:nvPr/>
+        </p:nvSpPr>
+        <p:spPr>
+          <a:xfrm>
+            <a:off x="502920" y="320040"/>
+            <a:ext cx="10972800" cy="1005840"/>
+          </a:xfrm>
+          <a:prstGeom prst="rect">
+            <a:avLst/>
+          </a:prstGeom>
+          <a:noFill/>
+        </p:spPr>
+        <p:txBody>
+          <a:bodyPr wrap="square" anchor="t">
+            <a:spAutoFit/>
+          </a:bodyPr>
+          <a:lstStyle/>
+          <a:p>
+            <a:pPr algn="l">
+              <a:spcAft>
+                <a:spcPts val="200"/>
+              </a:spcAft>
+            </a:pPr>
+            <a:r>
+              <a:rPr sz="1300" b="1">
+                <a:solidFill>
+                  <a:srgbClr val="2563EB"/>
+                </a:solidFill>
+                <a:latin typeface="PingFang TC"/>
+                <a:ea typeface="PingFang TC"/>
+              </a:rPr>
               <a:t>下週預告 · DEEP DIVE</a:t>
             </a:r>
           </a:p>

--- a/QR Code Generator/QR_Code_Generator.pptx
+++ b/QR Code Generator/QR_Code_Generator.pptx
@@ -36,6 +36,7 @@
     <p:sldId id="284" r:id="rId35"/>
     <p:sldId id="285" r:id="rId36"/>
     <p:sldId id="286" r:id="rId37"/>
+    <p:sldId id="287" r:id="rId38"/>
   </p:sldIdLst>
   <p:sldSz cx="12191695" cy="6858000" type="screen4x3"/>
   <p:notesSz cx="6858000" cy="9144000"/>
@@ -12615,7 +12616,7 @@
                           <a:latin typeface="PingFang TC"/>
                           <a:ea typeface="PingFang TC"/>
                         </a:rPr>
-                        <a:t>驗證回 400，未全面</a:t>
+                        <a:t>✅ 已實作</a:t>
                       </a:r>
                     </a:p>
                   </a:txBody>
@@ -12638,7 +12639,7 @@
                           <a:latin typeface="PingFang TC"/>
                           <a:ea typeface="PingFang TC"/>
                         </a:rPr>
-                        <a:t>全面驗證 · 結構化錯誤 · 不 crash</a:t>
+                        <a:t>全域處理 + 降級 + request id</a:t>
                       </a:r>
                     </a:p>
                   </a:txBody>
@@ -17613,7 +17614,7 @@
                 <a:latin typeface="PingFang TC"/>
                 <a:ea typeface="PingFang TC"/>
               </a:rPr>
-              <a:t>部署 · CI/CD</a:t>
+              <a:t>可靠性 · ERROR HANDLING</a:t>
             </a:r>
           </a:p>
           <a:p>
@@ -17630,798 +17631,287 @@
                 <a:latin typeface="PingFang TC"/>
                 <a:ea typeface="PingFang TC"/>
               </a:rPr>
-              <a:t>CI/CD 流程（GitHub Actions + OIDC）</a:t>
-            </a:r>
-          </a:p>
-        </p:txBody>
-      </p:sp>
-      <p:sp>
-        <p:nvSpPr>
-          <p:cNvPr id="4" name="Rounded Rectangle 3"/>
-          <p:cNvSpPr/>
-          <p:nvPr/>
-        </p:nvSpPr>
-        <p:spPr>
-          <a:xfrm>
-            <a:off x="457200" y="2286000"/>
-            <a:ext cx="1481328" cy="1280160"/>
-          </a:xfrm>
-          <a:prstGeom prst="roundRect">
-            <a:avLst/>
-          </a:prstGeom>
-          <a:solidFill>
-            <a:srgbClr val="64748B"/>
-          </a:solidFill>
-          <a:ln>
-            <a:solidFill>
-              <a:srgbClr val="64748B"/>
-            </a:solidFill>
-          </a:ln>
-          <a:effectLst/>
-        </p:spPr>
-        <p:style>
-          <a:lnRef idx="1">
-            <a:schemeClr val="accent1"/>
-          </a:lnRef>
-          <a:fillRef idx="3">
-            <a:schemeClr val="accent1"/>
-          </a:fillRef>
-          <a:effectRef idx="2">
-            <a:schemeClr val="accent1"/>
-          </a:effectRef>
-          <a:fontRef idx="minor">
-            <a:schemeClr val="lt1"/>
-          </a:fontRef>
-        </p:style>
-        <p:txBody>
-          <a:bodyPr rtlCol="0" anchor="ctr" wrap="square" tIns="25400" bIns="25400"/>
-          <a:lstStyle/>
-          <a:p>
-            <a:pPr algn="ctr"/>
-            <a:r>
-              <a:rPr sz="1100" b="1">
-                <a:solidFill>
-                  <a:srgbClr val="FFFFFF"/>
-                </a:solidFill>
-                <a:latin typeface="PingFang TC"/>
-                <a:ea typeface="PingFang TC"/>
-              </a:rPr>
-              <a:t>git push</a:t>
-            </a:r>
-          </a:p>
-          <a:p>
-            <a:pPr algn="ctr"/>
-            <a:r>
-              <a:rPr sz="1100" b="0">
-                <a:solidFill>
-                  <a:srgbClr val="FFFFFF"/>
-                </a:solidFill>
-                <a:latin typeface="PingFang TC"/>
-                <a:ea typeface="PingFang TC"/>
-              </a:rPr>
-              <a:t>QR Code Generator/**</a:t>
-            </a:r>
-          </a:p>
-        </p:txBody>
-      </p:sp>
-      <p:cxnSp>
-        <p:nvCxnSpPr>
-          <p:cNvPr id="5" name="Connector 4"/>
-          <p:cNvCxnSpPr/>
-          <p:nvPr/>
-        </p:nvCxnSpPr>
-        <p:spPr>
-          <a:xfrm>
-            <a:off x="1938528" y="2926080"/>
-            <a:ext cx="118872" cy="0"/>
-          </a:xfrm>
-          <a:prstGeom prst="line">
-            <a:avLst/>
-          </a:prstGeom>
-          <a:ln w="22225">
-            <a:solidFill>
-              <a:srgbClr val="64748B"/>
-            </a:solidFill>
-            <a:tailEnd type="triangle" w="med" len="med"/>
-          </a:ln>
-        </p:spPr>
-        <p:style>
-          <a:lnRef idx="2">
-            <a:schemeClr val="accent1"/>
-          </a:lnRef>
-          <a:fillRef idx="0">
-            <a:schemeClr val="accent1"/>
-          </a:fillRef>
-          <a:effectRef idx="1">
-            <a:schemeClr val="accent1"/>
-          </a:effectRef>
-          <a:fontRef idx="minor">
-            <a:schemeClr val="tx1"/>
-          </a:fontRef>
-        </p:style>
-      </p:cxnSp>
-      <p:sp>
-        <p:nvSpPr>
-          <p:cNvPr id="6" name="Rounded Rectangle 5"/>
-          <p:cNvSpPr/>
-          <p:nvPr/>
-        </p:nvSpPr>
-        <p:spPr>
-          <a:xfrm>
-            <a:off x="2057400" y="2286000"/>
-            <a:ext cx="1481328" cy="1280160"/>
-          </a:xfrm>
-          <a:prstGeom prst="roundRect">
-            <a:avLst/>
-          </a:prstGeom>
-          <a:solidFill>
-            <a:srgbClr val="0EA5E9"/>
-          </a:solidFill>
-          <a:ln>
-            <a:solidFill>
-              <a:srgbClr val="0EA5E9"/>
-            </a:solidFill>
-          </a:ln>
-          <a:effectLst/>
-        </p:spPr>
-        <p:style>
-          <a:lnRef idx="1">
-            <a:schemeClr val="accent1"/>
-          </a:lnRef>
-          <a:fillRef idx="3">
-            <a:schemeClr val="accent1"/>
-          </a:fillRef>
-          <a:effectRef idx="2">
-            <a:schemeClr val="accent1"/>
-          </a:effectRef>
-          <a:fontRef idx="minor">
-            <a:schemeClr val="lt1"/>
-          </a:fontRef>
-        </p:style>
-        <p:txBody>
-          <a:bodyPr rtlCol="0" anchor="ctr" wrap="square" tIns="25400" bIns="25400"/>
-          <a:lstStyle/>
-          <a:p>
-            <a:pPr algn="ctr"/>
-            <a:r>
-              <a:rPr sz="1100" b="1">
-                <a:solidFill>
-                  <a:srgbClr val="FFFFFF"/>
-                </a:solidFill>
-                <a:latin typeface="PingFang TC"/>
-                <a:ea typeface="PingFang TC"/>
-              </a:rPr>
-              <a:t>GitHub Actions</a:t>
-            </a:r>
-          </a:p>
-          <a:p>
-            <a:pPr algn="ctr"/>
-            <a:r>
-              <a:rPr sz="1100" b="0">
-                <a:solidFill>
-                  <a:srgbClr val="FFFFFF"/>
-                </a:solidFill>
-                <a:latin typeface="PingFang TC"/>
-                <a:ea typeface="PingFang TC"/>
-              </a:rPr>
-              <a:t>OIDC assume role</a:t>
-            </a:r>
-          </a:p>
-          <a:p>
-            <a:pPr algn="ctr"/>
-            <a:r>
-              <a:rPr sz="1100" b="0">
-                <a:solidFill>
-                  <a:srgbClr val="FFFFFF"/>
-                </a:solidFill>
-                <a:latin typeface="PingFang TC"/>
-                <a:ea typeface="PingFang TC"/>
-              </a:rPr>
-              <a:t>(無長期金鑰)</a:t>
-            </a:r>
-          </a:p>
-        </p:txBody>
-      </p:sp>
-      <p:cxnSp>
-        <p:nvCxnSpPr>
-          <p:cNvPr id="7" name="Connector 6"/>
-          <p:cNvCxnSpPr/>
-          <p:nvPr/>
-        </p:nvCxnSpPr>
-        <p:spPr>
-          <a:xfrm>
-            <a:off x="3538728" y="2926080"/>
-            <a:ext cx="118872" cy="0"/>
-          </a:xfrm>
-          <a:prstGeom prst="line">
-            <a:avLst/>
-          </a:prstGeom>
-          <a:ln w="22225">
-            <a:solidFill>
-              <a:srgbClr val="64748B"/>
-            </a:solidFill>
-            <a:tailEnd type="triangle" w="med" len="med"/>
-          </a:ln>
-        </p:spPr>
-        <p:style>
-          <a:lnRef idx="2">
-            <a:schemeClr val="accent1"/>
-          </a:lnRef>
-          <a:fillRef idx="0">
-            <a:schemeClr val="accent1"/>
-          </a:fillRef>
-          <a:effectRef idx="1">
-            <a:schemeClr val="accent1"/>
-          </a:effectRef>
-          <a:fontRef idx="minor">
-            <a:schemeClr val="tx1"/>
-          </a:fontRef>
-        </p:style>
-      </p:cxnSp>
-      <p:sp>
-        <p:nvSpPr>
-          <p:cNvPr id="8" name="Rounded Rectangle 7"/>
-          <p:cNvSpPr/>
-          <p:nvPr/>
-        </p:nvSpPr>
-        <p:spPr>
-          <a:xfrm>
-            <a:off x="3657600" y="2286000"/>
-            <a:ext cx="1481328" cy="1280160"/>
-          </a:xfrm>
-          <a:prstGeom prst="roundRect">
-            <a:avLst/>
-          </a:prstGeom>
-          <a:solidFill>
-            <a:srgbClr val="2563EB"/>
-          </a:solidFill>
-          <a:ln>
-            <a:solidFill>
-              <a:srgbClr val="2563EB"/>
-            </a:solidFill>
-          </a:ln>
-          <a:effectLst/>
-        </p:spPr>
-        <p:style>
-          <a:lnRef idx="1">
-            <a:schemeClr val="accent1"/>
-          </a:lnRef>
-          <a:fillRef idx="3">
-            <a:schemeClr val="accent1"/>
-          </a:fillRef>
-          <a:effectRef idx="2">
-            <a:schemeClr val="accent1"/>
-          </a:effectRef>
-          <a:fontRef idx="minor">
-            <a:schemeClr val="lt1"/>
-          </a:fontRef>
-        </p:style>
-        <p:txBody>
-          <a:bodyPr rtlCol="0" anchor="ctr" wrap="square" tIns="25400" bIns="25400"/>
-          <a:lstStyle/>
-          <a:p>
-            <a:pPr algn="ctr"/>
-            <a:r>
-              <a:rPr sz="1100" b="1">
-                <a:solidFill>
-                  <a:srgbClr val="FFFFFF"/>
-                </a:solidFill>
-                <a:latin typeface="PingFang TC"/>
-                <a:ea typeface="PingFang TC"/>
-              </a:rPr>
-              <a:t>buildx</a:t>
-            </a:r>
-          </a:p>
-          <a:p>
-            <a:pPr algn="ctr"/>
-            <a:r>
-              <a:rPr sz="1100" b="0">
-                <a:solidFill>
-                  <a:srgbClr val="FFFFFF"/>
-                </a:solidFill>
-                <a:latin typeface="PingFang TC"/>
-                <a:ea typeface="PingFang TC"/>
-              </a:rPr>
-              <a:t>--platform</a:t>
-            </a:r>
-          </a:p>
-          <a:p>
-            <a:pPr algn="ctr"/>
-            <a:r>
-              <a:rPr sz="1100" b="0">
-                <a:solidFill>
-                  <a:srgbClr val="FFFFFF"/>
-                </a:solidFill>
-                <a:latin typeface="PingFang TC"/>
-                <a:ea typeface="PingFang TC"/>
-              </a:rPr>
-              <a:t>linux/arm64</a:t>
-            </a:r>
-          </a:p>
-        </p:txBody>
-      </p:sp>
-      <p:cxnSp>
-        <p:nvCxnSpPr>
-          <p:cNvPr id="9" name="Connector 8"/>
-          <p:cNvCxnSpPr/>
-          <p:nvPr/>
-        </p:nvCxnSpPr>
-        <p:spPr>
-          <a:xfrm>
-            <a:off x="5138928" y="2926080"/>
-            <a:ext cx="118872" cy="0"/>
-          </a:xfrm>
-          <a:prstGeom prst="line">
-            <a:avLst/>
-          </a:prstGeom>
-          <a:ln w="22225">
-            <a:solidFill>
-              <a:srgbClr val="64748B"/>
-            </a:solidFill>
-            <a:tailEnd type="triangle" w="med" len="med"/>
-          </a:ln>
-        </p:spPr>
-        <p:style>
-          <a:lnRef idx="2">
-            <a:schemeClr val="accent1"/>
-          </a:lnRef>
-          <a:fillRef idx="0">
-            <a:schemeClr val="accent1"/>
-          </a:fillRef>
-          <a:effectRef idx="1">
-            <a:schemeClr val="accent1"/>
-          </a:effectRef>
-          <a:fontRef idx="minor">
-            <a:schemeClr val="tx1"/>
-          </a:fontRef>
-        </p:style>
-      </p:cxnSp>
-      <p:sp>
-        <p:nvSpPr>
-          <p:cNvPr id="10" name="Rounded Rectangle 9"/>
-          <p:cNvSpPr/>
-          <p:nvPr/>
-        </p:nvSpPr>
-        <p:spPr>
-          <a:xfrm>
-            <a:off x="5257800" y="2286000"/>
-            <a:ext cx="1481328" cy="1280160"/>
-          </a:xfrm>
-          <a:prstGeom prst="roundRect">
-            <a:avLst/>
-          </a:prstGeom>
-          <a:solidFill>
-            <a:srgbClr val="059669"/>
-          </a:solidFill>
-          <a:ln>
-            <a:solidFill>
-              <a:srgbClr val="059669"/>
-            </a:solidFill>
-          </a:ln>
-          <a:effectLst/>
-        </p:spPr>
-        <p:style>
-          <a:lnRef idx="1">
-            <a:schemeClr val="accent1"/>
-          </a:lnRef>
-          <a:fillRef idx="3">
-            <a:schemeClr val="accent1"/>
-          </a:fillRef>
-          <a:effectRef idx="2">
-            <a:schemeClr val="accent1"/>
-          </a:effectRef>
-          <a:fontRef idx="minor">
-            <a:schemeClr val="lt1"/>
-          </a:fontRef>
-        </p:style>
-        <p:txBody>
-          <a:bodyPr rtlCol="0" anchor="ctr" wrap="square" tIns="25400" bIns="25400"/>
-          <a:lstStyle/>
-          <a:p>
-            <a:pPr algn="ctr"/>
-            <a:r>
-              <a:rPr sz="1100" b="1">
-                <a:solidFill>
-                  <a:srgbClr val="FFFFFF"/>
-                </a:solidFill>
-                <a:latin typeface="PingFang TC"/>
-                <a:ea typeface="PingFang TC"/>
-              </a:rPr>
-              <a:t>ECR push</a:t>
-            </a:r>
-          </a:p>
-          <a:p>
-            <a:pPr algn="ctr"/>
-            <a:r>
-              <a:rPr sz="1100" b="0">
-                <a:solidFill>
-                  <a:srgbClr val="FFFFFF"/>
-                </a:solidFill>
-                <a:latin typeface="PingFang TC"/>
-                <a:ea typeface="PingFang TC"/>
-              </a:rPr>
-              <a:t>tag = SHA</a:t>
-            </a:r>
-          </a:p>
-          <a:p>
-            <a:pPr algn="ctr"/>
-            <a:r>
-              <a:rPr sz="1100" b="0">
-                <a:solidFill>
-                  <a:srgbClr val="FFFFFF"/>
-                </a:solidFill>
-                <a:latin typeface="PingFang TC"/>
-                <a:ea typeface="PingFang TC"/>
-              </a:rPr>
-              <a:t>+ latest</a:t>
-            </a:r>
-          </a:p>
-        </p:txBody>
-      </p:sp>
-      <p:cxnSp>
-        <p:nvCxnSpPr>
-          <p:cNvPr id="11" name="Connector 10"/>
-          <p:cNvCxnSpPr/>
-          <p:nvPr/>
-        </p:nvCxnSpPr>
-        <p:spPr>
-          <a:xfrm>
-            <a:off x="6739128" y="2926080"/>
-            <a:ext cx="118872" cy="0"/>
-          </a:xfrm>
-          <a:prstGeom prst="line">
-            <a:avLst/>
-          </a:prstGeom>
-          <a:ln w="22225">
-            <a:solidFill>
-              <a:srgbClr val="64748B"/>
-            </a:solidFill>
-            <a:tailEnd type="triangle" w="med" len="med"/>
-          </a:ln>
-        </p:spPr>
-        <p:style>
-          <a:lnRef idx="2">
-            <a:schemeClr val="accent1"/>
-          </a:lnRef>
-          <a:fillRef idx="0">
-            <a:schemeClr val="accent1"/>
-          </a:fillRef>
-          <a:effectRef idx="1">
-            <a:schemeClr val="accent1"/>
-          </a:effectRef>
-          <a:fontRef idx="minor">
-            <a:schemeClr val="tx1"/>
-          </a:fontRef>
-        </p:style>
-      </p:cxnSp>
-      <p:sp>
-        <p:nvSpPr>
-          <p:cNvPr id="12" name="Rounded Rectangle 11"/>
-          <p:cNvSpPr/>
-          <p:nvPr/>
-        </p:nvSpPr>
-        <p:spPr>
-          <a:xfrm>
-            <a:off x="6858000" y="2286000"/>
-            <a:ext cx="1481328" cy="1280160"/>
-          </a:xfrm>
-          <a:prstGeom prst="roundRect">
-            <a:avLst/>
-          </a:prstGeom>
-          <a:solidFill>
-            <a:srgbClr val="7C3AED"/>
-          </a:solidFill>
-          <a:ln>
-            <a:solidFill>
-              <a:srgbClr val="7C3AED"/>
-            </a:solidFill>
-          </a:ln>
-          <a:effectLst/>
-        </p:spPr>
-        <p:style>
-          <a:lnRef idx="1">
-            <a:schemeClr val="accent1"/>
-          </a:lnRef>
-          <a:fillRef idx="3">
-            <a:schemeClr val="accent1"/>
-          </a:fillRef>
-          <a:effectRef idx="2">
-            <a:schemeClr val="accent1"/>
-          </a:effectRef>
-          <a:fontRef idx="minor">
-            <a:schemeClr val="lt1"/>
-          </a:fontRef>
-        </p:style>
-        <p:txBody>
-          <a:bodyPr rtlCol="0" anchor="ctr" wrap="square" tIns="25400" bIns="25400"/>
-          <a:lstStyle/>
-          <a:p>
-            <a:pPr algn="ctr"/>
-            <a:r>
-              <a:rPr sz="1100" b="1">
-                <a:solidFill>
-                  <a:srgbClr val="FFFFFF"/>
-                </a:solidFill>
-                <a:latin typeface="PingFang TC"/>
-                <a:ea typeface="PingFang TC"/>
-              </a:rPr>
-              <a:t>SSM 更新</a:t>
-            </a:r>
-          </a:p>
-          <a:p>
-            <a:pPr algn="ctr"/>
-            <a:r>
-              <a:rPr sz="1100" b="0">
-                <a:solidFill>
-                  <a:srgbClr val="FFFFFF"/>
-                </a:solidFill>
-                <a:latin typeface="PingFang TC"/>
-                <a:ea typeface="PingFang TC"/>
-              </a:rPr>
-              <a:t>/qrcode/</a:t>
-            </a:r>
-          </a:p>
-          <a:p>
-            <a:pPr algn="ctr"/>
-            <a:r>
-              <a:rPr sz="1100" b="0">
-                <a:solidFill>
-                  <a:srgbClr val="FFFFFF"/>
-                </a:solidFill>
-                <a:latin typeface="PingFang TC"/>
-                <a:ea typeface="PingFang TC"/>
-              </a:rPr>
-              <a:t>IMAGE_URI</a:t>
-            </a:r>
-          </a:p>
-        </p:txBody>
-      </p:sp>
-      <p:cxnSp>
-        <p:nvCxnSpPr>
-          <p:cNvPr id="13" name="Connector 12"/>
-          <p:cNvCxnSpPr/>
-          <p:nvPr/>
-        </p:nvCxnSpPr>
-        <p:spPr>
-          <a:xfrm>
-            <a:off x="8339328" y="2926080"/>
-            <a:ext cx="118872" cy="0"/>
-          </a:xfrm>
-          <a:prstGeom prst="line">
-            <a:avLst/>
-          </a:prstGeom>
-          <a:ln w="22225">
-            <a:solidFill>
-              <a:srgbClr val="64748B"/>
-            </a:solidFill>
-            <a:tailEnd type="triangle" w="med" len="med"/>
-          </a:ln>
-        </p:spPr>
-        <p:style>
-          <a:lnRef idx="2">
-            <a:schemeClr val="accent1"/>
-          </a:lnRef>
-          <a:fillRef idx="0">
-            <a:schemeClr val="accent1"/>
-          </a:fillRef>
-          <a:effectRef idx="1">
-            <a:schemeClr val="accent1"/>
-          </a:effectRef>
-          <a:fontRef idx="minor">
-            <a:schemeClr val="tx1"/>
-          </a:fontRef>
-        </p:style>
-      </p:cxnSp>
-      <p:sp>
-        <p:nvSpPr>
-          <p:cNvPr id="14" name="Rounded Rectangle 13"/>
-          <p:cNvSpPr/>
-          <p:nvPr/>
-        </p:nvSpPr>
-        <p:spPr>
-          <a:xfrm>
-            <a:off x="8458200" y="2286000"/>
-            <a:ext cx="1481328" cy="1280160"/>
-          </a:xfrm>
-          <a:prstGeom prst="roundRect">
-            <a:avLst/>
-          </a:prstGeom>
-          <a:solidFill>
-            <a:srgbClr val="D97706"/>
-          </a:solidFill>
-          <a:ln>
-            <a:solidFill>
-              <a:srgbClr val="D97706"/>
-            </a:solidFill>
-          </a:ln>
-          <a:effectLst/>
-        </p:spPr>
-        <p:style>
-          <a:lnRef idx="1">
-            <a:schemeClr val="accent1"/>
-          </a:lnRef>
-          <a:fillRef idx="3">
-            <a:schemeClr val="accent1"/>
-          </a:fillRef>
-          <a:effectRef idx="2">
-            <a:schemeClr val="accent1"/>
-          </a:effectRef>
-          <a:fontRef idx="minor">
-            <a:schemeClr val="lt1"/>
-          </a:fontRef>
-        </p:style>
-        <p:txBody>
-          <a:bodyPr rtlCol="0" anchor="ctr" wrap="square" tIns="25400" bIns="25400"/>
-          <a:lstStyle/>
-          <a:p>
-            <a:pPr algn="ctr"/>
-            <a:r>
-              <a:rPr sz="1100" b="1">
-                <a:solidFill>
-                  <a:srgbClr val="FFFFFF"/>
-                </a:solidFill>
-                <a:latin typeface="PingFang TC"/>
-                <a:ea typeface="PingFang TC"/>
-              </a:rPr>
-              <a:t>SSM 部署</a:t>
-            </a:r>
-          </a:p>
-          <a:p>
-            <a:pPr algn="ctr"/>
-            <a:r>
-              <a:rPr sz="1100" b="0">
-                <a:solidFill>
-                  <a:srgbClr val="FFFFFF"/>
-                </a:solidFill>
-                <a:latin typeface="PingFang TC"/>
-                <a:ea typeface="PingFang TC"/>
-              </a:rPr>
-              <a:t>→ EC2</a:t>
-            </a:r>
-          </a:p>
-          <a:p>
-            <a:pPr algn="ctr"/>
-            <a:r>
-              <a:rPr sz="1100" b="0">
-                <a:solidFill>
-                  <a:srgbClr val="FFFFFF"/>
-                </a:solidFill>
-                <a:latin typeface="PingFang TC"/>
-                <a:ea typeface="PingFang TC"/>
-              </a:rPr>
-              <a:t>deploy-app.sh</a:t>
-            </a:r>
-          </a:p>
-        </p:txBody>
-      </p:sp>
-      <p:cxnSp>
-        <p:nvCxnSpPr>
-          <p:cNvPr id="15" name="Connector 14"/>
-          <p:cNvCxnSpPr/>
-          <p:nvPr/>
-        </p:nvCxnSpPr>
-        <p:spPr>
-          <a:xfrm>
-            <a:off x="9939528" y="2926080"/>
-            <a:ext cx="118872" cy="0"/>
-          </a:xfrm>
-          <a:prstGeom prst="line">
-            <a:avLst/>
-          </a:prstGeom>
-          <a:ln w="22225">
-            <a:solidFill>
-              <a:srgbClr val="64748B"/>
-            </a:solidFill>
-            <a:tailEnd type="triangle" w="med" len="med"/>
-          </a:ln>
-        </p:spPr>
-        <p:style>
-          <a:lnRef idx="2">
-            <a:schemeClr val="accent1"/>
-          </a:lnRef>
-          <a:fillRef idx="0">
-            <a:schemeClr val="accent1"/>
-          </a:fillRef>
-          <a:effectRef idx="1">
-            <a:schemeClr val="accent1"/>
-          </a:effectRef>
-          <a:fontRef idx="minor">
-            <a:schemeClr val="tx1"/>
-          </a:fontRef>
-        </p:style>
-      </p:cxnSp>
-      <p:sp>
-        <p:nvSpPr>
-          <p:cNvPr id="16" name="Rounded Rectangle 15"/>
-          <p:cNvSpPr/>
-          <p:nvPr/>
-        </p:nvSpPr>
-        <p:spPr>
-          <a:xfrm>
-            <a:off x="10058400" y="2286000"/>
-            <a:ext cx="1481328" cy="1280160"/>
-          </a:xfrm>
-          <a:prstGeom prst="roundRect">
-            <a:avLst/>
-          </a:prstGeom>
-          <a:solidFill>
-            <a:srgbClr val="059669"/>
-          </a:solidFill>
-          <a:ln>
-            <a:solidFill>
-              <a:srgbClr val="059669"/>
-            </a:solidFill>
-          </a:ln>
-          <a:effectLst/>
-        </p:spPr>
-        <p:style>
-          <a:lnRef idx="1">
-            <a:schemeClr val="accent1"/>
-          </a:lnRef>
-          <a:fillRef idx="3">
-            <a:schemeClr val="accent1"/>
-          </a:fillRef>
-          <a:effectRef idx="2">
-            <a:schemeClr val="accent1"/>
-          </a:effectRef>
-          <a:fontRef idx="minor">
-            <a:schemeClr val="lt1"/>
-          </a:fontRef>
-        </p:style>
-        <p:txBody>
-          <a:bodyPr rtlCol="0" anchor="ctr" wrap="square" tIns="25400" bIns="25400"/>
-          <a:lstStyle/>
-          <a:p>
-            <a:pPr algn="ctr"/>
-            <a:r>
-              <a:rPr sz="1100" b="1">
-                <a:solidFill>
-                  <a:srgbClr val="FFFFFF"/>
-                </a:solidFill>
-                <a:latin typeface="PingFang TC"/>
-                <a:ea typeface="PingFang TC"/>
-              </a:rPr>
-              <a:t>上線</a:t>
-            </a:r>
-          </a:p>
-          <a:p>
-            <a:pPr algn="ctr"/>
-            <a:r>
-              <a:rPr sz="1100" b="0">
-                <a:solidFill>
-                  <a:srgbClr val="FFFFFF"/>
-                </a:solidFill>
-                <a:latin typeface="PingFang TC"/>
-                <a:ea typeface="PingFang TC"/>
-              </a:rPr>
-              <a:t>ALB /health</a:t>
-            </a:r>
-          </a:p>
-          <a:p>
-            <a:pPr algn="ctr"/>
-            <a:r>
-              <a:rPr sz="1100" b="0">
-                <a:solidFill>
-                  <a:srgbClr val="FFFFFF"/>
-                </a:solidFill>
-                <a:latin typeface="PingFang TC"/>
-                <a:ea typeface="PingFang TC"/>
-              </a:rPr>
-              <a:t>通過</a:t>
-            </a:r>
-          </a:p>
-        </p:txBody>
-      </p:sp>
-      <p:sp>
-        <p:nvSpPr>
-          <p:cNvPr id="17" name="TextBox 16"/>
+              <a:t>壞輸入/依賴故障都優雅回應、不洩漏、可追蹤</a:t>
+            </a:r>
+          </a:p>
+        </p:txBody>
+      </p:sp>
+      <p:graphicFrame>
+        <p:nvGraphicFramePr>
+          <p:cNvPr id="4" name="Table 3"/>
+          <p:cNvGraphicFramePr>
+            <a:graphicFrameLocks noGrp="1"/>
+          </p:cNvGraphicFramePr>
+          <p:nvPr/>
+        </p:nvGraphicFramePr>
+        <p:xfrm>
+          <a:off x="548640" y="1828800"/>
+          <a:ext cx="11109960" cy="2468880"/>
+        </p:xfrm>
+        <a:graphic>
+          <a:graphicData uri="http://schemas.openxmlformats.org/drawingml/2006/table">
+            <a:tbl>
+              <a:tblPr firstRow="1" bandRow="1">
+                <a:tableStyleId>{5C22544A-7EE6-4342-B048-85BDC9FD1C3A}</a:tableStyleId>
+              </a:tblPr>
+              <a:tblGrid>
+                <a:gridCol w="2194560"/>
+                <a:gridCol w="8915400"/>
+              </a:tblGrid>
+              <a:tr h="493776">
+                <a:tc>
+                  <a:txBody>
+                    <a:bodyPr/>
+                    <a:lstStyle/>
+                    <a:p>
+                      <a:r>
+                        <a:rPr sz="1200" b="1">
+                          <a:solidFill>
+                            <a:srgbClr val="FFFFFF"/>
+                          </a:solidFill>
+                          <a:latin typeface="PingFang TC"/>
+                          <a:ea typeface="PingFang TC"/>
+                        </a:rPr>
+                        <a:t>面向</a:t>
+                      </a:r>
+                    </a:p>
+                  </a:txBody>
+                  <a:tcPr marT="25400" marB="25400" marL="101600" anchor="ctr">
+                    <a:solidFill>
+                      <a:srgbClr val="2563EB"/>
+                    </a:solidFill>
+                  </a:tcPr>
+                </a:tc>
+                <a:tc>
+                  <a:txBody>
+                    <a:bodyPr/>
+                    <a:lstStyle/>
+                    <a:p>
+                      <a:r>
+                        <a:rPr sz="1200" b="1">
+                          <a:solidFill>
+                            <a:srgbClr val="FFFFFF"/>
+                          </a:solidFill>
+                          <a:latin typeface="PingFang TC"/>
+                          <a:ea typeface="PingFang TC"/>
+                        </a:rPr>
+                        <a:t>做法</a:t>
+                      </a:r>
+                    </a:p>
+                  </a:txBody>
+                  <a:tcPr marT="25400" marB="25400" marL="101600" anchor="ctr">
+                    <a:solidFill>
+                      <a:srgbClr val="2563EB"/>
+                    </a:solidFill>
+                  </a:tcPr>
+                </a:tc>
+              </a:tr>
+              <a:tr h="493776">
+                <a:tc>
+                  <a:txBody>
+                    <a:bodyPr/>
+                    <a:lstStyle/>
+                    <a:p>
+                      <a:r>
+                        <a:rPr sz="1200" b="1">
+                          <a:solidFill>
+                            <a:srgbClr val="0F172A"/>
+                          </a:solidFill>
+                          <a:latin typeface="PingFang TC"/>
+                          <a:ea typeface="PingFang TC"/>
+                        </a:rPr>
+                        <a:t>全域處理器</a:t>
+                      </a:r>
+                    </a:p>
+                  </a:txBody>
+                  <a:tcPr marT="25400" marB="25400" marL="101600" anchor="ctr">
+                    <a:solidFill>
+                      <a:srgbClr val="FFFFFF"/>
+                    </a:solidFill>
+                  </a:tcPr>
+                </a:tc>
+                <a:tc>
+                  <a:txBody>
+                    <a:bodyPr/>
+                    <a:lstStyle/>
+                    <a:p>
+                      <a:r>
+                        <a:rPr sz="1200" b="0">
+                          <a:solidFill>
+                            <a:srgbClr val="0F172A"/>
+                          </a:solidFill>
+                          <a:latin typeface="PingFang TC"/>
+                          <a:ea typeface="PingFang TC"/>
+                        </a:rPr>
+                        <a:t>未捕捉例外 → 500 不洩漏 + 記 traceback;422 驗證轉可讀字串(沿用 {detail})</a:t>
+                      </a:r>
+                    </a:p>
+                  </a:txBody>
+                  <a:tcPr marT="25400" marB="25400" marL="101600" anchor="ctr">
+                    <a:solidFill>
+                      <a:srgbClr val="FFFFFF"/>
+                    </a:solidFill>
+                  </a:tcPr>
+                </a:tc>
+              </a:tr>
+              <a:tr h="493776">
+                <a:tc>
+                  <a:txBody>
+                    <a:bodyPr/>
+                    <a:lstStyle/>
+                    <a:p>
+                      <a:r>
+                        <a:rPr sz="1200" b="1">
+                          <a:solidFill>
+                            <a:srgbClr val="0F172A"/>
+                          </a:solidFill>
+                          <a:latin typeface="PingFang TC"/>
+                          <a:ea typeface="PingFang TC"/>
+                        </a:rPr>
+                        <a:t>依賴降級</a:t>
+                      </a:r>
+                    </a:p>
+                  </a:txBody>
+                  <a:tcPr marT="25400" marB="25400" marL="101600" anchor="ctr">
+                    <a:solidFill>
+                      <a:srgbClr val="F1F5F9"/>
+                    </a:solidFill>
+                  </a:tcPr>
+                </a:tc>
+                <a:tc>
+                  <a:txBody>
+                    <a:bodyPr/>
+                    <a:lstStyle/>
+                    <a:p>
+                      <a:r>
+                        <a:rPr sz="1200" b="0">
+                          <a:solidFill>
+                            <a:srgbClr val="0F172A"/>
+                          </a:solidFill>
+                          <a:latin typeface="PingFang TC"/>
+                          <a:ea typeface="PingFang TC"/>
+                        </a:rPr>
+                        <a:t>Redis 故障 → redirect 走 DB(不 500);S3 失敗 → create fallback /image</a:t>
+                      </a:r>
+                    </a:p>
+                  </a:txBody>
+                  <a:tcPr marT="25400" marB="25400" marL="101600" anchor="ctr">
+                    <a:solidFill>
+                      <a:srgbClr val="F1F5F9"/>
+                    </a:solidFill>
+                  </a:tcPr>
+                </a:tc>
+              </a:tr>
+              <a:tr h="493776">
+                <a:tc>
+                  <a:txBody>
+                    <a:bodyPr/>
+                    <a:lstStyle/>
+                    <a:p>
+                      <a:r>
+                        <a:rPr sz="1200" b="1">
+                          <a:solidFill>
+                            <a:srgbClr val="0F172A"/>
+                          </a:solidFill>
+                          <a:latin typeface="PingFang TC"/>
+                          <a:ea typeface="PingFang TC"/>
+                        </a:rPr>
+                        <a:t>Request ID</a:t>
+                      </a:r>
+                    </a:p>
+                  </a:txBody>
+                  <a:tcPr marT="25400" marB="25400" marL="101600" anchor="ctr">
+                    <a:solidFill>
+                      <a:srgbClr val="FFFFFF"/>
+                    </a:solidFill>
+                  </a:tcPr>
+                </a:tc>
+                <a:tc>
+                  <a:txBody>
+                    <a:bodyPr/>
+                    <a:lstStyle/>
+                    <a:p>
+                      <a:r>
+                        <a:rPr sz="1200" b="0">
+                          <a:solidFill>
+                            <a:srgbClr val="0F172A"/>
+                          </a:solidFill>
+                          <a:latin typeface="PingFang TC"/>
+                          <a:ea typeface="PingFang TC"/>
+                        </a:rPr>
+                        <a:t>所有回應帶 X-Request-ID + 進日誌/錯誤 body(對應 CloudWatch Logs)</a:t>
+                      </a:r>
+                    </a:p>
+                  </a:txBody>
+                  <a:tcPr marT="25400" marB="25400" marL="101600" anchor="ctr">
+                    <a:solidFill>
+                      <a:srgbClr val="FFFFFF"/>
+                    </a:solidFill>
+                  </a:tcPr>
+                </a:tc>
+              </a:tr>
+              <a:tr h="493776">
+                <a:tc>
+                  <a:txBody>
+                    <a:bodyPr/>
+                    <a:lstStyle/>
+                    <a:p>
+                      <a:r>
+                        <a:rPr sz="1200" b="1">
+                          <a:solidFill>
+                            <a:srgbClr val="0F172A"/>
+                          </a:solidFill>
+                          <a:latin typeface="PingFang TC"/>
+                          <a:ea typeface="PingFang TC"/>
+                        </a:rPr>
+                        <a:t>輸入健全化</a:t>
+                      </a:r>
+                    </a:p>
+                  </a:txBody>
+                  <a:tcPr marT="25400" marB="25400" marL="101600" anchor="ctr">
+                    <a:solidFill>
+                      <a:srgbClr val="F1F5F9"/>
+                    </a:solidFill>
+                  </a:tcPr>
+                </a:tc>
+                <a:tc>
+                  <a:txBody>
+                    <a:bodyPr/>
+                    <a:lstStyle/>
+                    <a:p>
+                      <a:r>
+                        <a:rPr sz="1200" b="0">
+                          <a:solidFill>
+                            <a:srgbClr val="0F172A"/>
+                          </a:solidFill>
+                          <a:latin typeface="PingFang TC"/>
+                          <a:ea typeface="PingFang TC"/>
+                        </a:rPr>
+                        <a:t>body &gt; 64KB → 413;malformed JSON → 422;URL 長度 2048</a:t>
+                      </a:r>
+                    </a:p>
+                  </a:txBody>
+                  <a:tcPr marT="25400" marB="25400" marL="101600" anchor="ctr">
+                    <a:solidFill>
+                      <a:srgbClr val="F1F5F9"/>
+                    </a:solidFill>
+                  </a:tcPr>
+                </a:tc>
+              </a:tr>
+            </a:tbl>
+          </a:graphicData>
+        </a:graphic>
+      </p:graphicFrame>
+      <p:sp>
+        <p:nvSpPr>
+          <p:cNvPr id="5" name="TextBox 4"/>
           <p:cNvSpPr txBox="1"/>
           <p:nvPr/>
         </p:nvSpPr>
         <p:spPr>
           <a:xfrm>
-            <a:off x="548640" y="4023360"/>
-            <a:ext cx="11247120" cy="2194560"/>
+            <a:off x="548640" y="4480560"/>
+            <a:ext cx="11247120" cy="1828800"/>
           </a:xfrm>
           <a:prstGeom prst="rect">
             <a:avLst/>
@@ -18436,52 +17926,52 @@
           <a:p>
             <a:pPr>
               <a:spcAft>
-                <a:spcPts val="900"/>
+                <a:spcPts val="800"/>
               </a:spcAft>
             </a:pPr>
             <a:r>
-              <a:rPr sz="1400" b="0">
+              <a:rPr sz="1300" b="0">
                 <a:solidFill>
                   <a:srgbClr val="0F172A"/>
                 </a:solidFill>
                 <a:latin typeface="PingFang TC"/>
                 <a:ea typeface="PingFang TC"/>
               </a:rPr>
-              <a:t>•  EC2 deploy-app.sh:從 SSM 撈設定 → ECR login → docker pull → docker run(換新容器)</a:t>
+              <a:t>•  錯誤格式沿用 {"detail"} → 相容前端;500 只回通用訊息 + request_id,traceback 僅進日誌</a:t>
             </a:r>
           </a:p>
           <a:p>
             <a:pPr>
               <a:spcAft>
-                <a:spcPts val="900"/>
+                <a:spcPts val="800"/>
               </a:spcAft>
             </a:pPr>
             <a:r>
-              <a:rPr sz="1400" b="0">
+              <a:rPr sz="1300" b="0">
                 <a:solidFill>
                   <a:srgbClr val="0F172A"/>
                 </a:solidFill>
                 <a:latin typeface="PingFang TC"/>
                 <a:ea typeface="PingFang TC"/>
               </a:rPr>
-              <a:t>•  全 env-gated:本機無這些環境變數 → 維持 SQLite + 記憶體 cache + 即時生圖,不受影響</a:t>
+              <a:t>•  依賴降級讓「Redis/S3 掛掉」不再連帶整個請求 500;分析寫入失敗也只記 log</a:t>
             </a:r>
           </a:p>
           <a:p>
             <a:pPr>
               <a:spcAft>
-                <a:spcPts val="900"/>
+                <a:spcPts val="800"/>
               </a:spcAft>
             </a:pPr>
             <a:r>
-              <a:rPr sz="1400" b="0">
+              <a:rPr sz="1300" b="0">
                 <a:solidFill>
                   <a:srgbClr val="0F172A"/>
                 </a:solidFill>
                 <a:latin typeface="PingFang TC"/>
                 <a:ea typeface="PingFang TC"/>
               </a:rPr>
-              <a:t>•  部署踩到的兩個坑:① EC2 role 少 s3:PutObject(500)② CI build amd64 但 EC2 arm64(502)→ buildx 跨平台修正</a:t>
+              <a:t>•  本機驗證:422/413/500(含 X-Request-ID)+ REDIS_URL 不可達時 redirect 仍 302。純 app,不動 infra</a:t>
             </a:r>
           </a:p>
         </p:txBody>
@@ -18513,13 +18003,13 @@
         <p:spPr>
           <a:xfrm>
             <a:off x="0" y="0"/>
-            <a:ext cx="12191695" cy="6858000"/>
+            <a:ext cx="164592" cy="6858000"/>
           </a:xfrm>
           <a:prstGeom prst="rect">
             <a:avLst/>
           </a:prstGeom>
           <a:solidFill>
-            <a:srgbClr val="0F172A"/>
+            <a:srgbClr val="2563EB"/>
           </a:solidFill>
           <a:ln>
             <a:noFill/>
@@ -18556,8 +18046,8 @@
         </p:nvSpPr>
         <p:spPr>
           <a:xfrm>
-            <a:off x="822960" y="1097280"/>
-            <a:ext cx="10515600" cy="1097280"/>
+            <a:off x="502920" y="320040"/>
+            <a:ext cx="10972800" cy="1005840"/>
           </a:xfrm>
           <a:prstGeom prst="rect">
             <a:avLst/>
@@ -18569,6 +18059,23 @@
             <a:spAutoFit/>
           </a:bodyPr>
           <a:lstStyle/>
+          <a:p>
+            <a:pPr algn="l">
+              <a:spcAft>
+                <a:spcPts val="200"/>
+              </a:spcAft>
+            </a:pPr>
+            <a:r>
+              <a:rPr sz="1300" b="1">
+                <a:solidFill>
+                  <a:srgbClr val="2563EB"/>
+                </a:solidFill>
+                <a:latin typeface="PingFang TC"/>
+                <a:ea typeface="PingFang TC"/>
+              </a:rPr>
+              <a:t>部署 · CI/CD</a:t>
+            </a:r>
+          </a:p>
           <a:p>
             <a:pPr algn="l">
               <a:spcAft>
@@ -18576,45 +18083,805 @@
               </a:spcAft>
             </a:pPr>
             <a:r>
-              <a:rPr sz="1600" b="1">
-                <a:solidFill>
-                  <a:srgbClr val="2563EB"/>
-                </a:solidFill>
-                <a:latin typeface="PingFang TC"/>
-                <a:ea typeface="PingFang TC"/>
-              </a:rPr>
-              <a:t>原型狀態</a:t>
-            </a:r>
-          </a:p>
-          <a:p>
-            <a:pPr algn="l">
-              <a:spcAft>
-                <a:spcPts val="400"/>
-              </a:spcAft>
-            </a:pPr>
-            <a:r>
               <a:rPr sz="3000" b="1">
                 <a:solidFill>
+                  <a:srgbClr val="0F172A"/>
+                </a:solidFill>
+                <a:latin typeface="PingFang TC"/>
+                <a:ea typeface="PingFang TC"/>
+              </a:rPr>
+              <a:t>CI/CD 流程（GitHub Actions + OIDC）</a:t>
+            </a:r>
+          </a:p>
+        </p:txBody>
+      </p:sp>
+      <p:sp>
+        <p:nvSpPr>
+          <p:cNvPr id="4" name="Rounded Rectangle 3"/>
+          <p:cNvSpPr/>
+          <p:nvPr/>
+        </p:nvSpPr>
+        <p:spPr>
+          <a:xfrm>
+            <a:off x="457200" y="2286000"/>
+            <a:ext cx="1481328" cy="1280160"/>
+          </a:xfrm>
+          <a:prstGeom prst="roundRect">
+            <a:avLst/>
+          </a:prstGeom>
+          <a:solidFill>
+            <a:srgbClr val="64748B"/>
+          </a:solidFill>
+          <a:ln>
+            <a:solidFill>
+              <a:srgbClr val="64748B"/>
+            </a:solidFill>
+          </a:ln>
+          <a:effectLst/>
+        </p:spPr>
+        <p:style>
+          <a:lnRef idx="1">
+            <a:schemeClr val="accent1"/>
+          </a:lnRef>
+          <a:fillRef idx="3">
+            <a:schemeClr val="accent1"/>
+          </a:fillRef>
+          <a:effectRef idx="2">
+            <a:schemeClr val="accent1"/>
+          </a:effectRef>
+          <a:fontRef idx="minor">
+            <a:schemeClr val="lt1"/>
+          </a:fontRef>
+        </p:style>
+        <p:txBody>
+          <a:bodyPr rtlCol="0" anchor="ctr" wrap="square" tIns="25400" bIns="25400"/>
+          <a:lstStyle/>
+          <a:p>
+            <a:pPr algn="ctr"/>
+            <a:r>
+              <a:rPr sz="1100" b="1">
+                <a:solidFill>
                   <a:srgbClr val="FFFFFF"/>
                 </a:solidFill>
                 <a:latin typeface="PingFang TC"/>
                 <a:ea typeface="PingFang TC"/>
               </a:rPr>
-              <a:t>可跑的 FastAPI 實作 + 管理頁前端</a:t>
-            </a:r>
-          </a:p>
-        </p:txBody>
-      </p:sp>
-      <p:sp>
-        <p:nvSpPr>
-          <p:cNvPr id="4" name="TextBox 3"/>
+              <a:t>git push</a:t>
+            </a:r>
+          </a:p>
+          <a:p>
+            <a:pPr algn="ctr"/>
+            <a:r>
+              <a:rPr sz="1100" b="0">
+                <a:solidFill>
+                  <a:srgbClr val="FFFFFF"/>
+                </a:solidFill>
+                <a:latin typeface="PingFang TC"/>
+                <a:ea typeface="PingFang TC"/>
+              </a:rPr>
+              <a:t>QR Code Generator/**</a:t>
+            </a:r>
+          </a:p>
+        </p:txBody>
+      </p:sp>
+      <p:cxnSp>
+        <p:nvCxnSpPr>
+          <p:cNvPr id="5" name="Connector 4"/>
+          <p:cNvCxnSpPr/>
+          <p:nvPr/>
+        </p:nvCxnSpPr>
+        <p:spPr>
+          <a:xfrm>
+            <a:off x="1938528" y="2926080"/>
+            <a:ext cx="118872" cy="0"/>
+          </a:xfrm>
+          <a:prstGeom prst="line">
+            <a:avLst/>
+          </a:prstGeom>
+          <a:ln w="22225">
+            <a:solidFill>
+              <a:srgbClr val="64748B"/>
+            </a:solidFill>
+            <a:tailEnd type="triangle" w="med" len="med"/>
+          </a:ln>
+        </p:spPr>
+        <p:style>
+          <a:lnRef idx="2">
+            <a:schemeClr val="accent1"/>
+          </a:lnRef>
+          <a:fillRef idx="0">
+            <a:schemeClr val="accent1"/>
+          </a:fillRef>
+          <a:effectRef idx="1">
+            <a:schemeClr val="accent1"/>
+          </a:effectRef>
+          <a:fontRef idx="minor">
+            <a:schemeClr val="tx1"/>
+          </a:fontRef>
+        </p:style>
+      </p:cxnSp>
+      <p:sp>
+        <p:nvSpPr>
+          <p:cNvPr id="6" name="Rounded Rectangle 5"/>
+          <p:cNvSpPr/>
+          <p:nvPr/>
+        </p:nvSpPr>
+        <p:spPr>
+          <a:xfrm>
+            <a:off x="2057400" y="2286000"/>
+            <a:ext cx="1481328" cy="1280160"/>
+          </a:xfrm>
+          <a:prstGeom prst="roundRect">
+            <a:avLst/>
+          </a:prstGeom>
+          <a:solidFill>
+            <a:srgbClr val="0EA5E9"/>
+          </a:solidFill>
+          <a:ln>
+            <a:solidFill>
+              <a:srgbClr val="0EA5E9"/>
+            </a:solidFill>
+          </a:ln>
+          <a:effectLst/>
+        </p:spPr>
+        <p:style>
+          <a:lnRef idx="1">
+            <a:schemeClr val="accent1"/>
+          </a:lnRef>
+          <a:fillRef idx="3">
+            <a:schemeClr val="accent1"/>
+          </a:fillRef>
+          <a:effectRef idx="2">
+            <a:schemeClr val="accent1"/>
+          </a:effectRef>
+          <a:fontRef idx="minor">
+            <a:schemeClr val="lt1"/>
+          </a:fontRef>
+        </p:style>
+        <p:txBody>
+          <a:bodyPr rtlCol="0" anchor="ctr" wrap="square" tIns="25400" bIns="25400"/>
+          <a:lstStyle/>
+          <a:p>
+            <a:pPr algn="ctr"/>
+            <a:r>
+              <a:rPr sz="1100" b="1">
+                <a:solidFill>
+                  <a:srgbClr val="FFFFFF"/>
+                </a:solidFill>
+                <a:latin typeface="PingFang TC"/>
+                <a:ea typeface="PingFang TC"/>
+              </a:rPr>
+              <a:t>GitHub Actions</a:t>
+            </a:r>
+          </a:p>
+          <a:p>
+            <a:pPr algn="ctr"/>
+            <a:r>
+              <a:rPr sz="1100" b="0">
+                <a:solidFill>
+                  <a:srgbClr val="FFFFFF"/>
+                </a:solidFill>
+                <a:latin typeface="PingFang TC"/>
+                <a:ea typeface="PingFang TC"/>
+              </a:rPr>
+              <a:t>OIDC assume role</a:t>
+            </a:r>
+          </a:p>
+          <a:p>
+            <a:pPr algn="ctr"/>
+            <a:r>
+              <a:rPr sz="1100" b="0">
+                <a:solidFill>
+                  <a:srgbClr val="FFFFFF"/>
+                </a:solidFill>
+                <a:latin typeface="PingFang TC"/>
+                <a:ea typeface="PingFang TC"/>
+              </a:rPr>
+              <a:t>(無長期金鑰)</a:t>
+            </a:r>
+          </a:p>
+        </p:txBody>
+      </p:sp>
+      <p:cxnSp>
+        <p:nvCxnSpPr>
+          <p:cNvPr id="7" name="Connector 6"/>
+          <p:cNvCxnSpPr/>
+          <p:nvPr/>
+        </p:nvCxnSpPr>
+        <p:spPr>
+          <a:xfrm>
+            <a:off x="3538728" y="2926080"/>
+            <a:ext cx="118872" cy="0"/>
+          </a:xfrm>
+          <a:prstGeom prst="line">
+            <a:avLst/>
+          </a:prstGeom>
+          <a:ln w="22225">
+            <a:solidFill>
+              <a:srgbClr val="64748B"/>
+            </a:solidFill>
+            <a:tailEnd type="triangle" w="med" len="med"/>
+          </a:ln>
+        </p:spPr>
+        <p:style>
+          <a:lnRef idx="2">
+            <a:schemeClr val="accent1"/>
+          </a:lnRef>
+          <a:fillRef idx="0">
+            <a:schemeClr val="accent1"/>
+          </a:fillRef>
+          <a:effectRef idx="1">
+            <a:schemeClr val="accent1"/>
+          </a:effectRef>
+          <a:fontRef idx="minor">
+            <a:schemeClr val="tx1"/>
+          </a:fontRef>
+        </p:style>
+      </p:cxnSp>
+      <p:sp>
+        <p:nvSpPr>
+          <p:cNvPr id="8" name="Rounded Rectangle 7"/>
+          <p:cNvSpPr/>
+          <p:nvPr/>
+        </p:nvSpPr>
+        <p:spPr>
+          <a:xfrm>
+            <a:off x="3657600" y="2286000"/>
+            <a:ext cx="1481328" cy="1280160"/>
+          </a:xfrm>
+          <a:prstGeom prst="roundRect">
+            <a:avLst/>
+          </a:prstGeom>
+          <a:solidFill>
+            <a:srgbClr val="2563EB"/>
+          </a:solidFill>
+          <a:ln>
+            <a:solidFill>
+              <a:srgbClr val="2563EB"/>
+            </a:solidFill>
+          </a:ln>
+          <a:effectLst/>
+        </p:spPr>
+        <p:style>
+          <a:lnRef idx="1">
+            <a:schemeClr val="accent1"/>
+          </a:lnRef>
+          <a:fillRef idx="3">
+            <a:schemeClr val="accent1"/>
+          </a:fillRef>
+          <a:effectRef idx="2">
+            <a:schemeClr val="accent1"/>
+          </a:effectRef>
+          <a:fontRef idx="minor">
+            <a:schemeClr val="lt1"/>
+          </a:fontRef>
+        </p:style>
+        <p:txBody>
+          <a:bodyPr rtlCol="0" anchor="ctr" wrap="square" tIns="25400" bIns="25400"/>
+          <a:lstStyle/>
+          <a:p>
+            <a:pPr algn="ctr"/>
+            <a:r>
+              <a:rPr sz="1100" b="1">
+                <a:solidFill>
+                  <a:srgbClr val="FFFFFF"/>
+                </a:solidFill>
+                <a:latin typeface="PingFang TC"/>
+                <a:ea typeface="PingFang TC"/>
+              </a:rPr>
+              <a:t>buildx</a:t>
+            </a:r>
+          </a:p>
+          <a:p>
+            <a:pPr algn="ctr"/>
+            <a:r>
+              <a:rPr sz="1100" b="0">
+                <a:solidFill>
+                  <a:srgbClr val="FFFFFF"/>
+                </a:solidFill>
+                <a:latin typeface="PingFang TC"/>
+                <a:ea typeface="PingFang TC"/>
+              </a:rPr>
+              <a:t>--platform</a:t>
+            </a:r>
+          </a:p>
+          <a:p>
+            <a:pPr algn="ctr"/>
+            <a:r>
+              <a:rPr sz="1100" b="0">
+                <a:solidFill>
+                  <a:srgbClr val="FFFFFF"/>
+                </a:solidFill>
+                <a:latin typeface="PingFang TC"/>
+                <a:ea typeface="PingFang TC"/>
+              </a:rPr>
+              <a:t>linux/arm64</a:t>
+            </a:r>
+          </a:p>
+        </p:txBody>
+      </p:sp>
+      <p:cxnSp>
+        <p:nvCxnSpPr>
+          <p:cNvPr id="9" name="Connector 8"/>
+          <p:cNvCxnSpPr/>
+          <p:nvPr/>
+        </p:nvCxnSpPr>
+        <p:spPr>
+          <a:xfrm>
+            <a:off x="5138928" y="2926080"/>
+            <a:ext cx="118872" cy="0"/>
+          </a:xfrm>
+          <a:prstGeom prst="line">
+            <a:avLst/>
+          </a:prstGeom>
+          <a:ln w="22225">
+            <a:solidFill>
+              <a:srgbClr val="64748B"/>
+            </a:solidFill>
+            <a:tailEnd type="triangle" w="med" len="med"/>
+          </a:ln>
+        </p:spPr>
+        <p:style>
+          <a:lnRef idx="2">
+            <a:schemeClr val="accent1"/>
+          </a:lnRef>
+          <a:fillRef idx="0">
+            <a:schemeClr val="accent1"/>
+          </a:fillRef>
+          <a:effectRef idx="1">
+            <a:schemeClr val="accent1"/>
+          </a:effectRef>
+          <a:fontRef idx="minor">
+            <a:schemeClr val="tx1"/>
+          </a:fontRef>
+        </p:style>
+      </p:cxnSp>
+      <p:sp>
+        <p:nvSpPr>
+          <p:cNvPr id="10" name="Rounded Rectangle 9"/>
+          <p:cNvSpPr/>
+          <p:nvPr/>
+        </p:nvSpPr>
+        <p:spPr>
+          <a:xfrm>
+            <a:off x="5257800" y="2286000"/>
+            <a:ext cx="1481328" cy="1280160"/>
+          </a:xfrm>
+          <a:prstGeom prst="roundRect">
+            <a:avLst/>
+          </a:prstGeom>
+          <a:solidFill>
+            <a:srgbClr val="059669"/>
+          </a:solidFill>
+          <a:ln>
+            <a:solidFill>
+              <a:srgbClr val="059669"/>
+            </a:solidFill>
+          </a:ln>
+          <a:effectLst/>
+        </p:spPr>
+        <p:style>
+          <a:lnRef idx="1">
+            <a:schemeClr val="accent1"/>
+          </a:lnRef>
+          <a:fillRef idx="3">
+            <a:schemeClr val="accent1"/>
+          </a:fillRef>
+          <a:effectRef idx="2">
+            <a:schemeClr val="accent1"/>
+          </a:effectRef>
+          <a:fontRef idx="minor">
+            <a:schemeClr val="lt1"/>
+          </a:fontRef>
+        </p:style>
+        <p:txBody>
+          <a:bodyPr rtlCol="0" anchor="ctr" wrap="square" tIns="25400" bIns="25400"/>
+          <a:lstStyle/>
+          <a:p>
+            <a:pPr algn="ctr"/>
+            <a:r>
+              <a:rPr sz="1100" b="1">
+                <a:solidFill>
+                  <a:srgbClr val="FFFFFF"/>
+                </a:solidFill>
+                <a:latin typeface="PingFang TC"/>
+                <a:ea typeface="PingFang TC"/>
+              </a:rPr>
+              <a:t>ECR push</a:t>
+            </a:r>
+          </a:p>
+          <a:p>
+            <a:pPr algn="ctr"/>
+            <a:r>
+              <a:rPr sz="1100" b="0">
+                <a:solidFill>
+                  <a:srgbClr val="FFFFFF"/>
+                </a:solidFill>
+                <a:latin typeface="PingFang TC"/>
+                <a:ea typeface="PingFang TC"/>
+              </a:rPr>
+              <a:t>tag = SHA</a:t>
+            </a:r>
+          </a:p>
+          <a:p>
+            <a:pPr algn="ctr"/>
+            <a:r>
+              <a:rPr sz="1100" b="0">
+                <a:solidFill>
+                  <a:srgbClr val="FFFFFF"/>
+                </a:solidFill>
+                <a:latin typeface="PingFang TC"/>
+                <a:ea typeface="PingFang TC"/>
+              </a:rPr>
+              <a:t>+ latest</a:t>
+            </a:r>
+          </a:p>
+        </p:txBody>
+      </p:sp>
+      <p:cxnSp>
+        <p:nvCxnSpPr>
+          <p:cNvPr id="11" name="Connector 10"/>
+          <p:cNvCxnSpPr/>
+          <p:nvPr/>
+        </p:nvCxnSpPr>
+        <p:spPr>
+          <a:xfrm>
+            <a:off x="6739128" y="2926080"/>
+            <a:ext cx="118872" cy="0"/>
+          </a:xfrm>
+          <a:prstGeom prst="line">
+            <a:avLst/>
+          </a:prstGeom>
+          <a:ln w="22225">
+            <a:solidFill>
+              <a:srgbClr val="64748B"/>
+            </a:solidFill>
+            <a:tailEnd type="triangle" w="med" len="med"/>
+          </a:ln>
+        </p:spPr>
+        <p:style>
+          <a:lnRef idx="2">
+            <a:schemeClr val="accent1"/>
+          </a:lnRef>
+          <a:fillRef idx="0">
+            <a:schemeClr val="accent1"/>
+          </a:fillRef>
+          <a:effectRef idx="1">
+            <a:schemeClr val="accent1"/>
+          </a:effectRef>
+          <a:fontRef idx="minor">
+            <a:schemeClr val="tx1"/>
+          </a:fontRef>
+        </p:style>
+      </p:cxnSp>
+      <p:sp>
+        <p:nvSpPr>
+          <p:cNvPr id="12" name="Rounded Rectangle 11"/>
+          <p:cNvSpPr/>
+          <p:nvPr/>
+        </p:nvSpPr>
+        <p:spPr>
+          <a:xfrm>
+            <a:off x="6858000" y="2286000"/>
+            <a:ext cx="1481328" cy="1280160"/>
+          </a:xfrm>
+          <a:prstGeom prst="roundRect">
+            <a:avLst/>
+          </a:prstGeom>
+          <a:solidFill>
+            <a:srgbClr val="7C3AED"/>
+          </a:solidFill>
+          <a:ln>
+            <a:solidFill>
+              <a:srgbClr val="7C3AED"/>
+            </a:solidFill>
+          </a:ln>
+          <a:effectLst/>
+        </p:spPr>
+        <p:style>
+          <a:lnRef idx="1">
+            <a:schemeClr val="accent1"/>
+          </a:lnRef>
+          <a:fillRef idx="3">
+            <a:schemeClr val="accent1"/>
+          </a:fillRef>
+          <a:effectRef idx="2">
+            <a:schemeClr val="accent1"/>
+          </a:effectRef>
+          <a:fontRef idx="minor">
+            <a:schemeClr val="lt1"/>
+          </a:fontRef>
+        </p:style>
+        <p:txBody>
+          <a:bodyPr rtlCol="0" anchor="ctr" wrap="square" tIns="25400" bIns="25400"/>
+          <a:lstStyle/>
+          <a:p>
+            <a:pPr algn="ctr"/>
+            <a:r>
+              <a:rPr sz="1100" b="1">
+                <a:solidFill>
+                  <a:srgbClr val="FFFFFF"/>
+                </a:solidFill>
+                <a:latin typeface="PingFang TC"/>
+                <a:ea typeface="PingFang TC"/>
+              </a:rPr>
+              <a:t>SSM 更新</a:t>
+            </a:r>
+          </a:p>
+          <a:p>
+            <a:pPr algn="ctr"/>
+            <a:r>
+              <a:rPr sz="1100" b="0">
+                <a:solidFill>
+                  <a:srgbClr val="FFFFFF"/>
+                </a:solidFill>
+                <a:latin typeface="PingFang TC"/>
+                <a:ea typeface="PingFang TC"/>
+              </a:rPr>
+              <a:t>/qrcode/</a:t>
+            </a:r>
+          </a:p>
+          <a:p>
+            <a:pPr algn="ctr"/>
+            <a:r>
+              <a:rPr sz="1100" b="0">
+                <a:solidFill>
+                  <a:srgbClr val="FFFFFF"/>
+                </a:solidFill>
+                <a:latin typeface="PingFang TC"/>
+                <a:ea typeface="PingFang TC"/>
+              </a:rPr>
+              <a:t>IMAGE_URI</a:t>
+            </a:r>
+          </a:p>
+        </p:txBody>
+      </p:sp>
+      <p:cxnSp>
+        <p:nvCxnSpPr>
+          <p:cNvPr id="13" name="Connector 12"/>
+          <p:cNvCxnSpPr/>
+          <p:nvPr/>
+        </p:nvCxnSpPr>
+        <p:spPr>
+          <a:xfrm>
+            <a:off x="8339328" y="2926080"/>
+            <a:ext cx="118872" cy="0"/>
+          </a:xfrm>
+          <a:prstGeom prst="line">
+            <a:avLst/>
+          </a:prstGeom>
+          <a:ln w="22225">
+            <a:solidFill>
+              <a:srgbClr val="64748B"/>
+            </a:solidFill>
+            <a:tailEnd type="triangle" w="med" len="med"/>
+          </a:ln>
+        </p:spPr>
+        <p:style>
+          <a:lnRef idx="2">
+            <a:schemeClr val="accent1"/>
+          </a:lnRef>
+          <a:fillRef idx="0">
+            <a:schemeClr val="accent1"/>
+          </a:fillRef>
+          <a:effectRef idx="1">
+            <a:schemeClr val="accent1"/>
+          </a:effectRef>
+          <a:fontRef idx="minor">
+            <a:schemeClr val="tx1"/>
+          </a:fontRef>
+        </p:style>
+      </p:cxnSp>
+      <p:sp>
+        <p:nvSpPr>
+          <p:cNvPr id="14" name="Rounded Rectangle 13"/>
+          <p:cNvSpPr/>
+          <p:nvPr/>
+        </p:nvSpPr>
+        <p:spPr>
+          <a:xfrm>
+            <a:off x="8458200" y="2286000"/>
+            <a:ext cx="1481328" cy="1280160"/>
+          </a:xfrm>
+          <a:prstGeom prst="roundRect">
+            <a:avLst/>
+          </a:prstGeom>
+          <a:solidFill>
+            <a:srgbClr val="D97706"/>
+          </a:solidFill>
+          <a:ln>
+            <a:solidFill>
+              <a:srgbClr val="D97706"/>
+            </a:solidFill>
+          </a:ln>
+          <a:effectLst/>
+        </p:spPr>
+        <p:style>
+          <a:lnRef idx="1">
+            <a:schemeClr val="accent1"/>
+          </a:lnRef>
+          <a:fillRef idx="3">
+            <a:schemeClr val="accent1"/>
+          </a:fillRef>
+          <a:effectRef idx="2">
+            <a:schemeClr val="accent1"/>
+          </a:effectRef>
+          <a:fontRef idx="minor">
+            <a:schemeClr val="lt1"/>
+          </a:fontRef>
+        </p:style>
+        <p:txBody>
+          <a:bodyPr rtlCol="0" anchor="ctr" wrap="square" tIns="25400" bIns="25400"/>
+          <a:lstStyle/>
+          <a:p>
+            <a:pPr algn="ctr"/>
+            <a:r>
+              <a:rPr sz="1100" b="1">
+                <a:solidFill>
+                  <a:srgbClr val="FFFFFF"/>
+                </a:solidFill>
+                <a:latin typeface="PingFang TC"/>
+                <a:ea typeface="PingFang TC"/>
+              </a:rPr>
+              <a:t>SSM 部署</a:t>
+            </a:r>
+          </a:p>
+          <a:p>
+            <a:pPr algn="ctr"/>
+            <a:r>
+              <a:rPr sz="1100" b="0">
+                <a:solidFill>
+                  <a:srgbClr val="FFFFFF"/>
+                </a:solidFill>
+                <a:latin typeface="PingFang TC"/>
+                <a:ea typeface="PingFang TC"/>
+              </a:rPr>
+              <a:t>→ EC2</a:t>
+            </a:r>
+          </a:p>
+          <a:p>
+            <a:pPr algn="ctr"/>
+            <a:r>
+              <a:rPr sz="1100" b="0">
+                <a:solidFill>
+                  <a:srgbClr val="FFFFFF"/>
+                </a:solidFill>
+                <a:latin typeface="PingFang TC"/>
+                <a:ea typeface="PingFang TC"/>
+              </a:rPr>
+              <a:t>deploy-app.sh</a:t>
+            </a:r>
+          </a:p>
+        </p:txBody>
+      </p:sp>
+      <p:cxnSp>
+        <p:nvCxnSpPr>
+          <p:cNvPr id="15" name="Connector 14"/>
+          <p:cNvCxnSpPr/>
+          <p:nvPr/>
+        </p:nvCxnSpPr>
+        <p:spPr>
+          <a:xfrm>
+            <a:off x="9939528" y="2926080"/>
+            <a:ext cx="118872" cy="0"/>
+          </a:xfrm>
+          <a:prstGeom prst="line">
+            <a:avLst/>
+          </a:prstGeom>
+          <a:ln w="22225">
+            <a:solidFill>
+              <a:srgbClr val="64748B"/>
+            </a:solidFill>
+            <a:tailEnd type="triangle" w="med" len="med"/>
+          </a:ln>
+        </p:spPr>
+        <p:style>
+          <a:lnRef idx="2">
+            <a:schemeClr val="accent1"/>
+          </a:lnRef>
+          <a:fillRef idx="0">
+            <a:schemeClr val="accent1"/>
+          </a:fillRef>
+          <a:effectRef idx="1">
+            <a:schemeClr val="accent1"/>
+          </a:effectRef>
+          <a:fontRef idx="minor">
+            <a:schemeClr val="tx1"/>
+          </a:fontRef>
+        </p:style>
+      </p:cxnSp>
+      <p:sp>
+        <p:nvSpPr>
+          <p:cNvPr id="16" name="Rounded Rectangle 15"/>
+          <p:cNvSpPr/>
+          <p:nvPr/>
+        </p:nvSpPr>
+        <p:spPr>
+          <a:xfrm>
+            <a:off x="10058400" y="2286000"/>
+            <a:ext cx="1481328" cy="1280160"/>
+          </a:xfrm>
+          <a:prstGeom prst="roundRect">
+            <a:avLst/>
+          </a:prstGeom>
+          <a:solidFill>
+            <a:srgbClr val="059669"/>
+          </a:solidFill>
+          <a:ln>
+            <a:solidFill>
+              <a:srgbClr val="059669"/>
+            </a:solidFill>
+          </a:ln>
+          <a:effectLst/>
+        </p:spPr>
+        <p:style>
+          <a:lnRef idx="1">
+            <a:schemeClr val="accent1"/>
+          </a:lnRef>
+          <a:fillRef idx="3">
+            <a:schemeClr val="accent1"/>
+          </a:fillRef>
+          <a:effectRef idx="2">
+            <a:schemeClr val="accent1"/>
+          </a:effectRef>
+          <a:fontRef idx="minor">
+            <a:schemeClr val="lt1"/>
+          </a:fontRef>
+        </p:style>
+        <p:txBody>
+          <a:bodyPr rtlCol="0" anchor="ctr" wrap="square" tIns="25400" bIns="25400"/>
+          <a:lstStyle/>
+          <a:p>
+            <a:pPr algn="ctr"/>
+            <a:r>
+              <a:rPr sz="1100" b="1">
+                <a:solidFill>
+                  <a:srgbClr val="FFFFFF"/>
+                </a:solidFill>
+                <a:latin typeface="PingFang TC"/>
+                <a:ea typeface="PingFang TC"/>
+              </a:rPr>
+              <a:t>上線</a:t>
+            </a:r>
+          </a:p>
+          <a:p>
+            <a:pPr algn="ctr"/>
+            <a:r>
+              <a:rPr sz="1100" b="0">
+                <a:solidFill>
+                  <a:srgbClr val="FFFFFF"/>
+                </a:solidFill>
+                <a:latin typeface="PingFang TC"/>
+                <a:ea typeface="PingFang TC"/>
+              </a:rPr>
+              <a:t>ALB /health</a:t>
+            </a:r>
+          </a:p>
+          <a:p>
+            <a:pPr algn="ctr"/>
+            <a:r>
+              <a:rPr sz="1100" b="0">
+                <a:solidFill>
+                  <a:srgbClr val="FFFFFF"/>
+                </a:solidFill>
+                <a:latin typeface="PingFang TC"/>
+                <a:ea typeface="PingFang TC"/>
+              </a:rPr>
+              <a:t>通過</a:t>
+            </a:r>
+          </a:p>
+        </p:txBody>
+      </p:sp>
+      <p:sp>
+        <p:nvSpPr>
+          <p:cNvPr id="17" name="TextBox 16"/>
           <p:cNvSpPr txBox="1"/>
           <p:nvPr/>
         </p:nvSpPr>
         <p:spPr>
           <a:xfrm>
-            <a:off x="822960" y="2743200"/>
-            <a:ext cx="10515600" cy="2743200"/>
+            <a:off x="548640" y="4023360"/>
+            <a:ext cx="11247120" cy="2194560"/>
           </a:xfrm>
           <a:prstGeom prst="rect">
             <a:avLst/>
@@ -18629,69 +18896,52 @@
           <a:p>
             <a:pPr>
               <a:spcAft>
-                <a:spcPts val="1200"/>
+                <a:spcPts val="900"/>
               </a:spcAft>
             </a:pPr>
             <a:r>
-              <a:rPr sz="1600" b="0">
-                <a:solidFill>
-                  <a:srgbClr val="E2E8F0"/>
-                </a:solidFill>
-                <a:latin typeface="PingFang TC"/>
-                <a:ea typeface="PingFang TC"/>
-              </a:rPr>
-              <a:t>✓  7 個 API 端點 + 管理頁前端（建立/清單/編輯/刪除/分析）</a:t>
+              <a:rPr sz="1400" b="0">
+                <a:solidFill>
+                  <a:srgbClr val="0F172A"/>
+                </a:solidFill>
+                <a:latin typeface="PingFang TC"/>
+                <a:ea typeface="PingFang TC"/>
+              </a:rPr>
+              <a:t>•  EC2 deploy-app.sh:從 SSM 撈設定 → ECR login → docker pull → docker run(換新容器)</a:t>
             </a:r>
           </a:p>
           <a:p>
             <a:pPr>
               <a:spcAft>
-                <a:spcPts val="1200"/>
+                <a:spcPts val="900"/>
               </a:spcAft>
             </a:pPr>
             <a:r>
-              <a:rPr sz="1600" b="0">
-                <a:solidFill>
-                  <a:srgbClr val="E2E8F0"/>
-                </a:solidFill>
-                <a:latin typeface="PingFang TC"/>
-                <a:ea typeface="PingFang TC"/>
-              </a:rPr>
-              <a:t>✓  全部 curl 驗證通過：302 / 404 / 410 / 8 碼 token / 正規化 / SSRF / 過期</a:t>
+              <a:rPr sz="1400" b="0">
+                <a:solidFill>
+                  <a:srgbClr val="0F172A"/>
+                </a:solidFill>
+                <a:latin typeface="PingFang TC"/>
+                <a:ea typeface="PingFang TC"/>
+              </a:rPr>
+              <a:t>•  全 env-gated:本機無這些環境變數 → 維持 SQLite + 記憶體 cache + 即時生圖,不受影響</a:t>
             </a:r>
           </a:p>
           <a:p>
             <a:pPr>
               <a:spcAft>
-                <a:spcPts val="1200"/>
+                <a:spcPts val="900"/>
               </a:spcAft>
             </a:pPr>
             <a:r>
-              <a:rPr sz="1600" b="0">
-                <a:solidFill>
-                  <a:srgbClr val="E2E8F0"/>
-                </a:solidFill>
-                <a:latin typeface="PingFang TC"/>
-                <a:ea typeface="PingFang TC"/>
-              </a:rPr>
-              <a:t>✓  production 替換點已在程式註解標明（Redis / 佇列 / CDN / 預聚合 / PostgreSQL）</a:t>
-            </a:r>
-          </a:p>
-          <a:p>
-            <a:pPr>
-              <a:spcAft>
-                <a:spcPts val="1200"/>
-              </a:spcAft>
-            </a:pPr>
-            <a:r>
-              <a:rPr sz="1600" b="0">
-                <a:solidFill>
-                  <a:srgbClr val="E2E8F0"/>
-                </a:solidFill>
-                <a:latin typeface="PingFang TC"/>
-                <a:ea typeface="PingFang TC"/>
-              </a:rPr>
-              <a:t>✓  設計依據：DESIGN.md（16 題決策 + 優劣分析）</a:t>
+              <a:rPr sz="1400" b="0">
+                <a:solidFill>
+                  <a:srgbClr val="0F172A"/>
+                </a:solidFill>
+                <a:latin typeface="PingFang TC"/>
+                <a:ea typeface="PingFang TC"/>
+              </a:rPr>
+              <a:t>•  部署踩到的兩個坑:① EC2 role 少 s3:PutObject(500)② CI build amd64 但 EC2 arm64(502)→ buildx 跨平台修正</a:t>
             </a:r>
           </a:p>
         </p:txBody>
@@ -19579,6 +19829,216 @@
         <p:spPr>
           <a:xfrm>
             <a:off x="0" y="0"/>
+            <a:ext cx="12191695" cy="6858000"/>
+          </a:xfrm>
+          <a:prstGeom prst="rect">
+            <a:avLst/>
+          </a:prstGeom>
+          <a:solidFill>
+            <a:srgbClr val="0F172A"/>
+          </a:solidFill>
+          <a:ln>
+            <a:noFill/>
+          </a:ln>
+          <a:effectLst/>
+        </p:spPr>
+        <p:style>
+          <a:lnRef idx="1">
+            <a:schemeClr val="accent1"/>
+          </a:lnRef>
+          <a:fillRef idx="3">
+            <a:schemeClr val="accent1"/>
+          </a:fillRef>
+          <a:effectRef idx="2">
+            <a:schemeClr val="accent1"/>
+          </a:effectRef>
+          <a:fontRef idx="minor">
+            <a:schemeClr val="lt1"/>
+          </a:fontRef>
+        </p:style>
+        <p:txBody>
+          <a:bodyPr rtlCol="0" anchor="ctr"/>
+          <a:lstStyle/>
+          <a:p>
+            <a:pPr algn="ctr"/>
+          </a:p>
+        </p:txBody>
+      </p:sp>
+      <p:sp>
+        <p:nvSpPr>
+          <p:cNvPr id="3" name="TextBox 2"/>
+          <p:cNvSpPr txBox="1"/>
+          <p:nvPr/>
+        </p:nvSpPr>
+        <p:spPr>
+          <a:xfrm>
+            <a:off x="822960" y="1097280"/>
+            <a:ext cx="10515600" cy="1097280"/>
+          </a:xfrm>
+          <a:prstGeom prst="rect">
+            <a:avLst/>
+          </a:prstGeom>
+          <a:noFill/>
+        </p:spPr>
+        <p:txBody>
+          <a:bodyPr wrap="square" anchor="t">
+            <a:spAutoFit/>
+          </a:bodyPr>
+          <a:lstStyle/>
+          <a:p>
+            <a:pPr algn="l">
+              <a:spcAft>
+                <a:spcPts val="400"/>
+              </a:spcAft>
+            </a:pPr>
+            <a:r>
+              <a:rPr sz="1600" b="1">
+                <a:solidFill>
+                  <a:srgbClr val="2563EB"/>
+                </a:solidFill>
+                <a:latin typeface="PingFang TC"/>
+                <a:ea typeface="PingFang TC"/>
+              </a:rPr>
+              <a:t>原型狀態</a:t>
+            </a:r>
+          </a:p>
+          <a:p>
+            <a:pPr algn="l">
+              <a:spcAft>
+                <a:spcPts val="400"/>
+              </a:spcAft>
+            </a:pPr>
+            <a:r>
+              <a:rPr sz="3000" b="1">
+                <a:solidFill>
+                  <a:srgbClr val="FFFFFF"/>
+                </a:solidFill>
+                <a:latin typeface="PingFang TC"/>
+                <a:ea typeface="PingFang TC"/>
+              </a:rPr>
+              <a:t>可跑的 FastAPI 實作 + 管理頁前端</a:t>
+            </a:r>
+          </a:p>
+        </p:txBody>
+      </p:sp>
+      <p:sp>
+        <p:nvSpPr>
+          <p:cNvPr id="4" name="TextBox 3"/>
+          <p:cNvSpPr txBox="1"/>
+          <p:nvPr/>
+        </p:nvSpPr>
+        <p:spPr>
+          <a:xfrm>
+            <a:off x="822960" y="2743200"/>
+            <a:ext cx="10515600" cy="2743200"/>
+          </a:xfrm>
+          <a:prstGeom prst="rect">
+            <a:avLst/>
+          </a:prstGeom>
+          <a:noFill/>
+        </p:spPr>
+        <p:txBody>
+          <a:bodyPr wrap="square">
+            <a:spAutoFit/>
+          </a:bodyPr>
+          <a:lstStyle/>
+          <a:p>
+            <a:pPr>
+              <a:spcAft>
+                <a:spcPts val="1200"/>
+              </a:spcAft>
+            </a:pPr>
+            <a:r>
+              <a:rPr sz="1600" b="0">
+                <a:solidFill>
+                  <a:srgbClr val="E2E8F0"/>
+                </a:solidFill>
+                <a:latin typeface="PingFang TC"/>
+                <a:ea typeface="PingFang TC"/>
+              </a:rPr>
+              <a:t>✓  7 個 API 端點 + 管理頁前端（建立/清單/編輯/刪除/分析）</a:t>
+            </a:r>
+          </a:p>
+          <a:p>
+            <a:pPr>
+              <a:spcAft>
+                <a:spcPts val="1200"/>
+              </a:spcAft>
+            </a:pPr>
+            <a:r>
+              <a:rPr sz="1600" b="0">
+                <a:solidFill>
+                  <a:srgbClr val="E2E8F0"/>
+                </a:solidFill>
+                <a:latin typeface="PingFang TC"/>
+                <a:ea typeface="PingFang TC"/>
+              </a:rPr>
+              <a:t>✓  全部 curl 驗證通過：302 / 404 / 410 / 8 碼 token / 正規化 / SSRF / 過期</a:t>
+            </a:r>
+          </a:p>
+          <a:p>
+            <a:pPr>
+              <a:spcAft>
+                <a:spcPts val="1200"/>
+              </a:spcAft>
+            </a:pPr>
+            <a:r>
+              <a:rPr sz="1600" b="0">
+                <a:solidFill>
+                  <a:srgbClr val="E2E8F0"/>
+                </a:solidFill>
+                <a:latin typeface="PingFang TC"/>
+                <a:ea typeface="PingFang TC"/>
+              </a:rPr>
+              <a:t>✓  production 替換點已在程式註解標明（Redis / 佇列 / CDN / 預聚合 / PostgreSQL）</a:t>
+            </a:r>
+          </a:p>
+          <a:p>
+            <a:pPr>
+              <a:spcAft>
+                <a:spcPts val="1200"/>
+              </a:spcAft>
+            </a:pPr>
+            <a:r>
+              <a:rPr sz="1600" b="0">
+                <a:solidFill>
+                  <a:srgbClr val="E2E8F0"/>
+                </a:solidFill>
+                <a:latin typeface="PingFang TC"/>
+                <a:ea typeface="PingFang TC"/>
+              </a:rPr>
+              <a:t>✓  設計依據：DESIGN.md（16 題決策 + 優劣分析）</a:t>
+            </a:r>
+          </a:p>
+        </p:txBody>
+      </p:sp>
+    </p:spTree>
+  </p:cSld>
+  <p:clrMapOvr>
+    <a:masterClrMapping/>
+  </p:clrMapOvr>
+</p:sld>
+</file>
+
+<file path=ppt/slides/slide31.xml><?xml version="1.0" encoding="utf-8"?>
+<p:sld xmlns:a="http://schemas.openxmlformats.org/drawingml/2006/main" xmlns:p="http://schemas.openxmlformats.org/presentationml/2006/main" xmlns:r="http://schemas.openxmlformats.org/officeDocument/2006/relationships">
+  <p:cSld>
+    <p:spTree>
+      <p:nvGrpSpPr>
+        <p:cNvPr id="1" name=""/>
+        <p:cNvGrpSpPr/>
+        <p:nvPr/>
+      </p:nvGrpSpPr>
+      <p:grpSpPr/>
+      <p:sp>
+        <p:nvSpPr>
+          <p:cNvPr id="2" name="Rectangle 1"/>
+          <p:cNvSpPr/>
+          <p:nvPr/>
+        </p:nvSpPr>
+        <p:spPr>
+          <a:xfrm>
+            <a:off x="0" y="0"/>
             <a:ext cx="164592" cy="6858000"/>
           </a:xfrm>
           <a:prstGeom prst="rect">
@@ -20602,7 +21062,7 @@
 </p:sld>
 </file>
 
-<file path=ppt/slides/slide31.xml><?xml version="1.0" encoding="utf-8"?>
+<file path=ppt/slides/slide32.xml><?xml version="1.0" encoding="utf-8"?>
 <p:sld xmlns:a="http://schemas.openxmlformats.org/drawingml/2006/main" xmlns:p="http://schemas.openxmlformats.org/presentationml/2006/main" xmlns:r="http://schemas.openxmlformats.org/officeDocument/2006/relationships">
   <p:cSld>
     <p:spTree>

--- a/QR Code Generator/QR_Code_Generator.pptx
+++ b/QR Code Generator/QR_Code_Generator.pptx
@@ -37,6 +37,7 @@
     <p:sldId id="285" r:id="rId36"/>
     <p:sldId id="286" r:id="rId37"/>
     <p:sldId id="287" r:id="rId38"/>
+    <p:sldId id="288" r:id="rId39"/>
   </p:sldIdLst>
   <p:sldSz cx="12191695" cy="6858000" type="screen4x3"/>
   <p:notesSz cx="6858000" cy="9144000"/>
@@ -21151,7 +21152,7 @@
                 <a:latin typeface="PingFang TC"/>
                 <a:ea typeface="PingFang TC"/>
               </a:rPr>
-              <a:t>下週預告 · DEEP DIVE</a:t>
+              <a:t>極限擴展 · 50× 推演</a:t>
             </a:r>
           </a:p>
           <a:p>
@@ -21168,7 +21169,7 @@
                 <a:latin typeface="PingFang TC"/>
                 <a:ea typeface="PingFang TC"/>
               </a:rPr>
-              <a:t>壓力測試與極限擴展 (Deep Dive)</a:t>
+              <a:t>1k → 50k QPS：這套架構哪裡先崩？</a:t>
             </a:r>
           </a:p>
         </p:txBody>
@@ -21181,8 +21182,8 @@
         </p:nvSpPr>
         <p:spPr>
           <a:xfrm>
-            <a:off x="548640" y="2011680"/>
-            <a:ext cx="5486400" cy="2926080"/>
+            <a:off x="548640" y="1417320"/>
+            <a:ext cx="10972800" cy="548640"/>
           </a:xfrm>
           <a:prstGeom prst="rect">
             <a:avLst/>
@@ -21194,23 +21195,6 @@
             <a:spAutoFit/>
           </a:bodyPr>
           <a:lstStyle/>
-          <a:p>
-            <a:pPr algn="l">
-              <a:spcAft>
-                <a:spcPts val="1600"/>
-              </a:spcAft>
-            </a:pPr>
-            <a:r>
-              <a:rPr sz="2600" b="1">
-                <a:solidFill>
-                  <a:srgbClr val="2563EB"/>
-                </a:solidFill>
-                <a:latin typeface="PingFang TC"/>
-                <a:ea typeface="PingFang TC"/>
-              </a:rPr>
-              <a:t>1,000 QPS  →  50,000 QPS</a:t>
-            </a:r>
-          </a:p>
           <a:p>
             <a:pPr algn="l">
               <a:spcAft>
@@ -21218,14 +21202,609 @@
               </a:spcAft>
             </a:pPr>
             <a:r>
-              <a:rPr sz="1900" b="1">
+              <a:rPr sz="1800" b="1">
+                <a:solidFill>
+                  <a:srgbClr val="2563EB"/>
+                </a:solidFill>
+                <a:latin typeface="PingFang TC"/>
+                <a:ea typeface="PingFang TC"/>
+              </a:rPr>
+              <a:t>1,000 QPS  →  50,000 QPS（大型客戶上線,流量瞬間 50×）</a:t>
+            </a:r>
+          </a:p>
+        </p:txBody>
+      </p:sp>
+      <p:graphicFrame>
+        <p:nvGraphicFramePr>
+          <p:cNvPr id="5" name="Table 4"/>
+          <p:cNvGraphicFramePr>
+            <a:graphicFrameLocks noGrp="1"/>
+          </p:cNvGraphicFramePr>
+          <p:nvPr/>
+        </p:nvGraphicFramePr>
+        <p:xfrm>
+          <a:off x="548640" y="2103120"/>
+          <a:ext cx="11109960" cy="3108960"/>
+        </p:xfrm>
+        <a:graphic>
+          <a:graphicData uri="http://schemas.openxmlformats.org/drawingml/2006/table">
+            <a:tbl>
+              <a:tblPr firstRow="1" bandRow="1">
+                <a:tableStyleId>{5C22544A-7EE6-4342-B048-85BDC9FD1C3A}</a:tableStyleId>
+              </a:tblPr>
+              <a:tblGrid>
+                <a:gridCol w="640080"/>
+                <a:gridCol w="3017520"/>
+                <a:gridCol w="7452360"/>
+              </a:tblGrid>
+              <a:tr h="518160">
+                <a:tc>
+                  <a:txBody>
+                    <a:bodyPr/>
+                    <a:lstStyle/>
+                    <a:p>
+                      <a:r>
+                        <a:rPr sz="1200" b="1">
+                          <a:solidFill>
+                            <a:srgbClr val="FFFFFF"/>
+                          </a:solidFill>
+                          <a:latin typeface="PingFang TC"/>
+                          <a:ea typeface="PingFang TC"/>
+                        </a:rPr>
+                        <a:t>#</a:t>
+                      </a:r>
+                    </a:p>
+                  </a:txBody>
+                  <a:tcPr marT="25400" marB="25400" marL="101600" anchor="ctr">
+                    <a:solidFill>
+                      <a:srgbClr val="2563EB"/>
+                    </a:solidFill>
+                  </a:tcPr>
+                </a:tc>
+                <a:tc>
+                  <a:txBody>
+                    <a:bodyPr/>
+                    <a:lstStyle/>
+                    <a:p>
+                      <a:r>
+                        <a:rPr sz="1200" b="1">
+                          <a:solidFill>
+                            <a:srgbClr val="FFFFFF"/>
+                          </a:solidFill>
+                          <a:latin typeface="PingFang TC"/>
+                          <a:ea typeface="PingFang TC"/>
+                        </a:rPr>
+                        <a:t>元件</a:t>
+                      </a:r>
+                    </a:p>
+                  </a:txBody>
+                  <a:tcPr marT="25400" marB="25400" marL="101600" anchor="ctr">
+                    <a:solidFill>
+                      <a:srgbClr val="2563EB"/>
+                    </a:solidFill>
+                  </a:tcPr>
+                </a:tc>
+                <a:tc>
+                  <a:txBody>
+                    <a:bodyPr/>
+                    <a:lstStyle/>
+                    <a:p>
+                      <a:r>
+                        <a:rPr sz="1200" b="1">
+                          <a:solidFill>
+                            <a:srgbClr val="FFFFFF"/>
+                          </a:solidFill>
+                          <a:latin typeface="PingFang TC"/>
+                          <a:ea typeface="PingFang TC"/>
+                        </a:rPr>
+                        <a:t>為何崩（先 → 後）</a:t>
+                      </a:r>
+                    </a:p>
+                  </a:txBody>
+                  <a:tcPr marT="25400" marB="25400" marL="101600" anchor="ctr">
+                    <a:solidFill>
+                      <a:srgbClr val="2563EB"/>
+                    </a:solidFill>
+                  </a:tcPr>
+                </a:tc>
+              </a:tr>
+              <a:tr h="518160">
+                <a:tc>
+                  <a:txBody>
+                    <a:bodyPr/>
+                    <a:lstStyle/>
+                    <a:p>
+                      <a:r>
+                        <a:rPr sz="1200" b="1">
+                          <a:solidFill>
+                            <a:srgbClr val="0F172A"/>
+                          </a:solidFill>
+                          <a:latin typeface="PingFang TC"/>
+                          <a:ea typeface="PingFang TC"/>
+                        </a:rPr>
+                        <a:t>1</a:t>
+                      </a:r>
+                    </a:p>
+                  </a:txBody>
+                  <a:tcPr marT="25400" marB="25400" marL="101600" anchor="ctr">
+                    <a:solidFill>
+                      <a:srgbClr val="FEE2E2"/>
+                    </a:solidFill>
+                  </a:tcPr>
+                </a:tc>
+                <a:tc>
+                  <a:txBody>
+                    <a:bodyPr/>
+                    <a:lstStyle/>
+                    <a:p>
+                      <a:r>
+                        <a:rPr sz="1200" b="1">
+                          <a:solidFill>
+                            <a:srgbClr val="0F172A"/>
+                          </a:solidFill>
+                          <a:latin typeface="PingFang TC"/>
+                          <a:ea typeface="PingFang TC"/>
+                        </a:rPr>
+                        <a:t>DB 寫入 (scan_events)</a:t>
+                      </a:r>
+                    </a:p>
+                  </a:txBody>
+                  <a:tcPr marT="25400" marB="25400" marL="101600" anchor="ctr">
+                    <a:solidFill>
+                      <a:srgbClr val="FEE2E2"/>
+                    </a:solidFill>
+                  </a:tcPr>
+                </a:tc>
+                <a:tc>
+                  <a:txBody>
+                    <a:bodyPr/>
+                    <a:lstStyle/>
+                    <a:p>
+                      <a:r>
+                        <a:rPr sz="1200" b="0">
+                          <a:solidFill>
+                            <a:srgbClr val="0F172A"/>
+                          </a:solidFill>
+                          <a:latin typeface="PingFang TC"/>
+                          <a:ea typeface="PingFang TC"/>
+                        </a:rPr>
+                        <a:t>每次 redirect 一筆 INSERT → 50k writes/s 打單一 RDS（單 AZ、無 replica）→ 最先爆</a:t>
+                      </a:r>
+                    </a:p>
+                  </a:txBody>
+                  <a:tcPr marT="25400" marB="25400" marL="101600" anchor="ctr">
+                    <a:solidFill>
+                      <a:srgbClr val="FEE2E2"/>
+                    </a:solidFill>
+                  </a:tcPr>
+                </a:tc>
+              </a:tr>
+              <a:tr h="518160">
+                <a:tc>
+                  <a:txBody>
+                    <a:bodyPr/>
+                    <a:lstStyle/>
+                    <a:p>
+                      <a:r>
+                        <a:rPr sz="1200" b="1">
+                          <a:solidFill>
+                            <a:srgbClr val="0F172A"/>
+                          </a:solidFill>
+                          <a:latin typeface="PingFang TC"/>
+                          <a:ea typeface="PingFang TC"/>
+                        </a:rPr>
+                        <a:t>2</a:t>
+                      </a:r>
+                    </a:p>
+                  </a:txBody>
+                  <a:tcPr marT="25400" marB="25400" marL="101600" anchor="ctr">
+                    <a:solidFill>
+                      <a:srgbClr val="F1F5F9"/>
+                    </a:solidFill>
+                  </a:tcPr>
+                </a:tc>
+                <a:tc>
+                  <a:txBody>
+                    <a:bodyPr/>
+                    <a:lstStyle/>
+                    <a:p>
+                      <a:r>
+                        <a:rPr sz="1200" b="1">
+                          <a:solidFill>
+                            <a:srgbClr val="0F172A"/>
+                          </a:solidFill>
+                          <a:latin typeface="PingFang TC"/>
+                          <a:ea typeface="PingFang TC"/>
+                        </a:rPr>
+                        <a:t>EC2 ASG</a:t>
+                      </a:r>
+                    </a:p>
+                  </a:txBody>
+                  <a:tcPr marT="25400" marB="25400" marL="101600" anchor="ctr">
+                    <a:solidFill>
+                      <a:srgbClr val="F1F5F9"/>
+                    </a:solidFill>
+                  </a:tcPr>
+                </a:tc>
+                <a:tc>
+                  <a:txBody>
+                    <a:bodyPr/>
+                    <a:lstStyle/>
+                    <a:p>
+                      <a:r>
+                        <a:rPr sz="1200" b="0">
+                          <a:solidFill>
+                            <a:srgbClr val="0F172A"/>
+                          </a:solidFill>
+                          <a:latin typeface="PingFang TC"/>
+                          <a:ea typeface="PingFang TC"/>
+                        </a:rPr>
+                        <a:t>max_size=2 且無 scaling policy（固定 desired）→ 扛不住 50k 連線/CPU</a:t>
+                      </a:r>
+                    </a:p>
+                  </a:txBody>
+                  <a:tcPr marT="25400" marB="25400" marL="101600" anchor="ctr">
+                    <a:solidFill>
+                      <a:srgbClr val="F1F5F9"/>
+                    </a:solidFill>
+                  </a:tcPr>
+                </a:tc>
+              </a:tr>
+              <a:tr h="518160">
+                <a:tc>
+                  <a:txBody>
+                    <a:bodyPr/>
+                    <a:lstStyle/>
+                    <a:p>
+                      <a:r>
+                        <a:rPr sz="1200" b="1">
+                          <a:solidFill>
+                            <a:srgbClr val="0F172A"/>
+                          </a:solidFill>
+                          <a:latin typeface="PingFang TC"/>
+                          <a:ea typeface="PingFang TC"/>
+                        </a:rPr>
+                        <a:t>3</a:t>
+                      </a:r>
+                    </a:p>
+                  </a:txBody>
+                  <a:tcPr marT="25400" marB="25400" marL="101600" anchor="ctr">
+                    <a:solidFill>
+                      <a:srgbClr val="FFFFFF"/>
+                    </a:solidFill>
+                  </a:tcPr>
+                </a:tc>
+                <a:tc>
+                  <a:txBody>
+                    <a:bodyPr/>
+                    <a:lstStyle/>
+                    <a:p>
+                      <a:r>
+                        <a:rPr sz="1200" b="1">
+                          <a:solidFill>
+                            <a:srgbClr val="0F172A"/>
+                          </a:solidFill>
+                          <a:latin typeface="PingFang TC"/>
+                          <a:ea typeface="PingFang TC"/>
+                        </a:rPr>
+                        <a:t>API Gateway</a:t>
+                      </a:r>
+                    </a:p>
+                  </a:txBody>
+                  <a:tcPr marT="25400" marB="25400" marL="101600" anchor="ctr">
+                    <a:solidFill>
+                      <a:srgbClr val="FFFFFF"/>
+                    </a:solidFill>
+                  </a:tcPr>
+                </a:tc>
+                <a:tc>
+                  <a:txBody>
+                    <a:bodyPr/>
+                    <a:lstStyle/>
+                    <a:p>
+                      <a:r>
+                        <a:rPr sz="1200" b="0">
+                          <a:solidFill>
+                            <a:srgbClr val="0F172A"/>
+                          </a:solidFill>
+                          <a:latin typeface="PingFang TC"/>
+                          <a:ea typeface="PingFang TC"/>
+                        </a:rPr>
+                        <a:t>stage rate=1000 + 帳號預設 ~10k RPS → 大量 429</a:t>
+                      </a:r>
+                    </a:p>
+                  </a:txBody>
+                  <a:tcPr marT="25400" marB="25400" marL="101600" anchor="ctr">
+                    <a:solidFill>
+                      <a:srgbClr val="FFFFFF"/>
+                    </a:solidFill>
+                  </a:tcPr>
+                </a:tc>
+              </a:tr>
+              <a:tr h="518160">
+                <a:tc>
+                  <a:txBody>
+                    <a:bodyPr/>
+                    <a:lstStyle/>
+                    <a:p>
+                      <a:r>
+                        <a:rPr sz="1200" b="1">
+                          <a:solidFill>
+                            <a:srgbClr val="0F172A"/>
+                          </a:solidFill>
+                          <a:latin typeface="PingFang TC"/>
+                          <a:ea typeface="PingFang TC"/>
+                        </a:rPr>
+                        <a:t>4</a:t>
+                      </a:r>
+                    </a:p>
+                  </a:txBody>
+                  <a:tcPr marT="25400" marB="25400" marL="101600" anchor="ctr">
+                    <a:solidFill>
+                      <a:srgbClr val="F1F5F9"/>
+                    </a:solidFill>
+                  </a:tcPr>
+                </a:tc>
+                <a:tc>
+                  <a:txBody>
+                    <a:bodyPr/>
+                    <a:lstStyle/>
+                    <a:p>
+                      <a:r>
+                        <a:rPr sz="1200" b="1">
+                          <a:solidFill>
+                            <a:srgbClr val="0F172A"/>
+                          </a:solidFill>
+                          <a:latin typeface="PingFang TC"/>
+                          <a:ea typeface="PingFang TC"/>
+                        </a:rPr>
+                        <a:t>Redis 單節點</a:t>
+                      </a:r>
+                    </a:p>
+                  </a:txBody>
+                  <a:tcPr marT="25400" marB="25400" marL="101600" anchor="ctr">
+                    <a:solidFill>
+                      <a:srgbClr val="F1F5F9"/>
+                    </a:solidFill>
+                  </a:tcPr>
+                </a:tc>
+                <a:tc>
+                  <a:txBody>
+                    <a:bodyPr/>
+                    <a:lstStyle/>
+                    <a:p>
+                      <a:r>
+                        <a:rPr sz="1200" b="0">
+                          <a:solidFill>
+                            <a:srgbClr val="0F172A"/>
+                          </a:solidFill>
+                          <a:latin typeface="PingFang TC"/>
+                          <a:ea typeface="PingFang TC"/>
+                        </a:rPr>
+                        <a:t>cache.t4g.micro 50k GET/s 高 CPU/網路、無讀擴展</a:t>
+                      </a:r>
+                    </a:p>
+                  </a:txBody>
+                  <a:tcPr marT="25400" marB="25400" marL="101600" anchor="ctr">
+                    <a:solidFill>
+                      <a:srgbClr val="F1F5F9"/>
+                    </a:solidFill>
+                  </a:tcPr>
+                </a:tc>
+              </a:tr>
+              <a:tr h="518160">
+                <a:tc>
+                  <a:txBody>
+                    <a:bodyPr/>
+                    <a:lstStyle/>
+                    <a:p>
+                      <a:r>
+                        <a:rPr sz="1200" b="1">
+                          <a:solidFill>
+                            <a:srgbClr val="0F172A"/>
+                          </a:solidFill>
+                          <a:latin typeface="PingFang TC"/>
+                          <a:ea typeface="PingFang TC"/>
+                        </a:rPr>
+                        <a:t>5</a:t>
+                      </a:r>
+                    </a:p>
+                  </a:txBody>
+                  <a:tcPr marT="25400" marB="25400" marL="101600" anchor="ctr">
+                    <a:solidFill>
+                      <a:srgbClr val="FFFFFF"/>
+                    </a:solidFill>
+                  </a:tcPr>
+                </a:tc>
+                <a:tc>
+                  <a:txBody>
+                    <a:bodyPr/>
+                    <a:lstStyle/>
+                    <a:p>
+                      <a:r>
+                        <a:rPr sz="1200" b="1">
+                          <a:solidFill>
+                            <a:srgbClr val="0F172A"/>
+                          </a:solidFill>
+                          <a:latin typeface="PingFang TC"/>
+                          <a:ea typeface="PingFang TC"/>
+                        </a:rPr>
+                        <a:t>Edge</a:t>
+                      </a:r>
+                    </a:p>
+                  </a:txBody>
+                  <a:tcPr marT="25400" marB="25400" marL="101600" anchor="ctr">
+                    <a:solidFill>
+                      <a:srgbClr val="FFFFFF"/>
+                    </a:solidFill>
+                  </a:tcPr>
+                </a:tc>
+                <a:tc>
+                  <a:txBody>
+                    <a:bodyPr/>
+                    <a:lstStyle/>
+                    <a:p>
+                      <a:r>
+                        <a:rPr sz="1200" b="0">
+                          <a:solidFill>
+                            <a:srgbClr val="0F172A"/>
+                          </a:solidFill>
+                          <a:latin typeface="PingFang TC"/>
+                          <a:ea typeface="PingFang TC"/>
+                        </a:rPr>
+                        <a:t>CloudFront/ALB 可擴(LCU 成本↑);但 redirect 不快取 → 全額回源放大下游</a:t>
+                      </a:r>
+                    </a:p>
+                  </a:txBody>
+                  <a:tcPr marT="25400" marB="25400" marL="101600" anchor="ctr">
+                    <a:solidFill>
+                      <a:srgbClr val="FFFFFF"/>
+                    </a:solidFill>
+                  </a:tcPr>
+                </a:tc>
+              </a:tr>
+            </a:tbl>
+          </a:graphicData>
+        </a:graphic>
+      </p:graphicFrame>
+      <p:sp>
+        <p:nvSpPr>
+          <p:cNvPr id="6" name="TextBox 5"/>
+          <p:cNvSpPr txBox="1"/>
+          <p:nvPr/>
+        </p:nvSpPr>
+        <p:spPr>
+          <a:xfrm>
+            <a:off x="548640" y="5394960"/>
+            <a:ext cx="11247120" cy="1097280"/>
+          </a:xfrm>
+          <a:prstGeom prst="rect">
+            <a:avLst/>
+          </a:prstGeom>
+          <a:noFill/>
+        </p:spPr>
+        <p:txBody>
+          <a:bodyPr wrap="square">
+            <a:spAutoFit/>
+          </a:bodyPr>
+          <a:lstStyle/>
+          <a:p>
+            <a:pPr>
+              <a:spcAft>
+                <a:spcPts val="400"/>
+              </a:spcAft>
+            </a:pPr>
+            <a:r>
+              <a:rPr sz="1400" b="0">
                 <a:solidFill>
                   <a:srgbClr val="0F172A"/>
                 </a:solidFill>
                 <a:latin typeface="PingFang TC"/>
                 <a:ea typeface="PingFang TC"/>
               </a:rPr>
-              <a:t>當大型客戶上線，</a:t>
+              <a:t>•  結論：DB 的 scan 寫入最先崩——分析寫入沒和 redirect 解耦(唯一線性暴增又集中單點的寫入)。</a:t>
+            </a:r>
+          </a:p>
+        </p:txBody>
+      </p:sp>
+    </p:spTree>
+  </p:cSld>
+  <p:clrMapOvr>
+    <a:masterClrMapping/>
+  </p:clrMapOvr>
+</p:sld>
+</file>
+
+<file path=ppt/slides/slide33.xml><?xml version="1.0" encoding="utf-8"?>
+<p:sld xmlns:a="http://schemas.openxmlformats.org/drawingml/2006/main" xmlns:p="http://schemas.openxmlformats.org/presentationml/2006/main" xmlns:r="http://schemas.openxmlformats.org/officeDocument/2006/relationships">
+  <p:cSld>
+    <p:spTree>
+      <p:nvGrpSpPr>
+        <p:cNvPr id="1" name=""/>
+        <p:cNvGrpSpPr/>
+        <p:nvPr/>
+      </p:nvGrpSpPr>
+      <p:grpSpPr/>
+      <p:sp>
+        <p:nvSpPr>
+          <p:cNvPr id="2" name="Rectangle 1"/>
+          <p:cNvSpPr/>
+          <p:nvPr/>
+        </p:nvSpPr>
+        <p:spPr>
+          <a:xfrm>
+            <a:off x="0" y="0"/>
+            <a:ext cx="164592" cy="6858000"/>
+          </a:xfrm>
+          <a:prstGeom prst="rect">
+            <a:avLst/>
+          </a:prstGeom>
+          <a:solidFill>
+            <a:srgbClr val="2563EB"/>
+          </a:solidFill>
+          <a:ln>
+            <a:noFill/>
+          </a:ln>
+          <a:effectLst/>
+        </p:spPr>
+        <p:style>
+          <a:lnRef idx="1">
+            <a:schemeClr val="accent1"/>
+          </a:lnRef>
+          <a:fillRef idx="3">
+            <a:schemeClr val="accent1"/>
+          </a:fillRef>
+          <a:effectRef idx="2">
+            <a:schemeClr val="accent1"/>
+          </a:effectRef>
+          <a:fontRef idx="minor">
+            <a:schemeClr val="lt1"/>
+          </a:fontRef>
+        </p:style>
+        <p:txBody>
+          <a:bodyPr rtlCol="0" anchor="ctr"/>
+          <a:lstStyle/>
+          <a:p>
+            <a:pPr algn="ctr"/>
+          </a:p>
+        </p:txBody>
+      </p:sp>
+      <p:sp>
+        <p:nvSpPr>
+          <p:cNvPr id="3" name="TextBox 2"/>
+          <p:cNvSpPr txBox="1"/>
+          <p:nvPr/>
+        </p:nvSpPr>
+        <p:spPr>
+          <a:xfrm>
+            <a:off x="502920" y="320040"/>
+            <a:ext cx="10972800" cy="1005840"/>
+          </a:xfrm>
+          <a:prstGeom prst="rect">
+            <a:avLst/>
+          </a:prstGeom>
+          <a:noFill/>
+        </p:spPr>
+        <p:txBody>
+          <a:bodyPr wrap="square" anchor="t">
+            <a:spAutoFit/>
+          </a:bodyPr>
+          <a:lstStyle/>
+          <a:p>
+            <a:pPr algn="l">
+              <a:spcAft>
+                <a:spcPts val="200"/>
+              </a:spcAft>
+            </a:pPr>
+            <a:r>
+              <a:rPr sz="1300" b="1">
+                <a:solidFill>
+                  <a:srgbClr val="2563EB"/>
+                </a:solidFill>
+                <a:latin typeface="PingFang TC"/>
+                <a:ea typeface="PingFang TC"/>
+              </a:rPr>
+              <a:t>極限擴展 · ANALYTICS PIPELINE</a:t>
             </a:r>
           </a:p>
           <a:p>
@@ -21235,129 +21814,38 @@
               </a:spcAft>
             </a:pPr>
             <a:r>
-              <a:rPr sz="1900" b="1">
+              <a:rPr sz="3000" b="1">
                 <a:solidFill>
                   <a:srgbClr val="0F172A"/>
                 </a:solidFill>
                 <a:latin typeface="PingFang TC"/>
                 <a:ea typeface="PingFang TC"/>
               </a:rPr>
-              <a:t>流量瞬間暴增 50 倍，</a:t>
-            </a:r>
-          </a:p>
-          <a:p>
-            <a:pPr algn="l">
-              <a:spcAft>
-                <a:spcPts val="400"/>
-              </a:spcAft>
-            </a:pPr>
-            <a:r>
-              <a:rPr sz="1900" b="1">
-                <a:solidFill>
-                  <a:srgbClr val="0F172A"/>
-                </a:solidFill>
-                <a:latin typeface="PingFang TC"/>
-                <a:ea typeface="PingFang TC"/>
-              </a:rPr>
-              <a:t>這個架構哪會先崩潰？</a:t>
-            </a:r>
-          </a:p>
-        </p:txBody>
-      </p:sp>
-      <p:sp>
-        <p:nvSpPr>
-          <p:cNvPr id="5" name="TextBox 4"/>
-          <p:cNvSpPr txBox="1"/>
-          <p:nvPr/>
-        </p:nvSpPr>
-        <p:spPr>
-          <a:xfrm>
-            <a:off x="6400800" y="2057400"/>
-            <a:ext cx="5303520" cy="2194560"/>
-          </a:xfrm>
-          <a:prstGeom prst="rect">
-            <a:avLst/>
-          </a:prstGeom>
-          <a:noFill/>
-        </p:spPr>
-        <p:txBody>
-          <a:bodyPr wrap="square">
-            <a:spAutoFit/>
-          </a:bodyPr>
-          <a:lstStyle/>
-          <a:p>
-            <a:pPr>
-              <a:spcAft>
-                <a:spcPts val="1400"/>
-              </a:spcAft>
-            </a:pPr>
-            <a:r>
-              <a:rPr sz="1600" b="0">
-                <a:solidFill>
-                  <a:srgbClr val="0F172A"/>
-                </a:solidFill>
-                <a:latin typeface="PingFang TC"/>
-                <a:ea typeface="PingFang TC"/>
-              </a:rPr>
-              <a:t>•  流量暴增 Scenario 推演（Server vs DB vs Network）</a:t>
-            </a:r>
-          </a:p>
-          <a:p>
-            <a:pPr>
-              <a:spcAft>
-                <a:spcPts val="1400"/>
-              </a:spcAft>
-            </a:pPr>
-            <a:r>
-              <a:rPr sz="1600" b="0">
-                <a:solidFill>
-                  <a:srgbClr val="0F172A"/>
-                </a:solidFill>
-                <a:latin typeface="PingFang TC"/>
-                <a:ea typeface="PingFang TC"/>
-              </a:rPr>
-              <a:t>•  Event-Driven Analytics Pipeline 架構</a:t>
-            </a:r>
-          </a:p>
-          <a:p>
-            <a:pPr>
-              <a:spcAft>
-                <a:spcPts val="1400"/>
-              </a:spcAft>
-            </a:pPr>
-            <a:r>
-              <a:rPr sz="1600" b="0">
-                <a:solidFill>
-                  <a:srgbClr val="0F172A"/>
-                </a:solidFill>
-                <a:latin typeface="PingFang TC"/>
-                <a:ea typeface="PingFang TC"/>
-              </a:rPr>
-              <a:t>•  System Design 面試實戰答題框架</a:t>
-            </a:r>
-          </a:p>
-        </p:txBody>
-      </p:sp>
-      <p:sp>
-        <p:nvSpPr>
-          <p:cNvPr id="6" name="Rounded Rectangle 5"/>
+              <a:t>解法:緩衝 + 批次聚合（解 DB 寫入瓶頸）</a:t>
+            </a:r>
+          </a:p>
+        </p:txBody>
+      </p:sp>
+      <p:sp>
+        <p:nvSpPr>
+          <p:cNvPr id="4" name="Rounded Rectangle 3"/>
           <p:cNvSpPr/>
           <p:nvPr/>
         </p:nvSpPr>
         <p:spPr>
           <a:xfrm>
-            <a:off x="6400800" y="4343400"/>
-            <a:ext cx="5303520" cy="1051560"/>
+            <a:off x="457200" y="1920240"/>
+            <a:ext cx="1920240" cy="822960"/>
           </a:xfrm>
           <a:prstGeom prst="roundRect">
             <a:avLst/>
           </a:prstGeom>
           <a:solidFill>
-            <a:srgbClr val="F1F5F9"/>
+            <a:srgbClr val="64748B"/>
           </a:solidFill>
           <a:ln>
             <a:solidFill>
-              <a:srgbClr val="F1F5F9"/>
+              <a:srgbClr val="64748B"/>
             </a:solidFill>
           </a:ln>
           <a:effectLst/>
@@ -21377,32 +21865,57 @@
           </a:fontRef>
         </p:style>
         <p:txBody>
-          <a:bodyPr rtlCol="0" anchor="ctr"/>
+          <a:bodyPr rtlCol="0" anchor="ctr" wrap="square" tIns="25400" bIns="25400"/>
           <a:lstStyle/>
           <a:p>
             <a:pPr algn="ctr"/>
-          </a:p>
-        </p:txBody>
-      </p:sp>
-      <p:sp>
-        <p:nvSpPr>
-          <p:cNvPr id="7" name="Rectangle 6"/>
+            <a:r>
+              <a:rPr sz="1200" b="1">
+                <a:solidFill>
+                  <a:srgbClr val="FFFFFF"/>
+                </a:solidFill>
+                <a:latin typeface="PingFang TC"/>
+                <a:ea typeface="PingFang TC"/>
+              </a:rPr>
+              <a:t>redirect</a:t>
+            </a:r>
+          </a:p>
+          <a:p>
+            <a:pPr algn="ctr"/>
+            <a:r>
+              <a:rPr sz="1200" b="0">
+                <a:solidFill>
+                  <a:srgbClr val="FFFFFF"/>
+                </a:solidFill>
+                <a:latin typeface="PingFang TC"/>
+                <a:ea typeface="PingFang TC"/>
+              </a:rPr>
+              <a:t>put 1 event</a:t>
+            </a:r>
+          </a:p>
+        </p:txBody>
+      </p:sp>
+      <p:sp>
+        <p:nvSpPr>
+          <p:cNvPr id="5" name="Rounded Rectangle 4"/>
           <p:cNvSpPr/>
           <p:nvPr/>
         </p:nvSpPr>
         <p:spPr>
           <a:xfrm>
-            <a:off x="6400800" y="4343400"/>
-            <a:ext cx="82296" cy="1051560"/>
-          </a:xfrm>
-          <a:prstGeom prst="rect">
+            <a:off x="2743200" y="1920240"/>
+            <a:ext cx="2468880" cy="822960"/>
+          </a:xfrm>
+          <a:prstGeom prst="roundRect">
             <a:avLst/>
           </a:prstGeom>
           <a:solidFill>
-            <a:srgbClr val="0EA5E9"/>
+            <a:srgbClr val="D97706"/>
           </a:solidFill>
           <a:ln>
-            <a:noFill/>
+            <a:solidFill>
+              <a:srgbClr val="D97706"/>
+            </a:solidFill>
           </a:ln>
           <a:effectLst/>
         </p:spPr>
@@ -21421,23 +21934,502 @@
           </a:fontRef>
         </p:style>
         <p:txBody>
-          <a:bodyPr rtlCol="0" anchor="ctr"/>
+          <a:bodyPr rtlCol="0" anchor="ctr" wrap="square" tIns="25400" bIns="25400"/>
           <a:lstStyle/>
           <a:p>
             <a:pPr algn="ctr"/>
-          </a:p>
-        </p:txBody>
-      </p:sp>
-      <p:sp>
-        <p:nvSpPr>
-          <p:cNvPr id="8" name="TextBox 7"/>
+            <a:r>
+              <a:rPr sz="1100" b="1">
+                <a:solidFill>
+                  <a:srgbClr val="FFFFFF"/>
+                </a:solidFill>
+                <a:latin typeface="PingFang TC"/>
+                <a:ea typeface="PingFang TC"/>
+              </a:rPr>
+              <a:t>Kinesis / SQS</a:t>
+            </a:r>
+          </a:p>
+          <a:p>
+            <a:pPr algn="ctr"/>
+            <a:r>
+              <a:rPr sz="1100" b="0">
+                <a:solidFill>
+                  <a:srgbClr val="FFFFFF"/>
+                </a:solidFill>
+                <a:latin typeface="PingFang TC"/>
+                <a:ea typeface="PingFang TC"/>
+              </a:rPr>
+              <a:t>高吞吐緩衝(吸尖峰)</a:t>
+            </a:r>
+          </a:p>
+        </p:txBody>
+      </p:sp>
+      <p:sp>
+        <p:nvSpPr>
+          <p:cNvPr id="6" name="Rounded Rectangle 5"/>
+          <p:cNvSpPr/>
+          <p:nvPr/>
+        </p:nvSpPr>
+        <p:spPr>
+          <a:xfrm>
+            <a:off x="5577840" y="1920240"/>
+            <a:ext cx="2468880" cy="822960"/>
+          </a:xfrm>
+          <a:prstGeom prst="roundRect">
+            <a:avLst/>
+          </a:prstGeom>
+          <a:solidFill>
+            <a:srgbClr val="2563EB"/>
+          </a:solidFill>
+          <a:ln>
+            <a:solidFill>
+              <a:srgbClr val="2563EB"/>
+            </a:solidFill>
+          </a:ln>
+          <a:effectLst/>
+        </p:spPr>
+        <p:style>
+          <a:lnRef idx="1">
+            <a:schemeClr val="accent1"/>
+          </a:lnRef>
+          <a:fillRef idx="3">
+            <a:schemeClr val="accent1"/>
+          </a:fillRef>
+          <a:effectRef idx="2">
+            <a:schemeClr val="accent1"/>
+          </a:effectRef>
+          <a:fontRef idx="minor">
+            <a:schemeClr val="lt1"/>
+          </a:fontRef>
+        </p:style>
+        <p:txBody>
+          <a:bodyPr rtlCol="0" anchor="ctr" wrap="square" tIns="25400" bIns="25400"/>
+          <a:lstStyle/>
+          <a:p>
+            <a:pPr algn="ctr"/>
+            <a:r>
+              <a:rPr sz="1100" b="1">
+                <a:solidFill>
+                  <a:srgbClr val="FFFFFF"/>
+                </a:solidFill>
+                <a:latin typeface="PingFang TC"/>
+                <a:ea typeface="PingFang TC"/>
+              </a:rPr>
+              <a:t>消費者</a:t>
+            </a:r>
+          </a:p>
+          <a:p>
+            <a:pPr algn="ctr"/>
+            <a:r>
+              <a:rPr sz="1100" b="0">
+                <a:solidFill>
+                  <a:srgbClr val="FFFFFF"/>
+                </a:solidFill>
+                <a:latin typeface="PingFang TC"/>
+                <a:ea typeface="PingFang TC"/>
+              </a:rPr>
+              <a:t>Lambda/KCL 批次聚合</a:t>
+            </a:r>
+          </a:p>
+        </p:txBody>
+      </p:sp>
+      <p:sp>
+        <p:nvSpPr>
+          <p:cNvPr id="7" name="Rounded Rectangle 6"/>
+          <p:cNvSpPr/>
+          <p:nvPr/>
+        </p:nvSpPr>
+        <p:spPr>
+          <a:xfrm>
+            <a:off x="8412480" y="1280160"/>
+            <a:ext cx="3017520" cy="640080"/>
+          </a:xfrm>
+          <a:prstGeom prst="roundRect">
+            <a:avLst/>
+          </a:prstGeom>
+          <a:solidFill>
+            <a:srgbClr val="059669"/>
+          </a:solidFill>
+          <a:ln>
+            <a:solidFill>
+              <a:srgbClr val="059669"/>
+            </a:solidFill>
+          </a:ln>
+          <a:effectLst/>
+        </p:spPr>
+        <p:style>
+          <a:lnRef idx="1">
+            <a:schemeClr val="accent1"/>
+          </a:lnRef>
+          <a:fillRef idx="3">
+            <a:schemeClr val="accent1"/>
+          </a:fillRef>
+          <a:effectRef idx="2">
+            <a:schemeClr val="accent1"/>
+          </a:effectRef>
+          <a:fontRef idx="minor">
+            <a:schemeClr val="lt1"/>
+          </a:fontRef>
+        </p:style>
+        <p:txBody>
+          <a:bodyPr rtlCol="0" anchor="ctr" wrap="square" tIns="25400" bIns="25400"/>
+          <a:lstStyle/>
+          <a:p>
+            <a:pPr algn="ctr"/>
+            <a:r>
+              <a:rPr sz="1000" b="1">
+                <a:solidFill>
+                  <a:srgbClr val="FFFFFF"/>
+                </a:solidFill>
+                <a:latin typeface="PingFang TC"/>
+                <a:ea typeface="PingFang TC"/>
+              </a:rPr>
+              <a:t>每日計數 rollup</a:t>
+            </a:r>
+          </a:p>
+          <a:p>
+            <a:pPr algn="ctr"/>
+            <a:r>
+              <a:rPr sz="1000" b="0">
+                <a:solidFill>
+                  <a:srgbClr val="FFFFFF"/>
+                </a:solidFill>
+                <a:latin typeface="PingFang TC"/>
+                <a:ea typeface="PingFang TC"/>
+              </a:rPr>
+              <a:t>(DynamoDB/RDS)</a:t>
+            </a:r>
+          </a:p>
+        </p:txBody>
+      </p:sp>
+      <p:sp>
+        <p:nvSpPr>
+          <p:cNvPr id="8" name="Rounded Rectangle 7"/>
+          <p:cNvSpPr/>
+          <p:nvPr/>
+        </p:nvSpPr>
+        <p:spPr>
+          <a:xfrm>
+            <a:off x="8412480" y="2057400"/>
+            <a:ext cx="3017520" cy="640080"/>
+          </a:xfrm>
+          <a:prstGeom prst="roundRect">
+            <a:avLst/>
+          </a:prstGeom>
+          <a:solidFill>
+            <a:srgbClr val="059669"/>
+          </a:solidFill>
+          <a:ln>
+            <a:solidFill>
+              <a:srgbClr val="059669"/>
+            </a:solidFill>
+          </a:ln>
+          <a:effectLst/>
+        </p:spPr>
+        <p:style>
+          <a:lnRef idx="1">
+            <a:schemeClr val="accent1"/>
+          </a:lnRef>
+          <a:fillRef idx="3">
+            <a:schemeClr val="accent1"/>
+          </a:fillRef>
+          <a:effectRef idx="2">
+            <a:schemeClr val="accent1"/>
+          </a:effectRef>
+          <a:fontRef idx="minor">
+            <a:schemeClr val="lt1"/>
+          </a:fontRef>
+        </p:style>
+        <p:txBody>
+          <a:bodyPr rtlCol="0" anchor="ctr" wrap="square" tIns="25400" bIns="25400"/>
+          <a:lstStyle/>
+          <a:p>
+            <a:pPr algn="ctr"/>
+            <a:r>
+              <a:rPr sz="1000" b="1">
+                <a:solidFill>
+                  <a:srgbClr val="FFFFFF"/>
+                </a:solidFill>
+                <a:latin typeface="PingFang TC"/>
+                <a:ea typeface="PingFang TC"/>
+              </a:rPr>
+              <a:t>原始明細歸檔</a:t>
+            </a:r>
+          </a:p>
+          <a:p>
+            <a:pPr algn="ctr"/>
+            <a:r>
+              <a:rPr sz="1000" b="0">
+                <a:solidFill>
+                  <a:srgbClr val="FFFFFF"/>
+                </a:solidFill>
+                <a:latin typeface="PingFang TC"/>
+                <a:ea typeface="PingFang TC"/>
+              </a:rPr>
+              <a:t>(S3 + Athena)</a:t>
+            </a:r>
+          </a:p>
+        </p:txBody>
+      </p:sp>
+      <p:sp>
+        <p:nvSpPr>
+          <p:cNvPr id="9" name="Rounded Rectangle 8"/>
+          <p:cNvSpPr/>
+          <p:nvPr/>
+        </p:nvSpPr>
+        <p:spPr>
+          <a:xfrm>
+            <a:off x="8412480" y="2834640"/>
+            <a:ext cx="3017520" cy="640080"/>
+          </a:xfrm>
+          <a:prstGeom prst="roundRect">
+            <a:avLst/>
+          </a:prstGeom>
+          <a:solidFill>
+            <a:srgbClr val="059669"/>
+          </a:solidFill>
+          <a:ln>
+            <a:solidFill>
+              <a:srgbClr val="059669"/>
+            </a:solidFill>
+          </a:ln>
+          <a:effectLst/>
+        </p:spPr>
+        <p:style>
+          <a:lnRef idx="1">
+            <a:schemeClr val="accent1"/>
+          </a:lnRef>
+          <a:fillRef idx="3">
+            <a:schemeClr val="accent1"/>
+          </a:fillRef>
+          <a:effectRef idx="2">
+            <a:schemeClr val="accent1"/>
+          </a:effectRef>
+          <a:fontRef idx="minor">
+            <a:schemeClr val="lt1"/>
+          </a:fontRef>
+        </p:style>
+        <p:txBody>
+          <a:bodyPr rtlCol="0" anchor="ctr" wrap="square" tIns="25400" bIns="25400"/>
+          <a:lstStyle/>
+          <a:p>
+            <a:pPr algn="ctr"/>
+            <a:r>
+              <a:rPr sz="1000" b="1">
+                <a:solidFill>
+                  <a:srgbClr val="FFFFFF"/>
+                </a:solidFill>
+                <a:latin typeface="PingFang TC"/>
+                <a:ea typeface="PingFang TC"/>
+              </a:rPr>
+              <a:t>即時分析(選)</a:t>
+            </a:r>
+          </a:p>
+          <a:p>
+            <a:pPr algn="ctr"/>
+            <a:r>
+              <a:rPr sz="1000" b="0">
+                <a:solidFill>
+                  <a:srgbClr val="FFFFFF"/>
+                </a:solidFill>
+                <a:latin typeface="PingFang TC"/>
+                <a:ea typeface="PingFang TC"/>
+              </a:rPr>
+              <a:t>OpenSearch</a:t>
+            </a:r>
+          </a:p>
+        </p:txBody>
+      </p:sp>
+      <p:cxnSp>
+        <p:nvCxnSpPr>
+          <p:cNvPr id="10" name="Connector 9"/>
+          <p:cNvCxnSpPr/>
+          <p:nvPr/>
+        </p:nvCxnSpPr>
+        <p:spPr>
+          <a:xfrm>
+            <a:off x="2377440" y="2331720"/>
+            <a:ext cx="365760" cy="0"/>
+          </a:xfrm>
+          <a:prstGeom prst="line">
+            <a:avLst/>
+          </a:prstGeom>
+          <a:ln w="22225">
+            <a:solidFill>
+              <a:srgbClr val="64748B"/>
+            </a:solidFill>
+            <a:tailEnd type="triangle" w="med" len="med"/>
+          </a:ln>
+        </p:spPr>
+        <p:style>
+          <a:lnRef idx="2">
+            <a:schemeClr val="accent1"/>
+          </a:lnRef>
+          <a:fillRef idx="0">
+            <a:schemeClr val="accent1"/>
+          </a:fillRef>
+          <a:effectRef idx="1">
+            <a:schemeClr val="accent1"/>
+          </a:effectRef>
+          <a:fontRef idx="minor">
+            <a:schemeClr val="tx1"/>
+          </a:fontRef>
+        </p:style>
+      </p:cxnSp>
+      <p:cxnSp>
+        <p:nvCxnSpPr>
+          <p:cNvPr id="11" name="Connector 10"/>
+          <p:cNvCxnSpPr/>
+          <p:nvPr/>
+        </p:nvCxnSpPr>
+        <p:spPr>
+          <a:xfrm>
+            <a:off x="5212080" y="2331720"/>
+            <a:ext cx="365760" cy="0"/>
+          </a:xfrm>
+          <a:prstGeom prst="line">
+            <a:avLst/>
+          </a:prstGeom>
+          <a:ln w="22225">
+            <a:solidFill>
+              <a:srgbClr val="64748B"/>
+            </a:solidFill>
+            <a:tailEnd type="triangle" w="med" len="med"/>
+          </a:ln>
+        </p:spPr>
+        <p:style>
+          <a:lnRef idx="2">
+            <a:schemeClr val="accent1"/>
+          </a:lnRef>
+          <a:fillRef idx="0">
+            <a:schemeClr val="accent1"/>
+          </a:fillRef>
+          <a:effectRef idx="1">
+            <a:schemeClr val="accent1"/>
+          </a:effectRef>
+          <a:fontRef idx="minor">
+            <a:schemeClr val="tx1"/>
+          </a:fontRef>
+        </p:style>
+      </p:cxnSp>
+      <p:cxnSp>
+        <p:nvCxnSpPr>
+          <p:cNvPr id="12" name="Connector 11"/>
+          <p:cNvCxnSpPr/>
+          <p:nvPr/>
+        </p:nvCxnSpPr>
+        <p:spPr>
+          <a:xfrm flipV="1">
+            <a:off x="8046720" y="1600200"/>
+            <a:ext cx="365760" cy="731520"/>
+          </a:xfrm>
+          <a:prstGeom prst="line">
+            <a:avLst/>
+          </a:prstGeom>
+          <a:ln w="13970">
+            <a:solidFill>
+              <a:srgbClr val="64748B"/>
+            </a:solidFill>
+            <a:tailEnd type="triangle" w="med" len="med"/>
+          </a:ln>
+        </p:spPr>
+        <p:style>
+          <a:lnRef idx="2">
+            <a:schemeClr val="accent1"/>
+          </a:lnRef>
+          <a:fillRef idx="0">
+            <a:schemeClr val="accent1"/>
+          </a:fillRef>
+          <a:effectRef idx="1">
+            <a:schemeClr val="accent1"/>
+          </a:effectRef>
+          <a:fontRef idx="minor">
+            <a:schemeClr val="tx1"/>
+          </a:fontRef>
+        </p:style>
+      </p:cxnSp>
+      <p:cxnSp>
+        <p:nvCxnSpPr>
+          <p:cNvPr id="13" name="Connector 12"/>
+          <p:cNvCxnSpPr/>
+          <p:nvPr/>
+        </p:nvCxnSpPr>
+        <p:spPr>
+          <a:xfrm>
+            <a:off x="8046720" y="2331720"/>
+            <a:ext cx="365760" cy="45720"/>
+          </a:xfrm>
+          <a:prstGeom prst="line">
+            <a:avLst/>
+          </a:prstGeom>
+          <a:ln w="13970">
+            <a:solidFill>
+              <a:srgbClr val="64748B"/>
+            </a:solidFill>
+            <a:tailEnd type="triangle" w="med" len="med"/>
+          </a:ln>
+        </p:spPr>
+        <p:style>
+          <a:lnRef idx="2">
+            <a:schemeClr val="accent1"/>
+          </a:lnRef>
+          <a:fillRef idx="0">
+            <a:schemeClr val="accent1"/>
+          </a:fillRef>
+          <a:effectRef idx="1">
+            <a:schemeClr val="accent1"/>
+          </a:effectRef>
+          <a:fontRef idx="minor">
+            <a:schemeClr val="tx1"/>
+          </a:fontRef>
+        </p:style>
+      </p:cxnSp>
+      <p:cxnSp>
+        <p:nvCxnSpPr>
+          <p:cNvPr id="14" name="Connector 13"/>
+          <p:cNvCxnSpPr/>
+          <p:nvPr/>
+        </p:nvCxnSpPr>
+        <p:spPr>
+          <a:xfrm>
+            <a:off x="8046720" y="2331720"/>
+            <a:ext cx="365760" cy="822960"/>
+          </a:xfrm>
+          <a:prstGeom prst="line">
+            <a:avLst/>
+          </a:prstGeom>
+          <a:ln w="13970">
+            <a:solidFill>
+              <a:srgbClr val="64748B"/>
+            </a:solidFill>
+            <a:tailEnd type="triangle" w="med" len="med"/>
+          </a:ln>
+        </p:spPr>
+        <p:style>
+          <a:lnRef idx="2">
+            <a:schemeClr val="accent1"/>
+          </a:lnRef>
+          <a:fillRef idx="0">
+            <a:schemeClr val="accent1"/>
+          </a:fillRef>
+          <a:effectRef idx="1">
+            <a:schemeClr val="accent1"/>
+          </a:effectRef>
+          <a:fontRef idx="minor">
+            <a:schemeClr val="tx1"/>
+          </a:fontRef>
+        </p:style>
+      </p:cxnSp>
+      <p:sp>
+        <p:nvSpPr>
+          <p:cNvPr id="15" name="TextBox 14"/>
           <p:cNvSpPr txBox="1"/>
           <p:nvPr/>
         </p:nvSpPr>
         <p:spPr>
           <a:xfrm>
-            <a:off x="6675120" y="4526280"/>
-            <a:ext cx="4846320" cy="822960"/>
+            <a:off x="548640" y="4023360"/>
+            <a:ext cx="11247120" cy="2377440"/>
           </a:xfrm>
           <a:prstGeom prst="rect">
             <a:avLst/>
@@ -21445,42 +22437,76 @@
           <a:noFill/>
         </p:spPr>
         <p:txBody>
-          <a:bodyPr wrap="square" anchor="t">
+          <a:bodyPr wrap="square">
             <a:spAutoFit/>
           </a:bodyPr>
           <a:lstStyle/>
           <a:p>
-            <a:pPr algn="l">
+            <a:pPr>
               <a:spcAft>
-                <a:spcPts val="600"/>
+                <a:spcPts val="800"/>
               </a:spcAft>
             </a:pPr>
             <a:r>
-              <a:rPr sz="1500" b="1">
+              <a:rPr sz="1300" b="0">
                 <a:solidFill>
                   <a:srgbClr val="0F172A"/>
                 </a:solidFill>
                 <a:latin typeface="PingFang TC"/>
                 <a:ea typeface="PingFang TC"/>
               </a:rPr>
-              <a:t>課前準備</a:t>
-            </a:r>
-          </a:p>
-          <a:p>
-            <a:pPr algn="l">
+              <a:t>•  redirect 只丟事件進 stream(極快、緩衝吸 50k/s 尖峰),不再每次同步寫 RDS → 寫入降到批次級(對應第 14 題)</a:t>
+            </a:r>
+          </a:p>
+          <a:p>
+            <a:pPr>
               <a:spcAft>
-                <a:spcPts val="400"/>
+                <a:spcPts val="800"/>
               </a:spcAft>
             </a:pPr>
             <a:r>
-              <a:rPr sz="1400" b="0">
-                <a:solidFill>
-                  <a:srgbClr val="64748B"/>
-                </a:solidFill>
-                <a:latin typeface="PingFang TC"/>
-                <a:ea typeface="PingFang TC"/>
-              </a:rPr>
-              <a:t>複習教材 Deep Dive 章節</a:t>
+              <a:rPr sz="1300" b="0">
+                <a:solidFill>
+                  <a:srgbClr val="0F172A"/>
+                </a:solidFill>
+                <a:latin typeface="PingFang TC"/>
+                <a:ea typeface="PingFang TC"/>
+              </a:rPr>
+              <a:t>•  ASG：target-tracking autoscaling + 提高 max(或 Fargate/Lambda)</a:t>
+            </a:r>
+          </a:p>
+          <a:p>
+            <a:pPr>
+              <a:spcAft>
+                <a:spcPts val="800"/>
+              </a:spcAft>
+            </a:pPr>
+            <a:r>
+              <a:rPr sz="1300" b="0">
+                <a:solidFill>
+                  <a:srgbClr val="0F172A"/>
+                </a:solidFill>
+                <a:latin typeface="PingFang TC"/>
+                <a:ea typeface="PingFang TC"/>
+              </a:rPr>
+              <a:t>•  讀路徑：Redis cluster/多節點 + 拉高熱門命中;RDS read replica 分攤 cache-miss 讀(第 16 題)</a:t>
+            </a:r>
+          </a:p>
+          <a:p>
+            <a:pPr>
+              <a:spcAft>
+                <a:spcPts val="800"/>
+              </a:spcAft>
+            </a:pPr>
+            <a:r>
+              <a:rPr sz="1300" b="0">
+                <a:solidFill>
+                  <a:srgbClr val="0F172A"/>
+                </a:solidFill>
+                <a:latin typeface="PingFang TC"/>
+                <a:ea typeface="PingFang TC"/>
+              </a:rPr>
+              <a:t>•  edge：熱門 token 用 CloudFront 短 TTL 邊緣 redirect(附錄 B)在邊緣消化大半流量;API GW 調高 throttle</a:t>
             </a:r>
           </a:p>
         </p:txBody>

--- a/QR Code Generator/QR_Code_Generator.pptx
+++ b/QR Code Generator/QR_Code_Generator.pptx
@@ -38,6 +38,7 @@
     <p:sldId id="286" r:id="rId37"/>
     <p:sldId id="287" r:id="rId38"/>
     <p:sldId id="288" r:id="rId39"/>
+    <p:sldId id="289" r:id="rId40"/>
   </p:sldIdLst>
   <p:sldSz cx="12191695" cy="6858000" type="screen4x3"/>
   <p:notesSz cx="6858000" cy="9144000"/>
@@ -7506,7 +7507,7 @@
                 <a:latin typeface="PingFang TC"/>
                 <a:ea typeface="PingFang TC"/>
               </a:rPr>
-              <a:t>10 · DEEP DIVE</a:t>
+              <a:t>09b · DEEP DIVE</a:t>
             </a:r>
           </a:p>
           <a:p>
@@ -7523,21 +7524,525 @@
                 <a:latin typeface="PingFang TC"/>
                 <a:ea typeface="PingFang TC"/>
               </a:rPr>
-              <a:t>決策 3 — 可靠性與資料語意</a:t>
-            </a:r>
-          </a:p>
-        </p:txBody>
-      </p:sp>
-      <p:sp>
-        <p:nvSpPr>
-          <p:cNvPr id="4" name="TextBox 3"/>
+              <a:t>Cache 寫策略 — 讀 cache-aside，寫 write-around</a:t>
+            </a:r>
+          </a:p>
+        </p:txBody>
+      </p:sp>
+      <p:sp>
+        <p:nvSpPr>
+          <p:cNvPr id="4" name="Rounded Rectangle 3"/>
+          <p:cNvSpPr/>
+          <p:nvPr/>
+        </p:nvSpPr>
+        <p:spPr>
+          <a:xfrm>
+            <a:off x="640080" y="1783080"/>
+            <a:ext cx="2286000" cy="640080"/>
+          </a:xfrm>
+          <a:prstGeom prst="roundRect">
+            <a:avLst/>
+          </a:prstGeom>
+          <a:solidFill>
+            <a:srgbClr val="059669"/>
+          </a:solidFill>
+          <a:ln>
+            <a:solidFill>
+              <a:srgbClr val="059669"/>
+            </a:solidFill>
+          </a:ln>
+          <a:effectLst/>
+        </p:spPr>
+        <p:style>
+          <a:lnRef idx="1">
+            <a:schemeClr val="accent1"/>
+          </a:lnRef>
+          <a:fillRef idx="3">
+            <a:schemeClr val="accent1"/>
+          </a:fillRef>
+          <a:effectRef idx="2">
+            <a:schemeClr val="accent1"/>
+          </a:effectRef>
+          <a:fontRef idx="minor">
+            <a:schemeClr val="lt1"/>
+          </a:fontRef>
+        </p:style>
+        <p:txBody>
+          <a:bodyPr rtlCol="0" anchor="ctr" wrap="square" tIns="25400" bIns="25400"/>
+          <a:lstStyle/>
+          <a:p>
+            <a:pPr algn="ctr"/>
+            <a:r>
+              <a:rPr sz="1300" b="1">
+                <a:solidFill>
+                  <a:srgbClr val="FFFFFF"/>
+                </a:solidFill>
+                <a:latin typeface="PingFang TC"/>
+                <a:ea typeface="PingFang TC"/>
+              </a:rPr>
+              <a:t>redirect 讀</a:t>
+            </a:r>
+          </a:p>
+        </p:txBody>
+      </p:sp>
+      <p:sp>
+        <p:nvSpPr>
+          <p:cNvPr id="5" name="Rounded Rectangle 4"/>
+          <p:cNvSpPr/>
+          <p:nvPr/>
+        </p:nvSpPr>
+        <p:spPr>
+          <a:xfrm>
+            <a:off x="3063240" y="1783080"/>
+            <a:ext cx="4114800" cy="640080"/>
+          </a:xfrm>
+          <a:prstGeom prst="roundRect">
+            <a:avLst/>
+          </a:prstGeom>
+          <a:solidFill>
+            <a:srgbClr val="FFFFFF"/>
+          </a:solidFill>
+          <a:ln>
+            <a:solidFill>
+              <a:srgbClr val="FFFFFF"/>
+            </a:solidFill>
+          </a:ln>
+          <a:effectLst/>
+        </p:spPr>
+        <p:style>
+          <a:lnRef idx="1">
+            <a:schemeClr val="accent1"/>
+          </a:lnRef>
+          <a:fillRef idx="3">
+            <a:schemeClr val="accent1"/>
+          </a:fillRef>
+          <a:effectRef idx="2">
+            <a:schemeClr val="accent1"/>
+          </a:effectRef>
+          <a:fontRef idx="minor">
+            <a:schemeClr val="lt1"/>
+          </a:fontRef>
+        </p:style>
+        <p:txBody>
+          <a:bodyPr rtlCol="0" anchor="ctr" wrap="square" tIns="25400" bIns="25400"/>
+          <a:lstStyle/>
+          <a:p>
+            <a:pPr algn="ctr"/>
+            <a:r>
+              <a:rPr sz="1200" b="0">
+                <a:solidFill>
+                  <a:srgbClr val="0F172A"/>
+                </a:solidFill>
+                <a:latin typeface="PingFang TC"/>
+                <a:ea typeface="PingFang TC"/>
+              </a:rPr>
+              <a:t>miss → 查 DB → 回填</a:t>
+            </a:r>
+          </a:p>
+        </p:txBody>
+      </p:sp>
+      <p:sp>
+        <p:nvSpPr>
+          <p:cNvPr id="6" name="Rounded Rectangle 5"/>
+          <p:cNvSpPr/>
+          <p:nvPr/>
+        </p:nvSpPr>
+        <p:spPr>
+          <a:xfrm>
+            <a:off x="7315200" y="1783080"/>
+            <a:ext cx="4206240" cy="640080"/>
+          </a:xfrm>
+          <a:prstGeom prst="roundRect">
+            <a:avLst/>
+          </a:prstGeom>
+          <a:solidFill>
+            <a:srgbClr val="FFFFFF"/>
+          </a:solidFill>
+          <a:ln>
+            <a:solidFill>
+              <a:srgbClr val="FFFFFF"/>
+            </a:solidFill>
+          </a:ln>
+          <a:effectLst/>
+        </p:spPr>
+        <p:style>
+          <a:lnRef idx="1">
+            <a:schemeClr val="accent1"/>
+          </a:lnRef>
+          <a:fillRef idx="3">
+            <a:schemeClr val="accent1"/>
+          </a:fillRef>
+          <a:effectRef idx="2">
+            <a:schemeClr val="accent1"/>
+          </a:effectRef>
+          <a:fontRef idx="minor">
+            <a:schemeClr val="lt1"/>
+          </a:fontRef>
+        </p:style>
+        <p:txBody>
+          <a:bodyPr rtlCol="0" anchor="ctr" wrap="square" tIns="25400" bIns="25400"/>
+          <a:lstStyle/>
+          <a:p>
+            <a:pPr algn="ctr"/>
+            <a:r>
+              <a:rPr sz="1200" b="1">
+                <a:solidFill>
+                  <a:srgbClr val="059669"/>
+                </a:solidFill>
+                <a:latin typeface="PingFang TC"/>
+                <a:ea typeface="PingFang TC"/>
+              </a:rPr>
+              <a:t>cache-aside</a:t>
+            </a:r>
+          </a:p>
+        </p:txBody>
+      </p:sp>
+      <p:sp>
+        <p:nvSpPr>
+          <p:cNvPr id="7" name="Rounded Rectangle 6"/>
+          <p:cNvSpPr/>
+          <p:nvPr/>
+        </p:nvSpPr>
+        <p:spPr>
+          <a:xfrm>
+            <a:off x="640080" y="2606040"/>
+            <a:ext cx="2286000" cy="640080"/>
+          </a:xfrm>
+          <a:prstGeom prst="roundRect">
+            <a:avLst/>
+          </a:prstGeom>
+          <a:solidFill>
+            <a:srgbClr val="2563EB"/>
+          </a:solidFill>
+          <a:ln>
+            <a:solidFill>
+              <a:srgbClr val="2563EB"/>
+            </a:solidFill>
+          </a:ln>
+          <a:effectLst/>
+        </p:spPr>
+        <p:style>
+          <a:lnRef idx="1">
+            <a:schemeClr val="accent1"/>
+          </a:lnRef>
+          <a:fillRef idx="3">
+            <a:schemeClr val="accent1"/>
+          </a:fillRef>
+          <a:effectRef idx="2">
+            <a:schemeClr val="accent1"/>
+          </a:effectRef>
+          <a:fontRef idx="minor">
+            <a:schemeClr val="lt1"/>
+          </a:fontRef>
+        </p:style>
+        <p:txBody>
+          <a:bodyPr rtlCol="0" anchor="ctr" wrap="square" tIns="25400" bIns="25400"/>
+          <a:lstStyle/>
+          <a:p>
+            <a:pPr algn="ctr"/>
+            <a:r>
+              <a:rPr sz="1300" b="1">
+                <a:solidFill>
+                  <a:srgbClr val="FFFFFF"/>
+                </a:solidFill>
+                <a:latin typeface="PingFang TC"/>
+                <a:ea typeface="PingFang TC"/>
+              </a:rPr>
+              <a:t>create</a:t>
+            </a:r>
+          </a:p>
+        </p:txBody>
+      </p:sp>
+      <p:sp>
+        <p:nvSpPr>
+          <p:cNvPr id="8" name="Rounded Rectangle 7"/>
+          <p:cNvSpPr/>
+          <p:nvPr/>
+        </p:nvSpPr>
+        <p:spPr>
+          <a:xfrm>
+            <a:off x="3063240" y="2606040"/>
+            <a:ext cx="4114800" cy="640080"/>
+          </a:xfrm>
+          <a:prstGeom prst="roundRect">
+            <a:avLst/>
+          </a:prstGeom>
+          <a:solidFill>
+            <a:srgbClr val="FFFFFF"/>
+          </a:solidFill>
+          <a:ln>
+            <a:solidFill>
+              <a:srgbClr val="FFFFFF"/>
+            </a:solidFill>
+          </a:ln>
+          <a:effectLst/>
+        </p:spPr>
+        <p:style>
+          <a:lnRef idx="1">
+            <a:schemeClr val="accent1"/>
+          </a:lnRef>
+          <a:fillRef idx="3">
+            <a:schemeClr val="accent1"/>
+          </a:fillRef>
+          <a:effectRef idx="2">
+            <a:schemeClr val="accent1"/>
+          </a:effectRef>
+          <a:fontRef idx="minor">
+            <a:schemeClr val="lt1"/>
+          </a:fontRef>
+        </p:style>
+        <p:txBody>
+          <a:bodyPr rtlCol="0" anchor="ctr" wrap="square" tIns="25400" bIns="25400"/>
+          <a:lstStyle/>
+          <a:p>
+            <a:pPr algn="ctr"/>
+            <a:r>
+              <a:rPr sz="1200" b="0">
+                <a:solidFill>
+                  <a:srgbClr val="0F172A"/>
+                </a:solidFill>
+                <a:latin typeface="PingFang TC"/>
+                <a:ea typeface="PingFang TC"/>
+              </a:rPr>
+              <a:t>寫 DB → 順手 set（暖）</a:t>
+            </a:r>
+          </a:p>
+        </p:txBody>
+      </p:sp>
+      <p:sp>
+        <p:nvSpPr>
+          <p:cNvPr id="9" name="Rounded Rectangle 8"/>
+          <p:cNvSpPr/>
+          <p:nvPr/>
+        </p:nvSpPr>
+        <p:spPr>
+          <a:xfrm>
+            <a:off x="7315200" y="2606040"/>
+            <a:ext cx="4206240" cy="640080"/>
+          </a:xfrm>
+          <a:prstGeom prst="roundRect">
+            <a:avLst/>
+          </a:prstGeom>
+          <a:solidFill>
+            <a:srgbClr val="FFFFFF"/>
+          </a:solidFill>
+          <a:ln>
+            <a:solidFill>
+              <a:srgbClr val="FFFFFF"/>
+            </a:solidFill>
+          </a:ln>
+          <a:effectLst/>
+        </p:spPr>
+        <p:style>
+          <a:lnRef idx="1">
+            <a:schemeClr val="accent1"/>
+          </a:lnRef>
+          <a:fillRef idx="3">
+            <a:schemeClr val="accent1"/>
+          </a:fillRef>
+          <a:effectRef idx="2">
+            <a:schemeClr val="accent1"/>
+          </a:effectRef>
+          <a:fontRef idx="minor">
+            <a:schemeClr val="lt1"/>
+          </a:fontRef>
+        </p:style>
+        <p:txBody>
+          <a:bodyPr rtlCol="0" anchor="ctr" wrap="square" tIns="25400" bIns="25400"/>
+          <a:lstStyle/>
+          <a:p>
+            <a:pPr algn="ctr"/>
+            <a:r>
+              <a:rPr sz="1200" b="1">
+                <a:solidFill>
+                  <a:srgbClr val="2563EB"/>
+                </a:solidFill>
+                <a:latin typeface="PingFang TC"/>
+                <a:ea typeface="PingFang TC"/>
+              </a:rPr>
+              <a:t>write-through（小優化）</a:t>
+            </a:r>
+          </a:p>
+        </p:txBody>
+      </p:sp>
+      <p:sp>
+        <p:nvSpPr>
+          <p:cNvPr id="10" name="Rounded Rectangle 9"/>
+          <p:cNvSpPr/>
+          <p:nvPr/>
+        </p:nvSpPr>
+        <p:spPr>
+          <a:xfrm>
+            <a:off x="640080" y="3429000"/>
+            <a:ext cx="2286000" cy="640080"/>
+          </a:xfrm>
+          <a:prstGeom prst="roundRect">
+            <a:avLst/>
+          </a:prstGeom>
+          <a:solidFill>
+            <a:srgbClr val="DC2626"/>
+          </a:solidFill>
+          <a:ln>
+            <a:solidFill>
+              <a:srgbClr val="DC2626"/>
+            </a:solidFill>
+          </a:ln>
+          <a:effectLst/>
+        </p:spPr>
+        <p:style>
+          <a:lnRef idx="1">
+            <a:schemeClr val="accent1"/>
+          </a:lnRef>
+          <a:fillRef idx="3">
+            <a:schemeClr val="accent1"/>
+          </a:fillRef>
+          <a:effectRef idx="2">
+            <a:schemeClr val="accent1"/>
+          </a:effectRef>
+          <a:fontRef idx="minor">
+            <a:schemeClr val="lt1"/>
+          </a:fontRef>
+        </p:style>
+        <p:txBody>
+          <a:bodyPr rtlCol="0" anchor="ctr" wrap="square" tIns="25400" bIns="25400"/>
+          <a:lstStyle/>
+          <a:p>
+            <a:pPr algn="ctr"/>
+            <a:r>
+              <a:rPr sz="1300" b="1">
+                <a:solidFill>
+                  <a:srgbClr val="FFFFFF"/>
+                </a:solidFill>
+                <a:latin typeface="PingFang TC"/>
+                <a:ea typeface="PingFang TC"/>
+              </a:rPr>
+              <a:t>update / delete</a:t>
+            </a:r>
+          </a:p>
+        </p:txBody>
+      </p:sp>
+      <p:sp>
+        <p:nvSpPr>
+          <p:cNvPr id="11" name="Rounded Rectangle 10"/>
+          <p:cNvSpPr/>
+          <p:nvPr/>
+        </p:nvSpPr>
+        <p:spPr>
+          <a:xfrm>
+            <a:off x="3063240" y="3429000"/>
+            <a:ext cx="4114800" cy="640080"/>
+          </a:xfrm>
+          <a:prstGeom prst="roundRect">
+            <a:avLst/>
+          </a:prstGeom>
+          <a:solidFill>
+            <a:srgbClr val="FFFFFF"/>
+          </a:solidFill>
+          <a:ln>
+            <a:solidFill>
+              <a:srgbClr val="FFFFFF"/>
+            </a:solidFill>
+          </a:ln>
+          <a:effectLst/>
+        </p:spPr>
+        <p:style>
+          <a:lnRef idx="1">
+            <a:schemeClr val="accent1"/>
+          </a:lnRef>
+          <a:fillRef idx="3">
+            <a:schemeClr val="accent1"/>
+          </a:fillRef>
+          <a:effectRef idx="2">
+            <a:schemeClr val="accent1"/>
+          </a:effectRef>
+          <a:fontRef idx="minor">
+            <a:schemeClr val="lt1"/>
+          </a:fontRef>
+        </p:style>
+        <p:txBody>
+          <a:bodyPr rtlCol="0" anchor="ctr" wrap="square" tIns="25400" bIns="25400"/>
+          <a:lstStyle/>
+          <a:p>
+            <a:pPr algn="ctr"/>
+            <a:r>
+              <a:rPr sz="1200" b="0">
+                <a:solidFill>
+                  <a:srgbClr val="0F172A"/>
+                </a:solidFill>
+                <a:latin typeface="PingFang TC"/>
+                <a:ea typeface="PingFang TC"/>
+              </a:rPr>
+              <a:t>寫 DB →（commit 後）delete</a:t>
+            </a:r>
+          </a:p>
+        </p:txBody>
+      </p:sp>
+      <p:sp>
+        <p:nvSpPr>
+          <p:cNvPr id="12" name="Rounded Rectangle 11"/>
+          <p:cNvSpPr/>
+          <p:nvPr/>
+        </p:nvSpPr>
+        <p:spPr>
+          <a:xfrm>
+            <a:off x="7315200" y="3429000"/>
+            <a:ext cx="4206240" cy="640080"/>
+          </a:xfrm>
+          <a:prstGeom prst="roundRect">
+            <a:avLst/>
+          </a:prstGeom>
+          <a:solidFill>
+            <a:srgbClr val="FFFFFF"/>
+          </a:solidFill>
+          <a:ln>
+            <a:solidFill>
+              <a:srgbClr val="FFFFFF"/>
+            </a:solidFill>
+          </a:ln>
+          <a:effectLst/>
+        </p:spPr>
+        <p:style>
+          <a:lnRef idx="1">
+            <a:schemeClr val="accent1"/>
+          </a:lnRef>
+          <a:fillRef idx="3">
+            <a:schemeClr val="accent1"/>
+          </a:fillRef>
+          <a:effectRef idx="2">
+            <a:schemeClr val="accent1"/>
+          </a:effectRef>
+          <a:fontRef idx="minor">
+            <a:schemeClr val="lt1"/>
+          </a:fontRef>
+        </p:style>
+        <p:txBody>
+          <a:bodyPr rtlCol="0" anchor="ctr" wrap="square" tIns="25400" bIns="25400"/>
+          <a:lstStyle/>
+          <a:p>
+            <a:pPr algn="ctr"/>
+            <a:r>
+              <a:rPr sz="1200" b="1">
+                <a:solidFill>
+                  <a:srgbClr val="DC2626"/>
+                </a:solidFill>
+                <a:latin typeface="PingFang TC"/>
+                <a:ea typeface="PingFang TC"/>
+              </a:rPr>
+              <a:t>write-around / invalidate</a:t>
+            </a:r>
+          </a:p>
+        </p:txBody>
+      </p:sp>
+      <p:sp>
+        <p:nvSpPr>
+          <p:cNvPr id="13" name="TextBox 12"/>
           <p:cNvSpPr txBox="1"/>
           <p:nvPr/>
         </p:nvSpPr>
         <p:spPr>
           <a:xfrm>
-            <a:off x="640080" y="1737360"/>
-            <a:ext cx="10789920" cy="4572000"/>
+            <a:off x="640080" y="4480560"/>
+            <a:ext cx="10881360" cy="2103120"/>
           </a:xfrm>
           <a:prstGeom prst="rect">
             <a:avLst/>
@@ -7552,120 +8057,86 @@
           <a:p>
             <a:pPr>
               <a:spcAft>
-                <a:spcPts val="900"/>
+                <a:spcPts val="700"/>
               </a:spcAft>
             </a:pPr>
             <a:r>
-              <a:rPr sz="1500" b="0">
+              <a:rPr sz="1300" b="0">
                 <a:solidFill>
                   <a:srgbClr val="0F172A"/>
                 </a:solidFill>
                 <a:latin typeface="PingFang TC"/>
                 <a:ea typeface="PingFang TC"/>
               </a:rPr>
-              <a:t>•  軟刪除（is_deleted）：支撐 410 語意、保留分析、避免 token 回收風險</a:t>
+              <a:t>•  為何寫時 invalidate 而非 write-through：</a:t>
+            </a:r>
+          </a:p>
+          <a:p>
+            <a:pPr lvl="1">
+              <a:spcAft>
+                <a:spcPts val="700"/>
+              </a:spcAft>
+            </a:pPr>
+            <a:r>
+              <a:rPr sz="1200" b="0">
+                <a:solidFill>
+                  <a:srgbClr val="64748B"/>
+                </a:solidFill>
+                <a:latin typeface="PingFang TC"/>
+                <a:ea typeface="PingFang TC"/>
+              </a:rPr>
+              <a:t>–  read-heavy 且非每筆會被讀 → write-through 白佔記憶體、擠掉熱門 token；write-around 只快取真正被讀的工作集</a:t>
+            </a:r>
+          </a:p>
+          <a:p>
+            <a:pPr lvl="1">
+              <a:spcAft>
+                <a:spcPts val="700"/>
+              </a:spcAft>
+            </a:pPr>
+            <a:r>
+              <a:rPr sz="1200" b="0">
+                <a:solidFill>
+                  <a:srgbClr val="64748B"/>
+                </a:solidFill>
+                <a:latin typeface="PingFang TC"/>
+                <a:ea typeface="PingFang TC"/>
+              </a:rPr>
+              <a:t>–  一致性更單純：update 直接刪 cache、下次讀從 DB 重建；順序 commit → 再 invalidate，避免 stale 回填 race</a:t>
+            </a:r>
+          </a:p>
+          <a:p>
+            <a:pPr lvl="1">
+              <a:spcAft>
+                <a:spcPts val="700"/>
+              </a:spcAft>
+            </a:pPr>
+            <a:r>
+              <a:rPr sz="1200" b="0">
+                <a:solidFill>
+                  <a:srgbClr val="64748B"/>
+                </a:solidFill>
+                <a:latin typeface="PingFang TC"/>
+                <a:ea typeface="PingFang TC"/>
+              </a:rPr>
+              <a:t>–  TTL 兜底最終一致；scan 分析寫入是非同步、不進此 cache（附錄 J）</a:t>
             </a:r>
           </a:p>
           <a:p>
             <a:pPr>
               <a:spcAft>
-                <a:spcPts val="900"/>
+                <a:spcPts val="700"/>
               </a:spcAft>
             </a:pPr>
             <a:r>
-              <a:rPr sz="1500" b="0">
+              <a:rPr sz="1300" b="0">
                 <a:solidFill>
                   <a:srgbClr val="0F172A"/>
                 </a:solidFill>
                 <a:latin typeface="PingFang TC"/>
                 <a:ea typeface="PingFang TC"/>
               </a:rPr>
-              <a:t>•  錯誤語意：404（從未存在） vs 410（曾存在已刪/過期）</a:t>
-            </a:r>
-          </a:p>
-          <a:p>
-            <a:pPr lvl="1">
-              <a:spcAft>
-                <a:spcPts val="900"/>
-              </a:spcAft>
-            </a:pPr>
-            <a:r>
-              <a:rPr sz="1400" b="0">
-                <a:solidFill>
-                  <a:srgbClr val="64748B"/>
-                </a:solidFill>
-                <a:latin typeface="PingFang TC"/>
-                <a:ea typeface="PingFang TC"/>
-              </a:rPr>
-              <a:t>–  掃描路徑刪除回 410；管理 API 已刪回 404（刻意差異）</a:t>
-            </a:r>
-          </a:p>
-          <a:p>
-            <a:pPr>
-              <a:spcAft>
-                <a:spcPts val="900"/>
-              </a:spcAft>
-            </a:pPr>
-            <a:r>
-              <a:rPr sz="1500" b="0">
-                <a:solidFill>
-                  <a:srgbClr val="0F172A"/>
-                </a:solidFill>
-                <a:latin typeface="PingFang TC"/>
-                <a:ea typeface="PingFang TC"/>
-              </a:rPr>
-              <a:t>•  惰性過期 + cron 兜底：掃描即時檢查過期；cron 清過期/通知未點擊/物理清理</a:t>
-            </a:r>
-          </a:p>
-          <a:p>
-            <a:pPr>
-              <a:spcAft>
-                <a:spcPts val="900"/>
-              </a:spcAft>
-            </a:pPr>
-            <a:r>
-              <a:rPr sz="1500" b="0">
-                <a:solidFill>
-                  <a:srgbClr val="0F172A"/>
-                </a:solidFill>
-                <a:latin typeface="PingFang TC"/>
-                <a:ea typeface="PingFang TC"/>
-              </a:rPr>
-              <a:t>•  URL 保守正規化：只 lower-case host，保留 path/query 與原 scheme</a:t>
-            </a:r>
-          </a:p>
-          <a:p>
-            <a:pPr lvl="1">
-              <a:spcAft>
-                <a:spcPts val="900"/>
-              </a:spcAft>
-            </a:pPr>
-            <a:r>
-              <a:rPr sz="1400" b="0">
-                <a:solidFill>
-                  <a:srgbClr val="64748B"/>
-                </a:solidFill>
-                <a:latin typeface="PingFang TC"/>
-                <a:ea typeface="PingFang TC"/>
-              </a:rPr>
-              <a:t>–  修正 repo 的整串小寫（破壞 path）+ 強制 https（導向失效站）</a:t>
-            </a:r>
-          </a:p>
-          <a:p>
-            <a:pPr>
-              <a:spcAft>
-                <a:spcPts val="900"/>
-              </a:spcAft>
-            </a:pPr>
-            <a:r>
-              <a:rPr sz="1500" b="0">
-                <a:solidFill>
-                  <a:srgbClr val="0F172A"/>
-                </a:solidFill>
-                <a:latin typeface="PingFang TC"/>
-                <a:ea typeface="PingFang TC"/>
-              </a:rPr>
-              <a:t>•  惡意阻擋：黑名單 + SSRF/內網位址（localhost·127.*·私網），正式版接 Safe Browsing</a:t>
+              <a:t>•  何時反選 write-through：寫完馬上一定會讀（read-your-write 高頻，如 session）；redirect 建立與被掃無強時間關聯 → write-around 勝</a:t>
             </a:r>
           </a:p>
         </p:txBody>
@@ -7767,7 +8238,7 @@
                 <a:latin typeface="PingFang TC"/>
                 <a:ea typeface="PingFang TC"/>
               </a:rPr>
-              <a:t>11 · SCALING</a:t>
+              <a:t>10 · DEEP DIVE</a:t>
             </a:r>
           </a:p>
           <a:p>
@@ -7784,7 +8255,7 @@
                 <a:latin typeface="PingFang TC"/>
                 <a:ea typeface="PingFang TC"/>
               </a:rPr>
-              <a:t>擴展策略</a:t>
+              <a:t>決策 3 — 可靠性與資料語意</a:t>
             </a:r>
           </a:p>
         </p:txBody>
@@ -7824,7 +8295,7 @@
                 <a:latin typeface="PingFang TC"/>
                 <a:ea typeface="PingFang TC"/>
               </a:rPr>
-              <a:t>•  App server stateless → 增加 instance 水平擴展（cache 外置 Redis）</a:t>
+              <a:t>•  軟刪除（is_deleted）：支撐 410 語意、保留分析、避免 token 回收風險</a:t>
             </a:r>
           </a:p>
           <a:p>
@@ -7841,7 +8312,7 @@
                 <a:latin typeface="PingFang TC"/>
                 <a:ea typeface="PingFang TC"/>
               </a:rPr>
-              <a:t>•  DB：單 primary + 多 read replica（讀走副）+ primary 掛 failover 升主</a:t>
+              <a:t>•  錯誤語意：404（從未存在） vs 410（曾存在已刪/過期）</a:t>
             </a:r>
           </a:p>
           <a:p>
@@ -7858,7 +8329,7 @@
                 <a:latin typeface="PingFang TC"/>
                 <a:ea typeface="PingFang TC"/>
               </a:rPr>
-              <a:t>–  複寫延遲：create 後暖 cache 緩解</a:t>
+              <a:t>–  掃描路徑刪除回 410；管理 API 已刪回 404（刻意差異）</a:t>
             </a:r>
           </a:p>
           <a:p>
@@ -7875,7 +8346,7 @@
                 <a:latin typeface="PingFang TC"/>
                 <a:ea typeface="PingFang TC"/>
               </a:rPr>
-              <a:t>•  分片：以 token hash 為鍵（均勻），列為未來選項（200GB 目前單機足夠）</a:t>
+              <a:t>•  惰性過期 + cron 兜底：掃描即時檢查過期；cron 清過期/通知未點擊/物理清理</a:t>
             </a:r>
           </a:p>
           <a:p>
@@ -7892,7 +8363,24 @@
                 <a:latin typeface="PingFang TC"/>
                 <a:ea typeface="PingFang TC"/>
               </a:rPr>
-              <a:t>•  QR 圖片：object store + CDN（靜態內容，目標 URL 改不需重生圖）</a:t>
+              <a:t>•  URL 保守正規化：只 lower-case host，保留 path/query 與原 scheme</a:t>
+            </a:r>
+          </a:p>
+          <a:p>
+            <a:pPr lvl="1">
+              <a:spcAft>
+                <a:spcPts val="900"/>
+              </a:spcAft>
+            </a:pPr>
+            <a:r>
+              <a:rPr sz="1400" b="0">
+                <a:solidFill>
+                  <a:srgbClr val="64748B"/>
+                </a:solidFill>
+                <a:latin typeface="PingFang TC"/>
+                <a:ea typeface="PingFang TC"/>
+              </a:rPr>
+              <a:t>–  修正 repo 的整串小寫（破壞 path）+ 強制 https（導向失效站）</a:t>
             </a:r>
           </a:p>
           <a:p>
@@ -7909,24 +8397,7 @@
                 <a:latin typeface="PingFang TC"/>
                 <a:ea typeface="PingFang TC"/>
               </a:rPr>
-              <a:t>•  分析：佇列 → 獨立分析庫 + 預聚合每日計數表</a:t>
-            </a:r>
-          </a:p>
-          <a:p>
-            <a:pPr>
-              <a:spcAft>
-                <a:spcPts val="900"/>
-              </a:spcAft>
-            </a:pPr>
-            <a:r>
-              <a:rPr sz="1500" b="0">
-                <a:solidFill>
-                  <a:srgbClr val="0F172A"/>
-                </a:solidFill>
-                <a:latin typeface="PingFang TC"/>
-                <a:ea typeface="PingFang TC"/>
-              </a:rPr>
-              <a:t>•  清理 cron：清過期 / 通知後刪長期未點擊 / 物理清理超期軟刪 + invalidate cache</a:t>
+              <a:t>•  惡意阻擋：黑名單 + SSRF/內網位址（localhost·127.*·私網），正式版接 Safe Browsing</a:t>
             </a:r>
           </a:p>
         </p:txBody>
@@ -8028,7 +8499,7 @@
                 <a:latin typeface="PingFang TC"/>
                 <a:ea typeface="PingFang TC"/>
               </a:rPr>
-              <a:t>11b · READ REPLICA</a:t>
+              <a:t>11 · SCALING</a:t>
             </a:r>
           </a:p>
           <a:p>
@@ -8045,7 +8516,7 @@
                 <a:latin typeface="PingFang TC"/>
                 <a:ea typeface="PingFang TC"/>
               </a:rPr>
-              <a:t>Read-heavy → 讀寫分離 + Read Replica</a:t>
+              <a:t>擴展策略</a:t>
             </a:r>
           </a:p>
         </p:txBody>
@@ -8058,726 +8529,8 @@
         </p:nvSpPr>
         <p:spPr>
           <a:xfrm>
-            <a:off x="548640" y="1645920"/>
-            <a:ext cx="5486400" cy="2926080"/>
-          </a:xfrm>
-          <a:prstGeom prst="rect">
-            <a:avLst/>
-          </a:prstGeom>
-          <a:noFill/>
-        </p:spPr>
-        <p:txBody>
-          <a:bodyPr wrap="square" anchor="t">
-            <a:spAutoFit/>
-          </a:bodyPr>
-          <a:lstStyle/>
-          <a:p>
-            <a:pPr algn="l">
-              <a:spcAft>
-                <a:spcPts val="800"/>
-              </a:spcAft>
-            </a:pPr>
-            <a:r>
-              <a:rPr sz="1500" b="0">
-                <a:solidFill>
-                  <a:srgbClr val="0F172A"/>
-                </a:solidFill>
-                <a:latin typeface="PingFang TC"/>
-                <a:ea typeface="PingFang TC"/>
-              </a:rPr>
-              <a:t>容量：1B × 200B = 200GB（單機放得下）</a:t>
-            </a:r>
-          </a:p>
-          <a:p>
-            <a:pPr algn="l">
-              <a:spcAft>
-                <a:spcPts val="400"/>
-              </a:spcAft>
-            </a:pPr>
-            <a:r>
-              <a:rPr sz="1500" b="0">
-                <a:solidFill>
-                  <a:srgbClr val="0F172A"/>
-                </a:solidFill>
-                <a:latin typeface="PingFang TC"/>
-                <a:ea typeface="PingFang TC"/>
-              </a:rPr>
-              <a:t>讀流量：1 億 users × 5/日 = 5 億 redirects/日</a:t>
-            </a:r>
-          </a:p>
-          <a:p>
-            <a:pPr algn="l">
-              <a:spcAft>
-                <a:spcPts val="800"/>
-              </a:spcAft>
-            </a:pPr>
-            <a:r>
-              <a:rPr sz="1600" b="1">
-                <a:solidFill>
-                  <a:srgbClr val="2563EB"/>
-                </a:solidFill>
-                <a:latin typeface="PingFang TC"/>
-                <a:ea typeface="PingFang TC"/>
-              </a:rPr>
-              <a:t>            5 億 ÷ 86,400s ≈ 5,787 redirects/秒</a:t>
-            </a:r>
-          </a:p>
-          <a:p>
-            <a:pPr algn="l">
-              <a:spcAft>
-                <a:spcPts val="1200"/>
-              </a:spcAft>
-            </a:pPr>
-            <a:r>
-              <a:rPr sz="1500" b="0">
-                <a:solidFill>
-                  <a:srgbClr val="0F172A"/>
-                </a:solidFill>
-                <a:latin typeface="PingFang TC"/>
-                <a:ea typeface="PingFang TC"/>
-              </a:rPr>
-              <a:t>讀寫比：≈ 100:1（讀 ≫ 寫）</a:t>
-            </a:r>
-          </a:p>
-          <a:p>
-            <a:pPr algn="l">
-              <a:spcAft>
-                <a:spcPts val="400"/>
-              </a:spcAft>
-            </a:pPr>
-            <a:r>
-              <a:rPr sz="1500" b="1">
-                <a:solidFill>
-                  <a:srgbClr val="0F172A"/>
-                </a:solidFill>
-                <a:latin typeface="PingFang TC"/>
-                <a:ea typeface="PingFang TC"/>
-              </a:rPr>
-              <a:t>→ 瓶頸是「讀吞吐」、不是容量</a:t>
-            </a:r>
-          </a:p>
-          <a:p>
-            <a:pPr algn="l">
-              <a:spcAft>
-                <a:spcPts val="400"/>
-              </a:spcAft>
-            </a:pPr>
-            <a:r>
-              <a:rPr sz="1600" b="1">
-                <a:solidFill>
-                  <a:srgbClr val="059669"/>
-                </a:solidFill>
-                <a:latin typeface="PingFang TC"/>
-                <a:ea typeface="PingFang TC"/>
-              </a:rPr>
-              <a:t>→ 讀寫分離 + 多個 read replica</a:t>
-            </a:r>
-          </a:p>
-        </p:txBody>
-      </p:sp>
-      <p:sp>
-        <p:nvSpPr>
-          <p:cNvPr id="5" name="Rounded Rectangle 4"/>
-          <p:cNvSpPr/>
-          <p:nvPr/>
-        </p:nvSpPr>
-        <p:spPr>
-          <a:xfrm>
-            <a:off x="6126480" y="2286000"/>
-            <a:ext cx="1645920" cy="914400"/>
-          </a:xfrm>
-          <a:prstGeom prst="roundRect">
-            <a:avLst/>
-          </a:prstGeom>
-          <a:solidFill>
-            <a:srgbClr val="2563EB"/>
-          </a:solidFill>
-          <a:ln>
-            <a:solidFill>
-              <a:srgbClr val="2563EB"/>
-            </a:solidFill>
-          </a:ln>
-          <a:effectLst/>
-        </p:spPr>
-        <p:style>
-          <a:lnRef idx="1">
-            <a:schemeClr val="accent1"/>
-          </a:lnRef>
-          <a:fillRef idx="3">
-            <a:schemeClr val="accent1"/>
-          </a:fillRef>
-          <a:effectRef idx="2">
-            <a:schemeClr val="accent1"/>
-          </a:effectRef>
-          <a:fontRef idx="minor">
-            <a:schemeClr val="lt1"/>
-          </a:fontRef>
-        </p:style>
-        <p:txBody>
-          <a:bodyPr rtlCol="0" anchor="ctr" wrap="square" tIns="25400" bIns="25400"/>
-          <a:lstStyle/>
-          <a:p>
-            <a:pPr algn="ctr"/>
-            <a:r>
-              <a:rPr sz="1300" b="1">
-                <a:solidFill>
-                  <a:srgbClr val="FFFFFF"/>
-                </a:solidFill>
-                <a:latin typeface="PingFang TC"/>
-                <a:ea typeface="PingFang TC"/>
-              </a:rPr>
-              <a:t>App</a:t>
-            </a:r>
-          </a:p>
-          <a:p>
-            <a:pPr algn="ctr"/>
-            <a:r>
-              <a:rPr sz="1300" b="0">
-                <a:solidFill>
-                  <a:srgbClr val="FFFFFF"/>
-                </a:solidFill>
-                <a:latin typeface="PingFang TC"/>
-                <a:ea typeface="PingFang TC"/>
-              </a:rPr>
-              <a:t>(stateless)</a:t>
-            </a:r>
-          </a:p>
-        </p:txBody>
-      </p:sp>
-      <p:sp>
-        <p:nvSpPr>
-          <p:cNvPr id="6" name="Rounded Rectangle 5"/>
-          <p:cNvSpPr/>
-          <p:nvPr/>
-        </p:nvSpPr>
-        <p:spPr>
-          <a:xfrm>
-            <a:off x="8595360" y="1737360"/>
-            <a:ext cx="3017520" cy="731520"/>
-          </a:xfrm>
-          <a:prstGeom prst="roundRect">
-            <a:avLst/>
-          </a:prstGeom>
-          <a:solidFill>
-            <a:srgbClr val="059669"/>
-          </a:solidFill>
-          <a:ln>
-            <a:solidFill>
-              <a:srgbClr val="059669"/>
-            </a:solidFill>
-          </a:ln>
-          <a:effectLst/>
-        </p:spPr>
-        <p:style>
-          <a:lnRef idx="1">
-            <a:schemeClr val="accent1"/>
-          </a:lnRef>
-          <a:fillRef idx="3">
-            <a:schemeClr val="accent1"/>
-          </a:fillRef>
-          <a:effectRef idx="2">
-            <a:schemeClr val="accent1"/>
-          </a:effectRef>
-          <a:fontRef idx="minor">
-            <a:schemeClr val="lt1"/>
-          </a:fontRef>
-        </p:style>
-        <p:txBody>
-          <a:bodyPr rtlCol="0" anchor="ctr" wrap="square" tIns="25400" bIns="25400"/>
-          <a:lstStyle/>
-          <a:p>
-            <a:pPr algn="ctr"/>
-            <a:r>
-              <a:rPr sz="1300" b="1">
-                <a:solidFill>
-                  <a:srgbClr val="FFFFFF"/>
-                </a:solidFill>
-                <a:latin typeface="PingFang TC"/>
-                <a:ea typeface="PingFang TC"/>
-              </a:rPr>
-              <a:t>Primary (Write)</a:t>
-            </a:r>
-          </a:p>
-        </p:txBody>
-      </p:sp>
-      <p:sp>
-        <p:nvSpPr>
-          <p:cNvPr id="7" name="Rounded Rectangle 6"/>
-          <p:cNvSpPr/>
-          <p:nvPr/>
-        </p:nvSpPr>
-        <p:spPr>
-          <a:xfrm>
-            <a:off x="8595360" y="2697480"/>
-            <a:ext cx="3017520" cy="594360"/>
-          </a:xfrm>
-          <a:prstGeom prst="roundRect">
-            <a:avLst/>
-          </a:prstGeom>
-          <a:solidFill>
-            <a:srgbClr val="0EA5E9"/>
-          </a:solidFill>
-          <a:ln>
-            <a:solidFill>
-              <a:srgbClr val="0EA5E9"/>
-            </a:solidFill>
-          </a:ln>
-          <a:effectLst/>
-        </p:spPr>
-        <p:style>
-          <a:lnRef idx="1">
-            <a:schemeClr val="accent1"/>
-          </a:lnRef>
-          <a:fillRef idx="3">
-            <a:schemeClr val="accent1"/>
-          </a:fillRef>
-          <a:effectRef idx="2">
-            <a:schemeClr val="accent1"/>
-          </a:effectRef>
-          <a:fontRef idx="minor">
-            <a:schemeClr val="lt1"/>
-          </a:fontRef>
-        </p:style>
-        <p:txBody>
-          <a:bodyPr rtlCol="0" anchor="ctr" wrap="square" tIns="25400" bIns="25400"/>
-          <a:lstStyle/>
-          <a:p>
-            <a:pPr algn="ctr"/>
-            <a:r>
-              <a:rPr sz="1200" b="1">
-                <a:solidFill>
-                  <a:srgbClr val="FFFFFF"/>
-                </a:solidFill>
-                <a:latin typeface="PingFang TC"/>
-                <a:ea typeface="PingFang TC"/>
-              </a:rPr>
-              <a:t>Read Replica 1</a:t>
-            </a:r>
-          </a:p>
-        </p:txBody>
-      </p:sp>
-      <p:sp>
-        <p:nvSpPr>
-          <p:cNvPr id="8" name="Rounded Rectangle 7"/>
-          <p:cNvSpPr/>
-          <p:nvPr/>
-        </p:nvSpPr>
-        <p:spPr>
-          <a:xfrm>
-            <a:off x="8595360" y="3429000"/>
-            <a:ext cx="3017520" cy="594360"/>
-          </a:xfrm>
-          <a:prstGeom prst="roundRect">
-            <a:avLst/>
-          </a:prstGeom>
-          <a:solidFill>
-            <a:srgbClr val="0EA5E9"/>
-          </a:solidFill>
-          <a:ln>
-            <a:solidFill>
-              <a:srgbClr val="0EA5E9"/>
-            </a:solidFill>
-          </a:ln>
-          <a:effectLst/>
-        </p:spPr>
-        <p:style>
-          <a:lnRef idx="1">
-            <a:schemeClr val="accent1"/>
-          </a:lnRef>
-          <a:fillRef idx="3">
-            <a:schemeClr val="accent1"/>
-          </a:fillRef>
-          <a:effectRef idx="2">
-            <a:schemeClr val="accent1"/>
-          </a:effectRef>
-          <a:fontRef idx="minor">
-            <a:schemeClr val="lt1"/>
-          </a:fontRef>
-        </p:style>
-        <p:txBody>
-          <a:bodyPr rtlCol="0" anchor="ctr" wrap="square" tIns="25400" bIns="25400"/>
-          <a:lstStyle/>
-          <a:p>
-            <a:pPr algn="ctr"/>
-            <a:r>
-              <a:rPr sz="1200" b="1">
-                <a:solidFill>
-                  <a:srgbClr val="FFFFFF"/>
-                </a:solidFill>
-                <a:latin typeface="PingFang TC"/>
-                <a:ea typeface="PingFang TC"/>
-              </a:rPr>
-              <a:t>Read Replica 2</a:t>
-            </a:r>
-          </a:p>
-        </p:txBody>
-      </p:sp>
-      <p:sp>
-        <p:nvSpPr>
-          <p:cNvPr id="9" name="Rounded Rectangle 8"/>
-          <p:cNvSpPr/>
-          <p:nvPr/>
-        </p:nvSpPr>
-        <p:spPr>
-          <a:xfrm>
-            <a:off x="8595360" y="4160520"/>
-            <a:ext cx="3017520" cy="594360"/>
-          </a:xfrm>
-          <a:prstGeom prst="roundRect">
-            <a:avLst/>
-          </a:prstGeom>
-          <a:solidFill>
-            <a:srgbClr val="0EA5E9"/>
-          </a:solidFill>
-          <a:ln>
-            <a:solidFill>
-              <a:srgbClr val="0EA5E9"/>
-            </a:solidFill>
-          </a:ln>
-          <a:effectLst/>
-        </p:spPr>
-        <p:style>
-          <a:lnRef idx="1">
-            <a:schemeClr val="accent1"/>
-          </a:lnRef>
-          <a:fillRef idx="3">
-            <a:schemeClr val="accent1"/>
-          </a:fillRef>
-          <a:effectRef idx="2">
-            <a:schemeClr val="accent1"/>
-          </a:effectRef>
-          <a:fontRef idx="minor">
-            <a:schemeClr val="lt1"/>
-          </a:fontRef>
-        </p:style>
-        <p:txBody>
-          <a:bodyPr rtlCol="0" anchor="ctr" wrap="square" tIns="25400" bIns="25400"/>
-          <a:lstStyle/>
-          <a:p>
-            <a:pPr algn="ctr"/>
-            <a:r>
-              <a:rPr sz="1200" b="1">
-                <a:solidFill>
-                  <a:srgbClr val="FFFFFF"/>
-                </a:solidFill>
-                <a:latin typeface="PingFang TC"/>
-                <a:ea typeface="PingFang TC"/>
-              </a:rPr>
-              <a:t>Read Replica N</a:t>
-            </a:r>
-          </a:p>
-        </p:txBody>
-      </p:sp>
-      <p:cxnSp>
-        <p:nvCxnSpPr>
-          <p:cNvPr id="10" name="Connector 9"/>
-          <p:cNvCxnSpPr/>
-          <p:nvPr/>
-        </p:nvCxnSpPr>
-        <p:spPr>
-          <a:xfrm flipV="1">
-            <a:off x="7772400" y="2103120"/>
-            <a:ext cx="822960" cy="457200"/>
-          </a:xfrm>
-          <a:prstGeom prst="line">
-            <a:avLst/>
-          </a:prstGeom>
-          <a:ln w="20320">
-            <a:solidFill>
-              <a:srgbClr val="DC2626"/>
-            </a:solidFill>
-            <a:tailEnd type="triangle" w="med" len="med"/>
-          </a:ln>
-        </p:spPr>
-        <p:style>
-          <a:lnRef idx="2">
-            <a:schemeClr val="accent1"/>
-          </a:lnRef>
-          <a:fillRef idx="0">
-            <a:schemeClr val="accent1"/>
-          </a:fillRef>
-          <a:effectRef idx="1">
-            <a:schemeClr val="accent1"/>
-          </a:effectRef>
-          <a:fontRef idx="minor">
-            <a:schemeClr val="tx1"/>
-          </a:fontRef>
-        </p:style>
-      </p:cxnSp>
-      <p:cxnSp>
-        <p:nvCxnSpPr>
-          <p:cNvPr id="11" name="Connector 10"/>
-          <p:cNvCxnSpPr/>
-          <p:nvPr/>
-        </p:nvCxnSpPr>
-        <p:spPr>
-          <a:xfrm>
-            <a:off x="7772400" y="2880360"/>
-            <a:ext cx="822960" cy="109728"/>
-          </a:xfrm>
-          <a:prstGeom prst="line">
-            <a:avLst/>
-          </a:prstGeom>
-          <a:ln w="17780">
-            <a:solidFill>
-              <a:srgbClr val="059669"/>
-            </a:solidFill>
-            <a:tailEnd type="triangle" w="med" len="med"/>
-          </a:ln>
-        </p:spPr>
-        <p:style>
-          <a:lnRef idx="2">
-            <a:schemeClr val="accent1"/>
-          </a:lnRef>
-          <a:fillRef idx="0">
-            <a:schemeClr val="accent1"/>
-          </a:fillRef>
-          <a:effectRef idx="1">
-            <a:schemeClr val="accent1"/>
-          </a:effectRef>
-          <a:fontRef idx="minor">
-            <a:schemeClr val="tx1"/>
-          </a:fontRef>
-        </p:style>
-      </p:cxnSp>
-      <p:cxnSp>
-        <p:nvCxnSpPr>
-          <p:cNvPr id="12" name="Connector 11"/>
-          <p:cNvCxnSpPr/>
-          <p:nvPr/>
-        </p:nvCxnSpPr>
-        <p:spPr>
-          <a:xfrm>
-            <a:off x="7772400" y="3017520"/>
-            <a:ext cx="822960" cy="704088"/>
-          </a:xfrm>
-          <a:prstGeom prst="line">
-            <a:avLst/>
-          </a:prstGeom>
-          <a:ln w="17780">
-            <a:solidFill>
-              <a:srgbClr val="059669"/>
-            </a:solidFill>
-            <a:tailEnd type="triangle" w="med" len="med"/>
-          </a:ln>
-        </p:spPr>
-        <p:style>
-          <a:lnRef idx="2">
-            <a:schemeClr val="accent1"/>
-          </a:lnRef>
-          <a:fillRef idx="0">
-            <a:schemeClr val="accent1"/>
-          </a:fillRef>
-          <a:effectRef idx="1">
-            <a:schemeClr val="accent1"/>
-          </a:effectRef>
-          <a:fontRef idx="minor">
-            <a:schemeClr val="tx1"/>
-          </a:fontRef>
-        </p:style>
-      </p:cxnSp>
-      <p:cxnSp>
-        <p:nvCxnSpPr>
-          <p:cNvPr id="13" name="Connector 12"/>
-          <p:cNvCxnSpPr/>
-          <p:nvPr/>
-        </p:nvCxnSpPr>
-        <p:spPr>
-          <a:xfrm>
-            <a:off x="7772400" y="3108960"/>
-            <a:ext cx="822960" cy="1344168"/>
-          </a:xfrm>
-          <a:prstGeom prst="line">
-            <a:avLst/>
-          </a:prstGeom>
-          <a:ln w="17780">
-            <a:solidFill>
-              <a:srgbClr val="059669"/>
-            </a:solidFill>
-            <a:tailEnd type="triangle" w="med" len="med"/>
-          </a:ln>
-        </p:spPr>
-        <p:style>
-          <a:lnRef idx="2">
-            <a:schemeClr val="accent1"/>
-          </a:lnRef>
-          <a:fillRef idx="0">
-            <a:schemeClr val="accent1"/>
-          </a:fillRef>
-          <a:effectRef idx="1">
-            <a:schemeClr val="accent1"/>
-          </a:effectRef>
-          <a:fontRef idx="minor">
-            <a:schemeClr val="tx1"/>
-          </a:fontRef>
-        </p:style>
-      </p:cxnSp>
-      <p:sp>
-        <p:nvSpPr>
-          <p:cNvPr id="14" name="TextBox 13"/>
-          <p:cNvSpPr txBox="1"/>
-          <p:nvPr/>
-        </p:nvSpPr>
-        <p:spPr>
-          <a:xfrm>
-            <a:off x="7635240" y="2057400"/>
-            <a:ext cx="914400" cy="274320"/>
-          </a:xfrm>
-          <a:prstGeom prst="rect">
-            <a:avLst/>
-          </a:prstGeom>
-          <a:noFill/>
-        </p:spPr>
-        <p:txBody>
-          <a:bodyPr wrap="square" anchor="t">
-            <a:spAutoFit/>
-          </a:bodyPr>
-          <a:lstStyle/>
-          <a:p>
-            <a:pPr algn="l">
-              <a:spcAft>
-                <a:spcPts val="400"/>
-              </a:spcAft>
-            </a:pPr>
-            <a:r>
-              <a:rPr sz="1200" b="1">
-                <a:solidFill>
-                  <a:srgbClr val="DC2626"/>
-                </a:solidFill>
-                <a:latin typeface="PingFang TC"/>
-                <a:ea typeface="PingFang TC"/>
-              </a:rPr>
-              <a:t>寫</a:t>
-            </a:r>
-          </a:p>
-        </p:txBody>
-      </p:sp>
-      <p:sp>
-        <p:nvSpPr>
-          <p:cNvPr id="15" name="TextBox 14"/>
-          <p:cNvSpPr txBox="1"/>
-          <p:nvPr/>
-        </p:nvSpPr>
-        <p:spPr>
-          <a:xfrm>
-            <a:off x="7589520" y="3200400"/>
-            <a:ext cx="914400" cy="274320"/>
-          </a:xfrm>
-          <a:prstGeom prst="rect">
-            <a:avLst/>
-          </a:prstGeom>
-          <a:noFill/>
-        </p:spPr>
-        <p:txBody>
-          <a:bodyPr wrap="square" anchor="t">
-            <a:spAutoFit/>
-          </a:bodyPr>
-          <a:lstStyle/>
-          <a:p>
-            <a:pPr algn="l">
-              <a:spcAft>
-                <a:spcPts val="400"/>
-              </a:spcAft>
-            </a:pPr>
-            <a:r>
-              <a:rPr sz="1200" b="1">
-                <a:solidFill>
-                  <a:srgbClr val="059669"/>
-                </a:solidFill>
-                <a:latin typeface="PingFang TC"/>
-                <a:ea typeface="PingFang TC"/>
-              </a:rPr>
-              <a:t>讀</a:t>
-            </a:r>
-          </a:p>
-        </p:txBody>
-      </p:sp>
-      <p:cxnSp>
-        <p:nvCxnSpPr>
-          <p:cNvPr id="16" name="Connector 15"/>
-          <p:cNvCxnSpPr/>
-          <p:nvPr/>
-        </p:nvCxnSpPr>
-        <p:spPr>
-          <a:xfrm>
-            <a:off x="10104120" y="2468880"/>
-            <a:ext cx="0" cy="228600"/>
-          </a:xfrm>
-          <a:prstGeom prst="line">
-            <a:avLst/>
-          </a:prstGeom>
-          <a:ln w="13970">
-            <a:solidFill>
-              <a:srgbClr val="64748B"/>
-            </a:solidFill>
-            <a:tailEnd type="triangle" w="med" len="med"/>
-          </a:ln>
-        </p:spPr>
-        <p:style>
-          <a:lnRef idx="2">
-            <a:schemeClr val="accent1"/>
-          </a:lnRef>
-          <a:fillRef idx="0">
-            <a:schemeClr val="accent1"/>
-          </a:fillRef>
-          <a:effectRef idx="1">
-            <a:schemeClr val="accent1"/>
-          </a:effectRef>
-          <a:fontRef idx="minor">
-            <a:schemeClr val="tx1"/>
-          </a:fontRef>
-        </p:style>
-      </p:cxnSp>
-      <p:sp>
-        <p:nvSpPr>
-          <p:cNvPr id="17" name="TextBox 16"/>
-          <p:cNvSpPr txBox="1"/>
-          <p:nvPr/>
-        </p:nvSpPr>
-        <p:spPr>
-          <a:xfrm>
-            <a:off x="10241280" y="2395728"/>
-            <a:ext cx="1463040" cy="274320"/>
-          </a:xfrm>
-          <a:prstGeom prst="rect">
-            <a:avLst/>
-          </a:prstGeom>
-          <a:noFill/>
-        </p:spPr>
-        <p:txBody>
-          <a:bodyPr wrap="square" anchor="t">
-            <a:spAutoFit/>
-          </a:bodyPr>
-          <a:lstStyle/>
-          <a:p>
-            <a:pPr algn="l">
-              <a:spcAft>
-                <a:spcPts val="400"/>
-              </a:spcAft>
-            </a:pPr>
-            <a:r>
-              <a:rPr sz="1000" b="0">
-                <a:solidFill>
-                  <a:srgbClr val="64748B"/>
-                </a:solidFill>
-                <a:latin typeface="PingFang TC"/>
-                <a:ea typeface="PingFang TC"/>
-              </a:rPr>
-              <a:t>非同步複寫</a:t>
-            </a:r>
-          </a:p>
-        </p:txBody>
-      </p:sp>
-      <p:sp>
-        <p:nvSpPr>
-          <p:cNvPr id="18" name="TextBox 17"/>
-          <p:cNvSpPr txBox="1"/>
-          <p:nvPr/>
-        </p:nvSpPr>
-        <p:spPr>
-          <a:xfrm>
-            <a:off x="548640" y="5029200"/>
-            <a:ext cx="11247120" cy="1554480"/>
+            <a:off x="640080" y="1737360"/>
+            <a:ext cx="10789920" cy="4572000"/>
           </a:xfrm>
           <a:prstGeom prst="rect">
             <a:avLst/>
@@ -8792,52 +8545,120 @@
           <a:p>
             <a:pPr>
               <a:spcAft>
-                <a:spcPts val="600"/>
+                <a:spcPts val="900"/>
               </a:spcAft>
             </a:pPr>
             <a:r>
-              <a:rPr sz="1300" b="0">
+              <a:rPr sz="1500" b="0">
                 <a:solidFill>
                   <a:srgbClr val="0F172A"/>
                 </a:solidFill>
                 <a:latin typeface="PingFang TC"/>
                 <a:ea typeface="PingFang TC"/>
               </a:rPr>
-              <a:t>•  寫走 primary、讀走 replica（load-balanced）；讀不夠就加 replica 水平擴讀</a:t>
+              <a:t>•  App server stateless → 增加 instance 水平擴展（cache 外置 Redis）</a:t>
             </a:r>
           </a:p>
           <a:p>
             <a:pPr>
               <a:spcAft>
-                <a:spcPts val="600"/>
+                <a:spcPts val="900"/>
               </a:spcAft>
             </a:pPr>
             <a:r>
-              <a:rPr sz="1300" b="0">
+              <a:rPr sz="1500" b="0">
                 <a:solidFill>
                   <a:srgbClr val="0F172A"/>
                 </a:solidFill>
                 <a:latin typeface="PingFang TC"/>
                 <a:ea typeface="PingFang TC"/>
               </a:rPr>
-              <a:t>•  配合 Redis cache，真正打到 DB 的讀已先被擋掉一大半</a:t>
+              <a:t>•  DB：單 primary + 多 read replica（讀走副）+ primary 掛 failover 升主</a:t>
+            </a:r>
+          </a:p>
+          <a:p>
+            <a:pPr lvl="1">
+              <a:spcAft>
+                <a:spcPts val="900"/>
+              </a:spcAft>
+            </a:pPr>
+            <a:r>
+              <a:rPr sz="1400" b="0">
+                <a:solidFill>
+                  <a:srgbClr val="64748B"/>
+                </a:solidFill>
+                <a:latin typeface="PingFang TC"/>
+                <a:ea typeface="PingFang TC"/>
+              </a:rPr>
+              <a:t>–  複寫延遲：create 後暖 cache 緩解</a:t>
             </a:r>
           </a:p>
           <a:p>
             <a:pPr>
               <a:spcAft>
-                <a:spcPts val="600"/>
+                <a:spcPts val="900"/>
               </a:spcAft>
             </a:pPr>
             <a:r>
-              <a:rPr sz="1300" b="0">
+              <a:rPr sz="1500" b="0">
                 <a:solidFill>
                   <a:srgbClr val="0F172A"/>
                 </a:solidFill>
                 <a:latin typeface="PingFang TC"/>
                 <a:ea typeface="PingFang TC"/>
               </a:rPr>
-              <a:t>•  failover：primary 掛 → 升一台 read replica 為新 primary；複寫延遲靠 create 後暖 cache 緩解</a:t>
+              <a:t>•  分片：以 token hash 為鍵（均勻），列為未來選項（200GB 目前單機足夠）</a:t>
+            </a:r>
+          </a:p>
+          <a:p>
+            <a:pPr>
+              <a:spcAft>
+                <a:spcPts val="900"/>
+              </a:spcAft>
+            </a:pPr>
+            <a:r>
+              <a:rPr sz="1500" b="0">
+                <a:solidFill>
+                  <a:srgbClr val="0F172A"/>
+                </a:solidFill>
+                <a:latin typeface="PingFang TC"/>
+                <a:ea typeface="PingFang TC"/>
+              </a:rPr>
+              <a:t>•  QR 圖片：object store + CDN（靜態內容，目標 URL 改不需重生圖）</a:t>
+            </a:r>
+          </a:p>
+          <a:p>
+            <a:pPr>
+              <a:spcAft>
+                <a:spcPts val="900"/>
+              </a:spcAft>
+            </a:pPr>
+            <a:r>
+              <a:rPr sz="1500" b="0">
+                <a:solidFill>
+                  <a:srgbClr val="0F172A"/>
+                </a:solidFill>
+                <a:latin typeface="PingFang TC"/>
+                <a:ea typeface="PingFang TC"/>
+              </a:rPr>
+              <a:t>•  分析：佇列 → 獨立分析庫 + 預聚合每日計數表</a:t>
+            </a:r>
+          </a:p>
+          <a:p>
+            <a:pPr>
+              <a:spcAft>
+                <a:spcPts val="900"/>
+              </a:spcAft>
+            </a:pPr>
+            <a:r>
+              <a:rPr sz="1500" b="0">
+                <a:solidFill>
+                  <a:srgbClr val="0F172A"/>
+                </a:solidFill>
+                <a:latin typeface="PingFang TC"/>
+                <a:ea typeface="PingFang TC"/>
+              </a:rPr>
+              <a:t>•  清理 cron：清過期 / 通知後刪長期未點擊 / 物理清理超期軟刪 + invalidate cache</a:t>
             </a:r>
           </a:p>
         </p:txBody>
@@ -8939,7 +8760,7 @@
                 <a:latin typeface="PingFang TC"/>
                 <a:ea typeface="PingFang TC"/>
               </a:rPr>
-              <a:t>12 · IMPROVEMENTS</a:t>
+              <a:t>11b · READ REPLICA</a:t>
             </a:r>
           </a:p>
           <a:p>
@@ -8956,21 +8777,146 @@
                 <a:latin typeface="PingFang TC"/>
                 <a:ea typeface="PingFang TC"/>
               </a:rPr>
-              <a:t>對參考 repo 的關鍵改良</a:t>
-            </a:r>
-          </a:p>
-        </p:txBody>
-      </p:sp>
-      <p:sp>
-        <p:nvSpPr>
-          <p:cNvPr id="4" name="Rounded Rectangle 3"/>
+              <a:t>Read-heavy → 讀寫分離 + Read Replica</a:t>
+            </a:r>
+          </a:p>
+        </p:txBody>
+      </p:sp>
+      <p:sp>
+        <p:nvSpPr>
+          <p:cNvPr id="4" name="TextBox 3"/>
+          <p:cNvSpPr txBox="1"/>
+          <p:nvPr/>
+        </p:nvSpPr>
+        <p:spPr>
+          <a:xfrm>
+            <a:off x="548640" y="1645920"/>
+            <a:ext cx="5486400" cy="2926080"/>
+          </a:xfrm>
+          <a:prstGeom prst="rect">
+            <a:avLst/>
+          </a:prstGeom>
+          <a:noFill/>
+        </p:spPr>
+        <p:txBody>
+          <a:bodyPr wrap="square" anchor="t">
+            <a:spAutoFit/>
+          </a:bodyPr>
+          <a:lstStyle/>
+          <a:p>
+            <a:pPr algn="l">
+              <a:spcAft>
+                <a:spcPts val="800"/>
+              </a:spcAft>
+            </a:pPr>
+            <a:r>
+              <a:rPr sz="1500" b="0">
+                <a:solidFill>
+                  <a:srgbClr val="0F172A"/>
+                </a:solidFill>
+                <a:latin typeface="PingFang TC"/>
+                <a:ea typeface="PingFang TC"/>
+              </a:rPr>
+              <a:t>容量：1B × 200B = 200GB（單機放得下）</a:t>
+            </a:r>
+          </a:p>
+          <a:p>
+            <a:pPr algn="l">
+              <a:spcAft>
+                <a:spcPts val="400"/>
+              </a:spcAft>
+            </a:pPr>
+            <a:r>
+              <a:rPr sz="1500" b="0">
+                <a:solidFill>
+                  <a:srgbClr val="0F172A"/>
+                </a:solidFill>
+                <a:latin typeface="PingFang TC"/>
+                <a:ea typeface="PingFang TC"/>
+              </a:rPr>
+              <a:t>讀流量：1 億 users × 5/日 = 5 億 redirects/日</a:t>
+            </a:r>
+          </a:p>
+          <a:p>
+            <a:pPr algn="l">
+              <a:spcAft>
+                <a:spcPts val="800"/>
+              </a:spcAft>
+            </a:pPr>
+            <a:r>
+              <a:rPr sz="1600" b="1">
+                <a:solidFill>
+                  <a:srgbClr val="2563EB"/>
+                </a:solidFill>
+                <a:latin typeface="PingFang TC"/>
+                <a:ea typeface="PingFang TC"/>
+              </a:rPr>
+              <a:t>            5 億 ÷ 86,400s ≈ 5,787 redirects/秒</a:t>
+            </a:r>
+          </a:p>
+          <a:p>
+            <a:pPr algn="l">
+              <a:spcAft>
+                <a:spcPts val="1200"/>
+              </a:spcAft>
+            </a:pPr>
+            <a:r>
+              <a:rPr sz="1500" b="0">
+                <a:solidFill>
+                  <a:srgbClr val="0F172A"/>
+                </a:solidFill>
+                <a:latin typeface="PingFang TC"/>
+                <a:ea typeface="PingFang TC"/>
+              </a:rPr>
+              <a:t>讀寫比：≈ 100:1（讀 ≫ 寫）</a:t>
+            </a:r>
+          </a:p>
+          <a:p>
+            <a:pPr algn="l">
+              <a:spcAft>
+                <a:spcPts val="400"/>
+              </a:spcAft>
+            </a:pPr>
+            <a:r>
+              <a:rPr sz="1500" b="1">
+                <a:solidFill>
+                  <a:srgbClr val="0F172A"/>
+                </a:solidFill>
+                <a:latin typeface="PingFang TC"/>
+                <a:ea typeface="PingFang TC"/>
+              </a:rPr>
+              <a:t>→ 瓶頸是「讀吞吐」、不是容量</a:t>
+            </a:r>
+          </a:p>
+          <a:p>
+            <a:pPr algn="l">
+              <a:spcAft>
+                <a:spcPts val="400"/>
+              </a:spcAft>
+            </a:pPr>
+            <a:r>
+              <a:rPr sz="1600" b="1">
+                <a:solidFill>
+                  <a:srgbClr val="059669"/>
+                </a:solidFill>
+                <a:latin typeface="PingFang TC"/>
+                <a:ea typeface="PingFang TC"/>
+              </a:rPr>
+              <a:t>→ 讀寫分離 + 多個 read replica</a:t>
+            </a:r>
+          </a:p>
+        </p:txBody>
+      </p:sp>
+      <p:sp>
+        <p:nvSpPr>
+          <p:cNvPr id="5" name="Rounded Rectangle 4"/>
           <p:cNvSpPr/>
           <p:nvPr/>
         </p:nvSpPr>
         <p:spPr>
           <a:xfrm>
-            <a:off x="640080" y="1691640"/>
-            <a:ext cx="640080" cy="731520"/>
+            <a:off x="6126480" y="2286000"/>
+            <a:ext cx="1645920" cy="914400"/>
           </a:xfrm>
           <a:prstGeom prst="roundRect">
             <a:avLst/>
@@ -9005,38 +8951,51 @@
           <a:p>
             <a:pPr algn="ctr"/>
             <a:r>
-              <a:rPr sz="1800" b="1">
+              <a:rPr sz="1300" b="1">
                 <a:solidFill>
                   <a:srgbClr val="FFFFFF"/>
                 </a:solidFill>
                 <a:latin typeface="PingFang TC"/>
                 <a:ea typeface="PingFang TC"/>
               </a:rPr>
-              <a:t>①</a:t>
-            </a:r>
-          </a:p>
-        </p:txBody>
-      </p:sp>
-      <p:sp>
-        <p:nvSpPr>
-          <p:cNvPr id="5" name="Rounded Rectangle 4"/>
+              <a:t>App</a:t>
+            </a:r>
+          </a:p>
+          <a:p>
+            <a:pPr algn="ctr"/>
+            <a:r>
+              <a:rPr sz="1300" b="0">
+                <a:solidFill>
+                  <a:srgbClr val="FFFFFF"/>
+                </a:solidFill>
+                <a:latin typeface="PingFang TC"/>
+                <a:ea typeface="PingFang TC"/>
+              </a:rPr>
+              <a:t>(stateless)</a:t>
+            </a:r>
+          </a:p>
+        </p:txBody>
+      </p:sp>
+      <p:sp>
+        <p:nvSpPr>
+          <p:cNvPr id="6" name="Rounded Rectangle 5"/>
           <p:cNvSpPr/>
           <p:nvPr/>
         </p:nvSpPr>
         <p:spPr>
           <a:xfrm>
-            <a:off x="1417320" y="1691640"/>
-            <a:ext cx="10149840" cy="731520"/>
+            <a:off x="8595360" y="1737360"/>
+            <a:ext cx="3017520" cy="731520"/>
           </a:xfrm>
           <a:prstGeom prst="roundRect">
             <a:avLst/>
           </a:prstGeom>
           <a:solidFill>
-            <a:srgbClr val="F1F5F9"/>
+            <a:srgbClr val="059669"/>
           </a:solidFill>
           <a:ln>
             <a:solidFill>
-              <a:srgbClr val="F1F5F9"/>
+              <a:srgbClr val="059669"/>
             </a:solidFill>
           </a:ln>
           <a:effectLst/>
@@ -9056,23 +9015,345 @@
           </a:fontRef>
         </p:style>
         <p:txBody>
-          <a:bodyPr rtlCol="0" anchor="ctr"/>
+          <a:bodyPr rtlCol="0" anchor="ctr" wrap="square" tIns="25400" bIns="25400"/>
           <a:lstStyle/>
           <a:p>
             <a:pPr algn="ctr"/>
-          </a:p>
-        </p:txBody>
-      </p:sp>
-      <p:sp>
-        <p:nvSpPr>
-          <p:cNvPr id="6" name="TextBox 5"/>
+            <a:r>
+              <a:rPr sz="1300" b="1">
+                <a:solidFill>
+                  <a:srgbClr val="FFFFFF"/>
+                </a:solidFill>
+                <a:latin typeface="PingFang TC"/>
+                <a:ea typeface="PingFang TC"/>
+              </a:rPr>
+              <a:t>Primary (Write)</a:t>
+            </a:r>
+          </a:p>
+        </p:txBody>
+      </p:sp>
+      <p:sp>
+        <p:nvSpPr>
+          <p:cNvPr id="7" name="Rounded Rectangle 6"/>
+          <p:cNvSpPr/>
+          <p:nvPr/>
+        </p:nvSpPr>
+        <p:spPr>
+          <a:xfrm>
+            <a:off x="8595360" y="2697480"/>
+            <a:ext cx="3017520" cy="594360"/>
+          </a:xfrm>
+          <a:prstGeom prst="roundRect">
+            <a:avLst/>
+          </a:prstGeom>
+          <a:solidFill>
+            <a:srgbClr val="0EA5E9"/>
+          </a:solidFill>
+          <a:ln>
+            <a:solidFill>
+              <a:srgbClr val="0EA5E9"/>
+            </a:solidFill>
+          </a:ln>
+          <a:effectLst/>
+        </p:spPr>
+        <p:style>
+          <a:lnRef idx="1">
+            <a:schemeClr val="accent1"/>
+          </a:lnRef>
+          <a:fillRef idx="3">
+            <a:schemeClr val="accent1"/>
+          </a:fillRef>
+          <a:effectRef idx="2">
+            <a:schemeClr val="accent1"/>
+          </a:effectRef>
+          <a:fontRef idx="minor">
+            <a:schemeClr val="lt1"/>
+          </a:fontRef>
+        </p:style>
+        <p:txBody>
+          <a:bodyPr rtlCol="0" anchor="ctr" wrap="square" tIns="25400" bIns="25400"/>
+          <a:lstStyle/>
+          <a:p>
+            <a:pPr algn="ctr"/>
+            <a:r>
+              <a:rPr sz="1200" b="1">
+                <a:solidFill>
+                  <a:srgbClr val="FFFFFF"/>
+                </a:solidFill>
+                <a:latin typeface="PingFang TC"/>
+                <a:ea typeface="PingFang TC"/>
+              </a:rPr>
+              <a:t>Read Replica 1</a:t>
+            </a:r>
+          </a:p>
+        </p:txBody>
+      </p:sp>
+      <p:sp>
+        <p:nvSpPr>
+          <p:cNvPr id="8" name="Rounded Rectangle 7"/>
+          <p:cNvSpPr/>
+          <p:nvPr/>
+        </p:nvSpPr>
+        <p:spPr>
+          <a:xfrm>
+            <a:off x="8595360" y="3429000"/>
+            <a:ext cx="3017520" cy="594360"/>
+          </a:xfrm>
+          <a:prstGeom prst="roundRect">
+            <a:avLst/>
+          </a:prstGeom>
+          <a:solidFill>
+            <a:srgbClr val="0EA5E9"/>
+          </a:solidFill>
+          <a:ln>
+            <a:solidFill>
+              <a:srgbClr val="0EA5E9"/>
+            </a:solidFill>
+          </a:ln>
+          <a:effectLst/>
+        </p:spPr>
+        <p:style>
+          <a:lnRef idx="1">
+            <a:schemeClr val="accent1"/>
+          </a:lnRef>
+          <a:fillRef idx="3">
+            <a:schemeClr val="accent1"/>
+          </a:fillRef>
+          <a:effectRef idx="2">
+            <a:schemeClr val="accent1"/>
+          </a:effectRef>
+          <a:fontRef idx="minor">
+            <a:schemeClr val="lt1"/>
+          </a:fontRef>
+        </p:style>
+        <p:txBody>
+          <a:bodyPr rtlCol="0" anchor="ctr" wrap="square" tIns="25400" bIns="25400"/>
+          <a:lstStyle/>
+          <a:p>
+            <a:pPr algn="ctr"/>
+            <a:r>
+              <a:rPr sz="1200" b="1">
+                <a:solidFill>
+                  <a:srgbClr val="FFFFFF"/>
+                </a:solidFill>
+                <a:latin typeface="PingFang TC"/>
+                <a:ea typeface="PingFang TC"/>
+              </a:rPr>
+              <a:t>Read Replica 2</a:t>
+            </a:r>
+          </a:p>
+        </p:txBody>
+      </p:sp>
+      <p:sp>
+        <p:nvSpPr>
+          <p:cNvPr id="9" name="Rounded Rectangle 8"/>
+          <p:cNvSpPr/>
+          <p:nvPr/>
+        </p:nvSpPr>
+        <p:spPr>
+          <a:xfrm>
+            <a:off x="8595360" y="4160520"/>
+            <a:ext cx="3017520" cy="594360"/>
+          </a:xfrm>
+          <a:prstGeom prst="roundRect">
+            <a:avLst/>
+          </a:prstGeom>
+          <a:solidFill>
+            <a:srgbClr val="0EA5E9"/>
+          </a:solidFill>
+          <a:ln>
+            <a:solidFill>
+              <a:srgbClr val="0EA5E9"/>
+            </a:solidFill>
+          </a:ln>
+          <a:effectLst/>
+        </p:spPr>
+        <p:style>
+          <a:lnRef idx="1">
+            <a:schemeClr val="accent1"/>
+          </a:lnRef>
+          <a:fillRef idx="3">
+            <a:schemeClr val="accent1"/>
+          </a:fillRef>
+          <a:effectRef idx="2">
+            <a:schemeClr val="accent1"/>
+          </a:effectRef>
+          <a:fontRef idx="minor">
+            <a:schemeClr val="lt1"/>
+          </a:fontRef>
+        </p:style>
+        <p:txBody>
+          <a:bodyPr rtlCol="0" anchor="ctr" wrap="square" tIns="25400" bIns="25400"/>
+          <a:lstStyle/>
+          <a:p>
+            <a:pPr algn="ctr"/>
+            <a:r>
+              <a:rPr sz="1200" b="1">
+                <a:solidFill>
+                  <a:srgbClr val="FFFFFF"/>
+                </a:solidFill>
+                <a:latin typeface="PingFang TC"/>
+                <a:ea typeface="PingFang TC"/>
+              </a:rPr>
+              <a:t>Read Replica N</a:t>
+            </a:r>
+          </a:p>
+        </p:txBody>
+      </p:sp>
+      <p:cxnSp>
+        <p:nvCxnSpPr>
+          <p:cNvPr id="10" name="Connector 9"/>
+          <p:cNvCxnSpPr/>
+          <p:nvPr/>
+        </p:nvCxnSpPr>
+        <p:spPr>
+          <a:xfrm flipV="1">
+            <a:off x="7772400" y="2103120"/>
+            <a:ext cx="822960" cy="457200"/>
+          </a:xfrm>
+          <a:prstGeom prst="line">
+            <a:avLst/>
+          </a:prstGeom>
+          <a:ln w="20320">
+            <a:solidFill>
+              <a:srgbClr val="DC2626"/>
+            </a:solidFill>
+            <a:tailEnd type="triangle" w="med" len="med"/>
+          </a:ln>
+        </p:spPr>
+        <p:style>
+          <a:lnRef idx="2">
+            <a:schemeClr val="accent1"/>
+          </a:lnRef>
+          <a:fillRef idx="0">
+            <a:schemeClr val="accent1"/>
+          </a:fillRef>
+          <a:effectRef idx="1">
+            <a:schemeClr val="accent1"/>
+          </a:effectRef>
+          <a:fontRef idx="minor">
+            <a:schemeClr val="tx1"/>
+          </a:fontRef>
+        </p:style>
+      </p:cxnSp>
+      <p:cxnSp>
+        <p:nvCxnSpPr>
+          <p:cNvPr id="11" name="Connector 10"/>
+          <p:cNvCxnSpPr/>
+          <p:nvPr/>
+        </p:nvCxnSpPr>
+        <p:spPr>
+          <a:xfrm>
+            <a:off x="7772400" y="2880360"/>
+            <a:ext cx="822960" cy="109728"/>
+          </a:xfrm>
+          <a:prstGeom prst="line">
+            <a:avLst/>
+          </a:prstGeom>
+          <a:ln w="17780">
+            <a:solidFill>
+              <a:srgbClr val="059669"/>
+            </a:solidFill>
+            <a:tailEnd type="triangle" w="med" len="med"/>
+          </a:ln>
+        </p:spPr>
+        <p:style>
+          <a:lnRef idx="2">
+            <a:schemeClr val="accent1"/>
+          </a:lnRef>
+          <a:fillRef idx="0">
+            <a:schemeClr val="accent1"/>
+          </a:fillRef>
+          <a:effectRef idx="1">
+            <a:schemeClr val="accent1"/>
+          </a:effectRef>
+          <a:fontRef idx="minor">
+            <a:schemeClr val="tx1"/>
+          </a:fontRef>
+        </p:style>
+      </p:cxnSp>
+      <p:cxnSp>
+        <p:nvCxnSpPr>
+          <p:cNvPr id="12" name="Connector 11"/>
+          <p:cNvCxnSpPr/>
+          <p:nvPr/>
+        </p:nvCxnSpPr>
+        <p:spPr>
+          <a:xfrm>
+            <a:off x="7772400" y="3017520"/>
+            <a:ext cx="822960" cy="704088"/>
+          </a:xfrm>
+          <a:prstGeom prst="line">
+            <a:avLst/>
+          </a:prstGeom>
+          <a:ln w="17780">
+            <a:solidFill>
+              <a:srgbClr val="059669"/>
+            </a:solidFill>
+            <a:tailEnd type="triangle" w="med" len="med"/>
+          </a:ln>
+        </p:spPr>
+        <p:style>
+          <a:lnRef idx="2">
+            <a:schemeClr val="accent1"/>
+          </a:lnRef>
+          <a:fillRef idx="0">
+            <a:schemeClr val="accent1"/>
+          </a:fillRef>
+          <a:effectRef idx="1">
+            <a:schemeClr val="accent1"/>
+          </a:effectRef>
+          <a:fontRef idx="minor">
+            <a:schemeClr val="tx1"/>
+          </a:fontRef>
+        </p:style>
+      </p:cxnSp>
+      <p:cxnSp>
+        <p:nvCxnSpPr>
+          <p:cNvPr id="13" name="Connector 12"/>
+          <p:cNvCxnSpPr/>
+          <p:nvPr/>
+        </p:nvCxnSpPr>
+        <p:spPr>
+          <a:xfrm>
+            <a:off x="7772400" y="3108960"/>
+            <a:ext cx="822960" cy="1344168"/>
+          </a:xfrm>
+          <a:prstGeom prst="line">
+            <a:avLst/>
+          </a:prstGeom>
+          <a:ln w="17780">
+            <a:solidFill>
+              <a:srgbClr val="059669"/>
+            </a:solidFill>
+            <a:tailEnd type="triangle" w="med" len="med"/>
+          </a:ln>
+        </p:spPr>
+        <p:style>
+          <a:lnRef idx="2">
+            <a:schemeClr val="accent1"/>
+          </a:lnRef>
+          <a:fillRef idx="0">
+            <a:schemeClr val="accent1"/>
+          </a:fillRef>
+          <a:effectRef idx="1">
+            <a:schemeClr val="accent1"/>
+          </a:effectRef>
+          <a:fontRef idx="minor">
+            <a:schemeClr val="tx1"/>
+          </a:fontRef>
+        </p:style>
+      </p:cxnSp>
+      <p:sp>
+        <p:nvSpPr>
+          <p:cNvPr id="14" name="TextBox 13"/>
           <p:cNvSpPr txBox="1"/>
           <p:nvPr/>
         </p:nvSpPr>
         <p:spPr>
           <a:xfrm>
-            <a:off x="1645920" y="1764792"/>
-            <a:ext cx="9784080" cy="640080"/>
+            <a:off x="7635240" y="2057400"/>
+            <a:ext cx="914400" cy="274320"/>
           </a:xfrm>
           <a:prstGeom prst="rect">
             <a:avLst/>
@@ -9084,23 +9365,6 @@
             <a:spAutoFit/>
           </a:bodyPr>
           <a:lstStyle/>
-          <a:p>
-            <a:pPr algn="l">
-              <a:spcAft>
-                <a:spcPts val="200"/>
-              </a:spcAft>
-            </a:pPr>
-            <a:r>
-              <a:rPr sz="1500" b="1">
-                <a:solidFill>
-                  <a:srgbClr val="0F172A"/>
-                </a:solidFill>
-                <a:latin typeface="PingFang TC"/>
-                <a:ea typeface="PingFang TC"/>
-              </a:rPr>
-              <a:t>先查再插 → 直接插入 + UNIQUE 例外重試</a:t>
-            </a:r>
-          </a:p>
           <a:p>
             <a:pPr algn="l">
               <a:spcAft>
@@ -9108,130 +9372,28 @@
               </a:spcAft>
             </a:pPr>
             <a:r>
-              <a:rPr sz="1200" b="0">
-                <a:solidFill>
-                  <a:srgbClr val="64748B"/>
-                </a:solidFill>
-                <a:latin typeface="PingFang TC"/>
-                <a:ea typeface="PingFang TC"/>
-              </a:rPr>
-              <a:t>消除高並發 race</a:t>
-            </a:r>
-          </a:p>
-        </p:txBody>
-      </p:sp>
-      <p:sp>
-        <p:nvSpPr>
-          <p:cNvPr id="7" name="Rounded Rectangle 6"/>
-          <p:cNvSpPr/>
-          <p:nvPr/>
-        </p:nvSpPr>
-        <p:spPr>
-          <a:xfrm>
-            <a:off x="640080" y="2606040"/>
-            <a:ext cx="640080" cy="731520"/>
-          </a:xfrm>
-          <a:prstGeom prst="roundRect">
-            <a:avLst/>
-          </a:prstGeom>
-          <a:solidFill>
-            <a:srgbClr val="2563EB"/>
-          </a:solidFill>
-          <a:ln>
-            <a:solidFill>
-              <a:srgbClr val="2563EB"/>
-            </a:solidFill>
-          </a:ln>
-          <a:effectLst/>
-        </p:spPr>
-        <p:style>
-          <a:lnRef idx="1">
-            <a:schemeClr val="accent1"/>
-          </a:lnRef>
-          <a:fillRef idx="3">
-            <a:schemeClr val="accent1"/>
-          </a:fillRef>
-          <a:effectRef idx="2">
-            <a:schemeClr val="accent1"/>
-          </a:effectRef>
-          <a:fontRef idx="minor">
-            <a:schemeClr val="lt1"/>
-          </a:fontRef>
-        </p:style>
-        <p:txBody>
-          <a:bodyPr rtlCol="0" anchor="ctr" wrap="square" tIns="25400" bIns="25400"/>
-          <a:lstStyle/>
-          <a:p>
-            <a:pPr algn="ctr"/>
-            <a:r>
-              <a:rPr sz="1800" b="1">
-                <a:solidFill>
-                  <a:srgbClr val="FFFFFF"/>
-                </a:solidFill>
-                <a:latin typeface="PingFang TC"/>
-                <a:ea typeface="PingFang TC"/>
-              </a:rPr>
-              <a:t>②</a:t>
-            </a:r>
-          </a:p>
-        </p:txBody>
-      </p:sp>
-      <p:sp>
-        <p:nvSpPr>
-          <p:cNvPr id="8" name="Rounded Rectangle 7"/>
-          <p:cNvSpPr/>
-          <p:nvPr/>
-        </p:nvSpPr>
-        <p:spPr>
-          <a:xfrm>
-            <a:off x="1417320" y="2606040"/>
-            <a:ext cx="10149840" cy="731520"/>
-          </a:xfrm>
-          <a:prstGeom prst="roundRect">
-            <a:avLst/>
-          </a:prstGeom>
-          <a:solidFill>
-            <a:srgbClr val="F1F5F9"/>
-          </a:solidFill>
-          <a:ln>
-            <a:solidFill>
-              <a:srgbClr val="F1F5F9"/>
-            </a:solidFill>
-          </a:ln>
-          <a:effectLst/>
-        </p:spPr>
-        <p:style>
-          <a:lnRef idx="1">
-            <a:schemeClr val="accent1"/>
-          </a:lnRef>
-          <a:fillRef idx="3">
-            <a:schemeClr val="accent1"/>
-          </a:fillRef>
-          <a:effectRef idx="2">
-            <a:schemeClr val="accent1"/>
-          </a:effectRef>
-          <a:fontRef idx="minor">
-            <a:schemeClr val="lt1"/>
-          </a:fontRef>
-        </p:style>
-        <p:txBody>
-          <a:bodyPr rtlCol="0" anchor="ctr"/>
-          <a:lstStyle/>
-          <a:p>
-            <a:pPr algn="ctr"/>
-          </a:p>
-        </p:txBody>
-      </p:sp>
-      <p:sp>
-        <p:nvSpPr>
-          <p:cNvPr id="9" name="TextBox 8"/>
+              <a:rPr sz="1200" b="1">
+                <a:solidFill>
+                  <a:srgbClr val="DC2626"/>
+                </a:solidFill>
+                <a:latin typeface="PingFang TC"/>
+                <a:ea typeface="PingFang TC"/>
+              </a:rPr>
+              <a:t>寫</a:t>
+            </a:r>
+          </a:p>
+        </p:txBody>
+      </p:sp>
+      <p:sp>
+        <p:nvSpPr>
+          <p:cNvPr id="15" name="TextBox 14"/>
           <p:cNvSpPr txBox="1"/>
           <p:nvPr/>
         </p:nvSpPr>
         <p:spPr>
           <a:xfrm>
-            <a:off x="1645920" y="2679192"/>
-            <a:ext cx="9784080" cy="640080"/>
+            <a:off x="7589520" y="3200400"/>
+            <a:ext cx="914400" cy="274320"/>
           </a:xfrm>
           <a:prstGeom prst="rect">
             <a:avLst/>
@@ -9243,23 +9405,6 @@
             <a:spAutoFit/>
           </a:bodyPr>
           <a:lstStyle/>
-          <a:p>
-            <a:pPr algn="l">
-              <a:spcAft>
-                <a:spcPts val="200"/>
-              </a:spcAft>
-            </a:pPr>
-            <a:r>
-              <a:rPr sz="1500" b="1">
-                <a:solidFill>
-                  <a:srgbClr val="0F172A"/>
-                </a:solidFill>
-                <a:latin typeface="PingFang TC"/>
-                <a:ea typeface="PingFang TC"/>
-              </a:rPr>
-              <a:t>行程內 dict cache → Redis</a:t>
-            </a:r>
-          </a:p>
           <a:p>
             <a:pPr algn="l">
               <a:spcAft>
@@ -9267,130 +9412,64 @@
               </a:spcAft>
             </a:pPr>
             <a:r>
-              <a:rPr sz="1200" b="0">
-                <a:solidFill>
-                  <a:srgbClr val="64748B"/>
-                </a:solidFill>
-                <a:latin typeface="PingFang TC"/>
-                <a:ea typeface="PingFang TC"/>
-              </a:rPr>
-              <a:t>stateless 一致性（invalidation 全域生效）</a:t>
-            </a:r>
-          </a:p>
-        </p:txBody>
-      </p:sp>
-      <p:sp>
-        <p:nvSpPr>
-          <p:cNvPr id="10" name="Rounded Rectangle 9"/>
-          <p:cNvSpPr/>
-          <p:nvPr/>
-        </p:nvSpPr>
-        <p:spPr>
-          <a:xfrm>
-            <a:off x="640080" y="3520440"/>
-            <a:ext cx="640080" cy="731520"/>
-          </a:xfrm>
-          <a:prstGeom prst="roundRect">
-            <a:avLst/>
-          </a:prstGeom>
-          <a:solidFill>
-            <a:srgbClr val="2563EB"/>
-          </a:solidFill>
-          <a:ln>
+              <a:rPr sz="1200" b="1">
+                <a:solidFill>
+                  <a:srgbClr val="059669"/>
+                </a:solidFill>
+                <a:latin typeface="PingFang TC"/>
+                <a:ea typeface="PingFang TC"/>
+              </a:rPr>
+              <a:t>讀</a:t>
+            </a:r>
+          </a:p>
+        </p:txBody>
+      </p:sp>
+      <p:cxnSp>
+        <p:nvCxnSpPr>
+          <p:cNvPr id="16" name="Connector 15"/>
+          <p:cNvCxnSpPr/>
+          <p:nvPr/>
+        </p:nvCxnSpPr>
+        <p:spPr>
+          <a:xfrm>
+            <a:off x="10104120" y="2468880"/>
+            <a:ext cx="0" cy="228600"/>
+          </a:xfrm>
+          <a:prstGeom prst="line">
+            <a:avLst/>
+          </a:prstGeom>
+          <a:ln w="13970">
             <a:solidFill>
-              <a:srgbClr val="2563EB"/>
+              <a:srgbClr val="64748B"/>
             </a:solidFill>
+            <a:tailEnd type="triangle" w="med" len="med"/>
           </a:ln>
-          <a:effectLst/>
         </p:spPr>
         <p:style>
-          <a:lnRef idx="1">
+          <a:lnRef idx="2">
             <a:schemeClr val="accent1"/>
           </a:lnRef>
-          <a:fillRef idx="3">
+          <a:fillRef idx="0">
             <a:schemeClr val="accent1"/>
           </a:fillRef>
-          <a:effectRef idx="2">
+          <a:effectRef idx="1">
             <a:schemeClr val="accent1"/>
           </a:effectRef>
           <a:fontRef idx="minor">
-            <a:schemeClr val="lt1"/>
+            <a:schemeClr val="tx1"/>
           </a:fontRef>
         </p:style>
-        <p:txBody>
-          <a:bodyPr rtlCol="0" anchor="ctr" wrap="square" tIns="25400" bIns="25400"/>
-          <a:lstStyle/>
-          <a:p>
-            <a:pPr algn="ctr"/>
-            <a:r>
-              <a:rPr sz="1800" b="1">
-                <a:solidFill>
-                  <a:srgbClr val="FFFFFF"/>
-                </a:solidFill>
-                <a:latin typeface="PingFang TC"/>
-                <a:ea typeface="PingFang TC"/>
-              </a:rPr>
-              <a:t>③</a:t>
-            </a:r>
-          </a:p>
-        </p:txBody>
-      </p:sp>
-      <p:sp>
-        <p:nvSpPr>
-          <p:cNvPr id="11" name="Rounded Rectangle 10"/>
-          <p:cNvSpPr/>
-          <p:nvPr/>
-        </p:nvSpPr>
-        <p:spPr>
-          <a:xfrm>
-            <a:off x="1417320" y="3520440"/>
-            <a:ext cx="10149840" cy="731520"/>
-          </a:xfrm>
-          <a:prstGeom prst="roundRect">
-            <a:avLst/>
-          </a:prstGeom>
-          <a:solidFill>
-            <a:srgbClr val="F1F5F9"/>
-          </a:solidFill>
-          <a:ln>
-            <a:solidFill>
-              <a:srgbClr val="F1F5F9"/>
-            </a:solidFill>
-          </a:ln>
-          <a:effectLst/>
-        </p:spPr>
-        <p:style>
-          <a:lnRef idx="1">
-            <a:schemeClr val="accent1"/>
-          </a:lnRef>
-          <a:fillRef idx="3">
-            <a:schemeClr val="accent1"/>
-          </a:fillRef>
-          <a:effectRef idx="2">
-            <a:schemeClr val="accent1"/>
-          </a:effectRef>
-          <a:fontRef idx="minor">
-            <a:schemeClr val="lt1"/>
-          </a:fontRef>
-        </p:style>
-        <p:txBody>
-          <a:bodyPr rtlCol="0" anchor="ctr"/>
-          <a:lstStyle/>
-          <a:p>
-            <a:pPr algn="ctr"/>
-          </a:p>
-        </p:txBody>
-      </p:sp>
-      <p:sp>
-        <p:nvSpPr>
-          <p:cNvPr id="12" name="TextBox 11"/>
+      </p:cxnSp>
+      <p:sp>
+        <p:nvSpPr>
+          <p:cNvPr id="17" name="TextBox 16"/>
           <p:cNvSpPr txBox="1"/>
           <p:nvPr/>
         </p:nvSpPr>
         <p:spPr>
           <a:xfrm>
-            <a:off x="1645920" y="3593592"/>
-            <a:ext cx="9784080" cy="640080"/>
+            <a:off x="10241280" y="2395728"/>
+            <a:ext cx="1463040" cy="274320"/>
           </a:xfrm>
           <a:prstGeom prst="rect">
             <a:avLst/>
@@ -9402,23 +9481,6 @@
             <a:spAutoFit/>
           </a:bodyPr>
           <a:lstStyle/>
-          <a:p>
-            <a:pPr algn="l">
-              <a:spcAft>
-                <a:spcPts val="200"/>
-              </a:spcAft>
-            </a:pPr>
-            <a:r>
-              <a:rPr sz="1500" b="1">
-                <a:solidFill>
-                  <a:srgbClr val="0F172A"/>
-                </a:solidFill>
-                <a:latin typeface="PingFang TC"/>
-                <a:ea typeface="PingFang TC"/>
-              </a:rPr>
-              <a:t>同步寫 scan → 非同步</a:t>
-            </a:r>
-          </a:p>
           <a:p>
             <a:pPr algn="l">
               <a:spcAft>
@@ -9426,130 +9488,28 @@
               </a:spcAft>
             </a:pPr>
             <a:r>
-              <a:rPr sz="1200" b="0">
+              <a:rPr sz="1000" b="0">
                 <a:solidFill>
                   <a:srgbClr val="64748B"/>
                 </a:solidFill>
                 <a:latin typeface="PingFang TC"/>
                 <a:ea typeface="PingFang TC"/>
               </a:rPr>
-              <a:t>不擋 redirect 關鍵路徑</a:t>
-            </a:r>
-          </a:p>
-        </p:txBody>
-      </p:sp>
-      <p:sp>
-        <p:nvSpPr>
-          <p:cNvPr id="13" name="Rounded Rectangle 12"/>
-          <p:cNvSpPr/>
-          <p:nvPr/>
-        </p:nvSpPr>
-        <p:spPr>
-          <a:xfrm>
-            <a:off x="640080" y="4434840"/>
-            <a:ext cx="640080" cy="731520"/>
-          </a:xfrm>
-          <a:prstGeom prst="roundRect">
-            <a:avLst/>
-          </a:prstGeom>
-          <a:solidFill>
-            <a:srgbClr val="2563EB"/>
-          </a:solidFill>
-          <a:ln>
-            <a:solidFill>
-              <a:srgbClr val="2563EB"/>
-            </a:solidFill>
-          </a:ln>
-          <a:effectLst/>
-        </p:spPr>
-        <p:style>
-          <a:lnRef idx="1">
-            <a:schemeClr val="accent1"/>
-          </a:lnRef>
-          <a:fillRef idx="3">
-            <a:schemeClr val="accent1"/>
-          </a:fillRef>
-          <a:effectRef idx="2">
-            <a:schemeClr val="accent1"/>
-          </a:effectRef>
-          <a:fontRef idx="minor">
-            <a:schemeClr val="lt1"/>
-          </a:fontRef>
-        </p:style>
-        <p:txBody>
-          <a:bodyPr rtlCol="0" anchor="ctr" wrap="square" tIns="25400" bIns="25400"/>
-          <a:lstStyle/>
-          <a:p>
-            <a:pPr algn="ctr"/>
-            <a:r>
-              <a:rPr sz="1800" b="1">
-                <a:solidFill>
-                  <a:srgbClr val="FFFFFF"/>
-                </a:solidFill>
-                <a:latin typeface="PingFang TC"/>
-                <a:ea typeface="PingFang TC"/>
-              </a:rPr>
-              <a:t>④</a:t>
-            </a:r>
-          </a:p>
-        </p:txBody>
-      </p:sp>
-      <p:sp>
-        <p:nvSpPr>
-          <p:cNvPr id="14" name="Rounded Rectangle 13"/>
-          <p:cNvSpPr/>
-          <p:nvPr/>
-        </p:nvSpPr>
-        <p:spPr>
-          <a:xfrm>
-            <a:off x="1417320" y="4434840"/>
-            <a:ext cx="10149840" cy="731520"/>
-          </a:xfrm>
-          <a:prstGeom prst="roundRect">
-            <a:avLst/>
-          </a:prstGeom>
-          <a:solidFill>
-            <a:srgbClr val="F1F5F9"/>
-          </a:solidFill>
-          <a:ln>
-            <a:solidFill>
-              <a:srgbClr val="F1F5F9"/>
-            </a:solidFill>
-          </a:ln>
-          <a:effectLst/>
-        </p:spPr>
-        <p:style>
-          <a:lnRef idx="1">
-            <a:schemeClr val="accent1"/>
-          </a:lnRef>
-          <a:fillRef idx="3">
-            <a:schemeClr val="accent1"/>
-          </a:fillRef>
-          <a:effectRef idx="2">
-            <a:schemeClr val="accent1"/>
-          </a:effectRef>
-          <a:fontRef idx="minor">
-            <a:schemeClr val="lt1"/>
-          </a:fontRef>
-        </p:style>
-        <p:txBody>
-          <a:bodyPr rtlCol="0" anchor="ctr"/>
-          <a:lstStyle/>
-          <a:p>
-            <a:pPr algn="ctr"/>
-          </a:p>
-        </p:txBody>
-      </p:sp>
-      <p:sp>
-        <p:nvSpPr>
-          <p:cNvPr id="15" name="TextBox 14"/>
+              <a:t>非同步複寫</a:t>
+            </a:r>
+          </a:p>
+        </p:txBody>
+      </p:sp>
+      <p:sp>
+        <p:nvSpPr>
+          <p:cNvPr id="18" name="TextBox 17"/>
           <p:cNvSpPr txBox="1"/>
           <p:nvPr/>
         </p:nvSpPr>
         <p:spPr>
           <a:xfrm>
-            <a:off x="1645920" y="4507992"/>
-            <a:ext cx="9784080" cy="640080"/>
+            <a:off x="548640" y="5029200"/>
+            <a:ext cx="11247120" cy="1554480"/>
           </a:xfrm>
           <a:prstGeom prst="rect">
             <a:avLst/>
@@ -9557,201 +9517,59 @@
           <a:noFill/>
         </p:spPr>
         <p:txBody>
-          <a:bodyPr wrap="square" anchor="t">
+          <a:bodyPr wrap="square">
             <a:spAutoFit/>
           </a:bodyPr>
           <a:lstStyle/>
           <a:p>
-            <a:pPr algn="l">
+            <a:pPr>
               <a:spcAft>
-                <a:spcPts val="200"/>
+                <a:spcPts val="600"/>
               </a:spcAft>
             </a:pPr>
             <a:r>
-              <a:rPr sz="1500" b="1">
+              <a:rPr sz="1300" b="0">
                 <a:solidFill>
                   <a:srgbClr val="0F172A"/>
                 </a:solidFill>
                 <a:latin typeface="PingFang TC"/>
                 <a:ea typeface="PingFang TC"/>
               </a:rPr>
-              <a:t>整串小寫 → 保守正規化</a:t>
-            </a:r>
-          </a:p>
-          <a:p>
-            <a:pPr algn="l">
+              <a:t>•  寫走 primary、讀走 replica（load-balanced）；讀不夠就加 replica 水平擴讀</a:t>
+            </a:r>
+          </a:p>
+          <a:p>
+            <a:pPr>
               <a:spcAft>
-                <a:spcPts val="400"/>
+                <a:spcPts val="600"/>
               </a:spcAft>
             </a:pPr>
             <a:r>
-              <a:rPr sz="1200" b="0">
-                <a:solidFill>
-                  <a:srgbClr val="64748B"/>
-                </a:solidFill>
-                <a:latin typeface="PingFang TC"/>
-                <a:ea typeface="PingFang TC"/>
-              </a:rPr>
-              <a:t>避免破壞 path 大小寫 / 導向失效站</a:t>
-            </a:r>
-          </a:p>
-        </p:txBody>
-      </p:sp>
-      <p:sp>
-        <p:nvSpPr>
-          <p:cNvPr id="16" name="Rounded Rectangle 15"/>
-          <p:cNvSpPr/>
-          <p:nvPr/>
-        </p:nvSpPr>
-        <p:spPr>
-          <a:xfrm>
-            <a:off x="640080" y="5349240"/>
-            <a:ext cx="640080" cy="731520"/>
-          </a:xfrm>
-          <a:prstGeom prst="roundRect">
-            <a:avLst/>
-          </a:prstGeom>
-          <a:solidFill>
-            <a:srgbClr val="2563EB"/>
-          </a:solidFill>
-          <a:ln>
-            <a:solidFill>
-              <a:srgbClr val="2563EB"/>
-            </a:solidFill>
-          </a:ln>
-          <a:effectLst/>
-        </p:spPr>
-        <p:style>
-          <a:lnRef idx="1">
-            <a:schemeClr val="accent1"/>
-          </a:lnRef>
-          <a:fillRef idx="3">
-            <a:schemeClr val="accent1"/>
-          </a:fillRef>
-          <a:effectRef idx="2">
-            <a:schemeClr val="accent1"/>
-          </a:effectRef>
-          <a:fontRef idx="minor">
-            <a:schemeClr val="lt1"/>
-          </a:fontRef>
-        </p:style>
-        <p:txBody>
-          <a:bodyPr rtlCol="0" anchor="ctr" wrap="square" tIns="25400" bIns="25400"/>
-          <a:lstStyle/>
-          <a:p>
-            <a:pPr algn="ctr"/>
-            <a:r>
-              <a:rPr sz="1800" b="1">
-                <a:solidFill>
-                  <a:srgbClr val="FFFFFF"/>
-                </a:solidFill>
-                <a:latin typeface="PingFang TC"/>
-                <a:ea typeface="PingFang TC"/>
-              </a:rPr>
-              <a:t>＋</a:t>
-            </a:r>
-          </a:p>
-        </p:txBody>
-      </p:sp>
-      <p:sp>
-        <p:nvSpPr>
-          <p:cNvPr id="17" name="Rounded Rectangle 16"/>
-          <p:cNvSpPr/>
-          <p:nvPr/>
-        </p:nvSpPr>
-        <p:spPr>
-          <a:xfrm>
-            <a:off x="1417320" y="5349240"/>
-            <a:ext cx="10149840" cy="731520"/>
-          </a:xfrm>
-          <a:prstGeom prst="roundRect">
-            <a:avLst/>
-          </a:prstGeom>
-          <a:solidFill>
-            <a:srgbClr val="F1F5F9"/>
-          </a:solidFill>
-          <a:ln>
-            <a:solidFill>
-              <a:srgbClr val="F1F5F9"/>
-            </a:solidFill>
-          </a:ln>
-          <a:effectLst/>
-        </p:spPr>
-        <p:style>
-          <a:lnRef idx="1">
-            <a:schemeClr val="accent1"/>
-          </a:lnRef>
-          <a:fillRef idx="3">
-            <a:schemeClr val="accent1"/>
-          </a:fillRef>
-          <a:effectRef idx="2">
-            <a:schemeClr val="accent1"/>
-          </a:effectRef>
-          <a:fontRef idx="minor">
-            <a:schemeClr val="lt1"/>
-          </a:fontRef>
-        </p:style>
-        <p:txBody>
-          <a:bodyPr rtlCol="0" anchor="ctr"/>
-          <a:lstStyle/>
-          <a:p>
-            <a:pPr algn="ctr"/>
-          </a:p>
-        </p:txBody>
-      </p:sp>
-      <p:sp>
-        <p:nvSpPr>
-          <p:cNvPr id="18" name="TextBox 17"/>
-          <p:cNvSpPr txBox="1"/>
-          <p:nvPr/>
-        </p:nvSpPr>
-        <p:spPr>
-          <a:xfrm>
-            <a:off x="1645920" y="5422392"/>
-            <a:ext cx="9784080" cy="640080"/>
-          </a:xfrm>
-          <a:prstGeom prst="rect">
-            <a:avLst/>
-          </a:prstGeom>
-          <a:noFill/>
-        </p:spPr>
-        <p:txBody>
-          <a:bodyPr wrap="square" anchor="t">
-            <a:spAutoFit/>
-          </a:bodyPr>
-          <a:lstStyle/>
-          <a:p>
-            <a:pPr algn="l">
+              <a:rPr sz="1300" b="0">
+                <a:solidFill>
+                  <a:srgbClr val="0F172A"/>
+                </a:solidFill>
+                <a:latin typeface="PingFang TC"/>
+                <a:ea typeface="PingFang TC"/>
+              </a:rPr>
+              <a:t>•  配合 Redis cache，真正打到 DB 的讀已先被擋掉一大半</a:t>
+            </a:r>
+          </a:p>
+          <a:p>
+            <a:pPr>
               <a:spcAft>
-                <a:spcPts val="200"/>
+                <a:spcPts val="600"/>
               </a:spcAft>
             </a:pPr>
             <a:r>
-              <a:rPr sz="1500" b="1">
+              <a:rPr sz="1300" b="0">
                 <a:solidFill>
                   <a:srgbClr val="0F172A"/>
                 </a:solidFill>
                 <a:latin typeface="PingFang TC"/>
                 <a:ea typeface="PingFang TC"/>
               </a:rPr>
-              <a:t>token 7 碼 → 8 碼</a:t>
-            </a:r>
-          </a:p>
-          <a:p>
-            <a:pPr algn="l">
-              <a:spcAft>
-                <a:spcPts val="400"/>
-              </a:spcAft>
-            </a:pPr>
-            <a:r>
-              <a:rPr sz="1200" b="0">
-                <a:solidFill>
-                  <a:srgbClr val="64748B"/>
-                </a:solidFill>
-                <a:latin typeface="PingFang TC"/>
-                <a:ea typeface="PingFang TC"/>
-              </a:rPr>
-              <a:t>碰撞預期 ×1/62</a:t>
+              <a:t>•  failover：primary 掛 → 升一台 read replica 為新 primary；複寫延遲靠 create 後暖 cache 緩解</a:t>
             </a:r>
           </a:p>
         </p:txBody>
@@ -10480,6 +10298,920 @@
 </file>
 
 <file path=ppt/slides/slide20.xml><?xml version="1.0" encoding="utf-8"?>
+<p:sld xmlns:a="http://schemas.openxmlformats.org/drawingml/2006/main" xmlns:p="http://schemas.openxmlformats.org/presentationml/2006/main" xmlns:r="http://schemas.openxmlformats.org/officeDocument/2006/relationships">
+  <p:cSld>
+    <p:spTree>
+      <p:nvGrpSpPr>
+        <p:cNvPr id="1" name=""/>
+        <p:cNvGrpSpPr/>
+        <p:nvPr/>
+      </p:nvGrpSpPr>
+      <p:grpSpPr/>
+      <p:sp>
+        <p:nvSpPr>
+          <p:cNvPr id="2" name="Rectangle 1"/>
+          <p:cNvSpPr/>
+          <p:nvPr/>
+        </p:nvSpPr>
+        <p:spPr>
+          <a:xfrm>
+            <a:off x="0" y="0"/>
+            <a:ext cx="164592" cy="6858000"/>
+          </a:xfrm>
+          <a:prstGeom prst="rect">
+            <a:avLst/>
+          </a:prstGeom>
+          <a:solidFill>
+            <a:srgbClr val="2563EB"/>
+          </a:solidFill>
+          <a:ln>
+            <a:noFill/>
+          </a:ln>
+          <a:effectLst/>
+        </p:spPr>
+        <p:style>
+          <a:lnRef idx="1">
+            <a:schemeClr val="accent1"/>
+          </a:lnRef>
+          <a:fillRef idx="3">
+            <a:schemeClr val="accent1"/>
+          </a:fillRef>
+          <a:effectRef idx="2">
+            <a:schemeClr val="accent1"/>
+          </a:effectRef>
+          <a:fontRef idx="minor">
+            <a:schemeClr val="lt1"/>
+          </a:fontRef>
+        </p:style>
+        <p:txBody>
+          <a:bodyPr rtlCol="0" anchor="ctr"/>
+          <a:lstStyle/>
+          <a:p>
+            <a:pPr algn="ctr"/>
+          </a:p>
+        </p:txBody>
+      </p:sp>
+      <p:sp>
+        <p:nvSpPr>
+          <p:cNvPr id="3" name="TextBox 2"/>
+          <p:cNvSpPr txBox="1"/>
+          <p:nvPr/>
+        </p:nvSpPr>
+        <p:spPr>
+          <a:xfrm>
+            <a:off x="502920" y="320040"/>
+            <a:ext cx="10972800" cy="1005840"/>
+          </a:xfrm>
+          <a:prstGeom prst="rect">
+            <a:avLst/>
+          </a:prstGeom>
+          <a:noFill/>
+        </p:spPr>
+        <p:txBody>
+          <a:bodyPr wrap="square" anchor="t">
+            <a:spAutoFit/>
+          </a:bodyPr>
+          <a:lstStyle/>
+          <a:p>
+            <a:pPr algn="l">
+              <a:spcAft>
+                <a:spcPts val="200"/>
+              </a:spcAft>
+            </a:pPr>
+            <a:r>
+              <a:rPr sz="1300" b="1">
+                <a:solidFill>
+                  <a:srgbClr val="2563EB"/>
+                </a:solidFill>
+                <a:latin typeface="PingFang TC"/>
+                <a:ea typeface="PingFang TC"/>
+              </a:rPr>
+              <a:t>12 · IMPROVEMENTS</a:t>
+            </a:r>
+          </a:p>
+          <a:p>
+            <a:pPr algn="l">
+              <a:spcAft>
+                <a:spcPts val="400"/>
+              </a:spcAft>
+            </a:pPr>
+            <a:r>
+              <a:rPr sz="3000" b="1">
+                <a:solidFill>
+                  <a:srgbClr val="0F172A"/>
+                </a:solidFill>
+                <a:latin typeface="PingFang TC"/>
+                <a:ea typeface="PingFang TC"/>
+              </a:rPr>
+              <a:t>對參考 repo 的關鍵改良</a:t>
+            </a:r>
+          </a:p>
+        </p:txBody>
+      </p:sp>
+      <p:sp>
+        <p:nvSpPr>
+          <p:cNvPr id="4" name="Rounded Rectangle 3"/>
+          <p:cNvSpPr/>
+          <p:nvPr/>
+        </p:nvSpPr>
+        <p:spPr>
+          <a:xfrm>
+            <a:off x="640080" y="1691640"/>
+            <a:ext cx="640080" cy="731520"/>
+          </a:xfrm>
+          <a:prstGeom prst="roundRect">
+            <a:avLst/>
+          </a:prstGeom>
+          <a:solidFill>
+            <a:srgbClr val="2563EB"/>
+          </a:solidFill>
+          <a:ln>
+            <a:solidFill>
+              <a:srgbClr val="2563EB"/>
+            </a:solidFill>
+          </a:ln>
+          <a:effectLst/>
+        </p:spPr>
+        <p:style>
+          <a:lnRef idx="1">
+            <a:schemeClr val="accent1"/>
+          </a:lnRef>
+          <a:fillRef idx="3">
+            <a:schemeClr val="accent1"/>
+          </a:fillRef>
+          <a:effectRef idx="2">
+            <a:schemeClr val="accent1"/>
+          </a:effectRef>
+          <a:fontRef idx="minor">
+            <a:schemeClr val="lt1"/>
+          </a:fontRef>
+        </p:style>
+        <p:txBody>
+          <a:bodyPr rtlCol="0" anchor="ctr" wrap="square" tIns="25400" bIns="25400"/>
+          <a:lstStyle/>
+          <a:p>
+            <a:pPr algn="ctr"/>
+            <a:r>
+              <a:rPr sz="1800" b="1">
+                <a:solidFill>
+                  <a:srgbClr val="FFFFFF"/>
+                </a:solidFill>
+                <a:latin typeface="PingFang TC"/>
+                <a:ea typeface="PingFang TC"/>
+              </a:rPr>
+              <a:t>①</a:t>
+            </a:r>
+          </a:p>
+        </p:txBody>
+      </p:sp>
+      <p:sp>
+        <p:nvSpPr>
+          <p:cNvPr id="5" name="Rounded Rectangle 4"/>
+          <p:cNvSpPr/>
+          <p:nvPr/>
+        </p:nvSpPr>
+        <p:spPr>
+          <a:xfrm>
+            <a:off x="1417320" y="1691640"/>
+            <a:ext cx="10149840" cy="731520"/>
+          </a:xfrm>
+          <a:prstGeom prst="roundRect">
+            <a:avLst/>
+          </a:prstGeom>
+          <a:solidFill>
+            <a:srgbClr val="F1F5F9"/>
+          </a:solidFill>
+          <a:ln>
+            <a:solidFill>
+              <a:srgbClr val="F1F5F9"/>
+            </a:solidFill>
+          </a:ln>
+          <a:effectLst/>
+        </p:spPr>
+        <p:style>
+          <a:lnRef idx="1">
+            <a:schemeClr val="accent1"/>
+          </a:lnRef>
+          <a:fillRef idx="3">
+            <a:schemeClr val="accent1"/>
+          </a:fillRef>
+          <a:effectRef idx="2">
+            <a:schemeClr val="accent1"/>
+          </a:effectRef>
+          <a:fontRef idx="minor">
+            <a:schemeClr val="lt1"/>
+          </a:fontRef>
+        </p:style>
+        <p:txBody>
+          <a:bodyPr rtlCol="0" anchor="ctr"/>
+          <a:lstStyle/>
+          <a:p>
+            <a:pPr algn="ctr"/>
+          </a:p>
+        </p:txBody>
+      </p:sp>
+      <p:sp>
+        <p:nvSpPr>
+          <p:cNvPr id="6" name="TextBox 5"/>
+          <p:cNvSpPr txBox="1"/>
+          <p:nvPr/>
+        </p:nvSpPr>
+        <p:spPr>
+          <a:xfrm>
+            <a:off x="1645920" y="1764792"/>
+            <a:ext cx="9784080" cy="640080"/>
+          </a:xfrm>
+          <a:prstGeom prst="rect">
+            <a:avLst/>
+          </a:prstGeom>
+          <a:noFill/>
+        </p:spPr>
+        <p:txBody>
+          <a:bodyPr wrap="square" anchor="t">
+            <a:spAutoFit/>
+          </a:bodyPr>
+          <a:lstStyle/>
+          <a:p>
+            <a:pPr algn="l">
+              <a:spcAft>
+                <a:spcPts val="200"/>
+              </a:spcAft>
+            </a:pPr>
+            <a:r>
+              <a:rPr sz="1500" b="1">
+                <a:solidFill>
+                  <a:srgbClr val="0F172A"/>
+                </a:solidFill>
+                <a:latin typeface="PingFang TC"/>
+                <a:ea typeface="PingFang TC"/>
+              </a:rPr>
+              <a:t>先查再插 → 直接插入 + UNIQUE 例外重試</a:t>
+            </a:r>
+          </a:p>
+          <a:p>
+            <a:pPr algn="l">
+              <a:spcAft>
+                <a:spcPts val="400"/>
+              </a:spcAft>
+            </a:pPr>
+            <a:r>
+              <a:rPr sz="1200" b="0">
+                <a:solidFill>
+                  <a:srgbClr val="64748B"/>
+                </a:solidFill>
+                <a:latin typeface="PingFang TC"/>
+                <a:ea typeface="PingFang TC"/>
+              </a:rPr>
+              <a:t>消除高並發 race</a:t>
+            </a:r>
+          </a:p>
+        </p:txBody>
+      </p:sp>
+      <p:sp>
+        <p:nvSpPr>
+          <p:cNvPr id="7" name="Rounded Rectangle 6"/>
+          <p:cNvSpPr/>
+          <p:nvPr/>
+        </p:nvSpPr>
+        <p:spPr>
+          <a:xfrm>
+            <a:off x="640080" y="2606040"/>
+            <a:ext cx="640080" cy="731520"/>
+          </a:xfrm>
+          <a:prstGeom prst="roundRect">
+            <a:avLst/>
+          </a:prstGeom>
+          <a:solidFill>
+            <a:srgbClr val="2563EB"/>
+          </a:solidFill>
+          <a:ln>
+            <a:solidFill>
+              <a:srgbClr val="2563EB"/>
+            </a:solidFill>
+          </a:ln>
+          <a:effectLst/>
+        </p:spPr>
+        <p:style>
+          <a:lnRef idx="1">
+            <a:schemeClr val="accent1"/>
+          </a:lnRef>
+          <a:fillRef idx="3">
+            <a:schemeClr val="accent1"/>
+          </a:fillRef>
+          <a:effectRef idx="2">
+            <a:schemeClr val="accent1"/>
+          </a:effectRef>
+          <a:fontRef idx="minor">
+            <a:schemeClr val="lt1"/>
+          </a:fontRef>
+        </p:style>
+        <p:txBody>
+          <a:bodyPr rtlCol="0" anchor="ctr" wrap="square" tIns="25400" bIns="25400"/>
+          <a:lstStyle/>
+          <a:p>
+            <a:pPr algn="ctr"/>
+            <a:r>
+              <a:rPr sz="1800" b="1">
+                <a:solidFill>
+                  <a:srgbClr val="FFFFFF"/>
+                </a:solidFill>
+                <a:latin typeface="PingFang TC"/>
+                <a:ea typeface="PingFang TC"/>
+              </a:rPr>
+              <a:t>②</a:t>
+            </a:r>
+          </a:p>
+        </p:txBody>
+      </p:sp>
+      <p:sp>
+        <p:nvSpPr>
+          <p:cNvPr id="8" name="Rounded Rectangle 7"/>
+          <p:cNvSpPr/>
+          <p:nvPr/>
+        </p:nvSpPr>
+        <p:spPr>
+          <a:xfrm>
+            <a:off x="1417320" y="2606040"/>
+            <a:ext cx="10149840" cy="731520"/>
+          </a:xfrm>
+          <a:prstGeom prst="roundRect">
+            <a:avLst/>
+          </a:prstGeom>
+          <a:solidFill>
+            <a:srgbClr val="F1F5F9"/>
+          </a:solidFill>
+          <a:ln>
+            <a:solidFill>
+              <a:srgbClr val="F1F5F9"/>
+            </a:solidFill>
+          </a:ln>
+          <a:effectLst/>
+        </p:spPr>
+        <p:style>
+          <a:lnRef idx="1">
+            <a:schemeClr val="accent1"/>
+          </a:lnRef>
+          <a:fillRef idx="3">
+            <a:schemeClr val="accent1"/>
+          </a:fillRef>
+          <a:effectRef idx="2">
+            <a:schemeClr val="accent1"/>
+          </a:effectRef>
+          <a:fontRef idx="minor">
+            <a:schemeClr val="lt1"/>
+          </a:fontRef>
+        </p:style>
+        <p:txBody>
+          <a:bodyPr rtlCol="0" anchor="ctr"/>
+          <a:lstStyle/>
+          <a:p>
+            <a:pPr algn="ctr"/>
+          </a:p>
+        </p:txBody>
+      </p:sp>
+      <p:sp>
+        <p:nvSpPr>
+          <p:cNvPr id="9" name="TextBox 8"/>
+          <p:cNvSpPr txBox="1"/>
+          <p:nvPr/>
+        </p:nvSpPr>
+        <p:spPr>
+          <a:xfrm>
+            <a:off x="1645920" y="2679192"/>
+            <a:ext cx="9784080" cy="640080"/>
+          </a:xfrm>
+          <a:prstGeom prst="rect">
+            <a:avLst/>
+          </a:prstGeom>
+          <a:noFill/>
+        </p:spPr>
+        <p:txBody>
+          <a:bodyPr wrap="square" anchor="t">
+            <a:spAutoFit/>
+          </a:bodyPr>
+          <a:lstStyle/>
+          <a:p>
+            <a:pPr algn="l">
+              <a:spcAft>
+                <a:spcPts val="200"/>
+              </a:spcAft>
+            </a:pPr>
+            <a:r>
+              <a:rPr sz="1500" b="1">
+                <a:solidFill>
+                  <a:srgbClr val="0F172A"/>
+                </a:solidFill>
+                <a:latin typeface="PingFang TC"/>
+                <a:ea typeface="PingFang TC"/>
+              </a:rPr>
+              <a:t>行程內 dict cache → Redis</a:t>
+            </a:r>
+          </a:p>
+          <a:p>
+            <a:pPr algn="l">
+              <a:spcAft>
+                <a:spcPts val="400"/>
+              </a:spcAft>
+            </a:pPr>
+            <a:r>
+              <a:rPr sz="1200" b="0">
+                <a:solidFill>
+                  <a:srgbClr val="64748B"/>
+                </a:solidFill>
+                <a:latin typeface="PingFang TC"/>
+                <a:ea typeface="PingFang TC"/>
+              </a:rPr>
+              <a:t>stateless 一致性（invalidation 全域生效）</a:t>
+            </a:r>
+          </a:p>
+        </p:txBody>
+      </p:sp>
+      <p:sp>
+        <p:nvSpPr>
+          <p:cNvPr id="10" name="Rounded Rectangle 9"/>
+          <p:cNvSpPr/>
+          <p:nvPr/>
+        </p:nvSpPr>
+        <p:spPr>
+          <a:xfrm>
+            <a:off x="640080" y="3520440"/>
+            <a:ext cx="640080" cy="731520"/>
+          </a:xfrm>
+          <a:prstGeom prst="roundRect">
+            <a:avLst/>
+          </a:prstGeom>
+          <a:solidFill>
+            <a:srgbClr val="2563EB"/>
+          </a:solidFill>
+          <a:ln>
+            <a:solidFill>
+              <a:srgbClr val="2563EB"/>
+            </a:solidFill>
+          </a:ln>
+          <a:effectLst/>
+        </p:spPr>
+        <p:style>
+          <a:lnRef idx="1">
+            <a:schemeClr val="accent1"/>
+          </a:lnRef>
+          <a:fillRef idx="3">
+            <a:schemeClr val="accent1"/>
+          </a:fillRef>
+          <a:effectRef idx="2">
+            <a:schemeClr val="accent1"/>
+          </a:effectRef>
+          <a:fontRef idx="minor">
+            <a:schemeClr val="lt1"/>
+          </a:fontRef>
+        </p:style>
+        <p:txBody>
+          <a:bodyPr rtlCol="0" anchor="ctr" wrap="square" tIns="25400" bIns="25400"/>
+          <a:lstStyle/>
+          <a:p>
+            <a:pPr algn="ctr"/>
+            <a:r>
+              <a:rPr sz="1800" b="1">
+                <a:solidFill>
+                  <a:srgbClr val="FFFFFF"/>
+                </a:solidFill>
+                <a:latin typeface="PingFang TC"/>
+                <a:ea typeface="PingFang TC"/>
+              </a:rPr>
+              <a:t>③</a:t>
+            </a:r>
+          </a:p>
+        </p:txBody>
+      </p:sp>
+      <p:sp>
+        <p:nvSpPr>
+          <p:cNvPr id="11" name="Rounded Rectangle 10"/>
+          <p:cNvSpPr/>
+          <p:nvPr/>
+        </p:nvSpPr>
+        <p:spPr>
+          <a:xfrm>
+            <a:off x="1417320" y="3520440"/>
+            <a:ext cx="10149840" cy="731520"/>
+          </a:xfrm>
+          <a:prstGeom prst="roundRect">
+            <a:avLst/>
+          </a:prstGeom>
+          <a:solidFill>
+            <a:srgbClr val="F1F5F9"/>
+          </a:solidFill>
+          <a:ln>
+            <a:solidFill>
+              <a:srgbClr val="F1F5F9"/>
+            </a:solidFill>
+          </a:ln>
+          <a:effectLst/>
+        </p:spPr>
+        <p:style>
+          <a:lnRef idx="1">
+            <a:schemeClr val="accent1"/>
+          </a:lnRef>
+          <a:fillRef idx="3">
+            <a:schemeClr val="accent1"/>
+          </a:fillRef>
+          <a:effectRef idx="2">
+            <a:schemeClr val="accent1"/>
+          </a:effectRef>
+          <a:fontRef idx="minor">
+            <a:schemeClr val="lt1"/>
+          </a:fontRef>
+        </p:style>
+        <p:txBody>
+          <a:bodyPr rtlCol="0" anchor="ctr"/>
+          <a:lstStyle/>
+          <a:p>
+            <a:pPr algn="ctr"/>
+          </a:p>
+        </p:txBody>
+      </p:sp>
+      <p:sp>
+        <p:nvSpPr>
+          <p:cNvPr id="12" name="TextBox 11"/>
+          <p:cNvSpPr txBox="1"/>
+          <p:nvPr/>
+        </p:nvSpPr>
+        <p:spPr>
+          <a:xfrm>
+            <a:off x="1645920" y="3593592"/>
+            <a:ext cx="9784080" cy="640080"/>
+          </a:xfrm>
+          <a:prstGeom prst="rect">
+            <a:avLst/>
+          </a:prstGeom>
+          <a:noFill/>
+        </p:spPr>
+        <p:txBody>
+          <a:bodyPr wrap="square" anchor="t">
+            <a:spAutoFit/>
+          </a:bodyPr>
+          <a:lstStyle/>
+          <a:p>
+            <a:pPr algn="l">
+              <a:spcAft>
+                <a:spcPts val="200"/>
+              </a:spcAft>
+            </a:pPr>
+            <a:r>
+              <a:rPr sz="1500" b="1">
+                <a:solidFill>
+                  <a:srgbClr val="0F172A"/>
+                </a:solidFill>
+                <a:latin typeface="PingFang TC"/>
+                <a:ea typeface="PingFang TC"/>
+              </a:rPr>
+              <a:t>同步寫 scan → 非同步</a:t>
+            </a:r>
+          </a:p>
+          <a:p>
+            <a:pPr algn="l">
+              <a:spcAft>
+                <a:spcPts val="400"/>
+              </a:spcAft>
+            </a:pPr>
+            <a:r>
+              <a:rPr sz="1200" b="0">
+                <a:solidFill>
+                  <a:srgbClr val="64748B"/>
+                </a:solidFill>
+                <a:latin typeface="PingFang TC"/>
+                <a:ea typeface="PingFang TC"/>
+              </a:rPr>
+              <a:t>不擋 redirect 關鍵路徑</a:t>
+            </a:r>
+          </a:p>
+        </p:txBody>
+      </p:sp>
+      <p:sp>
+        <p:nvSpPr>
+          <p:cNvPr id="13" name="Rounded Rectangle 12"/>
+          <p:cNvSpPr/>
+          <p:nvPr/>
+        </p:nvSpPr>
+        <p:spPr>
+          <a:xfrm>
+            <a:off x="640080" y="4434840"/>
+            <a:ext cx="640080" cy="731520"/>
+          </a:xfrm>
+          <a:prstGeom prst="roundRect">
+            <a:avLst/>
+          </a:prstGeom>
+          <a:solidFill>
+            <a:srgbClr val="2563EB"/>
+          </a:solidFill>
+          <a:ln>
+            <a:solidFill>
+              <a:srgbClr val="2563EB"/>
+            </a:solidFill>
+          </a:ln>
+          <a:effectLst/>
+        </p:spPr>
+        <p:style>
+          <a:lnRef idx="1">
+            <a:schemeClr val="accent1"/>
+          </a:lnRef>
+          <a:fillRef idx="3">
+            <a:schemeClr val="accent1"/>
+          </a:fillRef>
+          <a:effectRef idx="2">
+            <a:schemeClr val="accent1"/>
+          </a:effectRef>
+          <a:fontRef idx="minor">
+            <a:schemeClr val="lt1"/>
+          </a:fontRef>
+        </p:style>
+        <p:txBody>
+          <a:bodyPr rtlCol="0" anchor="ctr" wrap="square" tIns="25400" bIns="25400"/>
+          <a:lstStyle/>
+          <a:p>
+            <a:pPr algn="ctr"/>
+            <a:r>
+              <a:rPr sz="1800" b="1">
+                <a:solidFill>
+                  <a:srgbClr val="FFFFFF"/>
+                </a:solidFill>
+                <a:latin typeface="PingFang TC"/>
+                <a:ea typeface="PingFang TC"/>
+              </a:rPr>
+              <a:t>④</a:t>
+            </a:r>
+          </a:p>
+        </p:txBody>
+      </p:sp>
+      <p:sp>
+        <p:nvSpPr>
+          <p:cNvPr id="14" name="Rounded Rectangle 13"/>
+          <p:cNvSpPr/>
+          <p:nvPr/>
+        </p:nvSpPr>
+        <p:spPr>
+          <a:xfrm>
+            <a:off x="1417320" y="4434840"/>
+            <a:ext cx="10149840" cy="731520"/>
+          </a:xfrm>
+          <a:prstGeom prst="roundRect">
+            <a:avLst/>
+          </a:prstGeom>
+          <a:solidFill>
+            <a:srgbClr val="F1F5F9"/>
+          </a:solidFill>
+          <a:ln>
+            <a:solidFill>
+              <a:srgbClr val="F1F5F9"/>
+            </a:solidFill>
+          </a:ln>
+          <a:effectLst/>
+        </p:spPr>
+        <p:style>
+          <a:lnRef idx="1">
+            <a:schemeClr val="accent1"/>
+          </a:lnRef>
+          <a:fillRef idx="3">
+            <a:schemeClr val="accent1"/>
+          </a:fillRef>
+          <a:effectRef idx="2">
+            <a:schemeClr val="accent1"/>
+          </a:effectRef>
+          <a:fontRef idx="minor">
+            <a:schemeClr val="lt1"/>
+          </a:fontRef>
+        </p:style>
+        <p:txBody>
+          <a:bodyPr rtlCol="0" anchor="ctr"/>
+          <a:lstStyle/>
+          <a:p>
+            <a:pPr algn="ctr"/>
+          </a:p>
+        </p:txBody>
+      </p:sp>
+      <p:sp>
+        <p:nvSpPr>
+          <p:cNvPr id="15" name="TextBox 14"/>
+          <p:cNvSpPr txBox="1"/>
+          <p:nvPr/>
+        </p:nvSpPr>
+        <p:spPr>
+          <a:xfrm>
+            <a:off x="1645920" y="4507992"/>
+            <a:ext cx="9784080" cy="640080"/>
+          </a:xfrm>
+          <a:prstGeom prst="rect">
+            <a:avLst/>
+          </a:prstGeom>
+          <a:noFill/>
+        </p:spPr>
+        <p:txBody>
+          <a:bodyPr wrap="square" anchor="t">
+            <a:spAutoFit/>
+          </a:bodyPr>
+          <a:lstStyle/>
+          <a:p>
+            <a:pPr algn="l">
+              <a:spcAft>
+                <a:spcPts val="200"/>
+              </a:spcAft>
+            </a:pPr>
+            <a:r>
+              <a:rPr sz="1500" b="1">
+                <a:solidFill>
+                  <a:srgbClr val="0F172A"/>
+                </a:solidFill>
+                <a:latin typeface="PingFang TC"/>
+                <a:ea typeface="PingFang TC"/>
+              </a:rPr>
+              <a:t>整串小寫 → 保守正規化</a:t>
+            </a:r>
+          </a:p>
+          <a:p>
+            <a:pPr algn="l">
+              <a:spcAft>
+                <a:spcPts val="400"/>
+              </a:spcAft>
+            </a:pPr>
+            <a:r>
+              <a:rPr sz="1200" b="0">
+                <a:solidFill>
+                  <a:srgbClr val="64748B"/>
+                </a:solidFill>
+                <a:latin typeface="PingFang TC"/>
+                <a:ea typeface="PingFang TC"/>
+              </a:rPr>
+              <a:t>避免破壞 path 大小寫 / 導向失效站</a:t>
+            </a:r>
+          </a:p>
+        </p:txBody>
+      </p:sp>
+      <p:sp>
+        <p:nvSpPr>
+          <p:cNvPr id="16" name="Rounded Rectangle 15"/>
+          <p:cNvSpPr/>
+          <p:nvPr/>
+        </p:nvSpPr>
+        <p:spPr>
+          <a:xfrm>
+            <a:off x="640080" y="5349240"/>
+            <a:ext cx="640080" cy="731520"/>
+          </a:xfrm>
+          <a:prstGeom prst="roundRect">
+            <a:avLst/>
+          </a:prstGeom>
+          <a:solidFill>
+            <a:srgbClr val="2563EB"/>
+          </a:solidFill>
+          <a:ln>
+            <a:solidFill>
+              <a:srgbClr val="2563EB"/>
+            </a:solidFill>
+          </a:ln>
+          <a:effectLst/>
+        </p:spPr>
+        <p:style>
+          <a:lnRef idx="1">
+            <a:schemeClr val="accent1"/>
+          </a:lnRef>
+          <a:fillRef idx="3">
+            <a:schemeClr val="accent1"/>
+          </a:fillRef>
+          <a:effectRef idx="2">
+            <a:schemeClr val="accent1"/>
+          </a:effectRef>
+          <a:fontRef idx="minor">
+            <a:schemeClr val="lt1"/>
+          </a:fontRef>
+        </p:style>
+        <p:txBody>
+          <a:bodyPr rtlCol="0" anchor="ctr" wrap="square" tIns="25400" bIns="25400"/>
+          <a:lstStyle/>
+          <a:p>
+            <a:pPr algn="ctr"/>
+            <a:r>
+              <a:rPr sz="1800" b="1">
+                <a:solidFill>
+                  <a:srgbClr val="FFFFFF"/>
+                </a:solidFill>
+                <a:latin typeface="PingFang TC"/>
+                <a:ea typeface="PingFang TC"/>
+              </a:rPr>
+              <a:t>＋</a:t>
+            </a:r>
+          </a:p>
+        </p:txBody>
+      </p:sp>
+      <p:sp>
+        <p:nvSpPr>
+          <p:cNvPr id="17" name="Rounded Rectangle 16"/>
+          <p:cNvSpPr/>
+          <p:nvPr/>
+        </p:nvSpPr>
+        <p:spPr>
+          <a:xfrm>
+            <a:off x="1417320" y="5349240"/>
+            <a:ext cx="10149840" cy="731520"/>
+          </a:xfrm>
+          <a:prstGeom prst="roundRect">
+            <a:avLst/>
+          </a:prstGeom>
+          <a:solidFill>
+            <a:srgbClr val="F1F5F9"/>
+          </a:solidFill>
+          <a:ln>
+            <a:solidFill>
+              <a:srgbClr val="F1F5F9"/>
+            </a:solidFill>
+          </a:ln>
+          <a:effectLst/>
+        </p:spPr>
+        <p:style>
+          <a:lnRef idx="1">
+            <a:schemeClr val="accent1"/>
+          </a:lnRef>
+          <a:fillRef idx="3">
+            <a:schemeClr val="accent1"/>
+          </a:fillRef>
+          <a:effectRef idx="2">
+            <a:schemeClr val="accent1"/>
+          </a:effectRef>
+          <a:fontRef idx="minor">
+            <a:schemeClr val="lt1"/>
+          </a:fontRef>
+        </p:style>
+        <p:txBody>
+          <a:bodyPr rtlCol="0" anchor="ctr"/>
+          <a:lstStyle/>
+          <a:p>
+            <a:pPr algn="ctr"/>
+          </a:p>
+        </p:txBody>
+      </p:sp>
+      <p:sp>
+        <p:nvSpPr>
+          <p:cNvPr id="18" name="TextBox 17"/>
+          <p:cNvSpPr txBox="1"/>
+          <p:nvPr/>
+        </p:nvSpPr>
+        <p:spPr>
+          <a:xfrm>
+            <a:off x="1645920" y="5422392"/>
+            <a:ext cx="9784080" cy="640080"/>
+          </a:xfrm>
+          <a:prstGeom prst="rect">
+            <a:avLst/>
+          </a:prstGeom>
+          <a:noFill/>
+        </p:spPr>
+        <p:txBody>
+          <a:bodyPr wrap="square" anchor="t">
+            <a:spAutoFit/>
+          </a:bodyPr>
+          <a:lstStyle/>
+          <a:p>
+            <a:pPr algn="l">
+              <a:spcAft>
+                <a:spcPts val="200"/>
+              </a:spcAft>
+            </a:pPr>
+            <a:r>
+              <a:rPr sz="1500" b="1">
+                <a:solidFill>
+                  <a:srgbClr val="0F172A"/>
+                </a:solidFill>
+                <a:latin typeface="PingFang TC"/>
+                <a:ea typeface="PingFang TC"/>
+              </a:rPr>
+              <a:t>token 7 碼 → 8 碼</a:t>
+            </a:r>
+          </a:p>
+          <a:p>
+            <a:pPr algn="l">
+              <a:spcAft>
+                <a:spcPts val="400"/>
+              </a:spcAft>
+            </a:pPr>
+            <a:r>
+              <a:rPr sz="1200" b="0">
+                <a:solidFill>
+                  <a:srgbClr val="64748B"/>
+                </a:solidFill>
+                <a:latin typeface="PingFang TC"/>
+                <a:ea typeface="PingFang TC"/>
+              </a:rPr>
+              <a:t>碰撞預期 ×1/62</a:t>
+            </a:r>
+          </a:p>
+        </p:txBody>
+      </p:sp>
+    </p:spTree>
+  </p:cSld>
+  <p:clrMapOvr>
+    <a:masterClrMapping/>
+  </p:clrMapOvr>
+</p:sld>
+</file>
+
+<file path=ppt/slides/slide21.xml><?xml version="1.0" encoding="utf-8"?>
 <p:sld xmlns:a="http://schemas.openxmlformats.org/drawingml/2006/main" xmlns:p="http://schemas.openxmlformats.org/presentationml/2006/main" xmlns:r="http://schemas.openxmlformats.org/officeDocument/2006/relationships">
   <p:cSld>
     <p:spTree>
@@ -11411,7 +12143,7 @@
 </p:sld>
 </file>
 
-<file path=ppt/slides/slide21.xml><?xml version="1.0" encoding="utf-8"?>
+<file path=ppt/slides/slide22.xml><?xml version="1.0" encoding="utf-8"?>
 <p:sld xmlns:a="http://schemas.openxmlformats.org/drawingml/2006/main" xmlns:p="http://schemas.openxmlformats.org/presentationml/2006/main" xmlns:r="http://schemas.openxmlformats.org/officeDocument/2006/relationships">
   <p:cSld>
     <p:spTree>
@@ -12335,7 +13067,7 @@
 </p:sld>
 </file>
 
-<file path=ppt/slides/slide22.xml><?xml version="1.0" encoding="utf-8"?>
+<file path=ppt/slides/slide23.xml><?xml version="1.0" encoding="utf-8"?>
 <p:sld xmlns:a="http://schemas.openxmlformats.org/drawingml/2006/main" xmlns:p="http://schemas.openxmlformats.org/presentationml/2006/main" xmlns:r="http://schemas.openxmlformats.org/officeDocument/2006/relationships">
   <p:cSld>
     <p:spTree>
@@ -13058,7 +13790,7 @@
 </p:sld>
 </file>
 
-<file path=ppt/slides/slide23.xml><?xml version="1.0" encoding="utf-8"?>
+<file path=ppt/slides/slide24.xml><?xml version="1.0" encoding="utf-8"?>
 <p:sld xmlns:a="http://schemas.openxmlformats.org/drawingml/2006/main" xmlns:p="http://schemas.openxmlformats.org/presentationml/2006/main" xmlns:r="http://schemas.openxmlformats.org/officeDocument/2006/relationships">
   <p:cSld>
     <p:spTree>
@@ -14144,7 +14876,7 @@
 </p:sld>
 </file>
 
-<file path=ppt/slides/slide24.xml><?xml version="1.0" encoding="utf-8"?>
+<file path=ppt/slides/slide25.xml><?xml version="1.0" encoding="utf-8"?>
 <p:sld xmlns:a="http://schemas.openxmlformats.org/drawingml/2006/main" xmlns:p="http://schemas.openxmlformats.org/presentationml/2006/main" xmlns:r="http://schemas.openxmlformats.org/officeDocument/2006/relationships">
   <p:cSld>
     <p:spTree>
@@ -15191,7 +15923,7 @@
 </p:sld>
 </file>
 
-<file path=ppt/slides/slide25.xml><?xml version="1.0" encoding="utf-8"?>
+<file path=ppt/slides/slide26.xml><?xml version="1.0" encoding="utf-8"?>
 <p:sld xmlns:a="http://schemas.openxmlformats.org/drawingml/2006/main" xmlns:p="http://schemas.openxmlformats.org/presentationml/2006/main" xmlns:r="http://schemas.openxmlformats.org/officeDocument/2006/relationships">
   <p:cSld>
     <p:spTree>
@@ -16008,7 +16740,7 @@
 </p:sld>
 </file>
 
-<file path=ppt/slides/slide26.xml><?xml version="1.0" encoding="utf-8"?>
+<file path=ppt/slides/slide27.xml><?xml version="1.0" encoding="utf-8"?>
 <p:sld xmlns:a="http://schemas.openxmlformats.org/drawingml/2006/main" xmlns:p="http://schemas.openxmlformats.org/presentationml/2006/main" xmlns:r="http://schemas.openxmlformats.org/officeDocument/2006/relationships">
   <p:cSld>
     <p:spTree>
@@ -16774,7 +17506,7 @@
 </p:sld>
 </file>
 
-<file path=ppt/slides/slide27.xml><?xml version="1.0" encoding="utf-8"?>
+<file path=ppt/slides/slide28.xml><?xml version="1.0" encoding="utf-8"?>
 <p:sld xmlns:a="http://schemas.openxmlformats.org/drawingml/2006/main" xmlns:p="http://schemas.openxmlformats.org/presentationml/2006/main" xmlns:r="http://schemas.openxmlformats.org/officeDocument/2006/relationships">
   <p:cSld>
     <p:spTree>
@@ -17526,7 +18258,7 @@
 </p:sld>
 </file>
 
-<file path=ppt/slides/slide28.xml><?xml version="1.0" encoding="utf-8"?>
+<file path=ppt/slides/slide29.xml><?xml version="1.0" encoding="utf-8"?>
 <p:sld xmlns:a="http://schemas.openxmlformats.org/drawingml/2006/main" xmlns:p="http://schemas.openxmlformats.org/presentationml/2006/main" xmlns:r="http://schemas.openxmlformats.org/officeDocument/2006/relationships">
   <p:cSld>
     <p:spTree>
@@ -17973,976 +18705,6 @@
                 <a:ea typeface="PingFang TC"/>
               </a:rPr>
               <a:t>•  本機驗證:422/413/500(含 X-Request-ID)+ REDIS_URL 不可達時 redirect 仍 302。純 app,不動 infra</a:t>
-            </a:r>
-          </a:p>
-        </p:txBody>
-      </p:sp>
-    </p:spTree>
-  </p:cSld>
-  <p:clrMapOvr>
-    <a:masterClrMapping/>
-  </p:clrMapOvr>
-</p:sld>
-</file>
-
-<file path=ppt/slides/slide29.xml><?xml version="1.0" encoding="utf-8"?>
-<p:sld xmlns:a="http://schemas.openxmlformats.org/drawingml/2006/main" xmlns:p="http://schemas.openxmlformats.org/presentationml/2006/main" xmlns:r="http://schemas.openxmlformats.org/officeDocument/2006/relationships">
-  <p:cSld>
-    <p:spTree>
-      <p:nvGrpSpPr>
-        <p:cNvPr id="1" name=""/>
-        <p:cNvGrpSpPr/>
-        <p:nvPr/>
-      </p:nvGrpSpPr>
-      <p:grpSpPr/>
-      <p:sp>
-        <p:nvSpPr>
-          <p:cNvPr id="2" name="Rectangle 1"/>
-          <p:cNvSpPr/>
-          <p:nvPr/>
-        </p:nvSpPr>
-        <p:spPr>
-          <a:xfrm>
-            <a:off x="0" y="0"/>
-            <a:ext cx="164592" cy="6858000"/>
-          </a:xfrm>
-          <a:prstGeom prst="rect">
-            <a:avLst/>
-          </a:prstGeom>
-          <a:solidFill>
-            <a:srgbClr val="2563EB"/>
-          </a:solidFill>
-          <a:ln>
-            <a:noFill/>
-          </a:ln>
-          <a:effectLst/>
-        </p:spPr>
-        <p:style>
-          <a:lnRef idx="1">
-            <a:schemeClr val="accent1"/>
-          </a:lnRef>
-          <a:fillRef idx="3">
-            <a:schemeClr val="accent1"/>
-          </a:fillRef>
-          <a:effectRef idx="2">
-            <a:schemeClr val="accent1"/>
-          </a:effectRef>
-          <a:fontRef idx="minor">
-            <a:schemeClr val="lt1"/>
-          </a:fontRef>
-        </p:style>
-        <p:txBody>
-          <a:bodyPr rtlCol="0" anchor="ctr"/>
-          <a:lstStyle/>
-          <a:p>
-            <a:pPr algn="ctr"/>
-          </a:p>
-        </p:txBody>
-      </p:sp>
-      <p:sp>
-        <p:nvSpPr>
-          <p:cNvPr id="3" name="TextBox 2"/>
-          <p:cNvSpPr txBox="1"/>
-          <p:nvPr/>
-        </p:nvSpPr>
-        <p:spPr>
-          <a:xfrm>
-            <a:off x="502920" y="320040"/>
-            <a:ext cx="10972800" cy="1005840"/>
-          </a:xfrm>
-          <a:prstGeom prst="rect">
-            <a:avLst/>
-          </a:prstGeom>
-          <a:noFill/>
-        </p:spPr>
-        <p:txBody>
-          <a:bodyPr wrap="square" anchor="t">
-            <a:spAutoFit/>
-          </a:bodyPr>
-          <a:lstStyle/>
-          <a:p>
-            <a:pPr algn="l">
-              <a:spcAft>
-                <a:spcPts val="200"/>
-              </a:spcAft>
-            </a:pPr>
-            <a:r>
-              <a:rPr sz="1300" b="1">
-                <a:solidFill>
-                  <a:srgbClr val="2563EB"/>
-                </a:solidFill>
-                <a:latin typeface="PingFang TC"/>
-                <a:ea typeface="PingFang TC"/>
-              </a:rPr>
-              <a:t>部署 · CI/CD</a:t>
-            </a:r>
-          </a:p>
-          <a:p>
-            <a:pPr algn="l">
-              <a:spcAft>
-                <a:spcPts val="400"/>
-              </a:spcAft>
-            </a:pPr>
-            <a:r>
-              <a:rPr sz="3000" b="1">
-                <a:solidFill>
-                  <a:srgbClr val="0F172A"/>
-                </a:solidFill>
-                <a:latin typeface="PingFang TC"/>
-                <a:ea typeface="PingFang TC"/>
-              </a:rPr>
-              <a:t>CI/CD 流程（GitHub Actions + OIDC）</a:t>
-            </a:r>
-          </a:p>
-        </p:txBody>
-      </p:sp>
-      <p:sp>
-        <p:nvSpPr>
-          <p:cNvPr id="4" name="Rounded Rectangle 3"/>
-          <p:cNvSpPr/>
-          <p:nvPr/>
-        </p:nvSpPr>
-        <p:spPr>
-          <a:xfrm>
-            <a:off x="457200" y="2286000"/>
-            <a:ext cx="1481328" cy="1280160"/>
-          </a:xfrm>
-          <a:prstGeom prst="roundRect">
-            <a:avLst/>
-          </a:prstGeom>
-          <a:solidFill>
-            <a:srgbClr val="64748B"/>
-          </a:solidFill>
-          <a:ln>
-            <a:solidFill>
-              <a:srgbClr val="64748B"/>
-            </a:solidFill>
-          </a:ln>
-          <a:effectLst/>
-        </p:spPr>
-        <p:style>
-          <a:lnRef idx="1">
-            <a:schemeClr val="accent1"/>
-          </a:lnRef>
-          <a:fillRef idx="3">
-            <a:schemeClr val="accent1"/>
-          </a:fillRef>
-          <a:effectRef idx="2">
-            <a:schemeClr val="accent1"/>
-          </a:effectRef>
-          <a:fontRef idx="minor">
-            <a:schemeClr val="lt1"/>
-          </a:fontRef>
-        </p:style>
-        <p:txBody>
-          <a:bodyPr rtlCol="0" anchor="ctr" wrap="square" tIns="25400" bIns="25400"/>
-          <a:lstStyle/>
-          <a:p>
-            <a:pPr algn="ctr"/>
-            <a:r>
-              <a:rPr sz="1100" b="1">
-                <a:solidFill>
-                  <a:srgbClr val="FFFFFF"/>
-                </a:solidFill>
-                <a:latin typeface="PingFang TC"/>
-                <a:ea typeface="PingFang TC"/>
-              </a:rPr>
-              <a:t>git push</a:t>
-            </a:r>
-          </a:p>
-          <a:p>
-            <a:pPr algn="ctr"/>
-            <a:r>
-              <a:rPr sz="1100" b="0">
-                <a:solidFill>
-                  <a:srgbClr val="FFFFFF"/>
-                </a:solidFill>
-                <a:latin typeface="PingFang TC"/>
-                <a:ea typeface="PingFang TC"/>
-              </a:rPr>
-              <a:t>QR Code Generator/**</a:t>
-            </a:r>
-          </a:p>
-        </p:txBody>
-      </p:sp>
-      <p:cxnSp>
-        <p:nvCxnSpPr>
-          <p:cNvPr id="5" name="Connector 4"/>
-          <p:cNvCxnSpPr/>
-          <p:nvPr/>
-        </p:nvCxnSpPr>
-        <p:spPr>
-          <a:xfrm>
-            <a:off x="1938528" y="2926080"/>
-            <a:ext cx="118872" cy="0"/>
-          </a:xfrm>
-          <a:prstGeom prst="line">
-            <a:avLst/>
-          </a:prstGeom>
-          <a:ln w="22225">
-            <a:solidFill>
-              <a:srgbClr val="64748B"/>
-            </a:solidFill>
-            <a:tailEnd type="triangle" w="med" len="med"/>
-          </a:ln>
-        </p:spPr>
-        <p:style>
-          <a:lnRef idx="2">
-            <a:schemeClr val="accent1"/>
-          </a:lnRef>
-          <a:fillRef idx="0">
-            <a:schemeClr val="accent1"/>
-          </a:fillRef>
-          <a:effectRef idx="1">
-            <a:schemeClr val="accent1"/>
-          </a:effectRef>
-          <a:fontRef idx="minor">
-            <a:schemeClr val="tx1"/>
-          </a:fontRef>
-        </p:style>
-      </p:cxnSp>
-      <p:sp>
-        <p:nvSpPr>
-          <p:cNvPr id="6" name="Rounded Rectangle 5"/>
-          <p:cNvSpPr/>
-          <p:nvPr/>
-        </p:nvSpPr>
-        <p:spPr>
-          <a:xfrm>
-            <a:off x="2057400" y="2286000"/>
-            <a:ext cx="1481328" cy="1280160"/>
-          </a:xfrm>
-          <a:prstGeom prst="roundRect">
-            <a:avLst/>
-          </a:prstGeom>
-          <a:solidFill>
-            <a:srgbClr val="0EA5E9"/>
-          </a:solidFill>
-          <a:ln>
-            <a:solidFill>
-              <a:srgbClr val="0EA5E9"/>
-            </a:solidFill>
-          </a:ln>
-          <a:effectLst/>
-        </p:spPr>
-        <p:style>
-          <a:lnRef idx="1">
-            <a:schemeClr val="accent1"/>
-          </a:lnRef>
-          <a:fillRef idx="3">
-            <a:schemeClr val="accent1"/>
-          </a:fillRef>
-          <a:effectRef idx="2">
-            <a:schemeClr val="accent1"/>
-          </a:effectRef>
-          <a:fontRef idx="minor">
-            <a:schemeClr val="lt1"/>
-          </a:fontRef>
-        </p:style>
-        <p:txBody>
-          <a:bodyPr rtlCol="0" anchor="ctr" wrap="square" tIns="25400" bIns="25400"/>
-          <a:lstStyle/>
-          <a:p>
-            <a:pPr algn="ctr"/>
-            <a:r>
-              <a:rPr sz="1100" b="1">
-                <a:solidFill>
-                  <a:srgbClr val="FFFFFF"/>
-                </a:solidFill>
-                <a:latin typeface="PingFang TC"/>
-                <a:ea typeface="PingFang TC"/>
-              </a:rPr>
-              <a:t>GitHub Actions</a:t>
-            </a:r>
-          </a:p>
-          <a:p>
-            <a:pPr algn="ctr"/>
-            <a:r>
-              <a:rPr sz="1100" b="0">
-                <a:solidFill>
-                  <a:srgbClr val="FFFFFF"/>
-                </a:solidFill>
-                <a:latin typeface="PingFang TC"/>
-                <a:ea typeface="PingFang TC"/>
-              </a:rPr>
-              <a:t>OIDC assume role</a:t>
-            </a:r>
-          </a:p>
-          <a:p>
-            <a:pPr algn="ctr"/>
-            <a:r>
-              <a:rPr sz="1100" b="0">
-                <a:solidFill>
-                  <a:srgbClr val="FFFFFF"/>
-                </a:solidFill>
-                <a:latin typeface="PingFang TC"/>
-                <a:ea typeface="PingFang TC"/>
-              </a:rPr>
-              <a:t>(無長期金鑰)</a:t>
-            </a:r>
-          </a:p>
-        </p:txBody>
-      </p:sp>
-      <p:cxnSp>
-        <p:nvCxnSpPr>
-          <p:cNvPr id="7" name="Connector 6"/>
-          <p:cNvCxnSpPr/>
-          <p:nvPr/>
-        </p:nvCxnSpPr>
-        <p:spPr>
-          <a:xfrm>
-            <a:off x="3538728" y="2926080"/>
-            <a:ext cx="118872" cy="0"/>
-          </a:xfrm>
-          <a:prstGeom prst="line">
-            <a:avLst/>
-          </a:prstGeom>
-          <a:ln w="22225">
-            <a:solidFill>
-              <a:srgbClr val="64748B"/>
-            </a:solidFill>
-            <a:tailEnd type="triangle" w="med" len="med"/>
-          </a:ln>
-        </p:spPr>
-        <p:style>
-          <a:lnRef idx="2">
-            <a:schemeClr val="accent1"/>
-          </a:lnRef>
-          <a:fillRef idx="0">
-            <a:schemeClr val="accent1"/>
-          </a:fillRef>
-          <a:effectRef idx="1">
-            <a:schemeClr val="accent1"/>
-          </a:effectRef>
-          <a:fontRef idx="minor">
-            <a:schemeClr val="tx1"/>
-          </a:fontRef>
-        </p:style>
-      </p:cxnSp>
-      <p:sp>
-        <p:nvSpPr>
-          <p:cNvPr id="8" name="Rounded Rectangle 7"/>
-          <p:cNvSpPr/>
-          <p:nvPr/>
-        </p:nvSpPr>
-        <p:spPr>
-          <a:xfrm>
-            <a:off x="3657600" y="2286000"/>
-            <a:ext cx="1481328" cy="1280160"/>
-          </a:xfrm>
-          <a:prstGeom prst="roundRect">
-            <a:avLst/>
-          </a:prstGeom>
-          <a:solidFill>
-            <a:srgbClr val="2563EB"/>
-          </a:solidFill>
-          <a:ln>
-            <a:solidFill>
-              <a:srgbClr val="2563EB"/>
-            </a:solidFill>
-          </a:ln>
-          <a:effectLst/>
-        </p:spPr>
-        <p:style>
-          <a:lnRef idx="1">
-            <a:schemeClr val="accent1"/>
-          </a:lnRef>
-          <a:fillRef idx="3">
-            <a:schemeClr val="accent1"/>
-          </a:fillRef>
-          <a:effectRef idx="2">
-            <a:schemeClr val="accent1"/>
-          </a:effectRef>
-          <a:fontRef idx="minor">
-            <a:schemeClr val="lt1"/>
-          </a:fontRef>
-        </p:style>
-        <p:txBody>
-          <a:bodyPr rtlCol="0" anchor="ctr" wrap="square" tIns="25400" bIns="25400"/>
-          <a:lstStyle/>
-          <a:p>
-            <a:pPr algn="ctr"/>
-            <a:r>
-              <a:rPr sz="1100" b="1">
-                <a:solidFill>
-                  <a:srgbClr val="FFFFFF"/>
-                </a:solidFill>
-                <a:latin typeface="PingFang TC"/>
-                <a:ea typeface="PingFang TC"/>
-              </a:rPr>
-              <a:t>buildx</a:t>
-            </a:r>
-          </a:p>
-          <a:p>
-            <a:pPr algn="ctr"/>
-            <a:r>
-              <a:rPr sz="1100" b="0">
-                <a:solidFill>
-                  <a:srgbClr val="FFFFFF"/>
-                </a:solidFill>
-                <a:latin typeface="PingFang TC"/>
-                <a:ea typeface="PingFang TC"/>
-              </a:rPr>
-              <a:t>--platform</a:t>
-            </a:r>
-          </a:p>
-          <a:p>
-            <a:pPr algn="ctr"/>
-            <a:r>
-              <a:rPr sz="1100" b="0">
-                <a:solidFill>
-                  <a:srgbClr val="FFFFFF"/>
-                </a:solidFill>
-                <a:latin typeface="PingFang TC"/>
-                <a:ea typeface="PingFang TC"/>
-              </a:rPr>
-              <a:t>linux/arm64</a:t>
-            </a:r>
-          </a:p>
-        </p:txBody>
-      </p:sp>
-      <p:cxnSp>
-        <p:nvCxnSpPr>
-          <p:cNvPr id="9" name="Connector 8"/>
-          <p:cNvCxnSpPr/>
-          <p:nvPr/>
-        </p:nvCxnSpPr>
-        <p:spPr>
-          <a:xfrm>
-            <a:off x="5138928" y="2926080"/>
-            <a:ext cx="118872" cy="0"/>
-          </a:xfrm>
-          <a:prstGeom prst="line">
-            <a:avLst/>
-          </a:prstGeom>
-          <a:ln w="22225">
-            <a:solidFill>
-              <a:srgbClr val="64748B"/>
-            </a:solidFill>
-            <a:tailEnd type="triangle" w="med" len="med"/>
-          </a:ln>
-        </p:spPr>
-        <p:style>
-          <a:lnRef idx="2">
-            <a:schemeClr val="accent1"/>
-          </a:lnRef>
-          <a:fillRef idx="0">
-            <a:schemeClr val="accent1"/>
-          </a:fillRef>
-          <a:effectRef idx="1">
-            <a:schemeClr val="accent1"/>
-          </a:effectRef>
-          <a:fontRef idx="minor">
-            <a:schemeClr val="tx1"/>
-          </a:fontRef>
-        </p:style>
-      </p:cxnSp>
-      <p:sp>
-        <p:nvSpPr>
-          <p:cNvPr id="10" name="Rounded Rectangle 9"/>
-          <p:cNvSpPr/>
-          <p:nvPr/>
-        </p:nvSpPr>
-        <p:spPr>
-          <a:xfrm>
-            <a:off x="5257800" y="2286000"/>
-            <a:ext cx="1481328" cy="1280160"/>
-          </a:xfrm>
-          <a:prstGeom prst="roundRect">
-            <a:avLst/>
-          </a:prstGeom>
-          <a:solidFill>
-            <a:srgbClr val="059669"/>
-          </a:solidFill>
-          <a:ln>
-            <a:solidFill>
-              <a:srgbClr val="059669"/>
-            </a:solidFill>
-          </a:ln>
-          <a:effectLst/>
-        </p:spPr>
-        <p:style>
-          <a:lnRef idx="1">
-            <a:schemeClr val="accent1"/>
-          </a:lnRef>
-          <a:fillRef idx="3">
-            <a:schemeClr val="accent1"/>
-          </a:fillRef>
-          <a:effectRef idx="2">
-            <a:schemeClr val="accent1"/>
-          </a:effectRef>
-          <a:fontRef idx="minor">
-            <a:schemeClr val="lt1"/>
-          </a:fontRef>
-        </p:style>
-        <p:txBody>
-          <a:bodyPr rtlCol="0" anchor="ctr" wrap="square" tIns="25400" bIns="25400"/>
-          <a:lstStyle/>
-          <a:p>
-            <a:pPr algn="ctr"/>
-            <a:r>
-              <a:rPr sz="1100" b="1">
-                <a:solidFill>
-                  <a:srgbClr val="FFFFFF"/>
-                </a:solidFill>
-                <a:latin typeface="PingFang TC"/>
-                <a:ea typeface="PingFang TC"/>
-              </a:rPr>
-              <a:t>ECR push</a:t>
-            </a:r>
-          </a:p>
-          <a:p>
-            <a:pPr algn="ctr"/>
-            <a:r>
-              <a:rPr sz="1100" b="0">
-                <a:solidFill>
-                  <a:srgbClr val="FFFFFF"/>
-                </a:solidFill>
-                <a:latin typeface="PingFang TC"/>
-                <a:ea typeface="PingFang TC"/>
-              </a:rPr>
-              <a:t>tag = SHA</a:t>
-            </a:r>
-          </a:p>
-          <a:p>
-            <a:pPr algn="ctr"/>
-            <a:r>
-              <a:rPr sz="1100" b="0">
-                <a:solidFill>
-                  <a:srgbClr val="FFFFFF"/>
-                </a:solidFill>
-                <a:latin typeface="PingFang TC"/>
-                <a:ea typeface="PingFang TC"/>
-              </a:rPr>
-              <a:t>+ latest</a:t>
-            </a:r>
-          </a:p>
-        </p:txBody>
-      </p:sp>
-      <p:cxnSp>
-        <p:nvCxnSpPr>
-          <p:cNvPr id="11" name="Connector 10"/>
-          <p:cNvCxnSpPr/>
-          <p:nvPr/>
-        </p:nvCxnSpPr>
-        <p:spPr>
-          <a:xfrm>
-            <a:off x="6739128" y="2926080"/>
-            <a:ext cx="118872" cy="0"/>
-          </a:xfrm>
-          <a:prstGeom prst="line">
-            <a:avLst/>
-          </a:prstGeom>
-          <a:ln w="22225">
-            <a:solidFill>
-              <a:srgbClr val="64748B"/>
-            </a:solidFill>
-            <a:tailEnd type="triangle" w="med" len="med"/>
-          </a:ln>
-        </p:spPr>
-        <p:style>
-          <a:lnRef idx="2">
-            <a:schemeClr val="accent1"/>
-          </a:lnRef>
-          <a:fillRef idx="0">
-            <a:schemeClr val="accent1"/>
-          </a:fillRef>
-          <a:effectRef idx="1">
-            <a:schemeClr val="accent1"/>
-          </a:effectRef>
-          <a:fontRef idx="minor">
-            <a:schemeClr val="tx1"/>
-          </a:fontRef>
-        </p:style>
-      </p:cxnSp>
-      <p:sp>
-        <p:nvSpPr>
-          <p:cNvPr id="12" name="Rounded Rectangle 11"/>
-          <p:cNvSpPr/>
-          <p:nvPr/>
-        </p:nvSpPr>
-        <p:spPr>
-          <a:xfrm>
-            <a:off x="6858000" y="2286000"/>
-            <a:ext cx="1481328" cy="1280160"/>
-          </a:xfrm>
-          <a:prstGeom prst="roundRect">
-            <a:avLst/>
-          </a:prstGeom>
-          <a:solidFill>
-            <a:srgbClr val="7C3AED"/>
-          </a:solidFill>
-          <a:ln>
-            <a:solidFill>
-              <a:srgbClr val="7C3AED"/>
-            </a:solidFill>
-          </a:ln>
-          <a:effectLst/>
-        </p:spPr>
-        <p:style>
-          <a:lnRef idx="1">
-            <a:schemeClr val="accent1"/>
-          </a:lnRef>
-          <a:fillRef idx="3">
-            <a:schemeClr val="accent1"/>
-          </a:fillRef>
-          <a:effectRef idx="2">
-            <a:schemeClr val="accent1"/>
-          </a:effectRef>
-          <a:fontRef idx="minor">
-            <a:schemeClr val="lt1"/>
-          </a:fontRef>
-        </p:style>
-        <p:txBody>
-          <a:bodyPr rtlCol="0" anchor="ctr" wrap="square" tIns="25400" bIns="25400"/>
-          <a:lstStyle/>
-          <a:p>
-            <a:pPr algn="ctr"/>
-            <a:r>
-              <a:rPr sz="1100" b="1">
-                <a:solidFill>
-                  <a:srgbClr val="FFFFFF"/>
-                </a:solidFill>
-                <a:latin typeface="PingFang TC"/>
-                <a:ea typeface="PingFang TC"/>
-              </a:rPr>
-              <a:t>SSM 更新</a:t>
-            </a:r>
-          </a:p>
-          <a:p>
-            <a:pPr algn="ctr"/>
-            <a:r>
-              <a:rPr sz="1100" b="0">
-                <a:solidFill>
-                  <a:srgbClr val="FFFFFF"/>
-                </a:solidFill>
-                <a:latin typeface="PingFang TC"/>
-                <a:ea typeface="PingFang TC"/>
-              </a:rPr>
-              <a:t>/qrcode/</a:t>
-            </a:r>
-          </a:p>
-          <a:p>
-            <a:pPr algn="ctr"/>
-            <a:r>
-              <a:rPr sz="1100" b="0">
-                <a:solidFill>
-                  <a:srgbClr val="FFFFFF"/>
-                </a:solidFill>
-                <a:latin typeface="PingFang TC"/>
-                <a:ea typeface="PingFang TC"/>
-              </a:rPr>
-              <a:t>IMAGE_URI</a:t>
-            </a:r>
-          </a:p>
-        </p:txBody>
-      </p:sp>
-      <p:cxnSp>
-        <p:nvCxnSpPr>
-          <p:cNvPr id="13" name="Connector 12"/>
-          <p:cNvCxnSpPr/>
-          <p:nvPr/>
-        </p:nvCxnSpPr>
-        <p:spPr>
-          <a:xfrm>
-            <a:off x="8339328" y="2926080"/>
-            <a:ext cx="118872" cy="0"/>
-          </a:xfrm>
-          <a:prstGeom prst="line">
-            <a:avLst/>
-          </a:prstGeom>
-          <a:ln w="22225">
-            <a:solidFill>
-              <a:srgbClr val="64748B"/>
-            </a:solidFill>
-            <a:tailEnd type="triangle" w="med" len="med"/>
-          </a:ln>
-        </p:spPr>
-        <p:style>
-          <a:lnRef idx="2">
-            <a:schemeClr val="accent1"/>
-          </a:lnRef>
-          <a:fillRef idx="0">
-            <a:schemeClr val="accent1"/>
-          </a:fillRef>
-          <a:effectRef idx="1">
-            <a:schemeClr val="accent1"/>
-          </a:effectRef>
-          <a:fontRef idx="minor">
-            <a:schemeClr val="tx1"/>
-          </a:fontRef>
-        </p:style>
-      </p:cxnSp>
-      <p:sp>
-        <p:nvSpPr>
-          <p:cNvPr id="14" name="Rounded Rectangle 13"/>
-          <p:cNvSpPr/>
-          <p:nvPr/>
-        </p:nvSpPr>
-        <p:spPr>
-          <a:xfrm>
-            <a:off x="8458200" y="2286000"/>
-            <a:ext cx="1481328" cy="1280160"/>
-          </a:xfrm>
-          <a:prstGeom prst="roundRect">
-            <a:avLst/>
-          </a:prstGeom>
-          <a:solidFill>
-            <a:srgbClr val="D97706"/>
-          </a:solidFill>
-          <a:ln>
-            <a:solidFill>
-              <a:srgbClr val="D97706"/>
-            </a:solidFill>
-          </a:ln>
-          <a:effectLst/>
-        </p:spPr>
-        <p:style>
-          <a:lnRef idx="1">
-            <a:schemeClr val="accent1"/>
-          </a:lnRef>
-          <a:fillRef idx="3">
-            <a:schemeClr val="accent1"/>
-          </a:fillRef>
-          <a:effectRef idx="2">
-            <a:schemeClr val="accent1"/>
-          </a:effectRef>
-          <a:fontRef idx="minor">
-            <a:schemeClr val="lt1"/>
-          </a:fontRef>
-        </p:style>
-        <p:txBody>
-          <a:bodyPr rtlCol="0" anchor="ctr" wrap="square" tIns="25400" bIns="25400"/>
-          <a:lstStyle/>
-          <a:p>
-            <a:pPr algn="ctr"/>
-            <a:r>
-              <a:rPr sz="1100" b="1">
-                <a:solidFill>
-                  <a:srgbClr val="FFFFFF"/>
-                </a:solidFill>
-                <a:latin typeface="PingFang TC"/>
-                <a:ea typeface="PingFang TC"/>
-              </a:rPr>
-              <a:t>SSM 部署</a:t>
-            </a:r>
-          </a:p>
-          <a:p>
-            <a:pPr algn="ctr"/>
-            <a:r>
-              <a:rPr sz="1100" b="0">
-                <a:solidFill>
-                  <a:srgbClr val="FFFFFF"/>
-                </a:solidFill>
-                <a:latin typeface="PingFang TC"/>
-                <a:ea typeface="PingFang TC"/>
-              </a:rPr>
-              <a:t>→ EC2</a:t>
-            </a:r>
-          </a:p>
-          <a:p>
-            <a:pPr algn="ctr"/>
-            <a:r>
-              <a:rPr sz="1100" b="0">
-                <a:solidFill>
-                  <a:srgbClr val="FFFFFF"/>
-                </a:solidFill>
-                <a:latin typeface="PingFang TC"/>
-                <a:ea typeface="PingFang TC"/>
-              </a:rPr>
-              <a:t>deploy-app.sh</a:t>
-            </a:r>
-          </a:p>
-        </p:txBody>
-      </p:sp>
-      <p:cxnSp>
-        <p:nvCxnSpPr>
-          <p:cNvPr id="15" name="Connector 14"/>
-          <p:cNvCxnSpPr/>
-          <p:nvPr/>
-        </p:nvCxnSpPr>
-        <p:spPr>
-          <a:xfrm>
-            <a:off x="9939528" y="2926080"/>
-            <a:ext cx="118872" cy="0"/>
-          </a:xfrm>
-          <a:prstGeom prst="line">
-            <a:avLst/>
-          </a:prstGeom>
-          <a:ln w="22225">
-            <a:solidFill>
-              <a:srgbClr val="64748B"/>
-            </a:solidFill>
-            <a:tailEnd type="triangle" w="med" len="med"/>
-          </a:ln>
-        </p:spPr>
-        <p:style>
-          <a:lnRef idx="2">
-            <a:schemeClr val="accent1"/>
-          </a:lnRef>
-          <a:fillRef idx="0">
-            <a:schemeClr val="accent1"/>
-          </a:fillRef>
-          <a:effectRef idx="1">
-            <a:schemeClr val="accent1"/>
-          </a:effectRef>
-          <a:fontRef idx="minor">
-            <a:schemeClr val="tx1"/>
-          </a:fontRef>
-        </p:style>
-      </p:cxnSp>
-      <p:sp>
-        <p:nvSpPr>
-          <p:cNvPr id="16" name="Rounded Rectangle 15"/>
-          <p:cNvSpPr/>
-          <p:nvPr/>
-        </p:nvSpPr>
-        <p:spPr>
-          <a:xfrm>
-            <a:off x="10058400" y="2286000"/>
-            <a:ext cx="1481328" cy="1280160"/>
-          </a:xfrm>
-          <a:prstGeom prst="roundRect">
-            <a:avLst/>
-          </a:prstGeom>
-          <a:solidFill>
-            <a:srgbClr val="059669"/>
-          </a:solidFill>
-          <a:ln>
-            <a:solidFill>
-              <a:srgbClr val="059669"/>
-            </a:solidFill>
-          </a:ln>
-          <a:effectLst/>
-        </p:spPr>
-        <p:style>
-          <a:lnRef idx="1">
-            <a:schemeClr val="accent1"/>
-          </a:lnRef>
-          <a:fillRef idx="3">
-            <a:schemeClr val="accent1"/>
-          </a:fillRef>
-          <a:effectRef idx="2">
-            <a:schemeClr val="accent1"/>
-          </a:effectRef>
-          <a:fontRef idx="minor">
-            <a:schemeClr val="lt1"/>
-          </a:fontRef>
-        </p:style>
-        <p:txBody>
-          <a:bodyPr rtlCol="0" anchor="ctr" wrap="square" tIns="25400" bIns="25400"/>
-          <a:lstStyle/>
-          <a:p>
-            <a:pPr algn="ctr"/>
-            <a:r>
-              <a:rPr sz="1100" b="1">
-                <a:solidFill>
-                  <a:srgbClr val="FFFFFF"/>
-                </a:solidFill>
-                <a:latin typeface="PingFang TC"/>
-                <a:ea typeface="PingFang TC"/>
-              </a:rPr>
-              <a:t>上線</a:t>
-            </a:r>
-          </a:p>
-          <a:p>
-            <a:pPr algn="ctr"/>
-            <a:r>
-              <a:rPr sz="1100" b="0">
-                <a:solidFill>
-                  <a:srgbClr val="FFFFFF"/>
-                </a:solidFill>
-                <a:latin typeface="PingFang TC"/>
-                <a:ea typeface="PingFang TC"/>
-              </a:rPr>
-              <a:t>ALB /health</a:t>
-            </a:r>
-          </a:p>
-          <a:p>
-            <a:pPr algn="ctr"/>
-            <a:r>
-              <a:rPr sz="1100" b="0">
-                <a:solidFill>
-                  <a:srgbClr val="FFFFFF"/>
-                </a:solidFill>
-                <a:latin typeface="PingFang TC"/>
-                <a:ea typeface="PingFang TC"/>
-              </a:rPr>
-              <a:t>通過</a:t>
-            </a:r>
-          </a:p>
-        </p:txBody>
-      </p:sp>
-      <p:sp>
-        <p:nvSpPr>
-          <p:cNvPr id="17" name="TextBox 16"/>
-          <p:cNvSpPr txBox="1"/>
-          <p:nvPr/>
-        </p:nvSpPr>
-        <p:spPr>
-          <a:xfrm>
-            <a:off x="548640" y="4023360"/>
-            <a:ext cx="11247120" cy="2194560"/>
-          </a:xfrm>
-          <a:prstGeom prst="rect">
-            <a:avLst/>
-          </a:prstGeom>
-          <a:noFill/>
-        </p:spPr>
-        <p:txBody>
-          <a:bodyPr wrap="square">
-            <a:spAutoFit/>
-          </a:bodyPr>
-          <a:lstStyle/>
-          <a:p>
-            <a:pPr>
-              <a:spcAft>
-                <a:spcPts val="900"/>
-              </a:spcAft>
-            </a:pPr>
-            <a:r>
-              <a:rPr sz="1400" b="0">
-                <a:solidFill>
-                  <a:srgbClr val="0F172A"/>
-                </a:solidFill>
-                <a:latin typeface="PingFang TC"/>
-                <a:ea typeface="PingFang TC"/>
-              </a:rPr>
-              <a:t>•  EC2 deploy-app.sh:從 SSM 撈設定 → ECR login → docker pull → docker run(換新容器)</a:t>
-            </a:r>
-          </a:p>
-          <a:p>
-            <a:pPr>
-              <a:spcAft>
-                <a:spcPts val="900"/>
-              </a:spcAft>
-            </a:pPr>
-            <a:r>
-              <a:rPr sz="1400" b="0">
-                <a:solidFill>
-                  <a:srgbClr val="0F172A"/>
-                </a:solidFill>
-                <a:latin typeface="PingFang TC"/>
-                <a:ea typeface="PingFang TC"/>
-              </a:rPr>
-              <a:t>•  全 env-gated:本機無這些環境變數 → 維持 SQLite + 記憶體 cache + 即時生圖,不受影響</a:t>
-            </a:r>
-          </a:p>
-          <a:p>
-            <a:pPr>
-              <a:spcAft>
-                <a:spcPts val="900"/>
-              </a:spcAft>
-            </a:pPr>
-            <a:r>
-              <a:rPr sz="1400" b="0">
-                <a:solidFill>
-                  <a:srgbClr val="0F172A"/>
-                </a:solidFill>
-                <a:latin typeface="PingFang TC"/>
-                <a:ea typeface="PingFang TC"/>
-              </a:rPr>
-              <a:t>•  部署踩到的兩個坑:① EC2 role 少 s3:PutObject(500)② CI build amd64 但 EC2 arm64(502)→ buildx 跨平台修正</a:t>
             </a:r>
           </a:p>
         </p:txBody>
@@ -19830,13 +19592,13 @@
         <p:spPr>
           <a:xfrm>
             <a:off x="0" y="0"/>
-            <a:ext cx="12191695" cy="6858000"/>
+            <a:ext cx="164592" cy="6858000"/>
           </a:xfrm>
           <a:prstGeom prst="rect">
             <a:avLst/>
           </a:prstGeom>
           <a:solidFill>
-            <a:srgbClr val="0F172A"/>
+            <a:srgbClr val="2563EB"/>
           </a:solidFill>
           <a:ln>
             <a:noFill/>
@@ -19873,8 +19635,8 @@
         </p:nvSpPr>
         <p:spPr>
           <a:xfrm>
-            <a:off x="822960" y="1097280"/>
-            <a:ext cx="10515600" cy="1097280"/>
+            <a:off x="502920" y="320040"/>
+            <a:ext cx="10972800" cy="1005840"/>
           </a:xfrm>
           <a:prstGeom prst="rect">
             <a:avLst/>
@@ -19886,6 +19648,23 @@
             <a:spAutoFit/>
           </a:bodyPr>
           <a:lstStyle/>
+          <a:p>
+            <a:pPr algn="l">
+              <a:spcAft>
+                <a:spcPts val="200"/>
+              </a:spcAft>
+            </a:pPr>
+            <a:r>
+              <a:rPr sz="1300" b="1">
+                <a:solidFill>
+                  <a:srgbClr val="2563EB"/>
+                </a:solidFill>
+                <a:latin typeface="PingFang TC"/>
+                <a:ea typeface="PingFang TC"/>
+              </a:rPr>
+              <a:t>部署 · CI/CD</a:t>
+            </a:r>
+          </a:p>
           <a:p>
             <a:pPr algn="l">
               <a:spcAft>
@@ -19893,45 +19672,805 @@
               </a:spcAft>
             </a:pPr>
             <a:r>
-              <a:rPr sz="1600" b="1">
-                <a:solidFill>
-                  <a:srgbClr val="2563EB"/>
-                </a:solidFill>
-                <a:latin typeface="PingFang TC"/>
-                <a:ea typeface="PingFang TC"/>
-              </a:rPr>
-              <a:t>原型狀態</a:t>
-            </a:r>
-          </a:p>
-          <a:p>
-            <a:pPr algn="l">
-              <a:spcAft>
-                <a:spcPts val="400"/>
-              </a:spcAft>
-            </a:pPr>
-            <a:r>
               <a:rPr sz="3000" b="1">
                 <a:solidFill>
+                  <a:srgbClr val="0F172A"/>
+                </a:solidFill>
+                <a:latin typeface="PingFang TC"/>
+                <a:ea typeface="PingFang TC"/>
+              </a:rPr>
+              <a:t>CI/CD 流程（GitHub Actions + OIDC）</a:t>
+            </a:r>
+          </a:p>
+        </p:txBody>
+      </p:sp>
+      <p:sp>
+        <p:nvSpPr>
+          <p:cNvPr id="4" name="Rounded Rectangle 3"/>
+          <p:cNvSpPr/>
+          <p:nvPr/>
+        </p:nvSpPr>
+        <p:spPr>
+          <a:xfrm>
+            <a:off x="457200" y="2286000"/>
+            <a:ext cx="1481328" cy="1280160"/>
+          </a:xfrm>
+          <a:prstGeom prst="roundRect">
+            <a:avLst/>
+          </a:prstGeom>
+          <a:solidFill>
+            <a:srgbClr val="64748B"/>
+          </a:solidFill>
+          <a:ln>
+            <a:solidFill>
+              <a:srgbClr val="64748B"/>
+            </a:solidFill>
+          </a:ln>
+          <a:effectLst/>
+        </p:spPr>
+        <p:style>
+          <a:lnRef idx="1">
+            <a:schemeClr val="accent1"/>
+          </a:lnRef>
+          <a:fillRef idx="3">
+            <a:schemeClr val="accent1"/>
+          </a:fillRef>
+          <a:effectRef idx="2">
+            <a:schemeClr val="accent1"/>
+          </a:effectRef>
+          <a:fontRef idx="minor">
+            <a:schemeClr val="lt1"/>
+          </a:fontRef>
+        </p:style>
+        <p:txBody>
+          <a:bodyPr rtlCol="0" anchor="ctr" wrap="square" tIns="25400" bIns="25400"/>
+          <a:lstStyle/>
+          <a:p>
+            <a:pPr algn="ctr"/>
+            <a:r>
+              <a:rPr sz="1100" b="1">
+                <a:solidFill>
                   <a:srgbClr val="FFFFFF"/>
                 </a:solidFill>
                 <a:latin typeface="PingFang TC"/>
                 <a:ea typeface="PingFang TC"/>
               </a:rPr>
-              <a:t>可跑的 FastAPI 實作 + 管理頁前端</a:t>
-            </a:r>
-          </a:p>
-        </p:txBody>
-      </p:sp>
-      <p:sp>
-        <p:nvSpPr>
-          <p:cNvPr id="4" name="TextBox 3"/>
+              <a:t>git push</a:t>
+            </a:r>
+          </a:p>
+          <a:p>
+            <a:pPr algn="ctr"/>
+            <a:r>
+              <a:rPr sz="1100" b="0">
+                <a:solidFill>
+                  <a:srgbClr val="FFFFFF"/>
+                </a:solidFill>
+                <a:latin typeface="PingFang TC"/>
+                <a:ea typeface="PingFang TC"/>
+              </a:rPr>
+              <a:t>QR Code Generator/**</a:t>
+            </a:r>
+          </a:p>
+        </p:txBody>
+      </p:sp>
+      <p:cxnSp>
+        <p:nvCxnSpPr>
+          <p:cNvPr id="5" name="Connector 4"/>
+          <p:cNvCxnSpPr/>
+          <p:nvPr/>
+        </p:nvCxnSpPr>
+        <p:spPr>
+          <a:xfrm>
+            <a:off x="1938528" y="2926080"/>
+            <a:ext cx="118872" cy="0"/>
+          </a:xfrm>
+          <a:prstGeom prst="line">
+            <a:avLst/>
+          </a:prstGeom>
+          <a:ln w="22225">
+            <a:solidFill>
+              <a:srgbClr val="64748B"/>
+            </a:solidFill>
+            <a:tailEnd type="triangle" w="med" len="med"/>
+          </a:ln>
+        </p:spPr>
+        <p:style>
+          <a:lnRef idx="2">
+            <a:schemeClr val="accent1"/>
+          </a:lnRef>
+          <a:fillRef idx="0">
+            <a:schemeClr val="accent1"/>
+          </a:fillRef>
+          <a:effectRef idx="1">
+            <a:schemeClr val="accent1"/>
+          </a:effectRef>
+          <a:fontRef idx="minor">
+            <a:schemeClr val="tx1"/>
+          </a:fontRef>
+        </p:style>
+      </p:cxnSp>
+      <p:sp>
+        <p:nvSpPr>
+          <p:cNvPr id="6" name="Rounded Rectangle 5"/>
+          <p:cNvSpPr/>
+          <p:nvPr/>
+        </p:nvSpPr>
+        <p:spPr>
+          <a:xfrm>
+            <a:off x="2057400" y="2286000"/>
+            <a:ext cx="1481328" cy="1280160"/>
+          </a:xfrm>
+          <a:prstGeom prst="roundRect">
+            <a:avLst/>
+          </a:prstGeom>
+          <a:solidFill>
+            <a:srgbClr val="0EA5E9"/>
+          </a:solidFill>
+          <a:ln>
+            <a:solidFill>
+              <a:srgbClr val="0EA5E9"/>
+            </a:solidFill>
+          </a:ln>
+          <a:effectLst/>
+        </p:spPr>
+        <p:style>
+          <a:lnRef idx="1">
+            <a:schemeClr val="accent1"/>
+          </a:lnRef>
+          <a:fillRef idx="3">
+            <a:schemeClr val="accent1"/>
+          </a:fillRef>
+          <a:effectRef idx="2">
+            <a:schemeClr val="accent1"/>
+          </a:effectRef>
+          <a:fontRef idx="minor">
+            <a:schemeClr val="lt1"/>
+          </a:fontRef>
+        </p:style>
+        <p:txBody>
+          <a:bodyPr rtlCol="0" anchor="ctr" wrap="square" tIns="25400" bIns="25400"/>
+          <a:lstStyle/>
+          <a:p>
+            <a:pPr algn="ctr"/>
+            <a:r>
+              <a:rPr sz="1100" b="1">
+                <a:solidFill>
+                  <a:srgbClr val="FFFFFF"/>
+                </a:solidFill>
+                <a:latin typeface="PingFang TC"/>
+                <a:ea typeface="PingFang TC"/>
+              </a:rPr>
+              <a:t>GitHub Actions</a:t>
+            </a:r>
+          </a:p>
+          <a:p>
+            <a:pPr algn="ctr"/>
+            <a:r>
+              <a:rPr sz="1100" b="0">
+                <a:solidFill>
+                  <a:srgbClr val="FFFFFF"/>
+                </a:solidFill>
+                <a:latin typeface="PingFang TC"/>
+                <a:ea typeface="PingFang TC"/>
+              </a:rPr>
+              <a:t>OIDC assume role</a:t>
+            </a:r>
+          </a:p>
+          <a:p>
+            <a:pPr algn="ctr"/>
+            <a:r>
+              <a:rPr sz="1100" b="0">
+                <a:solidFill>
+                  <a:srgbClr val="FFFFFF"/>
+                </a:solidFill>
+                <a:latin typeface="PingFang TC"/>
+                <a:ea typeface="PingFang TC"/>
+              </a:rPr>
+              <a:t>(無長期金鑰)</a:t>
+            </a:r>
+          </a:p>
+        </p:txBody>
+      </p:sp>
+      <p:cxnSp>
+        <p:nvCxnSpPr>
+          <p:cNvPr id="7" name="Connector 6"/>
+          <p:cNvCxnSpPr/>
+          <p:nvPr/>
+        </p:nvCxnSpPr>
+        <p:spPr>
+          <a:xfrm>
+            <a:off x="3538728" y="2926080"/>
+            <a:ext cx="118872" cy="0"/>
+          </a:xfrm>
+          <a:prstGeom prst="line">
+            <a:avLst/>
+          </a:prstGeom>
+          <a:ln w="22225">
+            <a:solidFill>
+              <a:srgbClr val="64748B"/>
+            </a:solidFill>
+            <a:tailEnd type="triangle" w="med" len="med"/>
+          </a:ln>
+        </p:spPr>
+        <p:style>
+          <a:lnRef idx="2">
+            <a:schemeClr val="accent1"/>
+          </a:lnRef>
+          <a:fillRef idx="0">
+            <a:schemeClr val="accent1"/>
+          </a:fillRef>
+          <a:effectRef idx="1">
+            <a:schemeClr val="accent1"/>
+          </a:effectRef>
+          <a:fontRef idx="minor">
+            <a:schemeClr val="tx1"/>
+          </a:fontRef>
+        </p:style>
+      </p:cxnSp>
+      <p:sp>
+        <p:nvSpPr>
+          <p:cNvPr id="8" name="Rounded Rectangle 7"/>
+          <p:cNvSpPr/>
+          <p:nvPr/>
+        </p:nvSpPr>
+        <p:spPr>
+          <a:xfrm>
+            <a:off x="3657600" y="2286000"/>
+            <a:ext cx="1481328" cy="1280160"/>
+          </a:xfrm>
+          <a:prstGeom prst="roundRect">
+            <a:avLst/>
+          </a:prstGeom>
+          <a:solidFill>
+            <a:srgbClr val="2563EB"/>
+          </a:solidFill>
+          <a:ln>
+            <a:solidFill>
+              <a:srgbClr val="2563EB"/>
+            </a:solidFill>
+          </a:ln>
+          <a:effectLst/>
+        </p:spPr>
+        <p:style>
+          <a:lnRef idx="1">
+            <a:schemeClr val="accent1"/>
+          </a:lnRef>
+          <a:fillRef idx="3">
+            <a:schemeClr val="accent1"/>
+          </a:fillRef>
+          <a:effectRef idx="2">
+            <a:schemeClr val="accent1"/>
+          </a:effectRef>
+          <a:fontRef idx="minor">
+            <a:schemeClr val="lt1"/>
+          </a:fontRef>
+        </p:style>
+        <p:txBody>
+          <a:bodyPr rtlCol="0" anchor="ctr" wrap="square" tIns="25400" bIns="25400"/>
+          <a:lstStyle/>
+          <a:p>
+            <a:pPr algn="ctr"/>
+            <a:r>
+              <a:rPr sz="1100" b="1">
+                <a:solidFill>
+                  <a:srgbClr val="FFFFFF"/>
+                </a:solidFill>
+                <a:latin typeface="PingFang TC"/>
+                <a:ea typeface="PingFang TC"/>
+              </a:rPr>
+              <a:t>buildx</a:t>
+            </a:r>
+          </a:p>
+          <a:p>
+            <a:pPr algn="ctr"/>
+            <a:r>
+              <a:rPr sz="1100" b="0">
+                <a:solidFill>
+                  <a:srgbClr val="FFFFFF"/>
+                </a:solidFill>
+                <a:latin typeface="PingFang TC"/>
+                <a:ea typeface="PingFang TC"/>
+              </a:rPr>
+              <a:t>--platform</a:t>
+            </a:r>
+          </a:p>
+          <a:p>
+            <a:pPr algn="ctr"/>
+            <a:r>
+              <a:rPr sz="1100" b="0">
+                <a:solidFill>
+                  <a:srgbClr val="FFFFFF"/>
+                </a:solidFill>
+                <a:latin typeface="PingFang TC"/>
+                <a:ea typeface="PingFang TC"/>
+              </a:rPr>
+              <a:t>linux/arm64</a:t>
+            </a:r>
+          </a:p>
+        </p:txBody>
+      </p:sp>
+      <p:cxnSp>
+        <p:nvCxnSpPr>
+          <p:cNvPr id="9" name="Connector 8"/>
+          <p:cNvCxnSpPr/>
+          <p:nvPr/>
+        </p:nvCxnSpPr>
+        <p:spPr>
+          <a:xfrm>
+            <a:off x="5138928" y="2926080"/>
+            <a:ext cx="118872" cy="0"/>
+          </a:xfrm>
+          <a:prstGeom prst="line">
+            <a:avLst/>
+          </a:prstGeom>
+          <a:ln w="22225">
+            <a:solidFill>
+              <a:srgbClr val="64748B"/>
+            </a:solidFill>
+            <a:tailEnd type="triangle" w="med" len="med"/>
+          </a:ln>
+        </p:spPr>
+        <p:style>
+          <a:lnRef idx="2">
+            <a:schemeClr val="accent1"/>
+          </a:lnRef>
+          <a:fillRef idx="0">
+            <a:schemeClr val="accent1"/>
+          </a:fillRef>
+          <a:effectRef idx="1">
+            <a:schemeClr val="accent1"/>
+          </a:effectRef>
+          <a:fontRef idx="minor">
+            <a:schemeClr val="tx1"/>
+          </a:fontRef>
+        </p:style>
+      </p:cxnSp>
+      <p:sp>
+        <p:nvSpPr>
+          <p:cNvPr id="10" name="Rounded Rectangle 9"/>
+          <p:cNvSpPr/>
+          <p:nvPr/>
+        </p:nvSpPr>
+        <p:spPr>
+          <a:xfrm>
+            <a:off x="5257800" y="2286000"/>
+            <a:ext cx="1481328" cy="1280160"/>
+          </a:xfrm>
+          <a:prstGeom prst="roundRect">
+            <a:avLst/>
+          </a:prstGeom>
+          <a:solidFill>
+            <a:srgbClr val="059669"/>
+          </a:solidFill>
+          <a:ln>
+            <a:solidFill>
+              <a:srgbClr val="059669"/>
+            </a:solidFill>
+          </a:ln>
+          <a:effectLst/>
+        </p:spPr>
+        <p:style>
+          <a:lnRef idx="1">
+            <a:schemeClr val="accent1"/>
+          </a:lnRef>
+          <a:fillRef idx="3">
+            <a:schemeClr val="accent1"/>
+          </a:fillRef>
+          <a:effectRef idx="2">
+            <a:schemeClr val="accent1"/>
+          </a:effectRef>
+          <a:fontRef idx="minor">
+            <a:schemeClr val="lt1"/>
+          </a:fontRef>
+        </p:style>
+        <p:txBody>
+          <a:bodyPr rtlCol="0" anchor="ctr" wrap="square" tIns="25400" bIns="25400"/>
+          <a:lstStyle/>
+          <a:p>
+            <a:pPr algn="ctr"/>
+            <a:r>
+              <a:rPr sz="1100" b="1">
+                <a:solidFill>
+                  <a:srgbClr val="FFFFFF"/>
+                </a:solidFill>
+                <a:latin typeface="PingFang TC"/>
+                <a:ea typeface="PingFang TC"/>
+              </a:rPr>
+              <a:t>ECR push</a:t>
+            </a:r>
+          </a:p>
+          <a:p>
+            <a:pPr algn="ctr"/>
+            <a:r>
+              <a:rPr sz="1100" b="0">
+                <a:solidFill>
+                  <a:srgbClr val="FFFFFF"/>
+                </a:solidFill>
+                <a:latin typeface="PingFang TC"/>
+                <a:ea typeface="PingFang TC"/>
+              </a:rPr>
+              <a:t>tag = SHA</a:t>
+            </a:r>
+          </a:p>
+          <a:p>
+            <a:pPr algn="ctr"/>
+            <a:r>
+              <a:rPr sz="1100" b="0">
+                <a:solidFill>
+                  <a:srgbClr val="FFFFFF"/>
+                </a:solidFill>
+                <a:latin typeface="PingFang TC"/>
+                <a:ea typeface="PingFang TC"/>
+              </a:rPr>
+              <a:t>+ latest</a:t>
+            </a:r>
+          </a:p>
+        </p:txBody>
+      </p:sp>
+      <p:cxnSp>
+        <p:nvCxnSpPr>
+          <p:cNvPr id="11" name="Connector 10"/>
+          <p:cNvCxnSpPr/>
+          <p:nvPr/>
+        </p:nvCxnSpPr>
+        <p:spPr>
+          <a:xfrm>
+            <a:off x="6739128" y="2926080"/>
+            <a:ext cx="118872" cy="0"/>
+          </a:xfrm>
+          <a:prstGeom prst="line">
+            <a:avLst/>
+          </a:prstGeom>
+          <a:ln w="22225">
+            <a:solidFill>
+              <a:srgbClr val="64748B"/>
+            </a:solidFill>
+            <a:tailEnd type="triangle" w="med" len="med"/>
+          </a:ln>
+        </p:spPr>
+        <p:style>
+          <a:lnRef idx="2">
+            <a:schemeClr val="accent1"/>
+          </a:lnRef>
+          <a:fillRef idx="0">
+            <a:schemeClr val="accent1"/>
+          </a:fillRef>
+          <a:effectRef idx="1">
+            <a:schemeClr val="accent1"/>
+          </a:effectRef>
+          <a:fontRef idx="minor">
+            <a:schemeClr val="tx1"/>
+          </a:fontRef>
+        </p:style>
+      </p:cxnSp>
+      <p:sp>
+        <p:nvSpPr>
+          <p:cNvPr id="12" name="Rounded Rectangle 11"/>
+          <p:cNvSpPr/>
+          <p:nvPr/>
+        </p:nvSpPr>
+        <p:spPr>
+          <a:xfrm>
+            <a:off x="6858000" y="2286000"/>
+            <a:ext cx="1481328" cy="1280160"/>
+          </a:xfrm>
+          <a:prstGeom prst="roundRect">
+            <a:avLst/>
+          </a:prstGeom>
+          <a:solidFill>
+            <a:srgbClr val="7C3AED"/>
+          </a:solidFill>
+          <a:ln>
+            <a:solidFill>
+              <a:srgbClr val="7C3AED"/>
+            </a:solidFill>
+          </a:ln>
+          <a:effectLst/>
+        </p:spPr>
+        <p:style>
+          <a:lnRef idx="1">
+            <a:schemeClr val="accent1"/>
+          </a:lnRef>
+          <a:fillRef idx="3">
+            <a:schemeClr val="accent1"/>
+          </a:fillRef>
+          <a:effectRef idx="2">
+            <a:schemeClr val="accent1"/>
+          </a:effectRef>
+          <a:fontRef idx="minor">
+            <a:schemeClr val="lt1"/>
+          </a:fontRef>
+        </p:style>
+        <p:txBody>
+          <a:bodyPr rtlCol="0" anchor="ctr" wrap="square" tIns="25400" bIns="25400"/>
+          <a:lstStyle/>
+          <a:p>
+            <a:pPr algn="ctr"/>
+            <a:r>
+              <a:rPr sz="1100" b="1">
+                <a:solidFill>
+                  <a:srgbClr val="FFFFFF"/>
+                </a:solidFill>
+                <a:latin typeface="PingFang TC"/>
+                <a:ea typeface="PingFang TC"/>
+              </a:rPr>
+              <a:t>SSM 更新</a:t>
+            </a:r>
+          </a:p>
+          <a:p>
+            <a:pPr algn="ctr"/>
+            <a:r>
+              <a:rPr sz="1100" b="0">
+                <a:solidFill>
+                  <a:srgbClr val="FFFFFF"/>
+                </a:solidFill>
+                <a:latin typeface="PingFang TC"/>
+                <a:ea typeface="PingFang TC"/>
+              </a:rPr>
+              <a:t>/qrcode/</a:t>
+            </a:r>
+          </a:p>
+          <a:p>
+            <a:pPr algn="ctr"/>
+            <a:r>
+              <a:rPr sz="1100" b="0">
+                <a:solidFill>
+                  <a:srgbClr val="FFFFFF"/>
+                </a:solidFill>
+                <a:latin typeface="PingFang TC"/>
+                <a:ea typeface="PingFang TC"/>
+              </a:rPr>
+              <a:t>IMAGE_URI</a:t>
+            </a:r>
+          </a:p>
+        </p:txBody>
+      </p:sp>
+      <p:cxnSp>
+        <p:nvCxnSpPr>
+          <p:cNvPr id="13" name="Connector 12"/>
+          <p:cNvCxnSpPr/>
+          <p:nvPr/>
+        </p:nvCxnSpPr>
+        <p:spPr>
+          <a:xfrm>
+            <a:off x="8339328" y="2926080"/>
+            <a:ext cx="118872" cy="0"/>
+          </a:xfrm>
+          <a:prstGeom prst="line">
+            <a:avLst/>
+          </a:prstGeom>
+          <a:ln w="22225">
+            <a:solidFill>
+              <a:srgbClr val="64748B"/>
+            </a:solidFill>
+            <a:tailEnd type="triangle" w="med" len="med"/>
+          </a:ln>
+        </p:spPr>
+        <p:style>
+          <a:lnRef idx="2">
+            <a:schemeClr val="accent1"/>
+          </a:lnRef>
+          <a:fillRef idx="0">
+            <a:schemeClr val="accent1"/>
+          </a:fillRef>
+          <a:effectRef idx="1">
+            <a:schemeClr val="accent1"/>
+          </a:effectRef>
+          <a:fontRef idx="minor">
+            <a:schemeClr val="tx1"/>
+          </a:fontRef>
+        </p:style>
+      </p:cxnSp>
+      <p:sp>
+        <p:nvSpPr>
+          <p:cNvPr id="14" name="Rounded Rectangle 13"/>
+          <p:cNvSpPr/>
+          <p:nvPr/>
+        </p:nvSpPr>
+        <p:spPr>
+          <a:xfrm>
+            <a:off x="8458200" y="2286000"/>
+            <a:ext cx="1481328" cy="1280160"/>
+          </a:xfrm>
+          <a:prstGeom prst="roundRect">
+            <a:avLst/>
+          </a:prstGeom>
+          <a:solidFill>
+            <a:srgbClr val="D97706"/>
+          </a:solidFill>
+          <a:ln>
+            <a:solidFill>
+              <a:srgbClr val="D97706"/>
+            </a:solidFill>
+          </a:ln>
+          <a:effectLst/>
+        </p:spPr>
+        <p:style>
+          <a:lnRef idx="1">
+            <a:schemeClr val="accent1"/>
+          </a:lnRef>
+          <a:fillRef idx="3">
+            <a:schemeClr val="accent1"/>
+          </a:fillRef>
+          <a:effectRef idx="2">
+            <a:schemeClr val="accent1"/>
+          </a:effectRef>
+          <a:fontRef idx="minor">
+            <a:schemeClr val="lt1"/>
+          </a:fontRef>
+        </p:style>
+        <p:txBody>
+          <a:bodyPr rtlCol="0" anchor="ctr" wrap="square" tIns="25400" bIns="25400"/>
+          <a:lstStyle/>
+          <a:p>
+            <a:pPr algn="ctr"/>
+            <a:r>
+              <a:rPr sz="1100" b="1">
+                <a:solidFill>
+                  <a:srgbClr val="FFFFFF"/>
+                </a:solidFill>
+                <a:latin typeface="PingFang TC"/>
+                <a:ea typeface="PingFang TC"/>
+              </a:rPr>
+              <a:t>SSM 部署</a:t>
+            </a:r>
+          </a:p>
+          <a:p>
+            <a:pPr algn="ctr"/>
+            <a:r>
+              <a:rPr sz="1100" b="0">
+                <a:solidFill>
+                  <a:srgbClr val="FFFFFF"/>
+                </a:solidFill>
+                <a:latin typeface="PingFang TC"/>
+                <a:ea typeface="PingFang TC"/>
+              </a:rPr>
+              <a:t>→ EC2</a:t>
+            </a:r>
+          </a:p>
+          <a:p>
+            <a:pPr algn="ctr"/>
+            <a:r>
+              <a:rPr sz="1100" b="0">
+                <a:solidFill>
+                  <a:srgbClr val="FFFFFF"/>
+                </a:solidFill>
+                <a:latin typeface="PingFang TC"/>
+                <a:ea typeface="PingFang TC"/>
+              </a:rPr>
+              <a:t>deploy-app.sh</a:t>
+            </a:r>
+          </a:p>
+        </p:txBody>
+      </p:sp>
+      <p:cxnSp>
+        <p:nvCxnSpPr>
+          <p:cNvPr id="15" name="Connector 14"/>
+          <p:cNvCxnSpPr/>
+          <p:nvPr/>
+        </p:nvCxnSpPr>
+        <p:spPr>
+          <a:xfrm>
+            <a:off x="9939528" y="2926080"/>
+            <a:ext cx="118872" cy="0"/>
+          </a:xfrm>
+          <a:prstGeom prst="line">
+            <a:avLst/>
+          </a:prstGeom>
+          <a:ln w="22225">
+            <a:solidFill>
+              <a:srgbClr val="64748B"/>
+            </a:solidFill>
+            <a:tailEnd type="triangle" w="med" len="med"/>
+          </a:ln>
+        </p:spPr>
+        <p:style>
+          <a:lnRef idx="2">
+            <a:schemeClr val="accent1"/>
+          </a:lnRef>
+          <a:fillRef idx="0">
+            <a:schemeClr val="accent1"/>
+          </a:fillRef>
+          <a:effectRef idx="1">
+            <a:schemeClr val="accent1"/>
+          </a:effectRef>
+          <a:fontRef idx="minor">
+            <a:schemeClr val="tx1"/>
+          </a:fontRef>
+        </p:style>
+      </p:cxnSp>
+      <p:sp>
+        <p:nvSpPr>
+          <p:cNvPr id="16" name="Rounded Rectangle 15"/>
+          <p:cNvSpPr/>
+          <p:nvPr/>
+        </p:nvSpPr>
+        <p:spPr>
+          <a:xfrm>
+            <a:off x="10058400" y="2286000"/>
+            <a:ext cx="1481328" cy="1280160"/>
+          </a:xfrm>
+          <a:prstGeom prst="roundRect">
+            <a:avLst/>
+          </a:prstGeom>
+          <a:solidFill>
+            <a:srgbClr val="059669"/>
+          </a:solidFill>
+          <a:ln>
+            <a:solidFill>
+              <a:srgbClr val="059669"/>
+            </a:solidFill>
+          </a:ln>
+          <a:effectLst/>
+        </p:spPr>
+        <p:style>
+          <a:lnRef idx="1">
+            <a:schemeClr val="accent1"/>
+          </a:lnRef>
+          <a:fillRef idx="3">
+            <a:schemeClr val="accent1"/>
+          </a:fillRef>
+          <a:effectRef idx="2">
+            <a:schemeClr val="accent1"/>
+          </a:effectRef>
+          <a:fontRef idx="minor">
+            <a:schemeClr val="lt1"/>
+          </a:fontRef>
+        </p:style>
+        <p:txBody>
+          <a:bodyPr rtlCol="0" anchor="ctr" wrap="square" tIns="25400" bIns="25400"/>
+          <a:lstStyle/>
+          <a:p>
+            <a:pPr algn="ctr"/>
+            <a:r>
+              <a:rPr sz="1100" b="1">
+                <a:solidFill>
+                  <a:srgbClr val="FFFFFF"/>
+                </a:solidFill>
+                <a:latin typeface="PingFang TC"/>
+                <a:ea typeface="PingFang TC"/>
+              </a:rPr>
+              <a:t>上線</a:t>
+            </a:r>
+          </a:p>
+          <a:p>
+            <a:pPr algn="ctr"/>
+            <a:r>
+              <a:rPr sz="1100" b="0">
+                <a:solidFill>
+                  <a:srgbClr val="FFFFFF"/>
+                </a:solidFill>
+                <a:latin typeface="PingFang TC"/>
+                <a:ea typeface="PingFang TC"/>
+              </a:rPr>
+              <a:t>ALB /health</a:t>
+            </a:r>
+          </a:p>
+          <a:p>
+            <a:pPr algn="ctr"/>
+            <a:r>
+              <a:rPr sz="1100" b="0">
+                <a:solidFill>
+                  <a:srgbClr val="FFFFFF"/>
+                </a:solidFill>
+                <a:latin typeface="PingFang TC"/>
+                <a:ea typeface="PingFang TC"/>
+              </a:rPr>
+              <a:t>通過</a:t>
+            </a:r>
+          </a:p>
+        </p:txBody>
+      </p:sp>
+      <p:sp>
+        <p:nvSpPr>
+          <p:cNvPr id="17" name="TextBox 16"/>
           <p:cNvSpPr txBox="1"/>
           <p:nvPr/>
         </p:nvSpPr>
         <p:spPr>
           <a:xfrm>
-            <a:off x="822960" y="2743200"/>
-            <a:ext cx="10515600" cy="2743200"/>
+            <a:off x="548640" y="4023360"/>
+            <a:ext cx="11247120" cy="2194560"/>
           </a:xfrm>
           <a:prstGeom prst="rect">
             <a:avLst/>
@@ -19946,69 +20485,52 @@
           <a:p>
             <a:pPr>
               <a:spcAft>
-                <a:spcPts val="1200"/>
+                <a:spcPts val="900"/>
               </a:spcAft>
             </a:pPr>
             <a:r>
-              <a:rPr sz="1600" b="0">
-                <a:solidFill>
-                  <a:srgbClr val="E2E8F0"/>
-                </a:solidFill>
-                <a:latin typeface="PingFang TC"/>
-                <a:ea typeface="PingFang TC"/>
-              </a:rPr>
-              <a:t>✓  7 個 API 端點 + 管理頁前端（建立/清單/編輯/刪除/分析）</a:t>
+              <a:rPr sz="1400" b="0">
+                <a:solidFill>
+                  <a:srgbClr val="0F172A"/>
+                </a:solidFill>
+                <a:latin typeface="PingFang TC"/>
+                <a:ea typeface="PingFang TC"/>
+              </a:rPr>
+              <a:t>•  EC2 deploy-app.sh:從 SSM 撈設定 → ECR login → docker pull → docker run(換新容器)</a:t>
             </a:r>
           </a:p>
           <a:p>
             <a:pPr>
               <a:spcAft>
-                <a:spcPts val="1200"/>
+                <a:spcPts val="900"/>
               </a:spcAft>
             </a:pPr>
             <a:r>
-              <a:rPr sz="1600" b="0">
-                <a:solidFill>
-                  <a:srgbClr val="E2E8F0"/>
-                </a:solidFill>
-                <a:latin typeface="PingFang TC"/>
-                <a:ea typeface="PingFang TC"/>
-              </a:rPr>
-              <a:t>✓  全部 curl 驗證通過：302 / 404 / 410 / 8 碼 token / 正規化 / SSRF / 過期</a:t>
+              <a:rPr sz="1400" b="0">
+                <a:solidFill>
+                  <a:srgbClr val="0F172A"/>
+                </a:solidFill>
+                <a:latin typeface="PingFang TC"/>
+                <a:ea typeface="PingFang TC"/>
+              </a:rPr>
+              <a:t>•  全 env-gated:本機無這些環境變數 → 維持 SQLite + 記憶體 cache + 即時生圖,不受影響</a:t>
             </a:r>
           </a:p>
           <a:p>
             <a:pPr>
               <a:spcAft>
-                <a:spcPts val="1200"/>
+                <a:spcPts val="900"/>
               </a:spcAft>
             </a:pPr>
             <a:r>
-              <a:rPr sz="1600" b="0">
-                <a:solidFill>
-                  <a:srgbClr val="E2E8F0"/>
-                </a:solidFill>
-                <a:latin typeface="PingFang TC"/>
-                <a:ea typeface="PingFang TC"/>
-              </a:rPr>
-              <a:t>✓  production 替換點已在程式註解標明（Redis / 佇列 / CDN / 預聚合 / PostgreSQL）</a:t>
-            </a:r>
-          </a:p>
-          <a:p>
-            <a:pPr>
-              <a:spcAft>
-                <a:spcPts val="1200"/>
-              </a:spcAft>
-            </a:pPr>
-            <a:r>
-              <a:rPr sz="1600" b="0">
-                <a:solidFill>
-                  <a:srgbClr val="E2E8F0"/>
-                </a:solidFill>
-                <a:latin typeface="PingFang TC"/>
-                <a:ea typeface="PingFang TC"/>
-              </a:rPr>
-              <a:t>✓  設計依據：DESIGN.md（16 題決策 + 優劣分析）</a:t>
+              <a:rPr sz="1400" b="0">
+                <a:solidFill>
+                  <a:srgbClr val="0F172A"/>
+                </a:solidFill>
+                <a:latin typeface="PingFang TC"/>
+                <a:ea typeface="PingFang TC"/>
+              </a:rPr>
+              <a:t>•  部署踩到的兩個坑:① EC2 role 少 s3:PutObject(500)② CI build amd64 但 EC2 arm64(502)→ buildx 跨平台修正</a:t>
             </a:r>
           </a:p>
         </p:txBody>
@@ -20040,6 +20562,216 @@
         <p:spPr>
           <a:xfrm>
             <a:off x="0" y="0"/>
+            <a:ext cx="12191695" cy="6858000"/>
+          </a:xfrm>
+          <a:prstGeom prst="rect">
+            <a:avLst/>
+          </a:prstGeom>
+          <a:solidFill>
+            <a:srgbClr val="0F172A"/>
+          </a:solidFill>
+          <a:ln>
+            <a:noFill/>
+          </a:ln>
+          <a:effectLst/>
+        </p:spPr>
+        <p:style>
+          <a:lnRef idx="1">
+            <a:schemeClr val="accent1"/>
+          </a:lnRef>
+          <a:fillRef idx="3">
+            <a:schemeClr val="accent1"/>
+          </a:fillRef>
+          <a:effectRef idx="2">
+            <a:schemeClr val="accent1"/>
+          </a:effectRef>
+          <a:fontRef idx="minor">
+            <a:schemeClr val="lt1"/>
+          </a:fontRef>
+        </p:style>
+        <p:txBody>
+          <a:bodyPr rtlCol="0" anchor="ctr"/>
+          <a:lstStyle/>
+          <a:p>
+            <a:pPr algn="ctr"/>
+          </a:p>
+        </p:txBody>
+      </p:sp>
+      <p:sp>
+        <p:nvSpPr>
+          <p:cNvPr id="3" name="TextBox 2"/>
+          <p:cNvSpPr txBox="1"/>
+          <p:nvPr/>
+        </p:nvSpPr>
+        <p:spPr>
+          <a:xfrm>
+            <a:off x="822960" y="1097280"/>
+            <a:ext cx="10515600" cy="1097280"/>
+          </a:xfrm>
+          <a:prstGeom prst="rect">
+            <a:avLst/>
+          </a:prstGeom>
+          <a:noFill/>
+        </p:spPr>
+        <p:txBody>
+          <a:bodyPr wrap="square" anchor="t">
+            <a:spAutoFit/>
+          </a:bodyPr>
+          <a:lstStyle/>
+          <a:p>
+            <a:pPr algn="l">
+              <a:spcAft>
+                <a:spcPts val="400"/>
+              </a:spcAft>
+            </a:pPr>
+            <a:r>
+              <a:rPr sz="1600" b="1">
+                <a:solidFill>
+                  <a:srgbClr val="2563EB"/>
+                </a:solidFill>
+                <a:latin typeface="PingFang TC"/>
+                <a:ea typeface="PingFang TC"/>
+              </a:rPr>
+              <a:t>原型狀態</a:t>
+            </a:r>
+          </a:p>
+          <a:p>
+            <a:pPr algn="l">
+              <a:spcAft>
+                <a:spcPts val="400"/>
+              </a:spcAft>
+            </a:pPr>
+            <a:r>
+              <a:rPr sz="3000" b="1">
+                <a:solidFill>
+                  <a:srgbClr val="FFFFFF"/>
+                </a:solidFill>
+                <a:latin typeface="PingFang TC"/>
+                <a:ea typeface="PingFang TC"/>
+              </a:rPr>
+              <a:t>可跑的 FastAPI 實作 + 管理頁前端</a:t>
+            </a:r>
+          </a:p>
+        </p:txBody>
+      </p:sp>
+      <p:sp>
+        <p:nvSpPr>
+          <p:cNvPr id="4" name="TextBox 3"/>
+          <p:cNvSpPr txBox="1"/>
+          <p:nvPr/>
+        </p:nvSpPr>
+        <p:spPr>
+          <a:xfrm>
+            <a:off x="822960" y="2743200"/>
+            <a:ext cx="10515600" cy="2743200"/>
+          </a:xfrm>
+          <a:prstGeom prst="rect">
+            <a:avLst/>
+          </a:prstGeom>
+          <a:noFill/>
+        </p:spPr>
+        <p:txBody>
+          <a:bodyPr wrap="square">
+            <a:spAutoFit/>
+          </a:bodyPr>
+          <a:lstStyle/>
+          <a:p>
+            <a:pPr>
+              <a:spcAft>
+                <a:spcPts val="1200"/>
+              </a:spcAft>
+            </a:pPr>
+            <a:r>
+              <a:rPr sz="1600" b="0">
+                <a:solidFill>
+                  <a:srgbClr val="E2E8F0"/>
+                </a:solidFill>
+                <a:latin typeface="PingFang TC"/>
+                <a:ea typeface="PingFang TC"/>
+              </a:rPr>
+              <a:t>✓  7 個 API 端點 + 管理頁前端（建立/清單/編輯/刪除/分析）</a:t>
+            </a:r>
+          </a:p>
+          <a:p>
+            <a:pPr>
+              <a:spcAft>
+                <a:spcPts val="1200"/>
+              </a:spcAft>
+            </a:pPr>
+            <a:r>
+              <a:rPr sz="1600" b="0">
+                <a:solidFill>
+                  <a:srgbClr val="E2E8F0"/>
+                </a:solidFill>
+                <a:latin typeface="PingFang TC"/>
+                <a:ea typeface="PingFang TC"/>
+              </a:rPr>
+              <a:t>✓  全部 curl 驗證通過：302 / 404 / 410 / 8 碼 token / 正規化 / SSRF / 過期</a:t>
+            </a:r>
+          </a:p>
+          <a:p>
+            <a:pPr>
+              <a:spcAft>
+                <a:spcPts val="1200"/>
+              </a:spcAft>
+            </a:pPr>
+            <a:r>
+              <a:rPr sz="1600" b="0">
+                <a:solidFill>
+                  <a:srgbClr val="E2E8F0"/>
+                </a:solidFill>
+                <a:latin typeface="PingFang TC"/>
+                <a:ea typeface="PingFang TC"/>
+              </a:rPr>
+              <a:t>✓  production 替換點已在程式註解標明（Redis / 佇列 / CDN / 預聚合 / PostgreSQL）</a:t>
+            </a:r>
+          </a:p>
+          <a:p>
+            <a:pPr>
+              <a:spcAft>
+                <a:spcPts val="1200"/>
+              </a:spcAft>
+            </a:pPr>
+            <a:r>
+              <a:rPr sz="1600" b="0">
+                <a:solidFill>
+                  <a:srgbClr val="E2E8F0"/>
+                </a:solidFill>
+                <a:latin typeface="PingFang TC"/>
+                <a:ea typeface="PingFang TC"/>
+              </a:rPr>
+              <a:t>✓  設計依據：DESIGN.md（16 題決策 + 優劣分析）</a:t>
+            </a:r>
+          </a:p>
+        </p:txBody>
+      </p:sp>
+    </p:spTree>
+  </p:cSld>
+  <p:clrMapOvr>
+    <a:masterClrMapping/>
+  </p:clrMapOvr>
+</p:sld>
+</file>
+
+<file path=ppt/slides/slide32.xml><?xml version="1.0" encoding="utf-8"?>
+<p:sld xmlns:a="http://schemas.openxmlformats.org/drawingml/2006/main" xmlns:p="http://schemas.openxmlformats.org/presentationml/2006/main" xmlns:r="http://schemas.openxmlformats.org/officeDocument/2006/relationships">
+  <p:cSld>
+    <p:spTree>
+      <p:nvGrpSpPr>
+        <p:cNvPr id="1" name=""/>
+        <p:cNvGrpSpPr/>
+        <p:nvPr/>
+      </p:nvGrpSpPr>
+      <p:grpSpPr/>
+      <p:sp>
+        <p:nvSpPr>
+          <p:cNvPr id="2" name="Rectangle 1"/>
+          <p:cNvSpPr/>
+          <p:nvPr/>
+        </p:nvSpPr>
+        <p:spPr>
+          <a:xfrm>
+            <a:off x="0" y="0"/>
             <a:ext cx="164592" cy="6858000"/>
           </a:xfrm>
           <a:prstGeom prst="rect">
@@ -21063,7 +21795,7 @@
 </p:sld>
 </file>
 
-<file path=ppt/slides/slide32.xml><?xml version="1.0" encoding="utf-8"?>
+<file path=ppt/slides/slide33.xml><?xml version="1.0" encoding="utf-8"?>
 <p:sld xmlns:a="http://schemas.openxmlformats.org/drawingml/2006/main" xmlns:p="http://schemas.openxmlformats.org/presentationml/2006/main" xmlns:r="http://schemas.openxmlformats.org/officeDocument/2006/relationships">
   <p:cSld>
     <p:spTree>
@@ -21715,7 +22447,7 @@
 </p:sld>
 </file>
 
-<file path=ppt/slides/slide33.xml><?xml version="1.0" encoding="utf-8"?>
+<file path=ppt/slides/slide34.xml><?xml version="1.0" encoding="utf-8"?>
 <p:sld xmlns:a="http://schemas.openxmlformats.org/drawingml/2006/main" xmlns:p="http://schemas.openxmlformats.org/presentationml/2006/main" xmlns:r="http://schemas.openxmlformats.org/officeDocument/2006/relationships">
   <p:cSld>
     <p:spTree>

--- a/QR Code Generator/QR_Code_Generator.pptx
+++ b/QR Code Generator/QR_Code_Generator.pptx
@@ -39,6 +39,8 @@
     <p:sldId id="287" r:id="rId38"/>
     <p:sldId id="288" r:id="rId39"/>
     <p:sldId id="289" r:id="rId40"/>
+    <p:sldId id="290" r:id="rId41"/>
+    <p:sldId id="291" r:id="rId42"/>
   </p:sldIdLst>
   <p:sldSz cx="12191695" cy="6858000" type="screen4x3"/>
   <p:notesSz cx="6858000" cy="9144000"/>
@@ -7507,7 +7509,7 @@
                 <a:latin typeface="PingFang TC"/>
                 <a:ea typeface="PingFang TC"/>
               </a:rPr>
-              <a:t>09b · DEEP DIVE</a:t>
+              <a:t>附錄 · CACHE 策略</a:t>
             </a:r>
           </a:p>
           <a:p>
@@ -7524,525 +7526,21 @@
                 <a:latin typeface="PingFang TC"/>
                 <a:ea typeface="PingFang TC"/>
               </a:rPr>
-              <a:t>Cache 寫策略 — 讀 cache-aside，寫 write-around</a:t>
-            </a:r>
-          </a:p>
-        </p:txBody>
-      </p:sp>
-      <p:sp>
-        <p:nvSpPr>
-          <p:cNvPr id="4" name="Rounded Rectangle 3"/>
-          <p:cNvSpPr/>
-          <p:nvPr/>
-        </p:nvSpPr>
-        <p:spPr>
-          <a:xfrm>
-            <a:off x="640080" y="1783080"/>
-            <a:ext cx="2286000" cy="640080"/>
-          </a:xfrm>
-          <a:prstGeom prst="roundRect">
-            <a:avLst/>
-          </a:prstGeom>
-          <a:solidFill>
-            <a:srgbClr val="059669"/>
-          </a:solidFill>
-          <a:ln>
-            <a:solidFill>
-              <a:srgbClr val="059669"/>
-            </a:solidFill>
-          </a:ln>
-          <a:effectLst/>
-        </p:spPr>
-        <p:style>
-          <a:lnRef idx="1">
-            <a:schemeClr val="accent1"/>
-          </a:lnRef>
-          <a:fillRef idx="3">
-            <a:schemeClr val="accent1"/>
-          </a:fillRef>
-          <a:effectRef idx="2">
-            <a:schemeClr val="accent1"/>
-          </a:effectRef>
-          <a:fontRef idx="minor">
-            <a:schemeClr val="lt1"/>
-          </a:fontRef>
-        </p:style>
-        <p:txBody>
-          <a:bodyPr rtlCol="0" anchor="ctr" wrap="square" tIns="25400" bIns="25400"/>
-          <a:lstStyle/>
-          <a:p>
-            <a:pPr algn="ctr"/>
-            <a:r>
-              <a:rPr sz="1300" b="1">
-                <a:solidFill>
-                  <a:srgbClr val="FFFFFF"/>
-                </a:solidFill>
-                <a:latin typeface="PingFang TC"/>
-                <a:ea typeface="PingFang TC"/>
-              </a:rPr>
-              <a:t>redirect 讀</a:t>
-            </a:r>
-          </a:p>
-        </p:txBody>
-      </p:sp>
-      <p:sp>
-        <p:nvSpPr>
-          <p:cNvPr id="5" name="Rounded Rectangle 4"/>
-          <p:cNvSpPr/>
-          <p:nvPr/>
-        </p:nvSpPr>
-        <p:spPr>
-          <a:xfrm>
-            <a:off x="3063240" y="1783080"/>
-            <a:ext cx="4114800" cy="640080"/>
-          </a:xfrm>
-          <a:prstGeom prst="roundRect">
-            <a:avLst/>
-          </a:prstGeom>
-          <a:solidFill>
-            <a:srgbClr val="FFFFFF"/>
-          </a:solidFill>
-          <a:ln>
-            <a:solidFill>
-              <a:srgbClr val="FFFFFF"/>
-            </a:solidFill>
-          </a:ln>
-          <a:effectLst/>
-        </p:spPr>
-        <p:style>
-          <a:lnRef idx="1">
-            <a:schemeClr val="accent1"/>
-          </a:lnRef>
-          <a:fillRef idx="3">
-            <a:schemeClr val="accent1"/>
-          </a:fillRef>
-          <a:effectRef idx="2">
-            <a:schemeClr val="accent1"/>
-          </a:effectRef>
-          <a:fontRef idx="minor">
-            <a:schemeClr val="lt1"/>
-          </a:fontRef>
-        </p:style>
-        <p:txBody>
-          <a:bodyPr rtlCol="0" anchor="ctr" wrap="square" tIns="25400" bIns="25400"/>
-          <a:lstStyle/>
-          <a:p>
-            <a:pPr algn="ctr"/>
-            <a:r>
-              <a:rPr sz="1200" b="0">
-                <a:solidFill>
-                  <a:srgbClr val="0F172A"/>
-                </a:solidFill>
-                <a:latin typeface="PingFang TC"/>
-                <a:ea typeface="PingFang TC"/>
-              </a:rPr>
-              <a:t>miss → 查 DB → 回填</a:t>
-            </a:r>
-          </a:p>
-        </p:txBody>
-      </p:sp>
-      <p:sp>
-        <p:nvSpPr>
-          <p:cNvPr id="6" name="Rounded Rectangle 5"/>
-          <p:cNvSpPr/>
-          <p:nvPr/>
-        </p:nvSpPr>
-        <p:spPr>
-          <a:xfrm>
-            <a:off x="7315200" y="1783080"/>
-            <a:ext cx="4206240" cy="640080"/>
-          </a:xfrm>
-          <a:prstGeom prst="roundRect">
-            <a:avLst/>
-          </a:prstGeom>
-          <a:solidFill>
-            <a:srgbClr val="FFFFFF"/>
-          </a:solidFill>
-          <a:ln>
-            <a:solidFill>
-              <a:srgbClr val="FFFFFF"/>
-            </a:solidFill>
-          </a:ln>
-          <a:effectLst/>
-        </p:spPr>
-        <p:style>
-          <a:lnRef idx="1">
-            <a:schemeClr val="accent1"/>
-          </a:lnRef>
-          <a:fillRef idx="3">
-            <a:schemeClr val="accent1"/>
-          </a:fillRef>
-          <a:effectRef idx="2">
-            <a:schemeClr val="accent1"/>
-          </a:effectRef>
-          <a:fontRef idx="minor">
-            <a:schemeClr val="lt1"/>
-          </a:fontRef>
-        </p:style>
-        <p:txBody>
-          <a:bodyPr rtlCol="0" anchor="ctr" wrap="square" tIns="25400" bIns="25400"/>
-          <a:lstStyle/>
-          <a:p>
-            <a:pPr algn="ctr"/>
-            <a:r>
-              <a:rPr sz="1200" b="1">
-                <a:solidFill>
-                  <a:srgbClr val="059669"/>
-                </a:solidFill>
-                <a:latin typeface="PingFang TC"/>
-                <a:ea typeface="PingFang TC"/>
-              </a:rPr>
-              <a:t>cache-aside</a:t>
-            </a:r>
-          </a:p>
-        </p:txBody>
-      </p:sp>
-      <p:sp>
-        <p:nvSpPr>
-          <p:cNvPr id="7" name="Rounded Rectangle 6"/>
-          <p:cNvSpPr/>
-          <p:nvPr/>
-        </p:nvSpPr>
-        <p:spPr>
-          <a:xfrm>
-            <a:off x="640080" y="2606040"/>
-            <a:ext cx="2286000" cy="640080"/>
-          </a:xfrm>
-          <a:prstGeom prst="roundRect">
-            <a:avLst/>
-          </a:prstGeom>
-          <a:solidFill>
-            <a:srgbClr val="2563EB"/>
-          </a:solidFill>
-          <a:ln>
-            <a:solidFill>
-              <a:srgbClr val="2563EB"/>
-            </a:solidFill>
-          </a:ln>
-          <a:effectLst/>
-        </p:spPr>
-        <p:style>
-          <a:lnRef idx="1">
-            <a:schemeClr val="accent1"/>
-          </a:lnRef>
-          <a:fillRef idx="3">
-            <a:schemeClr val="accent1"/>
-          </a:fillRef>
-          <a:effectRef idx="2">
-            <a:schemeClr val="accent1"/>
-          </a:effectRef>
-          <a:fontRef idx="minor">
-            <a:schemeClr val="lt1"/>
-          </a:fontRef>
-        </p:style>
-        <p:txBody>
-          <a:bodyPr rtlCol="0" anchor="ctr" wrap="square" tIns="25400" bIns="25400"/>
-          <a:lstStyle/>
-          <a:p>
-            <a:pPr algn="ctr"/>
-            <a:r>
-              <a:rPr sz="1300" b="1">
-                <a:solidFill>
-                  <a:srgbClr val="FFFFFF"/>
-                </a:solidFill>
-                <a:latin typeface="PingFang TC"/>
-                <a:ea typeface="PingFang TC"/>
-              </a:rPr>
-              <a:t>create</a:t>
-            </a:r>
-          </a:p>
-        </p:txBody>
-      </p:sp>
-      <p:sp>
-        <p:nvSpPr>
-          <p:cNvPr id="8" name="Rounded Rectangle 7"/>
-          <p:cNvSpPr/>
-          <p:nvPr/>
-        </p:nvSpPr>
-        <p:spPr>
-          <a:xfrm>
-            <a:off x="3063240" y="2606040"/>
-            <a:ext cx="4114800" cy="640080"/>
-          </a:xfrm>
-          <a:prstGeom prst="roundRect">
-            <a:avLst/>
-          </a:prstGeom>
-          <a:solidFill>
-            <a:srgbClr val="FFFFFF"/>
-          </a:solidFill>
-          <a:ln>
-            <a:solidFill>
-              <a:srgbClr val="FFFFFF"/>
-            </a:solidFill>
-          </a:ln>
-          <a:effectLst/>
-        </p:spPr>
-        <p:style>
-          <a:lnRef idx="1">
-            <a:schemeClr val="accent1"/>
-          </a:lnRef>
-          <a:fillRef idx="3">
-            <a:schemeClr val="accent1"/>
-          </a:fillRef>
-          <a:effectRef idx="2">
-            <a:schemeClr val="accent1"/>
-          </a:effectRef>
-          <a:fontRef idx="minor">
-            <a:schemeClr val="lt1"/>
-          </a:fontRef>
-        </p:style>
-        <p:txBody>
-          <a:bodyPr rtlCol="0" anchor="ctr" wrap="square" tIns="25400" bIns="25400"/>
-          <a:lstStyle/>
-          <a:p>
-            <a:pPr algn="ctr"/>
-            <a:r>
-              <a:rPr sz="1200" b="0">
-                <a:solidFill>
-                  <a:srgbClr val="0F172A"/>
-                </a:solidFill>
-                <a:latin typeface="PingFang TC"/>
-                <a:ea typeface="PingFang TC"/>
-              </a:rPr>
-              <a:t>寫 DB → 順手 set（暖）</a:t>
-            </a:r>
-          </a:p>
-        </p:txBody>
-      </p:sp>
-      <p:sp>
-        <p:nvSpPr>
-          <p:cNvPr id="9" name="Rounded Rectangle 8"/>
-          <p:cNvSpPr/>
-          <p:nvPr/>
-        </p:nvSpPr>
-        <p:spPr>
-          <a:xfrm>
-            <a:off x="7315200" y="2606040"/>
-            <a:ext cx="4206240" cy="640080"/>
-          </a:xfrm>
-          <a:prstGeom prst="roundRect">
-            <a:avLst/>
-          </a:prstGeom>
-          <a:solidFill>
-            <a:srgbClr val="FFFFFF"/>
-          </a:solidFill>
-          <a:ln>
-            <a:solidFill>
-              <a:srgbClr val="FFFFFF"/>
-            </a:solidFill>
-          </a:ln>
-          <a:effectLst/>
-        </p:spPr>
-        <p:style>
-          <a:lnRef idx="1">
-            <a:schemeClr val="accent1"/>
-          </a:lnRef>
-          <a:fillRef idx="3">
-            <a:schemeClr val="accent1"/>
-          </a:fillRef>
-          <a:effectRef idx="2">
-            <a:schemeClr val="accent1"/>
-          </a:effectRef>
-          <a:fontRef idx="minor">
-            <a:schemeClr val="lt1"/>
-          </a:fontRef>
-        </p:style>
-        <p:txBody>
-          <a:bodyPr rtlCol="0" anchor="ctr" wrap="square" tIns="25400" bIns="25400"/>
-          <a:lstStyle/>
-          <a:p>
-            <a:pPr algn="ctr"/>
-            <a:r>
-              <a:rPr sz="1200" b="1">
-                <a:solidFill>
-                  <a:srgbClr val="2563EB"/>
-                </a:solidFill>
-                <a:latin typeface="PingFang TC"/>
-                <a:ea typeface="PingFang TC"/>
-              </a:rPr>
-              <a:t>write-through（小優化）</a:t>
-            </a:r>
-          </a:p>
-        </p:txBody>
-      </p:sp>
-      <p:sp>
-        <p:nvSpPr>
-          <p:cNvPr id="10" name="Rounded Rectangle 9"/>
-          <p:cNvSpPr/>
-          <p:nvPr/>
-        </p:nvSpPr>
-        <p:spPr>
-          <a:xfrm>
-            <a:off x="640080" y="3429000"/>
-            <a:ext cx="2286000" cy="640080"/>
-          </a:xfrm>
-          <a:prstGeom prst="roundRect">
-            <a:avLst/>
-          </a:prstGeom>
-          <a:solidFill>
-            <a:srgbClr val="DC2626"/>
-          </a:solidFill>
-          <a:ln>
-            <a:solidFill>
-              <a:srgbClr val="DC2626"/>
-            </a:solidFill>
-          </a:ln>
-          <a:effectLst/>
-        </p:spPr>
-        <p:style>
-          <a:lnRef idx="1">
-            <a:schemeClr val="accent1"/>
-          </a:lnRef>
-          <a:fillRef idx="3">
-            <a:schemeClr val="accent1"/>
-          </a:fillRef>
-          <a:effectRef idx="2">
-            <a:schemeClr val="accent1"/>
-          </a:effectRef>
-          <a:fontRef idx="minor">
-            <a:schemeClr val="lt1"/>
-          </a:fontRef>
-        </p:style>
-        <p:txBody>
-          <a:bodyPr rtlCol="0" anchor="ctr" wrap="square" tIns="25400" bIns="25400"/>
-          <a:lstStyle/>
-          <a:p>
-            <a:pPr algn="ctr"/>
-            <a:r>
-              <a:rPr sz="1300" b="1">
-                <a:solidFill>
-                  <a:srgbClr val="FFFFFF"/>
-                </a:solidFill>
-                <a:latin typeface="PingFang TC"/>
-                <a:ea typeface="PingFang TC"/>
-              </a:rPr>
-              <a:t>update / delete</a:t>
-            </a:r>
-          </a:p>
-        </p:txBody>
-      </p:sp>
-      <p:sp>
-        <p:nvSpPr>
-          <p:cNvPr id="11" name="Rounded Rectangle 10"/>
-          <p:cNvSpPr/>
-          <p:nvPr/>
-        </p:nvSpPr>
-        <p:spPr>
-          <a:xfrm>
-            <a:off x="3063240" y="3429000"/>
-            <a:ext cx="4114800" cy="640080"/>
-          </a:xfrm>
-          <a:prstGeom prst="roundRect">
-            <a:avLst/>
-          </a:prstGeom>
-          <a:solidFill>
-            <a:srgbClr val="FFFFFF"/>
-          </a:solidFill>
-          <a:ln>
-            <a:solidFill>
-              <a:srgbClr val="FFFFFF"/>
-            </a:solidFill>
-          </a:ln>
-          <a:effectLst/>
-        </p:spPr>
-        <p:style>
-          <a:lnRef idx="1">
-            <a:schemeClr val="accent1"/>
-          </a:lnRef>
-          <a:fillRef idx="3">
-            <a:schemeClr val="accent1"/>
-          </a:fillRef>
-          <a:effectRef idx="2">
-            <a:schemeClr val="accent1"/>
-          </a:effectRef>
-          <a:fontRef idx="minor">
-            <a:schemeClr val="lt1"/>
-          </a:fontRef>
-        </p:style>
-        <p:txBody>
-          <a:bodyPr rtlCol="0" anchor="ctr" wrap="square" tIns="25400" bIns="25400"/>
-          <a:lstStyle/>
-          <a:p>
-            <a:pPr algn="ctr"/>
-            <a:r>
-              <a:rPr sz="1200" b="0">
-                <a:solidFill>
-                  <a:srgbClr val="0F172A"/>
-                </a:solidFill>
-                <a:latin typeface="PingFang TC"/>
-                <a:ea typeface="PingFang TC"/>
-              </a:rPr>
-              <a:t>寫 DB →（commit 後）delete</a:t>
-            </a:r>
-          </a:p>
-        </p:txBody>
-      </p:sp>
-      <p:sp>
-        <p:nvSpPr>
-          <p:cNvPr id="12" name="Rounded Rectangle 11"/>
-          <p:cNvSpPr/>
-          <p:nvPr/>
-        </p:nvSpPr>
-        <p:spPr>
-          <a:xfrm>
-            <a:off x="7315200" y="3429000"/>
-            <a:ext cx="4206240" cy="640080"/>
-          </a:xfrm>
-          <a:prstGeom prst="roundRect">
-            <a:avLst/>
-          </a:prstGeom>
-          <a:solidFill>
-            <a:srgbClr val="FFFFFF"/>
-          </a:solidFill>
-          <a:ln>
-            <a:solidFill>
-              <a:srgbClr val="FFFFFF"/>
-            </a:solidFill>
-          </a:ln>
-          <a:effectLst/>
-        </p:spPr>
-        <p:style>
-          <a:lnRef idx="1">
-            <a:schemeClr val="accent1"/>
-          </a:lnRef>
-          <a:fillRef idx="3">
-            <a:schemeClr val="accent1"/>
-          </a:fillRef>
-          <a:effectRef idx="2">
-            <a:schemeClr val="accent1"/>
-          </a:effectRef>
-          <a:fontRef idx="minor">
-            <a:schemeClr val="lt1"/>
-          </a:fontRef>
-        </p:style>
-        <p:txBody>
-          <a:bodyPr rtlCol="0" anchor="ctr" wrap="square" tIns="25400" bIns="25400"/>
-          <a:lstStyle/>
-          <a:p>
-            <a:pPr algn="ctr"/>
-            <a:r>
-              <a:rPr sz="1200" b="1">
-                <a:solidFill>
-                  <a:srgbClr val="DC2626"/>
-                </a:solidFill>
-                <a:latin typeface="PingFang TC"/>
-                <a:ea typeface="PingFang TC"/>
-              </a:rPr>
-              <a:t>write-around / invalidate</a:t>
-            </a:r>
-          </a:p>
-        </p:txBody>
-      </p:sp>
-      <p:sp>
-        <p:nvSpPr>
-          <p:cNvPr id="13" name="TextBox 12"/>
+              <a:t>四種 Cache 策略 — 讀寫怎麼走</a:t>
+            </a:r>
+          </a:p>
+        </p:txBody>
+      </p:sp>
+      <p:sp>
+        <p:nvSpPr>
+          <p:cNvPr id="4" name="TextBox 3"/>
           <p:cNvSpPr txBox="1"/>
           <p:nvPr/>
         </p:nvSpPr>
         <p:spPr>
           <a:xfrm>
-            <a:off x="640080" y="4480560"/>
-            <a:ext cx="10881360" cy="2103120"/>
+            <a:off x="548640" y="1325880"/>
+            <a:ext cx="11155680" cy="685800"/>
           </a:xfrm>
           <a:prstGeom prst="rect">
             <a:avLst/>
@@ -8050,14 +7548,14 @@
           <a:noFill/>
         </p:spPr>
         <p:txBody>
-          <a:bodyPr wrap="square">
+          <a:bodyPr wrap="square" anchor="t">
             <a:spAutoFit/>
           </a:bodyPr>
           <a:lstStyle/>
           <a:p>
-            <a:pPr>
+            <a:pPr algn="l">
               <a:spcAft>
-                <a:spcPts val="700"/>
+                <a:spcPts val="200"/>
               </a:spcAft>
             </a:pPr>
             <a:r>
@@ -8068,13 +7566,13 @@
                 <a:latin typeface="PingFang TC"/>
                 <a:ea typeface="PingFang TC"/>
               </a:rPr>
-              <a:t>•  為何寫時 invalidate 而非 write-through：</a:t>
-            </a:r>
-          </a:p>
-          <a:p>
-            <a:pPr lvl="1">
+              <a:t>心法:cache 本質是 replication。兩個問題決定策略 →（1）誰是 master（DB 還是 cache）（2）複製是同步還是非同步。</a:t>
+            </a:r>
+          </a:p>
+          <a:p>
+            <a:pPr algn="l">
               <a:spcAft>
-                <a:spcPts val="700"/>
+                <a:spcPts val="400"/>
               </a:spcAft>
             </a:pPr>
             <a:r>
@@ -8085,13 +7583,534 @@
                 <a:latin typeface="PingFang TC"/>
                 <a:ea typeface="PingFang TC"/>
               </a:rPr>
-              <a:t>–  read-heavy 且非每筆會被讀 → write-through 白佔記憶體、擠掉熱門 token；write-around 只快取真正被讀的工作集</a:t>
-            </a:r>
-          </a:p>
-          <a:p>
-            <a:pPr lvl="1">
+              <a:t>策略沒有絕對對錯,看 write/read ratio、persistency、consistency 選最適合的。</a:t>
+            </a:r>
+          </a:p>
+        </p:txBody>
+      </p:sp>
+      <p:graphicFrame>
+        <p:nvGraphicFramePr>
+          <p:cNvPr id="5" name="Table 4"/>
+          <p:cNvGraphicFramePr>
+            <a:graphicFrameLocks noGrp="1"/>
+          </p:cNvGraphicFramePr>
+          <p:nvPr/>
+        </p:nvGraphicFramePr>
+        <p:xfrm>
+          <a:off x="548640" y="2331720"/>
+          <a:ext cx="11109960" cy="2926080"/>
+        </p:xfrm>
+        <a:graphic>
+          <a:graphicData uri="http://schemas.openxmlformats.org/drawingml/2006/table">
+            <a:tbl>
+              <a:tblPr firstRow="1" bandRow="1">
+                <a:tableStyleId>{5C22544A-7EE6-4342-B048-85BDC9FD1C3A}</a:tableStyleId>
+              </a:tblPr>
+              <a:tblGrid>
+                <a:gridCol w="2011680"/>
+                <a:gridCol w="3246120"/>
+                <a:gridCol w="3840480"/>
+                <a:gridCol w="2011680"/>
+              </a:tblGrid>
+              <a:tr h="585216">
+                <a:tc>
+                  <a:txBody>
+                    <a:bodyPr/>
+                    <a:lstStyle/>
+                    <a:p>
+                      <a:r>
+                        <a:rPr sz="1200" b="1">
+                          <a:solidFill>
+                            <a:srgbClr val="FFFFFF"/>
+                          </a:solidFill>
+                          <a:latin typeface="PingFang TC"/>
+                          <a:ea typeface="PingFang TC"/>
+                        </a:rPr>
+                        <a:t>策略</a:t>
+                      </a:r>
+                    </a:p>
+                  </a:txBody>
+                  <a:tcPr marT="38100" marB="38100" marL="101600" anchor="ctr">
+                    <a:solidFill>
+                      <a:srgbClr val="2563EB"/>
+                    </a:solidFill>
+                  </a:tcPr>
+                </a:tc>
+                <a:tc>
+                  <a:txBody>
+                    <a:bodyPr/>
+                    <a:lstStyle/>
+                    <a:p>
+                      <a:r>
+                        <a:rPr sz="1200" b="1">
+                          <a:solidFill>
+                            <a:srgbClr val="FFFFFF"/>
+                          </a:solidFill>
+                          <a:latin typeface="PingFang TC"/>
+                          <a:ea typeface="PingFang TC"/>
+                        </a:rPr>
+                        <a:t>讀（read）</a:t>
+                      </a:r>
+                    </a:p>
+                  </a:txBody>
+                  <a:tcPr marT="38100" marB="38100" marL="101600" anchor="ctr">
+                    <a:solidFill>
+                      <a:srgbClr val="2563EB"/>
+                    </a:solidFill>
+                  </a:tcPr>
+                </a:tc>
+                <a:tc>
+                  <a:txBody>
+                    <a:bodyPr/>
+                    <a:lstStyle/>
+                    <a:p>
+                      <a:r>
+                        <a:rPr sz="1200" b="1">
+                          <a:solidFill>
+                            <a:srgbClr val="FFFFFF"/>
+                          </a:solidFill>
+                          <a:latin typeface="PingFang TC"/>
+                          <a:ea typeface="PingFang TC"/>
+                        </a:rPr>
+                        <a:t>寫（write）</a:t>
+                      </a:r>
+                    </a:p>
+                  </a:txBody>
+                  <a:tcPr marT="38100" marB="38100" marL="101600" anchor="ctr">
+                    <a:solidFill>
+                      <a:srgbClr val="2563EB"/>
+                    </a:solidFill>
+                  </a:tcPr>
+                </a:tc>
+                <a:tc>
+                  <a:txBody>
+                    <a:bodyPr/>
+                    <a:lstStyle/>
+                    <a:p>
+                      <a:r>
+                        <a:rPr sz="1200" b="1">
+                          <a:solidFill>
+                            <a:srgbClr val="FFFFFF"/>
+                          </a:solidFill>
+                          <a:latin typeface="PingFang TC"/>
+                          <a:ea typeface="PingFang TC"/>
+                        </a:rPr>
+                        <a:t>master / 複製</a:t>
+                      </a:r>
+                    </a:p>
+                  </a:txBody>
+                  <a:tcPr marT="38100" marB="38100" marL="101600" anchor="ctr">
+                    <a:solidFill>
+                      <a:srgbClr val="2563EB"/>
+                    </a:solidFill>
+                  </a:tcPr>
+                </a:tc>
+              </a:tr>
+              <a:tr h="585216">
+                <a:tc>
+                  <a:txBody>
+                    <a:bodyPr/>
+                    <a:lstStyle/>
+                    <a:p>
+                      <a:r>
+                        <a:rPr sz="1200" b="1">
+                          <a:solidFill>
+                            <a:srgbClr val="0F172A"/>
+                          </a:solidFill>
+                          <a:latin typeface="PingFang TC"/>
+                          <a:ea typeface="PingFang TC"/>
+                        </a:rPr>
+                        <a:t>Cache Aside</a:t>
+                      </a:r>
+                    </a:p>
+                  </a:txBody>
+                  <a:tcPr marT="38100" marB="38100" marL="101600" anchor="ctr">
+                    <a:solidFill>
+                      <a:srgbClr val="FFFFFF"/>
+                    </a:solidFill>
+                  </a:tcPr>
+                </a:tc>
+                <a:tc>
+                  <a:txBody>
+                    <a:bodyPr/>
+                    <a:lstStyle/>
+                    <a:p>
+                      <a:r>
+                        <a:rPr sz="1200" b="0">
+                          <a:solidFill>
+                            <a:srgbClr val="64748B"/>
+                          </a:solidFill>
+                          <a:latin typeface="PingFang TC"/>
+                          <a:ea typeface="PingFang TC"/>
+                        </a:rPr>
+                        <a:t>先查 cache,miss → 讀 DB → 回填</a:t>
+                      </a:r>
+                    </a:p>
+                  </a:txBody>
+                  <a:tcPr marT="38100" marB="38100" marL="101600" anchor="ctr">
+                    <a:solidFill>
+                      <a:srgbClr val="FFFFFF"/>
+                    </a:solidFill>
+                  </a:tcPr>
+                </a:tc>
+                <a:tc>
+                  <a:txBody>
+                    <a:bodyPr/>
+                    <a:lstStyle/>
+                    <a:p>
+                      <a:r>
+                        <a:rPr sz="1200" b="0">
+                          <a:solidFill>
+                            <a:srgbClr val="64748B"/>
+                          </a:solidFill>
+                          <a:latin typeface="PingFang TC"/>
+                          <a:ea typeface="PingFang TC"/>
+                        </a:rPr>
+                        <a:t>直接寫 DB（app 自己管 cache）</a:t>
+                      </a:r>
+                    </a:p>
+                  </a:txBody>
+                  <a:tcPr marT="38100" marB="38100" marL="101600" anchor="ctr">
+                    <a:solidFill>
+                      <a:srgbClr val="FFFFFF"/>
+                    </a:solidFill>
+                  </a:tcPr>
+                </a:tc>
+                <a:tc>
+                  <a:txBody>
+                    <a:bodyPr/>
+                    <a:lstStyle/>
+                    <a:p>
+                      <a:r>
+                        <a:rPr sz="1200" b="0">
+                          <a:solidFill>
+                            <a:srgbClr val="64748B"/>
+                          </a:solidFill>
+                          <a:latin typeface="PingFang TC"/>
+                          <a:ea typeface="PingFang TC"/>
+                        </a:rPr>
+                        <a:t>DB / 惰性</a:t>
+                      </a:r>
+                    </a:p>
+                  </a:txBody>
+                  <a:tcPr marT="38100" marB="38100" marL="101600" anchor="ctr">
+                    <a:solidFill>
+                      <a:srgbClr val="FFFFFF"/>
+                    </a:solidFill>
+                  </a:tcPr>
+                </a:tc>
+              </a:tr>
+              <a:tr h="585216">
+                <a:tc>
+                  <a:txBody>
+                    <a:bodyPr/>
+                    <a:lstStyle/>
+                    <a:p>
+                      <a:r>
+                        <a:rPr sz="1200" b="1">
+                          <a:solidFill>
+                            <a:srgbClr val="0F172A"/>
+                          </a:solidFill>
+                          <a:latin typeface="PingFang TC"/>
+                          <a:ea typeface="PingFang TC"/>
+                        </a:rPr>
+                        <a:t>Read Through</a:t>
+                      </a:r>
+                    </a:p>
+                  </a:txBody>
+                  <a:tcPr marT="38100" marB="38100" marL="101600" anchor="ctr">
+                    <a:solidFill>
+                      <a:srgbClr val="F1F5F9"/>
+                    </a:solidFill>
+                  </a:tcPr>
+                </a:tc>
+                <a:tc>
+                  <a:txBody>
+                    <a:bodyPr/>
+                    <a:lstStyle/>
+                    <a:p>
+                      <a:r>
+                        <a:rPr sz="1200" b="0">
+                          <a:solidFill>
+                            <a:srgbClr val="64748B"/>
+                          </a:solidFill>
+                          <a:latin typeface="PingFang TC"/>
+                          <a:ea typeface="PingFang TC"/>
+                        </a:rPr>
+                        <a:t>只跟 cache 要,cache 自己回源 DB</a:t>
+                      </a:r>
+                    </a:p>
+                  </a:txBody>
+                  <a:tcPr marT="38100" marB="38100" marL="101600" anchor="ctr">
+                    <a:solidFill>
+                      <a:srgbClr val="F1F5F9"/>
+                    </a:solidFill>
+                  </a:tcPr>
+                </a:tc>
+                <a:tc>
+                  <a:txBody>
+                    <a:bodyPr/>
+                    <a:lstStyle/>
+                    <a:p>
+                      <a:r>
+                        <a:rPr sz="1200" b="0">
+                          <a:solidFill>
+                            <a:srgbClr val="64748B"/>
+                          </a:solidFill>
+                          <a:latin typeface="PingFang TC"/>
+                          <a:ea typeface="PingFang TC"/>
+                        </a:rPr>
+                        <a:t>直接寫 DB</a:t>
+                      </a:r>
+                    </a:p>
+                  </a:txBody>
+                  <a:tcPr marT="38100" marB="38100" marL="101600" anchor="ctr">
+                    <a:solidFill>
+                      <a:srgbClr val="F1F5F9"/>
+                    </a:solidFill>
+                  </a:tcPr>
+                </a:tc>
+                <a:tc>
+                  <a:txBody>
+                    <a:bodyPr/>
+                    <a:lstStyle/>
+                    <a:p>
+                      <a:r>
+                        <a:rPr sz="1200" b="0">
+                          <a:solidFill>
+                            <a:srgbClr val="64748B"/>
+                          </a:solidFill>
+                          <a:latin typeface="PingFang TC"/>
+                          <a:ea typeface="PingFang TC"/>
+                        </a:rPr>
+                        <a:t>DB / 惰性</a:t>
+                      </a:r>
+                    </a:p>
+                  </a:txBody>
+                  <a:tcPr marT="38100" marB="38100" marL="101600" anchor="ctr">
+                    <a:solidFill>
+                      <a:srgbClr val="F1F5F9"/>
+                    </a:solidFill>
+                  </a:tcPr>
+                </a:tc>
+              </a:tr>
+              <a:tr h="585216">
+                <a:tc>
+                  <a:txBody>
+                    <a:bodyPr/>
+                    <a:lstStyle/>
+                    <a:p>
+                      <a:r>
+                        <a:rPr sz="1200" b="1">
+                          <a:solidFill>
+                            <a:srgbClr val="0F172A"/>
+                          </a:solidFill>
+                          <a:latin typeface="PingFang TC"/>
+                          <a:ea typeface="PingFang TC"/>
+                        </a:rPr>
+                        <a:t>Write Through</a:t>
+                      </a:r>
+                    </a:p>
+                  </a:txBody>
+                  <a:tcPr marT="38100" marB="38100" marL="101600" anchor="ctr">
+                    <a:solidFill>
+                      <a:srgbClr val="FFFFFF"/>
+                    </a:solidFill>
+                  </a:tcPr>
+                </a:tc>
+                <a:tc>
+                  <a:txBody>
+                    <a:bodyPr/>
+                    <a:lstStyle/>
+                    <a:p>
+                      <a:r>
+                        <a:rPr sz="1200" b="0">
+                          <a:solidFill>
+                            <a:srgbClr val="64748B"/>
+                          </a:solidFill>
+                          <a:latin typeface="PingFang TC"/>
+                          <a:ea typeface="PingFang TC"/>
+                        </a:rPr>
+                        <a:t>直接讀 cache</a:t>
+                      </a:r>
+                    </a:p>
+                  </a:txBody>
+                  <a:tcPr marT="38100" marB="38100" marL="101600" anchor="ctr">
+                    <a:solidFill>
+                      <a:srgbClr val="FFFFFF"/>
+                    </a:solidFill>
+                  </a:tcPr>
+                </a:tc>
+                <a:tc>
+                  <a:txBody>
+                    <a:bodyPr/>
+                    <a:lstStyle/>
+                    <a:p>
+                      <a:r>
+                        <a:rPr sz="1200" b="0">
+                          <a:solidFill>
+                            <a:srgbClr val="64748B"/>
+                          </a:solidFill>
+                          <a:latin typeface="PingFang TC"/>
+                          <a:ea typeface="PingFang TC"/>
+                        </a:rPr>
+                        <a:t>同時寫 cache + DB,兩者成功才算完成</a:t>
+                      </a:r>
+                    </a:p>
+                  </a:txBody>
+                  <a:tcPr marT="38100" marB="38100" marL="101600" anchor="ctr">
+                    <a:solidFill>
+                      <a:srgbClr val="FFFFFF"/>
+                    </a:solidFill>
+                  </a:tcPr>
+                </a:tc>
+                <a:tc>
+                  <a:txBody>
+                    <a:bodyPr/>
+                    <a:lstStyle/>
+                    <a:p>
+                      <a:r>
+                        <a:rPr sz="1200" b="0">
+                          <a:solidFill>
+                            <a:srgbClr val="64748B"/>
+                          </a:solidFill>
+                          <a:latin typeface="PingFang TC"/>
+                          <a:ea typeface="PingFang TC"/>
+                        </a:rPr>
+                        <a:t>同步</a:t>
+                      </a:r>
+                    </a:p>
+                  </a:txBody>
+                  <a:tcPr marT="38100" marB="38100" marL="101600" anchor="ctr">
+                    <a:solidFill>
+                      <a:srgbClr val="FFFFFF"/>
+                    </a:solidFill>
+                  </a:tcPr>
+                </a:tc>
+              </a:tr>
+              <a:tr h="585216">
+                <a:tc>
+                  <a:txBody>
+                    <a:bodyPr/>
+                    <a:lstStyle/>
+                    <a:p>
+                      <a:r>
+                        <a:rPr sz="1200" b="1">
+                          <a:solidFill>
+                            <a:srgbClr val="0F172A"/>
+                          </a:solidFill>
+                          <a:latin typeface="PingFang TC"/>
+                          <a:ea typeface="PingFang TC"/>
+                        </a:rPr>
+                        <a:t>Write Back</a:t>
+                      </a:r>
+                    </a:p>
+                  </a:txBody>
+                  <a:tcPr marT="38100" marB="38100" marL="101600" anchor="ctr">
+                    <a:solidFill>
+                      <a:srgbClr val="F1F5F9"/>
+                    </a:solidFill>
+                  </a:tcPr>
+                </a:tc>
+                <a:tc>
+                  <a:txBody>
+                    <a:bodyPr/>
+                    <a:lstStyle/>
+                    <a:p>
+                      <a:r>
+                        <a:rPr sz="1200" b="0">
+                          <a:solidFill>
+                            <a:srgbClr val="64748B"/>
+                          </a:solidFill>
+                          <a:latin typeface="PingFang TC"/>
+                          <a:ea typeface="PingFang TC"/>
+                        </a:rPr>
+                        <a:t>直接讀 cache</a:t>
+                      </a:r>
+                    </a:p>
+                  </a:txBody>
+                  <a:tcPr marT="38100" marB="38100" marL="101600" anchor="ctr">
+                    <a:solidFill>
+                      <a:srgbClr val="F1F5F9"/>
+                    </a:solidFill>
+                  </a:tcPr>
+                </a:tc>
+                <a:tc>
+                  <a:txBody>
+                    <a:bodyPr/>
+                    <a:lstStyle/>
+                    <a:p>
+                      <a:r>
+                        <a:rPr sz="1200" b="0">
+                          <a:solidFill>
+                            <a:srgbClr val="64748B"/>
+                          </a:solidFill>
+                          <a:latin typeface="PingFang TC"/>
+                          <a:ea typeface="PingFang TC"/>
+                        </a:rPr>
+                        <a:t>先寫 cache,再非同步刷回 DB</a:t>
+                      </a:r>
+                    </a:p>
+                  </a:txBody>
+                  <a:tcPr marT="38100" marB="38100" marL="101600" anchor="ctr">
+                    <a:solidFill>
+                      <a:srgbClr val="F1F5F9"/>
+                    </a:solidFill>
+                  </a:tcPr>
+                </a:tc>
+                <a:tc>
+                  <a:txBody>
+                    <a:bodyPr/>
+                    <a:lstStyle/>
+                    <a:p>
+                      <a:r>
+                        <a:rPr sz="1200" b="0">
+                          <a:solidFill>
+                            <a:srgbClr val="64748B"/>
+                          </a:solidFill>
+                          <a:latin typeface="PingFang TC"/>
+                          <a:ea typeface="PingFang TC"/>
+                        </a:rPr>
+                        <a:t>cache / 非同步</a:t>
+                      </a:r>
+                    </a:p>
+                  </a:txBody>
+                  <a:tcPr marT="38100" marB="38100" marL="101600" anchor="ctr">
+                    <a:solidFill>
+                      <a:srgbClr val="F1F5F9"/>
+                    </a:solidFill>
+                  </a:tcPr>
+                </a:tc>
+              </a:tr>
+            </a:tbl>
+          </a:graphicData>
+        </a:graphic>
+      </p:graphicFrame>
+      <p:sp>
+        <p:nvSpPr>
+          <p:cNvPr id="6" name="TextBox 5"/>
+          <p:cNvSpPr txBox="1"/>
+          <p:nvPr/>
+        </p:nvSpPr>
+        <p:spPr>
+          <a:xfrm>
+            <a:off x="548640" y="5440680"/>
+            <a:ext cx="11155680" cy="1005840"/>
+          </a:xfrm>
+          <a:prstGeom prst="rect">
+            <a:avLst/>
+          </a:prstGeom>
+          <a:noFill/>
+        </p:spPr>
+        <p:txBody>
+          <a:bodyPr wrap="square" anchor="t">
+            <a:spAutoFit/>
+          </a:bodyPr>
+          <a:lstStyle/>
+          <a:p>
+            <a:pPr algn="l">
               <a:spcAft>
-                <a:spcPts val="700"/>
+                <a:spcPts val="200"/>
               </a:spcAft>
             </a:pPr>
             <a:r>
@@ -8102,13 +8121,13 @@
                 <a:latin typeface="PingFang TC"/>
                 <a:ea typeface="PingFang TC"/>
               </a:rPr>
-              <a:t>–  一致性更單純：update 直接刪 cache、下次讀從 DB 重建；順序 commit → 再 invalidate，避免 stale 回填 race</a:t>
-            </a:r>
-          </a:p>
-          <a:p>
-            <a:pPr lvl="1">
+              <a:t>Cache Aside / Read Through:master 是 DB、寫只進 DB → cache 惰性補;差別只在「誰負責回源」(app vs cache 元件)。</a:t>
+            </a:r>
+          </a:p>
+          <a:p>
+            <a:pPr algn="l">
               <a:spcAft>
-                <a:spcPts val="700"/>
+                <a:spcPts val="400"/>
               </a:spcAft>
             </a:pPr>
             <a:r>
@@ -8119,24 +8138,7 @@
                 <a:latin typeface="PingFang TC"/>
                 <a:ea typeface="PingFang TC"/>
               </a:rPr>
-              <a:t>–  TTL 兜底最終一致；scan 分析寫入是非同步、不進此 cache（附錄 J）</a:t>
-            </a:r>
-          </a:p>
-          <a:p>
-            <a:pPr>
-              <a:spcAft>
-                <a:spcPts val="700"/>
-              </a:spcAft>
-            </a:pPr>
-            <a:r>
-              <a:rPr sz="1300" b="0">
-                <a:solidFill>
-                  <a:srgbClr val="0F172A"/>
-                </a:solidFill>
-                <a:latin typeface="PingFang TC"/>
-                <a:ea typeface="PingFang TC"/>
-              </a:rPr>
-              <a:t>•  何時反選 write-through：寫完馬上一定會讀（read-your-write 高頻，如 session）；redirect 建立與被掃無強時間關聯 → write-around 勝</a:t>
+              <a:t>Write Through / Write Back:寫會碰 cache;差別在對 DB 是同步(慢但不丟) 還是非同步(快但可能丟)。</a:t>
             </a:r>
           </a:p>
         </p:txBody>
@@ -8238,7 +8240,7 @@
                 <a:latin typeface="PingFang TC"/>
                 <a:ea typeface="PingFang TC"/>
               </a:rPr>
-              <a:t>10 · DEEP DIVE</a:t>
+              <a:t>附錄 · CACHE 策略</a:t>
             </a:r>
           </a:p>
           <a:p>
@@ -8255,21 +8257,575 @@
                 <a:latin typeface="PingFang TC"/>
                 <a:ea typeface="PingFang TC"/>
               </a:rPr>
-              <a:t>決策 3 — 可靠性與資料語意</a:t>
-            </a:r>
-          </a:p>
-        </p:txBody>
-      </p:sp>
-      <p:sp>
-        <p:nvSpPr>
-          <p:cNvPr id="4" name="TextBox 3"/>
+              <a:t>優缺點・適用・本專案落點</a:t>
+            </a:r>
+          </a:p>
+        </p:txBody>
+      </p:sp>
+      <p:graphicFrame>
+        <p:nvGraphicFramePr>
+          <p:cNvPr id="4" name="Table 3"/>
+          <p:cNvGraphicFramePr>
+            <a:graphicFrameLocks noGrp="1"/>
+          </p:cNvGraphicFramePr>
+          <p:nvPr/>
+        </p:nvGraphicFramePr>
+        <p:xfrm>
+          <a:off x="548640" y="1554480"/>
+          <a:ext cx="11109960" cy="2743200"/>
+        </p:xfrm>
+        <a:graphic>
+          <a:graphicData uri="http://schemas.openxmlformats.org/drawingml/2006/table">
+            <a:tbl>
+              <a:tblPr firstRow="1" bandRow="1">
+                <a:tableStyleId>{5C22544A-7EE6-4342-B048-85BDC9FD1C3A}</a:tableStyleId>
+              </a:tblPr>
+              <a:tblGrid>
+                <a:gridCol w="2011680"/>
+                <a:gridCol w="3383280"/>
+                <a:gridCol w="3337560"/>
+                <a:gridCol w="2377440"/>
+              </a:tblGrid>
+              <a:tr h="548640">
+                <a:tc>
+                  <a:txBody>
+                    <a:bodyPr/>
+                    <a:lstStyle/>
+                    <a:p>
+                      <a:r>
+                        <a:rPr sz="1200" b="1">
+                          <a:solidFill>
+                            <a:srgbClr val="FFFFFF"/>
+                          </a:solidFill>
+                          <a:latin typeface="PingFang TC"/>
+                          <a:ea typeface="PingFang TC"/>
+                        </a:rPr>
+                        <a:t>策略</a:t>
+                      </a:r>
+                    </a:p>
+                  </a:txBody>
+                  <a:tcPr marT="38100" marB="38100" marL="101600" anchor="ctr">
+                    <a:solidFill>
+                      <a:srgbClr val="2563EB"/>
+                    </a:solidFill>
+                  </a:tcPr>
+                </a:tc>
+                <a:tc>
+                  <a:txBody>
+                    <a:bodyPr/>
+                    <a:lstStyle/>
+                    <a:p>
+                      <a:r>
+                        <a:rPr sz="1200" b="1">
+                          <a:solidFill>
+                            <a:srgbClr val="FFFFFF"/>
+                          </a:solidFill>
+                          <a:latin typeface="PingFang TC"/>
+                          <a:ea typeface="PingFang TC"/>
+                        </a:rPr>
+                        <a:t>優點</a:t>
+                      </a:r>
+                    </a:p>
+                  </a:txBody>
+                  <a:tcPr marT="38100" marB="38100" marL="101600" anchor="ctr">
+                    <a:solidFill>
+                      <a:srgbClr val="2563EB"/>
+                    </a:solidFill>
+                  </a:tcPr>
+                </a:tc>
+                <a:tc>
+                  <a:txBody>
+                    <a:bodyPr/>
+                    <a:lstStyle/>
+                    <a:p>
+                      <a:r>
+                        <a:rPr sz="1200" b="1">
+                          <a:solidFill>
+                            <a:srgbClr val="FFFFFF"/>
+                          </a:solidFill>
+                          <a:latin typeface="PingFang TC"/>
+                          <a:ea typeface="PingFang TC"/>
+                        </a:rPr>
+                        <a:t>缺點</a:t>
+                      </a:r>
+                    </a:p>
+                  </a:txBody>
+                  <a:tcPr marT="38100" marB="38100" marL="101600" anchor="ctr">
+                    <a:solidFill>
+                      <a:srgbClr val="2563EB"/>
+                    </a:solidFill>
+                  </a:tcPr>
+                </a:tc>
+                <a:tc>
+                  <a:txBody>
+                    <a:bodyPr/>
+                    <a:lstStyle/>
+                    <a:p>
+                      <a:r>
+                        <a:rPr sz="1200" b="1">
+                          <a:solidFill>
+                            <a:srgbClr val="FFFFFF"/>
+                          </a:solidFill>
+                          <a:latin typeface="PingFang TC"/>
+                          <a:ea typeface="PingFang TC"/>
+                        </a:rPr>
+                        <a:t>適用</a:t>
+                      </a:r>
+                    </a:p>
+                  </a:txBody>
+                  <a:tcPr marT="38100" marB="38100" marL="101600" anchor="ctr">
+                    <a:solidFill>
+                      <a:srgbClr val="2563EB"/>
+                    </a:solidFill>
+                  </a:tcPr>
+                </a:tc>
+              </a:tr>
+              <a:tr h="548640">
+                <a:tc>
+                  <a:txBody>
+                    <a:bodyPr/>
+                    <a:lstStyle/>
+                    <a:p>
+                      <a:r>
+                        <a:rPr sz="1200" b="1">
+                          <a:solidFill>
+                            <a:srgbClr val="0F172A"/>
+                          </a:solidFill>
+                          <a:latin typeface="PingFang TC"/>
+                          <a:ea typeface="PingFang TC"/>
+                        </a:rPr>
+                        <a:t>Cache Aside</a:t>
+                      </a:r>
+                    </a:p>
+                  </a:txBody>
+                  <a:tcPr marT="38100" marB="38100" marL="101600" anchor="ctr">
+                    <a:solidFill>
+                      <a:srgbClr val="FFFFFF"/>
+                    </a:solidFill>
+                  </a:tcPr>
+                </a:tc>
+                <a:tc>
+                  <a:txBody>
+                    <a:bodyPr/>
+                    <a:lstStyle/>
+                    <a:p>
+                      <a:r>
+                        <a:rPr sz="1200" b="0">
+                          <a:solidFill>
+                            <a:srgbClr val="64748B"/>
+                          </a:solidFill>
+                          <a:latin typeface="PingFang TC"/>
+                          <a:ea typeface="PingFang TC"/>
+                        </a:rPr>
+                        <a:t>資料不丟;最易實作</a:t>
+                      </a:r>
+                    </a:p>
+                  </a:txBody>
+                  <a:tcPr marT="38100" marB="38100" marL="101600" anchor="ctr">
+                    <a:solidFill>
+                      <a:srgbClr val="FFFFFF"/>
+                    </a:solidFill>
+                  </a:tcPr>
+                </a:tc>
+                <a:tc>
+                  <a:txBody>
+                    <a:bodyPr/>
+                    <a:lstStyle/>
+                    <a:p>
+                      <a:r>
+                        <a:rPr sz="1200" b="0">
+                          <a:solidFill>
+                            <a:srgbClr val="64748B"/>
+                          </a:solidFill>
+                          <a:latin typeface="PingFang TC"/>
+                          <a:ea typeface="PingFang TC"/>
+                        </a:rPr>
+                        <a:t>首讀 cache miss;可能不一致</a:t>
+                      </a:r>
+                    </a:p>
+                  </a:txBody>
+                  <a:tcPr marT="38100" marB="38100" marL="101600" anchor="ctr">
+                    <a:solidFill>
+                      <a:srgbClr val="FFFFFF"/>
+                    </a:solidFill>
+                  </a:tcPr>
+                </a:tc>
+                <a:tc>
+                  <a:txBody>
+                    <a:bodyPr/>
+                    <a:lstStyle/>
+                    <a:p>
+                      <a:r>
+                        <a:rPr sz="1200" b="0">
+                          <a:solidFill>
+                            <a:srgbClr val="64748B"/>
+                          </a:solidFill>
+                          <a:latin typeface="PingFang TC"/>
+                          <a:ea typeface="PingFang TC"/>
+                        </a:rPr>
+                        <a:t>讀多、可靠優先</a:t>
+                      </a:r>
+                    </a:p>
+                  </a:txBody>
+                  <a:tcPr marT="38100" marB="38100" marL="101600" anchor="ctr">
+                    <a:solidFill>
+                      <a:srgbClr val="FFFFFF"/>
+                    </a:solidFill>
+                  </a:tcPr>
+                </a:tc>
+              </a:tr>
+              <a:tr h="548640">
+                <a:tc>
+                  <a:txBody>
+                    <a:bodyPr/>
+                    <a:lstStyle/>
+                    <a:p>
+                      <a:r>
+                        <a:rPr sz="1200" b="1">
+                          <a:solidFill>
+                            <a:srgbClr val="0F172A"/>
+                          </a:solidFill>
+                          <a:latin typeface="PingFang TC"/>
+                          <a:ea typeface="PingFang TC"/>
+                        </a:rPr>
+                        <a:t>Read Through</a:t>
+                      </a:r>
+                    </a:p>
+                  </a:txBody>
+                  <a:tcPr marT="38100" marB="38100" marL="101600" anchor="ctr">
+                    <a:solidFill>
+                      <a:srgbClr val="F1F5F9"/>
+                    </a:solidFill>
+                  </a:tcPr>
+                </a:tc>
+                <a:tc>
+                  <a:txBody>
+                    <a:bodyPr/>
+                    <a:lstStyle/>
+                    <a:p>
+                      <a:r>
+                        <a:rPr sz="1200" b="0">
+                          <a:solidFill>
+                            <a:srgbClr val="64748B"/>
+                          </a:solidFill>
+                          <a:latin typeface="PingFang TC"/>
+                          <a:ea typeface="PingFang TC"/>
+                        </a:rPr>
+                        <a:t>程式碼簡潔</a:t>
+                      </a:r>
+                    </a:p>
+                  </a:txBody>
+                  <a:tcPr marT="38100" marB="38100" marL="101600" anchor="ctr">
+                    <a:solidFill>
+                      <a:srgbClr val="F1F5F9"/>
+                    </a:solidFill>
+                  </a:tcPr>
+                </a:tc>
+                <a:tc>
+                  <a:txBody>
+                    <a:bodyPr/>
+                    <a:lstStyle/>
+                    <a:p>
+                      <a:r>
+                        <a:rPr sz="1200" b="0">
+                          <a:solidFill>
+                            <a:srgbClr val="64748B"/>
+                          </a:solidFill>
+                          <a:latin typeface="PingFang TC"/>
+                          <a:ea typeface="PingFang TC"/>
+                        </a:rPr>
+                        <a:t>同 Cache Aside</a:t>
+                      </a:r>
+                    </a:p>
+                  </a:txBody>
+                  <a:tcPr marT="38100" marB="38100" marL="101600" anchor="ctr">
+                    <a:solidFill>
+                      <a:srgbClr val="F1F5F9"/>
+                    </a:solidFill>
+                  </a:tcPr>
+                </a:tc>
+                <a:tc>
+                  <a:txBody>
+                    <a:bodyPr/>
+                    <a:lstStyle/>
+                    <a:p>
+                      <a:r>
+                        <a:rPr sz="1200" b="0">
+                          <a:solidFill>
+                            <a:srgbClr val="64748B"/>
+                          </a:solidFill>
+                          <a:latin typeface="PingFang TC"/>
+                          <a:ea typeface="PingFang TC"/>
+                        </a:rPr>
+                        <a:t>讀多</a:t>
+                      </a:r>
+                    </a:p>
+                  </a:txBody>
+                  <a:tcPr marT="38100" marB="38100" marL="101600" anchor="ctr">
+                    <a:solidFill>
+                      <a:srgbClr val="F1F5F9"/>
+                    </a:solidFill>
+                  </a:tcPr>
+                </a:tc>
+              </a:tr>
+              <a:tr h="548640">
+                <a:tc>
+                  <a:txBody>
+                    <a:bodyPr/>
+                    <a:lstStyle/>
+                    <a:p>
+                      <a:r>
+                        <a:rPr sz="1200" b="1">
+                          <a:solidFill>
+                            <a:srgbClr val="0F172A"/>
+                          </a:solidFill>
+                          <a:latin typeface="PingFang TC"/>
+                          <a:ea typeface="PingFang TC"/>
+                        </a:rPr>
+                        <a:t>Write Through</a:t>
+                      </a:r>
+                    </a:p>
+                  </a:txBody>
+                  <a:tcPr marT="38100" marB="38100" marL="101600" anchor="ctr">
+                    <a:solidFill>
+                      <a:srgbClr val="FFFFFF"/>
+                    </a:solidFill>
+                  </a:tcPr>
+                </a:tc>
+                <a:tc>
+                  <a:txBody>
+                    <a:bodyPr/>
+                    <a:lstStyle/>
+                    <a:p>
+                      <a:r>
+                        <a:rPr sz="1200" b="0">
+                          <a:solidFill>
+                            <a:srgbClr val="64748B"/>
+                          </a:solidFill>
+                          <a:latin typeface="PingFang TC"/>
+                          <a:ea typeface="PingFang TC"/>
+                        </a:rPr>
+                        <a:t>無 cache miss(讀恆新)</a:t>
+                      </a:r>
+                    </a:p>
+                  </a:txBody>
+                  <a:tcPr marT="38100" marB="38100" marL="101600" anchor="ctr">
+                    <a:solidFill>
+                      <a:srgbClr val="FFFFFF"/>
+                    </a:solidFill>
+                  </a:tcPr>
+                </a:tc>
+                <a:tc>
+                  <a:txBody>
+                    <a:bodyPr/>
+                    <a:lstStyle/>
+                    <a:p>
+                      <a:r>
+                        <a:rPr sz="1200" b="0">
+                          <a:solidFill>
+                            <a:srgbClr val="64748B"/>
+                          </a:solidFill>
+                          <a:latin typeface="PingFang TC"/>
+                          <a:ea typeface="PingFang TC"/>
+                        </a:rPr>
+                        <a:t>寫入延遲增加</a:t>
+                      </a:r>
+                    </a:p>
+                  </a:txBody>
+                  <a:tcPr marT="38100" marB="38100" marL="101600" anchor="ctr">
+                    <a:solidFill>
+                      <a:srgbClr val="FFFFFF"/>
+                    </a:solidFill>
+                  </a:tcPr>
+                </a:tc>
+                <a:tc>
+                  <a:txBody>
+                    <a:bodyPr/>
+                    <a:lstStyle/>
+                    <a:p>
+                      <a:r>
+                        <a:rPr sz="1200" b="0">
+                          <a:solidFill>
+                            <a:srgbClr val="64748B"/>
+                          </a:solidFill>
+                          <a:latin typeface="PingFang TC"/>
+                          <a:ea typeface="PingFang TC"/>
+                        </a:rPr>
+                        <a:t>讀寫都要新鮮</a:t>
+                      </a:r>
+                    </a:p>
+                  </a:txBody>
+                  <a:tcPr marT="38100" marB="38100" marL="101600" anchor="ctr">
+                    <a:solidFill>
+                      <a:srgbClr val="FFFFFF"/>
+                    </a:solidFill>
+                  </a:tcPr>
+                </a:tc>
+              </a:tr>
+              <a:tr h="548640">
+                <a:tc>
+                  <a:txBody>
+                    <a:bodyPr/>
+                    <a:lstStyle/>
+                    <a:p>
+                      <a:r>
+                        <a:rPr sz="1200" b="1">
+                          <a:solidFill>
+                            <a:srgbClr val="0F172A"/>
+                          </a:solidFill>
+                          <a:latin typeface="PingFang TC"/>
+                          <a:ea typeface="PingFang TC"/>
+                        </a:rPr>
+                        <a:t>Write Back</a:t>
+                      </a:r>
+                    </a:p>
+                  </a:txBody>
+                  <a:tcPr marT="38100" marB="38100" marL="101600" anchor="ctr">
+                    <a:solidFill>
+                      <a:srgbClr val="F1F5F9"/>
+                    </a:solidFill>
+                  </a:tcPr>
+                </a:tc>
+                <a:tc>
+                  <a:txBody>
+                    <a:bodyPr/>
+                    <a:lstStyle/>
+                    <a:p>
+                      <a:r>
+                        <a:rPr sz="1200" b="0">
+                          <a:solidFill>
+                            <a:srgbClr val="64748B"/>
+                          </a:solidFill>
+                          <a:latin typeface="PingFang TC"/>
+                          <a:ea typeface="PingFang TC"/>
+                        </a:rPr>
+                        <a:t>無 miss;抗寫入重;減 DB 負荷</a:t>
+                      </a:r>
+                    </a:p>
+                  </a:txBody>
+                  <a:tcPr marT="38100" marB="38100" marL="101600" anchor="ctr">
+                    <a:solidFill>
+                      <a:srgbClr val="F1F5F9"/>
+                    </a:solidFill>
+                  </a:tcPr>
+                </a:tc>
+                <a:tc>
+                  <a:txBody>
+                    <a:bodyPr/>
+                    <a:lstStyle/>
+                    <a:p>
+                      <a:r>
+                        <a:rPr sz="1200" b="0">
+                          <a:solidFill>
+                            <a:srgbClr val="64748B"/>
+                          </a:solidFill>
+                          <a:latin typeface="PingFang TC"/>
+                          <a:ea typeface="PingFang TC"/>
+                        </a:rPr>
+                        <a:t>未刷回前可能丟資料</a:t>
+                      </a:r>
+                    </a:p>
+                  </a:txBody>
+                  <a:tcPr marT="38100" marB="38100" marL="101600" anchor="ctr">
+                    <a:solidFill>
+                      <a:srgbClr val="F1F5F9"/>
+                    </a:solidFill>
+                  </a:tcPr>
+                </a:tc>
+                <a:tc>
+                  <a:txBody>
+                    <a:bodyPr/>
+                    <a:lstStyle/>
+                    <a:p>
+                      <a:r>
+                        <a:rPr sz="1200" b="0">
+                          <a:solidFill>
+                            <a:srgbClr val="64748B"/>
+                          </a:solidFill>
+                          <a:latin typeface="PingFang TC"/>
+                          <a:ea typeface="PingFang TC"/>
+                        </a:rPr>
+                        <a:t>寫入重、可容忍丟失</a:t>
+                      </a:r>
+                    </a:p>
+                  </a:txBody>
+                  <a:tcPr marT="38100" marB="38100" marL="101600" anchor="ctr">
+                    <a:solidFill>
+                      <a:srgbClr val="F1F5F9"/>
+                    </a:solidFill>
+                  </a:tcPr>
+                </a:tc>
+              </a:tr>
+            </a:tbl>
+          </a:graphicData>
+        </a:graphic>
+      </p:graphicFrame>
+      <p:sp>
+        <p:nvSpPr>
+          <p:cNvPr id="5" name="Rounded Rectangle 4"/>
+          <p:cNvSpPr/>
+          <p:nvPr/>
+        </p:nvSpPr>
+        <p:spPr>
+          <a:xfrm>
+            <a:off x="548640" y="4617720"/>
+            <a:ext cx="11109960" cy="914400"/>
+          </a:xfrm>
+          <a:prstGeom prst="roundRect">
+            <a:avLst/>
+          </a:prstGeom>
+          <a:solidFill>
+            <a:srgbClr val="059669"/>
+          </a:solidFill>
+          <a:ln>
+            <a:solidFill>
+              <a:srgbClr val="059669"/>
+            </a:solidFill>
+          </a:ln>
+          <a:effectLst/>
+        </p:spPr>
+        <p:style>
+          <a:lnRef idx="1">
+            <a:schemeClr val="accent1"/>
+          </a:lnRef>
+          <a:fillRef idx="3">
+            <a:schemeClr val="accent1"/>
+          </a:fillRef>
+          <a:effectRef idx="2">
+            <a:schemeClr val="accent1"/>
+          </a:effectRef>
+          <a:fontRef idx="minor">
+            <a:schemeClr val="lt1"/>
+          </a:fontRef>
+        </p:style>
+        <p:txBody>
+          <a:bodyPr rtlCol="0" anchor="ctr" wrap="square" tIns="25400" bIns="25400"/>
+          <a:lstStyle/>
+          <a:p>
+            <a:pPr algn="ctr"/>
+            <a:r>
+              <a:rPr sz="1300" b="1">
+                <a:solidFill>
+                  <a:srgbClr val="FFFFFF"/>
+                </a:solidFill>
+                <a:latin typeface="PingFang TC"/>
+                <a:ea typeface="PingFang TC"/>
+              </a:rPr>
+              <a:t>本專案 redirect:讀走 Cache Aside(miss 回填)、改/刪時 write-around=invalidate(見下一頁 09b)</a:t>
+            </a:r>
+          </a:p>
+        </p:txBody>
+      </p:sp>
+      <p:sp>
+        <p:nvSpPr>
+          <p:cNvPr id="6" name="TextBox 5"/>
           <p:cNvSpPr txBox="1"/>
           <p:nvPr/>
         </p:nvSpPr>
         <p:spPr>
           <a:xfrm>
-            <a:off x="640080" y="1737360"/>
-            <a:ext cx="10789920" cy="4572000"/>
+            <a:off x="548640" y="5715000"/>
+            <a:ext cx="11155680" cy="822960"/>
           </a:xfrm>
           <a:prstGeom prst="rect">
             <a:avLst/>
@@ -8277,127 +8833,42 @@
           <a:noFill/>
         </p:spPr>
         <p:txBody>
-          <a:bodyPr wrap="square">
+          <a:bodyPr wrap="square" anchor="t">
             <a:spAutoFit/>
           </a:bodyPr>
           <a:lstStyle/>
           <a:p>
-            <a:pPr>
+            <a:pPr algn="l">
               <a:spcAft>
-                <a:spcPts val="900"/>
+                <a:spcPts val="200"/>
               </a:spcAft>
             </a:pPr>
             <a:r>
-              <a:rPr sz="1500" b="0">
-                <a:solidFill>
-                  <a:srgbClr val="0F172A"/>
-                </a:solidFill>
-                <a:latin typeface="PingFang TC"/>
-                <a:ea typeface="PingFang TC"/>
-              </a:rPr>
-              <a:t>•  軟刪除（is_deleted）：支撐 410 語意、保留分析、避免 token 回收風險</a:t>
-            </a:r>
-          </a:p>
-          <a:p>
-            <a:pPr>
+              <a:rPr sz="1200" b="0">
+                <a:solidFill>
+                  <a:srgbClr val="64748B"/>
+                </a:solidFill>
+                <a:latin typeface="PingFang TC"/>
+                <a:ea typeface="PingFang TC"/>
+              </a:rPr>
+              <a:t>為何是 Cache Aside 家族:read-heavy(302 遠多於寫)+ 連結/分析不能丟 → 不選 Write Back(未刷回可能丟);</a:t>
+            </a:r>
+          </a:p>
+          <a:p>
+            <a:pPr algn="l">
               <a:spcAft>
-                <a:spcPts val="900"/>
+                <a:spcPts val="400"/>
               </a:spcAft>
             </a:pPr>
             <a:r>
-              <a:rPr sz="1500" b="0">
-                <a:solidFill>
-                  <a:srgbClr val="0F172A"/>
-                </a:solidFill>
-                <a:latin typeface="PingFang TC"/>
-                <a:ea typeface="PingFang TC"/>
-              </a:rPr>
-              <a:t>•  錯誤語意：404（從未存在） vs 410（曾存在已刪/過期）</a:t>
-            </a:r>
-          </a:p>
-          <a:p>
-            <a:pPr lvl="1">
-              <a:spcAft>
-                <a:spcPts val="900"/>
-              </a:spcAft>
-            </a:pPr>
-            <a:r>
-              <a:rPr sz="1400" b="0">
+              <a:rPr sz="1100" b="0">
                 <a:solidFill>
                   <a:srgbClr val="64748B"/>
                 </a:solidFill>
                 <a:latin typeface="PingFang TC"/>
                 <a:ea typeface="PingFang TC"/>
               </a:rPr>
-              <a:t>–  掃描路徑刪除回 410；管理 API 已刪回 404（刻意差異）</a:t>
-            </a:r>
-          </a:p>
-          <a:p>
-            <a:pPr>
-              <a:spcAft>
-                <a:spcPts val="900"/>
-              </a:spcAft>
-            </a:pPr>
-            <a:r>
-              <a:rPr sz="1500" b="0">
-                <a:solidFill>
-                  <a:srgbClr val="0F172A"/>
-                </a:solidFill>
-                <a:latin typeface="PingFang TC"/>
-                <a:ea typeface="PingFang TC"/>
-              </a:rPr>
-              <a:t>•  惰性過期 + cron 兜底：掃描即時檢查過期；cron 清過期/通知未點擊/物理清理</a:t>
-            </a:r>
-          </a:p>
-          <a:p>
-            <a:pPr>
-              <a:spcAft>
-                <a:spcPts val="900"/>
-              </a:spcAft>
-            </a:pPr>
-            <a:r>
-              <a:rPr sz="1500" b="0">
-                <a:solidFill>
-                  <a:srgbClr val="0F172A"/>
-                </a:solidFill>
-                <a:latin typeface="PingFang TC"/>
-                <a:ea typeface="PingFang TC"/>
-              </a:rPr>
-              <a:t>•  URL 保守正規化：只 lower-case host，保留 path/query 與原 scheme</a:t>
-            </a:r>
-          </a:p>
-          <a:p>
-            <a:pPr lvl="1">
-              <a:spcAft>
-                <a:spcPts val="900"/>
-              </a:spcAft>
-            </a:pPr>
-            <a:r>
-              <a:rPr sz="1400" b="0">
-                <a:solidFill>
-                  <a:srgbClr val="64748B"/>
-                </a:solidFill>
-                <a:latin typeface="PingFang TC"/>
-                <a:ea typeface="PingFang TC"/>
-              </a:rPr>
-              <a:t>–  修正 repo 的整串小寫（破壞 path）+ 強制 https（導向失效站）</a:t>
-            </a:r>
-          </a:p>
-          <a:p>
-            <a:pPr>
-              <a:spcAft>
-                <a:spcPts val="900"/>
-              </a:spcAft>
-            </a:pPr>
-            <a:r>
-              <a:rPr sz="1500" b="0">
-                <a:solidFill>
-                  <a:srgbClr val="0F172A"/>
-                </a:solidFill>
-                <a:latin typeface="PingFang TC"/>
-                <a:ea typeface="PingFang TC"/>
-              </a:rPr>
-              <a:t>•  惡意阻擋：黑名單 + SSRF/內網位址（localhost·127.*·私網），正式版接 Safe Browsing</a:t>
+              <a:t>不選 Write Through(多數 QR 從沒被掃,寫時全塞 cache 白佔記憶體)。TTL 兜底最終一致。 來源:homuchen.com/posts/databse-chache-strategies</a:t>
             </a:r>
           </a:p>
         </p:txBody>
@@ -8499,7 +8970,7 @@
                 <a:latin typeface="PingFang TC"/>
                 <a:ea typeface="PingFang TC"/>
               </a:rPr>
-              <a:t>11 · SCALING</a:t>
+              <a:t>09b · DEEP DIVE</a:t>
             </a:r>
           </a:p>
           <a:p>
@@ -8516,21 +8987,525 @@
                 <a:latin typeface="PingFang TC"/>
                 <a:ea typeface="PingFang TC"/>
               </a:rPr>
-              <a:t>擴展策略</a:t>
-            </a:r>
-          </a:p>
-        </p:txBody>
-      </p:sp>
-      <p:sp>
-        <p:nvSpPr>
-          <p:cNvPr id="4" name="TextBox 3"/>
+              <a:t>Cache 寫策略 — 讀 cache-aside，寫 write-around</a:t>
+            </a:r>
+          </a:p>
+        </p:txBody>
+      </p:sp>
+      <p:sp>
+        <p:nvSpPr>
+          <p:cNvPr id="4" name="Rounded Rectangle 3"/>
+          <p:cNvSpPr/>
+          <p:nvPr/>
+        </p:nvSpPr>
+        <p:spPr>
+          <a:xfrm>
+            <a:off x="640080" y="1783080"/>
+            <a:ext cx="2286000" cy="640080"/>
+          </a:xfrm>
+          <a:prstGeom prst="roundRect">
+            <a:avLst/>
+          </a:prstGeom>
+          <a:solidFill>
+            <a:srgbClr val="059669"/>
+          </a:solidFill>
+          <a:ln>
+            <a:solidFill>
+              <a:srgbClr val="059669"/>
+            </a:solidFill>
+          </a:ln>
+          <a:effectLst/>
+        </p:spPr>
+        <p:style>
+          <a:lnRef idx="1">
+            <a:schemeClr val="accent1"/>
+          </a:lnRef>
+          <a:fillRef idx="3">
+            <a:schemeClr val="accent1"/>
+          </a:fillRef>
+          <a:effectRef idx="2">
+            <a:schemeClr val="accent1"/>
+          </a:effectRef>
+          <a:fontRef idx="minor">
+            <a:schemeClr val="lt1"/>
+          </a:fontRef>
+        </p:style>
+        <p:txBody>
+          <a:bodyPr rtlCol="0" anchor="ctr" wrap="square" tIns="25400" bIns="25400"/>
+          <a:lstStyle/>
+          <a:p>
+            <a:pPr algn="ctr"/>
+            <a:r>
+              <a:rPr sz="1300" b="1">
+                <a:solidFill>
+                  <a:srgbClr val="FFFFFF"/>
+                </a:solidFill>
+                <a:latin typeface="PingFang TC"/>
+                <a:ea typeface="PingFang TC"/>
+              </a:rPr>
+              <a:t>redirect 讀</a:t>
+            </a:r>
+          </a:p>
+        </p:txBody>
+      </p:sp>
+      <p:sp>
+        <p:nvSpPr>
+          <p:cNvPr id="5" name="Rounded Rectangle 4"/>
+          <p:cNvSpPr/>
+          <p:nvPr/>
+        </p:nvSpPr>
+        <p:spPr>
+          <a:xfrm>
+            <a:off x="3063240" y="1783080"/>
+            <a:ext cx="4114800" cy="640080"/>
+          </a:xfrm>
+          <a:prstGeom prst="roundRect">
+            <a:avLst/>
+          </a:prstGeom>
+          <a:solidFill>
+            <a:srgbClr val="FFFFFF"/>
+          </a:solidFill>
+          <a:ln>
+            <a:solidFill>
+              <a:srgbClr val="FFFFFF"/>
+            </a:solidFill>
+          </a:ln>
+          <a:effectLst/>
+        </p:spPr>
+        <p:style>
+          <a:lnRef idx="1">
+            <a:schemeClr val="accent1"/>
+          </a:lnRef>
+          <a:fillRef idx="3">
+            <a:schemeClr val="accent1"/>
+          </a:fillRef>
+          <a:effectRef idx="2">
+            <a:schemeClr val="accent1"/>
+          </a:effectRef>
+          <a:fontRef idx="minor">
+            <a:schemeClr val="lt1"/>
+          </a:fontRef>
+        </p:style>
+        <p:txBody>
+          <a:bodyPr rtlCol="0" anchor="ctr" wrap="square" tIns="25400" bIns="25400"/>
+          <a:lstStyle/>
+          <a:p>
+            <a:pPr algn="ctr"/>
+            <a:r>
+              <a:rPr sz="1200" b="0">
+                <a:solidFill>
+                  <a:srgbClr val="0F172A"/>
+                </a:solidFill>
+                <a:latin typeface="PingFang TC"/>
+                <a:ea typeface="PingFang TC"/>
+              </a:rPr>
+              <a:t>miss → 查 DB → 回填</a:t>
+            </a:r>
+          </a:p>
+        </p:txBody>
+      </p:sp>
+      <p:sp>
+        <p:nvSpPr>
+          <p:cNvPr id="6" name="Rounded Rectangle 5"/>
+          <p:cNvSpPr/>
+          <p:nvPr/>
+        </p:nvSpPr>
+        <p:spPr>
+          <a:xfrm>
+            <a:off x="7315200" y="1783080"/>
+            <a:ext cx="4206240" cy="640080"/>
+          </a:xfrm>
+          <a:prstGeom prst="roundRect">
+            <a:avLst/>
+          </a:prstGeom>
+          <a:solidFill>
+            <a:srgbClr val="FFFFFF"/>
+          </a:solidFill>
+          <a:ln>
+            <a:solidFill>
+              <a:srgbClr val="FFFFFF"/>
+            </a:solidFill>
+          </a:ln>
+          <a:effectLst/>
+        </p:spPr>
+        <p:style>
+          <a:lnRef idx="1">
+            <a:schemeClr val="accent1"/>
+          </a:lnRef>
+          <a:fillRef idx="3">
+            <a:schemeClr val="accent1"/>
+          </a:fillRef>
+          <a:effectRef idx="2">
+            <a:schemeClr val="accent1"/>
+          </a:effectRef>
+          <a:fontRef idx="minor">
+            <a:schemeClr val="lt1"/>
+          </a:fontRef>
+        </p:style>
+        <p:txBody>
+          <a:bodyPr rtlCol="0" anchor="ctr" wrap="square" tIns="25400" bIns="25400"/>
+          <a:lstStyle/>
+          <a:p>
+            <a:pPr algn="ctr"/>
+            <a:r>
+              <a:rPr sz="1200" b="1">
+                <a:solidFill>
+                  <a:srgbClr val="059669"/>
+                </a:solidFill>
+                <a:latin typeface="PingFang TC"/>
+                <a:ea typeface="PingFang TC"/>
+              </a:rPr>
+              <a:t>cache-aside</a:t>
+            </a:r>
+          </a:p>
+        </p:txBody>
+      </p:sp>
+      <p:sp>
+        <p:nvSpPr>
+          <p:cNvPr id="7" name="Rounded Rectangle 6"/>
+          <p:cNvSpPr/>
+          <p:nvPr/>
+        </p:nvSpPr>
+        <p:spPr>
+          <a:xfrm>
+            <a:off x="640080" y="2606040"/>
+            <a:ext cx="2286000" cy="640080"/>
+          </a:xfrm>
+          <a:prstGeom prst="roundRect">
+            <a:avLst/>
+          </a:prstGeom>
+          <a:solidFill>
+            <a:srgbClr val="2563EB"/>
+          </a:solidFill>
+          <a:ln>
+            <a:solidFill>
+              <a:srgbClr val="2563EB"/>
+            </a:solidFill>
+          </a:ln>
+          <a:effectLst/>
+        </p:spPr>
+        <p:style>
+          <a:lnRef idx="1">
+            <a:schemeClr val="accent1"/>
+          </a:lnRef>
+          <a:fillRef idx="3">
+            <a:schemeClr val="accent1"/>
+          </a:fillRef>
+          <a:effectRef idx="2">
+            <a:schemeClr val="accent1"/>
+          </a:effectRef>
+          <a:fontRef idx="minor">
+            <a:schemeClr val="lt1"/>
+          </a:fontRef>
+        </p:style>
+        <p:txBody>
+          <a:bodyPr rtlCol="0" anchor="ctr" wrap="square" tIns="25400" bIns="25400"/>
+          <a:lstStyle/>
+          <a:p>
+            <a:pPr algn="ctr"/>
+            <a:r>
+              <a:rPr sz="1300" b="1">
+                <a:solidFill>
+                  <a:srgbClr val="FFFFFF"/>
+                </a:solidFill>
+                <a:latin typeface="PingFang TC"/>
+                <a:ea typeface="PingFang TC"/>
+              </a:rPr>
+              <a:t>create</a:t>
+            </a:r>
+          </a:p>
+        </p:txBody>
+      </p:sp>
+      <p:sp>
+        <p:nvSpPr>
+          <p:cNvPr id="8" name="Rounded Rectangle 7"/>
+          <p:cNvSpPr/>
+          <p:nvPr/>
+        </p:nvSpPr>
+        <p:spPr>
+          <a:xfrm>
+            <a:off x="3063240" y="2606040"/>
+            <a:ext cx="4114800" cy="640080"/>
+          </a:xfrm>
+          <a:prstGeom prst="roundRect">
+            <a:avLst/>
+          </a:prstGeom>
+          <a:solidFill>
+            <a:srgbClr val="FFFFFF"/>
+          </a:solidFill>
+          <a:ln>
+            <a:solidFill>
+              <a:srgbClr val="FFFFFF"/>
+            </a:solidFill>
+          </a:ln>
+          <a:effectLst/>
+        </p:spPr>
+        <p:style>
+          <a:lnRef idx="1">
+            <a:schemeClr val="accent1"/>
+          </a:lnRef>
+          <a:fillRef idx="3">
+            <a:schemeClr val="accent1"/>
+          </a:fillRef>
+          <a:effectRef idx="2">
+            <a:schemeClr val="accent1"/>
+          </a:effectRef>
+          <a:fontRef idx="minor">
+            <a:schemeClr val="lt1"/>
+          </a:fontRef>
+        </p:style>
+        <p:txBody>
+          <a:bodyPr rtlCol="0" anchor="ctr" wrap="square" tIns="25400" bIns="25400"/>
+          <a:lstStyle/>
+          <a:p>
+            <a:pPr algn="ctr"/>
+            <a:r>
+              <a:rPr sz="1200" b="0">
+                <a:solidFill>
+                  <a:srgbClr val="0F172A"/>
+                </a:solidFill>
+                <a:latin typeface="PingFang TC"/>
+                <a:ea typeface="PingFang TC"/>
+              </a:rPr>
+              <a:t>寫 DB → 順手 set（暖）</a:t>
+            </a:r>
+          </a:p>
+        </p:txBody>
+      </p:sp>
+      <p:sp>
+        <p:nvSpPr>
+          <p:cNvPr id="9" name="Rounded Rectangle 8"/>
+          <p:cNvSpPr/>
+          <p:nvPr/>
+        </p:nvSpPr>
+        <p:spPr>
+          <a:xfrm>
+            <a:off x="7315200" y="2606040"/>
+            <a:ext cx="4206240" cy="640080"/>
+          </a:xfrm>
+          <a:prstGeom prst="roundRect">
+            <a:avLst/>
+          </a:prstGeom>
+          <a:solidFill>
+            <a:srgbClr val="FFFFFF"/>
+          </a:solidFill>
+          <a:ln>
+            <a:solidFill>
+              <a:srgbClr val="FFFFFF"/>
+            </a:solidFill>
+          </a:ln>
+          <a:effectLst/>
+        </p:spPr>
+        <p:style>
+          <a:lnRef idx="1">
+            <a:schemeClr val="accent1"/>
+          </a:lnRef>
+          <a:fillRef idx="3">
+            <a:schemeClr val="accent1"/>
+          </a:fillRef>
+          <a:effectRef idx="2">
+            <a:schemeClr val="accent1"/>
+          </a:effectRef>
+          <a:fontRef idx="minor">
+            <a:schemeClr val="lt1"/>
+          </a:fontRef>
+        </p:style>
+        <p:txBody>
+          <a:bodyPr rtlCol="0" anchor="ctr" wrap="square" tIns="25400" bIns="25400"/>
+          <a:lstStyle/>
+          <a:p>
+            <a:pPr algn="ctr"/>
+            <a:r>
+              <a:rPr sz="1200" b="1">
+                <a:solidFill>
+                  <a:srgbClr val="2563EB"/>
+                </a:solidFill>
+                <a:latin typeface="PingFang TC"/>
+                <a:ea typeface="PingFang TC"/>
+              </a:rPr>
+              <a:t>write-through（小優化）</a:t>
+            </a:r>
+          </a:p>
+        </p:txBody>
+      </p:sp>
+      <p:sp>
+        <p:nvSpPr>
+          <p:cNvPr id="10" name="Rounded Rectangle 9"/>
+          <p:cNvSpPr/>
+          <p:nvPr/>
+        </p:nvSpPr>
+        <p:spPr>
+          <a:xfrm>
+            <a:off x="640080" y="3429000"/>
+            <a:ext cx="2286000" cy="640080"/>
+          </a:xfrm>
+          <a:prstGeom prst="roundRect">
+            <a:avLst/>
+          </a:prstGeom>
+          <a:solidFill>
+            <a:srgbClr val="DC2626"/>
+          </a:solidFill>
+          <a:ln>
+            <a:solidFill>
+              <a:srgbClr val="DC2626"/>
+            </a:solidFill>
+          </a:ln>
+          <a:effectLst/>
+        </p:spPr>
+        <p:style>
+          <a:lnRef idx="1">
+            <a:schemeClr val="accent1"/>
+          </a:lnRef>
+          <a:fillRef idx="3">
+            <a:schemeClr val="accent1"/>
+          </a:fillRef>
+          <a:effectRef idx="2">
+            <a:schemeClr val="accent1"/>
+          </a:effectRef>
+          <a:fontRef idx="minor">
+            <a:schemeClr val="lt1"/>
+          </a:fontRef>
+        </p:style>
+        <p:txBody>
+          <a:bodyPr rtlCol="0" anchor="ctr" wrap="square" tIns="25400" bIns="25400"/>
+          <a:lstStyle/>
+          <a:p>
+            <a:pPr algn="ctr"/>
+            <a:r>
+              <a:rPr sz="1300" b="1">
+                <a:solidFill>
+                  <a:srgbClr val="FFFFFF"/>
+                </a:solidFill>
+                <a:latin typeface="PingFang TC"/>
+                <a:ea typeface="PingFang TC"/>
+              </a:rPr>
+              <a:t>update / delete</a:t>
+            </a:r>
+          </a:p>
+        </p:txBody>
+      </p:sp>
+      <p:sp>
+        <p:nvSpPr>
+          <p:cNvPr id="11" name="Rounded Rectangle 10"/>
+          <p:cNvSpPr/>
+          <p:nvPr/>
+        </p:nvSpPr>
+        <p:spPr>
+          <a:xfrm>
+            <a:off x="3063240" y="3429000"/>
+            <a:ext cx="4114800" cy="640080"/>
+          </a:xfrm>
+          <a:prstGeom prst="roundRect">
+            <a:avLst/>
+          </a:prstGeom>
+          <a:solidFill>
+            <a:srgbClr val="FFFFFF"/>
+          </a:solidFill>
+          <a:ln>
+            <a:solidFill>
+              <a:srgbClr val="FFFFFF"/>
+            </a:solidFill>
+          </a:ln>
+          <a:effectLst/>
+        </p:spPr>
+        <p:style>
+          <a:lnRef idx="1">
+            <a:schemeClr val="accent1"/>
+          </a:lnRef>
+          <a:fillRef idx="3">
+            <a:schemeClr val="accent1"/>
+          </a:fillRef>
+          <a:effectRef idx="2">
+            <a:schemeClr val="accent1"/>
+          </a:effectRef>
+          <a:fontRef idx="minor">
+            <a:schemeClr val="lt1"/>
+          </a:fontRef>
+        </p:style>
+        <p:txBody>
+          <a:bodyPr rtlCol="0" anchor="ctr" wrap="square" tIns="25400" bIns="25400"/>
+          <a:lstStyle/>
+          <a:p>
+            <a:pPr algn="ctr"/>
+            <a:r>
+              <a:rPr sz="1200" b="0">
+                <a:solidFill>
+                  <a:srgbClr val="0F172A"/>
+                </a:solidFill>
+                <a:latin typeface="PingFang TC"/>
+                <a:ea typeface="PingFang TC"/>
+              </a:rPr>
+              <a:t>寫 DB →（commit 後）delete</a:t>
+            </a:r>
+          </a:p>
+        </p:txBody>
+      </p:sp>
+      <p:sp>
+        <p:nvSpPr>
+          <p:cNvPr id="12" name="Rounded Rectangle 11"/>
+          <p:cNvSpPr/>
+          <p:nvPr/>
+        </p:nvSpPr>
+        <p:spPr>
+          <a:xfrm>
+            <a:off x="7315200" y="3429000"/>
+            <a:ext cx="4206240" cy="640080"/>
+          </a:xfrm>
+          <a:prstGeom prst="roundRect">
+            <a:avLst/>
+          </a:prstGeom>
+          <a:solidFill>
+            <a:srgbClr val="FFFFFF"/>
+          </a:solidFill>
+          <a:ln>
+            <a:solidFill>
+              <a:srgbClr val="FFFFFF"/>
+            </a:solidFill>
+          </a:ln>
+          <a:effectLst/>
+        </p:spPr>
+        <p:style>
+          <a:lnRef idx="1">
+            <a:schemeClr val="accent1"/>
+          </a:lnRef>
+          <a:fillRef idx="3">
+            <a:schemeClr val="accent1"/>
+          </a:fillRef>
+          <a:effectRef idx="2">
+            <a:schemeClr val="accent1"/>
+          </a:effectRef>
+          <a:fontRef idx="minor">
+            <a:schemeClr val="lt1"/>
+          </a:fontRef>
+        </p:style>
+        <p:txBody>
+          <a:bodyPr rtlCol="0" anchor="ctr" wrap="square" tIns="25400" bIns="25400"/>
+          <a:lstStyle/>
+          <a:p>
+            <a:pPr algn="ctr"/>
+            <a:r>
+              <a:rPr sz="1200" b="1">
+                <a:solidFill>
+                  <a:srgbClr val="DC2626"/>
+                </a:solidFill>
+                <a:latin typeface="PingFang TC"/>
+                <a:ea typeface="PingFang TC"/>
+              </a:rPr>
+              <a:t>write-around / invalidate</a:t>
+            </a:r>
+          </a:p>
+        </p:txBody>
+      </p:sp>
+      <p:sp>
+        <p:nvSpPr>
+          <p:cNvPr id="13" name="TextBox 12"/>
           <p:cNvSpPr txBox="1"/>
           <p:nvPr/>
         </p:nvSpPr>
         <p:spPr>
           <a:xfrm>
-            <a:off x="640080" y="1737360"/>
-            <a:ext cx="10789920" cy="4572000"/>
+            <a:off x="640080" y="4480560"/>
+            <a:ext cx="10881360" cy="2103120"/>
           </a:xfrm>
           <a:prstGeom prst="rect">
             <a:avLst/>
@@ -8545,120 +9520,86 @@
           <a:p>
             <a:pPr>
               <a:spcAft>
-                <a:spcPts val="900"/>
+                <a:spcPts val="700"/>
               </a:spcAft>
             </a:pPr>
             <a:r>
-              <a:rPr sz="1500" b="0">
+              <a:rPr sz="1300" b="0">
                 <a:solidFill>
                   <a:srgbClr val="0F172A"/>
                 </a:solidFill>
                 <a:latin typeface="PingFang TC"/>
                 <a:ea typeface="PingFang TC"/>
               </a:rPr>
-              <a:t>•  App server stateless → 增加 instance 水平擴展（cache 外置 Redis）</a:t>
+              <a:t>•  為何寫時 invalidate 而非 write-through：</a:t>
+            </a:r>
+          </a:p>
+          <a:p>
+            <a:pPr lvl="1">
+              <a:spcAft>
+                <a:spcPts val="700"/>
+              </a:spcAft>
+            </a:pPr>
+            <a:r>
+              <a:rPr sz="1200" b="0">
+                <a:solidFill>
+                  <a:srgbClr val="64748B"/>
+                </a:solidFill>
+                <a:latin typeface="PingFang TC"/>
+                <a:ea typeface="PingFang TC"/>
+              </a:rPr>
+              <a:t>–  read-heavy 且非每筆會被讀 → write-through 白佔記憶體、擠掉熱門 token；write-around 只快取真正被讀的工作集</a:t>
+            </a:r>
+          </a:p>
+          <a:p>
+            <a:pPr lvl="1">
+              <a:spcAft>
+                <a:spcPts val="700"/>
+              </a:spcAft>
+            </a:pPr>
+            <a:r>
+              <a:rPr sz="1200" b="0">
+                <a:solidFill>
+                  <a:srgbClr val="64748B"/>
+                </a:solidFill>
+                <a:latin typeface="PingFang TC"/>
+                <a:ea typeface="PingFang TC"/>
+              </a:rPr>
+              <a:t>–  一致性更單純：update 直接刪 cache、下次讀從 DB 重建；順序 commit → 再 invalidate，避免 stale 回填 race</a:t>
+            </a:r>
+          </a:p>
+          <a:p>
+            <a:pPr lvl="1">
+              <a:spcAft>
+                <a:spcPts val="700"/>
+              </a:spcAft>
+            </a:pPr>
+            <a:r>
+              <a:rPr sz="1200" b="0">
+                <a:solidFill>
+                  <a:srgbClr val="64748B"/>
+                </a:solidFill>
+                <a:latin typeface="PingFang TC"/>
+                <a:ea typeface="PingFang TC"/>
+              </a:rPr>
+              <a:t>–  TTL 兜底最終一致；scan 分析寫入是非同步、不進此 cache（附錄 J）</a:t>
             </a:r>
           </a:p>
           <a:p>
             <a:pPr>
               <a:spcAft>
-                <a:spcPts val="900"/>
+                <a:spcPts val="700"/>
               </a:spcAft>
             </a:pPr>
             <a:r>
-              <a:rPr sz="1500" b="0">
+              <a:rPr sz="1300" b="0">
                 <a:solidFill>
                   <a:srgbClr val="0F172A"/>
                 </a:solidFill>
                 <a:latin typeface="PingFang TC"/>
                 <a:ea typeface="PingFang TC"/>
               </a:rPr>
-              <a:t>•  DB：單 primary + 多 read replica（讀走副）+ primary 掛 failover 升主</a:t>
-            </a:r>
-          </a:p>
-          <a:p>
-            <a:pPr lvl="1">
-              <a:spcAft>
-                <a:spcPts val="900"/>
-              </a:spcAft>
-            </a:pPr>
-            <a:r>
-              <a:rPr sz="1400" b="0">
-                <a:solidFill>
-                  <a:srgbClr val="64748B"/>
-                </a:solidFill>
-                <a:latin typeface="PingFang TC"/>
-                <a:ea typeface="PingFang TC"/>
-              </a:rPr>
-              <a:t>–  複寫延遲：create 後暖 cache 緩解</a:t>
-            </a:r>
-          </a:p>
-          <a:p>
-            <a:pPr>
-              <a:spcAft>
-                <a:spcPts val="900"/>
-              </a:spcAft>
-            </a:pPr>
-            <a:r>
-              <a:rPr sz="1500" b="0">
-                <a:solidFill>
-                  <a:srgbClr val="0F172A"/>
-                </a:solidFill>
-                <a:latin typeface="PingFang TC"/>
-                <a:ea typeface="PingFang TC"/>
-              </a:rPr>
-              <a:t>•  分片：以 token hash 為鍵（均勻），列為未來選項（200GB 目前單機足夠）</a:t>
-            </a:r>
-          </a:p>
-          <a:p>
-            <a:pPr>
-              <a:spcAft>
-                <a:spcPts val="900"/>
-              </a:spcAft>
-            </a:pPr>
-            <a:r>
-              <a:rPr sz="1500" b="0">
-                <a:solidFill>
-                  <a:srgbClr val="0F172A"/>
-                </a:solidFill>
-                <a:latin typeface="PingFang TC"/>
-                <a:ea typeface="PingFang TC"/>
-              </a:rPr>
-              <a:t>•  QR 圖片：object store + CDN（靜態內容，目標 URL 改不需重生圖）</a:t>
-            </a:r>
-          </a:p>
-          <a:p>
-            <a:pPr>
-              <a:spcAft>
-                <a:spcPts val="900"/>
-              </a:spcAft>
-            </a:pPr>
-            <a:r>
-              <a:rPr sz="1500" b="0">
-                <a:solidFill>
-                  <a:srgbClr val="0F172A"/>
-                </a:solidFill>
-                <a:latin typeface="PingFang TC"/>
-                <a:ea typeface="PingFang TC"/>
-              </a:rPr>
-              <a:t>•  分析：佇列 → 獨立分析庫 + 預聚合每日計數表</a:t>
-            </a:r>
-          </a:p>
-          <a:p>
-            <a:pPr>
-              <a:spcAft>
-                <a:spcPts val="900"/>
-              </a:spcAft>
-            </a:pPr>
-            <a:r>
-              <a:rPr sz="1500" b="0">
-                <a:solidFill>
-                  <a:srgbClr val="0F172A"/>
-                </a:solidFill>
-                <a:latin typeface="PingFang TC"/>
-                <a:ea typeface="PingFang TC"/>
-              </a:rPr>
-              <a:t>•  清理 cron：清過期 / 通知後刪長期未點擊 / 物理清理超期軟刪 + invalidate cache</a:t>
+              <a:t>•  何時反選 write-through：寫完馬上一定會讀（read-your-write 高頻，如 session）；redirect 建立與被掃無強時間關聯 → write-around 勝</a:t>
             </a:r>
           </a:p>
         </p:txBody>
@@ -8760,7 +9701,7 @@
                 <a:latin typeface="PingFang TC"/>
                 <a:ea typeface="PingFang TC"/>
               </a:rPr>
-              <a:t>11b · READ REPLICA</a:t>
+              <a:t>10 · DEEP DIVE</a:t>
             </a:r>
           </a:p>
           <a:p>
@@ -8777,7 +9718,7 @@
                 <a:latin typeface="PingFang TC"/>
                 <a:ea typeface="PingFang TC"/>
               </a:rPr>
-              <a:t>Read-heavy → 讀寫分離 + Read Replica</a:t>
+              <a:t>決策 3 — 可靠性與資料語意</a:t>
             </a:r>
           </a:p>
         </p:txBody>
@@ -8790,726 +9731,8 @@
         </p:nvSpPr>
         <p:spPr>
           <a:xfrm>
-            <a:off x="548640" y="1645920"/>
-            <a:ext cx="5486400" cy="2926080"/>
-          </a:xfrm>
-          <a:prstGeom prst="rect">
-            <a:avLst/>
-          </a:prstGeom>
-          <a:noFill/>
-        </p:spPr>
-        <p:txBody>
-          <a:bodyPr wrap="square" anchor="t">
-            <a:spAutoFit/>
-          </a:bodyPr>
-          <a:lstStyle/>
-          <a:p>
-            <a:pPr algn="l">
-              <a:spcAft>
-                <a:spcPts val="800"/>
-              </a:spcAft>
-            </a:pPr>
-            <a:r>
-              <a:rPr sz="1500" b="0">
-                <a:solidFill>
-                  <a:srgbClr val="0F172A"/>
-                </a:solidFill>
-                <a:latin typeface="PingFang TC"/>
-                <a:ea typeface="PingFang TC"/>
-              </a:rPr>
-              <a:t>容量：1B × 200B = 200GB（單機放得下）</a:t>
-            </a:r>
-          </a:p>
-          <a:p>
-            <a:pPr algn="l">
-              <a:spcAft>
-                <a:spcPts val="400"/>
-              </a:spcAft>
-            </a:pPr>
-            <a:r>
-              <a:rPr sz="1500" b="0">
-                <a:solidFill>
-                  <a:srgbClr val="0F172A"/>
-                </a:solidFill>
-                <a:latin typeface="PingFang TC"/>
-                <a:ea typeface="PingFang TC"/>
-              </a:rPr>
-              <a:t>讀流量：1 億 users × 5/日 = 5 億 redirects/日</a:t>
-            </a:r>
-          </a:p>
-          <a:p>
-            <a:pPr algn="l">
-              <a:spcAft>
-                <a:spcPts val="800"/>
-              </a:spcAft>
-            </a:pPr>
-            <a:r>
-              <a:rPr sz="1600" b="1">
-                <a:solidFill>
-                  <a:srgbClr val="2563EB"/>
-                </a:solidFill>
-                <a:latin typeface="PingFang TC"/>
-                <a:ea typeface="PingFang TC"/>
-              </a:rPr>
-              <a:t>            5 億 ÷ 86,400s ≈ 5,787 redirects/秒</a:t>
-            </a:r>
-          </a:p>
-          <a:p>
-            <a:pPr algn="l">
-              <a:spcAft>
-                <a:spcPts val="1200"/>
-              </a:spcAft>
-            </a:pPr>
-            <a:r>
-              <a:rPr sz="1500" b="0">
-                <a:solidFill>
-                  <a:srgbClr val="0F172A"/>
-                </a:solidFill>
-                <a:latin typeface="PingFang TC"/>
-                <a:ea typeface="PingFang TC"/>
-              </a:rPr>
-              <a:t>讀寫比：≈ 100:1（讀 ≫ 寫）</a:t>
-            </a:r>
-          </a:p>
-          <a:p>
-            <a:pPr algn="l">
-              <a:spcAft>
-                <a:spcPts val="400"/>
-              </a:spcAft>
-            </a:pPr>
-            <a:r>
-              <a:rPr sz="1500" b="1">
-                <a:solidFill>
-                  <a:srgbClr val="0F172A"/>
-                </a:solidFill>
-                <a:latin typeface="PingFang TC"/>
-                <a:ea typeface="PingFang TC"/>
-              </a:rPr>
-              <a:t>→ 瓶頸是「讀吞吐」、不是容量</a:t>
-            </a:r>
-          </a:p>
-          <a:p>
-            <a:pPr algn="l">
-              <a:spcAft>
-                <a:spcPts val="400"/>
-              </a:spcAft>
-            </a:pPr>
-            <a:r>
-              <a:rPr sz="1600" b="1">
-                <a:solidFill>
-                  <a:srgbClr val="059669"/>
-                </a:solidFill>
-                <a:latin typeface="PingFang TC"/>
-                <a:ea typeface="PingFang TC"/>
-              </a:rPr>
-              <a:t>→ 讀寫分離 + 多個 read replica</a:t>
-            </a:r>
-          </a:p>
-        </p:txBody>
-      </p:sp>
-      <p:sp>
-        <p:nvSpPr>
-          <p:cNvPr id="5" name="Rounded Rectangle 4"/>
-          <p:cNvSpPr/>
-          <p:nvPr/>
-        </p:nvSpPr>
-        <p:spPr>
-          <a:xfrm>
-            <a:off x="6126480" y="2286000"/>
-            <a:ext cx="1645920" cy="914400"/>
-          </a:xfrm>
-          <a:prstGeom prst="roundRect">
-            <a:avLst/>
-          </a:prstGeom>
-          <a:solidFill>
-            <a:srgbClr val="2563EB"/>
-          </a:solidFill>
-          <a:ln>
-            <a:solidFill>
-              <a:srgbClr val="2563EB"/>
-            </a:solidFill>
-          </a:ln>
-          <a:effectLst/>
-        </p:spPr>
-        <p:style>
-          <a:lnRef idx="1">
-            <a:schemeClr val="accent1"/>
-          </a:lnRef>
-          <a:fillRef idx="3">
-            <a:schemeClr val="accent1"/>
-          </a:fillRef>
-          <a:effectRef idx="2">
-            <a:schemeClr val="accent1"/>
-          </a:effectRef>
-          <a:fontRef idx="minor">
-            <a:schemeClr val="lt1"/>
-          </a:fontRef>
-        </p:style>
-        <p:txBody>
-          <a:bodyPr rtlCol="0" anchor="ctr" wrap="square" tIns="25400" bIns="25400"/>
-          <a:lstStyle/>
-          <a:p>
-            <a:pPr algn="ctr"/>
-            <a:r>
-              <a:rPr sz="1300" b="1">
-                <a:solidFill>
-                  <a:srgbClr val="FFFFFF"/>
-                </a:solidFill>
-                <a:latin typeface="PingFang TC"/>
-                <a:ea typeface="PingFang TC"/>
-              </a:rPr>
-              <a:t>App</a:t>
-            </a:r>
-          </a:p>
-          <a:p>
-            <a:pPr algn="ctr"/>
-            <a:r>
-              <a:rPr sz="1300" b="0">
-                <a:solidFill>
-                  <a:srgbClr val="FFFFFF"/>
-                </a:solidFill>
-                <a:latin typeface="PingFang TC"/>
-                <a:ea typeface="PingFang TC"/>
-              </a:rPr>
-              <a:t>(stateless)</a:t>
-            </a:r>
-          </a:p>
-        </p:txBody>
-      </p:sp>
-      <p:sp>
-        <p:nvSpPr>
-          <p:cNvPr id="6" name="Rounded Rectangle 5"/>
-          <p:cNvSpPr/>
-          <p:nvPr/>
-        </p:nvSpPr>
-        <p:spPr>
-          <a:xfrm>
-            <a:off x="8595360" y="1737360"/>
-            <a:ext cx="3017520" cy="731520"/>
-          </a:xfrm>
-          <a:prstGeom prst="roundRect">
-            <a:avLst/>
-          </a:prstGeom>
-          <a:solidFill>
-            <a:srgbClr val="059669"/>
-          </a:solidFill>
-          <a:ln>
-            <a:solidFill>
-              <a:srgbClr val="059669"/>
-            </a:solidFill>
-          </a:ln>
-          <a:effectLst/>
-        </p:spPr>
-        <p:style>
-          <a:lnRef idx="1">
-            <a:schemeClr val="accent1"/>
-          </a:lnRef>
-          <a:fillRef idx="3">
-            <a:schemeClr val="accent1"/>
-          </a:fillRef>
-          <a:effectRef idx="2">
-            <a:schemeClr val="accent1"/>
-          </a:effectRef>
-          <a:fontRef idx="minor">
-            <a:schemeClr val="lt1"/>
-          </a:fontRef>
-        </p:style>
-        <p:txBody>
-          <a:bodyPr rtlCol="0" anchor="ctr" wrap="square" tIns="25400" bIns="25400"/>
-          <a:lstStyle/>
-          <a:p>
-            <a:pPr algn="ctr"/>
-            <a:r>
-              <a:rPr sz="1300" b="1">
-                <a:solidFill>
-                  <a:srgbClr val="FFFFFF"/>
-                </a:solidFill>
-                <a:latin typeface="PingFang TC"/>
-                <a:ea typeface="PingFang TC"/>
-              </a:rPr>
-              <a:t>Primary (Write)</a:t>
-            </a:r>
-          </a:p>
-        </p:txBody>
-      </p:sp>
-      <p:sp>
-        <p:nvSpPr>
-          <p:cNvPr id="7" name="Rounded Rectangle 6"/>
-          <p:cNvSpPr/>
-          <p:nvPr/>
-        </p:nvSpPr>
-        <p:spPr>
-          <a:xfrm>
-            <a:off x="8595360" y="2697480"/>
-            <a:ext cx="3017520" cy="594360"/>
-          </a:xfrm>
-          <a:prstGeom prst="roundRect">
-            <a:avLst/>
-          </a:prstGeom>
-          <a:solidFill>
-            <a:srgbClr val="0EA5E9"/>
-          </a:solidFill>
-          <a:ln>
-            <a:solidFill>
-              <a:srgbClr val="0EA5E9"/>
-            </a:solidFill>
-          </a:ln>
-          <a:effectLst/>
-        </p:spPr>
-        <p:style>
-          <a:lnRef idx="1">
-            <a:schemeClr val="accent1"/>
-          </a:lnRef>
-          <a:fillRef idx="3">
-            <a:schemeClr val="accent1"/>
-          </a:fillRef>
-          <a:effectRef idx="2">
-            <a:schemeClr val="accent1"/>
-          </a:effectRef>
-          <a:fontRef idx="minor">
-            <a:schemeClr val="lt1"/>
-          </a:fontRef>
-        </p:style>
-        <p:txBody>
-          <a:bodyPr rtlCol="0" anchor="ctr" wrap="square" tIns="25400" bIns="25400"/>
-          <a:lstStyle/>
-          <a:p>
-            <a:pPr algn="ctr"/>
-            <a:r>
-              <a:rPr sz="1200" b="1">
-                <a:solidFill>
-                  <a:srgbClr val="FFFFFF"/>
-                </a:solidFill>
-                <a:latin typeface="PingFang TC"/>
-                <a:ea typeface="PingFang TC"/>
-              </a:rPr>
-              <a:t>Read Replica 1</a:t>
-            </a:r>
-          </a:p>
-        </p:txBody>
-      </p:sp>
-      <p:sp>
-        <p:nvSpPr>
-          <p:cNvPr id="8" name="Rounded Rectangle 7"/>
-          <p:cNvSpPr/>
-          <p:nvPr/>
-        </p:nvSpPr>
-        <p:spPr>
-          <a:xfrm>
-            <a:off x="8595360" y="3429000"/>
-            <a:ext cx="3017520" cy="594360"/>
-          </a:xfrm>
-          <a:prstGeom prst="roundRect">
-            <a:avLst/>
-          </a:prstGeom>
-          <a:solidFill>
-            <a:srgbClr val="0EA5E9"/>
-          </a:solidFill>
-          <a:ln>
-            <a:solidFill>
-              <a:srgbClr val="0EA5E9"/>
-            </a:solidFill>
-          </a:ln>
-          <a:effectLst/>
-        </p:spPr>
-        <p:style>
-          <a:lnRef idx="1">
-            <a:schemeClr val="accent1"/>
-          </a:lnRef>
-          <a:fillRef idx="3">
-            <a:schemeClr val="accent1"/>
-          </a:fillRef>
-          <a:effectRef idx="2">
-            <a:schemeClr val="accent1"/>
-          </a:effectRef>
-          <a:fontRef idx="minor">
-            <a:schemeClr val="lt1"/>
-          </a:fontRef>
-        </p:style>
-        <p:txBody>
-          <a:bodyPr rtlCol="0" anchor="ctr" wrap="square" tIns="25400" bIns="25400"/>
-          <a:lstStyle/>
-          <a:p>
-            <a:pPr algn="ctr"/>
-            <a:r>
-              <a:rPr sz="1200" b="1">
-                <a:solidFill>
-                  <a:srgbClr val="FFFFFF"/>
-                </a:solidFill>
-                <a:latin typeface="PingFang TC"/>
-                <a:ea typeface="PingFang TC"/>
-              </a:rPr>
-              <a:t>Read Replica 2</a:t>
-            </a:r>
-          </a:p>
-        </p:txBody>
-      </p:sp>
-      <p:sp>
-        <p:nvSpPr>
-          <p:cNvPr id="9" name="Rounded Rectangle 8"/>
-          <p:cNvSpPr/>
-          <p:nvPr/>
-        </p:nvSpPr>
-        <p:spPr>
-          <a:xfrm>
-            <a:off x="8595360" y="4160520"/>
-            <a:ext cx="3017520" cy="594360"/>
-          </a:xfrm>
-          <a:prstGeom prst="roundRect">
-            <a:avLst/>
-          </a:prstGeom>
-          <a:solidFill>
-            <a:srgbClr val="0EA5E9"/>
-          </a:solidFill>
-          <a:ln>
-            <a:solidFill>
-              <a:srgbClr val="0EA5E9"/>
-            </a:solidFill>
-          </a:ln>
-          <a:effectLst/>
-        </p:spPr>
-        <p:style>
-          <a:lnRef idx="1">
-            <a:schemeClr val="accent1"/>
-          </a:lnRef>
-          <a:fillRef idx="3">
-            <a:schemeClr val="accent1"/>
-          </a:fillRef>
-          <a:effectRef idx="2">
-            <a:schemeClr val="accent1"/>
-          </a:effectRef>
-          <a:fontRef idx="minor">
-            <a:schemeClr val="lt1"/>
-          </a:fontRef>
-        </p:style>
-        <p:txBody>
-          <a:bodyPr rtlCol="0" anchor="ctr" wrap="square" tIns="25400" bIns="25400"/>
-          <a:lstStyle/>
-          <a:p>
-            <a:pPr algn="ctr"/>
-            <a:r>
-              <a:rPr sz="1200" b="1">
-                <a:solidFill>
-                  <a:srgbClr val="FFFFFF"/>
-                </a:solidFill>
-                <a:latin typeface="PingFang TC"/>
-                <a:ea typeface="PingFang TC"/>
-              </a:rPr>
-              <a:t>Read Replica N</a:t>
-            </a:r>
-          </a:p>
-        </p:txBody>
-      </p:sp>
-      <p:cxnSp>
-        <p:nvCxnSpPr>
-          <p:cNvPr id="10" name="Connector 9"/>
-          <p:cNvCxnSpPr/>
-          <p:nvPr/>
-        </p:nvCxnSpPr>
-        <p:spPr>
-          <a:xfrm flipV="1">
-            <a:off x="7772400" y="2103120"/>
-            <a:ext cx="822960" cy="457200"/>
-          </a:xfrm>
-          <a:prstGeom prst="line">
-            <a:avLst/>
-          </a:prstGeom>
-          <a:ln w="20320">
-            <a:solidFill>
-              <a:srgbClr val="DC2626"/>
-            </a:solidFill>
-            <a:tailEnd type="triangle" w="med" len="med"/>
-          </a:ln>
-        </p:spPr>
-        <p:style>
-          <a:lnRef idx="2">
-            <a:schemeClr val="accent1"/>
-          </a:lnRef>
-          <a:fillRef idx="0">
-            <a:schemeClr val="accent1"/>
-          </a:fillRef>
-          <a:effectRef idx="1">
-            <a:schemeClr val="accent1"/>
-          </a:effectRef>
-          <a:fontRef idx="minor">
-            <a:schemeClr val="tx1"/>
-          </a:fontRef>
-        </p:style>
-      </p:cxnSp>
-      <p:cxnSp>
-        <p:nvCxnSpPr>
-          <p:cNvPr id="11" name="Connector 10"/>
-          <p:cNvCxnSpPr/>
-          <p:nvPr/>
-        </p:nvCxnSpPr>
-        <p:spPr>
-          <a:xfrm>
-            <a:off x="7772400" y="2880360"/>
-            <a:ext cx="822960" cy="109728"/>
-          </a:xfrm>
-          <a:prstGeom prst="line">
-            <a:avLst/>
-          </a:prstGeom>
-          <a:ln w="17780">
-            <a:solidFill>
-              <a:srgbClr val="059669"/>
-            </a:solidFill>
-            <a:tailEnd type="triangle" w="med" len="med"/>
-          </a:ln>
-        </p:spPr>
-        <p:style>
-          <a:lnRef idx="2">
-            <a:schemeClr val="accent1"/>
-          </a:lnRef>
-          <a:fillRef idx="0">
-            <a:schemeClr val="accent1"/>
-          </a:fillRef>
-          <a:effectRef idx="1">
-            <a:schemeClr val="accent1"/>
-          </a:effectRef>
-          <a:fontRef idx="minor">
-            <a:schemeClr val="tx1"/>
-          </a:fontRef>
-        </p:style>
-      </p:cxnSp>
-      <p:cxnSp>
-        <p:nvCxnSpPr>
-          <p:cNvPr id="12" name="Connector 11"/>
-          <p:cNvCxnSpPr/>
-          <p:nvPr/>
-        </p:nvCxnSpPr>
-        <p:spPr>
-          <a:xfrm>
-            <a:off x="7772400" y="3017520"/>
-            <a:ext cx="822960" cy="704088"/>
-          </a:xfrm>
-          <a:prstGeom prst="line">
-            <a:avLst/>
-          </a:prstGeom>
-          <a:ln w="17780">
-            <a:solidFill>
-              <a:srgbClr val="059669"/>
-            </a:solidFill>
-            <a:tailEnd type="triangle" w="med" len="med"/>
-          </a:ln>
-        </p:spPr>
-        <p:style>
-          <a:lnRef idx="2">
-            <a:schemeClr val="accent1"/>
-          </a:lnRef>
-          <a:fillRef idx="0">
-            <a:schemeClr val="accent1"/>
-          </a:fillRef>
-          <a:effectRef idx="1">
-            <a:schemeClr val="accent1"/>
-          </a:effectRef>
-          <a:fontRef idx="minor">
-            <a:schemeClr val="tx1"/>
-          </a:fontRef>
-        </p:style>
-      </p:cxnSp>
-      <p:cxnSp>
-        <p:nvCxnSpPr>
-          <p:cNvPr id="13" name="Connector 12"/>
-          <p:cNvCxnSpPr/>
-          <p:nvPr/>
-        </p:nvCxnSpPr>
-        <p:spPr>
-          <a:xfrm>
-            <a:off x="7772400" y="3108960"/>
-            <a:ext cx="822960" cy="1344168"/>
-          </a:xfrm>
-          <a:prstGeom prst="line">
-            <a:avLst/>
-          </a:prstGeom>
-          <a:ln w="17780">
-            <a:solidFill>
-              <a:srgbClr val="059669"/>
-            </a:solidFill>
-            <a:tailEnd type="triangle" w="med" len="med"/>
-          </a:ln>
-        </p:spPr>
-        <p:style>
-          <a:lnRef idx="2">
-            <a:schemeClr val="accent1"/>
-          </a:lnRef>
-          <a:fillRef idx="0">
-            <a:schemeClr val="accent1"/>
-          </a:fillRef>
-          <a:effectRef idx="1">
-            <a:schemeClr val="accent1"/>
-          </a:effectRef>
-          <a:fontRef idx="minor">
-            <a:schemeClr val="tx1"/>
-          </a:fontRef>
-        </p:style>
-      </p:cxnSp>
-      <p:sp>
-        <p:nvSpPr>
-          <p:cNvPr id="14" name="TextBox 13"/>
-          <p:cNvSpPr txBox="1"/>
-          <p:nvPr/>
-        </p:nvSpPr>
-        <p:spPr>
-          <a:xfrm>
-            <a:off x="7635240" y="2057400"/>
-            <a:ext cx="914400" cy="274320"/>
-          </a:xfrm>
-          <a:prstGeom prst="rect">
-            <a:avLst/>
-          </a:prstGeom>
-          <a:noFill/>
-        </p:spPr>
-        <p:txBody>
-          <a:bodyPr wrap="square" anchor="t">
-            <a:spAutoFit/>
-          </a:bodyPr>
-          <a:lstStyle/>
-          <a:p>
-            <a:pPr algn="l">
-              <a:spcAft>
-                <a:spcPts val="400"/>
-              </a:spcAft>
-            </a:pPr>
-            <a:r>
-              <a:rPr sz="1200" b="1">
-                <a:solidFill>
-                  <a:srgbClr val="DC2626"/>
-                </a:solidFill>
-                <a:latin typeface="PingFang TC"/>
-                <a:ea typeface="PingFang TC"/>
-              </a:rPr>
-              <a:t>寫</a:t>
-            </a:r>
-          </a:p>
-        </p:txBody>
-      </p:sp>
-      <p:sp>
-        <p:nvSpPr>
-          <p:cNvPr id="15" name="TextBox 14"/>
-          <p:cNvSpPr txBox="1"/>
-          <p:nvPr/>
-        </p:nvSpPr>
-        <p:spPr>
-          <a:xfrm>
-            <a:off x="7589520" y="3200400"/>
-            <a:ext cx="914400" cy="274320"/>
-          </a:xfrm>
-          <a:prstGeom prst="rect">
-            <a:avLst/>
-          </a:prstGeom>
-          <a:noFill/>
-        </p:spPr>
-        <p:txBody>
-          <a:bodyPr wrap="square" anchor="t">
-            <a:spAutoFit/>
-          </a:bodyPr>
-          <a:lstStyle/>
-          <a:p>
-            <a:pPr algn="l">
-              <a:spcAft>
-                <a:spcPts val="400"/>
-              </a:spcAft>
-            </a:pPr>
-            <a:r>
-              <a:rPr sz="1200" b="1">
-                <a:solidFill>
-                  <a:srgbClr val="059669"/>
-                </a:solidFill>
-                <a:latin typeface="PingFang TC"/>
-                <a:ea typeface="PingFang TC"/>
-              </a:rPr>
-              <a:t>讀</a:t>
-            </a:r>
-          </a:p>
-        </p:txBody>
-      </p:sp>
-      <p:cxnSp>
-        <p:nvCxnSpPr>
-          <p:cNvPr id="16" name="Connector 15"/>
-          <p:cNvCxnSpPr/>
-          <p:nvPr/>
-        </p:nvCxnSpPr>
-        <p:spPr>
-          <a:xfrm>
-            <a:off x="10104120" y="2468880"/>
-            <a:ext cx="0" cy="228600"/>
-          </a:xfrm>
-          <a:prstGeom prst="line">
-            <a:avLst/>
-          </a:prstGeom>
-          <a:ln w="13970">
-            <a:solidFill>
-              <a:srgbClr val="64748B"/>
-            </a:solidFill>
-            <a:tailEnd type="triangle" w="med" len="med"/>
-          </a:ln>
-        </p:spPr>
-        <p:style>
-          <a:lnRef idx="2">
-            <a:schemeClr val="accent1"/>
-          </a:lnRef>
-          <a:fillRef idx="0">
-            <a:schemeClr val="accent1"/>
-          </a:fillRef>
-          <a:effectRef idx="1">
-            <a:schemeClr val="accent1"/>
-          </a:effectRef>
-          <a:fontRef idx="minor">
-            <a:schemeClr val="tx1"/>
-          </a:fontRef>
-        </p:style>
-      </p:cxnSp>
-      <p:sp>
-        <p:nvSpPr>
-          <p:cNvPr id="17" name="TextBox 16"/>
-          <p:cNvSpPr txBox="1"/>
-          <p:nvPr/>
-        </p:nvSpPr>
-        <p:spPr>
-          <a:xfrm>
-            <a:off x="10241280" y="2395728"/>
-            <a:ext cx="1463040" cy="274320"/>
-          </a:xfrm>
-          <a:prstGeom prst="rect">
-            <a:avLst/>
-          </a:prstGeom>
-          <a:noFill/>
-        </p:spPr>
-        <p:txBody>
-          <a:bodyPr wrap="square" anchor="t">
-            <a:spAutoFit/>
-          </a:bodyPr>
-          <a:lstStyle/>
-          <a:p>
-            <a:pPr algn="l">
-              <a:spcAft>
-                <a:spcPts val="400"/>
-              </a:spcAft>
-            </a:pPr>
-            <a:r>
-              <a:rPr sz="1000" b="0">
-                <a:solidFill>
-                  <a:srgbClr val="64748B"/>
-                </a:solidFill>
-                <a:latin typeface="PingFang TC"/>
-                <a:ea typeface="PingFang TC"/>
-              </a:rPr>
-              <a:t>非同步複寫</a:t>
-            </a:r>
-          </a:p>
-        </p:txBody>
-      </p:sp>
-      <p:sp>
-        <p:nvSpPr>
-          <p:cNvPr id="18" name="TextBox 17"/>
-          <p:cNvSpPr txBox="1"/>
-          <p:nvPr/>
-        </p:nvSpPr>
-        <p:spPr>
-          <a:xfrm>
-            <a:off x="548640" y="5029200"/>
-            <a:ext cx="11247120" cy="1554480"/>
+            <a:off x="640080" y="1737360"/>
+            <a:ext cx="10789920" cy="4572000"/>
           </a:xfrm>
           <a:prstGeom prst="rect">
             <a:avLst/>
@@ -9524,52 +9747,120 @@
           <a:p>
             <a:pPr>
               <a:spcAft>
-                <a:spcPts val="600"/>
+                <a:spcPts val="900"/>
               </a:spcAft>
             </a:pPr>
             <a:r>
-              <a:rPr sz="1300" b="0">
+              <a:rPr sz="1500" b="0">
                 <a:solidFill>
                   <a:srgbClr val="0F172A"/>
                 </a:solidFill>
                 <a:latin typeface="PingFang TC"/>
                 <a:ea typeface="PingFang TC"/>
               </a:rPr>
-              <a:t>•  寫走 primary、讀走 replica（load-balanced）；讀不夠就加 replica 水平擴讀</a:t>
+              <a:t>•  軟刪除（is_deleted）：支撐 410 語意、保留分析、避免 token 回收風險</a:t>
             </a:r>
           </a:p>
           <a:p>
             <a:pPr>
               <a:spcAft>
-                <a:spcPts val="600"/>
+                <a:spcPts val="900"/>
               </a:spcAft>
             </a:pPr>
             <a:r>
-              <a:rPr sz="1300" b="0">
+              <a:rPr sz="1500" b="0">
                 <a:solidFill>
                   <a:srgbClr val="0F172A"/>
                 </a:solidFill>
                 <a:latin typeface="PingFang TC"/>
                 <a:ea typeface="PingFang TC"/>
               </a:rPr>
-              <a:t>•  配合 Redis cache，真正打到 DB 的讀已先被擋掉一大半</a:t>
+              <a:t>•  錯誤語意：404（從未存在） vs 410（曾存在已刪/過期）</a:t>
+            </a:r>
+          </a:p>
+          <a:p>
+            <a:pPr lvl="1">
+              <a:spcAft>
+                <a:spcPts val="900"/>
+              </a:spcAft>
+            </a:pPr>
+            <a:r>
+              <a:rPr sz="1400" b="0">
+                <a:solidFill>
+                  <a:srgbClr val="64748B"/>
+                </a:solidFill>
+                <a:latin typeface="PingFang TC"/>
+                <a:ea typeface="PingFang TC"/>
+              </a:rPr>
+              <a:t>–  掃描路徑刪除回 410；管理 API 已刪回 404（刻意差異）</a:t>
             </a:r>
           </a:p>
           <a:p>
             <a:pPr>
               <a:spcAft>
-                <a:spcPts val="600"/>
+                <a:spcPts val="900"/>
               </a:spcAft>
             </a:pPr>
             <a:r>
-              <a:rPr sz="1300" b="0">
+              <a:rPr sz="1500" b="0">
                 <a:solidFill>
                   <a:srgbClr val="0F172A"/>
                 </a:solidFill>
                 <a:latin typeface="PingFang TC"/>
                 <a:ea typeface="PingFang TC"/>
               </a:rPr>
-              <a:t>•  failover：primary 掛 → 升一台 read replica 為新 primary；複寫延遲靠 create 後暖 cache 緩解</a:t>
+              <a:t>•  惰性過期 + cron 兜底：掃描即時檢查過期；cron 清過期/通知未點擊/物理清理</a:t>
+            </a:r>
+          </a:p>
+          <a:p>
+            <a:pPr>
+              <a:spcAft>
+                <a:spcPts val="900"/>
+              </a:spcAft>
+            </a:pPr>
+            <a:r>
+              <a:rPr sz="1500" b="0">
+                <a:solidFill>
+                  <a:srgbClr val="0F172A"/>
+                </a:solidFill>
+                <a:latin typeface="PingFang TC"/>
+                <a:ea typeface="PingFang TC"/>
+              </a:rPr>
+              <a:t>•  URL 保守正規化：只 lower-case host，保留 path/query 與原 scheme</a:t>
+            </a:r>
+          </a:p>
+          <a:p>
+            <a:pPr lvl="1">
+              <a:spcAft>
+                <a:spcPts val="900"/>
+              </a:spcAft>
+            </a:pPr>
+            <a:r>
+              <a:rPr sz="1400" b="0">
+                <a:solidFill>
+                  <a:srgbClr val="64748B"/>
+                </a:solidFill>
+                <a:latin typeface="PingFang TC"/>
+                <a:ea typeface="PingFang TC"/>
+              </a:rPr>
+              <a:t>–  修正 repo 的整串小寫（破壞 path）+ 強制 https（導向失效站）</a:t>
+            </a:r>
+          </a:p>
+          <a:p>
+            <a:pPr>
+              <a:spcAft>
+                <a:spcPts val="900"/>
+              </a:spcAft>
+            </a:pPr>
+            <a:r>
+              <a:rPr sz="1500" b="0">
+                <a:solidFill>
+                  <a:srgbClr val="0F172A"/>
+                </a:solidFill>
+                <a:latin typeface="PingFang TC"/>
+                <a:ea typeface="PingFang TC"/>
+              </a:rPr>
+              <a:t>•  惡意阻擋：黑名單 + SSRF/內網位址（localhost·127.*·私網），正式版接 Safe Browsing</a:t>
             </a:r>
           </a:p>
         </p:txBody>
@@ -10386,7 +10677,7 @@
                 <a:latin typeface="PingFang TC"/>
                 <a:ea typeface="PingFang TC"/>
               </a:rPr>
-              <a:t>12 · IMPROVEMENTS</a:t>
+              <a:t>11 · SCALING</a:t>
             </a:r>
           </a:p>
           <a:p>
@@ -10403,21 +10694,407 @@
                 <a:latin typeface="PingFang TC"/>
                 <a:ea typeface="PingFang TC"/>
               </a:rPr>
-              <a:t>對參考 repo 的關鍵改良</a:t>
-            </a:r>
-          </a:p>
-        </p:txBody>
-      </p:sp>
-      <p:sp>
-        <p:nvSpPr>
-          <p:cNvPr id="4" name="Rounded Rectangle 3"/>
+              <a:t>擴展策略</a:t>
+            </a:r>
+          </a:p>
+        </p:txBody>
+      </p:sp>
+      <p:sp>
+        <p:nvSpPr>
+          <p:cNvPr id="4" name="TextBox 3"/>
+          <p:cNvSpPr txBox="1"/>
+          <p:nvPr/>
+        </p:nvSpPr>
+        <p:spPr>
+          <a:xfrm>
+            <a:off x="640080" y="1737360"/>
+            <a:ext cx="10789920" cy="4572000"/>
+          </a:xfrm>
+          <a:prstGeom prst="rect">
+            <a:avLst/>
+          </a:prstGeom>
+          <a:noFill/>
+        </p:spPr>
+        <p:txBody>
+          <a:bodyPr wrap="square">
+            <a:spAutoFit/>
+          </a:bodyPr>
+          <a:lstStyle/>
+          <a:p>
+            <a:pPr>
+              <a:spcAft>
+                <a:spcPts val="900"/>
+              </a:spcAft>
+            </a:pPr>
+            <a:r>
+              <a:rPr sz="1500" b="0">
+                <a:solidFill>
+                  <a:srgbClr val="0F172A"/>
+                </a:solidFill>
+                <a:latin typeface="PingFang TC"/>
+                <a:ea typeface="PingFang TC"/>
+              </a:rPr>
+              <a:t>•  App server stateless → 增加 instance 水平擴展（cache 外置 Redis）</a:t>
+            </a:r>
+          </a:p>
+          <a:p>
+            <a:pPr>
+              <a:spcAft>
+                <a:spcPts val="900"/>
+              </a:spcAft>
+            </a:pPr>
+            <a:r>
+              <a:rPr sz="1500" b="0">
+                <a:solidFill>
+                  <a:srgbClr val="0F172A"/>
+                </a:solidFill>
+                <a:latin typeface="PingFang TC"/>
+                <a:ea typeface="PingFang TC"/>
+              </a:rPr>
+              <a:t>•  DB：單 primary + 多 read replica（讀走副）+ primary 掛 failover 升主</a:t>
+            </a:r>
+          </a:p>
+          <a:p>
+            <a:pPr lvl="1">
+              <a:spcAft>
+                <a:spcPts val="900"/>
+              </a:spcAft>
+            </a:pPr>
+            <a:r>
+              <a:rPr sz="1400" b="0">
+                <a:solidFill>
+                  <a:srgbClr val="64748B"/>
+                </a:solidFill>
+                <a:latin typeface="PingFang TC"/>
+                <a:ea typeface="PingFang TC"/>
+              </a:rPr>
+              <a:t>–  複寫延遲：create 後暖 cache 緩解</a:t>
+            </a:r>
+          </a:p>
+          <a:p>
+            <a:pPr>
+              <a:spcAft>
+                <a:spcPts val="900"/>
+              </a:spcAft>
+            </a:pPr>
+            <a:r>
+              <a:rPr sz="1500" b="0">
+                <a:solidFill>
+                  <a:srgbClr val="0F172A"/>
+                </a:solidFill>
+                <a:latin typeface="PingFang TC"/>
+                <a:ea typeface="PingFang TC"/>
+              </a:rPr>
+              <a:t>•  分片：以 token hash 為鍵（均勻），列為未來選項（200GB 目前單機足夠）</a:t>
+            </a:r>
+          </a:p>
+          <a:p>
+            <a:pPr>
+              <a:spcAft>
+                <a:spcPts val="900"/>
+              </a:spcAft>
+            </a:pPr>
+            <a:r>
+              <a:rPr sz="1500" b="0">
+                <a:solidFill>
+                  <a:srgbClr val="0F172A"/>
+                </a:solidFill>
+                <a:latin typeface="PingFang TC"/>
+                <a:ea typeface="PingFang TC"/>
+              </a:rPr>
+              <a:t>•  QR 圖片：object store + CDN（靜態內容，目標 URL 改不需重生圖）</a:t>
+            </a:r>
+          </a:p>
+          <a:p>
+            <a:pPr>
+              <a:spcAft>
+                <a:spcPts val="900"/>
+              </a:spcAft>
+            </a:pPr>
+            <a:r>
+              <a:rPr sz="1500" b="0">
+                <a:solidFill>
+                  <a:srgbClr val="0F172A"/>
+                </a:solidFill>
+                <a:latin typeface="PingFang TC"/>
+                <a:ea typeface="PingFang TC"/>
+              </a:rPr>
+              <a:t>•  分析：佇列 → 獨立分析庫 + 預聚合每日計數表</a:t>
+            </a:r>
+          </a:p>
+          <a:p>
+            <a:pPr>
+              <a:spcAft>
+                <a:spcPts val="900"/>
+              </a:spcAft>
+            </a:pPr>
+            <a:r>
+              <a:rPr sz="1500" b="0">
+                <a:solidFill>
+                  <a:srgbClr val="0F172A"/>
+                </a:solidFill>
+                <a:latin typeface="PingFang TC"/>
+                <a:ea typeface="PingFang TC"/>
+              </a:rPr>
+              <a:t>•  清理 cron：清過期 / 通知後刪長期未點擊 / 物理清理超期軟刪 + invalidate cache</a:t>
+            </a:r>
+          </a:p>
+        </p:txBody>
+      </p:sp>
+    </p:spTree>
+  </p:cSld>
+  <p:clrMapOvr>
+    <a:masterClrMapping/>
+  </p:clrMapOvr>
+</p:sld>
+</file>
+
+<file path=ppt/slides/slide21.xml><?xml version="1.0" encoding="utf-8"?>
+<p:sld xmlns:a="http://schemas.openxmlformats.org/drawingml/2006/main" xmlns:p="http://schemas.openxmlformats.org/presentationml/2006/main" xmlns:r="http://schemas.openxmlformats.org/officeDocument/2006/relationships">
+  <p:cSld>
+    <p:spTree>
+      <p:nvGrpSpPr>
+        <p:cNvPr id="1" name=""/>
+        <p:cNvGrpSpPr/>
+        <p:nvPr/>
+      </p:nvGrpSpPr>
+      <p:grpSpPr/>
+      <p:sp>
+        <p:nvSpPr>
+          <p:cNvPr id="2" name="Rectangle 1"/>
           <p:cNvSpPr/>
           <p:nvPr/>
         </p:nvSpPr>
         <p:spPr>
           <a:xfrm>
-            <a:off x="640080" y="1691640"/>
-            <a:ext cx="640080" cy="731520"/>
+            <a:off x="0" y="0"/>
+            <a:ext cx="164592" cy="6858000"/>
+          </a:xfrm>
+          <a:prstGeom prst="rect">
+            <a:avLst/>
+          </a:prstGeom>
+          <a:solidFill>
+            <a:srgbClr val="2563EB"/>
+          </a:solidFill>
+          <a:ln>
+            <a:noFill/>
+          </a:ln>
+          <a:effectLst/>
+        </p:spPr>
+        <p:style>
+          <a:lnRef idx="1">
+            <a:schemeClr val="accent1"/>
+          </a:lnRef>
+          <a:fillRef idx="3">
+            <a:schemeClr val="accent1"/>
+          </a:fillRef>
+          <a:effectRef idx="2">
+            <a:schemeClr val="accent1"/>
+          </a:effectRef>
+          <a:fontRef idx="minor">
+            <a:schemeClr val="lt1"/>
+          </a:fontRef>
+        </p:style>
+        <p:txBody>
+          <a:bodyPr rtlCol="0" anchor="ctr"/>
+          <a:lstStyle/>
+          <a:p>
+            <a:pPr algn="ctr"/>
+          </a:p>
+        </p:txBody>
+      </p:sp>
+      <p:sp>
+        <p:nvSpPr>
+          <p:cNvPr id="3" name="TextBox 2"/>
+          <p:cNvSpPr txBox="1"/>
+          <p:nvPr/>
+        </p:nvSpPr>
+        <p:spPr>
+          <a:xfrm>
+            <a:off x="502920" y="320040"/>
+            <a:ext cx="10972800" cy="1005840"/>
+          </a:xfrm>
+          <a:prstGeom prst="rect">
+            <a:avLst/>
+          </a:prstGeom>
+          <a:noFill/>
+        </p:spPr>
+        <p:txBody>
+          <a:bodyPr wrap="square" anchor="t">
+            <a:spAutoFit/>
+          </a:bodyPr>
+          <a:lstStyle/>
+          <a:p>
+            <a:pPr algn="l">
+              <a:spcAft>
+                <a:spcPts val="200"/>
+              </a:spcAft>
+            </a:pPr>
+            <a:r>
+              <a:rPr sz="1300" b="1">
+                <a:solidFill>
+                  <a:srgbClr val="2563EB"/>
+                </a:solidFill>
+                <a:latin typeface="PingFang TC"/>
+                <a:ea typeface="PingFang TC"/>
+              </a:rPr>
+              <a:t>11b · READ REPLICA</a:t>
+            </a:r>
+          </a:p>
+          <a:p>
+            <a:pPr algn="l">
+              <a:spcAft>
+                <a:spcPts val="400"/>
+              </a:spcAft>
+            </a:pPr>
+            <a:r>
+              <a:rPr sz="3000" b="1">
+                <a:solidFill>
+                  <a:srgbClr val="0F172A"/>
+                </a:solidFill>
+                <a:latin typeface="PingFang TC"/>
+                <a:ea typeface="PingFang TC"/>
+              </a:rPr>
+              <a:t>Read-heavy → 讀寫分離 + Read Replica</a:t>
+            </a:r>
+          </a:p>
+        </p:txBody>
+      </p:sp>
+      <p:sp>
+        <p:nvSpPr>
+          <p:cNvPr id="4" name="TextBox 3"/>
+          <p:cNvSpPr txBox="1"/>
+          <p:nvPr/>
+        </p:nvSpPr>
+        <p:spPr>
+          <a:xfrm>
+            <a:off x="548640" y="1645920"/>
+            <a:ext cx="5486400" cy="2926080"/>
+          </a:xfrm>
+          <a:prstGeom prst="rect">
+            <a:avLst/>
+          </a:prstGeom>
+          <a:noFill/>
+        </p:spPr>
+        <p:txBody>
+          <a:bodyPr wrap="square" anchor="t">
+            <a:spAutoFit/>
+          </a:bodyPr>
+          <a:lstStyle/>
+          <a:p>
+            <a:pPr algn="l">
+              <a:spcAft>
+                <a:spcPts val="800"/>
+              </a:spcAft>
+            </a:pPr>
+            <a:r>
+              <a:rPr sz="1500" b="0">
+                <a:solidFill>
+                  <a:srgbClr val="0F172A"/>
+                </a:solidFill>
+                <a:latin typeface="PingFang TC"/>
+                <a:ea typeface="PingFang TC"/>
+              </a:rPr>
+              <a:t>容量：1B × 200B = 200GB（單機放得下）</a:t>
+            </a:r>
+          </a:p>
+          <a:p>
+            <a:pPr algn="l">
+              <a:spcAft>
+                <a:spcPts val="400"/>
+              </a:spcAft>
+            </a:pPr>
+            <a:r>
+              <a:rPr sz="1500" b="0">
+                <a:solidFill>
+                  <a:srgbClr val="0F172A"/>
+                </a:solidFill>
+                <a:latin typeface="PingFang TC"/>
+                <a:ea typeface="PingFang TC"/>
+              </a:rPr>
+              <a:t>讀流量：1 億 users × 5/日 = 5 億 redirects/日</a:t>
+            </a:r>
+          </a:p>
+          <a:p>
+            <a:pPr algn="l">
+              <a:spcAft>
+                <a:spcPts val="800"/>
+              </a:spcAft>
+            </a:pPr>
+            <a:r>
+              <a:rPr sz="1600" b="1">
+                <a:solidFill>
+                  <a:srgbClr val="2563EB"/>
+                </a:solidFill>
+                <a:latin typeface="PingFang TC"/>
+                <a:ea typeface="PingFang TC"/>
+              </a:rPr>
+              <a:t>            5 億 ÷ 86,400s ≈ 5,787 redirects/秒</a:t>
+            </a:r>
+          </a:p>
+          <a:p>
+            <a:pPr algn="l">
+              <a:spcAft>
+                <a:spcPts val="1200"/>
+              </a:spcAft>
+            </a:pPr>
+            <a:r>
+              <a:rPr sz="1500" b="0">
+                <a:solidFill>
+                  <a:srgbClr val="0F172A"/>
+                </a:solidFill>
+                <a:latin typeface="PingFang TC"/>
+                <a:ea typeface="PingFang TC"/>
+              </a:rPr>
+              <a:t>讀寫比：≈ 100:1（讀 ≫ 寫）</a:t>
+            </a:r>
+          </a:p>
+          <a:p>
+            <a:pPr algn="l">
+              <a:spcAft>
+                <a:spcPts val="400"/>
+              </a:spcAft>
+            </a:pPr>
+            <a:r>
+              <a:rPr sz="1500" b="1">
+                <a:solidFill>
+                  <a:srgbClr val="0F172A"/>
+                </a:solidFill>
+                <a:latin typeface="PingFang TC"/>
+                <a:ea typeface="PingFang TC"/>
+              </a:rPr>
+              <a:t>→ 瓶頸是「讀吞吐」、不是容量</a:t>
+            </a:r>
+          </a:p>
+          <a:p>
+            <a:pPr algn="l">
+              <a:spcAft>
+                <a:spcPts val="400"/>
+              </a:spcAft>
+            </a:pPr>
+            <a:r>
+              <a:rPr sz="1600" b="1">
+                <a:solidFill>
+                  <a:srgbClr val="059669"/>
+                </a:solidFill>
+                <a:latin typeface="PingFang TC"/>
+                <a:ea typeface="PingFang TC"/>
+              </a:rPr>
+              <a:t>→ 讀寫分離 + 多個 read replica</a:t>
+            </a:r>
+          </a:p>
+        </p:txBody>
+      </p:sp>
+      <p:sp>
+        <p:nvSpPr>
+          <p:cNvPr id="5" name="Rounded Rectangle 4"/>
+          <p:cNvSpPr/>
+          <p:nvPr/>
+        </p:nvSpPr>
+        <p:spPr>
+          <a:xfrm>
+            <a:off x="6126480" y="2286000"/>
+            <a:ext cx="1645920" cy="914400"/>
           </a:xfrm>
           <a:prstGeom prst="roundRect">
             <a:avLst/>
@@ -10452,6 +11129,792 @@
           <a:p>
             <a:pPr algn="ctr"/>
             <a:r>
+              <a:rPr sz="1300" b="1">
+                <a:solidFill>
+                  <a:srgbClr val="FFFFFF"/>
+                </a:solidFill>
+                <a:latin typeface="PingFang TC"/>
+                <a:ea typeface="PingFang TC"/>
+              </a:rPr>
+              <a:t>App</a:t>
+            </a:r>
+          </a:p>
+          <a:p>
+            <a:pPr algn="ctr"/>
+            <a:r>
+              <a:rPr sz="1300" b="0">
+                <a:solidFill>
+                  <a:srgbClr val="FFFFFF"/>
+                </a:solidFill>
+                <a:latin typeface="PingFang TC"/>
+                <a:ea typeface="PingFang TC"/>
+              </a:rPr>
+              <a:t>(stateless)</a:t>
+            </a:r>
+          </a:p>
+        </p:txBody>
+      </p:sp>
+      <p:sp>
+        <p:nvSpPr>
+          <p:cNvPr id="6" name="Rounded Rectangle 5"/>
+          <p:cNvSpPr/>
+          <p:nvPr/>
+        </p:nvSpPr>
+        <p:spPr>
+          <a:xfrm>
+            <a:off x="8595360" y="1737360"/>
+            <a:ext cx="3017520" cy="731520"/>
+          </a:xfrm>
+          <a:prstGeom prst="roundRect">
+            <a:avLst/>
+          </a:prstGeom>
+          <a:solidFill>
+            <a:srgbClr val="059669"/>
+          </a:solidFill>
+          <a:ln>
+            <a:solidFill>
+              <a:srgbClr val="059669"/>
+            </a:solidFill>
+          </a:ln>
+          <a:effectLst/>
+        </p:spPr>
+        <p:style>
+          <a:lnRef idx="1">
+            <a:schemeClr val="accent1"/>
+          </a:lnRef>
+          <a:fillRef idx="3">
+            <a:schemeClr val="accent1"/>
+          </a:fillRef>
+          <a:effectRef idx="2">
+            <a:schemeClr val="accent1"/>
+          </a:effectRef>
+          <a:fontRef idx="minor">
+            <a:schemeClr val="lt1"/>
+          </a:fontRef>
+        </p:style>
+        <p:txBody>
+          <a:bodyPr rtlCol="0" anchor="ctr" wrap="square" tIns="25400" bIns="25400"/>
+          <a:lstStyle/>
+          <a:p>
+            <a:pPr algn="ctr"/>
+            <a:r>
+              <a:rPr sz="1300" b="1">
+                <a:solidFill>
+                  <a:srgbClr val="FFFFFF"/>
+                </a:solidFill>
+                <a:latin typeface="PingFang TC"/>
+                <a:ea typeface="PingFang TC"/>
+              </a:rPr>
+              <a:t>Primary (Write)</a:t>
+            </a:r>
+          </a:p>
+        </p:txBody>
+      </p:sp>
+      <p:sp>
+        <p:nvSpPr>
+          <p:cNvPr id="7" name="Rounded Rectangle 6"/>
+          <p:cNvSpPr/>
+          <p:nvPr/>
+        </p:nvSpPr>
+        <p:spPr>
+          <a:xfrm>
+            <a:off x="8595360" y="2697480"/>
+            <a:ext cx="3017520" cy="594360"/>
+          </a:xfrm>
+          <a:prstGeom prst="roundRect">
+            <a:avLst/>
+          </a:prstGeom>
+          <a:solidFill>
+            <a:srgbClr val="0EA5E9"/>
+          </a:solidFill>
+          <a:ln>
+            <a:solidFill>
+              <a:srgbClr val="0EA5E9"/>
+            </a:solidFill>
+          </a:ln>
+          <a:effectLst/>
+        </p:spPr>
+        <p:style>
+          <a:lnRef idx="1">
+            <a:schemeClr val="accent1"/>
+          </a:lnRef>
+          <a:fillRef idx="3">
+            <a:schemeClr val="accent1"/>
+          </a:fillRef>
+          <a:effectRef idx="2">
+            <a:schemeClr val="accent1"/>
+          </a:effectRef>
+          <a:fontRef idx="minor">
+            <a:schemeClr val="lt1"/>
+          </a:fontRef>
+        </p:style>
+        <p:txBody>
+          <a:bodyPr rtlCol="0" anchor="ctr" wrap="square" tIns="25400" bIns="25400"/>
+          <a:lstStyle/>
+          <a:p>
+            <a:pPr algn="ctr"/>
+            <a:r>
+              <a:rPr sz="1200" b="1">
+                <a:solidFill>
+                  <a:srgbClr val="FFFFFF"/>
+                </a:solidFill>
+                <a:latin typeface="PingFang TC"/>
+                <a:ea typeface="PingFang TC"/>
+              </a:rPr>
+              <a:t>Read Replica 1</a:t>
+            </a:r>
+          </a:p>
+        </p:txBody>
+      </p:sp>
+      <p:sp>
+        <p:nvSpPr>
+          <p:cNvPr id="8" name="Rounded Rectangle 7"/>
+          <p:cNvSpPr/>
+          <p:nvPr/>
+        </p:nvSpPr>
+        <p:spPr>
+          <a:xfrm>
+            <a:off x="8595360" y="3429000"/>
+            <a:ext cx="3017520" cy="594360"/>
+          </a:xfrm>
+          <a:prstGeom prst="roundRect">
+            <a:avLst/>
+          </a:prstGeom>
+          <a:solidFill>
+            <a:srgbClr val="0EA5E9"/>
+          </a:solidFill>
+          <a:ln>
+            <a:solidFill>
+              <a:srgbClr val="0EA5E9"/>
+            </a:solidFill>
+          </a:ln>
+          <a:effectLst/>
+        </p:spPr>
+        <p:style>
+          <a:lnRef idx="1">
+            <a:schemeClr val="accent1"/>
+          </a:lnRef>
+          <a:fillRef idx="3">
+            <a:schemeClr val="accent1"/>
+          </a:fillRef>
+          <a:effectRef idx="2">
+            <a:schemeClr val="accent1"/>
+          </a:effectRef>
+          <a:fontRef idx="minor">
+            <a:schemeClr val="lt1"/>
+          </a:fontRef>
+        </p:style>
+        <p:txBody>
+          <a:bodyPr rtlCol="0" anchor="ctr" wrap="square" tIns="25400" bIns="25400"/>
+          <a:lstStyle/>
+          <a:p>
+            <a:pPr algn="ctr"/>
+            <a:r>
+              <a:rPr sz="1200" b="1">
+                <a:solidFill>
+                  <a:srgbClr val="FFFFFF"/>
+                </a:solidFill>
+                <a:latin typeface="PingFang TC"/>
+                <a:ea typeface="PingFang TC"/>
+              </a:rPr>
+              <a:t>Read Replica 2</a:t>
+            </a:r>
+          </a:p>
+        </p:txBody>
+      </p:sp>
+      <p:sp>
+        <p:nvSpPr>
+          <p:cNvPr id="9" name="Rounded Rectangle 8"/>
+          <p:cNvSpPr/>
+          <p:nvPr/>
+        </p:nvSpPr>
+        <p:spPr>
+          <a:xfrm>
+            <a:off x="8595360" y="4160520"/>
+            <a:ext cx="3017520" cy="594360"/>
+          </a:xfrm>
+          <a:prstGeom prst="roundRect">
+            <a:avLst/>
+          </a:prstGeom>
+          <a:solidFill>
+            <a:srgbClr val="0EA5E9"/>
+          </a:solidFill>
+          <a:ln>
+            <a:solidFill>
+              <a:srgbClr val="0EA5E9"/>
+            </a:solidFill>
+          </a:ln>
+          <a:effectLst/>
+        </p:spPr>
+        <p:style>
+          <a:lnRef idx="1">
+            <a:schemeClr val="accent1"/>
+          </a:lnRef>
+          <a:fillRef idx="3">
+            <a:schemeClr val="accent1"/>
+          </a:fillRef>
+          <a:effectRef idx="2">
+            <a:schemeClr val="accent1"/>
+          </a:effectRef>
+          <a:fontRef idx="minor">
+            <a:schemeClr val="lt1"/>
+          </a:fontRef>
+        </p:style>
+        <p:txBody>
+          <a:bodyPr rtlCol="0" anchor="ctr" wrap="square" tIns="25400" bIns="25400"/>
+          <a:lstStyle/>
+          <a:p>
+            <a:pPr algn="ctr"/>
+            <a:r>
+              <a:rPr sz="1200" b="1">
+                <a:solidFill>
+                  <a:srgbClr val="FFFFFF"/>
+                </a:solidFill>
+                <a:latin typeface="PingFang TC"/>
+                <a:ea typeface="PingFang TC"/>
+              </a:rPr>
+              <a:t>Read Replica N</a:t>
+            </a:r>
+          </a:p>
+        </p:txBody>
+      </p:sp>
+      <p:cxnSp>
+        <p:nvCxnSpPr>
+          <p:cNvPr id="10" name="Connector 9"/>
+          <p:cNvCxnSpPr/>
+          <p:nvPr/>
+        </p:nvCxnSpPr>
+        <p:spPr>
+          <a:xfrm flipV="1">
+            <a:off x="7772400" y="2103120"/>
+            <a:ext cx="822960" cy="457200"/>
+          </a:xfrm>
+          <a:prstGeom prst="line">
+            <a:avLst/>
+          </a:prstGeom>
+          <a:ln w="20320">
+            <a:solidFill>
+              <a:srgbClr val="DC2626"/>
+            </a:solidFill>
+            <a:tailEnd type="triangle" w="med" len="med"/>
+          </a:ln>
+        </p:spPr>
+        <p:style>
+          <a:lnRef idx="2">
+            <a:schemeClr val="accent1"/>
+          </a:lnRef>
+          <a:fillRef idx="0">
+            <a:schemeClr val="accent1"/>
+          </a:fillRef>
+          <a:effectRef idx="1">
+            <a:schemeClr val="accent1"/>
+          </a:effectRef>
+          <a:fontRef idx="minor">
+            <a:schemeClr val="tx1"/>
+          </a:fontRef>
+        </p:style>
+      </p:cxnSp>
+      <p:cxnSp>
+        <p:nvCxnSpPr>
+          <p:cNvPr id="11" name="Connector 10"/>
+          <p:cNvCxnSpPr/>
+          <p:nvPr/>
+        </p:nvCxnSpPr>
+        <p:spPr>
+          <a:xfrm>
+            <a:off x="7772400" y="2880360"/>
+            <a:ext cx="822960" cy="109728"/>
+          </a:xfrm>
+          <a:prstGeom prst="line">
+            <a:avLst/>
+          </a:prstGeom>
+          <a:ln w="17780">
+            <a:solidFill>
+              <a:srgbClr val="059669"/>
+            </a:solidFill>
+            <a:tailEnd type="triangle" w="med" len="med"/>
+          </a:ln>
+        </p:spPr>
+        <p:style>
+          <a:lnRef idx="2">
+            <a:schemeClr val="accent1"/>
+          </a:lnRef>
+          <a:fillRef idx="0">
+            <a:schemeClr val="accent1"/>
+          </a:fillRef>
+          <a:effectRef idx="1">
+            <a:schemeClr val="accent1"/>
+          </a:effectRef>
+          <a:fontRef idx="minor">
+            <a:schemeClr val="tx1"/>
+          </a:fontRef>
+        </p:style>
+      </p:cxnSp>
+      <p:cxnSp>
+        <p:nvCxnSpPr>
+          <p:cNvPr id="12" name="Connector 11"/>
+          <p:cNvCxnSpPr/>
+          <p:nvPr/>
+        </p:nvCxnSpPr>
+        <p:spPr>
+          <a:xfrm>
+            <a:off x="7772400" y="3017520"/>
+            <a:ext cx="822960" cy="704088"/>
+          </a:xfrm>
+          <a:prstGeom prst="line">
+            <a:avLst/>
+          </a:prstGeom>
+          <a:ln w="17780">
+            <a:solidFill>
+              <a:srgbClr val="059669"/>
+            </a:solidFill>
+            <a:tailEnd type="triangle" w="med" len="med"/>
+          </a:ln>
+        </p:spPr>
+        <p:style>
+          <a:lnRef idx="2">
+            <a:schemeClr val="accent1"/>
+          </a:lnRef>
+          <a:fillRef idx="0">
+            <a:schemeClr val="accent1"/>
+          </a:fillRef>
+          <a:effectRef idx="1">
+            <a:schemeClr val="accent1"/>
+          </a:effectRef>
+          <a:fontRef idx="minor">
+            <a:schemeClr val="tx1"/>
+          </a:fontRef>
+        </p:style>
+      </p:cxnSp>
+      <p:cxnSp>
+        <p:nvCxnSpPr>
+          <p:cNvPr id="13" name="Connector 12"/>
+          <p:cNvCxnSpPr/>
+          <p:nvPr/>
+        </p:nvCxnSpPr>
+        <p:spPr>
+          <a:xfrm>
+            <a:off x="7772400" y="3108960"/>
+            <a:ext cx="822960" cy="1344168"/>
+          </a:xfrm>
+          <a:prstGeom prst="line">
+            <a:avLst/>
+          </a:prstGeom>
+          <a:ln w="17780">
+            <a:solidFill>
+              <a:srgbClr val="059669"/>
+            </a:solidFill>
+            <a:tailEnd type="triangle" w="med" len="med"/>
+          </a:ln>
+        </p:spPr>
+        <p:style>
+          <a:lnRef idx="2">
+            <a:schemeClr val="accent1"/>
+          </a:lnRef>
+          <a:fillRef idx="0">
+            <a:schemeClr val="accent1"/>
+          </a:fillRef>
+          <a:effectRef idx="1">
+            <a:schemeClr val="accent1"/>
+          </a:effectRef>
+          <a:fontRef idx="minor">
+            <a:schemeClr val="tx1"/>
+          </a:fontRef>
+        </p:style>
+      </p:cxnSp>
+      <p:sp>
+        <p:nvSpPr>
+          <p:cNvPr id="14" name="TextBox 13"/>
+          <p:cNvSpPr txBox="1"/>
+          <p:nvPr/>
+        </p:nvSpPr>
+        <p:spPr>
+          <a:xfrm>
+            <a:off x="7635240" y="2057400"/>
+            <a:ext cx="914400" cy="274320"/>
+          </a:xfrm>
+          <a:prstGeom prst="rect">
+            <a:avLst/>
+          </a:prstGeom>
+          <a:noFill/>
+        </p:spPr>
+        <p:txBody>
+          <a:bodyPr wrap="square" anchor="t">
+            <a:spAutoFit/>
+          </a:bodyPr>
+          <a:lstStyle/>
+          <a:p>
+            <a:pPr algn="l">
+              <a:spcAft>
+                <a:spcPts val="400"/>
+              </a:spcAft>
+            </a:pPr>
+            <a:r>
+              <a:rPr sz="1200" b="1">
+                <a:solidFill>
+                  <a:srgbClr val="DC2626"/>
+                </a:solidFill>
+                <a:latin typeface="PingFang TC"/>
+                <a:ea typeface="PingFang TC"/>
+              </a:rPr>
+              <a:t>寫</a:t>
+            </a:r>
+          </a:p>
+        </p:txBody>
+      </p:sp>
+      <p:sp>
+        <p:nvSpPr>
+          <p:cNvPr id="15" name="TextBox 14"/>
+          <p:cNvSpPr txBox="1"/>
+          <p:nvPr/>
+        </p:nvSpPr>
+        <p:spPr>
+          <a:xfrm>
+            <a:off x="7589520" y="3200400"/>
+            <a:ext cx="914400" cy="274320"/>
+          </a:xfrm>
+          <a:prstGeom prst="rect">
+            <a:avLst/>
+          </a:prstGeom>
+          <a:noFill/>
+        </p:spPr>
+        <p:txBody>
+          <a:bodyPr wrap="square" anchor="t">
+            <a:spAutoFit/>
+          </a:bodyPr>
+          <a:lstStyle/>
+          <a:p>
+            <a:pPr algn="l">
+              <a:spcAft>
+                <a:spcPts val="400"/>
+              </a:spcAft>
+            </a:pPr>
+            <a:r>
+              <a:rPr sz="1200" b="1">
+                <a:solidFill>
+                  <a:srgbClr val="059669"/>
+                </a:solidFill>
+                <a:latin typeface="PingFang TC"/>
+                <a:ea typeface="PingFang TC"/>
+              </a:rPr>
+              <a:t>讀</a:t>
+            </a:r>
+          </a:p>
+        </p:txBody>
+      </p:sp>
+      <p:cxnSp>
+        <p:nvCxnSpPr>
+          <p:cNvPr id="16" name="Connector 15"/>
+          <p:cNvCxnSpPr/>
+          <p:nvPr/>
+        </p:nvCxnSpPr>
+        <p:spPr>
+          <a:xfrm>
+            <a:off x="10104120" y="2468880"/>
+            <a:ext cx="0" cy="228600"/>
+          </a:xfrm>
+          <a:prstGeom prst="line">
+            <a:avLst/>
+          </a:prstGeom>
+          <a:ln w="13970">
+            <a:solidFill>
+              <a:srgbClr val="64748B"/>
+            </a:solidFill>
+            <a:tailEnd type="triangle" w="med" len="med"/>
+          </a:ln>
+        </p:spPr>
+        <p:style>
+          <a:lnRef idx="2">
+            <a:schemeClr val="accent1"/>
+          </a:lnRef>
+          <a:fillRef idx="0">
+            <a:schemeClr val="accent1"/>
+          </a:fillRef>
+          <a:effectRef idx="1">
+            <a:schemeClr val="accent1"/>
+          </a:effectRef>
+          <a:fontRef idx="minor">
+            <a:schemeClr val="tx1"/>
+          </a:fontRef>
+        </p:style>
+      </p:cxnSp>
+      <p:sp>
+        <p:nvSpPr>
+          <p:cNvPr id="17" name="TextBox 16"/>
+          <p:cNvSpPr txBox="1"/>
+          <p:nvPr/>
+        </p:nvSpPr>
+        <p:spPr>
+          <a:xfrm>
+            <a:off x="10241280" y="2395728"/>
+            <a:ext cx="1463040" cy="274320"/>
+          </a:xfrm>
+          <a:prstGeom prst="rect">
+            <a:avLst/>
+          </a:prstGeom>
+          <a:noFill/>
+        </p:spPr>
+        <p:txBody>
+          <a:bodyPr wrap="square" anchor="t">
+            <a:spAutoFit/>
+          </a:bodyPr>
+          <a:lstStyle/>
+          <a:p>
+            <a:pPr algn="l">
+              <a:spcAft>
+                <a:spcPts val="400"/>
+              </a:spcAft>
+            </a:pPr>
+            <a:r>
+              <a:rPr sz="1000" b="0">
+                <a:solidFill>
+                  <a:srgbClr val="64748B"/>
+                </a:solidFill>
+                <a:latin typeface="PingFang TC"/>
+                <a:ea typeface="PingFang TC"/>
+              </a:rPr>
+              <a:t>非同步複寫</a:t>
+            </a:r>
+          </a:p>
+        </p:txBody>
+      </p:sp>
+      <p:sp>
+        <p:nvSpPr>
+          <p:cNvPr id="18" name="TextBox 17"/>
+          <p:cNvSpPr txBox="1"/>
+          <p:nvPr/>
+        </p:nvSpPr>
+        <p:spPr>
+          <a:xfrm>
+            <a:off x="548640" y="5029200"/>
+            <a:ext cx="11247120" cy="1554480"/>
+          </a:xfrm>
+          <a:prstGeom prst="rect">
+            <a:avLst/>
+          </a:prstGeom>
+          <a:noFill/>
+        </p:spPr>
+        <p:txBody>
+          <a:bodyPr wrap="square">
+            <a:spAutoFit/>
+          </a:bodyPr>
+          <a:lstStyle/>
+          <a:p>
+            <a:pPr>
+              <a:spcAft>
+                <a:spcPts val="600"/>
+              </a:spcAft>
+            </a:pPr>
+            <a:r>
+              <a:rPr sz="1300" b="0">
+                <a:solidFill>
+                  <a:srgbClr val="0F172A"/>
+                </a:solidFill>
+                <a:latin typeface="PingFang TC"/>
+                <a:ea typeface="PingFang TC"/>
+              </a:rPr>
+              <a:t>•  寫走 primary、讀走 replica（load-balanced）；讀不夠就加 replica 水平擴讀</a:t>
+            </a:r>
+          </a:p>
+          <a:p>
+            <a:pPr>
+              <a:spcAft>
+                <a:spcPts val="600"/>
+              </a:spcAft>
+            </a:pPr>
+            <a:r>
+              <a:rPr sz="1300" b="0">
+                <a:solidFill>
+                  <a:srgbClr val="0F172A"/>
+                </a:solidFill>
+                <a:latin typeface="PingFang TC"/>
+                <a:ea typeface="PingFang TC"/>
+              </a:rPr>
+              <a:t>•  配合 Redis cache，真正打到 DB 的讀已先被擋掉一大半</a:t>
+            </a:r>
+          </a:p>
+          <a:p>
+            <a:pPr>
+              <a:spcAft>
+                <a:spcPts val="600"/>
+              </a:spcAft>
+            </a:pPr>
+            <a:r>
+              <a:rPr sz="1300" b="0">
+                <a:solidFill>
+                  <a:srgbClr val="0F172A"/>
+                </a:solidFill>
+                <a:latin typeface="PingFang TC"/>
+                <a:ea typeface="PingFang TC"/>
+              </a:rPr>
+              <a:t>•  failover：primary 掛 → 升一台 read replica 為新 primary；複寫延遲靠 create 後暖 cache 緩解</a:t>
+            </a:r>
+          </a:p>
+        </p:txBody>
+      </p:sp>
+    </p:spTree>
+  </p:cSld>
+  <p:clrMapOvr>
+    <a:masterClrMapping/>
+  </p:clrMapOvr>
+</p:sld>
+</file>
+
+<file path=ppt/slides/slide22.xml><?xml version="1.0" encoding="utf-8"?>
+<p:sld xmlns:a="http://schemas.openxmlformats.org/drawingml/2006/main" xmlns:p="http://schemas.openxmlformats.org/presentationml/2006/main" xmlns:r="http://schemas.openxmlformats.org/officeDocument/2006/relationships">
+  <p:cSld>
+    <p:spTree>
+      <p:nvGrpSpPr>
+        <p:cNvPr id="1" name=""/>
+        <p:cNvGrpSpPr/>
+        <p:nvPr/>
+      </p:nvGrpSpPr>
+      <p:grpSpPr/>
+      <p:sp>
+        <p:nvSpPr>
+          <p:cNvPr id="2" name="Rectangle 1"/>
+          <p:cNvSpPr/>
+          <p:nvPr/>
+        </p:nvSpPr>
+        <p:spPr>
+          <a:xfrm>
+            <a:off x="0" y="0"/>
+            <a:ext cx="164592" cy="6858000"/>
+          </a:xfrm>
+          <a:prstGeom prst="rect">
+            <a:avLst/>
+          </a:prstGeom>
+          <a:solidFill>
+            <a:srgbClr val="2563EB"/>
+          </a:solidFill>
+          <a:ln>
+            <a:noFill/>
+          </a:ln>
+          <a:effectLst/>
+        </p:spPr>
+        <p:style>
+          <a:lnRef idx="1">
+            <a:schemeClr val="accent1"/>
+          </a:lnRef>
+          <a:fillRef idx="3">
+            <a:schemeClr val="accent1"/>
+          </a:fillRef>
+          <a:effectRef idx="2">
+            <a:schemeClr val="accent1"/>
+          </a:effectRef>
+          <a:fontRef idx="minor">
+            <a:schemeClr val="lt1"/>
+          </a:fontRef>
+        </p:style>
+        <p:txBody>
+          <a:bodyPr rtlCol="0" anchor="ctr"/>
+          <a:lstStyle/>
+          <a:p>
+            <a:pPr algn="ctr"/>
+          </a:p>
+        </p:txBody>
+      </p:sp>
+      <p:sp>
+        <p:nvSpPr>
+          <p:cNvPr id="3" name="TextBox 2"/>
+          <p:cNvSpPr txBox="1"/>
+          <p:nvPr/>
+        </p:nvSpPr>
+        <p:spPr>
+          <a:xfrm>
+            <a:off x="502920" y="320040"/>
+            <a:ext cx="10972800" cy="1005840"/>
+          </a:xfrm>
+          <a:prstGeom prst="rect">
+            <a:avLst/>
+          </a:prstGeom>
+          <a:noFill/>
+        </p:spPr>
+        <p:txBody>
+          <a:bodyPr wrap="square" anchor="t">
+            <a:spAutoFit/>
+          </a:bodyPr>
+          <a:lstStyle/>
+          <a:p>
+            <a:pPr algn="l">
+              <a:spcAft>
+                <a:spcPts val="200"/>
+              </a:spcAft>
+            </a:pPr>
+            <a:r>
+              <a:rPr sz="1300" b="1">
+                <a:solidFill>
+                  <a:srgbClr val="2563EB"/>
+                </a:solidFill>
+                <a:latin typeface="PingFang TC"/>
+                <a:ea typeface="PingFang TC"/>
+              </a:rPr>
+              <a:t>12 · IMPROVEMENTS</a:t>
+            </a:r>
+          </a:p>
+          <a:p>
+            <a:pPr algn="l">
+              <a:spcAft>
+                <a:spcPts val="400"/>
+              </a:spcAft>
+            </a:pPr>
+            <a:r>
+              <a:rPr sz="3000" b="1">
+                <a:solidFill>
+                  <a:srgbClr val="0F172A"/>
+                </a:solidFill>
+                <a:latin typeface="PingFang TC"/>
+                <a:ea typeface="PingFang TC"/>
+              </a:rPr>
+              <a:t>對參考 repo 的關鍵改良</a:t>
+            </a:r>
+          </a:p>
+        </p:txBody>
+      </p:sp>
+      <p:sp>
+        <p:nvSpPr>
+          <p:cNvPr id="4" name="Rounded Rectangle 3"/>
+          <p:cNvSpPr/>
+          <p:nvPr/>
+        </p:nvSpPr>
+        <p:spPr>
+          <a:xfrm>
+            <a:off x="640080" y="1691640"/>
+            <a:ext cx="640080" cy="731520"/>
+          </a:xfrm>
+          <a:prstGeom prst="roundRect">
+            <a:avLst/>
+          </a:prstGeom>
+          <a:solidFill>
+            <a:srgbClr val="2563EB"/>
+          </a:solidFill>
+          <a:ln>
+            <a:solidFill>
+              <a:srgbClr val="2563EB"/>
+            </a:solidFill>
+          </a:ln>
+          <a:effectLst/>
+        </p:spPr>
+        <p:style>
+          <a:lnRef idx="1">
+            <a:schemeClr val="accent1"/>
+          </a:lnRef>
+          <a:fillRef idx="3">
+            <a:schemeClr val="accent1"/>
+          </a:fillRef>
+          <a:effectRef idx="2">
+            <a:schemeClr val="accent1"/>
+          </a:effectRef>
+          <a:fontRef idx="minor">
+            <a:schemeClr val="lt1"/>
+          </a:fontRef>
+        </p:style>
+        <p:txBody>
+          <a:bodyPr rtlCol="0" anchor="ctr" wrap="square" tIns="25400" bIns="25400"/>
+          <a:lstStyle/>
+          <a:p>
+            <a:pPr algn="ctr"/>
+            <a:r>
               <a:rPr sz="1800" b="1">
                 <a:solidFill>
                   <a:srgbClr val="FFFFFF"/>
@@ -11211,7 +12674,7 @@
 </p:sld>
 </file>
 
-<file path=ppt/slides/slide21.xml><?xml version="1.0" encoding="utf-8"?>
+<file path=ppt/slides/slide23.xml><?xml version="1.0" encoding="utf-8"?>
 <p:sld xmlns:a="http://schemas.openxmlformats.org/drawingml/2006/main" xmlns:p="http://schemas.openxmlformats.org/presentationml/2006/main" xmlns:r="http://schemas.openxmlformats.org/officeDocument/2006/relationships">
   <p:cSld>
     <p:spTree>
@@ -12143,7 +13606,7 @@
 </p:sld>
 </file>
 
-<file path=ppt/slides/slide22.xml><?xml version="1.0" encoding="utf-8"?>
+<file path=ppt/slides/slide24.xml><?xml version="1.0" encoding="utf-8"?>
 <p:sld xmlns:a="http://schemas.openxmlformats.org/drawingml/2006/main" xmlns:p="http://schemas.openxmlformats.org/presentationml/2006/main" xmlns:r="http://schemas.openxmlformats.org/officeDocument/2006/relationships">
   <p:cSld>
     <p:spTree>
@@ -13067,7 +14530,7 @@
 </p:sld>
 </file>
 
-<file path=ppt/slides/slide23.xml><?xml version="1.0" encoding="utf-8"?>
+<file path=ppt/slides/slide25.xml><?xml version="1.0" encoding="utf-8"?>
 <p:sld xmlns:a="http://schemas.openxmlformats.org/drawingml/2006/main" xmlns:p="http://schemas.openxmlformats.org/presentationml/2006/main" xmlns:r="http://schemas.openxmlformats.org/officeDocument/2006/relationships">
   <p:cSld>
     <p:spTree>
@@ -13790,7 +15253,7 @@
 </p:sld>
 </file>
 
-<file path=ppt/slides/slide24.xml><?xml version="1.0" encoding="utf-8"?>
+<file path=ppt/slides/slide26.xml><?xml version="1.0" encoding="utf-8"?>
 <p:sld xmlns:a="http://schemas.openxmlformats.org/drawingml/2006/main" xmlns:p="http://schemas.openxmlformats.org/presentationml/2006/main" xmlns:r="http://schemas.openxmlformats.org/officeDocument/2006/relationships">
   <p:cSld>
     <p:spTree>
@@ -14876,7 +16339,7 @@
 </p:sld>
 </file>
 
-<file path=ppt/slides/slide25.xml><?xml version="1.0" encoding="utf-8"?>
+<file path=ppt/slides/slide27.xml><?xml version="1.0" encoding="utf-8"?>
 <p:sld xmlns:a="http://schemas.openxmlformats.org/drawingml/2006/main" xmlns:p="http://schemas.openxmlformats.org/presentationml/2006/main" xmlns:r="http://schemas.openxmlformats.org/officeDocument/2006/relationships">
   <p:cSld>
     <p:spTree>
@@ -15923,7 +17386,7 @@
 </p:sld>
 </file>
 
-<file path=ppt/slides/slide26.xml><?xml version="1.0" encoding="utf-8"?>
+<file path=ppt/slides/slide28.xml><?xml version="1.0" encoding="utf-8"?>
 <p:sld xmlns:a="http://schemas.openxmlformats.org/drawingml/2006/main" xmlns:p="http://schemas.openxmlformats.org/presentationml/2006/main" xmlns:r="http://schemas.openxmlformats.org/officeDocument/2006/relationships">
   <p:cSld>
     <p:spTree>
@@ -16740,7 +18203,7 @@
 </p:sld>
 </file>
 
-<file path=ppt/slides/slide27.xml><?xml version="1.0" encoding="utf-8"?>
+<file path=ppt/slides/slide29.xml><?xml version="1.0" encoding="utf-8"?>
 <p:sld xmlns:a="http://schemas.openxmlformats.org/drawingml/2006/main" xmlns:p="http://schemas.openxmlformats.org/presentationml/2006/main" xmlns:r="http://schemas.openxmlformats.org/officeDocument/2006/relationships">
   <p:cSld>
     <p:spTree>
@@ -17494,1217 +18957,6 @@
                 <a:ea typeface="PingFang TC"/>
               </a:rPr>
               <a:t>•  與 app 實例解耦(不用 app 內排程,免多實例重複跑/leader election);保留天數皆 Terraform 變數可調</a:t>
-            </a:r>
-          </a:p>
-        </p:txBody>
-      </p:sp>
-    </p:spTree>
-  </p:cSld>
-  <p:clrMapOvr>
-    <a:masterClrMapping/>
-  </p:clrMapOvr>
-</p:sld>
-</file>
-
-<file path=ppt/slides/slide28.xml><?xml version="1.0" encoding="utf-8"?>
-<p:sld xmlns:a="http://schemas.openxmlformats.org/drawingml/2006/main" xmlns:p="http://schemas.openxmlformats.org/presentationml/2006/main" xmlns:r="http://schemas.openxmlformats.org/officeDocument/2006/relationships">
-  <p:cSld>
-    <p:spTree>
-      <p:nvGrpSpPr>
-        <p:cNvPr id="1" name=""/>
-        <p:cNvGrpSpPr/>
-        <p:nvPr/>
-      </p:nvGrpSpPr>
-      <p:grpSpPr/>
-      <p:sp>
-        <p:nvSpPr>
-          <p:cNvPr id="2" name="Rectangle 1"/>
-          <p:cNvSpPr/>
-          <p:nvPr/>
-        </p:nvSpPr>
-        <p:spPr>
-          <a:xfrm>
-            <a:off x="0" y="0"/>
-            <a:ext cx="164592" cy="6858000"/>
-          </a:xfrm>
-          <a:prstGeom prst="rect">
-            <a:avLst/>
-          </a:prstGeom>
-          <a:solidFill>
-            <a:srgbClr val="2563EB"/>
-          </a:solidFill>
-          <a:ln>
-            <a:noFill/>
-          </a:ln>
-          <a:effectLst/>
-        </p:spPr>
-        <p:style>
-          <a:lnRef idx="1">
-            <a:schemeClr val="accent1"/>
-          </a:lnRef>
-          <a:fillRef idx="3">
-            <a:schemeClr val="accent1"/>
-          </a:fillRef>
-          <a:effectRef idx="2">
-            <a:schemeClr val="accent1"/>
-          </a:effectRef>
-          <a:fontRef idx="minor">
-            <a:schemeClr val="lt1"/>
-          </a:fontRef>
-        </p:style>
-        <p:txBody>
-          <a:bodyPr rtlCol="0" anchor="ctr"/>
-          <a:lstStyle/>
-          <a:p>
-            <a:pPr algn="ctr"/>
-          </a:p>
-        </p:txBody>
-      </p:sp>
-      <p:sp>
-        <p:nvSpPr>
-          <p:cNvPr id="3" name="TextBox 2"/>
-          <p:cNvSpPr txBox="1"/>
-          <p:nvPr/>
-        </p:nvSpPr>
-        <p:spPr>
-          <a:xfrm>
-            <a:off x="502920" y="320040"/>
-            <a:ext cx="10972800" cy="1005840"/>
-          </a:xfrm>
-          <a:prstGeom prst="rect">
-            <a:avLst/>
-          </a:prstGeom>
-          <a:noFill/>
-        </p:spPr>
-        <p:txBody>
-          <a:bodyPr wrap="square" anchor="t">
-            <a:spAutoFit/>
-          </a:bodyPr>
-          <a:lstStyle/>
-          <a:p>
-            <a:pPr algn="l">
-              <a:spcAft>
-                <a:spcPts val="200"/>
-              </a:spcAft>
-            </a:pPr>
-            <a:r>
-              <a:rPr sz="1300" b="1">
-                <a:solidFill>
-                  <a:srgbClr val="2563EB"/>
-                </a:solidFill>
-                <a:latin typeface="PingFang TC"/>
-                <a:ea typeface="PingFang TC"/>
-              </a:rPr>
-              <a:t>可靠性 · MONITORING</a:t>
-            </a:r>
-          </a:p>
-          <a:p>
-            <a:pPr algn="l">
-              <a:spcAft>
-                <a:spcPts val="400"/>
-              </a:spcAft>
-            </a:pPr>
-            <a:r>
-              <a:rPr sz="3000" b="1">
-                <a:solidFill>
-                  <a:srgbClr val="0F172A"/>
-                </a:solidFill>
-                <a:latin typeface="PingFang TC"/>
-                <a:ea typeface="PingFang TC"/>
-              </a:rPr>
-              <a:t>CloudWatch alarms → SNS + Logs + Dashboard + Canary</a:t>
-            </a:r>
-          </a:p>
-        </p:txBody>
-      </p:sp>
-      <p:sp>
-        <p:nvSpPr>
-          <p:cNvPr id="4" name="Rounded Rectangle 3"/>
-          <p:cNvSpPr/>
-          <p:nvPr/>
-        </p:nvSpPr>
-        <p:spPr>
-          <a:xfrm>
-            <a:off x="548640" y="1828800"/>
-            <a:ext cx="2926080" cy="822960"/>
-          </a:xfrm>
-          <a:prstGeom prst="roundRect">
-            <a:avLst/>
-          </a:prstGeom>
-          <a:solidFill>
-            <a:srgbClr val="2563EB"/>
-          </a:solidFill>
-          <a:ln>
-            <a:solidFill>
-              <a:srgbClr val="2563EB"/>
-            </a:solidFill>
-          </a:ln>
-          <a:effectLst/>
-        </p:spPr>
-        <p:style>
-          <a:lnRef idx="1">
-            <a:schemeClr val="accent1"/>
-          </a:lnRef>
-          <a:fillRef idx="3">
-            <a:schemeClr val="accent1"/>
-          </a:fillRef>
-          <a:effectRef idx="2">
-            <a:schemeClr val="accent1"/>
-          </a:effectRef>
-          <a:fontRef idx="minor">
-            <a:schemeClr val="lt1"/>
-          </a:fontRef>
-        </p:style>
-        <p:txBody>
-          <a:bodyPr rtlCol="0" anchor="ctr" wrap="square" tIns="25400" bIns="25400"/>
-          <a:lstStyle/>
-          <a:p>
-            <a:pPr algn="ctr"/>
-            <a:r>
-              <a:rPr sz="1100" b="1">
-                <a:solidFill>
-                  <a:srgbClr val="FFFFFF"/>
-                </a:solidFill>
-                <a:latin typeface="PingFang TC"/>
-                <a:ea typeface="PingFang TC"/>
-              </a:rPr>
-              <a:t>CloudWatch Alarms</a:t>
-            </a:r>
-          </a:p>
-          <a:p>
-            <a:pPr algn="ctr"/>
-            <a:r>
-              <a:rPr sz="1100" b="0">
-                <a:solidFill>
-                  <a:srgbClr val="FFFFFF"/>
-                </a:solidFill>
-                <a:latin typeface="PingFang TC"/>
-                <a:ea typeface="PingFang TC"/>
-              </a:rPr>
-              <a:t>ALB/RDS/EC2/API GW/Lambda/CF</a:t>
-            </a:r>
-          </a:p>
-        </p:txBody>
-      </p:sp>
-      <p:sp>
-        <p:nvSpPr>
-          <p:cNvPr id="5" name="Rounded Rectangle 4"/>
-          <p:cNvSpPr/>
-          <p:nvPr/>
-        </p:nvSpPr>
-        <p:spPr>
-          <a:xfrm>
-            <a:off x="3931920" y="1828800"/>
-            <a:ext cx="2377440" cy="822960"/>
-          </a:xfrm>
-          <a:prstGeom prst="roundRect">
-            <a:avLst/>
-          </a:prstGeom>
-          <a:solidFill>
-            <a:srgbClr val="D97706"/>
-          </a:solidFill>
-          <a:ln>
-            <a:solidFill>
-              <a:srgbClr val="D97706"/>
-            </a:solidFill>
-          </a:ln>
-          <a:effectLst/>
-        </p:spPr>
-        <p:style>
-          <a:lnRef idx="1">
-            <a:schemeClr val="accent1"/>
-          </a:lnRef>
-          <a:fillRef idx="3">
-            <a:schemeClr val="accent1"/>
-          </a:fillRef>
-          <a:effectRef idx="2">
-            <a:schemeClr val="accent1"/>
-          </a:effectRef>
-          <a:fontRef idx="minor">
-            <a:schemeClr val="lt1"/>
-          </a:fontRef>
-        </p:style>
-        <p:txBody>
-          <a:bodyPr rtlCol="0" anchor="ctr" wrap="square" tIns="25400" bIns="25400"/>
-          <a:lstStyle/>
-          <a:p>
-            <a:pPr algn="ctr"/>
-            <a:r>
-              <a:rPr sz="1200" b="1">
-                <a:solidFill>
-                  <a:srgbClr val="FFFFFF"/>
-                </a:solidFill>
-                <a:latin typeface="PingFang TC"/>
-                <a:ea typeface="PingFang TC"/>
-              </a:rPr>
-              <a:t>SNS topic</a:t>
-            </a:r>
-          </a:p>
-          <a:p>
-            <a:pPr algn="ctr"/>
-            <a:r>
-              <a:rPr sz="1200" b="0">
-                <a:solidFill>
-                  <a:srgbClr val="FFFFFF"/>
-                </a:solidFill>
-                <a:latin typeface="PingFang TC"/>
-                <a:ea typeface="PingFang TC"/>
-              </a:rPr>
-              <a:t>→ Email 通知</a:t>
-            </a:r>
-          </a:p>
-        </p:txBody>
-      </p:sp>
-      <p:sp>
-        <p:nvSpPr>
-          <p:cNvPr id="6" name="Rounded Rectangle 5"/>
-          <p:cNvSpPr/>
-          <p:nvPr/>
-        </p:nvSpPr>
-        <p:spPr>
-          <a:xfrm>
-            <a:off x="6766560" y="1828800"/>
-            <a:ext cx="2377440" cy="822960"/>
-          </a:xfrm>
-          <a:prstGeom prst="roundRect">
-            <a:avLst/>
-          </a:prstGeom>
-          <a:solidFill>
-            <a:srgbClr val="059669"/>
-          </a:solidFill>
-          <a:ln>
-            <a:solidFill>
-              <a:srgbClr val="059669"/>
-            </a:solidFill>
-          </a:ln>
-          <a:effectLst/>
-        </p:spPr>
-        <p:style>
-          <a:lnRef idx="1">
-            <a:schemeClr val="accent1"/>
-          </a:lnRef>
-          <a:fillRef idx="3">
-            <a:schemeClr val="accent1"/>
-          </a:fillRef>
-          <a:effectRef idx="2">
-            <a:schemeClr val="accent1"/>
-          </a:effectRef>
-          <a:fontRef idx="minor">
-            <a:schemeClr val="lt1"/>
-          </a:fontRef>
-        </p:style>
-        <p:txBody>
-          <a:bodyPr rtlCol="0" anchor="ctr" wrap="square" tIns="25400" bIns="25400"/>
-          <a:lstStyle/>
-          <a:p>
-            <a:pPr algn="ctr"/>
-            <a:r>
-              <a:rPr sz="1200" b="1">
-                <a:solidFill>
-                  <a:srgbClr val="FFFFFF"/>
-                </a:solidFill>
-                <a:latin typeface="PingFang TC"/>
-                <a:ea typeface="PingFang TC"/>
-              </a:rPr>
-              <a:t>Synthetic Canary</a:t>
-            </a:r>
-          </a:p>
-          <a:p>
-            <a:pPr algn="ctr"/>
-            <a:r>
-              <a:rPr sz="1200" b="0">
-                <a:solidFill>
-                  <a:srgbClr val="FFFFFF"/>
-                </a:solidFill>
-                <a:latin typeface="PingFang TC"/>
-                <a:ea typeface="PingFang TC"/>
-              </a:rPr>
-              <a:t>每 5 分 /health</a:t>
-            </a:r>
-          </a:p>
-        </p:txBody>
-      </p:sp>
-      <p:cxnSp>
-        <p:nvCxnSpPr>
-          <p:cNvPr id="7" name="Connector 6"/>
-          <p:cNvCxnSpPr/>
-          <p:nvPr/>
-        </p:nvCxnSpPr>
-        <p:spPr>
-          <a:xfrm>
-            <a:off x="3474720" y="2240280"/>
-            <a:ext cx="457200" cy="0"/>
-          </a:xfrm>
-          <a:prstGeom prst="line">
-            <a:avLst/>
-          </a:prstGeom>
-          <a:ln w="22225">
-            <a:solidFill>
-              <a:srgbClr val="64748B"/>
-            </a:solidFill>
-            <a:tailEnd type="triangle" w="med" len="med"/>
-          </a:ln>
-        </p:spPr>
-        <p:style>
-          <a:lnRef idx="2">
-            <a:schemeClr val="accent1"/>
-          </a:lnRef>
-          <a:fillRef idx="0">
-            <a:schemeClr val="accent1"/>
-          </a:fillRef>
-          <a:effectRef idx="1">
-            <a:schemeClr val="accent1"/>
-          </a:effectRef>
-          <a:fontRef idx="minor">
-            <a:schemeClr val="tx1"/>
-          </a:fontRef>
-        </p:style>
-      </p:cxnSp>
-      <p:cxnSp>
-        <p:nvCxnSpPr>
-          <p:cNvPr id="8" name="Connector 7"/>
-          <p:cNvCxnSpPr/>
-          <p:nvPr/>
-        </p:nvCxnSpPr>
-        <p:spPr>
-          <a:xfrm flipH="1">
-            <a:off x="6309360" y="2240280"/>
-            <a:ext cx="457200" cy="0"/>
-          </a:xfrm>
-          <a:prstGeom prst="line">
-            <a:avLst/>
-          </a:prstGeom>
-          <a:ln w="15240">
-            <a:solidFill>
-              <a:srgbClr val="64748B"/>
-            </a:solidFill>
-            <a:tailEnd type="triangle" w="med" len="med"/>
-          </a:ln>
-        </p:spPr>
-        <p:style>
-          <a:lnRef idx="2">
-            <a:schemeClr val="accent1"/>
-          </a:lnRef>
-          <a:fillRef idx="0">
-            <a:schemeClr val="accent1"/>
-          </a:fillRef>
-          <a:effectRef idx="1">
-            <a:schemeClr val="accent1"/>
-          </a:effectRef>
-          <a:fontRef idx="minor">
-            <a:schemeClr val="tx1"/>
-          </a:fontRef>
-        </p:style>
-      </p:cxnSp>
-      <p:graphicFrame>
-        <p:nvGraphicFramePr>
-          <p:cNvPr id="9" name="Table 8"/>
-          <p:cNvGraphicFramePr>
-            <a:graphicFrameLocks noGrp="1"/>
-          </p:cNvGraphicFramePr>
-          <p:nvPr/>
-        </p:nvGraphicFramePr>
-        <p:xfrm>
-          <a:off x="548640" y="3017520"/>
-          <a:ext cx="11109960" cy="2651760"/>
-        </p:xfrm>
-        <a:graphic>
-          <a:graphicData uri="http://schemas.openxmlformats.org/drawingml/2006/table">
-            <a:tbl>
-              <a:tblPr firstRow="1" bandRow="1">
-                <a:tableStyleId>{5C22544A-7EE6-4342-B048-85BDC9FD1C3A}</a:tableStyleId>
-              </a:tblPr>
-              <a:tblGrid>
-                <a:gridCol w="2011680"/>
-                <a:gridCol w="9098280"/>
-              </a:tblGrid>
-              <a:tr h="441960">
-                <a:tc>
-                  <a:txBody>
-                    <a:bodyPr/>
-                    <a:lstStyle/>
-                    <a:p>
-                      <a:r>
-                        <a:rPr sz="1200" b="1">
-                          <a:solidFill>
-                            <a:srgbClr val="FFFFFF"/>
-                          </a:solidFill>
-                          <a:latin typeface="PingFang TC"/>
-                          <a:ea typeface="PingFang TC"/>
-                        </a:rPr>
-                        <a:t>面向</a:t>
-                      </a:r>
-                    </a:p>
-                  </a:txBody>
-                  <a:tcPr marT="25400" marB="25400" marL="101600" anchor="ctr">
-                    <a:solidFill>
-                      <a:srgbClr val="2563EB"/>
-                    </a:solidFill>
-                  </a:tcPr>
-                </a:tc>
-                <a:tc>
-                  <a:txBody>
-                    <a:bodyPr/>
-                    <a:lstStyle/>
-                    <a:p>
-                      <a:r>
-                        <a:rPr sz="1200" b="1">
-                          <a:solidFill>
-                            <a:srgbClr val="FFFFFF"/>
-                          </a:solidFill>
-                          <a:latin typeface="PingFang TC"/>
-                          <a:ea typeface="PingFang TC"/>
-                        </a:rPr>
-                        <a:t>內容</a:t>
-                      </a:r>
-                    </a:p>
-                  </a:txBody>
-                  <a:tcPr marT="25400" marB="25400" marL="101600" anchor="ctr">
-                    <a:solidFill>
-                      <a:srgbClr val="2563EB"/>
-                    </a:solidFill>
-                  </a:tcPr>
-                </a:tc>
-              </a:tr>
-              <a:tr h="441960">
-                <a:tc>
-                  <a:txBody>
-                    <a:bodyPr/>
-                    <a:lstStyle/>
-                    <a:p>
-                      <a:r>
-                        <a:rPr sz="1200" b="1">
-                          <a:solidFill>
-                            <a:srgbClr val="0F172A"/>
-                          </a:solidFill>
-                          <a:latin typeface="PingFang TC"/>
-                          <a:ea typeface="PingFang TC"/>
-                        </a:rPr>
-                        <a:t>告警 alarms</a:t>
-                      </a:r>
-                    </a:p>
-                  </a:txBody>
-                  <a:tcPr marT="25400" marB="25400" marL="101600" anchor="ctr">
-                    <a:solidFill>
-                      <a:srgbClr val="FFFFFF"/>
-                    </a:solidFill>
-                  </a:tcPr>
-                </a:tc>
-                <a:tc>
-                  <a:txBody>
-                    <a:bodyPr/>
-                    <a:lstStyle/>
-                    <a:p>
-                      <a:r>
-                        <a:rPr sz="1200" b="0">
-                          <a:solidFill>
-                            <a:srgbClr val="0F172A"/>
-                          </a:solidFill>
-                          <a:latin typeface="PingFang TC"/>
-                          <a:ea typeface="PingFang TC"/>
-                        </a:rPr>
-                        <a:t>ALB unhealthy/5xx/latency · RDS CPU/storage · ElastiCache · API GW 5xx · Lambda errors · CloudFront 5xx(us-east-1)</a:t>
-                      </a:r>
-                    </a:p>
-                  </a:txBody>
-                  <a:tcPr marT="25400" marB="25400" marL="101600" anchor="ctr">
-                    <a:solidFill>
-                      <a:srgbClr val="FFFFFF"/>
-                    </a:solidFill>
-                  </a:tcPr>
-                </a:tc>
-              </a:tr>
-              <a:tr h="441960">
-                <a:tc>
-                  <a:txBody>
-                    <a:bodyPr/>
-                    <a:lstStyle/>
-                    <a:p>
-                      <a:r>
-                        <a:rPr sz="1200" b="1">
-                          <a:solidFill>
-                            <a:srgbClr val="0F172A"/>
-                          </a:solidFill>
-                          <a:latin typeface="PingFang TC"/>
-                          <a:ea typeface="PingFang TC"/>
-                        </a:rPr>
-                        <a:t>通知</a:t>
-                      </a:r>
-                    </a:p>
-                  </a:txBody>
-                  <a:tcPr marT="25400" marB="25400" marL="101600" anchor="ctr">
-                    <a:solidFill>
-                      <a:srgbClr val="F1F5F9"/>
-                    </a:solidFill>
-                  </a:tcPr>
-                </a:tc>
-                <a:tc>
-                  <a:txBody>
-                    <a:bodyPr/>
-                    <a:lstStyle/>
-                    <a:p>
-                      <a:r>
-                        <a:rPr sz="1200" b="0">
-                          <a:solidFill>
-                            <a:srgbClr val="0F172A"/>
-                          </a:solidFill>
-                          <a:latin typeface="PingFang TC"/>
-                          <a:ea typeface="PingFang TC"/>
-                        </a:rPr>
-                        <a:t>CloudWatch alarm → SNS topic → email（alert_email,需點確認信）</a:t>
-                      </a:r>
-                    </a:p>
-                  </a:txBody>
-                  <a:tcPr marT="25400" marB="25400" marL="101600" anchor="ctr">
-                    <a:solidFill>
-                      <a:srgbClr val="F1F5F9"/>
-                    </a:solidFill>
-                  </a:tcPr>
-                </a:tc>
-              </a:tr>
-              <a:tr h="441960">
-                <a:tc>
-                  <a:txBody>
-                    <a:bodyPr/>
-                    <a:lstStyle/>
-                    <a:p>
-                      <a:r>
-                        <a:rPr sz="1200" b="1">
-                          <a:solidFill>
-                            <a:srgbClr val="0F172A"/>
-                          </a:solidFill>
-                          <a:latin typeface="PingFang TC"/>
-                          <a:ea typeface="PingFang TC"/>
-                        </a:rPr>
-                        <a:t>App logs</a:t>
-                      </a:r>
-                    </a:p>
-                  </a:txBody>
-                  <a:tcPr marT="25400" marB="25400" marL="101600" anchor="ctr">
-                    <a:solidFill>
-                      <a:srgbClr val="FFFFFF"/>
-                    </a:solidFill>
-                  </a:tcPr>
-                </a:tc>
-                <a:tc>
-                  <a:txBody>
-                    <a:bodyPr/>
-                    <a:lstStyle/>
-                    <a:p>
-                      <a:r>
-                        <a:rPr sz="1200" b="0">
-                          <a:solidFill>
-                            <a:srgbClr val="0F172A"/>
-                          </a:solidFill>
-                          <a:latin typeface="PingFang TC"/>
-                          <a:ea typeface="PingFang TC"/>
-                        </a:rPr>
-                        <a:t>EC2 容器 awslogs driver → CloudWatch Logs /qrcode/app（retention 14d）</a:t>
-                      </a:r>
-                    </a:p>
-                  </a:txBody>
-                  <a:tcPr marT="25400" marB="25400" marL="101600" anchor="ctr">
-                    <a:solidFill>
-                      <a:srgbClr val="FFFFFF"/>
-                    </a:solidFill>
-                  </a:tcPr>
-                </a:tc>
-              </a:tr>
-              <a:tr h="441960">
-                <a:tc>
-                  <a:txBody>
-                    <a:bodyPr/>
-                    <a:lstStyle/>
-                    <a:p>
-                      <a:r>
-                        <a:rPr sz="1200" b="1">
-                          <a:solidFill>
-                            <a:srgbClr val="0F172A"/>
-                          </a:solidFill>
-                          <a:latin typeface="PingFang TC"/>
-                          <a:ea typeface="PingFang TC"/>
-                        </a:rPr>
-                        <a:t>Dashboard</a:t>
-                      </a:r>
-                    </a:p>
-                  </a:txBody>
-                  <a:tcPr marT="25400" marB="25400" marL="101600" anchor="ctr">
-                    <a:solidFill>
-                      <a:srgbClr val="F1F5F9"/>
-                    </a:solidFill>
-                  </a:tcPr>
-                </a:tc>
-                <a:tc>
-                  <a:txBody>
-                    <a:bodyPr/>
-                    <a:lstStyle/>
-                    <a:p>
-                      <a:r>
-                        <a:rPr sz="1200" b="0">
-                          <a:solidFill>
-                            <a:srgbClr val="0F172A"/>
-                          </a:solidFill>
-                          <a:latin typeface="PingFang TC"/>
-                          <a:ea typeface="PingFang TC"/>
-                        </a:rPr>
-                        <a:t>qrcode-overview：ALB/RDS/EC2/API GW/Lambda 一頁</a:t>
-                      </a:r>
-                    </a:p>
-                  </a:txBody>
-                  <a:tcPr marT="25400" marB="25400" marL="101600" anchor="ctr">
-                    <a:solidFill>
-                      <a:srgbClr val="F1F5F9"/>
-                    </a:solidFill>
-                  </a:tcPr>
-                </a:tc>
-              </a:tr>
-              <a:tr h="441960">
-                <a:tc>
-                  <a:txBody>
-                    <a:bodyPr/>
-                    <a:lstStyle/>
-                    <a:p>
-                      <a:r>
-                        <a:rPr sz="1200" b="1">
-                          <a:solidFill>
-                            <a:srgbClr val="0F172A"/>
-                          </a:solidFill>
-                          <a:latin typeface="PingFang TC"/>
-                          <a:ea typeface="PingFang TC"/>
-                        </a:rPr>
-                        <a:t>Canary</a:t>
-                      </a:r>
-                    </a:p>
-                  </a:txBody>
-                  <a:tcPr marT="25400" marB="25400" marL="101600" anchor="ctr">
-                    <a:solidFill>
-                      <a:srgbClr val="FFFFFF"/>
-                    </a:solidFill>
-                  </a:tcPr>
-                </a:tc>
-                <a:tc>
-                  <a:txBody>
-                    <a:bodyPr/>
-                    <a:lstStyle/>
-                    <a:p>
-                      <a:r>
-                        <a:rPr sz="1200" b="0">
-                          <a:solidFill>
-                            <a:srgbClr val="0F172A"/>
-                          </a:solidFill>
-                          <a:latin typeface="PingFang TC"/>
-                          <a:ea typeface="PingFang TC"/>
-                        </a:rPr>
-                        <a:t>syn-nodejs-puppeteer 每 5 分探測 CloudFront /health → 失敗即 alarm</a:t>
-                      </a:r>
-                    </a:p>
-                  </a:txBody>
-                  <a:tcPr marT="25400" marB="25400" marL="101600" anchor="ctr">
-                    <a:solidFill>
-                      <a:srgbClr val="FFFFFF"/>
-                    </a:solidFill>
-                  </a:tcPr>
-                </a:tc>
-              </a:tr>
-            </a:tbl>
-          </a:graphicData>
-        </a:graphic>
-      </p:graphicFrame>
-      <p:sp>
-        <p:nvSpPr>
-          <p:cNvPr id="10" name="TextBox 9"/>
-          <p:cNvSpPr txBox="1"/>
-          <p:nvPr/>
-        </p:nvSpPr>
-        <p:spPr>
-          <a:xfrm>
-            <a:off x="548640" y="5852160"/>
-            <a:ext cx="11247120" cy="731520"/>
-          </a:xfrm>
-          <a:prstGeom prst="rect">
-            <a:avLst/>
-          </a:prstGeom>
-          <a:noFill/>
-        </p:spPr>
-        <p:txBody>
-          <a:bodyPr wrap="square">
-            <a:spAutoFit/>
-          </a:bodyPr>
-          <a:lstStyle/>
-          <a:p>
-            <a:pPr>
-              <a:spcAft>
-                <a:spcPts val="400"/>
-              </a:spcAft>
-            </a:pPr>
-            <a:r>
-              <a:rPr sz="1200" b="0">
-                <a:solidFill>
-                  <a:srgbClr val="0F172A"/>
-                </a:solidFill>
-                <a:latin typeface="PingFang TC"/>
-                <a:ea typeface="PingFang TC"/>
-              </a:rPr>
-              <a:t>•  解決『服務掛了沒人知道』;canary 是端到端外部探測(連 CloudFront/整鏈路掛掉都測得到)。純 infra,已 validate/plan 通過(未 apply)。</a:t>
-            </a:r>
-          </a:p>
-        </p:txBody>
-      </p:sp>
-    </p:spTree>
-  </p:cSld>
-  <p:clrMapOvr>
-    <a:masterClrMapping/>
-  </p:clrMapOvr>
-</p:sld>
-</file>
-
-<file path=ppt/slides/slide29.xml><?xml version="1.0" encoding="utf-8"?>
-<p:sld xmlns:a="http://schemas.openxmlformats.org/drawingml/2006/main" xmlns:p="http://schemas.openxmlformats.org/presentationml/2006/main" xmlns:r="http://schemas.openxmlformats.org/officeDocument/2006/relationships">
-  <p:cSld>
-    <p:spTree>
-      <p:nvGrpSpPr>
-        <p:cNvPr id="1" name=""/>
-        <p:cNvGrpSpPr/>
-        <p:nvPr/>
-      </p:nvGrpSpPr>
-      <p:grpSpPr/>
-      <p:sp>
-        <p:nvSpPr>
-          <p:cNvPr id="2" name="Rectangle 1"/>
-          <p:cNvSpPr/>
-          <p:nvPr/>
-        </p:nvSpPr>
-        <p:spPr>
-          <a:xfrm>
-            <a:off x="0" y="0"/>
-            <a:ext cx="164592" cy="6858000"/>
-          </a:xfrm>
-          <a:prstGeom prst="rect">
-            <a:avLst/>
-          </a:prstGeom>
-          <a:solidFill>
-            <a:srgbClr val="2563EB"/>
-          </a:solidFill>
-          <a:ln>
-            <a:noFill/>
-          </a:ln>
-          <a:effectLst/>
-        </p:spPr>
-        <p:style>
-          <a:lnRef idx="1">
-            <a:schemeClr val="accent1"/>
-          </a:lnRef>
-          <a:fillRef idx="3">
-            <a:schemeClr val="accent1"/>
-          </a:fillRef>
-          <a:effectRef idx="2">
-            <a:schemeClr val="accent1"/>
-          </a:effectRef>
-          <a:fontRef idx="minor">
-            <a:schemeClr val="lt1"/>
-          </a:fontRef>
-        </p:style>
-        <p:txBody>
-          <a:bodyPr rtlCol="0" anchor="ctr"/>
-          <a:lstStyle/>
-          <a:p>
-            <a:pPr algn="ctr"/>
-          </a:p>
-        </p:txBody>
-      </p:sp>
-      <p:sp>
-        <p:nvSpPr>
-          <p:cNvPr id="3" name="TextBox 2"/>
-          <p:cNvSpPr txBox="1"/>
-          <p:nvPr/>
-        </p:nvSpPr>
-        <p:spPr>
-          <a:xfrm>
-            <a:off x="502920" y="320040"/>
-            <a:ext cx="10972800" cy="1005840"/>
-          </a:xfrm>
-          <a:prstGeom prst="rect">
-            <a:avLst/>
-          </a:prstGeom>
-          <a:noFill/>
-        </p:spPr>
-        <p:txBody>
-          <a:bodyPr wrap="square" anchor="t">
-            <a:spAutoFit/>
-          </a:bodyPr>
-          <a:lstStyle/>
-          <a:p>
-            <a:pPr algn="l">
-              <a:spcAft>
-                <a:spcPts val="200"/>
-              </a:spcAft>
-            </a:pPr>
-            <a:r>
-              <a:rPr sz="1300" b="1">
-                <a:solidFill>
-                  <a:srgbClr val="2563EB"/>
-                </a:solidFill>
-                <a:latin typeface="PingFang TC"/>
-                <a:ea typeface="PingFang TC"/>
-              </a:rPr>
-              <a:t>可靠性 · ERROR HANDLING</a:t>
-            </a:r>
-          </a:p>
-          <a:p>
-            <a:pPr algn="l">
-              <a:spcAft>
-                <a:spcPts val="400"/>
-              </a:spcAft>
-            </a:pPr>
-            <a:r>
-              <a:rPr sz="3000" b="1">
-                <a:solidFill>
-                  <a:srgbClr val="0F172A"/>
-                </a:solidFill>
-                <a:latin typeface="PingFang TC"/>
-                <a:ea typeface="PingFang TC"/>
-              </a:rPr>
-              <a:t>壞輸入/依賴故障都優雅回應、不洩漏、可追蹤</a:t>
-            </a:r>
-          </a:p>
-        </p:txBody>
-      </p:sp>
-      <p:graphicFrame>
-        <p:nvGraphicFramePr>
-          <p:cNvPr id="4" name="Table 3"/>
-          <p:cNvGraphicFramePr>
-            <a:graphicFrameLocks noGrp="1"/>
-          </p:cNvGraphicFramePr>
-          <p:nvPr/>
-        </p:nvGraphicFramePr>
-        <p:xfrm>
-          <a:off x="548640" y="1828800"/>
-          <a:ext cx="11109960" cy="2468880"/>
-        </p:xfrm>
-        <a:graphic>
-          <a:graphicData uri="http://schemas.openxmlformats.org/drawingml/2006/table">
-            <a:tbl>
-              <a:tblPr firstRow="1" bandRow="1">
-                <a:tableStyleId>{5C22544A-7EE6-4342-B048-85BDC9FD1C3A}</a:tableStyleId>
-              </a:tblPr>
-              <a:tblGrid>
-                <a:gridCol w="2194560"/>
-                <a:gridCol w="8915400"/>
-              </a:tblGrid>
-              <a:tr h="493776">
-                <a:tc>
-                  <a:txBody>
-                    <a:bodyPr/>
-                    <a:lstStyle/>
-                    <a:p>
-                      <a:r>
-                        <a:rPr sz="1200" b="1">
-                          <a:solidFill>
-                            <a:srgbClr val="FFFFFF"/>
-                          </a:solidFill>
-                          <a:latin typeface="PingFang TC"/>
-                          <a:ea typeface="PingFang TC"/>
-                        </a:rPr>
-                        <a:t>面向</a:t>
-                      </a:r>
-                    </a:p>
-                  </a:txBody>
-                  <a:tcPr marT="25400" marB="25400" marL="101600" anchor="ctr">
-                    <a:solidFill>
-                      <a:srgbClr val="2563EB"/>
-                    </a:solidFill>
-                  </a:tcPr>
-                </a:tc>
-                <a:tc>
-                  <a:txBody>
-                    <a:bodyPr/>
-                    <a:lstStyle/>
-                    <a:p>
-                      <a:r>
-                        <a:rPr sz="1200" b="1">
-                          <a:solidFill>
-                            <a:srgbClr val="FFFFFF"/>
-                          </a:solidFill>
-                          <a:latin typeface="PingFang TC"/>
-                          <a:ea typeface="PingFang TC"/>
-                        </a:rPr>
-                        <a:t>做法</a:t>
-                      </a:r>
-                    </a:p>
-                  </a:txBody>
-                  <a:tcPr marT="25400" marB="25400" marL="101600" anchor="ctr">
-                    <a:solidFill>
-                      <a:srgbClr val="2563EB"/>
-                    </a:solidFill>
-                  </a:tcPr>
-                </a:tc>
-              </a:tr>
-              <a:tr h="493776">
-                <a:tc>
-                  <a:txBody>
-                    <a:bodyPr/>
-                    <a:lstStyle/>
-                    <a:p>
-                      <a:r>
-                        <a:rPr sz="1200" b="1">
-                          <a:solidFill>
-                            <a:srgbClr val="0F172A"/>
-                          </a:solidFill>
-                          <a:latin typeface="PingFang TC"/>
-                          <a:ea typeface="PingFang TC"/>
-                        </a:rPr>
-                        <a:t>全域處理器</a:t>
-                      </a:r>
-                    </a:p>
-                  </a:txBody>
-                  <a:tcPr marT="25400" marB="25400" marL="101600" anchor="ctr">
-                    <a:solidFill>
-                      <a:srgbClr val="FFFFFF"/>
-                    </a:solidFill>
-                  </a:tcPr>
-                </a:tc>
-                <a:tc>
-                  <a:txBody>
-                    <a:bodyPr/>
-                    <a:lstStyle/>
-                    <a:p>
-                      <a:r>
-                        <a:rPr sz="1200" b="0">
-                          <a:solidFill>
-                            <a:srgbClr val="0F172A"/>
-                          </a:solidFill>
-                          <a:latin typeface="PingFang TC"/>
-                          <a:ea typeface="PingFang TC"/>
-                        </a:rPr>
-                        <a:t>未捕捉例外 → 500 不洩漏 + 記 traceback;422 驗證轉可讀字串(沿用 {detail})</a:t>
-                      </a:r>
-                    </a:p>
-                  </a:txBody>
-                  <a:tcPr marT="25400" marB="25400" marL="101600" anchor="ctr">
-                    <a:solidFill>
-                      <a:srgbClr val="FFFFFF"/>
-                    </a:solidFill>
-                  </a:tcPr>
-                </a:tc>
-              </a:tr>
-              <a:tr h="493776">
-                <a:tc>
-                  <a:txBody>
-                    <a:bodyPr/>
-                    <a:lstStyle/>
-                    <a:p>
-                      <a:r>
-                        <a:rPr sz="1200" b="1">
-                          <a:solidFill>
-                            <a:srgbClr val="0F172A"/>
-                          </a:solidFill>
-                          <a:latin typeface="PingFang TC"/>
-                          <a:ea typeface="PingFang TC"/>
-                        </a:rPr>
-                        <a:t>依賴降級</a:t>
-                      </a:r>
-                    </a:p>
-                  </a:txBody>
-                  <a:tcPr marT="25400" marB="25400" marL="101600" anchor="ctr">
-                    <a:solidFill>
-                      <a:srgbClr val="F1F5F9"/>
-                    </a:solidFill>
-                  </a:tcPr>
-                </a:tc>
-                <a:tc>
-                  <a:txBody>
-                    <a:bodyPr/>
-                    <a:lstStyle/>
-                    <a:p>
-                      <a:r>
-                        <a:rPr sz="1200" b="0">
-                          <a:solidFill>
-                            <a:srgbClr val="0F172A"/>
-                          </a:solidFill>
-                          <a:latin typeface="PingFang TC"/>
-                          <a:ea typeface="PingFang TC"/>
-                        </a:rPr>
-                        <a:t>Redis 故障 → redirect 走 DB(不 500);S3 失敗 → create fallback /image</a:t>
-                      </a:r>
-                    </a:p>
-                  </a:txBody>
-                  <a:tcPr marT="25400" marB="25400" marL="101600" anchor="ctr">
-                    <a:solidFill>
-                      <a:srgbClr val="F1F5F9"/>
-                    </a:solidFill>
-                  </a:tcPr>
-                </a:tc>
-              </a:tr>
-              <a:tr h="493776">
-                <a:tc>
-                  <a:txBody>
-                    <a:bodyPr/>
-                    <a:lstStyle/>
-                    <a:p>
-                      <a:r>
-                        <a:rPr sz="1200" b="1">
-                          <a:solidFill>
-                            <a:srgbClr val="0F172A"/>
-                          </a:solidFill>
-                          <a:latin typeface="PingFang TC"/>
-                          <a:ea typeface="PingFang TC"/>
-                        </a:rPr>
-                        <a:t>Request ID</a:t>
-                      </a:r>
-                    </a:p>
-                  </a:txBody>
-                  <a:tcPr marT="25400" marB="25400" marL="101600" anchor="ctr">
-                    <a:solidFill>
-                      <a:srgbClr val="FFFFFF"/>
-                    </a:solidFill>
-                  </a:tcPr>
-                </a:tc>
-                <a:tc>
-                  <a:txBody>
-                    <a:bodyPr/>
-                    <a:lstStyle/>
-                    <a:p>
-                      <a:r>
-                        <a:rPr sz="1200" b="0">
-                          <a:solidFill>
-                            <a:srgbClr val="0F172A"/>
-                          </a:solidFill>
-                          <a:latin typeface="PingFang TC"/>
-                          <a:ea typeface="PingFang TC"/>
-                        </a:rPr>
-                        <a:t>所有回應帶 X-Request-ID + 進日誌/錯誤 body(對應 CloudWatch Logs)</a:t>
-                      </a:r>
-                    </a:p>
-                  </a:txBody>
-                  <a:tcPr marT="25400" marB="25400" marL="101600" anchor="ctr">
-                    <a:solidFill>
-                      <a:srgbClr val="FFFFFF"/>
-                    </a:solidFill>
-                  </a:tcPr>
-                </a:tc>
-              </a:tr>
-              <a:tr h="493776">
-                <a:tc>
-                  <a:txBody>
-                    <a:bodyPr/>
-                    <a:lstStyle/>
-                    <a:p>
-                      <a:r>
-                        <a:rPr sz="1200" b="1">
-                          <a:solidFill>
-                            <a:srgbClr val="0F172A"/>
-                          </a:solidFill>
-                          <a:latin typeface="PingFang TC"/>
-                          <a:ea typeface="PingFang TC"/>
-                        </a:rPr>
-                        <a:t>輸入健全化</a:t>
-                      </a:r>
-                    </a:p>
-                  </a:txBody>
-                  <a:tcPr marT="25400" marB="25400" marL="101600" anchor="ctr">
-                    <a:solidFill>
-                      <a:srgbClr val="F1F5F9"/>
-                    </a:solidFill>
-                  </a:tcPr>
-                </a:tc>
-                <a:tc>
-                  <a:txBody>
-                    <a:bodyPr/>
-                    <a:lstStyle/>
-                    <a:p>
-                      <a:r>
-                        <a:rPr sz="1200" b="0">
-                          <a:solidFill>
-                            <a:srgbClr val="0F172A"/>
-                          </a:solidFill>
-                          <a:latin typeface="PingFang TC"/>
-                          <a:ea typeface="PingFang TC"/>
-                        </a:rPr>
-                        <a:t>body &gt; 64KB → 413;malformed JSON → 422;URL 長度 2048</a:t>
-                      </a:r>
-                    </a:p>
-                  </a:txBody>
-                  <a:tcPr marT="25400" marB="25400" marL="101600" anchor="ctr">
-                    <a:solidFill>
-                      <a:srgbClr val="F1F5F9"/>
-                    </a:solidFill>
-                  </a:tcPr>
-                </a:tc>
-              </a:tr>
-            </a:tbl>
-          </a:graphicData>
-        </a:graphic>
-      </p:graphicFrame>
-      <p:sp>
-        <p:nvSpPr>
-          <p:cNvPr id="5" name="TextBox 4"/>
-          <p:cNvSpPr txBox="1"/>
-          <p:nvPr/>
-        </p:nvSpPr>
-        <p:spPr>
-          <a:xfrm>
-            <a:off x="548640" y="4480560"/>
-            <a:ext cx="11247120" cy="1828800"/>
-          </a:xfrm>
-          <a:prstGeom prst="rect">
-            <a:avLst/>
-          </a:prstGeom>
-          <a:noFill/>
-        </p:spPr>
-        <p:txBody>
-          <a:bodyPr wrap="square">
-            <a:spAutoFit/>
-          </a:bodyPr>
-          <a:lstStyle/>
-          <a:p>
-            <a:pPr>
-              <a:spcAft>
-                <a:spcPts val="800"/>
-              </a:spcAft>
-            </a:pPr>
-            <a:r>
-              <a:rPr sz="1300" b="0">
-                <a:solidFill>
-                  <a:srgbClr val="0F172A"/>
-                </a:solidFill>
-                <a:latin typeface="PingFang TC"/>
-                <a:ea typeface="PingFang TC"/>
-              </a:rPr>
-              <a:t>•  錯誤格式沿用 {"detail"} → 相容前端;500 只回通用訊息 + request_id,traceback 僅進日誌</a:t>
-            </a:r>
-          </a:p>
-          <a:p>
-            <a:pPr>
-              <a:spcAft>
-                <a:spcPts val="800"/>
-              </a:spcAft>
-            </a:pPr>
-            <a:r>
-              <a:rPr sz="1300" b="0">
-                <a:solidFill>
-                  <a:srgbClr val="0F172A"/>
-                </a:solidFill>
-                <a:latin typeface="PingFang TC"/>
-                <a:ea typeface="PingFang TC"/>
-              </a:rPr>
-              <a:t>•  依賴降級讓「Redis/S3 掛掉」不再連帶整個請求 500;分析寫入失敗也只記 log</a:t>
-            </a:r>
-          </a:p>
-          <a:p>
-            <a:pPr>
-              <a:spcAft>
-                <a:spcPts val="800"/>
-              </a:spcAft>
-            </a:pPr>
-            <a:r>
-              <a:rPr sz="1300" b="0">
-                <a:solidFill>
-                  <a:srgbClr val="0F172A"/>
-                </a:solidFill>
-                <a:latin typeface="PingFang TC"/>
-                <a:ea typeface="PingFang TC"/>
-              </a:rPr>
-              <a:t>•  本機驗證:422/413/500(含 X-Request-ID)+ REDIS_URL 不可達時 redirect 仍 302。純 app,不動 infra</a:t>
             </a:r>
           </a:p>
         </p:txBody>
@@ -19662,7 +19914,7 @@
                 <a:latin typeface="PingFang TC"/>
                 <a:ea typeface="PingFang TC"/>
               </a:rPr>
-              <a:t>部署 · CI/CD</a:t>
+              <a:t>可靠性 · MONITORING</a:t>
             </a:r>
           </a:p>
           <a:p>
@@ -19679,7 +19931,7 @@
                 <a:latin typeface="PingFang TC"/>
                 <a:ea typeface="PingFang TC"/>
               </a:rPr>
-              <a:t>CI/CD 流程（GitHub Actions + OIDC）</a:t>
+              <a:t>CloudWatch alarms → SNS + Logs + Dashboard + Canary</a:t>
             </a:r>
           </a:p>
         </p:txBody>
@@ -19692,231 +19944,8 @@
         </p:nvSpPr>
         <p:spPr>
           <a:xfrm>
-            <a:off x="457200" y="2286000"/>
-            <a:ext cx="1481328" cy="1280160"/>
-          </a:xfrm>
-          <a:prstGeom prst="roundRect">
-            <a:avLst/>
-          </a:prstGeom>
-          <a:solidFill>
-            <a:srgbClr val="64748B"/>
-          </a:solidFill>
-          <a:ln>
-            <a:solidFill>
-              <a:srgbClr val="64748B"/>
-            </a:solidFill>
-          </a:ln>
-          <a:effectLst/>
-        </p:spPr>
-        <p:style>
-          <a:lnRef idx="1">
-            <a:schemeClr val="accent1"/>
-          </a:lnRef>
-          <a:fillRef idx="3">
-            <a:schemeClr val="accent1"/>
-          </a:fillRef>
-          <a:effectRef idx="2">
-            <a:schemeClr val="accent1"/>
-          </a:effectRef>
-          <a:fontRef idx="minor">
-            <a:schemeClr val="lt1"/>
-          </a:fontRef>
-        </p:style>
-        <p:txBody>
-          <a:bodyPr rtlCol="0" anchor="ctr" wrap="square" tIns="25400" bIns="25400"/>
-          <a:lstStyle/>
-          <a:p>
-            <a:pPr algn="ctr"/>
-            <a:r>
-              <a:rPr sz="1100" b="1">
-                <a:solidFill>
-                  <a:srgbClr val="FFFFFF"/>
-                </a:solidFill>
-                <a:latin typeface="PingFang TC"/>
-                <a:ea typeface="PingFang TC"/>
-              </a:rPr>
-              <a:t>git push</a:t>
-            </a:r>
-          </a:p>
-          <a:p>
-            <a:pPr algn="ctr"/>
-            <a:r>
-              <a:rPr sz="1100" b="0">
-                <a:solidFill>
-                  <a:srgbClr val="FFFFFF"/>
-                </a:solidFill>
-                <a:latin typeface="PingFang TC"/>
-                <a:ea typeface="PingFang TC"/>
-              </a:rPr>
-              <a:t>QR Code Generator/**</a:t>
-            </a:r>
-          </a:p>
-        </p:txBody>
-      </p:sp>
-      <p:cxnSp>
-        <p:nvCxnSpPr>
-          <p:cNvPr id="5" name="Connector 4"/>
-          <p:cNvCxnSpPr/>
-          <p:nvPr/>
-        </p:nvCxnSpPr>
-        <p:spPr>
-          <a:xfrm>
-            <a:off x="1938528" y="2926080"/>
-            <a:ext cx="118872" cy="0"/>
-          </a:xfrm>
-          <a:prstGeom prst="line">
-            <a:avLst/>
-          </a:prstGeom>
-          <a:ln w="22225">
-            <a:solidFill>
-              <a:srgbClr val="64748B"/>
-            </a:solidFill>
-            <a:tailEnd type="triangle" w="med" len="med"/>
-          </a:ln>
-        </p:spPr>
-        <p:style>
-          <a:lnRef idx="2">
-            <a:schemeClr val="accent1"/>
-          </a:lnRef>
-          <a:fillRef idx="0">
-            <a:schemeClr val="accent1"/>
-          </a:fillRef>
-          <a:effectRef idx="1">
-            <a:schemeClr val="accent1"/>
-          </a:effectRef>
-          <a:fontRef idx="minor">
-            <a:schemeClr val="tx1"/>
-          </a:fontRef>
-        </p:style>
-      </p:cxnSp>
-      <p:sp>
-        <p:nvSpPr>
-          <p:cNvPr id="6" name="Rounded Rectangle 5"/>
-          <p:cNvSpPr/>
-          <p:nvPr/>
-        </p:nvSpPr>
-        <p:spPr>
-          <a:xfrm>
-            <a:off x="2057400" y="2286000"/>
-            <a:ext cx="1481328" cy="1280160"/>
-          </a:xfrm>
-          <a:prstGeom prst="roundRect">
-            <a:avLst/>
-          </a:prstGeom>
-          <a:solidFill>
-            <a:srgbClr val="0EA5E9"/>
-          </a:solidFill>
-          <a:ln>
-            <a:solidFill>
-              <a:srgbClr val="0EA5E9"/>
-            </a:solidFill>
-          </a:ln>
-          <a:effectLst/>
-        </p:spPr>
-        <p:style>
-          <a:lnRef idx="1">
-            <a:schemeClr val="accent1"/>
-          </a:lnRef>
-          <a:fillRef idx="3">
-            <a:schemeClr val="accent1"/>
-          </a:fillRef>
-          <a:effectRef idx="2">
-            <a:schemeClr val="accent1"/>
-          </a:effectRef>
-          <a:fontRef idx="minor">
-            <a:schemeClr val="lt1"/>
-          </a:fontRef>
-        </p:style>
-        <p:txBody>
-          <a:bodyPr rtlCol="0" anchor="ctr" wrap="square" tIns="25400" bIns="25400"/>
-          <a:lstStyle/>
-          <a:p>
-            <a:pPr algn="ctr"/>
-            <a:r>
-              <a:rPr sz="1100" b="1">
-                <a:solidFill>
-                  <a:srgbClr val="FFFFFF"/>
-                </a:solidFill>
-                <a:latin typeface="PingFang TC"/>
-                <a:ea typeface="PingFang TC"/>
-              </a:rPr>
-              <a:t>GitHub Actions</a:t>
-            </a:r>
-          </a:p>
-          <a:p>
-            <a:pPr algn="ctr"/>
-            <a:r>
-              <a:rPr sz="1100" b="0">
-                <a:solidFill>
-                  <a:srgbClr val="FFFFFF"/>
-                </a:solidFill>
-                <a:latin typeface="PingFang TC"/>
-                <a:ea typeface="PingFang TC"/>
-              </a:rPr>
-              <a:t>OIDC assume role</a:t>
-            </a:r>
-          </a:p>
-          <a:p>
-            <a:pPr algn="ctr"/>
-            <a:r>
-              <a:rPr sz="1100" b="0">
-                <a:solidFill>
-                  <a:srgbClr val="FFFFFF"/>
-                </a:solidFill>
-                <a:latin typeface="PingFang TC"/>
-                <a:ea typeface="PingFang TC"/>
-              </a:rPr>
-              <a:t>(無長期金鑰)</a:t>
-            </a:r>
-          </a:p>
-        </p:txBody>
-      </p:sp>
-      <p:cxnSp>
-        <p:nvCxnSpPr>
-          <p:cNvPr id="7" name="Connector 6"/>
-          <p:cNvCxnSpPr/>
-          <p:nvPr/>
-        </p:nvCxnSpPr>
-        <p:spPr>
-          <a:xfrm>
-            <a:off x="3538728" y="2926080"/>
-            <a:ext cx="118872" cy="0"/>
-          </a:xfrm>
-          <a:prstGeom prst="line">
-            <a:avLst/>
-          </a:prstGeom>
-          <a:ln w="22225">
-            <a:solidFill>
-              <a:srgbClr val="64748B"/>
-            </a:solidFill>
-            <a:tailEnd type="triangle" w="med" len="med"/>
-          </a:ln>
-        </p:spPr>
-        <p:style>
-          <a:lnRef idx="2">
-            <a:schemeClr val="accent1"/>
-          </a:lnRef>
-          <a:fillRef idx="0">
-            <a:schemeClr val="accent1"/>
-          </a:fillRef>
-          <a:effectRef idx="1">
-            <a:schemeClr val="accent1"/>
-          </a:effectRef>
-          <a:fontRef idx="minor">
-            <a:schemeClr val="tx1"/>
-          </a:fontRef>
-        </p:style>
-      </p:cxnSp>
-      <p:sp>
-        <p:nvSpPr>
-          <p:cNvPr id="8" name="Rounded Rectangle 7"/>
-          <p:cNvSpPr/>
-          <p:nvPr/>
-        </p:nvSpPr>
-        <p:spPr>
-          <a:xfrm>
-            <a:off x="3657600" y="2286000"/>
-            <a:ext cx="1481328" cy="1280160"/>
+            <a:off x="548640" y="1828800"/>
+            <a:ext cx="2926080" cy="822960"/>
           </a:xfrm>
           <a:prstGeom prst="roundRect">
             <a:avLst/>
@@ -19958,7 +19987,7 @@
                 <a:latin typeface="PingFang TC"/>
                 <a:ea typeface="PingFang TC"/>
               </a:rPr>
-              <a:t>buildx</a:t>
+              <a:t>CloudWatch Alarms</a:t>
             </a:r>
           </a:p>
           <a:p>
@@ -19971,70 +20000,90 @@
                 <a:latin typeface="PingFang TC"/>
                 <a:ea typeface="PingFang TC"/>
               </a:rPr>
-              <a:t>--platform</a:t>
-            </a:r>
-          </a:p>
-          <a:p>
-            <a:pPr algn="ctr"/>
-            <a:r>
-              <a:rPr sz="1100" b="0">
-                <a:solidFill>
-                  <a:srgbClr val="FFFFFF"/>
-                </a:solidFill>
-                <a:latin typeface="PingFang TC"/>
-                <a:ea typeface="PingFang TC"/>
-              </a:rPr>
-              <a:t>linux/arm64</a:t>
-            </a:r>
-          </a:p>
-        </p:txBody>
-      </p:sp>
-      <p:cxnSp>
-        <p:nvCxnSpPr>
-          <p:cNvPr id="9" name="Connector 8"/>
-          <p:cNvCxnSpPr/>
-          <p:nvPr/>
-        </p:nvCxnSpPr>
-        <p:spPr>
-          <a:xfrm>
-            <a:off x="5138928" y="2926080"/>
-            <a:ext cx="118872" cy="0"/>
-          </a:xfrm>
-          <a:prstGeom prst="line">
-            <a:avLst/>
-          </a:prstGeom>
-          <a:ln w="22225">
+              <a:t>ALB/RDS/EC2/API GW/Lambda/CF</a:t>
+            </a:r>
+          </a:p>
+        </p:txBody>
+      </p:sp>
+      <p:sp>
+        <p:nvSpPr>
+          <p:cNvPr id="5" name="Rounded Rectangle 4"/>
+          <p:cNvSpPr/>
+          <p:nvPr/>
+        </p:nvSpPr>
+        <p:spPr>
+          <a:xfrm>
+            <a:off x="3931920" y="1828800"/>
+            <a:ext cx="2377440" cy="822960"/>
+          </a:xfrm>
+          <a:prstGeom prst="roundRect">
+            <a:avLst/>
+          </a:prstGeom>
+          <a:solidFill>
+            <a:srgbClr val="D97706"/>
+          </a:solidFill>
+          <a:ln>
             <a:solidFill>
-              <a:srgbClr val="64748B"/>
+              <a:srgbClr val="D97706"/>
             </a:solidFill>
-            <a:tailEnd type="triangle" w="med" len="med"/>
           </a:ln>
+          <a:effectLst/>
         </p:spPr>
         <p:style>
-          <a:lnRef idx="2">
+          <a:lnRef idx="1">
             <a:schemeClr val="accent1"/>
           </a:lnRef>
-          <a:fillRef idx="0">
+          <a:fillRef idx="3">
             <a:schemeClr val="accent1"/>
           </a:fillRef>
-          <a:effectRef idx="1">
+          <a:effectRef idx="2">
             <a:schemeClr val="accent1"/>
           </a:effectRef>
           <a:fontRef idx="minor">
-            <a:schemeClr val="tx1"/>
+            <a:schemeClr val="lt1"/>
           </a:fontRef>
         </p:style>
-      </p:cxnSp>
-      <p:sp>
-        <p:nvSpPr>
-          <p:cNvPr id="10" name="Rounded Rectangle 9"/>
+        <p:txBody>
+          <a:bodyPr rtlCol="0" anchor="ctr" wrap="square" tIns="25400" bIns="25400"/>
+          <a:lstStyle/>
+          <a:p>
+            <a:pPr algn="ctr"/>
+            <a:r>
+              <a:rPr sz="1200" b="1">
+                <a:solidFill>
+                  <a:srgbClr val="FFFFFF"/>
+                </a:solidFill>
+                <a:latin typeface="PingFang TC"/>
+                <a:ea typeface="PingFang TC"/>
+              </a:rPr>
+              <a:t>SNS topic</a:t>
+            </a:r>
+          </a:p>
+          <a:p>
+            <a:pPr algn="ctr"/>
+            <a:r>
+              <a:rPr sz="1200" b="0">
+                <a:solidFill>
+                  <a:srgbClr val="FFFFFF"/>
+                </a:solidFill>
+                <a:latin typeface="PingFang TC"/>
+                <a:ea typeface="PingFang TC"/>
+              </a:rPr>
+              <a:t>→ Email 通知</a:t>
+            </a:r>
+          </a:p>
+        </p:txBody>
+      </p:sp>
+      <p:sp>
+        <p:nvSpPr>
+          <p:cNvPr id="6" name="Rounded Rectangle 5"/>
           <p:cNvSpPr/>
           <p:nvPr/>
         </p:nvSpPr>
         <p:spPr>
           <a:xfrm>
-            <a:off x="5257800" y="2286000"/>
-            <a:ext cx="1481328" cy="1280160"/>
+            <a:off x="6766560" y="1828800"/>
+            <a:ext cx="2377440" cy="822960"/>
           </a:xfrm>
           <a:prstGeom prst="roundRect">
             <a:avLst/>
@@ -20069,54 +20118,41 @@
           <a:p>
             <a:pPr algn="ctr"/>
             <a:r>
-              <a:rPr sz="1100" b="1">
+              <a:rPr sz="1200" b="1">
                 <a:solidFill>
                   <a:srgbClr val="FFFFFF"/>
                 </a:solidFill>
                 <a:latin typeface="PingFang TC"/>
                 <a:ea typeface="PingFang TC"/>
               </a:rPr>
-              <a:t>ECR push</a:t>
+              <a:t>Synthetic Canary</a:t>
             </a:r>
           </a:p>
           <a:p>
             <a:pPr algn="ctr"/>
             <a:r>
-              <a:rPr sz="1100" b="0">
+              <a:rPr sz="1200" b="0">
                 <a:solidFill>
                   <a:srgbClr val="FFFFFF"/>
                 </a:solidFill>
                 <a:latin typeface="PingFang TC"/>
                 <a:ea typeface="PingFang TC"/>
               </a:rPr>
-              <a:t>tag = SHA</a:t>
-            </a:r>
-          </a:p>
-          <a:p>
-            <a:pPr algn="ctr"/>
-            <a:r>
-              <a:rPr sz="1100" b="0">
-                <a:solidFill>
-                  <a:srgbClr val="FFFFFF"/>
-                </a:solidFill>
-                <a:latin typeface="PingFang TC"/>
-                <a:ea typeface="PingFang TC"/>
-              </a:rPr>
-              <a:t>+ latest</a:t>
+              <a:t>每 5 分 /health</a:t>
             </a:r>
           </a:p>
         </p:txBody>
       </p:sp>
       <p:cxnSp>
         <p:nvCxnSpPr>
-          <p:cNvPr id="11" name="Connector 10"/>
+          <p:cNvPr id="7" name="Connector 6"/>
           <p:cNvCxnSpPr/>
           <p:nvPr/>
         </p:nvCxnSpPr>
         <p:spPr>
           <a:xfrm>
-            <a:off x="6739128" y="2926080"/>
-            <a:ext cx="118872" cy="0"/>
+            <a:off x="3474720" y="2240280"/>
+            <a:ext cx="457200" cy="0"/>
           </a:xfrm>
           <a:prstGeom prst="line">
             <a:avLst/>
@@ -20143,103 +20179,21 @@
           </a:fontRef>
         </p:style>
       </p:cxnSp>
-      <p:sp>
-        <p:nvSpPr>
-          <p:cNvPr id="12" name="Rounded Rectangle 11"/>
-          <p:cNvSpPr/>
-          <p:nvPr/>
-        </p:nvSpPr>
-        <p:spPr>
-          <a:xfrm>
-            <a:off x="6858000" y="2286000"/>
-            <a:ext cx="1481328" cy="1280160"/>
-          </a:xfrm>
-          <a:prstGeom prst="roundRect">
-            <a:avLst/>
-          </a:prstGeom>
-          <a:solidFill>
-            <a:srgbClr val="7C3AED"/>
-          </a:solidFill>
-          <a:ln>
-            <a:solidFill>
-              <a:srgbClr val="7C3AED"/>
-            </a:solidFill>
-          </a:ln>
-          <a:effectLst/>
-        </p:spPr>
-        <p:style>
-          <a:lnRef idx="1">
-            <a:schemeClr val="accent1"/>
-          </a:lnRef>
-          <a:fillRef idx="3">
-            <a:schemeClr val="accent1"/>
-          </a:fillRef>
-          <a:effectRef idx="2">
-            <a:schemeClr val="accent1"/>
-          </a:effectRef>
-          <a:fontRef idx="minor">
-            <a:schemeClr val="lt1"/>
-          </a:fontRef>
-        </p:style>
-        <p:txBody>
-          <a:bodyPr rtlCol="0" anchor="ctr" wrap="square" tIns="25400" bIns="25400"/>
-          <a:lstStyle/>
-          <a:p>
-            <a:pPr algn="ctr"/>
-            <a:r>
-              <a:rPr sz="1100" b="1">
-                <a:solidFill>
-                  <a:srgbClr val="FFFFFF"/>
-                </a:solidFill>
-                <a:latin typeface="PingFang TC"/>
-                <a:ea typeface="PingFang TC"/>
-              </a:rPr>
-              <a:t>SSM 更新</a:t>
-            </a:r>
-          </a:p>
-          <a:p>
-            <a:pPr algn="ctr"/>
-            <a:r>
-              <a:rPr sz="1100" b="0">
-                <a:solidFill>
-                  <a:srgbClr val="FFFFFF"/>
-                </a:solidFill>
-                <a:latin typeface="PingFang TC"/>
-                <a:ea typeface="PingFang TC"/>
-              </a:rPr>
-              <a:t>/qrcode/</a:t>
-            </a:r>
-          </a:p>
-          <a:p>
-            <a:pPr algn="ctr"/>
-            <a:r>
-              <a:rPr sz="1100" b="0">
-                <a:solidFill>
-                  <a:srgbClr val="FFFFFF"/>
-                </a:solidFill>
-                <a:latin typeface="PingFang TC"/>
-                <a:ea typeface="PingFang TC"/>
-              </a:rPr>
-              <a:t>IMAGE_URI</a:t>
-            </a:r>
-          </a:p>
-        </p:txBody>
-      </p:sp>
       <p:cxnSp>
         <p:nvCxnSpPr>
-          <p:cNvPr id="13" name="Connector 12"/>
+          <p:cNvPr id="8" name="Connector 7"/>
           <p:cNvCxnSpPr/>
           <p:nvPr/>
         </p:nvCxnSpPr>
         <p:spPr>
-          <a:xfrm>
-            <a:off x="8339328" y="2926080"/>
-            <a:ext cx="118872" cy="0"/>
+          <a:xfrm flipH="1">
+            <a:off x="6309360" y="2240280"/>
+            <a:ext cx="457200" cy="0"/>
           </a:xfrm>
           <a:prstGeom prst="line">
             <a:avLst/>
           </a:prstGeom>
-          <a:ln w="22225">
+          <a:ln w="15240">
             <a:solidFill>
               <a:srgbClr val="64748B"/>
             </a:solidFill>
@@ -20261,216 +20215,330 @@
           </a:fontRef>
         </p:style>
       </p:cxnSp>
-      <p:sp>
-        <p:nvSpPr>
-          <p:cNvPr id="14" name="Rounded Rectangle 13"/>
-          <p:cNvSpPr/>
-          <p:nvPr/>
-        </p:nvSpPr>
-        <p:spPr>
-          <a:xfrm>
-            <a:off x="8458200" y="2286000"/>
-            <a:ext cx="1481328" cy="1280160"/>
-          </a:xfrm>
-          <a:prstGeom prst="roundRect">
-            <a:avLst/>
-          </a:prstGeom>
-          <a:solidFill>
-            <a:srgbClr val="D97706"/>
-          </a:solidFill>
-          <a:ln>
-            <a:solidFill>
-              <a:srgbClr val="D97706"/>
-            </a:solidFill>
-          </a:ln>
-          <a:effectLst/>
-        </p:spPr>
-        <p:style>
-          <a:lnRef idx="1">
-            <a:schemeClr val="accent1"/>
-          </a:lnRef>
-          <a:fillRef idx="3">
-            <a:schemeClr val="accent1"/>
-          </a:fillRef>
-          <a:effectRef idx="2">
-            <a:schemeClr val="accent1"/>
-          </a:effectRef>
-          <a:fontRef idx="minor">
-            <a:schemeClr val="lt1"/>
-          </a:fontRef>
-        </p:style>
-        <p:txBody>
-          <a:bodyPr rtlCol="0" anchor="ctr" wrap="square" tIns="25400" bIns="25400"/>
-          <a:lstStyle/>
-          <a:p>
-            <a:pPr algn="ctr"/>
-            <a:r>
-              <a:rPr sz="1100" b="1">
-                <a:solidFill>
-                  <a:srgbClr val="FFFFFF"/>
-                </a:solidFill>
-                <a:latin typeface="PingFang TC"/>
-                <a:ea typeface="PingFang TC"/>
-              </a:rPr>
-              <a:t>SSM 部署</a:t>
-            </a:r>
-          </a:p>
-          <a:p>
-            <a:pPr algn="ctr"/>
-            <a:r>
-              <a:rPr sz="1100" b="0">
-                <a:solidFill>
-                  <a:srgbClr val="FFFFFF"/>
-                </a:solidFill>
-                <a:latin typeface="PingFang TC"/>
-                <a:ea typeface="PingFang TC"/>
-              </a:rPr>
-              <a:t>→ EC2</a:t>
-            </a:r>
-          </a:p>
-          <a:p>
-            <a:pPr algn="ctr"/>
-            <a:r>
-              <a:rPr sz="1100" b="0">
-                <a:solidFill>
-                  <a:srgbClr val="FFFFFF"/>
-                </a:solidFill>
-                <a:latin typeface="PingFang TC"/>
-                <a:ea typeface="PingFang TC"/>
-              </a:rPr>
-              <a:t>deploy-app.sh</a:t>
-            </a:r>
-          </a:p>
-        </p:txBody>
-      </p:sp>
-      <p:cxnSp>
-        <p:nvCxnSpPr>
-          <p:cNvPr id="15" name="Connector 14"/>
-          <p:cNvCxnSpPr/>
-          <p:nvPr/>
-        </p:nvCxnSpPr>
-        <p:spPr>
-          <a:xfrm>
-            <a:off x="9939528" y="2926080"/>
-            <a:ext cx="118872" cy="0"/>
-          </a:xfrm>
-          <a:prstGeom prst="line">
-            <a:avLst/>
-          </a:prstGeom>
-          <a:ln w="22225">
-            <a:solidFill>
-              <a:srgbClr val="64748B"/>
-            </a:solidFill>
-            <a:tailEnd type="triangle" w="med" len="med"/>
-          </a:ln>
-        </p:spPr>
-        <p:style>
-          <a:lnRef idx="2">
-            <a:schemeClr val="accent1"/>
-          </a:lnRef>
-          <a:fillRef idx="0">
-            <a:schemeClr val="accent1"/>
-          </a:fillRef>
-          <a:effectRef idx="1">
-            <a:schemeClr val="accent1"/>
-          </a:effectRef>
-          <a:fontRef idx="minor">
-            <a:schemeClr val="tx1"/>
-          </a:fontRef>
-        </p:style>
-      </p:cxnSp>
-      <p:sp>
-        <p:nvSpPr>
-          <p:cNvPr id="16" name="Rounded Rectangle 15"/>
-          <p:cNvSpPr/>
-          <p:nvPr/>
-        </p:nvSpPr>
-        <p:spPr>
-          <a:xfrm>
-            <a:off x="10058400" y="2286000"/>
-            <a:ext cx="1481328" cy="1280160"/>
-          </a:xfrm>
-          <a:prstGeom prst="roundRect">
-            <a:avLst/>
-          </a:prstGeom>
-          <a:solidFill>
-            <a:srgbClr val="059669"/>
-          </a:solidFill>
-          <a:ln>
-            <a:solidFill>
-              <a:srgbClr val="059669"/>
-            </a:solidFill>
-          </a:ln>
-          <a:effectLst/>
-        </p:spPr>
-        <p:style>
-          <a:lnRef idx="1">
-            <a:schemeClr val="accent1"/>
-          </a:lnRef>
-          <a:fillRef idx="3">
-            <a:schemeClr val="accent1"/>
-          </a:fillRef>
-          <a:effectRef idx="2">
-            <a:schemeClr val="accent1"/>
-          </a:effectRef>
-          <a:fontRef idx="minor">
-            <a:schemeClr val="lt1"/>
-          </a:fontRef>
-        </p:style>
-        <p:txBody>
-          <a:bodyPr rtlCol="0" anchor="ctr" wrap="square" tIns="25400" bIns="25400"/>
-          <a:lstStyle/>
-          <a:p>
-            <a:pPr algn="ctr"/>
-            <a:r>
-              <a:rPr sz="1100" b="1">
-                <a:solidFill>
-                  <a:srgbClr val="FFFFFF"/>
-                </a:solidFill>
-                <a:latin typeface="PingFang TC"/>
-                <a:ea typeface="PingFang TC"/>
-              </a:rPr>
-              <a:t>上線</a:t>
-            </a:r>
-          </a:p>
-          <a:p>
-            <a:pPr algn="ctr"/>
-            <a:r>
-              <a:rPr sz="1100" b="0">
-                <a:solidFill>
-                  <a:srgbClr val="FFFFFF"/>
-                </a:solidFill>
-                <a:latin typeface="PingFang TC"/>
-                <a:ea typeface="PingFang TC"/>
-              </a:rPr>
-              <a:t>ALB /health</a:t>
-            </a:r>
-          </a:p>
-          <a:p>
-            <a:pPr algn="ctr"/>
-            <a:r>
-              <a:rPr sz="1100" b="0">
-                <a:solidFill>
-                  <a:srgbClr val="FFFFFF"/>
-                </a:solidFill>
-                <a:latin typeface="PingFang TC"/>
-                <a:ea typeface="PingFang TC"/>
-              </a:rPr>
-              <a:t>通過</a:t>
-            </a:r>
-          </a:p>
-        </p:txBody>
-      </p:sp>
-      <p:sp>
-        <p:nvSpPr>
-          <p:cNvPr id="17" name="TextBox 16"/>
+      <p:graphicFrame>
+        <p:nvGraphicFramePr>
+          <p:cNvPr id="9" name="Table 8"/>
+          <p:cNvGraphicFramePr>
+            <a:graphicFrameLocks noGrp="1"/>
+          </p:cNvGraphicFramePr>
+          <p:nvPr/>
+        </p:nvGraphicFramePr>
+        <p:xfrm>
+          <a:off x="548640" y="3017520"/>
+          <a:ext cx="11109960" cy="2651760"/>
+        </p:xfrm>
+        <a:graphic>
+          <a:graphicData uri="http://schemas.openxmlformats.org/drawingml/2006/table">
+            <a:tbl>
+              <a:tblPr firstRow="1" bandRow="1">
+                <a:tableStyleId>{5C22544A-7EE6-4342-B048-85BDC9FD1C3A}</a:tableStyleId>
+              </a:tblPr>
+              <a:tblGrid>
+                <a:gridCol w="2011680"/>
+                <a:gridCol w="9098280"/>
+              </a:tblGrid>
+              <a:tr h="441960">
+                <a:tc>
+                  <a:txBody>
+                    <a:bodyPr/>
+                    <a:lstStyle/>
+                    <a:p>
+                      <a:r>
+                        <a:rPr sz="1200" b="1">
+                          <a:solidFill>
+                            <a:srgbClr val="FFFFFF"/>
+                          </a:solidFill>
+                          <a:latin typeface="PingFang TC"/>
+                          <a:ea typeface="PingFang TC"/>
+                        </a:rPr>
+                        <a:t>面向</a:t>
+                      </a:r>
+                    </a:p>
+                  </a:txBody>
+                  <a:tcPr marT="25400" marB="25400" marL="101600" anchor="ctr">
+                    <a:solidFill>
+                      <a:srgbClr val="2563EB"/>
+                    </a:solidFill>
+                  </a:tcPr>
+                </a:tc>
+                <a:tc>
+                  <a:txBody>
+                    <a:bodyPr/>
+                    <a:lstStyle/>
+                    <a:p>
+                      <a:r>
+                        <a:rPr sz="1200" b="1">
+                          <a:solidFill>
+                            <a:srgbClr val="FFFFFF"/>
+                          </a:solidFill>
+                          <a:latin typeface="PingFang TC"/>
+                          <a:ea typeface="PingFang TC"/>
+                        </a:rPr>
+                        <a:t>內容</a:t>
+                      </a:r>
+                    </a:p>
+                  </a:txBody>
+                  <a:tcPr marT="25400" marB="25400" marL="101600" anchor="ctr">
+                    <a:solidFill>
+                      <a:srgbClr val="2563EB"/>
+                    </a:solidFill>
+                  </a:tcPr>
+                </a:tc>
+              </a:tr>
+              <a:tr h="441960">
+                <a:tc>
+                  <a:txBody>
+                    <a:bodyPr/>
+                    <a:lstStyle/>
+                    <a:p>
+                      <a:r>
+                        <a:rPr sz="1200" b="1">
+                          <a:solidFill>
+                            <a:srgbClr val="0F172A"/>
+                          </a:solidFill>
+                          <a:latin typeface="PingFang TC"/>
+                          <a:ea typeface="PingFang TC"/>
+                        </a:rPr>
+                        <a:t>告警 alarms</a:t>
+                      </a:r>
+                    </a:p>
+                  </a:txBody>
+                  <a:tcPr marT="25400" marB="25400" marL="101600" anchor="ctr">
+                    <a:solidFill>
+                      <a:srgbClr val="FFFFFF"/>
+                    </a:solidFill>
+                  </a:tcPr>
+                </a:tc>
+                <a:tc>
+                  <a:txBody>
+                    <a:bodyPr/>
+                    <a:lstStyle/>
+                    <a:p>
+                      <a:r>
+                        <a:rPr sz="1200" b="0">
+                          <a:solidFill>
+                            <a:srgbClr val="0F172A"/>
+                          </a:solidFill>
+                          <a:latin typeface="PingFang TC"/>
+                          <a:ea typeface="PingFang TC"/>
+                        </a:rPr>
+                        <a:t>ALB unhealthy/5xx/latency · RDS CPU/storage · ElastiCache · API GW 5xx · Lambda errors · CloudFront 5xx(us-east-1)</a:t>
+                      </a:r>
+                    </a:p>
+                  </a:txBody>
+                  <a:tcPr marT="25400" marB="25400" marL="101600" anchor="ctr">
+                    <a:solidFill>
+                      <a:srgbClr val="FFFFFF"/>
+                    </a:solidFill>
+                  </a:tcPr>
+                </a:tc>
+              </a:tr>
+              <a:tr h="441960">
+                <a:tc>
+                  <a:txBody>
+                    <a:bodyPr/>
+                    <a:lstStyle/>
+                    <a:p>
+                      <a:r>
+                        <a:rPr sz="1200" b="1">
+                          <a:solidFill>
+                            <a:srgbClr val="0F172A"/>
+                          </a:solidFill>
+                          <a:latin typeface="PingFang TC"/>
+                          <a:ea typeface="PingFang TC"/>
+                        </a:rPr>
+                        <a:t>通知</a:t>
+                      </a:r>
+                    </a:p>
+                  </a:txBody>
+                  <a:tcPr marT="25400" marB="25400" marL="101600" anchor="ctr">
+                    <a:solidFill>
+                      <a:srgbClr val="F1F5F9"/>
+                    </a:solidFill>
+                  </a:tcPr>
+                </a:tc>
+                <a:tc>
+                  <a:txBody>
+                    <a:bodyPr/>
+                    <a:lstStyle/>
+                    <a:p>
+                      <a:r>
+                        <a:rPr sz="1200" b="0">
+                          <a:solidFill>
+                            <a:srgbClr val="0F172A"/>
+                          </a:solidFill>
+                          <a:latin typeface="PingFang TC"/>
+                          <a:ea typeface="PingFang TC"/>
+                        </a:rPr>
+                        <a:t>CloudWatch alarm → SNS topic → email（alert_email,需點確認信）</a:t>
+                      </a:r>
+                    </a:p>
+                  </a:txBody>
+                  <a:tcPr marT="25400" marB="25400" marL="101600" anchor="ctr">
+                    <a:solidFill>
+                      <a:srgbClr val="F1F5F9"/>
+                    </a:solidFill>
+                  </a:tcPr>
+                </a:tc>
+              </a:tr>
+              <a:tr h="441960">
+                <a:tc>
+                  <a:txBody>
+                    <a:bodyPr/>
+                    <a:lstStyle/>
+                    <a:p>
+                      <a:r>
+                        <a:rPr sz="1200" b="1">
+                          <a:solidFill>
+                            <a:srgbClr val="0F172A"/>
+                          </a:solidFill>
+                          <a:latin typeface="PingFang TC"/>
+                          <a:ea typeface="PingFang TC"/>
+                        </a:rPr>
+                        <a:t>App logs</a:t>
+                      </a:r>
+                    </a:p>
+                  </a:txBody>
+                  <a:tcPr marT="25400" marB="25400" marL="101600" anchor="ctr">
+                    <a:solidFill>
+                      <a:srgbClr val="FFFFFF"/>
+                    </a:solidFill>
+                  </a:tcPr>
+                </a:tc>
+                <a:tc>
+                  <a:txBody>
+                    <a:bodyPr/>
+                    <a:lstStyle/>
+                    <a:p>
+                      <a:r>
+                        <a:rPr sz="1200" b="0">
+                          <a:solidFill>
+                            <a:srgbClr val="0F172A"/>
+                          </a:solidFill>
+                          <a:latin typeface="PingFang TC"/>
+                          <a:ea typeface="PingFang TC"/>
+                        </a:rPr>
+                        <a:t>EC2 容器 awslogs driver → CloudWatch Logs /qrcode/app（retention 14d）</a:t>
+                      </a:r>
+                    </a:p>
+                  </a:txBody>
+                  <a:tcPr marT="25400" marB="25400" marL="101600" anchor="ctr">
+                    <a:solidFill>
+                      <a:srgbClr val="FFFFFF"/>
+                    </a:solidFill>
+                  </a:tcPr>
+                </a:tc>
+              </a:tr>
+              <a:tr h="441960">
+                <a:tc>
+                  <a:txBody>
+                    <a:bodyPr/>
+                    <a:lstStyle/>
+                    <a:p>
+                      <a:r>
+                        <a:rPr sz="1200" b="1">
+                          <a:solidFill>
+                            <a:srgbClr val="0F172A"/>
+                          </a:solidFill>
+                          <a:latin typeface="PingFang TC"/>
+                          <a:ea typeface="PingFang TC"/>
+                        </a:rPr>
+                        <a:t>Dashboard</a:t>
+                      </a:r>
+                    </a:p>
+                  </a:txBody>
+                  <a:tcPr marT="25400" marB="25400" marL="101600" anchor="ctr">
+                    <a:solidFill>
+                      <a:srgbClr val="F1F5F9"/>
+                    </a:solidFill>
+                  </a:tcPr>
+                </a:tc>
+                <a:tc>
+                  <a:txBody>
+                    <a:bodyPr/>
+                    <a:lstStyle/>
+                    <a:p>
+                      <a:r>
+                        <a:rPr sz="1200" b="0">
+                          <a:solidFill>
+                            <a:srgbClr val="0F172A"/>
+                          </a:solidFill>
+                          <a:latin typeface="PingFang TC"/>
+                          <a:ea typeface="PingFang TC"/>
+                        </a:rPr>
+                        <a:t>qrcode-overview：ALB/RDS/EC2/API GW/Lambda 一頁</a:t>
+                      </a:r>
+                    </a:p>
+                  </a:txBody>
+                  <a:tcPr marT="25400" marB="25400" marL="101600" anchor="ctr">
+                    <a:solidFill>
+                      <a:srgbClr val="F1F5F9"/>
+                    </a:solidFill>
+                  </a:tcPr>
+                </a:tc>
+              </a:tr>
+              <a:tr h="441960">
+                <a:tc>
+                  <a:txBody>
+                    <a:bodyPr/>
+                    <a:lstStyle/>
+                    <a:p>
+                      <a:r>
+                        <a:rPr sz="1200" b="1">
+                          <a:solidFill>
+                            <a:srgbClr val="0F172A"/>
+                          </a:solidFill>
+                          <a:latin typeface="PingFang TC"/>
+                          <a:ea typeface="PingFang TC"/>
+                        </a:rPr>
+                        <a:t>Canary</a:t>
+                      </a:r>
+                    </a:p>
+                  </a:txBody>
+                  <a:tcPr marT="25400" marB="25400" marL="101600" anchor="ctr">
+                    <a:solidFill>
+                      <a:srgbClr val="FFFFFF"/>
+                    </a:solidFill>
+                  </a:tcPr>
+                </a:tc>
+                <a:tc>
+                  <a:txBody>
+                    <a:bodyPr/>
+                    <a:lstStyle/>
+                    <a:p>
+                      <a:r>
+                        <a:rPr sz="1200" b="0">
+                          <a:solidFill>
+                            <a:srgbClr val="0F172A"/>
+                          </a:solidFill>
+                          <a:latin typeface="PingFang TC"/>
+                          <a:ea typeface="PingFang TC"/>
+                        </a:rPr>
+                        <a:t>syn-nodejs-puppeteer 每 5 分探測 CloudFront /health → 失敗即 alarm</a:t>
+                      </a:r>
+                    </a:p>
+                  </a:txBody>
+                  <a:tcPr marT="25400" marB="25400" marL="101600" anchor="ctr">
+                    <a:solidFill>
+                      <a:srgbClr val="FFFFFF"/>
+                    </a:solidFill>
+                  </a:tcPr>
+                </a:tc>
+              </a:tr>
+            </a:tbl>
+          </a:graphicData>
+        </a:graphic>
+      </p:graphicFrame>
+      <p:sp>
+        <p:nvSpPr>
+          <p:cNvPr id="10" name="TextBox 9"/>
           <p:cNvSpPr txBox="1"/>
           <p:nvPr/>
         </p:nvSpPr>
         <p:spPr>
           <a:xfrm>
-            <a:off x="548640" y="4023360"/>
-            <a:ext cx="11247120" cy="2194560"/>
+            <a:off x="548640" y="5852160"/>
+            <a:ext cx="11247120" cy="731520"/>
           </a:xfrm>
           <a:prstGeom prst="rect">
             <a:avLst/>
@@ -20485,52 +20553,18 @@
           <a:p>
             <a:pPr>
               <a:spcAft>
-                <a:spcPts val="900"/>
+                <a:spcPts val="400"/>
               </a:spcAft>
             </a:pPr>
             <a:r>
-              <a:rPr sz="1400" b="0">
+              <a:rPr sz="1200" b="0">
                 <a:solidFill>
                   <a:srgbClr val="0F172A"/>
                 </a:solidFill>
                 <a:latin typeface="PingFang TC"/>
                 <a:ea typeface="PingFang TC"/>
               </a:rPr>
-              <a:t>•  EC2 deploy-app.sh:從 SSM 撈設定 → ECR login → docker pull → docker run(換新容器)</a:t>
-            </a:r>
-          </a:p>
-          <a:p>
-            <a:pPr>
-              <a:spcAft>
-                <a:spcPts val="900"/>
-              </a:spcAft>
-            </a:pPr>
-            <a:r>
-              <a:rPr sz="1400" b="0">
-                <a:solidFill>
-                  <a:srgbClr val="0F172A"/>
-                </a:solidFill>
-                <a:latin typeface="PingFang TC"/>
-                <a:ea typeface="PingFang TC"/>
-              </a:rPr>
-              <a:t>•  全 env-gated:本機無這些環境變數 → 維持 SQLite + 記憶體 cache + 即時生圖,不受影響</a:t>
-            </a:r>
-          </a:p>
-          <a:p>
-            <a:pPr>
-              <a:spcAft>
-                <a:spcPts val="900"/>
-              </a:spcAft>
-            </a:pPr>
-            <a:r>
-              <a:rPr sz="1400" b="0">
-                <a:solidFill>
-                  <a:srgbClr val="0F172A"/>
-                </a:solidFill>
-                <a:latin typeface="PingFang TC"/>
-                <a:ea typeface="PingFang TC"/>
-              </a:rPr>
-              <a:t>•  部署踩到的兩個坑:① EC2 role 少 s3:PutObject(500)② CI build amd64 但 EC2 arm64(502)→ buildx 跨平台修正</a:t>
+              <a:t>•  解決『服務掛了沒人知道』;canary 是端到端外部探測(連 CloudFront/整鏈路掛掉都測得到)。純 infra,已 validate/plan 通過(未 apply)。</a:t>
             </a:r>
           </a:p>
         </p:txBody>
@@ -20562,13 +20596,13 @@
         <p:spPr>
           <a:xfrm>
             <a:off x="0" y="0"/>
-            <a:ext cx="12191695" cy="6858000"/>
+            <a:ext cx="164592" cy="6858000"/>
           </a:xfrm>
           <a:prstGeom prst="rect">
             <a:avLst/>
           </a:prstGeom>
           <a:solidFill>
-            <a:srgbClr val="0F172A"/>
+            <a:srgbClr val="2563EB"/>
           </a:solidFill>
           <a:ln>
             <a:noFill/>
@@ -20605,8 +20639,8 @@
         </p:nvSpPr>
         <p:spPr>
           <a:xfrm>
-            <a:off x="822960" y="1097280"/>
-            <a:ext cx="10515600" cy="1097280"/>
+            <a:off x="502920" y="320040"/>
+            <a:ext cx="10972800" cy="1005840"/>
           </a:xfrm>
           <a:prstGeom prst="rect">
             <a:avLst/>
@@ -20618,6 +20652,23 @@
             <a:spAutoFit/>
           </a:bodyPr>
           <a:lstStyle/>
+          <a:p>
+            <a:pPr algn="l">
+              <a:spcAft>
+                <a:spcPts val="200"/>
+              </a:spcAft>
+            </a:pPr>
+            <a:r>
+              <a:rPr sz="1300" b="1">
+                <a:solidFill>
+                  <a:srgbClr val="2563EB"/>
+                </a:solidFill>
+                <a:latin typeface="PingFang TC"/>
+                <a:ea typeface="PingFang TC"/>
+              </a:rPr>
+              <a:t>可靠性 · ERROR HANDLING</a:t>
+            </a:r>
+          </a:p>
           <a:p>
             <a:pPr algn="l">
               <a:spcAft>
@@ -20625,45 +20676,294 @@
               </a:spcAft>
             </a:pPr>
             <a:r>
-              <a:rPr sz="1600" b="1">
-                <a:solidFill>
-                  <a:srgbClr val="2563EB"/>
-                </a:solidFill>
-                <a:latin typeface="PingFang TC"/>
-                <a:ea typeface="PingFang TC"/>
-              </a:rPr>
-              <a:t>原型狀態</a:t>
-            </a:r>
-          </a:p>
-          <a:p>
-            <a:pPr algn="l">
-              <a:spcAft>
-                <a:spcPts val="400"/>
-              </a:spcAft>
-            </a:pPr>
-            <a:r>
               <a:rPr sz="3000" b="1">
                 <a:solidFill>
-                  <a:srgbClr val="FFFFFF"/>
-                </a:solidFill>
-                <a:latin typeface="PingFang TC"/>
-                <a:ea typeface="PingFang TC"/>
-              </a:rPr>
-              <a:t>可跑的 FastAPI 實作 + 管理頁前端</a:t>
-            </a:r>
-          </a:p>
-        </p:txBody>
-      </p:sp>
-      <p:sp>
-        <p:nvSpPr>
-          <p:cNvPr id="4" name="TextBox 3"/>
+                  <a:srgbClr val="0F172A"/>
+                </a:solidFill>
+                <a:latin typeface="PingFang TC"/>
+                <a:ea typeface="PingFang TC"/>
+              </a:rPr>
+              <a:t>壞輸入/依賴故障都優雅回應、不洩漏、可追蹤</a:t>
+            </a:r>
+          </a:p>
+        </p:txBody>
+      </p:sp>
+      <p:graphicFrame>
+        <p:nvGraphicFramePr>
+          <p:cNvPr id="4" name="Table 3"/>
+          <p:cNvGraphicFramePr>
+            <a:graphicFrameLocks noGrp="1"/>
+          </p:cNvGraphicFramePr>
+          <p:nvPr/>
+        </p:nvGraphicFramePr>
+        <p:xfrm>
+          <a:off x="548640" y="1828800"/>
+          <a:ext cx="11109960" cy="2468880"/>
+        </p:xfrm>
+        <a:graphic>
+          <a:graphicData uri="http://schemas.openxmlformats.org/drawingml/2006/table">
+            <a:tbl>
+              <a:tblPr firstRow="1" bandRow="1">
+                <a:tableStyleId>{5C22544A-7EE6-4342-B048-85BDC9FD1C3A}</a:tableStyleId>
+              </a:tblPr>
+              <a:tblGrid>
+                <a:gridCol w="2194560"/>
+                <a:gridCol w="8915400"/>
+              </a:tblGrid>
+              <a:tr h="493776">
+                <a:tc>
+                  <a:txBody>
+                    <a:bodyPr/>
+                    <a:lstStyle/>
+                    <a:p>
+                      <a:r>
+                        <a:rPr sz="1200" b="1">
+                          <a:solidFill>
+                            <a:srgbClr val="FFFFFF"/>
+                          </a:solidFill>
+                          <a:latin typeface="PingFang TC"/>
+                          <a:ea typeface="PingFang TC"/>
+                        </a:rPr>
+                        <a:t>面向</a:t>
+                      </a:r>
+                    </a:p>
+                  </a:txBody>
+                  <a:tcPr marT="25400" marB="25400" marL="101600" anchor="ctr">
+                    <a:solidFill>
+                      <a:srgbClr val="2563EB"/>
+                    </a:solidFill>
+                  </a:tcPr>
+                </a:tc>
+                <a:tc>
+                  <a:txBody>
+                    <a:bodyPr/>
+                    <a:lstStyle/>
+                    <a:p>
+                      <a:r>
+                        <a:rPr sz="1200" b="1">
+                          <a:solidFill>
+                            <a:srgbClr val="FFFFFF"/>
+                          </a:solidFill>
+                          <a:latin typeface="PingFang TC"/>
+                          <a:ea typeface="PingFang TC"/>
+                        </a:rPr>
+                        <a:t>做法</a:t>
+                      </a:r>
+                    </a:p>
+                  </a:txBody>
+                  <a:tcPr marT="25400" marB="25400" marL="101600" anchor="ctr">
+                    <a:solidFill>
+                      <a:srgbClr val="2563EB"/>
+                    </a:solidFill>
+                  </a:tcPr>
+                </a:tc>
+              </a:tr>
+              <a:tr h="493776">
+                <a:tc>
+                  <a:txBody>
+                    <a:bodyPr/>
+                    <a:lstStyle/>
+                    <a:p>
+                      <a:r>
+                        <a:rPr sz="1200" b="1">
+                          <a:solidFill>
+                            <a:srgbClr val="0F172A"/>
+                          </a:solidFill>
+                          <a:latin typeface="PingFang TC"/>
+                          <a:ea typeface="PingFang TC"/>
+                        </a:rPr>
+                        <a:t>全域處理器</a:t>
+                      </a:r>
+                    </a:p>
+                  </a:txBody>
+                  <a:tcPr marT="25400" marB="25400" marL="101600" anchor="ctr">
+                    <a:solidFill>
+                      <a:srgbClr val="FFFFFF"/>
+                    </a:solidFill>
+                  </a:tcPr>
+                </a:tc>
+                <a:tc>
+                  <a:txBody>
+                    <a:bodyPr/>
+                    <a:lstStyle/>
+                    <a:p>
+                      <a:r>
+                        <a:rPr sz="1200" b="0">
+                          <a:solidFill>
+                            <a:srgbClr val="0F172A"/>
+                          </a:solidFill>
+                          <a:latin typeface="PingFang TC"/>
+                          <a:ea typeface="PingFang TC"/>
+                        </a:rPr>
+                        <a:t>未捕捉例外 → 500 不洩漏 + 記 traceback;422 驗證轉可讀字串(沿用 {detail})</a:t>
+                      </a:r>
+                    </a:p>
+                  </a:txBody>
+                  <a:tcPr marT="25400" marB="25400" marL="101600" anchor="ctr">
+                    <a:solidFill>
+                      <a:srgbClr val="FFFFFF"/>
+                    </a:solidFill>
+                  </a:tcPr>
+                </a:tc>
+              </a:tr>
+              <a:tr h="493776">
+                <a:tc>
+                  <a:txBody>
+                    <a:bodyPr/>
+                    <a:lstStyle/>
+                    <a:p>
+                      <a:r>
+                        <a:rPr sz="1200" b="1">
+                          <a:solidFill>
+                            <a:srgbClr val="0F172A"/>
+                          </a:solidFill>
+                          <a:latin typeface="PingFang TC"/>
+                          <a:ea typeface="PingFang TC"/>
+                        </a:rPr>
+                        <a:t>依賴降級</a:t>
+                      </a:r>
+                    </a:p>
+                  </a:txBody>
+                  <a:tcPr marT="25400" marB="25400" marL="101600" anchor="ctr">
+                    <a:solidFill>
+                      <a:srgbClr val="F1F5F9"/>
+                    </a:solidFill>
+                  </a:tcPr>
+                </a:tc>
+                <a:tc>
+                  <a:txBody>
+                    <a:bodyPr/>
+                    <a:lstStyle/>
+                    <a:p>
+                      <a:r>
+                        <a:rPr sz="1200" b="0">
+                          <a:solidFill>
+                            <a:srgbClr val="0F172A"/>
+                          </a:solidFill>
+                          <a:latin typeface="PingFang TC"/>
+                          <a:ea typeface="PingFang TC"/>
+                        </a:rPr>
+                        <a:t>Redis 故障 → redirect 走 DB(不 500);S3 失敗 → create fallback /image</a:t>
+                      </a:r>
+                    </a:p>
+                  </a:txBody>
+                  <a:tcPr marT="25400" marB="25400" marL="101600" anchor="ctr">
+                    <a:solidFill>
+                      <a:srgbClr val="F1F5F9"/>
+                    </a:solidFill>
+                  </a:tcPr>
+                </a:tc>
+              </a:tr>
+              <a:tr h="493776">
+                <a:tc>
+                  <a:txBody>
+                    <a:bodyPr/>
+                    <a:lstStyle/>
+                    <a:p>
+                      <a:r>
+                        <a:rPr sz="1200" b="1">
+                          <a:solidFill>
+                            <a:srgbClr val="0F172A"/>
+                          </a:solidFill>
+                          <a:latin typeface="PingFang TC"/>
+                          <a:ea typeface="PingFang TC"/>
+                        </a:rPr>
+                        <a:t>Request ID</a:t>
+                      </a:r>
+                    </a:p>
+                  </a:txBody>
+                  <a:tcPr marT="25400" marB="25400" marL="101600" anchor="ctr">
+                    <a:solidFill>
+                      <a:srgbClr val="FFFFFF"/>
+                    </a:solidFill>
+                  </a:tcPr>
+                </a:tc>
+                <a:tc>
+                  <a:txBody>
+                    <a:bodyPr/>
+                    <a:lstStyle/>
+                    <a:p>
+                      <a:r>
+                        <a:rPr sz="1200" b="0">
+                          <a:solidFill>
+                            <a:srgbClr val="0F172A"/>
+                          </a:solidFill>
+                          <a:latin typeface="PingFang TC"/>
+                          <a:ea typeface="PingFang TC"/>
+                        </a:rPr>
+                        <a:t>所有回應帶 X-Request-ID + 進日誌/錯誤 body(對應 CloudWatch Logs)</a:t>
+                      </a:r>
+                    </a:p>
+                  </a:txBody>
+                  <a:tcPr marT="25400" marB="25400" marL="101600" anchor="ctr">
+                    <a:solidFill>
+                      <a:srgbClr val="FFFFFF"/>
+                    </a:solidFill>
+                  </a:tcPr>
+                </a:tc>
+              </a:tr>
+              <a:tr h="493776">
+                <a:tc>
+                  <a:txBody>
+                    <a:bodyPr/>
+                    <a:lstStyle/>
+                    <a:p>
+                      <a:r>
+                        <a:rPr sz="1200" b="1">
+                          <a:solidFill>
+                            <a:srgbClr val="0F172A"/>
+                          </a:solidFill>
+                          <a:latin typeface="PingFang TC"/>
+                          <a:ea typeface="PingFang TC"/>
+                        </a:rPr>
+                        <a:t>輸入健全化</a:t>
+                      </a:r>
+                    </a:p>
+                  </a:txBody>
+                  <a:tcPr marT="25400" marB="25400" marL="101600" anchor="ctr">
+                    <a:solidFill>
+                      <a:srgbClr val="F1F5F9"/>
+                    </a:solidFill>
+                  </a:tcPr>
+                </a:tc>
+                <a:tc>
+                  <a:txBody>
+                    <a:bodyPr/>
+                    <a:lstStyle/>
+                    <a:p>
+                      <a:r>
+                        <a:rPr sz="1200" b="0">
+                          <a:solidFill>
+                            <a:srgbClr val="0F172A"/>
+                          </a:solidFill>
+                          <a:latin typeface="PingFang TC"/>
+                          <a:ea typeface="PingFang TC"/>
+                        </a:rPr>
+                        <a:t>body &gt; 64KB → 413;malformed JSON → 422;URL 長度 2048</a:t>
+                      </a:r>
+                    </a:p>
+                  </a:txBody>
+                  <a:tcPr marT="25400" marB="25400" marL="101600" anchor="ctr">
+                    <a:solidFill>
+                      <a:srgbClr val="F1F5F9"/>
+                    </a:solidFill>
+                  </a:tcPr>
+                </a:tc>
+              </a:tr>
+            </a:tbl>
+          </a:graphicData>
+        </a:graphic>
+      </p:graphicFrame>
+      <p:sp>
+        <p:nvSpPr>
+          <p:cNvPr id="5" name="TextBox 4"/>
           <p:cNvSpPr txBox="1"/>
           <p:nvPr/>
         </p:nvSpPr>
         <p:spPr>
           <a:xfrm>
-            <a:off x="822960" y="2743200"/>
-            <a:ext cx="10515600" cy="2743200"/>
+            <a:off x="548640" y="4480560"/>
+            <a:ext cx="11247120" cy="1828800"/>
           </a:xfrm>
           <a:prstGeom prst="rect">
             <a:avLst/>
@@ -20678,69 +20978,52 @@
           <a:p>
             <a:pPr>
               <a:spcAft>
-                <a:spcPts val="1200"/>
+                <a:spcPts val="800"/>
               </a:spcAft>
             </a:pPr>
             <a:r>
-              <a:rPr sz="1600" b="0">
-                <a:solidFill>
-                  <a:srgbClr val="E2E8F0"/>
-                </a:solidFill>
-                <a:latin typeface="PingFang TC"/>
-                <a:ea typeface="PingFang TC"/>
-              </a:rPr>
-              <a:t>✓  7 個 API 端點 + 管理頁前端（建立/清單/編輯/刪除/分析）</a:t>
+              <a:rPr sz="1300" b="0">
+                <a:solidFill>
+                  <a:srgbClr val="0F172A"/>
+                </a:solidFill>
+                <a:latin typeface="PingFang TC"/>
+                <a:ea typeface="PingFang TC"/>
+              </a:rPr>
+              <a:t>•  錯誤格式沿用 {"detail"} → 相容前端;500 只回通用訊息 + request_id,traceback 僅進日誌</a:t>
             </a:r>
           </a:p>
           <a:p>
             <a:pPr>
               <a:spcAft>
-                <a:spcPts val="1200"/>
+                <a:spcPts val="800"/>
               </a:spcAft>
             </a:pPr>
             <a:r>
-              <a:rPr sz="1600" b="0">
-                <a:solidFill>
-                  <a:srgbClr val="E2E8F0"/>
-                </a:solidFill>
-                <a:latin typeface="PingFang TC"/>
-                <a:ea typeface="PingFang TC"/>
-              </a:rPr>
-              <a:t>✓  全部 curl 驗證通過：302 / 404 / 410 / 8 碼 token / 正規化 / SSRF / 過期</a:t>
+              <a:rPr sz="1300" b="0">
+                <a:solidFill>
+                  <a:srgbClr val="0F172A"/>
+                </a:solidFill>
+                <a:latin typeface="PingFang TC"/>
+                <a:ea typeface="PingFang TC"/>
+              </a:rPr>
+              <a:t>•  依賴降級讓「Redis/S3 掛掉」不再連帶整個請求 500;分析寫入失敗也只記 log</a:t>
             </a:r>
           </a:p>
           <a:p>
             <a:pPr>
               <a:spcAft>
-                <a:spcPts val="1200"/>
+                <a:spcPts val="800"/>
               </a:spcAft>
             </a:pPr>
             <a:r>
-              <a:rPr sz="1600" b="0">
-                <a:solidFill>
-                  <a:srgbClr val="E2E8F0"/>
-                </a:solidFill>
-                <a:latin typeface="PingFang TC"/>
-                <a:ea typeface="PingFang TC"/>
-              </a:rPr>
-              <a:t>✓  production 替換點已在程式註解標明（Redis / 佇列 / CDN / 預聚合 / PostgreSQL）</a:t>
-            </a:r>
-          </a:p>
-          <a:p>
-            <a:pPr>
-              <a:spcAft>
-                <a:spcPts val="1200"/>
-              </a:spcAft>
-            </a:pPr>
-            <a:r>
-              <a:rPr sz="1600" b="0">
-                <a:solidFill>
-                  <a:srgbClr val="E2E8F0"/>
-                </a:solidFill>
-                <a:latin typeface="PingFang TC"/>
-                <a:ea typeface="PingFang TC"/>
-              </a:rPr>
-              <a:t>✓  設計依據：DESIGN.md（16 題決策 + 優劣分析）</a:t>
+              <a:rPr sz="1300" b="0">
+                <a:solidFill>
+                  <a:srgbClr val="0F172A"/>
+                </a:solidFill>
+                <a:latin typeface="PingFang TC"/>
+                <a:ea typeface="PingFang TC"/>
+              </a:rPr>
+              <a:t>•  本機驗證:422/413/500(含 X-Request-ID)+ REDIS_URL 不可達時 redirect 仍 302。純 app,不動 infra</a:t>
             </a:r>
           </a:p>
         </p:txBody>
@@ -20842,6 +21125,1186 @@
                 <a:latin typeface="PingFang TC"/>
                 <a:ea typeface="PingFang TC"/>
               </a:rPr>
+              <a:t>部署 · CI/CD</a:t>
+            </a:r>
+          </a:p>
+          <a:p>
+            <a:pPr algn="l">
+              <a:spcAft>
+                <a:spcPts val="400"/>
+              </a:spcAft>
+            </a:pPr>
+            <a:r>
+              <a:rPr sz="3000" b="1">
+                <a:solidFill>
+                  <a:srgbClr val="0F172A"/>
+                </a:solidFill>
+                <a:latin typeface="PingFang TC"/>
+                <a:ea typeface="PingFang TC"/>
+              </a:rPr>
+              <a:t>CI/CD 流程（GitHub Actions + OIDC）</a:t>
+            </a:r>
+          </a:p>
+        </p:txBody>
+      </p:sp>
+      <p:sp>
+        <p:nvSpPr>
+          <p:cNvPr id="4" name="Rounded Rectangle 3"/>
+          <p:cNvSpPr/>
+          <p:nvPr/>
+        </p:nvSpPr>
+        <p:spPr>
+          <a:xfrm>
+            <a:off x="457200" y="2286000"/>
+            <a:ext cx="1481328" cy="1280160"/>
+          </a:xfrm>
+          <a:prstGeom prst="roundRect">
+            <a:avLst/>
+          </a:prstGeom>
+          <a:solidFill>
+            <a:srgbClr val="64748B"/>
+          </a:solidFill>
+          <a:ln>
+            <a:solidFill>
+              <a:srgbClr val="64748B"/>
+            </a:solidFill>
+          </a:ln>
+          <a:effectLst/>
+        </p:spPr>
+        <p:style>
+          <a:lnRef idx="1">
+            <a:schemeClr val="accent1"/>
+          </a:lnRef>
+          <a:fillRef idx="3">
+            <a:schemeClr val="accent1"/>
+          </a:fillRef>
+          <a:effectRef idx="2">
+            <a:schemeClr val="accent1"/>
+          </a:effectRef>
+          <a:fontRef idx="minor">
+            <a:schemeClr val="lt1"/>
+          </a:fontRef>
+        </p:style>
+        <p:txBody>
+          <a:bodyPr rtlCol="0" anchor="ctr" wrap="square" tIns="25400" bIns="25400"/>
+          <a:lstStyle/>
+          <a:p>
+            <a:pPr algn="ctr"/>
+            <a:r>
+              <a:rPr sz="1100" b="1">
+                <a:solidFill>
+                  <a:srgbClr val="FFFFFF"/>
+                </a:solidFill>
+                <a:latin typeface="PingFang TC"/>
+                <a:ea typeface="PingFang TC"/>
+              </a:rPr>
+              <a:t>git push</a:t>
+            </a:r>
+          </a:p>
+          <a:p>
+            <a:pPr algn="ctr"/>
+            <a:r>
+              <a:rPr sz="1100" b="0">
+                <a:solidFill>
+                  <a:srgbClr val="FFFFFF"/>
+                </a:solidFill>
+                <a:latin typeface="PingFang TC"/>
+                <a:ea typeface="PingFang TC"/>
+              </a:rPr>
+              <a:t>QR Code Generator/**</a:t>
+            </a:r>
+          </a:p>
+        </p:txBody>
+      </p:sp>
+      <p:cxnSp>
+        <p:nvCxnSpPr>
+          <p:cNvPr id="5" name="Connector 4"/>
+          <p:cNvCxnSpPr/>
+          <p:nvPr/>
+        </p:nvCxnSpPr>
+        <p:spPr>
+          <a:xfrm>
+            <a:off x="1938528" y="2926080"/>
+            <a:ext cx="118872" cy="0"/>
+          </a:xfrm>
+          <a:prstGeom prst="line">
+            <a:avLst/>
+          </a:prstGeom>
+          <a:ln w="22225">
+            <a:solidFill>
+              <a:srgbClr val="64748B"/>
+            </a:solidFill>
+            <a:tailEnd type="triangle" w="med" len="med"/>
+          </a:ln>
+        </p:spPr>
+        <p:style>
+          <a:lnRef idx="2">
+            <a:schemeClr val="accent1"/>
+          </a:lnRef>
+          <a:fillRef idx="0">
+            <a:schemeClr val="accent1"/>
+          </a:fillRef>
+          <a:effectRef idx="1">
+            <a:schemeClr val="accent1"/>
+          </a:effectRef>
+          <a:fontRef idx="minor">
+            <a:schemeClr val="tx1"/>
+          </a:fontRef>
+        </p:style>
+      </p:cxnSp>
+      <p:sp>
+        <p:nvSpPr>
+          <p:cNvPr id="6" name="Rounded Rectangle 5"/>
+          <p:cNvSpPr/>
+          <p:nvPr/>
+        </p:nvSpPr>
+        <p:spPr>
+          <a:xfrm>
+            <a:off x="2057400" y="2286000"/>
+            <a:ext cx="1481328" cy="1280160"/>
+          </a:xfrm>
+          <a:prstGeom prst="roundRect">
+            <a:avLst/>
+          </a:prstGeom>
+          <a:solidFill>
+            <a:srgbClr val="0EA5E9"/>
+          </a:solidFill>
+          <a:ln>
+            <a:solidFill>
+              <a:srgbClr val="0EA5E9"/>
+            </a:solidFill>
+          </a:ln>
+          <a:effectLst/>
+        </p:spPr>
+        <p:style>
+          <a:lnRef idx="1">
+            <a:schemeClr val="accent1"/>
+          </a:lnRef>
+          <a:fillRef idx="3">
+            <a:schemeClr val="accent1"/>
+          </a:fillRef>
+          <a:effectRef idx="2">
+            <a:schemeClr val="accent1"/>
+          </a:effectRef>
+          <a:fontRef idx="minor">
+            <a:schemeClr val="lt1"/>
+          </a:fontRef>
+        </p:style>
+        <p:txBody>
+          <a:bodyPr rtlCol="0" anchor="ctr" wrap="square" tIns="25400" bIns="25400"/>
+          <a:lstStyle/>
+          <a:p>
+            <a:pPr algn="ctr"/>
+            <a:r>
+              <a:rPr sz="1100" b="1">
+                <a:solidFill>
+                  <a:srgbClr val="FFFFFF"/>
+                </a:solidFill>
+                <a:latin typeface="PingFang TC"/>
+                <a:ea typeface="PingFang TC"/>
+              </a:rPr>
+              <a:t>GitHub Actions</a:t>
+            </a:r>
+          </a:p>
+          <a:p>
+            <a:pPr algn="ctr"/>
+            <a:r>
+              <a:rPr sz="1100" b="0">
+                <a:solidFill>
+                  <a:srgbClr val="FFFFFF"/>
+                </a:solidFill>
+                <a:latin typeface="PingFang TC"/>
+                <a:ea typeface="PingFang TC"/>
+              </a:rPr>
+              <a:t>OIDC assume role</a:t>
+            </a:r>
+          </a:p>
+          <a:p>
+            <a:pPr algn="ctr"/>
+            <a:r>
+              <a:rPr sz="1100" b="0">
+                <a:solidFill>
+                  <a:srgbClr val="FFFFFF"/>
+                </a:solidFill>
+                <a:latin typeface="PingFang TC"/>
+                <a:ea typeface="PingFang TC"/>
+              </a:rPr>
+              <a:t>(無長期金鑰)</a:t>
+            </a:r>
+          </a:p>
+        </p:txBody>
+      </p:sp>
+      <p:cxnSp>
+        <p:nvCxnSpPr>
+          <p:cNvPr id="7" name="Connector 6"/>
+          <p:cNvCxnSpPr/>
+          <p:nvPr/>
+        </p:nvCxnSpPr>
+        <p:spPr>
+          <a:xfrm>
+            <a:off x="3538728" y="2926080"/>
+            <a:ext cx="118872" cy="0"/>
+          </a:xfrm>
+          <a:prstGeom prst="line">
+            <a:avLst/>
+          </a:prstGeom>
+          <a:ln w="22225">
+            <a:solidFill>
+              <a:srgbClr val="64748B"/>
+            </a:solidFill>
+            <a:tailEnd type="triangle" w="med" len="med"/>
+          </a:ln>
+        </p:spPr>
+        <p:style>
+          <a:lnRef idx="2">
+            <a:schemeClr val="accent1"/>
+          </a:lnRef>
+          <a:fillRef idx="0">
+            <a:schemeClr val="accent1"/>
+          </a:fillRef>
+          <a:effectRef idx="1">
+            <a:schemeClr val="accent1"/>
+          </a:effectRef>
+          <a:fontRef idx="minor">
+            <a:schemeClr val="tx1"/>
+          </a:fontRef>
+        </p:style>
+      </p:cxnSp>
+      <p:sp>
+        <p:nvSpPr>
+          <p:cNvPr id="8" name="Rounded Rectangle 7"/>
+          <p:cNvSpPr/>
+          <p:nvPr/>
+        </p:nvSpPr>
+        <p:spPr>
+          <a:xfrm>
+            <a:off x="3657600" y="2286000"/>
+            <a:ext cx="1481328" cy="1280160"/>
+          </a:xfrm>
+          <a:prstGeom prst="roundRect">
+            <a:avLst/>
+          </a:prstGeom>
+          <a:solidFill>
+            <a:srgbClr val="2563EB"/>
+          </a:solidFill>
+          <a:ln>
+            <a:solidFill>
+              <a:srgbClr val="2563EB"/>
+            </a:solidFill>
+          </a:ln>
+          <a:effectLst/>
+        </p:spPr>
+        <p:style>
+          <a:lnRef idx="1">
+            <a:schemeClr val="accent1"/>
+          </a:lnRef>
+          <a:fillRef idx="3">
+            <a:schemeClr val="accent1"/>
+          </a:fillRef>
+          <a:effectRef idx="2">
+            <a:schemeClr val="accent1"/>
+          </a:effectRef>
+          <a:fontRef idx="minor">
+            <a:schemeClr val="lt1"/>
+          </a:fontRef>
+        </p:style>
+        <p:txBody>
+          <a:bodyPr rtlCol="0" anchor="ctr" wrap="square" tIns="25400" bIns="25400"/>
+          <a:lstStyle/>
+          <a:p>
+            <a:pPr algn="ctr"/>
+            <a:r>
+              <a:rPr sz="1100" b="1">
+                <a:solidFill>
+                  <a:srgbClr val="FFFFFF"/>
+                </a:solidFill>
+                <a:latin typeface="PingFang TC"/>
+                <a:ea typeface="PingFang TC"/>
+              </a:rPr>
+              <a:t>buildx</a:t>
+            </a:r>
+          </a:p>
+          <a:p>
+            <a:pPr algn="ctr"/>
+            <a:r>
+              <a:rPr sz="1100" b="0">
+                <a:solidFill>
+                  <a:srgbClr val="FFFFFF"/>
+                </a:solidFill>
+                <a:latin typeface="PingFang TC"/>
+                <a:ea typeface="PingFang TC"/>
+              </a:rPr>
+              <a:t>--platform</a:t>
+            </a:r>
+          </a:p>
+          <a:p>
+            <a:pPr algn="ctr"/>
+            <a:r>
+              <a:rPr sz="1100" b="0">
+                <a:solidFill>
+                  <a:srgbClr val="FFFFFF"/>
+                </a:solidFill>
+                <a:latin typeface="PingFang TC"/>
+                <a:ea typeface="PingFang TC"/>
+              </a:rPr>
+              <a:t>linux/arm64</a:t>
+            </a:r>
+          </a:p>
+        </p:txBody>
+      </p:sp>
+      <p:cxnSp>
+        <p:nvCxnSpPr>
+          <p:cNvPr id="9" name="Connector 8"/>
+          <p:cNvCxnSpPr/>
+          <p:nvPr/>
+        </p:nvCxnSpPr>
+        <p:spPr>
+          <a:xfrm>
+            <a:off x="5138928" y="2926080"/>
+            <a:ext cx="118872" cy="0"/>
+          </a:xfrm>
+          <a:prstGeom prst="line">
+            <a:avLst/>
+          </a:prstGeom>
+          <a:ln w="22225">
+            <a:solidFill>
+              <a:srgbClr val="64748B"/>
+            </a:solidFill>
+            <a:tailEnd type="triangle" w="med" len="med"/>
+          </a:ln>
+        </p:spPr>
+        <p:style>
+          <a:lnRef idx="2">
+            <a:schemeClr val="accent1"/>
+          </a:lnRef>
+          <a:fillRef idx="0">
+            <a:schemeClr val="accent1"/>
+          </a:fillRef>
+          <a:effectRef idx="1">
+            <a:schemeClr val="accent1"/>
+          </a:effectRef>
+          <a:fontRef idx="minor">
+            <a:schemeClr val="tx1"/>
+          </a:fontRef>
+        </p:style>
+      </p:cxnSp>
+      <p:sp>
+        <p:nvSpPr>
+          <p:cNvPr id="10" name="Rounded Rectangle 9"/>
+          <p:cNvSpPr/>
+          <p:nvPr/>
+        </p:nvSpPr>
+        <p:spPr>
+          <a:xfrm>
+            <a:off x="5257800" y="2286000"/>
+            <a:ext cx="1481328" cy="1280160"/>
+          </a:xfrm>
+          <a:prstGeom prst="roundRect">
+            <a:avLst/>
+          </a:prstGeom>
+          <a:solidFill>
+            <a:srgbClr val="059669"/>
+          </a:solidFill>
+          <a:ln>
+            <a:solidFill>
+              <a:srgbClr val="059669"/>
+            </a:solidFill>
+          </a:ln>
+          <a:effectLst/>
+        </p:spPr>
+        <p:style>
+          <a:lnRef idx="1">
+            <a:schemeClr val="accent1"/>
+          </a:lnRef>
+          <a:fillRef idx="3">
+            <a:schemeClr val="accent1"/>
+          </a:fillRef>
+          <a:effectRef idx="2">
+            <a:schemeClr val="accent1"/>
+          </a:effectRef>
+          <a:fontRef idx="minor">
+            <a:schemeClr val="lt1"/>
+          </a:fontRef>
+        </p:style>
+        <p:txBody>
+          <a:bodyPr rtlCol="0" anchor="ctr" wrap="square" tIns="25400" bIns="25400"/>
+          <a:lstStyle/>
+          <a:p>
+            <a:pPr algn="ctr"/>
+            <a:r>
+              <a:rPr sz="1100" b="1">
+                <a:solidFill>
+                  <a:srgbClr val="FFFFFF"/>
+                </a:solidFill>
+                <a:latin typeface="PingFang TC"/>
+                <a:ea typeface="PingFang TC"/>
+              </a:rPr>
+              <a:t>ECR push</a:t>
+            </a:r>
+          </a:p>
+          <a:p>
+            <a:pPr algn="ctr"/>
+            <a:r>
+              <a:rPr sz="1100" b="0">
+                <a:solidFill>
+                  <a:srgbClr val="FFFFFF"/>
+                </a:solidFill>
+                <a:latin typeface="PingFang TC"/>
+                <a:ea typeface="PingFang TC"/>
+              </a:rPr>
+              <a:t>tag = SHA</a:t>
+            </a:r>
+          </a:p>
+          <a:p>
+            <a:pPr algn="ctr"/>
+            <a:r>
+              <a:rPr sz="1100" b="0">
+                <a:solidFill>
+                  <a:srgbClr val="FFFFFF"/>
+                </a:solidFill>
+                <a:latin typeface="PingFang TC"/>
+                <a:ea typeface="PingFang TC"/>
+              </a:rPr>
+              <a:t>+ latest</a:t>
+            </a:r>
+          </a:p>
+        </p:txBody>
+      </p:sp>
+      <p:cxnSp>
+        <p:nvCxnSpPr>
+          <p:cNvPr id="11" name="Connector 10"/>
+          <p:cNvCxnSpPr/>
+          <p:nvPr/>
+        </p:nvCxnSpPr>
+        <p:spPr>
+          <a:xfrm>
+            <a:off x="6739128" y="2926080"/>
+            <a:ext cx="118872" cy="0"/>
+          </a:xfrm>
+          <a:prstGeom prst="line">
+            <a:avLst/>
+          </a:prstGeom>
+          <a:ln w="22225">
+            <a:solidFill>
+              <a:srgbClr val="64748B"/>
+            </a:solidFill>
+            <a:tailEnd type="triangle" w="med" len="med"/>
+          </a:ln>
+        </p:spPr>
+        <p:style>
+          <a:lnRef idx="2">
+            <a:schemeClr val="accent1"/>
+          </a:lnRef>
+          <a:fillRef idx="0">
+            <a:schemeClr val="accent1"/>
+          </a:fillRef>
+          <a:effectRef idx="1">
+            <a:schemeClr val="accent1"/>
+          </a:effectRef>
+          <a:fontRef idx="minor">
+            <a:schemeClr val="tx1"/>
+          </a:fontRef>
+        </p:style>
+      </p:cxnSp>
+      <p:sp>
+        <p:nvSpPr>
+          <p:cNvPr id="12" name="Rounded Rectangle 11"/>
+          <p:cNvSpPr/>
+          <p:nvPr/>
+        </p:nvSpPr>
+        <p:spPr>
+          <a:xfrm>
+            <a:off x="6858000" y="2286000"/>
+            <a:ext cx="1481328" cy="1280160"/>
+          </a:xfrm>
+          <a:prstGeom prst="roundRect">
+            <a:avLst/>
+          </a:prstGeom>
+          <a:solidFill>
+            <a:srgbClr val="7C3AED"/>
+          </a:solidFill>
+          <a:ln>
+            <a:solidFill>
+              <a:srgbClr val="7C3AED"/>
+            </a:solidFill>
+          </a:ln>
+          <a:effectLst/>
+        </p:spPr>
+        <p:style>
+          <a:lnRef idx="1">
+            <a:schemeClr val="accent1"/>
+          </a:lnRef>
+          <a:fillRef idx="3">
+            <a:schemeClr val="accent1"/>
+          </a:fillRef>
+          <a:effectRef idx="2">
+            <a:schemeClr val="accent1"/>
+          </a:effectRef>
+          <a:fontRef idx="minor">
+            <a:schemeClr val="lt1"/>
+          </a:fontRef>
+        </p:style>
+        <p:txBody>
+          <a:bodyPr rtlCol="0" anchor="ctr" wrap="square" tIns="25400" bIns="25400"/>
+          <a:lstStyle/>
+          <a:p>
+            <a:pPr algn="ctr"/>
+            <a:r>
+              <a:rPr sz="1100" b="1">
+                <a:solidFill>
+                  <a:srgbClr val="FFFFFF"/>
+                </a:solidFill>
+                <a:latin typeface="PingFang TC"/>
+                <a:ea typeface="PingFang TC"/>
+              </a:rPr>
+              <a:t>SSM 更新</a:t>
+            </a:r>
+          </a:p>
+          <a:p>
+            <a:pPr algn="ctr"/>
+            <a:r>
+              <a:rPr sz="1100" b="0">
+                <a:solidFill>
+                  <a:srgbClr val="FFFFFF"/>
+                </a:solidFill>
+                <a:latin typeface="PingFang TC"/>
+                <a:ea typeface="PingFang TC"/>
+              </a:rPr>
+              <a:t>/qrcode/</a:t>
+            </a:r>
+          </a:p>
+          <a:p>
+            <a:pPr algn="ctr"/>
+            <a:r>
+              <a:rPr sz="1100" b="0">
+                <a:solidFill>
+                  <a:srgbClr val="FFFFFF"/>
+                </a:solidFill>
+                <a:latin typeface="PingFang TC"/>
+                <a:ea typeface="PingFang TC"/>
+              </a:rPr>
+              <a:t>IMAGE_URI</a:t>
+            </a:r>
+          </a:p>
+        </p:txBody>
+      </p:sp>
+      <p:cxnSp>
+        <p:nvCxnSpPr>
+          <p:cNvPr id="13" name="Connector 12"/>
+          <p:cNvCxnSpPr/>
+          <p:nvPr/>
+        </p:nvCxnSpPr>
+        <p:spPr>
+          <a:xfrm>
+            <a:off x="8339328" y="2926080"/>
+            <a:ext cx="118872" cy="0"/>
+          </a:xfrm>
+          <a:prstGeom prst="line">
+            <a:avLst/>
+          </a:prstGeom>
+          <a:ln w="22225">
+            <a:solidFill>
+              <a:srgbClr val="64748B"/>
+            </a:solidFill>
+            <a:tailEnd type="triangle" w="med" len="med"/>
+          </a:ln>
+        </p:spPr>
+        <p:style>
+          <a:lnRef idx="2">
+            <a:schemeClr val="accent1"/>
+          </a:lnRef>
+          <a:fillRef idx="0">
+            <a:schemeClr val="accent1"/>
+          </a:fillRef>
+          <a:effectRef idx="1">
+            <a:schemeClr val="accent1"/>
+          </a:effectRef>
+          <a:fontRef idx="minor">
+            <a:schemeClr val="tx1"/>
+          </a:fontRef>
+        </p:style>
+      </p:cxnSp>
+      <p:sp>
+        <p:nvSpPr>
+          <p:cNvPr id="14" name="Rounded Rectangle 13"/>
+          <p:cNvSpPr/>
+          <p:nvPr/>
+        </p:nvSpPr>
+        <p:spPr>
+          <a:xfrm>
+            <a:off x="8458200" y="2286000"/>
+            <a:ext cx="1481328" cy="1280160"/>
+          </a:xfrm>
+          <a:prstGeom prst="roundRect">
+            <a:avLst/>
+          </a:prstGeom>
+          <a:solidFill>
+            <a:srgbClr val="D97706"/>
+          </a:solidFill>
+          <a:ln>
+            <a:solidFill>
+              <a:srgbClr val="D97706"/>
+            </a:solidFill>
+          </a:ln>
+          <a:effectLst/>
+        </p:spPr>
+        <p:style>
+          <a:lnRef idx="1">
+            <a:schemeClr val="accent1"/>
+          </a:lnRef>
+          <a:fillRef idx="3">
+            <a:schemeClr val="accent1"/>
+          </a:fillRef>
+          <a:effectRef idx="2">
+            <a:schemeClr val="accent1"/>
+          </a:effectRef>
+          <a:fontRef idx="minor">
+            <a:schemeClr val="lt1"/>
+          </a:fontRef>
+        </p:style>
+        <p:txBody>
+          <a:bodyPr rtlCol="0" anchor="ctr" wrap="square" tIns="25400" bIns="25400"/>
+          <a:lstStyle/>
+          <a:p>
+            <a:pPr algn="ctr"/>
+            <a:r>
+              <a:rPr sz="1100" b="1">
+                <a:solidFill>
+                  <a:srgbClr val="FFFFFF"/>
+                </a:solidFill>
+                <a:latin typeface="PingFang TC"/>
+                <a:ea typeface="PingFang TC"/>
+              </a:rPr>
+              <a:t>SSM 部署</a:t>
+            </a:r>
+          </a:p>
+          <a:p>
+            <a:pPr algn="ctr"/>
+            <a:r>
+              <a:rPr sz="1100" b="0">
+                <a:solidFill>
+                  <a:srgbClr val="FFFFFF"/>
+                </a:solidFill>
+                <a:latin typeface="PingFang TC"/>
+                <a:ea typeface="PingFang TC"/>
+              </a:rPr>
+              <a:t>→ EC2</a:t>
+            </a:r>
+          </a:p>
+          <a:p>
+            <a:pPr algn="ctr"/>
+            <a:r>
+              <a:rPr sz="1100" b="0">
+                <a:solidFill>
+                  <a:srgbClr val="FFFFFF"/>
+                </a:solidFill>
+                <a:latin typeface="PingFang TC"/>
+                <a:ea typeface="PingFang TC"/>
+              </a:rPr>
+              <a:t>deploy-app.sh</a:t>
+            </a:r>
+          </a:p>
+        </p:txBody>
+      </p:sp>
+      <p:cxnSp>
+        <p:nvCxnSpPr>
+          <p:cNvPr id="15" name="Connector 14"/>
+          <p:cNvCxnSpPr/>
+          <p:nvPr/>
+        </p:nvCxnSpPr>
+        <p:spPr>
+          <a:xfrm>
+            <a:off x="9939528" y="2926080"/>
+            <a:ext cx="118872" cy="0"/>
+          </a:xfrm>
+          <a:prstGeom prst="line">
+            <a:avLst/>
+          </a:prstGeom>
+          <a:ln w="22225">
+            <a:solidFill>
+              <a:srgbClr val="64748B"/>
+            </a:solidFill>
+            <a:tailEnd type="triangle" w="med" len="med"/>
+          </a:ln>
+        </p:spPr>
+        <p:style>
+          <a:lnRef idx="2">
+            <a:schemeClr val="accent1"/>
+          </a:lnRef>
+          <a:fillRef idx="0">
+            <a:schemeClr val="accent1"/>
+          </a:fillRef>
+          <a:effectRef idx="1">
+            <a:schemeClr val="accent1"/>
+          </a:effectRef>
+          <a:fontRef idx="minor">
+            <a:schemeClr val="tx1"/>
+          </a:fontRef>
+        </p:style>
+      </p:cxnSp>
+      <p:sp>
+        <p:nvSpPr>
+          <p:cNvPr id="16" name="Rounded Rectangle 15"/>
+          <p:cNvSpPr/>
+          <p:nvPr/>
+        </p:nvSpPr>
+        <p:spPr>
+          <a:xfrm>
+            <a:off x="10058400" y="2286000"/>
+            <a:ext cx="1481328" cy="1280160"/>
+          </a:xfrm>
+          <a:prstGeom prst="roundRect">
+            <a:avLst/>
+          </a:prstGeom>
+          <a:solidFill>
+            <a:srgbClr val="059669"/>
+          </a:solidFill>
+          <a:ln>
+            <a:solidFill>
+              <a:srgbClr val="059669"/>
+            </a:solidFill>
+          </a:ln>
+          <a:effectLst/>
+        </p:spPr>
+        <p:style>
+          <a:lnRef idx="1">
+            <a:schemeClr val="accent1"/>
+          </a:lnRef>
+          <a:fillRef idx="3">
+            <a:schemeClr val="accent1"/>
+          </a:fillRef>
+          <a:effectRef idx="2">
+            <a:schemeClr val="accent1"/>
+          </a:effectRef>
+          <a:fontRef idx="minor">
+            <a:schemeClr val="lt1"/>
+          </a:fontRef>
+        </p:style>
+        <p:txBody>
+          <a:bodyPr rtlCol="0" anchor="ctr" wrap="square" tIns="25400" bIns="25400"/>
+          <a:lstStyle/>
+          <a:p>
+            <a:pPr algn="ctr"/>
+            <a:r>
+              <a:rPr sz="1100" b="1">
+                <a:solidFill>
+                  <a:srgbClr val="FFFFFF"/>
+                </a:solidFill>
+                <a:latin typeface="PingFang TC"/>
+                <a:ea typeface="PingFang TC"/>
+              </a:rPr>
+              <a:t>上線</a:t>
+            </a:r>
+          </a:p>
+          <a:p>
+            <a:pPr algn="ctr"/>
+            <a:r>
+              <a:rPr sz="1100" b="0">
+                <a:solidFill>
+                  <a:srgbClr val="FFFFFF"/>
+                </a:solidFill>
+                <a:latin typeface="PingFang TC"/>
+                <a:ea typeface="PingFang TC"/>
+              </a:rPr>
+              <a:t>ALB /health</a:t>
+            </a:r>
+          </a:p>
+          <a:p>
+            <a:pPr algn="ctr"/>
+            <a:r>
+              <a:rPr sz="1100" b="0">
+                <a:solidFill>
+                  <a:srgbClr val="FFFFFF"/>
+                </a:solidFill>
+                <a:latin typeface="PingFang TC"/>
+                <a:ea typeface="PingFang TC"/>
+              </a:rPr>
+              <a:t>通過</a:t>
+            </a:r>
+          </a:p>
+        </p:txBody>
+      </p:sp>
+      <p:sp>
+        <p:nvSpPr>
+          <p:cNvPr id="17" name="TextBox 16"/>
+          <p:cNvSpPr txBox="1"/>
+          <p:nvPr/>
+        </p:nvSpPr>
+        <p:spPr>
+          <a:xfrm>
+            <a:off x="548640" y="4023360"/>
+            <a:ext cx="11247120" cy="2194560"/>
+          </a:xfrm>
+          <a:prstGeom prst="rect">
+            <a:avLst/>
+          </a:prstGeom>
+          <a:noFill/>
+        </p:spPr>
+        <p:txBody>
+          <a:bodyPr wrap="square">
+            <a:spAutoFit/>
+          </a:bodyPr>
+          <a:lstStyle/>
+          <a:p>
+            <a:pPr>
+              <a:spcAft>
+                <a:spcPts val="900"/>
+              </a:spcAft>
+            </a:pPr>
+            <a:r>
+              <a:rPr sz="1400" b="0">
+                <a:solidFill>
+                  <a:srgbClr val="0F172A"/>
+                </a:solidFill>
+                <a:latin typeface="PingFang TC"/>
+                <a:ea typeface="PingFang TC"/>
+              </a:rPr>
+              <a:t>•  EC2 deploy-app.sh:從 SSM 撈設定 → ECR login → docker pull → docker run(換新容器)</a:t>
+            </a:r>
+          </a:p>
+          <a:p>
+            <a:pPr>
+              <a:spcAft>
+                <a:spcPts val="900"/>
+              </a:spcAft>
+            </a:pPr>
+            <a:r>
+              <a:rPr sz="1400" b="0">
+                <a:solidFill>
+                  <a:srgbClr val="0F172A"/>
+                </a:solidFill>
+                <a:latin typeface="PingFang TC"/>
+                <a:ea typeface="PingFang TC"/>
+              </a:rPr>
+              <a:t>•  全 env-gated:本機無這些環境變數 → 維持 SQLite + 記憶體 cache + 即時生圖,不受影響</a:t>
+            </a:r>
+          </a:p>
+          <a:p>
+            <a:pPr>
+              <a:spcAft>
+                <a:spcPts val="900"/>
+              </a:spcAft>
+            </a:pPr>
+            <a:r>
+              <a:rPr sz="1400" b="0">
+                <a:solidFill>
+                  <a:srgbClr val="0F172A"/>
+                </a:solidFill>
+                <a:latin typeface="PingFang TC"/>
+                <a:ea typeface="PingFang TC"/>
+              </a:rPr>
+              <a:t>•  部署踩到的兩個坑:① EC2 role 少 s3:PutObject(500)② CI build amd64 但 EC2 arm64(502)→ buildx 跨平台修正</a:t>
+            </a:r>
+          </a:p>
+        </p:txBody>
+      </p:sp>
+    </p:spTree>
+  </p:cSld>
+  <p:clrMapOvr>
+    <a:masterClrMapping/>
+  </p:clrMapOvr>
+</p:sld>
+</file>
+
+<file path=ppt/slides/slide33.xml><?xml version="1.0" encoding="utf-8"?>
+<p:sld xmlns:a="http://schemas.openxmlformats.org/drawingml/2006/main" xmlns:p="http://schemas.openxmlformats.org/presentationml/2006/main" xmlns:r="http://schemas.openxmlformats.org/officeDocument/2006/relationships">
+  <p:cSld>
+    <p:spTree>
+      <p:nvGrpSpPr>
+        <p:cNvPr id="1" name=""/>
+        <p:cNvGrpSpPr/>
+        <p:nvPr/>
+      </p:nvGrpSpPr>
+      <p:grpSpPr/>
+      <p:sp>
+        <p:nvSpPr>
+          <p:cNvPr id="2" name="Rectangle 1"/>
+          <p:cNvSpPr/>
+          <p:nvPr/>
+        </p:nvSpPr>
+        <p:spPr>
+          <a:xfrm>
+            <a:off x="0" y="0"/>
+            <a:ext cx="12191695" cy="6858000"/>
+          </a:xfrm>
+          <a:prstGeom prst="rect">
+            <a:avLst/>
+          </a:prstGeom>
+          <a:solidFill>
+            <a:srgbClr val="0F172A"/>
+          </a:solidFill>
+          <a:ln>
+            <a:noFill/>
+          </a:ln>
+          <a:effectLst/>
+        </p:spPr>
+        <p:style>
+          <a:lnRef idx="1">
+            <a:schemeClr val="accent1"/>
+          </a:lnRef>
+          <a:fillRef idx="3">
+            <a:schemeClr val="accent1"/>
+          </a:fillRef>
+          <a:effectRef idx="2">
+            <a:schemeClr val="accent1"/>
+          </a:effectRef>
+          <a:fontRef idx="minor">
+            <a:schemeClr val="lt1"/>
+          </a:fontRef>
+        </p:style>
+        <p:txBody>
+          <a:bodyPr rtlCol="0" anchor="ctr"/>
+          <a:lstStyle/>
+          <a:p>
+            <a:pPr algn="ctr"/>
+          </a:p>
+        </p:txBody>
+      </p:sp>
+      <p:sp>
+        <p:nvSpPr>
+          <p:cNvPr id="3" name="TextBox 2"/>
+          <p:cNvSpPr txBox="1"/>
+          <p:nvPr/>
+        </p:nvSpPr>
+        <p:spPr>
+          <a:xfrm>
+            <a:off x="822960" y="1097280"/>
+            <a:ext cx="10515600" cy="1097280"/>
+          </a:xfrm>
+          <a:prstGeom prst="rect">
+            <a:avLst/>
+          </a:prstGeom>
+          <a:noFill/>
+        </p:spPr>
+        <p:txBody>
+          <a:bodyPr wrap="square" anchor="t">
+            <a:spAutoFit/>
+          </a:bodyPr>
+          <a:lstStyle/>
+          <a:p>
+            <a:pPr algn="l">
+              <a:spcAft>
+                <a:spcPts val="400"/>
+              </a:spcAft>
+            </a:pPr>
+            <a:r>
+              <a:rPr sz="1600" b="1">
+                <a:solidFill>
+                  <a:srgbClr val="2563EB"/>
+                </a:solidFill>
+                <a:latin typeface="PingFang TC"/>
+                <a:ea typeface="PingFang TC"/>
+              </a:rPr>
+              <a:t>原型狀態</a:t>
+            </a:r>
+          </a:p>
+          <a:p>
+            <a:pPr algn="l">
+              <a:spcAft>
+                <a:spcPts val="400"/>
+              </a:spcAft>
+            </a:pPr>
+            <a:r>
+              <a:rPr sz="3000" b="1">
+                <a:solidFill>
+                  <a:srgbClr val="FFFFFF"/>
+                </a:solidFill>
+                <a:latin typeface="PingFang TC"/>
+                <a:ea typeface="PingFang TC"/>
+              </a:rPr>
+              <a:t>可跑的 FastAPI 實作 + 管理頁前端</a:t>
+            </a:r>
+          </a:p>
+        </p:txBody>
+      </p:sp>
+      <p:sp>
+        <p:nvSpPr>
+          <p:cNvPr id="4" name="TextBox 3"/>
+          <p:cNvSpPr txBox="1"/>
+          <p:nvPr/>
+        </p:nvSpPr>
+        <p:spPr>
+          <a:xfrm>
+            <a:off x="822960" y="2743200"/>
+            <a:ext cx="10515600" cy="2743200"/>
+          </a:xfrm>
+          <a:prstGeom prst="rect">
+            <a:avLst/>
+          </a:prstGeom>
+          <a:noFill/>
+        </p:spPr>
+        <p:txBody>
+          <a:bodyPr wrap="square">
+            <a:spAutoFit/>
+          </a:bodyPr>
+          <a:lstStyle/>
+          <a:p>
+            <a:pPr>
+              <a:spcAft>
+                <a:spcPts val="1200"/>
+              </a:spcAft>
+            </a:pPr>
+            <a:r>
+              <a:rPr sz="1600" b="0">
+                <a:solidFill>
+                  <a:srgbClr val="E2E8F0"/>
+                </a:solidFill>
+                <a:latin typeface="PingFang TC"/>
+                <a:ea typeface="PingFang TC"/>
+              </a:rPr>
+              <a:t>✓  7 個 API 端點 + 管理頁前端（建立/清單/編輯/刪除/分析）</a:t>
+            </a:r>
+          </a:p>
+          <a:p>
+            <a:pPr>
+              <a:spcAft>
+                <a:spcPts val="1200"/>
+              </a:spcAft>
+            </a:pPr>
+            <a:r>
+              <a:rPr sz="1600" b="0">
+                <a:solidFill>
+                  <a:srgbClr val="E2E8F0"/>
+                </a:solidFill>
+                <a:latin typeface="PingFang TC"/>
+                <a:ea typeface="PingFang TC"/>
+              </a:rPr>
+              <a:t>✓  全部 curl 驗證通過：302 / 404 / 410 / 8 碼 token / 正規化 / SSRF / 過期</a:t>
+            </a:r>
+          </a:p>
+          <a:p>
+            <a:pPr>
+              <a:spcAft>
+                <a:spcPts val="1200"/>
+              </a:spcAft>
+            </a:pPr>
+            <a:r>
+              <a:rPr sz="1600" b="0">
+                <a:solidFill>
+                  <a:srgbClr val="E2E8F0"/>
+                </a:solidFill>
+                <a:latin typeface="PingFang TC"/>
+                <a:ea typeface="PingFang TC"/>
+              </a:rPr>
+              <a:t>✓  production 替換點已在程式註解標明（Redis / 佇列 / CDN / 預聚合 / PostgreSQL）</a:t>
+            </a:r>
+          </a:p>
+          <a:p>
+            <a:pPr>
+              <a:spcAft>
+                <a:spcPts val="1200"/>
+              </a:spcAft>
+            </a:pPr>
+            <a:r>
+              <a:rPr sz="1600" b="0">
+                <a:solidFill>
+                  <a:srgbClr val="E2E8F0"/>
+                </a:solidFill>
+                <a:latin typeface="PingFang TC"/>
+                <a:ea typeface="PingFang TC"/>
+              </a:rPr>
+              <a:t>✓  設計依據：DESIGN.md（16 題決策 + 優劣分析）</a:t>
+            </a:r>
+          </a:p>
+        </p:txBody>
+      </p:sp>
+    </p:spTree>
+  </p:cSld>
+  <p:clrMapOvr>
+    <a:masterClrMapping/>
+  </p:clrMapOvr>
+</p:sld>
+</file>
+
+<file path=ppt/slides/slide34.xml><?xml version="1.0" encoding="utf-8"?>
+<p:sld xmlns:a="http://schemas.openxmlformats.org/drawingml/2006/main" xmlns:p="http://schemas.openxmlformats.org/presentationml/2006/main" xmlns:r="http://schemas.openxmlformats.org/officeDocument/2006/relationships">
+  <p:cSld>
+    <p:spTree>
+      <p:nvGrpSpPr>
+        <p:cNvPr id="1" name=""/>
+        <p:cNvGrpSpPr/>
+        <p:nvPr/>
+      </p:nvGrpSpPr>
+      <p:grpSpPr/>
+      <p:sp>
+        <p:nvSpPr>
+          <p:cNvPr id="2" name="Rectangle 1"/>
+          <p:cNvSpPr/>
+          <p:nvPr/>
+        </p:nvSpPr>
+        <p:spPr>
+          <a:xfrm>
+            <a:off x="0" y="0"/>
+            <a:ext cx="164592" cy="6858000"/>
+          </a:xfrm>
+          <a:prstGeom prst="rect">
+            <a:avLst/>
+          </a:prstGeom>
+          <a:solidFill>
+            <a:srgbClr val="2563EB"/>
+          </a:solidFill>
+          <a:ln>
+            <a:noFill/>
+          </a:ln>
+          <a:effectLst/>
+        </p:spPr>
+        <p:style>
+          <a:lnRef idx="1">
+            <a:schemeClr val="accent1"/>
+          </a:lnRef>
+          <a:fillRef idx="3">
+            <a:schemeClr val="accent1"/>
+          </a:fillRef>
+          <a:effectRef idx="2">
+            <a:schemeClr val="accent1"/>
+          </a:effectRef>
+          <a:fontRef idx="minor">
+            <a:schemeClr val="lt1"/>
+          </a:fontRef>
+        </p:style>
+        <p:txBody>
+          <a:bodyPr rtlCol="0" anchor="ctr"/>
+          <a:lstStyle/>
+          <a:p>
+            <a:pPr algn="ctr"/>
+          </a:p>
+        </p:txBody>
+      </p:sp>
+      <p:sp>
+        <p:nvSpPr>
+          <p:cNvPr id="3" name="TextBox 2"/>
+          <p:cNvSpPr txBox="1"/>
+          <p:nvPr/>
+        </p:nvSpPr>
+        <p:spPr>
+          <a:xfrm>
+            <a:off x="502920" y="320040"/>
+            <a:ext cx="10972800" cy="1005840"/>
+          </a:xfrm>
+          <a:prstGeom prst="rect">
+            <a:avLst/>
+          </a:prstGeom>
+          <a:noFill/>
+        </p:spPr>
+        <p:txBody>
+          <a:bodyPr wrap="square" anchor="t">
+            <a:spAutoFit/>
+          </a:bodyPr>
+          <a:lstStyle/>
+          <a:p>
+            <a:pPr algn="l">
+              <a:spcAft>
+                <a:spcPts val="200"/>
+              </a:spcAft>
+            </a:pPr>
+            <a:r>
+              <a:rPr sz="1300" b="1">
+                <a:solidFill>
+                  <a:srgbClr val="2563EB"/>
+                </a:solidFill>
+                <a:latin typeface="PingFang TC"/>
+                <a:ea typeface="PingFang TC"/>
+              </a:rPr>
               <a:t>下週預告 · NEXT WEEK</a:t>
             </a:r>
           </a:p>
@@ -21795,7 +23258,7 @@
 </p:sld>
 </file>
 
-<file path=ppt/slides/slide33.xml><?xml version="1.0" encoding="utf-8"?>
+<file path=ppt/slides/slide35.xml><?xml version="1.0" encoding="utf-8"?>
 <p:sld xmlns:a="http://schemas.openxmlformats.org/drawingml/2006/main" xmlns:p="http://schemas.openxmlformats.org/presentationml/2006/main" xmlns:r="http://schemas.openxmlformats.org/officeDocument/2006/relationships">
   <p:cSld>
     <p:spTree>
@@ -22447,7 +23910,7 @@
 </p:sld>
 </file>
 
-<file path=ppt/slides/slide34.xml><?xml version="1.0" encoding="utf-8"?>
+<file path=ppt/slides/slide36.xml><?xml version="1.0" encoding="utf-8"?>
 <p:sld xmlns:a="http://schemas.openxmlformats.org/drawingml/2006/main" xmlns:p="http://schemas.openxmlformats.org/presentationml/2006/main" xmlns:r="http://schemas.openxmlformats.org/officeDocument/2006/relationships">
   <p:cSld>
     <p:spTree>

--- a/QR Code Generator/QR_Code_Generator.pptx
+++ b/QR Code Generator/QR_Code_Generator.pptx
@@ -8094,8 +8094,8 @@
         </p:nvSpPr>
         <p:spPr>
           <a:xfrm>
-            <a:off x="548640" y="5440680"/>
-            <a:ext cx="11155680" cy="1005840"/>
+            <a:off x="548640" y="5349240"/>
+            <a:ext cx="11155680" cy="1188720"/>
           </a:xfrm>
           <a:prstGeom prst="rect">
             <a:avLst/>
@@ -8122,6 +8122,23 @@
                 <a:ea typeface="PingFang TC"/>
               </a:rPr>
               <a:t>Cache Aside / Read Through:master 是 DB、寫只進 DB → cache 惰性補;差別只在「誰負責回源」(app vs cache 元件)。</a:t>
+            </a:r>
+          </a:p>
+          <a:p>
+            <a:pPr algn="l">
+              <a:spcAft>
+                <a:spcPts val="200"/>
+              </a:spcAft>
+            </a:pPr>
+            <a:r>
+              <a:rPr sz="1200" b="0">
+                <a:solidFill>
+                  <a:srgbClr val="0F172A"/>
+                </a:solidFill>
+                <a:latin typeface="PingFang TC"/>
+                <a:ea typeface="PingFang TC"/>
+              </a:rPr>
+              <a:t>使用時機:模型不同/後補/部分控制/自寫降級 → Cache Aside(app 回源,本專案);想藏回源、應用變薄、有原生 read-through 產品(如 DAX) → Read Through(cache 回源)。</a:t>
             </a:r>
           </a:p>
           <a:p>

--- a/QR Code Generator/QR_Code_Generator.pptx
+++ b/QR Code Generator/QR_Code_Generator.pptx
@@ -41,6 +41,7 @@
     <p:sldId id="289" r:id="rId40"/>
     <p:sldId id="290" r:id="rId41"/>
     <p:sldId id="291" r:id="rId42"/>
+    <p:sldId id="292" r:id="rId43"/>
   </p:sldIdLst>
   <p:sldSz cx="12191695" cy="6858000" type="screen4x3"/>
   <p:notesSz cx="6858000" cy="9144000"/>
@@ -4949,7 +4950,7 @@
                 <a:latin typeface="PingFang TC"/>
                 <a:ea typeface="PingFang TC"/>
               </a:rPr>
-              <a:t>08 · DEEP DIVE</a:t>
+              <a:t>07b · QR IMAGE</a:t>
             </a:r>
           </a:p>
           <a:p>
@@ -4966,7 +4967,7 @@
                 <a:latin typeface="PingFang TC"/>
                 <a:ea typeface="PingFang TC"/>
               </a:rPr>
-              <a:t>決策 1 — Token 生成與碰撞</a:t>
+              <a:t>圖片存哪 — BLOB-in-DB vs Object Store（第 15 題）</a:t>
             </a:r>
           </a:p>
         </p:txBody>
@@ -4979,8 +4980,415 @@
         </p:nvSpPr>
         <p:spPr>
           <a:xfrm>
-            <a:off x="640080" y="1737360"/>
-            <a:ext cx="10789920" cy="4572000"/>
+            <a:off x="548640" y="1325880"/>
+            <a:ext cx="11155680" cy="640080"/>
+          </a:xfrm>
+          <a:prstGeom prst="rect">
+            <a:avLst/>
+          </a:prstGeom>
+          <a:noFill/>
+        </p:spPr>
+        <p:txBody>
+          <a:bodyPr wrap="square" anchor="t">
+            <a:spAutoFit/>
+          </a:bodyPr>
+          <a:lstStyle/>
+          <a:p>
+            <a:pPr algn="l">
+              <a:spcAft>
+                <a:spcPts val="200"/>
+              </a:spcAft>
+            </a:pPr>
+            <a:r>
+              <a:rPr sz="1300" b="0">
+                <a:solidFill>
+                  <a:srgbClr val="0F172A"/>
+                </a:solidFill>
+                <a:latin typeface="PingFang TC"/>
+                <a:ea typeface="PingFang TC"/>
+              </a:rPr>
+              <a:t>關鍵性質:QR 編的是不變短碼 /r/{token} → 圖是靜態內容,一次算好即可純讀;經典取捨:二進位大物該不該進 DB?</a:t>
+            </a:r>
+          </a:p>
+        </p:txBody>
+      </p:sp>
+      <p:graphicFrame>
+        <p:nvGraphicFramePr>
+          <p:cNvPr id="5" name="Table 4"/>
+          <p:cNvGraphicFramePr>
+            <a:graphicFrameLocks noGrp="1"/>
+          </p:cNvGraphicFramePr>
+          <p:nvPr/>
+        </p:nvGraphicFramePr>
+        <p:xfrm>
+          <a:off x="548640" y="2057400"/>
+          <a:ext cx="11109959" cy="2194560"/>
+        </p:xfrm>
+        <a:graphic>
+          <a:graphicData uri="http://schemas.openxmlformats.org/drawingml/2006/table">
+            <a:tbl>
+              <a:tblPr firstRow="1" bandRow="1">
+                <a:tableStyleId>{5C22544A-7EE6-4342-B048-85BDC9FD1C3A}</a:tableStyleId>
+              </a:tblPr>
+              <a:tblGrid>
+                <a:gridCol w="2743200"/>
+                <a:gridCol w="3977639"/>
+                <a:gridCol w="4389120"/>
+              </a:tblGrid>
+              <a:tr h="548640">
+                <a:tc>
+                  <a:txBody>
+                    <a:bodyPr/>
+                    <a:lstStyle/>
+                    <a:p>
+                      <a:r>
+                        <a:rPr sz="1200" b="1">
+                          <a:solidFill>
+                            <a:srgbClr val="FFFFFF"/>
+                          </a:solidFill>
+                          <a:latin typeface="PingFang TC"/>
+                          <a:ea typeface="PingFang TC"/>
+                        </a:rPr>
+                        <a:t>方案</a:t>
+                      </a:r>
+                    </a:p>
+                  </a:txBody>
+                  <a:tcPr marT="38100" marB="38100" marL="101600" anchor="ctr">
+                    <a:solidFill>
+                      <a:srgbClr val="2563EB"/>
+                    </a:solidFill>
+                  </a:tcPr>
+                </a:tc>
+                <a:tc>
+                  <a:txBody>
+                    <a:bodyPr/>
+                    <a:lstStyle/>
+                    <a:p>
+                      <a:r>
+                        <a:rPr sz="1200" b="1">
+                          <a:solidFill>
+                            <a:srgbClr val="FFFFFF"/>
+                          </a:solidFill>
+                          <a:latin typeface="PingFang TC"/>
+                          <a:ea typeface="PingFang TC"/>
+                        </a:rPr>
+                        <a:t>優</a:t>
+                      </a:r>
+                    </a:p>
+                  </a:txBody>
+                  <a:tcPr marT="38100" marB="38100" marL="101600" anchor="ctr">
+                    <a:solidFill>
+                      <a:srgbClr val="2563EB"/>
+                    </a:solidFill>
+                  </a:tcPr>
+                </a:tc>
+                <a:tc>
+                  <a:txBody>
+                    <a:bodyPr/>
+                    <a:lstStyle/>
+                    <a:p>
+                      <a:r>
+                        <a:rPr sz="1200" b="1">
+                          <a:solidFill>
+                            <a:srgbClr val="FFFFFF"/>
+                          </a:solidFill>
+                          <a:latin typeface="PingFang TC"/>
+                          <a:ea typeface="PingFang TC"/>
+                        </a:rPr>
+                        <a:t>劣</a:t>
+                      </a:r>
+                    </a:p>
+                  </a:txBody>
+                  <a:tcPr marT="38100" marB="38100" marL="101600" anchor="ctr">
+                    <a:solidFill>
+                      <a:srgbClr val="2563EB"/>
+                    </a:solidFill>
+                  </a:tcPr>
+                </a:tc>
+              </a:tr>
+              <a:tr h="548640">
+                <a:tc>
+                  <a:txBody>
+                    <a:bodyPr/>
+                    <a:lstStyle/>
+                    <a:p>
+                      <a:r>
+                        <a:rPr sz="1200" b="1">
+                          <a:solidFill>
+                            <a:srgbClr val="0F172A"/>
+                          </a:solidFill>
+                          <a:latin typeface="PingFang TC"/>
+                          <a:ea typeface="PingFang TC"/>
+                        </a:rPr>
+                        <a:t>即時生成（原型）</a:t>
+                      </a:r>
+                    </a:p>
+                  </a:txBody>
+                  <a:tcPr marT="38100" marB="38100" marL="101600" anchor="ctr">
+                    <a:solidFill>
+                      <a:srgbClr val="FFFFFF"/>
+                    </a:solidFill>
+                  </a:tcPr>
+                </a:tc>
+                <a:tc>
+                  <a:txBody>
+                    <a:bodyPr/>
+                    <a:lstStyle/>
+                    <a:p>
+                      <a:r>
+                        <a:rPr sz="1200" b="0">
+                          <a:solidFill>
+                            <a:srgbClr val="64748B"/>
+                          </a:solidFill>
+                          <a:latin typeface="PingFang TC"/>
+                          <a:ea typeface="PingFang TC"/>
+                        </a:rPr>
+                        <a:t>零儲存、URL 改圖自動對</a:t>
+                      </a:r>
+                    </a:p>
+                  </a:txBody>
+                  <a:tcPr marT="38100" marB="38100" marL="101600" anchor="ctr">
+                    <a:solidFill>
+                      <a:srgbClr val="FFFFFF"/>
+                    </a:solidFill>
+                  </a:tcPr>
+                </a:tc>
+                <a:tc>
+                  <a:txBody>
+                    <a:bodyPr/>
+                    <a:lstStyle/>
+                    <a:p>
+                      <a:r>
+                        <a:rPr sz="1200" b="0">
+                          <a:solidFill>
+                            <a:srgbClr val="64748B"/>
+                          </a:solidFill>
+                          <a:latin typeface="PingFang TC"/>
+                          <a:ea typeface="PingFang TC"/>
+                        </a:rPr>
+                        <a:t>每次吃 CPU,高 QPS → app 變算圖機</a:t>
+                      </a:r>
+                    </a:p>
+                  </a:txBody>
+                  <a:tcPr marT="38100" marB="38100" marL="101600" anchor="ctr">
+                    <a:solidFill>
+                      <a:srgbClr val="FFFFFF"/>
+                    </a:solidFill>
+                  </a:tcPr>
+                </a:tc>
+              </a:tr>
+              <a:tr h="548640">
+                <a:tc>
+                  <a:txBody>
+                    <a:bodyPr/>
+                    <a:lstStyle/>
+                    <a:p>
+                      <a:r>
+                        <a:rPr sz="1200" b="1">
+                          <a:solidFill>
+                            <a:srgbClr val="0F172A"/>
+                          </a:solidFill>
+                          <a:latin typeface="PingFang TC"/>
+                          <a:ea typeface="PingFang TC"/>
+                        </a:rPr>
+                        <a:t>存 DB（BLOB 欄位）</a:t>
+                      </a:r>
+                    </a:p>
+                  </a:txBody>
+                  <a:tcPr marT="38100" marB="38100" marL="101600" anchor="ctr">
+                    <a:solidFill>
+                      <a:srgbClr val="F1F5F9"/>
+                    </a:solidFill>
+                  </a:tcPr>
+                </a:tc>
+                <a:tc>
+                  <a:txBody>
+                    <a:bodyPr/>
+                    <a:lstStyle/>
+                    <a:p>
+                      <a:r>
+                        <a:rPr sz="1200" b="0">
+                          <a:solidFill>
+                            <a:srgbClr val="64748B"/>
+                          </a:solidFill>
+                          <a:latin typeface="PingFang TC"/>
+                          <a:ea typeface="PingFang TC"/>
+                        </a:rPr>
+                        <a:t>一致性簡單、一個 store、有交易</a:t>
+                      </a:r>
+                    </a:p>
+                  </a:txBody>
+                  <a:tcPr marT="38100" marB="38100" marL="101600" anchor="ctr">
+                    <a:solidFill>
+                      <a:srgbClr val="F1F5F9"/>
+                    </a:solidFill>
+                  </a:tcPr>
+                </a:tc>
+                <a:tc>
+                  <a:txBody>
+                    <a:bodyPr/>
+                    <a:lstStyle/>
+                    <a:p>
+                      <a:r>
+                        <a:rPr sz="1200" b="0">
+                          <a:solidFill>
+                            <a:srgbClr val="64748B"/>
+                          </a:solidFill>
+                          <a:latin typeface="PingFang TC"/>
+                          <a:ea typeface="PingFang TC"/>
+                        </a:rPr>
+                        <a:t>PNG 撐大表、吃 buffer pool/備份/複寫;DB 難放 CDN 後 → 貴</a:t>
+                      </a:r>
+                    </a:p>
+                  </a:txBody>
+                  <a:tcPr marT="38100" marB="38100" marL="101600" anchor="ctr">
+                    <a:solidFill>
+                      <a:srgbClr val="F1F5F9"/>
+                    </a:solidFill>
+                  </a:tcPr>
+                </a:tc>
+              </a:tr>
+              <a:tr h="548640">
+                <a:tc>
+                  <a:txBody>
+                    <a:bodyPr/>
+                    <a:lstStyle/>
+                    <a:p>
+                      <a:r>
+                        <a:rPr sz="1200" b="1">
+                          <a:solidFill>
+                            <a:srgbClr val="0F172A"/>
+                          </a:solidFill>
+                          <a:latin typeface="PingFang TC"/>
+                          <a:ea typeface="PingFang TC"/>
+                        </a:rPr>
+                        <a:t>Object Store + CDN（採用）</a:t>
+                      </a:r>
+                    </a:p>
+                  </a:txBody>
+                  <a:tcPr marT="38100" marB="38100" marL="101600" anchor="ctr">
+                    <a:solidFill>
+                      <a:srgbClr val="FFFFFF"/>
+                    </a:solidFill>
+                  </a:tcPr>
+                </a:tc>
+                <a:tc>
+                  <a:txBody>
+                    <a:bodyPr/>
+                    <a:lstStyle/>
+                    <a:p>
+                      <a:r>
+                        <a:rPr sz="1200" b="0">
+                          <a:solidFill>
+                            <a:srgbClr val="64748B"/>
+                          </a:solidFill>
+                          <a:latin typeface="PingFang TC"/>
+                          <a:ea typeface="PingFang TC"/>
+                        </a:rPr>
+                        <a:t>水平無限、單價低、邊緣快取最低延遲</a:t>
+                      </a:r>
+                    </a:p>
+                  </a:txBody>
+                  <a:tcPr marT="38100" marB="38100" marL="101600" anchor="ctr">
+                    <a:solidFill>
+                      <a:srgbClr val="FFFFFF"/>
+                    </a:solidFill>
+                  </a:tcPr>
+                </a:tc>
+                <a:tc>
+                  <a:txBody>
+                    <a:bodyPr/>
+                    <a:lstStyle/>
+                    <a:p>
+                      <a:r>
+                        <a:rPr sz="1200" b="0">
+                          <a:solidFill>
+                            <a:srgbClr val="64748B"/>
+                          </a:solidFill>
+                          <a:latin typeface="PingFang TC"/>
+                          <a:ea typeface="PingFang TC"/>
+                        </a:rPr>
+                        <a:t>多一個 store、最終一致</a:t>
+                      </a:r>
+                    </a:p>
+                  </a:txBody>
+                  <a:tcPr marT="38100" marB="38100" marL="101600" anchor="ctr">
+                    <a:solidFill>
+                      <a:srgbClr val="FFFFFF"/>
+                    </a:solidFill>
+                  </a:tcPr>
+                </a:tc>
+              </a:tr>
+            </a:tbl>
+          </a:graphicData>
+        </a:graphic>
+      </p:graphicFrame>
+      <p:sp>
+        <p:nvSpPr>
+          <p:cNvPr id="6" name="Rounded Rectangle 5"/>
+          <p:cNvSpPr/>
+          <p:nvPr/>
+        </p:nvSpPr>
+        <p:spPr>
+          <a:xfrm>
+            <a:off x="548640" y="4526280"/>
+            <a:ext cx="11109960" cy="914400"/>
+          </a:xfrm>
+          <a:prstGeom prst="roundRect">
+            <a:avLst/>
+          </a:prstGeom>
+          <a:solidFill>
+            <a:srgbClr val="059669"/>
+          </a:solidFill>
+          <a:ln>
+            <a:solidFill>
+              <a:srgbClr val="059669"/>
+            </a:solidFill>
+          </a:ln>
+          <a:effectLst/>
+        </p:spPr>
+        <p:style>
+          <a:lnRef idx="1">
+            <a:schemeClr val="accent1"/>
+          </a:lnRef>
+          <a:fillRef idx="3">
+            <a:schemeClr val="accent1"/>
+          </a:fillRef>
+          <a:effectRef idx="2">
+            <a:schemeClr val="accent1"/>
+          </a:effectRef>
+          <a:fontRef idx="minor">
+            <a:schemeClr val="lt1"/>
+          </a:fontRef>
+        </p:style>
+        <p:txBody>
+          <a:bodyPr rtlCol="0" anchor="ctr" wrap="square" tIns="25400" bIns="25400"/>
+          <a:lstStyle/>
+          <a:p>
+            <a:pPr algn="ctr"/>
+            <a:r>
+              <a:rPr sz="1300" b="1">
+                <a:solidFill>
+                  <a:srgbClr val="FFFFFF"/>
+                </a:solidFill>
+                <a:latin typeface="PingFang TC"/>
+                <a:ea typeface="PingFang TC"/>
+              </a:rPr>
+              <a:t>通則:DB 只存指標(object key / URL),bytes 放 object store —— DB 的價值在交易/索引/查詢,不是當檔案伺服器</a:t>
+            </a:r>
+          </a:p>
+        </p:txBody>
+      </p:sp>
+      <p:sp>
+        <p:nvSpPr>
+          <p:cNvPr id="7" name="TextBox 6"/>
+          <p:cNvSpPr txBox="1"/>
+          <p:nvPr/>
+        </p:nvSpPr>
+        <p:spPr>
+          <a:xfrm>
+            <a:off x="640080" y="5623560"/>
+            <a:ext cx="10881360" cy="914400"/>
           </a:xfrm>
           <a:prstGeom prst="rect">
             <a:avLst/>
@@ -4995,154 +5403,35 @@
           <a:p>
             <a:pPr>
               <a:spcAft>
-                <a:spcPts val="800"/>
+                <a:spcPts val="600"/>
               </a:spcAft>
             </a:pPr>
             <a:r>
-              <a:rPr sz="1500" b="0">
+              <a:rPr sz="1200" b="0">
                 <a:solidFill>
                   <a:srgbClr val="0F172A"/>
                 </a:solidFill>
                 <a:latin typeface="PingFang TC"/>
                 <a:ea typeface="PingFang TC"/>
               </a:rPr>
-              <a:t>•  演算法：SHA-256(url + nonce) → Base62 → 取前 8 碼</a:t>
-            </a:r>
-          </a:p>
-          <a:p>
-            <a:pPr>
+              <a:t>•  為何不進 DB:圖只會被整包讀、不查內容 → 佔 buffer pool + 備份/複寫頻寬,且 DB 擋不住 CDN 前的流量</a:t>
+            </a:r>
+          </a:p>
+          <a:p>
+            <a:pPr lvl="1">
               <a:spcAft>
-                <a:spcPts val="800"/>
+                <a:spcPts val="600"/>
               </a:spcAft>
             </a:pPr>
             <a:r>
-              <a:rPr sz="1500" b="0">
-                <a:solidFill>
-                  <a:srgbClr val="0F172A"/>
-                </a:solidFill>
-                <a:latin typeface="PingFang TC"/>
-                <a:ea typeface="PingFang TC"/>
-              </a:rPr>
-              <a:t>•  nonce = 時間戳_重試次數，打破 SHA-256 的確定性</a:t>
-            </a:r>
-          </a:p>
-          <a:p>
-            <a:pPr lvl="1">
-              <a:spcAft>
-                <a:spcPts val="800"/>
-              </a:spcAft>
-            </a:pPr>
-            <a:r>
-              <a:rPr sz="1400" b="0">
+              <a:rPr sz="1100" b="0">
                 <a:solidFill>
                   <a:srgbClr val="64748B"/>
                 </a:solidFill>
                 <a:latin typeface="PingFang TC"/>
                 <a:ea typeface="PingFang TC"/>
               </a:rPr>
-              <a:t>–  作用：讓同一個 URL 每次也產生不同 token（第 4 題：不去重）</a:t>
-            </a:r>
-          </a:p>
-          <a:p>
-            <a:pPr lvl="1">
-              <a:spcAft>
-                <a:spcPts val="800"/>
-              </a:spcAft>
-            </a:pPr>
-            <a:r>
-              <a:rPr sz="1400" b="0">
-                <a:solidFill>
-                  <a:srgbClr val="64748B"/>
-                </a:solidFill>
-                <a:latin typeface="PingFang TC"/>
-                <a:ea typeface="PingFang TC"/>
-              </a:rPr>
-              <a:t>–  ⚠ nonce 只解決『確定性』，不解決『碰撞』</a:t>
-            </a:r>
-          </a:p>
-          <a:p>
-            <a:pPr>
-              <a:spcAft>
-                <a:spcPts val="800"/>
-              </a:spcAft>
-            </a:pPr>
-            <a:r>
-              <a:rPr sz="1500" b="0">
-                <a:solidFill>
-                  <a:srgbClr val="0F172A"/>
-                </a:solidFill>
-                <a:latin typeface="PingFang TC"/>
-                <a:ea typeface="PingFang TC"/>
-              </a:rPr>
-              <a:t>•  碰撞數學：截斷成 8 碼後空間 = 62^8 ≈ 2.18×10^14</a:t>
-            </a:r>
-          </a:p>
-          <a:p>
-            <a:pPr lvl="1">
-              <a:spcAft>
-                <a:spcPts val="800"/>
-              </a:spcAft>
-            </a:pPr>
-            <a:r>
-              <a:rPr sz="1400" b="0">
-                <a:solidFill>
-                  <a:srgbClr val="64748B"/>
-                </a:solidFill>
-                <a:latin typeface="PingFang TC"/>
-                <a:ea typeface="PingFang TC"/>
-              </a:rPr>
-              <a:t>–  10 億規模下碰撞『必然』發生（預期 ~2,290 次）</a:t>
-            </a:r>
-          </a:p>
-          <a:p>
-            <a:pPr lvl="1">
-              <a:spcAft>
-                <a:spcPts val="800"/>
-              </a:spcAft>
-            </a:pPr>
-            <a:r>
-              <a:rPr sz="1400" b="0">
-                <a:solidFill>
-                  <a:srgbClr val="64748B"/>
-                </a:solidFill>
-                <a:latin typeface="PingFang TC"/>
-                <a:ea typeface="PingFang TC"/>
-              </a:rPr>
-              <a:t>–  7 碼 → 8 碼：空間 ×62、預期碰撞降到 1/62</a:t>
-            </a:r>
-          </a:p>
-          <a:p>
-            <a:pPr>
-              <a:spcAft>
-                <a:spcPts val="800"/>
-              </a:spcAft>
-            </a:pPr>
-            <a:r>
-              <a:rPr sz="1500" b="0">
-                <a:solidFill>
-                  <a:srgbClr val="0F172A"/>
-                </a:solidFill>
-                <a:latin typeface="PingFang TC"/>
-                <a:ea typeface="PingFang TC"/>
-              </a:rPr>
-              <a:t>•  安全網：DB token UNIQUE + 直接插入例外重試（≤10）</a:t>
-            </a:r>
-          </a:p>
-          <a:p>
-            <a:pPr lvl="1">
-              <a:spcAft>
-                <a:spcPts val="800"/>
-              </a:spcAft>
-            </a:pPr>
-            <a:r>
-              <a:rPr sz="1400" b="0">
-                <a:solidFill>
-                  <a:srgbClr val="64748B"/>
-                </a:solidFill>
-                <a:latin typeface="PingFang TC"/>
-                <a:ea typeface="PingFang TC"/>
-              </a:rPr>
-              <a:t>–  每筆插入碰撞率 ~0.0005%，重試幾乎都第 2 次成功</a:t>
+              <a:t>–  例外:小圖 + 低量 + 想少一個元件 → BLOB-in-DB 偶爾划算。樣式(dimension/color/border)不同視為不同圖,以 (token,樣式) 為 key</a:t>
             </a:r>
           </a:p>
         </p:txBody>
@@ -5244,6 +5533,301 @@
                 <a:latin typeface="PingFang TC"/>
                 <a:ea typeface="PingFang TC"/>
               </a:rPr>
+              <a:t>08 · DEEP DIVE</a:t>
+            </a:r>
+          </a:p>
+          <a:p>
+            <a:pPr algn="l">
+              <a:spcAft>
+                <a:spcPts val="400"/>
+              </a:spcAft>
+            </a:pPr>
+            <a:r>
+              <a:rPr sz="3000" b="1">
+                <a:solidFill>
+                  <a:srgbClr val="0F172A"/>
+                </a:solidFill>
+                <a:latin typeface="PingFang TC"/>
+                <a:ea typeface="PingFang TC"/>
+              </a:rPr>
+              <a:t>決策 1 — Token 生成與碰撞</a:t>
+            </a:r>
+          </a:p>
+        </p:txBody>
+      </p:sp>
+      <p:sp>
+        <p:nvSpPr>
+          <p:cNvPr id="4" name="TextBox 3"/>
+          <p:cNvSpPr txBox="1"/>
+          <p:nvPr/>
+        </p:nvSpPr>
+        <p:spPr>
+          <a:xfrm>
+            <a:off x="640080" y="1737360"/>
+            <a:ext cx="10789920" cy="4572000"/>
+          </a:xfrm>
+          <a:prstGeom prst="rect">
+            <a:avLst/>
+          </a:prstGeom>
+          <a:noFill/>
+        </p:spPr>
+        <p:txBody>
+          <a:bodyPr wrap="square">
+            <a:spAutoFit/>
+          </a:bodyPr>
+          <a:lstStyle/>
+          <a:p>
+            <a:pPr>
+              <a:spcAft>
+                <a:spcPts val="800"/>
+              </a:spcAft>
+            </a:pPr>
+            <a:r>
+              <a:rPr sz="1500" b="0">
+                <a:solidFill>
+                  <a:srgbClr val="0F172A"/>
+                </a:solidFill>
+                <a:latin typeface="PingFang TC"/>
+                <a:ea typeface="PingFang TC"/>
+              </a:rPr>
+              <a:t>•  演算法：SHA-256(url + nonce) → Base62 → 取前 8 碼</a:t>
+            </a:r>
+          </a:p>
+          <a:p>
+            <a:pPr>
+              <a:spcAft>
+                <a:spcPts val="800"/>
+              </a:spcAft>
+            </a:pPr>
+            <a:r>
+              <a:rPr sz="1500" b="0">
+                <a:solidFill>
+                  <a:srgbClr val="0F172A"/>
+                </a:solidFill>
+                <a:latin typeface="PingFang TC"/>
+                <a:ea typeface="PingFang TC"/>
+              </a:rPr>
+              <a:t>•  nonce = 時間戳_重試次數，打破 SHA-256 的確定性</a:t>
+            </a:r>
+          </a:p>
+          <a:p>
+            <a:pPr lvl="1">
+              <a:spcAft>
+                <a:spcPts val="800"/>
+              </a:spcAft>
+            </a:pPr>
+            <a:r>
+              <a:rPr sz="1400" b="0">
+                <a:solidFill>
+                  <a:srgbClr val="64748B"/>
+                </a:solidFill>
+                <a:latin typeface="PingFang TC"/>
+                <a:ea typeface="PingFang TC"/>
+              </a:rPr>
+              <a:t>–  作用：讓同一個 URL 每次也產生不同 token（第 4 題：不去重）</a:t>
+            </a:r>
+          </a:p>
+          <a:p>
+            <a:pPr lvl="1">
+              <a:spcAft>
+                <a:spcPts val="800"/>
+              </a:spcAft>
+            </a:pPr>
+            <a:r>
+              <a:rPr sz="1400" b="0">
+                <a:solidFill>
+                  <a:srgbClr val="64748B"/>
+                </a:solidFill>
+                <a:latin typeface="PingFang TC"/>
+                <a:ea typeface="PingFang TC"/>
+              </a:rPr>
+              <a:t>–  ⚠ nonce 只解決『確定性』，不解決『碰撞』</a:t>
+            </a:r>
+          </a:p>
+          <a:p>
+            <a:pPr>
+              <a:spcAft>
+                <a:spcPts val="800"/>
+              </a:spcAft>
+            </a:pPr>
+            <a:r>
+              <a:rPr sz="1500" b="0">
+                <a:solidFill>
+                  <a:srgbClr val="0F172A"/>
+                </a:solidFill>
+                <a:latin typeface="PingFang TC"/>
+                <a:ea typeface="PingFang TC"/>
+              </a:rPr>
+              <a:t>•  碰撞數學：截斷成 8 碼後空間 = 62^8 ≈ 2.18×10^14</a:t>
+            </a:r>
+          </a:p>
+          <a:p>
+            <a:pPr lvl="1">
+              <a:spcAft>
+                <a:spcPts val="800"/>
+              </a:spcAft>
+            </a:pPr>
+            <a:r>
+              <a:rPr sz="1400" b="0">
+                <a:solidFill>
+                  <a:srgbClr val="64748B"/>
+                </a:solidFill>
+                <a:latin typeface="PingFang TC"/>
+                <a:ea typeface="PingFang TC"/>
+              </a:rPr>
+              <a:t>–  10 億規模下碰撞『必然』發生（預期 ~2,290 次）</a:t>
+            </a:r>
+          </a:p>
+          <a:p>
+            <a:pPr lvl="1">
+              <a:spcAft>
+                <a:spcPts val="800"/>
+              </a:spcAft>
+            </a:pPr>
+            <a:r>
+              <a:rPr sz="1400" b="0">
+                <a:solidFill>
+                  <a:srgbClr val="64748B"/>
+                </a:solidFill>
+                <a:latin typeface="PingFang TC"/>
+                <a:ea typeface="PingFang TC"/>
+              </a:rPr>
+              <a:t>–  7 碼 → 8 碼：空間 ×62、預期碰撞降到 1/62</a:t>
+            </a:r>
+          </a:p>
+          <a:p>
+            <a:pPr>
+              <a:spcAft>
+                <a:spcPts val="800"/>
+              </a:spcAft>
+            </a:pPr>
+            <a:r>
+              <a:rPr sz="1500" b="0">
+                <a:solidFill>
+                  <a:srgbClr val="0F172A"/>
+                </a:solidFill>
+                <a:latin typeface="PingFang TC"/>
+                <a:ea typeface="PingFang TC"/>
+              </a:rPr>
+              <a:t>•  安全網：DB token UNIQUE + 直接插入例外重試（≤10）</a:t>
+            </a:r>
+          </a:p>
+          <a:p>
+            <a:pPr lvl="1">
+              <a:spcAft>
+                <a:spcPts val="800"/>
+              </a:spcAft>
+            </a:pPr>
+            <a:r>
+              <a:rPr sz="1400" b="0">
+                <a:solidFill>
+                  <a:srgbClr val="64748B"/>
+                </a:solidFill>
+                <a:latin typeface="PingFang TC"/>
+                <a:ea typeface="PingFang TC"/>
+              </a:rPr>
+              <a:t>–  每筆插入碰撞率 ~0.0005%，重試幾乎都第 2 次成功</a:t>
+            </a:r>
+          </a:p>
+        </p:txBody>
+      </p:sp>
+    </p:spTree>
+  </p:cSld>
+  <p:clrMapOvr>
+    <a:masterClrMapping/>
+  </p:clrMapOvr>
+</p:sld>
+</file>
+
+<file path=ppt/slides/slide14.xml><?xml version="1.0" encoding="utf-8"?>
+<p:sld xmlns:a="http://schemas.openxmlformats.org/drawingml/2006/main" xmlns:p="http://schemas.openxmlformats.org/presentationml/2006/main" xmlns:r="http://schemas.openxmlformats.org/officeDocument/2006/relationships">
+  <p:cSld>
+    <p:spTree>
+      <p:nvGrpSpPr>
+        <p:cNvPr id="1" name=""/>
+        <p:cNvGrpSpPr/>
+        <p:nvPr/>
+      </p:nvGrpSpPr>
+      <p:grpSpPr/>
+      <p:sp>
+        <p:nvSpPr>
+          <p:cNvPr id="2" name="Rectangle 1"/>
+          <p:cNvSpPr/>
+          <p:nvPr/>
+        </p:nvSpPr>
+        <p:spPr>
+          <a:xfrm>
+            <a:off x="0" y="0"/>
+            <a:ext cx="164592" cy="6858000"/>
+          </a:xfrm>
+          <a:prstGeom prst="rect">
+            <a:avLst/>
+          </a:prstGeom>
+          <a:solidFill>
+            <a:srgbClr val="2563EB"/>
+          </a:solidFill>
+          <a:ln>
+            <a:noFill/>
+          </a:ln>
+          <a:effectLst/>
+        </p:spPr>
+        <p:style>
+          <a:lnRef idx="1">
+            <a:schemeClr val="accent1"/>
+          </a:lnRef>
+          <a:fillRef idx="3">
+            <a:schemeClr val="accent1"/>
+          </a:fillRef>
+          <a:effectRef idx="2">
+            <a:schemeClr val="accent1"/>
+          </a:effectRef>
+          <a:fontRef idx="minor">
+            <a:schemeClr val="lt1"/>
+          </a:fontRef>
+        </p:style>
+        <p:txBody>
+          <a:bodyPr rtlCol="0" anchor="ctr"/>
+          <a:lstStyle/>
+          <a:p>
+            <a:pPr algn="ctr"/>
+          </a:p>
+        </p:txBody>
+      </p:sp>
+      <p:sp>
+        <p:nvSpPr>
+          <p:cNvPr id="3" name="TextBox 2"/>
+          <p:cNvSpPr txBox="1"/>
+          <p:nvPr/>
+        </p:nvSpPr>
+        <p:spPr>
+          <a:xfrm>
+            <a:off x="502920" y="320040"/>
+            <a:ext cx="10972800" cy="1005840"/>
+          </a:xfrm>
+          <a:prstGeom prst="rect">
+            <a:avLst/>
+          </a:prstGeom>
+          <a:noFill/>
+        </p:spPr>
+        <p:txBody>
+          <a:bodyPr wrap="square" anchor="t">
+            <a:spAutoFit/>
+          </a:bodyPr>
+          <a:lstStyle/>
+          <a:p>
+            <a:pPr algn="l">
+              <a:spcAft>
+                <a:spcPts val="200"/>
+              </a:spcAft>
+            </a:pPr>
+            <a:r>
+              <a:rPr sz="1300" b="1">
+                <a:solidFill>
+                  <a:srgbClr val="2563EB"/>
+                </a:solidFill>
+                <a:latin typeface="PingFang TC"/>
+                <a:ea typeface="PingFang TC"/>
+              </a:rPr>
               <a:t>08b · TOKEN INTERNALS</a:t>
             </a:r>
           </a:p>
@@ -5993,7 +6577,7 @@
 </p:sld>
 </file>
 
-<file path=ppt/slides/slide14.xml><?xml version="1.0" encoding="utf-8"?>
+<file path=ppt/slides/slide15.xml><?xml version="1.0" encoding="utf-8"?>
 <p:sld xmlns:a="http://schemas.openxmlformats.org/drawingml/2006/main" xmlns:p="http://schemas.openxmlformats.org/presentationml/2006/main" xmlns:r="http://schemas.openxmlformats.org/officeDocument/2006/relationships">
   <p:cSld>
     <p:spTree>
@@ -7034,7 +7618,7 @@
 </p:sld>
 </file>
 
-<file path=ppt/slides/slide15.xml><?xml version="1.0" encoding="utf-8"?>
+<file path=ppt/slides/slide16.xml><?xml version="1.0" encoding="utf-8"?>
 <p:sld xmlns:a="http://schemas.openxmlformats.org/drawingml/2006/main" xmlns:p="http://schemas.openxmlformats.org/presentationml/2006/main" xmlns:r="http://schemas.openxmlformats.org/officeDocument/2006/relationships">
   <p:cSld>
     <p:spTree>
@@ -7420,7 +8004,7 @@
 </p:sld>
 </file>
 
-<file path=ppt/slides/slide16.xml><?xml version="1.0" encoding="utf-8"?>
+<file path=ppt/slides/slide17.xml><?xml version="1.0" encoding="utf-8"?>
 <p:sld xmlns:a="http://schemas.openxmlformats.org/drawingml/2006/main" xmlns:p="http://schemas.openxmlformats.org/presentationml/2006/main" xmlns:r="http://schemas.openxmlformats.org/officeDocument/2006/relationships">
   <p:cSld>
     <p:spTree>
@@ -8168,7 +8752,7 @@
 </p:sld>
 </file>
 
-<file path=ppt/slides/slide17.xml><?xml version="1.0" encoding="utf-8"?>
+<file path=ppt/slides/slide18.xml><?xml version="1.0" encoding="utf-8"?>
 <p:sld xmlns:a="http://schemas.openxmlformats.org/drawingml/2006/main" xmlns:p="http://schemas.openxmlformats.org/presentationml/2006/main" xmlns:r="http://schemas.openxmlformats.org/officeDocument/2006/relationships">
   <p:cSld>
     <p:spTree>
@@ -8898,737 +9482,6 @@
 </p:sld>
 </file>
 
-<file path=ppt/slides/slide18.xml><?xml version="1.0" encoding="utf-8"?>
-<p:sld xmlns:a="http://schemas.openxmlformats.org/drawingml/2006/main" xmlns:p="http://schemas.openxmlformats.org/presentationml/2006/main" xmlns:r="http://schemas.openxmlformats.org/officeDocument/2006/relationships">
-  <p:cSld>
-    <p:spTree>
-      <p:nvGrpSpPr>
-        <p:cNvPr id="1" name=""/>
-        <p:cNvGrpSpPr/>
-        <p:nvPr/>
-      </p:nvGrpSpPr>
-      <p:grpSpPr/>
-      <p:sp>
-        <p:nvSpPr>
-          <p:cNvPr id="2" name="Rectangle 1"/>
-          <p:cNvSpPr/>
-          <p:nvPr/>
-        </p:nvSpPr>
-        <p:spPr>
-          <a:xfrm>
-            <a:off x="0" y="0"/>
-            <a:ext cx="164592" cy="6858000"/>
-          </a:xfrm>
-          <a:prstGeom prst="rect">
-            <a:avLst/>
-          </a:prstGeom>
-          <a:solidFill>
-            <a:srgbClr val="2563EB"/>
-          </a:solidFill>
-          <a:ln>
-            <a:noFill/>
-          </a:ln>
-          <a:effectLst/>
-        </p:spPr>
-        <p:style>
-          <a:lnRef idx="1">
-            <a:schemeClr val="accent1"/>
-          </a:lnRef>
-          <a:fillRef idx="3">
-            <a:schemeClr val="accent1"/>
-          </a:fillRef>
-          <a:effectRef idx="2">
-            <a:schemeClr val="accent1"/>
-          </a:effectRef>
-          <a:fontRef idx="minor">
-            <a:schemeClr val="lt1"/>
-          </a:fontRef>
-        </p:style>
-        <p:txBody>
-          <a:bodyPr rtlCol="0" anchor="ctr"/>
-          <a:lstStyle/>
-          <a:p>
-            <a:pPr algn="ctr"/>
-          </a:p>
-        </p:txBody>
-      <